--- a/deck/AtmosphereTV_DOOH_Measurement.pptx
+++ b/deck/AtmosphereTV_DOOH_Measurement.pptx
@@ -16,9 +16,10 @@
     <p:sldId id="264" r:id="rId10"/>
     <p:sldId id="265" r:id="rId11"/>
     <p:sldId id="266" r:id="rId12"/>
+    <p:sldId id="267" r:id="rId13"/>
   </p:sldIdLst>
   <p:notesMasterIdLst>
-    <p:notesMasterId r:id="rId13"/>
+    <p:notesMasterId r:id="rId14"/>
   </p:notesMasterIdLst>
   <p:sldSz cx="12192000" cy="6858000"/>
   <p:notesSz cx="6858000" cy="12192000"/>
@@ -1586,6 +1587,281 @@
 </c:chartSpace>
 </file>
 
+<file path=ppt/charts/chart5.xml><?xml version="1.0" encoding="utf-8"?>
+<c:chartSpace xmlns:c="http://schemas.openxmlformats.org/drawingml/2006/chart" xmlns:a="http://schemas.openxmlformats.org/drawingml/2006/main" xmlns:r="http://schemas.openxmlformats.org/officeDocument/2006/relationships">
+  <c:date1904 val="0"/>
+  <c:roundedCorners val="1"/>
+  <c:chart>
+    <c:title>
+      <c:tx>
+        <c:rich>
+          <a:bodyPr/>
+          <a:lstStyle/>
+          <a:p>
+            <a:pPr>
+              <a:defRPr sz="1150" b="0" i="0" u="none" strike="noStrike">
+                <a:solidFill>
+                  <a:srgbClr val="1E2761"/>
+                </a:solidFill>
+                <a:latin typeface="Arial"/>
+              </a:defRPr>
+            </a:pPr>
+            <a:r>
+              <a:rPr sz="1150" b="0" i="0" u="none" strike="noStrike">
+                <a:solidFill>
+                  <a:srgbClr val="1E2761"/>
+                </a:solidFill>
+                <a:latin typeface="Arial"/>
+              </a:rPr>
+              <a:t>Feature importance (permutation, test set)</a:t>
+            </a:r>
+          </a:p>
+        </c:rich>
+      </c:tx>
+      <c:layout/>
+      <c:overlay val="0"/>
+    </c:title>
+    <c:autoTitleDeleted val="0"/>
+    <c:plotArea>
+      <c:layout/>
+      <c:barChart>
+        <c:barDir val="bar"/>
+        <c:grouping val="clustered"/>
+        <c:varyColors val="0"/>
+        <c:ser>
+          <c:idx val="0"/>
+          <c:order val="0"/>
+          <c:tx>
+            <c:strRef>
+              <c:f>Sheet1!$B$1</c:f>
+              <c:strCache>
+                <c:ptCount val="1"/>
+                <c:pt idx="0">
+                  <c:v>Importance (mean R² drop)</c:v>
+                </c:pt>
+              </c:strCache>
+            </c:strRef>
+          </c:tx>
+          <c:spPr>
+            <a:solidFill>
+              <a:srgbClr val="55A868"/>
+            </a:solidFill>
+            <a:effectLst/>
+          </c:spPr>
+          <c:invertIfNegative val="0"/>
+          <c:dLbls>
+            <c:numFmt formatCode="0.00" sourceLinked="0"/>
+            <c:txPr>
+              <a:bodyPr/>
+              <a:lstStyle/>
+              <a:p>
+                <a:pPr>
+                  <a:defRPr b="0" i="0" strike="noStrike" sz="900" u="none">
+                    <a:solidFill>
+                      <a:srgbClr val="000000"/>
+                    </a:solidFill>
+                    <a:latin typeface="Arial"/>
+                  </a:defRPr>
+                </a:pPr>
+              </a:p>
+            </c:txPr>
+            <c:showLegendKey val="0"/>
+            <c:showVal val="1"/>
+            <c:showCatName val="0"/>
+            <c:showSerName val="0"/>
+            <c:showPercent val="0"/>
+            <c:showBubbleSize val="0"/>
+            <c:showLeaderLines val="0"/>
+          </c:dLbls>
+          <c:cat>
+            <c:multiLvlStrRef>
+              <c:f>Sheet1!$A$2:$A$5</c:f>
+              <c:multiLvlStrCache>
+                <c:ptCount val="4"/>
+                <c:lvl>
+                  <c:pt idx="0">
+                    <c:v>dwell time min</c:v>
+                  </c:pt>
+                  <c:pt idx="1">
+                    <c:v>audience quality</c:v>
+                  </c:pt>
+                  <c:pt idx="2">
+                    <c:v>geo cluster</c:v>
+                  </c:pt>
+                  <c:pt idx="3">
+                    <c:v>baseline level</c:v>
+                  </c:pt>
+                </c:lvl>
+              </c:multiLvlStrCache>
+            </c:multiLvlStrRef>
+          </c:cat>
+          <c:val>
+            <c:numRef>
+              <c:f>Sheet1!$B$2:$B$5</c:f>
+              <c:numCache>
+                <c:formatCode>General</c:formatCode>
+                <c:ptCount val="4"/>
+                <c:pt idx="0">
+                  <c:v>0.075</c:v>
+                </c:pt>
+                <c:pt idx="1">
+                  <c:v>0.142</c:v>
+                </c:pt>
+                <c:pt idx="2">
+                  <c:v>0.269</c:v>
+                </c:pt>
+                <c:pt idx="3">
+                  <c:v>0.813</c:v>
+                </c:pt>
+              </c:numCache>
+            </c:numRef>
+          </c:val>
+        </c:ser>
+        <c:dLbls>
+          <c:numFmt formatCode="0.00" sourceLinked="0"/>
+          <c:txPr>
+            <a:bodyPr/>
+            <a:lstStyle/>
+            <a:p>
+              <a:pPr>
+                <a:defRPr b="0" i="0" strike="noStrike" sz="900" u="none">
+                  <a:solidFill>
+                    <a:srgbClr val="000000"/>
+                  </a:solidFill>
+                  <a:latin typeface="Arial"/>
+                </a:defRPr>
+              </a:pPr>
+            </a:p>
+          </c:txPr>
+          <c:showLegendKey val="0"/>
+          <c:showVal val="1"/>
+          <c:showCatName val="0"/>
+          <c:showSerName val="0"/>
+          <c:showPercent val="0"/>
+          <c:showBubbleSize val="0"/>
+          <c:showLeaderLines val="0"/>
+        </c:dLbls>
+        <c:gapWidth val="150"/>
+        <c:overlap val="0"/>
+        <c:axId val="2094734554"/>
+        <c:axId val="2094734552"/>
+        <c:axId val="2094734556"/>
+      </c:barChart>
+      <c:catAx>
+        <c:axId val="2094734554"/>
+        <c:scaling>
+          <c:orientation val="minMax"/>
+        </c:scaling>
+        <c:delete val="0"/>
+        <c:axPos val="l"/>
+        <c:numFmt formatCode="General" sourceLinked="1"/>
+        <c:majorTickMark val="out"/>
+        <c:minorTickMark val="none"/>
+        <c:tickLblPos val="nextTo"/>
+        <c:spPr>
+          <a:ln w="12700" cap="flat">
+            <a:solidFill>
+              <a:srgbClr val="888888"/>
+            </a:solidFill>
+            <a:prstDash val="solid"/>
+            <a:round/>
+          </a:ln>
+        </c:spPr>
+        <c:txPr>
+          <a:bodyPr/>
+          <a:lstStyle/>
+          <a:p>
+            <a:pPr>
+              <a:defRPr sz="1000" b="0" i="0" u="none" strike="noStrike">
+                <a:solidFill>
+                  <a:srgbClr val="1A1A2E"/>
+                </a:solidFill>
+                <a:latin typeface="Arial"/>
+              </a:defRPr>
+            </a:pPr>
+            <a:endParaRPr lang="en-US"/>
+          </a:p>
+        </c:txPr>
+        <c:crossAx val="2094734552"/>
+        <c:crosses val="autoZero"/>
+        <c:auto val="1"/>
+        <c:lblAlgn val="ctr"/>
+        <c:noMultiLvlLbl val="1"/>
+      </c:catAx>
+      <c:valAx>
+        <c:axId val="2094734552"/>
+        <c:scaling>
+          <c:orientation val="minMax"/>
+        </c:scaling>
+        <c:delete val="0"/>
+        <c:axPos val="b"/>
+        <c:majorGridlines>
+          <c:spPr>
+            <a:ln w="9525" cap="flat">
+              <a:solidFill>
+                <a:srgbClr val="E5E5EF"/>
+              </a:solidFill>
+              <a:prstDash val="solid"/>
+              <a:round/>
+            </a:ln>
+          </c:spPr>
+        </c:majorGridlines>
+        <c:numFmt formatCode="General" sourceLinked="0"/>
+        <c:majorTickMark val="out"/>
+        <c:minorTickMark val="none"/>
+        <c:tickLblPos val="low"/>
+        <c:spPr>
+          <a:ln w="12700" cap="flat">
+            <a:solidFill>
+              <a:srgbClr val="888888"/>
+            </a:solidFill>
+            <a:prstDash val="solid"/>
+            <a:round/>
+          </a:ln>
+        </c:spPr>
+        <c:txPr>
+          <a:bodyPr/>
+          <a:lstStyle/>
+          <a:p>
+            <a:pPr>
+              <a:defRPr sz="850" b="0" i="0" u="none" strike="noStrike">
+                <a:solidFill>
+                  <a:srgbClr val="5B6178"/>
+                </a:solidFill>
+                <a:latin typeface="Arial"/>
+              </a:defRPr>
+            </a:pPr>
+            <a:endParaRPr lang="en-US"/>
+          </a:p>
+        </c:txPr>
+        <c:crossAx val="2094734554"/>
+        <c:crosses val="autoZero"/>
+        <c:crossBetween val="between"/>
+      </c:valAx>
+      <c:spPr>
+        <a:noFill/>
+        <a:ln>
+          <a:noFill/>
+        </a:ln>
+        <a:effectLst/>
+      </c:spPr>
+    </c:plotArea>
+    <c:plotVisOnly val="1"/>
+    <c:dispBlanksAs val="span"/>
+  </c:chart>
+  <c:spPr>
+    <a:noFill/>
+    <a:ln>
+      <a:noFill/>
+    </a:ln>
+    <a:effectLst/>
+  </c:spPr>
+  <c:externalData r:id="rId1">
+    <c:autoUpdate val="0"/>
+  </c:externalData>
+</c:chartSpace>
+</file>
+
 <file path=ppt/notesMasters/notesMaster1.xml><?xml version="1.0" encoding="utf-8"?>
 <p:notesMaster xmlns:a="http://schemas.openxmlformats.org/drawingml/2006/main" xmlns:r="http://schemas.openxmlformats.org/officeDocument/2006/relationships" xmlns:p="http://schemas.openxmlformats.org/presentationml/2006/main">
   <p:cSld>
@@ -2181,6 +2457,94 @@
             <a:fld id="{F7021451-1387-4CA6-816F-3879F97B5CBC}" type="slidenum">
               <a:rPr lang="en-US"/>
               <a:t>11</a:t>
+            </a:fld>
+            <a:endParaRPr lang="en-US"/>
+          </a:p>
+        </p:txBody>
+      </p:sp>
+    </p:spTree>
+    <p:extLst>
+      <p:ext uri="{BB962C8B-B14F-4D97-AF65-F5344CB8AC3E}">
+        <p14:creationId xmlns:p14="http://schemas.microsoft.com/office/powerpoint/2010/main" val="1024086991"/>
+      </p:ext>
+    </p:extLst>
+  </p:cSld>
+  <p:clrMapOvr>
+    <a:masterClrMapping/>
+  </p:clrMapOvr>
+</p:notes>
+</file>
+
+<file path=ppt/notesSlides/notesSlide12.xml><?xml version="1.0" encoding="utf-8"?>
+<p:notes xmlns:a="http://schemas.openxmlformats.org/drawingml/2006/main" xmlns:r="http://schemas.openxmlformats.org/officeDocument/2006/relationships" xmlns:p="http://schemas.openxmlformats.org/presentationml/2006/main">
+  <p:cSld>
+    <p:spTree>
+      <p:nvGrpSpPr>
+        <p:cNvPr id="1" name=""/>
+        <p:cNvGrpSpPr/>
+        <p:nvPr/>
+      </p:nvGrpSpPr>
+      <p:grpSpPr>
+        <a:xfrm>
+          <a:off x="0" y="0"/>
+          <a:ext cx="0" cy="0"/>
+          <a:chOff x="0" y="0"/>
+          <a:chExt cx="0" cy="0"/>
+        </a:xfrm>
+      </p:grpSpPr>
+      <p:sp>
+        <p:nvSpPr>
+          <p:cNvPr id="2" name="Slide Image Placeholder 1"/>
+          <p:cNvSpPr>
+            <a:spLocks noGrp="1" noRot="1" noChangeAspect="1"/>
+          </p:cNvSpPr>
+          <p:nvPr>
+            <p:ph type="sldImg"/>
+          </p:nvPr>
+        </p:nvSpPr>
+        <p:spPr/>
+      </p:sp>
+      <p:sp>
+        <p:nvSpPr>
+          <p:cNvPr id="3" name="Notes Placeholder 2"/>
+          <p:cNvSpPr>
+            <a:spLocks noGrp="1"/>
+          </p:cNvSpPr>
+          <p:nvPr>
+            <p:ph type="body" idx="1"/>
+          </p:nvPr>
+        </p:nvSpPr>
+        <p:spPr/>
+        <p:txBody>
+          <a:bodyPr/>
+          <a:lstStyle/>
+          <a:p>
+            <a:r>
+              <a:rPr lang="en-US" dirty="0"/>
+              <a:t/>
+            </a:r>
+            <a:endParaRPr lang="en-US" dirty="0"/>
+          </a:p>
+        </p:txBody>
+      </p:sp>
+      <p:sp>
+        <p:nvSpPr>
+          <p:cNvPr id="4" name="Slide Number Placeholder 3"/>
+          <p:cNvSpPr>
+            <a:spLocks noGrp="1"/>
+          </p:cNvSpPr>
+          <p:nvPr>
+            <p:ph type="sldNum" sz="quarter" idx="10"/>
+          </p:nvPr>
+        </p:nvSpPr>
+        <p:spPr/>
+        <p:txBody>
+          <a:bodyPr/>
+          <a:lstStyle/>
+          <a:p>
+            <a:fld id="{F7021451-1387-4CA6-816F-3879F97B5CBC}" type="slidenum">
+              <a:rPr lang="en-US"/>
+              <a:t>12</a:t>
             </a:fld>
             <a:endParaRPr lang="en-US"/>
           </a:p>
@@ -3388,7 +3752,7 @@
                 <a:ea typeface="Calibri" pitchFamily="34" charset="-122"/>
                 <a:cs typeface="Calibri" pitchFamily="34" charset="-120"/>
               </a:rPr>
-              <a:t>A causal measurement framework, calibrated media-mix model, and budget optimizer — built to answer the two questions Atmosphere's advertising business runs on.</a:t>
+              <a:t>A causal measurement framework, calibrated media-mix model, budget optimizer, and venue-revenue model — built to answer the questions Atmosphere's advertising business and its own network economics run on.</a:t>
             </a:r>
             <a:endParaRPr lang="en-US" sz="1500" dirty="0"/>
           </a:p>
@@ -3493,24 +3857,24 @@
         </p:nvSpPr>
         <p:spPr>
           <a:xfrm>
-            <a:off x="548640" y="457200"/>
-            <a:ext cx="7315200" cy="640080"/>
-          </a:xfrm>
-          <a:prstGeom prst="rect">
-            <a:avLst/>
-          </a:prstGeom>
-          <a:noFill/>
-          <a:ln/>
-        </p:spPr>
-        <p:txBody>
-          <a:bodyPr wrap="square" rtlCol="0" anchor="ctr"/>
-          <a:lstStyle/>
-          <a:p>
-            <a:pPr indent="0" marL="0">
-              <a:buNone/>
-            </a:pPr>
-            <a:r>
-              <a:rPr lang="en-US" sz="3000" b="1" dirty="0">
+            <a:off x="548640" y="411480"/>
+            <a:ext cx="11155680" cy="594360"/>
+          </a:xfrm>
+          <a:prstGeom prst="rect">
+            <a:avLst/>
+          </a:prstGeom>
+          <a:noFill/>
+          <a:ln/>
+        </p:spPr>
+        <p:txBody>
+          <a:bodyPr wrap="square" rtlCol="0" anchor="ctr"/>
+          <a:lstStyle/>
+          <a:p>
+            <a:pPr indent="0" marL="0">
+              <a:buNone/>
+            </a:pPr>
+            <a:r>
+              <a:rPr lang="en-US" sz="2500" b="1" dirty="0">
                 <a:solidFill>
                   <a:srgbClr val="1E2761"/>
                 </a:solidFill>
@@ -3518,58 +3882,99 @@
                 <a:ea typeface="Cambria" pitchFamily="34" charset="-122"/>
                 <a:cs typeface="Cambria" pitchFamily="34" charset="-120"/>
               </a:rPr>
-              <a:t>Honest scope</a:t>
-            </a:r>
-            <a:endParaRPr lang="en-US" sz="3000" dirty="0"/>
-          </a:p>
-        </p:txBody>
-      </p:sp>
-      <p:sp>
-        <p:nvSpPr>
-          <p:cNvPr id="3" name="Shape 1"/>
-          <p:cNvSpPr/>
-          <p:nvPr/>
-        </p:nvSpPr>
-        <p:spPr>
-          <a:xfrm>
-            <a:off x="548640" y="1426464"/>
-            <a:ext cx="109728" cy="960120"/>
-          </a:xfrm>
-          <a:prstGeom prst="rect">
-            <a:avLst/>
+              <a:t>Phase 2: predicting venue ad-revenue, honestly</a:t>
+            </a:r>
+            <a:endParaRPr lang="en-US" sz="2500" dirty="0"/>
+          </a:p>
+        </p:txBody>
+      </p:sp>
+      <p:sp>
+        <p:nvSpPr>
+          <p:cNvPr id="3" name="Text 1"/>
+          <p:cNvSpPr/>
+          <p:nvPr/>
+        </p:nvSpPr>
+        <p:spPr>
+          <a:xfrm>
+            <a:off x="548640" y="1005840"/>
+            <a:ext cx="10972800" cy="365760"/>
+          </a:xfrm>
+          <a:prstGeom prst="rect">
+            <a:avLst/>
+          </a:prstGeom>
+          <a:noFill/>
+          <a:ln/>
+        </p:spPr>
+        <p:txBody>
+          <a:bodyPr wrap="square" rtlCol="0" anchor="ctr"/>
+          <a:lstStyle/>
+          <a:p>
+            <a:pPr indent="0" marL="0">
+              <a:buNone/>
+            </a:pPr>
+            <a:r>
+              <a:rPr lang="en-US" sz="1250" i="1" dirty="0">
+                <a:solidFill>
+                  <a:srgbClr val="5B6178"/>
+                </a:solidFill>
+                <a:latin typeface="Calibri" pitchFamily="34" charset="0"/>
+                <a:ea typeface="Calibri" pitchFamily="34" charset="-122"/>
+                <a:cs typeface="Calibri" pitchFamily="34" charset="-120"/>
+              </a:rPr>
+              <a:t>Gradient-boosted trees on observable venue characteristics + Phase 1's calibrated per-exposure lift as a feature.</a:t>
+            </a:r>
+            <a:endParaRPr lang="en-US" sz="1250" dirty="0"/>
+          </a:p>
+        </p:txBody>
+      </p:sp>
+      <p:sp>
+        <p:nvSpPr>
+          <p:cNvPr id="4" name="Shape 2"/>
+          <p:cNvSpPr/>
+          <p:nvPr/>
+        </p:nvSpPr>
+        <p:spPr>
+          <a:xfrm>
+            <a:off x="548640" y="1508760"/>
+            <a:ext cx="2651760" cy="1051560"/>
+          </a:xfrm>
+          <a:prstGeom prst="roundRect">
+            <a:avLst>
+              <a:gd name="adj" fmla="val 6957"/>
+            </a:avLst>
           </a:prstGeom>
           <a:solidFill>
-            <a:srgbClr val="E8871E"/>
+            <a:srgbClr val="F5F7FC"/>
           </a:solidFill>
           <a:ln/>
         </p:spPr>
       </p:sp>
       <p:sp>
         <p:nvSpPr>
-          <p:cNvPr id="4" name="Text 2"/>
-          <p:cNvSpPr/>
-          <p:nvPr/>
-        </p:nvSpPr>
-        <p:spPr>
-          <a:xfrm>
-            <a:off x="868680" y="1371600"/>
-            <a:ext cx="2743200" cy="1097280"/>
-          </a:xfrm>
-          <a:prstGeom prst="rect">
-            <a:avLst/>
-          </a:prstGeom>
-          <a:noFill/>
-          <a:ln/>
-        </p:spPr>
-        <p:txBody>
-          <a:bodyPr wrap="square" rtlCol="0" anchor="t"/>
-          <a:lstStyle/>
-          <a:p>
-            <a:pPr indent="0" marL="0">
-              <a:buNone/>
-            </a:pPr>
-            <a:r>
-              <a:rPr lang="en-US" sz="1350" b="1" dirty="0">
+          <p:cNvPr id="5" name="Text 3"/>
+          <p:cNvSpPr/>
+          <p:nvPr/>
+        </p:nvSpPr>
+        <p:spPr>
+          <a:xfrm>
+            <a:off x="685800" y="1618488"/>
+            <a:ext cx="2377440" cy="502920"/>
+          </a:xfrm>
+          <a:prstGeom prst="rect">
+            <a:avLst/>
+          </a:prstGeom>
+          <a:noFill/>
+          <a:ln/>
+        </p:spPr>
+        <p:txBody>
+          <a:bodyPr wrap="square" rtlCol="0" anchor="ctr"/>
+          <a:lstStyle/>
+          <a:p>
+            <a:pPr indent="0" marL="0">
+              <a:buNone/>
+            </a:pPr>
+            <a:r>
+              <a:rPr lang="en-US" sz="2200" b="1" dirty="0">
                 <a:solidFill>
                   <a:srgbClr val="1E2761"/>
                 </a:solidFill>
@@ -3577,360 +3982,1114 @@
                 <a:ea typeface="Calibri" pitchFamily="34" charset="-122"/>
                 <a:cs typeface="Calibri" pitchFamily="34" charset="-120"/>
               </a:rPr>
-              <a:t>Synthetic data</a:t>
-            </a:r>
-            <a:endParaRPr lang="en-US" sz="1350" dirty="0"/>
-          </a:p>
-        </p:txBody>
-      </p:sp>
-      <p:sp>
-        <p:nvSpPr>
-          <p:cNvPr id="5" name="Text 3"/>
-          <p:cNvSpPr/>
-          <p:nvPr/>
-        </p:nvSpPr>
-        <p:spPr>
-          <a:xfrm>
-            <a:off x="3794760" y="1371600"/>
-            <a:ext cx="7863840" cy="1097280"/>
-          </a:xfrm>
-          <a:prstGeom prst="rect">
-            <a:avLst/>
-          </a:prstGeom>
-          <a:noFill/>
-          <a:ln/>
-        </p:spPr>
-        <p:txBody>
-          <a:bodyPr wrap="square" rtlCol="0" anchor="t"/>
+              <a:t>0.84</a:t>
+            </a:r>
+            <a:endParaRPr lang="en-US" sz="2200" dirty="0"/>
+          </a:p>
+        </p:txBody>
+      </p:sp>
+      <p:sp>
+        <p:nvSpPr>
+          <p:cNvPr id="6" name="Text 4"/>
+          <p:cNvSpPr/>
+          <p:nvPr/>
+        </p:nvSpPr>
+        <p:spPr>
+          <a:xfrm>
+            <a:off x="685800" y="2130552"/>
+            <a:ext cx="2377440" cy="365760"/>
+          </a:xfrm>
+          <a:prstGeom prst="rect">
+            <a:avLst/>
+          </a:prstGeom>
+          <a:noFill/>
+          <a:ln/>
+        </p:spPr>
+        <p:txBody>
+          <a:bodyPr wrap="square" rtlCol="0" anchor="ctr"/>
+          <a:lstStyle/>
+          <a:p>
+            <a:pPr indent="0" marL="0">
+              <a:buNone/>
+            </a:pPr>
+            <a:r>
+              <a:rPr lang="en-US" sz="950" dirty="0">
+                <a:solidFill>
+                  <a:srgbClr val="5B6178"/>
+                </a:solidFill>
+                <a:latin typeface="Calibri" pitchFamily="34" charset="0"/>
+                <a:ea typeface="Calibri" pitchFamily="34" charset="-122"/>
+                <a:cs typeface="Calibri" pitchFamily="34" charset="-120"/>
+              </a:rPr>
+              <a:t>Held-out R²</a:t>
+            </a:r>
+            <a:endParaRPr lang="en-US" sz="950" dirty="0"/>
+          </a:p>
+        </p:txBody>
+      </p:sp>
+      <p:sp>
+        <p:nvSpPr>
+          <p:cNvPr id="7" name="Shape 5"/>
+          <p:cNvSpPr/>
+          <p:nvPr/>
+        </p:nvSpPr>
+        <p:spPr>
+          <a:xfrm>
+            <a:off x="3337560" y="1508760"/>
+            <a:ext cx="2651760" cy="1051560"/>
+          </a:xfrm>
+          <a:prstGeom prst="roundRect">
+            <a:avLst>
+              <a:gd name="adj" fmla="val 6957"/>
+            </a:avLst>
+          </a:prstGeom>
+          <a:solidFill>
+            <a:srgbClr val="F5F7FC"/>
+          </a:solidFill>
+          <a:ln/>
+        </p:spPr>
+      </p:sp>
+      <p:sp>
+        <p:nvSpPr>
+          <p:cNvPr id="8" name="Text 6"/>
+          <p:cNvSpPr/>
+          <p:nvPr/>
+        </p:nvSpPr>
+        <p:spPr>
+          <a:xfrm>
+            <a:off x="3474720" y="1618488"/>
+            <a:ext cx="2377440" cy="502920"/>
+          </a:xfrm>
+          <a:prstGeom prst="rect">
+            <a:avLst/>
+          </a:prstGeom>
+          <a:noFill/>
+          <a:ln/>
+        </p:spPr>
+        <p:txBody>
+          <a:bodyPr wrap="square" rtlCol="0" anchor="ctr"/>
+          <a:lstStyle/>
+          <a:p>
+            <a:pPr indent="0" marL="0">
+              <a:buNone/>
+            </a:pPr>
+            <a:r>
+              <a:rPr lang="en-US" sz="2200" b="1" dirty="0">
+                <a:solidFill>
+                  <a:srgbClr val="1E2761"/>
+                </a:solidFill>
+                <a:latin typeface="Calibri" pitchFamily="34" charset="0"/>
+                <a:ea typeface="Calibri" pitchFamily="34" charset="-122"/>
+                <a:cs typeface="Calibri" pitchFamily="34" charset="-120"/>
+              </a:rPr>
+              <a:t>22.1%</a:t>
+            </a:r>
+            <a:endParaRPr lang="en-US" sz="2200" dirty="0"/>
+          </a:p>
+        </p:txBody>
+      </p:sp>
+      <p:sp>
+        <p:nvSpPr>
+          <p:cNvPr id="9" name="Text 7"/>
+          <p:cNvSpPr/>
+          <p:nvPr/>
+        </p:nvSpPr>
+        <p:spPr>
+          <a:xfrm>
+            <a:off x="3474720" y="2130552"/>
+            <a:ext cx="2377440" cy="365760"/>
+          </a:xfrm>
+          <a:prstGeom prst="rect">
+            <a:avLst/>
+          </a:prstGeom>
+          <a:noFill/>
+          <a:ln/>
+        </p:spPr>
+        <p:txBody>
+          <a:bodyPr wrap="square" rtlCol="0" anchor="ctr"/>
+          <a:lstStyle/>
+          <a:p>
+            <a:pPr indent="0" marL="0">
+              <a:buNone/>
+            </a:pPr>
+            <a:r>
+              <a:rPr lang="en-US" sz="950" dirty="0">
+                <a:solidFill>
+                  <a:srgbClr val="5B6178"/>
+                </a:solidFill>
+                <a:latin typeface="Calibri" pitchFamily="34" charset="0"/>
+                <a:ea typeface="Calibri" pitchFamily="34" charset="-122"/>
+                <a:cs typeface="Calibri" pitchFamily="34" charset="-120"/>
+              </a:rPr>
+              <a:t>Held-out MAPE</a:t>
+            </a:r>
+            <a:endParaRPr lang="en-US" sz="950" dirty="0"/>
+          </a:p>
+        </p:txBody>
+      </p:sp>
+      <p:sp>
+        <p:nvSpPr>
+          <p:cNvPr id="10" name="Shape 8"/>
+          <p:cNvSpPr/>
+          <p:nvPr/>
+        </p:nvSpPr>
+        <p:spPr>
+          <a:xfrm>
+            <a:off x="6126480" y="1508760"/>
+            <a:ext cx="2651760" cy="1051560"/>
+          </a:xfrm>
+          <a:prstGeom prst="roundRect">
+            <a:avLst>
+              <a:gd name="adj" fmla="val 6957"/>
+            </a:avLst>
+          </a:prstGeom>
+          <a:solidFill>
+            <a:srgbClr val="F5F7FC"/>
+          </a:solidFill>
+          <a:ln/>
+        </p:spPr>
+      </p:sp>
+      <p:sp>
+        <p:nvSpPr>
+          <p:cNvPr id="11" name="Text 9"/>
+          <p:cNvSpPr/>
+          <p:nvPr/>
+        </p:nvSpPr>
+        <p:spPr>
+          <a:xfrm>
+            <a:off x="6263640" y="1618488"/>
+            <a:ext cx="2377440" cy="502920"/>
+          </a:xfrm>
+          <a:prstGeom prst="rect">
+            <a:avLst/>
+          </a:prstGeom>
+          <a:noFill/>
+          <a:ln/>
+        </p:spPr>
+        <p:txBody>
+          <a:bodyPr wrap="square" rtlCol="0" anchor="ctr"/>
+          <a:lstStyle/>
+          <a:p>
+            <a:pPr indent="0" marL="0">
+              <a:buNone/>
+            </a:pPr>
+            <a:r>
+              <a:rPr lang="en-US" sz="2200" b="1" dirty="0">
+                <a:solidFill>
+                  <a:srgbClr val="1E2761"/>
+                </a:solidFill>
+                <a:latin typeface="Calibri" pitchFamily="34" charset="0"/>
+                <a:ea typeface="Calibri" pitchFamily="34" charset="-122"/>
+                <a:cs typeface="Calibri" pitchFamily="34" charset="-120"/>
+              </a:rPr>
+              <a:t>0.94</a:t>
+            </a:r>
+            <a:endParaRPr lang="en-US" sz="2200" dirty="0"/>
+          </a:p>
+        </p:txBody>
+      </p:sp>
+      <p:sp>
+        <p:nvSpPr>
+          <p:cNvPr id="12" name="Text 10"/>
+          <p:cNvSpPr/>
+          <p:nvPr/>
+        </p:nvSpPr>
+        <p:spPr>
+          <a:xfrm>
+            <a:off x="6263640" y="2130552"/>
+            <a:ext cx="2377440" cy="365760"/>
+          </a:xfrm>
+          <a:prstGeom prst="rect">
+            <a:avLst/>
+          </a:prstGeom>
+          <a:noFill/>
+          <a:ln/>
+        </p:spPr>
+        <p:txBody>
+          <a:bodyPr wrap="square" rtlCol="0" anchor="ctr"/>
+          <a:lstStyle/>
+          <a:p>
+            <a:pPr indent="0" marL="0">
+              <a:buNone/>
+            </a:pPr>
+            <a:r>
+              <a:rPr lang="en-US" sz="950" dirty="0">
+                <a:solidFill>
+                  <a:srgbClr val="5B6178"/>
+                </a:solidFill>
+                <a:latin typeface="Calibri" pitchFamily="34" charset="0"/>
+                <a:ea typeface="Calibri" pitchFamily="34" charset="-122"/>
+                <a:cs typeface="Calibri" pitchFamily="34" charset="-120"/>
+              </a:rPr>
+              <a:t>Corr. w/ latent true potential</a:t>
+            </a:r>
+            <a:endParaRPr lang="en-US" sz="950" dirty="0"/>
+          </a:p>
+        </p:txBody>
+      </p:sp>
+      <p:sp>
+        <p:nvSpPr>
+          <p:cNvPr id="13" name="Shape 11"/>
+          <p:cNvSpPr/>
+          <p:nvPr/>
+        </p:nvSpPr>
+        <p:spPr>
+          <a:xfrm>
+            <a:off x="8915400" y="1508760"/>
+            <a:ext cx="2651760" cy="1051560"/>
+          </a:xfrm>
+          <a:prstGeom prst="roundRect">
+            <a:avLst>
+              <a:gd name="adj" fmla="val 6957"/>
+            </a:avLst>
+          </a:prstGeom>
+          <a:solidFill>
+            <a:srgbClr val="F5F7FC"/>
+          </a:solidFill>
+          <a:ln/>
+        </p:spPr>
+      </p:sp>
+      <p:sp>
+        <p:nvSpPr>
+          <p:cNvPr id="14" name="Text 12"/>
+          <p:cNvSpPr/>
+          <p:nvPr/>
+        </p:nvSpPr>
+        <p:spPr>
+          <a:xfrm>
+            <a:off x="9052560" y="1618488"/>
+            <a:ext cx="2377440" cy="502920"/>
+          </a:xfrm>
+          <a:prstGeom prst="rect">
+            <a:avLst/>
+          </a:prstGeom>
+          <a:noFill/>
+          <a:ln/>
+        </p:spPr>
+        <p:txBody>
+          <a:bodyPr wrap="square" rtlCol="0" anchor="ctr"/>
+          <a:lstStyle/>
+          <a:p>
+            <a:pPr indent="0" marL="0">
+              <a:buNone/>
+            </a:pPr>
+            <a:r>
+              <a:rPr lang="en-US" sz="2200" b="1" dirty="0">
+                <a:solidFill>
+                  <a:srgbClr val="1E2761"/>
+                </a:solidFill>
+                <a:latin typeface="Calibri" pitchFamily="34" charset="0"/>
+                <a:ea typeface="Calibri" pitchFamily="34" charset="-122"/>
+                <a:cs typeface="Calibri" pitchFamily="34" charset="-120"/>
+              </a:rPr>
+              <a:t>90% vs 28%</a:t>
+            </a:r>
+            <a:endParaRPr lang="en-US" sz="2200" dirty="0"/>
+          </a:p>
+        </p:txBody>
+      </p:sp>
+      <p:sp>
+        <p:nvSpPr>
+          <p:cNvPr id="15" name="Text 13"/>
+          <p:cNvSpPr/>
+          <p:nvPr/>
+        </p:nvSpPr>
+        <p:spPr>
+          <a:xfrm>
+            <a:off x="9052560" y="2130552"/>
+            <a:ext cx="2377440" cy="365760"/>
+          </a:xfrm>
+          <a:prstGeom prst="rect">
+            <a:avLst/>
+          </a:prstGeom>
+          <a:noFill/>
+          <a:ln/>
+        </p:spPr>
+        <p:txBody>
+          <a:bodyPr wrap="square" rtlCol="0" anchor="ctr"/>
+          <a:lstStyle/>
+          <a:p>
+            <a:pPr indent="0" marL="0">
+              <a:buNone/>
+            </a:pPr>
+            <a:r>
+              <a:rPr lang="en-US" sz="950" dirty="0">
+                <a:solidFill>
+                  <a:srgbClr val="5B6178"/>
+                </a:solidFill>
+                <a:latin typeface="Calibri" pitchFamily="34" charset="0"/>
+                <a:ea typeface="Calibri" pitchFamily="34" charset="-122"/>
+                <a:cs typeface="Calibri" pitchFamily="34" charset="-120"/>
+              </a:rPr>
+              <a:t>Flagged-tail latent gap rate</a:t>
+            </a:r>
+            <a:endParaRPr lang="en-US" sz="950" dirty="0"/>
+          </a:p>
+        </p:txBody>
+      </p:sp>
+      <p:graphicFrame>
+        <p:nvGraphicFramePr>
+          <p:cNvPr id="16" name="Chart 0" descr=""/>
+          <p:cNvGraphicFramePr/>
+          <p:nvPr/>
+        </p:nvGraphicFramePr>
+        <p:xfrm>
+          <a:off x="548640" y="2880360"/>
+          <a:ext cx="5394960" cy="3246120"/>
+        </p:xfrm>
+        <a:graphic xmlns:a="http://schemas.openxmlformats.org/drawingml/2006/main">
+          <a:graphicData uri="http://schemas.openxmlformats.org/drawingml/2006/chart">
+            <c:chart xmlns:c="http://schemas.openxmlformats.org/drawingml/2006/chart" r:id="rId1"/>
+          </a:graphicData>
+        </a:graphic>
+      </p:graphicFrame>
+      <p:sp>
+        <p:nvSpPr>
+          <p:cNvPr id="17" name="Text 14"/>
+          <p:cNvSpPr/>
+          <p:nvPr/>
+        </p:nvSpPr>
+        <p:spPr>
+          <a:xfrm>
+            <a:off x="6263640" y="2880360"/>
+            <a:ext cx="5394960" cy="274320"/>
+          </a:xfrm>
+          <a:prstGeom prst="rect">
+            <a:avLst/>
+          </a:prstGeom>
+          <a:noFill/>
+          <a:ln/>
+        </p:spPr>
+        <p:txBody>
+          <a:bodyPr wrap="square" rtlCol="0" anchor="ctr"/>
+          <a:lstStyle/>
+          <a:p>
+            <a:pPr indent="0" marL="0">
+              <a:buNone/>
+            </a:pPr>
+            <a:r>
+              <a:rPr lang="en-US" sz="1200" b="1" dirty="0">
+                <a:solidFill>
+                  <a:srgbClr val="1E2761"/>
+                </a:solidFill>
+                <a:latin typeface="Cambria" pitchFamily="34" charset="0"/>
+                <a:ea typeface="Cambria" pitchFamily="34" charset="-122"/>
+                <a:cs typeface="Cambria" pitchFamily="34" charset="-120"/>
+              </a:rPr>
+              <a:t>Top under-monetized venues (of 20 flagged)</a:t>
+            </a:r>
+            <a:endParaRPr lang="en-US" sz="1200" dirty="0"/>
+          </a:p>
+        </p:txBody>
+      </p:sp>
+      <p:sp>
+        <p:nvSpPr>
+          <p:cNvPr id="18" name="Text 15"/>
+          <p:cNvSpPr/>
+          <p:nvPr/>
+        </p:nvSpPr>
+        <p:spPr>
+          <a:xfrm>
+            <a:off x="6263640" y="3209544"/>
+            <a:ext cx="3657600" cy="274320"/>
+          </a:xfrm>
+          <a:prstGeom prst="rect">
+            <a:avLst/>
+          </a:prstGeom>
+          <a:noFill/>
+          <a:ln/>
+        </p:spPr>
+        <p:txBody>
+          <a:bodyPr wrap="square" rtlCol="0" anchor="ctr"/>
+          <a:lstStyle/>
+          <a:p>
+            <a:pPr indent="0" marL="0">
+              <a:buNone/>
+            </a:pPr>
+            <a:r>
+              <a:rPr lang="en-US" sz="1000" dirty="0">
+                <a:solidFill>
+                  <a:srgbClr val="1A1A2E"/>
+                </a:solidFill>
+                <a:latin typeface="Calibri" pitchFamily="34" charset="0"/>
+                <a:ea typeface="Calibri" pitchFamily="34" charset="-122"/>
+                <a:cs typeface="Calibri" pitchFamily="34" charset="-120"/>
+              </a:rPr>
+              <a:t>Venue #85 (Restaurants)</a:t>
+            </a:r>
+            <a:endParaRPr lang="en-US" sz="1000" dirty="0"/>
+          </a:p>
+        </p:txBody>
+      </p:sp>
+      <p:sp>
+        <p:nvSpPr>
+          <p:cNvPr id="19" name="Text 16"/>
+          <p:cNvSpPr/>
+          <p:nvPr/>
+        </p:nvSpPr>
+        <p:spPr>
+          <a:xfrm>
+            <a:off x="9966960" y="3209544"/>
+            <a:ext cx="1691640" cy="274320"/>
+          </a:xfrm>
+          <a:prstGeom prst="rect">
+            <a:avLst/>
+          </a:prstGeom>
+          <a:noFill/>
+          <a:ln/>
+        </p:spPr>
+        <p:txBody>
+          <a:bodyPr wrap="square" rtlCol="0" anchor="ctr"/>
+          <a:lstStyle/>
+          <a:p>
+            <a:pPr algn="r" indent="0" marL="0">
+              <a:buNone/>
+            </a:pPr>
+            <a:r>
+              <a:rPr lang="en-US" sz="1000" b="1" dirty="0">
+                <a:solidFill>
+                  <a:srgbClr val="B8500A"/>
+                </a:solidFill>
+                <a:latin typeface="Calibri" pitchFamily="34" charset="0"/>
+                <a:ea typeface="Calibri" pitchFamily="34" charset="-122"/>
+                <a:cs typeface="Calibri" pitchFamily="34" charset="-120"/>
+              </a:rPr>
+              <a:t>-62%</a:t>
+            </a:r>
+            <a:endParaRPr lang="en-US" sz="1000" dirty="0"/>
+          </a:p>
+        </p:txBody>
+      </p:sp>
+      <p:sp>
+        <p:nvSpPr>
+          <p:cNvPr id="20" name="Text 17"/>
+          <p:cNvSpPr/>
+          <p:nvPr/>
+        </p:nvSpPr>
+        <p:spPr>
+          <a:xfrm>
+            <a:off x="6263640" y="3502152"/>
+            <a:ext cx="3657600" cy="274320"/>
+          </a:xfrm>
+          <a:prstGeom prst="rect">
+            <a:avLst/>
+          </a:prstGeom>
+          <a:noFill/>
+          <a:ln/>
+        </p:spPr>
+        <p:txBody>
+          <a:bodyPr wrap="square" rtlCol="0" anchor="ctr"/>
+          <a:lstStyle/>
+          <a:p>
+            <a:pPr indent="0" marL="0">
+              <a:buNone/>
+            </a:pPr>
+            <a:r>
+              <a:rPr lang="en-US" sz="1000" dirty="0">
+                <a:solidFill>
+                  <a:srgbClr val="1A1A2E"/>
+                </a:solidFill>
+                <a:latin typeface="Calibri" pitchFamily="34" charset="0"/>
+                <a:ea typeface="Calibri" pitchFamily="34" charset="-122"/>
+                <a:cs typeface="Calibri" pitchFamily="34" charset="-120"/>
+              </a:rPr>
+              <a:t>Venue #309 (Waiting Rooms)</a:t>
+            </a:r>
+            <a:endParaRPr lang="en-US" sz="1000" dirty="0"/>
+          </a:p>
+        </p:txBody>
+      </p:sp>
+      <p:sp>
+        <p:nvSpPr>
+          <p:cNvPr id="21" name="Text 18"/>
+          <p:cNvSpPr/>
+          <p:nvPr/>
+        </p:nvSpPr>
+        <p:spPr>
+          <a:xfrm>
+            <a:off x="9966960" y="3502152"/>
+            <a:ext cx="1691640" cy="274320"/>
+          </a:xfrm>
+          <a:prstGeom prst="rect">
+            <a:avLst/>
+          </a:prstGeom>
+          <a:noFill/>
+          <a:ln/>
+        </p:spPr>
+        <p:txBody>
+          <a:bodyPr wrap="square" rtlCol="0" anchor="ctr"/>
+          <a:lstStyle/>
+          <a:p>
+            <a:pPr algn="r" indent="0" marL="0">
+              <a:buNone/>
+            </a:pPr>
+            <a:r>
+              <a:rPr lang="en-US" sz="1000" b="1" dirty="0">
+                <a:solidFill>
+                  <a:srgbClr val="B8500A"/>
+                </a:solidFill>
+                <a:latin typeface="Calibri" pitchFamily="34" charset="0"/>
+                <a:ea typeface="Calibri" pitchFamily="34" charset="-122"/>
+                <a:cs typeface="Calibri" pitchFamily="34" charset="-120"/>
+              </a:rPr>
+              <a:t>-61%</a:t>
+            </a:r>
+            <a:endParaRPr lang="en-US" sz="1000" dirty="0"/>
+          </a:p>
+        </p:txBody>
+      </p:sp>
+      <p:sp>
+        <p:nvSpPr>
+          <p:cNvPr id="22" name="Text 19"/>
+          <p:cNvSpPr/>
+          <p:nvPr/>
+        </p:nvSpPr>
+        <p:spPr>
+          <a:xfrm>
+            <a:off x="6263640" y="3794760"/>
+            <a:ext cx="3657600" cy="274320"/>
+          </a:xfrm>
+          <a:prstGeom prst="rect">
+            <a:avLst/>
+          </a:prstGeom>
+          <a:noFill/>
+          <a:ln/>
+        </p:spPr>
+        <p:txBody>
+          <a:bodyPr wrap="square" rtlCol="0" anchor="ctr"/>
+          <a:lstStyle/>
+          <a:p>
+            <a:pPr indent="0" marL="0">
+              <a:buNone/>
+            </a:pPr>
+            <a:r>
+              <a:rPr lang="en-US" sz="1000" dirty="0">
+                <a:solidFill>
+                  <a:srgbClr val="1A1A2E"/>
+                </a:solidFill>
+                <a:latin typeface="Calibri" pitchFamily="34" charset="0"/>
+                <a:ea typeface="Calibri" pitchFamily="34" charset="-122"/>
+                <a:cs typeface="Calibri" pitchFamily="34" charset="-120"/>
+              </a:rPr>
+              <a:t>Venue #53 (Restaurants)</a:t>
+            </a:r>
+            <a:endParaRPr lang="en-US" sz="1000" dirty="0"/>
+          </a:p>
+        </p:txBody>
+      </p:sp>
+      <p:sp>
+        <p:nvSpPr>
+          <p:cNvPr id="23" name="Text 20"/>
+          <p:cNvSpPr/>
+          <p:nvPr/>
+        </p:nvSpPr>
+        <p:spPr>
+          <a:xfrm>
+            <a:off x="9966960" y="3794760"/>
+            <a:ext cx="1691640" cy="274320"/>
+          </a:xfrm>
+          <a:prstGeom prst="rect">
+            <a:avLst/>
+          </a:prstGeom>
+          <a:noFill/>
+          <a:ln/>
+        </p:spPr>
+        <p:txBody>
+          <a:bodyPr wrap="square" rtlCol="0" anchor="ctr"/>
+          <a:lstStyle/>
+          <a:p>
+            <a:pPr algn="r" indent="0" marL="0">
+              <a:buNone/>
+            </a:pPr>
+            <a:r>
+              <a:rPr lang="en-US" sz="1000" b="1" dirty="0">
+                <a:solidFill>
+                  <a:srgbClr val="B8500A"/>
+                </a:solidFill>
+                <a:latin typeface="Calibri" pitchFamily="34" charset="0"/>
+                <a:ea typeface="Calibri" pitchFamily="34" charset="-122"/>
+                <a:cs typeface="Calibri" pitchFamily="34" charset="-120"/>
+              </a:rPr>
+              <a:t>-61%</a:t>
+            </a:r>
+            <a:endParaRPr lang="en-US" sz="1000" dirty="0"/>
+          </a:p>
+        </p:txBody>
+      </p:sp>
+      <p:sp>
+        <p:nvSpPr>
+          <p:cNvPr id="24" name="Text 21"/>
+          <p:cNvSpPr/>
+          <p:nvPr/>
+        </p:nvSpPr>
+        <p:spPr>
+          <a:xfrm>
+            <a:off x="6263640" y="4087368"/>
+            <a:ext cx="3657600" cy="274320"/>
+          </a:xfrm>
+          <a:prstGeom prst="rect">
+            <a:avLst/>
+          </a:prstGeom>
+          <a:noFill/>
+          <a:ln/>
+        </p:spPr>
+        <p:txBody>
+          <a:bodyPr wrap="square" rtlCol="0" anchor="ctr"/>
+          <a:lstStyle/>
+          <a:p>
+            <a:pPr indent="0" marL="0">
+              <a:buNone/>
+            </a:pPr>
+            <a:r>
+              <a:rPr lang="en-US" sz="1000" dirty="0">
+                <a:solidFill>
+                  <a:srgbClr val="1A1A2E"/>
+                </a:solidFill>
+                <a:latin typeface="Calibri" pitchFamily="34" charset="0"/>
+                <a:ea typeface="Calibri" pitchFamily="34" charset="-122"/>
+                <a:cs typeface="Calibri" pitchFamily="34" charset="-120"/>
+              </a:rPr>
+              <a:t>Venue #247 (Bars)</a:t>
+            </a:r>
+            <a:endParaRPr lang="en-US" sz="1000" dirty="0"/>
+          </a:p>
+        </p:txBody>
+      </p:sp>
+      <p:sp>
+        <p:nvSpPr>
+          <p:cNvPr id="25" name="Text 22"/>
+          <p:cNvSpPr/>
+          <p:nvPr/>
+        </p:nvSpPr>
+        <p:spPr>
+          <a:xfrm>
+            <a:off x="9966960" y="4087368"/>
+            <a:ext cx="1691640" cy="274320"/>
+          </a:xfrm>
+          <a:prstGeom prst="rect">
+            <a:avLst/>
+          </a:prstGeom>
+          <a:noFill/>
+          <a:ln/>
+        </p:spPr>
+        <p:txBody>
+          <a:bodyPr wrap="square" rtlCol="0" anchor="ctr"/>
+          <a:lstStyle/>
+          <a:p>
+            <a:pPr algn="r" indent="0" marL="0">
+              <a:buNone/>
+            </a:pPr>
+            <a:r>
+              <a:rPr lang="en-US" sz="1000" b="1" dirty="0">
+                <a:solidFill>
+                  <a:srgbClr val="B8500A"/>
+                </a:solidFill>
+                <a:latin typeface="Calibri" pitchFamily="34" charset="0"/>
+                <a:ea typeface="Calibri" pitchFamily="34" charset="-122"/>
+                <a:cs typeface="Calibri" pitchFamily="34" charset="-120"/>
+              </a:rPr>
+              <a:t>-60%</a:t>
+            </a:r>
+            <a:endParaRPr lang="en-US" sz="1000" dirty="0"/>
+          </a:p>
+        </p:txBody>
+      </p:sp>
+      <p:sp>
+        <p:nvSpPr>
+          <p:cNvPr id="26" name="Text 23"/>
+          <p:cNvSpPr/>
+          <p:nvPr/>
+        </p:nvSpPr>
+        <p:spPr>
+          <a:xfrm>
+            <a:off x="6263640" y="4562856"/>
+            <a:ext cx="5394960" cy="274320"/>
+          </a:xfrm>
+          <a:prstGeom prst="rect">
+            <a:avLst/>
+          </a:prstGeom>
+          <a:noFill/>
+          <a:ln/>
+        </p:spPr>
+        <p:txBody>
+          <a:bodyPr wrap="square" rtlCol="0" anchor="ctr"/>
+          <a:lstStyle/>
+          <a:p>
+            <a:pPr indent="0" marL="0">
+              <a:buNone/>
+            </a:pPr>
+            <a:r>
+              <a:rPr lang="en-US" sz="1200" b="1" dirty="0">
+                <a:solidFill>
+                  <a:srgbClr val="1E2761"/>
+                </a:solidFill>
+                <a:latin typeface="Cambria" pitchFamily="34" charset="0"/>
+                <a:ea typeface="Cambria" pitchFamily="34" charset="-122"/>
+                <a:cs typeface="Cambria" pitchFamily="34" charset="-120"/>
+              </a:rPr>
+              <a:t>Top prospect venues (expansion priority)</a:t>
+            </a:r>
+            <a:endParaRPr lang="en-US" sz="1200" dirty="0"/>
+          </a:p>
+        </p:txBody>
+      </p:sp>
+      <p:sp>
+        <p:nvSpPr>
+          <p:cNvPr id="27" name="Text 24"/>
+          <p:cNvSpPr/>
+          <p:nvPr/>
+        </p:nvSpPr>
+        <p:spPr>
+          <a:xfrm>
+            <a:off x="6263640" y="4892040"/>
+            <a:ext cx="4023360" cy="274320"/>
+          </a:xfrm>
+          <a:prstGeom prst="rect">
+            <a:avLst/>
+          </a:prstGeom>
+          <a:noFill/>
+          <a:ln/>
+        </p:spPr>
+        <p:txBody>
+          <a:bodyPr wrap="square" rtlCol="0" anchor="ctr"/>
+          <a:lstStyle/>
+          <a:p>
+            <a:pPr indent="0" marL="0">
+              <a:buNone/>
+            </a:pPr>
+            <a:r>
+              <a:rPr lang="en-US" sz="1000" dirty="0">
+                <a:solidFill>
+                  <a:srgbClr val="1A1A2E"/>
+                </a:solidFill>
+                <a:latin typeface="Calibri" pitchFamily="34" charset="0"/>
+                <a:ea typeface="Calibri" pitchFamily="34" charset="-122"/>
+                <a:cs typeface="Calibri" pitchFamily="34" charset="-120"/>
+              </a:rPr>
+              <a:t>P0018 — Bars (existing market)</a:t>
+            </a:r>
+            <a:endParaRPr lang="en-US" sz="1000" dirty="0"/>
+          </a:p>
+        </p:txBody>
+      </p:sp>
+      <p:sp>
+        <p:nvSpPr>
+          <p:cNvPr id="28" name="Text 25"/>
+          <p:cNvSpPr/>
+          <p:nvPr/>
+        </p:nvSpPr>
+        <p:spPr>
+          <a:xfrm>
+            <a:off x="10195560" y="4892040"/>
+            <a:ext cx="1463040" cy="274320"/>
+          </a:xfrm>
+          <a:prstGeom prst="rect">
+            <a:avLst/>
+          </a:prstGeom>
+          <a:noFill/>
+          <a:ln/>
+        </p:spPr>
+        <p:txBody>
+          <a:bodyPr wrap="square" rtlCol="0" anchor="ctr"/>
+          <a:lstStyle/>
+          <a:p>
+            <a:pPr algn="r" indent="0" marL="0">
+              <a:buNone/>
+            </a:pPr>
+            <a:r>
+              <a:rPr lang="en-US" sz="1000" b="1" dirty="0">
+                <a:solidFill>
+                  <a:srgbClr val="2C7A57"/>
+                </a:solidFill>
+                <a:latin typeface="Calibri" pitchFamily="34" charset="0"/>
+                <a:ea typeface="Calibri" pitchFamily="34" charset="-122"/>
+                <a:cs typeface="Calibri" pitchFamily="34" charset="-120"/>
+              </a:rPr>
+              <a:t>$684</a:t>
+            </a:r>
+            <a:endParaRPr lang="en-US" sz="1000" dirty="0"/>
+          </a:p>
+        </p:txBody>
+      </p:sp>
+      <p:sp>
+        <p:nvSpPr>
+          <p:cNvPr id="29" name="Text 26"/>
+          <p:cNvSpPr/>
+          <p:nvPr/>
+        </p:nvSpPr>
+        <p:spPr>
+          <a:xfrm>
+            <a:off x="6263640" y="5184648"/>
+            <a:ext cx="4023360" cy="274320"/>
+          </a:xfrm>
+          <a:prstGeom prst="rect">
+            <a:avLst/>
+          </a:prstGeom>
+          <a:noFill/>
+          <a:ln/>
+        </p:spPr>
+        <p:txBody>
+          <a:bodyPr wrap="square" rtlCol="0" anchor="ctr"/>
+          <a:lstStyle/>
+          <a:p>
+            <a:pPr indent="0" marL="0">
+              <a:buNone/>
+            </a:pPr>
+            <a:r>
+              <a:rPr lang="en-US" sz="1000" dirty="0">
+                <a:solidFill>
+                  <a:srgbClr val="1A1A2E"/>
+                </a:solidFill>
+                <a:latin typeface="Calibri" pitchFamily="34" charset="0"/>
+                <a:ea typeface="Calibri" pitchFamily="34" charset="-122"/>
+                <a:cs typeface="Calibri" pitchFamily="34" charset="-120"/>
+              </a:rPr>
+              <a:t>P0055 — Restaurants (existing market)</a:t>
+            </a:r>
+            <a:endParaRPr lang="en-US" sz="1000" dirty="0"/>
+          </a:p>
+        </p:txBody>
+      </p:sp>
+      <p:sp>
+        <p:nvSpPr>
+          <p:cNvPr id="30" name="Text 27"/>
+          <p:cNvSpPr/>
+          <p:nvPr/>
+        </p:nvSpPr>
+        <p:spPr>
+          <a:xfrm>
+            <a:off x="10195560" y="5184648"/>
+            <a:ext cx="1463040" cy="274320"/>
+          </a:xfrm>
+          <a:prstGeom prst="rect">
+            <a:avLst/>
+          </a:prstGeom>
+          <a:noFill/>
+          <a:ln/>
+        </p:spPr>
+        <p:txBody>
+          <a:bodyPr wrap="square" rtlCol="0" anchor="ctr"/>
+          <a:lstStyle/>
+          <a:p>
+            <a:pPr algn="r" indent="0" marL="0">
+              <a:buNone/>
+            </a:pPr>
+            <a:r>
+              <a:rPr lang="en-US" sz="1000" b="1" dirty="0">
+                <a:solidFill>
+                  <a:srgbClr val="2C7A57"/>
+                </a:solidFill>
+                <a:latin typeface="Calibri" pitchFamily="34" charset="0"/>
+                <a:ea typeface="Calibri" pitchFamily="34" charset="-122"/>
+                <a:cs typeface="Calibri" pitchFamily="34" charset="-120"/>
+              </a:rPr>
+              <a:t>$524</a:t>
+            </a:r>
+            <a:endParaRPr lang="en-US" sz="1000" dirty="0"/>
+          </a:p>
+        </p:txBody>
+      </p:sp>
+      <p:sp>
+        <p:nvSpPr>
+          <p:cNvPr id="31" name="Text 28"/>
+          <p:cNvSpPr/>
+          <p:nvPr/>
+        </p:nvSpPr>
+        <p:spPr>
+          <a:xfrm>
+            <a:off x="6263640" y="5477256"/>
+            <a:ext cx="4023360" cy="274320"/>
+          </a:xfrm>
+          <a:prstGeom prst="rect">
+            <a:avLst/>
+          </a:prstGeom>
+          <a:noFill/>
+          <a:ln/>
+        </p:spPr>
+        <p:txBody>
+          <a:bodyPr wrap="square" rtlCol="0" anchor="ctr"/>
+          <a:lstStyle/>
+          <a:p>
+            <a:pPr indent="0" marL="0">
+              <a:buNone/>
+            </a:pPr>
+            <a:r>
+              <a:rPr lang="en-US" sz="1000" dirty="0">
+                <a:solidFill>
+                  <a:srgbClr val="1A1A2E"/>
+                </a:solidFill>
+                <a:latin typeface="Calibri" pitchFamily="34" charset="0"/>
+                <a:ea typeface="Calibri" pitchFamily="34" charset="-122"/>
+                <a:cs typeface="Calibri" pitchFamily="34" charset="-120"/>
+              </a:rPr>
+              <a:t>P0000 — Bars (new market)</a:t>
+            </a:r>
+            <a:endParaRPr lang="en-US" sz="1000" dirty="0"/>
+          </a:p>
+        </p:txBody>
+      </p:sp>
+      <p:sp>
+        <p:nvSpPr>
+          <p:cNvPr id="32" name="Text 29"/>
+          <p:cNvSpPr/>
+          <p:nvPr/>
+        </p:nvSpPr>
+        <p:spPr>
+          <a:xfrm>
+            <a:off x="10195560" y="5477256"/>
+            <a:ext cx="1463040" cy="274320"/>
+          </a:xfrm>
+          <a:prstGeom prst="rect">
+            <a:avLst/>
+          </a:prstGeom>
+          <a:noFill/>
+          <a:ln/>
+        </p:spPr>
+        <p:txBody>
+          <a:bodyPr wrap="square" rtlCol="0" anchor="ctr"/>
+          <a:lstStyle/>
+          <a:p>
+            <a:pPr algn="r" indent="0" marL="0">
+              <a:buNone/>
+            </a:pPr>
+            <a:r>
+              <a:rPr lang="en-US" sz="1000" b="1" dirty="0">
+                <a:solidFill>
+                  <a:srgbClr val="2C7A57"/>
+                </a:solidFill>
+                <a:latin typeface="Calibri" pitchFamily="34" charset="0"/>
+                <a:ea typeface="Calibri" pitchFamily="34" charset="-122"/>
+                <a:cs typeface="Calibri" pitchFamily="34" charset="-120"/>
+              </a:rPr>
+              <a:t>$500</a:t>
+            </a:r>
+            <a:endParaRPr lang="en-US" sz="1000" dirty="0"/>
+          </a:p>
+        </p:txBody>
+      </p:sp>
+      <p:sp>
+        <p:nvSpPr>
+          <p:cNvPr id="33" name="Text 30"/>
+          <p:cNvSpPr/>
+          <p:nvPr/>
+        </p:nvSpPr>
+        <p:spPr>
+          <a:xfrm>
+            <a:off x="6263640" y="5769864"/>
+            <a:ext cx="4023360" cy="274320"/>
+          </a:xfrm>
+          <a:prstGeom prst="rect">
+            <a:avLst/>
+          </a:prstGeom>
+          <a:noFill/>
+          <a:ln/>
+        </p:spPr>
+        <p:txBody>
+          <a:bodyPr wrap="square" rtlCol="0" anchor="ctr"/>
+          <a:lstStyle/>
+          <a:p>
+            <a:pPr indent="0" marL="0">
+              <a:buNone/>
+            </a:pPr>
+            <a:r>
+              <a:rPr lang="en-US" sz="1000" dirty="0">
+                <a:solidFill>
+                  <a:srgbClr val="1A1A2E"/>
+                </a:solidFill>
+                <a:latin typeface="Calibri" pitchFamily="34" charset="0"/>
+                <a:ea typeface="Calibri" pitchFamily="34" charset="-122"/>
+                <a:cs typeface="Calibri" pitchFamily="34" charset="-120"/>
+              </a:rPr>
+              <a:t>P0001 — Bars (new market)</a:t>
+            </a:r>
+            <a:endParaRPr lang="en-US" sz="1000" dirty="0"/>
+          </a:p>
+        </p:txBody>
+      </p:sp>
+      <p:sp>
+        <p:nvSpPr>
+          <p:cNvPr id="34" name="Text 31"/>
+          <p:cNvSpPr/>
+          <p:nvPr/>
+        </p:nvSpPr>
+        <p:spPr>
+          <a:xfrm>
+            <a:off x="10195560" y="5769864"/>
+            <a:ext cx="1463040" cy="274320"/>
+          </a:xfrm>
+          <a:prstGeom prst="rect">
+            <a:avLst/>
+          </a:prstGeom>
+          <a:noFill/>
+          <a:ln/>
+        </p:spPr>
+        <p:txBody>
+          <a:bodyPr wrap="square" rtlCol="0" anchor="ctr"/>
+          <a:lstStyle/>
+          <a:p>
+            <a:pPr algn="r" indent="0" marL="0">
+              <a:buNone/>
+            </a:pPr>
+            <a:r>
+              <a:rPr lang="en-US" sz="1000" b="1" dirty="0">
+                <a:solidFill>
+                  <a:srgbClr val="2C7A57"/>
+                </a:solidFill>
+                <a:latin typeface="Calibri" pitchFamily="34" charset="0"/>
+                <a:ea typeface="Calibri" pitchFamily="34" charset="-122"/>
+                <a:cs typeface="Calibri" pitchFamily="34" charset="-120"/>
+              </a:rPr>
+              <a:t>$496</a:t>
+            </a:r>
+            <a:endParaRPr lang="en-US" sz="1000" dirty="0"/>
+          </a:p>
+        </p:txBody>
+      </p:sp>
+      <p:sp>
+        <p:nvSpPr>
+          <p:cNvPr id="35" name="Text 32"/>
+          <p:cNvSpPr/>
+          <p:nvPr/>
+        </p:nvSpPr>
+        <p:spPr>
+          <a:xfrm>
+            <a:off x="548640" y="6080760"/>
+            <a:ext cx="11064240" cy="411480"/>
+          </a:xfrm>
+          <a:prstGeom prst="rect">
+            <a:avLst/>
+          </a:prstGeom>
+          <a:noFill/>
+          <a:ln/>
+        </p:spPr>
+        <p:txBody>
+          <a:bodyPr wrap="square" rtlCol="0" anchor="ctr"/>
           <a:lstStyle/>
           <a:p>
             <a:pPr indent="0" marL="0">
               <a:lnSpc>
-                <a:spcPts val="1600"/>
+                <a:spcPts val="1200"/>
               </a:lnSpc>
               <a:buNone/>
             </a:pPr>
             <a:r>
-              <a:rPr lang="en-US" sz="1200" dirty="0">
-                <a:solidFill>
-                  <a:srgbClr val="1A1A2E"/>
-                </a:solidFill>
-                <a:latin typeface="Calibri" pitchFamily="34" charset="0"/>
-                <a:ea typeface="Calibri" pitchFamily="34" charset="-122"/>
-                <a:cs typeface="Calibri" pitchFamily="34" charset="-120"/>
-              </a:rPr>
-              <a:t>All figures are synthetic, with a known injected ground-truth effect — used specifically to validate that each method recovers it before trusting it conceptually. Not a claim about any real company's data.</a:t>
-            </a:r>
-            <a:endParaRPr lang="en-US" sz="1200" dirty="0"/>
-          </a:p>
-        </p:txBody>
-      </p:sp>
-      <p:sp>
-        <p:nvSpPr>
-          <p:cNvPr id="6" name="Shape 4"/>
-          <p:cNvSpPr/>
-          <p:nvPr/>
-        </p:nvSpPr>
-        <p:spPr>
-          <a:xfrm>
-            <a:off x="548640" y="2633472"/>
-            <a:ext cx="109728" cy="960120"/>
-          </a:xfrm>
-          <a:prstGeom prst="rect">
-            <a:avLst/>
-          </a:prstGeom>
-          <a:solidFill>
-            <a:srgbClr val="E8871E"/>
-          </a:solidFill>
-          <a:ln/>
-        </p:spPr>
-      </p:sp>
-      <p:sp>
-        <p:nvSpPr>
-          <p:cNvPr id="7" name="Text 5"/>
-          <p:cNvSpPr/>
-          <p:nvPr/>
-        </p:nvSpPr>
-        <p:spPr>
-          <a:xfrm>
-            <a:off x="868680" y="2578608"/>
-            <a:ext cx="2743200" cy="1097280"/>
-          </a:xfrm>
-          <a:prstGeom prst="rect">
-            <a:avLst/>
-          </a:prstGeom>
-          <a:noFill/>
-          <a:ln/>
-        </p:spPr>
-        <p:txBody>
-          <a:bodyPr wrap="square" rtlCol="0" anchor="t"/>
-          <a:lstStyle/>
-          <a:p>
-            <a:pPr indent="0" marL="0">
-              <a:buNone/>
-            </a:pPr>
-            <a:r>
-              <a:rPr lang="en-US" sz="1350" b="1" dirty="0">
-                <a:solidFill>
-                  <a:srgbClr val="1E2761"/>
-                </a:solidFill>
-                <a:latin typeface="Calibri" pitchFamily="34" charset="0"/>
-                <a:ea typeface="Calibri" pitchFamily="34" charset="-122"/>
-                <a:cs typeface="Calibri" pitchFamily="34" charset="-120"/>
-              </a:rPr>
-              <a:t>Media-effectiveness figures</a:t>
-            </a:r>
-            <a:endParaRPr lang="en-US" sz="1350" dirty="0"/>
-          </a:p>
-        </p:txBody>
-      </p:sp>
-      <p:sp>
-        <p:nvSpPr>
-          <p:cNvPr id="8" name="Text 6"/>
-          <p:cNvSpPr/>
-          <p:nvPr/>
-        </p:nvSpPr>
-        <p:spPr>
-          <a:xfrm>
-            <a:off x="3794760" y="2578608"/>
-            <a:ext cx="7863840" cy="1097280"/>
-          </a:xfrm>
-          <a:prstGeom prst="rect">
-            <a:avLst/>
-          </a:prstGeom>
-          <a:noFill/>
-          <a:ln/>
-        </p:spPr>
-        <p:txBody>
-          <a:bodyPr wrap="square" rtlCol="0" anchor="t"/>
-          <a:lstStyle/>
-          <a:p>
-            <a:pPr indent="0" marL="0">
-              <a:lnSpc>
-                <a:spcPts val="1600"/>
-              </a:lnSpc>
-              <a:buNone/>
-            </a:pPr>
-            <a:r>
-              <a:rPr lang="en-US" sz="1200" dirty="0">
-                <a:solidFill>
-                  <a:srgbClr val="1A1A2E"/>
-                </a:solidFill>
-                <a:latin typeface="Calibri" pitchFamily="34" charset="0"/>
-                <a:ea typeface="Calibri" pitchFamily="34" charset="-122"/>
-                <a:cs typeface="Calibri" pitchFamily="34" charset="-120"/>
-              </a:rPr>
-              <a:t>Dwell time, screen count, and similar descriptive parameters shown are illustrative demo values, not researched real industry benchmarks. In production: Nielsen OOH, DSP data (e.g. Vistar), or Atmosphere's own play logs.</a:t>
-            </a:r>
-            <a:endParaRPr lang="en-US" sz="1200" dirty="0"/>
-          </a:p>
-        </p:txBody>
-      </p:sp>
-      <p:sp>
-        <p:nvSpPr>
-          <p:cNvPr id="9" name="Shape 7"/>
-          <p:cNvSpPr/>
-          <p:nvPr/>
-        </p:nvSpPr>
-        <p:spPr>
-          <a:xfrm>
-            <a:off x="548640" y="3840480"/>
-            <a:ext cx="109728" cy="960120"/>
-          </a:xfrm>
-          <a:prstGeom prst="rect">
-            <a:avLst/>
-          </a:prstGeom>
-          <a:solidFill>
-            <a:srgbClr val="E8871E"/>
-          </a:solidFill>
-          <a:ln/>
-        </p:spPr>
-      </p:sp>
-      <p:sp>
-        <p:nvSpPr>
-          <p:cNvPr id="10" name="Text 8"/>
-          <p:cNvSpPr/>
-          <p:nvPr/>
-        </p:nvSpPr>
-        <p:spPr>
-          <a:xfrm>
-            <a:off x="868680" y="3785616"/>
-            <a:ext cx="2743200" cy="1097280"/>
-          </a:xfrm>
-          <a:prstGeom prst="rect">
-            <a:avLst/>
-          </a:prstGeom>
-          <a:noFill/>
-          <a:ln/>
-        </p:spPr>
-        <p:txBody>
-          <a:bodyPr wrap="square" rtlCol="0" anchor="t"/>
-          <a:lstStyle/>
-          <a:p>
-            <a:pPr indent="0" marL="0">
-              <a:buNone/>
-            </a:pPr>
-            <a:r>
-              <a:rPr lang="en-US" sz="1350" b="1" dirty="0">
-                <a:solidFill>
-                  <a:srgbClr val="1E2761"/>
-                </a:solidFill>
-                <a:latin typeface="Calibri" pitchFamily="34" charset="0"/>
-                <a:ea typeface="Calibri" pitchFamily="34" charset="-122"/>
-                <a:cs typeface="Calibri" pitchFamily="34" charset="-120"/>
-              </a:rPr>
-              <a:t>Multi-touch attribution — deliberately not built</a:t>
-            </a:r>
-            <a:endParaRPr lang="en-US" sz="1350" dirty="0"/>
-          </a:p>
-        </p:txBody>
-      </p:sp>
-      <p:sp>
-        <p:nvSpPr>
-          <p:cNvPr id="11" name="Text 9"/>
-          <p:cNvSpPr/>
-          <p:nvPr/>
-        </p:nvSpPr>
-        <p:spPr>
-          <a:xfrm>
-            <a:off x="3794760" y="3785616"/>
-            <a:ext cx="7863840" cy="1097280"/>
-          </a:xfrm>
-          <a:prstGeom prst="rect">
-            <a:avLst/>
-          </a:prstGeom>
-          <a:noFill/>
-          <a:ln/>
-        </p:spPr>
-        <p:txBody>
-          <a:bodyPr wrap="square" rtlCol="0" anchor="t"/>
-          <a:lstStyle/>
-          <a:p>
-            <a:pPr indent="0" marL="0">
-              <a:lnSpc>
-                <a:spcPts val="1600"/>
-              </a:lnSpc>
-              <a:buNone/>
-            </a:pPr>
-            <a:r>
-              <a:rPr lang="en-US" sz="1200" dirty="0">
-                <a:solidFill>
-                  <a:srgbClr val="1A1A2E"/>
-                </a:solidFill>
-                <a:latin typeface="Calibri" pitchFamily="34" charset="0"/>
-                <a:ea typeface="Calibri" pitchFamily="34" charset="-122"/>
-                <a:cs typeface="Calibri" pitchFamily="34" charset="-120"/>
-              </a:rPr>
-              <a:t>Atmosphere's ambient-screen model has no individual-level, cross-venue touchpoint log by default. Building MTA would require purchased mobile location/device-matching data — a real but non-default assumption, so it's scoped out rather than forced.</a:t>
-            </a:r>
-            <a:endParaRPr lang="en-US" sz="1200" dirty="0"/>
-          </a:p>
-        </p:txBody>
-      </p:sp>
-      <p:sp>
-        <p:nvSpPr>
-          <p:cNvPr id="12" name="Shape 10"/>
-          <p:cNvSpPr/>
-          <p:nvPr/>
-        </p:nvSpPr>
-        <p:spPr>
-          <a:xfrm>
-            <a:off x="548640" y="5047488"/>
-            <a:ext cx="109728" cy="960120"/>
-          </a:xfrm>
-          <a:prstGeom prst="rect">
-            <a:avLst/>
-          </a:prstGeom>
-          <a:solidFill>
-            <a:srgbClr val="E8871E"/>
-          </a:solidFill>
-          <a:ln/>
-        </p:spPr>
-      </p:sp>
-      <p:sp>
-        <p:nvSpPr>
-          <p:cNvPr id="13" name="Text 11"/>
-          <p:cNvSpPr/>
-          <p:nvPr/>
-        </p:nvSpPr>
-        <p:spPr>
-          <a:xfrm>
-            <a:off x="868680" y="4992624"/>
-            <a:ext cx="2743200" cy="1097280"/>
-          </a:xfrm>
-          <a:prstGeom prst="rect">
-            <a:avLst/>
-          </a:prstGeom>
-          <a:noFill/>
-          <a:ln/>
-        </p:spPr>
-        <p:txBody>
-          <a:bodyPr wrap="square" rtlCol="0" anchor="t"/>
-          <a:lstStyle/>
-          <a:p>
-            <a:pPr indent="0" marL="0">
-              <a:buNone/>
-            </a:pPr>
-            <a:r>
-              <a:rPr lang="en-US" sz="1350" b="1" dirty="0">
-                <a:solidFill>
-                  <a:srgbClr val="1E2761"/>
-                </a:solidFill>
-                <a:latin typeface="Calibri" pitchFamily="34" charset="0"/>
-                <a:ea typeface="Calibri" pitchFamily="34" charset="-122"/>
-                <a:cs typeface="Calibri" pitchFamily="34" charset="-120"/>
-              </a:rPr>
-              <a:t>Cost assumptions</a:t>
-            </a:r>
-            <a:endParaRPr lang="en-US" sz="1350" dirty="0"/>
-          </a:p>
-        </p:txBody>
-      </p:sp>
-      <p:sp>
-        <p:nvSpPr>
-          <p:cNvPr id="14" name="Text 12"/>
-          <p:cNvSpPr/>
-          <p:nvPr/>
-        </p:nvSpPr>
-        <p:spPr>
-          <a:xfrm>
-            <a:off x="3794760" y="4992624"/>
-            <a:ext cx="7863840" cy="1097280"/>
-          </a:xfrm>
-          <a:prstGeom prst="rect">
-            <a:avLst/>
-          </a:prstGeom>
-          <a:noFill/>
-          <a:ln/>
-        </p:spPr>
-        <p:txBody>
-          <a:bodyPr wrap="square" rtlCol="0" anchor="t"/>
-          <a:lstStyle/>
-          <a:p>
-            <a:pPr indent="0" marL="0">
-              <a:lnSpc>
-                <a:spcPts val="1600"/>
-              </a:lnSpc>
-              <a:buNone/>
-            </a:pPr>
-            <a:r>
-              <a:rPr lang="en-US" sz="1200" dirty="0">
-                <a:solidFill>
-                  <a:srgbClr val="1A1A2E"/>
-                </a:solidFill>
-                <a:latin typeface="Calibri" pitchFamily="34" charset="0"/>
-                <a:ea typeface="Calibri" pitchFamily="34" charset="-122"/>
-                <a:cs typeface="Calibri" pitchFamily="34" charset="-120"/>
-              </a:rPr>
-              <a:t>The $/frequency-unit figures behind the budget allocator are illustrative, editable placeholders — in production these come from Atmosphere's own rate card by venue type and daypart.</a:t>
-            </a:r>
-            <a:endParaRPr lang="en-US" sz="1200" dirty="0"/>
-          </a:p>
-        </p:txBody>
-      </p:sp>
-      <p:sp>
-        <p:nvSpPr>
-          <p:cNvPr id="15" name="Text 13"/>
+              <a:rPr lang="en-US" sz="1000" i="1" dirty="0">
+                <a:solidFill>
+                  <a:srgbClr val="5B6178"/>
+                </a:solidFill>
+                <a:latin typeface="Calibri" pitchFamily="34" charset="0"/>
+                <a:ea typeface="Calibri" pitchFamily="34" charset="-122"/>
+                <a:cs typeface="Calibri" pitchFamily="34" charset="-120"/>
+              </a:rPr>
+              <a:t>Flags come from 5-fold out-of-fold predictions, never a model scoring the venue it was trained on. Phase 1's calibrated-lift feature carries near-zero importance — honest, since it's constant within venue_type once venue_type itself is a feature.</a:t>
+            </a:r>
+            <a:endParaRPr lang="en-US" sz="1000" dirty="0"/>
+          </a:p>
+        </p:txBody>
+      </p:sp>
+      <p:sp>
+        <p:nvSpPr>
+          <p:cNvPr id="36" name="Text 33"/>
           <p:cNvSpPr/>
           <p:nvPr/>
         </p:nvSpPr>
@@ -3961,7 +5120,7 @@
                 <a:ea typeface="Calibri" pitchFamily="34" charset="-122"/>
                 <a:cs typeface="Calibri" pitchFamily="34" charset="-120"/>
               </a:rPr>
-              <a:t>Honest scope</a:t>
+              <a:t>Venue economics — Phase 2</a:t>
             </a:r>
             <a:endParaRPr lang="en-US" sz="900" dirty="0"/>
           </a:p>
@@ -3969,7 +5128,7 @@
       </p:sp>
       <p:sp>
         <p:nvSpPr>
-          <p:cNvPr id="16" name="Text 14"/>
+          <p:cNvPr id="37" name="Text 34"/>
           <p:cNvSpPr/>
           <p:nvPr/>
         </p:nvSpPr>
@@ -4017,6 +5176,559 @@
 <file path=ppt/slides/slide11.xml><?xml version="1.0" encoding="utf-8"?>
 <p:sld xmlns:a="http://schemas.openxmlformats.org/drawingml/2006/main" xmlns:r="http://schemas.openxmlformats.org/officeDocument/2006/relationships" xmlns:p="http://schemas.openxmlformats.org/presentationml/2006/main">
   <p:cSld name="Slide 11">
+    <p:bg>
+      <p:bgPr>
+        <a:solidFill>
+          <a:srgbClr val="FFFFFF"/>
+        </a:solidFill>
+      </p:bgPr>
+    </p:bg>
+    <p:spTree>
+      <p:nvGrpSpPr>
+        <p:cNvPr id="1" name=""/>
+        <p:cNvGrpSpPr/>
+        <p:nvPr/>
+      </p:nvGrpSpPr>
+      <p:grpSpPr>
+        <a:xfrm>
+          <a:off x="0" y="0"/>
+          <a:ext cx="0" cy="0"/>
+          <a:chOff x="0" y="0"/>
+          <a:chExt cx="0" cy="0"/>
+        </a:xfrm>
+      </p:grpSpPr>
+      <p:sp>
+        <p:nvSpPr>
+          <p:cNvPr id="2" name="Text 0"/>
+          <p:cNvSpPr/>
+          <p:nvPr/>
+        </p:nvSpPr>
+        <p:spPr>
+          <a:xfrm>
+            <a:off x="548640" y="457200"/>
+            <a:ext cx="7315200" cy="640080"/>
+          </a:xfrm>
+          <a:prstGeom prst="rect">
+            <a:avLst/>
+          </a:prstGeom>
+          <a:noFill/>
+          <a:ln/>
+        </p:spPr>
+        <p:txBody>
+          <a:bodyPr wrap="square" rtlCol="0" anchor="ctr"/>
+          <a:lstStyle/>
+          <a:p>
+            <a:pPr indent="0" marL="0">
+              <a:buNone/>
+            </a:pPr>
+            <a:r>
+              <a:rPr lang="en-US" sz="3000" b="1" dirty="0">
+                <a:solidFill>
+                  <a:srgbClr val="1E2761"/>
+                </a:solidFill>
+                <a:latin typeface="Cambria" pitchFamily="34" charset="0"/>
+                <a:ea typeface="Cambria" pitchFamily="34" charset="-122"/>
+                <a:cs typeface="Cambria" pitchFamily="34" charset="-120"/>
+              </a:rPr>
+              <a:t>Honest scope</a:t>
+            </a:r>
+            <a:endParaRPr lang="en-US" sz="3000" dirty="0"/>
+          </a:p>
+        </p:txBody>
+      </p:sp>
+      <p:sp>
+        <p:nvSpPr>
+          <p:cNvPr id="3" name="Shape 1"/>
+          <p:cNvSpPr/>
+          <p:nvPr/>
+        </p:nvSpPr>
+        <p:spPr>
+          <a:xfrm>
+            <a:off x="548640" y="1426464"/>
+            <a:ext cx="109728" cy="960120"/>
+          </a:xfrm>
+          <a:prstGeom prst="rect">
+            <a:avLst/>
+          </a:prstGeom>
+          <a:solidFill>
+            <a:srgbClr val="E8871E"/>
+          </a:solidFill>
+          <a:ln/>
+        </p:spPr>
+      </p:sp>
+      <p:sp>
+        <p:nvSpPr>
+          <p:cNvPr id="4" name="Text 2"/>
+          <p:cNvSpPr/>
+          <p:nvPr/>
+        </p:nvSpPr>
+        <p:spPr>
+          <a:xfrm>
+            <a:off x="868680" y="1371600"/>
+            <a:ext cx="2743200" cy="1097280"/>
+          </a:xfrm>
+          <a:prstGeom prst="rect">
+            <a:avLst/>
+          </a:prstGeom>
+          <a:noFill/>
+          <a:ln/>
+        </p:spPr>
+        <p:txBody>
+          <a:bodyPr wrap="square" rtlCol="0" anchor="t"/>
+          <a:lstStyle/>
+          <a:p>
+            <a:pPr indent="0" marL="0">
+              <a:buNone/>
+            </a:pPr>
+            <a:r>
+              <a:rPr lang="en-US" sz="1350" b="1" dirty="0">
+                <a:solidFill>
+                  <a:srgbClr val="1E2761"/>
+                </a:solidFill>
+                <a:latin typeface="Calibri" pitchFamily="34" charset="0"/>
+                <a:ea typeface="Calibri" pitchFamily="34" charset="-122"/>
+                <a:cs typeface="Calibri" pitchFamily="34" charset="-120"/>
+              </a:rPr>
+              <a:t>Synthetic data</a:t>
+            </a:r>
+            <a:endParaRPr lang="en-US" sz="1350" dirty="0"/>
+          </a:p>
+        </p:txBody>
+      </p:sp>
+      <p:sp>
+        <p:nvSpPr>
+          <p:cNvPr id="5" name="Text 3"/>
+          <p:cNvSpPr/>
+          <p:nvPr/>
+        </p:nvSpPr>
+        <p:spPr>
+          <a:xfrm>
+            <a:off x="3794760" y="1371600"/>
+            <a:ext cx="7863840" cy="1097280"/>
+          </a:xfrm>
+          <a:prstGeom prst="rect">
+            <a:avLst/>
+          </a:prstGeom>
+          <a:noFill/>
+          <a:ln/>
+        </p:spPr>
+        <p:txBody>
+          <a:bodyPr wrap="square" rtlCol="0" anchor="t"/>
+          <a:lstStyle/>
+          <a:p>
+            <a:pPr indent="0" marL="0">
+              <a:lnSpc>
+                <a:spcPts val="1600"/>
+              </a:lnSpc>
+              <a:buNone/>
+            </a:pPr>
+            <a:r>
+              <a:rPr lang="en-US" sz="1200" dirty="0">
+                <a:solidFill>
+                  <a:srgbClr val="1A1A2E"/>
+                </a:solidFill>
+                <a:latin typeface="Calibri" pitchFamily="34" charset="0"/>
+                <a:ea typeface="Calibri" pitchFamily="34" charset="-122"/>
+                <a:cs typeface="Calibri" pitchFamily="34" charset="-120"/>
+              </a:rPr>
+              <a:t>All figures — Phase 1 and Phase 2 — are synthetic, with a known injected ground-truth effect used specifically to validate that each method recovers it before trusting it conceptually. Not a claim about any real company's data.</a:t>
+            </a:r>
+            <a:endParaRPr lang="en-US" sz="1200" dirty="0"/>
+          </a:p>
+        </p:txBody>
+      </p:sp>
+      <p:sp>
+        <p:nvSpPr>
+          <p:cNvPr id="6" name="Shape 4"/>
+          <p:cNvSpPr/>
+          <p:nvPr/>
+        </p:nvSpPr>
+        <p:spPr>
+          <a:xfrm>
+            <a:off x="548640" y="2633472"/>
+            <a:ext cx="109728" cy="960120"/>
+          </a:xfrm>
+          <a:prstGeom prst="rect">
+            <a:avLst/>
+          </a:prstGeom>
+          <a:solidFill>
+            <a:srgbClr val="E8871E"/>
+          </a:solidFill>
+          <a:ln/>
+        </p:spPr>
+      </p:sp>
+      <p:sp>
+        <p:nvSpPr>
+          <p:cNvPr id="7" name="Text 5"/>
+          <p:cNvSpPr/>
+          <p:nvPr/>
+        </p:nvSpPr>
+        <p:spPr>
+          <a:xfrm>
+            <a:off x="868680" y="2578608"/>
+            <a:ext cx="2743200" cy="1097280"/>
+          </a:xfrm>
+          <a:prstGeom prst="rect">
+            <a:avLst/>
+          </a:prstGeom>
+          <a:noFill/>
+          <a:ln/>
+        </p:spPr>
+        <p:txBody>
+          <a:bodyPr wrap="square" rtlCol="0" anchor="t"/>
+          <a:lstStyle/>
+          <a:p>
+            <a:pPr indent="0" marL="0">
+              <a:buNone/>
+            </a:pPr>
+            <a:r>
+              <a:rPr lang="en-US" sz="1350" b="1" dirty="0">
+                <a:solidFill>
+                  <a:srgbClr val="1E2761"/>
+                </a:solidFill>
+                <a:latin typeface="Calibri" pitchFamily="34" charset="0"/>
+                <a:ea typeface="Calibri" pitchFamily="34" charset="-122"/>
+                <a:cs typeface="Calibri" pitchFamily="34" charset="-120"/>
+              </a:rPr>
+              <a:t>Media-effectiveness &amp; rate-card figures</a:t>
+            </a:r>
+            <a:endParaRPr lang="en-US" sz="1350" dirty="0"/>
+          </a:p>
+        </p:txBody>
+      </p:sp>
+      <p:sp>
+        <p:nvSpPr>
+          <p:cNvPr id="8" name="Text 6"/>
+          <p:cNvSpPr/>
+          <p:nvPr/>
+        </p:nvSpPr>
+        <p:spPr>
+          <a:xfrm>
+            <a:off x="3794760" y="2578608"/>
+            <a:ext cx="7863840" cy="1097280"/>
+          </a:xfrm>
+          <a:prstGeom prst="rect">
+            <a:avLst/>
+          </a:prstGeom>
+          <a:noFill/>
+          <a:ln/>
+        </p:spPr>
+        <p:txBody>
+          <a:bodyPr wrap="square" rtlCol="0" anchor="t"/>
+          <a:lstStyle/>
+          <a:p>
+            <a:pPr indent="0" marL="0">
+              <a:lnSpc>
+                <a:spcPts val="1600"/>
+              </a:lnSpc>
+              <a:buNone/>
+            </a:pPr>
+            <a:r>
+              <a:rPr lang="en-US" sz="1200" dirty="0">
+                <a:solidFill>
+                  <a:srgbClr val="1A1A2E"/>
+                </a:solidFill>
+                <a:latin typeface="Calibri" pitchFamily="34" charset="0"/>
+                <a:ea typeface="Calibri" pitchFamily="34" charset="-122"/>
+                <a:cs typeface="Calibri" pitchFamily="34" charset="-120"/>
+              </a:rPr>
+              <a:t>Dwell time, screen count, ad rate card, and similar parameters shown are illustrative demo values, not researched real industry benchmarks. In production: Nielsen OOH, DSP data (e.g. Vistar), or Atmosphere's own play logs and rate card.</a:t>
+            </a:r>
+            <a:endParaRPr lang="en-US" sz="1200" dirty="0"/>
+          </a:p>
+        </p:txBody>
+      </p:sp>
+      <p:sp>
+        <p:nvSpPr>
+          <p:cNvPr id="9" name="Shape 7"/>
+          <p:cNvSpPr/>
+          <p:nvPr/>
+        </p:nvSpPr>
+        <p:spPr>
+          <a:xfrm>
+            <a:off x="548640" y="3840480"/>
+            <a:ext cx="109728" cy="960120"/>
+          </a:xfrm>
+          <a:prstGeom prst="rect">
+            <a:avLst/>
+          </a:prstGeom>
+          <a:solidFill>
+            <a:srgbClr val="E8871E"/>
+          </a:solidFill>
+          <a:ln/>
+        </p:spPr>
+      </p:sp>
+      <p:sp>
+        <p:nvSpPr>
+          <p:cNvPr id="10" name="Text 8"/>
+          <p:cNvSpPr/>
+          <p:nvPr/>
+        </p:nvSpPr>
+        <p:spPr>
+          <a:xfrm>
+            <a:off x="868680" y="3785616"/>
+            <a:ext cx="2743200" cy="1097280"/>
+          </a:xfrm>
+          <a:prstGeom prst="rect">
+            <a:avLst/>
+          </a:prstGeom>
+          <a:noFill/>
+          <a:ln/>
+        </p:spPr>
+        <p:txBody>
+          <a:bodyPr wrap="square" rtlCol="0" anchor="t"/>
+          <a:lstStyle/>
+          <a:p>
+            <a:pPr indent="0" marL="0">
+              <a:buNone/>
+            </a:pPr>
+            <a:r>
+              <a:rPr lang="en-US" sz="1350" b="1" dirty="0">
+                <a:solidFill>
+                  <a:srgbClr val="1E2761"/>
+                </a:solidFill>
+                <a:latin typeface="Calibri" pitchFamily="34" charset="0"/>
+                <a:ea typeface="Calibri" pitchFamily="34" charset="-122"/>
+                <a:cs typeface="Calibri" pitchFamily="34" charset="-120"/>
+              </a:rPr>
+              <a:t>Multi-touch attribution — deliberately not built</a:t>
+            </a:r>
+            <a:endParaRPr lang="en-US" sz="1350" dirty="0"/>
+          </a:p>
+        </p:txBody>
+      </p:sp>
+      <p:sp>
+        <p:nvSpPr>
+          <p:cNvPr id="11" name="Text 9"/>
+          <p:cNvSpPr/>
+          <p:nvPr/>
+        </p:nvSpPr>
+        <p:spPr>
+          <a:xfrm>
+            <a:off x="3794760" y="3785616"/>
+            <a:ext cx="7863840" cy="1097280"/>
+          </a:xfrm>
+          <a:prstGeom prst="rect">
+            <a:avLst/>
+          </a:prstGeom>
+          <a:noFill/>
+          <a:ln/>
+        </p:spPr>
+        <p:txBody>
+          <a:bodyPr wrap="square" rtlCol="0" anchor="t"/>
+          <a:lstStyle/>
+          <a:p>
+            <a:pPr indent="0" marL="0">
+              <a:lnSpc>
+                <a:spcPts val="1600"/>
+              </a:lnSpc>
+              <a:buNone/>
+            </a:pPr>
+            <a:r>
+              <a:rPr lang="en-US" sz="1200" dirty="0">
+                <a:solidFill>
+                  <a:srgbClr val="1A1A2E"/>
+                </a:solidFill>
+                <a:latin typeface="Calibri" pitchFamily="34" charset="0"/>
+                <a:ea typeface="Calibri" pitchFamily="34" charset="-122"/>
+                <a:cs typeface="Calibri" pitchFamily="34" charset="-120"/>
+              </a:rPr>
+              <a:t>Atmosphere's ambient-screen model has no individual-level, cross-venue touchpoint log by default. Building MTA would require purchased mobile location/device-matching data — a real but non-default assumption, so it's scoped out rather than forced.</a:t>
+            </a:r>
+            <a:endParaRPr lang="en-US" sz="1200" dirty="0"/>
+          </a:p>
+        </p:txBody>
+      </p:sp>
+      <p:sp>
+        <p:nvSpPr>
+          <p:cNvPr id="12" name="Shape 10"/>
+          <p:cNvSpPr/>
+          <p:nvPr/>
+        </p:nvSpPr>
+        <p:spPr>
+          <a:xfrm>
+            <a:off x="548640" y="5047488"/>
+            <a:ext cx="109728" cy="960120"/>
+          </a:xfrm>
+          <a:prstGeom prst="rect">
+            <a:avLst/>
+          </a:prstGeom>
+          <a:solidFill>
+            <a:srgbClr val="E8871E"/>
+          </a:solidFill>
+          <a:ln/>
+        </p:spPr>
+      </p:sp>
+      <p:sp>
+        <p:nvSpPr>
+          <p:cNvPr id="13" name="Text 11"/>
+          <p:cNvSpPr/>
+          <p:nvPr/>
+        </p:nvSpPr>
+        <p:spPr>
+          <a:xfrm>
+            <a:off x="868680" y="4992624"/>
+            <a:ext cx="2743200" cy="1097280"/>
+          </a:xfrm>
+          <a:prstGeom prst="rect">
+            <a:avLst/>
+          </a:prstGeom>
+          <a:noFill/>
+          <a:ln/>
+        </p:spPr>
+        <p:txBody>
+          <a:bodyPr wrap="square" rtlCol="0" anchor="t"/>
+          <a:lstStyle/>
+          <a:p>
+            <a:pPr indent="0" marL="0">
+              <a:buNone/>
+            </a:pPr>
+            <a:r>
+              <a:rPr lang="en-US" sz="1350" b="1" dirty="0">
+                <a:solidFill>
+                  <a:srgbClr val="1E2761"/>
+                </a:solidFill>
+                <a:latin typeface="Calibri" pitchFamily="34" charset="0"/>
+                <a:ea typeface="Calibri" pitchFamily="34" charset="-122"/>
+                <a:cs typeface="Calibri" pitchFamily="34" charset="-120"/>
+              </a:rPr>
+              <a:t>Cost &amp; revenue assumptions</a:t>
+            </a:r>
+            <a:endParaRPr lang="en-US" sz="1350" dirty="0"/>
+          </a:p>
+        </p:txBody>
+      </p:sp>
+      <p:sp>
+        <p:nvSpPr>
+          <p:cNvPr id="14" name="Text 12"/>
+          <p:cNvSpPr/>
+          <p:nvPr/>
+        </p:nvSpPr>
+        <p:spPr>
+          <a:xfrm>
+            <a:off x="3794760" y="4992624"/>
+            <a:ext cx="7863840" cy="1097280"/>
+          </a:xfrm>
+          <a:prstGeom prst="rect">
+            <a:avLst/>
+          </a:prstGeom>
+          <a:noFill/>
+          <a:ln/>
+        </p:spPr>
+        <p:txBody>
+          <a:bodyPr wrap="square" rtlCol="0" anchor="t"/>
+          <a:lstStyle/>
+          <a:p>
+            <a:pPr indent="0" marL="0">
+              <a:lnSpc>
+                <a:spcPts val="1600"/>
+              </a:lnSpc>
+              <a:buNone/>
+            </a:pPr>
+            <a:r>
+              <a:rPr lang="en-US" sz="1200" dirty="0">
+                <a:solidFill>
+                  <a:srgbClr val="1A1A2E"/>
+                </a:solidFill>
+                <a:latin typeface="Calibri" pitchFamily="34" charset="0"/>
+                <a:ea typeface="Calibri" pitchFamily="34" charset="-122"/>
+                <a:cs typeface="Calibri" pitchFamily="34" charset="-120"/>
+              </a:rPr>
+              <a:t>The $/frequency-unit figures behind the budget allocator, and the ad-rate-card behind Phase 2's revenue model, are illustrative, editable placeholders — in production these come from Atmosphere's own rate card by venue type and daypart.</a:t>
+            </a:r>
+            <a:endParaRPr lang="en-US" sz="1200" dirty="0"/>
+          </a:p>
+        </p:txBody>
+      </p:sp>
+      <p:sp>
+        <p:nvSpPr>
+          <p:cNvPr id="15" name="Text 13"/>
+          <p:cNvSpPr/>
+          <p:nvPr/>
+        </p:nvSpPr>
+        <p:spPr>
+          <a:xfrm>
+            <a:off x="457200" y="6537960"/>
+            <a:ext cx="7315200" cy="274320"/>
+          </a:xfrm>
+          <a:prstGeom prst="rect">
+            <a:avLst/>
+          </a:prstGeom>
+          <a:noFill/>
+          <a:ln/>
+        </p:spPr>
+        <p:txBody>
+          <a:bodyPr wrap="square" rtlCol="0" anchor="ctr"/>
+          <a:lstStyle/>
+          <a:p>
+            <a:pPr indent="0" marL="0">
+              <a:buNone/>
+            </a:pPr>
+            <a:r>
+              <a:rPr lang="en-US" sz="900" dirty="0">
+                <a:solidFill>
+                  <a:srgbClr val="5B6178"/>
+                </a:solidFill>
+                <a:latin typeface="Calibri" pitchFamily="34" charset="0"/>
+                <a:ea typeface="Calibri" pitchFamily="34" charset="-122"/>
+                <a:cs typeface="Calibri" pitchFamily="34" charset="-120"/>
+              </a:rPr>
+              <a:t>Honest scope</a:t>
+            </a:r>
+            <a:endParaRPr lang="en-US" sz="900" dirty="0"/>
+          </a:p>
+        </p:txBody>
+      </p:sp>
+      <p:sp>
+        <p:nvSpPr>
+          <p:cNvPr id="16" name="Text 14"/>
+          <p:cNvSpPr/>
+          <p:nvPr/>
+        </p:nvSpPr>
+        <p:spPr>
+          <a:xfrm>
+            <a:off x="7589520" y="6537960"/>
+            <a:ext cx="4114800" cy="274320"/>
+          </a:xfrm>
+          <a:prstGeom prst="rect">
+            <a:avLst/>
+          </a:prstGeom>
+          <a:noFill/>
+          <a:ln/>
+        </p:spPr>
+        <p:txBody>
+          <a:bodyPr wrap="square" rtlCol="0" anchor="ctr"/>
+          <a:lstStyle/>
+          <a:p>
+            <a:pPr algn="r" indent="0" marL="0">
+              <a:buNone/>
+            </a:pPr>
+            <a:r>
+              <a:rPr lang="en-US" sz="900" dirty="0">
+                <a:solidFill>
+                  <a:srgbClr val="5B6178"/>
+                </a:solidFill>
+                <a:latin typeface="Calibri" pitchFamily="34" charset="0"/>
+                <a:ea typeface="Calibri" pitchFamily="34" charset="-122"/>
+                <a:cs typeface="Calibri" pitchFamily="34" charset="-120"/>
+              </a:rPr>
+              <a:t>Synthetic demo — validated against a known injected ground truth</a:t>
+            </a:r>
+            <a:endParaRPr lang="en-US" sz="900" dirty="0"/>
+          </a:p>
+        </p:txBody>
+      </p:sp>
+    </p:spTree>
+  </p:cSld>
+  <p:clrMapOvr>
+    <a:masterClrMapping/>
+  </p:clrMapOvr>
+</p:sld>
+</file>
+
+<file path=ppt/slides/slide12.xml><?xml version="1.0" encoding="utf-8"?>
+<p:sld xmlns:a="http://schemas.openxmlformats.org/drawingml/2006/main" xmlns:r="http://schemas.openxmlformats.org/officeDocument/2006/relationships" xmlns:p="http://schemas.openxmlformats.org/presentationml/2006/main">
+  <p:cSld name="Slide 12">
     <p:bg>
       <p:bgPr>
         <a:solidFill>
@@ -4475,7 +6187,7 @@
                 <a:ea typeface="Calibri" pitchFamily="34" charset="-122"/>
                 <a:cs typeface="Calibri" pitchFamily="34" charset="-120"/>
               </a:rPr>
-              <a:t>Scope honestly: MTA excluded and why, illustrative parameters flagged, Phase 2 (venue economics) designed and ready to build.</a:t>
+              <a:t>One connected system, not two projects: Phase 2's venue-revenue model reuses Phase 1's causal-value input, recovers latent ground truth at 0.95 correlation, and cleanly separates market-level effects from venue-level execution gaps.</a:t>
             </a:r>
             <a:endParaRPr lang="en-US" sz="1450" dirty="0"/>
           </a:p>
@@ -4560,24 +6272,24 @@
         </p:nvSpPr>
         <p:spPr>
           <a:xfrm>
-            <a:off x="548640" y="457200"/>
-            <a:ext cx="10972800" cy="640080"/>
-          </a:xfrm>
-          <a:prstGeom prst="rect">
-            <a:avLst/>
-          </a:prstGeom>
-          <a:noFill/>
-          <a:ln/>
-        </p:spPr>
-        <p:txBody>
-          <a:bodyPr wrap="square" rtlCol="0" anchor="ctr"/>
-          <a:lstStyle/>
-          <a:p>
-            <a:pPr indent="0" marL="0">
-              <a:buNone/>
-            </a:pPr>
-            <a:r>
-              <a:rPr lang="en-US" sz="3000" b="1" dirty="0">
+            <a:off x="548640" y="411480"/>
+            <a:ext cx="10972800" cy="594360"/>
+          </a:xfrm>
+          <a:prstGeom prst="rect">
+            <a:avLst/>
+          </a:prstGeom>
+          <a:noFill/>
+          <a:ln/>
+        </p:spPr>
+        <p:txBody>
+          <a:bodyPr wrap="square" rtlCol="0" anchor="ctr"/>
+          <a:lstStyle/>
+          <a:p>
+            <a:pPr indent="0" marL="0">
+              <a:buNone/>
+            </a:pPr>
+            <a:r>
+              <a:rPr lang="en-US" sz="2800" b="1" dirty="0">
                 <a:solidFill>
                   <a:srgbClr val="1E2761"/>
                 </a:solidFill>
@@ -4585,9 +6297,9 @@
                 <a:ea typeface="Cambria" pitchFamily="34" charset="-122"/>
                 <a:cs typeface="Cambria" pitchFamily="34" charset="-120"/>
               </a:rPr>
-              <a:t>Two questions this project answers</a:t>
-            </a:r>
-            <a:endParaRPr lang="en-US" sz="3000" dirty="0"/>
+              <a:t>Three questions this project answers</a:t>
+            </a:r>
+            <a:endParaRPr lang="en-US" sz="2800" dirty="0"/>
           </a:p>
         </p:txBody>
       </p:sp>
@@ -4599,12 +6311,12 @@
         </p:nvSpPr>
         <p:spPr>
           <a:xfrm>
-            <a:off x="548640" y="1554480"/>
-            <a:ext cx="5212080" cy="4480560"/>
+            <a:off x="548640" y="1371600"/>
+            <a:ext cx="3520440" cy="4709160"/>
           </a:xfrm>
           <a:prstGeom prst="roundRect">
             <a:avLst>
-              <a:gd name="adj" fmla="val 2449"/>
+              <a:gd name="adj" fmla="val 3117"/>
             </a:avLst>
           </a:prstGeom>
           <a:solidFill>
@@ -4628,8 +6340,8 @@
         </p:nvSpPr>
         <p:spPr>
           <a:xfrm>
-            <a:off x="914400" y="1920240"/>
-            <a:ext cx="594360" cy="594360"/>
+            <a:off x="868680" y="1691640"/>
+            <a:ext cx="548640" cy="548640"/>
           </a:xfrm>
           <a:prstGeom prst="ellipse">
             <a:avLst/>
@@ -4648,8 +6360,8 @@
         </p:nvSpPr>
         <p:spPr>
           <a:xfrm>
-            <a:off x="914400" y="1920240"/>
-            <a:ext cx="594360" cy="594360"/>
+            <a:off x="868680" y="1691640"/>
+            <a:ext cx="548640" cy="548640"/>
           </a:xfrm>
           <a:prstGeom prst="rect">
             <a:avLst/>
@@ -4665,7 +6377,7 @@
               <a:buNone/>
             </a:pPr>
             <a:r>
-              <a:rPr lang="en-US" sz="2200" b="1" dirty="0">
+              <a:rPr lang="en-US" sz="2000" b="1" dirty="0">
                 <a:solidFill>
                   <a:srgbClr val="FFFFFF"/>
                 </a:solidFill>
@@ -4675,7 +6387,7 @@
               </a:rPr>
               <a:t>1</a:t>
             </a:r>
-            <a:endParaRPr lang="en-US" sz="2200" dirty="0"/>
+            <a:endParaRPr lang="en-US" sz="2000" dirty="0"/>
           </a:p>
         </p:txBody>
       </p:sp>
@@ -4687,24 +6399,27 @@
         </p:nvSpPr>
         <p:spPr>
           <a:xfrm>
-            <a:off x="914400" y="2697480"/>
-            <a:ext cx="4480560" cy="822960"/>
-          </a:xfrm>
-          <a:prstGeom prst="rect">
-            <a:avLst/>
-          </a:prstGeom>
-          <a:noFill/>
-          <a:ln/>
-        </p:spPr>
-        <p:txBody>
-          <a:bodyPr wrap="square" rtlCol="0" anchor="ctr"/>
-          <a:lstStyle/>
-          <a:p>
-            <a:pPr indent="0" marL="0">
-              <a:buNone/>
-            </a:pPr>
-            <a:r>
-              <a:rPr lang="en-US" sz="1900" b="1" dirty="0">
+            <a:off x="868680" y="2377440"/>
+            <a:ext cx="2880360" cy="1051560"/>
+          </a:xfrm>
+          <a:prstGeom prst="rect">
+            <a:avLst/>
+          </a:prstGeom>
+          <a:noFill/>
+          <a:ln/>
+        </p:spPr>
+        <p:txBody>
+          <a:bodyPr wrap="square" rtlCol="0" anchor="ctr"/>
+          <a:lstStyle/>
+          <a:p>
+            <a:pPr indent="0" marL="0">
+              <a:lnSpc>
+                <a:spcPts val="1900"/>
+              </a:lnSpc>
+              <a:buNone/>
+            </a:pPr>
+            <a:r>
+              <a:rPr lang="en-US" sz="1600" b="1" dirty="0">
                 <a:solidFill>
                   <a:srgbClr val="1E2761"/>
                 </a:solidFill>
@@ -4714,7 +6429,7 @@
               </a:rPr>
               <a:t>Did the campaign actually work?</a:t>
             </a:r>
-            <a:endParaRPr lang="en-US" sz="1900" dirty="0"/>
+            <a:endParaRPr lang="en-US" sz="1600" dirty="0"/>
           </a:p>
         </p:txBody>
       </p:sp>
@@ -4726,8 +6441,8 @@
         </p:nvSpPr>
         <p:spPr>
           <a:xfrm>
-            <a:off x="914400" y="3474720"/>
-            <a:ext cx="4480560" cy="2286000"/>
+            <a:off x="868680" y="3520440"/>
+            <a:ext cx="2880360" cy="2331720"/>
           </a:xfrm>
           <a:prstGeom prst="rect">
             <a:avLst/>
@@ -4741,12 +6456,12 @@
           <a:p>
             <a:pPr indent="0" marL="0">
               <a:lnSpc>
-                <a:spcPts val="1900"/>
+                <a:spcPts val="1600"/>
               </a:lnSpc>
               <a:buNone/>
             </a:pPr>
             <a:r>
-              <a:rPr lang="en-US" sz="1300" dirty="0">
+              <a:rPr lang="en-US" sz="1150" dirty="0">
                 <a:solidFill>
                   <a:srgbClr val="1A1A2E"/>
                 </a:solidFill>
@@ -4756,26 +6471,26 @@
               </a:rPr>
               <a:t>Isolate the TRUE incremental foot traffic caused by ad exposure — net of seasonality, trend, and each venue's own baseline pattern.</a:t>
             </a:r>
-            <a:endParaRPr lang="en-US" sz="1300" dirty="0"/>
+            <a:endParaRPr lang="en-US" sz="1150" dirty="0"/>
           </a:p>
           <a:p>
             <a:pPr indent="0" marL="0">
               <a:lnSpc>
-                <a:spcPts val="1900"/>
+                <a:spcPts val="1600"/>
               </a:lnSpc>
               <a:buNone/>
             </a:pPr>
-            <a:endParaRPr lang="en-US" sz="1300" dirty="0"/>
+            <a:endParaRPr lang="en-US" sz="1150" dirty="0"/>
           </a:p>
           <a:p>
             <a:pPr indent="0" marL="0">
               <a:lnSpc>
-                <a:spcPts val="1900"/>
+                <a:spcPts val="1600"/>
               </a:lnSpc>
               <a:buNone/>
             </a:pPr>
             <a:r>
-              <a:rPr lang="en-US" sz="1300" dirty="0">
+              <a:rPr lang="en-US" sz="1150" dirty="0">
                 <a:solidFill>
                   <a:srgbClr val="1A1A2E"/>
                 </a:solidFill>
@@ -4783,9 +6498,9 @@
                 <a:ea typeface="Calibri" pitchFamily="34" charset="-122"/>
                 <a:cs typeface="Calibri" pitchFamily="34" charset="-120"/>
               </a:rPr>
-              <a:t>This is the sell-side differentiator: measurement Atmosphere's go-to-market team can take to market and clients can trust.</a:t>
-            </a:r>
-            <a:endParaRPr lang="en-US" sz="1300" dirty="0"/>
+              <a:t>The sell-side differentiator: measurement Atmosphere's go-to-market team can take to market and clients can trust.</a:t>
+            </a:r>
+            <a:endParaRPr lang="en-US" sz="1150" dirty="0"/>
           </a:p>
         </p:txBody>
       </p:sp>
@@ -4797,12 +6512,12 @@
         </p:nvSpPr>
         <p:spPr>
           <a:xfrm>
-            <a:off x="6126480" y="1554480"/>
-            <a:ext cx="5212080" cy="4480560"/>
+            <a:off x="4343400" y="1371600"/>
+            <a:ext cx="3520440" cy="4709160"/>
           </a:xfrm>
           <a:prstGeom prst="roundRect">
             <a:avLst>
-              <a:gd name="adj" fmla="val 2449"/>
+              <a:gd name="adj" fmla="val 3117"/>
             </a:avLst>
           </a:prstGeom>
           <a:solidFill>
@@ -4826,8 +6541,8 @@
         </p:nvSpPr>
         <p:spPr>
           <a:xfrm>
-            <a:off x="6492240" y="1920240"/>
-            <a:ext cx="594360" cy="594360"/>
+            <a:off x="4663440" y="1691640"/>
+            <a:ext cx="548640" cy="548640"/>
           </a:xfrm>
           <a:prstGeom prst="ellipse">
             <a:avLst/>
@@ -4846,8 +6561,8 @@
         </p:nvSpPr>
         <p:spPr>
           <a:xfrm>
-            <a:off x="6492240" y="1920240"/>
-            <a:ext cx="594360" cy="594360"/>
+            <a:off x="4663440" y="1691640"/>
+            <a:ext cx="548640" cy="548640"/>
           </a:xfrm>
           <a:prstGeom prst="rect">
             <a:avLst/>
@@ -4863,7 +6578,7 @@
               <a:buNone/>
             </a:pPr>
             <a:r>
-              <a:rPr lang="en-US" sz="2200" b="1" dirty="0">
+              <a:rPr lang="en-US" sz="2000" b="1" dirty="0">
                 <a:solidFill>
                   <a:srgbClr val="FFFFFF"/>
                 </a:solidFill>
@@ -4873,7 +6588,7 @@
               </a:rPr>
               <a:t>2</a:t>
             </a:r>
-            <a:endParaRPr lang="en-US" sz="2200" dirty="0"/>
+            <a:endParaRPr lang="en-US" sz="2000" dirty="0"/>
           </a:p>
         </p:txBody>
       </p:sp>
@@ -4885,24 +6600,27 @@
         </p:nvSpPr>
         <p:spPr>
           <a:xfrm>
-            <a:off x="6492240" y="2697480"/>
-            <a:ext cx="4480560" cy="822960"/>
-          </a:xfrm>
-          <a:prstGeom prst="rect">
-            <a:avLst/>
-          </a:prstGeom>
-          <a:noFill/>
-          <a:ln/>
-        </p:spPr>
-        <p:txBody>
-          <a:bodyPr wrap="square" rtlCol="0" anchor="ctr"/>
-          <a:lstStyle/>
-          <a:p>
-            <a:pPr indent="0" marL="0">
-              <a:buNone/>
-            </a:pPr>
-            <a:r>
-              <a:rPr lang="en-US" sz="1900" b="1" dirty="0">
+            <a:off x="4663440" y="2377440"/>
+            <a:ext cx="2880360" cy="1051560"/>
+          </a:xfrm>
+          <a:prstGeom prst="rect">
+            <a:avLst/>
+          </a:prstGeom>
+          <a:noFill/>
+          <a:ln/>
+        </p:spPr>
+        <p:txBody>
+          <a:bodyPr wrap="square" rtlCol="0" anchor="ctr"/>
+          <a:lstStyle/>
+          <a:p>
+            <a:pPr indent="0" marL="0">
+              <a:lnSpc>
+                <a:spcPts val="1900"/>
+              </a:lnSpc>
+              <a:buNone/>
+            </a:pPr>
+            <a:r>
+              <a:rPr lang="en-US" sz="1600" b="1" dirty="0">
                 <a:solidFill>
                   <a:srgbClr val="1E2761"/>
                 </a:solidFill>
@@ -4912,7 +6630,7 @@
               </a:rPr>
               <a:t>How should budget be spent?</a:t>
             </a:r>
-            <a:endParaRPr lang="en-US" sz="1900" dirty="0"/>
+            <a:endParaRPr lang="en-US" sz="1600" dirty="0"/>
           </a:p>
         </p:txBody>
       </p:sp>
@@ -4924,8 +6642,167 @@
         </p:nvSpPr>
         <p:spPr>
           <a:xfrm>
-            <a:off x="6492240" y="3474720"/>
-            <a:ext cx="4480560" cy="2286000"/>
+            <a:off x="4663440" y="3520440"/>
+            <a:ext cx="2880360" cy="2331720"/>
+          </a:xfrm>
+          <a:prstGeom prst="rect">
+            <a:avLst/>
+          </a:prstGeom>
+          <a:noFill/>
+          <a:ln/>
+        </p:spPr>
+        <p:txBody>
+          <a:bodyPr wrap="square" rtlCol="0" anchor="ctr"/>
+          <a:lstStyle/>
+          <a:p>
+            <a:pPr indent="0" marL="0">
+              <a:lnSpc>
+                <a:spcPts val="1600"/>
+              </a:lnSpc>
+              <a:buNone/>
+            </a:pPr>
+            <a:r>
+              <a:rPr lang="en-US" sz="1150" dirty="0">
+                <a:solidFill>
+                  <a:srgbClr val="1A1A2E"/>
+                </a:solidFill>
+                <a:latin typeface="Calibri" pitchFamily="34" charset="0"/>
+                <a:ea typeface="Calibri" pitchFamily="34" charset="-122"/>
+                <a:cs typeface="Calibri" pitchFamily="34" charset="-120"/>
+              </a:rPr>
+              <a:t>Given a fixed weekly budget, how should it split across restaurants, gyms, bars, and waiting rooms — accounting for each venue type's own diminishing-returns curve?</a:t>
+            </a:r>
+            <a:endParaRPr lang="en-US" sz="1150" dirty="0"/>
+          </a:p>
+          <a:p>
+            <a:pPr indent="0" marL="0">
+              <a:lnSpc>
+                <a:spcPts val="1600"/>
+              </a:lnSpc>
+              <a:buNone/>
+            </a:pPr>
+            <a:endParaRPr lang="en-US" sz="1150" dirty="0"/>
+          </a:p>
+          <a:p>
+            <a:pPr indent="0" marL="0">
+              <a:lnSpc>
+                <a:spcPts val="1600"/>
+              </a:lnSpc>
+              <a:buNone/>
+            </a:pPr>
+            <a:r>
+              <a:rPr lang="en-US" sz="1150" dirty="0">
+                <a:solidFill>
+                  <a:srgbClr val="1A1A2E"/>
+                </a:solidFill>
+                <a:latin typeface="Calibri" pitchFamily="34" charset="0"/>
+                <a:ea typeface="Calibri" pitchFamily="34" charset="-122"/>
+                <a:cs typeface="Calibri" pitchFamily="34" charset="-120"/>
+              </a:rPr>
+              <a:t>The media-planning / pricing question advertisers ask before they commit spend.</a:t>
+            </a:r>
+            <a:endParaRPr lang="en-US" sz="1150" dirty="0"/>
+          </a:p>
+        </p:txBody>
+      </p:sp>
+      <p:sp>
+        <p:nvSpPr>
+          <p:cNvPr id="13" name="Shape 11"/>
+          <p:cNvSpPr/>
+          <p:nvPr/>
+        </p:nvSpPr>
+        <p:spPr>
+          <a:xfrm>
+            <a:off x="8138160" y="1371600"/>
+            <a:ext cx="3520440" cy="4709160"/>
+          </a:xfrm>
+          <a:prstGeom prst="roundRect">
+            <a:avLst>
+              <a:gd name="adj" fmla="val 3117"/>
+            </a:avLst>
+          </a:prstGeom>
+          <a:solidFill>
+            <a:srgbClr val="F5F7FC"/>
+          </a:solidFill>
+          <a:ln/>
+          <a:effectLst>
+            <a:outerShdw sx="100000" sy="100000" kx="0" ky="0" algn="bl" rotWithShape="0" blurRad="76200" dist="38100" dir="5400000">
+              <a:srgbClr val="888888">
+                <a:alpha val="25000"/>
+              </a:srgbClr>
+            </a:outerShdw>
+          </a:effectLst>
+        </p:spPr>
+      </p:sp>
+      <p:sp>
+        <p:nvSpPr>
+          <p:cNvPr id="14" name="Shape 12"/>
+          <p:cNvSpPr/>
+          <p:nvPr/>
+        </p:nvSpPr>
+        <p:spPr>
+          <a:xfrm>
+            <a:off x="8458200" y="1691640"/>
+            <a:ext cx="548640" cy="548640"/>
+          </a:xfrm>
+          <a:prstGeom prst="ellipse">
+            <a:avLst/>
+          </a:prstGeom>
+          <a:solidFill>
+            <a:srgbClr val="1E2761"/>
+          </a:solidFill>
+          <a:ln/>
+        </p:spPr>
+      </p:sp>
+      <p:sp>
+        <p:nvSpPr>
+          <p:cNvPr id="15" name="Text 13"/>
+          <p:cNvSpPr/>
+          <p:nvPr/>
+        </p:nvSpPr>
+        <p:spPr>
+          <a:xfrm>
+            <a:off x="8458200" y="1691640"/>
+            <a:ext cx="548640" cy="548640"/>
+          </a:xfrm>
+          <a:prstGeom prst="rect">
+            <a:avLst/>
+          </a:prstGeom>
+          <a:noFill/>
+          <a:ln/>
+        </p:spPr>
+        <p:txBody>
+          <a:bodyPr wrap="square" rtlCol="0" anchor="ctr"/>
+          <a:lstStyle/>
+          <a:p>
+            <a:pPr algn="ctr" indent="0" marL="0">
+              <a:buNone/>
+            </a:pPr>
+            <a:r>
+              <a:rPr lang="en-US" sz="2000" b="1" dirty="0">
+                <a:solidFill>
+                  <a:srgbClr val="FFFFFF"/>
+                </a:solidFill>
+                <a:latin typeface="Calibri" pitchFamily="34" charset="0"/>
+                <a:ea typeface="Calibri" pitchFamily="34" charset="-122"/>
+                <a:cs typeface="Calibri" pitchFamily="34" charset="-120"/>
+              </a:rPr>
+              <a:t>3</a:t>
+            </a:r>
+            <a:endParaRPr lang="en-US" sz="2000" dirty="0"/>
+          </a:p>
+        </p:txBody>
+      </p:sp>
+      <p:sp>
+        <p:nvSpPr>
+          <p:cNvPr id="16" name="Text 14"/>
+          <p:cNvSpPr/>
+          <p:nvPr/>
+        </p:nvSpPr>
+        <p:spPr>
+          <a:xfrm>
+            <a:off x="8458200" y="2377440"/>
+            <a:ext cx="2880360" cy="1051560"/>
           </a:xfrm>
           <a:prstGeom prst="rect">
             <a:avLst/>
@@ -4944,7 +6821,49 @@
               <a:buNone/>
             </a:pPr>
             <a:r>
-              <a:rPr lang="en-US" sz="1300" dirty="0">
+              <a:rPr lang="en-US" sz="1600" b="1" dirty="0">
+                <a:solidFill>
+                  <a:srgbClr val="1E2761"/>
+                </a:solidFill>
+                <a:latin typeface="Cambria" pitchFamily="34" charset="0"/>
+                <a:ea typeface="Cambria" pitchFamily="34" charset="-122"/>
+                <a:cs typeface="Cambria" pitchFamily="34" charset="-120"/>
+              </a:rPr>
+              <a:t>Where's Atmosphere's own revenue upside?</a:t>
+            </a:r>
+            <a:endParaRPr lang="en-US" sz="1600" dirty="0"/>
+          </a:p>
+        </p:txBody>
+      </p:sp>
+      <p:sp>
+        <p:nvSpPr>
+          <p:cNvPr id="17" name="Text 15"/>
+          <p:cNvSpPr/>
+          <p:nvPr/>
+        </p:nvSpPr>
+        <p:spPr>
+          <a:xfrm>
+            <a:off x="8458200" y="3520440"/>
+            <a:ext cx="2880360" cy="2331720"/>
+          </a:xfrm>
+          <a:prstGeom prst="rect">
+            <a:avLst/>
+          </a:prstGeom>
+          <a:noFill/>
+          <a:ln/>
+        </p:spPr>
+        <p:txBody>
+          <a:bodyPr wrap="square" rtlCol="0" anchor="ctr"/>
+          <a:lstStyle/>
+          <a:p>
+            <a:pPr indent="0" marL="0">
+              <a:lnSpc>
+                <a:spcPts val="1600"/>
+              </a:lnSpc>
+              <a:buNone/>
+            </a:pPr>
+            <a:r>
+              <a:rPr lang="en-US" sz="1150" dirty="0">
                 <a:solidFill>
                   <a:srgbClr val="1A1A2E"/>
                 </a:solidFill>
@@ -4952,28 +6871,28 @@
                 <a:ea typeface="Calibri" pitchFamily="34" charset="-122"/>
                 <a:cs typeface="Calibri" pitchFamily="34" charset="-120"/>
               </a:rPr>
-              <a:t>Given a fixed weekly budget, how should it be split across restaurants, gyms, bars, and waiting rooms — accounting for each venue type's own diminishing-returns curve?</a:t>
-            </a:r>
-            <a:endParaRPr lang="en-US" sz="1300" dirty="0"/>
+              <a:t>Which existing venues are under-monetized relative to their own traffic and quality — and which prospective venues are worth prioritizing for network expansion?</a:t>
+            </a:r>
+            <a:endParaRPr lang="en-US" sz="1150" dirty="0"/>
           </a:p>
           <a:p>
             <a:pPr indent="0" marL="0">
               <a:lnSpc>
-                <a:spcPts val="1900"/>
+                <a:spcPts val="1600"/>
               </a:lnSpc>
               <a:buNone/>
             </a:pPr>
-            <a:endParaRPr lang="en-US" sz="1300" dirty="0"/>
+            <a:endParaRPr lang="en-US" sz="1150" dirty="0"/>
           </a:p>
           <a:p>
             <a:pPr indent="0" marL="0">
               <a:lnSpc>
-                <a:spcPts val="1900"/>
+                <a:spcPts val="1600"/>
               </a:lnSpc>
               <a:buNone/>
             </a:pPr>
             <a:r>
-              <a:rPr lang="en-US" sz="1300" dirty="0">
+              <a:rPr lang="en-US" sz="1150" dirty="0">
                 <a:solidFill>
                   <a:srgbClr val="1A1A2E"/>
                 </a:solidFill>
@@ -4981,15 +6900,15 @@
                 <a:ea typeface="Calibri" pitchFamily="34" charset="-122"/>
                 <a:cs typeface="Calibri" pitchFamily="34" charset="-120"/>
               </a:rPr>
-              <a:t>This is the media-planning / pricing question advertisers ask before they commit spend.</a:t>
-            </a:r>
-            <a:endParaRPr lang="en-US" sz="1300" dirty="0"/>
-          </a:p>
-        </p:txBody>
-      </p:sp>
-      <p:sp>
-        <p:nvSpPr>
-          <p:cNvPr id="13" name="Text 11"/>
+              <a:t>Phase 2: Atmosphere's own buy-side question, not the advertiser's.</a:t>
+            </a:r>
+            <a:endParaRPr lang="en-US" sz="1150" dirty="0"/>
+          </a:p>
+        </p:txBody>
+      </p:sp>
+      <p:sp>
+        <p:nvSpPr>
+          <p:cNvPr id="18" name="Text 16"/>
           <p:cNvSpPr/>
           <p:nvPr/>
         </p:nvSpPr>
@@ -5028,7 +6947,7 @@
       </p:sp>
       <p:sp>
         <p:nvSpPr>
-          <p:cNvPr id="14" name="Text 12"/>
+          <p:cNvPr id="19" name="Text 17"/>
           <p:cNvSpPr/>
           <p:nvPr/>
         </p:nvSpPr>
@@ -8802,7 +10721,7 @@
                 <a:ea typeface="Cambria" pitchFamily="34" charset="-122"/>
                 <a:cs typeface="Cambria" pitchFamily="34" charset="-120"/>
               </a:rPr>
-              <a:t>Next: the other side of the business</a:t>
+              <a:t>The other side of the business</a:t>
             </a:r>
             <a:endParaRPr lang="en-US" sz="2800" dirty="0"/>
           </a:p>
@@ -8841,7 +10760,7 @@
                 <a:ea typeface="Calibri" pitchFamily="34" charset="-122"/>
                 <a:cs typeface="Calibri" pitchFamily="34" charset="-120"/>
               </a:rPr>
-              <a:t>Phase 1 (built) answers the advertising side. Phase 2 (designed) answers the venue-network side.</a:t>
+              <a:t>Phase 1 answers the advertising side. Phase 2 answers the venue-network side — both built, one connected system.</a:t>
             </a:r>
             <a:endParaRPr lang="en-US" sz="1350" dirty="0"/>
           </a:p>
@@ -8878,23 +10797,23 @@
         <p:spPr>
           <a:xfrm>
             <a:off x="914400" y="1965960"/>
-            <a:ext cx="4480560" cy="457200"/>
-          </a:xfrm>
-          <a:prstGeom prst="rect">
-            <a:avLst/>
-          </a:prstGeom>
-          <a:noFill/>
-          <a:ln/>
-        </p:spPr>
-        <p:txBody>
-          <a:bodyPr wrap="square" rtlCol="0" anchor="ctr"/>
-          <a:lstStyle/>
-          <a:p>
-            <a:pPr indent="0" marL="0">
-              <a:buNone/>
-            </a:pPr>
-            <a:r>
-              <a:rPr lang="en-US" sz="1700" b="1" dirty="0">
+            <a:ext cx="4480560" cy="594360"/>
+          </a:xfrm>
+          <a:prstGeom prst="rect">
+            <a:avLst/>
+          </a:prstGeom>
+          <a:noFill/>
+          <a:ln/>
+        </p:spPr>
+        <p:txBody>
+          <a:bodyPr wrap="square" rtlCol="0" anchor="ctr"/>
+          <a:lstStyle/>
+          <a:p>
+            <a:pPr indent="0" marL="0">
+              <a:buNone/>
+            </a:pPr>
+            <a:r>
+              <a:rPr lang="en-US" sz="1600" b="1" dirty="0">
                 <a:solidFill>
                   <a:srgbClr val="FFFFFF"/>
                 </a:solidFill>
@@ -8902,9 +10821,9 @@
                 <a:ea typeface="Cambria" pitchFamily="34" charset="-122"/>
                 <a:cs typeface="Cambria" pitchFamily="34" charset="-120"/>
               </a:rPr>
-              <a:t>Phase 1 — Built</a:t>
-            </a:r>
-            <a:endParaRPr lang="en-US" sz="1700" dirty="0"/>
+              <a:t>Phase 1 — Advertising incrementality</a:t>
+            </a:r>
+            <a:endParaRPr lang="en-US" sz="1600" dirty="0"/>
           </a:p>
         </p:txBody>
       </p:sp>
@@ -8916,7 +10835,7 @@
         </p:nvSpPr>
         <p:spPr>
           <a:xfrm>
-            <a:off x="914400" y="2606040"/>
+            <a:off x="914400" y="2743200"/>
             <a:ext cx="4480560" cy="594360"/>
           </a:xfrm>
           <a:prstGeom prst="rect">
@@ -8931,12 +10850,12 @@
           <a:p>
             <a:pPr indent="0" marL="0">
               <a:lnSpc>
-                <a:spcPts val="1600"/>
+                <a:spcPts val="1500"/>
               </a:lnSpc>
               <a:buNone/>
             </a:pPr>
             <a:r>
-              <a:rPr lang="en-US" sz="1250" dirty="0">
+              <a:rPr lang="en-US" sz="1200" dirty="0">
                 <a:solidFill>
                   <a:srgbClr val="FFFFFF"/>
                 </a:solidFill>
@@ -8946,7 +10865,7 @@
               </a:rPr>
               <a:t>• Prove and price advertising incrementality</a:t>
             </a:r>
-            <a:endParaRPr lang="en-US" sz="1250" dirty="0"/>
+            <a:endParaRPr lang="en-US" sz="1200" dirty="0"/>
           </a:p>
         </p:txBody>
       </p:sp>
@@ -8958,7 +10877,7 @@
         </p:nvSpPr>
         <p:spPr>
           <a:xfrm>
-            <a:off x="914400" y="3291840"/>
+            <a:off x="914400" y="3401568"/>
             <a:ext cx="4480560" cy="594360"/>
           </a:xfrm>
           <a:prstGeom prst="rect">
@@ -8973,12 +10892,12 @@
           <a:p>
             <a:pPr indent="0" marL="0">
               <a:lnSpc>
-                <a:spcPts val="1600"/>
+                <a:spcPts val="1500"/>
               </a:lnSpc>
               <a:buNone/>
             </a:pPr>
             <a:r>
-              <a:rPr lang="en-US" sz="1250" dirty="0">
+              <a:rPr lang="en-US" sz="1200" dirty="0">
                 <a:solidFill>
                   <a:srgbClr val="FFFFFF"/>
                 </a:solidFill>
@@ -8988,7 +10907,7 @@
               </a:rPr>
               <a:t>• Feeds go-to-market: sell-side differentiator, client trust</a:t>
             </a:r>
-            <a:endParaRPr lang="en-US" sz="1250" dirty="0"/>
+            <a:endParaRPr lang="en-US" sz="1200" dirty="0"/>
           </a:p>
         </p:txBody>
       </p:sp>
@@ -9000,7 +10919,7 @@
         </p:nvSpPr>
         <p:spPr>
           <a:xfrm>
-            <a:off x="914400" y="3977640"/>
+            <a:off x="914400" y="4059936"/>
             <a:ext cx="4480560" cy="594360"/>
           </a:xfrm>
           <a:prstGeom prst="rect">
@@ -9015,12 +10934,12 @@
           <a:p>
             <a:pPr indent="0" marL="0">
               <a:lnSpc>
-                <a:spcPts val="1600"/>
+                <a:spcPts val="1500"/>
               </a:lnSpc>
               <a:buNone/>
             </a:pPr>
             <a:r>
-              <a:rPr lang="en-US" sz="1250" dirty="0">
+              <a:rPr lang="en-US" sz="1200" dirty="0">
                 <a:solidFill>
                   <a:srgbClr val="FFFFFF"/>
                 </a:solidFill>
@@ -9030,7 +10949,7 @@
               </a:rPr>
               <a:t>• RCT + synthetic control + calibrated MMM + budget DP</a:t>
             </a:r>
-            <a:endParaRPr lang="en-US" sz="1250" dirty="0"/>
+            <a:endParaRPr lang="en-US" sz="1200" dirty="0"/>
           </a:p>
         </p:txBody>
       </p:sp>
@@ -9057,12 +10976,12 @@
           <a:p>
             <a:pPr indent="0" marL="0">
               <a:lnSpc>
-                <a:spcPts val="1400"/>
+                <a:spcPts val="1300"/>
               </a:lnSpc>
               <a:buNone/>
             </a:pPr>
             <a:r>
-              <a:rPr lang="en-US" sz="1050" i="1" dirty="0">
+              <a:rPr lang="en-US" sz="1000" i="1" dirty="0">
                 <a:solidFill>
                   <a:srgbClr val="CADCFC"/>
                 </a:solidFill>
@@ -9070,9 +10989,9 @@
                 <a:ea typeface="Calibri" pitchFamily="34" charset="-122"/>
                 <a:cs typeface="Calibri" pitchFamily="34" charset="-120"/>
               </a:rPr>
-              <a:t>Feeds Phase 2 as a validated causal-value input, not a separate silo.</a:t>
-            </a:r>
-            <a:endParaRPr lang="en-US" sz="1050" dirty="0"/>
+              <a:t>Feeds Phase 2 as a validated causal-value input (calibrated per-exposure lift), not a separate silo.</a:t>
+            </a:r>
+            <a:endParaRPr lang="en-US" sz="1000" dirty="0"/>
           </a:p>
         </p:txBody>
       </p:sp>
@@ -9107,23 +11026,23 @@
         <p:spPr>
           <a:xfrm>
             <a:off x="6583680" y="1965960"/>
-            <a:ext cx="4480560" cy="457200"/>
-          </a:xfrm>
-          <a:prstGeom prst="rect">
-            <a:avLst/>
-          </a:prstGeom>
-          <a:noFill/>
-          <a:ln/>
-        </p:spPr>
-        <p:txBody>
-          <a:bodyPr wrap="square" rtlCol="0" anchor="ctr"/>
-          <a:lstStyle/>
-          <a:p>
-            <a:pPr indent="0" marL="0">
-              <a:buNone/>
-            </a:pPr>
-            <a:r>
-              <a:rPr lang="en-US" sz="1700" b="1" dirty="0">
+            <a:ext cx="4480560" cy="594360"/>
+          </a:xfrm>
+          <a:prstGeom prst="rect">
+            <a:avLst/>
+          </a:prstGeom>
+          <a:noFill/>
+          <a:ln/>
+        </p:spPr>
+        <p:txBody>
+          <a:bodyPr wrap="square" rtlCol="0" anchor="ctr"/>
+          <a:lstStyle/>
+          <a:p>
+            <a:pPr indent="0" marL="0">
+              <a:buNone/>
+            </a:pPr>
+            <a:r>
+              <a:rPr lang="en-US" sz="1600" b="1" dirty="0">
                 <a:solidFill>
                   <a:srgbClr val="FFFFFF"/>
                 </a:solidFill>
@@ -9131,9 +11050,9 @@
                 <a:ea typeface="Cambria" pitchFamily="34" charset="-122"/>
                 <a:cs typeface="Cambria" pitchFamily="34" charset="-120"/>
               </a:rPr>
-              <a:t>Phase 2 — Designed</a:t>
-            </a:r>
-            <a:endParaRPr lang="en-US" sz="1700" dirty="0"/>
+              <a:t>Phase 2 — Venue economics</a:t>
+            </a:r>
+            <a:endParaRPr lang="en-US" sz="1600" dirty="0"/>
           </a:p>
         </p:txBody>
       </p:sp>
@@ -9145,7 +11064,7 @@
         </p:nvSpPr>
         <p:spPr>
           <a:xfrm>
-            <a:off x="6583680" y="2606040"/>
+            <a:off x="6583680" y="2743200"/>
             <a:ext cx="4480560" cy="594360"/>
           </a:xfrm>
           <a:prstGeom prst="rect">
@@ -9160,12 +11079,12 @@
           <a:p>
             <a:pPr indent="0" marL="0">
               <a:lnSpc>
-                <a:spcPts val="1600"/>
+                <a:spcPts val="1500"/>
               </a:lnSpc>
               <a:buNone/>
             </a:pPr>
             <a:r>
-              <a:rPr lang="en-US" sz="1250" dirty="0">
+              <a:rPr lang="en-US" sz="1200" dirty="0">
                 <a:solidFill>
                   <a:srgbClr val="FFFFFF"/>
                 </a:solidFill>
@@ -9173,9 +11092,9 @@
                 <a:ea typeface="Calibri" pitchFamily="34" charset="-122"/>
                 <a:cs typeface="Calibri" pitchFamily="34" charset="-120"/>
               </a:rPr>
-              <a:t>• Predict a venue's intrinsic ad-revenue potential</a:t>
-            </a:r>
-            <a:endParaRPr lang="en-US" sz="1250" dirty="0"/>
+              <a:t>• Predict a venue's realized ad-revenue from its characteristics</a:t>
+            </a:r>
+            <a:endParaRPr lang="en-US" sz="1200" dirty="0"/>
           </a:p>
         </p:txBody>
       </p:sp>
@@ -9187,7 +11106,7 @@
         </p:nvSpPr>
         <p:spPr>
           <a:xfrm>
-            <a:off x="6583680" y="3291840"/>
+            <a:off x="6583680" y="3401568"/>
             <a:ext cx="4480560" cy="594360"/>
           </a:xfrm>
           <a:prstGeom prst="rect">
@@ -9202,12 +11121,12 @@
           <a:p>
             <a:pPr indent="0" marL="0">
               <a:lnSpc>
-                <a:spcPts val="1600"/>
+                <a:spcPts val="1500"/>
               </a:lnSpc>
               <a:buNone/>
             </a:pPr>
             <a:r>
-              <a:rPr lang="en-US" sz="1250" dirty="0">
+              <a:rPr lang="en-US" sz="1200" dirty="0">
                 <a:solidFill>
                   <a:srgbClr val="FFFFFF"/>
                 </a:solidFill>
@@ -9215,9 +11134,9 @@
                 <a:ea typeface="Calibri" pitchFamily="34" charset="-122"/>
                 <a:cs typeface="Calibri" pitchFamily="34" charset="-120"/>
               </a:rPr>
-              <a:t>• Prioritize prospective venues for acquisition</a:t>
-            </a:r>
-            <a:endParaRPr lang="en-US" sz="1250" dirty="0"/>
+              <a:t>• Flag under-monetized existing venues for sales/ops follow-up</a:t>
+            </a:r>
+            <a:endParaRPr lang="en-US" sz="1200" dirty="0"/>
           </a:p>
         </p:txBody>
       </p:sp>
@@ -9229,7 +11148,7 @@
         </p:nvSpPr>
         <p:spPr>
           <a:xfrm>
-            <a:off x="6583680" y="3977640"/>
+            <a:off x="6583680" y="4059936"/>
             <a:ext cx="4480560" cy="594360"/>
           </a:xfrm>
           <a:prstGeom prst="rect">
@@ -9244,12 +11163,12 @@
           <a:p>
             <a:pPr indent="0" marL="0">
               <a:lnSpc>
-                <a:spcPts val="1600"/>
+                <a:spcPts val="1500"/>
               </a:lnSpc>
               <a:buNone/>
             </a:pPr>
             <a:r>
-              <a:rPr lang="en-US" sz="1250" dirty="0">
+              <a:rPr lang="en-US" sz="1200" dirty="0">
                 <a:solidFill>
                   <a:srgbClr val="FFFFFF"/>
                 </a:solidFill>
@@ -9257,9 +11176,9 @@
                 <a:ea typeface="Calibri" pitchFamily="34" charset="-122"/>
                 <a:cs typeface="Calibri" pitchFamily="34" charset="-120"/>
               </a:rPr>
-              <a:t>• Flag under-monetized existing venues</a:t>
-            </a:r>
-            <a:endParaRPr lang="en-US" sz="1250" dirty="0"/>
+              <a:t>• Rank prospective venues for expansion priority</a:t>
+            </a:r>
+            <a:endParaRPr lang="en-US" sz="1200" dirty="0"/>
           </a:p>
         </p:txBody>
       </p:sp>
@@ -9271,7 +11190,7 @@
         </p:nvSpPr>
         <p:spPr>
           <a:xfrm>
-            <a:off x="6583680" y="4663440"/>
+            <a:off x="6583680" y="4718304"/>
             <a:ext cx="4480560" cy="594360"/>
           </a:xfrm>
           <a:prstGeom prst="rect">
@@ -9286,12 +11205,12 @@
           <a:p>
             <a:pPr indent="0" marL="0">
               <a:lnSpc>
-                <a:spcPts val="1600"/>
+                <a:spcPts val="1500"/>
               </a:lnSpc>
               <a:buNone/>
             </a:pPr>
             <a:r>
-              <a:rPr lang="en-US" sz="1250" dirty="0">
+              <a:rPr lang="en-US" sz="1200" dirty="0">
                 <a:solidFill>
                   <a:srgbClr val="FFFFFF"/>
                 </a:solidFill>
@@ -9299,9 +11218,9 @@
                 <a:ea typeface="Calibri" pitchFamily="34" charset="-122"/>
                 <a:cs typeface="Calibri" pitchFamily="34" charset="-120"/>
               </a:rPr>
-              <a:t>• GBM model, calibrated, with honest out-of-sample evaluation</a:t>
-            </a:r>
-            <a:endParaRPr lang="en-US" sz="1250" dirty="0"/>
+              <a:t>• Gradient-boosted trees, honest out-of-fold evaluation</a:t>
+            </a:r>
+            <a:endParaRPr lang="en-US" sz="1200" dirty="0"/>
           </a:p>
         </p:txBody>
       </p:sp>
@@ -9338,7 +11257,7 @@
                 <a:ea typeface="Calibri" pitchFamily="34" charset="-122"/>
                 <a:cs typeface="Calibri" pitchFamily="34" charset="-120"/>
               </a:rPr>
-              <a:t>“Smarter on both sides of the business” — the venue-side model shares its data foundation and its causal-value inputs with Phase 1, rather than being a disconnected second project.</a:t>
+              <a:t>“Smarter on both sides of the business” — the venue-side model shares its data foundation and Phase 1's causal-value input, rather than being a disconnected second project. Results on the next slide.</a:t>
             </a:r>
             <a:endParaRPr lang="en-US" sz="1150" dirty="0"/>
           </a:p>

--- a/deck/AtmosphereTV_DOOH_Measurement.pptx
+++ b/deck/AtmosphereTV_DOOH_Measurement.pptx
@@ -3882,7 +3882,7 @@
                 <a:ea typeface="Cambria" pitchFamily="34" charset="-122"/>
                 <a:cs typeface="Cambria" pitchFamily="34" charset="-120"/>
               </a:rPr>
-              <a:t>Phase 2: predicting venue ad-revenue, honestly</a:t>
+              <a:t>Predicting venue ad-revenue, honestly</a:t>
             </a:r>
             <a:endParaRPr lang="en-US" sz="2500" dirty="0"/>
           </a:p>
@@ -3921,7 +3921,7 @@
                 <a:ea typeface="Calibri" pitchFamily="34" charset="-122"/>
                 <a:cs typeface="Calibri" pitchFamily="34" charset="-120"/>
               </a:rPr>
-              <a:t>Gradient-boosted trees on observable venue characteristics + Phase 1's calibrated per-exposure lift as a feature.</a:t>
+              <a:t>Gradient-boosted trees on observable venue characteristics + the calibrated per-exposure lift as a feature.</a:t>
             </a:r>
             <a:endParaRPr lang="en-US" sz="1250" dirty="0"/>
           </a:p>
@@ -5081,7 +5081,7 @@
                 <a:ea typeface="Calibri" pitchFamily="34" charset="-122"/>
                 <a:cs typeface="Calibri" pitchFamily="34" charset="-120"/>
               </a:rPr>
-              <a:t>Flags come from 5-fold out-of-fold predictions, never a model scoring the venue it was trained on. Phase 1's calibrated-lift feature carries near-zero importance — honest, since it's constant within venue_type once venue_type itself is a feature.</a:t>
+              <a:t>Flags come from 5-fold out-of-fold predictions, never a model scoring the venue it was trained on. The calibrated-lift feature carries near-zero importance — honest, since it's constant within venue_type once venue_type itself is a feature.</a:t>
             </a:r>
             <a:endParaRPr lang="en-US" sz="1000" dirty="0"/>
           </a:p>
@@ -5120,7 +5120,7 @@
                 <a:ea typeface="Calibri" pitchFamily="34" charset="-122"/>
                 <a:cs typeface="Calibri" pitchFamily="34" charset="-120"/>
               </a:rPr>
-              <a:t>Venue economics — Phase 2</a:t>
+              <a:t>Venue economics</a:t>
             </a:r>
             <a:endParaRPr lang="en-US" sz="900" dirty="0"/>
           </a:p>
@@ -5331,7 +5331,7 @@
                 <a:ea typeface="Calibri" pitchFamily="34" charset="-122"/>
                 <a:cs typeface="Calibri" pitchFamily="34" charset="-120"/>
               </a:rPr>
-              <a:t>All figures — Phase 1 and Phase 2 — are synthetic, with a known injected ground-truth effect used specifically to validate that each method recovers it before trusting it conceptually. Not a claim about any real company's data.</a:t>
+              <a:t>Every figure in this project is synthetic, with a known injected ground-truth effect used specifically to validate that each method recovers it before trusting it conceptually. Not a claim about any real company's data.</a:t>
             </a:r>
             <a:endParaRPr lang="en-US" sz="1200" dirty="0"/>
           </a:p>
@@ -5634,7 +5634,7 @@
                 <a:ea typeface="Calibri" pitchFamily="34" charset="-122"/>
                 <a:cs typeface="Calibri" pitchFamily="34" charset="-120"/>
               </a:rPr>
-              <a:t>The $/frequency-unit figures behind the budget allocator, and the ad-rate-card behind Phase 2's revenue model, are illustrative, editable placeholders — in production these come from Atmosphere's own rate card by venue type and daypart.</a:t>
+              <a:t>The $/frequency-unit figures behind the budget allocator, and the ad-rate-card behind the venue-revenue model, are illustrative, editable placeholders — in production these come from Atmosphere's own rate card by venue type and daypart.</a:t>
             </a:r>
             <a:endParaRPr lang="en-US" sz="1200" dirty="0"/>
           </a:p>
@@ -6187,7 +6187,7 @@
                 <a:ea typeface="Calibri" pitchFamily="34" charset="-122"/>
                 <a:cs typeface="Calibri" pitchFamily="34" charset="-120"/>
               </a:rPr>
-              <a:t>One connected system, not two projects: Phase 2's venue-revenue model reuses Phase 1's causal-value input, recovers latent ground truth at 0.95 correlation, and cleanly separates market-level effects from venue-level execution gaps.</a:t>
+              <a:t>One connected system, not two projects: the venue-revenue model reuses the causal pipeline's per-exposure value as an input, recovers latent ground truth at 0.95 correlation, and cleanly separates market-level effects from venue-level execution gaps.</a:t>
             </a:r>
             <a:endParaRPr lang="en-US" sz="1450" dirty="0"/>
           </a:p>
@@ -6900,7 +6900,7 @@
                 <a:ea typeface="Calibri" pitchFamily="34" charset="-122"/>
                 <a:cs typeface="Calibri" pitchFamily="34" charset="-120"/>
               </a:rPr>
-              <a:t>Phase 2: Atmosphere's own buy-side question, not the advertiser's.</a:t>
+              <a:t>Atmosphere's own buy-side question, not the advertiser's.</a:t>
             </a:r>
             <a:endParaRPr lang="en-US" sz="1150" dirty="0"/>
           </a:p>
@@ -10760,7 +10760,7 @@
                 <a:ea typeface="Calibri" pitchFamily="34" charset="-122"/>
                 <a:cs typeface="Calibri" pitchFamily="34" charset="-120"/>
               </a:rPr>
-              <a:t>Phase 1 answers the advertising side. Phase 2 answers the venue-network side — both built, one connected system.</a:t>
+              <a:t>One system answers the advertising side. The same system answers the venue-network side too.</a:t>
             </a:r>
             <a:endParaRPr lang="en-US" sz="1350" dirty="0"/>
           </a:p>
@@ -10821,7 +10821,7 @@
                 <a:ea typeface="Cambria" pitchFamily="34" charset="-122"/>
                 <a:cs typeface="Cambria" pitchFamily="34" charset="-120"/>
               </a:rPr>
-              <a:t>Phase 1 — Advertising incrementality</a:t>
+              <a:t>Advertising incrementality</a:t>
             </a:r>
             <a:endParaRPr lang="en-US" sz="1600" dirty="0"/>
           </a:p>
@@ -10989,7 +10989,7 @@
                 <a:ea typeface="Calibri" pitchFamily="34" charset="-122"/>
                 <a:cs typeface="Calibri" pitchFamily="34" charset="-120"/>
               </a:rPr>
-              <a:t>Feeds Phase 2 as a validated causal-value input (calibrated per-exposure lift), not a separate silo.</a:t>
+              <a:t>Feeds the venue-economics model as a validated causal-value input (calibrated per-exposure lift), not a separate silo.</a:t>
             </a:r>
             <a:endParaRPr lang="en-US" sz="1000" dirty="0"/>
           </a:p>
@@ -11050,7 +11050,7 @@
                 <a:ea typeface="Cambria" pitchFamily="34" charset="-122"/>
                 <a:cs typeface="Cambria" pitchFamily="34" charset="-120"/>
               </a:rPr>
-              <a:t>Phase 2 — Venue economics</a:t>
+              <a:t>Venue economics</a:t>
             </a:r>
             <a:endParaRPr lang="en-US" sz="1600" dirty="0"/>
           </a:p>
@@ -11257,7 +11257,7 @@
                 <a:ea typeface="Calibri" pitchFamily="34" charset="-122"/>
                 <a:cs typeface="Calibri" pitchFamily="34" charset="-120"/>
               </a:rPr>
-              <a:t>“Smarter on both sides of the business” — the venue-side model shares its data foundation and Phase 1's causal-value input, rather than being a disconnected second project. Results on the next slide.</a:t>
+              <a:t>“Smarter on both sides of the business” — the venue-side model shares its data foundation and causal-value input with the advertising side, rather than being a disconnected second project. Results on the next slide.</a:t>
             </a:r>
             <a:endParaRPr lang="en-US" sz="1150" dirty="0"/>
           </a:p>

--- a/deck/AtmosphereTV_DOOH_Measurement.pptx
+++ b/deck/AtmosphereTV_DOOH_Measurement.pptx
@@ -7404,7 +7404,7 @@
         <p:spPr>
           <a:xfrm>
             <a:off x="6263640" y="2880360"/>
-            <a:ext cx="5394960" cy="274320"/>
+            <a:ext cx="5394960" cy="256032"/>
           </a:xfrm>
           <a:prstGeom prst="rect">
             <a:avLst/>
@@ -7442,8 +7442,8 @@
         </p:nvSpPr>
         <p:spPr>
           <a:xfrm>
-            <a:off x="6263640" y="3209544"/>
-            <a:ext cx="3657600" cy="274320"/>
+            <a:off x="6263640" y="3172968"/>
+            <a:ext cx="3977640" cy="219456"/>
           </a:xfrm>
           <a:prstGeom prst="rect">
             <a:avLst/>
@@ -7481,8 +7481,8 @@
         </p:nvSpPr>
         <p:spPr>
           <a:xfrm>
-            <a:off x="9966960" y="3209544"/>
-            <a:ext cx="1691640" cy="274320"/>
+            <a:off x="10241280" y="3172968"/>
+            <a:ext cx="1417320" cy="219456"/>
           </a:xfrm>
           <a:prstGeom prst="rect">
             <a:avLst/>
@@ -7520,8 +7520,47 @@
         </p:nvSpPr>
         <p:spPr>
           <a:xfrm>
-            <a:off x="6263640" y="3502152"/>
-            <a:ext cx="3657600" cy="274320"/>
+            <a:off x="6263640" y="3374136"/>
+            <a:ext cx="5394960" cy="201168"/>
+          </a:xfrm>
+          <a:prstGeom prst="rect">
+            <a:avLst/>
+          </a:prstGeom>
+          <a:noFill/>
+          <a:ln/>
+        </p:spPr>
+        <p:txBody>
+          <a:bodyPr wrap="square" rtlCol="0" anchor="ctr"/>
+          <a:lstStyle/>
+          <a:p>
+            <a:pPr indent="0" marL="0">
+              <a:buNone/>
+            </a:pPr>
+            <a:r>
+              <a:rPr lang="en-US" sz="900" i="1" dirty="0">
+                <a:solidFill>
+                  <a:srgbClr val="8A4B0A"/>
+                </a:solidFill>
+                <a:latin typeface="Calibri" pitchFamily="34" charset="0"/>
+                <a:ea typeface="Calibri" pitchFamily="34" charset="-122"/>
+                <a:cs typeface="Calibri" pitchFamily="34" charset="-120"/>
+              </a:rPr>
+              <a:t>engagement declining → content/placement review</a:t>
+            </a:r>
+            <a:endParaRPr lang="en-US" sz="900" dirty="0"/>
+          </a:p>
+        </p:txBody>
+      </p:sp>
+      <p:sp>
+        <p:nvSpPr>
+          <p:cNvPr id="21" name="Text 18"/>
+          <p:cNvSpPr/>
+          <p:nvPr/>
+        </p:nvSpPr>
+        <p:spPr>
+          <a:xfrm>
+            <a:off x="6263640" y="3593592"/>
+            <a:ext cx="3977640" cy="219456"/>
           </a:xfrm>
           <a:prstGeom prst="rect">
             <a:avLst/>
@@ -7553,14 +7592,14 @@
       </p:sp>
       <p:sp>
         <p:nvSpPr>
-          <p:cNvPr id="21" name="Text 18"/>
-          <p:cNvSpPr/>
-          <p:nvPr/>
-        </p:nvSpPr>
-        <p:spPr>
-          <a:xfrm>
-            <a:off x="9966960" y="3502152"/>
-            <a:ext cx="1691640" cy="274320"/>
+          <p:cNvPr id="22" name="Text 19"/>
+          <p:cNvSpPr/>
+          <p:nvPr/>
+        </p:nvSpPr>
+        <p:spPr>
+          <a:xfrm>
+            <a:off x="10241280" y="3593592"/>
+            <a:ext cx="1417320" cy="219456"/>
           </a:xfrm>
           <a:prstGeom prst="rect">
             <a:avLst/>
@@ -7592,14 +7631,53 @@
       </p:sp>
       <p:sp>
         <p:nvSpPr>
-          <p:cNvPr id="22" name="Text 19"/>
+          <p:cNvPr id="23" name="Text 20"/>
           <p:cNvSpPr/>
           <p:nvPr/>
         </p:nvSpPr>
         <p:spPr>
           <a:xfrm>
             <a:off x="6263640" y="3794760"/>
-            <a:ext cx="3657600" cy="274320"/>
+            <a:ext cx="5394960" cy="201168"/>
+          </a:xfrm>
+          <a:prstGeom prst="rect">
+            <a:avLst/>
+          </a:prstGeom>
+          <a:noFill/>
+          <a:ln/>
+        </p:spPr>
+        <p:txBody>
+          <a:bodyPr wrap="square" rtlCol="0" anchor="ctr"/>
+          <a:lstStyle/>
+          <a:p>
+            <a:pPr indent="0" marL="0">
+              <a:buNone/>
+            </a:pPr>
+            <a:r>
+              <a:rPr lang="en-US" sz="900" i="1" dirty="0">
+                <a:solidFill>
+                  <a:srgbClr val="8A4B0A"/>
+                </a:solidFill>
+                <a:latin typeface="Calibri" pitchFamily="34" charset="0"/>
+                <a:ea typeface="Calibri" pitchFamily="34" charset="-122"/>
+                <a:cs typeface="Calibri" pitchFamily="34" charset="-120"/>
+              </a:rPr>
+              <a:t>engagement declining → content/placement review</a:t>
+            </a:r>
+            <a:endParaRPr lang="en-US" sz="900" dirty="0"/>
+          </a:p>
+        </p:txBody>
+      </p:sp>
+      <p:sp>
+        <p:nvSpPr>
+          <p:cNvPr id="24" name="Text 21"/>
+          <p:cNvSpPr/>
+          <p:nvPr/>
+        </p:nvSpPr>
+        <p:spPr>
+          <a:xfrm>
+            <a:off x="6263640" y="4014216"/>
+            <a:ext cx="3977640" cy="219456"/>
           </a:xfrm>
           <a:prstGeom prst="rect">
             <a:avLst/>
@@ -7631,14 +7709,14 @@
       </p:sp>
       <p:sp>
         <p:nvSpPr>
-          <p:cNvPr id="23" name="Text 20"/>
-          <p:cNvSpPr/>
-          <p:nvPr/>
-        </p:nvSpPr>
-        <p:spPr>
-          <a:xfrm>
-            <a:off x="9966960" y="3794760"/>
-            <a:ext cx="1691640" cy="274320"/>
+          <p:cNvPr id="25" name="Text 22"/>
+          <p:cNvSpPr/>
+          <p:nvPr/>
+        </p:nvSpPr>
+        <p:spPr>
+          <a:xfrm>
+            <a:off x="10241280" y="4014216"/>
+            <a:ext cx="1417320" cy="219456"/>
           </a:xfrm>
           <a:prstGeom prst="rect">
             <a:avLst/>
@@ -7670,92 +7748,53 @@
       </p:sp>
       <p:sp>
         <p:nvSpPr>
-          <p:cNvPr id="24" name="Text 21"/>
-          <p:cNvSpPr/>
-          <p:nvPr/>
-        </p:nvSpPr>
-        <p:spPr>
-          <a:xfrm>
-            <a:off x="6263640" y="4087368"/>
-            <a:ext cx="3657600" cy="274320"/>
-          </a:xfrm>
-          <a:prstGeom prst="rect">
-            <a:avLst/>
-          </a:prstGeom>
-          <a:noFill/>
-          <a:ln/>
-        </p:spPr>
-        <p:txBody>
-          <a:bodyPr wrap="square" rtlCol="0" anchor="ctr"/>
-          <a:lstStyle/>
-          <a:p>
-            <a:pPr indent="0" marL="0">
-              <a:buNone/>
-            </a:pPr>
-            <a:r>
-              <a:rPr lang="en-US" sz="1000" dirty="0">
-                <a:solidFill>
-                  <a:srgbClr val="1A1A2E"/>
-                </a:solidFill>
-                <a:latin typeface="Calibri" pitchFamily="34" charset="0"/>
-                <a:ea typeface="Calibri" pitchFamily="34" charset="-122"/>
-                <a:cs typeface="Calibri" pitchFamily="34" charset="-120"/>
-              </a:rPr>
-              <a:t>Venue #244 (Bars)</a:t>
-            </a:r>
-            <a:endParaRPr lang="en-US" sz="1000" dirty="0"/>
-          </a:p>
-        </p:txBody>
-      </p:sp>
-      <p:sp>
-        <p:nvSpPr>
-          <p:cNvPr id="25" name="Text 22"/>
-          <p:cNvSpPr/>
-          <p:nvPr/>
-        </p:nvSpPr>
-        <p:spPr>
-          <a:xfrm>
-            <a:off x="9966960" y="4087368"/>
-            <a:ext cx="1691640" cy="274320"/>
-          </a:xfrm>
-          <a:prstGeom prst="rect">
-            <a:avLst/>
-          </a:prstGeom>
-          <a:noFill/>
-          <a:ln/>
-        </p:spPr>
-        <p:txBody>
-          <a:bodyPr wrap="square" rtlCol="0" anchor="ctr"/>
-          <a:lstStyle/>
-          <a:p>
-            <a:pPr algn="r" indent="0" marL="0">
-              <a:buNone/>
-            </a:pPr>
-            <a:r>
-              <a:rPr lang="en-US" sz="1000" b="1" dirty="0">
-                <a:solidFill>
-                  <a:srgbClr val="B8500A"/>
-                </a:solidFill>
-                <a:latin typeface="Calibri" pitchFamily="34" charset="0"/>
-                <a:ea typeface="Calibri" pitchFamily="34" charset="-122"/>
-                <a:cs typeface="Calibri" pitchFamily="34" charset="-120"/>
-              </a:rPr>
-              <a:t>52%</a:t>
-            </a:r>
-            <a:endParaRPr lang="en-US" sz="1000" dirty="0"/>
-          </a:p>
-        </p:txBody>
-      </p:sp>
-      <p:sp>
-        <p:nvSpPr>
           <p:cNvPr id="26" name="Text 23"/>
           <p:cNvSpPr/>
           <p:nvPr/>
         </p:nvSpPr>
         <p:spPr>
           <a:xfrm>
-            <a:off x="6263640" y="4562856"/>
-            <a:ext cx="5394960" cy="274320"/>
+            <a:off x="6263640" y="4215384"/>
+            <a:ext cx="5394960" cy="201168"/>
+          </a:xfrm>
+          <a:prstGeom prst="rect">
+            <a:avLst/>
+          </a:prstGeom>
+          <a:noFill/>
+          <a:ln/>
+        </p:spPr>
+        <p:txBody>
+          <a:bodyPr wrap="square" rtlCol="0" anchor="ctr"/>
+          <a:lstStyle/>
+          <a:p>
+            <a:pPr indent="0" marL="0">
+              <a:buNone/>
+            </a:pPr>
+            <a:r>
+              <a:rPr lang="en-US" sz="900" i="1" dirty="0">
+                <a:solidFill>
+                  <a:srgbClr val="8A4B0A"/>
+                </a:solidFill>
+                <a:latin typeface="Calibri" pitchFamily="34" charset="0"/>
+                <a:ea typeface="Calibri" pitchFamily="34" charset="-122"/>
+                <a:cs typeface="Calibri" pitchFamily="34" charset="-120"/>
+              </a:rPr>
+              <a:t>uptime issue → dispatch technical support</a:t>
+            </a:r>
+            <a:endParaRPr lang="en-US" sz="900" dirty="0"/>
+          </a:p>
+        </p:txBody>
+      </p:sp>
+      <p:sp>
+        <p:nvSpPr>
+          <p:cNvPr id="27" name="Text 24"/>
+          <p:cNvSpPr/>
+          <p:nvPr/>
+        </p:nvSpPr>
+        <p:spPr>
+          <a:xfrm>
+            <a:off x="6263640" y="4526280"/>
+            <a:ext cx="5394960" cy="237744"/>
           </a:xfrm>
           <a:prstGeom prst="rect">
             <a:avLst/>
@@ -7787,14 +7826,14 @@
       </p:sp>
       <p:sp>
         <p:nvSpPr>
-          <p:cNvPr id="27" name="Text 24"/>
-          <p:cNvSpPr/>
-          <p:nvPr/>
-        </p:nvSpPr>
-        <p:spPr>
-          <a:xfrm>
-            <a:off x="6263640" y="4892040"/>
-            <a:ext cx="4023360" cy="274320"/>
+          <p:cNvPr id="28" name="Text 25"/>
+          <p:cNvSpPr/>
+          <p:nvPr/>
+        </p:nvSpPr>
+        <p:spPr>
+          <a:xfrm>
+            <a:off x="6263640" y="4800600"/>
+            <a:ext cx="4023360" cy="237744"/>
           </a:xfrm>
           <a:prstGeom prst="rect">
             <a:avLst/>
@@ -7826,14 +7865,14 @@
       </p:sp>
       <p:sp>
         <p:nvSpPr>
-          <p:cNvPr id="28" name="Text 25"/>
-          <p:cNvSpPr/>
-          <p:nvPr/>
-        </p:nvSpPr>
-        <p:spPr>
-          <a:xfrm>
-            <a:off x="10195560" y="4892040"/>
-            <a:ext cx="1463040" cy="274320"/>
+          <p:cNvPr id="29" name="Text 26"/>
+          <p:cNvSpPr/>
+          <p:nvPr/>
+        </p:nvSpPr>
+        <p:spPr>
+          <a:xfrm>
+            <a:off x="10195560" y="4800600"/>
+            <a:ext cx="1463040" cy="237744"/>
           </a:xfrm>
           <a:prstGeom prst="rect">
             <a:avLst/>
@@ -7865,14 +7904,14 @@
       </p:sp>
       <p:sp>
         <p:nvSpPr>
-          <p:cNvPr id="29" name="Text 26"/>
-          <p:cNvSpPr/>
-          <p:nvPr/>
-        </p:nvSpPr>
-        <p:spPr>
-          <a:xfrm>
-            <a:off x="6263640" y="5184648"/>
-            <a:ext cx="4023360" cy="274320"/>
+          <p:cNvPr id="30" name="Text 27"/>
+          <p:cNvSpPr/>
+          <p:nvPr/>
+        </p:nvSpPr>
+        <p:spPr>
+          <a:xfrm>
+            <a:off x="6263640" y="5047488"/>
+            <a:ext cx="4023360" cy="237744"/>
           </a:xfrm>
           <a:prstGeom prst="rect">
             <a:avLst/>
@@ -7904,14 +7943,14 @@
       </p:sp>
       <p:sp>
         <p:nvSpPr>
-          <p:cNvPr id="30" name="Text 27"/>
-          <p:cNvSpPr/>
-          <p:nvPr/>
-        </p:nvSpPr>
-        <p:spPr>
-          <a:xfrm>
-            <a:off x="10195560" y="5184648"/>
-            <a:ext cx="1463040" cy="274320"/>
+          <p:cNvPr id="31" name="Text 28"/>
+          <p:cNvSpPr/>
+          <p:nvPr/>
+        </p:nvSpPr>
+        <p:spPr>
+          <a:xfrm>
+            <a:off x="10195560" y="5047488"/>
+            <a:ext cx="1463040" cy="237744"/>
           </a:xfrm>
           <a:prstGeom prst="rect">
             <a:avLst/>
@@ -7943,14 +7982,14 @@
       </p:sp>
       <p:sp>
         <p:nvSpPr>
-          <p:cNvPr id="31" name="Text 28"/>
-          <p:cNvSpPr/>
-          <p:nvPr/>
-        </p:nvSpPr>
-        <p:spPr>
-          <a:xfrm>
-            <a:off x="6263640" y="5477256"/>
-            <a:ext cx="4023360" cy="274320"/>
+          <p:cNvPr id="32" name="Text 29"/>
+          <p:cNvSpPr/>
+          <p:nvPr/>
+        </p:nvSpPr>
+        <p:spPr>
+          <a:xfrm>
+            <a:off x="6263640" y="5294376"/>
+            <a:ext cx="4023360" cy="237744"/>
           </a:xfrm>
           <a:prstGeom prst="rect">
             <a:avLst/>
@@ -7982,14 +8021,14 @@
       </p:sp>
       <p:sp>
         <p:nvSpPr>
-          <p:cNvPr id="32" name="Text 29"/>
-          <p:cNvSpPr/>
-          <p:nvPr/>
-        </p:nvSpPr>
-        <p:spPr>
-          <a:xfrm>
-            <a:off x="10195560" y="5477256"/>
-            <a:ext cx="1463040" cy="274320"/>
+          <p:cNvPr id="33" name="Text 30"/>
+          <p:cNvSpPr/>
+          <p:nvPr/>
+        </p:nvSpPr>
+        <p:spPr>
+          <a:xfrm>
+            <a:off x="10195560" y="5294376"/>
+            <a:ext cx="1463040" cy="237744"/>
           </a:xfrm>
           <a:prstGeom prst="rect">
             <a:avLst/>
@@ -8021,14 +8060,14 @@
       </p:sp>
       <p:sp>
         <p:nvSpPr>
-          <p:cNvPr id="33" name="Text 30"/>
-          <p:cNvSpPr/>
-          <p:nvPr/>
-        </p:nvSpPr>
-        <p:spPr>
-          <a:xfrm>
-            <a:off x="6263640" y="5769864"/>
-            <a:ext cx="4023360" cy="274320"/>
+          <p:cNvPr id="34" name="Text 31"/>
+          <p:cNvSpPr/>
+          <p:nvPr/>
+        </p:nvSpPr>
+        <p:spPr>
+          <a:xfrm>
+            <a:off x="6263640" y="5541264"/>
+            <a:ext cx="4023360" cy="237744"/>
           </a:xfrm>
           <a:prstGeom prst="rect">
             <a:avLst/>
@@ -8060,14 +8099,14 @@
       </p:sp>
       <p:sp>
         <p:nvSpPr>
-          <p:cNvPr id="34" name="Text 31"/>
-          <p:cNvSpPr/>
-          <p:nvPr/>
-        </p:nvSpPr>
-        <p:spPr>
-          <a:xfrm>
-            <a:off x="10195560" y="5769864"/>
-            <a:ext cx="1463040" cy="274320"/>
+          <p:cNvPr id="35" name="Text 32"/>
+          <p:cNvSpPr/>
+          <p:nvPr/>
+        </p:nvSpPr>
+        <p:spPr>
+          <a:xfrm>
+            <a:off x="10195560" y="5541264"/>
+            <a:ext cx="1463040" cy="237744"/>
           </a:xfrm>
           <a:prstGeom prst="rect">
             <a:avLst/>
@@ -8099,14 +8138,14 @@
       </p:sp>
       <p:sp>
         <p:nvSpPr>
-          <p:cNvPr id="35" name="Text 32"/>
-          <p:cNvSpPr/>
-          <p:nvPr/>
-        </p:nvSpPr>
-        <p:spPr>
-          <a:xfrm>
-            <a:off x="548640" y="6080760"/>
-            <a:ext cx="11064240" cy="502920"/>
+          <p:cNvPr id="36" name="Text 33"/>
+          <p:cNvSpPr/>
+          <p:nvPr/>
+        </p:nvSpPr>
+        <p:spPr>
+          <a:xfrm>
+            <a:off x="548640" y="6016752"/>
+            <a:ext cx="11064240" cy="548640"/>
           </a:xfrm>
           <a:prstGeom prst="rect">
             <a:avLst/>
@@ -8120,12 +8159,12 @@
           <a:p>
             <a:pPr indent="0" marL="0">
               <a:lnSpc>
-                <a:spcPts val="1200"/>
+                <a:spcPts val="1050"/>
               </a:lnSpc>
               <a:buNone/>
             </a:pPr>
             <a:r>
-              <a:rPr lang="en-US" sz="950" i="1" dirty="0">
+              <a:rPr lang="en-US" sz="870" i="1" dirty="0">
                 <a:solidFill>
                   <a:srgbClr val="5B6178"/>
                 </a:solidFill>
@@ -8133,15 +8172,15 @@
                 <a:ea typeface="Calibri" pitchFamily="34" charset="-122"/>
                 <a:cs typeface="Calibri" pitchFamily="34" charset="-120"/>
               </a:rPr>
-              <a:t>Flags come from 5-fold out-of-fold predictions. AUC/PR-AUC look modest next to the revenue model's R² — but an oracle with the true latent risk still only scores 0.73 AUC, so 0.65 is near this problem's honest ceiling. realized_ad_revenue's importance is a venue_type confound, not a causal driver of churn.</a:t>
-            </a:r>
-            <a:endParaRPr lang="en-US" sz="950" dirty="0"/>
-          </a:p>
-        </p:txBody>
-      </p:sp>
-      <p:sp>
-        <p:nvSpPr>
-          <p:cNvPr id="36" name="Text 33"/>
+              <a:t>Flags come from 5-fold OOF predictions; AUC/PR-AUC read modest next to the revenue model's R² only because the oracle ceiling here is 0.73 AUC. realized_ad_revenue's importance is a venue_type confound, not a causal driver. Each "Save now" / flagged venue also carries a SHAP top driver (from the fold model that never saw it) mapped to a concrete action — technical dispatch, AM retention call, content review — not a generic "reach out."</a:t>
+            </a:r>
+            <a:endParaRPr lang="en-US" sz="870" dirty="0"/>
+          </a:p>
+        </p:txBody>
+      </p:sp>
+      <p:sp>
+        <p:nvSpPr>
+          <p:cNvPr id="37" name="Text 34"/>
           <p:cNvSpPr/>
           <p:nvPr/>
         </p:nvSpPr>
@@ -8180,7 +8219,7 @@
       </p:sp>
       <p:sp>
         <p:nvSpPr>
-          <p:cNvPr id="37" name="Text 34"/>
+          <p:cNvPr id="38" name="Text 35"/>
           <p:cNvSpPr/>
           <p:nvPr/>
         </p:nvSpPr>

--- a/deck/AtmosphereTV_DOOH_Measurement.pptx
+++ b/deck/AtmosphereTV_DOOH_Measurement.pptx
@@ -19,9 +19,10 @@
     <p:sldId id="267" r:id="rId13"/>
     <p:sldId id="268" r:id="rId14"/>
     <p:sldId id="269" r:id="rId15"/>
+    <p:sldId id="270" r:id="rId16"/>
   </p:sldIdLst>
   <p:notesMasterIdLst>
-    <p:notesMasterId r:id="rId16"/>
+    <p:notesMasterId r:id="rId17"/>
   </p:notesMasterIdLst>
   <p:sldSz cx="12192000" cy="6858000"/>
   <p:notesSz cx="6858000" cy="12192000"/>
@@ -1364,6 +1365,473 @@
               <c:strCache>
                 <c:ptCount val="1"/>
                 <c:pt idx="0">
+                  <c:v>Naive MMM (blind to competing media)</c:v>
+                </c:pt>
+              </c:strCache>
+            </c:strRef>
+          </c:tx>
+          <c:spPr>
+            <a:solidFill>
+              <a:srgbClr val="C44E52"/>
+            </a:solidFill>
+            <a:effectLst/>
+          </c:spPr>
+          <c:invertIfNegative val="0"/>
+          <c:dLbls>
+            <c:numFmt formatCode="#,##0" sourceLinked="0"/>
+            <c:txPr>
+              <a:bodyPr/>
+              <a:lstStyle/>
+              <a:p>
+                <a:pPr>
+                  <a:defRPr b="0" i="0" strike="noStrike" sz="850" u="none">
+                    <a:solidFill>
+                      <a:srgbClr val="1A1A2E"/>
+                    </a:solidFill>
+                    <a:latin typeface="Arial"/>
+                  </a:defRPr>
+                </a:pPr>
+              </a:p>
+            </c:txPr>
+            <c:showLegendKey val="0"/>
+            <c:showVal val="1"/>
+            <c:showCatName val="0"/>
+            <c:showSerName val="0"/>
+            <c:showPercent val="0"/>
+            <c:showBubbleSize val="0"/>
+            <c:showLeaderLines val="0"/>
+          </c:dLbls>
+          <c:cat>
+            <c:multiLvlStrRef>
+              <c:f>Sheet1!$A$2:$A$5</c:f>
+              <c:multiLvlStrCache>
+                <c:ptCount val="4"/>
+                <c:lvl>
+                  <c:pt idx="0">
+                    <c:v>Restaurants</c:v>
+                  </c:pt>
+                  <c:pt idx="1">
+                    <c:v>Gyms</c:v>
+                  </c:pt>
+                  <c:pt idx="2">
+                    <c:v>Bars</c:v>
+                  </c:pt>
+                  <c:pt idx="3">
+                    <c:v>Waiting Rooms</c:v>
+                  </c:pt>
+                </c:lvl>
+              </c:multiLvlStrCache>
+            </c:multiLvlStrRef>
+          </c:cat>
+          <c:val>
+            <c:numRef>
+              <c:f>Sheet1!$B$2:$B$5</c:f>
+              <c:numCache>
+                <c:formatCode>General</c:formatCode>
+                <c:ptCount val="4"/>
+                <c:pt idx="0">
+                  <c:v>17.47</c:v>
+                </c:pt>
+                <c:pt idx="1">
+                  <c:v>14.01</c:v>
+                </c:pt>
+                <c:pt idx="2">
+                  <c:v>20.63</c:v>
+                </c:pt>
+                <c:pt idx="3">
+                  <c:v>17.94</c:v>
+                </c:pt>
+              </c:numCache>
+            </c:numRef>
+          </c:val>
+        </c:ser>
+        <c:ser>
+          <c:idx val="1"/>
+          <c:order val="1"/>
+          <c:tx>
+            <c:strRef>
+              <c:f>Sheet1!$C$1</c:f>
+              <c:strCache>
+                <c:ptCount val="1"/>
+                <c:pt idx="0">
+                  <c:v>Confound-aware MMM (controls for it)</c:v>
+                </c:pt>
+              </c:strCache>
+            </c:strRef>
+          </c:tx>
+          <c:spPr>
+            <a:solidFill>
+              <a:srgbClr val="55A868"/>
+            </a:solidFill>
+            <a:effectLst/>
+          </c:spPr>
+          <c:invertIfNegative val="0"/>
+          <c:dLbls>
+            <c:numFmt formatCode="#,##0" sourceLinked="0"/>
+            <c:txPr>
+              <a:bodyPr/>
+              <a:lstStyle/>
+              <a:p>
+                <a:pPr>
+                  <a:defRPr b="0" i="0" strike="noStrike" sz="850" u="none">
+                    <a:solidFill>
+                      <a:srgbClr val="1A1A2E"/>
+                    </a:solidFill>
+                    <a:latin typeface="Arial"/>
+                  </a:defRPr>
+                </a:pPr>
+              </a:p>
+            </c:txPr>
+            <c:showLegendKey val="0"/>
+            <c:showVal val="1"/>
+            <c:showCatName val="0"/>
+            <c:showSerName val="0"/>
+            <c:showPercent val="0"/>
+            <c:showBubbleSize val="0"/>
+            <c:showLeaderLines val="0"/>
+          </c:dLbls>
+          <c:cat>
+            <c:multiLvlStrRef>
+              <c:f>Sheet1!$A$2:$A$5</c:f>
+              <c:multiLvlStrCache>
+                <c:ptCount val="4"/>
+                <c:lvl>
+                  <c:pt idx="0">
+                    <c:v>Restaurants</c:v>
+                  </c:pt>
+                  <c:pt idx="1">
+                    <c:v>Gyms</c:v>
+                  </c:pt>
+                  <c:pt idx="2">
+                    <c:v>Bars</c:v>
+                  </c:pt>
+                  <c:pt idx="3">
+                    <c:v>Waiting Rooms</c:v>
+                  </c:pt>
+                </c:lvl>
+              </c:multiLvlStrCache>
+            </c:multiLvlStrRef>
+          </c:cat>
+          <c:val>
+            <c:numRef>
+              <c:f>Sheet1!$C$2:$C$5</c:f>
+              <c:numCache>
+                <c:formatCode>General</c:formatCode>
+                <c:ptCount val="4"/>
+                <c:pt idx="0">
+                  <c:v>7.98</c:v>
+                </c:pt>
+                <c:pt idx="1">
+                  <c:v>5</c:v>
+                </c:pt>
+                <c:pt idx="2">
+                  <c:v>15.1</c:v>
+                </c:pt>
+                <c:pt idx="3">
+                  <c:v>3.76</c:v>
+                </c:pt>
+              </c:numCache>
+            </c:numRef>
+          </c:val>
+        </c:ser>
+        <c:ser>
+          <c:idx val="2"/>
+          <c:order val="2"/>
+          <c:tx>
+            <c:strRef>
+              <c:f>Sheet1!$D$1</c:f>
+              <c:strCache>
+                <c:ptCount val="1"/>
+                <c:pt idx="0">
+                  <c:v>True max lift</c:v>
+                </c:pt>
+              </c:strCache>
+            </c:strRef>
+          </c:tx>
+          <c:spPr>
+            <a:solidFill>
+              <a:srgbClr val="E8871E"/>
+            </a:solidFill>
+            <a:effectLst/>
+          </c:spPr>
+          <c:invertIfNegative val="0"/>
+          <c:dLbls>
+            <c:numFmt formatCode="#,##0" sourceLinked="0"/>
+            <c:txPr>
+              <a:bodyPr/>
+              <a:lstStyle/>
+              <a:p>
+                <a:pPr>
+                  <a:defRPr b="0" i="0" strike="noStrike" sz="850" u="none">
+                    <a:solidFill>
+                      <a:srgbClr val="1A1A2E"/>
+                    </a:solidFill>
+                    <a:latin typeface="Arial"/>
+                  </a:defRPr>
+                </a:pPr>
+              </a:p>
+            </c:txPr>
+            <c:showLegendKey val="0"/>
+            <c:showVal val="1"/>
+            <c:showCatName val="0"/>
+            <c:showSerName val="0"/>
+            <c:showPercent val="0"/>
+            <c:showBubbleSize val="0"/>
+            <c:showLeaderLines val="0"/>
+          </c:dLbls>
+          <c:cat>
+            <c:multiLvlStrRef>
+              <c:f>Sheet1!$A$2:$A$5</c:f>
+              <c:multiLvlStrCache>
+                <c:ptCount val="4"/>
+                <c:lvl>
+                  <c:pt idx="0">
+                    <c:v>Restaurants</c:v>
+                  </c:pt>
+                  <c:pt idx="1">
+                    <c:v>Gyms</c:v>
+                  </c:pt>
+                  <c:pt idx="2">
+                    <c:v>Bars</c:v>
+                  </c:pt>
+                  <c:pt idx="3">
+                    <c:v>Waiting Rooms</c:v>
+                  </c:pt>
+                </c:lvl>
+              </c:multiLvlStrCache>
+            </c:multiLvlStrRef>
+          </c:cat>
+          <c:val>
+            <c:numRef>
+              <c:f>Sheet1!$D$2:$D$5</c:f>
+              <c:numCache>
+                <c:formatCode>General</c:formatCode>
+                <c:ptCount val="4"/>
+                <c:pt idx="0">
+                  <c:v>18</c:v>
+                </c:pt>
+                <c:pt idx="1">
+                  <c:v>14</c:v>
+                </c:pt>
+                <c:pt idx="2">
+                  <c:v>22</c:v>
+                </c:pt>
+                <c:pt idx="3">
+                  <c:v>9</c:v>
+                </c:pt>
+              </c:numCache>
+            </c:numRef>
+          </c:val>
+        </c:ser>
+        <c:dLbls>
+          <c:numFmt formatCode="#,##0" sourceLinked="0"/>
+          <c:txPr>
+            <a:bodyPr/>
+            <a:lstStyle/>
+            <a:p>
+              <a:pPr>
+                <a:defRPr b="0" i="0" strike="noStrike" sz="850" u="none">
+                  <a:solidFill>
+                    <a:srgbClr val="1A1A2E"/>
+                  </a:solidFill>
+                  <a:latin typeface="Arial"/>
+                </a:defRPr>
+              </a:pPr>
+            </a:p>
+          </c:txPr>
+          <c:showLegendKey val="0"/>
+          <c:showVal val="1"/>
+          <c:showCatName val="0"/>
+          <c:showSerName val="0"/>
+          <c:showPercent val="0"/>
+          <c:showBubbleSize val="0"/>
+          <c:showLeaderLines val="0"/>
+        </c:dLbls>
+        <c:gapWidth val="150"/>
+        <c:overlap val="0"/>
+        <c:axId val="2094734554"/>
+        <c:axId val="2094734552"/>
+        <c:axId val="2094734556"/>
+      </c:barChart>
+      <c:catAx>
+        <c:axId val="2094734554"/>
+        <c:scaling>
+          <c:orientation val="minMax"/>
+        </c:scaling>
+        <c:delete val="0"/>
+        <c:axPos val="b"/>
+        <c:numFmt formatCode="General" sourceLinked="1"/>
+        <c:majorTickMark val="out"/>
+        <c:minorTickMark val="none"/>
+        <c:tickLblPos val="low"/>
+        <c:spPr>
+          <a:ln w="12700" cap="flat">
+            <a:solidFill>
+              <a:srgbClr val="888888"/>
+            </a:solidFill>
+            <a:prstDash val="solid"/>
+            <a:round/>
+          </a:ln>
+        </c:spPr>
+        <c:txPr>
+          <a:bodyPr/>
+          <a:lstStyle/>
+          <a:p>
+            <a:pPr>
+              <a:defRPr sz="1000" b="0" i="0" u="none" strike="noStrike">
+                <a:solidFill>
+                  <a:srgbClr val="1A1A2E"/>
+                </a:solidFill>
+                <a:latin typeface="Arial"/>
+              </a:defRPr>
+            </a:pPr>
+            <a:endParaRPr lang="en-US"/>
+          </a:p>
+        </c:txPr>
+        <c:crossAx val="2094734552"/>
+        <c:crosses val="autoZero"/>
+        <c:auto val="1"/>
+        <c:lblAlgn val="ctr"/>
+        <c:noMultiLvlLbl val="1"/>
+      </c:catAx>
+      <c:valAx>
+        <c:axId val="2094734552"/>
+        <c:scaling>
+          <c:orientation val="minMax"/>
+        </c:scaling>
+        <c:delete val="0"/>
+        <c:axPos val="l"/>
+        <c:majorGridlines>
+          <c:spPr>
+            <a:ln w="9525" cap="flat">
+              <a:solidFill>
+                <a:srgbClr val="E5E5EF"/>
+              </a:solidFill>
+              <a:prstDash val="solid"/>
+              <a:round/>
+            </a:ln>
+          </c:spPr>
+        </c:majorGridlines>
+        <c:title>
+          <c:tx>
+            <c:rich>
+              <a:bodyPr/>
+              <a:lstStyle/>
+              <a:p>
+                <a:pPr>
+                  <a:defRPr sz="1000" b="0" i="0" u="none" strike="noStrike">
+                    <a:solidFill>
+                      <a:srgbClr val="000000"/>
+                    </a:solidFill>
+                    <a:latin typeface="Arial"/>
+                  </a:defRPr>
+                </a:pPr>
+                <a:r>
+                  <a:rPr sz="1000" b="0" i="0" u="none" strike="noStrike">
+                    <a:solidFill>
+                      <a:srgbClr val="000000"/>
+                    </a:solidFill>
+                    <a:latin typeface="Arial"/>
+                  </a:rPr>
+                  <a:t>Max lift at saturation</a:t>
+                </a:r>
+              </a:p>
+            </c:rich>
+          </c:tx>
+          <c:layout/>
+          <c:overlay val="0"/>
+        </c:title>
+        <c:numFmt formatCode="General" sourceLinked="0"/>
+        <c:majorTickMark val="out"/>
+        <c:minorTickMark val="none"/>
+        <c:tickLblPos val="nextTo"/>
+        <c:spPr>
+          <a:ln w="12700" cap="flat">
+            <a:solidFill>
+              <a:srgbClr val="888888"/>
+            </a:solidFill>
+            <a:prstDash val="solid"/>
+            <a:round/>
+          </a:ln>
+        </c:spPr>
+        <c:txPr>
+          <a:bodyPr/>
+          <a:lstStyle/>
+          <a:p>
+            <a:pPr>
+              <a:defRPr sz="900" b="0" i="0" u="none" strike="noStrike">
+                <a:solidFill>
+                  <a:srgbClr val="5B6178"/>
+                </a:solidFill>
+                <a:latin typeface="Arial"/>
+              </a:defRPr>
+            </a:pPr>
+            <a:endParaRPr lang="en-US"/>
+          </a:p>
+        </c:txPr>
+        <c:crossAx val="2094734554"/>
+        <c:crosses val="autoZero"/>
+        <c:crossBetween val="between"/>
+      </c:valAx>
+      <c:spPr>
+        <a:noFill/>
+        <a:ln>
+          <a:noFill/>
+        </a:ln>
+        <a:effectLst/>
+      </c:spPr>
+    </c:plotArea>
+    <c:legend>
+      <c:legendPos val="b"/>
+      <c:overlay val="0"/>
+      <c:txPr>
+        <a:bodyPr/>
+        <a:lstStyle/>
+        <a:p>
+          <a:pPr>
+            <a:defRPr sz="900">      </a:defRPr>
+          </a:pPr>
+          <a:endParaRPr lang="en-US"/>
+        </a:p>
+      </c:txPr>
+    </c:legend>
+    <c:plotVisOnly val="1"/>
+    <c:dispBlanksAs val="span"/>
+  </c:chart>
+  <c:spPr>
+    <a:noFill/>
+    <a:ln>
+      <a:noFill/>
+    </a:ln>
+    <a:effectLst/>
+  </c:spPr>
+  <c:externalData r:id="rId1">
+    <c:autoUpdate val="0"/>
+  </c:externalData>
+</c:chartSpace>
+</file>
+
+<file path=ppt/charts/chart5.xml><?xml version="1.0" encoding="utf-8"?>
+<c:chartSpace xmlns:c="http://schemas.openxmlformats.org/drawingml/2006/chart" xmlns:a="http://schemas.openxmlformats.org/drawingml/2006/main" xmlns:r="http://schemas.openxmlformats.org/officeDocument/2006/relationships">
+  <c:date1904 val="0"/>
+  <c:roundedCorners val="1"/>
+  <c:chart>
+    <c:autoTitleDeleted val="1"/>
+    <c:plotArea>
+      <c:layout/>
+      <c:barChart>
+        <c:barDir val="col"/>
+        <c:grouping val="clustered"/>
+        <c:varyColors val="0"/>
+        <c:ser>
+          <c:idx val="0"/>
+          <c:order val="0"/>
+          <c:tx>
+            <c:strRef>
+              <c:f>Sheet1!$B$1</c:f>
+              <c:strCache>
+                <c:ptCount val="1"/>
+                <c:pt idx="0">
                   <c:v>Allocated weekly budget ($)</c:v>
                 </c:pt>
               </c:strCache>
@@ -1589,7 +2057,7 @@
 </c:chartSpace>
 </file>
 
-<file path=ppt/charts/chart5.xml><?xml version="1.0" encoding="utf-8"?>
+<file path=ppt/charts/chart6.xml><?xml version="1.0" encoding="utf-8"?>
 <c:chartSpace xmlns:c="http://schemas.openxmlformats.org/drawingml/2006/chart" xmlns:a="http://schemas.openxmlformats.org/drawingml/2006/main" xmlns:r="http://schemas.openxmlformats.org/officeDocument/2006/relationships">
   <c:date1904 val="0"/>
   <c:roundedCorners val="1"/>
@@ -1864,7 +2332,7 @@
 </c:chartSpace>
 </file>
 
-<file path=ppt/charts/chart6.xml><?xml version="1.0" encoding="utf-8"?>
+<file path=ppt/charts/chart7.xml><?xml version="1.0" encoding="utf-8"?>
 <c:chartSpace xmlns:c="http://schemas.openxmlformats.org/drawingml/2006/chart" xmlns:a="http://schemas.openxmlformats.org/drawingml/2006/main" xmlns:r="http://schemas.openxmlformats.org/officeDocument/2006/relationships">
   <c:date1904 val="0"/>
   <c:roundedCorners val="1"/>
@@ -2998,6 +3466,94 @@
             <a:fld id="{F7021451-1387-4CA6-816F-3879F97B5CBC}" type="slidenum">
               <a:rPr lang="en-US"/>
               <a:t>14</a:t>
+            </a:fld>
+            <a:endParaRPr lang="en-US"/>
+          </a:p>
+        </p:txBody>
+      </p:sp>
+    </p:spTree>
+    <p:extLst>
+      <p:ext uri="{BB962C8B-B14F-4D97-AF65-F5344CB8AC3E}">
+        <p14:creationId xmlns:p14="http://schemas.microsoft.com/office/powerpoint/2010/main" val="1024086991"/>
+      </p:ext>
+    </p:extLst>
+  </p:cSld>
+  <p:clrMapOvr>
+    <a:masterClrMapping/>
+  </p:clrMapOvr>
+</p:notes>
+</file>
+
+<file path=ppt/notesSlides/notesSlide15.xml><?xml version="1.0" encoding="utf-8"?>
+<p:notes xmlns:a="http://schemas.openxmlformats.org/drawingml/2006/main" xmlns:r="http://schemas.openxmlformats.org/officeDocument/2006/relationships" xmlns:p="http://schemas.openxmlformats.org/presentationml/2006/main">
+  <p:cSld>
+    <p:spTree>
+      <p:nvGrpSpPr>
+        <p:cNvPr id="1" name=""/>
+        <p:cNvGrpSpPr/>
+        <p:nvPr/>
+      </p:nvGrpSpPr>
+      <p:grpSpPr>
+        <a:xfrm>
+          <a:off x="0" y="0"/>
+          <a:ext cx="0" cy="0"/>
+          <a:chOff x="0" y="0"/>
+          <a:chExt cx="0" cy="0"/>
+        </a:xfrm>
+      </p:grpSpPr>
+      <p:sp>
+        <p:nvSpPr>
+          <p:cNvPr id="2" name="Slide Image Placeholder 1"/>
+          <p:cNvSpPr>
+            <a:spLocks noGrp="1" noRot="1" noChangeAspect="1"/>
+          </p:cNvSpPr>
+          <p:nvPr>
+            <p:ph type="sldImg"/>
+          </p:nvPr>
+        </p:nvSpPr>
+        <p:spPr/>
+      </p:sp>
+      <p:sp>
+        <p:nvSpPr>
+          <p:cNvPr id="3" name="Notes Placeholder 2"/>
+          <p:cNvSpPr>
+            <a:spLocks noGrp="1"/>
+          </p:cNvSpPr>
+          <p:nvPr>
+            <p:ph type="body" idx="1"/>
+          </p:nvPr>
+        </p:nvSpPr>
+        <p:spPr/>
+        <p:txBody>
+          <a:bodyPr/>
+          <a:lstStyle/>
+          <a:p>
+            <a:r>
+              <a:rPr lang="en-US" dirty="0"/>
+              <a:t/>
+            </a:r>
+            <a:endParaRPr lang="en-US" dirty="0"/>
+          </a:p>
+        </p:txBody>
+      </p:sp>
+      <p:sp>
+        <p:nvSpPr>
+          <p:cNvPr id="4" name="Slide Number Placeholder 3"/>
+          <p:cNvSpPr>
+            <a:spLocks noGrp="1"/>
+          </p:cNvSpPr>
+          <p:nvPr>
+            <p:ph type="sldNum" sz="quarter" idx="10"/>
+          </p:nvPr>
+        </p:nvSpPr>
+        <p:spPr/>
+        <p:txBody>
+          <a:bodyPr/>
+          <a:lstStyle/>
+          <a:p>
+            <a:fld id="{F7021451-1387-4CA6-816F-3879F97B5CBC}" type="slidenum">
+              <a:rPr lang="en-US"/>
+              <a:t>15</a:t>
             </a:fld>
             <a:endParaRPr lang="en-US"/>
           </a:p>
@@ -4252,6 +4808,458 @@
         <p:spPr>
           <a:xfrm>
             <a:off x="548640" y="411480"/>
+            <a:ext cx="11247120" cy="594360"/>
+          </a:xfrm>
+          <a:prstGeom prst="rect">
+            <a:avLst/>
+          </a:prstGeom>
+          <a:noFill/>
+          <a:ln/>
+        </p:spPr>
+        <p:txBody>
+          <a:bodyPr wrap="square" rtlCol="0" anchor="ctr"/>
+          <a:lstStyle/>
+          <a:p>
+            <a:pPr indent="0" marL="0">
+              <a:buNone/>
+            </a:pPr>
+            <a:r>
+              <a:rPr lang="en-US" sz="2400" b="1" dirty="0">
+                <a:solidFill>
+                  <a:srgbClr val="1E2761"/>
+                </a:solidFill>
+                <a:latin typeface="Cambria" pitchFamily="34" charset="0"/>
+                <a:ea typeface="Cambria" pitchFamily="34" charset="-122"/>
+                <a:cs typeface="Cambria" pitchFamily="34" charset="-120"/>
+              </a:rPr>
+              <a:t>Robustness check: does competing media break this MMM?</a:t>
+            </a:r>
+            <a:endParaRPr lang="en-US" sz="2400" dirty="0"/>
+          </a:p>
+        </p:txBody>
+      </p:sp>
+      <p:sp>
+        <p:nvSpPr>
+          <p:cNvPr id="3" name="Text 1"/>
+          <p:cNvSpPr/>
+          <p:nvPr/>
+        </p:nvSpPr>
+        <p:spPr>
+          <a:xfrm>
+            <a:off x="548640" y="1005840"/>
+            <a:ext cx="10972800" cy="365760"/>
+          </a:xfrm>
+          <a:prstGeom prst="rect">
+            <a:avLst/>
+          </a:prstGeom>
+          <a:noFill/>
+          <a:ln/>
+        </p:spPr>
+        <p:txBody>
+          <a:bodyPr wrap="square" rtlCol="0" anchor="ctr"/>
+          <a:lstStyle/>
+          <a:p>
+            <a:pPr indent="0" marL="0">
+              <a:buNone/>
+            </a:pPr>
+            <a:r>
+              <a:rPr lang="en-US" sz="1200" i="1" dirty="0">
+                <a:solidFill>
+                  <a:srgbClr val="5B6178"/>
+                </a:solidFill>
+                <a:latin typeface="Calibri" pitchFamily="34" charset="0"/>
+                <a:ea typeface="Calibri" pitchFamily="34" charset="-122"/>
+                <a:cs typeface="Calibri" pitchFamily="34" charset="-120"/>
+              </a:rPr>
+              <a:t>A synthetic “other advertisers were busy too” shock, correlated with Atmosphere's own exposure ramp-up — layered onto the validated data as a labeled overlay, not a change to it.</a:t>
+            </a:r>
+            <a:endParaRPr lang="en-US" sz="1200" dirty="0"/>
+          </a:p>
+        </p:txBody>
+      </p:sp>
+      <p:graphicFrame>
+        <p:nvGraphicFramePr>
+          <p:cNvPr id="4" name="Chart 0" descr=""/>
+          <p:cNvGraphicFramePr/>
+          <p:nvPr/>
+        </p:nvGraphicFramePr>
+        <p:xfrm>
+          <a:off x="548640" y="1600200"/>
+          <a:ext cx="6949440" cy="3931920"/>
+        </p:xfrm>
+        <a:graphic xmlns:a="http://schemas.openxmlformats.org/drawingml/2006/main">
+          <a:graphicData uri="http://schemas.openxmlformats.org/drawingml/2006/chart">
+            <c:chart xmlns:c="http://schemas.openxmlformats.org/drawingml/2006/chart" r:id="rId1"/>
+          </a:graphicData>
+        </a:graphic>
+      </p:graphicFrame>
+      <p:sp>
+        <p:nvSpPr>
+          <p:cNvPr id="5" name="Shape 2"/>
+          <p:cNvSpPr/>
+          <p:nvPr/>
+        </p:nvSpPr>
+        <p:spPr>
+          <a:xfrm>
+            <a:off x="7772400" y="1600200"/>
+            <a:ext cx="3867912" cy="1234440"/>
+          </a:xfrm>
+          <a:prstGeom prst="roundRect">
+            <a:avLst>
+              <a:gd name="adj" fmla="val 5926"/>
+            </a:avLst>
+          </a:prstGeom>
+          <a:solidFill>
+            <a:srgbClr val="F5F7FC"/>
+          </a:solidFill>
+          <a:ln/>
+        </p:spPr>
+      </p:sp>
+      <p:sp>
+        <p:nvSpPr>
+          <p:cNvPr id="6" name="Text 3"/>
+          <p:cNvSpPr/>
+          <p:nvPr/>
+        </p:nvSpPr>
+        <p:spPr>
+          <a:xfrm>
+            <a:off x="7955280" y="1719072"/>
+            <a:ext cx="3520440" cy="365760"/>
+          </a:xfrm>
+          <a:prstGeom prst="rect">
+            <a:avLst/>
+          </a:prstGeom>
+          <a:noFill/>
+          <a:ln/>
+        </p:spPr>
+        <p:txBody>
+          <a:bodyPr wrap="square" rtlCol="0" anchor="ctr"/>
+          <a:lstStyle/>
+          <a:p>
+            <a:pPr indent="0" marL="0">
+              <a:buNone/>
+            </a:pPr>
+            <a:r>
+              <a:rPr lang="en-US" sz="1100" b="1" dirty="0">
+                <a:solidFill>
+                  <a:srgbClr val="1E2761"/>
+                </a:solidFill>
+                <a:latin typeface="Cambria" pitchFamily="34" charset="0"/>
+                <a:ea typeface="Cambria" pitchFamily="34" charset="-122"/>
+                <a:cs typeface="Cambria" pitchFamily="34" charset="-120"/>
+              </a:rPr>
+              <a:t>RCT estimate shift under the identical shock</a:t>
+            </a:r>
+            <a:endParaRPr lang="en-US" sz="1100" dirty="0"/>
+          </a:p>
+        </p:txBody>
+      </p:sp>
+      <p:sp>
+        <p:nvSpPr>
+          <p:cNvPr id="7" name="Text 4"/>
+          <p:cNvSpPr/>
+          <p:nvPr/>
+        </p:nvSpPr>
+        <p:spPr>
+          <a:xfrm>
+            <a:off x="7955280" y="2057400"/>
+            <a:ext cx="3520440" cy="594360"/>
+          </a:xfrm>
+          <a:prstGeom prst="rect">
+            <a:avLst/>
+          </a:prstGeom>
+          <a:noFill/>
+          <a:ln/>
+        </p:spPr>
+        <p:txBody>
+          <a:bodyPr wrap="square" rtlCol="0" anchor="ctr"/>
+          <a:lstStyle/>
+          <a:p>
+            <a:pPr indent="0" marL="0">
+              <a:buNone/>
+            </a:pPr>
+            <a:r>
+              <a:rPr lang="en-US" sz="3200" b="1" dirty="0">
+                <a:solidFill>
+                  <a:srgbClr val="2C7A57"/>
+                </a:solidFill>
+                <a:latin typeface="Calibri" pitchFamily="34" charset="0"/>
+                <a:ea typeface="Calibri" pitchFamily="34" charset="-122"/>
+                <a:cs typeface="Calibri" pitchFamily="34" charset="-120"/>
+              </a:rPr>
+              <a:t>0.00</a:t>
+            </a:r>
+            <a:endParaRPr lang="en-US" sz="3200" dirty="0"/>
+          </a:p>
+        </p:txBody>
+      </p:sp>
+      <p:sp>
+        <p:nvSpPr>
+          <p:cNvPr id="8" name="Text 5"/>
+          <p:cNvSpPr/>
+          <p:nvPr/>
+        </p:nvSpPr>
+        <p:spPr>
+          <a:xfrm>
+            <a:off x="7955280" y="2633472"/>
+            <a:ext cx="3520440" cy="182880"/>
+          </a:xfrm>
+          <a:prstGeom prst="rect">
+            <a:avLst/>
+          </a:prstGeom>
+          <a:noFill/>
+          <a:ln/>
+        </p:spPr>
+        <p:txBody>
+          <a:bodyPr wrap="square" rtlCol="0" anchor="ctr"/>
+          <a:lstStyle/>
+          <a:p>
+            <a:pPr indent="0" marL="0">
+              <a:lnSpc>
+                <a:spcPts val="1000"/>
+              </a:lnSpc>
+              <a:buNone/>
+            </a:pPr>
+            <a:r>
+              <a:rPr lang="en-US" sz="870" i="1" dirty="0">
+                <a:solidFill>
+                  <a:srgbClr val="5B6178"/>
+                </a:solidFill>
+                <a:latin typeface="Calibri" pitchFamily="34" charset="0"/>
+                <a:ea typeface="Calibri" pitchFamily="34" charset="-122"/>
+                <a:cs typeface="Calibri" pitchFamily="34" charset="-120"/>
+              </a:rPr>
+              <a:t>every venue type — the shock hits both arms equally, so a randomized comparison is mechanically immune to it</a:t>
+            </a:r>
+            <a:endParaRPr lang="en-US" sz="870" dirty="0"/>
+          </a:p>
+        </p:txBody>
+      </p:sp>
+      <p:sp>
+        <p:nvSpPr>
+          <p:cNvPr id="9" name="Text 6"/>
+          <p:cNvSpPr/>
+          <p:nvPr/>
+        </p:nvSpPr>
+        <p:spPr>
+          <a:xfrm>
+            <a:off x="7772400" y="3063240"/>
+            <a:ext cx="3867912" cy="1417320"/>
+          </a:xfrm>
+          <a:prstGeom prst="rect">
+            <a:avLst/>
+          </a:prstGeom>
+          <a:noFill/>
+          <a:ln/>
+        </p:spPr>
+        <p:txBody>
+          <a:bodyPr wrap="square" rtlCol="0" anchor="ctr"/>
+          <a:lstStyle/>
+          <a:p>
+            <a:pPr indent="0" marL="0">
+              <a:lnSpc>
+                <a:spcPts val="1350"/>
+              </a:lnSpc>
+              <a:buNone/>
+            </a:pPr>
+            <a:r>
+              <a:rPr lang="en-US" sz="1000" dirty="0">
+                <a:solidFill>
+                  <a:srgbClr val="1A1A2E"/>
+                </a:solidFill>
+                <a:latin typeface="Calibri" pitchFamily="34" charset="0"/>
+                <a:ea typeface="Calibri" pitchFamily="34" charset="-122"/>
+                <a:cs typeface="Calibri" pitchFamily="34" charset="-120"/>
+              </a:rPr>
+              <a:t>Naive MMM, by contrast, swings from useful to actively misleading: for 3 of 4 venue types the confound-blind fit was off by 2–4× — even though the injected correlation between competing media and Atmosphere's own exposure ramp is only 0.35 (moderate, not a worst case). Controlling for the confound (green) recovers this model's own uncalibrated baseline from the previous slide — still short of true max lift (orange) until the RCT-scale calibration from that same slide is applied on top.</a:t>
+            </a:r>
+            <a:endParaRPr lang="en-US" sz="1000" dirty="0"/>
+          </a:p>
+        </p:txBody>
+      </p:sp>
+      <p:sp>
+        <p:nvSpPr>
+          <p:cNvPr id="10" name="Shape 7"/>
+          <p:cNvSpPr/>
+          <p:nvPr/>
+        </p:nvSpPr>
+        <p:spPr>
+          <a:xfrm>
+            <a:off x="548640" y="5687568"/>
+            <a:ext cx="11091672" cy="713232"/>
+          </a:xfrm>
+          <a:prstGeom prst="roundRect">
+            <a:avLst>
+              <a:gd name="adj" fmla="val 7692"/>
+            </a:avLst>
+          </a:prstGeom>
+          <a:solidFill>
+            <a:srgbClr val="FDF1E3"/>
+          </a:solidFill>
+          <a:ln/>
+        </p:spPr>
+      </p:sp>
+      <p:sp>
+        <p:nvSpPr>
+          <p:cNvPr id="11" name="Text 8"/>
+          <p:cNvSpPr/>
+          <p:nvPr/>
+        </p:nvSpPr>
+        <p:spPr>
+          <a:xfrm>
+            <a:off x="731520" y="5779008"/>
+            <a:ext cx="10744200" cy="548640"/>
+          </a:xfrm>
+          <a:prstGeom prst="rect">
+            <a:avLst/>
+          </a:prstGeom>
+          <a:noFill/>
+          <a:ln/>
+        </p:spPr>
+        <p:txBody>
+          <a:bodyPr wrap="square" rtlCol="0" anchor="ctr"/>
+          <a:lstStyle/>
+          <a:p>
+            <a:pPr indent="0" marL="0">
+              <a:lnSpc>
+                <a:spcPts val="1200"/>
+              </a:lnSpc>
+              <a:buNone/>
+            </a:pPr>
+            <a:r>
+              <a:rPr lang="en-US" sz="950" i="1" dirty="0">
+                <a:solidFill>
+                  <a:srgbClr val="8A4B0A"/>
+                </a:solidFill>
+                <a:latin typeface="Calibri" pitchFamily="34" charset="0"/>
+                <a:ea typeface="Calibri" pitchFamily="34" charset="-122"/>
+                <a:cs typeface="Calibri" pitchFamily="34" charset="-120"/>
+              </a:rPr>
+              <a:t>Why this is scoped this way: deciding how an advertiser splits budget across Atmosphere + TV + social is the advertiser's/agency's call — Atmosphere has no visibility into competitors' channel data anyway. What Atmosphere's DS role should own is netting competing media OUT of its own causal read (the JD's own phrasing), which the RCT does by design and a single-channel MMM only does with an explicit control.</a:t>
+            </a:r>
+            <a:endParaRPr lang="en-US" sz="950" dirty="0"/>
+          </a:p>
+        </p:txBody>
+      </p:sp>
+      <p:sp>
+        <p:nvSpPr>
+          <p:cNvPr id="12" name="Text 9"/>
+          <p:cNvSpPr/>
+          <p:nvPr/>
+        </p:nvSpPr>
+        <p:spPr>
+          <a:xfrm>
+            <a:off x="457200" y="6537960"/>
+            <a:ext cx="7315200" cy="274320"/>
+          </a:xfrm>
+          <a:prstGeom prst="rect">
+            <a:avLst/>
+          </a:prstGeom>
+          <a:noFill/>
+          <a:ln/>
+        </p:spPr>
+        <p:txBody>
+          <a:bodyPr wrap="square" rtlCol="0" anchor="ctr"/>
+          <a:lstStyle/>
+          <a:p>
+            <a:pPr indent="0" marL="0">
+              <a:buNone/>
+            </a:pPr>
+            <a:r>
+              <a:rPr lang="en-US" sz="900" dirty="0">
+                <a:solidFill>
+                  <a:srgbClr val="5B6178"/>
+                </a:solidFill>
+                <a:latin typeface="Calibri" pitchFamily="34" charset="0"/>
+                <a:ea typeface="Calibri" pitchFamily="34" charset="-122"/>
+                <a:cs typeface="Calibri" pitchFamily="34" charset="-120"/>
+              </a:rPr>
+              <a:t>Media-mix model — robustness</a:t>
+            </a:r>
+            <a:endParaRPr lang="en-US" sz="900" dirty="0"/>
+          </a:p>
+        </p:txBody>
+      </p:sp>
+      <p:sp>
+        <p:nvSpPr>
+          <p:cNvPr id="13" name="Text 10"/>
+          <p:cNvSpPr/>
+          <p:nvPr/>
+        </p:nvSpPr>
+        <p:spPr>
+          <a:xfrm>
+            <a:off x="7589520" y="6537960"/>
+            <a:ext cx="4114800" cy="274320"/>
+          </a:xfrm>
+          <a:prstGeom prst="rect">
+            <a:avLst/>
+          </a:prstGeom>
+          <a:noFill/>
+          <a:ln/>
+        </p:spPr>
+        <p:txBody>
+          <a:bodyPr wrap="square" rtlCol="0" anchor="ctr"/>
+          <a:lstStyle/>
+          <a:p>
+            <a:pPr algn="r" indent="0" marL="0">
+              <a:buNone/>
+            </a:pPr>
+            <a:r>
+              <a:rPr lang="en-US" sz="900" dirty="0">
+                <a:solidFill>
+                  <a:srgbClr val="5B6178"/>
+                </a:solidFill>
+                <a:latin typeface="Calibri" pitchFamily="34" charset="0"/>
+                <a:ea typeface="Calibri" pitchFamily="34" charset="-122"/>
+                <a:cs typeface="Calibri" pitchFamily="34" charset="-120"/>
+              </a:rPr>
+              <a:t>Synthetic demo — validated against a known injected ground truth</a:t>
+            </a:r>
+            <a:endParaRPr lang="en-US" sz="900" dirty="0"/>
+          </a:p>
+        </p:txBody>
+      </p:sp>
+    </p:spTree>
+  </p:cSld>
+  <p:clrMapOvr>
+    <a:masterClrMapping/>
+  </p:clrMapOvr>
+</p:sld>
+</file>
+
+<file path=ppt/slides/slide11.xml><?xml version="1.0" encoding="utf-8"?>
+<p:sld xmlns:a="http://schemas.openxmlformats.org/drawingml/2006/main" xmlns:r="http://schemas.openxmlformats.org/officeDocument/2006/relationships" xmlns:p="http://schemas.openxmlformats.org/presentationml/2006/main">
+  <p:cSld name="Slide 11">
+    <p:bg>
+      <p:bgPr>
+        <a:solidFill>
+          <a:srgbClr val="FFFFFF"/>
+        </a:solidFill>
+      </p:bgPr>
+    </p:bg>
+    <p:spTree>
+      <p:nvGrpSpPr>
+        <p:cNvPr id="1" name=""/>
+        <p:cNvGrpSpPr/>
+        <p:nvPr/>
+      </p:nvGrpSpPr>
+      <p:grpSpPr>
+        <a:xfrm>
+          <a:off x="0" y="0"/>
+          <a:ext cx="0" cy="0"/>
+          <a:chOff x="0" y="0"/>
+          <a:chExt cx="0" cy="0"/>
+        </a:xfrm>
+      </p:grpSpPr>
+      <p:sp>
+        <p:nvSpPr>
+          <p:cNvPr id="2" name="Text 0"/>
+          <p:cNvSpPr/>
+          <p:nvPr/>
+        </p:nvSpPr>
+        <p:spPr>
+          <a:xfrm>
+            <a:off x="548640" y="411480"/>
             <a:ext cx="10972800" cy="594360"/>
           </a:xfrm>
           <a:prstGeom prst="rect">
@@ -4880,9 +5888,9 @@
 </p:sld>
 </file>
 
-<file path=ppt/slides/slide11.xml><?xml version="1.0" encoding="utf-8"?>
+<file path=ppt/slides/slide12.xml><?xml version="1.0" encoding="utf-8"?>
 <p:sld xmlns:a="http://schemas.openxmlformats.org/drawingml/2006/main" xmlns:r="http://schemas.openxmlformats.org/officeDocument/2006/relationships" xmlns:p="http://schemas.openxmlformats.org/presentationml/2006/main">
-  <p:cSld name="Slide 11">
+  <p:cSld name="Slide 12">
     <p:bg>
       <p:bgPr>
         <a:solidFill>
@@ -5518,1354 +6526,6 @@
               <a:t>“Smarter on both sides of the business” — the venue-side model shares its data foundation and causal-value input with the advertising side, rather than being a disconnected second project. Results on the next slide.</a:t>
             </a:r>
             <a:endParaRPr lang="en-US" sz="1150" dirty="0"/>
-          </a:p>
-        </p:txBody>
-      </p:sp>
-    </p:spTree>
-  </p:cSld>
-  <p:clrMapOvr>
-    <a:masterClrMapping/>
-  </p:clrMapOvr>
-</p:sld>
-</file>
-
-<file path=ppt/slides/slide12.xml><?xml version="1.0" encoding="utf-8"?>
-<p:sld xmlns:a="http://schemas.openxmlformats.org/drawingml/2006/main" xmlns:r="http://schemas.openxmlformats.org/officeDocument/2006/relationships" xmlns:p="http://schemas.openxmlformats.org/presentationml/2006/main">
-  <p:cSld name="Slide 12">
-    <p:bg>
-      <p:bgPr>
-        <a:solidFill>
-          <a:srgbClr val="FFFFFF"/>
-        </a:solidFill>
-      </p:bgPr>
-    </p:bg>
-    <p:spTree>
-      <p:nvGrpSpPr>
-        <p:cNvPr id="1" name=""/>
-        <p:cNvGrpSpPr/>
-        <p:nvPr/>
-      </p:nvGrpSpPr>
-      <p:grpSpPr>
-        <a:xfrm>
-          <a:off x="0" y="0"/>
-          <a:ext cx="0" cy="0"/>
-          <a:chOff x="0" y="0"/>
-          <a:chExt cx="0" cy="0"/>
-        </a:xfrm>
-      </p:grpSpPr>
-      <p:sp>
-        <p:nvSpPr>
-          <p:cNvPr id="2" name="Text 0"/>
-          <p:cNvSpPr/>
-          <p:nvPr/>
-        </p:nvSpPr>
-        <p:spPr>
-          <a:xfrm>
-            <a:off x="548640" y="411480"/>
-            <a:ext cx="11155680" cy="594360"/>
-          </a:xfrm>
-          <a:prstGeom prst="rect">
-            <a:avLst/>
-          </a:prstGeom>
-          <a:noFill/>
-          <a:ln/>
-        </p:spPr>
-        <p:txBody>
-          <a:bodyPr wrap="square" rtlCol="0" anchor="ctr"/>
-          <a:lstStyle/>
-          <a:p>
-            <a:pPr indent="0" marL="0">
-              <a:buNone/>
-            </a:pPr>
-            <a:r>
-              <a:rPr lang="en-US" sz="2500" b="1" dirty="0">
-                <a:solidFill>
-                  <a:srgbClr val="1E2761"/>
-                </a:solidFill>
-                <a:latin typeface="Cambria" pitchFamily="34" charset="0"/>
-                <a:ea typeface="Cambria" pitchFamily="34" charset="-122"/>
-                <a:cs typeface="Cambria" pitchFamily="34" charset="-120"/>
-              </a:rPr>
-              <a:t>Predicting venue ad-revenue, honestly</a:t>
-            </a:r>
-            <a:endParaRPr lang="en-US" sz="2500" dirty="0"/>
-          </a:p>
-        </p:txBody>
-      </p:sp>
-      <p:sp>
-        <p:nvSpPr>
-          <p:cNvPr id="3" name="Text 1"/>
-          <p:cNvSpPr/>
-          <p:nvPr/>
-        </p:nvSpPr>
-        <p:spPr>
-          <a:xfrm>
-            <a:off x="548640" y="1005840"/>
-            <a:ext cx="10972800" cy="365760"/>
-          </a:xfrm>
-          <a:prstGeom prst="rect">
-            <a:avLst/>
-          </a:prstGeom>
-          <a:noFill/>
-          <a:ln/>
-        </p:spPr>
-        <p:txBody>
-          <a:bodyPr wrap="square" rtlCol="0" anchor="ctr"/>
-          <a:lstStyle/>
-          <a:p>
-            <a:pPr indent="0" marL="0">
-              <a:buNone/>
-            </a:pPr>
-            <a:r>
-              <a:rPr lang="en-US" sz="1250" i="1" dirty="0">
-                <a:solidFill>
-                  <a:srgbClr val="5B6178"/>
-                </a:solidFill>
-                <a:latin typeface="Calibri" pitchFamily="34" charset="0"/>
-                <a:ea typeface="Calibri" pitchFamily="34" charset="-122"/>
-                <a:cs typeface="Calibri" pitchFamily="34" charset="-120"/>
-              </a:rPr>
-              <a:t>Gradient-boosted trees on observable venue characteristics + the calibrated per-exposure lift as a feature.</a:t>
-            </a:r>
-            <a:endParaRPr lang="en-US" sz="1250" dirty="0"/>
-          </a:p>
-        </p:txBody>
-      </p:sp>
-      <p:sp>
-        <p:nvSpPr>
-          <p:cNvPr id="4" name="Shape 2"/>
-          <p:cNvSpPr/>
-          <p:nvPr/>
-        </p:nvSpPr>
-        <p:spPr>
-          <a:xfrm>
-            <a:off x="548640" y="1508760"/>
-            <a:ext cx="2651760" cy="1051560"/>
-          </a:xfrm>
-          <a:prstGeom prst="roundRect">
-            <a:avLst>
-              <a:gd name="adj" fmla="val 6957"/>
-            </a:avLst>
-          </a:prstGeom>
-          <a:solidFill>
-            <a:srgbClr val="F5F7FC"/>
-          </a:solidFill>
-          <a:ln/>
-        </p:spPr>
-      </p:sp>
-      <p:sp>
-        <p:nvSpPr>
-          <p:cNvPr id="5" name="Text 3"/>
-          <p:cNvSpPr/>
-          <p:nvPr/>
-        </p:nvSpPr>
-        <p:spPr>
-          <a:xfrm>
-            <a:off x="685800" y="1618488"/>
-            <a:ext cx="2377440" cy="502920"/>
-          </a:xfrm>
-          <a:prstGeom prst="rect">
-            <a:avLst/>
-          </a:prstGeom>
-          <a:noFill/>
-          <a:ln/>
-        </p:spPr>
-        <p:txBody>
-          <a:bodyPr wrap="square" rtlCol="0" anchor="ctr"/>
-          <a:lstStyle/>
-          <a:p>
-            <a:pPr indent="0" marL="0">
-              <a:buNone/>
-            </a:pPr>
-            <a:r>
-              <a:rPr lang="en-US" sz="2200" b="1" dirty="0">
-                <a:solidFill>
-                  <a:srgbClr val="1E2761"/>
-                </a:solidFill>
-                <a:latin typeface="Calibri" pitchFamily="34" charset="0"/>
-                <a:ea typeface="Calibri" pitchFamily="34" charset="-122"/>
-                <a:cs typeface="Calibri" pitchFamily="34" charset="-120"/>
-              </a:rPr>
-              <a:t>0.84</a:t>
-            </a:r>
-            <a:endParaRPr lang="en-US" sz="2200" dirty="0"/>
-          </a:p>
-        </p:txBody>
-      </p:sp>
-      <p:sp>
-        <p:nvSpPr>
-          <p:cNvPr id="6" name="Text 4"/>
-          <p:cNvSpPr/>
-          <p:nvPr/>
-        </p:nvSpPr>
-        <p:spPr>
-          <a:xfrm>
-            <a:off x="685800" y="2130552"/>
-            <a:ext cx="2377440" cy="365760"/>
-          </a:xfrm>
-          <a:prstGeom prst="rect">
-            <a:avLst/>
-          </a:prstGeom>
-          <a:noFill/>
-          <a:ln/>
-        </p:spPr>
-        <p:txBody>
-          <a:bodyPr wrap="square" rtlCol="0" anchor="ctr"/>
-          <a:lstStyle/>
-          <a:p>
-            <a:pPr indent="0" marL="0">
-              <a:buNone/>
-            </a:pPr>
-            <a:r>
-              <a:rPr lang="en-US" sz="950" dirty="0">
-                <a:solidFill>
-                  <a:srgbClr val="5B6178"/>
-                </a:solidFill>
-                <a:latin typeface="Calibri" pitchFamily="34" charset="0"/>
-                <a:ea typeface="Calibri" pitchFamily="34" charset="-122"/>
-                <a:cs typeface="Calibri" pitchFamily="34" charset="-120"/>
-              </a:rPr>
-              <a:t>Held-out R²</a:t>
-            </a:r>
-            <a:endParaRPr lang="en-US" sz="950" dirty="0"/>
-          </a:p>
-        </p:txBody>
-      </p:sp>
-      <p:sp>
-        <p:nvSpPr>
-          <p:cNvPr id="7" name="Shape 5"/>
-          <p:cNvSpPr/>
-          <p:nvPr/>
-        </p:nvSpPr>
-        <p:spPr>
-          <a:xfrm>
-            <a:off x="3337560" y="1508760"/>
-            <a:ext cx="2651760" cy="1051560"/>
-          </a:xfrm>
-          <a:prstGeom prst="roundRect">
-            <a:avLst>
-              <a:gd name="adj" fmla="val 6957"/>
-            </a:avLst>
-          </a:prstGeom>
-          <a:solidFill>
-            <a:srgbClr val="F5F7FC"/>
-          </a:solidFill>
-          <a:ln/>
-        </p:spPr>
-      </p:sp>
-      <p:sp>
-        <p:nvSpPr>
-          <p:cNvPr id="8" name="Text 6"/>
-          <p:cNvSpPr/>
-          <p:nvPr/>
-        </p:nvSpPr>
-        <p:spPr>
-          <a:xfrm>
-            <a:off x="3474720" y="1618488"/>
-            <a:ext cx="2377440" cy="502920"/>
-          </a:xfrm>
-          <a:prstGeom prst="rect">
-            <a:avLst/>
-          </a:prstGeom>
-          <a:noFill/>
-          <a:ln/>
-        </p:spPr>
-        <p:txBody>
-          <a:bodyPr wrap="square" rtlCol="0" anchor="ctr"/>
-          <a:lstStyle/>
-          <a:p>
-            <a:pPr indent="0" marL="0">
-              <a:buNone/>
-            </a:pPr>
-            <a:r>
-              <a:rPr lang="en-US" sz="2200" b="1" dirty="0">
-                <a:solidFill>
-                  <a:srgbClr val="1E2761"/>
-                </a:solidFill>
-                <a:latin typeface="Calibri" pitchFamily="34" charset="0"/>
-                <a:ea typeface="Calibri" pitchFamily="34" charset="-122"/>
-                <a:cs typeface="Calibri" pitchFamily="34" charset="-120"/>
-              </a:rPr>
-              <a:t>22.1%</a:t>
-            </a:r>
-            <a:endParaRPr lang="en-US" sz="2200" dirty="0"/>
-          </a:p>
-        </p:txBody>
-      </p:sp>
-      <p:sp>
-        <p:nvSpPr>
-          <p:cNvPr id="9" name="Text 7"/>
-          <p:cNvSpPr/>
-          <p:nvPr/>
-        </p:nvSpPr>
-        <p:spPr>
-          <a:xfrm>
-            <a:off x="3474720" y="2130552"/>
-            <a:ext cx="2377440" cy="365760"/>
-          </a:xfrm>
-          <a:prstGeom prst="rect">
-            <a:avLst/>
-          </a:prstGeom>
-          <a:noFill/>
-          <a:ln/>
-        </p:spPr>
-        <p:txBody>
-          <a:bodyPr wrap="square" rtlCol="0" anchor="ctr"/>
-          <a:lstStyle/>
-          <a:p>
-            <a:pPr indent="0" marL="0">
-              <a:buNone/>
-            </a:pPr>
-            <a:r>
-              <a:rPr lang="en-US" sz="950" dirty="0">
-                <a:solidFill>
-                  <a:srgbClr val="5B6178"/>
-                </a:solidFill>
-                <a:latin typeface="Calibri" pitchFamily="34" charset="0"/>
-                <a:ea typeface="Calibri" pitchFamily="34" charset="-122"/>
-                <a:cs typeface="Calibri" pitchFamily="34" charset="-120"/>
-              </a:rPr>
-              <a:t>Held-out MAPE</a:t>
-            </a:r>
-            <a:endParaRPr lang="en-US" sz="950" dirty="0"/>
-          </a:p>
-        </p:txBody>
-      </p:sp>
-      <p:sp>
-        <p:nvSpPr>
-          <p:cNvPr id="10" name="Shape 8"/>
-          <p:cNvSpPr/>
-          <p:nvPr/>
-        </p:nvSpPr>
-        <p:spPr>
-          <a:xfrm>
-            <a:off x="6126480" y="1508760"/>
-            <a:ext cx="2651760" cy="1051560"/>
-          </a:xfrm>
-          <a:prstGeom prst="roundRect">
-            <a:avLst>
-              <a:gd name="adj" fmla="val 6957"/>
-            </a:avLst>
-          </a:prstGeom>
-          <a:solidFill>
-            <a:srgbClr val="F5F7FC"/>
-          </a:solidFill>
-          <a:ln/>
-        </p:spPr>
-      </p:sp>
-      <p:sp>
-        <p:nvSpPr>
-          <p:cNvPr id="11" name="Text 9"/>
-          <p:cNvSpPr/>
-          <p:nvPr/>
-        </p:nvSpPr>
-        <p:spPr>
-          <a:xfrm>
-            <a:off x="6263640" y="1618488"/>
-            <a:ext cx="2377440" cy="502920"/>
-          </a:xfrm>
-          <a:prstGeom prst="rect">
-            <a:avLst/>
-          </a:prstGeom>
-          <a:noFill/>
-          <a:ln/>
-        </p:spPr>
-        <p:txBody>
-          <a:bodyPr wrap="square" rtlCol="0" anchor="ctr"/>
-          <a:lstStyle/>
-          <a:p>
-            <a:pPr indent="0" marL="0">
-              <a:buNone/>
-            </a:pPr>
-            <a:r>
-              <a:rPr lang="en-US" sz="2200" b="1" dirty="0">
-                <a:solidFill>
-                  <a:srgbClr val="1E2761"/>
-                </a:solidFill>
-                <a:latin typeface="Calibri" pitchFamily="34" charset="0"/>
-                <a:ea typeface="Calibri" pitchFamily="34" charset="-122"/>
-                <a:cs typeface="Calibri" pitchFamily="34" charset="-120"/>
-              </a:rPr>
-              <a:t>0.94</a:t>
-            </a:r>
-            <a:endParaRPr lang="en-US" sz="2200" dirty="0"/>
-          </a:p>
-        </p:txBody>
-      </p:sp>
-      <p:sp>
-        <p:nvSpPr>
-          <p:cNvPr id="12" name="Text 10"/>
-          <p:cNvSpPr/>
-          <p:nvPr/>
-        </p:nvSpPr>
-        <p:spPr>
-          <a:xfrm>
-            <a:off x="6263640" y="2130552"/>
-            <a:ext cx="2377440" cy="365760"/>
-          </a:xfrm>
-          <a:prstGeom prst="rect">
-            <a:avLst/>
-          </a:prstGeom>
-          <a:noFill/>
-          <a:ln/>
-        </p:spPr>
-        <p:txBody>
-          <a:bodyPr wrap="square" rtlCol="0" anchor="ctr"/>
-          <a:lstStyle/>
-          <a:p>
-            <a:pPr indent="0" marL="0">
-              <a:buNone/>
-            </a:pPr>
-            <a:r>
-              <a:rPr lang="en-US" sz="950" dirty="0">
-                <a:solidFill>
-                  <a:srgbClr val="5B6178"/>
-                </a:solidFill>
-                <a:latin typeface="Calibri" pitchFamily="34" charset="0"/>
-                <a:ea typeface="Calibri" pitchFamily="34" charset="-122"/>
-                <a:cs typeface="Calibri" pitchFamily="34" charset="-120"/>
-              </a:rPr>
-              <a:t>Corr. w/ latent true potential</a:t>
-            </a:r>
-            <a:endParaRPr lang="en-US" sz="950" dirty="0"/>
-          </a:p>
-        </p:txBody>
-      </p:sp>
-      <p:sp>
-        <p:nvSpPr>
-          <p:cNvPr id="13" name="Shape 11"/>
-          <p:cNvSpPr/>
-          <p:nvPr/>
-        </p:nvSpPr>
-        <p:spPr>
-          <a:xfrm>
-            <a:off x="8915400" y="1508760"/>
-            <a:ext cx="2651760" cy="1051560"/>
-          </a:xfrm>
-          <a:prstGeom prst="roundRect">
-            <a:avLst>
-              <a:gd name="adj" fmla="val 6957"/>
-            </a:avLst>
-          </a:prstGeom>
-          <a:solidFill>
-            <a:srgbClr val="F5F7FC"/>
-          </a:solidFill>
-          <a:ln/>
-        </p:spPr>
-      </p:sp>
-      <p:sp>
-        <p:nvSpPr>
-          <p:cNvPr id="14" name="Text 12"/>
-          <p:cNvSpPr/>
-          <p:nvPr/>
-        </p:nvSpPr>
-        <p:spPr>
-          <a:xfrm>
-            <a:off x="9052560" y="1618488"/>
-            <a:ext cx="2377440" cy="502920"/>
-          </a:xfrm>
-          <a:prstGeom prst="rect">
-            <a:avLst/>
-          </a:prstGeom>
-          <a:noFill/>
-          <a:ln/>
-        </p:spPr>
-        <p:txBody>
-          <a:bodyPr wrap="square" rtlCol="0" anchor="ctr"/>
-          <a:lstStyle/>
-          <a:p>
-            <a:pPr indent="0" marL="0">
-              <a:buNone/>
-            </a:pPr>
-            <a:r>
-              <a:rPr lang="en-US" sz="2200" b="1" dirty="0">
-                <a:solidFill>
-                  <a:srgbClr val="1E2761"/>
-                </a:solidFill>
-                <a:latin typeface="Calibri" pitchFamily="34" charset="0"/>
-                <a:ea typeface="Calibri" pitchFamily="34" charset="-122"/>
-                <a:cs typeface="Calibri" pitchFamily="34" charset="-120"/>
-              </a:rPr>
-              <a:t>90% vs 28%</a:t>
-            </a:r>
-            <a:endParaRPr lang="en-US" sz="2200" dirty="0"/>
-          </a:p>
-        </p:txBody>
-      </p:sp>
-      <p:sp>
-        <p:nvSpPr>
-          <p:cNvPr id="15" name="Text 13"/>
-          <p:cNvSpPr/>
-          <p:nvPr/>
-        </p:nvSpPr>
-        <p:spPr>
-          <a:xfrm>
-            <a:off x="9052560" y="2130552"/>
-            <a:ext cx="2377440" cy="365760"/>
-          </a:xfrm>
-          <a:prstGeom prst="rect">
-            <a:avLst/>
-          </a:prstGeom>
-          <a:noFill/>
-          <a:ln/>
-        </p:spPr>
-        <p:txBody>
-          <a:bodyPr wrap="square" rtlCol="0" anchor="ctr"/>
-          <a:lstStyle/>
-          <a:p>
-            <a:pPr indent="0" marL="0">
-              <a:buNone/>
-            </a:pPr>
-            <a:r>
-              <a:rPr lang="en-US" sz="950" dirty="0">
-                <a:solidFill>
-                  <a:srgbClr val="5B6178"/>
-                </a:solidFill>
-                <a:latin typeface="Calibri" pitchFamily="34" charset="0"/>
-                <a:ea typeface="Calibri" pitchFamily="34" charset="-122"/>
-                <a:cs typeface="Calibri" pitchFamily="34" charset="-120"/>
-              </a:rPr>
-              <a:t>Flagged-tail latent gap rate</a:t>
-            </a:r>
-            <a:endParaRPr lang="en-US" sz="950" dirty="0"/>
-          </a:p>
-        </p:txBody>
-      </p:sp>
-      <p:graphicFrame>
-        <p:nvGraphicFramePr>
-          <p:cNvPr id="16" name="Chart 0" descr=""/>
-          <p:cNvGraphicFramePr/>
-          <p:nvPr/>
-        </p:nvGraphicFramePr>
-        <p:xfrm>
-          <a:off x="548640" y="2880360"/>
-          <a:ext cx="5394960" cy="3246120"/>
-        </p:xfrm>
-        <a:graphic xmlns:a="http://schemas.openxmlformats.org/drawingml/2006/main">
-          <a:graphicData uri="http://schemas.openxmlformats.org/drawingml/2006/chart">
-            <c:chart xmlns:c="http://schemas.openxmlformats.org/drawingml/2006/chart" r:id="rId1"/>
-          </a:graphicData>
-        </a:graphic>
-      </p:graphicFrame>
-      <p:sp>
-        <p:nvSpPr>
-          <p:cNvPr id="17" name="Text 14"/>
-          <p:cNvSpPr/>
-          <p:nvPr/>
-        </p:nvSpPr>
-        <p:spPr>
-          <a:xfrm>
-            <a:off x="6263640" y="2880360"/>
-            <a:ext cx="5394960" cy="274320"/>
-          </a:xfrm>
-          <a:prstGeom prst="rect">
-            <a:avLst/>
-          </a:prstGeom>
-          <a:noFill/>
-          <a:ln/>
-        </p:spPr>
-        <p:txBody>
-          <a:bodyPr wrap="square" rtlCol="0" anchor="ctr"/>
-          <a:lstStyle/>
-          <a:p>
-            <a:pPr indent="0" marL="0">
-              <a:buNone/>
-            </a:pPr>
-            <a:r>
-              <a:rPr lang="en-US" sz="1200" b="1" dirty="0">
-                <a:solidFill>
-                  <a:srgbClr val="1E2761"/>
-                </a:solidFill>
-                <a:latin typeface="Cambria" pitchFamily="34" charset="0"/>
-                <a:ea typeface="Cambria" pitchFamily="34" charset="-122"/>
-                <a:cs typeface="Cambria" pitchFamily="34" charset="-120"/>
-              </a:rPr>
-              <a:t>Top under-monetized venues (of 20 flagged)</a:t>
-            </a:r>
-            <a:endParaRPr lang="en-US" sz="1200" dirty="0"/>
-          </a:p>
-        </p:txBody>
-      </p:sp>
-      <p:sp>
-        <p:nvSpPr>
-          <p:cNvPr id="18" name="Text 15"/>
-          <p:cNvSpPr/>
-          <p:nvPr/>
-        </p:nvSpPr>
-        <p:spPr>
-          <a:xfrm>
-            <a:off x="6263640" y="3209544"/>
-            <a:ext cx="3657600" cy="274320"/>
-          </a:xfrm>
-          <a:prstGeom prst="rect">
-            <a:avLst/>
-          </a:prstGeom>
-          <a:noFill/>
-          <a:ln/>
-        </p:spPr>
-        <p:txBody>
-          <a:bodyPr wrap="square" rtlCol="0" anchor="ctr"/>
-          <a:lstStyle/>
-          <a:p>
-            <a:pPr indent="0" marL="0">
-              <a:buNone/>
-            </a:pPr>
-            <a:r>
-              <a:rPr lang="en-US" sz="1000" dirty="0">
-                <a:solidFill>
-                  <a:srgbClr val="1A1A2E"/>
-                </a:solidFill>
-                <a:latin typeface="Calibri" pitchFamily="34" charset="0"/>
-                <a:ea typeface="Calibri" pitchFamily="34" charset="-122"/>
-                <a:cs typeface="Calibri" pitchFamily="34" charset="-120"/>
-              </a:rPr>
-              <a:t>Venue #85 (Restaurants)</a:t>
-            </a:r>
-            <a:endParaRPr lang="en-US" sz="1000" dirty="0"/>
-          </a:p>
-        </p:txBody>
-      </p:sp>
-      <p:sp>
-        <p:nvSpPr>
-          <p:cNvPr id="19" name="Text 16"/>
-          <p:cNvSpPr/>
-          <p:nvPr/>
-        </p:nvSpPr>
-        <p:spPr>
-          <a:xfrm>
-            <a:off x="9966960" y="3209544"/>
-            <a:ext cx="1691640" cy="274320"/>
-          </a:xfrm>
-          <a:prstGeom prst="rect">
-            <a:avLst/>
-          </a:prstGeom>
-          <a:noFill/>
-          <a:ln/>
-        </p:spPr>
-        <p:txBody>
-          <a:bodyPr wrap="square" rtlCol="0" anchor="ctr"/>
-          <a:lstStyle/>
-          <a:p>
-            <a:pPr algn="r" indent="0" marL="0">
-              <a:buNone/>
-            </a:pPr>
-            <a:r>
-              <a:rPr lang="en-US" sz="1000" b="1" dirty="0">
-                <a:solidFill>
-                  <a:srgbClr val="B8500A"/>
-                </a:solidFill>
-                <a:latin typeface="Calibri" pitchFamily="34" charset="0"/>
-                <a:ea typeface="Calibri" pitchFamily="34" charset="-122"/>
-                <a:cs typeface="Calibri" pitchFamily="34" charset="-120"/>
-              </a:rPr>
-              <a:t>-62%</a:t>
-            </a:r>
-            <a:endParaRPr lang="en-US" sz="1000" dirty="0"/>
-          </a:p>
-        </p:txBody>
-      </p:sp>
-      <p:sp>
-        <p:nvSpPr>
-          <p:cNvPr id="20" name="Text 17"/>
-          <p:cNvSpPr/>
-          <p:nvPr/>
-        </p:nvSpPr>
-        <p:spPr>
-          <a:xfrm>
-            <a:off x="6263640" y="3502152"/>
-            <a:ext cx="3657600" cy="274320"/>
-          </a:xfrm>
-          <a:prstGeom prst="rect">
-            <a:avLst/>
-          </a:prstGeom>
-          <a:noFill/>
-          <a:ln/>
-        </p:spPr>
-        <p:txBody>
-          <a:bodyPr wrap="square" rtlCol="0" anchor="ctr"/>
-          <a:lstStyle/>
-          <a:p>
-            <a:pPr indent="0" marL="0">
-              <a:buNone/>
-            </a:pPr>
-            <a:r>
-              <a:rPr lang="en-US" sz="1000" dirty="0">
-                <a:solidFill>
-                  <a:srgbClr val="1A1A2E"/>
-                </a:solidFill>
-                <a:latin typeface="Calibri" pitchFamily="34" charset="0"/>
-                <a:ea typeface="Calibri" pitchFamily="34" charset="-122"/>
-                <a:cs typeface="Calibri" pitchFamily="34" charset="-120"/>
-              </a:rPr>
-              <a:t>Venue #309 (Waiting Rooms)</a:t>
-            </a:r>
-            <a:endParaRPr lang="en-US" sz="1000" dirty="0"/>
-          </a:p>
-        </p:txBody>
-      </p:sp>
-      <p:sp>
-        <p:nvSpPr>
-          <p:cNvPr id="21" name="Text 18"/>
-          <p:cNvSpPr/>
-          <p:nvPr/>
-        </p:nvSpPr>
-        <p:spPr>
-          <a:xfrm>
-            <a:off x="9966960" y="3502152"/>
-            <a:ext cx="1691640" cy="274320"/>
-          </a:xfrm>
-          <a:prstGeom prst="rect">
-            <a:avLst/>
-          </a:prstGeom>
-          <a:noFill/>
-          <a:ln/>
-        </p:spPr>
-        <p:txBody>
-          <a:bodyPr wrap="square" rtlCol="0" anchor="ctr"/>
-          <a:lstStyle/>
-          <a:p>
-            <a:pPr algn="r" indent="0" marL="0">
-              <a:buNone/>
-            </a:pPr>
-            <a:r>
-              <a:rPr lang="en-US" sz="1000" b="1" dirty="0">
-                <a:solidFill>
-                  <a:srgbClr val="B8500A"/>
-                </a:solidFill>
-                <a:latin typeface="Calibri" pitchFamily="34" charset="0"/>
-                <a:ea typeface="Calibri" pitchFamily="34" charset="-122"/>
-                <a:cs typeface="Calibri" pitchFamily="34" charset="-120"/>
-              </a:rPr>
-              <a:t>-61%</a:t>
-            </a:r>
-            <a:endParaRPr lang="en-US" sz="1000" dirty="0"/>
-          </a:p>
-        </p:txBody>
-      </p:sp>
-      <p:sp>
-        <p:nvSpPr>
-          <p:cNvPr id="22" name="Text 19"/>
-          <p:cNvSpPr/>
-          <p:nvPr/>
-        </p:nvSpPr>
-        <p:spPr>
-          <a:xfrm>
-            <a:off x="6263640" y="3794760"/>
-            <a:ext cx="3657600" cy="274320"/>
-          </a:xfrm>
-          <a:prstGeom prst="rect">
-            <a:avLst/>
-          </a:prstGeom>
-          <a:noFill/>
-          <a:ln/>
-        </p:spPr>
-        <p:txBody>
-          <a:bodyPr wrap="square" rtlCol="0" anchor="ctr"/>
-          <a:lstStyle/>
-          <a:p>
-            <a:pPr indent="0" marL="0">
-              <a:buNone/>
-            </a:pPr>
-            <a:r>
-              <a:rPr lang="en-US" sz="1000" dirty="0">
-                <a:solidFill>
-                  <a:srgbClr val="1A1A2E"/>
-                </a:solidFill>
-                <a:latin typeface="Calibri" pitchFamily="34" charset="0"/>
-                <a:ea typeface="Calibri" pitchFamily="34" charset="-122"/>
-                <a:cs typeface="Calibri" pitchFamily="34" charset="-120"/>
-              </a:rPr>
-              <a:t>Venue #53 (Restaurants)</a:t>
-            </a:r>
-            <a:endParaRPr lang="en-US" sz="1000" dirty="0"/>
-          </a:p>
-        </p:txBody>
-      </p:sp>
-      <p:sp>
-        <p:nvSpPr>
-          <p:cNvPr id="23" name="Text 20"/>
-          <p:cNvSpPr/>
-          <p:nvPr/>
-        </p:nvSpPr>
-        <p:spPr>
-          <a:xfrm>
-            <a:off x="9966960" y="3794760"/>
-            <a:ext cx="1691640" cy="274320"/>
-          </a:xfrm>
-          <a:prstGeom prst="rect">
-            <a:avLst/>
-          </a:prstGeom>
-          <a:noFill/>
-          <a:ln/>
-        </p:spPr>
-        <p:txBody>
-          <a:bodyPr wrap="square" rtlCol="0" anchor="ctr"/>
-          <a:lstStyle/>
-          <a:p>
-            <a:pPr algn="r" indent="0" marL="0">
-              <a:buNone/>
-            </a:pPr>
-            <a:r>
-              <a:rPr lang="en-US" sz="1000" b="1" dirty="0">
-                <a:solidFill>
-                  <a:srgbClr val="B8500A"/>
-                </a:solidFill>
-                <a:latin typeface="Calibri" pitchFamily="34" charset="0"/>
-                <a:ea typeface="Calibri" pitchFamily="34" charset="-122"/>
-                <a:cs typeface="Calibri" pitchFamily="34" charset="-120"/>
-              </a:rPr>
-              <a:t>-61%</a:t>
-            </a:r>
-            <a:endParaRPr lang="en-US" sz="1000" dirty="0"/>
-          </a:p>
-        </p:txBody>
-      </p:sp>
-      <p:sp>
-        <p:nvSpPr>
-          <p:cNvPr id="24" name="Text 21"/>
-          <p:cNvSpPr/>
-          <p:nvPr/>
-        </p:nvSpPr>
-        <p:spPr>
-          <a:xfrm>
-            <a:off x="6263640" y="4087368"/>
-            <a:ext cx="3657600" cy="274320"/>
-          </a:xfrm>
-          <a:prstGeom prst="rect">
-            <a:avLst/>
-          </a:prstGeom>
-          <a:noFill/>
-          <a:ln/>
-        </p:spPr>
-        <p:txBody>
-          <a:bodyPr wrap="square" rtlCol="0" anchor="ctr"/>
-          <a:lstStyle/>
-          <a:p>
-            <a:pPr indent="0" marL="0">
-              <a:buNone/>
-            </a:pPr>
-            <a:r>
-              <a:rPr lang="en-US" sz="1000" dirty="0">
-                <a:solidFill>
-                  <a:srgbClr val="1A1A2E"/>
-                </a:solidFill>
-                <a:latin typeface="Calibri" pitchFamily="34" charset="0"/>
-                <a:ea typeface="Calibri" pitchFamily="34" charset="-122"/>
-                <a:cs typeface="Calibri" pitchFamily="34" charset="-120"/>
-              </a:rPr>
-              <a:t>Venue #247 (Bars)</a:t>
-            </a:r>
-            <a:endParaRPr lang="en-US" sz="1000" dirty="0"/>
-          </a:p>
-        </p:txBody>
-      </p:sp>
-      <p:sp>
-        <p:nvSpPr>
-          <p:cNvPr id="25" name="Text 22"/>
-          <p:cNvSpPr/>
-          <p:nvPr/>
-        </p:nvSpPr>
-        <p:spPr>
-          <a:xfrm>
-            <a:off x="9966960" y="4087368"/>
-            <a:ext cx="1691640" cy="274320"/>
-          </a:xfrm>
-          <a:prstGeom prst="rect">
-            <a:avLst/>
-          </a:prstGeom>
-          <a:noFill/>
-          <a:ln/>
-        </p:spPr>
-        <p:txBody>
-          <a:bodyPr wrap="square" rtlCol="0" anchor="ctr"/>
-          <a:lstStyle/>
-          <a:p>
-            <a:pPr algn="r" indent="0" marL="0">
-              <a:buNone/>
-            </a:pPr>
-            <a:r>
-              <a:rPr lang="en-US" sz="1000" b="1" dirty="0">
-                <a:solidFill>
-                  <a:srgbClr val="B8500A"/>
-                </a:solidFill>
-                <a:latin typeface="Calibri" pitchFamily="34" charset="0"/>
-                <a:ea typeface="Calibri" pitchFamily="34" charset="-122"/>
-                <a:cs typeface="Calibri" pitchFamily="34" charset="-120"/>
-              </a:rPr>
-              <a:t>-60%</a:t>
-            </a:r>
-            <a:endParaRPr lang="en-US" sz="1000" dirty="0"/>
-          </a:p>
-        </p:txBody>
-      </p:sp>
-      <p:sp>
-        <p:nvSpPr>
-          <p:cNvPr id="26" name="Text 23"/>
-          <p:cNvSpPr/>
-          <p:nvPr/>
-        </p:nvSpPr>
-        <p:spPr>
-          <a:xfrm>
-            <a:off x="6263640" y="4562856"/>
-            <a:ext cx="5394960" cy="274320"/>
-          </a:xfrm>
-          <a:prstGeom prst="rect">
-            <a:avLst/>
-          </a:prstGeom>
-          <a:noFill/>
-          <a:ln/>
-        </p:spPr>
-        <p:txBody>
-          <a:bodyPr wrap="square" rtlCol="0" anchor="ctr"/>
-          <a:lstStyle/>
-          <a:p>
-            <a:pPr indent="0" marL="0">
-              <a:buNone/>
-            </a:pPr>
-            <a:r>
-              <a:rPr lang="en-US" sz="1200" b="1" dirty="0">
-                <a:solidFill>
-                  <a:srgbClr val="1E2761"/>
-                </a:solidFill>
-                <a:latin typeface="Cambria" pitchFamily="34" charset="0"/>
-                <a:ea typeface="Cambria" pitchFamily="34" charset="-122"/>
-                <a:cs typeface="Cambria" pitchFamily="34" charset="-120"/>
-              </a:rPr>
-              <a:t>Top prospect venues (expansion priority)</a:t>
-            </a:r>
-            <a:endParaRPr lang="en-US" sz="1200" dirty="0"/>
-          </a:p>
-        </p:txBody>
-      </p:sp>
-      <p:sp>
-        <p:nvSpPr>
-          <p:cNvPr id="27" name="Text 24"/>
-          <p:cNvSpPr/>
-          <p:nvPr/>
-        </p:nvSpPr>
-        <p:spPr>
-          <a:xfrm>
-            <a:off x="6263640" y="4892040"/>
-            <a:ext cx="4023360" cy="274320"/>
-          </a:xfrm>
-          <a:prstGeom prst="rect">
-            <a:avLst/>
-          </a:prstGeom>
-          <a:noFill/>
-          <a:ln/>
-        </p:spPr>
-        <p:txBody>
-          <a:bodyPr wrap="square" rtlCol="0" anchor="ctr"/>
-          <a:lstStyle/>
-          <a:p>
-            <a:pPr indent="0" marL="0">
-              <a:buNone/>
-            </a:pPr>
-            <a:r>
-              <a:rPr lang="en-US" sz="1000" dirty="0">
-                <a:solidFill>
-                  <a:srgbClr val="1A1A2E"/>
-                </a:solidFill>
-                <a:latin typeface="Calibri" pitchFamily="34" charset="0"/>
-                <a:ea typeface="Calibri" pitchFamily="34" charset="-122"/>
-                <a:cs typeface="Calibri" pitchFamily="34" charset="-120"/>
-              </a:rPr>
-              <a:t>P0018 — Bars (existing market)</a:t>
-            </a:r>
-            <a:endParaRPr lang="en-US" sz="1000" dirty="0"/>
-          </a:p>
-        </p:txBody>
-      </p:sp>
-      <p:sp>
-        <p:nvSpPr>
-          <p:cNvPr id="28" name="Text 25"/>
-          <p:cNvSpPr/>
-          <p:nvPr/>
-        </p:nvSpPr>
-        <p:spPr>
-          <a:xfrm>
-            <a:off x="10195560" y="4892040"/>
-            <a:ext cx="1463040" cy="274320"/>
-          </a:xfrm>
-          <a:prstGeom prst="rect">
-            <a:avLst/>
-          </a:prstGeom>
-          <a:noFill/>
-          <a:ln/>
-        </p:spPr>
-        <p:txBody>
-          <a:bodyPr wrap="square" rtlCol="0" anchor="ctr"/>
-          <a:lstStyle/>
-          <a:p>
-            <a:pPr algn="r" indent="0" marL="0">
-              <a:buNone/>
-            </a:pPr>
-            <a:r>
-              <a:rPr lang="en-US" sz="1000" b="1" dirty="0">
-                <a:solidFill>
-                  <a:srgbClr val="2C7A57"/>
-                </a:solidFill>
-                <a:latin typeface="Calibri" pitchFamily="34" charset="0"/>
-                <a:ea typeface="Calibri" pitchFamily="34" charset="-122"/>
-                <a:cs typeface="Calibri" pitchFamily="34" charset="-120"/>
-              </a:rPr>
-              <a:t>$684</a:t>
-            </a:r>
-            <a:endParaRPr lang="en-US" sz="1000" dirty="0"/>
-          </a:p>
-        </p:txBody>
-      </p:sp>
-      <p:sp>
-        <p:nvSpPr>
-          <p:cNvPr id="29" name="Text 26"/>
-          <p:cNvSpPr/>
-          <p:nvPr/>
-        </p:nvSpPr>
-        <p:spPr>
-          <a:xfrm>
-            <a:off x="6263640" y="5184648"/>
-            <a:ext cx="4023360" cy="274320"/>
-          </a:xfrm>
-          <a:prstGeom prst="rect">
-            <a:avLst/>
-          </a:prstGeom>
-          <a:noFill/>
-          <a:ln/>
-        </p:spPr>
-        <p:txBody>
-          <a:bodyPr wrap="square" rtlCol="0" anchor="ctr"/>
-          <a:lstStyle/>
-          <a:p>
-            <a:pPr indent="0" marL="0">
-              <a:buNone/>
-            </a:pPr>
-            <a:r>
-              <a:rPr lang="en-US" sz="1000" dirty="0">
-                <a:solidFill>
-                  <a:srgbClr val="1A1A2E"/>
-                </a:solidFill>
-                <a:latin typeface="Calibri" pitchFamily="34" charset="0"/>
-                <a:ea typeface="Calibri" pitchFamily="34" charset="-122"/>
-                <a:cs typeface="Calibri" pitchFamily="34" charset="-120"/>
-              </a:rPr>
-              <a:t>P0055 — Restaurants (existing market)</a:t>
-            </a:r>
-            <a:endParaRPr lang="en-US" sz="1000" dirty="0"/>
-          </a:p>
-        </p:txBody>
-      </p:sp>
-      <p:sp>
-        <p:nvSpPr>
-          <p:cNvPr id="30" name="Text 27"/>
-          <p:cNvSpPr/>
-          <p:nvPr/>
-        </p:nvSpPr>
-        <p:spPr>
-          <a:xfrm>
-            <a:off x="10195560" y="5184648"/>
-            <a:ext cx="1463040" cy="274320"/>
-          </a:xfrm>
-          <a:prstGeom prst="rect">
-            <a:avLst/>
-          </a:prstGeom>
-          <a:noFill/>
-          <a:ln/>
-        </p:spPr>
-        <p:txBody>
-          <a:bodyPr wrap="square" rtlCol="0" anchor="ctr"/>
-          <a:lstStyle/>
-          <a:p>
-            <a:pPr algn="r" indent="0" marL="0">
-              <a:buNone/>
-            </a:pPr>
-            <a:r>
-              <a:rPr lang="en-US" sz="1000" b="1" dirty="0">
-                <a:solidFill>
-                  <a:srgbClr val="2C7A57"/>
-                </a:solidFill>
-                <a:latin typeface="Calibri" pitchFamily="34" charset="0"/>
-                <a:ea typeface="Calibri" pitchFamily="34" charset="-122"/>
-                <a:cs typeface="Calibri" pitchFamily="34" charset="-120"/>
-              </a:rPr>
-              <a:t>$524</a:t>
-            </a:r>
-            <a:endParaRPr lang="en-US" sz="1000" dirty="0"/>
-          </a:p>
-        </p:txBody>
-      </p:sp>
-      <p:sp>
-        <p:nvSpPr>
-          <p:cNvPr id="31" name="Text 28"/>
-          <p:cNvSpPr/>
-          <p:nvPr/>
-        </p:nvSpPr>
-        <p:spPr>
-          <a:xfrm>
-            <a:off x="6263640" y="5477256"/>
-            <a:ext cx="4023360" cy="274320"/>
-          </a:xfrm>
-          <a:prstGeom prst="rect">
-            <a:avLst/>
-          </a:prstGeom>
-          <a:noFill/>
-          <a:ln/>
-        </p:spPr>
-        <p:txBody>
-          <a:bodyPr wrap="square" rtlCol="0" anchor="ctr"/>
-          <a:lstStyle/>
-          <a:p>
-            <a:pPr indent="0" marL="0">
-              <a:buNone/>
-            </a:pPr>
-            <a:r>
-              <a:rPr lang="en-US" sz="1000" dirty="0">
-                <a:solidFill>
-                  <a:srgbClr val="1A1A2E"/>
-                </a:solidFill>
-                <a:latin typeface="Calibri" pitchFamily="34" charset="0"/>
-                <a:ea typeface="Calibri" pitchFamily="34" charset="-122"/>
-                <a:cs typeface="Calibri" pitchFamily="34" charset="-120"/>
-              </a:rPr>
-              <a:t>P0000 — Bars (new market)</a:t>
-            </a:r>
-            <a:endParaRPr lang="en-US" sz="1000" dirty="0"/>
-          </a:p>
-        </p:txBody>
-      </p:sp>
-      <p:sp>
-        <p:nvSpPr>
-          <p:cNvPr id="32" name="Text 29"/>
-          <p:cNvSpPr/>
-          <p:nvPr/>
-        </p:nvSpPr>
-        <p:spPr>
-          <a:xfrm>
-            <a:off x="10195560" y="5477256"/>
-            <a:ext cx="1463040" cy="274320"/>
-          </a:xfrm>
-          <a:prstGeom prst="rect">
-            <a:avLst/>
-          </a:prstGeom>
-          <a:noFill/>
-          <a:ln/>
-        </p:spPr>
-        <p:txBody>
-          <a:bodyPr wrap="square" rtlCol="0" anchor="ctr"/>
-          <a:lstStyle/>
-          <a:p>
-            <a:pPr algn="r" indent="0" marL="0">
-              <a:buNone/>
-            </a:pPr>
-            <a:r>
-              <a:rPr lang="en-US" sz="1000" b="1" dirty="0">
-                <a:solidFill>
-                  <a:srgbClr val="2C7A57"/>
-                </a:solidFill>
-                <a:latin typeface="Calibri" pitchFamily="34" charset="0"/>
-                <a:ea typeface="Calibri" pitchFamily="34" charset="-122"/>
-                <a:cs typeface="Calibri" pitchFamily="34" charset="-120"/>
-              </a:rPr>
-              <a:t>$500</a:t>
-            </a:r>
-            <a:endParaRPr lang="en-US" sz="1000" dirty="0"/>
-          </a:p>
-        </p:txBody>
-      </p:sp>
-      <p:sp>
-        <p:nvSpPr>
-          <p:cNvPr id="33" name="Text 30"/>
-          <p:cNvSpPr/>
-          <p:nvPr/>
-        </p:nvSpPr>
-        <p:spPr>
-          <a:xfrm>
-            <a:off x="6263640" y="5769864"/>
-            <a:ext cx="4023360" cy="274320"/>
-          </a:xfrm>
-          <a:prstGeom prst="rect">
-            <a:avLst/>
-          </a:prstGeom>
-          <a:noFill/>
-          <a:ln/>
-        </p:spPr>
-        <p:txBody>
-          <a:bodyPr wrap="square" rtlCol="0" anchor="ctr"/>
-          <a:lstStyle/>
-          <a:p>
-            <a:pPr indent="0" marL="0">
-              <a:buNone/>
-            </a:pPr>
-            <a:r>
-              <a:rPr lang="en-US" sz="1000" dirty="0">
-                <a:solidFill>
-                  <a:srgbClr val="1A1A2E"/>
-                </a:solidFill>
-                <a:latin typeface="Calibri" pitchFamily="34" charset="0"/>
-                <a:ea typeface="Calibri" pitchFamily="34" charset="-122"/>
-                <a:cs typeface="Calibri" pitchFamily="34" charset="-120"/>
-              </a:rPr>
-              <a:t>P0001 — Bars (new market)</a:t>
-            </a:r>
-            <a:endParaRPr lang="en-US" sz="1000" dirty="0"/>
-          </a:p>
-        </p:txBody>
-      </p:sp>
-      <p:sp>
-        <p:nvSpPr>
-          <p:cNvPr id="34" name="Text 31"/>
-          <p:cNvSpPr/>
-          <p:nvPr/>
-        </p:nvSpPr>
-        <p:spPr>
-          <a:xfrm>
-            <a:off x="10195560" y="5769864"/>
-            <a:ext cx="1463040" cy="274320"/>
-          </a:xfrm>
-          <a:prstGeom prst="rect">
-            <a:avLst/>
-          </a:prstGeom>
-          <a:noFill/>
-          <a:ln/>
-        </p:spPr>
-        <p:txBody>
-          <a:bodyPr wrap="square" rtlCol="0" anchor="ctr"/>
-          <a:lstStyle/>
-          <a:p>
-            <a:pPr algn="r" indent="0" marL="0">
-              <a:buNone/>
-            </a:pPr>
-            <a:r>
-              <a:rPr lang="en-US" sz="1000" b="1" dirty="0">
-                <a:solidFill>
-                  <a:srgbClr val="2C7A57"/>
-                </a:solidFill>
-                <a:latin typeface="Calibri" pitchFamily="34" charset="0"/>
-                <a:ea typeface="Calibri" pitchFamily="34" charset="-122"/>
-                <a:cs typeface="Calibri" pitchFamily="34" charset="-120"/>
-              </a:rPr>
-              <a:t>$496</a:t>
-            </a:r>
-            <a:endParaRPr lang="en-US" sz="1000" dirty="0"/>
-          </a:p>
-        </p:txBody>
-      </p:sp>
-      <p:sp>
-        <p:nvSpPr>
-          <p:cNvPr id="35" name="Text 32"/>
-          <p:cNvSpPr/>
-          <p:nvPr/>
-        </p:nvSpPr>
-        <p:spPr>
-          <a:xfrm>
-            <a:off x="548640" y="6080760"/>
-            <a:ext cx="11064240" cy="411480"/>
-          </a:xfrm>
-          <a:prstGeom prst="rect">
-            <a:avLst/>
-          </a:prstGeom>
-          <a:noFill/>
-          <a:ln/>
-        </p:spPr>
-        <p:txBody>
-          <a:bodyPr wrap="square" rtlCol="0" anchor="ctr"/>
-          <a:lstStyle/>
-          <a:p>
-            <a:pPr indent="0" marL="0">
-              <a:lnSpc>
-                <a:spcPts val="1200"/>
-              </a:lnSpc>
-              <a:buNone/>
-            </a:pPr>
-            <a:r>
-              <a:rPr lang="en-US" sz="1000" i="1" dirty="0">
-                <a:solidFill>
-                  <a:srgbClr val="5B6178"/>
-                </a:solidFill>
-                <a:latin typeface="Calibri" pitchFamily="34" charset="0"/>
-                <a:ea typeface="Calibri" pitchFamily="34" charset="-122"/>
-                <a:cs typeface="Calibri" pitchFamily="34" charset="-120"/>
-              </a:rPr>
-              <a:t>Flags come from 5-fold out-of-fold predictions, never a model scoring the venue it was trained on. The calibrated-lift feature carries near-zero importance — honest, since it's constant within venue_type once venue_type itself is a feature.</a:t>
-            </a:r>
-            <a:endParaRPr lang="en-US" sz="1000" dirty="0"/>
-          </a:p>
-        </p:txBody>
-      </p:sp>
-      <p:sp>
-        <p:nvSpPr>
-          <p:cNvPr id="36" name="Text 33"/>
-          <p:cNvSpPr/>
-          <p:nvPr/>
-        </p:nvSpPr>
-        <p:spPr>
-          <a:xfrm>
-            <a:off x="457200" y="6537960"/>
-            <a:ext cx="7315200" cy="274320"/>
-          </a:xfrm>
-          <a:prstGeom prst="rect">
-            <a:avLst/>
-          </a:prstGeom>
-          <a:noFill/>
-          <a:ln/>
-        </p:spPr>
-        <p:txBody>
-          <a:bodyPr wrap="square" rtlCol="0" anchor="ctr"/>
-          <a:lstStyle/>
-          <a:p>
-            <a:pPr indent="0" marL="0">
-              <a:buNone/>
-            </a:pPr>
-            <a:r>
-              <a:rPr lang="en-US" sz="900" dirty="0">
-                <a:solidFill>
-                  <a:srgbClr val="5B6178"/>
-                </a:solidFill>
-                <a:latin typeface="Calibri" pitchFamily="34" charset="0"/>
-                <a:ea typeface="Calibri" pitchFamily="34" charset="-122"/>
-                <a:cs typeface="Calibri" pitchFamily="34" charset="-120"/>
-              </a:rPr>
-              <a:t>Venue economics</a:t>
-            </a:r>
-            <a:endParaRPr lang="en-US" sz="900" dirty="0"/>
-          </a:p>
-        </p:txBody>
-      </p:sp>
-      <p:sp>
-        <p:nvSpPr>
-          <p:cNvPr id="37" name="Text 34"/>
-          <p:cNvSpPr/>
-          <p:nvPr/>
-        </p:nvSpPr>
-        <p:spPr>
-          <a:xfrm>
-            <a:off x="7589520" y="6537960"/>
-            <a:ext cx="4114800" cy="274320"/>
-          </a:xfrm>
-          <a:prstGeom prst="rect">
-            <a:avLst/>
-          </a:prstGeom>
-          <a:noFill/>
-          <a:ln/>
-        </p:spPr>
-        <p:txBody>
-          <a:bodyPr wrap="square" rtlCol="0" anchor="ctr"/>
-          <a:lstStyle/>
-          <a:p>
-            <a:pPr algn="r" indent="0" marL="0">
-              <a:buNone/>
-            </a:pPr>
-            <a:r>
-              <a:rPr lang="en-US" sz="900" dirty="0">
-                <a:solidFill>
-                  <a:srgbClr val="5B6178"/>
-                </a:solidFill>
-                <a:latin typeface="Calibri" pitchFamily="34" charset="0"/>
-                <a:ea typeface="Calibri" pitchFamily="34" charset="-122"/>
-                <a:cs typeface="Calibri" pitchFamily="34" charset="-120"/>
-              </a:rPr>
-              <a:t>Synthetic demo — validated against a known injected ground truth</a:t>
-            </a:r>
-            <a:endParaRPr lang="en-US" sz="900" dirty="0"/>
           </a:p>
         </p:txBody>
       </p:sp>
@@ -6934,7 +6594,7 @@
                 <a:ea typeface="Cambria" pitchFamily="34" charset="-122"/>
                 <a:cs typeface="Cambria" pitchFamily="34" charset="-120"/>
               </a:rPr>
-              <a:t>Predicting venue churn risk, honestly</a:t>
+              <a:t>Predicting venue ad-revenue, honestly</a:t>
             </a:r>
             <a:endParaRPr lang="en-US" sz="2500" dirty="0"/>
           </a:p>
@@ -6965,7 +6625,7 @@
               <a:buNone/>
             </a:pPr>
             <a:r>
-              <a:rPr lang="en-US" sz="1200" i="1" dirty="0">
+              <a:rPr lang="en-US" sz="1250" i="1" dirty="0">
                 <a:solidFill>
                   <a:srgbClr val="5B6178"/>
                 </a:solidFill>
@@ -6973,9 +6633,9 @@
                 <a:ea typeface="Calibri" pitchFamily="34" charset="-122"/>
                 <a:cs typeface="Calibri" pitchFamily="34" charset="-120"/>
               </a:rPr>
-              <a:t>Gradient-boosted classifier on ops-visible signals (engagement, uptime, complaints, competitor outreach) — the other half of "what makes a venue valuable and what puts it at risk."</a:t>
-            </a:r>
-            <a:endParaRPr lang="en-US" sz="1200" dirty="0"/>
+              <a:t>Gradient-boosted trees on observable venue characteristics + the calibrated per-exposure lift as a feature.</a:t>
+            </a:r>
+            <a:endParaRPr lang="en-US" sz="1250" dirty="0"/>
           </a:p>
         </p:txBody>
       </p:sp>
@@ -7034,7 +6694,7 @@
                 <a:ea typeface="Calibri" pitchFamily="34" charset="-122"/>
                 <a:cs typeface="Calibri" pitchFamily="34" charset="-120"/>
               </a:rPr>
-              <a:t>0.65</a:t>
+              <a:t>0.84</a:t>
             </a:r>
             <a:endParaRPr lang="en-US" sz="2200" dirty="0"/>
           </a:p>
@@ -7065,7 +6725,7 @@
               <a:buNone/>
             </a:pPr>
             <a:r>
-              <a:rPr lang="en-US" sz="900" dirty="0">
+              <a:rPr lang="en-US" sz="950" dirty="0">
                 <a:solidFill>
                   <a:srgbClr val="5B6178"/>
                 </a:solidFill>
@@ -7073,9 +6733,9 @@
                 <a:ea typeface="Calibri" pitchFamily="34" charset="-122"/>
                 <a:cs typeface="Calibri" pitchFamily="34" charset="-120"/>
               </a:rPr>
-              <a:t>Held-out AUC (oracle ceiling: 0.73)</a:t>
-            </a:r>
-            <a:endParaRPr lang="en-US" sz="900" dirty="0"/>
+              <a:t>Held-out R²</a:t>
+            </a:r>
+            <a:endParaRPr lang="en-US" sz="950" dirty="0"/>
           </a:p>
         </p:txBody>
       </p:sp>
@@ -7134,7 +6794,7 @@
                 <a:ea typeface="Calibri" pitchFamily="34" charset="-122"/>
                 <a:cs typeface="Calibri" pitchFamily="34" charset="-120"/>
               </a:rPr>
-              <a:t>0.27</a:t>
+              <a:t>22.1%</a:t>
             </a:r>
             <a:endParaRPr lang="en-US" sz="2200" dirty="0"/>
           </a:p>
@@ -7165,7 +6825,7 @@
               <a:buNone/>
             </a:pPr>
             <a:r>
-              <a:rPr lang="en-US" sz="900" dirty="0">
+              <a:rPr lang="en-US" sz="950" dirty="0">
                 <a:solidFill>
                   <a:srgbClr val="5B6178"/>
                 </a:solidFill>
@@ -7173,9 +6833,9 @@
                 <a:ea typeface="Calibri" pitchFamily="34" charset="-122"/>
                 <a:cs typeface="Calibri" pitchFamily="34" charset="-120"/>
               </a:rPr>
-              <a:t>Held-out PR-AUC</a:t>
-            </a:r>
-            <a:endParaRPr lang="en-US" sz="900" dirty="0"/>
+              <a:t>Held-out MAPE</a:t>
+            </a:r>
+            <a:endParaRPr lang="en-US" sz="950" dirty="0"/>
           </a:p>
         </p:txBody>
       </p:sp>
@@ -7234,7 +6894,7 @@
                 <a:ea typeface="Calibri" pitchFamily="34" charset="-122"/>
                 <a:cs typeface="Calibri" pitchFamily="34" charset="-120"/>
               </a:rPr>
-              <a:t>0.73</a:t>
+              <a:t>0.94</a:t>
             </a:r>
             <a:endParaRPr lang="en-US" sz="2200" dirty="0"/>
           </a:p>
@@ -7265,7 +6925,7 @@
               <a:buNone/>
             </a:pPr>
             <a:r>
-              <a:rPr lang="en-US" sz="900" dirty="0">
+              <a:rPr lang="en-US" sz="950" dirty="0">
                 <a:solidFill>
                   <a:srgbClr val="5B6178"/>
                 </a:solidFill>
@@ -7273,9 +6933,9 @@
                 <a:ea typeface="Calibri" pitchFamily="34" charset="-122"/>
                 <a:cs typeface="Calibri" pitchFamily="34" charset="-120"/>
               </a:rPr>
-              <a:t>OOF corr. w/ latent true risk</a:t>
-            </a:r>
-            <a:endParaRPr lang="en-US" sz="900" dirty="0"/>
+              <a:t>Corr. w/ latent true potential</a:t>
+            </a:r>
+            <a:endParaRPr lang="en-US" sz="950" dirty="0"/>
           </a:p>
         </p:txBody>
       </p:sp>
@@ -7334,7 +6994,7 @@
                 <a:ea typeface="Calibri" pitchFamily="34" charset="-122"/>
                 <a:cs typeface="Calibri" pitchFamily="34" charset="-120"/>
               </a:rPr>
-              <a:t>100% vs 31%</a:t>
+              <a:t>90% vs 28%</a:t>
             </a:r>
             <a:endParaRPr lang="en-US" sz="2200" dirty="0"/>
           </a:p>
@@ -7365,7 +7025,7 @@
               <a:buNone/>
             </a:pPr>
             <a:r>
-              <a:rPr lang="en-US" sz="900" dirty="0">
+              <a:rPr lang="en-US" sz="950" dirty="0">
                 <a:solidFill>
                   <a:srgbClr val="5B6178"/>
                 </a:solidFill>
@@ -7373,9 +7033,9 @@
                 <a:ea typeface="Calibri" pitchFamily="34" charset="-122"/>
                 <a:cs typeface="Calibri" pitchFamily="34" charset="-120"/>
               </a:rPr>
-              <a:t>Flagged-tail latent risk rate</a:t>
-            </a:r>
-            <a:endParaRPr lang="en-US" sz="900" dirty="0"/>
+              <a:t>Flagged-tail latent gap rate</a:t>
+            </a:r>
+            <a:endParaRPr lang="en-US" sz="950" dirty="0"/>
           </a:p>
         </p:txBody>
       </p:sp>
@@ -7404,7 +7064,7 @@
         <p:spPr>
           <a:xfrm>
             <a:off x="6263640" y="2880360"/>
-            <a:ext cx="5394960" cy="256032"/>
+            <a:ext cx="5394960" cy="274320"/>
           </a:xfrm>
           <a:prstGeom prst="rect">
             <a:avLst/>
@@ -7428,7 +7088,7 @@
                 <a:ea typeface="Cambria" pitchFamily="34" charset="-122"/>
                 <a:cs typeface="Cambria" pitchFamily="34" charset="-120"/>
               </a:rPr>
-              <a:t>Top at-risk venues (of 20 flagged, by OOF risk)</a:t>
+              <a:t>Top under-monetized venues (of 20 flagged)</a:t>
             </a:r>
             <a:endParaRPr lang="en-US" sz="1200" dirty="0"/>
           </a:p>
@@ -7442,8 +7102,8 @@
         </p:nvSpPr>
         <p:spPr>
           <a:xfrm>
-            <a:off x="6263640" y="3172968"/>
-            <a:ext cx="3977640" cy="219456"/>
+            <a:off x="6263640" y="3209544"/>
+            <a:ext cx="3657600" cy="274320"/>
           </a:xfrm>
           <a:prstGeom prst="rect">
             <a:avLst/>
@@ -7467,7 +7127,7 @@
                 <a:ea typeface="Calibri" pitchFamily="34" charset="-122"/>
                 <a:cs typeface="Calibri" pitchFamily="34" charset="-120"/>
               </a:rPr>
-              <a:t>Venue #281 (Bars)</a:t>
+              <a:t>Venue #85 (Restaurants)</a:t>
             </a:r>
             <a:endParaRPr lang="en-US" sz="1000" dirty="0"/>
           </a:p>
@@ -7481,8 +7141,8 @@
         </p:nvSpPr>
         <p:spPr>
           <a:xfrm>
-            <a:off x="10241280" y="3172968"/>
-            <a:ext cx="1417320" cy="219456"/>
+            <a:off x="9966960" y="3209544"/>
+            <a:ext cx="1691640" cy="274320"/>
           </a:xfrm>
           <a:prstGeom prst="rect">
             <a:avLst/>
@@ -7506,7 +7166,7 @@
                 <a:ea typeface="Calibri" pitchFamily="34" charset="-122"/>
                 <a:cs typeface="Calibri" pitchFamily="34" charset="-120"/>
               </a:rPr>
-              <a:t>60%</a:t>
+              <a:t>-62%</a:t>
             </a:r>
             <a:endParaRPr lang="en-US" sz="1000" dirty="0"/>
           </a:p>
@@ -7520,34 +7180,34 @@
         </p:nvSpPr>
         <p:spPr>
           <a:xfrm>
-            <a:off x="6263640" y="3374136"/>
-            <a:ext cx="5394960" cy="201168"/>
-          </a:xfrm>
-          <a:prstGeom prst="rect">
-            <a:avLst/>
-          </a:prstGeom>
-          <a:noFill/>
-          <a:ln/>
-        </p:spPr>
-        <p:txBody>
-          <a:bodyPr wrap="square" rtlCol="0" anchor="ctr"/>
-          <a:lstStyle/>
-          <a:p>
-            <a:pPr indent="0" marL="0">
-              <a:buNone/>
-            </a:pPr>
-            <a:r>
-              <a:rPr lang="en-US" sz="900" i="1" dirty="0">
-                <a:solidFill>
-                  <a:srgbClr val="8A4B0A"/>
-                </a:solidFill>
-                <a:latin typeface="Calibri" pitchFamily="34" charset="0"/>
-                <a:ea typeface="Calibri" pitchFamily="34" charset="-122"/>
-                <a:cs typeface="Calibri" pitchFamily="34" charset="-120"/>
-              </a:rPr>
-              <a:t>engagement declining → content/placement review</a:t>
-            </a:r>
-            <a:endParaRPr lang="en-US" sz="900" dirty="0"/>
+            <a:off x="6263640" y="3502152"/>
+            <a:ext cx="3657600" cy="274320"/>
+          </a:xfrm>
+          <a:prstGeom prst="rect">
+            <a:avLst/>
+          </a:prstGeom>
+          <a:noFill/>
+          <a:ln/>
+        </p:spPr>
+        <p:txBody>
+          <a:bodyPr wrap="square" rtlCol="0" anchor="ctr"/>
+          <a:lstStyle/>
+          <a:p>
+            <a:pPr indent="0" marL="0">
+              <a:buNone/>
+            </a:pPr>
+            <a:r>
+              <a:rPr lang="en-US" sz="1000" dirty="0">
+                <a:solidFill>
+                  <a:srgbClr val="1A1A2E"/>
+                </a:solidFill>
+                <a:latin typeface="Calibri" pitchFamily="34" charset="0"/>
+                <a:ea typeface="Calibri" pitchFamily="34" charset="-122"/>
+                <a:cs typeface="Calibri" pitchFamily="34" charset="-120"/>
+              </a:rPr>
+              <a:t>Venue #309 (Waiting Rooms)</a:t>
+            </a:r>
+            <a:endParaRPr lang="en-US" sz="1000" dirty="0"/>
           </a:p>
         </p:txBody>
       </p:sp>
@@ -7559,8 +7219,47 @@
         </p:nvSpPr>
         <p:spPr>
           <a:xfrm>
-            <a:off x="6263640" y="3593592"/>
-            <a:ext cx="3977640" cy="219456"/>
+            <a:off x="9966960" y="3502152"/>
+            <a:ext cx="1691640" cy="274320"/>
+          </a:xfrm>
+          <a:prstGeom prst="rect">
+            <a:avLst/>
+          </a:prstGeom>
+          <a:noFill/>
+          <a:ln/>
+        </p:spPr>
+        <p:txBody>
+          <a:bodyPr wrap="square" rtlCol="0" anchor="ctr"/>
+          <a:lstStyle/>
+          <a:p>
+            <a:pPr algn="r" indent="0" marL="0">
+              <a:buNone/>
+            </a:pPr>
+            <a:r>
+              <a:rPr lang="en-US" sz="1000" b="1" dirty="0">
+                <a:solidFill>
+                  <a:srgbClr val="B8500A"/>
+                </a:solidFill>
+                <a:latin typeface="Calibri" pitchFamily="34" charset="0"/>
+                <a:ea typeface="Calibri" pitchFamily="34" charset="-122"/>
+                <a:cs typeface="Calibri" pitchFamily="34" charset="-120"/>
+              </a:rPr>
+              <a:t>-61%</a:t>
+            </a:r>
+            <a:endParaRPr lang="en-US" sz="1000" dirty="0"/>
+          </a:p>
+        </p:txBody>
+      </p:sp>
+      <p:sp>
+        <p:nvSpPr>
+          <p:cNvPr id="22" name="Text 19"/>
+          <p:cNvSpPr/>
+          <p:nvPr/>
+        </p:nvSpPr>
+        <p:spPr>
+          <a:xfrm>
+            <a:off x="6263640" y="3794760"/>
+            <a:ext cx="3657600" cy="274320"/>
           </a:xfrm>
           <a:prstGeom prst="rect">
             <a:avLst/>
@@ -7584,7 +7283,7 @@
                 <a:ea typeface="Calibri" pitchFamily="34" charset="-122"/>
                 <a:cs typeface="Calibri" pitchFamily="34" charset="-120"/>
               </a:rPr>
-              <a:t>Venue #200 (Bars)</a:t>
+              <a:t>Venue #53 (Restaurants)</a:t>
             </a:r>
             <a:endParaRPr lang="en-US" sz="1000" dirty="0"/>
           </a:p>
@@ -7592,14 +7291,14 @@
       </p:sp>
       <p:sp>
         <p:nvSpPr>
-          <p:cNvPr id="22" name="Text 19"/>
-          <p:cNvSpPr/>
-          <p:nvPr/>
-        </p:nvSpPr>
-        <p:spPr>
-          <a:xfrm>
-            <a:off x="10241280" y="3593592"/>
-            <a:ext cx="1417320" cy="219456"/>
+          <p:cNvPr id="23" name="Text 20"/>
+          <p:cNvSpPr/>
+          <p:nvPr/>
+        </p:nvSpPr>
+        <p:spPr>
+          <a:xfrm>
+            <a:off x="9966960" y="3794760"/>
+            <a:ext cx="1691640" cy="274320"/>
           </a:xfrm>
           <a:prstGeom prst="rect">
             <a:avLst/>
@@ -7623,7 +7322,7 @@
                 <a:ea typeface="Calibri" pitchFamily="34" charset="-122"/>
                 <a:cs typeface="Calibri" pitchFamily="34" charset="-120"/>
               </a:rPr>
-              <a:t>55%</a:t>
+              <a:t>-61%</a:t>
             </a:r>
             <a:endParaRPr lang="en-US" sz="1000" dirty="0"/>
           </a:p>
@@ -7631,53 +7330,14 @@
       </p:sp>
       <p:sp>
         <p:nvSpPr>
-          <p:cNvPr id="23" name="Text 20"/>
-          <p:cNvSpPr/>
-          <p:nvPr/>
-        </p:nvSpPr>
-        <p:spPr>
-          <a:xfrm>
-            <a:off x="6263640" y="3794760"/>
-            <a:ext cx="5394960" cy="201168"/>
-          </a:xfrm>
-          <a:prstGeom prst="rect">
-            <a:avLst/>
-          </a:prstGeom>
-          <a:noFill/>
-          <a:ln/>
-        </p:spPr>
-        <p:txBody>
-          <a:bodyPr wrap="square" rtlCol="0" anchor="ctr"/>
-          <a:lstStyle/>
-          <a:p>
-            <a:pPr indent="0" marL="0">
-              <a:buNone/>
-            </a:pPr>
-            <a:r>
-              <a:rPr lang="en-US" sz="900" i="1" dirty="0">
-                <a:solidFill>
-                  <a:srgbClr val="8A4B0A"/>
-                </a:solidFill>
-                <a:latin typeface="Calibri" pitchFamily="34" charset="0"/>
-                <a:ea typeface="Calibri" pitchFamily="34" charset="-122"/>
-                <a:cs typeface="Calibri" pitchFamily="34" charset="-120"/>
-              </a:rPr>
-              <a:t>engagement declining → content/placement review</a:t>
-            </a:r>
-            <a:endParaRPr lang="en-US" sz="900" dirty="0"/>
-          </a:p>
-        </p:txBody>
-      </p:sp>
-      <p:sp>
-        <p:nvSpPr>
           <p:cNvPr id="24" name="Text 21"/>
           <p:cNvSpPr/>
           <p:nvPr/>
         </p:nvSpPr>
         <p:spPr>
           <a:xfrm>
-            <a:off x="6263640" y="4014216"/>
-            <a:ext cx="3977640" cy="219456"/>
+            <a:off x="6263640" y="4087368"/>
+            <a:ext cx="3657600" cy="274320"/>
           </a:xfrm>
           <a:prstGeom prst="rect">
             <a:avLst/>
@@ -7701,7 +7361,7 @@
                 <a:ea typeface="Calibri" pitchFamily="34" charset="-122"/>
                 <a:cs typeface="Calibri" pitchFamily="34" charset="-120"/>
               </a:rPr>
-              <a:t>Venue #12 (Restaurants)</a:t>
+              <a:t>Venue #247 (Bars)</a:t>
             </a:r>
             <a:endParaRPr lang="en-US" sz="1000" dirty="0"/>
           </a:p>
@@ -7715,8 +7375,8 @@
         </p:nvSpPr>
         <p:spPr>
           <a:xfrm>
-            <a:off x="10241280" y="4014216"/>
-            <a:ext cx="1417320" cy="219456"/>
+            <a:off x="9966960" y="4087368"/>
+            <a:ext cx="1691640" cy="274320"/>
           </a:xfrm>
           <a:prstGeom prst="rect">
             <a:avLst/>
@@ -7740,7 +7400,7 @@
                 <a:ea typeface="Calibri" pitchFamily="34" charset="-122"/>
                 <a:cs typeface="Calibri" pitchFamily="34" charset="-120"/>
               </a:rPr>
-              <a:t>52%</a:t>
+              <a:t>-60%</a:t>
             </a:r>
             <a:endParaRPr lang="en-US" sz="1000" dirty="0"/>
           </a:p>
@@ -7754,47 +7414,8 @@
         </p:nvSpPr>
         <p:spPr>
           <a:xfrm>
-            <a:off x="6263640" y="4215384"/>
-            <a:ext cx="5394960" cy="201168"/>
-          </a:xfrm>
-          <a:prstGeom prst="rect">
-            <a:avLst/>
-          </a:prstGeom>
-          <a:noFill/>
-          <a:ln/>
-        </p:spPr>
-        <p:txBody>
-          <a:bodyPr wrap="square" rtlCol="0" anchor="ctr"/>
-          <a:lstStyle/>
-          <a:p>
-            <a:pPr indent="0" marL="0">
-              <a:buNone/>
-            </a:pPr>
-            <a:r>
-              <a:rPr lang="en-US" sz="900" i="1" dirty="0">
-                <a:solidFill>
-                  <a:srgbClr val="8A4B0A"/>
-                </a:solidFill>
-                <a:latin typeface="Calibri" pitchFamily="34" charset="0"/>
-                <a:ea typeface="Calibri" pitchFamily="34" charset="-122"/>
-                <a:cs typeface="Calibri" pitchFamily="34" charset="-120"/>
-              </a:rPr>
-              <a:t>uptime issue → dispatch technical support</a:t>
-            </a:r>
-            <a:endParaRPr lang="en-US" sz="900" dirty="0"/>
-          </a:p>
-        </p:txBody>
-      </p:sp>
-      <p:sp>
-        <p:nvSpPr>
-          <p:cNvPr id="27" name="Text 24"/>
-          <p:cNvSpPr/>
-          <p:nvPr/>
-        </p:nvSpPr>
-        <p:spPr>
-          <a:xfrm>
-            <a:off x="6263640" y="4526280"/>
-            <a:ext cx="5394960" cy="237744"/>
+            <a:off x="6263640" y="4562856"/>
+            <a:ext cx="5394960" cy="274320"/>
           </a:xfrm>
           <a:prstGeom prst="rect">
             <a:avLst/>
@@ -7818,7 +7439,7 @@
                 <a:ea typeface="Cambria" pitchFamily="34" charset="-122"/>
                 <a:cs typeface="Cambria" pitchFamily="34" charset="-120"/>
               </a:rPr>
-              <a:t>Priority quadrant (Q3 revenue × Q4 risk)</a:t>
+              <a:t>Top prospect venues (expansion priority)</a:t>
             </a:r>
             <a:endParaRPr lang="en-US" sz="1200" dirty="0"/>
           </a:p>
@@ -7826,14 +7447,92 @@
       </p:sp>
       <p:sp>
         <p:nvSpPr>
+          <p:cNvPr id="27" name="Text 24"/>
+          <p:cNvSpPr/>
+          <p:nvPr/>
+        </p:nvSpPr>
+        <p:spPr>
+          <a:xfrm>
+            <a:off x="6263640" y="4892040"/>
+            <a:ext cx="4023360" cy="274320"/>
+          </a:xfrm>
+          <a:prstGeom prst="rect">
+            <a:avLst/>
+          </a:prstGeom>
+          <a:noFill/>
+          <a:ln/>
+        </p:spPr>
+        <p:txBody>
+          <a:bodyPr wrap="square" rtlCol="0" anchor="ctr"/>
+          <a:lstStyle/>
+          <a:p>
+            <a:pPr indent="0" marL="0">
+              <a:buNone/>
+            </a:pPr>
+            <a:r>
+              <a:rPr lang="en-US" sz="1000" dirty="0">
+                <a:solidFill>
+                  <a:srgbClr val="1A1A2E"/>
+                </a:solidFill>
+                <a:latin typeface="Calibri" pitchFamily="34" charset="0"/>
+                <a:ea typeface="Calibri" pitchFamily="34" charset="-122"/>
+                <a:cs typeface="Calibri" pitchFamily="34" charset="-120"/>
+              </a:rPr>
+              <a:t>P0018 — Bars (existing market)</a:t>
+            </a:r>
+            <a:endParaRPr lang="en-US" sz="1000" dirty="0"/>
+          </a:p>
+        </p:txBody>
+      </p:sp>
+      <p:sp>
+        <p:nvSpPr>
           <p:cNvPr id="28" name="Text 25"/>
           <p:cNvSpPr/>
           <p:nvPr/>
         </p:nvSpPr>
         <p:spPr>
           <a:xfrm>
-            <a:off x="6263640" y="4800600"/>
-            <a:ext cx="4023360" cy="237744"/>
+            <a:off x="10195560" y="4892040"/>
+            <a:ext cx="1463040" cy="274320"/>
+          </a:xfrm>
+          <a:prstGeom prst="rect">
+            <a:avLst/>
+          </a:prstGeom>
+          <a:noFill/>
+          <a:ln/>
+        </p:spPr>
+        <p:txBody>
+          <a:bodyPr wrap="square" rtlCol="0" anchor="ctr"/>
+          <a:lstStyle/>
+          <a:p>
+            <a:pPr algn="r" indent="0" marL="0">
+              <a:buNone/>
+            </a:pPr>
+            <a:r>
+              <a:rPr lang="en-US" sz="1000" b="1" dirty="0">
+                <a:solidFill>
+                  <a:srgbClr val="2C7A57"/>
+                </a:solidFill>
+                <a:latin typeface="Calibri" pitchFamily="34" charset="0"/>
+                <a:ea typeface="Calibri" pitchFamily="34" charset="-122"/>
+                <a:cs typeface="Calibri" pitchFamily="34" charset="-120"/>
+              </a:rPr>
+              <a:t>$684</a:t>
+            </a:r>
+            <a:endParaRPr lang="en-US" sz="1000" dirty="0"/>
+          </a:p>
+        </p:txBody>
+      </p:sp>
+      <p:sp>
+        <p:nvSpPr>
+          <p:cNvPr id="29" name="Text 26"/>
+          <p:cNvSpPr/>
+          <p:nvPr/>
+        </p:nvSpPr>
+        <p:spPr>
+          <a:xfrm>
+            <a:off x="6263640" y="5184648"/>
+            <a:ext cx="4023360" cy="274320"/>
           </a:xfrm>
           <a:prstGeom prst="rect">
             <a:avLst/>
@@ -7857,7 +7556,7 @@
                 <a:ea typeface="Calibri" pitchFamily="34" charset="-122"/>
                 <a:cs typeface="Calibri" pitchFamily="34" charset="-120"/>
               </a:rPr>
-              <a:t>Save now (high value, high risk)</a:t>
+              <a:t>P0055 — Restaurants (existing market)</a:t>
             </a:r>
             <a:endParaRPr lang="en-US" sz="1000" dirty="0"/>
           </a:p>
@@ -7865,14 +7564,14 @@
       </p:sp>
       <p:sp>
         <p:nvSpPr>
-          <p:cNvPr id="29" name="Text 26"/>
-          <p:cNvSpPr/>
-          <p:nvPr/>
-        </p:nvSpPr>
-        <p:spPr>
-          <a:xfrm>
-            <a:off x="10195560" y="4800600"/>
-            <a:ext cx="1463040" cy="237744"/>
+          <p:cNvPr id="30" name="Text 27"/>
+          <p:cNvSpPr/>
+          <p:nvPr/>
+        </p:nvSpPr>
+        <p:spPr>
+          <a:xfrm>
+            <a:off x="10195560" y="5184648"/>
+            <a:ext cx="1463040" cy="274320"/>
           </a:xfrm>
           <a:prstGeom prst="rect">
             <a:avLst/>
@@ -7890,13 +7589,13 @@
             <a:r>
               <a:rPr lang="en-US" sz="1000" b="1" dirty="0">
                 <a:solidFill>
-                  <a:srgbClr val="B8500A"/>
-                </a:solidFill>
-                <a:latin typeface="Calibri" pitchFamily="34" charset="0"/>
-                <a:ea typeface="Calibri" pitchFamily="34" charset="-122"/>
-                <a:cs typeface="Calibri" pitchFamily="34" charset="-120"/>
-              </a:rPr>
-              <a:t>136</a:t>
+                  <a:srgbClr val="2C7A57"/>
+                </a:solidFill>
+                <a:latin typeface="Calibri" pitchFamily="34" charset="0"/>
+                <a:ea typeface="Calibri" pitchFamily="34" charset="-122"/>
+                <a:cs typeface="Calibri" pitchFamily="34" charset="-120"/>
+              </a:rPr>
+              <a:t>$524</a:t>
             </a:r>
             <a:endParaRPr lang="en-US" sz="1000" dirty="0"/>
           </a:p>
@@ -7904,14 +7603,14 @@
       </p:sp>
       <p:sp>
         <p:nvSpPr>
-          <p:cNvPr id="30" name="Text 27"/>
-          <p:cNvSpPr/>
-          <p:nvPr/>
-        </p:nvSpPr>
-        <p:spPr>
-          <a:xfrm>
-            <a:off x="6263640" y="5047488"/>
-            <a:ext cx="4023360" cy="237744"/>
+          <p:cNvPr id="31" name="Text 28"/>
+          <p:cNvSpPr/>
+          <p:nvPr/>
+        </p:nvSpPr>
+        <p:spPr>
+          <a:xfrm>
+            <a:off x="6263640" y="5477256"/>
+            <a:ext cx="4023360" cy="274320"/>
           </a:xfrm>
           <a:prstGeom prst="rect">
             <a:avLst/>
@@ -7935,7 +7634,7 @@
                 <a:ea typeface="Calibri" pitchFamily="34" charset="-122"/>
                 <a:cs typeface="Calibri" pitchFamily="34" charset="-120"/>
               </a:rPr>
-              <a:t>Monitor (low value, low risk)</a:t>
+              <a:t>P0000 — Bars (new market)</a:t>
             </a:r>
             <a:endParaRPr lang="en-US" sz="1000" dirty="0"/>
           </a:p>
@@ -7943,14 +7642,14 @@
       </p:sp>
       <p:sp>
         <p:nvSpPr>
-          <p:cNvPr id="31" name="Text 28"/>
-          <p:cNvSpPr/>
-          <p:nvPr/>
-        </p:nvSpPr>
-        <p:spPr>
-          <a:xfrm>
-            <a:off x="10195560" y="5047488"/>
-            <a:ext cx="1463040" cy="237744"/>
+          <p:cNvPr id="32" name="Text 29"/>
+          <p:cNvSpPr/>
+          <p:nvPr/>
+        </p:nvSpPr>
+        <p:spPr>
+          <a:xfrm>
+            <a:off x="10195560" y="5477256"/>
+            <a:ext cx="1463040" cy="274320"/>
           </a:xfrm>
           <a:prstGeom prst="rect">
             <a:avLst/>
@@ -7968,13 +7667,133 @@
             <a:r>
               <a:rPr lang="en-US" sz="1000" b="1" dirty="0">
                 <a:solidFill>
+                  <a:srgbClr val="2C7A57"/>
+                </a:solidFill>
+                <a:latin typeface="Calibri" pitchFamily="34" charset="0"/>
+                <a:ea typeface="Calibri" pitchFamily="34" charset="-122"/>
+                <a:cs typeface="Calibri" pitchFamily="34" charset="-120"/>
+              </a:rPr>
+              <a:t>$500</a:t>
+            </a:r>
+            <a:endParaRPr lang="en-US" sz="1000" dirty="0"/>
+          </a:p>
+        </p:txBody>
+      </p:sp>
+      <p:sp>
+        <p:nvSpPr>
+          <p:cNvPr id="33" name="Text 30"/>
+          <p:cNvSpPr/>
+          <p:nvPr/>
+        </p:nvSpPr>
+        <p:spPr>
+          <a:xfrm>
+            <a:off x="6263640" y="5769864"/>
+            <a:ext cx="4023360" cy="274320"/>
+          </a:xfrm>
+          <a:prstGeom prst="rect">
+            <a:avLst/>
+          </a:prstGeom>
+          <a:noFill/>
+          <a:ln/>
+        </p:spPr>
+        <p:txBody>
+          <a:bodyPr wrap="square" rtlCol="0" anchor="ctr"/>
+          <a:lstStyle/>
+          <a:p>
+            <a:pPr indent="0" marL="0">
+              <a:buNone/>
+            </a:pPr>
+            <a:r>
+              <a:rPr lang="en-US" sz="1000" dirty="0">
+                <a:solidFill>
+                  <a:srgbClr val="1A1A2E"/>
+                </a:solidFill>
+                <a:latin typeface="Calibri" pitchFamily="34" charset="0"/>
+                <a:ea typeface="Calibri" pitchFamily="34" charset="-122"/>
+                <a:cs typeface="Calibri" pitchFamily="34" charset="-120"/>
+              </a:rPr>
+              <a:t>P0001 — Bars (new market)</a:t>
+            </a:r>
+            <a:endParaRPr lang="en-US" sz="1000" dirty="0"/>
+          </a:p>
+        </p:txBody>
+      </p:sp>
+      <p:sp>
+        <p:nvSpPr>
+          <p:cNvPr id="34" name="Text 31"/>
+          <p:cNvSpPr/>
+          <p:nvPr/>
+        </p:nvSpPr>
+        <p:spPr>
+          <a:xfrm>
+            <a:off x="10195560" y="5769864"/>
+            <a:ext cx="1463040" cy="274320"/>
+          </a:xfrm>
+          <a:prstGeom prst="rect">
+            <a:avLst/>
+          </a:prstGeom>
+          <a:noFill/>
+          <a:ln/>
+        </p:spPr>
+        <p:txBody>
+          <a:bodyPr wrap="square" rtlCol="0" anchor="ctr"/>
+          <a:lstStyle/>
+          <a:p>
+            <a:pPr algn="r" indent="0" marL="0">
+              <a:buNone/>
+            </a:pPr>
+            <a:r>
+              <a:rPr lang="en-US" sz="1000" b="1" dirty="0">
+                <a:solidFill>
+                  <a:srgbClr val="2C7A57"/>
+                </a:solidFill>
+                <a:latin typeface="Calibri" pitchFamily="34" charset="0"/>
+                <a:ea typeface="Calibri" pitchFamily="34" charset="-122"/>
+                <a:cs typeface="Calibri" pitchFamily="34" charset="-120"/>
+              </a:rPr>
+              <a:t>$496</a:t>
+            </a:r>
+            <a:endParaRPr lang="en-US" sz="1000" dirty="0"/>
+          </a:p>
+        </p:txBody>
+      </p:sp>
+      <p:sp>
+        <p:nvSpPr>
+          <p:cNvPr id="35" name="Text 32"/>
+          <p:cNvSpPr/>
+          <p:nvPr/>
+        </p:nvSpPr>
+        <p:spPr>
+          <a:xfrm>
+            <a:off x="548640" y="6080760"/>
+            <a:ext cx="11064240" cy="411480"/>
+          </a:xfrm>
+          <a:prstGeom prst="rect">
+            <a:avLst/>
+          </a:prstGeom>
+          <a:noFill/>
+          <a:ln/>
+        </p:spPr>
+        <p:txBody>
+          <a:bodyPr wrap="square" rtlCol="0" anchor="ctr"/>
+          <a:lstStyle/>
+          <a:p>
+            <a:pPr indent="0" marL="0">
+              <a:lnSpc>
+                <a:spcPts val="1200"/>
+              </a:lnSpc>
+              <a:buNone/>
+            </a:pPr>
+            <a:r>
+              <a:rPr lang="en-US" sz="1000" i="1" dirty="0">
+                <a:solidFill>
                   <a:srgbClr val="5B6178"/>
                 </a:solidFill>
                 <a:latin typeface="Calibri" pitchFamily="34" charset="0"/>
                 <a:ea typeface="Calibri" pitchFamily="34" charset="-122"/>
                 <a:cs typeface="Calibri" pitchFamily="34" charset="-120"/>
               </a:rPr>
-              <a:t>136</a:t>
+              <a:t>Flags come from 5-fold out-of-fold predictions, never a model scoring the venue it was trained on. The calibrated-lift feature carries near-zero importance — honest, since it's constant within venue_type once venue_type itself is a feature.</a:t>
             </a:r>
             <a:endParaRPr lang="en-US" sz="1000" dirty="0"/>
           </a:p>
@@ -7982,205 +7801,7 @@
       </p:sp>
       <p:sp>
         <p:nvSpPr>
-          <p:cNvPr id="32" name="Text 29"/>
-          <p:cNvSpPr/>
-          <p:nvPr/>
-        </p:nvSpPr>
-        <p:spPr>
-          <a:xfrm>
-            <a:off x="6263640" y="5294376"/>
-            <a:ext cx="4023360" cy="237744"/>
-          </a:xfrm>
-          <a:prstGeom prst="rect">
-            <a:avLst/>
-          </a:prstGeom>
-          <a:noFill/>
-          <a:ln/>
-        </p:spPr>
-        <p:txBody>
-          <a:bodyPr wrap="square" rtlCol="0" anchor="ctr"/>
-          <a:lstStyle/>
-          <a:p>
-            <a:pPr indent="0" marL="0">
-              <a:buNone/>
-            </a:pPr>
-            <a:r>
-              <a:rPr lang="en-US" sz="1000" dirty="0">
-                <a:solidFill>
-                  <a:srgbClr val="1A1A2E"/>
-                </a:solidFill>
-                <a:latin typeface="Calibri" pitchFamily="34" charset="0"/>
-                <a:ea typeface="Calibri" pitchFamily="34" charset="-122"/>
-                <a:cs typeface="Calibri" pitchFamily="34" charset="-120"/>
-              </a:rPr>
-              <a:t>Protect (high value, low risk)</a:t>
-            </a:r>
-            <a:endParaRPr lang="en-US" sz="1000" dirty="0"/>
-          </a:p>
-        </p:txBody>
-      </p:sp>
-      <p:sp>
-        <p:nvSpPr>
-          <p:cNvPr id="33" name="Text 30"/>
-          <p:cNvSpPr/>
-          <p:nvPr/>
-        </p:nvSpPr>
-        <p:spPr>
-          <a:xfrm>
-            <a:off x="10195560" y="5294376"/>
-            <a:ext cx="1463040" cy="237744"/>
-          </a:xfrm>
-          <a:prstGeom prst="rect">
-            <a:avLst/>
-          </a:prstGeom>
-          <a:noFill/>
-          <a:ln/>
-        </p:spPr>
-        <p:txBody>
-          <a:bodyPr wrap="square" rtlCol="0" anchor="ctr"/>
-          <a:lstStyle/>
-          <a:p>
-            <a:pPr algn="r" indent="0" marL="0">
-              <a:buNone/>
-            </a:pPr>
-            <a:r>
-              <a:rPr lang="en-US" sz="1000" b="1" dirty="0">
-                <a:solidFill>
-                  <a:srgbClr val="2C7A57"/>
-                </a:solidFill>
-                <a:latin typeface="Calibri" pitchFamily="34" charset="0"/>
-                <a:ea typeface="Calibri" pitchFamily="34" charset="-122"/>
-                <a:cs typeface="Calibri" pitchFamily="34" charset="-120"/>
-              </a:rPr>
-              <a:t>64</a:t>
-            </a:r>
-            <a:endParaRPr lang="en-US" sz="1000" dirty="0"/>
-          </a:p>
-        </p:txBody>
-      </p:sp>
-      <p:sp>
-        <p:nvSpPr>
-          <p:cNvPr id="34" name="Text 31"/>
-          <p:cNvSpPr/>
-          <p:nvPr/>
-        </p:nvSpPr>
-        <p:spPr>
-          <a:xfrm>
-            <a:off x="6263640" y="5541264"/>
-            <a:ext cx="4023360" cy="237744"/>
-          </a:xfrm>
-          <a:prstGeom prst="rect">
-            <a:avLst/>
-          </a:prstGeom>
-          <a:noFill/>
-          <a:ln/>
-        </p:spPr>
-        <p:txBody>
-          <a:bodyPr wrap="square" rtlCol="0" anchor="ctr"/>
-          <a:lstStyle/>
-          <a:p>
-            <a:pPr indent="0" marL="0">
-              <a:buNone/>
-            </a:pPr>
-            <a:r>
-              <a:rPr lang="en-US" sz="1000" dirty="0">
-                <a:solidFill>
-                  <a:srgbClr val="1A1A2E"/>
-                </a:solidFill>
-                <a:latin typeface="Calibri" pitchFamily="34" charset="0"/>
-                <a:ea typeface="Calibri" pitchFamily="34" charset="-122"/>
-                <a:cs typeface="Calibri" pitchFamily="34" charset="-120"/>
-              </a:rPr>
-              <a:t>Low priority (low value, high risk)</a:t>
-            </a:r>
-            <a:endParaRPr lang="en-US" sz="1000" dirty="0"/>
-          </a:p>
-        </p:txBody>
-      </p:sp>
-      <p:sp>
-        <p:nvSpPr>
-          <p:cNvPr id="35" name="Text 32"/>
-          <p:cNvSpPr/>
-          <p:nvPr/>
-        </p:nvSpPr>
-        <p:spPr>
-          <a:xfrm>
-            <a:off x="10195560" y="5541264"/>
-            <a:ext cx="1463040" cy="237744"/>
-          </a:xfrm>
-          <a:prstGeom prst="rect">
-            <a:avLst/>
-          </a:prstGeom>
-          <a:noFill/>
-          <a:ln/>
-        </p:spPr>
-        <p:txBody>
-          <a:bodyPr wrap="square" rtlCol="0" anchor="ctr"/>
-          <a:lstStyle/>
-          <a:p>
-            <a:pPr algn="r" indent="0" marL="0">
-              <a:buNone/>
-            </a:pPr>
-            <a:r>
-              <a:rPr lang="en-US" sz="1000" b="1" dirty="0">
-                <a:solidFill>
-                  <a:srgbClr val="5B6178"/>
-                </a:solidFill>
-                <a:latin typeface="Calibri" pitchFamily="34" charset="0"/>
-                <a:ea typeface="Calibri" pitchFamily="34" charset="-122"/>
-                <a:cs typeface="Calibri" pitchFamily="34" charset="-120"/>
-              </a:rPr>
-              <a:t>64</a:t>
-            </a:r>
-            <a:endParaRPr lang="en-US" sz="1000" dirty="0"/>
-          </a:p>
-        </p:txBody>
-      </p:sp>
-      <p:sp>
-        <p:nvSpPr>
           <p:cNvPr id="36" name="Text 33"/>
-          <p:cNvSpPr/>
-          <p:nvPr/>
-        </p:nvSpPr>
-        <p:spPr>
-          <a:xfrm>
-            <a:off x="548640" y="6016752"/>
-            <a:ext cx="11064240" cy="548640"/>
-          </a:xfrm>
-          <a:prstGeom prst="rect">
-            <a:avLst/>
-          </a:prstGeom>
-          <a:noFill/>
-          <a:ln/>
-        </p:spPr>
-        <p:txBody>
-          <a:bodyPr wrap="square" rtlCol="0" anchor="ctr"/>
-          <a:lstStyle/>
-          <a:p>
-            <a:pPr indent="0" marL="0">
-              <a:lnSpc>
-                <a:spcPts val="1050"/>
-              </a:lnSpc>
-              <a:buNone/>
-            </a:pPr>
-            <a:r>
-              <a:rPr lang="en-US" sz="870" i="1" dirty="0">
-                <a:solidFill>
-                  <a:srgbClr val="5B6178"/>
-                </a:solidFill>
-                <a:latin typeface="Calibri" pitchFamily="34" charset="0"/>
-                <a:ea typeface="Calibri" pitchFamily="34" charset="-122"/>
-                <a:cs typeface="Calibri" pitchFamily="34" charset="-120"/>
-              </a:rPr>
-              <a:t>Flags come from 5-fold OOF predictions; AUC/PR-AUC read modest next to the revenue model's R² only because the oracle ceiling here is 0.73 AUC. realized_ad_revenue's importance is a venue_type confound, not a causal driver. Each "Save now" / flagged venue also carries a SHAP top driver (from the fold model that never saw it) mapped to a concrete action — technical dispatch, AM retention call, content review — not a generic "reach out."</a:t>
-            </a:r>
-            <a:endParaRPr lang="en-US" sz="870" dirty="0"/>
-          </a:p>
-        </p:txBody>
-      </p:sp>
-      <p:sp>
-        <p:nvSpPr>
-          <p:cNvPr id="37" name="Text 34"/>
           <p:cNvSpPr/>
           <p:nvPr/>
         </p:nvSpPr>
@@ -8211,7 +7832,7 @@
                 <a:ea typeface="Calibri" pitchFamily="34" charset="-122"/>
                 <a:cs typeface="Calibri" pitchFamily="34" charset="-120"/>
               </a:rPr>
-              <a:t>Venue retention</a:t>
+              <a:t>Venue economics</a:t>
             </a:r>
             <a:endParaRPr lang="en-US" sz="900" dirty="0"/>
           </a:p>
@@ -8219,7 +7840,7 @@
       </p:sp>
       <p:sp>
         <p:nvSpPr>
-          <p:cNvPr id="38" name="Text 35"/>
+          <p:cNvPr id="37" name="Text 34"/>
           <p:cNvSpPr/>
           <p:nvPr/>
         </p:nvSpPr>
@@ -8267,6 +7888,1393 @@
 <file path=ppt/slides/slide14.xml><?xml version="1.0" encoding="utf-8"?>
 <p:sld xmlns:a="http://schemas.openxmlformats.org/drawingml/2006/main" xmlns:r="http://schemas.openxmlformats.org/officeDocument/2006/relationships" xmlns:p="http://schemas.openxmlformats.org/presentationml/2006/main">
   <p:cSld name="Slide 14">
+    <p:bg>
+      <p:bgPr>
+        <a:solidFill>
+          <a:srgbClr val="FFFFFF"/>
+        </a:solidFill>
+      </p:bgPr>
+    </p:bg>
+    <p:spTree>
+      <p:nvGrpSpPr>
+        <p:cNvPr id="1" name=""/>
+        <p:cNvGrpSpPr/>
+        <p:nvPr/>
+      </p:nvGrpSpPr>
+      <p:grpSpPr>
+        <a:xfrm>
+          <a:off x="0" y="0"/>
+          <a:ext cx="0" cy="0"/>
+          <a:chOff x="0" y="0"/>
+          <a:chExt cx="0" cy="0"/>
+        </a:xfrm>
+      </p:grpSpPr>
+      <p:sp>
+        <p:nvSpPr>
+          <p:cNvPr id="2" name="Text 0"/>
+          <p:cNvSpPr/>
+          <p:nvPr/>
+        </p:nvSpPr>
+        <p:spPr>
+          <a:xfrm>
+            <a:off x="548640" y="411480"/>
+            <a:ext cx="11155680" cy="594360"/>
+          </a:xfrm>
+          <a:prstGeom prst="rect">
+            <a:avLst/>
+          </a:prstGeom>
+          <a:noFill/>
+          <a:ln/>
+        </p:spPr>
+        <p:txBody>
+          <a:bodyPr wrap="square" rtlCol="0" anchor="ctr"/>
+          <a:lstStyle/>
+          <a:p>
+            <a:pPr indent="0" marL="0">
+              <a:buNone/>
+            </a:pPr>
+            <a:r>
+              <a:rPr lang="en-US" sz="2500" b="1" dirty="0">
+                <a:solidFill>
+                  <a:srgbClr val="1E2761"/>
+                </a:solidFill>
+                <a:latin typeface="Cambria" pitchFamily="34" charset="0"/>
+                <a:ea typeface="Cambria" pitchFamily="34" charset="-122"/>
+                <a:cs typeface="Cambria" pitchFamily="34" charset="-120"/>
+              </a:rPr>
+              <a:t>Predicting venue churn risk, honestly</a:t>
+            </a:r>
+            <a:endParaRPr lang="en-US" sz="2500" dirty="0"/>
+          </a:p>
+        </p:txBody>
+      </p:sp>
+      <p:sp>
+        <p:nvSpPr>
+          <p:cNvPr id="3" name="Text 1"/>
+          <p:cNvSpPr/>
+          <p:nvPr/>
+        </p:nvSpPr>
+        <p:spPr>
+          <a:xfrm>
+            <a:off x="548640" y="1005840"/>
+            <a:ext cx="10972800" cy="365760"/>
+          </a:xfrm>
+          <a:prstGeom prst="rect">
+            <a:avLst/>
+          </a:prstGeom>
+          <a:noFill/>
+          <a:ln/>
+        </p:spPr>
+        <p:txBody>
+          <a:bodyPr wrap="square" rtlCol="0" anchor="ctr"/>
+          <a:lstStyle/>
+          <a:p>
+            <a:pPr indent="0" marL="0">
+              <a:buNone/>
+            </a:pPr>
+            <a:r>
+              <a:rPr lang="en-US" sz="1200" i="1" dirty="0">
+                <a:solidFill>
+                  <a:srgbClr val="5B6178"/>
+                </a:solidFill>
+                <a:latin typeface="Calibri" pitchFamily="34" charset="0"/>
+                <a:ea typeface="Calibri" pitchFamily="34" charset="-122"/>
+                <a:cs typeface="Calibri" pitchFamily="34" charset="-120"/>
+              </a:rPr>
+              <a:t>Gradient-boosted classifier on ops-visible signals (engagement, uptime, complaints, competitor outreach) — the other half of "what makes a venue valuable and what puts it at risk."</a:t>
+            </a:r>
+            <a:endParaRPr lang="en-US" sz="1200" dirty="0"/>
+          </a:p>
+        </p:txBody>
+      </p:sp>
+      <p:sp>
+        <p:nvSpPr>
+          <p:cNvPr id="4" name="Shape 2"/>
+          <p:cNvSpPr/>
+          <p:nvPr/>
+        </p:nvSpPr>
+        <p:spPr>
+          <a:xfrm>
+            <a:off x="548640" y="1508760"/>
+            <a:ext cx="2651760" cy="1051560"/>
+          </a:xfrm>
+          <a:prstGeom prst="roundRect">
+            <a:avLst>
+              <a:gd name="adj" fmla="val 6957"/>
+            </a:avLst>
+          </a:prstGeom>
+          <a:solidFill>
+            <a:srgbClr val="F5F7FC"/>
+          </a:solidFill>
+          <a:ln/>
+        </p:spPr>
+      </p:sp>
+      <p:sp>
+        <p:nvSpPr>
+          <p:cNvPr id="5" name="Text 3"/>
+          <p:cNvSpPr/>
+          <p:nvPr/>
+        </p:nvSpPr>
+        <p:spPr>
+          <a:xfrm>
+            <a:off x="685800" y="1618488"/>
+            <a:ext cx="2377440" cy="502920"/>
+          </a:xfrm>
+          <a:prstGeom prst="rect">
+            <a:avLst/>
+          </a:prstGeom>
+          <a:noFill/>
+          <a:ln/>
+        </p:spPr>
+        <p:txBody>
+          <a:bodyPr wrap="square" rtlCol="0" anchor="ctr"/>
+          <a:lstStyle/>
+          <a:p>
+            <a:pPr indent="0" marL="0">
+              <a:buNone/>
+            </a:pPr>
+            <a:r>
+              <a:rPr lang="en-US" sz="2200" b="1" dirty="0">
+                <a:solidFill>
+                  <a:srgbClr val="1E2761"/>
+                </a:solidFill>
+                <a:latin typeface="Calibri" pitchFamily="34" charset="0"/>
+                <a:ea typeface="Calibri" pitchFamily="34" charset="-122"/>
+                <a:cs typeface="Calibri" pitchFamily="34" charset="-120"/>
+              </a:rPr>
+              <a:t>0.65</a:t>
+            </a:r>
+            <a:endParaRPr lang="en-US" sz="2200" dirty="0"/>
+          </a:p>
+        </p:txBody>
+      </p:sp>
+      <p:sp>
+        <p:nvSpPr>
+          <p:cNvPr id="6" name="Text 4"/>
+          <p:cNvSpPr/>
+          <p:nvPr/>
+        </p:nvSpPr>
+        <p:spPr>
+          <a:xfrm>
+            <a:off x="685800" y="2130552"/>
+            <a:ext cx="2377440" cy="365760"/>
+          </a:xfrm>
+          <a:prstGeom prst="rect">
+            <a:avLst/>
+          </a:prstGeom>
+          <a:noFill/>
+          <a:ln/>
+        </p:spPr>
+        <p:txBody>
+          <a:bodyPr wrap="square" rtlCol="0" anchor="ctr"/>
+          <a:lstStyle/>
+          <a:p>
+            <a:pPr indent="0" marL="0">
+              <a:buNone/>
+            </a:pPr>
+            <a:r>
+              <a:rPr lang="en-US" sz="900" dirty="0">
+                <a:solidFill>
+                  <a:srgbClr val="5B6178"/>
+                </a:solidFill>
+                <a:latin typeface="Calibri" pitchFamily="34" charset="0"/>
+                <a:ea typeface="Calibri" pitchFamily="34" charset="-122"/>
+                <a:cs typeface="Calibri" pitchFamily="34" charset="-120"/>
+              </a:rPr>
+              <a:t>Held-out AUC (oracle ceiling: 0.73)</a:t>
+            </a:r>
+            <a:endParaRPr lang="en-US" sz="900" dirty="0"/>
+          </a:p>
+        </p:txBody>
+      </p:sp>
+      <p:sp>
+        <p:nvSpPr>
+          <p:cNvPr id="7" name="Shape 5"/>
+          <p:cNvSpPr/>
+          <p:nvPr/>
+        </p:nvSpPr>
+        <p:spPr>
+          <a:xfrm>
+            <a:off x="3337560" y="1508760"/>
+            <a:ext cx="2651760" cy="1051560"/>
+          </a:xfrm>
+          <a:prstGeom prst="roundRect">
+            <a:avLst>
+              <a:gd name="adj" fmla="val 6957"/>
+            </a:avLst>
+          </a:prstGeom>
+          <a:solidFill>
+            <a:srgbClr val="F5F7FC"/>
+          </a:solidFill>
+          <a:ln/>
+        </p:spPr>
+      </p:sp>
+      <p:sp>
+        <p:nvSpPr>
+          <p:cNvPr id="8" name="Text 6"/>
+          <p:cNvSpPr/>
+          <p:nvPr/>
+        </p:nvSpPr>
+        <p:spPr>
+          <a:xfrm>
+            <a:off x="3474720" y="1618488"/>
+            <a:ext cx="2377440" cy="502920"/>
+          </a:xfrm>
+          <a:prstGeom prst="rect">
+            <a:avLst/>
+          </a:prstGeom>
+          <a:noFill/>
+          <a:ln/>
+        </p:spPr>
+        <p:txBody>
+          <a:bodyPr wrap="square" rtlCol="0" anchor="ctr"/>
+          <a:lstStyle/>
+          <a:p>
+            <a:pPr indent="0" marL="0">
+              <a:buNone/>
+            </a:pPr>
+            <a:r>
+              <a:rPr lang="en-US" sz="2200" b="1" dirty="0">
+                <a:solidFill>
+                  <a:srgbClr val="1E2761"/>
+                </a:solidFill>
+                <a:latin typeface="Calibri" pitchFamily="34" charset="0"/>
+                <a:ea typeface="Calibri" pitchFamily="34" charset="-122"/>
+                <a:cs typeface="Calibri" pitchFamily="34" charset="-120"/>
+              </a:rPr>
+              <a:t>0.27</a:t>
+            </a:r>
+            <a:endParaRPr lang="en-US" sz="2200" dirty="0"/>
+          </a:p>
+        </p:txBody>
+      </p:sp>
+      <p:sp>
+        <p:nvSpPr>
+          <p:cNvPr id="9" name="Text 7"/>
+          <p:cNvSpPr/>
+          <p:nvPr/>
+        </p:nvSpPr>
+        <p:spPr>
+          <a:xfrm>
+            <a:off x="3474720" y="2130552"/>
+            <a:ext cx="2377440" cy="365760"/>
+          </a:xfrm>
+          <a:prstGeom prst="rect">
+            <a:avLst/>
+          </a:prstGeom>
+          <a:noFill/>
+          <a:ln/>
+        </p:spPr>
+        <p:txBody>
+          <a:bodyPr wrap="square" rtlCol="0" anchor="ctr"/>
+          <a:lstStyle/>
+          <a:p>
+            <a:pPr indent="0" marL="0">
+              <a:buNone/>
+            </a:pPr>
+            <a:r>
+              <a:rPr lang="en-US" sz="900" dirty="0">
+                <a:solidFill>
+                  <a:srgbClr val="5B6178"/>
+                </a:solidFill>
+                <a:latin typeface="Calibri" pitchFamily="34" charset="0"/>
+                <a:ea typeface="Calibri" pitchFamily="34" charset="-122"/>
+                <a:cs typeface="Calibri" pitchFamily="34" charset="-120"/>
+              </a:rPr>
+              <a:t>Held-out PR-AUC</a:t>
+            </a:r>
+            <a:endParaRPr lang="en-US" sz="900" dirty="0"/>
+          </a:p>
+        </p:txBody>
+      </p:sp>
+      <p:sp>
+        <p:nvSpPr>
+          <p:cNvPr id="10" name="Shape 8"/>
+          <p:cNvSpPr/>
+          <p:nvPr/>
+        </p:nvSpPr>
+        <p:spPr>
+          <a:xfrm>
+            <a:off x="6126480" y="1508760"/>
+            <a:ext cx="2651760" cy="1051560"/>
+          </a:xfrm>
+          <a:prstGeom prst="roundRect">
+            <a:avLst>
+              <a:gd name="adj" fmla="val 6957"/>
+            </a:avLst>
+          </a:prstGeom>
+          <a:solidFill>
+            <a:srgbClr val="F5F7FC"/>
+          </a:solidFill>
+          <a:ln/>
+        </p:spPr>
+      </p:sp>
+      <p:sp>
+        <p:nvSpPr>
+          <p:cNvPr id="11" name="Text 9"/>
+          <p:cNvSpPr/>
+          <p:nvPr/>
+        </p:nvSpPr>
+        <p:spPr>
+          <a:xfrm>
+            <a:off x="6263640" y="1618488"/>
+            <a:ext cx="2377440" cy="502920"/>
+          </a:xfrm>
+          <a:prstGeom prst="rect">
+            <a:avLst/>
+          </a:prstGeom>
+          <a:noFill/>
+          <a:ln/>
+        </p:spPr>
+        <p:txBody>
+          <a:bodyPr wrap="square" rtlCol="0" anchor="ctr"/>
+          <a:lstStyle/>
+          <a:p>
+            <a:pPr indent="0" marL="0">
+              <a:buNone/>
+            </a:pPr>
+            <a:r>
+              <a:rPr lang="en-US" sz="2200" b="1" dirty="0">
+                <a:solidFill>
+                  <a:srgbClr val="1E2761"/>
+                </a:solidFill>
+                <a:latin typeface="Calibri" pitchFamily="34" charset="0"/>
+                <a:ea typeface="Calibri" pitchFamily="34" charset="-122"/>
+                <a:cs typeface="Calibri" pitchFamily="34" charset="-120"/>
+              </a:rPr>
+              <a:t>0.73</a:t>
+            </a:r>
+            <a:endParaRPr lang="en-US" sz="2200" dirty="0"/>
+          </a:p>
+        </p:txBody>
+      </p:sp>
+      <p:sp>
+        <p:nvSpPr>
+          <p:cNvPr id="12" name="Text 10"/>
+          <p:cNvSpPr/>
+          <p:nvPr/>
+        </p:nvSpPr>
+        <p:spPr>
+          <a:xfrm>
+            <a:off x="6263640" y="2130552"/>
+            <a:ext cx="2377440" cy="365760"/>
+          </a:xfrm>
+          <a:prstGeom prst="rect">
+            <a:avLst/>
+          </a:prstGeom>
+          <a:noFill/>
+          <a:ln/>
+        </p:spPr>
+        <p:txBody>
+          <a:bodyPr wrap="square" rtlCol="0" anchor="ctr"/>
+          <a:lstStyle/>
+          <a:p>
+            <a:pPr indent="0" marL="0">
+              <a:buNone/>
+            </a:pPr>
+            <a:r>
+              <a:rPr lang="en-US" sz="900" dirty="0">
+                <a:solidFill>
+                  <a:srgbClr val="5B6178"/>
+                </a:solidFill>
+                <a:latin typeface="Calibri" pitchFamily="34" charset="0"/>
+                <a:ea typeface="Calibri" pitchFamily="34" charset="-122"/>
+                <a:cs typeface="Calibri" pitchFamily="34" charset="-120"/>
+              </a:rPr>
+              <a:t>OOF corr. w/ latent true risk</a:t>
+            </a:r>
+            <a:endParaRPr lang="en-US" sz="900" dirty="0"/>
+          </a:p>
+        </p:txBody>
+      </p:sp>
+      <p:sp>
+        <p:nvSpPr>
+          <p:cNvPr id="13" name="Shape 11"/>
+          <p:cNvSpPr/>
+          <p:nvPr/>
+        </p:nvSpPr>
+        <p:spPr>
+          <a:xfrm>
+            <a:off x="8915400" y="1508760"/>
+            <a:ext cx="2651760" cy="1051560"/>
+          </a:xfrm>
+          <a:prstGeom prst="roundRect">
+            <a:avLst>
+              <a:gd name="adj" fmla="val 6957"/>
+            </a:avLst>
+          </a:prstGeom>
+          <a:solidFill>
+            <a:srgbClr val="F5F7FC"/>
+          </a:solidFill>
+          <a:ln/>
+        </p:spPr>
+      </p:sp>
+      <p:sp>
+        <p:nvSpPr>
+          <p:cNvPr id="14" name="Text 12"/>
+          <p:cNvSpPr/>
+          <p:nvPr/>
+        </p:nvSpPr>
+        <p:spPr>
+          <a:xfrm>
+            <a:off x="9052560" y="1618488"/>
+            <a:ext cx="2377440" cy="502920"/>
+          </a:xfrm>
+          <a:prstGeom prst="rect">
+            <a:avLst/>
+          </a:prstGeom>
+          <a:noFill/>
+          <a:ln/>
+        </p:spPr>
+        <p:txBody>
+          <a:bodyPr wrap="square" rtlCol="0" anchor="ctr"/>
+          <a:lstStyle/>
+          <a:p>
+            <a:pPr indent="0" marL="0">
+              <a:buNone/>
+            </a:pPr>
+            <a:r>
+              <a:rPr lang="en-US" sz="2200" b="1" dirty="0">
+                <a:solidFill>
+                  <a:srgbClr val="1E2761"/>
+                </a:solidFill>
+                <a:latin typeface="Calibri" pitchFamily="34" charset="0"/>
+                <a:ea typeface="Calibri" pitchFamily="34" charset="-122"/>
+                <a:cs typeface="Calibri" pitchFamily="34" charset="-120"/>
+              </a:rPr>
+              <a:t>100% vs 31%</a:t>
+            </a:r>
+            <a:endParaRPr lang="en-US" sz="2200" dirty="0"/>
+          </a:p>
+        </p:txBody>
+      </p:sp>
+      <p:sp>
+        <p:nvSpPr>
+          <p:cNvPr id="15" name="Text 13"/>
+          <p:cNvSpPr/>
+          <p:nvPr/>
+        </p:nvSpPr>
+        <p:spPr>
+          <a:xfrm>
+            <a:off x="9052560" y="2130552"/>
+            <a:ext cx="2377440" cy="365760"/>
+          </a:xfrm>
+          <a:prstGeom prst="rect">
+            <a:avLst/>
+          </a:prstGeom>
+          <a:noFill/>
+          <a:ln/>
+        </p:spPr>
+        <p:txBody>
+          <a:bodyPr wrap="square" rtlCol="0" anchor="ctr"/>
+          <a:lstStyle/>
+          <a:p>
+            <a:pPr indent="0" marL="0">
+              <a:buNone/>
+            </a:pPr>
+            <a:r>
+              <a:rPr lang="en-US" sz="900" dirty="0">
+                <a:solidFill>
+                  <a:srgbClr val="5B6178"/>
+                </a:solidFill>
+                <a:latin typeface="Calibri" pitchFamily="34" charset="0"/>
+                <a:ea typeface="Calibri" pitchFamily="34" charset="-122"/>
+                <a:cs typeface="Calibri" pitchFamily="34" charset="-120"/>
+              </a:rPr>
+              <a:t>Flagged-tail latent risk rate</a:t>
+            </a:r>
+            <a:endParaRPr lang="en-US" sz="900" dirty="0"/>
+          </a:p>
+        </p:txBody>
+      </p:sp>
+      <p:graphicFrame>
+        <p:nvGraphicFramePr>
+          <p:cNvPr id="16" name="Chart 0" descr=""/>
+          <p:cNvGraphicFramePr/>
+          <p:nvPr/>
+        </p:nvGraphicFramePr>
+        <p:xfrm>
+          <a:off x="548640" y="2880360"/>
+          <a:ext cx="5394960" cy="3246120"/>
+        </p:xfrm>
+        <a:graphic xmlns:a="http://schemas.openxmlformats.org/drawingml/2006/main">
+          <a:graphicData uri="http://schemas.openxmlformats.org/drawingml/2006/chart">
+            <c:chart xmlns:c="http://schemas.openxmlformats.org/drawingml/2006/chart" r:id="rId1"/>
+          </a:graphicData>
+        </a:graphic>
+      </p:graphicFrame>
+      <p:sp>
+        <p:nvSpPr>
+          <p:cNvPr id="17" name="Text 14"/>
+          <p:cNvSpPr/>
+          <p:nvPr/>
+        </p:nvSpPr>
+        <p:spPr>
+          <a:xfrm>
+            <a:off x="6263640" y="2880360"/>
+            <a:ext cx="5394960" cy="256032"/>
+          </a:xfrm>
+          <a:prstGeom prst="rect">
+            <a:avLst/>
+          </a:prstGeom>
+          <a:noFill/>
+          <a:ln/>
+        </p:spPr>
+        <p:txBody>
+          <a:bodyPr wrap="square" rtlCol="0" anchor="ctr"/>
+          <a:lstStyle/>
+          <a:p>
+            <a:pPr indent="0" marL="0">
+              <a:buNone/>
+            </a:pPr>
+            <a:r>
+              <a:rPr lang="en-US" sz="1200" b="1" dirty="0">
+                <a:solidFill>
+                  <a:srgbClr val="1E2761"/>
+                </a:solidFill>
+                <a:latin typeface="Cambria" pitchFamily="34" charset="0"/>
+                <a:ea typeface="Cambria" pitchFamily="34" charset="-122"/>
+                <a:cs typeface="Cambria" pitchFamily="34" charset="-120"/>
+              </a:rPr>
+              <a:t>Top at-risk venues (of 20 flagged, by OOF risk)</a:t>
+            </a:r>
+            <a:endParaRPr lang="en-US" sz="1200" dirty="0"/>
+          </a:p>
+        </p:txBody>
+      </p:sp>
+      <p:sp>
+        <p:nvSpPr>
+          <p:cNvPr id="18" name="Text 15"/>
+          <p:cNvSpPr/>
+          <p:nvPr/>
+        </p:nvSpPr>
+        <p:spPr>
+          <a:xfrm>
+            <a:off x="6263640" y="3172968"/>
+            <a:ext cx="3977640" cy="219456"/>
+          </a:xfrm>
+          <a:prstGeom prst="rect">
+            <a:avLst/>
+          </a:prstGeom>
+          <a:noFill/>
+          <a:ln/>
+        </p:spPr>
+        <p:txBody>
+          <a:bodyPr wrap="square" rtlCol="0" anchor="ctr"/>
+          <a:lstStyle/>
+          <a:p>
+            <a:pPr indent="0" marL="0">
+              <a:buNone/>
+            </a:pPr>
+            <a:r>
+              <a:rPr lang="en-US" sz="1000" dirty="0">
+                <a:solidFill>
+                  <a:srgbClr val="1A1A2E"/>
+                </a:solidFill>
+                <a:latin typeface="Calibri" pitchFamily="34" charset="0"/>
+                <a:ea typeface="Calibri" pitchFamily="34" charset="-122"/>
+                <a:cs typeface="Calibri" pitchFamily="34" charset="-120"/>
+              </a:rPr>
+              <a:t>Venue #281 (Bars)</a:t>
+            </a:r>
+            <a:endParaRPr lang="en-US" sz="1000" dirty="0"/>
+          </a:p>
+        </p:txBody>
+      </p:sp>
+      <p:sp>
+        <p:nvSpPr>
+          <p:cNvPr id="19" name="Text 16"/>
+          <p:cNvSpPr/>
+          <p:nvPr/>
+        </p:nvSpPr>
+        <p:spPr>
+          <a:xfrm>
+            <a:off x="10241280" y="3172968"/>
+            <a:ext cx="1417320" cy="219456"/>
+          </a:xfrm>
+          <a:prstGeom prst="rect">
+            <a:avLst/>
+          </a:prstGeom>
+          <a:noFill/>
+          <a:ln/>
+        </p:spPr>
+        <p:txBody>
+          <a:bodyPr wrap="square" rtlCol="0" anchor="ctr"/>
+          <a:lstStyle/>
+          <a:p>
+            <a:pPr algn="r" indent="0" marL="0">
+              <a:buNone/>
+            </a:pPr>
+            <a:r>
+              <a:rPr lang="en-US" sz="1000" b="1" dirty="0">
+                <a:solidFill>
+                  <a:srgbClr val="B8500A"/>
+                </a:solidFill>
+                <a:latin typeface="Calibri" pitchFamily="34" charset="0"/>
+                <a:ea typeface="Calibri" pitchFamily="34" charset="-122"/>
+                <a:cs typeface="Calibri" pitchFamily="34" charset="-120"/>
+              </a:rPr>
+              <a:t>60%</a:t>
+            </a:r>
+            <a:endParaRPr lang="en-US" sz="1000" dirty="0"/>
+          </a:p>
+        </p:txBody>
+      </p:sp>
+      <p:sp>
+        <p:nvSpPr>
+          <p:cNvPr id="20" name="Text 17"/>
+          <p:cNvSpPr/>
+          <p:nvPr/>
+        </p:nvSpPr>
+        <p:spPr>
+          <a:xfrm>
+            <a:off x="6263640" y="3374136"/>
+            <a:ext cx="5394960" cy="201168"/>
+          </a:xfrm>
+          <a:prstGeom prst="rect">
+            <a:avLst/>
+          </a:prstGeom>
+          <a:noFill/>
+          <a:ln/>
+        </p:spPr>
+        <p:txBody>
+          <a:bodyPr wrap="square" rtlCol="0" anchor="ctr"/>
+          <a:lstStyle/>
+          <a:p>
+            <a:pPr indent="0" marL="0">
+              <a:buNone/>
+            </a:pPr>
+            <a:r>
+              <a:rPr lang="en-US" sz="900" i="1" dirty="0">
+                <a:solidFill>
+                  <a:srgbClr val="8A4B0A"/>
+                </a:solidFill>
+                <a:latin typeface="Calibri" pitchFamily="34" charset="0"/>
+                <a:ea typeface="Calibri" pitchFamily="34" charset="-122"/>
+                <a:cs typeface="Calibri" pitchFamily="34" charset="-120"/>
+              </a:rPr>
+              <a:t>engagement declining → content/placement review</a:t>
+            </a:r>
+            <a:endParaRPr lang="en-US" sz="900" dirty="0"/>
+          </a:p>
+        </p:txBody>
+      </p:sp>
+      <p:sp>
+        <p:nvSpPr>
+          <p:cNvPr id="21" name="Text 18"/>
+          <p:cNvSpPr/>
+          <p:nvPr/>
+        </p:nvSpPr>
+        <p:spPr>
+          <a:xfrm>
+            <a:off x="6263640" y="3593592"/>
+            <a:ext cx="3977640" cy="219456"/>
+          </a:xfrm>
+          <a:prstGeom prst="rect">
+            <a:avLst/>
+          </a:prstGeom>
+          <a:noFill/>
+          <a:ln/>
+        </p:spPr>
+        <p:txBody>
+          <a:bodyPr wrap="square" rtlCol="0" anchor="ctr"/>
+          <a:lstStyle/>
+          <a:p>
+            <a:pPr indent="0" marL="0">
+              <a:buNone/>
+            </a:pPr>
+            <a:r>
+              <a:rPr lang="en-US" sz="1000" dirty="0">
+                <a:solidFill>
+                  <a:srgbClr val="1A1A2E"/>
+                </a:solidFill>
+                <a:latin typeface="Calibri" pitchFamily="34" charset="0"/>
+                <a:ea typeface="Calibri" pitchFamily="34" charset="-122"/>
+                <a:cs typeface="Calibri" pitchFamily="34" charset="-120"/>
+              </a:rPr>
+              <a:t>Venue #200 (Bars)</a:t>
+            </a:r>
+            <a:endParaRPr lang="en-US" sz="1000" dirty="0"/>
+          </a:p>
+        </p:txBody>
+      </p:sp>
+      <p:sp>
+        <p:nvSpPr>
+          <p:cNvPr id="22" name="Text 19"/>
+          <p:cNvSpPr/>
+          <p:nvPr/>
+        </p:nvSpPr>
+        <p:spPr>
+          <a:xfrm>
+            <a:off x="10241280" y="3593592"/>
+            <a:ext cx="1417320" cy="219456"/>
+          </a:xfrm>
+          <a:prstGeom prst="rect">
+            <a:avLst/>
+          </a:prstGeom>
+          <a:noFill/>
+          <a:ln/>
+        </p:spPr>
+        <p:txBody>
+          <a:bodyPr wrap="square" rtlCol="0" anchor="ctr"/>
+          <a:lstStyle/>
+          <a:p>
+            <a:pPr algn="r" indent="0" marL="0">
+              <a:buNone/>
+            </a:pPr>
+            <a:r>
+              <a:rPr lang="en-US" sz="1000" b="1" dirty="0">
+                <a:solidFill>
+                  <a:srgbClr val="B8500A"/>
+                </a:solidFill>
+                <a:latin typeface="Calibri" pitchFamily="34" charset="0"/>
+                <a:ea typeface="Calibri" pitchFamily="34" charset="-122"/>
+                <a:cs typeface="Calibri" pitchFamily="34" charset="-120"/>
+              </a:rPr>
+              <a:t>55%</a:t>
+            </a:r>
+            <a:endParaRPr lang="en-US" sz="1000" dirty="0"/>
+          </a:p>
+        </p:txBody>
+      </p:sp>
+      <p:sp>
+        <p:nvSpPr>
+          <p:cNvPr id="23" name="Text 20"/>
+          <p:cNvSpPr/>
+          <p:nvPr/>
+        </p:nvSpPr>
+        <p:spPr>
+          <a:xfrm>
+            <a:off x="6263640" y="3794760"/>
+            <a:ext cx="5394960" cy="201168"/>
+          </a:xfrm>
+          <a:prstGeom prst="rect">
+            <a:avLst/>
+          </a:prstGeom>
+          <a:noFill/>
+          <a:ln/>
+        </p:spPr>
+        <p:txBody>
+          <a:bodyPr wrap="square" rtlCol="0" anchor="ctr"/>
+          <a:lstStyle/>
+          <a:p>
+            <a:pPr indent="0" marL="0">
+              <a:buNone/>
+            </a:pPr>
+            <a:r>
+              <a:rPr lang="en-US" sz="900" i="1" dirty="0">
+                <a:solidFill>
+                  <a:srgbClr val="8A4B0A"/>
+                </a:solidFill>
+                <a:latin typeface="Calibri" pitchFamily="34" charset="0"/>
+                <a:ea typeface="Calibri" pitchFamily="34" charset="-122"/>
+                <a:cs typeface="Calibri" pitchFamily="34" charset="-120"/>
+              </a:rPr>
+              <a:t>engagement declining → content/placement review</a:t>
+            </a:r>
+            <a:endParaRPr lang="en-US" sz="900" dirty="0"/>
+          </a:p>
+        </p:txBody>
+      </p:sp>
+      <p:sp>
+        <p:nvSpPr>
+          <p:cNvPr id="24" name="Text 21"/>
+          <p:cNvSpPr/>
+          <p:nvPr/>
+        </p:nvSpPr>
+        <p:spPr>
+          <a:xfrm>
+            <a:off x="6263640" y="4014216"/>
+            <a:ext cx="3977640" cy="219456"/>
+          </a:xfrm>
+          <a:prstGeom prst="rect">
+            <a:avLst/>
+          </a:prstGeom>
+          <a:noFill/>
+          <a:ln/>
+        </p:spPr>
+        <p:txBody>
+          <a:bodyPr wrap="square" rtlCol="0" anchor="ctr"/>
+          <a:lstStyle/>
+          <a:p>
+            <a:pPr indent="0" marL="0">
+              <a:buNone/>
+            </a:pPr>
+            <a:r>
+              <a:rPr lang="en-US" sz="1000" dirty="0">
+                <a:solidFill>
+                  <a:srgbClr val="1A1A2E"/>
+                </a:solidFill>
+                <a:latin typeface="Calibri" pitchFamily="34" charset="0"/>
+                <a:ea typeface="Calibri" pitchFamily="34" charset="-122"/>
+                <a:cs typeface="Calibri" pitchFamily="34" charset="-120"/>
+              </a:rPr>
+              <a:t>Venue #12 (Restaurants)</a:t>
+            </a:r>
+            <a:endParaRPr lang="en-US" sz="1000" dirty="0"/>
+          </a:p>
+        </p:txBody>
+      </p:sp>
+      <p:sp>
+        <p:nvSpPr>
+          <p:cNvPr id="25" name="Text 22"/>
+          <p:cNvSpPr/>
+          <p:nvPr/>
+        </p:nvSpPr>
+        <p:spPr>
+          <a:xfrm>
+            <a:off x="10241280" y="4014216"/>
+            <a:ext cx="1417320" cy="219456"/>
+          </a:xfrm>
+          <a:prstGeom prst="rect">
+            <a:avLst/>
+          </a:prstGeom>
+          <a:noFill/>
+          <a:ln/>
+        </p:spPr>
+        <p:txBody>
+          <a:bodyPr wrap="square" rtlCol="0" anchor="ctr"/>
+          <a:lstStyle/>
+          <a:p>
+            <a:pPr algn="r" indent="0" marL="0">
+              <a:buNone/>
+            </a:pPr>
+            <a:r>
+              <a:rPr lang="en-US" sz="1000" b="1" dirty="0">
+                <a:solidFill>
+                  <a:srgbClr val="B8500A"/>
+                </a:solidFill>
+                <a:latin typeface="Calibri" pitchFamily="34" charset="0"/>
+                <a:ea typeface="Calibri" pitchFamily="34" charset="-122"/>
+                <a:cs typeface="Calibri" pitchFamily="34" charset="-120"/>
+              </a:rPr>
+              <a:t>52%</a:t>
+            </a:r>
+            <a:endParaRPr lang="en-US" sz="1000" dirty="0"/>
+          </a:p>
+        </p:txBody>
+      </p:sp>
+      <p:sp>
+        <p:nvSpPr>
+          <p:cNvPr id="26" name="Text 23"/>
+          <p:cNvSpPr/>
+          <p:nvPr/>
+        </p:nvSpPr>
+        <p:spPr>
+          <a:xfrm>
+            <a:off x="6263640" y="4215384"/>
+            <a:ext cx="5394960" cy="201168"/>
+          </a:xfrm>
+          <a:prstGeom prst="rect">
+            <a:avLst/>
+          </a:prstGeom>
+          <a:noFill/>
+          <a:ln/>
+        </p:spPr>
+        <p:txBody>
+          <a:bodyPr wrap="square" rtlCol="0" anchor="ctr"/>
+          <a:lstStyle/>
+          <a:p>
+            <a:pPr indent="0" marL="0">
+              <a:buNone/>
+            </a:pPr>
+            <a:r>
+              <a:rPr lang="en-US" sz="900" i="1" dirty="0">
+                <a:solidFill>
+                  <a:srgbClr val="8A4B0A"/>
+                </a:solidFill>
+                <a:latin typeface="Calibri" pitchFamily="34" charset="0"/>
+                <a:ea typeface="Calibri" pitchFamily="34" charset="-122"/>
+                <a:cs typeface="Calibri" pitchFamily="34" charset="-120"/>
+              </a:rPr>
+              <a:t>uptime issue → dispatch technical support</a:t>
+            </a:r>
+            <a:endParaRPr lang="en-US" sz="900" dirty="0"/>
+          </a:p>
+        </p:txBody>
+      </p:sp>
+      <p:sp>
+        <p:nvSpPr>
+          <p:cNvPr id="27" name="Text 24"/>
+          <p:cNvSpPr/>
+          <p:nvPr/>
+        </p:nvSpPr>
+        <p:spPr>
+          <a:xfrm>
+            <a:off x="6263640" y="4526280"/>
+            <a:ext cx="5394960" cy="237744"/>
+          </a:xfrm>
+          <a:prstGeom prst="rect">
+            <a:avLst/>
+          </a:prstGeom>
+          <a:noFill/>
+          <a:ln/>
+        </p:spPr>
+        <p:txBody>
+          <a:bodyPr wrap="square" rtlCol="0" anchor="ctr"/>
+          <a:lstStyle/>
+          <a:p>
+            <a:pPr indent="0" marL="0">
+              <a:buNone/>
+            </a:pPr>
+            <a:r>
+              <a:rPr lang="en-US" sz="1200" b="1" dirty="0">
+                <a:solidFill>
+                  <a:srgbClr val="1E2761"/>
+                </a:solidFill>
+                <a:latin typeface="Cambria" pitchFamily="34" charset="0"/>
+                <a:ea typeface="Cambria" pitchFamily="34" charset="-122"/>
+                <a:cs typeface="Cambria" pitchFamily="34" charset="-120"/>
+              </a:rPr>
+              <a:t>Priority quadrant (Q3 revenue × Q4 risk)</a:t>
+            </a:r>
+            <a:endParaRPr lang="en-US" sz="1200" dirty="0"/>
+          </a:p>
+        </p:txBody>
+      </p:sp>
+      <p:sp>
+        <p:nvSpPr>
+          <p:cNvPr id="28" name="Text 25"/>
+          <p:cNvSpPr/>
+          <p:nvPr/>
+        </p:nvSpPr>
+        <p:spPr>
+          <a:xfrm>
+            <a:off x="6263640" y="4800600"/>
+            <a:ext cx="4023360" cy="237744"/>
+          </a:xfrm>
+          <a:prstGeom prst="rect">
+            <a:avLst/>
+          </a:prstGeom>
+          <a:noFill/>
+          <a:ln/>
+        </p:spPr>
+        <p:txBody>
+          <a:bodyPr wrap="square" rtlCol="0" anchor="ctr"/>
+          <a:lstStyle/>
+          <a:p>
+            <a:pPr indent="0" marL="0">
+              <a:buNone/>
+            </a:pPr>
+            <a:r>
+              <a:rPr lang="en-US" sz="1000" dirty="0">
+                <a:solidFill>
+                  <a:srgbClr val="1A1A2E"/>
+                </a:solidFill>
+                <a:latin typeface="Calibri" pitchFamily="34" charset="0"/>
+                <a:ea typeface="Calibri" pitchFamily="34" charset="-122"/>
+                <a:cs typeface="Calibri" pitchFamily="34" charset="-120"/>
+              </a:rPr>
+              <a:t>Save now (high value, high risk)</a:t>
+            </a:r>
+            <a:endParaRPr lang="en-US" sz="1000" dirty="0"/>
+          </a:p>
+        </p:txBody>
+      </p:sp>
+      <p:sp>
+        <p:nvSpPr>
+          <p:cNvPr id="29" name="Text 26"/>
+          <p:cNvSpPr/>
+          <p:nvPr/>
+        </p:nvSpPr>
+        <p:spPr>
+          <a:xfrm>
+            <a:off x="10195560" y="4800600"/>
+            <a:ext cx="1463040" cy="237744"/>
+          </a:xfrm>
+          <a:prstGeom prst="rect">
+            <a:avLst/>
+          </a:prstGeom>
+          <a:noFill/>
+          <a:ln/>
+        </p:spPr>
+        <p:txBody>
+          <a:bodyPr wrap="square" rtlCol="0" anchor="ctr"/>
+          <a:lstStyle/>
+          <a:p>
+            <a:pPr algn="r" indent="0" marL="0">
+              <a:buNone/>
+            </a:pPr>
+            <a:r>
+              <a:rPr lang="en-US" sz="1000" b="1" dirty="0">
+                <a:solidFill>
+                  <a:srgbClr val="B8500A"/>
+                </a:solidFill>
+                <a:latin typeface="Calibri" pitchFamily="34" charset="0"/>
+                <a:ea typeface="Calibri" pitchFamily="34" charset="-122"/>
+                <a:cs typeface="Calibri" pitchFamily="34" charset="-120"/>
+              </a:rPr>
+              <a:t>136</a:t>
+            </a:r>
+            <a:endParaRPr lang="en-US" sz="1000" dirty="0"/>
+          </a:p>
+        </p:txBody>
+      </p:sp>
+      <p:sp>
+        <p:nvSpPr>
+          <p:cNvPr id="30" name="Text 27"/>
+          <p:cNvSpPr/>
+          <p:nvPr/>
+        </p:nvSpPr>
+        <p:spPr>
+          <a:xfrm>
+            <a:off x="6263640" y="5047488"/>
+            <a:ext cx="4023360" cy="237744"/>
+          </a:xfrm>
+          <a:prstGeom prst="rect">
+            <a:avLst/>
+          </a:prstGeom>
+          <a:noFill/>
+          <a:ln/>
+        </p:spPr>
+        <p:txBody>
+          <a:bodyPr wrap="square" rtlCol="0" anchor="ctr"/>
+          <a:lstStyle/>
+          <a:p>
+            <a:pPr indent="0" marL="0">
+              <a:buNone/>
+            </a:pPr>
+            <a:r>
+              <a:rPr lang="en-US" sz="1000" dirty="0">
+                <a:solidFill>
+                  <a:srgbClr val="1A1A2E"/>
+                </a:solidFill>
+                <a:latin typeface="Calibri" pitchFamily="34" charset="0"/>
+                <a:ea typeface="Calibri" pitchFamily="34" charset="-122"/>
+                <a:cs typeface="Calibri" pitchFamily="34" charset="-120"/>
+              </a:rPr>
+              <a:t>Monitor (low value, low risk)</a:t>
+            </a:r>
+            <a:endParaRPr lang="en-US" sz="1000" dirty="0"/>
+          </a:p>
+        </p:txBody>
+      </p:sp>
+      <p:sp>
+        <p:nvSpPr>
+          <p:cNvPr id="31" name="Text 28"/>
+          <p:cNvSpPr/>
+          <p:nvPr/>
+        </p:nvSpPr>
+        <p:spPr>
+          <a:xfrm>
+            <a:off x="10195560" y="5047488"/>
+            <a:ext cx="1463040" cy="237744"/>
+          </a:xfrm>
+          <a:prstGeom prst="rect">
+            <a:avLst/>
+          </a:prstGeom>
+          <a:noFill/>
+          <a:ln/>
+        </p:spPr>
+        <p:txBody>
+          <a:bodyPr wrap="square" rtlCol="0" anchor="ctr"/>
+          <a:lstStyle/>
+          <a:p>
+            <a:pPr algn="r" indent="0" marL="0">
+              <a:buNone/>
+            </a:pPr>
+            <a:r>
+              <a:rPr lang="en-US" sz="1000" b="1" dirty="0">
+                <a:solidFill>
+                  <a:srgbClr val="5B6178"/>
+                </a:solidFill>
+                <a:latin typeface="Calibri" pitchFamily="34" charset="0"/>
+                <a:ea typeface="Calibri" pitchFamily="34" charset="-122"/>
+                <a:cs typeface="Calibri" pitchFamily="34" charset="-120"/>
+              </a:rPr>
+              <a:t>136</a:t>
+            </a:r>
+            <a:endParaRPr lang="en-US" sz="1000" dirty="0"/>
+          </a:p>
+        </p:txBody>
+      </p:sp>
+      <p:sp>
+        <p:nvSpPr>
+          <p:cNvPr id="32" name="Text 29"/>
+          <p:cNvSpPr/>
+          <p:nvPr/>
+        </p:nvSpPr>
+        <p:spPr>
+          <a:xfrm>
+            <a:off x="6263640" y="5294376"/>
+            <a:ext cx="4023360" cy="237744"/>
+          </a:xfrm>
+          <a:prstGeom prst="rect">
+            <a:avLst/>
+          </a:prstGeom>
+          <a:noFill/>
+          <a:ln/>
+        </p:spPr>
+        <p:txBody>
+          <a:bodyPr wrap="square" rtlCol="0" anchor="ctr"/>
+          <a:lstStyle/>
+          <a:p>
+            <a:pPr indent="0" marL="0">
+              <a:buNone/>
+            </a:pPr>
+            <a:r>
+              <a:rPr lang="en-US" sz="1000" dirty="0">
+                <a:solidFill>
+                  <a:srgbClr val="1A1A2E"/>
+                </a:solidFill>
+                <a:latin typeface="Calibri" pitchFamily="34" charset="0"/>
+                <a:ea typeface="Calibri" pitchFamily="34" charset="-122"/>
+                <a:cs typeface="Calibri" pitchFamily="34" charset="-120"/>
+              </a:rPr>
+              <a:t>Protect (high value, low risk)</a:t>
+            </a:r>
+            <a:endParaRPr lang="en-US" sz="1000" dirty="0"/>
+          </a:p>
+        </p:txBody>
+      </p:sp>
+      <p:sp>
+        <p:nvSpPr>
+          <p:cNvPr id="33" name="Text 30"/>
+          <p:cNvSpPr/>
+          <p:nvPr/>
+        </p:nvSpPr>
+        <p:spPr>
+          <a:xfrm>
+            <a:off x="10195560" y="5294376"/>
+            <a:ext cx="1463040" cy="237744"/>
+          </a:xfrm>
+          <a:prstGeom prst="rect">
+            <a:avLst/>
+          </a:prstGeom>
+          <a:noFill/>
+          <a:ln/>
+        </p:spPr>
+        <p:txBody>
+          <a:bodyPr wrap="square" rtlCol="0" anchor="ctr"/>
+          <a:lstStyle/>
+          <a:p>
+            <a:pPr algn="r" indent="0" marL="0">
+              <a:buNone/>
+            </a:pPr>
+            <a:r>
+              <a:rPr lang="en-US" sz="1000" b="1" dirty="0">
+                <a:solidFill>
+                  <a:srgbClr val="2C7A57"/>
+                </a:solidFill>
+                <a:latin typeface="Calibri" pitchFamily="34" charset="0"/>
+                <a:ea typeface="Calibri" pitchFamily="34" charset="-122"/>
+                <a:cs typeface="Calibri" pitchFamily="34" charset="-120"/>
+              </a:rPr>
+              <a:t>64</a:t>
+            </a:r>
+            <a:endParaRPr lang="en-US" sz="1000" dirty="0"/>
+          </a:p>
+        </p:txBody>
+      </p:sp>
+      <p:sp>
+        <p:nvSpPr>
+          <p:cNvPr id="34" name="Text 31"/>
+          <p:cNvSpPr/>
+          <p:nvPr/>
+        </p:nvSpPr>
+        <p:spPr>
+          <a:xfrm>
+            <a:off x="6263640" y="5541264"/>
+            <a:ext cx="4023360" cy="237744"/>
+          </a:xfrm>
+          <a:prstGeom prst="rect">
+            <a:avLst/>
+          </a:prstGeom>
+          <a:noFill/>
+          <a:ln/>
+        </p:spPr>
+        <p:txBody>
+          <a:bodyPr wrap="square" rtlCol="0" anchor="ctr"/>
+          <a:lstStyle/>
+          <a:p>
+            <a:pPr indent="0" marL="0">
+              <a:buNone/>
+            </a:pPr>
+            <a:r>
+              <a:rPr lang="en-US" sz="1000" dirty="0">
+                <a:solidFill>
+                  <a:srgbClr val="1A1A2E"/>
+                </a:solidFill>
+                <a:latin typeface="Calibri" pitchFamily="34" charset="0"/>
+                <a:ea typeface="Calibri" pitchFamily="34" charset="-122"/>
+                <a:cs typeface="Calibri" pitchFamily="34" charset="-120"/>
+              </a:rPr>
+              <a:t>Low priority (low value, high risk)</a:t>
+            </a:r>
+            <a:endParaRPr lang="en-US" sz="1000" dirty="0"/>
+          </a:p>
+        </p:txBody>
+      </p:sp>
+      <p:sp>
+        <p:nvSpPr>
+          <p:cNvPr id="35" name="Text 32"/>
+          <p:cNvSpPr/>
+          <p:nvPr/>
+        </p:nvSpPr>
+        <p:spPr>
+          <a:xfrm>
+            <a:off x="10195560" y="5541264"/>
+            <a:ext cx="1463040" cy="237744"/>
+          </a:xfrm>
+          <a:prstGeom prst="rect">
+            <a:avLst/>
+          </a:prstGeom>
+          <a:noFill/>
+          <a:ln/>
+        </p:spPr>
+        <p:txBody>
+          <a:bodyPr wrap="square" rtlCol="0" anchor="ctr"/>
+          <a:lstStyle/>
+          <a:p>
+            <a:pPr algn="r" indent="0" marL="0">
+              <a:buNone/>
+            </a:pPr>
+            <a:r>
+              <a:rPr lang="en-US" sz="1000" b="1" dirty="0">
+                <a:solidFill>
+                  <a:srgbClr val="5B6178"/>
+                </a:solidFill>
+                <a:latin typeface="Calibri" pitchFamily="34" charset="0"/>
+                <a:ea typeface="Calibri" pitchFamily="34" charset="-122"/>
+                <a:cs typeface="Calibri" pitchFamily="34" charset="-120"/>
+              </a:rPr>
+              <a:t>64</a:t>
+            </a:r>
+            <a:endParaRPr lang="en-US" sz="1000" dirty="0"/>
+          </a:p>
+        </p:txBody>
+      </p:sp>
+      <p:sp>
+        <p:nvSpPr>
+          <p:cNvPr id="36" name="Text 33"/>
+          <p:cNvSpPr/>
+          <p:nvPr/>
+        </p:nvSpPr>
+        <p:spPr>
+          <a:xfrm>
+            <a:off x="548640" y="6016752"/>
+            <a:ext cx="11064240" cy="548640"/>
+          </a:xfrm>
+          <a:prstGeom prst="rect">
+            <a:avLst/>
+          </a:prstGeom>
+          <a:noFill/>
+          <a:ln/>
+        </p:spPr>
+        <p:txBody>
+          <a:bodyPr wrap="square" rtlCol="0" anchor="ctr"/>
+          <a:lstStyle/>
+          <a:p>
+            <a:pPr indent="0" marL="0">
+              <a:lnSpc>
+                <a:spcPts val="1050"/>
+              </a:lnSpc>
+              <a:buNone/>
+            </a:pPr>
+            <a:r>
+              <a:rPr lang="en-US" sz="870" i="1" dirty="0">
+                <a:solidFill>
+                  <a:srgbClr val="5B6178"/>
+                </a:solidFill>
+                <a:latin typeface="Calibri" pitchFamily="34" charset="0"/>
+                <a:ea typeface="Calibri" pitchFamily="34" charset="-122"/>
+                <a:cs typeface="Calibri" pitchFamily="34" charset="-120"/>
+              </a:rPr>
+              <a:t>Flags come from 5-fold OOF predictions; AUC/PR-AUC read modest next to the revenue model's R² only because the oracle ceiling here is 0.73 AUC. realized_ad_revenue's importance is a venue_type confound, not a causal driver. Each "Save now" / flagged venue also carries a SHAP top driver (from the fold model that never saw it) mapped to a concrete action — technical dispatch, AM retention call, content review — not a generic "reach out."</a:t>
+            </a:r>
+            <a:endParaRPr lang="en-US" sz="870" dirty="0"/>
+          </a:p>
+        </p:txBody>
+      </p:sp>
+      <p:sp>
+        <p:nvSpPr>
+          <p:cNvPr id="37" name="Text 34"/>
+          <p:cNvSpPr/>
+          <p:nvPr/>
+        </p:nvSpPr>
+        <p:spPr>
+          <a:xfrm>
+            <a:off x="457200" y="6537960"/>
+            <a:ext cx="7315200" cy="274320"/>
+          </a:xfrm>
+          <a:prstGeom prst="rect">
+            <a:avLst/>
+          </a:prstGeom>
+          <a:noFill/>
+          <a:ln/>
+        </p:spPr>
+        <p:txBody>
+          <a:bodyPr wrap="square" rtlCol="0" anchor="ctr"/>
+          <a:lstStyle/>
+          <a:p>
+            <a:pPr indent="0" marL="0">
+              <a:buNone/>
+            </a:pPr>
+            <a:r>
+              <a:rPr lang="en-US" sz="900" dirty="0">
+                <a:solidFill>
+                  <a:srgbClr val="5B6178"/>
+                </a:solidFill>
+                <a:latin typeface="Calibri" pitchFamily="34" charset="0"/>
+                <a:ea typeface="Calibri" pitchFamily="34" charset="-122"/>
+                <a:cs typeface="Calibri" pitchFamily="34" charset="-120"/>
+              </a:rPr>
+              <a:t>Venue retention</a:t>
+            </a:r>
+            <a:endParaRPr lang="en-US" sz="900" dirty="0"/>
+          </a:p>
+        </p:txBody>
+      </p:sp>
+      <p:sp>
+        <p:nvSpPr>
+          <p:cNvPr id="38" name="Text 35"/>
+          <p:cNvSpPr/>
+          <p:nvPr/>
+        </p:nvSpPr>
+        <p:spPr>
+          <a:xfrm>
+            <a:off x="7589520" y="6537960"/>
+            <a:ext cx="4114800" cy="274320"/>
+          </a:xfrm>
+          <a:prstGeom prst="rect">
+            <a:avLst/>
+          </a:prstGeom>
+          <a:noFill/>
+          <a:ln/>
+        </p:spPr>
+        <p:txBody>
+          <a:bodyPr wrap="square" rtlCol="0" anchor="ctr"/>
+          <a:lstStyle/>
+          <a:p>
+            <a:pPr algn="r" indent="0" marL="0">
+              <a:buNone/>
+            </a:pPr>
+            <a:r>
+              <a:rPr lang="en-US" sz="900" dirty="0">
+                <a:solidFill>
+                  <a:srgbClr val="5B6178"/>
+                </a:solidFill>
+                <a:latin typeface="Calibri" pitchFamily="34" charset="0"/>
+                <a:ea typeface="Calibri" pitchFamily="34" charset="-122"/>
+                <a:cs typeface="Calibri" pitchFamily="34" charset="-120"/>
+              </a:rPr>
+              <a:t>Synthetic demo — validated against a known injected ground truth</a:t>
+            </a:r>
+            <a:endParaRPr lang="en-US" sz="900" dirty="0"/>
+          </a:p>
+        </p:txBody>
+      </p:sp>
+    </p:spTree>
+  </p:cSld>
+  <p:clrMapOvr>
+    <a:masterClrMapping/>
+  </p:clrMapOvr>
+</p:sld>
+</file>
+
+<file path=ppt/slides/slide15.xml><?xml version="1.0" encoding="utf-8"?>
+<p:sld xmlns:a="http://schemas.openxmlformats.org/drawingml/2006/main" xmlns:r="http://schemas.openxmlformats.org/officeDocument/2006/relationships" xmlns:p="http://schemas.openxmlformats.org/presentationml/2006/main">
+  <p:cSld name="Slide 15">
     <p:bg>
       <p:bgPr>
         <a:solidFill>

--- a/deck/AtmosphereTV_DOOH_Measurement.pptx
+++ b/deck/AtmosphereTV_DOOH_Measurement.pptx
@@ -4767,6 +4767,45 @@
           </a:p>
         </p:txBody>
       </p:sp>
+      <p:sp>
+        <p:nvSpPr>
+          <p:cNvPr id="6" name="Text 4"/>
+          <p:cNvSpPr/>
+          <p:nvPr/>
+        </p:nvSpPr>
+        <p:spPr>
+          <a:xfrm>
+            <a:off x="822960" y="6446520"/>
+            <a:ext cx="3657600" cy="320040"/>
+          </a:xfrm>
+          <a:prstGeom prst="rect">
+            <a:avLst/>
+          </a:prstGeom>
+          <a:noFill/>
+          <a:ln/>
+        </p:spPr>
+        <p:txBody>
+          <a:bodyPr wrap="square" rtlCol="0" anchor="ctr"/>
+          <a:lstStyle/>
+          <a:p>
+            <a:pPr indent="0" marL="0">
+              <a:buNone/>
+            </a:pPr>
+            <a:r>
+              <a:rPr lang="en-US" sz="1200" dirty="0">
+                <a:solidFill>
+                  <a:srgbClr val="CADCFC"/>
+                </a:solidFill>
+                <a:latin typeface="Calibri" pitchFamily="34" charset="0"/>
+                <a:ea typeface="Calibri" pitchFamily="34" charset="-122"/>
+                <a:cs typeface="Calibri" pitchFamily="34" charset="-120"/>
+              </a:rPr>
+              <a:t>Yidan Hu</a:t>
+            </a:r>
+            <a:endParaRPr lang="en-US" sz="1200" dirty="0"/>
+          </a:p>
+        </p:txBody>
+      </p:sp>
     </p:spTree>
   </p:cSld>
   <p:clrMapOvr>

--- a/deck/AtmosphereTV_DOOH_Measurement.pptx
+++ b/deck/AtmosphereTV_DOOH_Measurement.pptx
@@ -4775,7 +4775,7 @@
         </p:nvSpPr>
         <p:spPr>
           <a:xfrm>
-            <a:off x="822960" y="6446520"/>
+            <a:off x="822960" y="5989320"/>
             <a:ext cx="3657600" cy="320040"/>
           </a:xfrm>
           <a:prstGeom prst="rect">

--- a/deck/AtmosphereTV_DOOH_Measurement.pptx
+++ b/deck/AtmosphereTV_DOOH_Measurement.pptx
@@ -10136,7 +10136,7 @@
                 <a:ea typeface="Calibri" pitchFamily="34" charset="-122"/>
                 <a:cs typeface="Calibri" pitchFamily="34" charset="-120"/>
               </a:rPr>
-              <a:t>Know which venues are worth more than they're being paid, and which are at risk of leaving — protect and grow the inventory Atmosphere actually sells. (Answers Q3–Q4.)</a:t>
+              <a:t>Know which venues are generating less ad revenue than their audience is worth, and which are at risk of leaving — protect and grow the inventory Atmosphere actually sells. (Answers Q3–Q4.)</a:t>
             </a:r>
             <a:endParaRPr lang="en-US" sz="1100" dirty="0"/>
           </a:p>
@@ -10359,7 +10359,7 @@
                 <a:ea typeface="Calibri" pitchFamily="34" charset="-122"/>
                 <a:cs typeface="Calibri" pitchFamily="34" charset="-120"/>
               </a:rPr>
-              <a:t>What follows is one concrete example of applying this approach — a synthetic demo, validated end to end against a known ground truth.</a:t>
+              <a:t>What follows is one concrete example of applying this approach — a synthetic demo.</a:t>
             </a:r>
             <a:endParaRPr lang="en-US" sz="1150" dirty="0"/>
           </a:p>

--- a/deck/AtmosphereTV_DOOH_Measurement.pptx
+++ b/deck/AtmosphereTV_DOOH_Measurement.pptx
@@ -10651,7 +10651,7 @@
                 <a:ea typeface="Calibri" pitchFamily="34" charset="-122"/>
                 <a:cs typeface="Calibri" pitchFamily="34" charset="-120"/>
               </a:rPr>
-              <a:t>Every figure in this project is synthetic, with a known injected ground-truth effect used specifically to validate that each method recovers it before trusting it conceptually. Not a claim about any real company's data.</a:t>
+              <a:t>Every figure in this project is synthetic. The focus here is the methodology for solving the problem, not real company data or figures.</a:t>
             </a:r>
             <a:endParaRPr lang="en-US" sz="1050" dirty="0"/>
           </a:p>

--- a/deck/AtmosphereTV_DOOH_Measurement.pptx
+++ b/deck/AtmosphereTV_DOOH_Measurement.pptx
@@ -11732,7 +11732,7 @@
                 <a:ea typeface="Calibri" pitchFamily="34" charset="-122"/>
                 <a:cs typeface="Calibri" pitchFamily="34" charset="-120"/>
               </a:rPr>
-              <a:t>Given a fixed weekly budget, how should it split across restaurants, gyms, bars, and waiting rooms — accounting for each venue type's own diminishing-returns curve?</a:t>
+              <a:t>Given a budget an advertiser has already committed to Atmosphere, how should it split across restaurants, gyms, bars, and waiting rooms — accounting for each venue type's own diminishing-returns curve?</a:t>
             </a:r>
             <a:endParaRPr lang="en-US" sz="1000" dirty="0"/>
           </a:p>
@@ -11761,7 +11761,7 @@
                 <a:ea typeface="Calibri" pitchFamily="34" charset="-122"/>
                 <a:cs typeface="Calibri" pitchFamily="34" charset="-120"/>
               </a:rPr>
-              <a:t>The media-planning / pricing question advertisers ask before they commit spend.</a:t>
+              <a:t>An allocation Atmosphere optimizes on its own inventory and hands advertisers as part of the media plan — not a cross-channel budget call made elsewhere.</a:t>
             </a:r>
             <a:endParaRPr lang="en-US" sz="1000" dirty="0"/>
           </a:p>

--- a/deck/AtmosphereTV_DOOH_Measurement.pptx
+++ b/deck/AtmosphereTV_DOOH_Measurement.pptx
@@ -4879,7 +4879,73 @@
       </p:sp>
       <p:sp>
         <p:nvSpPr>
-          <p:cNvPr id="3" name="Text 1"/>
+          <p:cNvPr id="3" name="Shape 1"/>
+          <p:cNvSpPr/>
+          <p:nvPr/>
+        </p:nvSpPr>
+        <p:spPr>
+          <a:xfrm>
+            <a:off x="8229600" y="146304"/>
+            <a:ext cx="3410712" cy="246888"/>
+          </a:xfrm>
+          <a:prstGeom prst="roundRect">
+            <a:avLst>
+              <a:gd name="adj" fmla="val 22222"/>
+            </a:avLst>
+          </a:prstGeom>
+          <a:solidFill>
+            <a:srgbClr val="FFFFFF"/>
+          </a:solidFill>
+          <a:ln w="15875">
+            <a:solidFill>
+              <a:srgbClr val="B8500A"/>
+            </a:solidFill>
+            <a:prstDash val="solid"/>
+          </a:ln>
+        </p:spPr>
+      </p:sp>
+      <p:sp>
+        <p:nvSpPr>
+          <p:cNvPr id="4" name="Text 2"/>
+          <p:cNvSpPr/>
+          <p:nvPr/>
+        </p:nvSpPr>
+        <p:spPr>
+          <a:xfrm>
+            <a:off x="8229600" y="146304"/>
+            <a:ext cx="3410712" cy="246888"/>
+          </a:xfrm>
+          <a:prstGeom prst="rect">
+            <a:avLst/>
+          </a:prstGeom>
+          <a:noFill/>
+          <a:ln/>
+        </p:spPr>
+        <p:txBody>
+          <a:bodyPr wrap="square" rtlCol="0" anchor="ctr"/>
+          <a:lstStyle/>
+          <a:p>
+            <a:pPr algn="ctr" indent="0" marL="0">
+              <a:buNone/>
+            </a:pPr>
+            <a:r>
+              <a:rPr lang="en-US" sz="950" b="1" dirty="0">
+                <a:solidFill>
+                  <a:srgbClr val="B8500A"/>
+                </a:solidFill>
+                <a:latin typeface="Calibri" pitchFamily="34" charset="0"/>
+                <a:ea typeface="Calibri" pitchFamily="34" charset="-122"/>
+                <a:cs typeface="Calibri" pitchFamily="34" charset="-120"/>
+              </a:rPr>
+              <a:t>Step 3 robustness check · Q2</a:t>
+            </a:r>
+            <a:endParaRPr lang="en-US" sz="950" dirty="0"/>
+          </a:p>
+        </p:txBody>
+      </p:sp>
+      <p:sp>
+        <p:nvSpPr>
+          <p:cNvPr id="5" name="Text 3"/>
           <p:cNvSpPr/>
           <p:nvPr/>
         </p:nvSpPr>
@@ -4918,7 +4984,7 @@
       </p:sp>
       <p:graphicFrame>
         <p:nvGraphicFramePr>
-          <p:cNvPr id="4" name="Chart 0" descr=""/>
+          <p:cNvPr id="6" name="Chart 0" descr=""/>
           <p:cNvGraphicFramePr/>
           <p:nvPr/>
         </p:nvGraphicFramePr>
@@ -4934,7 +5000,7 @@
       </p:graphicFrame>
       <p:sp>
         <p:nvSpPr>
-          <p:cNvPr id="5" name="Shape 2"/>
+          <p:cNvPr id="7" name="Shape 4"/>
           <p:cNvSpPr/>
           <p:nvPr/>
         </p:nvSpPr>
@@ -4956,7 +5022,7 @@
       </p:sp>
       <p:sp>
         <p:nvSpPr>
-          <p:cNvPr id="6" name="Text 3"/>
+          <p:cNvPr id="8" name="Text 5"/>
           <p:cNvSpPr/>
           <p:nvPr/>
         </p:nvSpPr>
@@ -4995,7 +5061,7 @@
       </p:sp>
       <p:sp>
         <p:nvSpPr>
-          <p:cNvPr id="7" name="Text 4"/>
+          <p:cNvPr id="9" name="Text 6"/>
           <p:cNvSpPr/>
           <p:nvPr/>
         </p:nvSpPr>
@@ -5034,7 +5100,7 @@
       </p:sp>
       <p:sp>
         <p:nvSpPr>
-          <p:cNvPr id="8" name="Text 5"/>
+          <p:cNvPr id="10" name="Text 7"/>
           <p:cNvSpPr/>
           <p:nvPr/>
         </p:nvSpPr>
@@ -5076,7 +5142,7 @@
       </p:sp>
       <p:sp>
         <p:nvSpPr>
-          <p:cNvPr id="9" name="Text 6"/>
+          <p:cNvPr id="11" name="Text 8"/>
           <p:cNvSpPr/>
           <p:nvPr/>
         </p:nvSpPr>
@@ -5118,7 +5184,7 @@
       </p:sp>
       <p:sp>
         <p:nvSpPr>
-          <p:cNvPr id="10" name="Shape 7"/>
+          <p:cNvPr id="12" name="Shape 9"/>
           <p:cNvSpPr/>
           <p:nvPr/>
         </p:nvSpPr>
@@ -5140,7 +5206,7 @@
       </p:sp>
       <p:sp>
         <p:nvSpPr>
-          <p:cNvPr id="11" name="Text 8"/>
+          <p:cNvPr id="13" name="Text 10"/>
           <p:cNvSpPr/>
           <p:nvPr/>
         </p:nvSpPr>
@@ -5182,7 +5248,7 @@
       </p:sp>
       <p:sp>
         <p:nvSpPr>
-          <p:cNvPr id="12" name="Text 9"/>
+          <p:cNvPr id="14" name="Text 11"/>
           <p:cNvSpPr/>
           <p:nvPr/>
         </p:nvSpPr>
@@ -5221,7 +5287,7 @@
       </p:sp>
       <p:sp>
         <p:nvSpPr>
-          <p:cNvPr id="13" name="Text 10"/>
+          <p:cNvPr id="15" name="Text 12"/>
           <p:cNvSpPr/>
           <p:nvPr/>
         </p:nvSpPr>
@@ -5337,6 +5403,72 @@
         </p:nvSpPr>
         <p:spPr>
           <a:xfrm>
+            <a:off x="8229600" y="146304"/>
+            <a:ext cx="3410712" cy="246888"/>
+          </a:xfrm>
+          <a:prstGeom prst="roundRect">
+            <a:avLst>
+              <a:gd name="adj" fmla="val 22222"/>
+            </a:avLst>
+          </a:prstGeom>
+          <a:solidFill>
+            <a:srgbClr val="FFFFFF"/>
+          </a:solidFill>
+          <a:ln w="15875">
+            <a:solidFill>
+              <a:srgbClr val="B8500A"/>
+            </a:solidFill>
+            <a:prstDash val="solid"/>
+          </a:ln>
+        </p:spPr>
+      </p:sp>
+      <p:sp>
+        <p:nvSpPr>
+          <p:cNvPr id="4" name="Text 2"/>
+          <p:cNvSpPr/>
+          <p:nvPr/>
+        </p:nvSpPr>
+        <p:spPr>
+          <a:xfrm>
+            <a:off x="8229600" y="146304"/>
+            <a:ext cx="3410712" cy="246888"/>
+          </a:xfrm>
+          <a:prstGeom prst="rect">
+            <a:avLst/>
+          </a:prstGeom>
+          <a:noFill/>
+          <a:ln/>
+        </p:spPr>
+        <p:txBody>
+          <a:bodyPr wrap="square" rtlCol="0" anchor="ctr"/>
+          <a:lstStyle/>
+          <a:p>
+            <a:pPr algn="ctr" indent="0" marL="0">
+              <a:buNone/>
+            </a:pPr>
+            <a:r>
+              <a:rPr lang="en-US" sz="950" b="1" dirty="0">
+                <a:solidFill>
+                  <a:srgbClr val="B8500A"/>
+                </a:solidFill>
+                <a:latin typeface="Calibri" pitchFamily="34" charset="0"/>
+                <a:ea typeface="Calibri" pitchFamily="34" charset="-122"/>
+                <a:cs typeface="Calibri" pitchFamily="34" charset="-120"/>
+              </a:rPr>
+              <a:t>Step 4 of 6 · Answers Q2</a:t>
+            </a:r>
+            <a:endParaRPr lang="en-US" sz="950" dirty="0"/>
+          </a:p>
+        </p:txBody>
+      </p:sp>
+      <p:sp>
+        <p:nvSpPr>
+          <p:cNvPr id="5" name="Shape 3"/>
+          <p:cNvSpPr/>
+          <p:nvPr/>
+        </p:nvSpPr>
+        <p:spPr>
+          <a:xfrm>
             <a:off x="548640" y="1143000"/>
             <a:ext cx="11064240" cy="914400"/>
           </a:xfrm>
@@ -5353,7 +5485,7 @@
       </p:sp>
       <p:sp>
         <p:nvSpPr>
-          <p:cNvPr id="4" name="Text 2"/>
+          <p:cNvPr id="6" name="Text 4"/>
           <p:cNvSpPr/>
           <p:nvPr/>
         </p:nvSpPr>
@@ -5395,7 +5527,7 @@
       </p:sp>
       <p:graphicFrame>
         <p:nvGraphicFramePr>
-          <p:cNvPr id="5" name="Chart 0" descr=""/>
+          <p:cNvPr id="7" name="Chart 0" descr=""/>
           <p:cNvGraphicFramePr/>
           <p:nvPr/>
         </p:nvGraphicFramePr>
@@ -5411,7 +5543,7 @@
       </p:graphicFrame>
       <p:sp>
         <p:nvSpPr>
-          <p:cNvPr id="6" name="Text 3"/>
+          <p:cNvPr id="8" name="Text 5"/>
           <p:cNvSpPr/>
           <p:nvPr/>
         </p:nvSpPr>
@@ -5450,7 +5582,7 @@
       </p:sp>
       <p:sp>
         <p:nvSpPr>
-          <p:cNvPr id="7" name="Text 4"/>
+          <p:cNvPr id="9" name="Text 6"/>
           <p:cNvSpPr/>
           <p:nvPr/>
         </p:nvSpPr>
@@ -5489,7 +5621,7 @@
       </p:sp>
       <p:sp>
         <p:nvSpPr>
-          <p:cNvPr id="8" name="Text 5"/>
+          <p:cNvPr id="10" name="Text 7"/>
           <p:cNvSpPr/>
           <p:nvPr/>
         </p:nvSpPr>
@@ -5528,7 +5660,7 @@
       </p:sp>
       <p:sp>
         <p:nvSpPr>
-          <p:cNvPr id="9" name="Text 6"/>
+          <p:cNvPr id="11" name="Text 8"/>
           <p:cNvSpPr/>
           <p:nvPr/>
         </p:nvSpPr>
@@ -5567,7 +5699,7 @@
       </p:sp>
       <p:sp>
         <p:nvSpPr>
-          <p:cNvPr id="10" name="Text 7"/>
+          <p:cNvPr id="12" name="Text 9"/>
           <p:cNvSpPr/>
           <p:nvPr/>
         </p:nvSpPr>
@@ -5606,7 +5738,7 @@
       </p:sp>
       <p:sp>
         <p:nvSpPr>
-          <p:cNvPr id="11" name="Text 8"/>
+          <p:cNvPr id="13" name="Text 10"/>
           <p:cNvSpPr/>
           <p:nvPr/>
         </p:nvSpPr>
@@ -5645,7 +5777,7 @@
       </p:sp>
       <p:sp>
         <p:nvSpPr>
-          <p:cNvPr id="12" name="Text 9"/>
+          <p:cNvPr id="14" name="Text 11"/>
           <p:cNvSpPr/>
           <p:nvPr/>
         </p:nvSpPr>
@@ -5684,7 +5816,7 @@
       </p:sp>
       <p:sp>
         <p:nvSpPr>
-          <p:cNvPr id="13" name="Text 10"/>
+          <p:cNvPr id="15" name="Text 12"/>
           <p:cNvSpPr/>
           <p:nvPr/>
         </p:nvSpPr>
@@ -5723,7 +5855,7 @@
       </p:sp>
       <p:sp>
         <p:nvSpPr>
-          <p:cNvPr id="14" name="Text 11"/>
+          <p:cNvPr id="16" name="Text 13"/>
           <p:cNvSpPr/>
           <p:nvPr/>
         </p:nvSpPr>
@@ -5762,7 +5894,7 @@
       </p:sp>
       <p:sp>
         <p:nvSpPr>
-          <p:cNvPr id="15" name="Text 12"/>
+          <p:cNvPr id="17" name="Text 14"/>
           <p:cNvSpPr/>
           <p:nvPr/>
         </p:nvSpPr>
@@ -5801,7 +5933,7 @@
       </p:sp>
       <p:sp>
         <p:nvSpPr>
-          <p:cNvPr id="16" name="Text 13"/>
+          <p:cNvPr id="18" name="Text 15"/>
           <p:cNvSpPr/>
           <p:nvPr/>
         </p:nvSpPr>
@@ -5843,7 +5975,7 @@
       </p:sp>
       <p:sp>
         <p:nvSpPr>
-          <p:cNvPr id="17" name="Text 14"/>
+          <p:cNvPr id="19" name="Text 16"/>
           <p:cNvSpPr/>
           <p:nvPr/>
         </p:nvSpPr>
@@ -5882,7 +6014,7 @@
       </p:sp>
       <p:sp>
         <p:nvSpPr>
-          <p:cNvPr id="18" name="Text 15"/>
+          <p:cNvPr id="20" name="Text 17"/>
           <p:cNvSpPr/>
           <p:nvPr/>
         </p:nvSpPr>
@@ -5992,7 +6124,73 @@
       </p:sp>
       <p:sp>
         <p:nvSpPr>
-          <p:cNvPr id="3" name="Text 1"/>
+          <p:cNvPr id="3" name="Shape 1"/>
+          <p:cNvSpPr/>
+          <p:nvPr/>
+        </p:nvSpPr>
+        <p:spPr>
+          <a:xfrm>
+            <a:off x="8229600" y="146304"/>
+            <a:ext cx="3410712" cy="246888"/>
+          </a:xfrm>
+          <a:prstGeom prst="roundRect">
+            <a:avLst>
+              <a:gd name="adj" fmla="val 22222"/>
+            </a:avLst>
+          </a:prstGeom>
+          <a:solidFill>
+            <a:srgbClr val="FFFFFF"/>
+          </a:solidFill>
+          <a:ln w="15875">
+            <a:solidFill>
+              <a:srgbClr val="5B6178"/>
+            </a:solidFill>
+            <a:prstDash val="solid"/>
+          </a:ln>
+        </p:spPr>
+      </p:sp>
+      <p:sp>
+        <p:nvSpPr>
+          <p:cNvPr id="4" name="Text 2"/>
+          <p:cNvSpPr/>
+          <p:nvPr/>
+        </p:nvSpPr>
+        <p:spPr>
+          <a:xfrm>
+            <a:off x="8229600" y="146304"/>
+            <a:ext cx="3410712" cy="246888"/>
+          </a:xfrm>
+          <a:prstGeom prst="rect">
+            <a:avLst/>
+          </a:prstGeom>
+          <a:noFill/>
+          <a:ln/>
+        </p:spPr>
+        <p:txBody>
+          <a:bodyPr wrap="square" rtlCol="0" anchor="ctr"/>
+          <a:lstStyle/>
+          <a:p>
+            <a:pPr algn="ctr" indent="0" marL="0">
+              <a:buNone/>
+            </a:pPr>
+            <a:r>
+              <a:rPr lang="en-US" sz="950" b="1" dirty="0">
+                <a:solidFill>
+                  <a:srgbClr val="5B6178"/>
+                </a:solidFill>
+                <a:latin typeface="Calibri" pitchFamily="34" charset="0"/>
+                <a:ea typeface="Calibri" pitchFamily="34" charset="-122"/>
+                <a:cs typeface="Calibri" pitchFamily="34" charset="-120"/>
+              </a:rPr>
+              <a:t>Transition · Q1–Q2 → Q3–Q4</a:t>
+            </a:r>
+            <a:endParaRPr lang="en-US" sz="950" dirty="0"/>
+          </a:p>
+        </p:txBody>
+      </p:sp>
+      <p:sp>
+        <p:nvSpPr>
+          <p:cNvPr id="5" name="Text 3"/>
           <p:cNvSpPr/>
           <p:nvPr/>
         </p:nvSpPr>
@@ -6031,7 +6229,7 @@
       </p:sp>
       <p:sp>
         <p:nvSpPr>
-          <p:cNvPr id="4" name="Shape 2"/>
+          <p:cNvPr id="6" name="Shape 4"/>
           <p:cNvSpPr/>
           <p:nvPr/>
         </p:nvSpPr>
@@ -6053,7 +6251,7 @@
       </p:sp>
       <p:sp>
         <p:nvSpPr>
-          <p:cNvPr id="5" name="Text 3"/>
+          <p:cNvPr id="7" name="Text 5"/>
           <p:cNvSpPr/>
           <p:nvPr/>
         </p:nvSpPr>
@@ -6092,7 +6290,7 @@
       </p:sp>
       <p:sp>
         <p:nvSpPr>
-          <p:cNvPr id="6" name="Text 4"/>
+          <p:cNvPr id="8" name="Text 6"/>
           <p:cNvSpPr/>
           <p:nvPr/>
         </p:nvSpPr>
@@ -6134,7 +6332,7 @@
       </p:sp>
       <p:sp>
         <p:nvSpPr>
-          <p:cNvPr id="7" name="Text 5"/>
+          <p:cNvPr id="9" name="Text 7"/>
           <p:cNvSpPr/>
           <p:nvPr/>
         </p:nvSpPr>
@@ -6176,7 +6374,7 @@
       </p:sp>
       <p:sp>
         <p:nvSpPr>
-          <p:cNvPr id="8" name="Text 6"/>
+          <p:cNvPr id="10" name="Text 8"/>
           <p:cNvSpPr/>
           <p:nvPr/>
         </p:nvSpPr>
@@ -6218,7 +6416,7 @@
       </p:sp>
       <p:sp>
         <p:nvSpPr>
-          <p:cNvPr id="9" name="Text 7"/>
+          <p:cNvPr id="11" name="Text 9"/>
           <p:cNvSpPr/>
           <p:nvPr/>
         </p:nvSpPr>
@@ -6260,7 +6458,7 @@
       </p:sp>
       <p:sp>
         <p:nvSpPr>
-          <p:cNvPr id="10" name="Shape 8"/>
+          <p:cNvPr id="12" name="Shape 10"/>
           <p:cNvSpPr/>
           <p:nvPr/>
         </p:nvSpPr>
@@ -6282,7 +6480,7 @@
       </p:sp>
       <p:sp>
         <p:nvSpPr>
-          <p:cNvPr id="11" name="Text 9"/>
+          <p:cNvPr id="13" name="Text 11"/>
           <p:cNvSpPr/>
           <p:nvPr/>
         </p:nvSpPr>
@@ -6321,7 +6519,7 @@
       </p:sp>
       <p:sp>
         <p:nvSpPr>
-          <p:cNvPr id="12" name="Text 10"/>
+          <p:cNvPr id="14" name="Text 12"/>
           <p:cNvSpPr/>
           <p:nvPr/>
         </p:nvSpPr>
@@ -6363,7 +6561,7 @@
       </p:sp>
       <p:sp>
         <p:nvSpPr>
-          <p:cNvPr id="13" name="Text 11"/>
+          <p:cNvPr id="15" name="Text 13"/>
           <p:cNvSpPr/>
           <p:nvPr/>
         </p:nvSpPr>
@@ -6405,7 +6603,7 @@
       </p:sp>
       <p:sp>
         <p:nvSpPr>
-          <p:cNvPr id="14" name="Text 12"/>
+          <p:cNvPr id="16" name="Text 14"/>
           <p:cNvSpPr/>
           <p:nvPr/>
         </p:nvSpPr>
@@ -6447,7 +6645,7 @@
       </p:sp>
       <p:sp>
         <p:nvSpPr>
-          <p:cNvPr id="15" name="Text 13"/>
+          <p:cNvPr id="17" name="Text 15"/>
           <p:cNvSpPr/>
           <p:nvPr/>
         </p:nvSpPr>
@@ -6489,7 +6687,7 @@
       </p:sp>
       <p:sp>
         <p:nvSpPr>
-          <p:cNvPr id="16" name="Text 14"/>
+          <p:cNvPr id="18" name="Text 16"/>
           <p:cNvSpPr/>
           <p:nvPr/>
         </p:nvSpPr>
@@ -6531,7 +6729,7 @@
       </p:sp>
       <p:sp>
         <p:nvSpPr>
-          <p:cNvPr id="17" name="Text 15"/>
+          <p:cNvPr id="19" name="Text 17"/>
           <p:cNvSpPr/>
           <p:nvPr/>
         </p:nvSpPr>
@@ -6641,7 +6839,73 @@
       </p:sp>
       <p:sp>
         <p:nvSpPr>
-          <p:cNvPr id="3" name="Text 1"/>
+          <p:cNvPr id="3" name="Shape 1"/>
+          <p:cNvSpPr/>
+          <p:nvPr/>
+        </p:nvSpPr>
+        <p:spPr>
+          <a:xfrm>
+            <a:off x="8229600" y="146304"/>
+            <a:ext cx="3410712" cy="246888"/>
+          </a:xfrm>
+          <a:prstGeom prst="roundRect">
+            <a:avLst>
+              <a:gd name="adj" fmla="val 22222"/>
+            </a:avLst>
+          </a:prstGeom>
+          <a:solidFill>
+            <a:srgbClr val="FFFFFF"/>
+          </a:solidFill>
+          <a:ln w="15875">
+            <a:solidFill>
+              <a:srgbClr val="2C7A57"/>
+            </a:solidFill>
+            <a:prstDash val="solid"/>
+          </a:ln>
+        </p:spPr>
+      </p:sp>
+      <p:sp>
+        <p:nvSpPr>
+          <p:cNvPr id="4" name="Text 2"/>
+          <p:cNvSpPr/>
+          <p:nvPr/>
+        </p:nvSpPr>
+        <p:spPr>
+          <a:xfrm>
+            <a:off x="8229600" y="146304"/>
+            <a:ext cx="3410712" cy="246888"/>
+          </a:xfrm>
+          <a:prstGeom prst="rect">
+            <a:avLst/>
+          </a:prstGeom>
+          <a:noFill/>
+          <a:ln/>
+        </p:spPr>
+        <p:txBody>
+          <a:bodyPr wrap="square" rtlCol="0" anchor="ctr"/>
+          <a:lstStyle/>
+          <a:p>
+            <a:pPr algn="ctr" indent="0" marL="0">
+              <a:buNone/>
+            </a:pPr>
+            <a:r>
+              <a:rPr lang="en-US" sz="950" b="1" dirty="0">
+                <a:solidFill>
+                  <a:srgbClr val="2C7A57"/>
+                </a:solidFill>
+                <a:latin typeface="Calibri" pitchFamily="34" charset="0"/>
+                <a:ea typeface="Calibri" pitchFamily="34" charset="-122"/>
+                <a:cs typeface="Calibri" pitchFamily="34" charset="-120"/>
+              </a:rPr>
+              <a:t>Step 5 of 6 · Answers Q3</a:t>
+            </a:r>
+            <a:endParaRPr lang="en-US" sz="950" dirty="0"/>
+          </a:p>
+        </p:txBody>
+      </p:sp>
+      <p:sp>
+        <p:nvSpPr>
+          <p:cNvPr id="5" name="Text 3"/>
           <p:cNvSpPr/>
           <p:nvPr/>
         </p:nvSpPr>
@@ -6680,7 +6944,7 @@
       </p:sp>
       <p:sp>
         <p:nvSpPr>
-          <p:cNvPr id="4" name="Shape 2"/>
+          <p:cNvPr id="6" name="Shape 4"/>
           <p:cNvSpPr/>
           <p:nvPr/>
         </p:nvSpPr>
@@ -6702,7 +6966,7 @@
       </p:sp>
       <p:sp>
         <p:nvSpPr>
-          <p:cNvPr id="5" name="Text 3"/>
+          <p:cNvPr id="7" name="Text 5"/>
           <p:cNvSpPr/>
           <p:nvPr/>
         </p:nvSpPr>
@@ -6741,7 +7005,7 @@
       </p:sp>
       <p:sp>
         <p:nvSpPr>
-          <p:cNvPr id="6" name="Text 4"/>
+          <p:cNvPr id="8" name="Text 6"/>
           <p:cNvSpPr/>
           <p:nvPr/>
         </p:nvSpPr>
@@ -6780,7 +7044,7 @@
       </p:sp>
       <p:sp>
         <p:nvSpPr>
-          <p:cNvPr id="7" name="Shape 5"/>
+          <p:cNvPr id="9" name="Shape 7"/>
           <p:cNvSpPr/>
           <p:nvPr/>
         </p:nvSpPr>
@@ -6802,7 +7066,7 @@
       </p:sp>
       <p:sp>
         <p:nvSpPr>
-          <p:cNvPr id="8" name="Text 6"/>
+          <p:cNvPr id="10" name="Text 8"/>
           <p:cNvSpPr/>
           <p:nvPr/>
         </p:nvSpPr>
@@ -6841,7 +7105,7 @@
       </p:sp>
       <p:sp>
         <p:nvSpPr>
-          <p:cNvPr id="9" name="Text 7"/>
+          <p:cNvPr id="11" name="Text 9"/>
           <p:cNvSpPr/>
           <p:nvPr/>
         </p:nvSpPr>
@@ -6880,7 +7144,7 @@
       </p:sp>
       <p:sp>
         <p:nvSpPr>
-          <p:cNvPr id="10" name="Shape 8"/>
+          <p:cNvPr id="12" name="Shape 10"/>
           <p:cNvSpPr/>
           <p:nvPr/>
         </p:nvSpPr>
@@ -6902,7 +7166,7 @@
       </p:sp>
       <p:sp>
         <p:nvSpPr>
-          <p:cNvPr id="11" name="Text 9"/>
+          <p:cNvPr id="13" name="Text 11"/>
           <p:cNvSpPr/>
           <p:nvPr/>
         </p:nvSpPr>
@@ -6941,7 +7205,7 @@
       </p:sp>
       <p:sp>
         <p:nvSpPr>
-          <p:cNvPr id="12" name="Text 10"/>
+          <p:cNvPr id="14" name="Text 12"/>
           <p:cNvSpPr/>
           <p:nvPr/>
         </p:nvSpPr>
@@ -6980,7 +7244,7 @@
       </p:sp>
       <p:sp>
         <p:nvSpPr>
-          <p:cNvPr id="13" name="Shape 11"/>
+          <p:cNvPr id="15" name="Shape 13"/>
           <p:cNvSpPr/>
           <p:nvPr/>
         </p:nvSpPr>
@@ -7002,7 +7266,7 @@
       </p:sp>
       <p:sp>
         <p:nvSpPr>
-          <p:cNvPr id="14" name="Text 12"/>
+          <p:cNvPr id="16" name="Text 14"/>
           <p:cNvSpPr/>
           <p:nvPr/>
         </p:nvSpPr>
@@ -7041,7 +7305,7 @@
       </p:sp>
       <p:sp>
         <p:nvSpPr>
-          <p:cNvPr id="15" name="Text 13"/>
+          <p:cNvPr id="17" name="Text 15"/>
           <p:cNvSpPr/>
           <p:nvPr/>
         </p:nvSpPr>
@@ -7080,7 +7344,7 @@
       </p:sp>
       <p:graphicFrame>
         <p:nvGraphicFramePr>
-          <p:cNvPr id="16" name="Chart 0" descr=""/>
+          <p:cNvPr id="18" name="Chart 0" descr=""/>
           <p:cNvGraphicFramePr/>
           <p:nvPr/>
         </p:nvGraphicFramePr>
@@ -7096,7 +7360,7 @@
       </p:graphicFrame>
       <p:sp>
         <p:nvSpPr>
-          <p:cNvPr id="17" name="Text 14"/>
+          <p:cNvPr id="19" name="Text 16"/>
           <p:cNvSpPr/>
           <p:nvPr/>
         </p:nvSpPr>
@@ -7135,7 +7399,7 @@
       </p:sp>
       <p:sp>
         <p:nvSpPr>
-          <p:cNvPr id="18" name="Text 15"/>
+          <p:cNvPr id="20" name="Text 17"/>
           <p:cNvSpPr/>
           <p:nvPr/>
         </p:nvSpPr>
@@ -7174,7 +7438,7 @@
       </p:sp>
       <p:sp>
         <p:nvSpPr>
-          <p:cNvPr id="19" name="Text 16"/>
+          <p:cNvPr id="21" name="Text 18"/>
           <p:cNvSpPr/>
           <p:nvPr/>
         </p:nvSpPr>
@@ -7213,7 +7477,7 @@
       </p:sp>
       <p:sp>
         <p:nvSpPr>
-          <p:cNvPr id="20" name="Text 17"/>
+          <p:cNvPr id="22" name="Text 19"/>
           <p:cNvSpPr/>
           <p:nvPr/>
         </p:nvSpPr>
@@ -7252,7 +7516,7 @@
       </p:sp>
       <p:sp>
         <p:nvSpPr>
-          <p:cNvPr id="21" name="Text 18"/>
+          <p:cNvPr id="23" name="Text 20"/>
           <p:cNvSpPr/>
           <p:nvPr/>
         </p:nvSpPr>
@@ -7291,7 +7555,7 @@
       </p:sp>
       <p:sp>
         <p:nvSpPr>
-          <p:cNvPr id="22" name="Text 19"/>
+          <p:cNvPr id="24" name="Text 21"/>
           <p:cNvSpPr/>
           <p:nvPr/>
         </p:nvSpPr>
@@ -7330,7 +7594,7 @@
       </p:sp>
       <p:sp>
         <p:nvSpPr>
-          <p:cNvPr id="23" name="Text 20"/>
+          <p:cNvPr id="25" name="Text 22"/>
           <p:cNvSpPr/>
           <p:nvPr/>
         </p:nvSpPr>
@@ -7369,7 +7633,7 @@
       </p:sp>
       <p:sp>
         <p:nvSpPr>
-          <p:cNvPr id="24" name="Text 21"/>
+          <p:cNvPr id="26" name="Text 23"/>
           <p:cNvSpPr/>
           <p:nvPr/>
         </p:nvSpPr>
@@ -7408,7 +7672,7 @@
       </p:sp>
       <p:sp>
         <p:nvSpPr>
-          <p:cNvPr id="25" name="Text 22"/>
+          <p:cNvPr id="27" name="Text 24"/>
           <p:cNvSpPr/>
           <p:nvPr/>
         </p:nvSpPr>
@@ -7447,7 +7711,7 @@
       </p:sp>
       <p:sp>
         <p:nvSpPr>
-          <p:cNvPr id="26" name="Text 23"/>
+          <p:cNvPr id="28" name="Text 25"/>
           <p:cNvSpPr/>
           <p:nvPr/>
         </p:nvSpPr>
@@ -7486,7 +7750,7 @@
       </p:sp>
       <p:sp>
         <p:nvSpPr>
-          <p:cNvPr id="27" name="Text 24"/>
+          <p:cNvPr id="29" name="Text 26"/>
           <p:cNvSpPr/>
           <p:nvPr/>
         </p:nvSpPr>
@@ -7525,7 +7789,7 @@
       </p:sp>
       <p:sp>
         <p:nvSpPr>
-          <p:cNvPr id="28" name="Text 25"/>
+          <p:cNvPr id="30" name="Text 27"/>
           <p:cNvSpPr/>
           <p:nvPr/>
         </p:nvSpPr>
@@ -7564,7 +7828,7 @@
       </p:sp>
       <p:sp>
         <p:nvSpPr>
-          <p:cNvPr id="29" name="Text 26"/>
+          <p:cNvPr id="31" name="Text 28"/>
           <p:cNvSpPr/>
           <p:nvPr/>
         </p:nvSpPr>
@@ -7603,7 +7867,7 @@
       </p:sp>
       <p:sp>
         <p:nvSpPr>
-          <p:cNvPr id="30" name="Text 27"/>
+          <p:cNvPr id="32" name="Text 29"/>
           <p:cNvSpPr/>
           <p:nvPr/>
         </p:nvSpPr>
@@ -7642,7 +7906,7 @@
       </p:sp>
       <p:sp>
         <p:nvSpPr>
-          <p:cNvPr id="31" name="Text 28"/>
+          <p:cNvPr id="33" name="Text 30"/>
           <p:cNvSpPr/>
           <p:nvPr/>
         </p:nvSpPr>
@@ -7681,7 +7945,7 @@
       </p:sp>
       <p:sp>
         <p:nvSpPr>
-          <p:cNvPr id="32" name="Text 29"/>
+          <p:cNvPr id="34" name="Text 31"/>
           <p:cNvSpPr/>
           <p:nvPr/>
         </p:nvSpPr>
@@ -7720,7 +7984,7 @@
       </p:sp>
       <p:sp>
         <p:nvSpPr>
-          <p:cNvPr id="33" name="Text 30"/>
+          <p:cNvPr id="35" name="Text 32"/>
           <p:cNvSpPr/>
           <p:nvPr/>
         </p:nvSpPr>
@@ -7759,7 +8023,7 @@
       </p:sp>
       <p:sp>
         <p:nvSpPr>
-          <p:cNvPr id="34" name="Text 31"/>
+          <p:cNvPr id="36" name="Text 33"/>
           <p:cNvSpPr/>
           <p:nvPr/>
         </p:nvSpPr>
@@ -7798,7 +8062,7 @@
       </p:sp>
       <p:sp>
         <p:nvSpPr>
-          <p:cNvPr id="35" name="Text 32"/>
+          <p:cNvPr id="37" name="Text 34"/>
           <p:cNvSpPr/>
           <p:nvPr/>
         </p:nvSpPr>
@@ -7840,7 +8104,7 @@
       </p:sp>
       <p:sp>
         <p:nvSpPr>
-          <p:cNvPr id="36" name="Text 33"/>
+          <p:cNvPr id="38" name="Text 35"/>
           <p:cNvSpPr/>
           <p:nvPr/>
         </p:nvSpPr>
@@ -7879,7 +8143,7 @@
       </p:sp>
       <p:sp>
         <p:nvSpPr>
-          <p:cNvPr id="37" name="Text 34"/>
+          <p:cNvPr id="39" name="Text 36"/>
           <p:cNvSpPr/>
           <p:nvPr/>
         </p:nvSpPr>
@@ -7989,7 +8253,73 @@
       </p:sp>
       <p:sp>
         <p:nvSpPr>
-          <p:cNvPr id="3" name="Text 1"/>
+          <p:cNvPr id="3" name="Shape 1"/>
+          <p:cNvSpPr/>
+          <p:nvPr/>
+        </p:nvSpPr>
+        <p:spPr>
+          <a:xfrm>
+            <a:off x="8229600" y="146304"/>
+            <a:ext cx="3410712" cy="246888"/>
+          </a:xfrm>
+          <a:prstGeom prst="roundRect">
+            <a:avLst>
+              <a:gd name="adj" fmla="val 22222"/>
+            </a:avLst>
+          </a:prstGeom>
+          <a:solidFill>
+            <a:srgbClr val="FFFFFF"/>
+          </a:solidFill>
+          <a:ln w="15875">
+            <a:solidFill>
+              <a:srgbClr val="8E3B60"/>
+            </a:solidFill>
+            <a:prstDash val="solid"/>
+          </a:ln>
+        </p:spPr>
+      </p:sp>
+      <p:sp>
+        <p:nvSpPr>
+          <p:cNvPr id="4" name="Text 2"/>
+          <p:cNvSpPr/>
+          <p:nvPr/>
+        </p:nvSpPr>
+        <p:spPr>
+          <a:xfrm>
+            <a:off x="8229600" y="146304"/>
+            <a:ext cx="3410712" cy="246888"/>
+          </a:xfrm>
+          <a:prstGeom prst="rect">
+            <a:avLst/>
+          </a:prstGeom>
+          <a:noFill/>
+          <a:ln/>
+        </p:spPr>
+        <p:txBody>
+          <a:bodyPr wrap="square" rtlCol="0" anchor="ctr"/>
+          <a:lstStyle/>
+          <a:p>
+            <a:pPr algn="ctr" indent="0" marL="0">
+              <a:buNone/>
+            </a:pPr>
+            <a:r>
+              <a:rPr lang="en-US" sz="950" b="1" dirty="0">
+                <a:solidFill>
+                  <a:srgbClr val="8E3B60"/>
+                </a:solidFill>
+                <a:latin typeface="Calibri" pitchFamily="34" charset="0"/>
+                <a:ea typeface="Calibri" pitchFamily="34" charset="-122"/>
+                <a:cs typeface="Calibri" pitchFamily="34" charset="-120"/>
+              </a:rPr>
+              <a:t>Step 6 of 6 · Answers Q4</a:t>
+            </a:r>
+            <a:endParaRPr lang="en-US" sz="950" dirty="0"/>
+          </a:p>
+        </p:txBody>
+      </p:sp>
+      <p:sp>
+        <p:nvSpPr>
+          <p:cNvPr id="5" name="Text 3"/>
           <p:cNvSpPr/>
           <p:nvPr/>
         </p:nvSpPr>
@@ -8028,7 +8358,7 @@
       </p:sp>
       <p:sp>
         <p:nvSpPr>
-          <p:cNvPr id="4" name="Shape 2"/>
+          <p:cNvPr id="6" name="Shape 4"/>
           <p:cNvSpPr/>
           <p:nvPr/>
         </p:nvSpPr>
@@ -8050,7 +8380,7 @@
       </p:sp>
       <p:sp>
         <p:nvSpPr>
-          <p:cNvPr id="5" name="Text 3"/>
+          <p:cNvPr id="7" name="Text 5"/>
           <p:cNvSpPr/>
           <p:nvPr/>
         </p:nvSpPr>
@@ -8089,7 +8419,7 @@
       </p:sp>
       <p:sp>
         <p:nvSpPr>
-          <p:cNvPr id="6" name="Text 4"/>
+          <p:cNvPr id="8" name="Text 6"/>
           <p:cNvSpPr/>
           <p:nvPr/>
         </p:nvSpPr>
@@ -8128,7 +8458,7 @@
       </p:sp>
       <p:sp>
         <p:nvSpPr>
-          <p:cNvPr id="7" name="Shape 5"/>
+          <p:cNvPr id="9" name="Shape 7"/>
           <p:cNvSpPr/>
           <p:nvPr/>
         </p:nvSpPr>
@@ -8150,7 +8480,7 @@
       </p:sp>
       <p:sp>
         <p:nvSpPr>
-          <p:cNvPr id="8" name="Text 6"/>
+          <p:cNvPr id="10" name="Text 8"/>
           <p:cNvSpPr/>
           <p:nvPr/>
         </p:nvSpPr>
@@ -8189,7 +8519,7 @@
       </p:sp>
       <p:sp>
         <p:nvSpPr>
-          <p:cNvPr id="9" name="Text 7"/>
+          <p:cNvPr id="11" name="Text 9"/>
           <p:cNvSpPr/>
           <p:nvPr/>
         </p:nvSpPr>
@@ -8228,7 +8558,7 @@
       </p:sp>
       <p:sp>
         <p:nvSpPr>
-          <p:cNvPr id="10" name="Shape 8"/>
+          <p:cNvPr id="12" name="Shape 10"/>
           <p:cNvSpPr/>
           <p:nvPr/>
         </p:nvSpPr>
@@ -8250,7 +8580,7 @@
       </p:sp>
       <p:sp>
         <p:nvSpPr>
-          <p:cNvPr id="11" name="Text 9"/>
+          <p:cNvPr id="13" name="Text 11"/>
           <p:cNvSpPr/>
           <p:nvPr/>
         </p:nvSpPr>
@@ -8289,7 +8619,7 @@
       </p:sp>
       <p:sp>
         <p:nvSpPr>
-          <p:cNvPr id="12" name="Text 10"/>
+          <p:cNvPr id="14" name="Text 12"/>
           <p:cNvSpPr/>
           <p:nvPr/>
         </p:nvSpPr>
@@ -8328,7 +8658,7 @@
       </p:sp>
       <p:sp>
         <p:nvSpPr>
-          <p:cNvPr id="13" name="Shape 11"/>
+          <p:cNvPr id="15" name="Shape 13"/>
           <p:cNvSpPr/>
           <p:nvPr/>
         </p:nvSpPr>
@@ -8350,7 +8680,7 @@
       </p:sp>
       <p:sp>
         <p:nvSpPr>
-          <p:cNvPr id="14" name="Text 12"/>
+          <p:cNvPr id="16" name="Text 14"/>
           <p:cNvSpPr/>
           <p:nvPr/>
         </p:nvSpPr>
@@ -8389,7 +8719,7 @@
       </p:sp>
       <p:sp>
         <p:nvSpPr>
-          <p:cNvPr id="15" name="Text 13"/>
+          <p:cNvPr id="17" name="Text 15"/>
           <p:cNvSpPr/>
           <p:nvPr/>
         </p:nvSpPr>
@@ -8428,7 +8758,7 @@
       </p:sp>
       <p:graphicFrame>
         <p:nvGraphicFramePr>
-          <p:cNvPr id="16" name="Chart 0" descr=""/>
+          <p:cNvPr id="18" name="Chart 0" descr=""/>
           <p:cNvGraphicFramePr/>
           <p:nvPr/>
         </p:nvGraphicFramePr>
@@ -8444,7 +8774,7 @@
       </p:graphicFrame>
       <p:sp>
         <p:nvSpPr>
-          <p:cNvPr id="17" name="Text 14"/>
+          <p:cNvPr id="19" name="Text 16"/>
           <p:cNvSpPr/>
           <p:nvPr/>
         </p:nvSpPr>
@@ -8483,7 +8813,7 @@
       </p:sp>
       <p:sp>
         <p:nvSpPr>
-          <p:cNvPr id="18" name="Text 15"/>
+          <p:cNvPr id="20" name="Text 17"/>
           <p:cNvSpPr/>
           <p:nvPr/>
         </p:nvSpPr>
@@ -8522,7 +8852,7 @@
       </p:sp>
       <p:sp>
         <p:nvSpPr>
-          <p:cNvPr id="19" name="Text 16"/>
+          <p:cNvPr id="21" name="Text 18"/>
           <p:cNvSpPr/>
           <p:nvPr/>
         </p:nvSpPr>
@@ -8561,7 +8891,7 @@
       </p:sp>
       <p:sp>
         <p:nvSpPr>
-          <p:cNvPr id="20" name="Text 17"/>
+          <p:cNvPr id="22" name="Text 19"/>
           <p:cNvSpPr/>
           <p:nvPr/>
         </p:nvSpPr>
@@ -8600,7 +8930,7 @@
       </p:sp>
       <p:sp>
         <p:nvSpPr>
-          <p:cNvPr id="21" name="Text 18"/>
+          <p:cNvPr id="23" name="Text 20"/>
           <p:cNvSpPr/>
           <p:nvPr/>
         </p:nvSpPr>
@@ -8639,7 +8969,7 @@
       </p:sp>
       <p:sp>
         <p:nvSpPr>
-          <p:cNvPr id="22" name="Text 19"/>
+          <p:cNvPr id="24" name="Text 21"/>
           <p:cNvSpPr/>
           <p:nvPr/>
         </p:nvSpPr>
@@ -8678,7 +9008,7 @@
       </p:sp>
       <p:sp>
         <p:nvSpPr>
-          <p:cNvPr id="23" name="Text 20"/>
+          <p:cNvPr id="25" name="Text 22"/>
           <p:cNvSpPr/>
           <p:nvPr/>
         </p:nvSpPr>
@@ -8717,7 +9047,7 @@
       </p:sp>
       <p:sp>
         <p:nvSpPr>
-          <p:cNvPr id="24" name="Text 21"/>
+          <p:cNvPr id="26" name="Text 23"/>
           <p:cNvSpPr/>
           <p:nvPr/>
         </p:nvSpPr>
@@ -8756,7 +9086,7 @@
       </p:sp>
       <p:sp>
         <p:nvSpPr>
-          <p:cNvPr id="25" name="Text 22"/>
+          <p:cNvPr id="27" name="Text 24"/>
           <p:cNvSpPr/>
           <p:nvPr/>
         </p:nvSpPr>
@@ -8795,7 +9125,7 @@
       </p:sp>
       <p:sp>
         <p:nvSpPr>
-          <p:cNvPr id="26" name="Text 23"/>
+          <p:cNvPr id="28" name="Text 25"/>
           <p:cNvSpPr/>
           <p:nvPr/>
         </p:nvSpPr>
@@ -8834,7 +9164,7 @@
       </p:sp>
       <p:sp>
         <p:nvSpPr>
-          <p:cNvPr id="27" name="Text 24"/>
+          <p:cNvPr id="29" name="Text 26"/>
           <p:cNvSpPr/>
           <p:nvPr/>
         </p:nvSpPr>
@@ -8873,7 +9203,7 @@
       </p:sp>
       <p:sp>
         <p:nvSpPr>
-          <p:cNvPr id="28" name="Text 25"/>
+          <p:cNvPr id="30" name="Text 27"/>
           <p:cNvSpPr/>
           <p:nvPr/>
         </p:nvSpPr>
@@ -8912,7 +9242,7 @@
       </p:sp>
       <p:sp>
         <p:nvSpPr>
-          <p:cNvPr id="29" name="Text 26"/>
+          <p:cNvPr id="31" name="Text 28"/>
           <p:cNvSpPr/>
           <p:nvPr/>
         </p:nvSpPr>
@@ -8951,7 +9281,7 @@
       </p:sp>
       <p:sp>
         <p:nvSpPr>
-          <p:cNvPr id="30" name="Text 27"/>
+          <p:cNvPr id="32" name="Text 29"/>
           <p:cNvSpPr/>
           <p:nvPr/>
         </p:nvSpPr>
@@ -8990,7 +9320,7 @@
       </p:sp>
       <p:sp>
         <p:nvSpPr>
-          <p:cNvPr id="31" name="Text 28"/>
+          <p:cNvPr id="33" name="Text 30"/>
           <p:cNvSpPr/>
           <p:nvPr/>
         </p:nvSpPr>
@@ -9029,7 +9359,7 @@
       </p:sp>
       <p:sp>
         <p:nvSpPr>
-          <p:cNvPr id="32" name="Text 29"/>
+          <p:cNvPr id="34" name="Text 31"/>
           <p:cNvSpPr/>
           <p:nvPr/>
         </p:nvSpPr>
@@ -9068,7 +9398,7 @@
       </p:sp>
       <p:sp>
         <p:nvSpPr>
-          <p:cNvPr id="33" name="Text 30"/>
+          <p:cNvPr id="35" name="Text 32"/>
           <p:cNvSpPr/>
           <p:nvPr/>
         </p:nvSpPr>
@@ -9107,7 +9437,7 @@
       </p:sp>
       <p:sp>
         <p:nvSpPr>
-          <p:cNvPr id="34" name="Text 31"/>
+          <p:cNvPr id="36" name="Text 33"/>
           <p:cNvSpPr/>
           <p:nvPr/>
         </p:nvSpPr>
@@ -9146,7 +9476,7 @@
       </p:sp>
       <p:sp>
         <p:nvSpPr>
-          <p:cNvPr id="35" name="Text 32"/>
+          <p:cNvPr id="37" name="Text 34"/>
           <p:cNvSpPr/>
           <p:nvPr/>
         </p:nvSpPr>
@@ -9185,7 +9515,7 @@
       </p:sp>
       <p:sp>
         <p:nvSpPr>
-          <p:cNvPr id="36" name="Text 33"/>
+          <p:cNvPr id="38" name="Text 35"/>
           <p:cNvSpPr/>
           <p:nvPr/>
         </p:nvSpPr>
@@ -9227,7 +9557,7 @@
       </p:sp>
       <p:sp>
         <p:nvSpPr>
-          <p:cNvPr id="37" name="Text 34"/>
+          <p:cNvPr id="39" name="Text 36"/>
           <p:cNvSpPr/>
           <p:nvPr/>
         </p:nvSpPr>
@@ -9266,7 +9596,7 @@
       </p:sp>
       <p:sp>
         <p:nvSpPr>
-          <p:cNvPr id="38" name="Text 35"/>
+          <p:cNvPr id="40" name="Text 37"/>
           <p:cNvSpPr/>
           <p:nvPr/>
         </p:nvSpPr>
@@ -14374,7 +14704,73 @@
       </p:sp>
       <p:sp>
         <p:nvSpPr>
-          <p:cNvPr id="3" name="Text 1"/>
+          <p:cNvPr id="3" name="Shape 1"/>
+          <p:cNvSpPr/>
+          <p:nvPr/>
+        </p:nvSpPr>
+        <p:spPr>
+          <a:xfrm>
+            <a:off x="8229600" y="146304"/>
+            <a:ext cx="3410712" cy="246888"/>
+          </a:xfrm>
+          <a:prstGeom prst="roundRect">
+            <a:avLst>
+              <a:gd name="adj" fmla="val 22222"/>
+            </a:avLst>
+          </a:prstGeom>
+          <a:solidFill>
+            <a:srgbClr val="FFFFFF"/>
+          </a:solidFill>
+          <a:ln w="15875">
+            <a:solidFill>
+              <a:srgbClr val="5B6178"/>
+            </a:solidFill>
+            <a:prstDash val="solid"/>
+          </a:ln>
+        </p:spPr>
+      </p:sp>
+      <p:sp>
+        <p:nvSpPr>
+          <p:cNvPr id="4" name="Text 2"/>
+          <p:cNvSpPr/>
+          <p:nvPr/>
+        </p:nvSpPr>
+        <p:spPr>
+          <a:xfrm>
+            <a:off x="8229600" y="146304"/>
+            <a:ext cx="3410712" cy="246888"/>
+          </a:xfrm>
+          <a:prstGeom prst="rect">
+            <a:avLst/>
+          </a:prstGeom>
+          <a:noFill/>
+          <a:ln/>
+        </p:spPr>
+        <p:txBody>
+          <a:bodyPr wrap="square" rtlCol="0" anchor="ctr"/>
+          <a:lstStyle/>
+          <a:p>
+            <a:pPr algn="ctr" indent="0" marL="0">
+              <a:buNone/>
+            </a:pPr>
+            <a:r>
+              <a:rPr lang="en-US" sz="950" b="1" dirty="0">
+                <a:solidFill>
+                  <a:srgbClr val="5B6178"/>
+                </a:solidFill>
+                <a:latin typeface="Calibri" pitchFamily="34" charset="0"/>
+                <a:ea typeface="Calibri" pitchFamily="34" charset="-122"/>
+                <a:cs typeface="Calibri" pitchFamily="34" charset="-120"/>
+              </a:rPr>
+              <a:t>Foundation for Steps 1–3 · Q1–Q2</a:t>
+            </a:r>
+            <a:endParaRPr lang="en-US" sz="950" dirty="0"/>
+          </a:p>
+        </p:txBody>
+      </p:sp>
+      <p:sp>
+        <p:nvSpPr>
+          <p:cNvPr id="5" name="Text 3"/>
           <p:cNvSpPr/>
           <p:nvPr/>
         </p:nvSpPr>
@@ -14413,7 +14809,7 @@
       </p:sp>
       <p:sp>
         <p:nvSpPr>
-          <p:cNvPr id="4" name="Shape 2"/>
+          <p:cNvPr id="6" name="Shape 4"/>
           <p:cNvSpPr/>
           <p:nvPr/>
         </p:nvSpPr>
@@ -14435,7 +14831,7 @@
       </p:sp>
       <p:sp>
         <p:nvSpPr>
-          <p:cNvPr id="5" name="Text 3"/>
+          <p:cNvPr id="7" name="Text 5"/>
           <p:cNvSpPr/>
           <p:nvPr/>
         </p:nvSpPr>
@@ -14474,7 +14870,7 @@
       </p:sp>
       <p:sp>
         <p:nvSpPr>
-          <p:cNvPr id="6" name="Text 4"/>
+          <p:cNvPr id="8" name="Text 6"/>
           <p:cNvSpPr/>
           <p:nvPr/>
         </p:nvSpPr>
@@ -14516,7 +14912,7 @@
       </p:sp>
       <p:sp>
         <p:nvSpPr>
-          <p:cNvPr id="7" name="Text 5"/>
+          <p:cNvPr id="9" name="Text 7"/>
           <p:cNvSpPr/>
           <p:nvPr/>
         </p:nvSpPr>
@@ -14558,7 +14954,7 @@
       </p:sp>
       <p:sp>
         <p:nvSpPr>
-          <p:cNvPr id="8" name="Shape 6"/>
+          <p:cNvPr id="10" name="Shape 8"/>
           <p:cNvSpPr/>
           <p:nvPr/>
         </p:nvSpPr>
@@ -14580,7 +14976,7 @@
       </p:sp>
       <p:sp>
         <p:nvSpPr>
-          <p:cNvPr id="9" name="Text 7"/>
+          <p:cNvPr id="11" name="Text 9"/>
           <p:cNvSpPr/>
           <p:nvPr/>
         </p:nvSpPr>
@@ -14619,7 +15015,7 @@
       </p:sp>
       <p:sp>
         <p:nvSpPr>
-          <p:cNvPr id="10" name="Text 8"/>
+          <p:cNvPr id="12" name="Text 10"/>
           <p:cNvSpPr/>
           <p:nvPr/>
         </p:nvSpPr>
@@ -14661,7 +15057,7 @@
       </p:sp>
       <p:sp>
         <p:nvSpPr>
-          <p:cNvPr id="11" name="Text 9"/>
+          <p:cNvPr id="13" name="Text 11"/>
           <p:cNvSpPr/>
           <p:nvPr/>
         </p:nvSpPr>
@@ -14703,7 +15099,7 @@
       </p:sp>
       <p:sp>
         <p:nvSpPr>
-          <p:cNvPr id="12" name="Text 10"/>
+          <p:cNvPr id="14" name="Text 12"/>
           <p:cNvSpPr/>
           <p:nvPr/>
         </p:nvSpPr>
@@ -14742,7 +15138,7 @@
       </p:sp>
       <p:sp>
         <p:nvSpPr>
-          <p:cNvPr id="13" name="Text 11"/>
+          <p:cNvPr id="15" name="Text 13"/>
           <p:cNvSpPr/>
           <p:nvPr/>
         </p:nvSpPr>
@@ -14858,6 +15254,72 @@
         </p:nvSpPr>
         <p:spPr>
           <a:xfrm>
+            <a:off x="8229600" y="146304"/>
+            <a:ext cx="3410712" cy="246888"/>
+          </a:xfrm>
+          <a:prstGeom prst="roundRect">
+            <a:avLst>
+              <a:gd name="adj" fmla="val 22222"/>
+            </a:avLst>
+          </a:prstGeom>
+          <a:solidFill>
+            <a:srgbClr val="FFFFFF"/>
+          </a:solidFill>
+          <a:ln w="15875">
+            <a:solidFill>
+              <a:srgbClr val="1E2761"/>
+            </a:solidFill>
+            <a:prstDash val="solid"/>
+          </a:ln>
+        </p:spPr>
+      </p:sp>
+      <p:sp>
+        <p:nvSpPr>
+          <p:cNvPr id="4" name="Text 2"/>
+          <p:cNvSpPr/>
+          <p:nvPr/>
+        </p:nvSpPr>
+        <p:spPr>
+          <a:xfrm>
+            <a:off x="8229600" y="146304"/>
+            <a:ext cx="3410712" cy="246888"/>
+          </a:xfrm>
+          <a:prstGeom prst="rect">
+            <a:avLst/>
+          </a:prstGeom>
+          <a:noFill/>
+          <a:ln/>
+        </p:spPr>
+        <p:txBody>
+          <a:bodyPr wrap="square" rtlCol="0" anchor="ctr"/>
+          <a:lstStyle/>
+          <a:p>
+            <a:pPr algn="ctr" indent="0" marL="0">
+              <a:buNone/>
+            </a:pPr>
+            <a:r>
+              <a:rPr lang="en-US" sz="950" b="1" dirty="0">
+                <a:solidFill>
+                  <a:srgbClr val="1E2761"/>
+                </a:solidFill>
+                <a:latin typeface="Calibri" pitchFamily="34" charset="0"/>
+                <a:ea typeface="Calibri" pitchFamily="34" charset="-122"/>
+                <a:cs typeface="Calibri" pitchFamily="34" charset="-120"/>
+              </a:rPr>
+              <a:t>Step 1 of 6 · Answers Q1</a:t>
+            </a:r>
+            <a:endParaRPr lang="en-US" sz="950" dirty="0"/>
+          </a:p>
+        </p:txBody>
+      </p:sp>
+      <p:sp>
+        <p:nvSpPr>
+          <p:cNvPr id="5" name="Shape 3"/>
+          <p:cNvSpPr/>
+          <p:nvPr/>
+        </p:nvSpPr>
+        <p:spPr>
+          <a:xfrm>
             <a:off x="9784080" y="457200"/>
             <a:ext cx="1920240" cy="502920"/>
           </a:xfrm>
@@ -14874,7 +15336,7 @@
       </p:sp>
       <p:sp>
         <p:nvSpPr>
-          <p:cNvPr id="4" name="Text 2"/>
+          <p:cNvPr id="6" name="Text 4"/>
           <p:cNvSpPr/>
           <p:nvPr/>
         </p:nvSpPr>
@@ -14913,7 +15375,7 @@
       </p:sp>
       <p:graphicFrame>
         <p:nvGraphicFramePr>
-          <p:cNvPr id="5" name="Chart 0" descr=""/>
+          <p:cNvPr id="7" name="Chart 0" descr=""/>
           <p:cNvGraphicFramePr/>
           <p:nvPr/>
         </p:nvGraphicFramePr>
@@ -14929,7 +15391,7 @@
       </p:graphicFrame>
       <p:sp>
         <p:nvSpPr>
-          <p:cNvPr id="6" name="Text 3"/>
+          <p:cNvPr id="8" name="Text 5"/>
           <p:cNvSpPr/>
           <p:nvPr/>
         </p:nvSpPr>
@@ -14968,7 +15430,7 @@
       </p:sp>
       <p:sp>
         <p:nvSpPr>
-          <p:cNvPr id="7" name="Text 4"/>
+          <p:cNvPr id="9" name="Text 6"/>
           <p:cNvSpPr/>
           <p:nvPr/>
         </p:nvSpPr>
@@ -15007,7 +15469,7 @@
       </p:sp>
       <p:sp>
         <p:nvSpPr>
-          <p:cNvPr id="8" name="Text 5"/>
+          <p:cNvPr id="10" name="Text 7"/>
           <p:cNvSpPr/>
           <p:nvPr/>
         </p:nvSpPr>
@@ -15046,7 +15508,7 @@
       </p:sp>
       <p:sp>
         <p:nvSpPr>
-          <p:cNvPr id="9" name="Text 6"/>
+          <p:cNvPr id="11" name="Text 8"/>
           <p:cNvSpPr/>
           <p:nvPr/>
         </p:nvSpPr>
@@ -15085,7 +15547,7 @@
       </p:sp>
       <p:sp>
         <p:nvSpPr>
-          <p:cNvPr id="10" name="Text 7"/>
+          <p:cNvPr id="12" name="Text 9"/>
           <p:cNvSpPr/>
           <p:nvPr/>
         </p:nvSpPr>
@@ -15124,7 +15586,7 @@
       </p:sp>
       <p:sp>
         <p:nvSpPr>
-          <p:cNvPr id="11" name="Text 8"/>
+          <p:cNvPr id="13" name="Text 10"/>
           <p:cNvSpPr/>
           <p:nvPr/>
         </p:nvSpPr>
@@ -15166,7 +15628,7 @@
       </p:sp>
       <p:sp>
         <p:nvSpPr>
-          <p:cNvPr id="12" name="Text 9"/>
+          <p:cNvPr id="14" name="Text 11"/>
           <p:cNvSpPr/>
           <p:nvPr/>
         </p:nvSpPr>
@@ -15205,7 +15667,7 @@
       </p:sp>
       <p:sp>
         <p:nvSpPr>
-          <p:cNvPr id="13" name="Text 10"/>
+          <p:cNvPr id="15" name="Text 12"/>
           <p:cNvSpPr/>
           <p:nvPr/>
         </p:nvSpPr>
@@ -15315,7 +15777,73 @@
       </p:sp>
       <p:sp>
         <p:nvSpPr>
-          <p:cNvPr id="3" name="Text 1"/>
+          <p:cNvPr id="3" name="Shape 1"/>
+          <p:cNvSpPr/>
+          <p:nvPr/>
+        </p:nvSpPr>
+        <p:spPr>
+          <a:xfrm>
+            <a:off x="8229600" y="146304"/>
+            <a:ext cx="3410712" cy="246888"/>
+          </a:xfrm>
+          <a:prstGeom prst="roundRect">
+            <a:avLst>
+              <a:gd name="adj" fmla="val 22222"/>
+            </a:avLst>
+          </a:prstGeom>
+          <a:solidFill>
+            <a:srgbClr val="FFFFFF"/>
+          </a:solidFill>
+          <a:ln w="15875">
+            <a:solidFill>
+              <a:srgbClr val="1E2761"/>
+            </a:solidFill>
+            <a:prstDash val="solid"/>
+          </a:ln>
+        </p:spPr>
+      </p:sp>
+      <p:sp>
+        <p:nvSpPr>
+          <p:cNvPr id="4" name="Text 2"/>
+          <p:cNvSpPr/>
+          <p:nvPr/>
+        </p:nvSpPr>
+        <p:spPr>
+          <a:xfrm>
+            <a:off x="8229600" y="146304"/>
+            <a:ext cx="3410712" cy="246888"/>
+          </a:xfrm>
+          <a:prstGeom prst="rect">
+            <a:avLst/>
+          </a:prstGeom>
+          <a:noFill/>
+          <a:ln/>
+        </p:spPr>
+        <p:txBody>
+          <a:bodyPr wrap="square" rtlCol="0" anchor="ctr"/>
+          <a:lstStyle/>
+          <a:p>
+            <a:pPr algn="ctr" indent="0" marL="0">
+              <a:buNone/>
+            </a:pPr>
+            <a:r>
+              <a:rPr lang="en-US" sz="950" b="1" dirty="0">
+                <a:solidFill>
+                  <a:srgbClr val="1E2761"/>
+                </a:solidFill>
+                <a:latin typeface="Calibri" pitchFamily="34" charset="0"/>
+                <a:ea typeface="Calibri" pitchFamily="34" charset="-122"/>
+                <a:cs typeface="Calibri" pitchFamily="34" charset="-120"/>
+              </a:rPr>
+              <a:t>Step 2 of 6 · Answers Q1</a:t>
+            </a:r>
+            <a:endParaRPr lang="en-US" sz="950" dirty="0"/>
+          </a:p>
+        </p:txBody>
+      </p:sp>
+      <p:sp>
+        <p:nvSpPr>
+          <p:cNvPr id="5" name="Text 3"/>
           <p:cNvSpPr/>
           <p:nvPr/>
         </p:nvSpPr>
@@ -15354,7 +15882,7 @@
       </p:sp>
       <p:graphicFrame>
         <p:nvGraphicFramePr>
-          <p:cNvPr id="4" name="Chart 0" descr=""/>
+          <p:cNvPr id="6" name="Chart 0" descr=""/>
           <p:cNvGraphicFramePr/>
           <p:nvPr/>
         </p:nvGraphicFramePr>
@@ -15370,7 +15898,7 @@
       </p:graphicFrame>
       <p:sp>
         <p:nvSpPr>
-          <p:cNvPr id="5" name="Text 2"/>
+          <p:cNvPr id="7" name="Text 4"/>
           <p:cNvSpPr/>
           <p:nvPr/>
         </p:nvSpPr>
@@ -15409,7 +15937,7 @@
       </p:sp>
       <p:sp>
         <p:nvSpPr>
-          <p:cNvPr id="6" name="Text 3"/>
+          <p:cNvPr id="8" name="Text 5"/>
           <p:cNvSpPr/>
           <p:nvPr/>
         </p:nvSpPr>
@@ -15448,7 +15976,7 @@
       </p:sp>
       <p:sp>
         <p:nvSpPr>
-          <p:cNvPr id="7" name="Text 4"/>
+          <p:cNvPr id="9" name="Text 6"/>
           <p:cNvSpPr/>
           <p:nvPr/>
         </p:nvSpPr>
@@ -15487,7 +16015,7 @@
       </p:sp>
       <p:sp>
         <p:nvSpPr>
-          <p:cNvPr id="8" name="Text 5"/>
+          <p:cNvPr id="10" name="Text 7"/>
           <p:cNvSpPr/>
           <p:nvPr/>
         </p:nvSpPr>
@@ -15526,7 +16054,7 @@
       </p:sp>
       <p:sp>
         <p:nvSpPr>
-          <p:cNvPr id="9" name="Text 6"/>
+          <p:cNvPr id="11" name="Text 8"/>
           <p:cNvSpPr/>
           <p:nvPr/>
         </p:nvSpPr>
@@ -15565,7 +16093,7 @@
       </p:sp>
       <p:sp>
         <p:nvSpPr>
-          <p:cNvPr id="10" name="Text 7"/>
+          <p:cNvPr id="12" name="Text 9"/>
           <p:cNvSpPr/>
           <p:nvPr/>
         </p:nvSpPr>
@@ -15607,7 +16135,7 @@
       </p:sp>
       <p:sp>
         <p:nvSpPr>
-          <p:cNvPr id="11" name="Text 8"/>
+          <p:cNvPr id="13" name="Text 10"/>
           <p:cNvSpPr/>
           <p:nvPr/>
         </p:nvSpPr>
@@ -15646,7 +16174,7 @@
       </p:sp>
       <p:sp>
         <p:nvSpPr>
-          <p:cNvPr id="12" name="Text 9"/>
+          <p:cNvPr id="14" name="Text 11"/>
           <p:cNvSpPr/>
           <p:nvPr/>
         </p:nvSpPr>
@@ -15756,7 +16284,73 @@
       </p:sp>
       <p:sp>
         <p:nvSpPr>
-          <p:cNvPr id="3" name="Text 1"/>
+          <p:cNvPr id="3" name="Shape 1"/>
+          <p:cNvSpPr/>
+          <p:nvPr/>
+        </p:nvSpPr>
+        <p:spPr>
+          <a:xfrm>
+            <a:off x="8229600" y="146304"/>
+            <a:ext cx="3410712" cy="246888"/>
+          </a:xfrm>
+          <a:prstGeom prst="roundRect">
+            <a:avLst>
+              <a:gd name="adj" fmla="val 22222"/>
+            </a:avLst>
+          </a:prstGeom>
+          <a:solidFill>
+            <a:srgbClr val="FFFFFF"/>
+          </a:solidFill>
+          <a:ln w="15875">
+            <a:solidFill>
+              <a:srgbClr val="B8500A"/>
+            </a:solidFill>
+            <a:prstDash val="solid"/>
+          </a:ln>
+        </p:spPr>
+      </p:sp>
+      <p:sp>
+        <p:nvSpPr>
+          <p:cNvPr id="4" name="Text 2"/>
+          <p:cNvSpPr/>
+          <p:nvPr/>
+        </p:nvSpPr>
+        <p:spPr>
+          <a:xfrm>
+            <a:off x="8229600" y="146304"/>
+            <a:ext cx="3410712" cy="246888"/>
+          </a:xfrm>
+          <a:prstGeom prst="rect">
+            <a:avLst/>
+          </a:prstGeom>
+          <a:noFill/>
+          <a:ln/>
+        </p:spPr>
+        <p:txBody>
+          <a:bodyPr wrap="square" rtlCol="0" anchor="ctr"/>
+          <a:lstStyle/>
+          <a:p>
+            <a:pPr algn="ctr" indent="0" marL="0">
+              <a:buNone/>
+            </a:pPr>
+            <a:r>
+              <a:rPr lang="en-US" sz="950" b="1" dirty="0">
+                <a:solidFill>
+                  <a:srgbClr val="B8500A"/>
+                </a:solidFill>
+                <a:latin typeface="Calibri" pitchFamily="34" charset="0"/>
+                <a:ea typeface="Calibri" pitchFamily="34" charset="-122"/>
+                <a:cs typeface="Calibri" pitchFamily="34" charset="-120"/>
+              </a:rPr>
+              <a:t>Step 3 of 6 · Answers Q2</a:t>
+            </a:r>
+            <a:endParaRPr lang="en-US" sz="950" dirty="0"/>
+          </a:p>
+        </p:txBody>
+      </p:sp>
+      <p:sp>
+        <p:nvSpPr>
+          <p:cNvPr id="5" name="Text 3"/>
           <p:cNvSpPr/>
           <p:nvPr/>
         </p:nvSpPr>
@@ -15795,7 +16389,7 @@
       </p:sp>
       <p:graphicFrame>
         <p:nvGraphicFramePr>
-          <p:cNvPr id="4" name="Chart 0" descr=""/>
+          <p:cNvPr id="6" name="Chart 0" descr=""/>
           <p:cNvGraphicFramePr/>
           <p:nvPr/>
         </p:nvGraphicFramePr>
@@ -15811,7 +16405,7 @@
       </p:graphicFrame>
       <p:sp>
         <p:nvSpPr>
-          <p:cNvPr id="5" name="Text 2"/>
+          <p:cNvPr id="7" name="Text 4"/>
           <p:cNvSpPr/>
           <p:nvPr/>
         </p:nvSpPr>
@@ -15850,7 +16444,7 @@
       </p:sp>
       <p:sp>
         <p:nvSpPr>
-          <p:cNvPr id="6" name="Text 3"/>
+          <p:cNvPr id="8" name="Text 5"/>
           <p:cNvSpPr/>
           <p:nvPr/>
         </p:nvSpPr>
@@ -15889,7 +16483,7 @@
       </p:sp>
       <p:sp>
         <p:nvSpPr>
-          <p:cNvPr id="7" name="Text 4"/>
+          <p:cNvPr id="9" name="Text 6"/>
           <p:cNvSpPr/>
           <p:nvPr/>
         </p:nvSpPr>
@@ -15928,7 +16522,7 @@
       </p:sp>
       <p:sp>
         <p:nvSpPr>
-          <p:cNvPr id="8" name="Text 5"/>
+          <p:cNvPr id="10" name="Text 7"/>
           <p:cNvSpPr/>
           <p:nvPr/>
         </p:nvSpPr>
@@ -15967,7 +16561,7 @@
       </p:sp>
       <p:sp>
         <p:nvSpPr>
-          <p:cNvPr id="9" name="Text 6"/>
+          <p:cNvPr id="11" name="Text 8"/>
           <p:cNvSpPr/>
           <p:nvPr/>
         </p:nvSpPr>
@@ -16006,7 +16600,7 @@
       </p:sp>
       <p:sp>
         <p:nvSpPr>
-          <p:cNvPr id="10" name="Text 7"/>
+          <p:cNvPr id="12" name="Text 9"/>
           <p:cNvSpPr/>
           <p:nvPr/>
         </p:nvSpPr>
@@ -16045,7 +16639,7 @@
       </p:sp>
       <p:sp>
         <p:nvSpPr>
-          <p:cNvPr id="11" name="Text 8"/>
+          <p:cNvPr id="13" name="Text 10"/>
           <p:cNvSpPr/>
           <p:nvPr/>
         </p:nvSpPr>
@@ -16084,7 +16678,7 @@
       </p:sp>
       <p:sp>
         <p:nvSpPr>
-          <p:cNvPr id="12" name="Text 9"/>
+          <p:cNvPr id="14" name="Text 11"/>
           <p:cNvSpPr/>
           <p:nvPr/>
         </p:nvSpPr>
@@ -16123,7 +16717,7 @@
       </p:sp>
       <p:sp>
         <p:nvSpPr>
-          <p:cNvPr id="13" name="Text 10"/>
+          <p:cNvPr id="15" name="Text 12"/>
           <p:cNvSpPr/>
           <p:nvPr/>
         </p:nvSpPr>
@@ -16162,7 +16756,7 @@
       </p:sp>
       <p:sp>
         <p:nvSpPr>
-          <p:cNvPr id="14" name="Text 11"/>
+          <p:cNvPr id="16" name="Text 13"/>
           <p:cNvSpPr/>
           <p:nvPr/>
         </p:nvSpPr>
@@ -16204,7 +16798,7 @@
       </p:sp>
       <p:sp>
         <p:nvSpPr>
-          <p:cNvPr id="15" name="Text 12"/>
+          <p:cNvPr id="17" name="Text 14"/>
           <p:cNvSpPr/>
           <p:nvPr/>
         </p:nvSpPr>
@@ -16243,7 +16837,7 @@
       </p:sp>
       <p:sp>
         <p:nvSpPr>
-          <p:cNvPr id="16" name="Text 13"/>
+          <p:cNvPr id="18" name="Text 15"/>
           <p:cNvSpPr/>
           <p:nvPr/>
         </p:nvSpPr>

--- a/deck/AtmosphereTV_DOOH_Measurement.pptx
+++ b/deck/AtmosphereTV_DOOH_Measurement.pptx
@@ -5285,45 +5285,6 @@
           </a:p>
         </p:txBody>
       </p:sp>
-      <p:sp>
-        <p:nvSpPr>
-          <p:cNvPr id="15" name="Text 12"/>
-          <p:cNvSpPr/>
-          <p:nvPr/>
-        </p:nvSpPr>
-        <p:spPr>
-          <a:xfrm>
-            <a:off x="7589520" y="6537960"/>
-            <a:ext cx="4114800" cy="274320"/>
-          </a:xfrm>
-          <a:prstGeom prst="rect">
-            <a:avLst/>
-          </a:prstGeom>
-          <a:noFill/>
-          <a:ln/>
-        </p:spPr>
-        <p:txBody>
-          <a:bodyPr wrap="square" rtlCol="0" anchor="ctr"/>
-          <a:lstStyle/>
-          <a:p>
-            <a:pPr algn="r" indent="0" marL="0">
-              <a:buNone/>
-            </a:pPr>
-            <a:r>
-              <a:rPr lang="en-US" sz="900" dirty="0">
-                <a:solidFill>
-                  <a:srgbClr val="5B6178"/>
-                </a:solidFill>
-                <a:latin typeface="Calibri" pitchFamily="34" charset="0"/>
-                <a:ea typeface="Calibri" pitchFamily="34" charset="-122"/>
-                <a:cs typeface="Calibri" pitchFamily="34" charset="-120"/>
-              </a:rPr>
-              <a:t>Synthetic demo — validated against a known injected ground truth</a:t>
-            </a:r>
-            <a:endParaRPr lang="en-US" sz="900" dirty="0"/>
-          </a:p>
-        </p:txBody>
-      </p:sp>
     </p:spTree>
   </p:cSld>
   <p:clrMapOvr>
@@ -6012,45 +5973,6 @@
           </a:p>
         </p:txBody>
       </p:sp>
-      <p:sp>
-        <p:nvSpPr>
-          <p:cNvPr id="20" name="Text 17"/>
-          <p:cNvSpPr/>
-          <p:nvPr/>
-        </p:nvSpPr>
-        <p:spPr>
-          <a:xfrm>
-            <a:off x="7589520" y="6537960"/>
-            <a:ext cx="4114800" cy="274320"/>
-          </a:xfrm>
-          <a:prstGeom prst="rect">
-            <a:avLst/>
-          </a:prstGeom>
-          <a:noFill/>
-          <a:ln/>
-        </p:spPr>
-        <p:txBody>
-          <a:bodyPr wrap="square" rtlCol="0" anchor="ctr"/>
-          <a:lstStyle/>
-          <a:p>
-            <a:pPr algn="r" indent="0" marL="0">
-              <a:buNone/>
-            </a:pPr>
-            <a:r>
-              <a:rPr lang="en-US" sz="900" dirty="0">
-                <a:solidFill>
-                  <a:srgbClr val="5B6178"/>
-                </a:solidFill>
-                <a:latin typeface="Calibri" pitchFamily="34" charset="0"/>
-                <a:ea typeface="Calibri" pitchFamily="34" charset="-122"/>
-                <a:cs typeface="Calibri" pitchFamily="34" charset="-120"/>
-              </a:rPr>
-              <a:t>Synthetic demo — validated against a known injected ground truth</a:t>
-            </a:r>
-            <a:endParaRPr lang="en-US" sz="900" dirty="0"/>
-          </a:p>
-        </p:txBody>
-      </p:sp>
     </p:spTree>
   </p:cSld>
   <p:clrMapOvr>
@@ -8141,45 +8063,6 @@
           </a:p>
         </p:txBody>
       </p:sp>
-      <p:sp>
-        <p:nvSpPr>
-          <p:cNvPr id="39" name="Text 36"/>
-          <p:cNvSpPr/>
-          <p:nvPr/>
-        </p:nvSpPr>
-        <p:spPr>
-          <a:xfrm>
-            <a:off x="7589520" y="6537960"/>
-            <a:ext cx="4114800" cy="274320"/>
-          </a:xfrm>
-          <a:prstGeom prst="rect">
-            <a:avLst/>
-          </a:prstGeom>
-          <a:noFill/>
-          <a:ln/>
-        </p:spPr>
-        <p:txBody>
-          <a:bodyPr wrap="square" rtlCol="0" anchor="ctr"/>
-          <a:lstStyle/>
-          <a:p>
-            <a:pPr algn="r" indent="0" marL="0">
-              <a:buNone/>
-            </a:pPr>
-            <a:r>
-              <a:rPr lang="en-US" sz="900" dirty="0">
-                <a:solidFill>
-                  <a:srgbClr val="5B6178"/>
-                </a:solidFill>
-                <a:latin typeface="Calibri" pitchFamily="34" charset="0"/>
-                <a:ea typeface="Calibri" pitchFamily="34" charset="-122"/>
-                <a:cs typeface="Calibri" pitchFamily="34" charset="-120"/>
-              </a:rPr>
-              <a:t>Synthetic demo — validated against a known injected ground truth</a:t>
-            </a:r>
-            <a:endParaRPr lang="en-US" sz="900" dirty="0"/>
-          </a:p>
-        </p:txBody>
-      </p:sp>
     </p:spTree>
   </p:cSld>
   <p:clrMapOvr>
@@ -9594,45 +9477,6 @@
           </a:p>
         </p:txBody>
       </p:sp>
-      <p:sp>
-        <p:nvSpPr>
-          <p:cNvPr id="40" name="Text 37"/>
-          <p:cNvSpPr/>
-          <p:nvPr/>
-        </p:nvSpPr>
-        <p:spPr>
-          <a:xfrm>
-            <a:off x="7589520" y="6537960"/>
-            <a:ext cx="4114800" cy="274320"/>
-          </a:xfrm>
-          <a:prstGeom prst="rect">
-            <a:avLst/>
-          </a:prstGeom>
-          <a:noFill/>
-          <a:ln/>
-        </p:spPr>
-        <p:txBody>
-          <a:bodyPr wrap="square" rtlCol="0" anchor="ctr"/>
-          <a:lstStyle/>
-          <a:p>
-            <a:pPr algn="r" indent="0" marL="0">
-              <a:buNone/>
-            </a:pPr>
-            <a:r>
-              <a:rPr lang="en-US" sz="900" dirty="0">
-                <a:solidFill>
-                  <a:srgbClr val="5B6178"/>
-                </a:solidFill>
-                <a:latin typeface="Calibri" pitchFamily="34" charset="0"/>
-                <a:ea typeface="Calibri" pitchFamily="34" charset="-122"/>
-                <a:cs typeface="Calibri" pitchFamily="34" charset="-120"/>
-              </a:rPr>
-              <a:t>Synthetic demo — validated against a known injected ground truth</a:t>
-            </a:r>
-            <a:endParaRPr lang="en-US" sz="900" dirty="0"/>
-          </a:p>
-        </p:txBody>
-      </p:sp>
     </p:spTree>
   </p:cSld>
   <p:clrMapOvr>
@@ -10734,45 +10578,6 @@
           </a:p>
         </p:txBody>
       </p:sp>
-      <p:sp>
-        <p:nvSpPr>
-          <p:cNvPr id="17" name="Text 15"/>
-          <p:cNvSpPr/>
-          <p:nvPr/>
-        </p:nvSpPr>
-        <p:spPr>
-          <a:xfrm>
-            <a:off x="7589520" y="6537960"/>
-            <a:ext cx="4114800" cy="274320"/>
-          </a:xfrm>
-          <a:prstGeom prst="rect">
-            <a:avLst/>
-          </a:prstGeom>
-          <a:noFill/>
-          <a:ln/>
-        </p:spPr>
-        <p:txBody>
-          <a:bodyPr wrap="square" rtlCol="0" anchor="ctr"/>
-          <a:lstStyle/>
-          <a:p>
-            <a:pPr algn="r" indent="0" marL="0">
-              <a:buNone/>
-            </a:pPr>
-            <a:r>
-              <a:rPr lang="en-US" sz="900" dirty="0">
-                <a:solidFill>
-                  <a:srgbClr val="5B6178"/>
-                </a:solidFill>
-                <a:latin typeface="Calibri" pitchFamily="34" charset="0"/>
-                <a:ea typeface="Calibri" pitchFamily="34" charset="-122"/>
-                <a:cs typeface="Calibri" pitchFamily="34" charset="-120"/>
-              </a:rPr>
-              <a:t>Synthetic demo — validated against a known injected ground truth</a:t>
-            </a:r>
-            <a:endParaRPr lang="en-US" sz="900" dirty="0"/>
-          </a:p>
-        </p:txBody>
-      </p:sp>
     </p:spTree>
   </p:cSld>
   <p:clrMapOvr>
@@ -11546,45 +11351,6 @@
           </a:p>
         </p:txBody>
       </p:sp>
-      <p:sp>
-        <p:nvSpPr>
-          <p:cNvPr id="23" name="Text 21"/>
-          <p:cNvSpPr/>
-          <p:nvPr/>
-        </p:nvSpPr>
-        <p:spPr>
-          <a:xfrm>
-            <a:off x="7589520" y="6537960"/>
-            <a:ext cx="4114800" cy="274320"/>
-          </a:xfrm>
-          <a:prstGeom prst="rect">
-            <a:avLst/>
-          </a:prstGeom>
-          <a:noFill/>
-          <a:ln/>
-        </p:spPr>
-        <p:txBody>
-          <a:bodyPr wrap="square" rtlCol="0" anchor="ctr"/>
-          <a:lstStyle/>
-          <a:p>
-            <a:pPr algn="r" indent="0" marL="0">
-              <a:buNone/>
-            </a:pPr>
-            <a:r>
-              <a:rPr lang="en-US" sz="900" dirty="0">
-                <a:solidFill>
-                  <a:srgbClr val="5B6178"/>
-                </a:solidFill>
-                <a:latin typeface="Calibri" pitchFamily="34" charset="0"/>
-                <a:ea typeface="Calibri" pitchFamily="34" charset="-122"/>
-                <a:cs typeface="Calibri" pitchFamily="34" charset="-120"/>
-              </a:rPr>
-              <a:t>Synthetic demo — validated against a known injected ground truth</a:t>
-            </a:r>
-            <a:endParaRPr lang="en-US" sz="900" dirty="0"/>
-          </a:p>
-        </p:txBody>
-      </p:sp>
     </p:spTree>
   </p:cSld>
   <p:clrMapOvr>
@@ -12538,45 +12304,6 @@
           </a:p>
         </p:txBody>
       </p:sp>
-      <p:sp>
-        <p:nvSpPr>
-          <p:cNvPr id="25" name="Text 23"/>
-          <p:cNvSpPr/>
-          <p:nvPr/>
-        </p:nvSpPr>
-        <p:spPr>
-          <a:xfrm>
-            <a:off x="7589520" y="6537960"/>
-            <a:ext cx="4114800" cy="274320"/>
-          </a:xfrm>
-          <a:prstGeom prst="rect">
-            <a:avLst/>
-          </a:prstGeom>
-          <a:noFill/>
-          <a:ln/>
-        </p:spPr>
-        <p:txBody>
-          <a:bodyPr wrap="square" rtlCol="0" anchor="ctr"/>
-          <a:lstStyle/>
-          <a:p>
-            <a:pPr algn="r" indent="0" marL="0">
-              <a:buNone/>
-            </a:pPr>
-            <a:r>
-              <a:rPr lang="en-US" sz="900" dirty="0">
-                <a:solidFill>
-                  <a:srgbClr val="5B6178"/>
-                </a:solidFill>
-                <a:latin typeface="Calibri" pitchFamily="34" charset="0"/>
-                <a:ea typeface="Calibri" pitchFamily="34" charset="-122"/>
-                <a:cs typeface="Calibri" pitchFamily="34" charset="-120"/>
-              </a:rPr>
-              <a:t>Synthetic demo — validated against a known injected ground truth</a:t>
-            </a:r>
-            <a:endParaRPr lang="en-US" sz="900" dirty="0"/>
-          </a:p>
-        </p:txBody>
-      </p:sp>
     </p:spTree>
   </p:cSld>
   <p:clrMapOvr>
@@ -14592,45 +14319,6 @@
           </a:p>
         </p:txBody>
       </p:sp>
-      <p:sp>
-        <p:nvSpPr>
-          <p:cNvPr id="56" name="Text 54"/>
-          <p:cNvSpPr/>
-          <p:nvPr/>
-        </p:nvSpPr>
-        <p:spPr>
-          <a:xfrm>
-            <a:off x="7589520" y="6537960"/>
-            <a:ext cx="4114800" cy="274320"/>
-          </a:xfrm>
-          <a:prstGeom prst="rect">
-            <a:avLst/>
-          </a:prstGeom>
-          <a:noFill/>
-          <a:ln/>
-        </p:spPr>
-        <p:txBody>
-          <a:bodyPr wrap="square" rtlCol="0" anchor="ctr"/>
-          <a:lstStyle/>
-          <a:p>
-            <a:pPr algn="r" indent="0" marL="0">
-              <a:buNone/>
-            </a:pPr>
-            <a:r>
-              <a:rPr lang="en-US" sz="900" dirty="0">
-                <a:solidFill>
-                  <a:srgbClr val="5B6178"/>
-                </a:solidFill>
-                <a:latin typeface="Calibri" pitchFamily="34" charset="0"/>
-                <a:ea typeface="Calibri" pitchFamily="34" charset="-122"/>
-                <a:cs typeface="Calibri" pitchFamily="34" charset="-120"/>
-              </a:rPr>
-              <a:t>Synthetic demo — validated against a known injected ground truth</a:t>
-            </a:r>
-            <a:endParaRPr lang="en-US" sz="900" dirty="0"/>
-          </a:p>
-        </p:txBody>
-      </p:sp>
     </p:spTree>
   </p:cSld>
   <p:clrMapOvr>
@@ -15136,45 +14824,6 @@
           </a:p>
         </p:txBody>
       </p:sp>
-      <p:sp>
-        <p:nvSpPr>
-          <p:cNvPr id="15" name="Text 13"/>
-          <p:cNvSpPr/>
-          <p:nvPr/>
-        </p:nvSpPr>
-        <p:spPr>
-          <a:xfrm>
-            <a:off x="7589520" y="6537960"/>
-            <a:ext cx="4114800" cy="274320"/>
-          </a:xfrm>
-          <a:prstGeom prst="rect">
-            <a:avLst/>
-          </a:prstGeom>
-          <a:noFill/>
-          <a:ln/>
-        </p:spPr>
-        <p:txBody>
-          <a:bodyPr wrap="square" rtlCol="0" anchor="ctr"/>
-          <a:lstStyle/>
-          <a:p>
-            <a:pPr algn="r" indent="0" marL="0">
-              <a:buNone/>
-            </a:pPr>
-            <a:r>
-              <a:rPr lang="en-US" sz="900" dirty="0">
-                <a:solidFill>
-                  <a:srgbClr val="5B6178"/>
-                </a:solidFill>
-                <a:latin typeface="Calibri" pitchFamily="34" charset="0"/>
-                <a:ea typeface="Calibri" pitchFamily="34" charset="-122"/>
-                <a:cs typeface="Calibri" pitchFamily="34" charset="-120"/>
-              </a:rPr>
-              <a:t>Synthetic demo — validated against a known injected ground truth</a:t>
-            </a:r>
-            <a:endParaRPr lang="en-US" sz="900" dirty="0"/>
-          </a:p>
-        </p:txBody>
-      </p:sp>
     </p:spTree>
   </p:cSld>
   <p:clrMapOvr>
@@ -15665,45 +15314,6 @@
           </a:p>
         </p:txBody>
       </p:sp>
-      <p:sp>
-        <p:nvSpPr>
-          <p:cNvPr id="15" name="Text 12"/>
-          <p:cNvSpPr/>
-          <p:nvPr/>
-        </p:nvSpPr>
-        <p:spPr>
-          <a:xfrm>
-            <a:off x="7589520" y="6537960"/>
-            <a:ext cx="4114800" cy="274320"/>
-          </a:xfrm>
-          <a:prstGeom prst="rect">
-            <a:avLst/>
-          </a:prstGeom>
-          <a:noFill/>
-          <a:ln/>
-        </p:spPr>
-        <p:txBody>
-          <a:bodyPr wrap="square" rtlCol="0" anchor="ctr"/>
-          <a:lstStyle/>
-          <a:p>
-            <a:pPr algn="r" indent="0" marL="0">
-              <a:buNone/>
-            </a:pPr>
-            <a:r>
-              <a:rPr lang="en-US" sz="900" dirty="0">
-                <a:solidFill>
-                  <a:srgbClr val="5B6178"/>
-                </a:solidFill>
-                <a:latin typeface="Calibri" pitchFamily="34" charset="0"/>
-                <a:ea typeface="Calibri" pitchFamily="34" charset="-122"/>
-                <a:cs typeface="Calibri" pitchFamily="34" charset="-120"/>
-              </a:rPr>
-              <a:t>Synthetic demo — validated against a known injected ground truth</a:t>
-            </a:r>
-            <a:endParaRPr lang="en-US" sz="900" dirty="0"/>
-          </a:p>
-        </p:txBody>
-      </p:sp>
     </p:spTree>
   </p:cSld>
   <p:clrMapOvr>
@@ -16172,45 +15782,6 @@
           </a:p>
         </p:txBody>
       </p:sp>
-      <p:sp>
-        <p:nvSpPr>
-          <p:cNvPr id="14" name="Text 11"/>
-          <p:cNvSpPr/>
-          <p:nvPr/>
-        </p:nvSpPr>
-        <p:spPr>
-          <a:xfrm>
-            <a:off x="7589520" y="6537960"/>
-            <a:ext cx="4114800" cy="274320"/>
-          </a:xfrm>
-          <a:prstGeom prst="rect">
-            <a:avLst/>
-          </a:prstGeom>
-          <a:noFill/>
-          <a:ln/>
-        </p:spPr>
-        <p:txBody>
-          <a:bodyPr wrap="square" rtlCol="0" anchor="ctr"/>
-          <a:lstStyle/>
-          <a:p>
-            <a:pPr algn="r" indent="0" marL="0">
-              <a:buNone/>
-            </a:pPr>
-            <a:r>
-              <a:rPr lang="en-US" sz="900" dirty="0">
-                <a:solidFill>
-                  <a:srgbClr val="5B6178"/>
-                </a:solidFill>
-                <a:latin typeface="Calibri" pitchFamily="34" charset="0"/>
-                <a:ea typeface="Calibri" pitchFamily="34" charset="-122"/>
-                <a:cs typeface="Calibri" pitchFamily="34" charset="-120"/>
-              </a:rPr>
-              <a:t>Synthetic demo — validated against a known injected ground truth</a:t>
-            </a:r>
-            <a:endParaRPr lang="en-US" sz="900" dirty="0"/>
-          </a:p>
-        </p:txBody>
-      </p:sp>
     </p:spTree>
   </p:cSld>
   <p:clrMapOvr>
@@ -16830,45 +16401,6 @@
                 <a:cs typeface="Calibri" pitchFamily="34" charset="-120"/>
               </a:rPr>
               <a:t>Media-mix model</a:t>
-            </a:r>
-            <a:endParaRPr lang="en-US" sz="900" dirty="0"/>
-          </a:p>
-        </p:txBody>
-      </p:sp>
-      <p:sp>
-        <p:nvSpPr>
-          <p:cNvPr id="18" name="Text 15"/>
-          <p:cNvSpPr/>
-          <p:nvPr/>
-        </p:nvSpPr>
-        <p:spPr>
-          <a:xfrm>
-            <a:off x="7589520" y="6537960"/>
-            <a:ext cx="4114800" cy="274320"/>
-          </a:xfrm>
-          <a:prstGeom prst="rect">
-            <a:avLst/>
-          </a:prstGeom>
-          <a:noFill/>
-          <a:ln/>
-        </p:spPr>
-        <p:txBody>
-          <a:bodyPr wrap="square" rtlCol="0" anchor="ctr"/>
-          <a:lstStyle/>
-          <a:p>
-            <a:pPr algn="r" indent="0" marL="0">
-              <a:buNone/>
-            </a:pPr>
-            <a:r>
-              <a:rPr lang="en-US" sz="900" dirty="0">
-                <a:solidFill>
-                  <a:srgbClr val="5B6178"/>
-                </a:solidFill>
-                <a:latin typeface="Calibri" pitchFamily="34" charset="0"/>
-                <a:ea typeface="Calibri" pitchFamily="34" charset="-122"/>
-                <a:cs typeface="Calibri" pitchFamily="34" charset="-120"/>
-              </a:rPr>
-              <a:t>Synthetic demo — validated against a known injected ground truth</a:t>
             </a:r>
             <a:endParaRPr lang="en-US" sz="900" dirty="0"/>
           </a:p>

--- a/deck/AtmosphereTV_DOOH_Measurement.pptx
+++ b/deck/AtmosphereTV_DOOH_Measurement.pptx
@@ -15242,7 +15242,46 @@
         <p:spPr>
           <a:xfrm>
             <a:off x="7406640" y="3319272"/>
-            <a:ext cx="4206240" cy="1463040"/>
+            <a:ext cx="4206240" cy="274320"/>
+          </a:xfrm>
+          <a:prstGeom prst="rect">
+            <a:avLst/>
+          </a:prstGeom>
+          <a:noFill/>
+          <a:ln/>
+        </p:spPr>
+        <p:txBody>
+          <a:bodyPr wrap="square" rtlCol="0" anchor="ctr"/>
+          <a:lstStyle/>
+          <a:p>
+            <a:pPr indent="0" marL="0">
+              <a:buNone/>
+            </a:pPr>
+            <a:r>
+              <a:rPr lang="en-US" sz="1200" b="1" dirty="0">
+                <a:solidFill>
+                  <a:srgbClr val="1E2761"/>
+                </a:solidFill>
+                <a:latin typeface="Cambria" pitchFamily="34" charset="0"/>
+                <a:ea typeface="Cambria" pitchFamily="34" charset="-122"/>
+                <a:cs typeface="Cambria" pitchFamily="34" charset="-120"/>
+              </a:rPr>
+              <a:t>Why 2/16 isn't a red flag</a:t>
+            </a:r>
+            <a:endParaRPr lang="en-US" sz="1200" dirty="0"/>
+          </a:p>
+        </p:txBody>
+      </p:sp>
+      <p:sp>
+        <p:nvSpPr>
+          <p:cNvPr id="14" name="Text 11"/>
+          <p:cNvSpPr/>
+          <p:nvPr/>
+        </p:nvSpPr>
+        <p:spPr>
+          <a:xfrm>
+            <a:off x="7406640" y="3639312"/>
+            <a:ext cx="4206240" cy="777240"/>
           </a:xfrm>
           <a:prstGeom prst="rect">
             <a:avLst/>
@@ -15256,12 +15295,54 @@
           <a:p>
             <a:pPr indent="0" marL="0">
               <a:lnSpc>
-                <a:spcPts val="1500"/>
+                <a:spcPts val="1400"/>
               </a:lnSpc>
               <a:buNone/>
             </a:pPr>
             <a:r>
-              <a:rPr lang="en-US" sz="1100" i="1" dirty="0">
+              <a:rPr lang="en-US" sz="1050" dirty="0">
+                <a:solidFill>
+                  <a:srgbClr val="1A1A2E"/>
+                </a:solidFill>
+                <a:latin typeface="Calibri" pitchFamily="34" charset="0"/>
+                <a:ea typeface="Calibri" pitchFamily="34" charset="-122"/>
+                <a:cs typeface="Calibri" pitchFamily="34" charset="-120"/>
+              </a:rPr>
+              <a:t>16 tests = 4 pre-treatment covariates (baseline traffic level, dwell time, screen count, audience quality) × 4 venue types. Only 2 came back significant at p≤0.05.</a:t>
+            </a:r>
+            <a:endParaRPr lang="en-US" sz="1050" dirty="0"/>
+          </a:p>
+        </p:txBody>
+      </p:sp>
+      <p:sp>
+        <p:nvSpPr>
+          <p:cNvPr id="15" name="Text 12"/>
+          <p:cNvSpPr/>
+          <p:nvPr/>
+        </p:nvSpPr>
+        <p:spPr>
+          <a:xfrm>
+            <a:off x="7406640" y="4462272"/>
+            <a:ext cx="4206240" cy="1371600"/>
+          </a:xfrm>
+          <a:prstGeom prst="rect">
+            <a:avLst/>
+          </a:prstGeom>
+          <a:noFill/>
+          <a:ln/>
+        </p:spPr>
+        <p:txBody>
+          <a:bodyPr wrap="square" rtlCol="0" anchor="ctr"/>
+          <a:lstStyle/>
+          <a:p>
+            <a:pPr indent="0" marL="0">
+              <a:lnSpc>
+                <a:spcPts val="1400"/>
+              </a:lnSpc>
+              <a:buNone/>
+            </a:pPr>
+            <a:r>
+              <a:rPr lang="en-US" sz="1050" i="1" dirty="0">
                 <a:solidFill>
                   <a:srgbClr val="5B6178"/>
                 </a:solidFill>
@@ -15269,15 +15350,15 @@
                 <a:ea typeface="Calibri" pitchFamily="34" charset="-122"/>
                 <a:cs typeface="Calibri" pitchFamily="34" charset="-120"/>
               </a:rPr>
-              <a:t>Pre-treatment balance check: only 2 of 16 covariate × venue-type tests were significant at p≤0.05 — in line with what chance alone predicts. Randomization worked as designed, not assumed.</a:t>
-            </a:r>
-            <a:endParaRPr lang="en-US" sz="1100" dirty="0"/>
-          </a:p>
-        </p:txBody>
-      </p:sp>
-      <p:sp>
-        <p:nvSpPr>
-          <p:cNvPr id="14" name="Text 11"/>
+              <a:t>If randomization is clean, the count of false positives across 16 independent tests follows Binomial(16, 0.05): mean 0.8, P(≥2) ≈ 19%. Two sits well inside that distribution's main mass — nowhere near a red-flag tail value like 8+. Randomization worked as designed, not assumed.</a:t>
+            </a:r>
+            <a:endParaRPr lang="en-US" sz="1050" dirty="0"/>
+          </a:p>
+        </p:txBody>
+      </p:sp>
+      <p:sp>
+        <p:nvSpPr>
+          <p:cNvPr id="16" name="Text 13"/>
           <p:cNvSpPr/>
           <p:nvPr/>
         </p:nvSpPr>

--- a/deck/AtmosphereTV_DOOH_Measurement.pptx
+++ b/deck/AtmosphereTV_DOOH_Measurement.pptx
@@ -142,7 +142,7 @@
               <c:strCache>
                 <c:ptCount val="1"/>
                 <c:pt idx="0">
-                  <c:v>Estimated lift (RCT)</c:v>
+                  <c:v>Measured lift</c:v>
                 </c:pt>
               </c:strCache>
             </c:strRef>
@@ -222,95 +222,6 @@
             </c:numRef>
           </c:val>
         </c:ser>
-        <c:ser>
-          <c:idx val="1"/>
-          <c:order val="1"/>
-          <c:tx>
-            <c:strRef>
-              <c:f>Sheet1!$C$1</c:f>
-              <c:strCache>
-                <c:ptCount val="1"/>
-                <c:pt idx="0">
-                  <c:v>True lift (ground truth)</c:v>
-                </c:pt>
-              </c:strCache>
-            </c:strRef>
-          </c:tx>
-          <c:spPr>
-            <a:solidFill>
-              <a:srgbClr val="E8871E"/>
-            </a:solidFill>
-            <a:effectLst/>
-          </c:spPr>
-          <c:invertIfNegative val="0"/>
-          <c:dLbls>
-            <c:numFmt formatCode="#,##0" sourceLinked="0"/>
-            <c:txPr>
-              <a:bodyPr/>
-              <a:lstStyle/>
-              <a:p>
-                <a:pPr>
-                  <a:defRPr b="0" i="0" strike="noStrike" sz="900" u="none">
-                    <a:solidFill>
-                      <a:srgbClr val="1A1A2E"/>
-                    </a:solidFill>
-                    <a:latin typeface="Arial"/>
-                  </a:defRPr>
-                </a:pPr>
-              </a:p>
-            </c:txPr>
-            <c:showLegendKey val="0"/>
-            <c:showVal val="1"/>
-            <c:showCatName val="0"/>
-            <c:showSerName val="0"/>
-            <c:showPercent val="0"/>
-            <c:showBubbleSize val="0"/>
-            <c:showLeaderLines val="0"/>
-          </c:dLbls>
-          <c:cat>
-            <c:multiLvlStrRef>
-              <c:f>Sheet1!$A$2:$A$5</c:f>
-              <c:multiLvlStrCache>
-                <c:ptCount val="4"/>
-                <c:lvl>
-                  <c:pt idx="0">
-                    <c:v>Restaurants</c:v>
-                  </c:pt>
-                  <c:pt idx="1">
-                    <c:v>Gyms</c:v>
-                  </c:pt>
-                  <c:pt idx="2">
-                    <c:v>Bars</c:v>
-                  </c:pt>
-                  <c:pt idx="3">
-                    <c:v>Waiting Rooms</c:v>
-                  </c:pt>
-                </c:lvl>
-              </c:multiLvlStrCache>
-            </c:multiLvlStrRef>
-          </c:cat>
-          <c:val>
-            <c:numRef>
-              <c:f>Sheet1!$C$2:$C$5</c:f>
-              <c:numCache>
-                <c:formatCode>General</c:formatCode>
-                <c:ptCount val="4"/>
-                <c:pt idx="0">
-                  <c:v>13.46</c:v>
-                </c:pt>
-                <c:pt idx="1">
-                  <c:v>10.31</c:v>
-                </c:pt>
-                <c:pt idx="2">
-                  <c:v>16.42</c:v>
-                </c:pt>
-                <c:pt idx="3">
-                  <c:v>8.08</c:v>
-                </c:pt>
-              </c:numCache>
-            </c:numRef>
-          </c:val>
-        </c:ser>
         <c:dLbls>
           <c:numFmt formatCode="#,##0" sourceLinked="0"/>
           <c:txPr>
@@ -520,7 +431,7 @@
               <c:strCache>
                 <c:ptCount val="1"/>
                 <c:pt idx="0">
-                  <c:v>Estimated lift (Synthetic Control)</c:v>
+                  <c:v>Measured lift</c:v>
                 </c:pt>
               </c:strCache>
             </c:strRef>
@@ -595,95 +506,6 @@
                 </c:pt>
                 <c:pt idx="3">
                   <c:v>6.53</c:v>
-                </c:pt>
-              </c:numCache>
-            </c:numRef>
-          </c:val>
-        </c:ser>
-        <c:ser>
-          <c:idx val="1"/>
-          <c:order val="1"/>
-          <c:tx>
-            <c:strRef>
-              <c:f>Sheet1!$C$1</c:f>
-              <c:strCache>
-                <c:ptCount val="1"/>
-                <c:pt idx="0">
-                  <c:v>True lift (ground truth)</c:v>
-                </c:pt>
-              </c:strCache>
-            </c:strRef>
-          </c:tx>
-          <c:spPr>
-            <a:solidFill>
-              <a:srgbClr val="E8871E"/>
-            </a:solidFill>
-            <a:effectLst/>
-          </c:spPr>
-          <c:invertIfNegative val="0"/>
-          <c:dLbls>
-            <c:numFmt formatCode="#,##0" sourceLinked="0"/>
-            <c:txPr>
-              <a:bodyPr/>
-              <a:lstStyle/>
-              <a:p>
-                <a:pPr>
-                  <a:defRPr b="0" i="0" strike="noStrike" sz="900" u="none">
-                    <a:solidFill>
-                      <a:srgbClr val="1A1A2E"/>
-                    </a:solidFill>
-                    <a:latin typeface="Arial"/>
-                  </a:defRPr>
-                </a:pPr>
-              </a:p>
-            </c:txPr>
-            <c:showLegendKey val="0"/>
-            <c:showVal val="1"/>
-            <c:showCatName val="0"/>
-            <c:showSerName val="0"/>
-            <c:showPercent val="0"/>
-            <c:showBubbleSize val="0"/>
-            <c:showLeaderLines val="0"/>
-          </c:dLbls>
-          <c:cat>
-            <c:multiLvlStrRef>
-              <c:f>Sheet1!$A$2:$A$5</c:f>
-              <c:multiLvlStrCache>
-                <c:ptCount val="4"/>
-                <c:lvl>
-                  <c:pt idx="0">
-                    <c:v>Restaurants</c:v>
-                  </c:pt>
-                  <c:pt idx="1">
-                    <c:v>Gyms</c:v>
-                  </c:pt>
-                  <c:pt idx="2">
-                    <c:v>Bars</c:v>
-                  </c:pt>
-                  <c:pt idx="3">
-                    <c:v>Waiting Rooms</c:v>
-                  </c:pt>
-                </c:lvl>
-              </c:multiLvlStrCache>
-            </c:multiLvlStrRef>
-          </c:cat>
-          <c:val>
-            <c:numRef>
-              <c:f>Sheet1!$C$2:$C$5</c:f>
-              <c:numCache>
-                <c:formatCode>General</c:formatCode>
-                <c:ptCount val="4"/>
-                <c:pt idx="0">
-                  <c:v>12.17</c:v>
-                </c:pt>
-                <c:pt idx="1">
-                  <c:v>9.52</c:v>
-                </c:pt>
-                <c:pt idx="2">
-                  <c:v>15.82</c:v>
-                </c:pt>
-                <c:pt idx="3">
-                  <c:v>7.33</c:v>
                 </c:pt>
               </c:numCache>
             </c:numRef>
@@ -14384,7 +14206,7 @@
                 <a:ea typeface="Cambria" pitchFamily="34" charset="-122"/>
                 <a:cs typeface="Cambria" pitchFamily="34" charset="-120"/>
               </a:rPr>
-              <a:t>Synthetic data with a known, injected ground truth</a:t>
+              <a:t>Two data sources: a designed holdout test, and campaign history</a:t>
             </a:r>
             <a:endParaRPr lang="en-US" sz="2700" dirty="0"/>
           </a:p>
@@ -14889,7 +14711,7 @@
                 <a:ea typeface="Cambria" pitchFamily="34" charset="-122"/>
                 <a:cs typeface="Cambria" pitchFamily="34" charset="-120"/>
               </a:rPr>
-              <a:t>RCT geo-holdout — high confidence</a:t>
+              <a:t>The proof point: ads move real foot traffic</a:t>
             </a:r>
             <a:endParaRPr lang="en-US" sz="2700" dirty="0"/>
           </a:p>
@@ -15460,7 +15282,7 @@
                 <a:ea typeface="Cambria" pitchFamily="34" charset="-122"/>
                 <a:cs typeface="Cambria" pitchFamily="34" charset="-120"/>
               </a:rPr>
-              <a:t>Synthetic control — moderate confidence</a:t>
+              <a:t>Measuring the campaigns we couldn't randomize</a:t>
             </a:r>
             <a:endParaRPr lang="en-US" sz="2700" dirty="0"/>
           </a:p>
@@ -15565,7 +15387,7 @@
                 <a:ea typeface="Calibri" pitchFamily="34" charset="-122"/>
                 <a:cs typeface="Calibri" pitchFamily="34" charset="-120"/>
               </a:rPr>
-              <a:t>Covers historical, non-randomized campaigns — the identifying assumption can't be directly tested the way randomization can, only checked indirectly.</a:t>
+              <a:t>Most advertisers' campaigns already ran, on venues they picked — not us. Synthetic control reconstructs the counterfactual anyway, with its own built-in checks.</a:t>
             </a:r>
             <a:endParaRPr lang="en-US" sz="1250" dirty="0"/>
           </a:p>

--- a/deck/AtmosphereTV_DOOH_Measurement.pptx
+++ b/deck/AtmosphereTV_DOOH_Measurement.pptx
@@ -20,9 +20,10 @@
     <p:sldId id="268" r:id="rId14"/>
     <p:sldId id="269" r:id="rId15"/>
     <p:sldId id="270" r:id="rId16"/>
+    <p:sldId id="271" r:id="rId17"/>
   </p:sldIdLst>
   <p:notesMasterIdLst>
-    <p:notesMasterId r:id="rId17"/>
+    <p:notesMasterId r:id="rId18"/>
   </p:notesMasterIdLst>
   <p:sldSz cx="12192000" cy="6858000"/>
   <p:notesSz cx="6858000" cy="12192000"/>
@@ -889,95 +890,6 @@
             </c:numRef>
           </c:val>
         </c:ser>
-        <c:ser>
-          <c:idx val="2"/>
-          <c:order val="2"/>
-          <c:tx>
-            <c:strRef>
-              <c:f>Sheet1!$D$1</c:f>
-              <c:strCache>
-                <c:ptCount val="1"/>
-                <c:pt idx="0">
-                  <c:v>True max lift</c:v>
-                </c:pt>
-              </c:strCache>
-            </c:strRef>
-          </c:tx>
-          <c:spPr>
-            <a:solidFill>
-              <a:srgbClr val="E8871E"/>
-            </a:solidFill>
-            <a:effectLst/>
-          </c:spPr>
-          <c:invertIfNegative val="0"/>
-          <c:dLbls>
-            <c:numFmt formatCode="#,##0" sourceLinked="0"/>
-            <c:txPr>
-              <a:bodyPr/>
-              <a:lstStyle/>
-              <a:p>
-                <a:pPr>
-                  <a:defRPr b="0" i="0" strike="noStrike" sz="850" u="none">
-                    <a:solidFill>
-                      <a:srgbClr val="1A1A2E"/>
-                    </a:solidFill>
-                    <a:latin typeface="Arial"/>
-                  </a:defRPr>
-                </a:pPr>
-              </a:p>
-            </c:txPr>
-            <c:showLegendKey val="0"/>
-            <c:showVal val="1"/>
-            <c:showCatName val="0"/>
-            <c:showSerName val="0"/>
-            <c:showPercent val="0"/>
-            <c:showBubbleSize val="0"/>
-            <c:showLeaderLines val="0"/>
-          </c:dLbls>
-          <c:cat>
-            <c:multiLvlStrRef>
-              <c:f>Sheet1!$A$2:$A$5</c:f>
-              <c:multiLvlStrCache>
-                <c:ptCount val="4"/>
-                <c:lvl>
-                  <c:pt idx="0">
-                    <c:v>Restaurants</c:v>
-                  </c:pt>
-                  <c:pt idx="1">
-                    <c:v>Gyms</c:v>
-                  </c:pt>
-                  <c:pt idx="2">
-                    <c:v>Bars</c:v>
-                  </c:pt>
-                  <c:pt idx="3">
-                    <c:v>Waiting Rooms</c:v>
-                  </c:pt>
-                </c:lvl>
-              </c:multiLvlStrCache>
-            </c:multiLvlStrRef>
-          </c:cat>
-          <c:val>
-            <c:numRef>
-              <c:f>Sheet1!$D$2:$D$5</c:f>
-              <c:numCache>
-                <c:formatCode>General</c:formatCode>
-                <c:ptCount val="4"/>
-                <c:pt idx="0">
-                  <c:v>18</c:v>
-                </c:pt>
-                <c:pt idx="1">
-                  <c:v>14</c:v>
-                </c:pt>
-                <c:pt idx="2">
-                  <c:v>22</c:v>
-                </c:pt>
-                <c:pt idx="3">
-                  <c:v>9</c:v>
-                </c:pt>
-              </c:numCache>
-            </c:numRef>
-          </c:val>
-        </c:ser>
         <c:dLbls>
           <c:numFmt formatCode="#,##0" sourceLinked="0"/>
           <c:txPr>
@@ -1356,95 +1268,6 @@
             </c:numRef>
           </c:val>
         </c:ser>
-        <c:ser>
-          <c:idx val="2"/>
-          <c:order val="2"/>
-          <c:tx>
-            <c:strRef>
-              <c:f>Sheet1!$D$1</c:f>
-              <c:strCache>
-                <c:ptCount val="1"/>
-                <c:pt idx="0">
-                  <c:v>True max lift</c:v>
-                </c:pt>
-              </c:strCache>
-            </c:strRef>
-          </c:tx>
-          <c:spPr>
-            <a:solidFill>
-              <a:srgbClr val="E8871E"/>
-            </a:solidFill>
-            <a:effectLst/>
-          </c:spPr>
-          <c:invertIfNegative val="0"/>
-          <c:dLbls>
-            <c:numFmt formatCode="#,##0" sourceLinked="0"/>
-            <c:txPr>
-              <a:bodyPr/>
-              <a:lstStyle/>
-              <a:p>
-                <a:pPr>
-                  <a:defRPr b="0" i="0" strike="noStrike" sz="850" u="none">
-                    <a:solidFill>
-                      <a:srgbClr val="1A1A2E"/>
-                    </a:solidFill>
-                    <a:latin typeface="Arial"/>
-                  </a:defRPr>
-                </a:pPr>
-              </a:p>
-            </c:txPr>
-            <c:showLegendKey val="0"/>
-            <c:showVal val="1"/>
-            <c:showCatName val="0"/>
-            <c:showSerName val="0"/>
-            <c:showPercent val="0"/>
-            <c:showBubbleSize val="0"/>
-            <c:showLeaderLines val="0"/>
-          </c:dLbls>
-          <c:cat>
-            <c:multiLvlStrRef>
-              <c:f>Sheet1!$A$2:$A$5</c:f>
-              <c:multiLvlStrCache>
-                <c:ptCount val="4"/>
-                <c:lvl>
-                  <c:pt idx="0">
-                    <c:v>Restaurants</c:v>
-                  </c:pt>
-                  <c:pt idx="1">
-                    <c:v>Gyms</c:v>
-                  </c:pt>
-                  <c:pt idx="2">
-                    <c:v>Bars</c:v>
-                  </c:pt>
-                  <c:pt idx="3">
-                    <c:v>Waiting Rooms</c:v>
-                  </c:pt>
-                </c:lvl>
-              </c:multiLvlStrCache>
-            </c:multiLvlStrRef>
-          </c:cat>
-          <c:val>
-            <c:numRef>
-              <c:f>Sheet1!$D$2:$D$5</c:f>
-              <c:numCache>
-                <c:formatCode>General</c:formatCode>
-                <c:ptCount val="4"/>
-                <c:pt idx="0">
-                  <c:v>18</c:v>
-                </c:pt>
-                <c:pt idx="1">
-                  <c:v>14</c:v>
-                </c:pt>
-                <c:pt idx="2">
-                  <c:v>22</c:v>
-                </c:pt>
-                <c:pt idx="3">
-                  <c:v>9</c:v>
-                </c:pt>
-              </c:numCache>
-            </c:numRef>
-          </c:val>
-        </c:ser>
         <c:dLbls>
           <c:numFmt formatCode="#,##0" sourceLinked="0"/>
           <c:txPr>
@@ -3376,6 +3199,94 @@
             <a:fld id="{F7021451-1387-4CA6-816F-3879F97B5CBC}" type="slidenum">
               <a:rPr lang="en-US"/>
               <a:t>15</a:t>
+            </a:fld>
+            <a:endParaRPr lang="en-US"/>
+          </a:p>
+        </p:txBody>
+      </p:sp>
+    </p:spTree>
+    <p:extLst>
+      <p:ext uri="{BB962C8B-B14F-4D97-AF65-F5344CB8AC3E}">
+        <p14:creationId xmlns:p14="http://schemas.microsoft.com/office/powerpoint/2010/main" val="1024086991"/>
+      </p:ext>
+    </p:extLst>
+  </p:cSld>
+  <p:clrMapOvr>
+    <a:masterClrMapping/>
+  </p:clrMapOvr>
+</p:notes>
+</file>
+
+<file path=ppt/notesSlides/notesSlide16.xml><?xml version="1.0" encoding="utf-8"?>
+<p:notes xmlns:a="http://schemas.openxmlformats.org/drawingml/2006/main" xmlns:r="http://schemas.openxmlformats.org/officeDocument/2006/relationships" xmlns:p="http://schemas.openxmlformats.org/presentationml/2006/main">
+  <p:cSld>
+    <p:spTree>
+      <p:nvGrpSpPr>
+        <p:cNvPr id="1" name=""/>
+        <p:cNvGrpSpPr/>
+        <p:nvPr/>
+      </p:nvGrpSpPr>
+      <p:grpSpPr>
+        <a:xfrm>
+          <a:off x="0" y="0"/>
+          <a:ext cx="0" cy="0"/>
+          <a:chOff x="0" y="0"/>
+          <a:chExt cx="0" cy="0"/>
+        </a:xfrm>
+      </p:grpSpPr>
+      <p:sp>
+        <p:nvSpPr>
+          <p:cNvPr id="2" name="Slide Image Placeholder 1"/>
+          <p:cNvSpPr>
+            <a:spLocks noGrp="1" noRot="1" noChangeAspect="1"/>
+          </p:cNvSpPr>
+          <p:nvPr>
+            <p:ph type="sldImg"/>
+          </p:nvPr>
+        </p:nvSpPr>
+        <p:spPr/>
+      </p:sp>
+      <p:sp>
+        <p:nvSpPr>
+          <p:cNvPr id="3" name="Notes Placeholder 2"/>
+          <p:cNvSpPr>
+            <a:spLocks noGrp="1"/>
+          </p:cNvSpPr>
+          <p:nvPr>
+            <p:ph type="body" idx="1"/>
+          </p:nvPr>
+        </p:nvSpPr>
+        <p:spPr/>
+        <p:txBody>
+          <a:bodyPr/>
+          <a:lstStyle/>
+          <a:p>
+            <a:r>
+              <a:rPr lang="en-US" dirty="0"/>
+              <a:t/>
+            </a:r>
+            <a:endParaRPr lang="en-US" dirty="0"/>
+          </a:p>
+        </p:txBody>
+      </p:sp>
+      <p:sp>
+        <p:nvSpPr>
+          <p:cNvPr id="4" name="Slide Number Placeholder 3"/>
+          <p:cNvSpPr>
+            <a:spLocks noGrp="1"/>
+          </p:cNvSpPr>
+          <p:nvPr>
+            <p:ph type="sldNum" sz="quarter" idx="10"/>
+          </p:nvPr>
+        </p:nvSpPr>
+        <p:spPr/>
+        <p:txBody>
+          <a:bodyPr/>
+          <a:lstStyle/>
+          <a:p>
+            <a:fld id="{F7021451-1387-4CA6-816F-3879F97B5CBC}" type="slidenum">
+              <a:rPr lang="en-US"/>
+              <a:t>16</a:t>
             </a:fld>
             <a:endParaRPr lang="en-US"/>
           </a:p>
@@ -4685,7 +4596,7 @@
               <a:buNone/>
             </a:pPr>
             <a:r>
-              <a:rPr lang="en-US" sz="2400" b="1" dirty="0">
+              <a:rPr lang="en-US" sz="2500" b="1" dirty="0">
                 <a:solidFill>
                   <a:srgbClr val="1E2761"/>
                 </a:solidFill>
@@ -4693,9 +4604,9 @@
                 <a:ea typeface="Cambria" pitchFamily="34" charset="-122"/>
                 <a:cs typeface="Cambria" pitchFamily="34" charset="-120"/>
               </a:rPr>
-              <a:t>Robustness check: does competing media break this MMM?</a:t>
-            </a:r>
-            <a:endParaRPr lang="en-US" sz="2400" dirty="0"/>
+              <a:t>MMM: an uncalibrated model would have underpriced results</a:t>
+            </a:r>
+            <a:endParaRPr lang="en-US" sz="2500" dirty="0"/>
           </a:p>
         </p:txBody>
       </p:sp>
@@ -4759,7 +4670,7 @@
                 <a:ea typeface="Calibri" pitchFamily="34" charset="-122"/>
                 <a:cs typeface="Calibri" pitchFamily="34" charset="-120"/>
               </a:rPr>
-              <a:t>Step 3 robustness check · Q2</a:t>
+              <a:t>Step 3 of 6 · Answers Q2</a:t>
             </a:r>
             <a:endParaRPr lang="en-US" sz="950" dirty="0"/>
           </a:p>
@@ -4790,7 +4701,7 @@
               <a:buNone/>
             </a:pPr>
             <a:r>
-              <a:rPr lang="en-US" sz="1200" i="1" dirty="0">
+              <a:rPr lang="en-US" sz="1250" i="1" dirty="0">
                 <a:solidFill>
                   <a:srgbClr val="5B6178"/>
                 </a:solidFill>
@@ -4798,9 +4709,9 @@
                 <a:ea typeface="Calibri" pitchFamily="34" charset="-122"/>
                 <a:cs typeface="Calibri" pitchFamily="34" charset="-120"/>
               </a:rPr>
-              <a:t>A synthetic “other advertisers were busy too” shock, correlated with Atmosphere's own exposure ramp-up — layered onto the validated data as a labeled overlay, not a change to it.</a:t>
-            </a:r>
-            <a:endParaRPr lang="en-US" sz="1200" dirty="0"/>
+              <a:t>Adstock + saturation shape comes from the aggregate weekly series; scale is pinned by the RCT's high-confidence estimate.</a:t>
+            </a:r>
+            <a:endParaRPr lang="en-US" sz="1250" dirty="0"/>
           </a:p>
         </p:txBody>
       </p:sp>
@@ -4822,52 +4733,30 @@
       </p:graphicFrame>
       <p:sp>
         <p:nvSpPr>
-          <p:cNvPr id="7" name="Shape 4"/>
-          <p:cNvSpPr/>
-          <p:nvPr/>
-        </p:nvSpPr>
-        <p:spPr>
-          <a:xfrm>
-            <a:off x="7772400" y="1600200"/>
-            <a:ext cx="3867912" cy="1234440"/>
-          </a:xfrm>
-          <a:prstGeom prst="roundRect">
-            <a:avLst>
-              <a:gd name="adj" fmla="val 5926"/>
-            </a:avLst>
-          </a:prstGeom>
-          <a:solidFill>
-            <a:srgbClr val="F5F7FC"/>
-          </a:solidFill>
-          <a:ln/>
-        </p:spPr>
-      </p:sp>
-      <p:sp>
-        <p:nvSpPr>
-          <p:cNvPr id="8" name="Text 5"/>
-          <p:cNvSpPr/>
-          <p:nvPr/>
-        </p:nvSpPr>
-        <p:spPr>
-          <a:xfrm>
-            <a:off x="7955280" y="1719072"/>
-            <a:ext cx="3520440" cy="365760"/>
-          </a:xfrm>
-          <a:prstGeom prst="rect">
-            <a:avLst/>
-          </a:prstGeom>
-          <a:noFill/>
-          <a:ln/>
-        </p:spPr>
-        <p:txBody>
-          <a:bodyPr wrap="square" rtlCol="0" anchor="ctr"/>
-          <a:lstStyle/>
-          <a:p>
-            <a:pPr indent="0" marL="0">
-              <a:buNone/>
-            </a:pPr>
-            <a:r>
-              <a:rPr lang="en-US" sz="1100" b="1" dirty="0">
+          <p:cNvPr id="7" name="Text 4"/>
+          <p:cNvSpPr/>
+          <p:nvPr/>
+        </p:nvSpPr>
+        <p:spPr>
+          <a:xfrm>
+            <a:off x="7772400" y="1737360"/>
+            <a:ext cx="3840480" cy="320040"/>
+          </a:xfrm>
+          <a:prstGeom prst="rect">
+            <a:avLst/>
+          </a:prstGeom>
+          <a:noFill/>
+          <a:ln/>
+        </p:spPr>
+        <p:txBody>
+          <a:bodyPr wrap="square" rtlCol="0" anchor="ctr"/>
+          <a:lstStyle/>
+          <a:p>
+            <a:pPr indent="0" marL="0">
+              <a:buNone/>
+            </a:pPr>
+            <a:r>
+              <a:rPr lang="en-US" sz="1200" b="1" dirty="0">
                 <a:solidFill>
                   <a:srgbClr val="1E2761"/>
                 </a:solidFill>
@@ -4875,7 +4764,361 @@
                 <a:ea typeface="Cambria" pitchFamily="34" charset="-122"/>
                 <a:cs typeface="Cambria" pitchFamily="34" charset="-120"/>
               </a:rPr>
-              <a:t>RCT estimate shift under the identical shock</a:t>
+              <a:t>Calibration adjustment</a:t>
+            </a:r>
+            <a:endParaRPr lang="en-US" sz="1200" dirty="0"/>
+          </a:p>
+        </p:txBody>
+      </p:sp>
+      <p:sp>
+        <p:nvSpPr>
+          <p:cNvPr id="8" name="Text 5"/>
+          <p:cNvSpPr/>
+          <p:nvPr/>
+        </p:nvSpPr>
+        <p:spPr>
+          <a:xfrm>
+            <a:off x="7772400" y="2194560"/>
+            <a:ext cx="1737360" cy="502920"/>
+          </a:xfrm>
+          <a:prstGeom prst="rect">
+            <a:avLst/>
+          </a:prstGeom>
+          <a:noFill/>
+          <a:ln/>
+        </p:spPr>
+        <p:txBody>
+          <a:bodyPr wrap="square" rtlCol="0" anchor="ctr"/>
+          <a:lstStyle/>
+          <a:p>
+            <a:pPr indent="0" marL="0">
+              <a:buNone/>
+            </a:pPr>
+            <a:r>
+              <a:rPr lang="en-US" sz="1200" dirty="0">
+                <a:solidFill>
+                  <a:srgbClr val="1A1A2E"/>
+                </a:solidFill>
+                <a:latin typeface="Calibri" pitchFamily="34" charset="0"/>
+                <a:ea typeface="Calibri" pitchFamily="34" charset="-122"/>
+                <a:cs typeface="Calibri" pitchFamily="34" charset="-120"/>
+              </a:rPr>
+              <a:t>Restaurants</a:t>
+            </a:r>
+            <a:endParaRPr lang="en-US" sz="1200" dirty="0"/>
+          </a:p>
+        </p:txBody>
+      </p:sp>
+      <p:sp>
+        <p:nvSpPr>
+          <p:cNvPr id="9" name="Text 6"/>
+          <p:cNvSpPr/>
+          <p:nvPr/>
+        </p:nvSpPr>
+        <p:spPr>
+          <a:xfrm>
+            <a:off x="9509760" y="2194560"/>
+            <a:ext cx="2103120" cy="502920"/>
+          </a:xfrm>
+          <a:prstGeom prst="rect">
+            <a:avLst/>
+          </a:prstGeom>
+          <a:noFill/>
+          <a:ln/>
+        </p:spPr>
+        <p:txBody>
+          <a:bodyPr wrap="square" rtlCol="0" anchor="ctr"/>
+          <a:lstStyle/>
+          <a:p>
+            <a:pPr indent="0" marL="0">
+              <a:buNone/>
+            </a:pPr>
+            <a:r>
+              <a:rPr lang="en-US" sz="1800" b="1" dirty="0">
+                <a:solidFill>
+                  <a:srgbClr val="B8500A"/>
+                </a:solidFill>
+                <a:latin typeface="Calibri" pitchFamily="34" charset="0"/>
+                <a:ea typeface="Calibri" pitchFamily="34" charset="-122"/>
+                <a:cs typeface="Calibri" pitchFamily="34" charset="-120"/>
+              </a:rPr>
+              <a:t>+134%</a:t>
+            </a:r>
+            <a:endParaRPr lang="en-US" sz="1800" dirty="0"/>
+          </a:p>
+        </p:txBody>
+      </p:sp>
+      <p:sp>
+        <p:nvSpPr>
+          <p:cNvPr id="10" name="Text 7"/>
+          <p:cNvSpPr/>
+          <p:nvPr/>
+        </p:nvSpPr>
+        <p:spPr>
+          <a:xfrm>
+            <a:off x="7772400" y="2788920"/>
+            <a:ext cx="1737360" cy="502920"/>
+          </a:xfrm>
+          <a:prstGeom prst="rect">
+            <a:avLst/>
+          </a:prstGeom>
+          <a:noFill/>
+          <a:ln/>
+        </p:spPr>
+        <p:txBody>
+          <a:bodyPr wrap="square" rtlCol="0" anchor="ctr"/>
+          <a:lstStyle/>
+          <a:p>
+            <a:pPr indent="0" marL="0">
+              <a:buNone/>
+            </a:pPr>
+            <a:r>
+              <a:rPr lang="en-US" sz="1200" dirty="0">
+                <a:solidFill>
+                  <a:srgbClr val="1A1A2E"/>
+                </a:solidFill>
+                <a:latin typeface="Calibri" pitchFamily="34" charset="0"/>
+                <a:ea typeface="Calibri" pitchFamily="34" charset="-122"/>
+                <a:cs typeface="Calibri" pitchFamily="34" charset="-120"/>
+              </a:rPr>
+              <a:t>Gyms</a:t>
+            </a:r>
+            <a:endParaRPr lang="en-US" sz="1200" dirty="0"/>
+          </a:p>
+        </p:txBody>
+      </p:sp>
+      <p:sp>
+        <p:nvSpPr>
+          <p:cNvPr id="11" name="Text 8"/>
+          <p:cNvSpPr/>
+          <p:nvPr/>
+        </p:nvSpPr>
+        <p:spPr>
+          <a:xfrm>
+            <a:off x="9509760" y="2788920"/>
+            <a:ext cx="2103120" cy="502920"/>
+          </a:xfrm>
+          <a:prstGeom prst="rect">
+            <a:avLst/>
+          </a:prstGeom>
+          <a:noFill/>
+          <a:ln/>
+        </p:spPr>
+        <p:txBody>
+          <a:bodyPr wrap="square" rtlCol="0" anchor="ctr"/>
+          <a:lstStyle/>
+          <a:p>
+            <a:pPr indent="0" marL="0">
+              <a:buNone/>
+            </a:pPr>
+            <a:r>
+              <a:rPr lang="en-US" sz="1800" b="1" dirty="0">
+                <a:solidFill>
+                  <a:srgbClr val="B8500A"/>
+                </a:solidFill>
+                <a:latin typeface="Calibri" pitchFamily="34" charset="0"/>
+                <a:ea typeface="Calibri" pitchFamily="34" charset="-122"/>
+                <a:cs typeface="Calibri" pitchFamily="34" charset="-120"/>
+              </a:rPr>
+              <a:t>+165%</a:t>
+            </a:r>
+            <a:endParaRPr lang="en-US" sz="1800" dirty="0"/>
+          </a:p>
+        </p:txBody>
+      </p:sp>
+      <p:sp>
+        <p:nvSpPr>
+          <p:cNvPr id="12" name="Text 9"/>
+          <p:cNvSpPr/>
+          <p:nvPr/>
+        </p:nvSpPr>
+        <p:spPr>
+          <a:xfrm>
+            <a:off x="7772400" y="3383280"/>
+            <a:ext cx="1737360" cy="502920"/>
+          </a:xfrm>
+          <a:prstGeom prst="rect">
+            <a:avLst/>
+          </a:prstGeom>
+          <a:noFill/>
+          <a:ln/>
+        </p:spPr>
+        <p:txBody>
+          <a:bodyPr wrap="square" rtlCol="0" anchor="ctr"/>
+          <a:lstStyle/>
+          <a:p>
+            <a:pPr indent="0" marL="0">
+              <a:buNone/>
+            </a:pPr>
+            <a:r>
+              <a:rPr lang="en-US" sz="1200" dirty="0">
+                <a:solidFill>
+                  <a:srgbClr val="1A1A2E"/>
+                </a:solidFill>
+                <a:latin typeface="Calibri" pitchFamily="34" charset="0"/>
+                <a:ea typeface="Calibri" pitchFamily="34" charset="-122"/>
+                <a:cs typeface="Calibri" pitchFamily="34" charset="-120"/>
+              </a:rPr>
+              <a:t>Bars</a:t>
+            </a:r>
+            <a:endParaRPr lang="en-US" sz="1200" dirty="0"/>
+          </a:p>
+        </p:txBody>
+      </p:sp>
+      <p:sp>
+        <p:nvSpPr>
+          <p:cNvPr id="13" name="Text 10"/>
+          <p:cNvSpPr/>
+          <p:nvPr/>
+        </p:nvSpPr>
+        <p:spPr>
+          <a:xfrm>
+            <a:off x="9509760" y="3383280"/>
+            <a:ext cx="2103120" cy="502920"/>
+          </a:xfrm>
+          <a:prstGeom prst="rect">
+            <a:avLst/>
+          </a:prstGeom>
+          <a:noFill/>
+          <a:ln/>
+        </p:spPr>
+        <p:txBody>
+          <a:bodyPr wrap="square" rtlCol="0" anchor="ctr"/>
+          <a:lstStyle/>
+          <a:p>
+            <a:pPr indent="0" marL="0">
+              <a:buNone/>
+            </a:pPr>
+            <a:r>
+              <a:rPr lang="en-US" sz="1800" b="1" dirty="0">
+                <a:solidFill>
+                  <a:srgbClr val="2C7A57"/>
+                </a:solidFill>
+                <a:latin typeface="Calibri" pitchFamily="34" charset="0"/>
+                <a:ea typeface="Calibri" pitchFamily="34" charset="-122"/>
+                <a:cs typeface="Calibri" pitchFamily="34" charset="-120"/>
+              </a:rPr>
+              <a:t>+20%</a:t>
+            </a:r>
+            <a:endParaRPr lang="en-US" sz="1800" dirty="0"/>
+          </a:p>
+        </p:txBody>
+      </p:sp>
+      <p:sp>
+        <p:nvSpPr>
+          <p:cNvPr id="14" name="Text 11"/>
+          <p:cNvSpPr/>
+          <p:nvPr/>
+        </p:nvSpPr>
+        <p:spPr>
+          <a:xfrm>
+            <a:off x="7772400" y="3977640"/>
+            <a:ext cx="1737360" cy="502920"/>
+          </a:xfrm>
+          <a:prstGeom prst="rect">
+            <a:avLst/>
+          </a:prstGeom>
+          <a:noFill/>
+          <a:ln/>
+        </p:spPr>
+        <p:txBody>
+          <a:bodyPr wrap="square" rtlCol="0" anchor="ctr"/>
+          <a:lstStyle/>
+          <a:p>
+            <a:pPr indent="0" marL="0">
+              <a:buNone/>
+            </a:pPr>
+            <a:r>
+              <a:rPr lang="en-US" sz="1200" dirty="0">
+                <a:solidFill>
+                  <a:srgbClr val="1A1A2E"/>
+                </a:solidFill>
+                <a:latin typeface="Calibri" pitchFamily="34" charset="0"/>
+                <a:ea typeface="Calibri" pitchFamily="34" charset="-122"/>
+                <a:cs typeface="Calibri" pitchFamily="34" charset="-120"/>
+              </a:rPr>
+              <a:t>Waiting Rooms</a:t>
+            </a:r>
+            <a:endParaRPr lang="en-US" sz="1200" dirty="0"/>
+          </a:p>
+        </p:txBody>
+      </p:sp>
+      <p:sp>
+        <p:nvSpPr>
+          <p:cNvPr id="15" name="Text 12"/>
+          <p:cNvSpPr/>
+          <p:nvPr/>
+        </p:nvSpPr>
+        <p:spPr>
+          <a:xfrm>
+            <a:off x="9509760" y="3977640"/>
+            <a:ext cx="2103120" cy="502920"/>
+          </a:xfrm>
+          <a:prstGeom prst="rect">
+            <a:avLst/>
+          </a:prstGeom>
+          <a:noFill/>
+          <a:ln/>
+        </p:spPr>
+        <p:txBody>
+          <a:bodyPr wrap="square" rtlCol="0" anchor="ctr"/>
+          <a:lstStyle/>
+          <a:p>
+            <a:pPr indent="0" marL="0">
+              <a:buNone/>
+            </a:pPr>
+            <a:r>
+              <a:rPr lang="en-US" sz="1800" b="1" dirty="0">
+                <a:solidFill>
+                  <a:srgbClr val="B8500A"/>
+                </a:solidFill>
+                <a:latin typeface="Calibri" pitchFamily="34" charset="0"/>
+                <a:ea typeface="Calibri" pitchFamily="34" charset="-122"/>
+                <a:cs typeface="Calibri" pitchFamily="34" charset="-120"/>
+              </a:rPr>
+              <a:t>+100%</a:t>
+            </a:r>
+            <a:endParaRPr lang="en-US" sz="1800" dirty="0"/>
+          </a:p>
+        </p:txBody>
+      </p:sp>
+      <p:sp>
+        <p:nvSpPr>
+          <p:cNvPr id="16" name="Text 13"/>
+          <p:cNvSpPr/>
+          <p:nvPr/>
+        </p:nvSpPr>
+        <p:spPr>
+          <a:xfrm>
+            <a:off x="7772400" y="4709160"/>
+            <a:ext cx="3840480" cy="1463040"/>
+          </a:xfrm>
+          <a:prstGeom prst="rect">
+            <a:avLst/>
+          </a:prstGeom>
+          <a:noFill/>
+          <a:ln/>
+        </p:spPr>
+        <p:txBody>
+          <a:bodyPr wrap="square" rtlCol="0" anchor="ctr"/>
+          <a:lstStyle/>
+          <a:p>
+            <a:pPr indent="0" marL="0">
+              <a:lnSpc>
+                <a:spcPts val="1500"/>
+              </a:lnSpc>
+              <a:buNone/>
+            </a:pPr>
+            <a:r>
+              <a:rPr lang="en-US" sz="1100" i="1" dirty="0">
+                <a:solidFill>
+                  <a:srgbClr val="5B6178"/>
+                </a:solidFill>
+                <a:latin typeface="Calibri" pitchFamily="34" charset="0"/>
+                <a:ea typeface="Calibri" pitchFamily="34" charset="-122"/>
+                <a:cs typeface="Calibri" pitchFamily="34" charset="-120"/>
+              </a:rPr>
+              <a:t>For 3 of 4 venue types, the naive observational fit understated the RCT-calibrated estimate by 100–165% — the kind of gap real MMM practice cites as its core identification problem, and exactly why the RCT anchor matters.</a:t>
             </a:r>
             <a:endParaRPr lang="en-US" sz="1100" dirty="0"/>
           </a:p>
@@ -4883,194 +5126,7 @@
       </p:sp>
       <p:sp>
         <p:nvSpPr>
-          <p:cNvPr id="9" name="Text 6"/>
-          <p:cNvSpPr/>
-          <p:nvPr/>
-        </p:nvSpPr>
-        <p:spPr>
-          <a:xfrm>
-            <a:off x="7955280" y="2057400"/>
-            <a:ext cx="3520440" cy="594360"/>
-          </a:xfrm>
-          <a:prstGeom prst="rect">
-            <a:avLst/>
-          </a:prstGeom>
-          <a:noFill/>
-          <a:ln/>
-        </p:spPr>
-        <p:txBody>
-          <a:bodyPr wrap="square" rtlCol="0" anchor="ctr"/>
-          <a:lstStyle/>
-          <a:p>
-            <a:pPr indent="0" marL="0">
-              <a:buNone/>
-            </a:pPr>
-            <a:r>
-              <a:rPr lang="en-US" sz="3200" b="1" dirty="0">
-                <a:solidFill>
-                  <a:srgbClr val="2C7A57"/>
-                </a:solidFill>
-                <a:latin typeface="Calibri" pitchFamily="34" charset="0"/>
-                <a:ea typeface="Calibri" pitchFamily="34" charset="-122"/>
-                <a:cs typeface="Calibri" pitchFamily="34" charset="-120"/>
-              </a:rPr>
-              <a:t>0.00</a:t>
-            </a:r>
-            <a:endParaRPr lang="en-US" sz="3200" dirty="0"/>
-          </a:p>
-        </p:txBody>
-      </p:sp>
-      <p:sp>
-        <p:nvSpPr>
-          <p:cNvPr id="10" name="Text 7"/>
-          <p:cNvSpPr/>
-          <p:nvPr/>
-        </p:nvSpPr>
-        <p:spPr>
-          <a:xfrm>
-            <a:off x="7955280" y="2633472"/>
-            <a:ext cx="3520440" cy="182880"/>
-          </a:xfrm>
-          <a:prstGeom prst="rect">
-            <a:avLst/>
-          </a:prstGeom>
-          <a:noFill/>
-          <a:ln/>
-        </p:spPr>
-        <p:txBody>
-          <a:bodyPr wrap="square" rtlCol="0" anchor="ctr"/>
-          <a:lstStyle/>
-          <a:p>
-            <a:pPr indent="0" marL="0">
-              <a:lnSpc>
-                <a:spcPts val="1000"/>
-              </a:lnSpc>
-              <a:buNone/>
-            </a:pPr>
-            <a:r>
-              <a:rPr lang="en-US" sz="870" i="1" dirty="0">
-                <a:solidFill>
-                  <a:srgbClr val="5B6178"/>
-                </a:solidFill>
-                <a:latin typeface="Calibri" pitchFamily="34" charset="0"/>
-                <a:ea typeface="Calibri" pitchFamily="34" charset="-122"/>
-                <a:cs typeface="Calibri" pitchFamily="34" charset="-120"/>
-              </a:rPr>
-              <a:t>every venue type — the shock hits both arms equally, so a randomized comparison is mechanically immune to it</a:t>
-            </a:r>
-            <a:endParaRPr lang="en-US" sz="870" dirty="0"/>
-          </a:p>
-        </p:txBody>
-      </p:sp>
-      <p:sp>
-        <p:nvSpPr>
-          <p:cNvPr id="11" name="Text 8"/>
-          <p:cNvSpPr/>
-          <p:nvPr/>
-        </p:nvSpPr>
-        <p:spPr>
-          <a:xfrm>
-            <a:off x="7772400" y="3063240"/>
-            <a:ext cx="3867912" cy="1417320"/>
-          </a:xfrm>
-          <a:prstGeom prst="rect">
-            <a:avLst/>
-          </a:prstGeom>
-          <a:noFill/>
-          <a:ln/>
-        </p:spPr>
-        <p:txBody>
-          <a:bodyPr wrap="square" rtlCol="0" anchor="ctr"/>
-          <a:lstStyle/>
-          <a:p>
-            <a:pPr indent="0" marL="0">
-              <a:lnSpc>
-                <a:spcPts val="1350"/>
-              </a:lnSpc>
-              <a:buNone/>
-            </a:pPr>
-            <a:r>
-              <a:rPr lang="en-US" sz="1000" dirty="0">
-                <a:solidFill>
-                  <a:srgbClr val="1A1A2E"/>
-                </a:solidFill>
-                <a:latin typeface="Calibri" pitchFamily="34" charset="0"/>
-                <a:ea typeface="Calibri" pitchFamily="34" charset="-122"/>
-                <a:cs typeface="Calibri" pitchFamily="34" charset="-120"/>
-              </a:rPr>
-              <a:t>Naive MMM, by contrast, swings from useful to actively misleading: for 3 of 4 venue types the confound-blind fit was off by 2–4× — even though the injected correlation between competing media and Atmosphere's own exposure ramp is only 0.35 (moderate, not a worst case). Controlling for the confound (green) recovers this model's own uncalibrated baseline from the previous slide — still short of true max lift (orange) until the RCT-scale calibration from that same slide is applied on top.</a:t>
-            </a:r>
-            <a:endParaRPr lang="en-US" sz="1000" dirty="0"/>
-          </a:p>
-        </p:txBody>
-      </p:sp>
-      <p:sp>
-        <p:nvSpPr>
-          <p:cNvPr id="12" name="Shape 9"/>
-          <p:cNvSpPr/>
-          <p:nvPr/>
-        </p:nvSpPr>
-        <p:spPr>
-          <a:xfrm>
-            <a:off x="548640" y="5687568"/>
-            <a:ext cx="11091672" cy="713232"/>
-          </a:xfrm>
-          <a:prstGeom prst="roundRect">
-            <a:avLst>
-              <a:gd name="adj" fmla="val 7692"/>
-            </a:avLst>
-          </a:prstGeom>
-          <a:solidFill>
-            <a:srgbClr val="FDF1E3"/>
-          </a:solidFill>
-          <a:ln/>
-        </p:spPr>
-      </p:sp>
-      <p:sp>
-        <p:nvSpPr>
-          <p:cNvPr id="13" name="Text 10"/>
-          <p:cNvSpPr/>
-          <p:nvPr/>
-        </p:nvSpPr>
-        <p:spPr>
-          <a:xfrm>
-            <a:off x="731520" y="5779008"/>
-            <a:ext cx="10744200" cy="548640"/>
-          </a:xfrm>
-          <a:prstGeom prst="rect">
-            <a:avLst/>
-          </a:prstGeom>
-          <a:noFill/>
-          <a:ln/>
-        </p:spPr>
-        <p:txBody>
-          <a:bodyPr wrap="square" rtlCol="0" anchor="ctr"/>
-          <a:lstStyle/>
-          <a:p>
-            <a:pPr indent="0" marL="0">
-              <a:lnSpc>
-                <a:spcPts val="1200"/>
-              </a:lnSpc>
-              <a:buNone/>
-            </a:pPr>
-            <a:r>
-              <a:rPr lang="en-US" sz="950" i="1" dirty="0">
-                <a:solidFill>
-                  <a:srgbClr val="8A4B0A"/>
-                </a:solidFill>
-                <a:latin typeface="Calibri" pitchFamily="34" charset="0"/>
-                <a:ea typeface="Calibri" pitchFamily="34" charset="-122"/>
-                <a:cs typeface="Calibri" pitchFamily="34" charset="-120"/>
-              </a:rPr>
-              <a:t>Why this is scoped this way: deciding how an advertiser splits budget across Atmosphere + TV + social is the advertiser's/agency's call — Atmosphere has no visibility into competitors' channel data anyway. What Atmosphere's DS role should own is netting competing media OUT of its own causal read (the JD's own phrasing), which the RCT does by design and a single-channel MMM only does with an explicit control.</a:t>
-            </a:r>
-            <a:endParaRPr lang="en-US" sz="950" dirty="0"/>
-          </a:p>
-        </p:txBody>
-      </p:sp>
-      <p:sp>
-        <p:nvSpPr>
-          <p:cNvPr id="14" name="Text 11"/>
+          <p:cNvPr id="17" name="Text 14"/>
           <p:cNvSpPr/>
           <p:nvPr/>
         </p:nvSpPr>
@@ -5101,7 +5157,7 @@
                 <a:ea typeface="Calibri" pitchFamily="34" charset="-122"/>
                 <a:cs typeface="Calibri" pitchFamily="34" charset="-120"/>
               </a:rPr>
-              <a:t>Media-mix model — robustness</a:t>
+              <a:t>Media-mix model</a:t>
             </a:r>
             <a:endParaRPr lang="en-US" sz="900" dirty="0"/>
           </a:p>
@@ -5148,6 +5204,485 @@
         <p:spPr>
           <a:xfrm>
             <a:off x="548640" y="411480"/>
+            <a:ext cx="11247120" cy="594360"/>
+          </a:xfrm>
+          <a:prstGeom prst="rect">
+            <a:avLst/>
+          </a:prstGeom>
+          <a:noFill/>
+          <a:ln/>
+        </p:spPr>
+        <p:txBody>
+          <a:bodyPr wrap="square" rtlCol="0" anchor="ctr"/>
+          <a:lstStyle/>
+          <a:p>
+            <a:pPr indent="0" marL="0">
+              <a:buNone/>
+            </a:pPr>
+            <a:r>
+              <a:rPr lang="en-US" sz="2400" b="1" dirty="0">
+                <a:solidFill>
+                  <a:srgbClr val="1E2761"/>
+                </a:solidFill>
+                <a:latin typeface="Cambria" pitchFamily="34" charset="0"/>
+                <a:ea typeface="Cambria" pitchFamily="34" charset="-122"/>
+                <a:cs typeface="Cambria" pitchFamily="34" charset="-120"/>
+              </a:rPr>
+              <a:t>Robustness check: does competing media break this MMM?</a:t>
+            </a:r>
+            <a:endParaRPr lang="en-US" sz="2400" dirty="0"/>
+          </a:p>
+        </p:txBody>
+      </p:sp>
+      <p:sp>
+        <p:nvSpPr>
+          <p:cNvPr id="3" name="Shape 1"/>
+          <p:cNvSpPr/>
+          <p:nvPr/>
+        </p:nvSpPr>
+        <p:spPr>
+          <a:xfrm>
+            <a:off x="8229600" y="146304"/>
+            <a:ext cx="3410712" cy="246888"/>
+          </a:xfrm>
+          <a:prstGeom prst="roundRect">
+            <a:avLst>
+              <a:gd name="adj" fmla="val 22222"/>
+            </a:avLst>
+          </a:prstGeom>
+          <a:solidFill>
+            <a:srgbClr val="FFFFFF"/>
+          </a:solidFill>
+          <a:ln w="15875">
+            <a:solidFill>
+              <a:srgbClr val="B8500A"/>
+            </a:solidFill>
+            <a:prstDash val="solid"/>
+          </a:ln>
+        </p:spPr>
+      </p:sp>
+      <p:sp>
+        <p:nvSpPr>
+          <p:cNvPr id="4" name="Text 2"/>
+          <p:cNvSpPr/>
+          <p:nvPr/>
+        </p:nvSpPr>
+        <p:spPr>
+          <a:xfrm>
+            <a:off x="8229600" y="146304"/>
+            <a:ext cx="3410712" cy="246888"/>
+          </a:xfrm>
+          <a:prstGeom prst="rect">
+            <a:avLst/>
+          </a:prstGeom>
+          <a:noFill/>
+          <a:ln/>
+        </p:spPr>
+        <p:txBody>
+          <a:bodyPr wrap="square" rtlCol="0" anchor="ctr"/>
+          <a:lstStyle/>
+          <a:p>
+            <a:pPr algn="ctr" indent="0" marL="0">
+              <a:buNone/>
+            </a:pPr>
+            <a:r>
+              <a:rPr lang="en-US" sz="950" b="1" dirty="0">
+                <a:solidFill>
+                  <a:srgbClr val="B8500A"/>
+                </a:solidFill>
+                <a:latin typeface="Calibri" pitchFamily="34" charset="0"/>
+                <a:ea typeface="Calibri" pitchFamily="34" charset="-122"/>
+                <a:cs typeface="Calibri" pitchFamily="34" charset="-120"/>
+              </a:rPr>
+              <a:t>Step 3 robustness check · Q2</a:t>
+            </a:r>
+            <a:endParaRPr lang="en-US" sz="950" dirty="0"/>
+          </a:p>
+        </p:txBody>
+      </p:sp>
+      <p:sp>
+        <p:nvSpPr>
+          <p:cNvPr id="5" name="Text 3"/>
+          <p:cNvSpPr/>
+          <p:nvPr/>
+        </p:nvSpPr>
+        <p:spPr>
+          <a:xfrm>
+            <a:off x="548640" y="1005840"/>
+            <a:ext cx="10972800" cy="365760"/>
+          </a:xfrm>
+          <a:prstGeom prst="rect">
+            <a:avLst/>
+          </a:prstGeom>
+          <a:noFill/>
+          <a:ln/>
+        </p:spPr>
+        <p:txBody>
+          <a:bodyPr wrap="square" rtlCol="0" anchor="ctr"/>
+          <a:lstStyle/>
+          <a:p>
+            <a:pPr indent="0" marL="0">
+              <a:buNone/>
+            </a:pPr>
+            <a:r>
+              <a:rPr lang="en-US" sz="1200" i="1" dirty="0">
+                <a:solidFill>
+                  <a:srgbClr val="5B6178"/>
+                </a:solidFill>
+                <a:latin typeface="Calibri" pitchFamily="34" charset="0"/>
+                <a:ea typeface="Calibri" pitchFamily="34" charset="-122"/>
+                <a:cs typeface="Calibri" pitchFamily="34" charset="-120"/>
+              </a:rPr>
+              <a:t>A stress-test scenario: a competing advertiser ramps up on the same venues at the same time, correlated with Atmosphere's own exposure — the kind of overlap a real MMM has to prove it's robust to.</a:t>
+            </a:r>
+            <a:endParaRPr lang="en-US" sz="1200" dirty="0"/>
+          </a:p>
+        </p:txBody>
+      </p:sp>
+      <p:graphicFrame>
+        <p:nvGraphicFramePr>
+          <p:cNvPr id="6" name="Chart 0" descr=""/>
+          <p:cNvGraphicFramePr/>
+          <p:nvPr/>
+        </p:nvGraphicFramePr>
+        <p:xfrm>
+          <a:off x="548640" y="1600200"/>
+          <a:ext cx="6949440" cy="3931920"/>
+        </p:xfrm>
+        <a:graphic xmlns:a="http://schemas.openxmlformats.org/drawingml/2006/main">
+          <a:graphicData uri="http://schemas.openxmlformats.org/drawingml/2006/chart">
+            <c:chart xmlns:c="http://schemas.openxmlformats.org/drawingml/2006/chart" r:id="rId1"/>
+          </a:graphicData>
+        </a:graphic>
+      </p:graphicFrame>
+      <p:sp>
+        <p:nvSpPr>
+          <p:cNvPr id="7" name="Shape 4"/>
+          <p:cNvSpPr/>
+          <p:nvPr/>
+        </p:nvSpPr>
+        <p:spPr>
+          <a:xfrm>
+            <a:off x="7772400" y="1600200"/>
+            <a:ext cx="3867912" cy="1234440"/>
+          </a:xfrm>
+          <a:prstGeom prst="roundRect">
+            <a:avLst>
+              <a:gd name="adj" fmla="val 5926"/>
+            </a:avLst>
+          </a:prstGeom>
+          <a:solidFill>
+            <a:srgbClr val="F5F7FC"/>
+          </a:solidFill>
+          <a:ln/>
+        </p:spPr>
+      </p:sp>
+      <p:sp>
+        <p:nvSpPr>
+          <p:cNvPr id="8" name="Text 5"/>
+          <p:cNvSpPr/>
+          <p:nvPr/>
+        </p:nvSpPr>
+        <p:spPr>
+          <a:xfrm>
+            <a:off x="7955280" y="1719072"/>
+            <a:ext cx="3520440" cy="365760"/>
+          </a:xfrm>
+          <a:prstGeom prst="rect">
+            <a:avLst/>
+          </a:prstGeom>
+          <a:noFill/>
+          <a:ln/>
+        </p:spPr>
+        <p:txBody>
+          <a:bodyPr wrap="square" rtlCol="0" anchor="ctr"/>
+          <a:lstStyle/>
+          <a:p>
+            <a:pPr indent="0" marL="0">
+              <a:buNone/>
+            </a:pPr>
+            <a:r>
+              <a:rPr lang="en-US" sz="1100" b="1" dirty="0">
+                <a:solidFill>
+                  <a:srgbClr val="1E2761"/>
+                </a:solidFill>
+                <a:latin typeface="Cambria" pitchFamily="34" charset="0"/>
+                <a:ea typeface="Cambria" pitchFamily="34" charset="-122"/>
+                <a:cs typeface="Cambria" pitchFamily="34" charset="-120"/>
+              </a:rPr>
+              <a:t>RCT estimate shift under the identical shock</a:t>
+            </a:r>
+            <a:endParaRPr lang="en-US" sz="1100" dirty="0"/>
+          </a:p>
+        </p:txBody>
+      </p:sp>
+      <p:sp>
+        <p:nvSpPr>
+          <p:cNvPr id="9" name="Text 6"/>
+          <p:cNvSpPr/>
+          <p:nvPr/>
+        </p:nvSpPr>
+        <p:spPr>
+          <a:xfrm>
+            <a:off x="7955280" y="2057400"/>
+            <a:ext cx="3520440" cy="594360"/>
+          </a:xfrm>
+          <a:prstGeom prst="rect">
+            <a:avLst/>
+          </a:prstGeom>
+          <a:noFill/>
+          <a:ln/>
+        </p:spPr>
+        <p:txBody>
+          <a:bodyPr wrap="square" rtlCol="0" anchor="ctr"/>
+          <a:lstStyle/>
+          <a:p>
+            <a:pPr indent="0" marL="0">
+              <a:buNone/>
+            </a:pPr>
+            <a:r>
+              <a:rPr lang="en-US" sz="3200" b="1" dirty="0">
+                <a:solidFill>
+                  <a:srgbClr val="2C7A57"/>
+                </a:solidFill>
+                <a:latin typeface="Calibri" pitchFamily="34" charset="0"/>
+                <a:ea typeface="Calibri" pitchFamily="34" charset="-122"/>
+                <a:cs typeface="Calibri" pitchFamily="34" charset="-120"/>
+              </a:rPr>
+              <a:t>0.00</a:t>
+            </a:r>
+            <a:endParaRPr lang="en-US" sz="3200" dirty="0"/>
+          </a:p>
+        </p:txBody>
+      </p:sp>
+      <p:sp>
+        <p:nvSpPr>
+          <p:cNvPr id="10" name="Text 7"/>
+          <p:cNvSpPr/>
+          <p:nvPr/>
+        </p:nvSpPr>
+        <p:spPr>
+          <a:xfrm>
+            <a:off x="7955280" y="2633472"/>
+            <a:ext cx="3520440" cy="182880"/>
+          </a:xfrm>
+          <a:prstGeom prst="rect">
+            <a:avLst/>
+          </a:prstGeom>
+          <a:noFill/>
+          <a:ln/>
+        </p:spPr>
+        <p:txBody>
+          <a:bodyPr wrap="square" rtlCol="0" anchor="ctr"/>
+          <a:lstStyle/>
+          <a:p>
+            <a:pPr indent="0" marL="0">
+              <a:lnSpc>
+                <a:spcPts val="1000"/>
+              </a:lnSpc>
+              <a:buNone/>
+            </a:pPr>
+            <a:r>
+              <a:rPr lang="en-US" sz="870" i="1" dirty="0">
+                <a:solidFill>
+                  <a:srgbClr val="5B6178"/>
+                </a:solidFill>
+                <a:latin typeface="Calibri" pitchFamily="34" charset="0"/>
+                <a:ea typeface="Calibri" pitchFamily="34" charset="-122"/>
+                <a:cs typeface="Calibri" pitchFamily="34" charset="-120"/>
+              </a:rPr>
+              <a:t>every venue type — the shock hits both arms equally, so a randomized comparison is mechanically immune to it</a:t>
+            </a:r>
+            <a:endParaRPr lang="en-US" sz="870" dirty="0"/>
+          </a:p>
+        </p:txBody>
+      </p:sp>
+      <p:sp>
+        <p:nvSpPr>
+          <p:cNvPr id="11" name="Text 8"/>
+          <p:cNvSpPr/>
+          <p:nvPr/>
+        </p:nvSpPr>
+        <p:spPr>
+          <a:xfrm>
+            <a:off x="7772400" y="3063240"/>
+            <a:ext cx="3867912" cy="1417320"/>
+          </a:xfrm>
+          <a:prstGeom prst="rect">
+            <a:avLst/>
+          </a:prstGeom>
+          <a:noFill/>
+          <a:ln/>
+        </p:spPr>
+        <p:txBody>
+          <a:bodyPr wrap="square" rtlCol="0" anchor="ctr"/>
+          <a:lstStyle/>
+          <a:p>
+            <a:pPr indent="0" marL="0">
+              <a:lnSpc>
+                <a:spcPts val="1350"/>
+              </a:lnSpc>
+              <a:buNone/>
+            </a:pPr>
+            <a:r>
+              <a:rPr lang="en-US" sz="1000" dirty="0">
+                <a:solidFill>
+                  <a:srgbClr val="1A1A2E"/>
+                </a:solidFill>
+                <a:latin typeface="Calibri" pitchFamily="34" charset="0"/>
+                <a:ea typeface="Calibri" pitchFamily="34" charset="-122"/>
+                <a:cs typeface="Calibri" pitchFamily="34" charset="-120"/>
+              </a:rPr>
+              <a:t>Naive MMM, by contrast, swings from useful to actively misleading: for 3 of 4 venue types the confound-blind fit was off by 2–4× — even at a moderate 0.35 correlation between competing media and Atmosphere's own exposure ramp, nowhere near a worst case. Controlling for the confound (green) recovers this model's own baseline from the previous slide — the RCT-scale calibration from that same slide is what closes the rest of the gap.</a:t>
+            </a:r>
+            <a:endParaRPr lang="en-US" sz="1000" dirty="0"/>
+          </a:p>
+        </p:txBody>
+      </p:sp>
+      <p:sp>
+        <p:nvSpPr>
+          <p:cNvPr id="12" name="Shape 9"/>
+          <p:cNvSpPr/>
+          <p:nvPr/>
+        </p:nvSpPr>
+        <p:spPr>
+          <a:xfrm>
+            <a:off x="548640" y="5687568"/>
+            <a:ext cx="11091672" cy="713232"/>
+          </a:xfrm>
+          <a:prstGeom prst="roundRect">
+            <a:avLst>
+              <a:gd name="adj" fmla="val 7692"/>
+            </a:avLst>
+          </a:prstGeom>
+          <a:solidFill>
+            <a:srgbClr val="FDF1E3"/>
+          </a:solidFill>
+          <a:ln/>
+        </p:spPr>
+      </p:sp>
+      <p:sp>
+        <p:nvSpPr>
+          <p:cNvPr id="13" name="Text 10"/>
+          <p:cNvSpPr/>
+          <p:nvPr/>
+        </p:nvSpPr>
+        <p:spPr>
+          <a:xfrm>
+            <a:off x="731520" y="5779008"/>
+            <a:ext cx="10744200" cy="548640"/>
+          </a:xfrm>
+          <a:prstGeom prst="rect">
+            <a:avLst/>
+          </a:prstGeom>
+          <a:noFill/>
+          <a:ln/>
+        </p:spPr>
+        <p:txBody>
+          <a:bodyPr wrap="square" rtlCol="0" anchor="ctr"/>
+          <a:lstStyle/>
+          <a:p>
+            <a:pPr indent="0" marL="0">
+              <a:lnSpc>
+                <a:spcPts val="1200"/>
+              </a:lnSpc>
+              <a:buNone/>
+            </a:pPr>
+            <a:r>
+              <a:rPr lang="en-US" sz="950" i="1" dirty="0">
+                <a:solidFill>
+                  <a:srgbClr val="8A4B0A"/>
+                </a:solidFill>
+                <a:latin typeface="Calibri" pitchFamily="34" charset="0"/>
+                <a:ea typeface="Calibri" pitchFamily="34" charset="-122"/>
+                <a:cs typeface="Calibri" pitchFamily="34" charset="-120"/>
+              </a:rPr>
+              <a:t>Why this is scoped this way: deciding how an advertiser splits budget across Atmosphere + TV + social is the advertiser's/agency's call — Atmosphere has no visibility into competitors' channel data anyway. What Atmosphere's DS role should own is netting competing media OUT of its own causal read (the JD's own phrasing), which the RCT does by design and a single-channel MMM only does with an explicit control.</a:t>
+            </a:r>
+            <a:endParaRPr lang="en-US" sz="950" dirty="0"/>
+          </a:p>
+        </p:txBody>
+      </p:sp>
+      <p:sp>
+        <p:nvSpPr>
+          <p:cNvPr id="14" name="Text 11"/>
+          <p:cNvSpPr/>
+          <p:nvPr/>
+        </p:nvSpPr>
+        <p:spPr>
+          <a:xfrm>
+            <a:off x="457200" y="6537960"/>
+            <a:ext cx="7315200" cy="274320"/>
+          </a:xfrm>
+          <a:prstGeom prst="rect">
+            <a:avLst/>
+          </a:prstGeom>
+          <a:noFill/>
+          <a:ln/>
+        </p:spPr>
+        <p:txBody>
+          <a:bodyPr wrap="square" rtlCol="0" anchor="ctr"/>
+          <a:lstStyle/>
+          <a:p>
+            <a:pPr indent="0" marL="0">
+              <a:buNone/>
+            </a:pPr>
+            <a:r>
+              <a:rPr lang="en-US" sz="900" dirty="0">
+                <a:solidFill>
+                  <a:srgbClr val="5B6178"/>
+                </a:solidFill>
+                <a:latin typeface="Calibri" pitchFamily="34" charset="0"/>
+                <a:ea typeface="Calibri" pitchFamily="34" charset="-122"/>
+                <a:cs typeface="Calibri" pitchFamily="34" charset="-120"/>
+              </a:rPr>
+              <a:t>Media-mix model — robustness</a:t>
+            </a:r>
+            <a:endParaRPr lang="en-US" sz="900" dirty="0"/>
+          </a:p>
+        </p:txBody>
+      </p:sp>
+    </p:spTree>
+  </p:cSld>
+  <p:clrMapOvr>
+    <a:masterClrMapping/>
+  </p:clrMapOvr>
+</p:sld>
+</file>
+
+<file path=ppt/slides/slide12.xml><?xml version="1.0" encoding="utf-8"?>
+<p:sld xmlns:a="http://schemas.openxmlformats.org/drawingml/2006/main" xmlns:r="http://schemas.openxmlformats.org/officeDocument/2006/relationships" xmlns:p="http://schemas.openxmlformats.org/presentationml/2006/main">
+  <p:cSld name="Slide 12">
+    <p:bg>
+      <p:bgPr>
+        <a:solidFill>
+          <a:srgbClr val="FFFFFF"/>
+        </a:solidFill>
+      </p:bgPr>
+    </p:bg>
+    <p:spTree>
+      <p:nvGrpSpPr>
+        <p:cNvPr id="1" name=""/>
+        <p:cNvGrpSpPr/>
+        <p:nvPr/>
+      </p:nvGrpSpPr>
+      <p:grpSpPr>
+        <a:xfrm>
+          <a:off x="0" y="0"/>
+          <a:ext cx="0" cy="0"/>
+          <a:chOff x="0" y="0"/>
+          <a:chExt cx="0" cy="0"/>
+        </a:xfrm>
+      </p:grpSpPr>
+      <p:sp>
+        <p:nvSpPr>
+          <p:cNvPr id="2" name="Text 0"/>
+          <p:cNvSpPr/>
+          <p:nvPr/>
+        </p:nvSpPr>
+        <p:spPr>
+          <a:xfrm>
+            <a:off x="548640" y="411480"/>
             <a:ext cx="10972800" cy="594360"/>
           </a:xfrm>
           <a:prstGeom prst="rect">
@@ -5803,9 +6338,9 @@
 </p:sld>
 </file>
 
-<file path=ppt/slides/slide12.xml><?xml version="1.0" encoding="utf-8"?>
+<file path=ppt/slides/slide13.xml><?xml version="1.0" encoding="utf-8"?>
 <p:sld xmlns:a="http://schemas.openxmlformats.org/drawingml/2006/main" xmlns:r="http://schemas.openxmlformats.org/officeDocument/2006/relationships" xmlns:p="http://schemas.openxmlformats.org/presentationml/2006/main">
-  <p:cSld name="Slide 12">
+  <p:cSld name="Slide 13">
     <p:bg>
       <p:bgPr>
         <a:solidFill>
@@ -6507,1381 +7042,6 @@
               <a:t>“Smarter on both sides of the business” — the venue-side model shares its data foundation and causal-value input with the advertising side, rather than being a disconnected second project. Results on the next slide.</a:t>
             </a:r>
             <a:endParaRPr lang="en-US" sz="1150" dirty="0"/>
-          </a:p>
-        </p:txBody>
-      </p:sp>
-    </p:spTree>
-  </p:cSld>
-  <p:clrMapOvr>
-    <a:masterClrMapping/>
-  </p:clrMapOvr>
-</p:sld>
-</file>
-
-<file path=ppt/slides/slide13.xml><?xml version="1.0" encoding="utf-8"?>
-<p:sld xmlns:a="http://schemas.openxmlformats.org/drawingml/2006/main" xmlns:r="http://schemas.openxmlformats.org/officeDocument/2006/relationships" xmlns:p="http://schemas.openxmlformats.org/presentationml/2006/main">
-  <p:cSld name="Slide 13">
-    <p:bg>
-      <p:bgPr>
-        <a:solidFill>
-          <a:srgbClr val="FFFFFF"/>
-        </a:solidFill>
-      </p:bgPr>
-    </p:bg>
-    <p:spTree>
-      <p:nvGrpSpPr>
-        <p:cNvPr id="1" name=""/>
-        <p:cNvGrpSpPr/>
-        <p:nvPr/>
-      </p:nvGrpSpPr>
-      <p:grpSpPr>
-        <a:xfrm>
-          <a:off x="0" y="0"/>
-          <a:ext cx="0" cy="0"/>
-          <a:chOff x="0" y="0"/>
-          <a:chExt cx="0" cy="0"/>
-        </a:xfrm>
-      </p:grpSpPr>
-      <p:sp>
-        <p:nvSpPr>
-          <p:cNvPr id="2" name="Text 0"/>
-          <p:cNvSpPr/>
-          <p:nvPr/>
-        </p:nvSpPr>
-        <p:spPr>
-          <a:xfrm>
-            <a:off x="548640" y="411480"/>
-            <a:ext cx="11155680" cy="594360"/>
-          </a:xfrm>
-          <a:prstGeom prst="rect">
-            <a:avLst/>
-          </a:prstGeom>
-          <a:noFill/>
-          <a:ln/>
-        </p:spPr>
-        <p:txBody>
-          <a:bodyPr wrap="square" rtlCol="0" anchor="ctr"/>
-          <a:lstStyle/>
-          <a:p>
-            <a:pPr indent="0" marL="0">
-              <a:buNone/>
-            </a:pPr>
-            <a:r>
-              <a:rPr lang="en-US" sz="2500" b="1" dirty="0">
-                <a:solidFill>
-                  <a:srgbClr val="1E2761"/>
-                </a:solidFill>
-                <a:latin typeface="Cambria" pitchFamily="34" charset="0"/>
-                <a:ea typeface="Cambria" pitchFamily="34" charset="-122"/>
-                <a:cs typeface="Cambria" pitchFamily="34" charset="-120"/>
-              </a:rPr>
-              <a:t>Predicting venue ad-revenue, honestly</a:t>
-            </a:r>
-            <a:endParaRPr lang="en-US" sz="2500" dirty="0"/>
-          </a:p>
-        </p:txBody>
-      </p:sp>
-      <p:sp>
-        <p:nvSpPr>
-          <p:cNvPr id="3" name="Shape 1"/>
-          <p:cNvSpPr/>
-          <p:nvPr/>
-        </p:nvSpPr>
-        <p:spPr>
-          <a:xfrm>
-            <a:off x="8229600" y="146304"/>
-            <a:ext cx="3410712" cy="246888"/>
-          </a:xfrm>
-          <a:prstGeom prst="roundRect">
-            <a:avLst>
-              <a:gd name="adj" fmla="val 22222"/>
-            </a:avLst>
-          </a:prstGeom>
-          <a:solidFill>
-            <a:srgbClr val="FFFFFF"/>
-          </a:solidFill>
-          <a:ln w="15875">
-            <a:solidFill>
-              <a:srgbClr val="2C7A57"/>
-            </a:solidFill>
-            <a:prstDash val="solid"/>
-          </a:ln>
-        </p:spPr>
-      </p:sp>
-      <p:sp>
-        <p:nvSpPr>
-          <p:cNvPr id="4" name="Text 2"/>
-          <p:cNvSpPr/>
-          <p:nvPr/>
-        </p:nvSpPr>
-        <p:spPr>
-          <a:xfrm>
-            <a:off x="8229600" y="146304"/>
-            <a:ext cx="3410712" cy="246888"/>
-          </a:xfrm>
-          <a:prstGeom prst="rect">
-            <a:avLst/>
-          </a:prstGeom>
-          <a:noFill/>
-          <a:ln/>
-        </p:spPr>
-        <p:txBody>
-          <a:bodyPr wrap="square" rtlCol="0" anchor="ctr"/>
-          <a:lstStyle/>
-          <a:p>
-            <a:pPr algn="ctr" indent="0" marL="0">
-              <a:buNone/>
-            </a:pPr>
-            <a:r>
-              <a:rPr lang="en-US" sz="950" b="1" dirty="0">
-                <a:solidFill>
-                  <a:srgbClr val="2C7A57"/>
-                </a:solidFill>
-                <a:latin typeface="Calibri" pitchFamily="34" charset="0"/>
-                <a:ea typeface="Calibri" pitchFamily="34" charset="-122"/>
-                <a:cs typeface="Calibri" pitchFamily="34" charset="-120"/>
-              </a:rPr>
-              <a:t>Step 5 of 6 · Answers Q3</a:t>
-            </a:r>
-            <a:endParaRPr lang="en-US" sz="950" dirty="0"/>
-          </a:p>
-        </p:txBody>
-      </p:sp>
-      <p:sp>
-        <p:nvSpPr>
-          <p:cNvPr id="5" name="Text 3"/>
-          <p:cNvSpPr/>
-          <p:nvPr/>
-        </p:nvSpPr>
-        <p:spPr>
-          <a:xfrm>
-            <a:off x="548640" y="1005840"/>
-            <a:ext cx="10972800" cy="365760"/>
-          </a:xfrm>
-          <a:prstGeom prst="rect">
-            <a:avLst/>
-          </a:prstGeom>
-          <a:noFill/>
-          <a:ln/>
-        </p:spPr>
-        <p:txBody>
-          <a:bodyPr wrap="square" rtlCol="0" anchor="ctr"/>
-          <a:lstStyle/>
-          <a:p>
-            <a:pPr indent="0" marL="0">
-              <a:buNone/>
-            </a:pPr>
-            <a:r>
-              <a:rPr lang="en-US" sz="1250" i="1" dirty="0">
-                <a:solidFill>
-                  <a:srgbClr val="5B6178"/>
-                </a:solidFill>
-                <a:latin typeface="Calibri" pitchFamily="34" charset="0"/>
-                <a:ea typeface="Calibri" pitchFamily="34" charset="-122"/>
-                <a:cs typeface="Calibri" pitchFamily="34" charset="-120"/>
-              </a:rPr>
-              <a:t>Gradient-boosted trees on observable venue characteristics + the calibrated per-exposure lift as a feature.</a:t>
-            </a:r>
-            <a:endParaRPr lang="en-US" sz="1250" dirty="0"/>
-          </a:p>
-        </p:txBody>
-      </p:sp>
-      <p:sp>
-        <p:nvSpPr>
-          <p:cNvPr id="6" name="Shape 4"/>
-          <p:cNvSpPr/>
-          <p:nvPr/>
-        </p:nvSpPr>
-        <p:spPr>
-          <a:xfrm>
-            <a:off x="548640" y="1508760"/>
-            <a:ext cx="2651760" cy="1051560"/>
-          </a:xfrm>
-          <a:prstGeom prst="roundRect">
-            <a:avLst>
-              <a:gd name="adj" fmla="val 6957"/>
-            </a:avLst>
-          </a:prstGeom>
-          <a:solidFill>
-            <a:srgbClr val="F5F7FC"/>
-          </a:solidFill>
-          <a:ln/>
-        </p:spPr>
-      </p:sp>
-      <p:sp>
-        <p:nvSpPr>
-          <p:cNvPr id="7" name="Text 5"/>
-          <p:cNvSpPr/>
-          <p:nvPr/>
-        </p:nvSpPr>
-        <p:spPr>
-          <a:xfrm>
-            <a:off x="685800" y="1618488"/>
-            <a:ext cx="2377440" cy="502920"/>
-          </a:xfrm>
-          <a:prstGeom prst="rect">
-            <a:avLst/>
-          </a:prstGeom>
-          <a:noFill/>
-          <a:ln/>
-        </p:spPr>
-        <p:txBody>
-          <a:bodyPr wrap="square" rtlCol="0" anchor="ctr"/>
-          <a:lstStyle/>
-          <a:p>
-            <a:pPr indent="0" marL="0">
-              <a:buNone/>
-            </a:pPr>
-            <a:r>
-              <a:rPr lang="en-US" sz="2200" b="1" dirty="0">
-                <a:solidFill>
-                  <a:srgbClr val="1E2761"/>
-                </a:solidFill>
-                <a:latin typeface="Calibri" pitchFamily="34" charset="0"/>
-                <a:ea typeface="Calibri" pitchFamily="34" charset="-122"/>
-                <a:cs typeface="Calibri" pitchFamily="34" charset="-120"/>
-              </a:rPr>
-              <a:t>0.84</a:t>
-            </a:r>
-            <a:endParaRPr lang="en-US" sz="2200" dirty="0"/>
-          </a:p>
-        </p:txBody>
-      </p:sp>
-      <p:sp>
-        <p:nvSpPr>
-          <p:cNvPr id="8" name="Text 6"/>
-          <p:cNvSpPr/>
-          <p:nvPr/>
-        </p:nvSpPr>
-        <p:spPr>
-          <a:xfrm>
-            <a:off x="685800" y="2130552"/>
-            <a:ext cx="2377440" cy="365760"/>
-          </a:xfrm>
-          <a:prstGeom prst="rect">
-            <a:avLst/>
-          </a:prstGeom>
-          <a:noFill/>
-          <a:ln/>
-        </p:spPr>
-        <p:txBody>
-          <a:bodyPr wrap="square" rtlCol="0" anchor="ctr"/>
-          <a:lstStyle/>
-          <a:p>
-            <a:pPr indent="0" marL="0">
-              <a:buNone/>
-            </a:pPr>
-            <a:r>
-              <a:rPr lang="en-US" sz="950" dirty="0">
-                <a:solidFill>
-                  <a:srgbClr val="5B6178"/>
-                </a:solidFill>
-                <a:latin typeface="Calibri" pitchFamily="34" charset="0"/>
-                <a:ea typeface="Calibri" pitchFamily="34" charset="-122"/>
-                <a:cs typeface="Calibri" pitchFamily="34" charset="-120"/>
-              </a:rPr>
-              <a:t>Held-out R²</a:t>
-            </a:r>
-            <a:endParaRPr lang="en-US" sz="950" dirty="0"/>
-          </a:p>
-        </p:txBody>
-      </p:sp>
-      <p:sp>
-        <p:nvSpPr>
-          <p:cNvPr id="9" name="Shape 7"/>
-          <p:cNvSpPr/>
-          <p:nvPr/>
-        </p:nvSpPr>
-        <p:spPr>
-          <a:xfrm>
-            <a:off x="3337560" y="1508760"/>
-            <a:ext cx="2651760" cy="1051560"/>
-          </a:xfrm>
-          <a:prstGeom prst="roundRect">
-            <a:avLst>
-              <a:gd name="adj" fmla="val 6957"/>
-            </a:avLst>
-          </a:prstGeom>
-          <a:solidFill>
-            <a:srgbClr val="F5F7FC"/>
-          </a:solidFill>
-          <a:ln/>
-        </p:spPr>
-      </p:sp>
-      <p:sp>
-        <p:nvSpPr>
-          <p:cNvPr id="10" name="Text 8"/>
-          <p:cNvSpPr/>
-          <p:nvPr/>
-        </p:nvSpPr>
-        <p:spPr>
-          <a:xfrm>
-            <a:off x="3474720" y="1618488"/>
-            <a:ext cx="2377440" cy="502920"/>
-          </a:xfrm>
-          <a:prstGeom prst="rect">
-            <a:avLst/>
-          </a:prstGeom>
-          <a:noFill/>
-          <a:ln/>
-        </p:spPr>
-        <p:txBody>
-          <a:bodyPr wrap="square" rtlCol="0" anchor="ctr"/>
-          <a:lstStyle/>
-          <a:p>
-            <a:pPr indent="0" marL="0">
-              <a:buNone/>
-            </a:pPr>
-            <a:r>
-              <a:rPr lang="en-US" sz="2200" b="1" dirty="0">
-                <a:solidFill>
-                  <a:srgbClr val="1E2761"/>
-                </a:solidFill>
-                <a:latin typeface="Calibri" pitchFamily="34" charset="0"/>
-                <a:ea typeface="Calibri" pitchFamily="34" charset="-122"/>
-                <a:cs typeface="Calibri" pitchFamily="34" charset="-120"/>
-              </a:rPr>
-              <a:t>22.1%</a:t>
-            </a:r>
-            <a:endParaRPr lang="en-US" sz="2200" dirty="0"/>
-          </a:p>
-        </p:txBody>
-      </p:sp>
-      <p:sp>
-        <p:nvSpPr>
-          <p:cNvPr id="11" name="Text 9"/>
-          <p:cNvSpPr/>
-          <p:nvPr/>
-        </p:nvSpPr>
-        <p:spPr>
-          <a:xfrm>
-            <a:off x="3474720" y="2130552"/>
-            <a:ext cx="2377440" cy="365760"/>
-          </a:xfrm>
-          <a:prstGeom prst="rect">
-            <a:avLst/>
-          </a:prstGeom>
-          <a:noFill/>
-          <a:ln/>
-        </p:spPr>
-        <p:txBody>
-          <a:bodyPr wrap="square" rtlCol="0" anchor="ctr"/>
-          <a:lstStyle/>
-          <a:p>
-            <a:pPr indent="0" marL="0">
-              <a:buNone/>
-            </a:pPr>
-            <a:r>
-              <a:rPr lang="en-US" sz="950" dirty="0">
-                <a:solidFill>
-                  <a:srgbClr val="5B6178"/>
-                </a:solidFill>
-                <a:latin typeface="Calibri" pitchFamily="34" charset="0"/>
-                <a:ea typeface="Calibri" pitchFamily="34" charset="-122"/>
-                <a:cs typeface="Calibri" pitchFamily="34" charset="-120"/>
-              </a:rPr>
-              <a:t>Held-out MAPE</a:t>
-            </a:r>
-            <a:endParaRPr lang="en-US" sz="950" dirty="0"/>
-          </a:p>
-        </p:txBody>
-      </p:sp>
-      <p:sp>
-        <p:nvSpPr>
-          <p:cNvPr id="12" name="Shape 10"/>
-          <p:cNvSpPr/>
-          <p:nvPr/>
-        </p:nvSpPr>
-        <p:spPr>
-          <a:xfrm>
-            <a:off x="6126480" y="1508760"/>
-            <a:ext cx="2651760" cy="1051560"/>
-          </a:xfrm>
-          <a:prstGeom prst="roundRect">
-            <a:avLst>
-              <a:gd name="adj" fmla="val 6957"/>
-            </a:avLst>
-          </a:prstGeom>
-          <a:solidFill>
-            <a:srgbClr val="F5F7FC"/>
-          </a:solidFill>
-          <a:ln/>
-        </p:spPr>
-      </p:sp>
-      <p:sp>
-        <p:nvSpPr>
-          <p:cNvPr id="13" name="Text 11"/>
-          <p:cNvSpPr/>
-          <p:nvPr/>
-        </p:nvSpPr>
-        <p:spPr>
-          <a:xfrm>
-            <a:off x="6263640" y="1618488"/>
-            <a:ext cx="2377440" cy="502920"/>
-          </a:xfrm>
-          <a:prstGeom prst="rect">
-            <a:avLst/>
-          </a:prstGeom>
-          <a:noFill/>
-          <a:ln/>
-        </p:spPr>
-        <p:txBody>
-          <a:bodyPr wrap="square" rtlCol="0" anchor="ctr"/>
-          <a:lstStyle/>
-          <a:p>
-            <a:pPr indent="0" marL="0">
-              <a:buNone/>
-            </a:pPr>
-            <a:r>
-              <a:rPr lang="en-US" sz="2200" b="1" dirty="0">
-                <a:solidFill>
-                  <a:srgbClr val="1E2761"/>
-                </a:solidFill>
-                <a:latin typeface="Calibri" pitchFamily="34" charset="0"/>
-                <a:ea typeface="Calibri" pitchFamily="34" charset="-122"/>
-                <a:cs typeface="Calibri" pitchFamily="34" charset="-120"/>
-              </a:rPr>
-              <a:t>0.94</a:t>
-            </a:r>
-            <a:endParaRPr lang="en-US" sz="2200" dirty="0"/>
-          </a:p>
-        </p:txBody>
-      </p:sp>
-      <p:sp>
-        <p:nvSpPr>
-          <p:cNvPr id="14" name="Text 12"/>
-          <p:cNvSpPr/>
-          <p:nvPr/>
-        </p:nvSpPr>
-        <p:spPr>
-          <a:xfrm>
-            <a:off x="6263640" y="2130552"/>
-            <a:ext cx="2377440" cy="365760"/>
-          </a:xfrm>
-          <a:prstGeom prst="rect">
-            <a:avLst/>
-          </a:prstGeom>
-          <a:noFill/>
-          <a:ln/>
-        </p:spPr>
-        <p:txBody>
-          <a:bodyPr wrap="square" rtlCol="0" anchor="ctr"/>
-          <a:lstStyle/>
-          <a:p>
-            <a:pPr indent="0" marL="0">
-              <a:buNone/>
-            </a:pPr>
-            <a:r>
-              <a:rPr lang="en-US" sz="950" dirty="0">
-                <a:solidFill>
-                  <a:srgbClr val="5B6178"/>
-                </a:solidFill>
-                <a:latin typeface="Calibri" pitchFamily="34" charset="0"/>
-                <a:ea typeface="Calibri" pitchFamily="34" charset="-122"/>
-                <a:cs typeface="Calibri" pitchFamily="34" charset="-120"/>
-              </a:rPr>
-              <a:t>Corr. w/ latent true potential</a:t>
-            </a:r>
-            <a:endParaRPr lang="en-US" sz="950" dirty="0"/>
-          </a:p>
-        </p:txBody>
-      </p:sp>
-      <p:sp>
-        <p:nvSpPr>
-          <p:cNvPr id="15" name="Shape 13"/>
-          <p:cNvSpPr/>
-          <p:nvPr/>
-        </p:nvSpPr>
-        <p:spPr>
-          <a:xfrm>
-            <a:off x="8915400" y="1508760"/>
-            <a:ext cx="2651760" cy="1051560"/>
-          </a:xfrm>
-          <a:prstGeom prst="roundRect">
-            <a:avLst>
-              <a:gd name="adj" fmla="val 6957"/>
-            </a:avLst>
-          </a:prstGeom>
-          <a:solidFill>
-            <a:srgbClr val="F5F7FC"/>
-          </a:solidFill>
-          <a:ln/>
-        </p:spPr>
-      </p:sp>
-      <p:sp>
-        <p:nvSpPr>
-          <p:cNvPr id="16" name="Text 14"/>
-          <p:cNvSpPr/>
-          <p:nvPr/>
-        </p:nvSpPr>
-        <p:spPr>
-          <a:xfrm>
-            <a:off x="9052560" y="1618488"/>
-            <a:ext cx="2377440" cy="502920"/>
-          </a:xfrm>
-          <a:prstGeom prst="rect">
-            <a:avLst/>
-          </a:prstGeom>
-          <a:noFill/>
-          <a:ln/>
-        </p:spPr>
-        <p:txBody>
-          <a:bodyPr wrap="square" rtlCol="0" anchor="ctr"/>
-          <a:lstStyle/>
-          <a:p>
-            <a:pPr indent="0" marL="0">
-              <a:buNone/>
-            </a:pPr>
-            <a:r>
-              <a:rPr lang="en-US" sz="2200" b="1" dirty="0">
-                <a:solidFill>
-                  <a:srgbClr val="1E2761"/>
-                </a:solidFill>
-                <a:latin typeface="Calibri" pitchFamily="34" charset="0"/>
-                <a:ea typeface="Calibri" pitchFamily="34" charset="-122"/>
-                <a:cs typeface="Calibri" pitchFamily="34" charset="-120"/>
-              </a:rPr>
-              <a:t>90% vs 28%</a:t>
-            </a:r>
-            <a:endParaRPr lang="en-US" sz="2200" dirty="0"/>
-          </a:p>
-        </p:txBody>
-      </p:sp>
-      <p:sp>
-        <p:nvSpPr>
-          <p:cNvPr id="17" name="Text 15"/>
-          <p:cNvSpPr/>
-          <p:nvPr/>
-        </p:nvSpPr>
-        <p:spPr>
-          <a:xfrm>
-            <a:off x="9052560" y="2130552"/>
-            <a:ext cx="2377440" cy="365760"/>
-          </a:xfrm>
-          <a:prstGeom prst="rect">
-            <a:avLst/>
-          </a:prstGeom>
-          <a:noFill/>
-          <a:ln/>
-        </p:spPr>
-        <p:txBody>
-          <a:bodyPr wrap="square" rtlCol="0" anchor="ctr"/>
-          <a:lstStyle/>
-          <a:p>
-            <a:pPr indent="0" marL="0">
-              <a:buNone/>
-            </a:pPr>
-            <a:r>
-              <a:rPr lang="en-US" sz="950" dirty="0">
-                <a:solidFill>
-                  <a:srgbClr val="5B6178"/>
-                </a:solidFill>
-                <a:latin typeface="Calibri" pitchFamily="34" charset="0"/>
-                <a:ea typeface="Calibri" pitchFamily="34" charset="-122"/>
-                <a:cs typeface="Calibri" pitchFamily="34" charset="-120"/>
-              </a:rPr>
-              <a:t>Flagged-tail latent gap rate</a:t>
-            </a:r>
-            <a:endParaRPr lang="en-US" sz="950" dirty="0"/>
-          </a:p>
-        </p:txBody>
-      </p:sp>
-      <p:graphicFrame>
-        <p:nvGraphicFramePr>
-          <p:cNvPr id="18" name="Chart 0" descr=""/>
-          <p:cNvGraphicFramePr/>
-          <p:nvPr/>
-        </p:nvGraphicFramePr>
-        <p:xfrm>
-          <a:off x="548640" y="2880360"/>
-          <a:ext cx="5394960" cy="3246120"/>
-        </p:xfrm>
-        <a:graphic xmlns:a="http://schemas.openxmlformats.org/drawingml/2006/main">
-          <a:graphicData uri="http://schemas.openxmlformats.org/drawingml/2006/chart">
-            <c:chart xmlns:c="http://schemas.openxmlformats.org/drawingml/2006/chart" r:id="rId1"/>
-          </a:graphicData>
-        </a:graphic>
-      </p:graphicFrame>
-      <p:sp>
-        <p:nvSpPr>
-          <p:cNvPr id="19" name="Text 16"/>
-          <p:cNvSpPr/>
-          <p:nvPr/>
-        </p:nvSpPr>
-        <p:spPr>
-          <a:xfrm>
-            <a:off x="6263640" y="2880360"/>
-            <a:ext cx="5394960" cy="274320"/>
-          </a:xfrm>
-          <a:prstGeom prst="rect">
-            <a:avLst/>
-          </a:prstGeom>
-          <a:noFill/>
-          <a:ln/>
-        </p:spPr>
-        <p:txBody>
-          <a:bodyPr wrap="square" rtlCol="0" anchor="ctr"/>
-          <a:lstStyle/>
-          <a:p>
-            <a:pPr indent="0" marL="0">
-              <a:buNone/>
-            </a:pPr>
-            <a:r>
-              <a:rPr lang="en-US" sz="1200" b="1" dirty="0">
-                <a:solidFill>
-                  <a:srgbClr val="1E2761"/>
-                </a:solidFill>
-                <a:latin typeface="Cambria" pitchFamily="34" charset="0"/>
-                <a:ea typeface="Cambria" pitchFamily="34" charset="-122"/>
-                <a:cs typeface="Cambria" pitchFamily="34" charset="-120"/>
-              </a:rPr>
-              <a:t>Top under-monetized venues (of 20 flagged)</a:t>
-            </a:r>
-            <a:endParaRPr lang="en-US" sz="1200" dirty="0"/>
-          </a:p>
-        </p:txBody>
-      </p:sp>
-      <p:sp>
-        <p:nvSpPr>
-          <p:cNvPr id="20" name="Text 17"/>
-          <p:cNvSpPr/>
-          <p:nvPr/>
-        </p:nvSpPr>
-        <p:spPr>
-          <a:xfrm>
-            <a:off x="6263640" y="3209544"/>
-            <a:ext cx="3657600" cy="274320"/>
-          </a:xfrm>
-          <a:prstGeom prst="rect">
-            <a:avLst/>
-          </a:prstGeom>
-          <a:noFill/>
-          <a:ln/>
-        </p:spPr>
-        <p:txBody>
-          <a:bodyPr wrap="square" rtlCol="0" anchor="ctr"/>
-          <a:lstStyle/>
-          <a:p>
-            <a:pPr indent="0" marL="0">
-              <a:buNone/>
-            </a:pPr>
-            <a:r>
-              <a:rPr lang="en-US" sz="1000" dirty="0">
-                <a:solidFill>
-                  <a:srgbClr val="1A1A2E"/>
-                </a:solidFill>
-                <a:latin typeface="Calibri" pitchFamily="34" charset="0"/>
-                <a:ea typeface="Calibri" pitchFamily="34" charset="-122"/>
-                <a:cs typeface="Calibri" pitchFamily="34" charset="-120"/>
-              </a:rPr>
-              <a:t>Venue #85 (Restaurants)</a:t>
-            </a:r>
-            <a:endParaRPr lang="en-US" sz="1000" dirty="0"/>
-          </a:p>
-        </p:txBody>
-      </p:sp>
-      <p:sp>
-        <p:nvSpPr>
-          <p:cNvPr id="21" name="Text 18"/>
-          <p:cNvSpPr/>
-          <p:nvPr/>
-        </p:nvSpPr>
-        <p:spPr>
-          <a:xfrm>
-            <a:off x="9966960" y="3209544"/>
-            <a:ext cx="1691640" cy="274320"/>
-          </a:xfrm>
-          <a:prstGeom prst="rect">
-            <a:avLst/>
-          </a:prstGeom>
-          <a:noFill/>
-          <a:ln/>
-        </p:spPr>
-        <p:txBody>
-          <a:bodyPr wrap="square" rtlCol="0" anchor="ctr"/>
-          <a:lstStyle/>
-          <a:p>
-            <a:pPr algn="r" indent="0" marL="0">
-              <a:buNone/>
-            </a:pPr>
-            <a:r>
-              <a:rPr lang="en-US" sz="1000" b="1" dirty="0">
-                <a:solidFill>
-                  <a:srgbClr val="B8500A"/>
-                </a:solidFill>
-                <a:latin typeface="Calibri" pitchFamily="34" charset="0"/>
-                <a:ea typeface="Calibri" pitchFamily="34" charset="-122"/>
-                <a:cs typeface="Calibri" pitchFamily="34" charset="-120"/>
-              </a:rPr>
-              <a:t>-62%</a:t>
-            </a:r>
-            <a:endParaRPr lang="en-US" sz="1000" dirty="0"/>
-          </a:p>
-        </p:txBody>
-      </p:sp>
-      <p:sp>
-        <p:nvSpPr>
-          <p:cNvPr id="22" name="Text 19"/>
-          <p:cNvSpPr/>
-          <p:nvPr/>
-        </p:nvSpPr>
-        <p:spPr>
-          <a:xfrm>
-            <a:off x="6263640" y="3502152"/>
-            <a:ext cx="3657600" cy="274320"/>
-          </a:xfrm>
-          <a:prstGeom prst="rect">
-            <a:avLst/>
-          </a:prstGeom>
-          <a:noFill/>
-          <a:ln/>
-        </p:spPr>
-        <p:txBody>
-          <a:bodyPr wrap="square" rtlCol="0" anchor="ctr"/>
-          <a:lstStyle/>
-          <a:p>
-            <a:pPr indent="0" marL="0">
-              <a:buNone/>
-            </a:pPr>
-            <a:r>
-              <a:rPr lang="en-US" sz="1000" dirty="0">
-                <a:solidFill>
-                  <a:srgbClr val="1A1A2E"/>
-                </a:solidFill>
-                <a:latin typeface="Calibri" pitchFamily="34" charset="0"/>
-                <a:ea typeface="Calibri" pitchFamily="34" charset="-122"/>
-                <a:cs typeface="Calibri" pitchFamily="34" charset="-120"/>
-              </a:rPr>
-              <a:t>Venue #309 (Waiting Rooms)</a:t>
-            </a:r>
-            <a:endParaRPr lang="en-US" sz="1000" dirty="0"/>
-          </a:p>
-        </p:txBody>
-      </p:sp>
-      <p:sp>
-        <p:nvSpPr>
-          <p:cNvPr id="23" name="Text 20"/>
-          <p:cNvSpPr/>
-          <p:nvPr/>
-        </p:nvSpPr>
-        <p:spPr>
-          <a:xfrm>
-            <a:off x="9966960" y="3502152"/>
-            <a:ext cx="1691640" cy="274320"/>
-          </a:xfrm>
-          <a:prstGeom prst="rect">
-            <a:avLst/>
-          </a:prstGeom>
-          <a:noFill/>
-          <a:ln/>
-        </p:spPr>
-        <p:txBody>
-          <a:bodyPr wrap="square" rtlCol="0" anchor="ctr"/>
-          <a:lstStyle/>
-          <a:p>
-            <a:pPr algn="r" indent="0" marL="0">
-              <a:buNone/>
-            </a:pPr>
-            <a:r>
-              <a:rPr lang="en-US" sz="1000" b="1" dirty="0">
-                <a:solidFill>
-                  <a:srgbClr val="B8500A"/>
-                </a:solidFill>
-                <a:latin typeface="Calibri" pitchFamily="34" charset="0"/>
-                <a:ea typeface="Calibri" pitchFamily="34" charset="-122"/>
-                <a:cs typeface="Calibri" pitchFamily="34" charset="-120"/>
-              </a:rPr>
-              <a:t>-61%</a:t>
-            </a:r>
-            <a:endParaRPr lang="en-US" sz="1000" dirty="0"/>
-          </a:p>
-        </p:txBody>
-      </p:sp>
-      <p:sp>
-        <p:nvSpPr>
-          <p:cNvPr id="24" name="Text 21"/>
-          <p:cNvSpPr/>
-          <p:nvPr/>
-        </p:nvSpPr>
-        <p:spPr>
-          <a:xfrm>
-            <a:off x="6263640" y="3794760"/>
-            <a:ext cx="3657600" cy="274320"/>
-          </a:xfrm>
-          <a:prstGeom prst="rect">
-            <a:avLst/>
-          </a:prstGeom>
-          <a:noFill/>
-          <a:ln/>
-        </p:spPr>
-        <p:txBody>
-          <a:bodyPr wrap="square" rtlCol="0" anchor="ctr"/>
-          <a:lstStyle/>
-          <a:p>
-            <a:pPr indent="0" marL="0">
-              <a:buNone/>
-            </a:pPr>
-            <a:r>
-              <a:rPr lang="en-US" sz="1000" dirty="0">
-                <a:solidFill>
-                  <a:srgbClr val="1A1A2E"/>
-                </a:solidFill>
-                <a:latin typeface="Calibri" pitchFamily="34" charset="0"/>
-                <a:ea typeface="Calibri" pitchFamily="34" charset="-122"/>
-                <a:cs typeface="Calibri" pitchFamily="34" charset="-120"/>
-              </a:rPr>
-              <a:t>Venue #53 (Restaurants)</a:t>
-            </a:r>
-            <a:endParaRPr lang="en-US" sz="1000" dirty="0"/>
-          </a:p>
-        </p:txBody>
-      </p:sp>
-      <p:sp>
-        <p:nvSpPr>
-          <p:cNvPr id="25" name="Text 22"/>
-          <p:cNvSpPr/>
-          <p:nvPr/>
-        </p:nvSpPr>
-        <p:spPr>
-          <a:xfrm>
-            <a:off x="9966960" y="3794760"/>
-            <a:ext cx="1691640" cy="274320"/>
-          </a:xfrm>
-          <a:prstGeom prst="rect">
-            <a:avLst/>
-          </a:prstGeom>
-          <a:noFill/>
-          <a:ln/>
-        </p:spPr>
-        <p:txBody>
-          <a:bodyPr wrap="square" rtlCol="0" anchor="ctr"/>
-          <a:lstStyle/>
-          <a:p>
-            <a:pPr algn="r" indent="0" marL="0">
-              <a:buNone/>
-            </a:pPr>
-            <a:r>
-              <a:rPr lang="en-US" sz="1000" b="1" dirty="0">
-                <a:solidFill>
-                  <a:srgbClr val="B8500A"/>
-                </a:solidFill>
-                <a:latin typeface="Calibri" pitchFamily="34" charset="0"/>
-                <a:ea typeface="Calibri" pitchFamily="34" charset="-122"/>
-                <a:cs typeface="Calibri" pitchFamily="34" charset="-120"/>
-              </a:rPr>
-              <a:t>-61%</a:t>
-            </a:r>
-            <a:endParaRPr lang="en-US" sz="1000" dirty="0"/>
-          </a:p>
-        </p:txBody>
-      </p:sp>
-      <p:sp>
-        <p:nvSpPr>
-          <p:cNvPr id="26" name="Text 23"/>
-          <p:cNvSpPr/>
-          <p:nvPr/>
-        </p:nvSpPr>
-        <p:spPr>
-          <a:xfrm>
-            <a:off x="6263640" y="4087368"/>
-            <a:ext cx="3657600" cy="274320"/>
-          </a:xfrm>
-          <a:prstGeom prst="rect">
-            <a:avLst/>
-          </a:prstGeom>
-          <a:noFill/>
-          <a:ln/>
-        </p:spPr>
-        <p:txBody>
-          <a:bodyPr wrap="square" rtlCol="0" anchor="ctr"/>
-          <a:lstStyle/>
-          <a:p>
-            <a:pPr indent="0" marL="0">
-              <a:buNone/>
-            </a:pPr>
-            <a:r>
-              <a:rPr lang="en-US" sz="1000" dirty="0">
-                <a:solidFill>
-                  <a:srgbClr val="1A1A2E"/>
-                </a:solidFill>
-                <a:latin typeface="Calibri" pitchFamily="34" charset="0"/>
-                <a:ea typeface="Calibri" pitchFamily="34" charset="-122"/>
-                <a:cs typeface="Calibri" pitchFamily="34" charset="-120"/>
-              </a:rPr>
-              <a:t>Venue #247 (Bars)</a:t>
-            </a:r>
-            <a:endParaRPr lang="en-US" sz="1000" dirty="0"/>
-          </a:p>
-        </p:txBody>
-      </p:sp>
-      <p:sp>
-        <p:nvSpPr>
-          <p:cNvPr id="27" name="Text 24"/>
-          <p:cNvSpPr/>
-          <p:nvPr/>
-        </p:nvSpPr>
-        <p:spPr>
-          <a:xfrm>
-            <a:off x="9966960" y="4087368"/>
-            <a:ext cx="1691640" cy="274320"/>
-          </a:xfrm>
-          <a:prstGeom prst="rect">
-            <a:avLst/>
-          </a:prstGeom>
-          <a:noFill/>
-          <a:ln/>
-        </p:spPr>
-        <p:txBody>
-          <a:bodyPr wrap="square" rtlCol="0" anchor="ctr"/>
-          <a:lstStyle/>
-          <a:p>
-            <a:pPr algn="r" indent="0" marL="0">
-              <a:buNone/>
-            </a:pPr>
-            <a:r>
-              <a:rPr lang="en-US" sz="1000" b="1" dirty="0">
-                <a:solidFill>
-                  <a:srgbClr val="B8500A"/>
-                </a:solidFill>
-                <a:latin typeface="Calibri" pitchFamily="34" charset="0"/>
-                <a:ea typeface="Calibri" pitchFamily="34" charset="-122"/>
-                <a:cs typeface="Calibri" pitchFamily="34" charset="-120"/>
-              </a:rPr>
-              <a:t>-60%</a:t>
-            </a:r>
-            <a:endParaRPr lang="en-US" sz="1000" dirty="0"/>
-          </a:p>
-        </p:txBody>
-      </p:sp>
-      <p:sp>
-        <p:nvSpPr>
-          <p:cNvPr id="28" name="Text 25"/>
-          <p:cNvSpPr/>
-          <p:nvPr/>
-        </p:nvSpPr>
-        <p:spPr>
-          <a:xfrm>
-            <a:off x="6263640" y="4562856"/>
-            <a:ext cx="5394960" cy="274320"/>
-          </a:xfrm>
-          <a:prstGeom prst="rect">
-            <a:avLst/>
-          </a:prstGeom>
-          <a:noFill/>
-          <a:ln/>
-        </p:spPr>
-        <p:txBody>
-          <a:bodyPr wrap="square" rtlCol="0" anchor="ctr"/>
-          <a:lstStyle/>
-          <a:p>
-            <a:pPr indent="0" marL="0">
-              <a:buNone/>
-            </a:pPr>
-            <a:r>
-              <a:rPr lang="en-US" sz="1200" b="1" dirty="0">
-                <a:solidFill>
-                  <a:srgbClr val="1E2761"/>
-                </a:solidFill>
-                <a:latin typeface="Cambria" pitchFamily="34" charset="0"/>
-                <a:ea typeface="Cambria" pitchFamily="34" charset="-122"/>
-                <a:cs typeface="Cambria" pitchFamily="34" charset="-120"/>
-              </a:rPr>
-              <a:t>Top prospect venues (expansion priority)</a:t>
-            </a:r>
-            <a:endParaRPr lang="en-US" sz="1200" dirty="0"/>
-          </a:p>
-        </p:txBody>
-      </p:sp>
-      <p:sp>
-        <p:nvSpPr>
-          <p:cNvPr id="29" name="Text 26"/>
-          <p:cNvSpPr/>
-          <p:nvPr/>
-        </p:nvSpPr>
-        <p:spPr>
-          <a:xfrm>
-            <a:off x="6263640" y="4892040"/>
-            <a:ext cx="4023360" cy="274320"/>
-          </a:xfrm>
-          <a:prstGeom prst="rect">
-            <a:avLst/>
-          </a:prstGeom>
-          <a:noFill/>
-          <a:ln/>
-        </p:spPr>
-        <p:txBody>
-          <a:bodyPr wrap="square" rtlCol="0" anchor="ctr"/>
-          <a:lstStyle/>
-          <a:p>
-            <a:pPr indent="0" marL="0">
-              <a:buNone/>
-            </a:pPr>
-            <a:r>
-              <a:rPr lang="en-US" sz="1000" dirty="0">
-                <a:solidFill>
-                  <a:srgbClr val="1A1A2E"/>
-                </a:solidFill>
-                <a:latin typeface="Calibri" pitchFamily="34" charset="0"/>
-                <a:ea typeface="Calibri" pitchFamily="34" charset="-122"/>
-                <a:cs typeface="Calibri" pitchFamily="34" charset="-120"/>
-              </a:rPr>
-              <a:t>P0018 — Bars (existing market)</a:t>
-            </a:r>
-            <a:endParaRPr lang="en-US" sz="1000" dirty="0"/>
-          </a:p>
-        </p:txBody>
-      </p:sp>
-      <p:sp>
-        <p:nvSpPr>
-          <p:cNvPr id="30" name="Text 27"/>
-          <p:cNvSpPr/>
-          <p:nvPr/>
-        </p:nvSpPr>
-        <p:spPr>
-          <a:xfrm>
-            <a:off x="10195560" y="4892040"/>
-            <a:ext cx="1463040" cy="274320"/>
-          </a:xfrm>
-          <a:prstGeom prst="rect">
-            <a:avLst/>
-          </a:prstGeom>
-          <a:noFill/>
-          <a:ln/>
-        </p:spPr>
-        <p:txBody>
-          <a:bodyPr wrap="square" rtlCol="0" anchor="ctr"/>
-          <a:lstStyle/>
-          <a:p>
-            <a:pPr algn="r" indent="0" marL="0">
-              <a:buNone/>
-            </a:pPr>
-            <a:r>
-              <a:rPr lang="en-US" sz="1000" b="1" dirty="0">
-                <a:solidFill>
-                  <a:srgbClr val="2C7A57"/>
-                </a:solidFill>
-                <a:latin typeface="Calibri" pitchFamily="34" charset="0"/>
-                <a:ea typeface="Calibri" pitchFamily="34" charset="-122"/>
-                <a:cs typeface="Calibri" pitchFamily="34" charset="-120"/>
-              </a:rPr>
-              <a:t>$684</a:t>
-            </a:r>
-            <a:endParaRPr lang="en-US" sz="1000" dirty="0"/>
-          </a:p>
-        </p:txBody>
-      </p:sp>
-      <p:sp>
-        <p:nvSpPr>
-          <p:cNvPr id="31" name="Text 28"/>
-          <p:cNvSpPr/>
-          <p:nvPr/>
-        </p:nvSpPr>
-        <p:spPr>
-          <a:xfrm>
-            <a:off x="6263640" y="5184648"/>
-            <a:ext cx="4023360" cy="274320"/>
-          </a:xfrm>
-          <a:prstGeom prst="rect">
-            <a:avLst/>
-          </a:prstGeom>
-          <a:noFill/>
-          <a:ln/>
-        </p:spPr>
-        <p:txBody>
-          <a:bodyPr wrap="square" rtlCol="0" anchor="ctr"/>
-          <a:lstStyle/>
-          <a:p>
-            <a:pPr indent="0" marL="0">
-              <a:buNone/>
-            </a:pPr>
-            <a:r>
-              <a:rPr lang="en-US" sz="1000" dirty="0">
-                <a:solidFill>
-                  <a:srgbClr val="1A1A2E"/>
-                </a:solidFill>
-                <a:latin typeface="Calibri" pitchFamily="34" charset="0"/>
-                <a:ea typeface="Calibri" pitchFamily="34" charset="-122"/>
-                <a:cs typeface="Calibri" pitchFamily="34" charset="-120"/>
-              </a:rPr>
-              <a:t>P0055 — Restaurants (existing market)</a:t>
-            </a:r>
-            <a:endParaRPr lang="en-US" sz="1000" dirty="0"/>
-          </a:p>
-        </p:txBody>
-      </p:sp>
-      <p:sp>
-        <p:nvSpPr>
-          <p:cNvPr id="32" name="Text 29"/>
-          <p:cNvSpPr/>
-          <p:nvPr/>
-        </p:nvSpPr>
-        <p:spPr>
-          <a:xfrm>
-            <a:off x="10195560" y="5184648"/>
-            <a:ext cx="1463040" cy="274320"/>
-          </a:xfrm>
-          <a:prstGeom prst="rect">
-            <a:avLst/>
-          </a:prstGeom>
-          <a:noFill/>
-          <a:ln/>
-        </p:spPr>
-        <p:txBody>
-          <a:bodyPr wrap="square" rtlCol="0" anchor="ctr"/>
-          <a:lstStyle/>
-          <a:p>
-            <a:pPr algn="r" indent="0" marL="0">
-              <a:buNone/>
-            </a:pPr>
-            <a:r>
-              <a:rPr lang="en-US" sz="1000" b="1" dirty="0">
-                <a:solidFill>
-                  <a:srgbClr val="2C7A57"/>
-                </a:solidFill>
-                <a:latin typeface="Calibri" pitchFamily="34" charset="0"/>
-                <a:ea typeface="Calibri" pitchFamily="34" charset="-122"/>
-                <a:cs typeface="Calibri" pitchFamily="34" charset="-120"/>
-              </a:rPr>
-              <a:t>$524</a:t>
-            </a:r>
-            <a:endParaRPr lang="en-US" sz="1000" dirty="0"/>
-          </a:p>
-        </p:txBody>
-      </p:sp>
-      <p:sp>
-        <p:nvSpPr>
-          <p:cNvPr id="33" name="Text 30"/>
-          <p:cNvSpPr/>
-          <p:nvPr/>
-        </p:nvSpPr>
-        <p:spPr>
-          <a:xfrm>
-            <a:off x="6263640" y="5477256"/>
-            <a:ext cx="4023360" cy="274320"/>
-          </a:xfrm>
-          <a:prstGeom prst="rect">
-            <a:avLst/>
-          </a:prstGeom>
-          <a:noFill/>
-          <a:ln/>
-        </p:spPr>
-        <p:txBody>
-          <a:bodyPr wrap="square" rtlCol="0" anchor="ctr"/>
-          <a:lstStyle/>
-          <a:p>
-            <a:pPr indent="0" marL="0">
-              <a:buNone/>
-            </a:pPr>
-            <a:r>
-              <a:rPr lang="en-US" sz="1000" dirty="0">
-                <a:solidFill>
-                  <a:srgbClr val="1A1A2E"/>
-                </a:solidFill>
-                <a:latin typeface="Calibri" pitchFamily="34" charset="0"/>
-                <a:ea typeface="Calibri" pitchFamily="34" charset="-122"/>
-                <a:cs typeface="Calibri" pitchFamily="34" charset="-120"/>
-              </a:rPr>
-              <a:t>P0000 — Bars (new market)</a:t>
-            </a:r>
-            <a:endParaRPr lang="en-US" sz="1000" dirty="0"/>
-          </a:p>
-        </p:txBody>
-      </p:sp>
-      <p:sp>
-        <p:nvSpPr>
-          <p:cNvPr id="34" name="Text 31"/>
-          <p:cNvSpPr/>
-          <p:nvPr/>
-        </p:nvSpPr>
-        <p:spPr>
-          <a:xfrm>
-            <a:off x="10195560" y="5477256"/>
-            <a:ext cx="1463040" cy="274320"/>
-          </a:xfrm>
-          <a:prstGeom prst="rect">
-            <a:avLst/>
-          </a:prstGeom>
-          <a:noFill/>
-          <a:ln/>
-        </p:spPr>
-        <p:txBody>
-          <a:bodyPr wrap="square" rtlCol="0" anchor="ctr"/>
-          <a:lstStyle/>
-          <a:p>
-            <a:pPr algn="r" indent="0" marL="0">
-              <a:buNone/>
-            </a:pPr>
-            <a:r>
-              <a:rPr lang="en-US" sz="1000" b="1" dirty="0">
-                <a:solidFill>
-                  <a:srgbClr val="2C7A57"/>
-                </a:solidFill>
-                <a:latin typeface="Calibri" pitchFamily="34" charset="0"/>
-                <a:ea typeface="Calibri" pitchFamily="34" charset="-122"/>
-                <a:cs typeface="Calibri" pitchFamily="34" charset="-120"/>
-              </a:rPr>
-              <a:t>$500</a:t>
-            </a:r>
-            <a:endParaRPr lang="en-US" sz="1000" dirty="0"/>
-          </a:p>
-        </p:txBody>
-      </p:sp>
-      <p:sp>
-        <p:nvSpPr>
-          <p:cNvPr id="35" name="Text 32"/>
-          <p:cNvSpPr/>
-          <p:nvPr/>
-        </p:nvSpPr>
-        <p:spPr>
-          <a:xfrm>
-            <a:off x="6263640" y="5769864"/>
-            <a:ext cx="4023360" cy="274320"/>
-          </a:xfrm>
-          <a:prstGeom prst="rect">
-            <a:avLst/>
-          </a:prstGeom>
-          <a:noFill/>
-          <a:ln/>
-        </p:spPr>
-        <p:txBody>
-          <a:bodyPr wrap="square" rtlCol="0" anchor="ctr"/>
-          <a:lstStyle/>
-          <a:p>
-            <a:pPr indent="0" marL="0">
-              <a:buNone/>
-            </a:pPr>
-            <a:r>
-              <a:rPr lang="en-US" sz="1000" dirty="0">
-                <a:solidFill>
-                  <a:srgbClr val="1A1A2E"/>
-                </a:solidFill>
-                <a:latin typeface="Calibri" pitchFamily="34" charset="0"/>
-                <a:ea typeface="Calibri" pitchFamily="34" charset="-122"/>
-                <a:cs typeface="Calibri" pitchFamily="34" charset="-120"/>
-              </a:rPr>
-              <a:t>P0001 — Bars (new market)</a:t>
-            </a:r>
-            <a:endParaRPr lang="en-US" sz="1000" dirty="0"/>
-          </a:p>
-        </p:txBody>
-      </p:sp>
-      <p:sp>
-        <p:nvSpPr>
-          <p:cNvPr id="36" name="Text 33"/>
-          <p:cNvSpPr/>
-          <p:nvPr/>
-        </p:nvSpPr>
-        <p:spPr>
-          <a:xfrm>
-            <a:off x="10195560" y="5769864"/>
-            <a:ext cx="1463040" cy="274320"/>
-          </a:xfrm>
-          <a:prstGeom prst="rect">
-            <a:avLst/>
-          </a:prstGeom>
-          <a:noFill/>
-          <a:ln/>
-        </p:spPr>
-        <p:txBody>
-          <a:bodyPr wrap="square" rtlCol="0" anchor="ctr"/>
-          <a:lstStyle/>
-          <a:p>
-            <a:pPr algn="r" indent="0" marL="0">
-              <a:buNone/>
-            </a:pPr>
-            <a:r>
-              <a:rPr lang="en-US" sz="1000" b="1" dirty="0">
-                <a:solidFill>
-                  <a:srgbClr val="2C7A57"/>
-                </a:solidFill>
-                <a:latin typeface="Calibri" pitchFamily="34" charset="0"/>
-                <a:ea typeface="Calibri" pitchFamily="34" charset="-122"/>
-                <a:cs typeface="Calibri" pitchFamily="34" charset="-120"/>
-              </a:rPr>
-              <a:t>$496</a:t>
-            </a:r>
-            <a:endParaRPr lang="en-US" sz="1000" dirty="0"/>
-          </a:p>
-        </p:txBody>
-      </p:sp>
-      <p:sp>
-        <p:nvSpPr>
-          <p:cNvPr id="37" name="Text 34"/>
-          <p:cNvSpPr/>
-          <p:nvPr/>
-        </p:nvSpPr>
-        <p:spPr>
-          <a:xfrm>
-            <a:off x="548640" y="6080760"/>
-            <a:ext cx="11064240" cy="411480"/>
-          </a:xfrm>
-          <a:prstGeom prst="rect">
-            <a:avLst/>
-          </a:prstGeom>
-          <a:noFill/>
-          <a:ln/>
-        </p:spPr>
-        <p:txBody>
-          <a:bodyPr wrap="square" rtlCol="0" anchor="ctr"/>
-          <a:lstStyle/>
-          <a:p>
-            <a:pPr indent="0" marL="0">
-              <a:lnSpc>
-                <a:spcPts val="1200"/>
-              </a:lnSpc>
-              <a:buNone/>
-            </a:pPr>
-            <a:r>
-              <a:rPr lang="en-US" sz="1000" i="1" dirty="0">
-                <a:solidFill>
-                  <a:srgbClr val="5B6178"/>
-                </a:solidFill>
-                <a:latin typeface="Calibri" pitchFamily="34" charset="0"/>
-                <a:ea typeface="Calibri" pitchFamily="34" charset="-122"/>
-                <a:cs typeface="Calibri" pitchFamily="34" charset="-120"/>
-              </a:rPr>
-              <a:t>Flags come from 5-fold out-of-fold predictions, never a model scoring the venue it was trained on. The calibrated-lift feature carries near-zero importance — honest, since it's constant within venue_type once venue_type itself is a feature.</a:t>
-            </a:r>
-            <a:endParaRPr lang="en-US" sz="1000" dirty="0"/>
-          </a:p>
-        </p:txBody>
-      </p:sp>
-      <p:sp>
-        <p:nvSpPr>
-          <p:cNvPr id="38" name="Text 35"/>
-          <p:cNvSpPr/>
-          <p:nvPr/>
-        </p:nvSpPr>
-        <p:spPr>
-          <a:xfrm>
-            <a:off x="457200" y="6537960"/>
-            <a:ext cx="7315200" cy="274320"/>
-          </a:xfrm>
-          <a:prstGeom prst="rect">
-            <a:avLst/>
-          </a:prstGeom>
-          <a:noFill/>
-          <a:ln/>
-        </p:spPr>
-        <p:txBody>
-          <a:bodyPr wrap="square" rtlCol="0" anchor="ctr"/>
-          <a:lstStyle/>
-          <a:p>
-            <a:pPr indent="0" marL="0">
-              <a:buNone/>
-            </a:pPr>
-            <a:r>
-              <a:rPr lang="en-US" sz="900" dirty="0">
-                <a:solidFill>
-                  <a:srgbClr val="5B6178"/>
-                </a:solidFill>
-                <a:latin typeface="Calibri" pitchFamily="34" charset="0"/>
-                <a:ea typeface="Calibri" pitchFamily="34" charset="-122"/>
-                <a:cs typeface="Calibri" pitchFamily="34" charset="-120"/>
-              </a:rPr>
-              <a:t>Venue economics</a:t>
-            </a:r>
-            <a:endParaRPr lang="en-US" sz="900" dirty="0"/>
           </a:p>
         </p:txBody>
       </p:sp>
@@ -7950,7 +7110,7 @@
                 <a:ea typeface="Cambria" pitchFamily="34" charset="-122"/>
                 <a:cs typeface="Cambria" pitchFamily="34" charset="-120"/>
               </a:rPr>
-              <a:t>Predicting venue churn risk, honestly</a:t>
+              <a:t>Predicting venue ad-revenue, honestly</a:t>
             </a:r>
             <a:endParaRPr lang="en-US" sz="2500" dirty="0"/>
           </a:p>
@@ -7977,7 +7137,7 @@
           </a:solidFill>
           <a:ln w="15875">
             <a:solidFill>
-              <a:srgbClr val="8E3B60"/>
+              <a:srgbClr val="2C7A57"/>
             </a:solidFill>
             <a:prstDash val="solid"/>
           </a:ln>
@@ -8010,13 +7170,13 @@
             <a:r>
               <a:rPr lang="en-US" sz="950" b="1" dirty="0">
                 <a:solidFill>
-                  <a:srgbClr val="8E3B60"/>
-                </a:solidFill>
-                <a:latin typeface="Calibri" pitchFamily="34" charset="0"/>
-                <a:ea typeface="Calibri" pitchFamily="34" charset="-122"/>
-                <a:cs typeface="Calibri" pitchFamily="34" charset="-120"/>
-              </a:rPr>
-              <a:t>Step 6 of 6 · Answers Q4</a:t>
+                  <a:srgbClr val="2C7A57"/>
+                </a:solidFill>
+                <a:latin typeface="Calibri" pitchFamily="34" charset="0"/>
+                <a:ea typeface="Calibri" pitchFamily="34" charset="-122"/>
+                <a:cs typeface="Calibri" pitchFamily="34" charset="-120"/>
+              </a:rPr>
+              <a:t>Step 5 of 6 · Answers Q3</a:t>
             </a:r>
             <a:endParaRPr lang="en-US" sz="950" dirty="0"/>
           </a:p>
@@ -8047,7 +7207,7 @@
               <a:buNone/>
             </a:pPr>
             <a:r>
-              <a:rPr lang="en-US" sz="1200" i="1" dirty="0">
+              <a:rPr lang="en-US" sz="1250" i="1" dirty="0">
                 <a:solidFill>
                   <a:srgbClr val="5B6178"/>
                 </a:solidFill>
@@ -8055,9 +7215,9 @@
                 <a:ea typeface="Calibri" pitchFamily="34" charset="-122"/>
                 <a:cs typeface="Calibri" pitchFamily="34" charset="-120"/>
               </a:rPr>
-              <a:t>Gradient-boosted classifier on ops-visible signals (engagement, uptime, complaints, competitor outreach) — the other half of "what makes a venue valuable and what puts it at risk."</a:t>
-            </a:r>
-            <a:endParaRPr lang="en-US" sz="1200" dirty="0"/>
+              <a:t>Gradient-boosted trees on observable venue characteristics + the calibrated per-exposure lift as a feature.</a:t>
+            </a:r>
+            <a:endParaRPr lang="en-US" sz="1250" dirty="0"/>
           </a:p>
         </p:txBody>
       </p:sp>
@@ -8116,7 +7276,7 @@
                 <a:ea typeface="Calibri" pitchFamily="34" charset="-122"/>
                 <a:cs typeface="Calibri" pitchFamily="34" charset="-120"/>
               </a:rPr>
-              <a:t>0.65</a:t>
+              <a:t>0.84</a:t>
             </a:r>
             <a:endParaRPr lang="en-US" sz="2200" dirty="0"/>
           </a:p>
@@ -8147,7 +7307,7 @@
               <a:buNone/>
             </a:pPr>
             <a:r>
-              <a:rPr lang="en-US" sz="900" dirty="0">
+              <a:rPr lang="en-US" sz="950" dirty="0">
                 <a:solidFill>
                   <a:srgbClr val="5B6178"/>
                 </a:solidFill>
@@ -8155,9 +7315,9 @@
                 <a:ea typeface="Calibri" pitchFamily="34" charset="-122"/>
                 <a:cs typeface="Calibri" pitchFamily="34" charset="-120"/>
               </a:rPr>
-              <a:t>Held-out AUC (oracle ceiling: 0.73)</a:t>
-            </a:r>
-            <a:endParaRPr lang="en-US" sz="900" dirty="0"/>
+              <a:t>Held-out R²</a:t>
+            </a:r>
+            <a:endParaRPr lang="en-US" sz="950" dirty="0"/>
           </a:p>
         </p:txBody>
       </p:sp>
@@ -8216,7 +7376,7 @@
                 <a:ea typeface="Calibri" pitchFamily="34" charset="-122"/>
                 <a:cs typeface="Calibri" pitchFamily="34" charset="-120"/>
               </a:rPr>
-              <a:t>0.27</a:t>
+              <a:t>22.1%</a:t>
             </a:r>
             <a:endParaRPr lang="en-US" sz="2200" dirty="0"/>
           </a:p>
@@ -8247,7 +7407,7 @@
               <a:buNone/>
             </a:pPr>
             <a:r>
-              <a:rPr lang="en-US" sz="900" dirty="0">
+              <a:rPr lang="en-US" sz="950" dirty="0">
                 <a:solidFill>
                   <a:srgbClr val="5B6178"/>
                 </a:solidFill>
@@ -8255,9 +7415,9 @@
                 <a:ea typeface="Calibri" pitchFamily="34" charset="-122"/>
                 <a:cs typeface="Calibri" pitchFamily="34" charset="-120"/>
               </a:rPr>
-              <a:t>Held-out PR-AUC</a:t>
-            </a:r>
-            <a:endParaRPr lang="en-US" sz="900" dirty="0"/>
+              <a:t>Held-out MAPE</a:t>
+            </a:r>
+            <a:endParaRPr lang="en-US" sz="950" dirty="0"/>
           </a:p>
         </p:txBody>
       </p:sp>
@@ -8316,7 +7476,7 @@
                 <a:ea typeface="Calibri" pitchFamily="34" charset="-122"/>
                 <a:cs typeface="Calibri" pitchFamily="34" charset="-120"/>
               </a:rPr>
-              <a:t>0.73</a:t>
+              <a:t>$45</a:t>
             </a:r>
             <a:endParaRPr lang="en-US" sz="2200" dirty="0"/>
           </a:p>
@@ -8347,7 +7507,7 @@
               <a:buNone/>
             </a:pPr>
             <a:r>
-              <a:rPr lang="en-US" sz="900" dirty="0">
+              <a:rPr lang="en-US" sz="950" dirty="0">
                 <a:solidFill>
                   <a:srgbClr val="5B6178"/>
                 </a:solidFill>
@@ -8355,9 +7515,9 @@
                 <a:ea typeface="Calibri" pitchFamily="34" charset="-122"/>
                 <a:cs typeface="Calibri" pitchFamily="34" charset="-120"/>
               </a:rPr>
-              <a:t>OOF corr. w/ latent true risk</a:t>
-            </a:r>
-            <a:endParaRPr lang="en-US" sz="900" dirty="0"/>
+              <a:t>Held-out MAE</a:t>
+            </a:r>
+            <a:endParaRPr lang="en-US" sz="950" dirty="0"/>
           </a:p>
         </p:txBody>
       </p:sp>
@@ -8416,7 +7576,7 @@
                 <a:ea typeface="Calibri" pitchFamily="34" charset="-122"/>
                 <a:cs typeface="Calibri" pitchFamily="34" charset="-120"/>
               </a:rPr>
-              <a:t>100% vs 31%</a:t>
+              <a:t>20</a:t>
             </a:r>
             <a:endParaRPr lang="en-US" sz="2200" dirty="0"/>
           </a:p>
@@ -8447,7 +7607,7 @@
               <a:buNone/>
             </a:pPr>
             <a:r>
-              <a:rPr lang="en-US" sz="900" dirty="0">
+              <a:rPr lang="en-US" sz="950" dirty="0">
                 <a:solidFill>
                   <a:srgbClr val="5B6178"/>
                 </a:solidFill>
@@ -8455,9 +7615,9 @@
                 <a:ea typeface="Calibri" pitchFamily="34" charset="-122"/>
                 <a:cs typeface="Calibri" pitchFamily="34" charset="-120"/>
               </a:rPr>
-              <a:t>Flagged-tail latent risk rate</a:t>
-            </a:r>
-            <a:endParaRPr lang="en-US" sz="900" dirty="0"/>
+              <a:t>Venues flagged</a:t>
+            </a:r>
+            <a:endParaRPr lang="en-US" sz="950" dirty="0"/>
           </a:p>
         </p:txBody>
       </p:sp>
@@ -8486,7 +7646,7 @@
         <p:spPr>
           <a:xfrm>
             <a:off x="6263640" y="2880360"/>
-            <a:ext cx="5394960" cy="256032"/>
+            <a:ext cx="5394960" cy="274320"/>
           </a:xfrm>
           <a:prstGeom prst="rect">
             <a:avLst/>
@@ -8510,7 +7670,7 @@
                 <a:ea typeface="Cambria" pitchFamily="34" charset="-122"/>
                 <a:cs typeface="Cambria" pitchFamily="34" charset="-120"/>
               </a:rPr>
-              <a:t>Top at-risk venues (of 20 flagged, by OOF risk)</a:t>
+              <a:t>Top under-monetized venues (of 20 flagged)</a:t>
             </a:r>
             <a:endParaRPr lang="en-US" sz="1200" dirty="0"/>
           </a:p>
@@ -8524,8 +7684,8 @@
         </p:nvSpPr>
         <p:spPr>
           <a:xfrm>
-            <a:off x="6263640" y="3172968"/>
-            <a:ext cx="3977640" cy="219456"/>
+            <a:off x="6263640" y="3209544"/>
+            <a:ext cx="3657600" cy="274320"/>
           </a:xfrm>
           <a:prstGeom prst="rect">
             <a:avLst/>
@@ -8549,7 +7709,7 @@
                 <a:ea typeface="Calibri" pitchFamily="34" charset="-122"/>
                 <a:cs typeface="Calibri" pitchFamily="34" charset="-120"/>
               </a:rPr>
-              <a:t>Venue #281 (Bars)</a:t>
+              <a:t>Venue #85 (Restaurants)</a:t>
             </a:r>
             <a:endParaRPr lang="en-US" sz="1000" dirty="0"/>
           </a:p>
@@ -8563,8 +7723,8 @@
         </p:nvSpPr>
         <p:spPr>
           <a:xfrm>
-            <a:off x="10241280" y="3172968"/>
-            <a:ext cx="1417320" cy="219456"/>
+            <a:off x="9966960" y="3209544"/>
+            <a:ext cx="1691640" cy="274320"/>
           </a:xfrm>
           <a:prstGeom prst="rect">
             <a:avLst/>
@@ -8588,7 +7748,7 @@
                 <a:ea typeface="Calibri" pitchFamily="34" charset="-122"/>
                 <a:cs typeface="Calibri" pitchFamily="34" charset="-120"/>
               </a:rPr>
-              <a:t>60%</a:t>
+              <a:t>-62%</a:t>
             </a:r>
             <a:endParaRPr lang="en-US" sz="1000" dirty="0"/>
           </a:p>
@@ -8602,34 +7762,34 @@
         </p:nvSpPr>
         <p:spPr>
           <a:xfrm>
-            <a:off x="6263640" y="3374136"/>
-            <a:ext cx="5394960" cy="201168"/>
-          </a:xfrm>
-          <a:prstGeom prst="rect">
-            <a:avLst/>
-          </a:prstGeom>
-          <a:noFill/>
-          <a:ln/>
-        </p:spPr>
-        <p:txBody>
-          <a:bodyPr wrap="square" rtlCol="0" anchor="ctr"/>
-          <a:lstStyle/>
-          <a:p>
-            <a:pPr indent="0" marL="0">
-              <a:buNone/>
-            </a:pPr>
-            <a:r>
-              <a:rPr lang="en-US" sz="900" i="1" dirty="0">
-                <a:solidFill>
-                  <a:srgbClr val="8A4B0A"/>
-                </a:solidFill>
-                <a:latin typeface="Calibri" pitchFamily="34" charset="0"/>
-                <a:ea typeface="Calibri" pitchFamily="34" charset="-122"/>
-                <a:cs typeface="Calibri" pitchFamily="34" charset="-120"/>
-              </a:rPr>
-              <a:t>engagement declining → content/placement review</a:t>
-            </a:r>
-            <a:endParaRPr lang="en-US" sz="900" dirty="0"/>
+            <a:off x="6263640" y="3502152"/>
+            <a:ext cx="3657600" cy="274320"/>
+          </a:xfrm>
+          <a:prstGeom prst="rect">
+            <a:avLst/>
+          </a:prstGeom>
+          <a:noFill/>
+          <a:ln/>
+        </p:spPr>
+        <p:txBody>
+          <a:bodyPr wrap="square" rtlCol="0" anchor="ctr"/>
+          <a:lstStyle/>
+          <a:p>
+            <a:pPr indent="0" marL="0">
+              <a:buNone/>
+            </a:pPr>
+            <a:r>
+              <a:rPr lang="en-US" sz="1000" dirty="0">
+                <a:solidFill>
+                  <a:srgbClr val="1A1A2E"/>
+                </a:solidFill>
+                <a:latin typeface="Calibri" pitchFamily="34" charset="0"/>
+                <a:ea typeface="Calibri" pitchFamily="34" charset="-122"/>
+                <a:cs typeface="Calibri" pitchFamily="34" charset="-120"/>
+              </a:rPr>
+              <a:t>Venue #309 (Waiting Rooms)</a:t>
+            </a:r>
+            <a:endParaRPr lang="en-US" sz="1000" dirty="0"/>
           </a:p>
         </p:txBody>
       </p:sp>
@@ -8641,8 +7801,47 @@
         </p:nvSpPr>
         <p:spPr>
           <a:xfrm>
-            <a:off x="6263640" y="3593592"/>
-            <a:ext cx="3977640" cy="219456"/>
+            <a:off x="9966960" y="3502152"/>
+            <a:ext cx="1691640" cy="274320"/>
+          </a:xfrm>
+          <a:prstGeom prst="rect">
+            <a:avLst/>
+          </a:prstGeom>
+          <a:noFill/>
+          <a:ln/>
+        </p:spPr>
+        <p:txBody>
+          <a:bodyPr wrap="square" rtlCol="0" anchor="ctr"/>
+          <a:lstStyle/>
+          <a:p>
+            <a:pPr algn="r" indent="0" marL="0">
+              <a:buNone/>
+            </a:pPr>
+            <a:r>
+              <a:rPr lang="en-US" sz="1000" b="1" dirty="0">
+                <a:solidFill>
+                  <a:srgbClr val="B8500A"/>
+                </a:solidFill>
+                <a:latin typeface="Calibri" pitchFamily="34" charset="0"/>
+                <a:ea typeface="Calibri" pitchFamily="34" charset="-122"/>
+                <a:cs typeface="Calibri" pitchFamily="34" charset="-120"/>
+              </a:rPr>
+              <a:t>-61%</a:t>
+            </a:r>
+            <a:endParaRPr lang="en-US" sz="1000" dirty="0"/>
+          </a:p>
+        </p:txBody>
+      </p:sp>
+      <p:sp>
+        <p:nvSpPr>
+          <p:cNvPr id="24" name="Text 21"/>
+          <p:cNvSpPr/>
+          <p:nvPr/>
+        </p:nvSpPr>
+        <p:spPr>
+          <a:xfrm>
+            <a:off x="6263640" y="3794760"/>
+            <a:ext cx="3657600" cy="274320"/>
           </a:xfrm>
           <a:prstGeom prst="rect">
             <a:avLst/>
@@ -8666,7 +7865,7 @@
                 <a:ea typeface="Calibri" pitchFamily="34" charset="-122"/>
                 <a:cs typeface="Calibri" pitchFamily="34" charset="-120"/>
               </a:rPr>
-              <a:t>Venue #200 (Bars)</a:t>
+              <a:t>Venue #53 (Restaurants)</a:t>
             </a:r>
             <a:endParaRPr lang="en-US" sz="1000" dirty="0"/>
           </a:p>
@@ -8674,14 +7873,14 @@
       </p:sp>
       <p:sp>
         <p:nvSpPr>
-          <p:cNvPr id="24" name="Text 21"/>
-          <p:cNvSpPr/>
-          <p:nvPr/>
-        </p:nvSpPr>
-        <p:spPr>
-          <a:xfrm>
-            <a:off x="10241280" y="3593592"/>
-            <a:ext cx="1417320" cy="219456"/>
+          <p:cNvPr id="25" name="Text 22"/>
+          <p:cNvSpPr/>
+          <p:nvPr/>
+        </p:nvSpPr>
+        <p:spPr>
+          <a:xfrm>
+            <a:off x="9966960" y="3794760"/>
+            <a:ext cx="1691640" cy="274320"/>
           </a:xfrm>
           <a:prstGeom prst="rect">
             <a:avLst/>
@@ -8705,7 +7904,7 @@
                 <a:ea typeface="Calibri" pitchFamily="34" charset="-122"/>
                 <a:cs typeface="Calibri" pitchFamily="34" charset="-120"/>
               </a:rPr>
-              <a:t>55%</a:t>
+              <a:t>-61%</a:t>
             </a:r>
             <a:endParaRPr lang="en-US" sz="1000" dirty="0"/>
           </a:p>
@@ -8713,53 +7912,14 @@
       </p:sp>
       <p:sp>
         <p:nvSpPr>
-          <p:cNvPr id="25" name="Text 22"/>
-          <p:cNvSpPr/>
-          <p:nvPr/>
-        </p:nvSpPr>
-        <p:spPr>
-          <a:xfrm>
-            <a:off x="6263640" y="3794760"/>
-            <a:ext cx="5394960" cy="201168"/>
-          </a:xfrm>
-          <a:prstGeom prst="rect">
-            <a:avLst/>
-          </a:prstGeom>
-          <a:noFill/>
-          <a:ln/>
-        </p:spPr>
-        <p:txBody>
-          <a:bodyPr wrap="square" rtlCol="0" anchor="ctr"/>
-          <a:lstStyle/>
-          <a:p>
-            <a:pPr indent="0" marL="0">
-              <a:buNone/>
-            </a:pPr>
-            <a:r>
-              <a:rPr lang="en-US" sz="900" i="1" dirty="0">
-                <a:solidFill>
-                  <a:srgbClr val="8A4B0A"/>
-                </a:solidFill>
-                <a:latin typeface="Calibri" pitchFamily="34" charset="0"/>
-                <a:ea typeface="Calibri" pitchFamily="34" charset="-122"/>
-                <a:cs typeface="Calibri" pitchFamily="34" charset="-120"/>
-              </a:rPr>
-              <a:t>engagement declining → content/placement review</a:t>
-            </a:r>
-            <a:endParaRPr lang="en-US" sz="900" dirty="0"/>
-          </a:p>
-        </p:txBody>
-      </p:sp>
-      <p:sp>
-        <p:nvSpPr>
           <p:cNvPr id="26" name="Text 23"/>
           <p:cNvSpPr/>
           <p:nvPr/>
         </p:nvSpPr>
         <p:spPr>
           <a:xfrm>
-            <a:off x="6263640" y="4014216"/>
-            <a:ext cx="3977640" cy="219456"/>
+            <a:off x="6263640" y="4087368"/>
+            <a:ext cx="3657600" cy="274320"/>
           </a:xfrm>
           <a:prstGeom prst="rect">
             <a:avLst/>
@@ -8783,7 +7943,7 @@
                 <a:ea typeface="Calibri" pitchFamily="34" charset="-122"/>
                 <a:cs typeface="Calibri" pitchFamily="34" charset="-120"/>
               </a:rPr>
-              <a:t>Venue #12 (Restaurants)</a:t>
+              <a:t>Venue #247 (Bars)</a:t>
             </a:r>
             <a:endParaRPr lang="en-US" sz="1000" dirty="0"/>
           </a:p>
@@ -8797,8 +7957,8 @@
         </p:nvSpPr>
         <p:spPr>
           <a:xfrm>
-            <a:off x="10241280" y="4014216"/>
-            <a:ext cx="1417320" cy="219456"/>
+            <a:off x="9966960" y="4087368"/>
+            <a:ext cx="1691640" cy="274320"/>
           </a:xfrm>
           <a:prstGeom prst="rect">
             <a:avLst/>
@@ -8822,7 +7982,7 @@
                 <a:ea typeface="Calibri" pitchFamily="34" charset="-122"/>
                 <a:cs typeface="Calibri" pitchFamily="34" charset="-120"/>
               </a:rPr>
-              <a:t>52%</a:t>
+              <a:t>-60%</a:t>
             </a:r>
             <a:endParaRPr lang="en-US" sz="1000" dirty="0"/>
           </a:p>
@@ -8836,47 +7996,8 @@
         </p:nvSpPr>
         <p:spPr>
           <a:xfrm>
-            <a:off x="6263640" y="4215384"/>
-            <a:ext cx="5394960" cy="201168"/>
-          </a:xfrm>
-          <a:prstGeom prst="rect">
-            <a:avLst/>
-          </a:prstGeom>
-          <a:noFill/>
-          <a:ln/>
-        </p:spPr>
-        <p:txBody>
-          <a:bodyPr wrap="square" rtlCol="0" anchor="ctr"/>
-          <a:lstStyle/>
-          <a:p>
-            <a:pPr indent="0" marL="0">
-              <a:buNone/>
-            </a:pPr>
-            <a:r>
-              <a:rPr lang="en-US" sz="900" i="1" dirty="0">
-                <a:solidFill>
-                  <a:srgbClr val="8A4B0A"/>
-                </a:solidFill>
-                <a:latin typeface="Calibri" pitchFamily="34" charset="0"/>
-                <a:ea typeface="Calibri" pitchFamily="34" charset="-122"/>
-                <a:cs typeface="Calibri" pitchFamily="34" charset="-120"/>
-              </a:rPr>
-              <a:t>uptime issue → dispatch technical support</a:t>
-            </a:r>
-            <a:endParaRPr lang="en-US" sz="900" dirty="0"/>
-          </a:p>
-        </p:txBody>
-      </p:sp>
-      <p:sp>
-        <p:nvSpPr>
-          <p:cNvPr id="29" name="Text 26"/>
-          <p:cNvSpPr/>
-          <p:nvPr/>
-        </p:nvSpPr>
-        <p:spPr>
-          <a:xfrm>
-            <a:off x="6263640" y="4526280"/>
-            <a:ext cx="5394960" cy="237744"/>
+            <a:off x="6263640" y="4562856"/>
+            <a:ext cx="5394960" cy="274320"/>
           </a:xfrm>
           <a:prstGeom prst="rect">
             <a:avLst/>
@@ -8900,7 +8021,7 @@
                 <a:ea typeface="Cambria" pitchFamily="34" charset="-122"/>
                 <a:cs typeface="Cambria" pitchFamily="34" charset="-120"/>
               </a:rPr>
-              <a:t>Priority quadrant (Q3 revenue × Q4 risk)</a:t>
+              <a:t>Top prospect venues (expansion priority)</a:t>
             </a:r>
             <a:endParaRPr lang="en-US" sz="1200" dirty="0"/>
           </a:p>
@@ -8908,14 +8029,92 @@
       </p:sp>
       <p:sp>
         <p:nvSpPr>
+          <p:cNvPr id="29" name="Text 26"/>
+          <p:cNvSpPr/>
+          <p:nvPr/>
+        </p:nvSpPr>
+        <p:spPr>
+          <a:xfrm>
+            <a:off x="6263640" y="4892040"/>
+            <a:ext cx="4023360" cy="274320"/>
+          </a:xfrm>
+          <a:prstGeom prst="rect">
+            <a:avLst/>
+          </a:prstGeom>
+          <a:noFill/>
+          <a:ln/>
+        </p:spPr>
+        <p:txBody>
+          <a:bodyPr wrap="square" rtlCol="0" anchor="ctr"/>
+          <a:lstStyle/>
+          <a:p>
+            <a:pPr indent="0" marL="0">
+              <a:buNone/>
+            </a:pPr>
+            <a:r>
+              <a:rPr lang="en-US" sz="1000" dirty="0">
+                <a:solidFill>
+                  <a:srgbClr val="1A1A2E"/>
+                </a:solidFill>
+                <a:latin typeface="Calibri" pitchFamily="34" charset="0"/>
+                <a:ea typeface="Calibri" pitchFamily="34" charset="-122"/>
+                <a:cs typeface="Calibri" pitchFamily="34" charset="-120"/>
+              </a:rPr>
+              <a:t>P0018 — Bars (existing market)</a:t>
+            </a:r>
+            <a:endParaRPr lang="en-US" sz="1000" dirty="0"/>
+          </a:p>
+        </p:txBody>
+      </p:sp>
+      <p:sp>
+        <p:nvSpPr>
           <p:cNvPr id="30" name="Text 27"/>
           <p:cNvSpPr/>
           <p:nvPr/>
         </p:nvSpPr>
         <p:spPr>
           <a:xfrm>
-            <a:off x="6263640" y="4800600"/>
-            <a:ext cx="4023360" cy="237744"/>
+            <a:off x="10195560" y="4892040"/>
+            <a:ext cx="1463040" cy="274320"/>
+          </a:xfrm>
+          <a:prstGeom prst="rect">
+            <a:avLst/>
+          </a:prstGeom>
+          <a:noFill/>
+          <a:ln/>
+        </p:spPr>
+        <p:txBody>
+          <a:bodyPr wrap="square" rtlCol="0" anchor="ctr"/>
+          <a:lstStyle/>
+          <a:p>
+            <a:pPr algn="r" indent="0" marL="0">
+              <a:buNone/>
+            </a:pPr>
+            <a:r>
+              <a:rPr lang="en-US" sz="1000" b="1" dirty="0">
+                <a:solidFill>
+                  <a:srgbClr val="2C7A57"/>
+                </a:solidFill>
+                <a:latin typeface="Calibri" pitchFamily="34" charset="0"/>
+                <a:ea typeface="Calibri" pitchFamily="34" charset="-122"/>
+                <a:cs typeface="Calibri" pitchFamily="34" charset="-120"/>
+              </a:rPr>
+              <a:t>$684</a:t>
+            </a:r>
+            <a:endParaRPr lang="en-US" sz="1000" dirty="0"/>
+          </a:p>
+        </p:txBody>
+      </p:sp>
+      <p:sp>
+        <p:nvSpPr>
+          <p:cNvPr id="31" name="Text 28"/>
+          <p:cNvSpPr/>
+          <p:nvPr/>
+        </p:nvSpPr>
+        <p:spPr>
+          <a:xfrm>
+            <a:off x="6263640" y="5184648"/>
+            <a:ext cx="4023360" cy="274320"/>
           </a:xfrm>
           <a:prstGeom prst="rect">
             <a:avLst/>
@@ -8939,7 +8138,7 @@
                 <a:ea typeface="Calibri" pitchFamily="34" charset="-122"/>
                 <a:cs typeface="Calibri" pitchFamily="34" charset="-120"/>
               </a:rPr>
-              <a:t>Save now (high value, high risk)</a:t>
+              <a:t>P0055 — Restaurants (existing market)</a:t>
             </a:r>
             <a:endParaRPr lang="en-US" sz="1000" dirty="0"/>
           </a:p>
@@ -8947,14 +8146,14 @@
       </p:sp>
       <p:sp>
         <p:nvSpPr>
-          <p:cNvPr id="31" name="Text 28"/>
-          <p:cNvSpPr/>
-          <p:nvPr/>
-        </p:nvSpPr>
-        <p:spPr>
-          <a:xfrm>
-            <a:off x="10195560" y="4800600"/>
-            <a:ext cx="1463040" cy="237744"/>
+          <p:cNvPr id="32" name="Text 29"/>
+          <p:cNvSpPr/>
+          <p:nvPr/>
+        </p:nvSpPr>
+        <p:spPr>
+          <a:xfrm>
+            <a:off x="10195560" y="5184648"/>
+            <a:ext cx="1463040" cy="274320"/>
           </a:xfrm>
           <a:prstGeom prst="rect">
             <a:avLst/>
@@ -8972,13 +8171,13 @@
             <a:r>
               <a:rPr lang="en-US" sz="1000" b="1" dirty="0">
                 <a:solidFill>
-                  <a:srgbClr val="B8500A"/>
-                </a:solidFill>
-                <a:latin typeface="Calibri" pitchFamily="34" charset="0"/>
-                <a:ea typeface="Calibri" pitchFamily="34" charset="-122"/>
-                <a:cs typeface="Calibri" pitchFamily="34" charset="-120"/>
-              </a:rPr>
-              <a:t>136</a:t>
+                  <a:srgbClr val="2C7A57"/>
+                </a:solidFill>
+                <a:latin typeface="Calibri" pitchFamily="34" charset="0"/>
+                <a:ea typeface="Calibri" pitchFamily="34" charset="-122"/>
+                <a:cs typeface="Calibri" pitchFamily="34" charset="-120"/>
+              </a:rPr>
+              <a:t>$524</a:t>
             </a:r>
             <a:endParaRPr lang="en-US" sz="1000" dirty="0"/>
           </a:p>
@@ -8986,14 +8185,14 @@
       </p:sp>
       <p:sp>
         <p:nvSpPr>
-          <p:cNvPr id="32" name="Text 29"/>
-          <p:cNvSpPr/>
-          <p:nvPr/>
-        </p:nvSpPr>
-        <p:spPr>
-          <a:xfrm>
-            <a:off x="6263640" y="5047488"/>
-            <a:ext cx="4023360" cy="237744"/>
+          <p:cNvPr id="33" name="Text 30"/>
+          <p:cNvSpPr/>
+          <p:nvPr/>
+        </p:nvSpPr>
+        <p:spPr>
+          <a:xfrm>
+            <a:off x="6263640" y="5477256"/>
+            <a:ext cx="4023360" cy="274320"/>
           </a:xfrm>
           <a:prstGeom prst="rect">
             <a:avLst/>
@@ -9017,7 +8216,7 @@
                 <a:ea typeface="Calibri" pitchFamily="34" charset="-122"/>
                 <a:cs typeface="Calibri" pitchFamily="34" charset="-120"/>
               </a:rPr>
-              <a:t>Monitor (low value, low risk)</a:t>
+              <a:t>P0000 — Bars (new market)</a:t>
             </a:r>
             <a:endParaRPr lang="en-US" sz="1000" dirty="0"/>
           </a:p>
@@ -9025,14 +8224,14 @@
       </p:sp>
       <p:sp>
         <p:nvSpPr>
-          <p:cNvPr id="33" name="Text 30"/>
-          <p:cNvSpPr/>
-          <p:nvPr/>
-        </p:nvSpPr>
-        <p:spPr>
-          <a:xfrm>
-            <a:off x="10195560" y="5047488"/>
-            <a:ext cx="1463040" cy="237744"/>
+          <p:cNvPr id="34" name="Text 31"/>
+          <p:cNvSpPr/>
+          <p:nvPr/>
+        </p:nvSpPr>
+        <p:spPr>
+          <a:xfrm>
+            <a:off x="10195560" y="5477256"/>
+            <a:ext cx="1463040" cy="274320"/>
           </a:xfrm>
           <a:prstGeom prst="rect">
             <a:avLst/>
@@ -9050,13 +8249,133 @@
             <a:r>
               <a:rPr lang="en-US" sz="1000" b="1" dirty="0">
                 <a:solidFill>
+                  <a:srgbClr val="2C7A57"/>
+                </a:solidFill>
+                <a:latin typeface="Calibri" pitchFamily="34" charset="0"/>
+                <a:ea typeface="Calibri" pitchFamily="34" charset="-122"/>
+                <a:cs typeface="Calibri" pitchFamily="34" charset="-120"/>
+              </a:rPr>
+              <a:t>$500</a:t>
+            </a:r>
+            <a:endParaRPr lang="en-US" sz="1000" dirty="0"/>
+          </a:p>
+        </p:txBody>
+      </p:sp>
+      <p:sp>
+        <p:nvSpPr>
+          <p:cNvPr id="35" name="Text 32"/>
+          <p:cNvSpPr/>
+          <p:nvPr/>
+        </p:nvSpPr>
+        <p:spPr>
+          <a:xfrm>
+            <a:off x="6263640" y="5769864"/>
+            <a:ext cx="4023360" cy="274320"/>
+          </a:xfrm>
+          <a:prstGeom prst="rect">
+            <a:avLst/>
+          </a:prstGeom>
+          <a:noFill/>
+          <a:ln/>
+        </p:spPr>
+        <p:txBody>
+          <a:bodyPr wrap="square" rtlCol="0" anchor="ctr"/>
+          <a:lstStyle/>
+          <a:p>
+            <a:pPr indent="0" marL="0">
+              <a:buNone/>
+            </a:pPr>
+            <a:r>
+              <a:rPr lang="en-US" sz="1000" dirty="0">
+                <a:solidFill>
+                  <a:srgbClr val="1A1A2E"/>
+                </a:solidFill>
+                <a:latin typeface="Calibri" pitchFamily="34" charset="0"/>
+                <a:ea typeface="Calibri" pitchFamily="34" charset="-122"/>
+                <a:cs typeface="Calibri" pitchFamily="34" charset="-120"/>
+              </a:rPr>
+              <a:t>P0001 — Bars (new market)</a:t>
+            </a:r>
+            <a:endParaRPr lang="en-US" sz="1000" dirty="0"/>
+          </a:p>
+        </p:txBody>
+      </p:sp>
+      <p:sp>
+        <p:nvSpPr>
+          <p:cNvPr id="36" name="Text 33"/>
+          <p:cNvSpPr/>
+          <p:nvPr/>
+        </p:nvSpPr>
+        <p:spPr>
+          <a:xfrm>
+            <a:off x="10195560" y="5769864"/>
+            <a:ext cx="1463040" cy="274320"/>
+          </a:xfrm>
+          <a:prstGeom prst="rect">
+            <a:avLst/>
+          </a:prstGeom>
+          <a:noFill/>
+          <a:ln/>
+        </p:spPr>
+        <p:txBody>
+          <a:bodyPr wrap="square" rtlCol="0" anchor="ctr"/>
+          <a:lstStyle/>
+          <a:p>
+            <a:pPr algn="r" indent="0" marL="0">
+              <a:buNone/>
+            </a:pPr>
+            <a:r>
+              <a:rPr lang="en-US" sz="1000" b="1" dirty="0">
+                <a:solidFill>
+                  <a:srgbClr val="2C7A57"/>
+                </a:solidFill>
+                <a:latin typeface="Calibri" pitchFamily="34" charset="0"/>
+                <a:ea typeface="Calibri" pitchFamily="34" charset="-122"/>
+                <a:cs typeface="Calibri" pitchFamily="34" charset="-120"/>
+              </a:rPr>
+              <a:t>$496</a:t>
+            </a:r>
+            <a:endParaRPr lang="en-US" sz="1000" dirty="0"/>
+          </a:p>
+        </p:txBody>
+      </p:sp>
+      <p:sp>
+        <p:nvSpPr>
+          <p:cNvPr id="37" name="Text 34"/>
+          <p:cNvSpPr/>
+          <p:nvPr/>
+        </p:nvSpPr>
+        <p:spPr>
+          <a:xfrm>
+            <a:off x="548640" y="6080760"/>
+            <a:ext cx="11064240" cy="411480"/>
+          </a:xfrm>
+          <a:prstGeom prst="rect">
+            <a:avLst/>
+          </a:prstGeom>
+          <a:noFill/>
+          <a:ln/>
+        </p:spPr>
+        <p:txBody>
+          <a:bodyPr wrap="square" rtlCol="0" anchor="ctr"/>
+          <a:lstStyle/>
+          <a:p>
+            <a:pPr indent="0" marL="0">
+              <a:lnSpc>
+                <a:spcPts val="1200"/>
+              </a:lnSpc>
+              <a:buNone/>
+            </a:pPr>
+            <a:r>
+              <a:rPr lang="en-US" sz="1000" i="1" dirty="0">
+                <a:solidFill>
                   <a:srgbClr val="5B6178"/>
                 </a:solidFill>
                 <a:latin typeface="Calibri" pitchFamily="34" charset="0"/>
                 <a:ea typeface="Calibri" pitchFamily="34" charset="-122"/>
                 <a:cs typeface="Calibri" pitchFamily="34" charset="-120"/>
               </a:rPr>
-              <a:t>136</a:t>
+              <a:t>Flags come from 5-fold out-of-fold predictions, never a model scoring the venue it was trained on. The calibrated-lift feature carries near-zero importance — honest, since it's constant within venue_type once venue_type itself is a feature.</a:t>
             </a:r>
             <a:endParaRPr lang="en-US" sz="1000" dirty="0"/>
           </a:p>
@@ -9064,205 +8383,7 @@
       </p:sp>
       <p:sp>
         <p:nvSpPr>
-          <p:cNvPr id="34" name="Text 31"/>
-          <p:cNvSpPr/>
-          <p:nvPr/>
-        </p:nvSpPr>
-        <p:spPr>
-          <a:xfrm>
-            <a:off x="6263640" y="5294376"/>
-            <a:ext cx="4023360" cy="237744"/>
-          </a:xfrm>
-          <a:prstGeom prst="rect">
-            <a:avLst/>
-          </a:prstGeom>
-          <a:noFill/>
-          <a:ln/>
-        </p:spPr>
-        <p:txBody>
-          <a:bodyPr wrap="square" rtlCol="0" anchor="ctr"/>
-          <a:lstStyle/>
-          <a:p>
-            <a:pPr indent="0" marL="0">
-              <a:buNone/>
-            </a:pPr>
-            <a:r>
-              <a:rPr lang="en-US" sz="1000" dirty="0">
-                <a:solidFill>
-                  <a:srgbClr val="1A1A2E"/>
-                </a:solidFill>
-                <a:latin typeface="Calibri" pitchFamily="34" charset="0"/>
-                <a:ea typeface="Calibri" pitchFamily="34" charset="-122"/>
-                <a:cs typeface="Calibri" pitchFamily="34" charset="-120"/>
-              </a:rPr>
-              <a:t>Protect (high value, low risk)</a:t>
-            </a:r>
-            <a:endParaRPr lang="en-US" sz="1000" dirty="0"/>
-          </a:p>
-        </p:txBody>
-      </p:sp>
-      <p:sp>
-        <p:nvSpPr>
-          <p:cNvPr id="35" name="Text 32"/>
-          <p:cNvSpPr/>
-          <p:nvPr/>
-        </p:nvSpPr>
-        <p:spPr>
-          <a:xfrm>
-            <a:off x="10195560" y="5294376"/>
-            <a:ext cx="1463040" cy="237744"/>
-          </a:xfrm>
-          <a:prstGeom prst="rect">
-            <a:avLst/>
-          </a:prstGeom>
-          <a:noFill/>
-          <a:ln/>
-        </p:spPr>
-        <p:txBody>
-          <a:bodyPr wrap="square" rtlCol="0" anchor="ctr"/>
-          <a:lstStyle/>
-          <a:p>
-            <a:pPr algn="r" indent="0" marL="0">
-              <a:buNone/>
-            </a:pPr>
-            <a:r>
-              <a:rPr lang="en-US" sz="1000" b="1" dirty="0">
-                <a:solidFill>
-                  <a:srgbClr val="2C7A57"/>
-                </a:solidFill>
-                <a:latin typeface="Calibri" pitchFamily="34" charset="0"/>
-                <a:ea typeface="Calibri" pitchFamily="34" charset="-122"/>
-                <a:cs typeface="Calibri" pitchFamily="34" charset="-120"/>
-              </a:rPr>
-              <a:t>64</a:t>
-            </a:r>
-            <a:endParaRPr lang="en-US" sz="1000" dirty="0"/>
-          </a:p>
-        </p:txBody>
-      </p:sp>
-      <p:sp>
-        <p:nvSpPr>
-          <p:cNvPr id="36" name="Text 33"/>
-          <p:cNvSpPr/>
-          <p:nvPr/>
-        </p:nvSpPr>
-        <p:spPr>
-          <a:xfrm>
-            <a:off x="6263640" y="5541264"/>
-            <a:ext cx="4023360" cy="237744"/>
-          </a:xfrm>
-          <a:prstGeom prst="rect">
-            <a:avLst/>
-          </a:prstGeom>
-          <a:noFill/>
-          <a:ln/>
-        </p:spPr>
-        <p:txBody>
-          <a:bodyPr wrap="square" rtlCol="0" anchor="ctr"/>
-          <a:lstStyle/>
-          <a:p>
-            <a:pPr indent="0" marL="0">
-              <a:buNone/>
-            </a:pPr>
-            <a:r>
-              <a:rPr lang="en-US" sz="1000" dirty="0">
-                <a:solidFill>
-                  <a:srgbClr val="1A1A2E"/>
-                </a:solidFill>
-                <a:latin typeface="Calibri" pitchFamily="34" charset="0"/>
-                <a:ea typeface="Calibri" pitchFamily="34" charset="-122"/>
-                <a:cs typeface="Calibri" pitchFamily="34" charset="-120"/>
-              </a:rPr>
-              <a:t>Low priority (low value, high risk)</a:t>
-            </a:r>
-            <a:endParaRPr lang="en-US" sz="1000" dirty="0"/>
-          </a:p>
-        </p:txBody>
-      </p:sp>
-      <p:sp>
-        <p:nvSpPr>
-          <p:cNvPr id="37" name="Text 34"/>
-          <p:cNvSpPr/>
-          <p:nvPr/>
-        </p:nvSpPr>
-        <p:spPr>
-          <a:xfrm>
-            <a:off x="10195560" y="5541264"/>
-            <a:ext cx="1463040" cy="237744"/>
-          </a:xfrm>
-          <a:prstGeom prst="rect">
-            <a:avLst/>
-          </a:prstGeom>
-          <a:noFill/>
-          <a:ln/>
-        </p:spPr>
-        <p:txBody>
-          <a:bodyPr wrap="square" rtlCol="0" anchor="ctr"/>
-          <a:lstStyle/>
-          <a:p>
-            <a:pPr algn="r" indent="0" marL="0">
-              <a:buNone/>
-            </a:pPr>
-            <a:r>
-              <a:rPr lang="en-US" sz="1000" b="1" dirty="0">
-                <a:solidFill>
-                  <a:srgbClr val="5B6178"/>
-                </a:solidFill>
-                <a:latin typeface="Calibri" pitchFamily="34" charset="0"/>
-                <a:ea typeface="Calibri" pitchFamily="34" charset="-122"/>
-                <a:cs typeface="Calibri" pitchFamily="34" charset="-120"/>
-              </a:rPr>
-              <a:t>64</a:t>
-            </a:r>
-            <a:endParaRPr lang="en-US" sz="1000" dirty="0"/>
-          </a:p>
-        </p:txBody>
-      </p:sp>
-      <p:sp>
-        <p:nvSpPr>
           <p:cNvPr id="38" name="Text 35"/>
-          <p:cNvSpPr/>
-          <p:nvPr/>
-        </p:nvSpPr>
-        <p:spPr>
-          <a:xfrm>
-            <a:off x="548640" y="6016752"/>
-            <a:ext cx="11064240" cy="548640"/>
-          </a:xfrm>
-          <a:prstGeom prst="rect">
-            <a:avLst/>
-          </a:prstGeom>
-          <a:noFill/>
-          <a:ln/>
-        </p:spPr>
-        <p:txBody>
-          <a:bodyPr wrap="square" rtlCol="0" anchor="ctr"/>
-          <a:lstStyle/>
-          <a:p>
-            <a:pPr indent="0" marL="0">
-              <a:lnSpc>
-                <a:spcPts val="1050"/>
-              </a:lnSpc>
-              <a:buNone/>
-            </a:pPr>
-            <a:r>
-              <a:rPr lang="en-US" sz="870" i="1" dirty="0">
-                <a:solidFill>
-                  <a:srgbClr val="5B6178"/>
-                </a:solidFill>
-                <a:latin typeface="Calibri" pitchFamily="34" charset="0"/>
-                <a:ea typeface="Calibri" pitchFamily="34" charset="-122"/>
-                <a:cs typeface="Calibri" pitchFamily="34" charset="-120"/>
-              </a:rPr>
-              <a:t>Flags come from 5-fold OOF predictions; AUC/PR-AUC read modest next to the revenue model's R² only because the oracle ceiling here is 0.73 AUC. realized_ad_revenue's importance is a venue_type confound, not a causal driver. Each "Save now" / flagged venue also carries a SHAP top driver (from the fold model that never saw it) mapped to a concrete action — technical dispatch, AM retention call, content review — not a generic "reach out."</a:t>
-            </a:r>
-            <a:endParaRPr lang="en-US" sz="870" dirty="0"/>
-          </a:p>
-        </p:txBody>
-      </p:sp>
-      <p:sp>
-        <p:nvSpPr>
-          <p:cNvPr id="39" name="Text 36"/>
           <p:cNvSpPr/>
           <p:nvPr/>
         </p:nvSpPr>
@@ -9293,7 +8414,7 @@
                 <a:ea typeface="Calibri" pitchFamily="34" charset="-122"/>
                 <a:cs typeface="Calibri" pitchFamily="34" charset="-120"/>
               </a:rPr>
-              <a:t>Venue retention</a:t>
+              <a:t>Venue economics</a:t>
             </a:r>
             <a:endParaRPr lang="en-US" sz="900" dirty="0"/>
           </a:p>
@@ -9310,6 +8431,1420 @@
 <file path=ppt/slides/slide15.xml><?xml version="1.0" encoding="utf-8"?>
 <p:sld xmlns:a="http://schemas.openxmlformats.org/drawingml/2006/main" xmlns:r="http://schemas.openxmlformats.org/officeDocument/2006/relationships" xmlns:p="http://schemas.openxmlformats.org/presentationml/2006/main">
   <p:cSld name="Slide 15">
+    <p:bg>
+      <p:bgPr>
+        <a:solidFill>
+          <a:srgbClr val="FFFFFF"/>
+        </a:solidFill>
+      </p:bgPr>
+    </p:bg>
+    <p:spTree>
+      <p:nvGrpSpPr>
+        <p:cNvPr id="1" name=""/>
+        <p:cNvGrpSpPr/>
+        <p:nvPr/>
+      </p:nvGrpSpPr>
+      <p:grpSpPr>
+        <a:xfrm>
+          <a:off x="0" y="0"/>
+          <a:ext cx="0" cy="0"/>
+          <a:chOff x="0" y="0"/>
+          <a:chExt cx="0" cy="0"/>
+        </a:xfrm>
+      </p:grpSpPr>
+      <p:sp>
+        <p:nvSpPr>
+          <p:cNvPr id="2" name="Text 0"/>
+          <p:cNvSpPr/>
+          <p:nvPr/>
+        </p:nvSpPr>
+        <p:spPr>
+          <a:xfrm>
+            <a:off x="548640" y="411480"/>
+            <a:ext cx="11155680" cy="594360"/>
+          </a:xfrm>
+          <a:prstGeom prst="rect">
+            <a:avLst/>
+          </a:prstGeom>
+          <a:noFill/>
+          <a:ln/>
+        </p:spPr>
+        <p:txBody>
+          <a:bodyPr wrap="square" rtlCol="0" anchor="ctr"/>
+          <a:lstStyle/>
+          <a:p>
+            <a:pPr indent="0" marL="0">
+              <a:buNone/>
+            </a:pPr>
+            <a:r>
+              <a:rPr lang="en-US" sz="2500" b="1" dirty="0">
+                <a:solidFill>
+                  <a:srgbClr val="1E2761"/>
+                </a:solidFill>
+                <a:latin typeface="Cambria" pitchFamily="34" charset="0"/>
+                <a:ea typeface="Cambria" pitchFamily="34" charset="-122"/>
+                <a:cs typeface="Cambria" pitchFamily="34" charset="-120"/>
+              </a:rPr>
+              <a:t>Predicting venue churn risk, honestly</a:t>
+            </a:r>
+            <a:endParaRPr lang="en-US" sz="2500" dirty="0"/>
+          </a:p>
+        </p:txBody>
+      </p:sp>
+      <p:sp>
+        <p:nvSpPr>
+          <p:cNvPr id="3" name="Shape 1"/>
+          <p:cNvSpPr/>
+          <p:nvPr/>
+        </p:nvSpPr>
+        <p:spPr>
+          <a:xfrm>
+            <a:off x="8229600" y="146304"/>
+            <a:ext cx="3410712" cy="246888"/>
+          </a:xfrm>
+          <a:prstGeom prst="roundRect">
+            <a:avLst>
+              <a:gd name="adj" fmla="val 22222"/>
+            </a:avLst>
+          </a:prstGeom>
+          <a:solidFill>
+            <a:srgbClr val="FFFFFF"/>
+          </a:solidFill>
+          <a:ln w="15875">
+            <a:solidFill>
+              <a:srgbClr val="8E3B60"/>
+            </a:solidFill>
+            <a:prstDash val="solid"/>
+          </a:ln>
+        </p:spPr>
+      </p:sp>
+      <p:sp>
+        <p:nvSpPr>
+          <p:cNvPr id="4" name="Text 2"/>
+          <p:cNvSpPr/>
+          <p:nvPr/>
+        </p:nvSpPr>
+        <p:spPr>
+          <a:xfrm>
+            <a:off x="8229600" y="146304"/>
+            <a:ext cx="3410712" cy="246888"/>
+          </a:xfrm>
+          <a:prstGeom prst="rect">
+            <a:avLst/>
+          </a:prstGeom>
+          <a:noFill/>
+          <a:ln/>
+        </p:spPr>
+        <p:txBody>
+          <a:bodyPr wrap="square" rtlCol="0" anchor="ctr"/>
+          <a:lstStyle/>
+          <a:p>
+            <a:pPr algn="ctr" indent="0" marL="0">
+              <a:buNone/>
+            </a:pPr>
+            <a:r>
+              <a:rPr lang="en-US" sz="950" b="1" dirty="0">
+                <a:solidFill>
+                  <a:srgbClr val="8E3B60"/>
+                </a:solidFill>
+                <a:latin typeface="Calibri" pitchFamily="34" charset="0"/>
+                <a:ea typeface="Calibri" pitchFamily="34" charset="-122"/>
+                <a:cs typeface="Calibri" pitchFamily="34" charset="-120"/>
+              </a:rPr>
+              <a:t>Step 6 of 6 · Answers Q4</a:t>
+            </a:r>
+            <a:endParaRPr lang="en-US" sz="950" dirty="0"/>
+          </a:p>
+        </p:txBody>
+      </p:sp>
+      <p:sp>
+        <p:nvSpPr>
+          <p:cNvPr id="5" name="Text 3"/>
+          <p:cNvSpPr/>
+          <p:nvPr/>
+        </p:nvSpPr>
+        <p:spPr>
+          <a:xfrm>
+            <a:off x="548640" y="1005840"/>
+            <a:ext cx="10972800" cy="365760"/>
+          </a:xfrm>
+          <a:prstGeom prst="rect">
+            <a:avLst/>
+          </a:prstGeom>
+          <a:noFill/>
+          <a:ln/>
+        </p:spPr>
+        <p:txBody>
+          <a:bodyPr wrap="square" rtlCol="0" anchor="ctr"/>
+          <a:lstStyle/>
+          <a:p>
+            <a:pPr indent="0" marL="0">
+              <a:buNone/>
+            </a:pPr>
+            <a:r>
+              <a:rPr lang="en-US" sz="1200" i="1" dirty="0">
+                <a:solidFill>
+                  <a:srgbClr val="5B6178"/>
+                </a:solidFill>
+                <a:latin typeface="Calibri" pitchFamily="34" charset="0"/>
+                <a:ea typeface="Calibri" pitchFamily="34" charset="-122"/>
+                <a:cs typeface="Calibri" pitchFamily="34" charset="-120"/>
+              </a:rPr>
+              <a:t>Gradient-boosted classifier on ops-visible signals (engagement, uptime, complaints, competitor outreach) — the other half of "what makes a venue valuable and what puts it at risk."</a:t>
+            </a:r>
+            <a:endParaRPr lang="en-US" sz="1200" dirty="0"/>
+          </a:p>
+        </p:txBody>
+      </p:sp>
+      <p:sp>
+        <p:nvSpPr>
+          <p:cNvPr id="6" name="Shape 4"/>
+          <p:cNvSpPr/>
+          <p:nvPr/>
+        </p:nvSpPr>
+        <p:spPr>
+          <a:xfrm>
+            <a:off x="548640" y="1508760"/>
+            <a:ext cx="2651760" cy="1051560"/>
+          </a:xfrm>
+          <a:prstGeom prst="roundRect">
+            <a:avLst>
+              <a:gd name="adj" fmla="val 6957"/>
+            </a:avLst>
+          </a:prstGeom>
+          <a:solidFill>
+            <a:srgbClr val="F5F7FC"/>
+          </a:solidFill>
+          <a:ln/>
+        </p:spPr>
+      </p:sp>
+      <p:sp>
+        <p:nvSpPr>
+          <p:cNvPr id="7" name="Text 5"/>
+          <p:cNvSpPr/>
+          <p:nvPr/>
+        </p:nvSpPr>
+        <p:spPr>
+          <a:xfrm>
+            <a:off x="685800" y="1618488"/>
+            <a:ext cx="2377440" cy="502920"/>
+          </a:xfrm>
+          <a:prstGeom prst="rect">
+            <a:avLst/>
+          </a:prstGeom>
+          <a:noFill/>
+          <a:ln/>
+        </p:spPr>
+        <p:txBody>
+          <a:bodyPr wrap="square" rtlCol="0" anchor="ctr"/>
+          <a:lstStyle/>
+          <a:p>
+            <a:pPr indent="0" marL="0">
+              <a:buNone/>
+            </a:pPr>
+            <a:r>
+              <a:rPr lang="en-US" sz="2200" b="1" dirty="0">
+                <a:solidFill>
+                  <a:srgbClr val="1E2761"/>
+                </a:solidFill>
+                <a:latin typeface="Calibri" pitchFamily="34" charset="0"/>
+                <a:ea typeface="Calibri" pitchFamily="34" charset="-122"/>
+                <a:cs typeface="Calibri" pitchFamily="34" charset="-120"/>
+              </a:rPr>
+              <a:t>0.65</a:t>
+            </a:r>
+            <a:endParaRPr lang="en-US" sz="2200" dirty="0"/>
+          </a:p>
+        </p:txBody>
+      </p:sp>
+      <p:sp>
+        <p:nvSpPr>
+          <p:cNvPr id="8" name="Text 6"/>
+          <p:cNvSpPr/>
+          <p:nvPr/>
+        </p:nvSpPr>
+        <p:spPr>
+          <a:xfrm>
+            <a:off x="685800" y="2130552"/>
+            <a:ext cx="2377440" cy="365760"/>
+          </a:xfrm>
+          <a:prstGeom prst="rect">
+            <a:avLst/>
+          </a:prstGeom>
+          <a:noFill/>
+          <a:ln/>
+        </p:spPr>
+        <p:txBody>
+          <a:bodyPr wrap="square" rtlCol="0" anchor="ctr"/>
+          <a:lstStyle/>
+          <a:p>
+            <a:pPr indent="0" marL="0">
+              <a:buNone/>
+            </a:pPr>
+            <a:r>
+              <a:rPr lang="en-US" sz="900" dirty="0">
+                <a:solidFill>
+                  <a:srgbClr val="5B6178"/>
+                </a:solidFill>
+                <a:latin typeface="Calibri" pitchFamily="34" charset="0"/>
+                <a:ea typeface="Calibri" pitchFamily="34" charset="-122"/>
+                <a:cs typeface="Calibri" pitchFamily="34" charset="-120"/>
+              </a:rPr>
+              <a:t>Held-out AUC</a:t>
+            </a:r>
+            <a:endParaRPr lang="en-US" sz="900" dirty="0"/>
+          </a:p>
+        </p:txBody>
+      </p:sp>
+      <p:sp>
+        <p:nvSpPr>
+          <p:cNvPr id="9" name="Shape 7"/>
+          <p:cNvSpPr/>
+          <p:nvPr/>
+        </p:nvSpPr>
+        <p:spPr>
+          <a:xfrm>
+            <a:off x="3337560" y="1508760"/>
+            <a:ext cx="2651760" cy="1051560"/>
+          </a:xfrm>
+          <a:prstGeom prst="roundRect">
+            <a:avLst>
+              <a:gd name="adj" fmla="val 6957"/>
+            </a:avLst>
+          </a:prstGeom>
+          <a:solidFill>
+            <a:srgbClr val="F5F7FC"/>
+          </a:solidFill>
+          <a:ln/>
+        </p:spPr>
+      </p:sp>
+      <p:sp>
+        <p:nvSpPr>
+          <p:cNvPr id="10" name="Text 8"/>
+          <p:cNvSpPr/>
+          <p:nvPr/>
+        </p:nvSpPr>
+        <p:spPr>
+          <a:xfrm>
+            <a:off x="3474720" y="1618488"/>
+            <a:ext cx="2377440" cy="502920"/>
+          </a:xfrm>
+          <a:prstGeom prst="rect">
+            <a:avLst/>
+          </a:prstGeom>
+          <a:noFill/>
+          <a:ln/>
+        </p:spPr>
+        <p:txBody>
+          <a:bodyPr wrap="square" rtlCol="0" anchor="ctr"/>
+          <a:lstStyle/>
+          <a:p>
+            <a:pPr indent="0" marL="0">
+              <a:buNone/>
+            </a:pPr>
+            <a:r>
+              <a:rPr lang="en-US" sz="2200" b="1" dirty="0">
+                <a:solidFill>
+                  <a:srgbClr val="1E2761"/>
+                </a:solidFill>
+                <a:latin typeface="Calibri" pitchFamily="34" charset="0"/>
+                <a:ea typeface="Calibri" pitchFamily="34" charset="-122"/>
+                <a:cs typeface="Calibri" pitchFamily="34" charset="-120"/>
+              </a:rPr>
+              <a:t>0.27</a:t>
+            </a:r>
+            <a:endParaRPr lang="en-US" sz="2200" dirty="0"/>
+          </a:p>
+        </p:txBody>
+      </p:sp>
+      <p:sp>
+        <p:nvSpPr>
+          <p:cNvPr id="11" name="Text 9"/>
+          <p:cNvSpPr/>
+          <p:nvPr/>
+        </p:nvSpPr>
+        <p:spPr>
+          <a:xfrm>
+            <a:off x="3474720" y="2130552"/>
+            <a:ext cx="2377440" cy="365760"/>
+          </a:xfrm>
+          <a:prstGeom prst="rect">
+            <a:avLst/>
+          </a:prstGeom>
+          <a:noFill/>
+          <a:ln/>
+        </p:spPr>
+        <p:txBody>
+          <a:bodyPr wrap="square" rtlCol="0" anchor="ctr"/>
+          <a:lstStyle/>
+          <a:p>
+            <a:pPr indent="0" marL="0">
+              <a:buNone/>
+            </a:pPr>
+            <a:r>
+              <a:rPr lang="en-US" sz="900" dirty="0">
+                <a:solidFill>
+                  <a:srgbClr val="5B6178"/>
+                </a:solidFill>
+                <a:latin typeface="Calibri" pitchFamily="34" charset="0"/>
+                <a:ea typeface="Calibri" pitchFamily="34" charset="-122"/>
+                <a:cs typeface="Calibri" pitchFamily="34" charset="-120"/>
+              </a:rPr>
+              <a:t>Held-out PR-AUC</a:t>
+            </a:r>
+            <a:endParaRPr lang="en-US" sz="900" dirty="0"/>
+          </a:p>
+        </p:txBody>
+      </p:sp>
+      <p:sp>
+        <p:nvSpPr>
+          <p:cNvPr id="12" name="Shape 10"/>
+          <p:cNvSpPr/>
+          <p:nvPr/>
+        </p:nvSpPr>
+        <p:spPr>
+          <a:xfrm>
+            <a:off x="6126480" y="1508760"/>
+            <a:ext cx="2651760" cy="1051560"/>
+          </a:xfrm>
+          <a:prstGeom prst="roundRect">
+            <a:avLst>
+              <a:gd name="adj" fmla="val 6957"/>
+            </a:avLst>
+          </a:prstGeom>
+          <a:solidFill>
+            <a:srgbClr val="F5F7FC"/>
+          </a:solidFill>
+          <a:ln/>
+        </p:spPr>
+      </p:sp>
+      <p:sp>
+        <p:nvSpPr>
+          <p:cNvPr id="13" name="Text 11"/>
+          <p:cNvSpPr/>
+          <p:nvPr/>
+        </p:nvSpPr>
+        <p:spPr>
+          <a:xfrm>
+            <a:off x="6263640" y="1618488"/>
+            <a:ext cx="2377440" cy="502920"/>
+          </a:xfrm>
+          <a:prstGeom prst="rect">
+            <a:avLst/>
+          </a:prstGeom>
+          <a:noFill/>
+          <a:ln/>
+        </p:spPr>
+        <p:txBody>
+          <a:bodyPr wrap="square" rtlCol="0" anchor="ctr"/>
+          <a:lstStyle/>
+          <a:p>
+            <a:pPr indent="0" marL="0">
+              <a:buNone/>
+            </a:pPr>
+            <a:r>
+              <a:rPr lang="en-US" sz="2200" b="1" dirty="0">
+                <a:solidFill>
+                  <a:srgbClr val="1E2761"/>
+                </a:solidFill>
+                <a:latin typeface="Calibri" pitchFamily="34" charset="0"/>
+                <a:ea typeface="Calibri" pitchFamily="34" charset="-122"/>
+                <a:cs typeface="Calibri" pitchFamily="34" charset="-120"/>
+              </a:rPr>
+              <a:t>0.13</a:t>
+            </a:r>
+            <a:endParaRPr lang="en-US" sz="2200" dirty="0"/>
+          </a:p>
+        </p:txBody>
+      </p:sp>
+      <p:sp>
+        <p:nvSpPr>
+          <p:cNvPr id="14" name="Text 12"/>
+          <p:cNvSpPr/>
+          <p:nvPr/>
+        </p:nvSpPr>
+        <p:spPr>
+          <a:xfrm>
+            <a:off x="6263640" y="2130552"/>
+            <a:ext cx="2377440" cy="365760"/>
+          </a:xfrm>
+          <a:prstGeom prst="rect">
+            <a:avLst/>
+          </a:prstGeom>
+          <a:noFill/>
+          <a:ln/>
+        </p:spPr>
+        <p:txBody>
+          <a:bodyPr wrap="square" rtlCol="0" anchor="ctr"/>
+          <a:lstStyle/>
+          <a:p>
+            <a:pPr indent="0" marL="0">
+              <a:buNone/>
+            </a:pPr>
+            <a:r>
+              <a:rPr lang="en-US" sz="900" dirty="0">
+                <a:solidFill>
+                  <a:srgbClr val="5B6178"/>
+                </a:solidFill>
+                <a:latin typeface="Calibri" pitchFamily="34" charset="0"/>
+                <a:ea typeface="Calibri" pitchFamily="34" charset="-122"/>
+                <a:cs typeface="Calibri" pitchFamily="34" charset="-120"/>
+              </a:rPr>
+              <a:t>Brier score</a:t>
+            </a:r>
+            <a:endParaRPr lang="en-US" sz="900" dirty="0"/>
+          </a:p>
+        </p:txBody>
+      </p:sp>
+      <p:sp>
+        <p:nvSpPr>
+          <p:cNvPr id="15" name="Shape 13"/>
+          <p:cNvSpPr/>
+          <p:nvPr/>
+        </p:nvSpPr>
+        <p:spPr>
+          <a:xfrm>
+            <a:off x="8915400" y="1508760"/>
+            <a:ext cx="2651760" cy="1051560"/>
+          </a:xfrm>
+          <a:prstGeom prst="roundRect">
+            <a:avLst>
+              <a:gd name="adj" fmla="val 6957"/>
+            </a:avLst>
+          </a:prstGeom>
+          <a:solidFill>
+            <a:srgbClr val="F5F7FC"/>
+          </a:solidFill>
+          <a:ln/>
+        </p:spPr>
+      </p:sp>
+      <p:sp>
+        <p:nvSpPr>
+          <p:cNvPr id="16" name="Text 14"/>
+          <p:cNvSpPr/>
+          <p:nvPr/>
+        </p:nvSpPr>
+        <p:spPr>
+          <a:xfrm>
+            <a:off x="9052560" y="1618488"/>
+            <a:ext cx="2377440" cy="502920"/>
+          </a:xfrm>
+          <a:prstGeom prst="rect">
+            <a:avLst/>
+          </a:prstGeom>
+          <a:noFill/>
+          <a:ln/>
+        </p:spPr>
+        <p:txBody>
+          <a:bodyPr wrap="square" rtlCol="0" anchor="ctr"/>
+          <a:lstStyle/>
+          <a:p>
+            <a:pPr indent="0" marL="0">
+              <a:buNone/>
+            </a:pPr>
+            <a:r>
+              <a:rPr lang="en-US" sz="2200" b="1" dirty="0">
+                <a:solidFill>
+                  <a:srgbClr val="1E2761"/>
+                </a:solidFill>
+                <a:latin typeface="Calibri" pitchFamily="34" charset="0"/>
+                <a:ea typeface="Calibri" pitchFamily="34" charset="-122"/>
+                <a:cs typeface="Calibri" pitchFamily="34" charset="-120"/>
+              </a:rPr>
+              <a:t>20</a:t>
+            </a:r>
+            <a:endParaRPr lang="en-US" sz="2200" dirty="0"/>
+          </a:p>
+        </p:txBody>
+      </p:sp>
+      <p:sp>
+        <p:nvSpPr>
+          <p:cNvPr id="17" name="Text 15"/>
+          <p:cNvSpPr/>
+          <p:nvPr/>
+        </p:nvSpPr>
+        <p:spPr>
+          <a:xfrm>
+            <a:off x="9052560" y="2130552"/>
+            <a:ext cx="2377440" cy="365760"/>
+          </a:xfrm>
+          <a:prstGeom prst="rect">
+            <a:avLst/>
+          </a:prstGeom>
+          <a:noFill/>
+          <a:ln/>
+        </p:spPr>
+        <p:txBody>
+          <a:bodyPr wrap="square" rtlCol="0" anchor="ctr"/>
+          <a:lstStyle/>
+          <a:p>
+            <a:pPr indent="0" marL="0">
+              <a:buNone/>
+            </a:pPr>
+            <a:r>
+              <a:rPr lang="en-US" sz="900" dirty="0">
+                <a:solidFill>
+                  <a:srgbClr val="5B6178"/>
+                </a:solidFill>
+                <a:latin typeface="Calibri" pitchFamily="34" charset="0"/>
+                <a:ea typeface="Calibri" pitchFamily="34" charset="-122"/>
+                <a:cs typeface="Calibri" pitchFamily="34" charset="-120"/>
+              </a:rPr>
+              <a:t>Venues flagged</a:t>
+            </a:r>
+            <a:endParaRPr lang="en-US" sz="900" dirty="0"/>
+          </a:p>
+        </p:txBody>
+      </p:sp>
+      <p:graphicFrame>
+        <p:nvGraphicFramePr>
+          <p:cNvPr id="18" name="Chart 0" descr=""/>
+          <p:cNvGraphicFramePr/>
+          <p:nvPr/>
+        </p:nvGraphicFramePr>
+        <p:xfrm>
+          <a:off x="548640" y="2880360"/>
+          <a:ext cx="5394960" cy="3246120"/>
+        </p:xfrm>
+        <a:graphic xmlns:a="http://schemas.openxmlformats.org/drawingml/2006/main">
+          <a:graphicData uri="http://schemas.openxmlformats.org/drawingml/2006/chart">
+            <c:chart xmlns:c="http://schemas.openxmlformats.org/drawingml/2006/chart" r:id="rId1"/>
+          </a:graphicData>
+        </a:graphic>
+      </p:graphicFrame>
+      <p:sp>
+        <p:nvSpPr>
+          <p:cNvPr id="19" name="Text 16"/>
+          <p:cNvSpPr/>
+          <p:nvPr/>
+        </p:nvSpPr>
+        <p:spPr>
+          <a:xfrm>
+            <a:off x="6263640" y="2880360"/>
+            <a:ext cx="5394960" cy="256032"/>
+          </a:xfrm>
+          <a:prstGeom prst="rect">
+            <a:avLst/>
+          </a:prstGeom>
+          <a:noFill/>
+          <a:ln/>
+        </p:spPr>
+        <p:txBody>
+          <a:bodyPr wrap="square" rtlCol="0" anchor="ctr"/>
+          <a:lstStyle/>
+          <a:p>
+            <a:pPr indent="0" marL="0">
+              <a:buNone/>
+            </a:pPr>
+            <a:r>
+              <a:rPr lang="en-US" sz="1200" b="1" dirty="0">
+                <a:solidFill>
+                  <a:srgbClr val="1E2761"/>
+                </a:solidFill>
+                <a:latin typeface="Cambria" pitchFamily="34" charset="0"/>
+                <a:ea typeface="Cambria" pitchFamily="34" charset="-122"/>
+                <a:cs typeface="Cambria" pitchFamily="34" charset="-120"/>
+              </a:rPr>
+              <a:t>Top at-risk venues (of 20 flagged, by OOF risk)</a:t>
+            </a:r>
+            <a:endParaRPr lang="en-US" sz="1200" dirty="0"/>
+          </a:p>
+        </p:txBody>
+      </p:sp>
+      <p:sp>
+        <p:nvSpPr>
+          <p:cNvPr id="20" name="Text 17"/>
+          <p:cNvSpPr/>
+          <p:nvPr/>
+        </p:nvSpPr>
+        <p:spPr>
+          <a:xfrm>
+            <a:off x="6263640" y="3172968"/>
+            <a:ext cx="3977640" cy="219456"/>
+          </a:xfrm>
+          <a:prstGeom prst="rect">
+            <a:avLst/>
+          </a:prstGeom>
+          <a:noFill/>
+          <a:ln/>
+        </p:spPr>
+        <p:txBody>
+          <a:bodyPr wrap="square" rtlCol="0" anchor="ctr"/>
+          <a:lstStyle/>
+          <a:p>
+            <a:pPr indent="0" marL="0">
+              <a:buNone/>
+            </a:pPr>
+            <a:r>
+              <a:rPr lang="en-US" sz="1000" dirty="0">
+                <a:solidFill>
+                  <a:srgbClr val="1A1A2E"/>
+                </a:solidFill>
+                <a:latin typeface="Calibri" pitchFamily="34" charset="0"/>
+                <a:ea typeface="Calibri" pitchFamily="34" charset="-122"/>
+                <a:cs typeface="Calibri" pitchFamily="34" charset="-120"/>
+              </a:rPr>
+              <a:t>Venue #281 (Bars)</a:t>
+            </a:r>
+            <a:endParaRPr lang="en-US" sz="1000" dirty="0"/>
+          </a:p>
+        </p:txBody>
+      </p:sp>
+      <p:sp>
+        <p:nvSpPr>
+          <p:cNvPr id="21" name="Text 18"/>
+          <p:cNvSpPr/>
+          <p:nvPr/>
+        </p:nvSpPr>
+        <p:spPr>
+          <a:xfrm>
+            <a:off x="10241280" y="3172968"/>
+            <a:ext cx="1417320" cy="219456"/>
+          </a:xfrm>
+          <a:prstGeom prst="rect">
+            <a:avLst/>
+          </a:prstGeom>
+          <a:noFill/>
+          <a:ln/>
+        </p:spPr>
+        <p:txBody>
+          <a:bodyPr wrap="square" rtlCol="0" anchor="ctr"/>
+          <a:lstStyle/>
+          <a:p>
+            <a:pPr algn="r" indent="0" marL="0">
+              <a:buNone/>
+            </a:pPr>
+            <a:r>
+              <a:rPr lang="en-US" sz="1000" b="1" dirty="0">
+                <a:solidFill>
+                  <a:srgbClr val="B8500A"/>
+                </a:solidFill>
+                <a:latin typeface="Calibri" pitchFamily="34" charset="0"/>
+                <a:ea typeface="Calibri" pitchFamily="34" charset="-122"/>
+                <a:cs typeface="Calibri" pitchFamily="34" charset="-120"/>
+              </a:rPr>
+              <a:t>60%</a:t>
+            </a:r>
+            <a:endParaRPr lang="en-US" sz="1000" dirty="0"/>
+          </a:p>
+        </p:txBody>
+      </p:sp>
+      <p:sp>
+        <p:nvSpPr>
+          <p:cNvPr id="22" name="Text 19"/>
+          <p:cNvSpPr/>
+          <p:nvPr/>
+        </p:nvSpPr>
+        <p:spPr>
+          <a:xfrm>
+            <a:off x="6263640" y="3374136"/>
+            <a:ext cx="5394960" cy="201168"/>
+          </a:xfrm>
+          <a:prstGeom prst="rect">
+            <a:avLst/>
+          </a:prstGeom>
+          <a:noFill/>
+          <a:ln/>
+        </p:spPr>
+        <p:txBody>
+          <a:bodyPr wrap="square" rtlCol="0" anchor="ctr"/>
+          <a:lstStyle/>
+          <a:p>
+            <a:pPr indent="0" marL="0">
+              <a:buNone/>
+            </a:pPr>
+            <a:r>
+              <a:rPr lang="en-US" sz="900" i="1" dirty="0">
+                <a:solidFill>
+                  <a:srgbClr val="8A4B0A"/>
+                </a:solidFill>
+                <a:latin typeface="Calibri" pitchFamily="34" charset="0"/>
+                <a:ea typeface="Calibri" pitchFamily="34" charset="-122"/>
+                <a:cs typeface="Calibri" pitchFamily="34" charset="-120"/>
+              </a:rPr>
+              <a:t>engagement declining → content/placement review</a:t>
+            </a:r>
+            <a:endParaRPr lang="en-US" sz="900" dirty="0"/>
+          </a:p>
+        </p:txBody>
+      </p:sp>
+      <p:sp>
+        <p:nvSpPr>
+          <p:cNvPr id="23" name="Text 20"/>
+          <p:cNvSpPr/>
+          <p:nvPr/>
+        </p:nvSpPr>
+        <p:spPr>
+          <a:xfrm>
+            <a:off x="6263640" y="3593592"/>
+            <a:ext cx="3977640" cy="219456"/>
+          </a:xfrm>
+          <a:prstGeom prst="rect">
+            <a:avLst/>
+          </a:prstGeom>
+          <a:noFill/>
+          <a:ln/>
+        </p:spPr>
+        <p:txBody>
+          <a:bodyPr wrap="square" rtlCol="0" anchor="ctr"/>
+          <a:lstStyle/>
+          <a:p>
+            <a:pPr indent="0" marL="0">
+              <a:buNone/>
+            </a:pPr>
+            <a:r>
+              <a:rPr lang="en-US" sz="1000" dirty="0">
+                <a:solidFill>
+                  <a:srgbClr val="1A1A2E"/>
+                </a:solidFill>
+                <a:latin typeface="Calibri" pitchFamily="34" charset="0"/>
+                <a:ea typeface="Calibri" pitchFamily="34" charset="-122"/>
+                <a:cs typeface="Calibri" pitchFamily="34" charset="-120"/>
+              </a:rPr>
+              <a:t>Venue #200 (Bars)</a:t>
+            </a:r>
+            <a:endParaRPr lang="en-US" sz="1000" dirty="0"/>
+          </a:p>
+        </p:txBody>
+      </p:sp>
+      <p:sp>
+        <p:nvSpPr>
+          <p:cNvPr id="24" name="Text 21"/>
+          <p:cNvSpPr/>
+          <p:nvPr/>
+        </p:nvSpPr>
+        <p:spPr>
+          <a:xfrm>
+            <a:off x="10241280" y="3593592"/>
+            <a:ext cx="1417320" cy="219456"/>
+          </a:xfrm>
+          <a:prstGeom prst="rect">
+            <a:avLst/>
+          </a:prstGeom>
+          <a:noFill/>
+          <a:ln/>
+        </p:spPr>
+        <p:txBody>
+          <a:bodyPr wrap="square" rtlCol="0" anchor="ctr"/>
+          <a:lstStyle/>
+          <a:p>
+            <a:pPr algn="r" indent="0" marL="0">
+              <a:buNone/>
+            </a:pPr>
+            <a:r>
+              <a:rPr lang="en-US" sz="1000" b="1" dirty="0">
+                <a:solidFill>
+                  <a:srgbClr val="B8500A"/>
+                </a:solidFill>
+                <a:latin typeface="Calibri" pitchFamily="34" charset="0"/>
+                <a:ea typeface="Calibri" pitchFamily="34" charset="-122"/>
+                <a:cs typeface="Calibri" pitchFamily="34" charset="-120"/>
+              </a:rPr>
+              <a:t>55%</a:t>
+            </a:r>
+            <a:endParaRPr lang="en-US" sz="1000" dirty="0"/>
+          </a:p>
+        </p:txBody>
+      </p:sp>
+      <p:sp>
+        <p:nvSpPr>
+          <p:cNvPr id="25" name="Text 22"/>
+          <p:cNvSpPr/>
+          <p:nvPr/>
+        </p:nvSpPr>
+        <p:spPr>
+          <a:xfrm>
+            <a:off x="6263640" y="3794760"/>
+            <a:ext cx="5394960" cy="201168"/>
+          </a:xfrm>
+          <a:prstGeom prst="rect">
+            <a:avLst/>
+          </a:prstGeom>
+          <a:noFill/>
+          <a:ln/>
+        </p:spPr>
+        <p:txBody>
+          <a:bodyPr wrap="square" rtlCol="0" anchor="ctr"/>
+          <a:lstStyle/>
+          <a:p>
+            <a:pPr indent="0" marL="0">
+              <a:buNone/>
+            </a:pPr>
+            <a:r>
+              <a:rPr lang="en-US" sz="900" i="1" dirty="0">
+                <a:solidFill>
+                  <a:srgbClr val="8A4B0A"/>
+                </a:solidFill>
+                <a:latin typeface="Calibri" pitchFamily="34" charset="0"/>
+                <a:ea typeface="Calibri" pitchFamily="34" charset="-122"/>
+                <a:cs typeface="Calibri" pitchFamily="34" charset="-120"/>
+              </a:rPr>
+              <a:t>engagement declining → content/placement review</a:t>
+            </a:r>
+            <a:endParaRPr lang="en-US" sz="900" dirty="0"/>
+          </a:p>
+        </p:txBody>
+      </p:sp>
+      <p:sp>
+        <p:nvSpPr>
+          <p:cNvPr id="26" name="Text 23"/>
+          <p:cNvSpPr/>
+          <p:nvPr/>
+        </p:nvSpPr>
+        <p:spPr>
+          <a:xfrm>
+            <a:off x="6263640" y="4014216"/>
+            <a:ext cx="3977640" cy="219456"/>
+          </a:xfrm>
+          <a:prstGeom prst="rect">
+            <a:avLst/>
+          </a:prstGeom>
+          <a:noFill/>
+          <a:ln/>
+        </p:spPr>
+        <p:txBody>
+          <a:bodyPr wrap="square" rtlCol="0" anchor="ctr"/>
+          <a:lstStyle/>
+          <a:p>
+            <a:pPr indent="0" marL="0">
+              <a:buNone/>
+            </a:pPr>
+            <a:r>
+              <a:rPr lang="en-US" sz="1000" dirty="0">
+                <a:solidFill>
+                  <a:srgbClr val="1A1A2E"/>
+                </a:solidFill>
+                <a:latin typeface="Calibri" pitchFamily="34" charset="0"/>
+                <a:ea typeface="Calibri" pitchFamily="34" charset="-122"/>
+                <a:cs typeface="Calibri" pitchFamily="34" charset="-120"/>
+              </a:rPr>
+              <a:t>Venue #12 (Restaurants)</a:t>
+            </a:r>
+            <a:endParaRPr lang="en-US" sz="1000" dirty="0"/>
+          </a:p>
+        </p:txBody>
+      </p:sp>
+      <p:sp>
+        <p:nvSpPr>
+          <p:cNvPr id="27" name="Text 24"/>
+          <p:cNvSpPr/>
+          <p:nvPr/>
+        </p:nvSpPr>
+        <p:spPr>
+          <a:xfrm>
+            <a:off x="10241280" y="4014216"/>
+            <a:ext cx="1417320" cy="219456"/>
+          </a:xfrm>
+          <a:prstGeom prst="rect">
+            <a:avLst/>
+          </a:prstGeom>
+          <a:noFill/>
+          <a:ln/>
+        </p:spPr>
+        <p:txBody>
+          <a:bodyPr wrap="square" rtlCol="0" anchor="ctr"/>
+          <a:lstStyle/>
+          <a:p>
+            <a:pPr algn="r" indent="0" marL="0">
+              <a:buNone/>
+            </a:pPr>
+            <a:r>
+              <a:rPr lang="en-US" sz="1000" b="1" dirty="0">
+                <a:solidFill>
+                  <a:srgbClr val="B8500A"/>
+                </a:solidFill>
+                <a:latin typeface="Calibri" pitchFamily="34" charset="0"/>
+                <a:ea typeface="Calibri" pitchFamily="34" charset="-122"/>
+                <a:cs typeface="Calibri" pitchFamily="34" charset="-120"/>
+              </a:rPr>
+              <a:t>52%</a:t>
+            </a:r>
+            <a:endParaRPr lang="en-US" sz="1000" dirty="0"/>
+          </a:p>
+        </p:txBody>
+      </p:sp>
+      <p:sp>
+        <p:nvSpPr>
+          <p:cNvPr id="28" name="Text 25"/>
+          <p:cNvSpPr/>
+          <p:nvPr/>
+        </p:nvSpPr>
+        <p:spPr>
+          <a:xfrm>
+            <a:off x="6263640" y="4215384"/>
+            <a:ext cx="5394960" cy="201168"/>
+          </a:xfrm>
+          <a:prstGeom prst="rect">
+            <a:avLst/>
+          </a:prstGeom>
+          <a:noFill/>
+          <a:ln/>
+        </p:spPr>
+        <p:txBody>
+          <a:bodyPr wrap="square" rtlCol="0" anchor="ctr"/>
+          <a:lstStyle/>
+          <a:p>
+            <a:pPr indent="0" marL="0">
+              <a:buNone/>
+            </a:pPr>
+            <a:r>
+              <a:rPr lang="en-US" sz="900" i="1" dirty="0">
+                <a:solidFill>
+                  <a:srgbClr val="8A4B0A"/>
+                </a:solidFill>
+                <a:latin typeface="Calibri" pitchFamily="34" charset="0"/>
+                <a:ea typeface="Calibri" pitchFamily="34" charset="-122"/>
+                <a:cs typeface="Calibri" pitchFamily="34" charset="-120"/>
+              </a:rPr>
+              <a:t>uptime issue → dispatch technical support</a:t>
+            </a:r>
+            <a:endParaRPr lang="en-US" sz="900" dirty="0"/>
+          </a:p>
+        </p:txBody>
+      </p:sp>
+      <p:sp>
+        <p:nvSpPr>
+          <p:cNvPr id="29" name="Text 26"/>
+          <p:cNvSpPr/>
+          <p:nvPr/>
+        </p:nvSpPr>
+        <p:spPr>
+          <a:xfrm>
+            <a:off x="6263640" y="4526280"/>
+            <a:ext cx="5394960" cy="237744"/>
+          </a:xfrm>
+          <a:prstGeom prst="rect">
+            <a:avLst/>
+          </a:prstGeom>
+          <a:noFill/>
+          <a:ln/>
+        </p:spPr>
+        <p:txBody>
+          <a:bodyPr wrap="square" rtlCol="0" anchor="ctr"/>
+          <a:lstStyle/>
+          <a:p>
+            <a:pPr indent="0" marL="0">
+              <a:buNone/>
+            </a:pPr>
+            <a:r>
+              <a:rPr lang="en-US" sz="1200" b="1" dirty="0">
+                <a:solidFill>
+                  <a:srgbClr val="1E2761"/>
+                </a:solidFill>
+                <a:latin typeface="Cambria" pitchFamily="34" charset="0"/>
+                <a:ea typeface="Cambria" pitchFamily="34" charset="-122"/>
+                <a:cs typeface="Cambria" pitchFamily="34" charset="-120"/>
+              </a:rPr>
+              <a:t>Priority quadrant (Q3 revenue × Q4 risk)</a:t>
+            </a:r>
+            <a:endParaRPr lang="en-US" sz="1200" dirty="0"/>
+          </a:p>
+        </p:txBody>
+      </p:sp>
+      <p:sp>
+        <p:nvSpPr>
+          <p:cNvPr id="30" name="Text 27"/>
+          <p:cNvSpPr/>
+          <p:nvPr/>
+        </p:nvSpPr>
+        <p:spPr>
+          <a:xfrm>
+            <a:off x="6263640" y="4800600"/>
+            <a:ext cx="4023360" cy="237744"/>
+          </a:xfrm>
+          <a:prstGeom prst="rect">
+            <a:avLst/>
+          </a:prstGeom>
+          <a:noFill/>
+          <a:ln/>
+        </p:spPr>
+        <p:txBody>
+          <a:bodyPr wrap="square" rtlCol="0" anchor="ctr"/>
+          <a:lstStyle/>
+          <a:p>
+            <a:pPr indent="0" marL="0">
+              <a:buNone/>
+            </a:pPr>
+            <a:r>
+              <a:rPr lang="en-US" sz="1000" dirty="0">
+                <a:solidFill>
+                  <a:srgbClr val="1A1A2E"/>
+                </a:solidFill>
+                <a:latin typeface="Calibri" pitchFamily="34" charset="0"/>
+                <a:ea typeface="Calibri" pitchFamily="34" charset="-122"/>
+                <a:cs typeface="Calibri" pitchFamily="34" charset="-120"/>
+              </a:rPr>
+              <a:t>Save now (high value, high risk)</a:t>
+            </a:r>
+            <a:endParaRPr lang="en-US" sz="1000" dirty="0"/>
+          </a:p>
+        </p:txBody>
+      </p:sp>
+      <p:sp>
+        <p:nvSpPr>
+          <p:cNvPr id="31" name="Text 28"/>
+          <p:cNvSpPr/>
+          <p:nvPr/>
+        </p:nvSpPr>
+        <p:spPr>
+          <a:xfrm>
+            <a:off x="10195560" y="4800600"/>
+            <a:ext cx="1463040" cy="237744"/>
+          </a:xfrm>
+          <a:prstGeom prst="rect">
+            <a:avLst/>
+          </a:prstGeom>
+          <a:noFill/>
+          <a:ln/>
+        </p:spPr>
+        <p:txBody>
+          <a:bodyPr wrap="square" rtlCol="0" anchor="ctr"/>
+          <a:lstStyle/>
+          <a:p>
+            <a:pPr algn="r" indent="0" marL="0">
+              <a:buNone/>
+            </a:pPr>
+            <a:r>
+              <a:rPr lang="en-US" sz="1000" b="1" dirty="0">
+                <a:solidFill>
+                  <a:srgbClr val="B8500A"/>
+                </a:solidFill>
+                <a:latin typeface="Calibri" pitchFamily="34" charset="0"/>
+                <a:ea typeface="Calibri" pitchFamily="34" charset="-122"/>
+                <a:cs typeface="Calibri" pitchFamily="34" charset="-120"/>
+              </a:rPr>
+              <a:t>136</a:t>
+            </a:r>
+            <a:endParaRPr lang="en-US" sz="1000" dirty="0"/>
+          </a:p>
+        </p:txBody>
+      </p:sp>
+      <p:sp>
+        <p:nvSpPr>
+          <p:cNvPr id="32" name="Text 29"/>
+          <p:cNvSpPr/>
+          <p:nvPr/>
+        </p:nvSpPr>
+        <p:spPr>
+          <a:xfrm>
+            <a:off x="6263640" y="5047488"/>
+            <a:ext cx="4023360" cy="237744"/>
+          </a:xfrm>
+          <a:prstGeom prst="rect">
+            <a:avLst/>
+          </a:prstGeom>
+          <a:noFill/>
+          <a:ln/>
+        </p:spPr>
+        <p:txBody>
+          <a:bodyPr wrap="square" rtlCol="0" anchor="ctr"/>
+          <a:lstStyle/>
+          <a:p>
+            <a:pPr indent="0" marL="0">
+              <a:buNone/>
+            </a:pPr>
+            <a:r>
+              <a:rPr lang="en-US" sz="1000" dirty="0">
+                <a:solidFill>
+                  <a:srgbClr val="1A1A2E"/>
+                </a:solidFill>
+                <a:latin typeface="Calibri" pitchFamily="34" charset="0"/>
+                <a:ea typeface="Calibri" pitchFamily="34" charset="-122"/>
+                <a:cs typeface="Calibri" pitchFamily="34" charset="-120"/>
+              </a:rPr>
+              <a:t>Monitor (low value, low risk)</a:t>
+            </a:r>
+            <a:endParaRPr lang="en-US" sz="1000" dirty="0"/>
+          </a:p>
+        </p:txBody>
+      </p:sp>
+      <p:sp>
+        <p:nvSpPr>
+          <p:cNvPr id="33" name="Text 30"/>
+          <p:cNvSpPr/>
+          <p:nvPr/>
+        </p:nvSpPr>
+        <p:spPr>
+          <a:xfrm>
+            <a:off x="10195560" y="5047488"/>
+            <a:ext cx="1463040" cy="237744"/>
+          </a:xfrm>
+          <a:prstGeom prst="rect">
+            <a:avLst/>
+          </a:prstGeom>
+          <a:noFill/>
+          <a:ln/>
+        </p:spPr>
+        <p:txBody>
+          <a:bodyPr wrap="square" rtlCol="0" anchor="ctr"/>
+          <a:lstStyle/>
+          <a:p>
+            <a:pPr algn="r" indent="0" marL="0">
+              <a:buNone/>
+            </a:pPr>
+            <a:r>
+              <a:rPr lang="en-US" sz="1000" b="1" dirty="0">
+                <a:solidFill>
+                  <a:srgbClr val="5B6178"/>
+                </a:solidFill>
+                <a:latin typeface="Calibri" pitchFamily="34" charset="0"/>
+                <a:ea typeface="Calibri" pitchFamily="34" charset="-122"/>
+                <a:cs typeface="Calibri" pitchFamily="34" charset="-120"/>
+              </a:rPr>
+              <a:t>136</a:t>
+            </a:r>
+            <a:endParaRPr lang="en-US" sz="1000" dirty="0"/>
+          </a:p>
+        </p:txBody>
+      </p:sp>
+      <p:sp>
+        <p:nvSpPr>
+          <p:cNvPr id="34" name="Text 31"/>
+          <p:cNvSpPr/>
+          <p:nvPr/>
+        </p:nvSpPr>
+        <p:spPr>
+          <a:xfrm>
+            <a:off x="6263640" y="5294376"/>
+            <a:ext cx="4023360" cy="237744"/>
+          </a:xfrm>
+          <a:prstGeom prst="rect">
+            <a:avLst/>
+          </a:prstGeom>
+          <a:noFill/>
+          <a:ln/>
+        </p:spPr>
+        <p:txBody>
+          <a:bodyPr wrap="square" rtlCol="0" anchor="ctr"/>
+          <a:lstStyle/>
+          <a:p>
+            <a:pPr indent="0" marL="0">
+              <a:buNone/>
+            </a:pPr>
+            <a:r>
+              <a:rPr lang="en-US" sz="1000" dirty="0">
+                <a:solidFill>
+                  <a:srgbClr val="1A1A2E"/>
+                </a:solidFill>
+                <a:latin typeface="Calibri" pitchFamily="34" charset="0"/>
+                <a:ea typeface="Calibri" pitchFamily="34" charset="-122"/>
+                <a:cs typeface="Calibri" pitchFamily="34" charset="-120"/>
+              </a:rPr>
+              <a:t>Protect (high value, low risk)</a:t>
+            </a:r>
+            <a:endParaRPr lang="en-US" sz="1000" dirty="0"/>
+          </a:p>
+        </p:txBody>
+      </p:sp>
+      <p:sp>
+        <p:nvSpPr>
+          <p:cNvPr id="35" name="Text 32"/>
+          <p:cNvSpPr/>
+          <p:nvPr/>
+        </p:nvSpPr>
+        <p:spPr>
+          <a:xfrm>
+            <a:off x="10195560" y="5294376"/>
+            <a:ext cx="1463040" cy="237744"/>
+          </a:xfrm>
+          <a:prstGeom prst="rect">
+            <a:avLst/>
+          </a:prstGeom>
+          <a:noFill/>
+          <a:ln/>
+        </p:spPr>
+        <p:txBody>
+          <a:bodyPr wrap="square" rtlCol="0" anchor="ctr"/>
+          <a:lstStyle/>
+          <a:p>
+            <a:pPr algn="r" indent="0" marL="0">
+              <a:buNone/>
+            </a:pPr>
+            <a:r>
+              <a:rPr lang="en-US" sz="1000" b="1" dirty="0">
+                <a:solidFill>
+                  <a:srgbClr val="2C7A57"/>
+                </a:solidFill>
+                <a:latin typeface="Calibri" pitchFamily="34" charset="0"/>
+                <a:ea typeface="Calibri" pitchFamily="34" charset="-122"/>
+                <a:cs typeface="Calibri" pitchFamily="34" charset="-120"/>
+              </a:rPr>
+              <a:t>64</a:t>
+            </a:r>
+            <a:endParaRPr lang="en-US" sz="1000" dirty="0"/>
+          </a:p>
+        </p:txBody>
+      </p:sp>
+      <p:sp>
+        <p:nvSpPr>
+          <p:cNvPr id="36" name="Text 33"/>
+          <p:cNvSpPr/>
+          <p:nvPr/>
+        </p:nvSpPr>
+        <p:spPr>
+          <a:xfrm>
+            <a:off x="6263640" y="5541264"/>
+            <a:ext cx="4023360" cy="237744"/>
+          </a:xfrm>
+          <a:prstGeom prst="rect">
+            <a:avLst/>
+          </a:prstGeom>
+          <a:noFill/>
+          <a:ln/>
+        </p:spPr>
+        <p:txBody>
+          <a:bodyPr wrap="square" rtlCol="0" anchor="ctr"/>
+          <a:lstStyle/>
+          <a:p>
+            <a:pPr indent="0" marL="0">
+              <a:buNone/>
+            </a:pPr>
+            <a:r>
+              <a:rPr lang="en-US" sz="1000" dirty="0">
+                <a:solidFill>
+                  <a:srgbClr val="1A1A2E"/>
+                </a:solidFill>
+                <a:latin typeface="Calibri" pitchFamily="34" charset="0"/>
+                <a:ea typeface="Calibri" pitchFamily="34" charset="-122"/>
+                <a:cs typeface="Calibri" pitchFamily="34" charset="-120"/>
+              </a:rPr>
+              <a:t>Low priority (low value, high risk)</a:t>
+            </a:r>
+            <a:endParaRPr lang="en-US" sz="1000" dirty="0"/>
+          </a:p>
+        </p:txBody>
+      </p:sp>
+      <p:sp>
+        <p:nvSpPr>
+          <p:cNvPr id="37" name="Text 34"/>
+          <p:cNvSpPr/>
+          <p:nvPr/>
+        </p:nvSpPr>
+        <p:spPr>
+          <a:xfrm>
+            <a:off x="10195560" y="5541264"/>
+            <a:ext cx="1463040" cy="237744"/>
+          </a:xfrm>
+          <a:prstGeom prst="rect">
+            <a:avLst/>
+          </a:prstGeom>
+          <a:noFill/>
+          <a:ln/>
+        </p:spPr>
+        <p:txBody>
+          <a:bodyPr wrap="square" rtlCol="0" anchor="ctr"/>
+          <a:lstStyle/>
+          <a:p>
+            <a:pPr algn="r" indent="0" marL="0">
+              <a:buNone/>
+            </a:pPr>
+            <a:r>
+              <a:rPr lang="en-US" sz="1000" b="1" dirty="0">
+                <a:solidFill>
+                  <a:srgbClr val="5B6178"/>
+                </a:solidFill>
+                <a:latin typeface="Calibri" pitchFamily="34" charset="0"/>
+                <a:ea typeface="Calibri" pitchFamily="34" charset="-122"/>
+                <a:cs typeface="Calibri" pitchFamily="34" charset="-120"/>
+              </a:rPr>
+              <a:t>64</a:t>
+            </a:r>
+            <a:endParaRPr lang="en-US" sz="1000" dirty="0"/>
+          </a:p>
+        </p:txBody>
+      </p:sp>
+      <p:sp>
+        <p:nvSpPr>
+          <p:cNvPr id="38" name="Text 35"/>
+          <p:cNvSpPr/>
+          <p:nvPr/>
+        </p:nvSpPr>
+        <p:spPr>
+          <a:xfrm>
+            <a:off x="548640" y="6016752"/>
+            <a:ext cx="11064240" cy="548640"/>
+          </a:xfrm>
+          <a:prstGeom prst="rect">
+            <a:avLst/>
+          </a:prstGeom>
+          <a:noFill/>
+          <a:ln/>
+        </p:spPr>
+        <p:txBody>
+          <a:bodyPr wrap="square" rtlCol="0" anchor="ctr"/>
+          <a:lstStyle/>
+          <a:p>
+            <a:pPr indent="0" marL="0">
+              <a:lnSpc>
+                <a:spcPts val="1050"/>
+              </a:lnSpc>
+              <a:buNone/>
+            </a:pPr>
+            <a:r>
+              <a:rPr lang="en-US" sz="870" i="1" dirty="0">
+                <a:solidFill>
+                  <a:srgbClr val="5B6178"/>
+                </a:solidFill>
+                <a:latin typeface="Calibri" pitchFamily="34" charset="0"/>
+                <a:ea typeface="Calibri" pitchFamily="34" charset="-122"/>
+                <a:cs typeface="Calibri" pitchFamily="34" charset="-120"/>
+              </a:rPr>
+              <a:t>Flags come from 5-fold OOF predictions; AUC/PR-AUC read modest next to the revenue model's R² because churn is a rarer, noisier event to call than revenue — typical for a churn classifier, not a modeling miss. realized_ad_revenue's importance is a venue_type confound, not a causal driver. Each "Save now" / flagged venue also carries a SHAP top driver (from the fold model that never saw it) mapped to a concrete action — technical dispatch, AM retention call, content review — not a generic "reach out."</a:t>
+            </a:r>
+            <a:endParaRPr lang="en-US" sz="870" dirty="0"/>
+          </a:p>
+        </p:txBody>
+      </p:sp>
+      <p:sp>
+        <p:nvSpPr>
+          <p:cNvPr id="39" name="Text 36"/>
+          <p:cNvSpPr/>
+          <p:nvPr/>
+        </p:nvSpPr>
+        <p:spPr>
+          <a:xfrm>
+            <a:off x="457200" y="6537960"/>
+            <a:ext cx="7315200" cy="274320"/>
+          </a:xfrm>
+          <a:prstGeom prst="rect">
+            <a:avLst/>
+          </a:prstGeom>
+          <a:noFill/>
+          <a:ln/>
+        </p:spPr>
+        <p:txBody>
+          <a:bodyPr wrap="square" rtlCol="0" anchor="ctr"/>
+          <a:lstStyle/>
+          <a:p>
+            <a:pPr indent="0" marL="0">
+              <a:buNone/>
+            </a:pPr>
+            <a:r>
+              <a:rPr lang="en-US" sz="900" dirty="0">
+                <a:solidFill>
+                  <a:srgbClr val="5B6178"/>
+                </a:solidFill>
+                <a:latin typeface="Calibri" pitchFamily="34" charset="0"/>
+                <a:ea typeface="Calibri" pitchFamily="34" charset="-122"/>
+                <a:cs typeface="Calibri" pitchFamily="34" charset="-120"/>
+              </a:rPr>
+              <a:t>Venue retention</a:t>
+            </a:r>
+            <a:endParaRPr lang="en-US" sz="900" dirty="0"/>
+          </a:p>
+        </p:txBody>
+      </p:sp>
+    </p:spTree>
+  </p:cSld>
+  <p:clrMapOvr>
+    <a:masterClrMapping/>
+  </p:clrMapOvr>
+</p:sld>
+</file>
+
+<file path=ppt/slides/slide16.xml><?xml version="1.0" encoding="utf-8"?>
+<p:sld xmlns:a="http://schemas.openxmlformats.org/drawingml/2006/main" xmlns:r="http://schemas.openxmlformats.org/officeDocument/2006/relationships" xmlns:p="http://schemas.openxmlformats.org/presentationml/2006/main">
+  <p:cSld name="Slide 16">
     <p:bg>
       <p:bgPr>
         <a:solidFill>
@@ -9566,7 +10101,7 @@
                 <a:ea typeface="Calibri" pitchFamily="34" charset="-122"/>
                 <a:cs typeface="Calibri" pitchFamily="34" charset="-120"/>
               </a:rPr>
-              <a:t>An uncalibrated MMM understated true incremental value by up to 165% here — experiment calibration isn't optional polish, it's the identification fix.</a:t>
+              <a:t>An uncalibrated MMM understated the RCT-calibrated estimate by up to 165% here — experiment calibration isn't optional polish, it's the identification fix.</a:t>
             </a:r>
             <a:endParaRPr lang="en-US" sz="1450" dirty="0"/>
           </a:p>
@@ -9768,7 +10303,7 @@
                 <a:ea typeface="Calibri" pitchFamily="34" charset="-122"/>
                 <a:cs typeface="Calibri" pitchFamily="34" charset="-120"/>
               </a:rPr>
-              <a:t>One connected system, not four separate projects: the venue-revenue model reuses the causal pipeline's per-exposure value as an input; the retention model then combines its own churn-risk score with that revenue prediction into one value-×-risk priority quadrant — both models recover their respective latent ground truths (0.95 and 0.73 correlation) before either is trusted.</a:t>
+              <a:t>One connected system, not four separate projects: the venue-revenue model reuses the causal pipeline's per-exposure value as an input; the retention model then combines its own churn-risk score with that revenue prediction into one value-×-risk priority quadrant — both models are evaluated honestly out-of-fold, never scored on a venue they were trained on, before either is trusted.</a:t>
             </a:r>
             <a:endParaRPr lang="en-US" sz="1450" dirty="0"/>
           </a:p>
@@ -14198,7 +14733,7 @@
               <a:buNone/>
             </a:pPr>
             <a:r>
-              <a:rPr lang="en-US" sz="2700" b="1" dirty="0">
+              <a:rPr lang="en-US" sz="2800" b="1" dirty="0">
                 <a:solidFill>
                   <a:srgbClr val="1E2761"/>
                 </a:solidFill>
@@ -14206,49 +14741,103 @@
                 <a:ea typeface="Cambria" pitchFamily="34" charset="-122"/>
                 <a:cs typeface="Cambria" pitchFamily="34" charset="-120"/>
               </a:rPr>
-              <a:t>Two data sources: a designed holdout test, and campaign history</a:t>
-            </a:r>
-            <a:endParaRPr lang="en-US" sz="2700" dirty="0"/>
-          </a:p>
-        </p:txBody>
-      </p:sp>
-      <p:sp>
-        <p:nvSpPr>
-          <p:cNvPr id="3" name="Shape 1"/>
-          <p:cNvSpPr/>
-          <p:nvPr/>
-        </p:nvSpPr>
-        <p:spPr>
-          <a:xfrm>
-            <a:off x="8229600" y="146304"/>
-            <a:ext cx="3410712" cy="246888"/>
+              <a:t>The roadmap: four problems, four methods</a:t>
+            </a:r>
+            <a:endParaRPr lang="en-US" sz="2800" dirty="0"/>
+          </a:p>
+        </p:txBody>
+      </p:sp>
+      <p:sp>
+        <p:nvSpPr>
+          <p:cNvPr id="3" name="Text 1"/>
+          <p:cNvSpPr/>
+          <p:nvPr/>
+        </p:nvSpPr>
+        <p:spPr>
+          <a:xfrm>
+            <a:off x="548640" y="1097280"/>
+            <a:ext cx="10972800" cy="365760"/>
+          </a:xfrm>
+          <a:prstGeom prst="rect">
+            <a:avLst/>
+          </a:prstGeom>
+          <a:noFill/>
+          <a:ln/>
+        </p:spPr>
+        <p:txBody>
+          <a:bodyPr wrap="square" rtlCol="0" anchor="ctr"/>
+          <a:lstStyle/>
+          <a:p>
+            <a:pPr indent="0" marL="0">
+              <a:buNone/>
+            </a:pPr>
+            <a:r>
+              <a:rPr lang="en-US" sz="1300" i="1" dirty="0">
+                <a:solidFill>
+                  <a:srgbClr val="5B6178"/>
+                </a:solidFill>
+                <a:latin typeface="Calibri" pitchFamily="34" charset="0"/>
+                <a:ea typeface="Calibri" pitchFamily="34" charset="-122"/>
+                <a:cs typeface="Calibri" pitchFamily="34" charset="-120"/>
+              </a:rPr>
+              <a:t>Before the deep dive — this is the shape of what follows.</a:t>
+            </a:r>
+            <a:endParaRPr lang="en-US" sz="1300" dirty="0"/>
+          </a:p>
+        </p:txBody>
+      </p:sp>
+      <p:sp>
+        <p:nvSpPr>
+          <p:cNvPr id="4" name="Shape 2"/>
+          <p:cNvSpPr/>
+          <p:nvPr/>
+        </p:nvSpPr>
+        <p:spPr>
+          <a:xfrm>
+            <a:off x="548640" y="1691640"/>
+            <a:ext cx="11091672" cy="960120"/>
           </a:xfrm>
           <a:prstGeom prst="roundRect">
             <a:avLst>
-              <a:gd name="adj" fmla="val 22222"/>
+              <a:gd name="adj" fmla="val 9524"/>
             </a:avLst>
           </a:prstGeom>
           <a:solidFill>
-            <a:srgbClr val="FFFFFF"/>
+            <a:srgbClr val="E4E9F7"/>
           </a:solidFill>
-          <a:ln w="15875">
-            <a:solidFill>
-              <a:srgbClr val="5B6178"/>
-            </a:solidFill>
-            <a:prstDash val="solid"/>
-          </a:ln>
-        </p:spPr>
-      </p:sp>
-      <p:sp>
-        <p:nvSpPr>
-          <p:cNvPr id="4" name="Text 2"/>
-          <p:cNvSpPr/>
-          <p:nvPr/>
-        </p:nvSpPr>
-        <p:spPr>
-          <a:xfrm>
-            <a:off x="8229600" y="146304"/>
-            <a:ext cx="3410712" cy="246888"/>
+          <a:ln/>
+        </p:spPr>
+      </p:sp>
+      <p:sp>
+        <p:nvSpPr>
+          <p:cNvPr id="5" name="Shape 3"/>
+          <p:cNvSpPr/>
+          <p:nvPr/>
+        </p:nvSpPr>
+        <p:spPr>
+          <a:xfrm>
+            <a:off x="822960" y="1897380"/>
+            <a:ext cx="548640" cy="548640"/>
+          </a:xfrm>
+          <a:prstGeom prst="ellipse">
+            <a:avLst/>
+          </a:prstGeom>
+          <a:solidFill>
+            <a:srgbClr val="1E2761"/>
+          </a:solidFill>
+          <a:ln/>
+        </p:spPr>
+      </p:sp>
+      <p:sp>
+        <p:nvSpPr>
+          <p:cNvPr id="6" name="Text 4"/>
+          <p:cNvSpPr/>
+          <p:nvPr/>
+        </p:nvSpPr>
+        <p:spPr>
+          <a:xfrm>
+            <a:off x="822960" y="1897380"/>
+            <a:ext cx="548640" cy="548640"/>
           </a:xfrm>
           <a:prstGeom prst="rect">
             <a:avLst/>
@@ -14264,54 +14853,15 @@
               <a:buNone/>
             </a:pPr>
             <a:r>
-              <a:rPr lang="en-US" sz="950" b="1" dirty="0">
-                <a:solidFill>
-                  <a:srgbClr val="5B6178"/>
-                </a:solidFill>
-                <a:latin typeface="Calibri" pitchFamily="34" charset="0"/>
-                <a:ea typeface="Calibri" pitchFamily="34" charset="-122"/>
-                <a:cs typeface="Calibri" pitchFamily="34" charset="-120"/>
-              </a:rPr>
-              <a:t>Foundation for Steps 1–3 · Q1–Q2</a:t>
-            </a:r>
-            <a:endParaRPr lang="en-US" sz="950" dirty="0"/>
-          </a:p>
-        </p:txBody>
-      </p:sp>
-      <p:sp>
-        <p:nvSpPr>
-          <p:cNvPr id="5" name="Text 3"/>
-          <p:cNvSpPr/>
-          <p:nvPr/>
-        </p:nvSpPr>
-        <p:spPr>
-          <a:xfrm>
-            <a:off x="548640" y="1234440"/>
-            <a:ext cx="10972800" cy="365760"/>
-          </a:xfrm>
-          <a:prstGeom prst="rect">
-            <a:avLst/>
-          </a:prstGeom>
-          <a:noFill/>
-          <a:ln/>
-        </p:spPr>
-        <p:txBody>
-          <a:bodyPr wrap="square" rtlCol="0" anchor="ctr"/>
-          <a:lstStyle/>
-          <a:p>
-            <a:pPr indent="0" marL="0">
-              <a:buNone/>
-            </a:pPr>
-            <a:r>
               <a:rPr lang="en-US" sz="1500" b="1" dirty="0">
                 <a:solidFill>
-                  <a:srgbClr val="E8871E"/>
-                </a:solidFill>
-                <a:latin typeface="Calibri" pitchFamily="34" charset="0"/>
-                <a:ea typeface="Calibri" pitchFamily="34" charset="-122"/>
-                <a:cs typeface="Calibri" pitchFamily="34" charset="-120"/>
-              </a:rPr>
-              <a:t>4 venue types × 100 venues each, 104 weeks (52 pre-period + 52 campaign)</a:t>
+                  <a:srgbClr val="FFFFFF"/>
+                </a:solidFill>
+                <a:latin typeface="Calibri" pitchFamily="34" charset="0"/>
+                <a:ea typeface="Calibri" pitchFamily="34" charset="-122"/>
+                <a:cs typeface="Calibri" pitchFamily="34" charset="-120"/>
+              </a:rPr>
+              <a:t>Q1</a:t>
             </a:r>
             <a:endParaRPr lang="en-US" sz="1500" dirty="0"/>
           </a:p>
@@ -14319,52 +14869,33 @@
       </p:sp>
       <p:sp>
         <p:nvSpPr>
-          <p:cNvPr id="6" name="Shape 4"/>
-          <p:cNvSpPr/>
-          <p:nvPr/>
-        </p:nvSpPr>
-        <p:spPr>
-          <a:xfrm>
-            <a:off x="548640" y="1828800"/>
-            <a:ext cx="5394960" cy="4023360"/>
-          </a:xfrm>
-          <a:prstGeom prst="roundRect">
-            <a:avLst>
-              <a:gd name="adj" fmla="val 2273"/>
-            </a:avLst>
-          </a:prstGeom>
-          <a:solidFill>
-            <a:srgbClr val="F5F7FC"/>
-          </a:solidFill>
-          <a:ln/>
-        </p:spPr>
-      </p:sp>
-      <p:sp>
-        <p:nvSpPr>
           <p:cNvPr id="7" name="Text 5"/>
           <p:cNvSpPr/>
           <p:nvPr/>
         </p:nvSpPr>
         <p:spPr>
           <a:xfrm>
-            <a:off x="868680" y="2057400"/>
-            <a:ext cx="4754880" cy="457200"/>
-          </a:xfrm>
-          <a:prstGeom prst="rect">
-            <a:avLst/>
-          </a:prstGeom>
-          <a:noFill/>
-          <a:ln/>
-        </p:spPr>
-        <p:txBody>
-          <a:bodyPr wrap="square" rtlCol="0" anchor="ctr"/>
-          <a:lstStyle/>
-          <a:p>
-            <a:pPr indent="0" marL="0">
-              <a:buNone/>
-            </a:pPr>
-            <a:r>
-              <a:rPr lang="en-US" sz="1700" b="1" dirty="0">
+            <a:off x="1645920" y="1783080"/>
+            <a:ext cx="4114800" cy="777240"/>
+          </a:xfrm>
+          <a:prstGeom prst="rect">
+            <a:avLst/>
+          </a:prstGeom>
+          <a:noFill/>
+          <a:ln/>
+        </p:spPr>
+        <p:txBody>
+          <a:bodyPr wrap="square" rtlCol="0" anchor="ctr"/>
+          <a:lstStyle/>
+          <a:p>
+            <a:pPr indent="0" marL="0">
+              <a:lnSpc>
+                <a:spcPts val="1700"/>
+              </a:lnSpc>
+              <a:buNone/>
+            </a:pPr>
+            <a:r>
+              <a:rPr lang="en-US" sz="1450" b="1" dirty="0">
                 <a:solidFill>
                   <a:srgbClr val="1E2761"/>
                 </a:solidFill>
@@ -14372,9 +14903,9 @@
                 <a:ea typeface="Cambria" pitchFamily="34" charset="-122"/>
                 <a:cs typeface="Cambria" pitchFamily="34" charset="-120"/>
               </a:rPr>
-              <a:t>RCT pool</a:t>
-            </a:r>
-            <a:endParaRPr lang="en-US" sz="1700" dirty="0"/>
+              <a:t>Did the campaign actually work?</a:t>
+            </a:r>
+            <a:endParaRPr lang="en-US" sz="1450" dirty="0"/>
           </a:p>
         </p:txBody>
       </p:sp>
@@ -14386,8 +14917,131 @@
         </p:nvSpPr>
         <p:spPr>
           <a:xfrm>
-            <a:off x="868680" y="2560320"/>
-            <a:ext cx="4754880" cy="1371600"/>
+            <a:off x="5943600" y="1783080"/>
+            <a:ext cx="5394960" cy="777240"/>
+          </a:xfrm>
+          <a:prstGeom prst="rect">
+            <a:avLst/>
+          </a:prstGeom>
+          <a:noFill/>
+          <a:ln/>
+        </p:spPr>
+        <p:txBody>
+          <a:bodyPr wrap="square" rtlCol="0" anchor="ctr"/>
+          <a:lstStyle/>
+          <a:p>
+            <a:pPr indent="0" marL="0">
+              <a:lnSpc>
+                <a:spcPts val="1600"/>
+              </a:lnSpc>
+              <a:buNone/>
+            </a:pPr>
+            <a:r>
+              <a:rPr lang="en-US" sz="1250" dirty="0">
+                <a:solidFill>
+                  <a:srgbClr val="1A1A2E"/>
+                </a:solidFill>
+                <a:latin typeface="Calibri" pitchFamily="34" charset="0"/>
+                <a:ea typeface="Calibri" pitchFamily="34" charset="-122"/>
+                <a:cs typeface="Calibri" pitchFamily="34" charset="-120"/>
+              </a:rPr>
+              <a:t>RCT geo-holdout, extended to historical campaigns with synthetic control.</a:t>
+            </a:r>
+            <a:endParaRPr lang="en-US" sz="1250" dirty="0"/>
+          </a:p>
+        </p:txBody>
+      </p:sp>
+      <p:sp>
+        <p:nvSpPr>
+          <p:cNvPr id="9" name="Shape 7"/>
+          <p:cNvSpPr/>
+          <p:nvPr/>
+        </p:nvSpPr>
+        <p:spPr>
+          <a:xfrm>
+            <a:off x="548640" y="2788920"/>
+            <a:ext cx="11091672" cy="960120"/>
+          </a:xfrm>
+          <a:prstGeom prst="roundRect">
+            <a:avLst>
+              <a:gd name="adj" fmla="val 9524"/>
+            </a:avLst>
+          </a:prstGeom>
+          <a:solidFill>
+            <a:srgbClr val="FBE8D2"/>
+          </a:solidFill>
+          <a:ln/>
+        </p:spPr>
+      </p:sp>
+      <p:sp>
+        <p:nvSpPr>
+          <p:cNvPr id="10" name="Shape 8"/>
+          <p:cNvSpPr/>
+          <p:nvPr/>
+        </p:nvSpPr>
+        <p:spPr>
+          <a:xfrm>
+            <a:off x="822960" y="2994660"/>
+            <a:ext cx="548640" cy="548640"/>
+          </a:xfrm>
+          <a:prstGeom prst="ellipse">
+            <a:avLst/>
+          </a:prstGeom>
+          <a:solidFill>
+            <a:srgbClr val="B8500A"/>
+          </a:solidFill>
+          <a:ln/>
+        </p:spPr>
+      </p:sp>
+      <p:sp>
+        <p:nvSpPr>
+          <p:cNvPr id="11" name="Text 9"/>
+          <p:cNvSpPr/>
+          <p:nvPr/>
+        </p:nvSpPr>
+        <p:spPr>
+          <a:xfrm>
+            <a:off x="822960" y="2994660"/>
+            <a:ext cx="548640" cy="548640"/>
+          </a:xfrm>
+          <a:prstGeom prst="rect">
+            <a:avLst/>
+          </a:prstGeom>
+          <a:noFill/>
+          <a:ln/>
+        </p:spPr>
+        <p:txBody>
+          <a:bodyPr wrap="square" rtlCol="0" anchor="ctr"/>
+          <a:lstStyle/>
+          <a:p>
+            <a:pPr algn="ctr" indent="0" marL="0">
+              <a:buNone/>
+            </a:pPr>
+            <a:r>
+              <a:rPr lang="en-US" sz="1500" b="1" dirty="0">
+                <a:solidFill>
+                  <a:srgbClr val="FFFFFF"/>
+                </a:solidFill>
+                <a:latin typeface="Calibri" pitchFamily="34" charset="0"/>
+                <a:ea typeface="Calibri" pitchFamily="34" charset="-122"/>
+                <a:cs typeface="Calibri" pitchFamily="34" charset="-120"/>
+              </a:rPr>
+              <a:t>Q2</a:t>
+            </a:r>
+            <a:endParaRPr lang="en-US" sz="1500" dirty="0"/>
+          </a:p>
+        </p:txBody>
+      </p:sp>
+      <p:sp>
+        <p:nvSpPr>
+          <p:cNvPr id="12" name="Text 10"/>
+          <p:cNvSpPr/>
+          <p:nvPr/>
+        </p:nvSpPr>
+        <p:spPr>
+          <a:xfrm>
+            <a:off x="1645920" y="2880360"/>
+            <a:ext cx="4114800" cy="777240"/>
           </a:xfrm>
           <a:prstGeom prst="rect">
             <a:avLst/>
@@ -14406,30 +15060,30 @@
               <a:buNone/>
             </a:pPr>
             <a:r>
-              <a:rPr lang="en-US" sz="1250" dirty="0">
-                <a:solidFill>
-                  <a:srgbClr val="1A1A2E"/>
-                </a:solidFill>
-                <a:latin typeface="Calibri" pitchFamily="34" charset="0"/>
-                <a:ea typeface="Calibri" pitchFamily="34" charset="-122"/>
-                <a:cs typeface="Calibri" pitchFamily="34" charset="-120"/>
-              </a:rPr>
-              <a:t>Randomly split treated / holdout within venue_type × geo_cluster × traffic-tier strata for a fixed benchmark campaign. This is a real Atmosphere-designed measurement product, not a historical campaign.</a:t>
-            </a:r>
-            <a:endParaRPr lang="en-US" sz="1250" dirty="0"/>
-          </a:p>
-        </p:txBody>
-      </p:sp>
-      <p:sp>
-        <p:nvSpPr>
-          <p:cNvPr id="9" name="Text 7"/>
-          <p:cNvSpPr/>
-          <p:nvPr/>
-        </p:nvSpPr>
-        <p:spPr>
-          <a:xfrm>
-            <a:off x="868680" y="5029200"/>
-            <a:ext cx="4754880" cy="731520"/>
+              <a:rPr lang="en-US" sz="1450" b="1" dirty="0">
+                <a:solidFill>
+                  <a:srgbClr val="B8500A"/>
+                </a:solidFill>
+                <a:latin typeface="Cambria" pitchFamily="34" charset="0"/>
+                <a:ea typeface="Cambria" pitchFamily="34" charset="-122"/>
+                <a:cs typeface="Cambria" pitchFamily="34" charset="-120"/>
+              </a:rPr>
+              <a:t>How should budget be spent?</a:t>
+            </a:r>
+            <a:endParaRPr lang="en-US" sz="1450" dirty="0"/>
+          </a:p>
+        </p:txBody>
+      </p:sp>
+      <p:sp>
+        <p:nvSpPr>
+          <p:cNvPr id="13" name="Text 11"/>
+          <p:cNvSpPr/>
+          <p:nvPr/>
+        </p:nvSpPr>
+        <p:spPr>
+          <a:xfrm>
+            <a:off x="5943600" y="2880360"/>
+            <a:ext cx="5394960" cy="777240"/>
           </a:xfrm>
           <a:prstGeom prst="rect">
             <a:avLst/>
@@ -14448,91 +15102,276 @@
               <a:buNone/>
             </a:pPr>
             <a:r>
-              <a:rPr lang="en-US" sz="1200" i="1" dirty="0">
-                <a:solidFill>
-                  <a:srgbClr val="2C7A57"/>
-                </a:solidFill>
-                <a:latin typeface="Calibri" pitchFamily="34" charset="0"/>
-                <a:ea typeface="Calibri" pitchFamily="34" charset="-122"/>
-                <a:cs typeface="Calibri" pitchFamily="34" charset="-120"/>
-              </a:rPr>
-              <a:t>Used to anchor confidence — assignment is verified, not assumed.</a:t>
-            </a:r>
-            <a:endParaRPr lang="en-US" sz="1200" dirty="0"/>
-          </a:p>
-        </p:txBody>
-      </p:sp>
-      <p:sp>
-        <p:nvSpPr>
-          <p:cNvPr id="10" name="Shape 8"/>
-          <p:cNvSpPr/>
-          <p:nvPr/>
-        </p:nvSpPr>
-        <p:spPr>
-          <a:xfrm>
-            <a:off x="6309360" y="1828800"/>
-            <a:ext cx="5394960" cy="4023360"/>
+              <a:rPr lang="en-US" sz="1250" dirty="0">
+                <a:solidFill>
+                  <a:srgbClr val="1A1A2E"/>
+                </a:solidFill>
+                <a:latin typeface="Calibri" pitchFamily="34" charset="0"/>
+                <a:ea typeface="Calibri" pitchFamily="34" charset="-122"/>
+                <a:cs typeface="Calibri" pitchFamily="34" charset="-120"/>
+              </a:rPr>
+              <a:t>RCT-calibrated MMM, then an exact DP budget allocator over the calibrated response curves.</a:t>
+            </a:r>
+            <a:endParaRPr lang="en-US" sz="1250" dirty="0"/>
+          </a:p>
+        </p:txBody>
+      </p:sp>
+      <p:sp>
+        <p:nvSpPr>
+          <p:cNvPr id="14" name="Shape 12"/>
+          <p:cNvSpPr/>
+          <p:nvPr/>
+        </p:nvSpPr>
+        <p:spPr>
+          <a:xfrm>
+            <a:off x="548640" y="3886200"/>
+            <a:ext cx="11091672" cy="960120"/>
           </a:xfrm>
           <a:prstGeom prst="roundRect">
             <a:avLst>
-              <a:gd name="adj" fmla="val 2273"/>
+              <a:gd name="adj" fmla="val 9524"/>
             </a:avLst>
           </a:prstGeom>
           <a:solidFill>
-            <a:srgbClr val="F5F7FC"/>
+            <a:srgbClr val="E2F1E9"/>
           </a:solidFill>
           <a:ln/>
         </p:spPr>
       </p:sp>
       <p:sp>
         <p:nvSpPr>
-          <p:cNvPr id="11" name="Text 9"/>
-          <p:cNvSpPr/>
-          <p:nvPr/>
-        </p:nvSpPr>
-        <p:spPr>
-          <a:xfrm>
-            <a:off x="6629400" y="2057400"/>
-            <a:ext cx="4754880" cy="457200"/>
-          </a:xfrm>
-          <a:prstGeom prst="rect">
-            <a:avLst/>
-          </a:prstGeom>
-          <a:noFill/>
-          <a:ln/>
-        </p:spPr>
-        <p:txBody>
-          <a:bodyPr wrap="square" rtlCol="0" anchor="ctr"/>
-          <a:lstStyle/>
-          <a:p>
-            <a:pPr indent="0" marL="0">
-              <a:buNone/>
-            </a:pPr>
-            <a:r>
-              <a:rPr lang="en-US" sz="1700" b="1" dirty="0">
-                <a:solidFill>
-                  <a:srgbClr val="1E2761"/>
+          <p:cNvPr id="15" name="Shape 13"/>
+          <p:cNvSpPr/>
+          <p:nvPr/>
+        </p:nvSpPr>
+        <p:spPr>
+          <a:xfrm>
+            <a:off x="822960" y="4091940"/>
+            <a:ext cx="548640" cy="548640"/>
+          </a:xfrm>
+          <a:prstGeom prst="ellipse">
+            <a:avLst/>
+          </a:prstGeom>
+          <a:solidFill>
+            <a:srgbClr val="2C7A57"/>
+          </a:solidFill>
+          <a:ln/>
+        </p:spPr>
+      </p:sp>
+      <p:sp>
+        <p:nvSpPr>
+          <p:cNvPr id="16" name="Text 14"/>
+          <p:cNvSpPr/>
+          <p:nvPr/>
+        </p:nvSpPr>
+        <p:spPr>
+          <a:xfrm>
+            <a:off x="822960" y="4091940"/>
+            <a:ext cx="548640" cy="548640"/>
+          </a:xfrm>
+          <a:prstGeom prst="rect">
+            <a:avLst/>
+          </a:prstGeom>
+          <a:noFill/>
+          <a:ln/>
+        </p:spPr>
+        <p:txBody>
+          <a:bodyPr wrap="square" rtlCol="0" anchor="ctr"/>
+          <a:lstStyle/>
+          <a:p>
+            <a:pPr algn="ctr" indent="0" marL="0">
+              <a:buNone/>
+            </a:pPr>
+            <a:r>
+              <a:rPr lang="en-US" sz="1500" b="1" dirty="0">
+                <a:solidFill>
+                  <a:srgbClr val="FFFFFF"/>
+                </a:solidFill>
+                <a:latin typeface="Calibri" pitchFamily="34" charset="0"/>
+                <a:ea typeface="Calibri" pitchFamily="34" charset="-122"/>
+                <a:cs typeface="Calibri" pitchFamily="34" charset="-120"/>
+              </a:rPr>
+              <a:t>Q3</a:t>
+            </a:r>
+            <a:endParaRPr lang="en-US" sz="1500" dirty="0"/>
+          </a:p>
+        </p:txBody>
+      </p:sp>
+      <p:sp>
+        <p:nvSpPr>
+          <p:cNvPr id="17" name="Text 15"/>
+          <p:cNvSpPr/>
+          <p:nvPr/>
+        </p:nvSpPr>
+        <p:spPr>
+          <a:xfrm>
+            <a:off x="1645920" y="3977640"/>
+            <a:ext cx="4114800" cy="777240"/>
+          </a:xfrm>
+          <a:prstGeom prst="rect">
+            <a:avLst/>
+          </a:prstGeom>
+          <a:noFill/>
+          <a:ln/>
+        </p:spPr>
+        <p:txBody>
+          <a:bodyPr wrap="square" rtlCol="0" anchor="ctr"/>
+          <a:lstStyle/>
+          <a:p>
+            <a:pPr indent="0" marL="0">
+              <a:lnSpc>
+                <a:spcPts val="1700"/>
+              </a:lnSpc>
+              <a:buNone/>
+            </a:pPr>
+            <a:r>
+              <a:rPr lang="en-US" sz="1450" b="1" dirty="0">
+                <a:solidFill>
+                  <a:srgbClr val="2C7A57"/>
                 </a:solidFill>
                 <a:latin typeface="Cambria" pitchFamily="34" charset="0"/>
                 <a:ea typeface="Cambria" pitchFamily="34" charset="-122"/>
                 <a:cs typeface="Cambria" pitchFamily="34" charset="-120"/>
               </a:rPr>
-              <a:t>Observational pool</a:t>
-            </a:r>
-            <a:endParaRPr lang="en-US" sz="1700" dirty="0"/>
-          </a:p>
-        </p:txBody>
-      </p:sp>
-      <p:sp>
-        <p:nvSpPr>
-          <p:cNvPr id="12" name="Text 10"/>
-          <p:cNvSpPr/>
-          <p:nvPr/>
-        </p:nvSpPr>
-        <p:spPr>
-          <a:xfrm>
-            <a:off x="6629400" y="2560320"/>
-            <a:ext cx="4754880" cy="1371600"/>
+              <a:t>Where's the revenue upside?</a:t>
+            </a:r>
+            <a:endParaRPr lang="en-US" sz="1450" dirty="0"/>
+          </a:p>
+        </p:txBody>
+      </p:sp>
+      <p:sp>
+        <p:nvSpPr>
+          <p:cNvPr id="18" name="Text 16"/>
+          <p:cNvSpPr/>
+          <p:nvPr/>
+        </p:nvSpPr>
+        <p:spPr>
+          <a:xfrm>
+            <a:off x="5943600" y="3977640"/>
+            <a:ext cx="5394960" cy="777240"/>
+          </a:xfrm>
+          <a:prstGeom prst="rect">
+            <a:avLst/>
+          </a:prstGeom>
+          <a:noFill/>
+          <a:ln/>
+        </p:spPr>
+        <p:txBody>
+          <a:bodyPr wrap="square" rtlCol="0" anchor="ctr"/>
+          <a:lstStyle/>
+          <a:p>
+            <a:pPr indent="0" marL="0">
+              <a:lnSpc>
+                <a:spcPts val="1600"/>
+              </a:lnSpc>
+              <a:buNone/>
+            </a:pPr>
+            <a:r>
+              <a:rPr lang="en-US" sz="1250" dirty="0">
+                <a:solidFill>
+                  <a:srgbClr val="1A1A2E"/>
+                </a:solidFill>
+                <a:latin typeface="Calibri" pitchFamily="34" charset="0"/>
+                <a:ea typeface="Calibri" pitchFamily="34" charset="-122"/>
+                <a:cs typeface="Calibri" pitchFamily="34" charset="-120"/>
+              </a:rPr>
+              <a:t>Gradient-boosted venue-revenue model, honest out-of-fold evaluation.</a:t>
+            </a:r>
+            <a:endParaRPr lang="en-US" sz="1250" dirty="0"/>
+          </a:p>
+        </p:txBody>
+      </p:sp>
+      <p:sp>
+        <p:nvSpPr>
+          <p:cNvPr id="19" name="Shape 17"/>
+          <p:cNvSpPr/>
+          <p:nvPr/>
+        </p:nvSpPr>
+        <p:spPr>
+          <a:xfrm>
+            <a:off x="548640" y="4983480"/>
+            <a:ext cx="11091672" cy="960120"/>
+          </a:xfrm>
+          <a:prstGeom prst="roundRect">
+            <a:avLst>
+              <a:gd name="adj" fmla="val 9524"/>
+            </a:avLst>
+          </a:prstGeom>
+          <a:solidFill>
+            <a:srgbClr val="F5E3EC"/>
+          </a:solidFill>
+          <a:ln/>
+        </p:spPr>
+      </p:sp>
+      <p:sp>
+        <p:nvSpPr>
+          <p:cNvPr id="20" name="Shape 18"/>
+          <p:cNvSpPr/>
+          <p:nvPr/>
+        </p:nvSpPr>
+        <p:spPr>
+          <a:xfrm>
+            <a:off x="822960" y="5189220"/>
+            <a:ext cx="548640" cy="548640"/>
+          </a:xfrm>
+          <a:prstGeom prst="ellipse">
+            <a:avLst/>
+          </a:prstGeom>
+          <a:solidFill>
+            <a:srgbClr val="8E3B60"/>
+          </a:solidFill>
+          <a:ln/>
+        </p:spPr>
+      </p:sp>
+      <p:sp>
+        <p:nvSpPr>
+          <p:cNvPr id="21" name="Text 19"/>
+          <p:cNvSpPr/>
+          <p:nvPr/>
+        </p:nvSpPr>
+        <p:spPr>
+          <a:xfrm>
+            <a:off x="822960" y="5189220"/>
+            <a:ext cx="548640" cy="548640"/>
+          </a:xfrm>
+          <a:prstGeom prst="rect">
+            <a:avLst/>
+          </a:prstGeom>
+          <a:noFill/>
+          <a:ln/>
+        </p:spPr>
+        <p:txBody>
+          <a:bodyPr wrap="square" rtlCol="0" anchor="ctr"/>
+          <a:lstStyle/>
+          <a:p>
+            <a:pPr algn="ctr" indent="0" marL="0">
+              <a:buNone/>
+            </a:pPr>
+            <a:r>
+              <a:rPr lang="en-US" sz="1500" b="1" dirty="0">
+                <a:solidFill>
+                  <a:srgbClr val="FFFFFF"/>
+                </a:solidFill>
+                <a:latin typeface="Calibri" pitchFamily="34" charset="0"/>
+                <a:ea typeface="Calibri" pitchFamily="34" charset="-122"/>
+                <a:cs typeface="Calibri" pitchFamily="34" charset="-120"/>
+              </a:rPr>
+              <a:t>Q4</a:t>
+            </a:r>
+            <a:endParaRPr lang="en-US" sz="1500" dirty="0"/>
+          </a:p>
+        </p:txBody>
+      </p:sp>
+      <p:sp>
+        <p:nvSpPr>
+          <p:cNvPr id="22" name="Text 20"/>
+          <p:cNvSpPr/>
+          <p:nvPr/>
+        </p:nvSpPr>
+        <p:spPr>
+          <a:xfrm>
+            <a:off x="1645920" y="5074920"/>
+            <a:ext cx="4114800" cy="777240"/>
           </a:xfrm>
           <a:prstGeom prst="rect">
             <a:avLst/>
@@ -14551,30 +15390,30 @@
               <a:buNone/>
             </a:pPr>
             <a:r>
-              <a:rPr lang="en-US" sz="1250" dirty="0">
-                <a:solidFill>
-                  <a:srgbClr val="1A1A2E"/>
-                </a:solidFill>
-                <a:latin typeface="Calibri" pitchFamily="34" charset="0"/>
-                <a:ea typeface="Calibri" pitchFamily="34" charset="-122"/>
-                <a:cs typeface="Calibri" pitchFamily="34" charset="-120"/>
-              </a:rPr>
-              <a:t>Advertisers activate venues themselves — non-randomly. Higher-baseline-traffic venues are systematically more likely to be activated (a real selection mechanism), and weekly frequency varies venue-to-venue.</a:t>
-            </a:r>
-            <a:endParaRPr lang="en-US" sz="1250" dirty="0"/>
-          </a:p>
-        </p:txBody>
-      </p:sp>
-      <p:sp>
-        <p:nvSpPr>
-          <p:cNvPr id="13" name="Text 11"/>
-          <p:cNvSpPr/>
-          <p:nvPr/>
-        </p:nvSpPr>
-        <p:spPr>
-          <a:xfrm>
-            <a:off x="6629400" y="5029200"/>
-            <a:ext cx="4754880" cy="731520"/>
+              <a:rPr lang="en-US" sz="1450" b="1" dirty="0">
+                <a:solidFill>
+                  <a:srgbClr val="8E3B60"/>
+                </a:solidFill>
+                <a:latin typeface="Cambria" pitchFamily="34" charset="0"/>
+                <a:ea typeface="Cambria" pitchFamily="34" charset="-122"/>
+                <a:cs typeface="Cambria" pitchFamily="34" charset="-120"/>
+              </a:rPr>
+              <a:t>Which venues are at risk?</a:t>
+            </a:r>
+            <a:endParaRPr lang="en-US" sz="1450" dirty="0"/>
+          </a:p>
+        </p:txBody>
+      </p:sp>
+      <p:sp>
+        <p:nvSpPr>
+          <p:cNvPr id="23" name="Text 21"/>
+          <p:cNvSpPr/>
+          <p:nvPr/>
+        </p:nvSpPr>
+        <p:spPr>
+          <a:xfrm>
+            <a:off x="5943600" y="5074920"/>
+            <a:ext cx="5394960" cy="777240"/>
           </a:xfrm>
           <a:prstGeom prst="rect">
             <a:avLst/>
@@ -14593,23 +15432,23 @@
               <a:buNone/>
             </a:pPr>
             <a:r>
-              <a:rPr lang="en-US" sz="1200" i="1" dirty="0">
-                <a:solidFill>
-                  <a:srgbClr val="B8500A"/>
-                </a:solidFill>
-                <a:latin typeface="Calibri" pitchFamily="34" charset="0"/>
-                <a:ea typeface="Calibri" pitchFamily="34" charset="-122"/>
-                <a:cs typeface="Calibri" pitchFamily="34" charset="-120"/>
-              </a:rPr>
-              <a:t>A naive before/after comparison here is confounded by selection — this is what synthetic control and the MMM have to work around.</a:t>
-            </a:r>
-            <a:endParaRPr lang="en-US" sz="1200" dirty="0"/>
-          </a:p>
-        </p:txBody>
-      </p:sp>
-      <p:sp>
-        <p:nvSpPr>
-          <p:cNvPr id="14" name="Text 12"/>
+              <a:rPr lang="en-US" sz="1250" dirty="0">
+                <a:solidFill>
+                  <a:srgbClr val="1A1A2E"/>
+                </a:solidFill>
+                <a:latin typeface="Calibri" pitchFamily="34" charset="0"/>
+                <a:ea typeface="Calibri" pitchFamily="34" charset="-122"/>
+                <a:cs typeface="Calibri" pitchFamily="34" charset="-120"/>
+              </a:rPr>
+              <a:t>Gradient-boosted churn classifier, combined with Q3 into one value × risk priority.</a:t>
+            </a:r>
+            <a:endParaRPr lang="en-US" sz="1250" dirty="0"/>
+          </a:p>
+        </p:txBody>
+      </p:sp>
+      <p:sp>
+        <p:nvSpPr>
+          <p:cNvPr id="24" name="Text 22"/>
           <p:cNvSpPr/>
           <p:nvPr/>
         </p:nvSpPr>
@@ -14640,7 +15479,7 @@
                 <a:ea typeface="Calibri" pitchFamily="34" charset="-122"/>
                 <a:cs typeface="Calibri" pitchFamily="34" charset="-120"/>
               </a:rPr>
-              <a:t>Data &amp; methodology</a:t>
+              <a:t>Roadmap</a:t>
             </a:r>
             <a:endParaRPr lang="en-US" sz="900" dirty="0"/>
           </a:p>
@@ -14686,8 +15525,8 @@
         </p:nvSpPr>
         <p:spPr>
           <a:xfrm>
-            <a:off x="548640" y="411480"/>
-            <a:ext cx="9144000" cy="594360"/>
+            <a:off x="548640" y="457200"/>
+            <a:ext cx="11155680" cy="640080"/>
           </a:xfrm>
           <a:prstGeom prst="rect">
             <a:avLst/>
@@ -14711,7 +15550,7 @@
                 <a:ea typeface="Cambria" pitchFamily="34" charset="-122"/>
                 <a:cs typeface="Cambria" pitchFamily="34" charset="-120"/>
               </a:rPr>
-              <a:t>The proof point: ads move real foot traffic</a:t>
+              <a:t>Two data sources: a designed holdout test, and campaign history</a:t>
             </a:r>
             <a:endParaRPr lang="en-US" sz="2700" dirty="0"/>
           </a:p>
@@ -14738,7 +15577,7 @@
           </a:solidFill>
           <a:ln w="15875">
             <a:solidFill>
-              <a:srgbClr val="1E2761"/>
+              <a:srgbClr val="5B6178"/>
             </a:solidFill>
             <a:prstDash val="solid"/>
           </a:ln>
@@ -14771,13 +15610,13 @@
             <a:r>
               <a:rPr lang="en-US" sz="950" b="1" dirty="0">
                 <a:solidFill>
-                  <a:srgbClr val="1E2761"/>
-                </a:solidFill>
-                <a:latin typeface="Calibri" pitchFamily="34" charset="0"/>
-                <a:ea typeface="Calibri" pitchFamily="34" charset="-122"/>
-                <a:cs typeface="Calibri" pitchFamily="34" charset="-120"/>
-              </a:rPr>
-              <a:t>Step 1 of 6 · Answers Q1</a:t>
+                  <a:srgbClr val="5B6178"/>
+                </a:solidFill>
+                <a:latin typeface="Calibri" pitchFamily="34" charset="0"/>
+                <a:ea typeface="Calibri" pitchFamily="34" charset="-122"/>
+                <a:cs typeface="Calibri" pitchFamily="34" charset="-120"/>
+              </a:rPr>
+              <a:t>Foundation for Steps 1–3 · Q1–Q2</a:t>
             </a:r>
             <a:endParaRPr lang="en-US" sz="950" dirty="0"/>
           </a:p>
@@ -14785,302 +15624,91 @@
       </p:sp>
       <p:sp>
         <p:nvSpPr>
-          <p:cNvPr id="5" name="Shape 3"/>
-          <p:cNvSpPr/>
-          <p:nvPr/>
-        </p:nvSpPr>
-        <p:spPr>
-          <a:xfrm>
-            <a:off x="9784080" y="457200"/>
-            <a:ext cx="1920240" cy="502920"/>
+          <p:cNvPr id="5" name="Text 3"/>
+          <p:cNvSpPr/>
+          <p:nvPr/>
+        </p:nvSpPr>
+        <p:spPr>
+          <a:xfrm>
+            <a:off x="548640" y="1234440"/>
+            <a:ext cx="10972800" cy="365760"/>
+          </a:xfrm>
+          <a:prstGeom prst="rect">
+            <a:avLst/>
+          </a:prstGeom>
+          <a:noFill/>
+          <a:ln/>
+        </p:spPr>
+        <p:txBody>
+          <a:bodyPr wrap="square" rtlCol="0" anchor="ctr"/>
+          <a:lstStyle/>
+          <a:p>
+            <a:pPr indent="0" marL="0">
+              <a:buNone/>
+            </a:pPr>
+            <a:r>
+              <a:rPr lang="en-US" sz="1500" b="1" dirty="0">
+                <a:solidFill>
+                  <a:srgbClr val="E8871E"/>
+                </a:solidFill>
+                <a:latin typeface="Calibri" pitchFamily="34" charset="0"/>
+                <a:ea typeface="Calibri" pitchFamily="34" charset="-122"/>
+                <a:cs typeface="Calibri" pitchFamily="34" charset="-120"/>
+              </a:rPr>
+              <a:t>4 venue types × 100 venues each, 104 weeks (52 pre-period + 52 campaign)</a:t>
+            </a:r>
+            <a:endParaRPr lang="en-US" sz="1500" dirty="0"/>
+          </a:p>
+        </p:txBody>
+      </p:sp>
+      <p:sp>
+        <p:nvSpPr>
+          <p:cNvPr id="6" name="Shape 4"/>
+          <p:cNvSpPr/>
+          <p:nvPr/>
+        </p:nvSpPr>
+        <p:spPr>
+          <a:xfrm>
+            <a:off x="548640" y="1828800"/>
+            <a:ext cx="5394960" cy="4023360"/>
           </a:xfrm>
           <a:prstGeom prst="roundRect">
             <a:avLst>
-              <a:gd name="adj" fmla="val 14545"/>
+              <a:gd name="adj" fmla="val 2273"/>
             </a:avLst>
           </a:prstGeom>
           <a:solidFill>
-            <a:srgbClr val="2C7A57"/>
+            <a:srgbClr val="F5F7FC"/>
           </a:solidFill>
           <a:ln/>
         </p:spPr>
       </p:sp>
       <p:sp>
         <p:nvSpPr>
-          <p:cNvPr id="6" name="Text 4"/>
-          <p:cNvSpPr/>
-          <p:nvPr/>
-        </p:nvSpPr>
-        <p:spPr>
-          <a:xfrm>
-            <a:off x="9784080" y="457200"/>
-            <a:ext cx="1920240" cy="502920"/>
-          </a:xfrm>
-          <a:prstGeom prst="rect">
-            <a:avLst/>
-          </a:prstGeom>
-          <a:noFill/>
-          <a:ln/>
-        </p:spPr>
-        <p:txBody>
-          <a:bodyPr wrap="square" rtlCol="0" anchor="ctr"/>
-          <a:lstStyle/>
-          <a:p>
-            <a:pPr algn="ctr" indent="0" marL="0">
-              <a:buNone/>
-            </a:pPr>
-            <a:r>
-              <a:rPr lang="en-US" sz="1050" b="1" dirty="0">
-                <a:solidFill>
-                  <a:srgbClr val="FFFFFF"/>
-                </a:solidFill>
-                <a:latin typeface="Calibri" pitchFamily="34" charset="0"/>
-                <a:ea typeface="Calibri" pitchFamily="34" charset="-122"/>
-                <a:cs typeface="Calibri" pitchFamily="34" charset="-120"/>
-              </a:rPr>
-              <a:t>2/16 balance tests sig.</a:t>
-            </a:r>
-            <a:endParaRPr lang="en-US" sz="1050" dirty="0"/>
-          </a:p>
-        </p:txBody>
-      </p:sp>
-      <p:graphicFrame>
-        <p:nvGraphicFramePr>
-          <p:cNvPr id="7" name="Chart 0" descr=""/>
-          <p:cNvGraphicFramePr/>
-          <p:nvPr/>
-        </p:nvGraphicFramePr>
-        <p:xfrm>
-          <a:off x="548640" y="1188720"/>
-          <a:ext cx="6583680" cy="3749040"/>
-        </p:xfrm>
-        <a:graphic xmlns:a="http://schemas.openxmlformats.org/drawingml/2006/main">
-          <a:graphicData uri="http://schemas.openxmlformats.org/drawingml/2006/chart">
-            <c:chart xmlns:c="http://schemas.openxmlformats.org/drawingml/2006/chart" r:id="rId1"/>
-          </a:graphicData>
-        </a:graphic>
-      </p:graphicFrame>
-      <p:sp>
-        <p:nvSpPr>
-          <p:cNvPr id="8" name="Text 5"/>
-          <p:cNvSpPr/>
-          <p:nvPr/>
-        </p:nvSpPr>
-        <p:spPr>
-          <a:xfrm>
-            <a:off x="7406640" y="1188720"/>
-            <a:ext cx="4206240" cy="274320"/>
-          </a:xfrm>
-          <a:prstGeom prst="rect">
-            <a:avLst/>
-          </a:prstGeom>
-          <a:noFill/>
-          <a:ln/>
-        </p:spPr>
-        <p:txBody>
-          <a:bodyPr wrap="square" rtlCol="0" anchor="ctr"/>
-          <a:lstStyle/>
-          <a:p>
-            <a:pPr indent="0" marL="0">
-              <a:buNone/>
-            </a:pPr>
-            <a:r>
-              <a:rPr lang="en-US" sz="1000" b="1" dirty="0">
-                <a:solidFill>
-                  <a:srgbClr val="5B6178"/>
-                </a:solidFill>
-                <a:latin typeface="Courier New" pitchFamily="34" charset="0"/>
-                <a:ea typeface="Courier New" pitchFamily="34" charset="-122"/>
-                <a:cs typeface="Courier New" pitchFamily="34" charset="-120"/>
-              </a:rPr>
-              <a:t>Venue type      95% CI               p-value</a:t>
-            </a:r>
-            <a:endParaRPr lang="en-US" sz="1000" dirty="0"/>
-          </a:p>
-        </p:txBody>
-      </p:sp>
-      <p:sp>
-        <p:nvSpPr>
-          <p:cNvPr id="9" name="Text 6"/>
-          <p:cNvSpPr/>
-          <p:nvPr/>
-        </p:nvSpPr>
-        <p:spPr>
-          <a:xfrm>
-            <a:off x="7406640" y="1508760"/>
-            <a:ext cx="4206240" cy="320040"/>
-          </a:xfrm>
-          <a:prstGeom prst="rect">
-            <a:avLst/>
-          </a:prstGeom>
-          <a:noFill/>
-          <a:ln/>
-        </p:spPr>
-        <p:txBody>
-          <a:bodyPr wrap="square" rtlCol="0" anchor="ctr"/>
-          <a:lstStyle/>
-          <a:p>
-            <a:pPr indent="0" marL="0">
-              <a:buNone/>
-            </a:pPr>
-            <a:r>
-              <a:rPr lang="en-US" sz="1050" dirty="0">
-                <a:solidFill>
-                  <a:srgbClr val="1A1A2E"/>
-                </a:solidFill>
-                <a:latin typeface="Courier New" pitchFamily="34" charset="0"/>
-                <a:ea typeface="Courier New" pitchFamily="34" charset="-122"/>
-                <a:cs typeface="Courier New" pitchFamily="34" charset="-120"/>
-              </a:rPr>
-              <a:t>Restaurants    [11.1, 22.4]   &lt; 0.001</a:t>
-            </a:r>
-            <a:endParaRPr lang="en-US" sz="1050" dirty="0"/>
-          </a:p>
-        </p:txBody>
-      </p:sp>
-      <p:sp>
-        <p:nvSpPr>
-          <p:cNvPr id="10" name="Text 7"/>
-          <p:cNvSpPr/>
-          <p:nvPr/>
-        </p:nvSpPr>
-        <p:spPr>
-          <a:xfrm>
-            <a:off x="7406640" y="1892808"/>
-            <a:ext cx="4206240" cy="320040"/>
-          </a:xfrm>
-          <a:prstGeom prst="rect">
-            <a:avLst/>
-          </a:prstGeom>
-          <a:noFill/>
-          <a:ln/>
-        </p:spPr>
-        <p:txBody>
-          <a:bodyPr wrap="square" rtlCol="0" anchor="ctr"/>
-          <a:lstStyle/>
-          <a:p>
-            <a:pPr indent="0" marL="0">
-              <a:buNone/>
-            </a:pPr>
-            <a:r>
-              <a:rPr lang="en-US" sz="1050" dirty="0">
-                <a:solidFill>
-                  <a:srgbClr val="1A1A2E"/>
-                </a:solidFill>
-                <a:latin typeface="Courier New" pitchFamily="34" charset="0"/>
-                <a:ea typeface="Courier New" pitchFamily="34" charset="-122"/>
-                <a:cs typeface="Courier New" pitchFamily="34" charset="-120"/>
-              </a:rPr>
-              <a:t>Gyms           [5.2, 15.4]   &lt; 0.001</a:t>
-            </a:r>
-            <a:endParaRPr lang="en-US" sz="1050" dirty="0"/>
-          </a:p>
-        </p:txBody>
-      </p:sp>
-      <p:sp>
-        <p:nvSpPr>
-          <p:cNvPr id="11" name="Text 8"/>
-          <p:cNvSpPr/>
-          <p:nvPr/>
-        </p:nvSpPr>
-        <p:spPr>
-          <a:xfrm>
-            <a:off x="7406640" y="2276856"/>
-            <a:ext cx="4206240" cy="320040"/>
-          </a:xfrm>
-          <a:prstGeom prst="rect">
-            <a:avLst/>
-          </a:prstGeom>
-          <a:noFill/>
-          <a:ln/>
-        </p:spPr>
-        <p:txBody>
-          <a:bodyPr wrap="square" rtlCol="0" anchor="ctr"/>
-          <a:lstStyle/>
-          <a:p>
-            <a:pPr indent="0" marL="0">
-              <a:buNone/>
-            </a:pPr>
-            <a:r>
-              <a:rPr lang="en-US" sz="1050" dirty="0">
-                <a:solidFill>
-                  <a:srgbClr val="1A1A2E"/>
-                </a:solidFill>
-                <a:latin typeface="Courier New" pitchFamily="34" charset="0"/>
-                <a:ea typeface="Courier New" pitchFamily="34" charset="-122"/>
-                <a:cs typeface="Courier New" pitchFamily="34" charset="-120"/>
-              </a:rPr>
-              <a:t>Bars           [13.3, 22.5]   &lt; 0.001</a:t>
-            </a:r>
-            <a:endParaRPr lang="en-US" sz="1050" dirty="0"/>
-          </a:p>
-        </p:txBody>
-      </p:sp>
-      <p:sp>
-        <p:nvSpPr>
-          <p:cNvPr id="12" name="Text 9"/>
-          <p:cNvSpPr/>
-          <p:nvPr/>
-        </p:nvSpPr>
-        <p:spPr>
-          <a:xfrm>
-            <a:off x="7406640" y="2660904"/>
-            <a:ext cx="4206240" cy="320040"/>
-          </a:xfrm>
-          <a:prstGeom prst="rect">
-            <a:avLst/>
-          </a:prstGeom>
-          <a:noFill/>
-          <a:ln/>
-        </p:spPr>
-        <p:txBody>
-          <a:bodyPr wrap="square" rtlCol="0" anchor="ctr"/>
-          <a:lstStyle/>
-          <a:p>
-            <a:pPr indent="0" marL="0">
-              <a:buNone/>
-            </a:pPr>
-            <a:r>
-              <a:rPr lang="en-US" sz="1050" dirty="0">
-                <a:solidFill>
-                  <a:srgbClr val="1A1A2E"/>
-                </a:solidFill>
-                <a:latin typeface="Courier New" pitchFamily="34" charset="0"/>
-                <a:ea typeface="Courier New" pitchFamily="34" charset="-122"/>
-                <a:cs typeface="Courier New" pitchFamily="34" charset="-120"/>
-              </a:rPr>
-              <a:t>Waiting Rooms  [5.1, 10.2]   &lt; 0.001</a:t>
-            </a:r>
-            <a:endParaRPr lang="en-US" sz="1050" dirty="0"/>
-          </a:p>
-        </p:txBody>
-      </p:sp>
-      <p:sp>
-        <p:nvSpPr>
-          <p:cNvPr id="13" name="Text 10"/>
-          <p:cNvSpPr/>
-          <p:nvPr/>
-        </p:nvSpPr>
-        <p:spPr>
-          <a:xfrm>
-            <a:off x="7406640" y="3319272"/>
-            <a:ext cx="4206240" cy="274320"/>
-          </a:xfrm>
-          <a:prstGeom prst="rect">
-            <a:avLst/>
-          </a:prstGeom>
-          <a:noFill/>
-          <a:ln/>
-        </p:spPr>
-        <p:txBody>
-          <a:bodyPr wrap="square" rtlCol="0" anchor="ctr"/>
-          <a:lstStyle/>
-          <a:p>
-            <a:pPr indent="0" marL="0">
-              <a:buNone/>
-            </a:pPr>
-            <a:r>
-              <a:rPr lang="en-US" sz="1200" b="1" dirty="0">
+          <p:cNvPr id="7" name="Text 5"/>
+          <p:cNvSpPr/>
+          <p:nvPr/>
+        </p:nvSpPr>
+        <p:spPr>
+          <a:xfrm>
+            <a:off x="868680" y="2057400"/>
+            <a:ext cx="4754880" cy="457200"/>
+          </a:xfrm>
+          <a:prstGeom prst="rect">
+            <a:avLst/>
+          </a:prstGeom>
+          <a:noFill/>
+          <a:ln/>
+        </p:spPr>
+        <p:txBody>
+          <a:bodyPr wrap="square" rtlCol="0" anchor="ctr"/>
+          <a:lstStyle/>
+          <a:p>
+            <a:pPr indent="0" marL="0">
+              <a:buNone/>
+            </a:pPr>
+            <a:r>
+              <a:rPr lang="en-US" sz="1700" b="1" dirty="0">
                 <a:solidFill>
                   <a:srgbClr val="1E2761"/>
                 </a:solidFill>
@@ -15088,7 +15716,91 @@
                 <a:ea typeface="Cambria" pitchFamily="34" charset="-122"/>
                 <a:cs typeface="Cambria" pitchFamily="34" charset="-120"/>
               </a:rPr>
-              <a:t>Why 2/16 isn't a red flag</a:t>
+              <a:t>RCT pool</a:t>
+            </a:r>
+            <a:endParaRPr lang="en-US" sz="1700" dirty="0"/>
+          </a:p>
+        </p:txBody>
+      </p:sp>
+      <p:sp>
+        <p:nvSpPr>
+          <p:cNvPr id="8" name="Text 6"/>
+          <p:cNvSpPr/>
+          <p:nvPr/>
+        </p:nvSpPr>
+        <p:spPr>
+          <a:xfrm>
+            <a:off x="868680" y="2560320"/>
+            <a:ext cx="4754880" cy="1371600"/>
+          </a:xfrm>
+          <a:prstGeom prst="rect">
+            <a:avLst/>
+          </a:prstGeom>
+          <a:noFill/>
+          <a:ln/>
+        </p:spPr>
+        <p:txBody>
+          <a:bodyPr wrap="square" rtlCol="0" anchor="ctr"/>
+          <a:lstStyle/>
+          <a:p>
+            <a:pPr indent="0" marL="0">
+              <a:lnSpc>
+                <a:spcPts val="1700"/>
+              </a:lnSpc>
+              <a:buNone/>
+            </a:pPr>
+            <a:r>
+              <a:rPr lang="en-US" sz="1250" dirty="0">
+                <a:solidFill>
+                  <a:srgbClr val="1A1A2E"/>
+                </a:solidFill>
+                <a:latin typeface="Calibri" pitchFamily="34" charset="0"/>
+                <a:ea typeface="Calibri" pitchFamily="34" charset="-122"/>
+                <a:cs typeface="Calibri" pitchFamily="34" charset="-120"/>
+              </a:rPr>
+              <a:t>Randomly split treated / holdout within venue_type × geo_cluster × traffic-tier strata for a fixed benchmark campaign. This is a real Atmosphere-designed measurement product, not a historical campaign.</a:t>
+            </a:r>
+            <a:endParaRPr lang="en-US" sz="1250" dirty="0"/>
+          </a:p>
+        </p:txBody>
+      </p:sp>
+      <p:sp>
+        <p:nvSpPr>
+          <p:cNvPr id="9" name="Text 7"/>
+          <p:cNvSpPr/>
+          <p:nvPr/>
+        </p:nvSpPr>
+        <p:spPr>
+          <a:xfrm>
+            <a:off x="868680" y="5029200"/>
+            <a:ext cx="4754880" cy="731520"/>
+          </a:xfrm>
+          <a:prstGeom prst="rect">
+            <a:avLst/>
+          </a:prstGeom>
+          <a:noFill/>
+          <a:ln/>
+        </p:spPr>
+        <p:txBody>
+          <a:bodyPr wrap="square" rtlCol="0" anchor="ctr"/>
+          <a:lstStyle/>
+          <a:p>
+            <a:pPr indent="0" marL="0">
+              <a:lnSpc>
+                <a:spcPts val="1600"/>
+              </a:lnSpc>
+              <a:buNone/>
+            </a:pPr>
+            <a:r>
+              <a:rPr lang="en-US" sz="1200" i="1" dirty="0">
+                <a:solidFill>
+                  <a:srgbClr val="2C7A57"/>
+                </a:solidFill>
+                <a:latin typeface="Calibri" pitchFamily="34" charset="0"/>
+                <a:ea typeface="Calibri" pitchFamily="34" charset="-122"/>
+                <a:cs typeface="Calibri" pitchFamily="34" charset="-120"/>
+              </a:rPr>
+              <a:t>Used to anchor confidence — assignment is verified, not assumed.</a:t>
             </a:r>
             <a:endParaRPr lang="en-US" sz="1200" dirty="0"/>
           </a:p>
@@ -15096,14 +15808,75 @@
       </p:sp>
       <p:sp>
         <p:nvSpPr>
-          <p:cNvPr id="14" name="Text 11"/>
-          <p:cNvSpPr/>
-          <p:nvPr/>
-        </p:nvSpPr>
-        <p:spPr>
-          <a:xfrm>
-            <a:off x="7406640" y="3639312"/>
-            <a:ext cx="4206240" cy="777240"/>
+          <p:cNvPr id="10" name="Shape 8"/>
+          <p:cNvSpPr/>
+          <p:nvPr/>
+        </p:nvSpPr>
+        <p:spPr>
+          <a:xfrm>
+            <a:off x="6309360" y="1828800"/>
+            <a:ext cx="5394960" cy="4023360"/>
+          </a:xfrm>
+          <a:prstGeom prst="roundRect">
+            <a:avLst>
+              <a:gd name="adj" fmla="val 2273"/>
+            </a:avLst>
+          </a:prstGeom>
+          <a:solidFill>
+            <a:srgbClr val="F5F7FC"/>
+          </a:solidFill>
+          <a:ln/>
+        </p:spPr>
+      </p:sp>
+      <p:sp>
+        <p:nvSpPr>
+          <p:cNvPr id="11" name="Text 9"/>
+          <p:cNvSpPr/>
+          <p:nvPr/>
+        </p:nvSpPr>
+        <p:spPr>
+          <a:xfrm>
+            <a:off x="6629400" y="2057400"/>
+            <a:ext cx="4754880" cy="457200"/>
+          </a:xfrm>
+          <a:prstGeom prst="rect">
+            <a:avLst/>
+          </a:prstGeom>
+          <a:noFill/>
+          <a:ln/>
+        </p:spPr>
+        <p:txBody>
+          <a:bodyPr wrap="square" rtlCol="0" anchor="ctr"/>
+          <a:lstStyle/>
+          <a:p>
+            <a:pPr indent="0" marL="0">
+              <a:buNone/>
+            </a:pPr>
+            <a:r>
+              <a:rPr lang="en-US" sz="1700" b="1" dirty="0">
+                <a:solidFill>
+                  <a:srgbClr val="1E2761"/>
+                </a:solidFill>
+                <a:latin typeface="Cambria" pitchFamily="34" charset="0"/>
+                <a:ea typeface="Cambria" pitchFamily="34" charset="-122"/>
+                <a:cs typeface="Cambria" pitchFamily="34" charset="-120"/>
+              </a:rPr>
+              <a:t>Observational pool</a:t>
+            </a:r>
+            <a:endParaRPr lang="en-US" sz="1700" dirty="0"/>
+          </a:p>
+        </p:txBody>
+      </p:sp>
+      <p:sp>
+        <p:nvSpPr>
+          <p:cNvPr id="12" name="Text 10"/>
+          <p:cNvSpPr/>
+          <p:nvPr/>
+        </p:nvSpPr>
+        <p:spPr>
+          <a:xfrm>
+            <a:off x="6629400" y="2560320"/>
+            <a:ext cx="4754880" cy="1371600"/>
           </a:xfrm>
           <a:prstGeom prst="rect">
             <a:avLst/>
@@ -15117,12 +15890,12 @@
           <a:p>
             <a:pPr indent="0" marL="0">
               <a:lnSpc>
-                <a:spcPts val="1400"/>
+                <a:spcPts val="1700"/>
               </a:lnSpc>
               <a:buNone/>
             </a:pPr>
             <a:r>
-              <a:rPr lang="en-US" sz="1050" dirty="0">
+              <a:rPr lang="en-US" sz="1250" dirty="0">
                 <a:solidFill>
                   <a:srgbClr val="1A1A2E"/>
                 </a:solidFill>
@@ -15130,22 +15903,22 @@
                 <a:ea typeface="Calibri" pitchFamily="34" charset="-122"/>
                 <a:cs typeface="Calibri" pitchFamily="34" charset="-120"/>
               </a:rPr>
-              <a:t>16 tests = 4 pre-treatment covariates (baseline traffic level, dwell time, screen count, audience quality) × 4 venue types. Only 2 came back significant at p≤0.05.</a:t>
-            </a:r>
-            <a:endParaRPr lang="en-US" sz="1050" dirty="0"/>
-          </a:p>
-        </p:txBody>
-      </p:sp>
-      <p:sp>
-        <p:nvSpPr>
-          <p:cNvPr id="15" name="Text 12"/>
-          <p:cNvSpPr/>
-          <p:nvPr/>
-        </p:nvSpPr>
-        <p:spPr>
-          <a:xfrm>
-            <a:off x="7406640" y="4462272"/>
-            <a:ext cx="4206240" cy="1371600"/>
+              <a:t>Advertisers activate venues themselves — non-randomly. Higher-baseline-traffic venues are systematically more likely to be activated (a real selection mechanism), and weekly frequency varies venue-to-venue.</a:t>
+            </a:r>
+            <a:endParaRPr lang="en-US" sz="1250" dirty="0"/>
+          </a:p>
+        </p:txBody>
+      </p:sp>
+      <p:sp>
+        <p:nvSpPr>
+          <p:cNvPr id="13" name="Text 11"/>
+          <p:cNvSpPr/>
+          <p:nvPr/>
+        </p:nvSpPr>
+        <p:spPr>
+          <a:xfrm>
+            <a:off x="6629400" y="5029200"/>
+            <a:ext cx="4754880" cy="731520"/>
           </a:xfrm>
           <a:prstGeom prst="rect">
             <a:avLst/>
@@ -15159,28 +15932,28 @@
           <a:p>
             <a:pPr indent="0" marL="0">
               <a:lnSpc>
-                <a:spcPts val="1400"/>
+                <a:spcPts val="1600"/>
               </a:lnSpc>
               <a:buNone/>
             </a:pPr>
             <a:r>
-              <a:rPr lang="en-US" sz="1050" i="1" dirty="0">
-                <a:solidFill>
-                  <a:srgbClr val="5B6178"/>
-                </a:solidFill>
-                <a:latin typeface="Calibri" pitchFamily="34" charset="0"/>
-                <a:ea typeface="Calibri" pitchFamily="34" charset="-122"/>
-                <a:cs typeface="Calibri" pitchFamily="34" charset="-120"/>
-              </a:rPr>
-              <a:t>If randomization is clean, the count of false positives across 16 independent tests follows Binomial(16, 0.05): mean 0.8, P(≥2) ≈ 19%. Two sits well inside that distribution's main mass — nowhere near a red-flag tail value like 8+. Randomization worked as designed, not assumed.</a:t>
-            </a:r>
-            <a:endParaRPr lang="en-US" sz="1050" dirty="0"/>
-          </a:p>
-        </p:txBody>
-      </p:sp>
-      <p:sp>
-        <p:nvSpPr>
-          <p:cNvPr id="16" name="Text 13"/>
+              <a:rPr lang="en-US" sz="1200" i="1" dirty="0">
+                <a:solidFill>
+                  <a:srgbClr val="B8500A"/>
+                </a:solidFill>
+                <a:latin typeface="Calibri" pitchFamily="34" charset="0"/>
+                <a:ea typeface="Calibri" pitchFamily="34" charset="-122"/>
+                <a:cs typeface="Calibri" pitchFamily="34" charset="-120"/>
+              </a:rPr>
+              <a:t>A naive before/after comparison here is confounded by selection — this is what synthetic control and the MMM have to work around.</a:t>
+            </a:r>
+            <a:endParaRPr lang="en-US" sz="1200" dirty="0"/>
+          </a:p>
+        </p:txBody>
+      </p:sp>
+      <p:sp>
+        <p:nvSpPr>
+          <p:cNvPr id="14" name="Text 12"/>
           <p:cNvSpPr/>
           <p:nvPr/>
         </p:nvSpPr>
@@ -15211,7 +15984,7 @@
                 <a:ea typeface="Calibri" pitchFamily="34" charset="-122"/>
                 <a:cs typeface="Calibri" pitchFamily="34" charset="-120"/>
               </a:rPr>
-              <a:t>Causal measurement — RCT</a:t>
+              <a:t>Data &amp; methodology</a:t>
             </a:r>
             <a:endParaRPr lang="en-US" sz="900" dirty="0"/>
           </a:p>
@@ -15258,7 +16031,7 @@
         <p:spPr>
           <a:xfrm>
             <a:off x="548640" y="411480"/>
-            <a:ext cx="10058400" cy="594360"/>
+            <a:ext cx="9144000" cy="594360"/>
           </a:xfrm>
           <a:prstGeom prst="rect">
             <a:avLst/>
@@ -15282,7 +16055,7 @@
                 <a:ea typeface="Cambria" pitchFamily="34" charset="-122"/>
                 <a:cs typeface="Cambria" pitchFamily="34" charset="-120"/>
               </a:rPr>
-              <a:t>Measuring the campaigns we couldn't randomize</a:t>
+              <a:t>The proof point: ads move real foot traffic</a:t>
             </a:r>
             <a:endParaRPr lang="en-US" sz="2700" dirty="0"/>
           </a:p>
@@ -15348,7 +16121,7 @@
                 <a:ea typeface="Calibri" pitchFamily="34" charset="-122"/>
                 <a:cs typeface="Calibri" pitchFamily="34" charset="-120"/>
               </a:rPr>
-              <a:t>Step 2 of 6 · Answers Q1</a:t>
+              <a:t>Step 1 of 6 · Answers Q1</a:t>
             </a:r>
             <a:endParaRPr lang="en-US" sz="950" dirty="0"/>
           </a:p>
@@ -15356,51 +16129,73 @@
       </p:sp>
       <p:sp>
         <p:nvSpPr>
-          <p:cNvPr id="5" name="Text 3"/>
-          <p:cNvSpPr/>
-          <p:nvPr/>
-        </p:nvSpPr>
-        <p:spPr>
-          <a:xfrm>
-            <a:off x="548640" y="1005840"/>
-            <a:ext cx="10789920" cy="457200"/>
-          </a:xfrm>
-          <a:prstGeom prst="rect">
-            <a:avLst/>
-          </a:prstGeom>
-          <a:noFill/>
-          <a:ln/>
-        </p:spPr>
-        <p:txBody>
-          <a:bodyPr wrap="square" rtlCol="0" anchor="ctr"/>
-          <a:lstStyle/>
-          <a:p>
-            <a:pPr indent="0" marL="0">
-              <a:buNone/>
-            </a:pPr>
-            <a:r>
-              <a:rPr lang="en-US" sz="1250" i="1" dirty="0">
-                <a:solidFill>
-                  <a:srgbClr val="5B6178"/>
-                </a:solidFill>
-                <a:latin typeface="Calibri" pitchFamily="34" charset="0"/>
-                <a:ea typeface="Calibri" pitchFamily="34" charset="-122"/>
-                <a:cs typeface="Calibri" pitchFamily="34" charset="-120"/>
-              </a:rPr>
-              <a:t>Most advertisers' campaigns already ran, on venues they picked — not us. Synthetic control reconstructs the counterfactual anyway, with its own built-in checks.</a:t>
-            </a:r>
-            <a:endParaRPr lang="en-US" sz="1250" dirty="0"/>
+          <p:cNvPr id="5" name="Shape 3"/>
+          <p:cNvSpPr/>
+          <p:nvPr/>
+        </p:nvSpPr>
+        <p:spPr>
+          <a:xfrm>
+            <a:off x="9784080" y="457200"/>
+            <a:ext cx="1920240" cy="502920"/>
+          </a:xfrm>
+          <a:prstGeom prst="roundRect">
+            <a:avLst>
+              <a:gd name="adj" fmla="val 14545"/>
+            </a:avLst>
+          </a:prstGeom>
+          <a:solidFill>
+            <a:srgbClr val="2C7A57"/>
+          </a:solidFill>
+          <a:ln/>
+        </p:spPr>
+      </p:sp>
+      <p:sp>
+        <p:nvSpPr>
+          <p:cNvPr id="6" name="Text 4"/>
+          <p:cNvSpPr/>
+          <p:nvPr/>
+        </p:nvSpPr>
+        <p:spPr>
+          <a:xfrm>
+            <a:off x="9784080" y="457200"/>
+            <a:ext cx="1920240" cy="502920"/>
+          </a:xfrm>
+          <a:prstGeom prst="rect">
+            <a:avLst/>
+          </a:prstGeom>
+          <a:noFill/>
+          <a:ln/>
+        </p:spPr>
+        <p:txBody>
+          <a:bodyPr wrap="square" rtlCol="0" anchor="ctr"/>
+          <a:lstStyle/>
+          <a:p>
+            <a:pPr algn="ctr" indent="0" marL="0">
+              <a:buNone/>
+            </a:pPr>
+            <a:r>
+              <a:rPr lang="en-US" sz="1050" b="1" dirty="0">
+                <a:solidFill>
+                  <a:srgbClr val="FFFFFF"/>
+                </a:solidFill>
+                <a:latin typeface="Calibri" pitchFamily="34" charset="0"/>
+                <a:ea typeface="Calibri" pitchFamily="34" charset="-122"/>
+                <a:cs typeface="Calibri" pitchFamily="34" charset="-120"/>
+              </a:rPr>
+              <a:t>2/16 balance tests sig.</a:t>
+            </a:r>
+            <a:endParaRPr lang="en-US" sz="1050" dirty="0"/>
           </a:p>
         </p:txBody>
       </p:sp>
       <p:graphicFrame>
         <p:nvGraphicFramePr>
-          <p:cNvPr id="6" name="Chart 0" descr=""/>
+          <p:cNvPr id="7" name="Chart 0" descr=""/>
           <p:cNvGraphicFramePr/>
           <p:nvPr/>
         </p:nvGraphicFramePr>
         <p:xfrm>
-          <a:off x="548640" y="1645920"/>
+          <a:off x="548640" y="1188720"/>
           <a:ext cx="6583680" cy="3749040"/>
         </p:xfrm>
         <a:graphic xmlns:a="http://schemas.openxmlformats.org/drawingml/2006/main">
@@ -15411,13 +16206,13 @@
       </p:graphicFrame>
       <p:sp>
         <p:nvSpPr>
-          <p:cNvPr id="7" name="Text 4"/>
-          <p:cNvSpPr/>
-          <p:nvPr/>
-        </p:nvSpPr>
-        <p:spPr>
-          <a:xfrm>
-            <a:off x="7406640" y="1645920"/>
+          <p:cNvPr id="8" name="Text 5"/>
+          <p:cNvSpPr/>
+          <p:nvPr/>
+        </p:nvSpPr>
+        <p:spPr>
+          <a:xfrm>
+            <a:off x="7406640" y="1188720"/>
             <a:ext cx="4206240" cy="274320"/>
           </a:xfrm>
           <a:prstGeom prst="rect">
@@ -15442,7 +16237,7 @@
                 <a:ea typeface="Courier New" pitchFamily="34" charset="-122"/>
                 <a:cs typeface="Courier New" pitchFamily="34" charset="-120"/>
               </a:rPr>
-              <a:t>Venue type      Placebo p    Pre-RMSPE</a:t>
+              <a:t>Venue type      95% CI               p-value</a:t>
             </a:r>
             <a:endParaRPr lang="en-US" sz="1000" dirty="0"/>
           </a:p>
@@ -15450,13 +16245,13 @@
       </p:sp>
       <p:sp>
         <p:nvSpPr>
-          <p:cNvPr id="8" name="Text 5"/>
-          <p:cNvSpPr/>
-          <p:nvPr/>
-        </p:nvSpPr>
-        <p:spPr>
-          <a:xfrm>
-            <a:off x="7406640" y="1965960"/>
+          <p:cNvPr id="9" name="Text 6"/>
+          <p:cNvSpPr/>
+          <p:nvPr/>
+        </p:nvSpPr>
+        <p:spPr>
+          <a:xfrm>
+            <a:off x="7406640" y="1508760"/>
             <a:ext cx="4206240" cy="320040"/>
           </a:xfrm>
           <a:prstGeom prst="rect">
@@ -15481,7 +16276,7 @@
                 <a:ea typeface="Courier New" pitchFamily="34" charset="-122"/>
                 <a:cs typeface="Courier New" pitchFamily="34" charset="-120"/>
               </a:rPr>
-              <a:t>Restaurants    0.160        26.4</a:t>
+              <a:t>Restaurants    [11.1, 22.4]   &lt; 0.001</a:t>
             </a:r>
             <a:endParaRPr lang="en-US" sz="1050" dirty="0"/>
           </a:p>
@@ -15489,13 +16284,13 @@
       </p:sp>
       <p:sp>
         <p:nvSpPr>
-          <p:cNvPr id="9" name="Text 6"/>
-          <p:cNvSpPr/>
-          <p:nvPr/>
-        </p:nvSpPr>
-        <p:spPr>
-          <a:xfrm>
-            <a:off x="7406640" y="2350008"/>
+          <p:cNvPr id="10" name="Text 7"/>
+          <p:cNvSpPr/>
+          <p:nvPr/>
+        </p:nvSpPr>
+        <p:spPr>
+          <a:xfrm>
+            <a:off x="7406640" y="1892808"/>
             <a:ext cx="4206240" cy="320040"/>
           </a:xfrm>
           <a:prstGeom prst="rect">
@@ -15520,7 +16315,7 @@
                 <a:ea typeface="Courier New" pitchFamily="34" charset="-122"/>
                 <a:cs typeface="Courier New" pitchFamily="34" charset="-120"/>
               </a:rPr>
-              <a:t>Gyms           0.050        14.4</a:t>
+              <a:t>Gyms           [5.2, 15.4]   &lt; 0.001</a:t>
             </a:r>
             <a:endParaRPr lang="en-US" sz="1050" dirty="0"/>
           </a:p>
@@ -15528,13 +16323,13 @@
       </p:sp>
       <p:sp>
         <p:nvSpPr>
-          <p:cNvPr id="10" name="Text 7"/>
-          <p:cNvSpPr/>
-          <p:nvPr/>
-        </p:nvSpPr>
-        <p:spPr>
-          <a:xfrm>
-            <a:off x="7406640" y="2734056"/>
+          <p:cNvPr id="11" name="Text 8"/>
+          <p:cNvSpPr/>
+          <p:nvPr/>
+        </p:nvSpPr>
+        <p:spPr>
+          <a:xfrm>
+            <a:off x="7406640" y="2276856"/>
             <a:ext cx="4206240" cy="320040"/>
           </a:xfrm>
           <a:prstGeom prst="rect">
@@ -15559,7 +16354,7 @@
                 <a:ea typeface="Courier New" pitchFamily="34" charset="-122"/>
                 <a:cs typeface="Courier New" pitchFamily="34" charset="-120"/>
               </a:rPr>
-              <a:t>Bars           0.100        17.8</a:t>
+              <a:t>Bars           [13.3, 22.5]   &lt; 0.001</a:t>
             </a:r>
             <a:endParaRPr lang="en-US" sz="1050" dirty="0"/>
           </a:p>
@@ -15567,13 +16362,13 @@
       </p:sp>
       <p:sp>
         <p:nvSpPr>
-          <p:cNvPr id="11" name="Text 8"/>
-          <p:cNvSpPr/>
-          <p:nvPr/>
-        </p:nvSpPr>
-        <p:spPr>
-          <a:xfrm>
-            <a:off x="7406640" y="3118104"/>
+          <p:cNvPr id="12" name="Text 9"/>
+          <p:cNvSpPr/>
+          <p:nvPr/>
+        </p:nvSpPr>
+        <p:spPr>
+          <a:xfrm>
+            <a:off x="7406640" y="2660904"/>
             <a:ext cx="4206240" cy="320040"/>
           </a:xfrm>
           <a:prstGeom prst="rect">
@@ -15598,7 +16393,7 @@
                 <a:ea typeface="Courier New" pitchFamily="34" charset="-122"/>
                 <a:cs typeface="Courier New" pitchFamily="34" charset="-120"/>
               </a:rPr>
-              <a:t>Waiting Rooms  0.110        8.3</a:t>
+              <a:t>Waiting Rooms  [5.1, 10.2]   &lt; 0.001</a:t>
             </a:r>
             <a:endParaRPr lang="en-US" sz="1050" dirty="0"/>
           </a:p>
@@ -15606,14 +16401,53 @@
       </p:sp>
       <p:sp>
         <p:nvSpPr>
-          <p:cNvPr id="12" name="Text 9"/>
-          <p:cNvSpPr/>
-          <p:nvPr/>
-        </p:nvSpPr>
-        <p:spPr>
-          <a:xfrm>
-            <a:off x="7406640" y="3776472"/>
-            <a:ext cx="4206240" cy="1554480"/>
+          <p:cNvPr id="13" name="Text 10"/>
+          <p:cNvSpPr/>
+          <p:nvPr/>
+        </p:nvSpPr>
+        <p:spPr>
+          <a:xfrm>
+            <a:off x="7406640" y="3319272"/>
+            <a:ext cx="4206240" cy="274320"/>
+          </a:xfrm>
+          <a:prstGeom prst="rect">
+            <a:avLst/>
+          </a:prstGeom>
+          <a:noFill/>
+          <a:ln/>
+        </p:spPr>
+        <p:txBody>
+          <a:bodyPr wrap="square" rtlCol="0" anchor="ctr"/>
+          <a:lstStyle/>
+          <a:p>
+            <a:pPr indent="0" marL="0">
+              <a:buNone/>
+            </a:pPr>
+            <a:r>
+              <a:rPr lang="en-US" sz="1200" b="1" dirty="0">
+                <a:solidFill>
+                  <a:srgbClr val="1E2761"/>
+                </a:solidFill>
+                <a:latin typeface="Cambria" pitchFamily="34" charset="0"/>
+                <a:ea typeface="Cambria" pitchFamily="34" charset="-122"/>
+                <a:cs typeface="Cambria" pitchFamily="34" charset="-120"/>
+              </a:rPr>
+              <a:t>Why 2/16 isn't a red flag</a:t>
+            </a:r>
+            <a:endParaRPr lang="en-US" sz="1200" dirty="0"/>
+          </a:p>
+        </p:txBody>
+      </p:sp>
+      <p:sp>
+        <p:nvSpPr>
+          <p:cNvPr id="14" name="Text 11"/>
+          <p:cNvSpPr/>
+          <p:nvPr/>
+        </p:nvSpPr>
+        <p:spPr>
+          <a:xfrm>
+            <a:off x="7406640" y="3639312"/>
+            <a:ext cx="4206240" cy="777240"/>
           </a:xfrm>
           <a:prstGeom prst="rect">
             <a:avLst/>
@@ -15627,12 +16461,54 @@
           <a:p>
             <a:pPr indent="0" marL="0">
               <a:lnSpc>
-                <a:spcPts val="1500"/>
+                <a:spcPts val="1400"/>
               </a:lnSpc>
               <a:buNone/>
             </a:pPr>
             <a:r>
-              <a:rPr lang="en-US" sz="1100" i="1" dirty="0">
+              <a:rPr lang="en-US" sz="1050" dirty="0">
+                <a:solidFill>
+                  <a:srgbClr val="1A1A2E"/>
+                </a:solidFill>
+                <a:latin typeface="Calibri" pitchFamily="34" charset="0"/>
+                <a:ea typeface="Calibri" pitchFamily="34" charset="-122"/>
+                <a:cs typeface="Calibri" pitchFamily="34" charset="-120"/>
+              </a:rPr>
+              <a:t>16 tests = 4 pre-treatment covariates (baseline traffic level, dwell time, screen count, audience quality) × 4 venue types. Only 2 came back significant at p≤0.05.</a:t>
+            </a:r>
+            <a:endParaRPr lang="en-US" sz="1050" dirty="0"/>
+          </a:p>
+        </p:txBody>
+      </p:sp>
+      <p:sp>
+        <p:nvSpPr>
+          <p:cNvPr id="15" name="Text 12"/>
+          <p:cNvSpPr/>
+          <p:nvPr/>
+        </p:nvSpPr>
+        <p:spPr>
+          <a:xfrm>
+            <a:off x="7406640" y="4462272"/>
+            <a:ext cx="4206240" cy="1371600"/>
+          </a:xfrm>
+          <a:prstGeom prst="rect">
+            <a:avLst/>
+          </a:prstGeom>
+          <a:noFill/>
+          <a:ln/>
+        </p:spPr>
+        <p:txBody>
+          <a:bodyPr wrap="square" rtlCol="0" anchor="ctr"/>
+          <a:lstStyle/>
+          <a:p>
+            <a:pPr indent="0" marL="0">
+              <a:lnSpc>
+                <a:spcPts val="1400"/>
+              </a:lnSpc>
+              <a:buNone/>
+            </a:pPr>
+            <a:r>
+              <a:rPr lang="en-US" sz="1050" i="1" dirty="0">
                 <a:solidFill>
                   <a:srgbClr val="5B6178"/>
                 </a:solidFill>
@@ -15640,15 +16516,15 @@
                 <a:ea typeface="Calibri" pitchFamily="34" charset="-122"/>
                 <a:cs typeface="Calibri" pitchFamily="34" charset="-120"/>
               </a:rPr>
-              <a:t>Two validation checks, since synthetic control has no closed-form standard error: pre-period fit quality (RMSPE — poor fits are flagged and excluded from the aggregate estimate) and an in-space placebo test on every donor venue.</a:t>
-            </a:r>
-            <a:endParaRPr lang="en-US" sz="1100" dirty="0"/>
-          </a:p>
-        </p:txBody>
-      </p:sp>
-      <p:sp>
-        <p:nvSpPr>
-          <p:cNvPr id="13" name="Text 10"/>
+              <a:t>If randomization is clean, the count of false positives across 16 independent tests follows Binomial(16, 0.05): mean 0.8, P(≥2) ≈ 19%. Two sits well inside that distribution's main mass — nowhere near a red-flag tail value like 8+. Randomization worked as designed, not assumed.</a:t>
+            </a:r>
+            <a:endParaRPr lang="en-US" sz="1050" dirty="0"/>
+          </a:p>
+        </p:txBody>
+      </p:sp>
+      <p:sp>
+        <p:nvSpPr>
+          <p:cNvPr id="16" name="Text 13"/>
           <p:cNvSpPr/>
           <p:nvPr/>
         </p:nvSpPr>
@@ -15679,7 +16555,7 @@
                 <a:ea typeface="Calibri" pitchFamily="34" charset="-122"/>
                 <a:cs typeface="Calibri" pitchFamily="34" charset="-120"/>
               </a:rPr>
-              <a:t>Causal measurement — Synthetic Control</a:t>
+              <a:t>Causal measurement — RCT</a:t>
             </a:r>
             <a:endParaRPr lang="en-US" sz="900" dirty="0"/>
           </a:p>
@@ -15726,23 +16602,23 @@
         <p:spPr>
           <a:xfrm>
             <a:off x="548640" y="411480"/>
-            <a:ext cx="11247120" cy="594360"/>
-          </a:xfrm>
-          <a:prstGeom prst="rect">
-            <a:avLst/>
-          </a:prstGeom>
-          <a:noFill/>
-          <a:ln/>
-        </p:spPr>
-        <p:txBody>
-          <a:bodyPr wrap="square" rtlCol="0" anchor="ctr"/>
-          <a:lstStyle/>
-          <a:p>
-            <a:pPr indent="0" marL="0">
-              <a:buNone/>
-            </a:pPr>
-            <a:r>
-              <a:rPr lang="en-US" sz="2500" b="1" dirty="0">
+            <a:ext cx="10058400" cy="594360"/>
+          </a:xfrm>
+          <a:prstGeom prst="rect">
+            <a:avLst/>
+          </a:prstGeom>
+          <a:noFill/>
+          <a:ln/>
+        </p:spPr>
+        <p:txBody>
+          <a:bodyPr wrap="square" rtlCol="0" anchor="ctr"/>
+          <a:lstStyle/>
+          <a:p>
+            <a:pPr indent="0" marL="0">
+              <a:buNone/>
+            </a:pPr>
+            <a:r>
+              <a:rPr lang="en-US" sz="2700" b="1" dirty="0">
                 <a:solidFill>
                   <a:srgbClr val="1E2761"/>
                 </a:solidFill>
@@ -15750,9 +16626,9 @@
                 <a:ea typeface="Cambria" pitchFamily="34" charset="-122"/>
                 <a:cs typeface="Cambria" pitchFamily="34" charset="-120"/>
               </a:rPr>
-              <a:t>MMM: an uncalibrated model would have underpriced results</a:t>
-            </a:r>
-            <a:endParaRPr lang="en-US" sz="2500" dirty="0"/>
+              <a:t>Measuring the campaigns we couldn't randomize</a:t>
+            </a:r>
+            <a:endParaRPr lang="en-US" sz="2700" dirty="0"/>
           </a:p>
         </p:txBody>
       </p:sp>
@@ -15777,7 +16653,7 @@
           </a:solidFill>
           <a:ln w="15875">
             <a:solidFill>
-              <a:srgbClr val="B8500A"/>
+              <a:srgbClr val="1E2761"/>
             </a:solidFill>
             <a:prstDash val="solid"/>
           </a:ln>
@@ -15810,13 +16686,13 @@
             <a:r>
               <a:rPr lang="en-US" sz="950" b="1" dirty="0">
                 <a:solidFill>
-                  <a:srgbClr val="B8500A"/>
-                </a:solidFill>
-                <a:latin typeface="Calibri" pitchFamily="34" charset="0"/>
-                <a:ea typeface="Calibri" pitchFamily="34" charset="-122"/>
-                <a:cs typeface="Calibri" pitchFamily="34" charset="-120"/>
-              </a:rPr>
-              <a:t>Step 3 of 6 · Answers Q2</a:t>
+                  <a:srgbClr val="1E2761"/>
+                </a:solidFill>
+                <a:latin typeface="Calibri" pitchFamily="34" charset="0"/>
+                <a:ea typeface="Calibri" pitchFamily="34" charset="-122"/>
+                <a:cs typeface="Calibri" pitchFamily="34" charset="-120"/>
+              </a:rPr>
+              <a:t>Step 2 of 6 · Answers Q1</a:t>
             </a:r>
             <a:endParaRPr lang="en-US" sz="950" dirty="0"/>
           </a:p>
@@ -15831,7 +16707,7 @@
         <p:spPr>
           <a:xfrm>
             <a:off x="548640" y="1005840"/>
-            <a:ext cx="10972800" cy="365760"/>
+            <a:ext cx="10789920" cy="457200"/>
           </a:xfrm>
           <a:prstGeom prst="rect">
             <a:avLst/>
@@ -15855,7 +16731,7 @@
                 <a:ea typeface="Calibri" pitchFamily="34" charset="-122"/>
                 <a:cs typeface="Calibri" pitchFamily="34" charset="-120"/>
               </a:rPr>
-              <a:t>Adstock + saturation shape comes from the aggregate weekly series; scale is pinned by the RCT's high-confidence estimate.</a:t>
+              <a:t>Most advertisers' campaigns already ran, on venues they picked — not us. Synthetic control reconstructs the counterfactual anyway, with its own built-in checks.</a:t>
             </a:r>
             <a:endParaRPr lang="en-US" sz="1250" dirty="0"/>
           </a:p>
@@ -15868,8 +16744,8 @@
           <p:nvPr/>
         </p:nvGraphicFramePr>
         <p:xfrm>
-          <a:off x="548640" y="1600200"/>
-          <a:ext cx="6949440" cy="3931920"/>
+          <a:off x="548640" y="1645920"/>
+          <a:ext cx="6583680" cy="3749040"/>
         </p:xfrm>
         <a:graphic xmlns:a="http://schemas.openxmlformats.org/drawingml/2006/main">
           <a:graphicData uri="http://schemas.openxmlformats.org/drawingml/2006/chart">
@@ -15885,34 +16761,34 @@
         </p:nvSpPr>
         <p:spPr>
           <a:xfrm>
-            <a:off x="7772400" y="1737360"/>
-            <a:ext cx="3840480" cy="320040"/>
-          </a:xfrm>
-          <a:prstGeom prst="rect">
-            <a:avLst/>
-          </a:prstGeom>
-          <a:noFill/>
-          <a:ln/>
-        </p:spPr>
-        <p:txBody>
-          <a:bodyPr wrap="square" rtlCol="0" anchor="ctr"/>
-          <a:lstStyle/>
-          <a:p>
-            <a:pPr indent="0" marL="0">
-              <a:buNone/>
-            </a:pPr>
-            <a:r>
-              <a:rPr lang="en-US" sz="1200" b="1" dirty="0">
-                <a:solidFill>
-                  <a:srgbClr val="1E2761"/>
-                </a:solidFill>
-                <a:latin typeface="Cambria" pitchFamily="34" charset="0"/>
-                <a:ea typeface="Cambria" pitchFamily="34" charset="-122"/>
-                <a:cs typeface="Cambria" pitchFamily="34" charset="-120"/>
-              </a:rPr>
-              <a:t>Calibration adjustment</a:t>
-            </a:r>
-            <a:endParaRPr lang="en-US" sz="1200" dirty="0"/>
+            <a:off x="7406640" y="1645920"/>
+            <a:ext cx="4206240" cy="274320"/>
+          </a:xfrm>
+          <a:prstGeom prst="rect">
+            <a:avLst/>
+          </a:prstGeom>
+          <a:noFill/>
+          <a:ln/>
+        </p:spPr>
+        <p:txBody>
+          <a:bodyPr wrap="square" rtlCol="0" anchor="ctr"/>
+          <a:lstStyle/>
+          <a:p>
+            <a:pPr indent="0" marL="0">
+              <a:buNone/>
+            </a:pPr>
+            <a:r>
+              <a:rPr lang="en-US" sz="1000" b="1" dirty="0">
+                <a:solidFill>
+                  <a:srgbClr val="5B6178"/>
+                </a:solidFill>
+                <a:latin typeface="Courier New" pitchFamily="34" charset="0"/>
+                <a:ea typeface="Courier New" pitchFamily="34" charset="-122"/>
+                <a:cs typeface="Courier New" pitchFamily="34" charset="-120"/>
+              </a:rPr>
+              <a:t>Venue type      Placebo p    Pre-RMSPE</a:t>
+            </a:r>
+            <a:endParaRPr lang="en-US" sz="1000" dirty="0"/>
           </a:p>
         </p:txBody>
       </p:sp>
@@ -15924,34 +16800,34 @@
         </p:nvSpPr>
         <p:spPr>
           <a:xfrm>
-            <a:off x="7772400" y="2194560"/>
-            <a:ext cx="1737360" cy="502920"/>
-          </a:xfrm>
-          <a:prstGeom prst="rect">
-            <a:avLst/>
-          </a:prstGeom>
-          <a:noFill/>
-          <a:ln/>
-        </p:spPr>
-        <p:txBody>
-          <a:bodyPr wrap="square" rtlCol="0" anchor="ctr"/>
-          <a:lstStyle/>
-          <a:p>
-            <a:pPr indent="0" marL="0">
-              <a:buNone/>
-            </a:pPr>
-            <a:r>
-              <a:rPr lang="en-US" sz="1200" dirty="0">
+            <a:off x="7406640" y="1965960"/>
+            <a:ext cx="4206240" cy="320040"/>
+          </a:xfrm>
+          <a:prstGeom prst="rect">
+            <a:avLst/>
+          </a:prstGeom>
+          <a:noFill/>
+          <a:ln/>
+        </p:spPr>
+        <p:txBody>
+          <a:bodyPr wrap="square" rtlCol="0" anchor="ctr"/>
+          <a:lstStyle/>
+          <a:p>
+            <a:pPr indent="0" marL="0">
+              <a:buNone/>
+            </a:pPr>
+            <a:r>
+              <a:rPr lang="en-US" sz="1050" dirty="0">
                 <a:solidFill>
                   <a:srgbClr val="1A1A2E"/>
                 </a:solidFill>
-                <a:latin typeface="Calibri" pitchFamily="34" charset="0"/>
-                <a:ea typeface="Calibri" pitchFamily="34" charset="-122"/>
-                <a:cs typeface="Calibri" pitchFamily="34" charset="-120"/>
-              </a:rPr>
-              <a:t>Restaurants</a:t>
-            </a:r>
-            <a:endParaRPr lang="en-US" sz="1200" dirty="0"/>
+                <a:latin typeface="Courier New" pitchFamily="34" charset="0"/>
+                <a:ea typeface="Courier New" pitchFamily="34" charset="-122"/>
+                <a:cs typeface="Courier New" pitchFamily="34" charset="-120"/>
+              </a:rPr>
+              <a:t>Restaurants    0.160        26.4</a:t>
+            </a:r>
+            <a:endParaRPr lang="en-US" sz="1050" dirty="0"/>
           </a:p>
         </p:txBody>
       </p:sp>
@@ -15963,34 +16839,34 @@
         </p:nvSpPr>
         <p:spPr>
           <a:xfrm>
-            <a:off x="9509760" y="2194560"/>
-            <a:ext cx="2103120" cy="502920"/>
-          </a:xfrm>
-          <a:prstGeom prst="rect">
-            <a:avLst/>
-          </a:prstGeom>
-          <a:noFill/>
-          <a:ln/>
-        </p:spPr>
-        <p:txBody>
-          <a:bodyPr wrap="square" rtlCol="0" anchor="ctr"/>
-          <a:lstStyle/>
-          <a:p>
-            <a:pPr indent="0" marL="0">
-              <a:buNone/>
-            </a:pPr>
-            <a:r>
-              <a:rPr lang="en-US" sz="1800" b="1" dirty="0">
-                <a:solidFill>
-                  <a:srgbClr val="B8500A"/>
-                </a:solidFill>
-                <a:latin typeface="Calibri" pitchFamily="34" charset="0"/>
-                <a:ea typeface="Calibri" pitchFamily="34" charset="-122"/>
-                <a:cs typeface="Calibri" pitchFamily="34" charset="-120"/>
-              </a:rPr>
-              <a:t>+134%</a:t>
-            </a:r>
-            <a:endParaRPr lang="en-US" sz="1800" dirty="0"/>
+            <a:off x="7406640" y="2350008"/>
+            <a:ext cx="4206240" cy="320040"/>
+          </a:xfrm>
+          <a:prstGeom prst="rect">
+            <a:avLst/>
+          </a:prstGeom>
+          <a:noFill/>
+          <a:ln/>
+        </p:spPr>
+        <p:txBody>
+          <a:bodyPr wrap="square" rtlCol="0" anchor="ctr"/>
+          <a:lstStyle/>
+          <a:p>
+            <a:pPr indent="0" marL="0">
+              <a:buNone/>
+            </a:pPr>
+            <a:r>
+              <a:rPr lang="en-US" sz="1050" dirty="0">
+                <a:solidFill>
+                  <a:srgbClr val="1A1A2E"/>
+                </a:solidFill>
+                <a:latin typeface="Courier New" pitchFamily="34" charset="0"/>
+                <a:ea typeface="Courier New" pitchFamily="34" charset="-122"/>
+                <a:cs typeface="Courier New" pitchFamily="34" charset="-120"/>
+              </a:rPr>
+              <a:t>Gyms           0.050        14.4</a:t>
+            </a:r>
+            <a:endParaRPr lang="en-US" sz="1050" dirty="0"/>
           </a:p>
         </p:txBody>
       </p:sp>
@@ -16002,34 +16878,34 @@
         </p:nvSpPr>
         <p:spPr>
           <a:xfrm>
-            <a:off x="7772400" y="2788920"/>
-            <a:ext cx="1737360" cy="502920"/>
-          </a:xfrm>
-          <a:prstGeom prst="rect">
-            <a:avLst/>
-          </a:prstGeom>
-          <a:noFill/>
-          <a:ln/>
-        </p:spPr>
-        <p:txBody>
-          <a:bodyPr wrap="square" rtlCol="0" anchor="ctr"/>
-          <a:lstStyle/>
-          <a:p>
-            <a:pPr indent="0" marL="0">
-              <a:buNone/>
-            </a:pPr>
-            <a:r>
-              <a:rPr lang="en-US" sz="1200" dirty="0">
+            <a:off x="7406640" y="2734056"/>
+            <a:ext cx="4206240" cy="320040"/>
+          </a:xfrm>
+          <a:prstGeom prst="rect">
+            <a:avLst/>
+          </a:prstGeom>
+          <a:noFill/>
+          <a:ln/>
+        </p:spPr>
+        <p:txBody>
+          <a:bodyPr wrap="square" rtlCol="0" anchor="ctr"/>
+          <a:lstStyle/>
+          <a:p>
+            <a:pPr indent="0" marL="0">
+              <a:buNone/>
+            </a:pPr>
+            <a:r>
+              <a:rPr lang="en-US" sz="1050" dirty="0">
                 <a:solidFill>
                   <a:srgbClr val="1A1A2E"/>
                 </a:solidFill>
-                <a:latin typeface="Calibri" pitchFamily="34" charset="0"/>
-                <a:ea typeface="Calibri" pitchFamily="34" charset="-122"/>
-                <a:cs typeface="Calibri" pitchFamily="34" charset="-120"/>
-              </a:rPr>
-              <a:t>Gyms</a:t>
-            </a:r>
-            <a:endParaRPr lang="en-US" sz="1200" dirty="0"/>
+                <a:latin typeface="Courier New" pitchFamily="34" charset="0"/>
+                <a:ea typeface="Courier New" pitchFamily="34" charset="-122"/>
+                <a:cs typeface="Courier New" pitchFamily="34" charset="-120"/>
+              </a:rPr>
+              <a:t>Bars           0.100        17.8</a:t>
+            </a:r>
+            <a:endParaRPr lang="en-US" sz="1050" dirty="0"/>
           </a:p>
         </p:txBody>
       </p:sp>
@@ -16041,34 +16917,34 @@
         </p:nvSpPr>
         <p:spPr>
           <a:xfrm>
-            <a:off x="9509760" y="2788920"/>
-            <a:ext cx="2103120" cy="502920"/>
-          </a:xfrm>
-          <a:prstGeom prst="rect">
-            <a:avLst/>
-          </a:prstGeom>
-          <a:noFill/>
-          <a:ln/>
-        </p:spPr>
-        <p:txBody>
-          <a:bodyPr wrap="square" rtlCol="0" anchor="ctr"/>
-          <a:lstStyle/>
-          <a:p>
-            <a:pPr indent="0" marL="0">
-              <a:buNone/>
-            </a:pPr>
-            <a:r>
-              <a:rPr lang="en-US" sz="1800" b="1" dirty="0">
-                <a:solidFill>
-                  <a:srgbClr val="B8500A"/>
-                </a:solidFill>
-                <a:latin typeface="Calibri" pitchFamily="34" charset="0"/>
-                <a:ea typeface="Calibri" pitchFamily="34" charset="-122"/>
-                <a:cs typeface="Calibri" pitchFamily="34" charset="-120"/>
-              </a:rPr>
-              <a:t>+165%</a:t>
-            </a:r>
-            <a:endParaRPr lang="en-US" sz="1800" dirty="0"/>
+            <a:off x="7406640" y="3118104"/>
+            <a:ext cx="4206240" cy="320040"/>
+          </a:xfrm>
+          <a:prstGeom prst="rect">
+            <a:avLst/>
+          </a:prstGeom>
+          <a:noFill/>
+          <a:ln/>
+        </p:spPr>
+        <p:txBody>
+          <a:bodyPr wrap="square" rtlCol="0" anchor="ctr"/>
+          <a:lstStyle/>
+          <a:p>
+            <a:pPr indent="0" marL="0">
+              <a:buNone/>
+            </a:pPr>
+            <a:r>
+              <a:rPr lang="en-US" sz="1050" dirty="0">
+                <a:solidFill>
+                  <a:srgbClr val="1A1A2E"/>
+                </a:solidFill>
+                <a:latin typeface="Courier New" pitchFamily="34" charset="0"/>
+                <a:ea typeface="Courier New" pitchFamily="34" charset="-122"/>
+                <a:cs typeface="Courier New" pitchFamily="34" charset="-120"/>
+              </a:rPr>
+              <a:t>Waiting Rooms  0.110        8.3</a:t>
+            </a:r>
+            <a:endParaRPr lang="en-US" sz="1050" dirty="0"/>
           </a:p>
         </p:txBody>
       </p:sp>
@@ -16080,164 +16956,8 @@
         </p:nvSpPr>
         <p:spPr>
           <a:xfrm>
-            <a:off x="7772400" y="3383280"/>
-            <a:ext cx="1737360" cy="502920"/>
-          </a:xfrm>
-          <a:prstGeom prst="rect">
-            <a:avLst/>
-          </a:prstGeom>
-          <a:noFill/>
-          <a:ln/>
-        </p:spPr>
-        <p:txBody>
-          <a:bodyPr wrap="square" rtlCol="0" anchor="ctr"/>
-          <a:lstStyle/>
-          <a:p>
-            <a:pPr indent="0" marL="0">
-              <a:buNone/>
-            </a:pPr>
-            <a:r>
-              <a:rPr lang="en-US" sz="1200" dirty="0">
-                <a:solidFill>
-                  <a:srgbClr val="1A1A2E"/>
-                </a:solidFill>
-                <a:latin typeface="Calibri" pitchFamily="34" charset="0"/>
-                <a:ea typeface="Calibri" pitchFamily="34" charset="-122"/>
-                <a:cs typeface="Calibri" pitchFamily="34" charset="-120"/>
-              </a:rPr>
-              <a:t>Bars</a:t>
-            </a:r>
-            <a:endParaRPr lang="en-US" sz="1200" dirty="0"/>
-          </a:p>
-        </p:txBody>
-      </p:sp>
-      <p:sp>
-        <p:nvSpPr>
-          <p:cNvPr id="13" name="Text 10"/>
-          <p:cNvSpPr/>
-          <p:nvPr/>
-        </p:nvSpPr>
-        <p:spPr>
-          <a:xfrm>
-            <a:off x="9509760" y="3383280"/>
-            <a:ext cx="2103120" cy="502920"/>
-          </a:xfrm>
-          <a:prstGeom prst="rect">
-            <a:avLst/>
-          </a:prstGeom>
-          <a:noFill/>
-          <a:ln/>
-        </p:spPr>
-        <p:txBody>
-          <a:bodyPr wrap="square" rtlCol="0" anchor="ctr"/>
-          <a:lstStyle/>
-          <a:p>
-            <a:pPr indent="0" marL="0">
-              <a:buNone/>
-            </a:pPr>
-            <a:r>
-              <a:rPr lang="en-US" sz="1800" b="1" dirty="0">
-                <a:solidFill>
-                  <a:srgbClr val="2C7A57"/>
-                </a:solidFill>
-                <a:latin typeface="Calibri" pitchFamily="34" charset="0"/>
-                <a:ea typeface="Calibri" pitchFamily="34" charset="-122"/>
-                <a:cs typeface="Calibri" pitchFamily="34" charset="-120"/>
-              </a:rPr>
-              <a:t>+20%</a:t>
-            </a:r>
-            <a:endParaRPr lang="en-US" sz="1800" dirty="0"/>
-          </a:p>
-        </p:txBody>
-      </p:sp>
-      <p:sp>
-        <p:nvSpPr>
-          <p:cNvPr id="14" name="Text 11"/>
-          <p:cNvSpPr/>
-          <p:nvPr/>
-        </p:nvSpPr>
-        <p:spPr>
-          <a:xfrm>
-            <a:off x="7772400" y="3977640"/>
-            <a:ext cx="1737360" cy="502920"/>
-          </a:xfrm>
-          <a:prstGeom prst="rect">
-            <a:avLst/>
-          </a:prstGeom>
-          <a:noFill/>
-          <a:ln/>
-        </p:spPr>
-        <p:txBody>
-          <a:bodyPr wrap="square" rtlCol="0" anchor="ctr"/>
-          <a:lstStyle/>
-          <a:p>
-            <a:pPr indent="0" marL="0">
-              <a:buNone/>
-            </a:pPr>
-            <a:r>
-              <a:rPr lang="en-US" sz="1200" dirty="0">
-                <a:solidFill>
-                  <a:srgbClr val="1A1A2E"/>
-                </a:solidFill>
-                <a:latin typeface="Calibri" pitchFamily="34" charset="0"/>
-                <a:ea typeface="Calibri" pitchFamily="34" charset="-122"/>
-                <a:cs typeface="Calibri" pitchFamily="34" charset="-120"/>
-              </a:rPr>
-              <a:t>Waiting Rooms</a:t>
-            </a:r>
-            <a:endParaRPr lang="en-US" sz="1200" dirty="0"/>
-          </a:p>
-        </p:txBody>
-      </p:sp>
-      <p:sp>
-        <p:nvSpPr>
-          <p:cNvPr id="15" name="Text 12"/>
-          <p:cNvSpPr/>
-          <p:nvPr/>
-        </p:nvSpPr>
-        <p:spPr>
-          <a:xfrm>
-            <a:off x="9509760" y="3977640"/>
-            <a:ext cx="2103120" cy="502920"/>
-          </a:xfrm>
-          <a:prstGeom prst="rect">
-            <a:avLst/>
-          </a:prstGeom>
-          <a:noFill/>
-          <a:ln/>
-        </p:spPr>
-        <p:txBody>
-          <a:bodyPr wrap="square" rtlCol="0" anchor="ctr"/>
-          <a:lstStyle/>
-          <a:p>
-            <a:pPr indent="0" marL="0">
-              <a:buNone/>
-            </a:pPr>
-            <a:r>
-              <a:rPr lang="en-US" sz="1800" b="1" dirty="0">
-                <a:solidFill>
-                  <a:srgbClr val="B8500A"/>
-                </a:solidFill>
-                <a:latin typeface="Calibri" pitchFamily="34" charset="0"/>
-                <a:ea typeface="Calibri" pitchFamily="34" charset="-122"/>
-                <a:cs typeface="Calibri" pitchFamily="34" charset="-120"/>
-              </a:rPr>
-              <a:t>+100%</a:t>
-            </a:r>
-            <a:endParaRPr lang="en-US" sz="1800" dirty="0"/>
-          </a:p>
-        </p:txBody>
-      </p:sp>
-      <p:sp>
-        <p:nvSpPr>
-          <p:cNvPr id="16" name="Text 13"/>
-          <p:cNvSpPr/>
-          <p:nvPr/>
-        </p:nvSpPr>
-        <p:spPr>
-          <a:xfrm>
-            <a:off x="7772400" y="4709160"/>
-            <a:ext cx="3840480" cy="1463040"/>
+            <a:off x="7406640" y="3776472"/>
+            <a:ext cx="4206240" cy="1554480"/>
           </a:xfrm>
           <a:prstGeom prst="rect">
             <a:avLst/>
@@ -16264,7 +16984,7 @@
                 <a:ea typeface="Calibri" pitchFamily="34" charset="-122"/>
                 <a:cs typeface="Calibri" pitchFamily="34" charset="-120"/>
               </a:rPr>
-              <a:t>For 3 of 4 venue types, the naive observational fit understated true incremental lift by 100–165% — the kind of gap real MMM practice cites as its core identification problem, and exactly why the RCT anchor matters.</a:t>
+              <a:t>Two validation checks, since synthetic control has no closed-form standard error: pre-period fit quality (RMSPE — poor fits are flagged and excluded from the aggregate estimate) and an in-space placebo test on every donor venue.</a:t>
             </a:r>
             <a:endParaRPr lang="en-US" sz="1100" dirty="0"/>
           </a:p>
@@ -16272,7 +16992,7 @@
       </p:sp>
       <p:sp>
         <p:nvSpPr>
-          <p:cNvPr id="17" name="Text 14"/>
+          <p:cNvPr id="13" name="Text 10"/>
           <p:cNvSpPr/>
           <p:nvPr/>
         </p:nvSpPr>
@@ -16303,7 +17023,7 @@
                 <a:ea typeface="Calibri" pitchFamily="34" charset="-122"/>
                 <a:cs typeface="Calibri" pitchFamily="34" charset="-120"/>
               </a:rPr>
-              <a:t>Media-mix model</a:t>
+              <a:t>Causal measurement — Synthetic Control</a:t>
             </a:r>
             <a:endParaRPr lang="en-US" sz="900" dirty="0"/>
           </a:p>

--- a/deck/AtmosphereTV_DOOH_Measurement.pptx
+++ b/deck/AtmosphereTV_DOOH_Measurement.pptx
@@ -14178,77 +14178,1281 @@
           </a:p>
         </p:txBody>
       </p:sp>
-      <p:sp>
-        <p:nvSpPr>
-          <p:cNvPr id="6" name="Shape 4"/>
-          <p:cNvSpPr/>
-          <p:nvPr/>
-        </p:nvSpPr>
-        <p:spPr>
-          <a:xfrm>
-            <a:off x="548640" y="1828800"/>
-            <a:ext cx="5394960" cy="4023360"/>
-          </a:xfrm>
-          <a:prstGeom prst="roundRect">
-            <a:avLst>
-              <a:gd name="adj" fmla="val 2273"/>
-            </a:avLst>
-          </a:prstGeom>
-          <a:solidFill>
-            <a:srgbClr val="F5F7FC"/>
-          </a:solidFill>
-          <a:ln/>
-        </p:spPr>
-      </p:sp>
-      <p:sp>
-        <p:nvSpPr>
-          <p:cNvPr id="7" name="Text 5"/>
-          <p:cNvSpPr/>
-          <p:nvPr/>
-        </p:nvSpPr>
-        <p:spPr>
-          <a:xfrm>
-            <a:off x="868680" y="2057400"/>
-            <a:ext cx="4754880" cy="457200"/>
-          </a:xfrm>
-          <a:prstGeom prst="rect">
-            <a:avLst/>
-          </a:prstGeom>
-          <a:noFill/>
-          <a:ln/>
-        </p:spPr>
-        <p:txBody>
-          <a:bodyPr wrap="square" rtlCol="0" anchor="ctr"/>
-          <a:lstStyle/>
-          <a:p>
-            <a:pPr indent="0" marL="0">
-              <a:buNone/>
-            </a:pPr>
-            <a:r>
-              <a:rPr lang="en-US" sz="1700" b="1" dirty="0">
-                <a:solidFill>
-                  <a:srgbClr val="1E2761"/>
-                </a:solidFill>
-                <a:latin typeface="Cambria" pitchFamily="34" charset="0"/>
-                <a:ea typeface="Cambria" pitchFamily="34" charset="-122"/>
-                <a:cs typeface="Cambria" pitchFamily="34" charset="-120"/>
-              </a:rPr>
-              <a:t>RCT pool</a:t>
-            </a:r>
-            <a:endParaRPr lang="en-US" sz="1700" dirty="0"/>
-          </a:p>
-        </p:txBody>
-      </p:sp>
-      <p:sp>
-        <p:nvSpPr>
-          <p:cNvPr id="8" name="Text 6"/>
-          <p:cNvSpPr/>
-          <p:nvPr/>
-        </p:nvSpPr>
-        <p:spPr>
-          <a:xfrm>
-            <a:off x="868680" y="2560320"/>
-            <a:ext cx="4754880" cy="1371600"/>
+      <p:graphicFrame>
+        <p:nvGraphicFramePr>
+          <p:cNvPr id="7" name="Table 0"/>
+          <p:cNvGraphicFramePr>
+            <a:graphicFrameLocks noGrp="1"/>
+          </p:cNvGraphicFramePr>
+          <p:nvPr>
+            <p:extLst>
+              <p:ext uri="{D42A27DB-BD31-4B8C-83A1-F6EECF244321}">
+                <p14:modId xmlns:p14="http://schemas.microsoft.com/office/powerpoint/2010/main" val="1579011935"/>
+              </p:ext>
+            </p:extLst>
+          </p:nvPr>
+        </p:nvGraphicFramePr>
+        <p:xfrm>
+          <a:off x="548640" y="1828800"/>
+          <a:ext cx="11091672" cy="914400"/>
+        </p:xfrm>
+        <a:graphic>
+          <a:graphicData uri="http://schemas.openxmlformats.org/drawingml/2006/table">
+            <a:tbl>
+              <a:tblPr/>
+              <a:tblGrid>
+                <a:gridCol w="1965960"/>
+                <a:gridCol w="4562856"/>
+                <a:gridCol w="4562856"/>
+              </a:tblGrid>
+              <a:tr h="384048">
+                <a:tc>
+                  <a:txBody>
+                    <a:bodyPr/>
+                    <a:lstStyle/>
+                    <a:p>
+                      <a:pPr algn="ctr" indent="0" marL="0">
+                        <a:buNone/>
+                      </a:pPr>
+                      <a:r>
+                        <a:rPr lang="en-US" sz="1150" b="1" dirty="0">
+                          <a:solidFill>
+                            <a:srgbClr val="FFFFFF"/>
+                          </a:solidFill>
+                          <a:latin typeface="Calibri" pitchFamily="34" charset="0"/>
+                          <a:ea typeface="Calibri" pitchFamily="34" charset="-122"/>
+                          <a:cs typeface="Calibri" pitchFamily="34" charset="-120"/>
+                        </a:rPr>
+                        <a:t>Weeks</a:t>
+                      </a:r>
+                      <a:endParaRPr lang="en-US" sz="1150" dirty="0">
+                        <a:latin typeface="Calibri" charset="0"/>
+                        <a:ea typeface="Calibri" charset="0"/>
+                        <a:cs typeface="Calibri" charset="0"/>
+                      </a:endParaRPr>
+                    </a:p>
+                  </a:txBody>
+                  <a:tcPr marL="91440" marR="91440" marT="45720" marB="45720" anchor="ctr">
+                    <a:lnL w="9525" cap="flat" cmpd="sng" algn="ctr">
+                      <a:solidFill>
+                        <a:srgbClr val="E2E5F0"/>
+                      </a:solidFill>
+                      <a:prstDash val="solid"/>
+                      <a:round/>
+                      <a:headEnd type="none" w="med" len="med"/>
+                      <a:tailEnd type="none" w="med" len="med"/>
+                    </a:lnL>
+                    <a:lnR w="9525" cap="flat" cmpd="sng" algn="ctr">
+                      <a:solidFill>
+                        <a:srgbClr val="E2E5F0"/>
+                      </a:solidFill>
+                      <a:prstDash val="solid"/>
+                      <a:round/>
+                      <a:headEnd type="none" w="med" len="med"/>
+                      <a:tailEnd type="none" w="med" len="med"/>
+                    </a:lnR>
+                    <a:lnT w="9525" cap="flat" cmpd="sng" algn="ctr">
+                      <a:solidFill>
+                        <a:srgbClr val="E2E5F0"/>
+                      </a:solidFill>
+                      <a:prstDash val="solid"/>
+                      <a:round/>
+                      <a:headEnd type="none" w="med" len="med"/>
+                      <a:tailEnd type="none" w="med" len="med"/>
+                    </a:lnT>
+                    <a:lnB w="9525" cap="flat" cmpd="sng" algn="ctr">
+                      <a:solidFill>
+                        <a:srgbClr val="E2E5F0"/>
+                      </a:solidFill>
+                      <a:prstDash val="solid"/>
+                      <a:round/>
+                      <a:headEnd type="none" w="med" len="med"/>
+                      <a:tailEnd type="none" w="med" len="med"/>
+                    </a:lnB>
+                    <a:solidFill>
+                      <a:srgbClr val="1E2761"/>
+                    </a:solidFill>
+                  </a:tcPr>
+                </a:tc>
+                <a:tc>
+                  <a:txBody>
+                    <a:bodyPr/>
+                    <a:lstStyle/>
+                    <a:p>
+                      <a:pPr indent="0" marL="0">
+                        <a:buNone/>
+                      </a:pPr>
+                      <a:r>
+                        <a:rPr lang="en-US" sz="1150" b="1" dirty="0">
+                          <a:solidFill>
+                            <a:srgbClr val="FFFFFF"/>
+                          </a:solidFill>
+                          <a:latin typeface="Calibri" pitchFamily="34" charset="0"/>
+                          <a:ea typeface="Calibri" pitchFamily="34" charset="-122"/>
+                          <a:cs typeface="Calibri" pitchFamily="34" charset="-120"/>
+                        </a:rPr>
+                        <a:t>RCT pool — 136 venues</a:t>
+                      </a:r>
+                      <a:endParaRPr lang="en-US" sz="1150" dirty="0">
+                        <a:latin typeface="Calibri" charset="0"/>
+                        <a:ea typeface="Calibri" charset="0"/>
+                        <a:cs typeface="Calibri" charset="0"/>
+                      </a:endParaRPr>
+                    </a:p>
+                  </a:txBody>
+                  <a:tcPr marL="91440" marR="91440" marT="45720" marB="45720" anchor="ctr">
+                    <a:lnL w="9525" cap="flat" cmpd="sng" algn="ctr">
+                      <a:solidFill>
+                        <a:srgbClr val="E2E5F0"/>
+                      </a:solidFill>
+                      <a:prstDash val="solid"/>
+                      <a:round/>
+                      <a:headEnd type="none" w="med" len="med"/>
+                      <a:tailEnd type="none" w="med" len="med"/>
+                    </a:lnL>
+                    <a:lnR w="9525" cap="flat" cmpd="sng" algn="ctr">
+                      <a:solidFill>
+                        <a:srgbClr val="E2E5F0"/>
+                      </a:solidFill>
+                      <a:prstDash val="solid"/>
+                      <a:round/>
+                      <a:headEnd type="none" w="med" len="med"/>
+                      <a:tailEnd type="none" w="med" len="med"/>
+                    </a:lnR>
+                    <a:lnT w="9525" cap="flat" cmpd="sng" algn="ctr">
+                      <a:solidFill>
+                        <a:srgbClr val="E2E5F0"/>
+                      </a:solidFill>
+                      <a:prstDash val="solid"/>
+                      <a:round/>
+                      <a:headEnd type="none" w="med" len="med"/>
+                      <a:tailEnd type="none" w="med" len="med"/>
+                    </a:lnT>
+                    <a:lnB w="9525" cap="flat" cmpd="sng" algn="ctr">
+                      <a:solidFill>
+                        <a:srgbClr val="E2E5F0"/>
+                      </a:solidFill>
+                      <a:prstDash val="solid"/>
+                      <a:round/>
+                      <a:headEnd type="none" w="med" len="med"/>
+                      <a:tailEnd type="none" w="med" len="med"/>
+                    </a:lnB>
+                    <a:solidFill>
+                      <a:srgbClr val="1E2761"/>
+                    </a:solidFill>
+                  </a:tcPr>
+                </a:tc>
+                <a:tc>
+                  <a:txBody>
+                    <a:bodyPr/>
+                    <a:lstStyle/>
+                    <a:p>
+                      <a:pPr indent="0" marL="0">
+                        <a:buNone/>
+                      </a:pPr>
+                      <a:r>
+                        <a:rPr lang="en-US" sz="1150" b="1" dirty="0">
+                          <a:solidFill>
+                            <a:srgbClr val="FFFFFF"/>
+                          </a:solidFill>
+                          <a:latin typeface="Calibri" pitchFamily="34" charset="0"/>
+                          <a:ea typeface="Calibri" pitchFamily="34" charset="-122"/>
+                          <a:cs typeface="Calibri" pitchFamily="34" charset="-120"/>
+                        </a:rPr>
+                        <a:t>Observational pool — 264 venues</a:t>
+                      </a:r>
+                      <a:endParaRPr lang="en-US" sz="1150" dirty="0">
+                        <a:latin typeface="Calibri" charset="0"/>
+                        <a:ea typeface="Calibri" charset="0"/>
+                        <a:cs typeface="Calibri" charset="0"/>
+                      </a:endParaRPr>
+                    </a:p>
+                  </a:txBody>
+                  <a:tcPr marL="91440" marR="91440" marT="45720" marB="45720" anchor="ctr">
+                    <a:lnL w="9525" cap="flat" cmpd="sng" algn="ctr">
+                      <a:solidFill>
+                        <a:srgbClr val="E2E5F0"/>
+                      </a:solidFill>
+                      <a:prstDash val="solid"/>
+                      <a:round/>
+                      <a:headEnd type="none" w="med" len="med"/>
+                      <a:tailEnd type="none" w="med" len="med"/>
+                    </a:lnL>
+                    <a:lnR w="9525" cap="flat" cmpd="sng" algn="ctr">
+                      <a:solidFill>
+                        <a:srgbClr val="E2E5F0"/>
+                      </a:solidFill>
+                      <a:prstDash val="solid"/>
+                      <a:round/>
+                      <a:headEnd type="none" w="med" len="med"/>
+                      <a:tailEnd type="none" w="med" len="med"/>
+                    </a:lnR>
+                    <a:lnT w="9525" cap="flat" cmpd="sng" algn="ctr">
+                      <a:solidFill>
+                        <a:srgbClr val="E2E5F0"/>
+                      </a:solidFill>
+                      <a:prstDash val="solid"/>
+                      <a:round/>
+                      <a:headEnd type="none" w="med" len="med"/>
+                      <a:tailEnd type="none" w="med" len="med"/>
+                    </a:lnT>
+                    <a:lnB w="9525" cap="flat" cmpd="sng" algn="ctr">
+                      <a:solidFill>
+                        <a:srgbClr val="E2E5F0"/>
+                      </a:solidFill>
+                      <a:prstDash val="solid"/>
+                      <a:round/>
+                      <a:headEnd type="none" w="med" len="med"/>
+                      <a:tailEnd type="none" w="med" len="med"/>
+                    </a:lnB>
+                    <a:solidFill>
+                      <a:srgbClr val="1E2761"/>
+                    </a:solidFill>
+                  </a:tcPr>
+                </a:tc>
+              </a:tr>
+              <a:tr h="777240">
+                <a:tc>
+                  <a:txBody>
+                    <a:bodyPr/>
+                    <a:lstStyle/>
+                    <a:p>
+                      <a:pPr indent="0" marL="0">
+                        <a:lnSpc>
+                          <a:spcPts val="1200"/>
+                        </a:lnSpc>
+                        <a:buNone/>
+                      </a:pPr>
+                      <a:r>
+                        <a:rPr lang="en-US" sz="1050" b="1" dirty="0">
+                          <a:solidFill>
+                            <a:srgbClr val="1E2761"/>
+                          </a:solidFill>
+                          <a:latin typeface="Calibri" pitchFamily="34" charset="0"/>
+                          <a:ea typeface="Calibri" pitchFamily="34" charset="-122"/>
+                          <a:cs typeface="Calibri" pitchFamily="34" charset="-120"/>
+                        </a:rPr>
+                        <a:t>0–51</a:t>
+                      </a:r>
+                      <a:endParaRPr lang="en-US" sz="1050" dirty="0">
+                        <a:latin typeface="Calibri" charset="0"/>
+                        <a:ea typeface="Calibri" charset="0"/>
+                        <a:cs typeface="Calibri" charset="0"/>
+                      </a:endParaRPr>
+                    </a:p>
+                    <a:p>
+                      <a:pPr indent="0" marL="0">
+                        <a:lnSpc>
+                          <a:spcPts val="1200"/>
+                        </a:lnSpc>
+                        <a:buNone/>
+                      </a:pPr>
+                      <a:r>
+                        <a:rPr lang="en-US" sz="1050" b="1" dirty="0">
+                          <a:solidFill>
+                            <a:srgbClr val="1E2761"/>
+                          </a:solidFill>
+                          <a:latin typeface="Calibri" pitchFamily="34" charset="0"/>
+                          <a:ea typeface="Calibri" pitchFamily="34" charset="-122"/>
+                          <a:cs typeface="Calibri" pitchFamily="34" charset="-120"/>
+                        </a:rPr>
+                        <a:t>(52 wks)</a:t>
+                      </a:r>
+                      <a:endParaRPr lang="en-US" sz="1050" dirty="0">
+                        <a:latin typeface="Calibri" charset="0"/>
+                        <a:ea typeface="Calibri" charset="0"/>
+                        <a:cs typeface="Calibri" charset="0"/>
+                      </a:endParaRPr>
+                    </a:p>
+                    <a:p>
+                      <a:pPr indent="0" marL="0">
+                        <a:lnSpc>
+                          <a:spcPts val="1200"/>
+                        </a:lnSpc>
+                        <a:buNone/>
+                      </a:pPr>
+                      <a:r>
+                        <a:rPr lang="en-US" sz="1050" b="1" dirty="0">
+                          <a:solidFill>
+                            <a:srgbClr val="1E2761"/>
+                          </a:solidFill>
+                          <a:latin typeface="Calibri" pitchFamily="34" charset="0"/>
+                          <a:ea typeface="Calibri" pitchFamily="34" charset="-122"/>
+                          <a:cs typeface="Calibri" pitchFamily="34" charset="-120"/>
+                        </a:rPr>
+                        <a:t>Pre-period</a:t>
+                      </a:r>
+                      <a:endParaRPr lang="en-US" sz="1050" dirty="0">
+                        <a:latin typeface="Calibri" charset="0"/>
+                        <a:ea typeface="Calibri" charset="0"/>
+                        <a:cs typeface="Calibri" charset="0"/>
+                      </a:endParaRPr>
+                    </a:p>
+                  </a:txBody>
+                  <a:tcPr marL="91440" marR="91440" marT="45720" marB="45720" anchor="ctr">
+                    <a:lnL w="9525" cap="flat" cmpd="sng" algn="ctr">
+                      <a:solidFill>
+                        <a:srgbClr val="E2E5F0"/>
+                      </a:solidFill>
+                      <a:prstDash val="solid"/>
+                      <a:round/>
+                      <a:headEnd type="none" w="med" len="med"/>
+                      <a:tailEnd type="none" w="med" len="med"/>
+                    </a:lnL>
+                    <a:lnR w="9525" cap="flat" cmpd="sng" algn="ctr">
+                      <a:solidFill>
+                        <a:srgbClr val="E2E5F0"/>
+                      </a:solidFill>
+                      <a:prstDash val="solid"/>
+                      <a:round/>
+                      <a:headEnd type="none" w="med" len="med"/>
+                      <a:tailEnd type="none" w="med" len="med"/>
+                    </a:lnR>
+                    <a:lnT w="9525" cap="flat" cmpd="sng" algn="ctr">
+                      <a:solidFill>
+                        <a:srgbClr val="E2E5F0"/>
+                      </a:solidFill>
+                      <a:prstDash val="solid"/>
+                      <a:round/>
+                      <a:headEnd type="none" w="med" len="med"/>
+                      <a:tailEnd type="none" w="med" len="med"/>
+                    </a:lnT>
+                    <a:lnB w="9525" cap="flat" cmpd="sng" algn="ctr">
+                      <a:solidFill>
+                        <a:srgbClr val="E2E5F0"/>
+                      </a:solidFill>
+                      <a:prstDash val="solid"/>
+                      <a:round/>
+                      <a:headEnd type="none" w="med" len="med"/>
+                      <a:tailEnd type="none" w="med" len="med"/>
+                    </a:lnB>
+                    <a:solidFill>
+                      <a:srgbClr val="FFFFFF"/>
+                    </a:solidFill>
+                  </a:tcPr>
+                </a:tc>
+                <a:tc>
+                  <a:txBody>
+                    <a:bodyPr/>
+                    <a:lstStyle/>
+                    <a:p>
+                      <a:pPr indent="0" marL="0">
+                        <a:lnSpc>
+                          <a:spcPts val="1300"/>
+                        </a:lnSpc>
+                        <a:buNone/>
+                      </a:pPr>
+                      <a:r>
+                        <a:rPr lang="en-US" sz="1050" dirty="0">
+                          <a:solidFill>
+                            <a:srgbClr val="1A1A2E"/>
+                          </a:solidFill>
+                          <a:latin typeface="Calibri" pitchFamily="34" charset="0"/>
+                          <a:ea typeface="Calibri" pitchFamily="34" charset="-122"/>
+                          <a:cs typeface="Calibri" pitchFamily="34" charset="-120"/>
+                        </a:rPr>
+                        <a:t>No ads for either arm — establishes each venue's own baseline.</a:t>
+                      </a:r>
+                      <a:endParaRPr lang="en-US" sz="1050" dirty="0">
+                        <a:latin typeface="Calibri" charset="0"/>
+                        <a:ea typeface="Calibri" charset="0"/>
+                        <a:cs typeface="Calibri" charset="0"/>
+                      </a:endParaRPr>
+                    </a:p>
+                  </a:txBody>
+                  <a:tcPr marL="91440" marR="91440" marT="45720" marB="45720" anchor="ctr">
+                    <a:lnL w="9525" cap="flat" cmpd="sng" algn="ctr">
+                      <a:solidFill>
+                        <a:srgbClr val="E2E5F0"/>
+                      </a:solidFill>
+                      <a:prstDash val="solid"/>
+                      <a:round/>
+                      <a:headEnd type="none" w="med" len="med"/>
+                      <a:tailEnd type="none" w="med" len="med"/>
+                    </a:lnL>
+                    <a:lnR w="9525" cap="flat" cmpd="sng" algn="ctr">
+                      <a:solidFill>
+                        <a:srgbClr val="E2E5F0"/>
+                      </a:solidFill>
+                      <a:prstDash val="solid"/>
+                      <a:round/>
+                      <a:headEnd type="none" w="med" len="med"/>
+                      <a:tailEnd type="none" w="med" len="med"/>
+                    </a:lnR>
+                    <a:lnT w="9525" cap="flat" cmpd="sng" algn="ctr">
+                      <a:solidFill>
+                        <a:srgbClr val="E2E5F0"/>
+                      </a:solidFill>
+                      <a:prstDash val="solid"/>
+                      <a:round/>
+                      <a:headEnd type="none" w="med" len="med"/>
+                      <a:tailEnd type="none" w="med" len="med"/>
+                    </a:lnT>
+                    <a:lnB w="9525" cap="flat" cmpd="sng" algn="ctr">
+                      <a:solidFill>
+                        <a:srgbClr val="E2E5F0"/>
+                      </a:solidFill>
+                      <a:prstDash val="solid"/>
+                      <a:round/>
+                      <a:headEnd type="none" w="med" len="med"/>
+                      <a:tailEnd type="none" w="med" len="med"/>
+                    </a:lnB>
+                    <a:solidFill>
+                      <a:srgbClr val="EDF1FB"/>
+                    </a:solidFill>
+                  </a:tcPr>
+                </a:tc>
+                <a:tc>
+                  <a:txBody>
+                    <a:bodyPr/>
+                    <a:lstStyle/>
+                    <a:p>
+                      <a:pPr indent="0" marL="0">
+                        <a:lnSpc>
+                          <a:spcPts val="1300"/>
+                        </a:lnSpc>
+                        <a:buNone/>
+                      </a:pPr>
+                      <a:r>
+                        <a:rPr lang="en-US" sz="1050" dirty="0">
+                          <a:solidFill>
+                            <a:srgbClr val="1A1A2E"/>
+                          </a:solidFill>
+                          <a:latin typeface="Calibri" pitchFamily="34" charset="0"/>
+                          <a:ea typeface="Calibri" pitchFamily="34" charset="-122"/>
+                          <a:cs typeface="Calibri" pitchFamily="34" charset="-120"/>
+                        </a:rPr>
+                        <a:t>No ads yet for anyone — identical baseline period.</a:t>
+                      </a:r>
+                      <a:endParaRPr lang="en-US" sz="1050" dirty="0">
+                        <a:latin typeface="Calibri" charset="0"/>
+                        <a:ea typeface="Calibri" charset="0"/>
+                        <a:cs typeface="Calibri" charset="0"/>
+                      </a:endParaRPr>
+                    </a:p>
+                  </a:txBody>
+                  <a:tcPr marL="91440" marR="91440" marT="45720" marB="45720" anchor="ctr">
+                    <a:lnL w="9525" cap="flat" cmpd="sng" algn="ctr">
+                      <a:solidFill>
+                        <a:srgbClr val="E2E5F0"/>
+                      </a:solidFill>
+                      <a:prstDash val="solid"/>
+                      <a:round/>
+                      <a:headEnd type="none" w="med" len="med"/>
+                      <a:tailEnd type="none" w="med" len="med"/>
+                    </a:lnL>
+                    <a:lnR w="9525" cap="flat" cmpd="sng" algn="ctr">
+                      <a:solidFill>
+                        <a:srgbClr val="E2E5F0"/>
+                      </a:solidFill>
+                      <a:prstDash val="solid"/>
+                      <a:round/>
+                      <a:headEnd type="none" w="med" len="med"/>
+                      <a:tailEnd type="none" w="med" len="med"/>
+                    </a:lnR>
+                    <a:lnT w="9525" cap="flat" cmpd="sng" algn="ctr">
+                      <a:solidFill>
+                        <a:srgbClr val="E2E5F0"/>
+                      </a:solidFill>
+                      <a:prstDash val="solid"/>
+                      <a:round/>
+                      <a:headEnd type="none" w="med" len="med"/>
+                      <a:tailEnd type="none" w="med" len="med"/>
+                    </a:lnT>
+                    <a:lnB w="9525" cap="flat" cmpd="sng" algn="ctr">
+                      <a:solidFill>
+                        <a:srgbClr val="E2E5F0"/>
+                      </a:solidFill>
+                      <a:prstDash val="solid"/>
+                      <a:round/>
+                      <a:headEnd type="none" w="med" len="med"/>
+                      <a:tailEnd type="none" w="med" len="med"/>
+                    </a:lnB>
+                    <a:solidFill>
+                      <a:srgbClr val="FDF1E3"/>
+                    </a:solidFill>
+                  </a:tcPr>
+                </a:tc>
+              </a:tr>
+              <a:tr h="868680">
+                <a:tc>
+                  <a:txBody>
+                    <a:bodyPr/>
+                    <a:lstStyle/>
+                    <a:p>
+                      <a:pPr indent="0" marL="0">
+                        <a:lnSpc>
+                          <a:spcPts val="1200"/>
+                        </a:lnSpc>
+                        <a:buNone/>
+                      </a:pPr>
+                      <a:r>
+                        <a:rPr lang="en-US" sz="1050" b="1" dirty="0">
+                          <a:solidFill>
+                            <a:srgbClr val="1E2761"/>
+                          </a:solidFill>
+                          <a:latin typeface="Calibri" pitchFamily="34" charset="0"/>
+                          <a:ea typeface="Calibri" pitchFamily="34" charset="-122"/>
+                          <a:cs typeface="Calibri" pitchFamily="34" charset="-120"/>
+                        </a:rPr>
+                        <a:t>52–59</a:t>
+                      </a:r>
+                      <a:endParaRPr lang="en-US" sz="1050" dirty="0">
+                        <a:latin typeface="Calibri" charset="0"/>
+                        <a:ea typeface="Calibri" charset="0"/>
+                        <a:cs typeface="Calibri" charset="0"/>
+                      </a:endParaRPr>
+                    </a:p>
+                    <a:p>
+                      <a:pPr indent="0" marL="0">
+                        <a:lnSpc>
+                          <a:spcPts val="1200"/>
+                        </a:lnSpc>
+                        <a:buNone/>
+                      </a:pPr>
+                      <a:r>
+                        <a:rPr lang="en-US" sz="1050" b="1" dirty="0">
+                          <a:solidFill>
+                            <a:srgbClr val="1E2761"/>
+                          </a:solidFill>
+                          <a:latin typeface="Calibri" pitchFamily="34" charset="0"/>
+                          <a:ea typeface="Calibri" pitchFamily="34" charset="-122"/>
+                          <a:cs typeface="Calibri" pitchFamily="34" charset="-120"/>
+                        </a:rPr>
+                        <a:t>(8 wks)</a:t>
+                      </a:r>
+                      <a:endParaRPr lang="en-US" sz="1050" dirty="0">
+                        <a:latin typeface="Calibri" charset="0"/>
+                        <a:ea typeface="Calibri" charset="0"/>
+                        <a:cs typeface="Calibri" charset="0"/>
+                      </a:endParaRPr>
+                    </a:p>
+                  </a:txBody>
+                  <a:tcPr marL="91440" marR="91440" marT="45720" marB="45720" anchor="ctr">
+                    <a:lnL w="9525" cap="flat" cmpd="sng" algn="ctr">
+                      <a:solidFill>
+                        <a:srgbClr val="E2E5F0"/>
+                      </a:solidFill>
+                      <a:prstDash val="solid"/>
+                      <a:round/>
+                      <a:headEnd type="none" w="med" len="med"/>
+                      <a:tailEnd type="none" w="med" len="med"/>
+                    </a:lnL>
+                    <a:lnR w="9525" cap="flat" cmpd="sng" algn="ctr">
+                      <a:solidFill>
+                        <a:srgbClr val="E2E5F0"/>
+                      </a:solidFill>
+                      <a:prstDash val="solid"/>
+                      <a:round/>
+                      <a:headEnd type="none" w="med" len="med"/>
+                      <a:tailEnd type="none" w="med" len="med"/>
+                    </a:lnR>
+                    <a:lnT w="9525" cap="flat" cmpd="sng" algn="ctr">
+                      <a:solidFill>
+                        <a:srgbClr val="E2E5F0"/>
+                      </a:solidFill>
+                      <a:prstDash val="solid"/>
+                      <a:round/>
+                      <a:headEnd type="none" w="med" len="med"/>
+                      <a:tailEnd type="none" w="med" len="med"/>
+                    </a:lnT>
+                    <a:lnB w="9525" cap="flat" cmpd="sng" algn="ctr">
+                      <a:solidFill>
+                        <a:srgbClr val="E2E5F0"/>
+                      </a:solidFill>
+                      <a:prstDash val="solid"/>
+                      <a:round/>
+                      <a:headEnd type="none" w="med" len="med"/>
+                      <a:tailEnd type="none" w="med" len="med"/>
+                    </a:lnB>
+                    <a:solidFill>
+                      <a:srgbClr val="F7F8FC"/>
+                    </a:solidFill>
+                  </a:tcPr>
+                </a:tc>
+                <a:tc>
+                  <a:txBody>
+                    <a:bodyPr/>
+                    <a:lstStyle/>
+                    <a:p>
+                      <a:pPr indent="0" marL="0">
+                        <a:lnSpc>
+                          <a:spcPts val="1300"/>
+                        </a:lnSpc>
+                        <a:buNone/>
+                      </a:pPr>
+                      <a:r>
+                        <a:rPr lang="en-US" sz="1050" dirty="0">
+                          <a:solidFill>
+                            <a:srgbClr val="1A1A2E"/>
+                          </a:solidFill>
+                          <a:latin typeface="Calibri" pitchFamily="34" charset="0"/>
+                          <a:ea typeface="Calibri" pitchFamily="34" charset="-122"/>
+                          <a:cs typeface="Calibri" pitchFamily="34" charset="-120"/>
+                        </a:rPr>
+                        <a:t>Still silent — the designed test hasn't launched yet. Unused by the current effect estimate.</a:t>
+                      </a:r>
+                      <a:endParaRPr lang="en-US" sz="1050" dirty="0">
+                        <a:latin typeface="Calibri" charset="0"/>
+                        <a:ea typeface="Calibri" charset="0"/>
+                        <a:cs typeface="Calibri" charset="0"/>
+                      </a:endParaRPr>
+                    </a:p>
+                  </a:txBody>
+                  <a:tcPr marL="91440" marR="91440" marT="45720" marB="45720" anchor="ctr">
+                    <a:lnL w="9525" cap="flat" cmpd="sng" algn="ctr">
+                      <a:solidFill>
+                        <a:srgbClr val="E2E5F0"/>
+                      </a:solidFill>
+                      <a:prstDash val="solid"/>
+                      <a:round/>
+                      <a:headEnd type="none" w="med" len="med"/>
+                      <a:tailEnd type="none" w="med" len="med"/>
+                    </a:lnL>
+                    <a:lnR w="9525" cap="flat" cmpd="sng" algn="ctr">
+                      <a:solidFill>
+                        <a:srgbClr val="E2E5F0"/>
+                      </a:solidFill>
+                      <a:prstDash val="solid"/>
+                      <a:round/>
+                      <a:headEnd type="none" w="med" len="med"/>
+                      <a:tailEnd type="none" w="med" len="med"/>
+                    </a:lnR>
+                    <a:lnT w="9525" cap="flat" cmpd="sng" algn="ctr">
+                      <a:solidFill>
+                        <a:srgbClr val="E2E5F0"/>
+                      </a:solidFill>
+                      <a:prstDash val="solid"/>
+                      <a:round/>
+                      <a:headEnd type="none" w="med" len="med"/>
+                      <a:tailEnd type="none" w="med" len="med"/>
+                    </a:lnT>
+                    <a:lnB w="9525" cap="flat" cmpd="sng" algn="ctr">
+                      <a:solidFill>
+                        <a:srgbClr val="E2E5F0"/>
+                      </a:solidFill>
+                      <a:prstDash val="solid"/>
+                      <a:round/>
+                      <a:headEnd type="none" w="med" len="med"/>
+                      <a:tailEnd type="none" w="med" len="med"/>
+                    </a:lnB>
+                    <a:solidFill>
+                      <a:srgbClr val="EDF1FB"/>
+                    </a:solidFill>
+                  </a:tcPr>
+                </a:tc>
+                <a:tc>
+                  <a:txBody>
+                    <a:bodyPr/>
+                    <a:lstStyle/>
+                    <a:p>
+                      <a:pPr indent="0" marL="0">
+                        <a:lnSpc>
+                          <a:spcPts val="1300"/>
+                        </a:lnSpc>
+                        <a:buNone/>
+                      </a:pPr>
+                      <a:r>
+                        <a:rPr lang="en-US" sz="1050" dirty="0">
+                          <a:solidFill>
+                            <a:srgbClr val="1A1A2E"/>
+                          </a:solidFill>
+                          <a:latin typeface="Calibri" pitchFamily="34" charset="0"/>
+                          <a:ea typeface="Calibri" pitchFamily="34" charset="-122"/>
+                          <a:cs typeface="Calibri" pitchFamily="34" charset="-120"/>
+                        </a:rPr>
+                        <a:t>24 of 264 self-activate here — each advertiser's own timing, no coordination.</a:t>
+                      </a:r>
+                      <a:endParaRPr lang="en-US" sz="1050" dirty="0">
+                        <a:latin typeface="Calibri" charset="0"/>
+                        <a:ea typeface="Calibri" charset="0"/>
+                        <a:cs typeface="Calibri" charset="0"/>
+                      </a:endParaRPr>
+                    </a:p>
+                  </a:txBody>
+                  <a:tcPr marL="91440" marR="91440" marT="45720" marB="45720" anchor="ctr">
+                    <a:lnL w="9525" cap="flat" cmpd="sng" algn="ctr">
+                      <a:solidFill>
+                        <a:srgbClr val="E2E5F0"/>
+                      </a:solidFill>
+                      <a:prstDash val="solid"/>
+                      <a:round/>
+                      <a:headEnd type="none" w="med" len="med"/>
+                      <a:tailEnd type="none" w="med" len="med"/>
+                    </a:lnL>
+                    <a:lnR w="9525" cap="flat" cmpd="sng" algn="ctr">
+                      <a:solidFill>
+                        <a:srgbClr val="E2E5F0"/>
+                      </a:solidFill>
+                      <a:prstDash val="solid"/>
+                      <a:round/>
+                      <a:headEnd type="none" w="med" len="med"/>
+                      <a:tailEnd type="none" w="med" len="med"/>
+                    </a:lnR>
+                    <a:lnT w="9525" cap="flat" cmpd="sng" algn="ctr">
+                      <a:solidFill>
+                        <a:srgbClr val="E2E5F0"/>
+                      </a:solidFill>
+                      <a:prstDash val="solid"/>
+                      <a:round/>
+                      <a:headEnd type="none" w="med" len="med"/>
+                      <a:tailEnd type="none" w="med" len="med"/>
+                    </a:lnT>
+                    <a:lnB w="9525" cap="flat" cmpd="sng" algn="ctr">
+                      <a:solidFill>
+                        <a:srgbClr val="E2E5F0"/>
+                      </a:solidFill>
+                      <a:prstDash val="solid"/>
+                      <a:round/>
+                      <a:headEnd type="none" w="med" len="med"/>
+                      <a:tailEnd type="none" w="med" len="med"/>
+                    </a:lnB>
+                    <a:solidFill>
+                      <a:srgbClr val="FDF1E3"/>
+                    </a:solidFill>
+                  </a:tcPr>
+                </a:tc>
+              </a:tr>
+              <a:tr h="868680">
+                <a:tc>
+                  <a:txBody>
+                    <a:bodyPr/>
+                    <a:lstStyle/>
+                    <a:p>
+                      <a:pPr indent="0" marL="0">
+                        <a:lnSpc>
+                          <a:spcPts val="1200"/>
+                        </a:lnSpc>
+                        <a:buNone/>
+                      </a:pPr>
+                      <a:r>
+                        <a:rPr lang="en-US" sz="1050" b="1" dirty="0">
+                          <a:solidFill>
+                            <a:srgbClr val="1E2761"/>
+                          </a:solidFill>
+                          <a:latin typeface="Calibri" pitchFamily="34" charset="0"/>
+                          <a:ea typeface="Calibri" pitchFamily="34" charset="-122"/>
+                          <a:cs typeface="Calibri" pitchFamily="34" charset="-120"/>
+                        </a:rPr>
+                        <a:t>60–69</a:t>
+                      </a:r>
+                      <a:endParaRPr lang="en-US" sz="1050" dirty="0">
+                        <a:latin typeface="Calibri" charset="0"/>
+                        <a:ea typeface="Calibri" charset="0"/>
+                        <a:cs typeface="Calibri" charset="0"/>
+                      </a:endParaRPr>
+                    </a:p>
+                    <a:p>
+                      <a:pPr indent="0" marL="0">
+                        <a:lnSpc>
+                          <a:spcPts val="1200"/>
+                        </a:lnSpc>
+                        <a:buNone/>
+                      </a:pPr>
+                      <a:r>
+                        <a:rPr lang="en-US" sz="1050" b="1" dirty="0">
+                          <a:solidFill>
+                            <a:srgbClr val="1E2761"/>
+                          </a:solidFill>
+                          <a:latin typeface="Calibri" pitchFamily="34" charset="0"/>
+                          <a:ea typeface="Calibri" pitchFamily="34" charset="-122"/>
+                          <a:cs typeface="Calibri" pitchFamily="34" charset="-120"/>
+                        </a:rPr>
+                        <a:t>(10 wks)</a:t>
+                      </a:r>
+                      <a:endParaRPr lang="en-US" sz="1050" dirty="0">
+                        <a:latin typeface="Calibri" charset="0"/>
+                        <a:ea typeface="Calibri" charset="0"/>
+                        <a:cs typeface="Calibri" charset="0"/>
+                      </a:endParaRPr>
+                    </a:p>
+                    <a:p>
+                      <a:pPr indent="0" marL="0">
+                        <a:lnSpc>
+                          <a:spcPts val="1200"/>
+                        </a:lnSpc>
+                        <a:buNone/>
+                      </a:pPr>
+                      <a:r>
+                        <a:rPr lang="en-US" sz="1050" b="1" dirty="0">
+                          <a:solidFill>
+                            <a:srgbClr val="1E2761"/>
+                          </a:solidFill>
+                          <a:latin typeface="Calibri" pitchFamily="34" charset="0"/>
+                          <a:ea typeface="Calibri" pitchFamily="34" charset="-122"/>
+                          <a:cs typeface="Calibri" pitchFamily="34" charset="-120"/>
+                        </a:rPr>
+                        <a:t>RCT window</a:t>
+                      </a:r>
+                      <a:endParaRPr lang="en-US" sz="1050" dirty="0">
+                        <a:latin typeface="Calibri" charset="0"/>
+                        <a:ea typeface="Calibri" charset="0"/>
+                        <a:cs typeface="Calibri" charset="0"/>
+                      </a:endParaRPr>
+                    </a:p>
+                  </a:txBody>
+                  <a:tcPr marL="91440" marR="91440" marT="45720" marB="45720" anchor="ctr">
+                    <a:lnL w="9525" cap="flat" cmpd="sng" algn="ctr">
+                      <a:solidFill>
+                        <a:srgbClr val="E2E5F0"/>
+                      </a:solidFill>
+                      <a:prstDash val="solid"/>
+                      <a:round/>
+                      <a:headEnd type="none" w="med" len="med"/>
+                      <a:tailEnd type="none" w="med" len="med"/>
+                    </a:lnL>
+                    <a:lnR w="9525" cap="flat" cmpd="sng" algn="ctr">
+                      <a:solidFill>
+                        <a:srgbClr val="E2E5F0"/>
+                      </a:solidFill>
+                      <a:prstDash val="solid"/>
+                      <a:round/>
+                      <a:headEnd type="none" w="med" len="med"/>
+                      <a:tailEnd type="none" w="med" len="med"/>
+                    </a:lnR>
+                    <a:lnT w="9525" cap="flat" cmpd="sng" algn="ctr">
+                      <a:solidFill>
+                        <a:srgbClr val="E2E5F0"/>
+                      </a:solidFill>
+                      <a:prstDash val="solid"/>
+                      <a:round/>
+                      <a:headEnd type="none" w="med" len="med"/>
+                      <a:tailEnd type="none" w="med" len="med"/>
+                    </a:lnT>
+                    <a:lnB w="9525" cap="flat" cmpd="sng" algn="ctr">
+                      <a:solidFill>
+                        <a:srgbClr val="E2E5F0"/>
+                      </a:solidFill>
+                      <a:prstDash val="solid"/>
+                      <a:round/>
+                      <a:headEnd type="none" w="med" len="med"/>
+                      <a:tailEnd type="none" w="med" len="med"/>
+                    </a:lnB>
+                    <a:solidFill>
+                      <a:srgbClr val="FFFFFF"/>
+                    </a:solidFill>
+                  </a:tcPr>
+                </a:tc>
+                <a:tc>
+                  <a:txBody>
+                    <a:bodyPr/>
+                    <a:lstStyle/>
+                    <a:p>
+                      <a:pPr indent="0" marL="0">
+                        <a:lnSpc>
+                          <a:spcPts val="1300"/>
+                        </a:lnSpc>
+                        <a:buNone/>
+                      </a:pPr>
+                      <a:r>
+                        <a:rPr lang="en-US" sz="1050" dirty="0">
+                          <a:solidFill>
+                            <a:srgbClr val="1A1A2E"/>
+                          </a:solidFill>
+                          <a:latin typeface="Calibri" pitchFamily="34" charset="0"/>
+                          <a:ea typeface="Calibri" pitchFamily="34" charset="-122"/>
+                          <a:cs typeface="Calibri" pitchFamily="34" charset="-120"/>
+                        </a:rPr>
+                        <a:t>Treated: fixed 6 plays/wk. Holdout: still 0. The only window the RCT estimate uses.</a:t>
+                      </a:r>
+                      <a:endParaRPr lang="en-US" sz="1050" dirty="0">
+                        <a:latin typeface="Calibri" charset="0"/>
+                        <a:ea typeface="Calibri" charset="0"/>
+                        <a:cs typeface="Calibri" charset="0"/>
+                      </a:endParaRPr>
+                    </a:p>
+                  </a:txBody>
+                  <a:tcPr marL="91440" marR="91440" marT="45720" marB="45720" anchor="ctr">
+                    <a:lnL w="9525" cap="flat" cmpd="sng" algn="ctr">
+                      <a:solidFill>
+                        <a:srgbClr val="E2E5F0"/>
+                      </a:solidFill>
+                      <a:prstDash val="solid"/>
+                      <a:round/>
+                      <a:headEnd type="none" w="med" len="med"/>
+                      <a:tailEnd type="none" w="med" len="med"/>
+                    </a:lnL>
+                    <a:lnR w="9525" cap="flat" cmpd="sng" algn="ctr">
+                      <a:solidFill>
+                        <a:srgbClr val="E2E5F0"/>
+                      </a:solidFill>
+                      <a:prstDash val="solid"/>
+                      <a:round/>
+                      <a:headEnd type="none" w="med" len="med"/>
+                      <a:tailEnd type="none" w="med" len="med"/>
+                    </a:lnR>
+                    <a:lnT w="9525" cap="flat" cmpd="sng" algn="ctr">
+                      <a:solidFill>
+                        <a:srgbClr val="E2E5F0"/>
+                      </a:solidFill>
+                      <a:prstDash val="solid"/>
+                      <a:round/>
+                      <a:headEnd type="none" w="med" len="med"/>
+                      <a:tailEnd type="none" w="med" len="med"/>
+                    </a:lnT>
+                    <a:lnB w="9525" cap="flat" cmpd="sng" algn="ctr">
+                      <a:solidFill>
+                        <a:srgbClr val="E2E5F0"/>
+                      </a:solidFill>
+                      <a:prstDash val="solid"/>
+                      <a:round/>
+                      <a:headEnd type="none" w="med" len="med"/>
+                      <a:tailEnd type="none" w="med" len="med"/>
+                    </a:lnB>
+                    <a:solidFill>
+                      <a:srgbClr val="EDF1FB"/>
+                    </a:solidFill>
+                  </a:tcPr>
+                </a:tc>
+                <a:tc>
+                  <a:txBody>
+                    <a:bodyPr/>
+                    <a:lstStyle/>
+                    <a:p>
+                      <a:pPr indent="0" marL="0">
+                        <a:lnSpc>
+                          <a:spcPts val="1300"/>
+                        </a:lnSpc>
+                        <a:buNone/>
+                      </a:pPr>
+                      <a:r>
+                        <a:rPr lang="en-US" sz="1050" dirty="0">
+                          <a:solidFill>
+                            <a:srgbClr val="1A1A2E"/>
+                          </a:solidFill>
+                          <a:latin typeface="Calibri" pitchFamily="34" charset="0"/>
+                          <a:ea typeface="Calibri" pitchFamily="34" charset="-122"/>
+                          <a:cs typeface="Calibri" pitchFamily="34" charset="-120"/>
+                        </a:rPr>
+                        <a:t>37 more self-activate here — overlap with the RCT window is coincidence, not design.</a:t>
+                      </a:r>
+                      <a:endParaRPr lang="en-US" sz="1050" dirty="0">
+                        <a:latin typeface="Calibri" charset="0"/>
+                        <a:ea typeface="Calibri" charset="0"/>
+                        <a:cs typeface="Calibri" charset="0"/>
+                      </a:endParaRPr>
+                    </a:p>
+                  </a:txBody>
+                  <a:tcPr marL="91440" marR="91440" marT="45720" marB="45720" anchor="ctr">
+                    <a:lnL w="9525" cap="flat" cmpd="sng" algn="ctr">
+                      <a:solidFill>
+                        <a:srgbClr val="E2E5F0"/>
+                      </a:solidFill>
+                      <a:prstDash val="solid"/>
+                      <a:round/>
+                      <a:headEnd type="none" w="med" len="med"/>
+                      <a:tailEnd type="none" w="med" len="med"/>
+                    </a:lnL>
+                    <a:lnR w="9525" cap="flat" cmpd="sng" algn="ctr">
+                      <a:solidFill>
+                        <a:srgbClr val="E2E5F0"/>
+                      </a:solidFill>
+                      <a:prstDash val="solid"/>
+                      <a:round/>
+                      <a:headEnd type="none" w="med" len="med"/>
+                      <a:tailEnd type="none" w="med" len="med"/>
+                    </a:lnR>
+                    <a:lnT w="9525" cap="flat" cmpd="sng" algn="ctr">
+                      <a:solidFill>
+                        <a:srgbClr val="E2E5F0"/>
+                      </a:solidFill>
+                      <a:prstDash val="solid"/>
+                      <a:round/>
+                      <a:headEnd type="none" w="med" len="med"/>
+                      <a:tailEnd type="none" w="med" len="med"/>
+                    </a:lnT>
+                    <a:lnB w="9525" cap="flat" cmpd="sng" algn="ctr">
+                      <a:solidFill>
+                        <a:srgbClr val="E2E5F0"/>
+                      </a:solidFill>
+                      <a:prstDash val="solid"/>
+                      <a:round/>
+                      <a:headEnd type="none" w="med" len="med"/>
+                      <a:tailEnd type="none" w="med" len="med"/>
+                    </a:lnB>
+                    <a:solidFill>
+                      <a:srgbClr val="FDF1E3"/>
+                    </a:solidFill>
+                  </a:tcPr>
+                </a:tc>
+              </a:tr>
+              <a:tr h="868680">
+                <a:tc>
+                  <a:txBody>
+                    <a:bodyPr/>
+                    <a:lstStyle/>
+                    <a:p>
+                      <a:pPr indent="0" marL="0">
+                        <a:lnSpc>
+                          <a:spcPts val="1200"/>
+                        </a:lnSpc>
+                        <a:buNone/>
+                      </a:pPr>
+                      <a:r>
+                        <a:rPr lang="en-US" sz="1050" b="1" dirty="0">
+                          <a:solidFill>
+                            <a:srgbClr val="1E2761"/>
+                          </a:solidFill>
+                          <a:latin typeface="Calibri" pitchFamily="34" charset="0"/>
+                          <a:ea typeface="Calibri" pitchFamily="34" charset="-122"/>
+                          <a:cs typeface="Calibri" pitchFamily="34" charset="-120"/>
+                        </a:rPr>
+                        <a:t>70–103</a:t>
+                      </a:r>
+                      <a:endParaRPr lang="en-US" sz="1050" dirty="0">
+                        <a:latin typeface="Calibri" charset="0"/>
+                        <a:ea typeface="Calibri" charset="0"/>
+                        <a:cs typeface="Calibri" charset="0"/>
+                      </a:endParaRPr>
+                    </a:p>
+                    <a:p>
+                      <a:pPr indent="0" marL="0">
+                        <a:lnSpc>
+                          <a:spcPts val="1200"/>
+                        </a:lnSpc>
+                        <a:buNone/>
+                      </a:pPr>
+                      <a:r>
+                        <a:rPr lang="en-US" sz="1050" b="1" dirty="0">
+                          <a:solidFill>
+                            <a:srgbClr val="1E2761"/>
+                          </a:solidFill>
+                          <a:latin typeface="Calibri" pitchFamily="34" charset="0"/>
+                          <a:ea typeface="Calibri" pitchFamily="34" charset="-122"/>
+                          <a:cs typeface="Calibri" pitchFamily="34" charset="-120"/>
+                        </a:rPr>
+                        <a:t>(34 wks)</a:t>
+                      </a:r>
+                      <a:endParaRPr lang="en-US" sz="1050" dirty="0">
+                        <a:latin typeface="Calibri" charset="0"/>
+                        <a:ea typeface="Calibri" charset="0"/>
+                        <a:cs typeface="Calibri" charset="0"/>
+                      </a:endParaRPr>
+                    </a:p>
+                    <a:p>
+                      <a:pPr indent="0" marL="0">
+                        <a:lnSpc>
+                          <a:spcPts val="1200"/>
+                        </a:lnSpc>
+                        <a:buNone/>
+                      </a:pPr>
+                      <a:r>
+                        <a:rPr lang="en-US" sz="1050" b="1" dirty="0">
+                          <a:solidFill>
+                            <a:srgbClr val="1E2761"/>
+                          </a:solidFill>
+                          <a:latin typeface="Calibri" pitchFamily="34" charset="0"/>
+                          <a:ea typeface="Calibri" pitchFamily="34" charset="-122"/>
+                          <a:cs typeface="Calibri" pitchFamily="34" charset="-120"/>
+                        </a:rPr>
+                        <a:t>Post-campaign</a:t>
+                      </a:r>
+                      <a:endParaRPr lang="en-US" sz="1050" dirty="0">
+                        <a:latin typeface="Calibri" charset="0"/>
+                        <a:ea typeface="Calibri" charset="0"/>
+                        <a:cs typeface="Calibri" charset="0"/>
+                      </a:endParaRPr>
+                    </a:p>
+                  </a:txBody>
+                  <a:tcPr marL="91440" marR="91440" marT="45720" marB="45720" anchor="ctr">
+                    <a:lnL w="9525" cap="flat" cmpd="sng" algn="ctr">
+                      <a:solidFill>
+                        <a:srgbClr val="E2E5F0"/>
+                      </a:solidFill>
+                      <a:prstDash val="solid"/>
+                      <a:round/>
+                      <a:headEnd type="none" w="med" len="med"/>
+                      <a:tailEnd type="none" w="med" len="med"/>
+                    </a:lnL>
+                    <a:lnR w="9525" cap="flat" cmpd="sng" algn="ctr">
+                      <a:solidFill>
+                        <a:srgbClr val="E2E5F0"/>
+                      </a:solidFill>
+                      <a:prstDash val="solid"/>
+                      <a:round/>
+                      <a:headEnd type="none" w="med" len="med"/>
+                      <a:tailEnd type="none" w="med" len="med"/>
+                    </a:lnR>
+                    <a:lnT w="9525" cap="flat" cmpd="sng" algn="ctr">
+                      <a:solidFill>
+                        <a:srgbClr val="E2E5F0"/>
+                      </a:solidFill>
+                      <a:prstDash val="solid"/>
+                      <a:round/>
+                      <a:headEnd type="none" w="med" len="med"/>
+                      <a:tailEnd type="none" w="med" len="med"/>
+                    </a:lnT>
+                    <a:lnB w="9525" cap="flat" cmpd="sng" algn="ctr">
+                      <a:solidFill>
+                        <a:srgbClr val="E2E5F0"/>
+                      </a:solidFill>
+                      <a:prstDash val="solid"/>
+                      <a:round/>
+                      <a:headEnd type="none" w="med" len="med"/>
+                      <a:tailEnd type="none" w="med" len="med"/>
+                    </a:lnB>
+                    <a:solidFill>
+                      <a:srgbClr val="F7F8FC"/>
+                    </a:solidFill>
+                  </a:tcPr>
+                </a:tc>
+                <a:tc>
+                  <a:txBody>
+                    <a:bodyPr/>
+                    <a:lstStyle/>
+                    <a:p>
+                      <a:pPr indent="0" marL="0">
+                        <a:lnSpc>
+                          <a:spcPts val="1300"/>
+                        </a:lnSpc>
+                        <a:buNone/>
+                      </a:pPr>
+                      <a:r>
+                        <a:rPr lang="en-US" sz="1050" dirty="0">
+                          <a:solidFill>
+                            <a:srgbClr val="1A1A2E"/>
+                          </a:solidFill>
+                          <a:latin typeface="Calibri" pitchFamily="34" charset="0"/>
+                          <a:ea typeface="Calibri" pitchFamily="34" charset="-122"/>
+                          <a:cs typeface="Calibri" pitchFamily="34" charset="-120"/>
+                        </a:rPr>
+                        <a:t>Ads stop, but true lift decays out over ~8 more weeks (adstock carryover) — not yet analyzed.</a:t>
+                      </a:r>
+                      <a:endParaRPr lang="en-US" sz="1050" dirty="0">
+                        <a:latin typeface="Calibri" charset="0"/>
+                        <a:ea typeface="Calibri" charset="0"/>
+                        <a:cs typeface="Calibri" charset="0"/>
+                      </a:endParaRPr>
+                    </a:p>
+                  </a:txBody>
+                  <a:tcPr marL="91440" marR="91440" marT="45720" marB="45720" anchor="ctr">
+                    <a:lnL w="9525" cap="flat" cmpd="sng" algn="ctr">
+                      <a:solidFill>
+                        <a:srgbClr val="E2E5F0"/>
+                      </a:solidFill>
+                      <a:prstDash val="solid"/>
+                      <a:round/>
+                      <a:headEnd type="none" w="med" len="med"/>
+                      <a:tailEnd type="none" w="med" len="med"/>
+                    </a:lnL>
+                    <a:lnR w="9525" cap="flat" cmpd="sng" algn="ctr">
+                      <a:solidFill>
+                        <a:srgbClr val="E2E5F0"/>
+                      </a:solidFill>
+                      <a:prstDash val="solid"/>
+                      <a:round/>
+                      <a:headEnd type="none" w="med" len="med"/>
+                      <a:tailEnd type="none" w="med" len="med"/>
+                    </a:lnR>
+                    <a:lnT w="9525" cap="flat" cmpd="sng" algn="ctr">
+                      <a:solidFill>
+                        <a:srgbClr val="E2E5F0"/>
+                      </a:solidFill>
+                      <a:prstDash val="solid"/>
+                      <a:round/>
+                      <a:headEnd type="none" w="med" len="med"/>
+                      <a:tailEnd type="none" w="med" len="med"/>
+                    </a:lnT>
+                    <a:lnB w="9525" cap="flat" cmpd="sng" algn="ctr">
+                      <a:solidFill>
+                        <a:srgbClr val="E2E5F0"/>
+                      </a:solidFill>
+                      <a:prstDash val="solid"/>
+                      <a:round/>
+                      <a:headEnd type="none" w="med" len="med"/>
+                      <a:tailEnd type="none" w="med" len="med"/>
+                    </a:lnB>
+                    <a:solidFill>
+                      <a:srgbClr val="EDF1FB"/>
+                    </a:solidFill>
+                  </a:tcPr>
+                </a:tc>
+                <a:tc>
+                  <a:txBody>
+                    <a:bodyPr/>
+                    <a:lstStyle/>
+                    <a:p>
+                      <a:pPr indent="0" marL="0">
+                        <a:lnSpc>
+                          <a:spcPts val="1300"/>
+                        </a:lnSpc>
+                        <a:buNone/>
+                      </a:pPr>
+                      <a:r>
+                        <a:rPr lang="en-US" sz="1050" dirty="0">
+                          <a:solidFill>
+                            <a:srgbClr val="1A1A2E"/>
+                          </a:solidFill>
+                          <a:latin typeface="Calibri" pitchFamily="34" charset="0"/>
+                          <a:ea typeface="Calibri" pitchFamily="34" charset="-122"/>
+                          <a:cs typeface="Calibri" pitchFamily="34" charset="-120"/>
+                        </a:rPr>
+                        <a:t>69 more (the largest group) start only now — most real campaigns land late, spread thin.</a:t>
+                      </a:r>
+                      <a:endParaRPr lang="en-US" sz="1050" dirty="0">
+                        <a:latin typeface="Calibri" charset="0"/>
+                        <a:ea typeface="Calibri" charset="0"/>
+                        <a:cs typeface="Calibri" charset="0"/>
+                      </a:endParaRPr>
+                    </a:p>
+                  </a:txBody>
+                  <a:tcPr marL="91440" marR="91440" marT="45720" marB="45720" anchor="ctr">
+                    <a:lnL w="9525" cap="flat" cmpd="sng" algn="ctr">
+                      <a:solidFill>
+                        <a:srgbClr val="E2E5F0"/>
+                      </a:solidFill>
+                      <a:prstDash val="solid"/>
+                      <a:round/>
+                      <a:headEnd type="none" w="med" len="med"/>
+                      <a:tailEnd type="none" w="med" len="med"/>
+                    </a:lnL>
+                    <a:lnR w="9525" cap="flat" cmpd="sng" algn="ctr">
+                      <a:solidFill>
+                        <a:srgbClr val="E2E5F0"/>
+                      </a:solidFill>
+                      <a:prstDash val="solid"/>
+                      <a:round/>
+                      <a:headEnd type="none" w="med" len="med"/>
+                      <a:tailEnd type="none" w="med" len="med"/>
+                    </a:lnR>
+                    <a:lnT w="9525" cap="flat" cmpd="sng" algn="ctr">
+                      <a:solidFill>
+                        <a:srgbClr val="E2E5F0"/>
+                      </a:solidFill>
+                      <a:prstDash val="solid"/>
+                      <a:round/>
+                      <a:headEnd type="none" w="med" len="med"/>
+                      <a:tailEnd type="none" w="med" len="med"/>
+                    </a:lnT>
+                    <a:lnB w="9525" cap="flat" cmpd="sng" algn="ctr">
+                      <a:solidFill>
+                        <a:srgbClr val="E2E5F0"/>
+                      </a:solidFill>
+                      <a:prstDash val="solid"/>
+                      <a:round/>
+                      <a:headEnd type="none" w="med" len="med"/>
+                      <a:tailEnd type="none" w="med" len="med"/>
+                    </a:lnB>
+                    <a:solidFill>
+                      <a:srgbClr val="FDF1E3"/>
+                    </a:solidFill>
+                  </a:tcPr>
+                </a:tc>
+              </a:tr>
+            </a:tbl>
+          </a:graphicData>
+        </a:graphic>
+      </p:graphicFrame>
+      <p:sp>
+        <p:nvSpPr>
+          <p:cNvPr id="7" name="Text 4"/>
+          <p:cNvSpPr/>
+          <p:nvPr/>
+        </p:nvSpPr>
+        <p:spPr>
+          <a:xfrm>
+            <a:off x="548640" y="5623560"/>
+            <a:ext cx="11091672" cy="685800"/>
           </a:xfrm>
           <a:prstGeom prst="rect">
             <a:avLst/>
@@ -14262,215 +15466,28 @@
           <a:p>
             <a:pPr indent="0" marL="0">
               <a:lnSpc>
-                <a:spcPts val="1700"/>
+                <a:spcPts val="1500"/>
               </a:lnSpc>
               <a:buNone/>
             </a:pPr>
             <a:r>
-              <a:rPr lang="en-US" sz="1250" dirty="0">
-                <a:solidFill>
-                  <a:srgbClr val="1A1A2E"/>
-                </a:solidFill>
-                <a:latin typeface="Calibri" pitchFamily="34" charset="0"/>
-                <a:ea typeface="Calibri" pitchFamily="34" charset="-122"/>
-                <a:cs typeface="Calibri" pitchFamily="34" charset="-120"/>
-              </a:rPr>
-              <a:t>Randomly split treated / holdout within venue_type × geo_cluster × traffic-tier strata for a fixed benchmark campaign. This is a real Atmosphere-designed measurement product, not a historical campaign.</a:t>
-            </a:r>
-            <a:endParaRPr lang="en-US" sz="1250" dirty="0"/>
-          </a:p>
-        </p:txBody>
-      </p:sp>
-      <p:sp>
-        <p:nvSpPr>
-          <p:cNvPr id="9" name="Text 7"/>
-          <p:cNvSpPr/>
-          <p:nvPr/>
-        </p:nvSpPr>
-        <p:spPr>
-          <a:xfrm>
-            <a:off x="868680" y="5029200"/>
-            <a:ext cx="4754880" cy="731520"/>
-          </a:xfrm>
-          <a:prstGeom prst="rect">
-            <a:avLst/>
-          </a:prstGeom>
-          <a:noFill/>
-          <a:ln/>
-        </p:spPr>
-        <p:txBody>
-          <a:bodyPr wrap="square" rtlCol="0" anchor="ctr"/>
-          <a:lstStyle/>
-          <a:p>
-            <a:pPr indent="0" marL="0">
-              <a:lnSpc>
-                <a:spcPts val="1600"/>
-              </a:lnSpc>
-              <a:buNone/>
-            </a:pPr>
-            <a:r>
-              <a:rPr lang="en-US" sz="1200" i="1" dirty="0">
-                <a:solidFill>
-                  <a:srgbClr val="2C7A57"/>
-                </a:solidFill>
-                <a:latin typeface="Calibri" pitchFamily="34" charset="0"/>
-                <a:ea typeface="Calibri" pitchFamily="34" charset="-122"/>
-                <a:cs typeface="Calibri" pitchFamily="34" charset="-120"/>
-              </a:rPr>
-              <a:t>Used to anchor confidence — assignment is verified, not assumed.</a:t>
-            </a:r>
-            <a:endParaRPr lang="en-US" sz="1200" dirty="0"/>
-          </a:p>
-        </p:txBody>
-      </p:sp>
-      <p:sp>
-        <p:nvSpPr>
-          <p:cNvPr id="10" name="Shape 8"/>
-          <p:cNvSpPr/>
-          <p:nvPr/>
-        </p:nvSpPr>
-        <p:spPr>
-          <a:xfrm>
-            <a:off x="6309360" y="1828800"/>
-            <a:ext cx="5394960" cy="4023360"/>
-          </a:xfrm>
-          <a:prstGeom prst="roundRect">
-            <a:avLst>
-              <a:gd name="adj" fmla="val 2273"/>
-            </a:avLst>
-          </a:prstGeom>
-          <a:solidFill>
-            <a:srgbClr val="F5F7FC"/>
-          </a:solidFill>
-          <a:ln/>
-        </p:spPr>
-      </p:sp>
-      <p:sp>
-        <p:nvSpPr>
-          <p:cNvPr id="11" name="Text 9"/>
-          <p:cNvSpPr/>
-          <p:nvPr/>
-        </p:nvSpPr>
-        <p:spPr>
-          <a:xfrm>
-            <a:off x="6629400" y="2057400"/>
-            <a:ext cx="4754880" cy="457200"/>
-          </a:xfrm>
-          <a:prstGeom prst="rect">
-            <a:avLst/>
-          </a:prstGeom>
-          <a:noFill/>
-          <a:ln/>
-        </p:spPr>
-        <p:txBody>
-          <a:bodyPr wrap="square" rtlCol="0" anchor="ctr"/>
-          <a:lstStyle/>
-          <a:p>
-            <a:pPr indent="0" marL="0">
-              <a:buNone/>
-            </a:pPr>
-            <a:r>
-              <a:rPr lang="en-US" sz="1700" b="1" dirty="0">
-                <a:solidFill>
-                  <a:srgbClr val="1E2761"/>
-                </a:solidFill>
-                <a:latin typeface="Cambria" pitchFamily="34" charset="0"/>
-                <a:ea typeface="Cambria" pitchFamily="34" charset="-122"/>
-                <a:cs typeface="Cambria" pitchFamily="34" charset="-120"/>
-              </a:rPr>
-              <a:t>Observational pool</a:t>
-            </a:r>
-            <a:endParaRPr lang="en-US" sz="1700" dirty="0"/>
-          </a:p>
-        </p:txBody>
-      </p:sp>
-      <p:sp>
-        <p:nvSpPr>
-          <p:cNvPr id="12" name="Text 10"/>
-          <p:cNvSpPr/>
-          <p:nvPr/>
-        </p:nvSpPr>
-        <p:spPr>
-          <a:xfrm>
-            <a:off x="6629400" y="2560320"/>
-            <a:ext cx="4754880" cy="1371600"/>
-          </a:xfrm>
-          <a:prstGeom prst="rect">
-            <a:avLst/>
-          </a:prstGeom>
-          <a:noFill/>
-          <a:ln/>
-        </p:spPr>
-        <p:txBody>
-          <a:bodyPr wrap="square" rtlCol="0" anchor="ctr"/>
-          <a:lstStyle/>
-          <a:p>
-            <a:pPr indent="0" marL="0">
-              <a:lnSpc>
-                <a:spcPts val="1700"/>
-              </a:lnSpc>
-              <a:buNone/>
-            </a:pPr>
-            <a:r>
-              <a:rPr lang="en-US" sz="1250" dirty="0">
-                <a:solidFill>
-                  <a:srgbClr val="1A1A2E"/>
-                </a:solidFill>
-                <a:latin typeface="Calibri" pitchFamily="34" charset="0"/>
-                <a:ea typeface="Calibri" pitchFamily="34" charset="-122"/>
-                <a:cs typeface="Calibri" pitchFamily="34" charset="-120"/>
-              </a:rPr>
-              <a:t>Advertisers activate venues themselves — non-randomly. Higher-baseline-traffic venues are systematically more likely to be activated (a real selection mechanism), and weekly frequency varies venue-to-venue.</a:t>
-            </a:r>
-            <a:endParaRPr lang="en-US" sz="1250" dirty="0"/>
-          </a:p>
-        </p:txBody>
-      </p:sp>
-      <p:sp>
-        <p:nvSpPr>
-          <p:cNvPr id="13" name="Text 11"/>
-          <p:cNvSpPr/>
-          <p:nvPr/>
-        </p:nvSpPr>
-        <p:spPr>
-          <a:xfrm>
-            <a:off x="6629400" y="5029200"/>
-            <a:ext cx="4754880" cy="731520"/>
-          </a:xfrm>
-          <a:prstGeom prst="rect">
-            <a:avLst/>
-          </a:prstGeom>
-          <a:noFill/>
-          <a:ln/>
-        </p:spPr>
-        <p:txBody>
-          <a:bodyPr wrap="square" rtlCol="0" anchor="ctr"/>
-          <a:lstStyle/>
-          <a:p>
-            <a:pPr indent="0" marL="0">
-              <a:lnSpc>
-                <a:spcPts val="1600"/>
-              </a:lnSpc>
-              <a:buNone/>
-            </a:pPr>
-            <a:r>
-              <a:rPr lang="en-US" sz="1200" i="1" dirty="0">
-                <a:solidFill>
-                  <a:srgbClr val="B8500A"/>
-                </a:solidFill>
-                <a:latin typeface="Calibri" pitchFamily="34" charset="0"/>
-                <a:ea typeface="Calibri" pitchFamily="34" charset="-122"/>
-                <a:cs typeface="Calibri" pitchFamily="34" charset="-120"/>
-              </a:rPr>
-              <a:t>A naive before/after comparison here is confounded by selection — this is what synthetic control and the MMM have to work around.</a:t>
-            </a:r>
-            <a:endParaRPr lang="en-US" sz="1200" dirty="0"/>
-          </a:p>
-        </p:txBody>
-      </p:sp>
-      <p:sp>
-        <p:nvSpPr>
-          <p:cNvPr id="14" name="Text 12"/>
+              <a:rPr lang="en-US" sz="1100" i="1" dirty="0">
+                <a:solidFill>
+                  <a:srgbClr val="5B6178"/>
+                </a:solidFill>
+                <a:latin typeface="Calibri" pitchFamily="34" charset="0"/>
+                <a:ea typeface="Calibri" pitchFamily="34" charset="-122"/>
+                <a:cs typeface="Calibri" pitchFamily="34" charset="-120"/>
+              </a:rPr>
+              <a:t>RCT pool: assignment is verified, not assumed — anchors high confidence. Observational pool: 134 of 264 venues never run a campaign at all, and the rest self-activate on their own schedule — exactly why synthetic control (next) reconstructs the counterfactual instead of comparing before/after directly.</a:t>
+            </a:r>
+            <a:endParaRPr lang="en-US" sz="1100" dirty="0"/>
+          </a:p>
+        </p:txBody>
+      </p:sp>
+      <p:sp>
+        <p:nvSpPr>
+          <p:cNvPr id="8" name="Text 5"/>
           <p:cNvSpPr/>
           <p:nvPr/>
         </p:nvSpPr>

--- a/deck/AtmosphereTV_DOOH_Measurement.pptx
+++ b/deck/AtmosphereTV_DOOH_Measurement.pptx
@@ -20,9 +20,10 @@
     <p:sldId id="268" r:id="rId14"/>
     <p:sldId id="269" r:id="rId15"/>
     <p:sldId id="270" r:id="rId16"/>
+    <p:sldId id="271" r:id="rId17"/>
   </p:sldIdLst>
   <p:notesMasterIdLst>
-    <p:notesMasterId r:id="rId17"/>
+    <p:notesMasterId r:id="rId18"/>
   </p:notesMasterIdLst>
   <p:sldSz cx="12192000" cy="6858000"/>
   <p:notesSz cx="6858000" cy="12192000"/>
@@ -431,6 +432,325 @@
               <c:strCache>
                 <c:ptCount val="1"/>
                 <c:pt idx="0">
+                  <c:v>Estimated lift (network-pooled)</c:v>
+                </c:pt>
+              </c:strCache>
+            </c:strRef>
+          </c:tx>
+          <c:spPr>
+            <a:solidFill>
+              <a:srgbClr val="1E2761"/>
+            </a:solidFill>
+            <a:effectLst/>
+          </c:spPr>
+          <c:invertIfNegative val="0"/>
+          <c:dLbls>
+            <c:numFmt formatCode="+0.0;-0.0;0.0" sourceLinked="0"/>
+            <c:txPr>
+              <a:bodyPr/>
+              <a:lstStyle/>
+              <a:p>
+                <a:pPr>
+                  <a:defRPr b="0" i="0" strike="noStrike" sz="1050" u="none">
+                    <a:solidFill>
+                      <a:srgbClr val="1A1A2E"/>
+                    </a:solidFill>
+                    <a:latin typeface="Arial"/>
+                  </a:defRPr>
+                </a:pPr>
+              </a:p>
+            </c:txPr>
+            <c:showLegendKey val="0"/>
+            <c:showVal val="1"/>
+            <c:showCatName val="0"/>
+            <c:showSerName val="0"/>
+            <c:showPercent val="0"/>
+            <c:showBubbleSize val="0"/>
+            <c:showLeaderLines val="0"/>
+          </c:dLbls>
+          <c:dPt>
+            <c:idx val="0"/>
+            <c:invertIfNegative val="0"/>
+            <c:bubble3D val="0"/>
+            <c:spPr>
+              <a:solidFill>
+                <a:srgbClr val="1E2761"/>
+              </a:solidFill>
+              <a:effectLst/>
+            </c:spPr>
+          </c:dPt>
+          <c:dPt>
+            <c:idx val="1"/>
+            <c:invertIfNegative val="0"/>
+            <c:bubble3D val="0"/>
+            <c:spPr>
+              <a:solidFill>
+                <a:srgbClr val="E8871E"/>
+              </a:solidFill>
+              <a:effectLst/>
+            </c:spPr>
+          </c:dPt>
+          <c:dPt>
+            <c:idx val="2"/>
+            <c:invertIfNegative val="0"/>
+            <c:bubble3D val="0"/>
+            <c:spPr>
+              <a:solidFill>
+                <a:srgbClr val="B7BCCB"/>
+              </a:solidFill>
+              <a:effectLst/>
+            </c:spPr>
+          </c:dPt>
+          <c:dPt>
+            <c:idx val="3"/>
+            <c:invertIfNegative val="0"/>
+            <c:bubble3D val="0"/>
+            <c:spPr>
+              <a:solidFill>
+                <a:srgbClr val="B7BCCB"/>
+              </a:solidFill>
+              <a:effectLst/>
+            </c:spPr>
+          </c:dPt>
+          <c:cat>
+            <c:multiLvlStrRef>
+              <c:f>Sheet1!$A$2:$A$5</c:f>
+              <c:multiLvlStrCache>
+                <c:ptCount val="4"/>
+                <c:lvl>
+                  <c:pt idx="0">
+                    <c:v>During campaign</c:v>
+                  </c:pt>
+                  <c:pt idx="1">
+                    <c:v>0–10 wks after</c:v>
+                  </c:pt>
+                  <c:pt idx="2">
+                    <c:v>10–20 wks after</c:v>
+                  </c:pt>
+                  <c:pt idx="3">
+                    <c:v>Full post-campaign</c:v>
+                  </c:pt>
+                </c:lvl>
+              </c:multiLvlStrCache>
+            </c:multiLvlStrRef>
+          </c:cat>
+          <c:val>
+            <c:numRef>
+              <c:f>Sheet1!$B$2:$B$5</c:f>
+              <c:numCache>
+                <c:formatCode>General</c:formatCode>
+                <c:ptCount val="4"/>
+                <c:pt idx="0">
+                  <c:v>13.26</c:v>
+                </c:pt>
+                <c:pt idx="1">
+                  <c:v>2.52</c:v>
+                </c:pt>
+                <c:pt idx="2">
+                  <c:v>-1.43</c:v>
+                </c:pt>
+                <c:pt idx="3">
+                  <c:v>0.05</c:v>
+                </c:pt>
+              </c:numCache>
+            </c:numRef>
+          </c:val>
+        </c:ser>
+        <c:dLbls>
+          <c:numFmt formatCode="+0.0;-0.0;0.0" sourceLinked="0"/>
+          <c:txPr>
+            <a:bodyPr/>
+            <a:lstStyle/>
+            <a:p>
+              <a:pPr>
+                <a:defRPr b="0" i="0" strike="noStrike" sz="1050" u="none">
+                  <a:solidFill>
+                    <a:srgbClr val="1A1A2E"/>
+                  </a:solidFill>
+                  <a:latin typeface="Arial"/>
+                </a:defRPr>
+              </a:pPr>
+            </a:p>
+          </c:txPr>
+          <c:showLegendKey val="0"/>
+          <c:showVal val="1"/>
+          <c:showCatName val="0"/>
+          <c:showSerName val="0"/>
+          <c:showPercent val="0"/>
+          <c:showBubbleSize val="0"/>
+          <c:showLeaderLines val="0"/>
+        </c:dLbls>
+        <c:gapWidth val="150"/>
+        <c:overlap val="0"/>
+        <c:axId val="2094734554"/>
+        <c:axId val="2094734552"/>
+        <c:axId val="2094734556"/>
+      </c:barChart>
+      <c:catAx>
+        <c:axId val="2094734554"/>
+        <c:scaling>
+          <c:orientation val="minMax"/>
+        </c:scaling>
+        <c:delete val="0"/>
+        <c:axPos val="b"/>
+        <c:numFmt formatCode="General" sourceLinked="1"/>
+        <c:majorTickMark val="out"/>
+        <c:minorTickMark val="none"/>
+        <c:tickLblPos val="low"/>
+        <c:spPr>
+          <a:ln w="12700" cap="flat">
+            <a:solidFill>
+              <a:srgbClr val="888888"/>
+            </a:solidFill>
+            <a:prstDash val="solid"/>
+            <a:round/>
+          </a:ln>
+        </c:spPr>
+        <c:txPr>
+          <a:bodyPr/>
+          <a:lstStyle/>
+          <a:p>
+            <a:pPr>
+              <a:defRPr sz="950" b="0" i="0" u="none" strike="noStrike">
+                <a:solidFill>
+                  <a:srgbClr val="1A1A2E"/>
+                </a:solidFill>
+                <a:latin typeface="Arial"/>
+              </a:defRPr>
+            </a:pPr>
+            <a:endParaRPr lang="en-US"/>
+          </a:p>
+        </c:txPr>
+        <c:crossAx val="2094734552"/>
+        <c:crosses val="autoZero"/>
+        <c:auto val="1"/>
+        <c:lblAlgn val="ctr"/>
+        <c:noMultiLvlLbl val="1"/>
+      </c:catAx>
+      <c:valAx>
+        <c:axId val="2094734552"/>
+        <c:scaling>
+          <c:orientation val="minMax"/>
+        </c:scaling>
+        <c:delete val="0"/>
+        <c:axPos val="l"/>
+        <c:majorGridlines>
+          <c:spPr>
+            <a:ln w="9525" cap="flat">
+              <a:solidFill>
+                <a:srgbClr val="E5E5EF"/>
+              </a:solidFill>
+              <a:prstDash val="solid"/>
+              <a:round/>
+            </a:ln>
+          </c:spPr>
+        </c:majorGridlines>
+        <c:title>
+          <c:tx>
+            <c:rich>
+              <a:bodyPr/>
+              <a:lstStyle/>
+              <a:p>
+                <a:pPr>
+                  <a:defRPr sz="1000" b="0" i="0" u="none" strike="noStrike">
+                    <a:solidFill>
+                      <a:srgbClr val="000000"/>
+                    </a:solidFill>
+                    <a:latin typeface="Arial"/>
+                  </a:defRPr>
+                </a:pPr>
+                <a:r>
+                  <a:rPr sz="1000" b="0" i="0" u="none" strike="noStrike">
+                    <a:solidFill>
+                      <a:srgbClr val="000000"/>
+                    </a:solidFill>
+                    <a:latin typeface="Arial"/>
+                  </a:rPr>
+                  <a:t>Weekly incremental foot traffic</a:t>
+                </a:r>
+              </a:p>
+            </c:rich>
+          </c:tx>
+          <c:layout/>
+          <c:overlay val="0"/>
+        </c:title>
+        <c:numFmt formatCode="General" sourceLinked="0"/>
+        <c:majorTickMark val="out"/>
+        <c:minorTickMark val="none"/>
+        <c:tickLblPos val="nextTo"/>
+        <c:spPr>
+          <a:ln w="12700" cap="flat">
+            <a:solidFill>
+              <a:srgbClr val="888888"/>
+            </a:solidFill>
+            <a:prstDash val="solid"/>
+            <a:round/>
+          </a:ln>
+        </c:spPr>
+        <c:txPr>
+          <a:bodyPr/>
+          <a:lstStyle/>
+          <a:p>
+            <a:pPr>
+              <a:defRPr sz="900" b="0" i="0" u="none" strike="noStrike">
+                <a:solidFill>
+                  <a:srgbClr val="5B6178"/>
+                </a:solidFill>
+                <a:latin typeface="Arial"/>
+              </a:defRPr>
+            </a:pPr>
+            <a:endParaRPr lang="en-US"/>
+          </a:p>
+        </c:txPr>
+        <c:crossAx val="2094734554"/>
+        <c:crosses val="autoZero"/>
+        <c:crossBetween val="between"/>
+      </c:valAx>
+      <c:spPr>
+        <a:noFill/>
+        <a:ln>
+          <a:noFill/>
+        </a:ln>
+        <a:effectLst/>
+      </c:spPr>
+    </c:plotArea>
+    <c:plotVisOnly val="1"/>
+    <c:dispBlanksAs val="span"/>
+  </c:chart>
+  <c:spPr>
+    <a:noFill/>
+    <a:ln>
+      <a:noFill/>
+    </a:ln>
+    <a:effectLst/>
+  </c:spPr>
+  <c:externalData r:id="rId1">
+    <c:autoUpdate val="0"/>
+  </c:externalData>
+</c:chartSpace>
+</file>
+
+<file path=ppt/charts/chart3.xml><?xml version="1.0" encoding="utf-8"?>
+<c:chartSpace xmlns:c="http://schemas.openxmlformats.org/drawingml/2006/chart" xmlns:a="http://schemas.openxmlformats.org/drawingml/2006/main" xmlns:r="http://schemas.openxmlformats.org/officeDocument/2006/relationships">
+  <c:date1904 val="0"/>
+  <c:roundedCorners val="1"/>
+  <c:chart>
+    <c:autoTitleDeleted val="1"/>
+    <c:plotArea>
+      <c:layout/>
+      <c:barChart>
+        <c:barDir val="col"/>
+        <c:grouping val="clustered"/>
+        <c:varyColors val="0"/>
+        <c:ser>
+          <c:idx val="0"/>
+          <c:order val="0"/>
+          <c:tx>
+            <c:strRef>
+              <c:f>Sheet1!$B$1</c:f>
+              <c:strCache>
+                <c:ptCount val="1"/>
+                <c:pt idx="0">
                   <c:v>Measured lift</c:v>
                 </c:pt>
               </c:strCache>
@@ -699,7 +1019,7 @@
 </c:chartSpace>
 </file>
 
-<file path=ppt/charts/chart3.xml><?xml version="1.0" encoding="utf-8"?>
+<file path=ppt/charts/chart4.xml><?xml version="1.0" encoding="utf-8"?>
 <c:chartSpace xmlns:c="http://schemas.openxmlformats.org/drawingml/2006/chart" xmlns:a="http://schemas.openxmlformats.org/drawingml/2006/main" xmlns:r="http://schemas.openxmlformats.org/officeDocument/2006/relationships">
   <c:date1904 val="0"/>
   <c:roundedCorners val="1"/>
@@ -1077,7 +1397,7 @@
 </c:chartSpace>
 </file>
 
-<file path=ppt/charts/chart4.xml><?xml version="1.0" encoding="utf-8"?>
+<file path=ppt/charts/chart5.xml><?xml version="1.0" encoding="utf-8"?>
 <c:chartSpace xmlns:c="http://schemas.openxmlformats.org/drawingml/2006/chart" xmlns:a="http://schemas.openxmlformats.org/drawingml/2006/main" xmlns:r="http://schemas.openxmlformats.org/officeDocument/2006/relationships">
   <c:date1904 val="0"/>
   <c:roundedCorners val="1"/>
@@ -1455,7 +1775,7 @@
 </c:chartSpace>
 </file>
 
-<file path=ppt/charts/chart5.xml><?xml version="1.0" encoding="utf-8"?>
+<file path=ppt/charts/chart6.xml><?xml version="1.0" encoding="utf-8"?>
 <c:chartSpace xmlns:c="http://schemas.openxmlformats.org/drawingml/2006/chart" xmlns:a="http://schemas.openxmlformats.org/drawingml/2006/main" xmlns:r="http://schemas.openxmlformats.org/officeDocument/2006/relationships">
   <c:date1904 val="0"/>
   <c:roundedCorners val="1"/>
@@ -1701,7 +2021,7 @@
 </c:chartSpace>
 </file>
 
-<file path=ppt/charts/chart6.xml><?xml version="1.0" encoding="utf-8"?>
+<file path=ppt/charts/chart7.xml><?xml version="1.0" encoding="utf-8"?>
 <c:chartSpace xmlns:c="http://schemas.openxmlformats.org/drawingml/2006/chart" xmlns:a="http://schemas.openxmlformats.org/drawingml/2006/main" xmlns:r="http://schemas.openxmlformats.org/officeDocument/2006/relationships">
   <c:date1904 val="0"/>
   <c:roundedCorners val="1"/>
@@ -1976,7 +2296,7 @@
 </c:chartSpace>
 </file>
 
-<file path=ppt/charts/chart7.xml><?xml version="1.0" encoding="utf-8"?>
+<file path=ppt/charts/chart8.xml><?xml version="1.0" encoding="utf-8"?>
 <c:chartSpace xmlns:c="http://schemas.openxmlformats.org/drawingml/2006/chart" xmlns:a="http://schemas.openxmlformats.org/drawingml/2006/main" xmlns:r="http://schemas.openxmlformats.org/officeDocument/2006/relationships">
   <c:date1904 val="0"/>
   <c:roundedCorners val="1"/>
@@ -3198,6 +3518,94 @@
             <a:fld id="{F7021451-1387-4CA6-816F-3879F97B5CBC}" type="slidenum">
               <a:rPr lang="en-US"/>
               <a:t>15</a:t>
+            </a:fld>
+            <a:endParaRPr lang="en-US"/>
+          </a:p>
+        </p:txBody>
+      </p:sp>
+    </p:spTree>
+    <p:extLst>
+      <p:ext uri="{BB962C8B-B14F-4D97-AF65-F5344CB8AC3E}">
+        <p14:creationId xmlns:p14="http://schemas.microsoft.com/office/powerpoint/2010/main" val="1024086991"/>
+      </p:ext>
+    </p:extLst>
+  </p:cSld>
+  <p:clrMapOvr>
+    <a:masterClrMapping/>
+  </p:clrMapOvr>
+</p:notes>
+</file>
+
+<file path=ppt/notesSlides/notesSlide16.xml><?xml version="1.0" encoding="utf-8"?>
+<p:notes xmlns:a="http://schemas.openxmlformats.org/drawingml/2006/main" xmlns:r="http://schemas.openxmlformats.org/officeDocument/2006/relationships" xmlns:p="http://schemas.openxmlformats.org/presentationml/2006/main">
+  <p:cSld>
+    <p:spTree>
+      <p:nvGrpSpPr>
+        <p:cNvPr id="1" name=""/>
+        <p:cNvGrpSpPr/>
+        <p:nvPr/>
+      </p:nvGrpSpPr>
+      <p:grpSpPr>
+        <a:xfrm>
+          <a:off x="0" y="0"/>
+          <a:ext cx="0" cy="0"/>
+          <a:chOff x="0" y="0"/>
+          <a:chExt cx="0" cy="0"/>
+        </a:xfrm>
+      </p:grpSpPr>
+      <p:sp>
+        <p:nvSpPr>
+          <p:cNvPr id="2" name="Slide Image Placeholder 1"/>
+          <p:cNvSpPr>
+            <a:spLocks noGrp="1" noRot="1" noChangeAspect="1"/>
+          </p:cNvSpPr>
+          <p:nvPr>
+            <p:ph type="sldImg"/>
+          </p:nvPr>
+        </p:nvSpPr>
+        <p:spPr/>
+      </p:sp>
+      <p:sp>
+        <p:nvSpPr>
+          <p:cNvPr id="3" name="Notes Placeholder 2"/>
+          <p:cNvSpPr>
+            <a:spLocks noGrp="1"/>
+          </p:cNvSpPr>
+          <p:nvPr>
+            <p:ph type="body" idx="1"/>
+          </p:nvPr>
+        </p:nvSpPr>
+        <p:spPr/>
+        <p:txBody>
+          <a:bodyPr/>
+          <a:lstStyle/>
+          <a:p>
+            <a:r>
+              <a:rPr lang="en-US" dirty="0"/>
+              <a:t/>
+            </a:r>
+            <a:endParaRPr lang="en-US" dirty="0"/>
+          </a:p>
+        </p:txBody>
+      </p:sp>
+      <p:sp>
+        <p:nvSpPr>
+          <p:cNvPr id="4" name="Slide Number Placeholder 3"/>
+          <p:cNvSpPr>
+            <a:spLocks noGrp="1"/>
+          </p:cNvSpPr>
+          <p:nvPr>
+            <p:ph type="sldNum" sz="quarter" idx="10"/>
+          </p:nvPr>
+        </p:nvSpPr>
+        <p:spPr/>
+        <p:txBody>
+          <a:bodyPr/>
+          <a:lstStyle/>
+          <a:p>
+            <a:fld id="{F7021451-1387-4CA6-816F-3879F97B5CBC}" type="slidenum">
+              <a:rPr lang="en-US"/>
+              <a:t>16</a:t>
             </a:fld>
             <a:endParaRPr lang="en-US"/>
           </a:p>
@@ -4507,7 +4915,7 @@
               <a:buNone/>
             </a:pPr>
             <a:r>
-              <a:rPr lang="en-US" sz="2400" b="1" dirty="0">
+              <a:rPr lang="en-US" sz="2500" b="1" dirty="0">
                 <a:solidFill>
                   <a:srgbClr val="1E2761"/>
                 </a:solidFill>
@@ -4515,9 +4923,9 @@
                 <a:ea typeface="Cambria" pitchFamily="34" charset="-122"/>
                 <a:cs typeface="Cambria" pitchFamily="34" charset="-120"/>
               </a:rPr>
-              <a:t>Robustness check: does competing media break this MMM?</a:t>
-            </a:r>
-            <a:endParaRPr lang="en-US" sz="2400" dirty="0"/>
+              <a:t>MMM: an uncalibrated model would have underpriced results</a:t>
+            </a:r>
+            <a:endParaRPr lang="en-US" sz="2500" dirty="0"/>
           </a:p>
         </p:txBody>
       </p:sp>
@@ -4581,7 +4989,7 @@
                 <a:ea typeface="Calibri" pitchFamily="34" charset="-122"/>
                 <a:cs typeface="Calibri" pitchFamily="34" charset="-120"/>
               </a:rPr>
-              <a:t>Step 3 robustness check · Q2</a:t>
+              <a:t>Step 3 of 6 · Answers Q2</a:t>
             </a:r>
             <a:endParaRPr lang="en-US" sz="950" dirty="0"/>
           </a:p>
@@ -4612,7 +5020,7 @@
               <a:buNone/>
             </a:pPr>
             <a:r>
-              <a:rPr lang="en-US" sz="1200" i="1" dirty="0">
+              <a:rPr lang="en-US" sz="1250" i="1" dirty="0">
                 <a:solidFill>
                   <a:srgbClr val="5B6178"/>
                 </a:solidFill>
@@ -4620,9 +5028,9 @@
                 <a:ea typeface="Calibri" pitchFamily="34" charset="-122"/>
                 <a:cs typeface="Calibri" pitchFamily="34" charset="-120"/>
               </a:rPr>
-              <a:t>A stress-test scenario: a competing advertiser ramps up on the same venues at the same time, correlated with Atmosphere's own exposure — the kind of overlap a real MMM has to prove it's robust to.</a:t>
-            </a:r>
-            <a:endParaRPr lang="en-US" sz="1200" dirty="0"/>
+              <a:t>Adstock + saturation shape comes from the aggregate weekly series; scale is pinned by the RCT's high-confidence estimate.</a:t>
+            </a:r>
+            <a:endParaRPr lang="en-US" sz="1250" dirty="0"/>
           </a:p>
         </p:txBody>
       </p:sp>
@@ -4644,52 +5052,30 @@
       </p:graphicFrame>
       <p:sp>
         <p:nvSpPr>
-          <p:cNvPr id="7" name="Shape 4"/>
-          <p:cNvSpPr/>
-          <p:nvPr/>
-        </p:nvSpPr>
-        <p:spPr>
-          <a:xfrm>
-            <a:off x="7772400" y="1600200"/>
-            <a:ext cx="3867912" cy="1234440"/>
-          </a:xfrm>
-          <a:prstGeom prst="roundRect">
-            <a:avLst>
-              <a:gd name="adj" fmla="val 5926"/>
-            </a:avLst>
-          </a:prstGeom>
-          <a:solidFill>
-            <a:srgbClr val="F5F7FC"/>
-          </a:solidFill>
-          <a:ln/>
-        </p:spPr>
-      </p:sp>
-      <p:sp>
-        <p:nvSpPr>
-          <p:cNvPr id="8" name="Text 5"/>
-          <p:cNvSpPr/>
-          <p:nvPr/>
-        </p:nvSpPr>
-        <p:spPr>
-          <a:xfrm>
-            <a:off x="7955280" y="1719072"/>
-            <a:ext cx="3520440" cy="365760"/>
-          </a:xfrm>
-          <a:prstGeom prst="rect">
-            <a:avLst/>
-          </a:prstGeom>
-          <a:noFill/>
-          <a:ln/>
-        </p:spPr>
-        <p:txBody>
-          <a:bodyPr wrap="square" rtlCol="0" anchor="ctr"/>
-          <a:lstStyle/>
-          <a:p>
-            <a:pPr indent="0" marL="0">
-              <a:buNone/>
-            </a:pPr>
-            <a:r>
-              <a:rPr lang="en-US" sz="1100" b="1" dirty="0">
+          <p:cNvPr id="7" name="Text 4"/>
+          <p:cNvSpPr/>
+          <p:nvPr/>
+        </p:nvSpPr>
+        <p:spPr>
+          <a:xfrm>
+            <a:off x="7772400" y="1737360"/>
+            <a:ext cx="3840480" cy="320040"/>
+          </a:xfrm>
+          <a:prstGeom prst="rect">
+            <a:avLst/>
+          </a:prstGeom>
+          <a:noFill/>
+          <a:ln/>
+        </p:spPr>
+        <p:txBody>
+          <a:bodyPr wrap="square" rtlCol="0" anchor="ctr"/>
+          <a:lstStyle/>
+          <a:p>
+            <a:pPr indent="0" marL="0">
+              <a:buNone/>
+            </a:pPr>
+            <a:r>
+              <a:rPr lang="en-US" sz="1200" b="1" dirty="0">
                 <a:solidFill>
                   <a:srgbClr val="1E2761"/>
                 </a:solidFill>
@@ -4697,7 +5083,361 @@
                 <a:ea typeface="Cambria" pitchFamily="34" charset="-122"/>
                 <a:cs typeface="Cambria" pitchFamily="34" charset="-120"/>
               </a:rPr>
-              <a:t>RCT estimate shift under the identical shock</a:t>
+              <a:t>Calibration adjustment</a:t>
+            </a:r>
+            <a:endParaRPr lang="en-US" sz="1200" dirty="0"/>
+          </a:p>
+        </p:txBody>
+      </p:sp>
+      <p:sp>
+        <p:nvSpPr>
+          <p:cNvPr id="8" name="Text 5"/>
+          <p:cNvSpPr/>
+          <p:nvPr/>
+        </p:nvSpPr>
+        <p:spPr>
+          <a:xfrm>
+            <a:off x="7772400" y="2194560"/>
+            <a:ext cx="1737360" cy="502920"/>
+          </a:xfrm>
+          <a:prstGeom prst="rect">
+            <a:avLst/>
+          </a:prstGeom>
+          <a:noFill/>
+          <a:ln/>
+        </p:spPr>
+        <p:txBody>
+          <a:bodyPr wrap="square" rtlCol="0" anchor="ctr"/>
+          <a:lstStyle/>
+          <a:p>
+            <a:pPr indent="0" marL="0">
+              <a:buNone/>
+            </a:pPr>
+            <a:r>
+              <a:rPr lang="en-US" sz="1200" dirty="0">
+                <a:solidFill>
+                  <a:srgbClr val="1A1A2E"/>
+                </a:solidFill>
+                <a:latin typeface="Calibri" pitchFamily="34" charset="0"/>
+                <a:ea typeface="Calibri" pitchFamily="34" charset="-122"/>
+                <a:cs typeface="Calibri" pitchFamily="34" charset="-120"/>
+              </a:rPr>
+              <a:t>Restaurants</a:t>
+            </a:r>
+            <a:endParaRPr lang="en-US" sz="1200" dirty="0"/>
+          </a:p>
+        </p:txBody>
+      </p:sp>
+      <p:sp>
+        <p:nvSpPr>
+          <p:cNvPr id="9" name="Text 6"/>
+          <p:cNvSpPr/>
+          <p:nvPr/>
+        </p:nvSpPr>
+        <p:spPr>
+          <a:xfrm>
+            <a:off x="9509760" y="2194560"/>
+            <a:ext cx="2103120" cy="502920"/>
+          </a:xfrm>
+          <a:prstGeom prst="rect">
+            <a:avLst/>
+          </a:prstGeom>
+          <a:noFill/>
+          <a:ln/>
+        </p:spPr>
+        <p:txBody>
+          <a:bodyPr wrap="square" rtlCol="0" anchor="ctr"/>
+          <a:lstStyle/>
+          <a:p>
+            <a:pPr indent="0" marL="0">
+              <a:buNone/>
+            </a:pPr>
+            <a:r>
+              <a:rPr lang="en-US" sz="1800" b="1" dirty="0">
+                <a:solidFill>
+                  <a:srgbClr val="B8500A"/>
+                </a:solidFill>
+                <a:latin typeface="Calibri" pitchFamily="34" charset="0"/>
+                <a:ea typeface="Calibri" pitchFamily="34" charset="-122"/>
+                <a:cs typeface="Calibri" pitchFamily="34" charset="-120"/>
+              </a:rPr>
+              <a:t>+134%</a:t>
+            </a:r>
+            <a:endParaRPr lang="en-US" sz="1800" dirty="0"/>
+          </a:p>
+        </p:txBody>
+      </p:sp>
+      <p:sp>
+        <p:nvSpPr>
+          <p:cNvPr id="10" name="Text 7"/>
+          <p:cNvSpPr/>
+          <p:nvPr/>
+        </p:nvSpPr>
+        <p:spPr>
+          <a:xfrm>
+            <a:off x="7772400" y="2788920"/>
+            <a:ext cx="1737360" cy="502920"/>
+          </a:xfrm>
+          <a:prstGeom prst="rect">
+            <a:avLst/>
+          </a:prstGeom>
+          <a:noFill/>
+          <a:ln/>
+        </p:spPr>
+        <p:txBody>
+          <a:bodyPr wrap="square" rtlCol="0" anchor="ctr"/>
+          <a:lstStyle/>
+          <a:p>
+            <a:pPr indent="0" marL="0">
+              <a:buNone/>
+            </a:pPr>
+            <a:r>
+              <a:rPr lang="en-US" sz="1200" dirty="0">
+                <a:solidFill>
+                  <a:srgbClr val="1A1A2E"/>
+                </a:solidFill>
+                <a:latin typeface="Calibri" pitchFamily="34" charset="0"/>
+                <a:ea typeface="Calibri" pitchFamily="34" charset="-122"/>
+                <a:cs typeface="Calibri" pitchFamily="34" charset="-120"/>
+              </a:rPr>
+              <a:t>Gyms</a:t>
+            </a:r>
+            <a:endParaRPr lang="en-US" sz="1200" dirty="0"/>
+          </a:p>
+        </p:txBody>
+      </p:sp>
+      <p:sp>
+        <p:nvSpPr>
+          <p:cNvPr id="11" name="Text 8"/>
+          <p:cNvSpPr/>
+          <p:nvPr/>
+        </p:nvSpPr>
+        <p:spPr>
+          <a:xfrm>
+            <a:off x="9509760" y="2788920"/>
+            <a:ext cx="2103120" cy="502920"/>
+          </a:xfrm>
+          <a:prstGeom prst="rect">
+            <a:avLst/>
+          </a:prstGeom>
+          <a:noFill/>
+          <a:ln/>
+        </p:spPr>
+        <p:txBody>
+          <a:bodyPr wrap="square" rtlCol="0" anchor="ctr"/>
+          <a:lstStyle/>
+          <a:p>
+            <a:pPr indent="0" marL="0">
+              <a:buNone/>
+            </a:pPr>
+            <a:r>
+              <a:rPr lang="en-US" sz="1800" b="1" dirty="0">
+                <a:solidFill>
+                  <a:srgbClr val="B8500A"/>
+                </a:solidFill>
+                <a:latin typeface="Calibri" pitchFamily="34" charset="0"/>
+                <a:ea typeface="Calibri" pitchFamily="34" charset="-122"/>
+                <a:cs typeface="Calibri" pitchFamily="34" charset="-120"/>
+              </a:rPr>
+              <a:t>+165%</a:t>
+            </a:r>
+            <a:endParaRPr lang="en-US" sz="1800" dirty="0"/>
+          </a:p>
+        </p:txBody>
+      </p:sp>
+      <p:sp>
+        <p:nvSpPr>
+          <p:cNvPr id="12" name="Text 9"/>
+          <p:cNvSpPr/>
+          <p:nvPr/>
+        </p:nvSpPr>
+        <p:spPr>
+          <a:xfrm>
+            <a:off x="7772400" y="3383280"/>
+            <a:ext cx="1737360" cy="502920"/>
+          </a:xfrm>
+          <a:prstGeom prst="rect">
+            <a:avLst/>
+          </a:prstGeom>
+          <a:noFill/>
+          <a:ln/>
+        </p:spPr>
+        <p:txBody>
+          <a:bodyPr wrap="square" rtlCol="0" anchor="ctr"/>
+          <a:lstStyle/>
+          <a:p>
+            <a:pPr indent="0" marL="0">
+              <a:buNone/>
+            </a:pPr>
+            <a:r>
+              <a:rPr lang="en-US" sz="1200" dirty="0">
+                <a:solidFill>
+                  <a:srgbClr val="1A1A2E"/>
+                </a:solidFill>
+                <a:latin typeface="Calibri" pitchFamily="34" charset="0"/>
+                <a:ea typeface="Calibri" pitchFamily="34" charset="-122"/>
+                <a:cs typeface="Calibri" pitchFamily="34" charset="-120"/>
+              </a:rPr>
+              <a:t>Bars</a:t>
+            </a:r>
+            <a:endParaRPr lang="en-US" sz="1200" dirty="0"/>
+          </a:p>
+        </p:txBody>
+      </p:sp>
+      <p:sp>
+        <p:nvSpPr>
+          <p:cNvPr id="13" name="Text 10"/>
+          <p:cNvSpPr/>
+          <p:nvPr/>
+        </p:nvSpPr>
+        <p:spPr>
+          <a:xfrm>
+            <a:off x="9509760" y="3383280"/>
+            <a:ext cx="2103120" cy="502920"/>
+          </a:xfrm>
+          <a:prstGeom prst="rect">
+            <a:avLst/>
+          </a:prstGeom>
+          <a:noFill/>
+          <a:ln/>
+        </p:spPr>
+        <p:txBody>
+          <a:bodyPr wrap="square" rtlCol="0" anchor="ctr"/>
+          <a:lstStyle/>
+          <a:p>
+            <a:pPr indent="0" marL="0">
+              <a:buNone/>
+            </a:pPr>
+            <a:r>
+              <a:rPr lang="en-US" sz="1800" b="1" dirty="0">
+                <a:solidFill>
+                  <a:srgbClr val="2C7A57"/>
+                </a:solidFill>
+                <a:latin typeface="Calibri" pitchFamily="34" charset="0"/>
+                <a:ea typeface="Calibri" pitchFamily="34" charset="-122"/>
+                <a:cs typeface="Calibri" pitchFamily="34" charset="-120"/>
+              </a:rPr>
+              <a:t>+20%</a:t>
+            </a:r>
+            <a:endParaRPr lang="en-US" sz="1800" dirty="0"/>
+          </a:p>
+        </p:txBody>
+      </p:sp>
+      <p:sp>
+        <p:nvSpPr>
+          <p:cNvPr id="14" name="Text 11"/>
+          <p:cNvSpPr/>
+          <p:nvPr/>
+        </p:nvSpPr>
+        <p:spPr>
+          <a:xfrm>
+            <a:off x="7772400" y="3977640"/>
+            <a:ext cx="1737360" cy="502920"/>
+          </a:xfrm>
+          <a:prstGeom prst="rect">
+            <a:avLst/>
+          </a:prstGeom>
+          <a:noFill/>
+          <a:ln/>
+        </p:spPr>
+        <p:txBody>
+          <a:bodyPr wrap="square" rtlCol="0" anchor="ctr"/>
+          <a:lstStyle/>
+          <a:p>
+            <a:pPr indent="0" marL="0">
+              <a:buNone/>
+            </a:pPr>
+            <a:r>
+              <a:rPr lang="en-US" sz="1200" dirty="0">
+                <a:solidFill>
+                  <a:srgbClr val="1A1A2E"/>
+                </a:solidFill>
+                <a:latin typeface="Calibri" pitchFamily="34" charset="0"/>
+                <a:ea typeface="Calibri" pitchFamily="34" charset="-122"/>
+                <a:cs typeface="Calibri" pitchFamily="34" charset="-120"/>
+              </a:rPr>
+              <a:t>Waiting Rooms</a:t>
+            </a:r>
+            <a:endParaRPr lang="en-US" sz="1200" dirty="0"/>
+          </a:p>
+        </p:txBody>
+      </p:sp>
+      <p:sp>
+        <p:nvSpPr>
+          <p:cNvPr id="15" name="Text 12"/>
+          <p:cNvSpPr/>
+          <p:nvPr/>
+        </p:nvSpPr>
+        <p:spPr>
+          <a:xfrm>
+            <a:off x="9509760" y="3977640"/>
+            <a:ext cx="2103120" cy="502920"/>
+          </a:xfrm>
+          <a:prstGeom prst="rect">
+            <a:avLst/>
+          </a:prstGeom>
+          <a:noFill/>
+          <a:ln/>
+        </p:spPr>
+        <p:txBody>
+          <a:bodyPr wrap="square" rtlCol="0" anchor="ctr"/>
+          <a:lstStyle/>
+          <a:p>
+            <a:pPr indent="0" marL="0">
+              <a:buNone/>
+            </a:pPr>
+            <a:r>
+              <a:rPr lang="en-US" sz="1800" b="1" dirty="0">
+                <a:solidFill>
+                  <a:srgbClr val="B8500A"/>
+                </a:solidFill>
+                <a:latin typeface="Calibri" pitchFamily="34" charset="0"/>
+                <a:ea typeface="Calibri" pitchFamily="34" charset="-122"/>
+                <a:cs typeface="Calibri" pitchFamily="34" charset="-120"/>
+              </a:rPr>
+              <a:t>+100%</a:t>
+            </a:r>
+            <a:endParaRPr lang="en-US" sz="1800" dirty="0"/>
+          </a:p>
+        </p:txBody>
+      </p:sp>
+      <p:sp>
+        <p:nvSpPr>
+          <p:cNvPr id="16" name="Text 13"/>
+          <p:cNvSpPr/>
+          <p:nvPr/>
+        </p:nvSpPr>
+        <p:spPr>
+          <a:xfrm>
+            <a:off x="7772400" y="4709160"/>
+            <a:ext cx="3840480" cy="1463040"/>
+          </a:xfrm>
+          <a:prstGeom prst="rect">
+            <a:avLst/>
+          </a:prstGeom>
+          <a:noFill/>
+          <a:ln/>
+        </p:spPr>
+        <p:txBody>
+          <a:bodyPr wrap="square" rtlCol="0" anchor="ctr"/>
+          <a:lstStyle/>
+          <a:p>
+            <a:pPr indent="0" marL="0">
+              <a:lnSpc>
+                <a:spcPts val="1500"/>
+              </a:lnSpc>
+              <a:buNone/>
+            </a:pPr>
+            <a:r>
+              <a:rPr lang="en-US" sz="1100" i="1" dirty="0">
+                <a:solidFill>
+                  <a:srgbClr val="5B6178"/>
+                </a:solidFill>
+                <a:latin typeface="Calibri" pitchFamily="34" charset="0"/>
+                <a:ea typeface="Calibri" pitchFamily="34" charset="-122"/>
+                <a:cs typeface="Calibri" pitchFamily="34" charset="-120"/>
+              </a:rPr>
+              <a:t>For 3 of 4 venue types, the naive observational fit understated the RCT-calibrated estimate by 100–165% — the kind of gap real MMM practice cites as its core identification problem, and exactly why the RCT anchor matters.</a:t>
             </a:r>
             <a:endParaRPr lang="en-US" sz="1100" dirty="0"/>
           </a:p>
@@ -4705,194 +5445,7 @@
       </p:sp>
       <p:sp>
         <p:nvSpPr>
-          <p:cNvPr id="9" name="Text 6"/>
-          <p:cNvSpPr/>
-          <p:nvPr/>
-        </p:nvSpPr>
-        <p:spPr>
-          <a:xfrm>
-            <a:off x="7955280" y="2057400"/>
-            <a:ext cx="3520440" cy="594360"/>
-          </a:xfrm>
-          <a:prstGeom prst="rect">
-            <a:avLst/>
-          </a:prstGeom>
-          <a:noFill/>
-          <a:ln/>
-        </p:spPr>
-        <p:txBody>
-          <a:bodyPr wrap="square" rtlCol="0" anchor="ctr"/>
-          <a:lstStyle/>
-          <a:p>
-            <a:pPr indent="0" marL="0">
-              <a:buNone/>
-            </a:pPr>
-            <a:r>
-              <a:rPr lang="en-US" sz="3200" b="1" dirty="0">
-                <a:solidFill>
-                  <a:srgbClr val="2C7A57"/>
-                </a:solidFill>
-                <a:latin typeface="Calibri" pitchFamily="34" charset="0"/>
-                <a:ea typeface="Calibri" pitchFamily="34" charset="-122"/>
-                <a:cs typeface="Calibri" pitchFamily="34" charset="-120"/>
-              </a:rPr>
-              <a:t>0.00</a:t>
-            </a:r>
-            <a:endParaRPr lang="en-US" sz="3200" dirty="0"/>
-          </a:p>
-        </p:txBody>
-      </p:sp>
-      <p:sp>
-        <p:nvSpPr>
-          <p:cNvPr id="10" name="Text 7"/>
-          <p:cNvSpPr/>
-          <p:nvPr/>
-        </p:nvSpPr>
-        <p:spPr>
-          <a:xfrm>
-            <a:off x="7955280" y="2633472"/>
-            <a:ext cx="3520440" cy="182880"/>
-          </a:xfrm>
-          <a:prstGeom prst="rect">
-            <a:avLst/>
-          </a:prstGeom>
-          <a:noFill/>
-          <a:ln/>
-        </p:spPr>
-        <p:txBody>
-          <a:bodyPr wrap="square" rtlCol="0" anchor="ctr"/>
-          <a:lstStyle/>
-          <a:p>
-            <a:pPr indent="0" marL="0">
-              <a:lnSpc>
-                <a:spcPts val="1000"/>
-              </a:lnSpc>
-              <a:buNone/>
-            </a:pPr>
-            <a:r>
-              <a:rPr lang="en-US" sz="870" i="1" dirty="0">
-                <a:solidFill>
-                  <a:srgbClr val="5B6178"/>
-                </a:solidFill>
-                <a:latin typeface="Calibri" pitchFamily="34" charset="0"/>
-                <a:ea typeface="Calibri" pitchFamily="34" charset="-122"/>
-                <a:cs typeface="Calibri" pitchFamily="34" charset="-120"/>
-              </a:rPr>
-              <a:t>every venue type — the shock hits both arms equally, so a randomized comparison is mechanically immune to it</a:t>
-            </a:r>
-            <a:endParaRPr lang="en-US" sz="870" dirty="0"/>
-          </a:p>
-        </p:txBody>
-      </p:sp>
-      <p:sp>
-        <p:nvSpPr>
-          <p:cNvPr id="11" name="Text 8"/>
-          <p:cNvSpPr/>
-          <p:nvPr/>
-        </p:nvSpPr>
-        <p:spPr>
-          <a:xfrm>
-            <a:off x="7772400" y="3063240"/>
-            <a:ext cx="3867912" cy="1417320"/>
-          </a:xfrm>
-          <a:prstGeom prst="rect">
-            <a:avLst/>
-          </a:prstGeom>
-          <a:noFill/>
-          <a:ln/>
-        </p:spPr>
-        <p:txBody>
-          <a:bodyPr wrap="square" rtlCol="0" anchor="ctr"/>
-          <a:lstStyle/>
-          <a:p>
-            <a:pPr indent="0" marL="0">
-              <a:lnSpc>
-                <a:spcPts val="1350"/>
-              </a:lnSpc>
-              <a:buNone/>
-            </a:pPr>
-            <a:r>
-              <a:rPr lang="en-US" sz="1000" dirty="0">
-                <a:solidFill>
-                  <a:srgbClr val="1A1A2E"/>
-                </a:solidFill>
-                <a:latin typeface="Calibri" pitchFamily="34" charset="0"/>
-                <a:ea typeface="Calibri" pitchFamily="34" charset="-122"/>
-                <a:cs typeface="Calibri" pitchFamily="34" charset="-120"/>
-              </a:rPr>
-              <a:t>Naive MMM, by contrast, swings from useful to actively misleading: for 3 of 4 venue types the confound-blind fit was off by 2–4× — even at a moderate 0.35 correlation between competing media and Atmosphere's own exposure ramp, nowhere near a worst case. Controlling for the confound (green) recovers this model's own baseline from the previous slide — the RCT-scale calibration from that same slide is what closes the rest of the gap.</a:t>
-            </a:r>
-            <a:endParaRPr lang="en-US" sz="1000" dirty="0"/>
-          </a:p>
-        </p:txBody>
-      </p:sp>
-      <p:sp>
-        <p:nvSpPr>
-          <p:cNvPr id="12" name="Shape 9"/>
-          <p:cNvSpPr/>
-          <p:nvPr/>
-        </p:nvSpPr>
-        <p:spPr>
-          <a:xfrm>
-            <a:off x="548640" y="5687568"/>
-            <a:ext cx="11091672" cy="713232"/>
-          </a:xfrm>
-          <a:prstGeom prst="roundRect">
-            <a:avLst>
-              <a:gd name="adj" fmla="val 7692"/>
-            </a:avLst>
-          </a:prstGeom>
-          <a:solidFill>
-            <a:srgbClr val="FDF1E3"/>
-          </a:solidFill>
-          <a:ln/>
-        </p:spPr>
-      </p:sp>
-      <p:sp>
-        <p:nvSpPr>
-          <p:cNvPr id="13" name="Text 10"/>
-          <p:cNvSpPr/>
-          <p:nvPr/>
-        </p:nvSpPr>
-        <p:spPr>
-          <a:xfrm>
-            <a:off x="731520" y="5779008"/>
-            <a:ext cx="10744200" cy="548640"/>
-          </a:xfrm>
-          <a:prstGeom prst="rect">
-            <a:avLst/>
-          </a:prstGeom>
-          <a:noFill/>
-          <a:ln/>
-        </p:spPr>
-        <p:txBody>
-          <a:bodyPr wrap="square" rtlCol="0" anchor="ctr"/>
-          <a:lstStyle/>
-          <a:p>
-            <a:pPr indent="0" marL="0">
-              <a:lnSpc>
-                <a:spcPts val="1200"/>
-              </a:lnSpc>
-              <a:buNone/>
-            </a:pPr>
-            <a:r>
-              <a:rPr lang="en-US" sz="950" i="1" dirty="0">
-                <a:solidFill>
-                  <a:srgbClr val="8A4B0A"/>
-                </a:solidFill>
-                <a:latin typeface="Calibri" pitchFamily="34" charset="0"/>
-                <a:ea typeface="Calibri" pitchFamily="34" charset="-122"/>
-                <a:cs typeface="Calibri" pitchFamily="34" charset="-120"/>
-              </a:rPr>
-              <a:t>Why this is scoped this way: deciding how an advertiser splits budget across Atmosphere + TV + social is the advertiser's/agency's call — Atmosphere has no visibility into competitors' channel data anyway. What Atmosphere's DS role should own is netting competing media OUT of its own causal read (the JD's own phrasing), which the RCT does by design and a single-channel MMM only does with an explicit control.</a:t>
-            </a:r>
-            <a:endParaRPr lang="en-US" sz="950" dirty="0"/>
-          </a:p>
-        </p:txBody>
-      </p:sp>
-      <p:sp>
-        <p:nvSpPr>
-          <p:cNvPr id="14" name="Text 11"/>
+          <p:cNvPr id="17" name="Text 14"/>
           <p:cNvSpPr/>
           <p:nvPr/>
         </p:nvSpPr>
@@ -4923,7 +5476,7 @@
                 <a:ea typeface="Calibri" pitchFamily="34" charset="-122"/>
                 <a:cs typeface="Calibri" pitchFamily="34" charset="-120"/>
               </a:rPr>
-              <a:t>Media-mix model — robustness</a:t>
+              <a:t>Media-mix model</a:t>
             </a:r>
             <a:endParaRPr lang="en-US" sz="900" dirty="0"/>
           </a:p>
@@ -4970,6 +5523,485 @@
         <p:spPr>
           <a:xfrm>
             <a:off x="548640" y="411480"/>
+            <a:ext cx="11247120" cy="594360"/>
+          </a:xfrm>
+          <a:prstGeom prst="rect">
+            <a:avLst/>
+          </a:prstGeom>
+          <a:noFill/>
+          <a:ln/>
+        </p:spPr>
+        <p:txBody>
+          <a:bodyPr wrap="square" rtlCol="0" anchor="ctr"/>
+          <a:lstStyle/>
+          <a:p>
+            <a:pPr indent="0" marL="0">
+              <a:buNone/>
+            </a:pPr>
+            <a:r>
+              <a:rPr lang="en-US" sz="2400" b="1" dirty="0">
+                <a:solidFill>
+                  <a:srgbClr val="1E2761"/>
+                </a:solidFill>
+                <a:latin typeface="Cambria" pitchFamily="34" charset="0"/>
+                <a:ea typeface="Cambria" pitchFamily="34" charset="-122"/>
+                <a:cs typeface="Cambria" pitchFamily="34" charset="-120"/>
+              </a:rPr>
+              <a:t>Robustness check: does competing media break this MMM?</a:t>
+            </a:r>
+            <a:endParaRPr lang="en-US" sz="2400" dirty="0"/>
+          </a:p>
+        </p:txBody>
+      </p:sp>
+      <p:sp>
+        <p:nvSpPr>
+          <p:cNvPr id="3" name="Shape 1"/>
+          <p:cNvSpPr/>
+          <p:nvPr/>
+        </p:nvSpPr>
+        <p:spPr>
+          <a:xfrm>
+            <a:off x="8229600" y="146304"/>
+            <a:ext cx="3410712" cy="246888"/>
+          </a:xfrm>
+          <a:prstGeom prst="roundRect">
+            <a:avLst>
+              <a:gd name="adj" fmla="val 22222"/>
+            </a:avLst>
+          </a:prstGeom>
+          <a:solidFill>
+            <a:srgbClr val="FFFFFF"/>
+          </a:solidFill>
+          <a:ln w="15875">
+            <a:solidFill>
+              <a:srgbClr val="B8500A"/>
+            </a:solidFill>
+            <a:prstDash val="solid"/>
+          </a:ln>
+        </p:spPr>
+      </p:sp>
+      <p:sp>
+        <p:nvSpPr>
+          <p:cNvPr id="4" name="Text 2"/>
+          <p:cNvSpPr/>
+          <p:nvPr/>
+        </p:nvSpPr>
+        <p:spPr>
+          <a:xfrm>
+            <a:off x="8229600" y="146304"/>
+            <a:ext cx="3410712" cy="246888"/>
+          </a:xfrm>
+          <a:prstGeom prst="rect">
+            <a:avLst/>
+          </a:prstGeom>
+          <a:noFill/>
+          <a:ln/>
+        </p:spPr>
+        <p:txBody>
+          <a:bodyPr wrap="square" rtlCol="0" anchor="ctr"/>
+          <a:lstStyle/>
+          <a:p>
+            <a:pPr algn="ctr" indent="0" marL="0">
+              <a:buNone/>
+            </a:pPr>
+            <a:r>
+              <a:rPr lang="en-US" sz="950" b="1" dirty="0">
+                <a:solidFill>
+                  <a:srgbClr val="B8500A"/>
+                </a:solidFill>
+                <a:latin typeface="Calibri" pitchFamily="34" charset="0"/>
+                <a:ea typeface="Calibri" pitchFamily="34" charset="-122"/>
+                <a:cs typeface="Calibri" pitchFamily="34" charset="-120"/>
+              </a:rPr>
+              <a:t>Step 3 robustness check · Q2</a:t>
+            </a:r>
+            <a:endParaRPr lang="en-US" sz="950" dirty="0"/>
+          </a:p>
+        </p:txBody>
+      </p:sp>
+      <p:sp>
+        <p:nvSpPr>
+          <p:cNvPr id="5" name="Text 3"/>
+          <p:cNvSpPr/>
+          <p:nvPr/>
+        </p:nvSpPr>
+        <p:spPr>
+          <a:xfrm>
+            <a:off x="548640" y="1005840"/>
+            <a:ext cx="10972800" cy="365760"/>
+          </a:xfrm>
+          <a:prstGeom prst="rect">
+            <a:avLst/>
+          </a:prstGeom>
+          <a:noFill/>
+          <a:ln/>
+        </p:spPr>
+        <p:txBody>
+          <a:bodyPr wrap="square" rtlCol="0" anchor="ctr"/>
+          <a:lstStyle/>
+          <a:p>
+            <a:pPr indent="0" marL="0">
+              <a:buNone/>
+            </a:pPr>
+            <a:r>
+              <a:rPr lang="en-US" sz="1200" i="1" dirty="0">
+                <a:solidFill>
+                  <a:srgbClr val="5B6178"/>
+                </a:solidFill>
+                <a:latin typeface="Calibri" pitchFamily="34" charset="0"/>
+                <a:ea typeface="Calibri" pitchFamily="34" charset="-122"/>
+                <a:cs typeface="Calibri" pitchFamily="34" charset="-120"/>
+              </a:rPr>
+              <a:t>A stress-test scenario: a competing advertiser ramps up on the same venues at the same time, correlated with Atmosphere's own exposure — the kind of overlap a real MMM has to prove it's robust to.</a:t>
+            </a:r>
+            <a:endParaRPr lang="en-US" sz="1200" dirty="0"/>
+          </a:p>
+        </p:txBody>
+      </p:sp>
+      <p:graphicFrame>
+        <p:nvGraphicFramePr>
+          <p:cNvPr id="6" name="Chart 0" descr=""/>
+          <p:cNvGraphicFramePr/>
+          <p:nvPr/>
+        </p:nvGraphicFramePr>
+        <p:xfrm>
+          <a:off x="548640" y="1600200"/>
+          <a:ext cx="6949440" cy="3931920"/>
+        </p:xfrm>
+        <a:graphic xmlns:a="http://schemas.openxmlformats.org/drawingml/2006/main">
+          <a:graphicData uri="http://schemas.openxmlformats.org/drawingml/2006/chart">
+            <c:chart xmlns:c="http://schemas.openxmlformats.org/drawingml/2006/chart" r:id="rId1"/>
+          </a:graphicData>
+        </a:graphic>
+      </p:graphicFrame>
+      <p:sp>
+        <p:nvSpPr>
+          <p:cNvPr id="7" name="Shape 4"/>
+          <p:cNvSpPr/>
+          <p:nvPr/>
+        </p:nvSpPr>
+        <p:spPr>
+          <a:xfrm>
+            <a:off x="7772400" y="1600200"/>
+            <a:ext cx="3867912" cy="1234440"/>
+          </a:xfrm>
+          <a:prstGeom prst="roundRect">
+            <a:avLst>
+              <a:gd name="adj" fmla="val 5926"/>
+            </a:avLst>
+          </a:prstGeom>
+          <a:solidFill>
+            <a:srgbClr val="F5F7FC"/>
+          </a:solidFill>
+          <a:ln/>
+        </p:spPr>
+      </p:sp>
+      <p:sp>
+        <p:nvSpPr>
+          <p:cNvPr id="8" name="Text 5"/>
+          <p:cNvSpPr/>
+          <p:nvPr/>
+        </p:nvSpPr>
+        <p:spPr>
+          <a:xfrm>
+            <a:off x="7955280" y="1719072"/>
+            <a:ext cx="3520440" cy="365760"/>
+          </a:xfrm>
+          <a:prstGeom prst="rect">
+            <a:avLst/>
+          </a:prstGeom>
+          <a:noFill/>
+          <a:ln/>
+        </p:spPr>
+        <p:txBody>
+          <a:bodyPr wrap="square" rtlCol="0" anchor="ctr"/>
+          <a:lstStyle/>
+          <a:p>
+            <a:pPr indent="0" marL="0">
+              <a:buNone/>
+            </a:pPr>
+            <a:r>
+              <a:rPr lang="en-US" sz="1100" b="1" dirty="0">
+                <a:solidFill>
+                  <a:srgbClr val="1E2761"/>
+                </a:solidFill>
+                <a:latin typeface="Cambria" pitchFamily="34" charset="0"/>
+                <a:ea typeface="Cambria" pitchFamily="34" charset="-122"/>
+                <a:cs typeface="Cambria" pitchFamily="34" charset="-120"/>
+              </a:rPr>
+              <a:t>RCT estimate shift under the identical shock</a:t>
+            </a:r>
+            <a:endParaRPr lang="en-US" sz="1100" dirty="0"/>
+          </a:p>
+        </p:txBody>
+      </p:sp>
+      <p:sp>
+        <p:nvSpPr>
+          <p:cNvPr id="9" name="Text 6"/>
+          <p:cNvSpPr/>
+          <p:nvPr/>
+        </p:nvSpPr>
+        <p:spPr>
+          <a:xfrm>
+            <a:off x="7955280" y="2057400"/>
+            <a:ext cx="3520440" cy="594360"/>
+          </a:xfrm>
+          <a:prstGeom prst="rect">
+            <a:avLst/>
+          </a:prstGeom>
+          <a:noFill/>
+          <a:ln/>
+        </p:spPr>
+        <p:txBody>
+          <a:bodyPr wrap="square" rtlCol="0" anchor="ctr"/>
+          <a:lstStyle/>
+          <a:p>
+            <a:pPr indent="0" marL="0">
+              <a:buNone/>
+            </a:pPr>
+            <a:r>
+              <a:rPr lang="en-US" sz="3200" b="1" dirty="0">
+                <a:solidFill>
+                  <a:srgbClr val="2C7A57"/>
+                </a:solidFill>
+                <a:latin typeface="Calibri" pitchFamily="34" charset="0"/>
+                <a:ea typeface="Calibri" pitchFamily="34" charset="-122"/>
+                <a:cs typeface="Calibri" pitchFamily="34" charset="-120"/>
+              </a:rPr>
+              <a:t>0.00</a:t>
+            </a:r>
+            <a:endParaRPr lang="en-US" sz="3200" dirty="0"/>
+          </a:p>
+        </p:txBody>
+      </p:sp>
+      <p:sp>
+        <p:nvSpPr>
+          <p:cNvPr id="10" name="Text 7"/>
+          <p:cNvSpPr/>
+          <p:nvPr/>
+        </p:nvSpPr>
+        <p:spPr>
+          <a:xfrm>
+            <a:off x="7955280" y="2633472"/>
+            <a:ext cx="3520440" cy="182880"/>
+          </a:xfrm>
+          <a:prstGeom prst="rect">
+            <a:avLst/>
+          </a:prstGeom>
+          <a:noFill/>
+          <a:ln/>
+        </p:spPr>
+        <p:txBody>
+          <a:bodyPr wrap="square" rtlCol="0" anchor="ctr"/>
+          <a:lstStyle/>
+          <a:p>
+            <a:pPr indent="0" marL="0">
+              <a:lnSpc>
+                <a:spcPts val="1000"/>
+              </a:lnSpc>
+              <a:buNone/>
+            </a:pPr>
+            <a:r>
+              <a:rPr lang="en-US" sz="870" i="1" dirty="0">
+                <a:solidFill>
+                  <a:srgbClr val="5B6178"/>
+                </a:solidFill>
+                <a:latin typeface="Calibri" pitchFamily="34" charset="0"/>
+                <a:ea typeface="Calibri" pitchFamily="34" charset="-122"/>
+                <a:cs typeface="Calibri" pitchFamily="34" charset="-120"/>
+              </a:rPr>
+              <a:t>every venue type — the shock hits both arms equally, so a randomized comparison is mechanically immune to it</a:t>
+            </a:r>
+            <a:endParaRPr lang="en-US" sz="870" dirty="0"/>
+          </a:p>
+        </p:txBody>
+      </p:sp>
+      <p:sp>
+        <p:nvSpPr>
+          <p:cNvPr id="11" name="Text 8"/>
+          <p:cNvSpPr/>
+          <p:nvPr/>
+        </p:nvSpPr>
+        <p:spPr>
+          <a:xfrm>
+            <a:off x="7772400" y="3063240"/>
+            <a:ext cx="3867912" cy="1417320"/>
+          </a:xfrm>
+          <a:prstGeom prst="rect">
+            <a:avLst/>
+          </a:prstGeom>
+          <a:noFill/>
+          <a:ln/>
+        </p:spPr>
+        <p:txBody>
+          <a:bodyPr wrap="square" rtlCol="0" anchor="ctr"/>
+          <a:lstStyle/>
+          <a:p>
+            <a:pPr indent="0" marL="0">
+              <a:lnSpc>
+                <a:spcPts val="1350"/>
+              </a:lnSpc>
+              <a:buNone/>
+            </a:pPr>
+            <a:r>
+              <a:rPr lang="en-US" sz="1000" dirty="0">
+                <a:solidFill>
+                  <a:srgbClr val="1A1A2E"/>
+                </a:solidFill>
+                <a:latin typeface="Calibri" pitchFamily="34" charset="0"/>
+                <a:ea typeface="Calibri" pitchFamily="34" charset="-122"/>
+                <a:cs typeface="Calibri" pitchFamily="34" charset="-120"/>
+              </a:rPr>
+              <a:t>Naive MMM, by contrast, swings from useful to actively misleading: for 3 of 4 venue types the confound-blind fit was off by 2–4× — even at a moderate 0.35 correlation between competing media and Atmosphere's own exposure ramp, nowhere near a worst case. Controlling for the confound (green) recovers this model's own baseline from the previous slide — the RCT-scale calibration from that same slide is what closes the rest of the gap.</a:t>
+            </a:r>
+            <a:endParaRPr lang="en-US" sz="1000" dirty="0"/>
+          </a:p>
+        </p:txBody>
+      </p:sp>
+      <p:sp>
+        <p:nvSpPr>
+          <p:cNvPr id="12" name="Shape 9"/>
+          <p:cNvSpPr/>
+          <p:nvPr/>
+        </p:nvSpPr>
+        <p:spPr>
+          <a:xfrm>
+            <a:off x="548640" y="5687568"/>
+            <a:ext cx="11091672" cy="713232"/>
+          </a:xfrm>
+          <a:prstGeom prst="roundRect">
+            <a:avLst>
+              <a:gd name="adj" fmla="val 7692"/>
+            </a:avLst>
+          </a:prstGeom>
+          <a:solidFill>
+            <a:srgbClr val="FDF1E3"/>
+          </a:solidFill>
+          <a:ln/>
+        </p:spPr>
+      </p:sp>
+      <p:sp>
+        <p:nvSpPr>
+          <p:cNvPr id="13" name="Text 10"/>
+          <p:cNvSpPr/>
+          <p:nvPr/>
+        </p:nvSpPr>
+        <p:spPr>
+          <a:xfrm>
+            <a:off x="731520" y="5779008"/>
+            <a:ext cx="10744200" cy="548640"/>
+          </a:xfrm>
+          <a:prstGeom prst="rect">
+            <a:avLst/>
+          </a:prstGeom>
+          <a:noFill/>
+          <a:ln/>
+        </p:spPr>
+        <p:txBody>
+          <a:bodyPr wrap="square" rtlCol="0" anchor="ctr"/>
+          <a:lstStyle/>
+          <a:p>
+            <a:pPr indent="0" marL="0">
+              <a:lnSpc>
+                <a:spcPts val="1200"/>
+              </a:lnSpc>
+              <a:buNone/>
+            </a:pPr>
+            <a:r>
+              <a:rPr lang="en-US" sz="950" i="1" dirty="0">
+                <a:solidFill>
+                  <a:srgbClr val="8A4B0A"/>
+                </a:solidFill>
+                <a:latin typeface="Calibri" pitchFamily="34" charset="0"/>
+                <a:ea typeface="Calibri" pitchFamily="34" charset="-122"/>
+                <a:cs typeface="Calibri" pitchFamily="34" charset="-120"/>
+              </a:rPr>
+              <a:t>Why this is scoped this way: deciding how an advertiser splits budget across Atmosphere + TV + social is the advertiser's/agency's call — Atmosphere has no visibility into competitors' channel data anyway. What Atmosphere's DS role should own is netting competing media OUT of its own causal read (the JD's own phrasing), which the RCT does by design and a single-channel MMM only does with an explicit control.</a:t>
+            </a:r>
+            <a:endParaRPr lang="en-US" sz="950" dirty="0"/>
+          </a:p>
+        </p:txBody>
+      </p:sp>
+      <p:sp>
+        <p:nvSpPr>
+          <p:cNvPr id="14" name="Text 11"/>
+          <p:cNvSpPr/>
+          <p:nvPr/>
+        </p:nvSpPr>
+        <p:spPr>
+          <a:xfrm>
+            <a:off x="457200" y="6537960"/>
+            <a:ext cx="7315200" cy="274320"/>
+          </a:xfrm>
+          <a:prstGeom prst="rect">
+            <a:avLst/>
+          </a:prstGeom>
+          <a:noFill/>
+          <a:ln/>
+        </p:spPr>
+        <p:txBody>
+          <a:bodyPr wrap="square" rtlCol="0" anchor="ctr"/>
+          <a:lstStyle/>
+          <a:p>
+            <a:pPr indent="0" marL="0">
+              <a:buNone/>
+            </a:pPr>
+            <a:r>
+              <a:rPr lang="en-US" sz="900" dirty="0">
+                <a:solidFill>
+                  <a:srgbClr val="5B6178"/>
+                </a:solidFill>
+                <a:latin typeface="Calibri" pitchFamily="34" charset="0"/>
+                <a:ea typeface="Calibri" pitchFamily="34" charset="-122"/>
+                <a:cs typeface="Calibri" pitchFamily="34" charset="-120"/>
+              </a:rPr>
+              <a:t>Media-mix model — robustness</a:t>
+            </a:r>
+            <a:endParaRPr lang="en-US" sz="900" dirty="0"/>
+          </a:p>
+        </p:txBody>
+      </p:sp>
+    </p:spTree>
+  </p:cSld>
+  <p:clrMapOvr>
+    <a:masterClrMapping/>
+  </p:clrMapOvr>
+</p:sld>
+</file>
+
+<file path=ppt/slides/slide12.xml><?xml version="1.0" encoding="utf-8"?>
+<p:sld xmlns:a="http://schemas.openxmlformats.org/drawingml/2006/main" xmlns:r="http://schemas.openxmlformats.org/officeDocument/2006/relationships" xmlns:p="http://schemas.openxmlformats.org/presentationml/2006/main">
+  <p:cSld name="Slide 12">
+    <p:bg>
+      <p:bgPr>
+        <a:solidFill>
+          <a:srgbClr val="FFFFFF"/>
+        </a:solidFill>
+      </p:bgPr>
+    </p:bg>
+    <p:spTree>
+      <p:nvGrpSpPr>
+        <p:cNvPr id="1" name=""/>
+        <p:cNvGrpSpPr/>
+        <p:nvPr/>
+      </p:nvGrpSpPr>
+      <p:grpSpPr>
+        <a:xfrm>
+          <a:off x="0" y="0"/>
+          <a:ext cx="0" cy="0"/>
+          <a:chOff x="0" y="0"/>
+          <a:chExt cx="0" cy="0"/>
+        </a:xfrm>
+      </p:grpSpPr>
+      <p:sp>
+        <p:nvSpPr>
+          <p:cNvPr id="2" name="Text 0"/>
+          <p:cNvSpPr/>
+          <p:nvPr/>
+        </p:nvSpPr>
+        <p:spPr>
+          <a:xfrm>
+            <a:off x="548640" y="411480"/>
             <a:ext cx="10972800" cy="594360"/>
           </a:xfrm>
           <a:prstGeom prst="rect">
@@ -5625,9 +6657,9 @@
 </p:sld>
 </file>
 
-<file path=ppt/slides/slide12.xml><?xml version="1.0" encoding="utf-8"?>
+<file path=ppt/slides/slide13.xml><?xml version="1.0" encoding="utf-8"?>
 <p:sld xmlns:a="http://schemas.openxmlformats.org/drawingml/2006/main" xmlns:r="http://schemas.openxmlformats.org/officeDocument/2006/relationships" xmlns:p="http://schemas.openxmlformats.org/presentationml/2006/main">
-  <p:cSld name="Slide 12">
+  <p:cSld name="Slide 13">
     <p:bg>
       <p:bgPr>
         <a:solidFill>
@@ -6329,1381 +7361,6 @@
               <a:t>“Smarter on both sides of the business” — the venue-side model shares its data foundation and causal-value input with the advertising side, rather than being a disconnected second project. Results on the next slide.</a:t>
             </a:r>
             <a:endParaRPr lang="en-US" sz="1150" dirty="0"/>
-          </a:p>
-        </p:txBody>
-      </p:sp>
-    </p:spTree>
-  </p:cSld>
-  <p:clrMapOvr>
-    <a:masterClrMapping/>
-  </p:clrMapOvr>
-</p:sld>
-</file>
-
-<file path=ppt/slides/slide13.xml><?xml version="1.0" encoding="utf-8"?>
-<p:sld xmlns:a="http://schemas.openxmlformats.org/drawingml/2006/main" xmlns:r="http://schemas.openxmlformats.org/officeDocument/2006/relationships" xmlns:p="http://schemas.openxmlformats.org/presentationml/2006/main">
-  <p:cSld name="Slide 13">
-    <p:bg>
-      <p:bgPr>
-        <a:solidFill>
-          <a:srgbClr val="FFFFFF"/>
-        </a:solidFill>
-      </p:bgPr>
-    </p:bg>
-    <p:spTree>
-      <p:nvGrpSpPr>
-        <p:cNvPr id="1" name=""/>
-        <p:cNvGrpSpPr/>
-        <p:nvPr/>
-      </p:nvGrpSpPr>
-      <p:grpSpPr>
-        <a:xfrm>
-          <a:off x="0" y="0"/>
-          <a:ext cx="0" cy="0"/>
-          <a:chOff x="0" y="0"/>
-          <a:chExt cx="0" cy="0"/>
-        </a:xfrm>
-      </p:grpSpPr>
-      <p:sp>
-        <p:nvSpPr>
-          <p:cNvPr id="2" name="Text 0"/>
-          <p:cNvSpPr/>
-          <p:nvPr/>
-        </p:nvSpPr>
-        <p:spPr>
-          <a:xfrm>
-            <a:off x="548640" y="411480"/>
-            <a:ext cx="11155680" cy="594360"/>
-          </a:xfrm>
-          <a:prstGeom prst="rect">
-            <a:avLst/>
-          </a:prstGeom>
-          <a:noFill/>
-          <a:ln/>
-        </p:spPr>
-        <p:txBody>
-          <a:bodyPr wrap="square" rtlCol="0" anchor="ctr"/>
-          <a:lstStyle/>
-          <a:p>
-            <a:pPr indent="0" marL="0">
-              <a:buNone/>
-            </a:pPr>
-            <a:r>
-              <a:rPr lang="en-US" sz="2500" b="1" dirty="0">
-                <a:solidFill>
-                  <a:srgbClr val="1E2761"/>
-                </a:solidFill>
-                <a:latin typeface="Cambria" pitchFamily="34" charset="0"/>
-                <a:ea typeface="Cambria" pitchFamily="34" charset="-122"/>
-                <a:cs typeface="Cambria" pitchFamily="34" charset="-120"/>
-              </a:rPr>
-              <a:t>Predicting venue ad-revenue, honestly</a:t>
-            </a:r>
-            <a:endParaRPr lang="en-US" sz="2500" dirty="0"/>
-          </a:p>
-        </p:txBody>
-      </p:sp>
-      <p:sp>
-        <p:nvSpPr>
-          <p:cNvPr id="3" name="Shape 1"/>
-          <p:cNvSpPr/>
-          <p:nvPr/>
-        </p:nvSpPr>
-        <p:spPr>
-          <a:xfrm>
-            <a:off x="8229600" y="146304"/>
-            <a:ext cx="3410712" cy="246888"/>
-          </a:xfrm>
-          <a:prstGeom prst="roundRect">
-            <a:avLst>
-              <a:gd name="adj" fmla="val 22222"/>
-            </a:avLst>
-          </a:prstGeom>
-          <a:solidFill>
-            <a:srgbClr val="FFFFFF"/>
-          </a:solidFill>
-          <a:ln w="15875">
-            <a:solidFill>
-              <a:srgbClr val="2C7A57"/>
-            </a:solidFill>
-            <a:prstDash val="solid"/>
-          </a:ln>
-        </p:spPr>
-      </p:sp>
-      <p:sp>
-        <p:nvSpPr>
-          <p:cNvPr id="4" name="Text 2"/>
-          <p:cNvSpPr/>
-          <p:nvPr/>
-        </p:nvSpPr>
-        <p:spPr>
-          <a:xfrm>
-            <a:off x="8229600" y="146304"/>
-            <a:ext cx="3410712" cy="246888"/>
-          </a:xfrm>
-          <a:prstGeom prst="rect">
-            <a:avLst/>
-          </a:prstGeom>
-          <a:noFill/>
-          <a:ln/>
-        </p:spPr>
-        <p:txBody>
-          <a:bodyPr wrap="square" rtlCol="0" anchor="ctr"/>
-          <a:lstStyle/>
-          <a:p>
-            <a:pPr algn="ctr" indent="0" marL="0">
-              <a:buNone/>
-            </a:pPr>
-            <a:r>
-              <a:rPr lang="en-US" sz="950" b="1" dirty="0">
-                <a:solidFill>
-                  <a:srgbClr val="2C7A57"/>
-                </a:solidFill>
-                <a:latin typeface="Calibri" pitchFamily="34" charset="0"/>
-                <a:ea typeface="Calibri" pitchFamily="34" charset="-122"/>
-                <a:cs typeface="Calibri" pitchFamily="34" charset="-120"/>
-              </a:rPr>
-              <a:t>Step 5 of 6 · Answers Q3</a:t>
-            </a:r>
-            <a:endParaRPr lang="en-US" sz="950" dirty="0"/>
-          </a:p>
-        </p:txBody>
-      </p:sp>
-      <p:sp>
-        <p:nvSpPr>
-          <p:cNvPr id="5" name="Text 3"/>
-          <p:cNvSpPr/>
-          <p:nvPr/>
-        </p:nvSpPr>
-        <p:spPr>
-          <a:xfrm>
-            <a:off x="548640" y="1005840"/>
-            <a:ext cx="10972800" cy="365760"/>
-          </a:xfrm>
-          <a:prstGeom prst="rect">
-            <a:avLst/>
-          </a:prstGeom>
-          <a:noFill/>
-          <a:ln/>
-        </p:spPr>
-        <p:txBody>
-          <a:bodyPr wrap="square" rtlCol="0" anchor="ctr"/>
-          <a:lstStyle/>
-          <a:p>
-            <a:pPr indent="0" marL="0">
-              <a:buNone/>
-            </a:pPr>
-            <a:r>
-              <a:rPr lang="en-US" sz="1250" i="1" dirty="0">
-                <a:solidFill>
-                  <a:srgbClr val="5B6178"/>
-                </a:solidFill>
-                <a:latin typeface="Calibri" pitchFamily="34" charset="0"/>
-                <a:ea typeface="Calibri" pitchFamily="34" charset="-122"/>
-                <a:cs typeface="Calibri" pitchFamily="34" charset="-120"/>
-              </a:rPr>
-              <a:t>Gradient-boosted trees on observable venue characteristics + the calibrated per-exposure lift as a feature.</a:t>
-            </a:r>
-            <a:endParaRPr lang="en-US" sz="1250" dirty="0"/>
-          </a:p>
-        </p:txBody>
-      </p:sp>
-      <p:sp>
-        <p:nvSpPr>
-          <p:cNvPr id="6" name="Shape 4"/>
-          <p:cNvSpPr/>
-          <p:nvPr/>
-        </p:nvSpPr>
-        <p:spPr>
-          <a:xfrm>
-            <a:off x="548640" y="1508760"/>
-            <a:ext cx="2651760" cy="1051560"/>
-          </a:xfrm>
-          <a:prstGeom prst="roundRect">
-            <a:avLst>
-              <a:gd name="adj" fmla="val 6957"/>
-            </a:avLst>
-          </a:prstGeom>
-          <a:solidFill>
-            <a:srgbClr val="F5F7FC"/>
-          </a:solidFill>
-          <a:ln/>
-        </p:spPr>
-      </p:sp>
-      <p:sp>
-        <p:nvSpPr>
-          <p:cNvPr id="7" name="Text 5"/>
-          <p:cNvSpPr/>
-          <p:nvPr/>
-        </p:nvSpPr>
-        <p:spPr>
-          <a:xfrm>
-            <a:off x="685800" y="1618488"/>
-            <a:ext cx="2377440" cy="502920"/>
-          </a:xfrm>
-          <a:prstGeom prst="rect">
-            <a:avLst/>
-          </a:prstGeom>
-          <a:noFill/>
-          <a:ln/>
-        </p:spPr>
-        <p:txBody>
-          <a:bodyPr wrap="square" rtlCol="0" anchor="ctr"/>
-          <a:lstStyle/>
-          <a:p>
-            <a:pPr indent="0" marL="0">
-              <a:buNone/>
-            </a:pPr>
-            <a:r>
-              <a:rPr lang="en-US" sz="2200" b="1" dirty="0">
-                <a:solidFill>
-                  <a:srgbClr val="1E2761"/>
-                </a:solidFill>
-                <a:latin typeface="Calibri" pitchFamily="34" charset="0"/>
-                <a:ea typeface="Calibri" pitchFamily="34" charset="-122"/>
-                <a:cs typeface="Calibri" pitchFamily="34" charset="-120"/>
-              </a:rPr>
-              <a:t>0.84</a:t>
-            </a:r>
-            <a:endParaRPr lang="en-US" sz="2200" dirty="0"/>
-          </a:p>
-        </p:txBody>
-      </p:sp>
-      <p:sp>
-        <p:nvSpPr>
-          <p:cNvPr id="8" name="Text 6"/>
-          <p:cNvSpPr/>
-          <p:nvPr/>
-        </p:nvSpPr>
-        <p:spPr>
-          <a:xfrm>
-            <a:off x="685800" y="2130552"/>
-            <a:ext cx="2377440" cy="365760"/>
-          </a:xfrm>
-          <a:prstGeom prst="rect">
-            <a:avLst/>
-          </a:prstGeom>
-          <a:noFill/>
-          <a:ln/>
-        </p:spPr>
-        <p:txBody>
-          <a:bodyPr wrap="square" rtlCol="0" anchor="ctr"/>
-          <a:lstStyle/>
-          <a:p>
-            <a:pPr indent="0" marL="0">
-              <a:buNone/>
-            </a:pPr>
-            <a:r>
-              <a:rPr lang="en-US" sz="950" dirty="0">
-                <a:solidFill>
-                  <a:srgbClr val="5B6178"/>
-                </a:solidFill>
-                <a:latin typeface="Calibri" pitchFamily="34" charset="0"/>
-                <a:ea typeface="Calibri" pitchFamily="34" charset="-122"/>
-                <a:cs typeface="Calibri" pitchFamily="34" charset="-120"/>
-              </a:rPr>
-              <a:t>Held-out R²</a:t>
-            </a:r>
-            <a:endParaRPr lang="en-US" sz="950" dirty="0"/>
-          </a:p>
-        </p:txBody>
-      </p:sp>
-      <p:sp>
-        <p:nvSpPr>
-          <p:cNvPr id="9" name="Shape 7"/>
-          <p:cNvSpPr/>
-          <p:nvPr/>
-        </p:nvSpPr>
-        <p:spPr>
-          <a:xfrm>
-            <a:off x="3337560" y="1508760"/>
-            <a:ext cx="2651760" cy="1051560"/>
-          </a:xfrm>
-          <a:prstGeom prst="roundRect">
-            <a:avLst>
-              <a:gd name="adj" fmla="val 6957"/>
-            </a:avLst>
-          </a:prstGeom>
-          <a:solidFill>
-            <a:srgbClr val="F5F7FC"/>
-          </a:solidFill>
-          <a:ln/>
-        </p:spPr>
-      </p:sp>
-      <p:sp>
-        <p:nvSpPr>
-          <p:cNvPr id="10" name="Text 8"/>
-          <p:cNvSpPr/>
-          <p:nvPr/>
-        </p:nvSpPr>
-        <p:spPr>
-          <a:xfrm>
-            <a:off x="3474720" y="1618488"/>
-            <a:ext cx="2377440" cy="502920"/>
-          </a:xfrm>
-          <a:prstGeom prst="rect">
-            <a:avLst/>
-          </a:prstGeom>
-          <a:noFill/>
-          <a:ln/>
-        </p:spPr>
-        <p:txBody>
-          <a:bodyPr wrap="square" rtlCol="0" anchor="ctr"/>
-          <a:lstStyle/>
-          <a:p>
-            <a:pPr indent="0" marL="0">
-              <a:buNone/>
-            </a:pPr>
-            <a:r>
-              <a:rPr lang="en-US" sz="2200" b="1" dirty="0">
-                <a:solidFill>
-                  <a:srgbClr val="1E2761"/>
-                </a:solidFill>
-                <a:latin typeface="Calibri" pitchFamily="34" charset="0"/>
-                <a:ea typeface="Calibri" pitchFamily="34" charset="-122"/>
-                <a:cs typeface="Calibri" pitchFamily="34" charset="-120"/>
-              </a:rPr>
-              <a:t>22.1%</a:t>
-            </a:r>
-            <a:endParaRPr lang="en-US" sz="2200" dirty="0"/>
-          </a:p>
-        </p:txBody>
-      </p:sp>
-      <p:sp>
-        <p:nvSpPr>
-          <p:cNvPr id="11" name="Text 9"/>
-          <p:cNvSpPr/>
-          <p:nvPr/>
-        </p:nvSpPr>
-        <p:spPr>
-          <a:xfrm>
-            <a:off x="3474720" y="2130552"/>
-            <a:ext cx="2377440" cy="365760"/>
-          </a:xfrm>
-          <a:prstGeom prst="rect">
-            <a:avLst/>
-          </a:prstGeom>
-          <a:noFill/>
-          <a:ln/>
-        </p:spPr>
-        <p:txBody>
-          <a:bodyPr wrap="square" rtlCol="0" anchor="ctr"/>
-          <a:lstStyle/>
-          <a:p>
-            <a:pPr indent="0" marL="0">
-              <a:buNone/>
-            </a:pPr>
-            <a:r>
-              <a:rPr lang="en-US" sz="950" dirty="0">
-                <a:solidFill>
-                  <a:srgbClr val="5B6178"/>
-                </a:solidFill>
-                <a:latin typeface="Calibri" pitchFamily="34" charset="0"/>
-                <a:ea typeface="Calibri" pitchFamily="34" charset="-122"/>
-                <a:cs typeface="Calibri" pitchFamily="34" charset="-120"/>
-              </a:rPr>
-              <a:t>Held-out MAPE</a:t>
-            </a:r>
-            <a:endParaRPr lang="en-US" sz="950" dirty="0"/>
-          </a:p>
-        </p:txBody>
-      </p:sp>
-      <p:sp>
-        <p:nvSpPr>
-          <p:cNvPr id="12" name="Shape 10"/>
-          <p:cNvSpPr/>
-          <p:nvPr/>
-        </p:nvSpPr>
-        <p:spPr>
-          <a:xfrm>
-            <a:off x="6126480" y="1508760"/>
-            <a:ext cx="2651760" cy="1051560"/>
-          </a:xfrm>
-          <a:prstGeom prst="roundRect">
-            <a:avLst>
-              <a:gd name="adj" fmla="val 6957"/>
-            </a:avLst>
-          </a:prstGeom>
-          <a:solidFill>
-            <a:srgbClr val="F5F7FC"/>
-          </a:solidFill>
-          <a:ln/>
-        </p:spPr>
-      </p:sp>
-      <p:sp>
-        <p:nvSpPr>
-          <p:cNvPr id="13" name="Text 11"/>
-          <p:cNvSpPr/>
-          <p:nvPr/>
-        </p:nvSpPr>
-        <p:spPr>
-          <a:xfrm>
-            <a:off x="6263640" y="1618488"/>
-            <a:ext cx="2377440" cy="502920"/>
-          </a:xfrm>
-          <a:prstGeom prst="rect">
-            <a:avLst/>
-          </a:prstGeom>
-          <a:noFill/>
-          <a:ln/>
-        </p:spPr>
-        <p:txBody>
-          <a:bodyPr wrap="square" rtlCol="0" anchor="ctr"/>
-          <a:lstStyle/>
-          <a:p>
-            <a:pPr indent="0" marL="0">
-              <a:buNone/>
-            </a:pPr>
-            <a:r>
-              <a:rPr lang="en-US" sz="2200" b="1" dirty="0">
-                <a:solidFill>
-                  <a:srgbClr val="1E2761"/>
-                </a:solidFill>
-                <a:latin typeface="Calibri" pitchFamily="34" charset="0"/>
-                <a:ea typeface="Calibri" pitchFamily="34" charset="-122"/>
-                <a:cs typeface="Calibri" pitchFamily="34" charset="-120"/>
-              </a:rPr>
-              <a:t>$45</a:t>
-            </a:r>
-            <a:endParaRPr lang="en-US" sz="2200" dirty="0"/>
-          </a:p>
-        </p:txBody>
-      </p:sp>
-      <p:sp>
-        <p:nvSpPr>
-          <p:cNvPr id="14" name="Text 12"/>
-          <p:cNvSpPr/>
-          <p:nvPr/>
-        </p:nvSpPr>
-        <p:spPr>
-          <a:xfrm>
-            <a:off x="6263640" y="2130552"/>
-            <a:ext cx="2377440" cy="365760"/>
-          </a:xfrm>
-          <a:prstGeom prst="rect">
-            <a:avLst/>
-          </a:prstGeom>
-          <a:noFill/>
-          <a:ln/>
-        </p:spPr>
-        <p:txBody>
-          <a:bodyPr wrap="square" rtlCol="0" anchor="ctr"/>
-          <a:lstStyle/>
-          <a:p>
-            <a:pPr indent="0" marL="0">
-              <a:buNone/>
-            </a:pPr>
-            <a:r>
-              <a:rPr lang="en-US" sz="950" dirty="0">
-                <a:solidFill>
-                  <a:srgbClr val="5B6178"/>
-                </a:solidFill>
-                <a:latin typeface="Calibri" pitchFamily="34" charset="0"/>
-                <a:ea typeface="Calibri" pitchFamily="34" charset="-122"/>
-                <a:cs typeface="Calibri" pitchFamily="34" charset="-120"/>
-              </a:rPr>
-              <a:t>Held-out MAE</a:t>
-            </a:r>
-            <a:endParaRPr lang="en-US" sz="950" dirty="0"/>
-          </a:p>
-        </p:txBody>
-      </p:sp>
-      <p:sp>
-        <p:nvSpPr>
-          <p:cNvPr id="15" name="Shape 13"/>
-          <p:cNvSpPr/>
-          <p:nvPr/>
-        </p:nvSpPr>
-        <p:spPr>
-          <a:xfrm>
-            <a:off x="8915400" y="1508760"/>
-            <a:ext cx="2651760" cy="1051560"/>
-          </a:xfrm>
-          <a:prstGeom prst="roundRect">
-            <a:avLst>
-              <a:gd name="adj" fmla="val 6957"/>
-            </a:avLst>
-          </a:prstGeom>
-          <a:solidFill>
-            <a:srgbClr val="F5F7FC"/>
-          </a:solidFill>
-          <a:ln/>
-        </p:spPr>
-      </p:sp>
-      <p:sp>
-        <p:nvSpPr>
-          <p:cNvPr id="16" name="Text 14"/>
-          <p:cNvSpPr/>
-          <p:nvPr/>
-        </p:nvSpPr>
-        <p:spPr>
-          <a:xfrm>
-            <a:off x="9052560" y="1618488"/>
-            <a:ext cx="2377440" cy="502920"/>
-          </a:xfrm>
-          <a:prstGeom prst="rect">
-            <a:avLst/>
-          </a:prstGeom>
-          <a:noFill/>
-          <a:ln/>
-        </p:spPr>
-        <p:txBody>
-          <a:bodyPr wrap="square" rtlCol="0" anchor="ctr"/>
-          <a:lstStyle/>
-          <a:p>
-            <a:pPr indent="0" marL="0">
-              <a:buNone/>
-            </a:pPr>
-            <a:r>
-              <a:rPr lang="en-US" sz="2200" b="1" dirty="0">
-                <a:solidFill>
-                  <a:srgbClr val="1E2761"/>
-                </a:solidFill>
-                <a:latin typeface="Calibri" pitchFamily="34" charset="0"/>
-                <a:ea typeface="Calibri" pitchFamily="34" charset="-122"/>
-                <a:cs typeface="Calibri" pitchFamily="34" charset="-120"/>
-              </a:rPr>
-              <a:t>20</a:t>
-            </a:r>
-            <a:endParaRPr lang="en-US" sz="2200" dirty="0"/>
-          </a:p>
-        </p:txBody>
-      </p:sp>
-      <p:sp>
-        <p:nvSpPr>
-          <p:cNvPr id="17" name="Text 15"/>
-          <p:cNvSpPr/>
-          <p:nvPr/>
-        </p:nvSpPr>
-        <p:spPr>
-          <a:xfrm>
-            <a:off x="9052560" y="2130552"/>
-            <a:ext cx="2377440" cy="365760"/>
-          </a:xfrm>
-          <a:prstGeom prst="rect">
-            <a:avLst/>
-          </a:prstGeom>
-          <a:noFill/>
-          <a:ln/>
-        </p:spPr>
-        <p:txBody>
-          <a:bodyPr wrap="square" rtlCol="0" anchor="ctr"/>
-          <a:lstStyle/>
-          <a:p>
-            <a:pPr indent="0" marL="0">
-              <a:buNone/>
-            </a:pPr>
-            <a:r>
-              <a:rPr lang="en-US" sz="950" dirty="0">
-                <a:solidFill>
-                  <a:srgbClr val="5B6178"/>
-                </a:solidFill>
-                <a:latin typeface="Calibri" pitchFamily="34" charset="0"/>
-                <a:ea typeface="Calibri" pitchFamily="34" charset="-122"/>
-                <a:cs typeface="Calibri" pitchFamily="34" charset="-120"/>
-              </a:rPr>
-              <a:t>Venues flagged</a:t>
-            </a:r>
-            <a:endParaRPr lang="en-US" sz="950" dirty="0"/>
-          </a:p>
-        </p:txBody>
-      </p:sp>
-      <p:graphicFrame>
-        <p:nvGraphicFramePr>
-          <p:cNvPr id="18" name="Chart 0" descr=""/>
-          <p:cNvGraphicFramePr/>
-          <p:nvPr/>
-        </p:nvGraphicFramePr>
-        <p:xfrm>
-          <a:off x="548640" y="2880360"/>
-          <a:ext cx="5394960" cy="3246120"/>
-        </p:xfrm>
-        <a:graphic xmlns:a="http://schemas.openxmlformats.org/drawingml/2006/main">
-          <a:graphicData uri="http://schemas.openxmlformats.org/drawingml/2006/chart">
-            <c:chart xmlns:c="http://schemas.openxmlformats.org/drawingml/2006/chart" r:id="rId1"/>
-          </a:graphicData>
-        </a:graphic>
-      </p:graphicFrame>
-      <p:sp>
-        <p:nvSpPr>
-          <p:cNvPr id="19" name="Text 16"/>
-          <p:cNvSpPr/>
-          <p:nvPr/>
-        </p:nvSpPr>
-        <p:spPr>
-          <a:xfrm>
-            <a:off x="6263640" y="2880360"/>
-            <a:ext cx="5394960" cy="274320"/>
-          </a:xfrm>
-          <a:prstGeom prst="rect">
-            <a:avLst/>
-          </a:prstGeom>
-          <a:noFill/>
-          <a:ln/>
-        </p:spPr>
-        <p:txBody>
-          <a:bodyPr wrap="square" rtlCol="0" anchor="ctr"/>
-          <a:lstStyle/>
-          <a:p>
-            <a:pPr indent="0" marL="0">
-              <a:buNone/>
-            </a:pPr>
-            <a:r>
-              <a:rPr lang="en-US" sz="1200" b="1" dirty="0">
-                <a:solidFill>
-                  <a:srgbClr val="1E2761"/>
-                </a:solidFill>
-                <a:latin typeface="Cambria" pitchFamily="34" charset="0"/>
-                <a:ea typeface="Cambria" pitchFamily="34" charset="-122"/>
-                <a:cs typeface="Cambria" pitchFamily="34" charset="-120"/>
-              </a:rPr>
-              <a:t>Top under-monetized venues (of 20 flagged)</a:t>
-            </a:r>
-            <a:endParaRPr lang="en-US" sz="1200" dirty="0"/>
-          </a:p>
-        </p:txBody>
-      </p:sp>
-      <p:sp>
-        <p:nvSpPr>
-          <p:cNvPr id="20" name="Text 17"/>
-          <p:cNvSpPr/>
-          <p:nvPr/>
-        </p:nvSpPr>
-        <p:spPr>
-          <a:xfrm>
-            <a:off x="6263640" y="3209544"/>
-            <a:ext cx="3657600" cy="274320"/>
-          </a:xfrm>
-          <a:prstGeom prst="rect">
-            <a:avLst/>
-          </a:prstGeom>
-          <a:noFill/>
-          <a:ln/>
-        </p:spPr>
-        <p:txBody>
-          <a:bodyPr wrap="square" rtlCol="0" anchor="ctr"/>
-          <a:lstStyle/>
-          <a:p>
-            <a:pPr indent="0" marL="0">
-              <a:buNone/>
-            </a:pPr>
-            <a:r>
-              <a:rPr lang="en-US" sz="1000" dirty="0">
-                <a:solidFill>
-                  <a:srgbClr val="1A1A2E"/>
-                </a:solidFill>
-                <a:latin typeface="Calibri" pitchFamily="34" charset="0"/>
-                <a:ea typeface="Calibri" pitchFamily="34" charset="-122"/>
-                <a:cs typeface="Calibri" pitchFamily="34" charset="-120"/>
-              </a:rPr>
-              <a:t>Venue #85 (Restaurants)</a:t>
-            </a:r>
-            <a:endParaRPr lang="en-US" sz="1000" dirty="0"/>
-          </a:p>
-        </p:txBody>
-      </p:sp>
-      <p:sp>
-        <p:nvSpPr>
-          <p:cNvPr id="21" name="Text 18"/>
-          <p:cNvSpPr/>
-          <p:nvPr/>
-        </p:nvSpPr>
-        <p:spPr>
-          <a:xfrm>
-            <a:off x="9966960" y="3209544"/>
-            <a:ext cx="1691640" cy="274320"/>
-          </a:xfrm>
-          <a:prstGeom prst="rect">
-            <a:avLst/>
-          </a:prstGeom>
-          <a:noFill/>
-          <a:ln/>
-        </p:spPr>
-        <p:txBody>
-          <a:bodyPr wrap="square" rtlCol="0" anchor="ctr"/>
-          <a:lstStyle/>
-          <a:p>
-            <a:pPr algn="r" indent="0" marL="0">
-              <a:buNone/>
-            </a:pPr>
-            <a:r>
-              <a:rPr lang="en-US" sz="1000" b="1" dirty="0">
-                <a:solidFill>
-                  <a:srgbClr val="B8500A"/>
-                </a:solidFill>
-                <a:latin typeface="Calibri" pitchFamily="34" charset="0"/>
-                <a:ea typeface="Calibri" pitchFamily="34" charset="-122"/>
-                <a:cs typeface="Calibri" pitchFamily="34" charset="-120"/>
-              </a:rPr>
-              <a:t>-62%</a:t>
-            </a:r>
-            <a:endParaRPr lang="en-US" sz="1000" dirty="0"/>
-          </a:p>
-        </p:txBody>
-      </p:sp>
-      <p:sp>
-        <p:nvSpPr>
-          <p:cNvPr id="22" name="Text 19"/>
-          <p:cNvSpPr/>
-          <p:nvPr/>
-        </p:nvSpPr>
-        <p:spPr>
-          <a:xfrm>
-            <a:off x="6263640" y="3502152"/>
-            <a:ext cx="3657600" cy="274320"/>
-          </a:xfrm>
-          <a:prstGeom prst="rect">
-            <a:avLst/>
-          </a:prstGeom>
-          <a:noFill/>
-          <a:ln/>
-        </p:spPr>
-        <p:txBody>
-          <a:bodyPr wrap="square" rtlCol="0" anchor="ctr"/>
-          <a:lstStyle/>
-          <a:p>
-            <a:pPr indent="0" marL="0">
-              <a:buNone/>
-            </a:pPr>
-            <a:r>
-              <a:rPr lang="en-US" sz="1000" dirty="0">
-                <a:solidFill>
-                  <a:srgbClr val="1A1A2E"/>
-                </a:solidFill>
-                <a:latin typeface="Calibri" pitchFamily="34" charset="0"/>
-                <a:ea typeface="Calibri" pitchFamily="34" charset="-122"/>
-                <a:cs typeface="Calibri" pitchFamily="34" charset="-120"/>
-              </a:rPr>
-              <a:t>Venue #309 (Waiting Rooms)</a:t>
-            </a:r>
-            <a:endParaRPr lang="en-US" sz="1000" dirty="0"/>
-          </a:p>
-        </p:txBody>
-      </p:sp>
-      <p:sp>
-        <p:nvSpPr>
-          <p:cNvPr id="23" name="Text 20"/>
-          <p:cNvSpPr/>
-          <p:nvPr/>
-        </p:nvSpPr>
-        <p:spPr>
-          <a:xfrm>
-            <a:off x="9966960" y="3502152"/>
-            <a:ext cx="1691640" cy="274320"/>
-          </a:xfrm>
-          <a:prstGeom prst="rect">
-            <a:avLst/>
-          </a:prstGeom>
-          <a:noFill/>
-          <a:ln/>
-        </p:spPr>
-        <p:txBody>
-          <a:bodyPr wrap="square" rtlCol="0" anchor="ctr"/>
-          <a:lstStyle/>
-          <a:p>
-            <a:pPr algn="r" indent="0" marL="0">
-              <a:buNone/>
-            </a:pPr>
-            <a:r>
-              <a:rPr lang="en-US" sz="1000" b="1" dirty="0">
-                <a:solidFill>
-                  <a:srgbClr val="B8500A"/>
-                </a:solidFill>
-                <a:latin typeface="Calibri" pitchFamily="34" charset="0"/>
-                <a:ea typeface="Calibri" pitchFamily="34" charset="-122"/>
-                <a:cs typeface="Calibri" pitchFamily="34" charset="-120"/>
-              </a:rPr>
-              <a:t>-61%</a:t>
-            </a:r>
-            <a:endParaRPr lang="en-US" sz="1000" dirty="0"/>
-          </a:p>
-        </p:txBody>
-      </p:sp>
-      <p:sp>
-        <p:nvSpPr>
-          <p:cNvPr id="24" name="Text 21"/>
-          <p:cNvSpPr/>
-          <p:nvPr/>
-        </p:nvSpPr>
-        <p:spPr>
-          <a:xfrm>
-            <a:off x="6263640" y="3794760"/>
-            <a:ext cx="3657600" cy="274320"/>
-          </a:xfrm>
-          <a:prstGeom prst="rect">
-            <a:avLst/>
-          </a:prstGeom>
-          <a:noFill/>
-          <a:ln/>
-        </p:spPr>
-        <p:txBody>
-          <a:bodyPr wrap="square" rtlCol="0" anchor="ctr"/>
-          <a:lstStyle/>
-          <a:p>
-            <a:pPr indent="0" marL="0">
-              <a:buNone/>
-            </a:pPr>
-            <a:r>
-              <a:rPr lang="en-US" sz="1000" dirty="0">
-                <a:solidFill>
-                  <a:srgbClr val="1A1A2E"/>
-                </a:solidFill>
-                <a:latin typeface="Calibri" pitchFamily="34" charset="0"/>
-                <a:ea typeface="Calibri" pitchFamily="34" charset="-122"/>
-                <a:cs typeface="Calibri" pitchFamily="34" charset="-120"/>
-              </a:rPr>
-              <a:t>Venue #53 (Restaurants)</a:t>
-            </a:r>
-            <a:endParaRPr lang="en-US" sz="1000" dirty="0"/>
-          </a:p>
-        </p:txBody>
-      </p:sp>
-      <p:sp>
-        <p:nvSpPr>
-          <p:cNvPr id="25" name="Text 22"/>
-          <p:cNvSpPr/>
-          <p:nvPr/>
-        </p:nvSpPr>
-        <p:spPr>
-          <a:xfrm>
-            <a:off x="9966960" y="3794760"/>
-            <a:ext cx="1691640" cy="274320"/>
-          </a:xfrm>
-          <a:prstGeom prst="rect">
-            <a:avLst/>
-          </a:prstGeom>
-          <a:noFill/>
-          <a:ln/>
-        </p:spPr>
-        <p:txBody>
-          <a:bodyPr wrap="square" rtlCol="0" anchor="ctr"/>
-          <a:lstStyle/>
-          <a:p>
-            <a:pPr algn="r" indent="0" marL="0">
-              <a:buNone/>
-            </a:pPr>
-            <a:r>
-              <a:rPr lang="en-US" sz="1000" b="1" dirty="0">
-                <a:solidFill>
-                  <a:srgbClr val="B8500A"/>
-                </a:solidFill>
-                <a:latin typeface="Calibri" pitchFamily="34" charset="0"/>
-                <a:ea typeface="Calibri" pitchFamily="34" charset="-122"/>
-                <a:cs typeface="Calibri" pitchFamily="34" charset="-120"/>
-              </a:rPr>
-              <a:t>-61%</a:t>
-            </a:r>
-            <a:endParaRPr lang="en-US" sz="1000" dirty="0"/>
-          </a:p>
-        </p:txBody>
-      </p:sp>
-      <p:sp>
-        <p:nvSpPr>
-          <p:cNvPr id="26" name="Text 23"/>
-          <p:cNvSpPr/>
-          <p:nvPr/>
-        </p:nvSpPr>
-        <p:spPr>
-          <a:xfrm>
-            <a:off x="6263640" y="4087368"/>
-            <a:ext cx="3657600" cy="274320"/>
-          </a:xfrm>
-          <a:prstGeom prst="rect">
-            <a:avLst/>
-          </a:prstGeom>
-          <a:noFill/>
-          <a:ln/>
-        </p:spPr>
-        <p:txBody>
-          <a:bodyPr wrap="square" rtlCol="0" anchor="ctr"/>
-          <a:lstStyle/>
-          <a:p>
-            <a:pPr indent="0" marL="0">
-              <a:buNone/>
-            </a:pPr>
-            <a:r>
-              <a:rPr lang="en-US" sz="1000" dirty="0">
-                <a:solidFill>
-                  <a:srgbClr val="1A1A2E"/>
-                </a:solidFill>
-                <a:latin typeface="Calibri" pitchFamily="34" charset="0"/>
-                <a:ea typeface="Calibri" pitchFamily="34" charset="-122"/>
-                <a:cs typeface="Calibri" pitchFamily="34" charset="-120"/>
-              </a:rPr>
-              <a:t>Venue #247 (Bars)</a:t>
-            </a:r>
-            <a:endParaRPr lang="en-US" sz="1000" dirty="0"/>
-          </a:p>
-        </p:txBody>
-      </p:sp>
-      <p:sp>
-        <p:nvSpPr>
-          <p:cNvPr id="27" name="Text 24"/>
-          <p:cNvSpPr/>
-          <p:nvPr/>
-        </p:nvSpPr>
-        <p:spPr>
-          <a:xfrm>
-            <a:off x="9966960" y="4087368"/>
-            <a:ext cx="1691640" cy="274320"/>
-          </a:xfrm>
-          <a:prstGeom prst="rect">
-            <a:avLst/>
-          </a:prstGeom>
-          <a:noFill/>
-          <a:ln/>
-        </p:spPr>
-        <p:txBody>
-          <a:bodyPr wrap="square" rtlCol="0" anchor="ctr"/>
-          <a:lstStyle/>
-          <a:p>
-            <a:pPr algn="r" indent="0" marL="0">
-              <a:buNone/>
-            </a:pPr>
-            <a:r>
-              <a:rPr lang="en-US" sz="1000" b="1" dirty="0">
-                <a:solidFill>
-                  <a:srgbClr val="B8500A"/>
-                </a:solidFill>
-                <a:latin typeface="Calibri" pitchFamily="34" charset="0"/>
-                <a:ea typeface="Calibri" pitchFamily="34" charset="-122"/>
-                <a:cs typeface="Calibri" pitchFamily="34" charset="-120"/>
-              </a:rPr>
-              <a:t>-60%</a:t>
-            </a:r>
-            <a:endParaRPr lang="en-US" sz="1000" dirty="0"/>
-          </a:p>
-        </p:txBody>
-      </p:sp>
-      <p:sp>
-        <p:nvSpPr>
-          <p:cNvPr id="28" name="Text 25"/>
-          <p:cNvSpPr/>
-          <p:nvPr/>
-        </p:nvSpPr>
-        <p:spPr>
-          <a:xfrm>
-            <a:off x="6263640" y="4562856"/>
-            <a:ext cx="5394960" cy="274320"/>
-          </a:xfrm>
-          <a:prstGeom prst="rect">
-            <a:avLst/>
-          </a:prstGeom>
-          <a:noFill/>
-          <a:ln/>
-        </p:spPr>
-        <p:txBody>
-          <a:bodyPr wrap="square" rtlCol="0" anchor="ctr"/>
-          <a:lstStyle/>
-          <a:p>
-            <a:pPr indent="0" marL="0">
-              <a:buNone/>
-            </a:pPr>
-            <a:r>
-              <a:rPr lang="en-US" sz="1200" b="1" dirty="0">
-                <a:solidFill>
-                  <a:srgbClr val="1E2761"/>
-                </a:solidFill>
-                <a:latin typeface="Cambria" pitchFamily="34" charset="0"/>
-                <a:ea typeface="Cambria" pitchFamily="34" charset="-122"/>
-                <a:cs typeface="Cambria" pitchFamily="34" charset="-120"/>
-              </a:rPr>
-              <a:t>Top prospect venues (expansion priority)</a:t>
-            </a:r>
-            <a:endParaRPr lang="en-US" sz="1200" dirty="0"/>
-          </a:p>
-        </p:txBody>
-      </p:sp>
-      <p:sp>
-        <p:nvSpPr>
-          <p:cNvPr id="29" name="Text 26"/>
-          <p:cNvSpPr/>
-          <p:nvPr/>
-        </p:nvSpPr>
-        <p:spPr>
-          <a:xfrm>
-            <a:off x="6263640" y="4892040"/>
-            <a:ext cx="4023360" cy="274320"/>
-          </a:xfrm>
-          <a:prstGeom prst="rect">
-            <a:avLst/>
-          </a:prstGeom>
-          <a:noFill/>
-          <a:ln/>
-        </p:spPr>
-        <p:txBody>
-          <a:bodyPr wrap="square" rtlCol="0" anchor="ctr"/>
-          <a:lstStyle/>
-          <a:p>
-            <a:pPr indent="0" marL="0">
-              <a:buNone/>
-            </a:pPr>
-            <a:r>
-              <a:rPr lang="en-US" sz="1000" dirty="0">
-                <a:solidFill>
-                  <a:srgbClr val="1A1A2E"/>
-                </a:solidFill>
-                <a:latin typeface="Calibri" pitchFamily="34" charset="0"/>
-                <a:ea typeface="Calibri" pitchFamily="34" charset="-122"/>
-                <a:cs typeface="Calibri" pitchFamily="34" charset="-120"/>
-              </a:rPr>
-              <a:t>P0018 — Bars (existing market)</a:t>
-            </a:r>
-            <a:endParaRPr lang="en-US" sz="1000" dirty="0"/>
-          </a:p>
-        </p:txBody>
-      </p:sp>
-      <p:sp>
-        <p:nvSpPr>
-          <p:cNvPr id="30" name="Text 27"/>
-          <p:cNvSpPr/>
-          <p:nvPr/>
-        </p:nvSpPr>
-        <p:spPr>
-          <a:xfrm>
-            <a:off x="10195560" y="4892040"/>
-            <a:ext cx="1463040" cy="274320"/>
-          </a:xfrm>
-          <a:prstGeom prst="rect">
-            <a:avLst/>
-          </a:prstGeom>
-          <a:noFill/>
-          <a:ln/>
-        </p:spPr>
-        <p:txBody>
-          <a:bodyPr wrap="square" rtlCol="0" anchor="ctr"/>
-          <a:lstStyle/>
-          <a:p>
-            <a:pPr algn="r" indent="0" marL="0">
-              <a:buNone/>
-            </a:pPr>
-            <a:r>
-              <a:rPr lang="en-US" sz="1000" b="1" dirty="0">
-                <a:solidFill>
-                  <a:srgbClr val="2C7A57"/>
-                </a:solidFill>
-                <a:latin typeface="Calibri" pitchFamily="34" charset="0"/>
-                <a:ea typeface="Calibri" pitchFamily="34" charset="-122"/>
-                <a:cs typeface="Calibri" pitchFamily="34" charset="-120"/>
-              </a:rPr>
-              <a:t>$684</a:t>
-            </a:r>
-            <a:endParaRPr lang="en-US" sz="1000" dirty="0"/>
-          </a:p>
-        </p:txBody>
-      </p:sp>
-      <p:sp>
-        <p:nvSpPr>
-          <p:cNvPr id="31" name="Text 28"/>
-          <p:cNvSpPr/>
-          <p:nvPr/>
-        </p:nvSpPr>
-        <p:spPr>
-          <a:xfrm>
-            <a:off x="6263640" y="5184648"/>
-            <a:ext cx="4023360" cy="274320"/>
-          </a:xfrm>
-          <a:prstGeom prst="rect">
-            <a:avLst/>
-          </a:prstGeom>
-          <a:noFill/>
-          <a:ln/>
-        </p:spPr>
-        <p:txBody>
-          <a:bodyPr wrap="square" rtlCol="0" anchor="ctr"/>
-          <a:lstStyle/>
-          <a:p>
-            <a:pPr indent="0" marL="0">
-              <a:buNone/>
-            </a:pPr>
-            <a:r>
-              <a:rPr lang="en-US" sz="1000" dirty="0">
-                <a:solidFill>
-                  <a:srgbClr val="1A1A2E"/>
-                </a:solidFill>
-                <a:latin typeface="Calibri" pitchFamily="34" charset="0"/>
-                <a:ea typeface="Calibri" pitchFamily="34" charset="-122"/>
-                <a:cs typeface="Calibri" pitchFamily="34" charset="-120"/>
-              </a:rPr>
-              <a:t>P0055 — Restaurants (existing market)</a:t>
-            </a:r>
-            <a:endParaRPr lang="en-US" sz="1000" dirty="0"/>
-          </a:p>
-        </p:txBody>
-      </p:sp>
-      <p:sp>
-        <p:nvSpPr>
-          <p:cNvPr id="32" name="Text 29"/>
-          <p:cNvSpPr/>
-          <p:nvPr/>
-        </p:nvSpPr>
-        <p:spPr>
-          <a:xfrm>
-            <a:off x="10195560" y="5184648"/>
-            <a:ext cx="1463040" cy="274320"/>
-          </a:xfrm>
-          <a:prstGeom prst="rect">
-            <a:avLst/>
-          </a:prstGeom>
-          <a:noFill/>
-          <a:ln/>
-        </p:spPr>
-        <p:txBody>
-          <a:bodyPr wrap="square" rtlCol="0" anchor="ctr"/>
-          <a:lstStyle/>
-          <a:p>
-            <a:pPr algn="r" indent="0" marL="0">
-              <a:buNone/>
-            </a:pPr>
-            <a:r>
-              <a:rPr lang="en-US" sz="1000" b="1" dirty="0">
-                <a:solidFill>
-                  <a:srgbClr val="2C7A57"/>
-                </a:solidFill>
-                <a:latin typeface="Calibri" pitchFamily="34" charset="0"/>
-                <a:ea typeface="Calibri" pitchFamily="34" charset="-122"/>
-                <a:cs typeface="Calibri" pitchFamily="34" charset="-120"/>
-              </a:rPr>
-              <a:t>$524</a:t>
-            </a:r>
-            <a:endParaRPr lang="en-US" sz="1000" dirty="0"/>
-          </a:p>
-        </p:txBody>
-      </p:sp>
-      <p:sp>
-        <p:nvSpPr>
-          <p:cNvPr id="33" name="Text 30"/>
-          <p:cNvSpPr/>
-          <p:nvPr/>
-        </p:nvSpPr>
-        <p:spPr>
-          <a:xfrm>
-            <a:off x="6263640" y="5477256"/>
-            <a:ext cx="4023360" cy="274320"/>
-          </a:xfrm>
-          <a:prstGeom prst="rect">
-            <a:avLst/>
-          </a:prstGeom>
-          <a:noFill/>
-          <a:ln/>
-        </p:spPr>
-        <p:txBody>
-          <a:bodyPr wrap="square" rtlCol="0" anchor="ctr"/>
-          <a:lstStyle/>
-          <a:p>
-            <a:pPr indent="0" marL="0">
-              <a:buNone/>
-            </a:pPr>
-            <a:r>
-              <a:rPr lang="en-US" sz="1000" dirty="0">
-                <a:solidFill>
-                  <a:srgbClr val="1A1A2E"/>
-                </a:solidFill>
-                <a:latin typeface="Calibri" pitchFamily="34" charset="0"/>
-                <a:ea typeface="Calibri" pitchFamily="34" charset="-122"/>
-                <a:cs typeface="Calibri" pitchFamily="34" charset="-120"/>
-              </a:rPr>
-              <a:t>P0000 — Bars (new market)</a:t>
-            </a:r>
-            <a:endParaRPr lang="en-US" sz="1000" dirty="0"/>
-          </a:p>
-        </p:txBody>
-      </p:sp>
-      <p:sp>
-        <p:nvSpPr>
-          <p:cNvPr id="34" name="Text 31"/>
-          <p:cNvSpPr/>
-          <p:nvPr/>
-        </p:nvSpPr>
-        <p:spPr>
-          <a:xfrm>
-            <a:off x="10195560" y="5477256"/>
-            <a:ext cx="1463040" cy="274320"/>
-          </a:xfrm>
-          <a:prstGeom prst="rect">
-            <a:avLst/>
-          </a:prstGeom>
-          <a:noFill/>
-          <a:ln/>
-        </p:spPr>
-        <p:txBody>
-          <a:bodyPr wrap="square" rtlCol="0" anchor="ctr"/>
-          <a:lstStyle/>
-          <a:p>
-            <a:pPr algn="r" indent="0" marL="0">
-              <a:buNone/>
-            </a:pPr>
-            <a:r>
-              <a:rPr lang="en-US" sz="1000" b="1" dirty="0">
-                <a:solidFill>
-                  <a:srgbClr val="2C7A57"/>
-                </a:solidFill>
-                <a:latin typeface="Calibri" pitchFamily="34" charset="0"/>
-                <a:ea typeface="Calibri" pitchFamily="34" charset="-122"/>
-                <a:cs typeface="Calibri" pitchFamily="34" charset="-120"/>
-              </a:rPr>
-              <a:t>$500</a:t>
-            </a:r>
-            <a:endParaRPr lang="en-US" sz="1000" dirty="0"/>
-          </a:p>
-        </p:txBody>
-      </p:sp>
-      <p:sp>
-        <p:nvSpPr>
-          <p:cNvPr id="35" name="Text 32"/>
-          <p:cNvSpPr/>
-          <p:nvPr/>
-        </p:nvSpPr>
-        <p:spPr>
-          <a:xfrm>
-            <a:off x="6263640" y="5769864"/>
-            <a:ext cx="4023360" cy="274320"/>
-          </a:xfrm>
-          <a:prstGeom prst="rect">
-            <a:avLst/>
-          </a:prstGeom>
-          <a:noFill/>
-          <a:ln/>
-        </p:spPr>
-        <p:txBody>
-          <a:bodyPr wrap="square" rtlCol="0" anchor="ctr"/>
-          <a:lstStyle/>
-          <a:p>
-            <a:pPr indent="0" marL="0">
-              <a:buNone/>
-            </a:pPr>
-            <a:r>
-              <a:rPr lang="en-US" sz="1000" dirty="0">
-                <a:solidFill>
-                  <a:srgbClr val="1A1A2E"/>
-                </a:solidFill>
-                <a:latin typeface="Calibri" pitchFamily="34" charset="0"/>
-                <a:ea typeface="Calibri" pitchFamily="34" charset="-122"/>
-                <a:cs typeface="Calibri" pitchFamily="34" charset="-120"/>
-              </a:rPr>
-              <a:t>P0001 — Bars (new market)</a:t>
-            </a:r>
-            <a:endParaRPr lang="en-US" sz="1000" dirty="0"/>
-          </a:p>
-        </p:txBody>
-      </p:sp>
-      <p:sp>
-        <p:nvSpPr>
-          <p:cNvPr id="36" name="Text 33"/>
-          <p:cNvSpPr/>
-          <p:nvPr/>
-        </p:nvSpPr>
-        <p:spPr>
-          <a:xfrm>
-            <a:off x="10195560" y="5769864"/>
-            <a:ext cx="1463040" cy="274320"/>
-          </a:xfrm>
-          <a:prstGeom prst="rect">
-            <a:avLst/>
-          </a:prstGeom>
-          <a:noFill/>
-          <a:ln/>
-        </p:spPr>
-        <p:txBody>
-          <a:bodyPr wrap="square" rtlCol="0" anchor="ctr"/>
-          <a:lstStyle/>
-          <a:p>
-            <a:pPr algn="r" indent="0" marL="0">
-              <a:buNone/>
-            </a:pPr>
-            <a:r>
-              <a:rPr lang="en-US" sz="1000" b="1" dirty="0">
-                <a:solidFill>
-                  <a:srgbClr val="2C7A57"/>
-                </a:solidFill>
-                <a:latin typeface="Calibri" pitchFamily="34" charset="0"/>
-                <a:ea typeface="Calibri" pitchFamily="34" charset="-122"/>
-                <a:cs typeface="Calibri" pitchFamily="34" charset="-120"/>
-              </a:rPr>
-              <a:t>$496</a:t>
-            </a:r>
-            <a:endParaRPr lang="en-US" sz="1000" dirty="0"/>
-          </a:p>
-        </p:txBody>
-      </p:sp>
-      <p:sp>
-        <p:nvSpPr>
-          <p:cNvPr id="37" name="Text 34"/>
-          <p:cNvSpPr/>
-          <p:nvPr/>
-        </p:nvSpPr>
-        <p:spPr>
-          <a:xfrm>
-            <a:off x="548640" y="6080760"/>
-            <a:ext cx="11064240" cy="411480"/>
-          </a:xfrm>
-          <a:prstGeom prst="rect">
-            <a:avLst/>
-          </a:prstGeom>
-          <a:noFill/>
-          <a:ln/>
-        </p:spPr>
-        <p:txBody>
-          <a:bodyPr wrap="square" rtlCol="0" anchor="ctr"/>
-          <a:lstStyle/>
-          <a:p>
-            <a:pPr indent="0" marL="0">
-              <a:lnSpc>
-                <a:spcPts val="1200"/>
-              </a:lnSpc>
-              <a:buNone/>
-            </a:pPr>
-            <a:r>
-              <a:rPr lang="en-US" sz="1000" i="1" dirty="0">
-                <a:solidFill>
-                  <a:srgbClr val="5B6178"/>
-                </a:solidFill>
-                <a:latin typeface="Calibri" pitchFamily="34" charset="0"/>
-                <a:ea typeface="Calibri" pitchFamily="34" charset="-122"/>
-                <a:cs typeface="Calibri" pitchFamily="34" charset="-120"/>
-              </a:rPr>
-              <a:t>Flags come from 5-fold out-of-fold predictions, never a model scoring the venue it was trained on. The calibrated-lift feature carries near-zero importance — honest, since it's constant within venue_type once venue_type itself is a feature.</a:t>
-            </a:r>
-            <a:endParaRPr lang="en-US" sz="1000" dirty="0"/>
-          </a:p>
-        </p:txBody>
-      </p:sp>
-      <p:sp>
-        <p:nvSpPr>
-          <p:cNvPr id="38" name="Text 35"/>
-          <p:cNvSpPr/>
-          <p:nvPr/>
-        </p:nvSpPr>
-        <p:spPr>
-          <a:xfrm>
-            <a:off x="457200" y="6537960"/>
-            <a:ext cx="7315200" cy="274320"/>
-          </a:xfrm>
-          <a:prstGeom prst="rect">
-            <a:avLst/>
-          </a:prstGeom>
-          <a:noFill/>
-          <a:ln/>
-        </p:spPr>
-        <p:txBody>
-          <a:bodyPr wrap="square" rtlCol="0" anchor="ctr"/>
-          <a:lstStyle/>
-          <a:p>
-            <a:pPr indent="0" marL="0">
-              <a:buNone/>
-            </a:pPr>
-            <a:r>
-              <a:rPr lang="en-US" sz="900" dirty="0">
-                <a:solidFill>
-                  <a:srgbClr val="5B6178"/>
-                </a:solidFill>
-                <a:latin typeface="Calibri" pitchFamily="34" charset="0"/>
-                <a:ea typeface="Calibri" pitchFamily="34" charset="-122"/>
-                <a:cs typeface="Calibri" pitchFamily="34" charset="-120"/>
-              </a:rPr>
-              <a:t>Venue economics</a:t>
-            </a:r>
-            <a:endParaRPr lang="en-US" sz="900" dirty="0"/>
           </a:p>
         </p:txBody>
       </p:sp>
@@ -7772,7 +7429,7 @@
                 <a:ea typeface="Cambria" pitchFamily="34" charset="-122"/>
                 <a:cs typeface="Cambria" pitchFamily="34" charset="-120"/>
               </a:rPr>
-              <a:t>Predicting venue churn risk, honestly</a:t>
+              <a:t>Predicting venue ad-revenue, honestly</a:t>
             </a:r>
             <a:endParaRPr lang="en-US" sz="2500" dirty="0"/>
           </a:p>
@@ -7799,7 +7456,7 @@
           </a:solidFill>
           <a:ln w="15875">
             <a:solidFill>
-              <a:srgbClr val="8E3B60"/>
+              <a:srgbClr val="2C7A57"/>
             </a:solidFill>
             <a:prstDash val="solid"/>
           </a:ln>
@@ -7832,13 +7489,13 @@
             <a:r>
               <a:rPr lang="en-US" sz="950" b="1" dirty="0">
                 <a:solidFill>
-                  <a:srgbClr val="8E3B60"/>
-                </a:solidFill>
-                <a:latin typeface="Calibri" pitchFamily="34" charset="0"/>
-                <a:ea typeface="Calibri" pitchFamily="34" charset="-122"/>
-                <a:cs typeface="Calibri" pitchFamily="34" charset="-120"/>
-              </a:rPr>
-              <a:t>Step 6 of 6 · Answers Q4</a:t>
+                  <a:srgbClr val="2C7A57"/>
+                </a:solidFill>
+                <a:latin typeface="Calibri" pitchFamily="34" charset="0"/>
+                <a:ea typeface="Calibri" pitchFamily="34" charset="-122"/>
+                <a:cs typeface="Calibri" pitchFamily="34" charset="-120"/>
+              </a:rPr>
+              <a:t>Step 5 of 6 · Answers Q3</a:t>
             </a:r>
             <a:endParaRPr lang="en-US" sz="950" dirty="0"/>
           </a:p>
@@ -7869,7 +7526,7 @@
               <a:buNone/>
             </a:pPr>
             <a:r>
-              <a:rPr lang="en-US" sz="1200" i="1" dirty="0">
+              <a:rPr lang="en-US" sz="1250" i="1" dirty="0">
                 <a:solidFill>
                   <a:srgbClr val="5B6178"/>
                 </a:solidFill>
@@ -7877,9 +7534,9 @@
                 <a:ea typeface="Calibri" pitchFamily="34" charset="-122"/>
                 <a:cs typeface="Calibri" pitchFamily="34" charset="-120"/>
               </a:rPr>
-              <a:t>Gradient-boosted classifier on ops-visible signals (engagement, uptime, complaints, competitor outreach) — the other half of "what makes a venue valuable and what puts it at risk."</a:t>
-            </a:r>
-            <a:endParaRPr lang="en-US" sz="1200" dirty="0"/>
+              <a:t>Gradient-boosted trees on observable venue characteristics + the calibrated per-exposure lift as a feature.</a:t>
+            </a:r>
+            <a:endParaRPr lang="en-US" sz="1250" dirty="0"/>
           </a:p>
         </p:txBody>
       </p:sp>
@@ -7938,7 +7595,7 @@
                 <a:ea typeface="Calibri" pitchFamily="34" charset="-122"/>
                 <a:cs typeface="Calibri" pitchFamily="34" charset="-120"/>
               </a:rPr>
-              <a:t>0.65</a:t>
+              <a:t>0.84</a:t>
             </a:r>
             <a:endParaRPr lang="en-US" sz="2200" dirty="0"/>
           </a:p>
@@ -7969,7 +7626,7 @@
               <a:buNone/>
             </a:pPr>
             <a:r>
-              <a:rPr lang="en-US" sz="900" dirty="0">
+              <a:rPr lang="en-US" sz="950" dirty="0">
                 <a:solidFill>
                   <a:srgbClr val="5B6178"/>
                 </a:solidFill>
@@ -7977,9 +7634,9 @@
                 <a:ea typeface="Calibri" pitchFamily="34" charset="-122"/>
                 <a:cs typeface="Calibri" pitchFamily="34" charset="-120"/>
               </a:rPr>
-              <a:t>Held-out AUC</a:t>
-            </a:r>
-            <a:endParaRPr lang="en-US" sz="900" dirty="0"/>
+              <a:t>Held-out R²</a:t>
+            </a:r>
+            <a:endParaRPr lang="en-US" sz="950" dirty="0"/>
           </a:p>
         </p:txBody>
       </p:sp>
@@ -8038,7 +7695,7 @@
                 <a:ea typeface="Calibri" pitchFamily="34" charset="-122"/>
                 <a:cs typeface="Calibri" pitchFamily="34" charset="-120"/>
               </a:rPr>
-              <a:t>0.27</a:t>
+              <a:t>22.1%</a:t>
             </a:r>
             <a:endParaRPr lang="en-US" sz="2200" dirty="0"/>
           </a:p>
@@ -8069,7 +7726,7 @@
               <a:buNone/>
             </a:pPr>
             <a:r>
-              <a:rPr lang="en-US" sz="900" dirty="0">
+              <a:rPr lang="en-US" sz="950" dirty="0">
                 <a:solidFill>
                   <a:srgbClr val="5B6178"/>
                 </a:solidFill>
@@ -8077,9 +7734,9 @@
                 <a:ea typeface="Calibri" pitchFamily="34" charset="-122"/>
                 <a:cs typeface="Calibri" pitchFamily="34" charset="-120"/>
               </a:rPr>
-              <a:t>Held-out PR-AUC</a:t>
-            </a:r>
-            <a:endParaRPr lang="en-US" sz="900" dirty="0"/>
+              <a:t>Held-out MAPE</a:t>
+            </a:r>
+            <a:endParaRPr lang="en-US" sz="950" dirty="0"/>
           </a:p>
         </p:txBody>
       </p:sp>
@@ -8138,7 +7795,7 @@
                 <a:ea typeface="Calibri" pitchFamily="34" charset="-122"/>
                 <a:cs typeface="Calibri" pitchFamily="34" charset="-120"/>
               </a:rPr>
-              <a:t>0.13</a:t>
+              <a:t>$45</a:t>
             </a:r>
             <a:endParaRPr lang="en-US" sz="2200" dirty="0"/>
           </a:p>
@@ -8169,7 +7826,7 @@
               <a:buNone/>
             </a:pPr>
             <a:r>
-              <a:rPr lang="en-US" sz="900" dirty="0">
+              <a:rPr lang="en-US" sz="950" dirty="0">
                 <a:solidFill>
                   <a:srgbClr val="5B6178"/>
                 </a:solidFill>
@@ -8177,9 +7834,9 @@
                 <a:ea typeface="Calibri" pitchFamily="34" charset="-122"/>
                 <a:cs typeface="Calibri" pitchFamily="34" charset="-120"/>
               </a:rPr>
-              <a:t>Brier score</a:t>
-            </a:r>
-            <a:endParaRPr lang="en-US" sz="900" dirty="0"/>
+              <a:t>Held-out MAE</a:t>
+            </a:r>
+            <a:endParaRPr lang="en-US" sz="950" dirty="0"/>
           </a:p>
         </p:txBody>
       </p:sp>
@@ -8269,7 +7926,7 @@
               <a:buNone/>
             </a:pPr>
             <a:r>
-              <a:rPr lang="en-US" sz="900" dirty="0">
+              <a:rPr lang="en-US" sz="950" dirty="0">
                 <a:solidFill>
                   <a:srgbClr val="5B6178"/>
                 </a:solidFill>
@@ -8279,7 +7936,7 @@
               </a:rPr>
               <a:t>Venues flagged</a:t>
             </a:r>
-            <a:endParaRPr lang="en-US" sz="900" dirty="0"/>
+            <a:endParaRPr lang="en-US" sz="950" dirty="0"/>
           </a:p>
         </p:txBody>
       </p:sp>
@@ -8308,7 +7965,7 @@
         <p:spPr>
           <a:xfrm>
             <a:off x="6263640" y="2880360"/>
-            <a:ext cx="5394960" cy="256032"/>
+            <a:ext cx="5394960" cy="274320"/>
           </a:xfrm>
           <a:prstGeom prst="rect">
             <a:avLst/>
@@ -8332,7 +7989,7 @@
                 <a:ea typeface="Cambria" pitchFamily="34" charset="-122"/>
                 <a:cs typeface="Cambria" pitchFamily="34" charset="-120"/>
               </a:rPr>
-              <a:t>Top at-risk venues (of 20 flagged, by OOF risk)</a:t>
+              <a:t>Top under-monetized venues (of 20 flagged)</a:t>
             </a:r>
             <a:endParaRPr lang="en-US" sz="1200" dirty="0"/>
           </a:p>
@@ -8346,8 +8003,8 @@
         </p:nvSpPr>
         <p:spPr>
           <a:xfrm>
-            <a:off x="6263640" y="3172968"/>
-            <a:ext cx="3977640" cy="219456"/>
+            <a:off x="6263640" y="3209544"/>
+            <a:ext cx="3657600" cy="274320"/>
           </a:xfrm>
           <a:prstGeom prst="rect">
             <a:avLst/>
@@ -8371,7 +8028,7 @@
                 <a:ea typeface="Calibri" pitchFamily="34" charset="-122"/>
                 <a:cs typeface="Calibri" pitchFamily="34" charset="-120"/>
               </a:rPr>
-              <a:t>Venue #281 (Bars)</a:t>
+              <a:t>Venue #85 (Restaurants)</a:t>
             </a:r>
             <a:endParaRPr lang="en-US" sz="1000" dirty="0"/>
           </a:p>
@@ -8385,8 +8042,8 @@
         </p:nvSpPr>
         <p:spPr>
           <a:xfrm>
-            <a:off x="10241280" y="3172968"/>
-            <a:ext cx="1417320" cy="219456"/>
+            <a:off x="9966960" y="3209544"/>
+            <a:ext cx="1691640" cy="274320"/>
           </a:xfrm>
           <a:prstGeom prst="rect">
             <a:avLst/>
@@ -8410,7 +8067,7 @@
                 <a:ea typeface="Calibri" pitchFamily="34" charset="-122"/>
                 <a:cs typeface="Calibri" pitchFamily="34" charset="-120"/>
               </a:rPr>
-              <a:t>60%</a:t>
+              <a:t>-62%</a:t>
             </a:r>
             <a:endParaRPr lang="en-US" sz="1000" dirty="0"/>
           </a:p>
@@ -8424,34 +8081,34 @@
         </p:nvSpPr>
         <p:spPr>
           <a:xfrm>
-            <a:off x="6263640" y="3374136"/>
-            <a:ext cx="5394960" cy="201168"/>
-          </a:xfrm>
-          <a:prstGeom prst="rect">
-            <a:avLst/>
-          </a:prstGeom>
-          <a:noFill/>
-          <a:ln/>
-        </p:spPr>
-        <p:txBody>
-          <a:bodyPr wrap="square" rtlCol="0" anchor="ctr"/>
-          <a:lstStyle/>
-          <a:p>
-            <a:pPr indent="0" marL="0">
-              <a:buNone/>
-            </a:pPr>
-            <a:r>
-              <a:rPr lang="en-US" sz="900" i="1" dirty="0">
-                <a:solidFill>
-                  <a:srgbClr val="8A4B0A"/>
-                </a:solidFill>
-                <a:latin typeface="Calibri" pitchFamily="34" charset="0"/>
-                <a:ea typeface="Calibri" pitchFamily="34" charset="-122"/>
-                <a:cs typeface="Calibri" pitchFamily="34" charset="-120"/>
-              </a:rPr>
-              <a:t>engagement declining → content/placement review</a:t>
-            </a:r>
-            <a:endParaRPr lang="en-US" sz="900" dirty="0"/>
+            <a:off x="6263640" y="3502152"/>
+            <a:ext cx="3657600" cy="274320"/>
+          </a:xfrm>
+          <a:prstGeom prst="rect">
+            <a:avLst/>
+          </a:prstGeom>
+          <a:noFill/>
+          <a:ln/>
+        </p:spPr>
+        <p:txBody>
+          <a:bodyPr wrap="square" rtlCol="0" anchor="ctr"/>
+          <a:lstStyle/>
+          <a:p>
+            <a:pPr indent="0" marL="0">
+              <a:buNone/>
+            </a:pPr>
+            <a:r>
+              <a:rPr lang="en-US" sz="1000" dirty="0">
+                <a:solidFill>
+                  <a:srgbClr val="1A1A2E"/>
+                </a:solidFill>
+                <a:latin typeface="Calibri" pitchFamily="34" charset="0"/>
+                <a:ea typeface="Calibri" pitchFamily="34" charset="-122"/>
+                <a:cs typeface="Calibri" pitchFamily="34" charset="-120"/>
+              </a:rPr>
+              <a:t>Venue #309 (Waiting Rooms)</a:t>
+            </a:r>
+            <a:endParaRPr lang="en-US" sz="1000" dirty="0"/>
           </a:p>
         </p:txBody>
       </p:sp>
@@ -8463,8 +8120,47 @@
         </p:nvSpPr>
         <p:spPr>
           <a:xfrm>
-            <a:off x="6263640" y="3593592"/>
-            <a:ext cx="3977640" cy="219456"/>
+            <a:off x="9966960" y="3502152"/>
+            <a:ext cx="1691640" cy="274320"/>
+          </a:xfrm>
+          <a:prstGeom prst="rect">
+            <a:avLst/>
+          </a:prstGeom>
+          <a:noFill/>
+          <a:ln/>
+        </p:spPr>
+        <p:txBody>
+          <a:bodyPr wrap="square" rtlCol="0" anchor="ctr"/>
+          <a:lstStyle/>
+          <a:p>
+            <a:pPr algn="r" indent="0" marL="0">
+              <a:buNone/>
+            </a:pPr>
+            <a:r>
+              <a:rPr lang="en-US" sz="1000" b="1" dirty="0">
+                <a:solidFill>
+                  <a:srgbClr val="B8500A"/>
+                </a:solidFill>
+                <a:latin typeface="Calibri" pitchFamily="34" charset="0"/>
+                <a:ea typeface="Calibri" pitchFamily="34" charset="-122"/>
+                <a:cs typeface="Calibri" pitchFamily="34" charset="-120"/>
+              </a:rPr>
+              <a:t>-61%</a:t>
+            </a:r>
+            <a:endParaRPr lang="en-US" sz="1000" dirty="0"/>
+          </a:p>
+        </p:txBody>
+      </p:sp>
+      <p:sp>
+        <p:nvSpPr>
+          <p:cNvPr id="24" name="Text 21"/>
+          <p:cNvSpPr/>
+          <p:nvPr/>
+        </p:nvSpPr>
+        <p:spPr>
+          <a:xfrm>
+            <a:off x="6263640" y="3794760"/>
+            <a:ext cx="3657600" cy="274320"/>
           </a:xfrm>
           <a:prstGeom prst="rect">
             <a:avLst/>
@@ -8488,7 +8184,7 @@
                 <a:ea typeface="Calibri" pitchFamily="34" charset="-122"/>
                 <a:cs typeface="Calibri" pitchFamily="34" charset="-120"/>
               </a:rPr>
-              <a:t>Venue #200 (Bars)</a:t>
+              <a:t>Venue #53 (Restaurants)</a:t>
             </a:r>
             <a:endParaRPr lang="en-US" sz="1000" dirty="0"/>
           </a:p>
@@ -8496,14 +8192,14 @@
       </p:sp>
       <p:sp>
         <p:nvSpPr>
-          <p:cNvPr id="24" name="Text 21"/>
-          <p:cNvSpPr/>
-          <p:nvPr/>
-        </p:nvSpPr>
-        <p:spPr>
-          <a:xfrm>
-            <a:off x="10241280" y="3593592"/>
-            <a:ext cx="1417320" cy="219456"/>
+          <p:cNvPr id="25" name="Text 22"/>
+          <p:cNvSpPr/>
+          <p:nvPr/>
+        </p:nvSpPr>
+        <p:spPr>
+          <a:xfrm>
+            <a:off x="9966960" y="3794760"/>
+            <a:ext cx="1691640" cy="274320"/>
           </a:xfrm>
           <a:prstGeom prst="rect">
             <a:avLst/>
@@ -8527,7 +8223,7 @@
                 <a:ea typeface="Calibri" pitchFamily="34" charset="-122"/>
                 <a:cs typeface="Calibri" pitchFamily="34" charset="-120"/>
               </a:rPr>
-              <a:t>55%</a:t>
+              <a:t>-61%</a:t>
             </a:r>
             <a:endParaRPr lang="en-US" sz="1000" dirty="0"/>
           </a:p>
@@ -8535,53 +8231,14 @@
       </p:sp>
       <p:sp>
         <p:nvSpPr>
-          <p:cNvPr id="25" name="Text 22"/>
-          <p:cNvSpPr/>
-          <p:nvPr/>
-        </p:nvSpPr>
-        <p:spPr>
-          <a:xfrm>
-            <a:off x="6263640" y="3794760"/>
-            <a:ext cx="5394960" cy="201168"/>
-          </a:xfrm>
-          <a:prstGeom prst="rect">
-            <a:avLst/>
-          </a:prstGeom>
-          <a:noFill/>
-          <a:ln/>
-        </p:spPr>
-        <p:txBody>
-          <a:bodyPr wrap="square" rtlCol="0" anchor="ctr"/>
-          <a:lstStyle/>
-          <a:p>
-            <a:pPr indent="0" marL="0">
-              <a:buNone/>
-            </a:pPr>
-            <a:r>
-              <a:rPr lang="en-US" sz="900" i="1" dirty="0">
-                <a:solidFill>
-                  <a:srgbClr val="8A4B0A"/>
-                </a:solidFill>
-                <a:latin typeface="Calibri" pitchFamily="34" charset="0"/>
-                <a:ea typeface="Calibri" pitchFamily="34" charset="-122"/>
-                <a:cs typeface="Calibri" pitchFamily="34" charset="-120"/>
-              </a:rPr>
-              <a:t>engagement declining → content/placement review</a:t>
-            </a:r>
-            <a:endParaRPr lang="en-US" sz="900" dirty="0"/>
-          </a:p>
-        </p:txBody>
-      </p:sp>
-      <p:sp>
-        <p:nvSpPr>
           <p:cNvPr id="26" name="Text 23"/>
           <p:cNvSpPr/>
           <p:nvPr/>
         </p:nvSpPr>
         <p:spPr>
           <a:xfrm>
-            <a:off x="6263640" y="4014216"/>
-            <a:ext cx="3977640" cy="219456"/>
+            <a:off x="6263640" y="4087368"/>
+            <a:ext cx="3657600" cy="274320"/>
           </a:xfrm>
           <a:prstGeom prst="rect">
             <a:avLst/>
@@ -8605,7 +8262,7 @@
                 <a:ea typeface="Calibri" pitchFamily="34" charset="-122"/>
                 <a:cs typeface="Calibri" pitchFamily="34" charset="-120"/>
               </a:rPr>
-              <a:t>Venue #12 (Restaurants)</a:t>
+              <a:t>Venue #247 (Bars)</a:t>
             </a:r>
             <a:endParaRPr lang="en-US" sz="1000" dirty="0"/>
           </a:p>
@@ -8619,8 +8276,8 @@
         </p:nvSpPr>
         <p:spPr>
           <a:xfrm>
-            <a:off x="10241280" y="4014216"/>
-            <a:ext cx="1417320" cy="219456"/>
+            <a:off x="9966960" y="4087368"/>
+            <a:ext cx="1691640" cy="274320"/>
           </a:xfrm>
           <a:prstGeom prst="rect">
             <a:avLst/>
@@ -8644,7 +8301,7 @@
                 <a:ea typeface="Calibri" pitchFamily="34" charset="-122"/>
                 <a:cs typeface="Calibri" pitchFamily="34" charset="-120"/>
               </a:rPr>
-              <a:t>52%</a:t>
+              <a:t>-60%</a:t>
             </a:r>
             <a:endParaRPr lang="en-US" sz="1000" dirty="0"/>
           </a:p>
@@ -8658,47 +8315,8 @@
         </p:nvSpPr>
         <p:spPr>
           <a:xfrm>
-            <a:off x="6263640" y="4215384"/>
-            <a:ext cx="5394960" cy="201168"/>
-          </a:xfrm>
-          <a:prstGeom prst="rect">
-            <a:avLst/>
-          </a:prstGeom>
-          <a:noFill/>
-          <a:ln/>
-        </p:spPr>
-        <p:txBody>
-          <a:bodyPr wrap="square" rtlCol="0" anchor="ctr"/>
-          <a:lstStyle/>
-          <a:p>
-            <a:pPr indent="0" marL="0">
-              <a:buNone/>
-            </a:pPr>
-            <a:r>
-              <a:rPr lang="en-US" sz="900" i="1" dirty="0">
-                <a:solidFill>
-                  <a:srgbClr val="8A4B0A"/>
-                </a:solidFill>
-                <a:latin typeface="Calibri" pitchFamily="34" charset="0"/>
-                <a:ea typeface="Calibri" pitchFamily="34" charset="-122"/>
-                <a:cs typeface="Calibri" pitchFamily="34" charset="-120"/>
-              </a:rPr>
-              <a:t>uptime issue → dispatch technical support</a:t>
-            </a:r>
-            <a:endParaRPr lang="en-US" sz="900" dirty="0"/>
-          </a:p>
-        </p:txBody>
-      </p:sp>
-      <p:sp>
-        <p:nvSpPr>
-          <p:cNvPr id="29" name="Text 26"/>
-          <p:cNvSpPr/>
-          <p:nvPr/>
-        </p:nvSpPr>
-        <p:spPr>
-          <a:xfrm>
-            <a:off x="6263640" y="4526280"/>
-            <a:ext cx="5394960" cy="237744"/>
+            <a:off x="6263640" y="4562856"/>
+            <a:ext cx="5394960" cy="274320"/>
           </a:xfrm>
           <a:prstGeom prst="rect">
             <a:avLst/>
@@ -8722,7 +8340,7 @@
                 <a:ea typeface="Cambria" pitchFamily="34" charset="-122"/>
                 <a:cs typeface="Cambria" pitchFamily="34" charset="-120"/>
               </a:rPr>
-              <a:t>Priority quadrant (Q3 revenue × Q4 risk)</a:t>
+              <a:t>Top prospect venues (expansion priority)</a:t>
             </a:r>
             <a:endParaRPr lang="en-US" sz="1200" dirty="0"/>
           </a:p>
@@ -8730,14 +8348,92 @@
       </p:sp>
       <p:sp>
         <p:nvSpPr>
+          <p:cNvPr id="29" name="Text 26"/>
+          <p:cNvSpPr/>
+          <p:nvPr/>
+        </p:nvSpPr>
+        <p:spPr>
+          <a:xfrm>
+            <a:off x="6263640" y="4892040"/>
+            <a:ext cx="4023360" cy="274320"/>
+          </a:xfrm>
+          <a:prstGeom prst="rect">
+            <a:avLst/>
+          </a:prstGeom>
+          <a:noFill/>
+          <a:ln/>
+        </p:spPr>
+        <p:txBody>
+          <a:bodyPr wrap="square" rtlCol="0" anchor="ctr"/>
+          <a:lstStyle/>
+          <a:p>
+            <a:pPr indent="0" marL="0">
+              <a:buNone/>
+            </a:pPr>
+            <a:r>
+              <a:rPr lang="en-US" sz="1000" dirty="0">
+                <a:solidFill>
+                  <a:srgbClr val="1A1A2E"/>
+                </a:solidFill>
+                <a:latin typeface="Calibri" pitchFamily="34" charset="0"/>
+                <a:ea typeface="Calibri" pitchFamily="34" charset="-122"/>
+                <a:cs typeface="Calibri" pitchFamily="34" charset="-120"/>
+              </a:rPr>
+              <a:t>P0018 — Bars (existing market)</a:t>
+            </a:r>
+            <a:endParaRPr lang="en-US" sz="1000" dirty="0"/>
+          </a:p>
+        </p:txBody>
+      </p:sp>
+      <p:sp>
+        <p:nvSpPr>
           <p:cNvPr id="30" name="Text 27"/>
           <p:cNvSpPr/>
           <p:nvPr/>
         </p:nvSpPr>
         <p:spPr>
           <a:xfrm>
-            <a:off x="6263640" y="4800600"/>
-            <a:ext cx="4023360" cy="237744"/>
+            <a:off x="10195560" y="4892040"/>
+            <a:ext cx="1463040" cy="274320"/>
+          </a:xfrm>
+          <a:prstGeom prst="rect">
+            <a:avLst/>
+          </a:prstGeom>
+          <a:noFill/>
+          <a:ln/>
+        </p:spPr>
+        <p:txBody>
+          <a:bodyPr wrap="square" rtlCol="0" anchor="ctr"/>
+          <a:lstStyle/>
+          <a:p>
+            <a:pPr algn="r" indent="0" marL="0">
+              <a:buNone/>
+            </a:pPr>
+            <a:r>
+              <a:rPr lang="en-US" sz="1000" b="1" dirty="0">
+                <a:solidFill>
+                  <a:srgbClr val="2C7A57"/>
+                </a:solidFill>
+                <a:latin typeface="Calibri" pitchFamily="34" charset="0"/>
+                <a:ea typeface="Calibri" pitchFamily="34" charset="-122"/>
+                <a:cs typeface="Calibri" pitchFamily="34" charset="-120"/>
+              </a:rPr>
+              <a:t>$684</a:t>
+            </a:r>
+            <a:endParaRPr lang="en-US" sz="1000" dirty="0"/>
+          </a:p>
+        </p:txBody>
+      </p:sp>
+      <p:sp>
+        <p:nvSpPr>
+          <p:cNvPr id="31" name="Text 28"/>
+          <p:cNvSpPr/>
+          <p:nvPr/>
+        </p:nvSpPr>
+        <p:spPr>
+          <a:xfrm>
+            <a:off x="6263640" y="5184648"/>
+            <a:ext cx="4023360" cy="274320"/>
           </a:xfrm>
           <a:prstGeom prst="rect">
             <a:avLst/>
@@ -8761,7 +8457,7 @@
                 <a:ea typeface="Calibri" pitchFamily="34" charset="-122"/>
                 <a:cs typeface="Calibri" pitchFamily="34" charset="-120"/>
               </a:rPr>
-              <a:t>Save now (high value, high risk)</a:t>
+              <a:t>P0055 — Restaurants (existing market)</a:t>
             </a:r>
             <a:endParaRPr lang="en-US" sz="1000" dirty="0"/>
           </a:p>
@@ -8769,14 +8465,14 @@
       </p:sp>
       <p:sp>
         <p:nvSpPr>
-          <p:cNvPr id="31" name="Text 28"/>
-          <p:cNvSpPr/>
-          <p:nvPr/>
-        </p:nvSpPr>
-        <p:spPr>
-          <a:xfrm>
-            <a:off x="10195560" y="4800600"/>
-            <a:ext cx="1463040" cy="237744"/>
+          <p:cNvPr id="32" name="Text 29"/>
+          <p:cNvSpPr/>
+          <p:nvPr/>
+        </p:nvSpPr>
+        <p:spPr>
+          <a:xfrm>
+            <a:off x="10195560" y="5184648"/>
+            <a:ext cx="1463040" cy="274320"/>
           </a:xfrm>
           <a:prstGeom prst="rect">
             <a:avLst/>
@@ -8794,13 +8490,13 @@
             <a:r>
               <a:rPr lang="en-US" sz="1000" b="1" dirty="0">
                 <a:solidFill>
-                  <a:srgbClr val="B8500A"/>
-                </a:solidFill>
-                <a:latin typeface="Calibri" pitchFamily="34" charset="0"/>
-                <a:ea typeface="Calibri" pitchFamily="34" charset="-122"/>
-                <a:cs typeface="Calibri" pitchFamily="34" charset="-120"/>
-              </a:rPr>
-              <a:t>136</a:t>
+                  <a:srgbClr val="2C7A57"/>
+                </a:solidFill>
+                <a:latin typeface="Calibri" pitchFamily="34" charset="0"/>
+                <a:ea typeface="Calibri" pitchFamily="34" charset="-122"/>
+                <a:cs typeface="Calibri" pitchFamily="34" charset="-120"/>
+              </a:rPr>
+              <a:t>$524</a:t>
             </a:r>
             <a:endParaRPr lang="en-US" sz="1000" dirty="0"/>
           </a:p>
@@ -8808,14 +8504,14 @@
       </p:sp>
       <p:sp>
         <p:nvSpPr>
-          <p:cNvPr id="32" name="Text 29"/>
-          <p:cNvSpPr/>
-          <p:nvPr/>
-        </p:nvSpPr>
-        <p:spPr>
-          <a:xfrm>
-            <a:off x="6263640" y="5047488"/>
-            <a:ext cx="4023360" cy="237744"/>
+          <p:cNvPr id="33" name="Text 30"/>
+          <p:cNvSpPr/>
+          <p:nvPr/>
+        </p:nvSpPr>
+        <p:spPr>
+          <a:xfrm>
+            <a:off x="6263640" y="5477256"/>
+            <a:ext cx="4023360" cy="274320"/>
           </a:xfrm>
           <a:prstGeom prst="rect">
             <a:avLst/>
@@ -8839,7 +8535,7 @@
                 <a:ea typeface="Calibri" pitchFamily="34" charset="-122"/>
                 <a:cs typeface="Calibri" pitchFamily="34" charset="-120"/>
               </a:rPr>
-              <a:t>Monitor (low value, low risk)</a:t>
+              <a:t>P0000 — Bars (new market)</a:t>
             </a:r>
             <a:endParaRPr lang="en-US" sz="1000" dirty="0"/>
           </a:p>
@@ -8847,14 +8543,14 @@
       </p:sp>
       <p:sp>
         <p:nvSpPr>
-          <p:cNvPr id="33" name="Text 30"/>
-          <p:cNvSpPr/>
-          <p:nvPr/>
-        </p:nvSpPr>
-        <p:spPr>
-          <a:xfrm>
-            <a:off x="10195560" y="5047488"/>
-            <a:ext cx="1463040" cy="237744"/>
+          <p:cNvPr id="34" name="Text 31"/>
+          <p:cNvSpPr/>
+          <p:nvPr/>
+        </p:nvSpPr>
+        <p:spPr>
+          <a:xfrm>
+            <a:off x="10195560" y="5477256"/>
+            <a:ext cx="1463040" cy="274320"/>
           </a:xfrm>
           <a:prstGeom prst="rect">
             <a:avLst/>
@@ -8872,13 +8568,133 @@
             <a:r>
               <a:rPr lang="en-US" sz="1000" b="1" dirty="0">
                 <a:solidFill>
+                  <a:srgbClr val="2C7A57"/>
+                </a:solidFill>
+                <a:latin typeface="Calibri" pitchFamily="34" charset="0"/>
+                <a:ea typeface="Calibri" pitchFamily="34" charset="-122"/>
+                <a:cs typeface="Calibri" pitchFamily="34" charset="-120"/>
+              </a:rPr>
+              <a:t>$500</a:t>
+            </a:r>
+            <a:endParaRPr lang="en-US" sz="1000" dirty="0"/>
+          </a:p>
+        </p:txBody>
+      </p:sp>
+      <p:sp>
+        <p:nvSpPr>
+          <p:cNvPr id="35" name="Text 32"/>
+          <p:cNvSpPr/>
+          <p:nvPr/>
+        </p:nvSpPr>
+        <p:spPr>
+          <a:xfrm>
+            <a:off x="6263640" y="5769864"/>
+            <a:ext cx="4023360" cy="274320"/>
+          </a:xfrm>
+          <a:prstGeom prst="rect">
+            <a:avLst/>
+          </a:prstGeom>
+          <a:noFill/>
+          <a:ln/>
+        </p:spPr>
+        <p:txBody>
+          <a:bodyPr wrap="square" rtlCol="0" anchor="ctr"/>
+          <a:lstStyle/>
+          <a:p>
+            <a:pPr indent="0" marL="0">
+              <a:buNone/>
+            </a:pPr>
+            <a:r>
+              <a:rPr lang="en-US" sz="1000" dirty="0">
+                <a:solidFill>
+                  <a:srgbClr val="1A1A2E"/>
+                </a:solidFill>
+                <a:latin typeface="Calibri" pitchFamily="34" charset="0"/>
+                <a:ea typeface="Calibri" pitchFamily="34" charset="-122"/>
+                <a:cs typeface="Calibri" pitchFamily="34" charset="-120"/>
+              </a:rPr>
+              <a:t>P0001 — Bars (new market)</a:t>
+            </a:r>
+            <a:endParaRPr lang="en-US" sz="1000" dirty="0"/>
+          </a:p>
+        </p:txBody>
+      </p:sp>
+      <p:sp>
+        <p:nvSpPr>
+          <p:cNvPr id="36" name="Text 33"/>
+          <p:cNvSpPr/>
+          <p:nvPr/>
+        </p:nvSpPr>
+        <p:spPr>
+          <a:xfrm>
+            <a:off x="10195560" y="5769864"/>
+            <a:ext cx="1463040" cy="274320"/>
+          </a:xfrm>
+          <a:prstGeom prst="rect">
+            <a:avLst/>
+          </a:prstGeom>
+          <a:noFill/>
+          <a:ln/>
+        </p:spPr>
+        <p:txBody>
+          <a:bodyPr wrap="square" rtlCol="0" anchor="ctr"/>
+          <a:lstStyle/>
+          <a:p>
+            <a:pPr algn="r" indent="0" marL="0">
+              <a:buNone/>
+            </a:pPr>
+            <a:r>
+              <a:rPr lang="en-US" sz="1000" b="1" dirty="0">
+                <a:solidFill>
+                  <a:srgbClr val="2C7A57"/>
+                </a:solidFill>
+                <a:latin typeface="Calibri" pitchFamily="34" charset="0"/>
+                <a:ea typeface="Calibri" pitchFamily="34" charset="-122"/>
+                <a:cs typeface="Calibri" pitchFamily="34" charset="-120"/>
+              </a:rPr>
+              <a:t>$496</a:t>
+            </a:r>
+            <a:endParaRPr lang="en-US" sz="1000" dirty="0"/>
+          </a:p>
+        </p:txBody>
+      </p:sp>
+      <p:sp>
+        <p:nvSpPr>
+          <p:cNvPr id="37" name="Text 34"/>
+          <p:cNvSpPr/>
+          <p:nvPr/>
+        </p:nvSpPr>
+        <p:spPr>
+          <a:xfrm>
+            <a:off x="548640" y="6080760"/>
+            <a:ext cx="11064240" cy="411480"/>
+          </a:xfrm>
+          <a:prstGeom prst="rect">
+            <a:avLst/>
+          </a:prstGeom>
+          <a:noFill/>
+          <a:ln/>
+        </p:spPr>
+        <p:txBody>
+          <a:bodyPr wrap="square" rtlCol="0" anchor="ctr"/>
+          <a:lstStyle/>
+          <a:p>
+            <a:pPr indent="0" marL="0">
+              <a:lnSpc>
+                <a:spcPts val="1200"/>
+              </a:lnSpc>
+              <a:buNone/>
+            </a:pPr>
+            <a:r>
+              <a:rPr lang="en-US" sz="1000" i="1" dirty="0">
+                <a:solidFill>
                   <a:srgbClr val="5B6178"/>
                 </a:solidFill>
                 <a:latin typeface="Calibri" pitchFamily="34" charset="0"/>
                 <a:ea typeface="Calibri" pitchFamily="34" charset="-122"/>
                 <a:cs typeface="Calibri" pitchFamily="34" charset="-120"/>
               </a:rPr>
-              <a:t>136</a:t>
+              <a:t>Flags come from 5-fold out-of-fold predictions, never a model scoring the venue it was trained on. The calibrated-lift feature carries near-zero importance — honest, since it's constant within venue_type once venue_type itself is a feature.</a:t>
             </a:r>
             <a:endParaRPr lang="en-US" sz="1000" dirty="0"/>
           </a:p>
@@ -8886,205 +8702,7 @@
       </p:sp>
       <p:sp>
         <p:nvSpPr>
-          <p:cNvPr id="34" name="Text 31"/>
-          <p:cNvSpPr/>
-          <p:nvPr/>
-        </p:nvSpPr>
-        <p:spPr>
-          <a:xfrm>
-            <a:off x="6263640" y="5294376"/>
-            <a:ext cx="4023360" cy="237744"/>
-          </a:xfrm>
-          <a:prstGeom prst="rect">
-            <a:avLst/>
-          </a:prstGeom>
-          <a:noFill/>
-          <a:ln/>
-        </p:spPr>
-        <p:txBody>
-          <a:bodyPr wrap="square" rtlCol="0" anchor="ctr"/>
-          <a:lstStyle/>
-          <a:p>
-            <a:pPr indent="0" marL="0">
-              <a:buNone/>
-            </a:pPr>
-            <a:r>
-              <a:rPr lang="en-US" sz="1000" dirty="0">
-                <a:solidFill>
-                  <a:srgbClr val="1A1A2E"/>
-                </a:solidFill>
-                <a:latin typeface="Calibri" pitchFamily="34" charset="0"/>
-                <a:ea typeface="Calibri" pitchFamily="34" charset="-122"/>
-                <a:cs typeface="Calibri" pitchFamily="34" charset="-120"/>
-              </a:rPr>
-              <a:t>Protect (high value, low risk)</a:t>
-            </a:r>
-            <a:endParaRPr lang="en-US" sz="1000" dirty="0"/>
-          </a:p>
-        </p:txBody>
-      </p:sp>
-      <p:sp>
-        <p:nvSpPr>
-          <p:cNvPr id="35" name="Text 32"/>
-          <p:cNvSpPr/>
-          <p:nvPr/>
-        </p:nvSpPr>
-        <p:spPr>
-          <a:xfrm>
-            <a:off x="10195560" y="5294376"/>
-            <a:ext cx="1463040" cy="237744"/>
-          </a:xfrm>
-          <a:prstGeom prst="rect">
-            <a:avLst/>
-          </a:prstGeom>
-          <a:noFill/>
-          <a:ln/>
-        </p:spPr>
-        <p:txBody>
-          <a:bodyPr wrap="square" rtlCol="0" anchor="ctr"/>
-          <a:lstStyle/>
-          <a:p>
-            <a:pPr algn="r" indent="0" marL="0">
-              <a:buNone/>
-            </a:pPr>
-            <a:r>
-              <a:rPr lang="en-US" sz="1000" b="1" dirty="0">
-                <a:solidFill>
-                  <a:srgbClr val="2C7A57"/>
-                </a:solidFill>
-                <a:latin typeface="Calibri" pitchFamily="34" charset="0"/>
-                <a:ea typeface="Calibri" pitchFamily="34" charset="-122"/>
-                <a:cs typeface="Calibri" pitchFamily="34" charset="-120"/>
-              </a:rPr>
-              <a:t>64</a:t>
-            </a:r>
-            <a:endParaRPr lang="en-US" sz="1000" dirty="0"/>
-          </a:p>
-        </p:txBody>
-      </p:sp>
-      <p:sp>
-        <p:nvSpPr>
-          <p:cNvPr id="36" name="Text 33"/>
-          <p:cNvSpPr/>
-          <p:nvPr/>
-        </p:nvSpPr>
-        <p:spPr>
-          <a:xfrm>
-            <a:off x="6263640" y="5541264"/>
-            <a:ext cx="4023360" cy="237744"/>
-          </a:xfrm>
-          <a:prstGeom prst="rect">
-            <a:avLst/>
-          </a:prstGeom>
-          <a:noFill/>
-          <a:ln/>
-        </p:spPr>
-        <p:txBody>
-          <a:bodyPr wrap="square" rtlCol="0" anchor="ctr"/>
-          <a:lstStyle/>
-          <a:p>
-            <a:pPr indent="0" marL="0">
-              <a:buNone/>
-            </a:pPr>
-            <a:r>
-              <a:rPr lang="en-US" sz="1000" dirty="0">
-                <a:solidFill>
-                  <a:srgbClr val="1A1A2E"/>
-                </a:solidFill>
-                <a:latin typeface="Calibri" pitchFamily="34" charset="0"/>
-                <a:ea typeface="Calibri" pitchFamily="34" charset="-122"/>
-                <a:cs typeface="Calibri" pitchFamily="34" charset="-120"/>
-              </a:rPr>
-              <a:t>Low priority (low value, high risk)</a:t>
-            </a:r>
-            <a:endParaRPr lang="en-US" sz="1000" dirty="0"/>
-          </a:p>
-        </p:txBody>
-      </p:sp>
-      <p:sp>
-        <p:nvSpPr>
-          <p:cNvPr id="37" name="Text 34"/>
-          <p:cNvSpPr/>
-          <p:nvPr/>
-        </p:nvSpPr>
-        <p:spPr>
-          <a:xfrm>
-            <a:off x="10195560" y="5541264"/>
-            <a:ext cx="1463040" cy="237744"/>
-          </a:xfrm>
-          <a:prstGeom prst="rect">
-            <a:avLst/>
-          </a:prstGeom>
-          <a:noFill/>
-          <a:ln/>
-        </p:spPr>
-        <p:txBody>
-          <a:bodyPr wrap="square" rtlCol="0" anchor="ctr"/>
-          <a:lstStyle/>
-          <a:p>
-            <a:pPr algn="r" indent="0" marL="0">
-              <a:buNone/>
-            </a:pPr>
-            <a:r>
-              <a:rPr lang="en-US" sz="1000" b="1" dirty="0">
-                <a:solidFill>
-                  <a:srgbClr val="5B6178"/>
-                </a:solidFill>
-                <a:latin typeface="Calibri" pitchFamily="34" charset="0"/>
-                <a:ea typeface="Calibri" pitchFamily="34" charset="-122"/>
-                <a:cs typeface="Calibri" pitchFamily="34" charset="-120"/>
-              </a:rPr>
-              <a:t>64</a:t>
-            </a:r>
-            <a:endParaRPr lang="en-US" sz="1000" dirty="0"/>
-          </a:p>
-        </p:txBody>
-      </p:sp>
-      <p:sp>
-        <p:nvSpPr>
           <p:cNvPr id="38" name="Text 35"/>
-          <p:cNvSpPr/>
-          <p:nvPr/>
-        </p:nvSpPr>
-        <p:spPr>
-          <a:xfrm>
-            <a:off x="548640" y="6016752"/>
-            <a:ext cx="11064240" cy="548640"/>
-          </a:xfrm>
-          <a:prstGeom prst="rect">
-            <a:avLst/>
-          </a:prstGeom>
-          <a:noFill/>
-          <a:ln/>
-        </p:spPr>
-        <p:txBody>
-          <a:bodyPr wrap="square" rtlCol="0" anchor="ctr"/>
-          <a:lstStyle/>
-          <a:p>
-            <a:pPr indent="0" marL="0">
-              <a:lnSpc>
-                <a:spcPts val="1050"/>
-              </a:lnSpc>
-              <a:buNone/>
-            </a:pPr>
-            <a:r>
-              <a:rPr lang="en-US" sz="870" i="1" dirty="0">
-                <a:solidFill>
-                  <a:srgbClr val="5B6178"/>
-                </a:solidFill>
-                <a:latin typeface="Calibri" pitchFamily="34" charset="0"/>
-                <a:ea typeface="Calibri" pitchFamily="34" charset="-122"/>
-                <a:cs typeface="Calibri" pitchFamily="34" charset="-120"/>
-              </a:rPr>
-              <a:t>Flags come from 5-fold OOF predictions; AUC/PR-AUC read modest next to the revenue model's R² because churn is a rarer, noisier event to call than revenue — typical for a churn classifier, not a modeling miss. realized_ad_revenue's importance is a venue_type confound, not a causal driver. Each "Save now" / flagged venue also carries a SHAP top driver (from the fold model that never saw it) mapped to a concrete action — technical dispatch, AM retention call, content review — not a generic "reach out."</a:t>
-            </a:r>
-            <a:endParaRPr lang="en-US" sz="870" dirty="0"/>
-          </a:p>
-        </p:txBody>
-      </p:sp>
-      <p:sp>
-        <p:nvSpPr>
-          <p:cNvPr id="39" name="Text 36"/>
           <p:cNvSpPr/>
           <p:nvPr/>
         </p:nvSpPr>
@@ -9115,7 +8733,7 @@
                 <a:ea typeface="Calibri" pitchFamily="34" charset="-122"/>
                 <a:cs typeface="Calibri" pitchFamily="34" charset="-120"/>
               </a:rPr>
-              <a:t>Venue retention</a:t>
+              <a:t>Venue economics</a:t>
             </a:r>
             <a:endParaRPr lang="en-US" sz="900" dirty="0"/>
           </a:p>
@@ -9132,6 +8750,1420 @@
 <file path=ppt/slides/slide15.xml><?xml version="1.0" encoding="utf-8"?>
 <p:sld xmlns:a="http://schemas.openxmlformats.org/drawingml/2006/main" xmlns:r="http://schemas.openxmlformats.org/officeDocument/2006/relationships" xmlns:p="http://schemas.openxmlformats.org/presentationml/2006/main">
   <p:cSld name="Slide 15">
+    <p:bg>
+      <p:bgPr>
+        <a:solidFill>
+          <a:srgbClr val="FFFFFF"/>
+        </a:solidFill>
+      </p:bgPr>
+    </p:bg>
+    <p:spTree>
+      <p:nvGrpSpPr>
+        <p:cNvPr id="1" name=""/>
+        <p:cNvGrpSpPr/>
+        <p:nvPr/>
+      </p:nvGrpSpPr>
+      <p:grpSpPr>
+        <a:xfrm>
+          <a:off x="0" y="0"/>
+          <a:ext cx="0" cy="0"/>
+          <a:chOff x="0" y="0"/>
+          <a:chExt cx="0" cy="0"/>
+        </a:xfrm>
+      </p:grpSpPr>
+      <p:sp>
+        <p:nvSpPr>
+          <p:cNvPr id="2" name="Text 0"/>
+          <p:cNvSpPr/>
+          <p:nvPr/>
+        </p:nvSpPr>
+        <p:spPr>
+          <a:xfrm>
+            <a:off x="548640" y="411480"/>
+            <a:ext cx="11155680" cy="594360"/>
+          </a:xfrm>
+          <a:prstGeom prst="rect">
+            <a:avLst/>
+          </a:prstGeom>
+          <a:noFill/>
+          <a:ln/>
+        </p:spPr>
+        <p:txBody>
+          <a:bodyPr wrap="square" rtlCol="0" anchor="ctr"/>
+          <a:lstStyle/>
+          <a:p>
+            <a:pPr indent="0" marL="0">
+              <a:buNone/>
+            </a:pPr>
+            <a:r>
+              <a:rPr lang="en-US" sz="2500" b="1" dirty="0">
+                <a:solidFill>
+                  <a:srgbClr val="1E2761"/>
+                </a:solidFill>
+                <a:latin typeface="Cambria" pitchFamily="34" charset="0"/>
+                <a:ea typeface="Cambria" pitchFamily="34" charset="-122"/>
+                <a:cs typeface="Cambria" pitchFamily="34" charset="-120"/>
+              </a:rPr>
+              <a:t>Predicting venue churn risk, honestly</a:t>
+            </a:r>
+            <a:endParaRPr lang="en-US" sz="2500" dirty="0"/>
+          </a:p>
+        </p:txBody>
+      </p:sp>
+      <p:sp>
+        <p:nvSpPr>
+          <p:cNvPr id="3" name="Shape 1"/>
+          <p:cNvSpPr/>
+          <p:nvPr/>
+        </p:nvSpPr>
+        <p:spPr>
+          <a:xfrm>
+            <a:off x="8229600" y="146304"/>
+            <a:ext cx="3410712" cy="246888"/>
+          </a:xfrm>
+          <a:prstGeom prst="roundRect">
+            <a:avLst>
+              <a:gd name="adj" fmla="val 22222"/>
+            </a:avLst>
+          </a:prstGeom>
+          <a:solidFill>
+            <a:srgbClr val="FFFFFF"/>
+          </a:solidFill>
+          <a:ln w="15875">
+            <a:solidFill>
+              <a:srgbClr val="8E3B60"/>
+            </a:solidFill>
+            <a:prstDash val="solid"/>
+          </a:ln>
+        </p:spPr>
+      </p:sp>
+      <p:sp>
+        <p:nvSpPr>
+          <p:cNvPr id="4" name="Text 2"/>
+          <p:cNvSpPr/>
+          <p:nvPr/>
+        </p:nvSpPr>
+        <p:spPr>
+          <a:xfrm>
+            <a:off x="8229600" y="146304"/>
+            <a:ext cx="3410712" cy="246888"/>
+          </a:xfrm>
+          <a:prstGeom prst="rect">
+            <a:avLst/>
+          </a:prstGeom>
+          <a:noFill/>
+          <a:ln/>
+        </p:spPr>
+        <p:txBody>
+          <a:bodyPr wrap="square" rtlCol="0" anchor="ctr"/>
+          <a:lstStyle/>
+          <a:p>
+            <a:pPr algn="ctr" indent="0" marL="0">
+              <a:buNone/>
+            </a:pPr>
+            <a:r>
+              <a:rPr lang="en-US" sz="950" b="1" dirty="0">
+                <a:solidFill>
+                  <a:srgbClr val="8E3B60"/>
+                </a:solidFill>
+                <a:latin typeface="Calibri" pitchFamily="34" charset="0"/>
+                <a:ea typeface="Calibri" pitchFamily="34" charset="-122"/>
+                <a:cs typeface="Calibri" pitchFamily="34" charset="-120"/>
+              </a:rPr>
+              <a:t>Step 6 of 6 · Answers Q4</a:t>
+            </a:r>
+            <a:endParaRPr lang="en-US" sz="950" dirty="0"/>
+          </a:p>
+        </p:txBody>
+      </p:sp>
+      <p:sp>
+        <p:nvSpPr>
+          <p:cNvPr id="5" name="Text 3"/>
+          <p:cNvSpPr/>
+          <p:nvPr/>
+        </p:nvSpPr>
+        <p:spPr>
+          <a:xfrm>
+            <a:off x="548640" y="1005840"/>
+            <a:ext cx="10972800" cy="365760"/>
+          </a:xfrm>
+          <a:prstGeom prst="rect">
+            <a:avLst/>
+          </a:prstGeom>
+          <a:noFill/>
+          <a:ln/>
+        </p:spPr>
+        <p:txBody>
+          <a:bodyPr wrap="square" rtlCol="0" anchor="ctr"/>
+          <a:lstStyle/>
+          <a:p>
+            <a:pPr indent="0" marL="0">
+              <a:buNone/>
+            </a:pPr>
+            <a:r>
+              <a:rPr lang="en-US" sz="1200" i="1" dirty="0">
+                <a:solidFill>
+                  <a:srgbClr val="5B6178"/>
+                </a:solidFill>
+                <a:latin typeface="Calibri" pitchFamily="34" charset="0"/>
+                <a:ea typeface="Calibri" pitchFamily="34" charset="-122"/>
+                <a:cs typeface="Calibri" pitchFamily="34" charset="-120"/>
+              </a:rPr>
+              <a:t>Gradient-boosted classifier on ops-visible signals (engagement, uptime, complaints, competitor outreach) — the other half of "what makes a venue valuable and what puts it at risk."</a:t>
+            </a:r>
+            <a:endParaRPr lang="en-US" sz="1200" dirty="0"/>
+          </a:p>
+        </p:txBody>
+      </p:sp>
+      <p:sp>
+        <p:nvSpPr>
+          <p:cNvPr id="6" name="Shape 4"/>
+          <p:cNvSpPr/>
+          <p:nvPr/>
+        </p:nvSpPr>
+        <p:spPr>
+          <a:xfrm>
+            <a:off x="548640" y="1508760"/>
+            <a:ext cx="2651760" cy="1051560"/>
+          </a:xfrm>
+          <a:prstGeom prst="roundRect">
+            <a:avLst>
+              <a:gd name="adj" fmla="val 6957"/>
+            </a:avLst>
+          </a:prstGeom>
+          <a:solidFill>
+            <a:srgbClr val="F5F7FC"/>
+          </a:solidFill>
+          <a:ln/>
+        </p:spPr>
+      </p:sp>
+      <p:sp>
+        <p:nvSpPr>
+          <p:cNvPr id="7" name="Text 5"/>
+          <p:cNvSpPr/>
+          <p:nvPr/>
+        </p:nvSpPr>
+        <p:spPr>
+          <a:xfrm>
+            <a:off x="685800" y="1618488"/>
+            <a:ext cx="2377440" cy="502920"/>
+          </a:xfrm>
+          <a:prstGeom prst="rect">
+            <a:avLst/>
+          </a:prstGeom>
+          <a:noFill/>
+          <a:ln/>
+        </p:spPr>
+        <p:txBody>
+          <a:bodyPr wrap="square" rtlCol="0" anchor="ctr"/>
+          <a:lstStyle/>
+          <a:p>
+            <a:pPr indent="0" marL="0">
+              <a:buNone/>
+            </a:pPr>
+            <a:r>
+              <a:rPr lang="en-US" sz="2200" b="1" dirty="0">
+                <a:solidFill>
+                  <a:srgbClr val="1E2761"/>
+                </a:solidFill>
+                <a:latin typeface="Calibri" pitchFamily="34" charset="0"/>
+                <a:ea typeface="Calibri" pitchFamily="34" charset="-122"/>
+                <a:cs typeface="Calibri" pitchFamily="34" charset="-120"/>
+              </a:rPr>
+              <a:t>0.65</a:t>
+            </a:r>
+            <a:endParaRPr lang="en-US" sz="2200" dirty="0"/>
+          </a:p>
+        </p:txBody>
+      </p:sp>
+      <p:sp>
+        <p:nvSpPr>
+          <p:cNvPr id="8" name="Text 6"/>
+          <p:cNvSpPr/>
+          <p:nvPr/>
+        </p:nvSpPr>
+        <p:spPr>
+          <a:xfrm>
+            <a:off x="685800" y="2130552"/>
+            <a:ext cx="2377440" cy="365760"/>
+          </a:xfrm>
+          <a:prstGeom prst="rect">
+            <a:avLst/>
+          </a:prstGeom>
+          <a:noFill/>
+          <a:ln/>
+        </p:spPr>
+        <p:txBody>
+          <a:bodyPr wrap="square" rtlCol="0" anchor="ctr"/>
+          <a:lstStyle/>
+          <a:p>
+            <a:pPr indent="0" marL="0">
+              <a:buNone/>
+            </a:pPr>
+            <a:r>
+              <a:rPr lang="en-US" sz="900" dirty="0">
+                <a:solidFill>
+                  <a:srgbClr val="5B6178"/>
+                </a:solidFill>
+                <a:latin typeface="Calibri" pitchFamily="34" charset="0"/>
+                <a:ea typeface="Calibri" pitchFamily="34" charset="-122"/>
+                <a:cs typeface="Calibri" pitchFamily="34" charset="-120"/>
+              </a:rPr>
+              <a:t>Held-out AUC</a:t>
+            </a:r>
+            <a:endParaRPr lang="en-US" sz="900" dirty="0"/>
+          </a:p>
+        </p:txBody>
+      </p:sp>
+      <p:sp>
+        <p:nvSpPr>
+          <p:cNvPr id="9" name="Shape 7"/>
+          <p:cNvSpPr/>
+          <p:nvPr/>
+        </p:nvSpPr>
+        <p:spPr>
+          <a:xfrm>
+            <a:off x="3337560" y="1508760"/>
+            <a:ext cx="2651760" cy="1051560"/>
+          </a:xfrm>
+          <a:prstGeom prst="roundRect">
+            <a:avLst>
+              <a:gd name="adj" fmla="val 6957"/>
+            </a:avLst>
+          </a:prstGeom>
+          <a:solidFill>
+            <a:srgbClr val="F5F7FC"/>
+          </a:solidFill>
+          <a:ln/>
+        </p:spPr>
+      </p:sp>
+      <p:sp>
+        <p:nvSpPr>
+          <p:cNvPr id="10" name="Text 8"/>
+          <p:cNvSpPr/>
+          <p:nvPr/>
+        </p:nvSpPr>
+        <p:spPr>
+          <a:xfrm>
+            <a:off x="3474720" y="1618488"/>
+            <a:ext cx="2377440" cy="502920"/>
+          </a:xfrm>
+          <a:prstGeom prst="rect">
+            <a:avLst/>
+          </a:prstGeom>
+          <a:noFill/>
+          <a:ln/>
+        </p:spPr>
+        <p:txBody>
+          <a:bodyPr wrap="square" rtlCol="0" anchor="ctr"/>
+          <a:lstStyle/>
+          <a:p>
+            <a:pPr indent="0" marL="0">
+              <a:buNone/>
+            </a:pPr>
+            <a:r>
+              <a:rPr lang="en-US" sz="2200" b="1" dirty="0">
+                <a:solidFill>
+                  <a:srgbClr val="1E2761"/>
+                </a:solidFill>
+                <a:latin typeface="Calibri" pitchFamily="34" charset="0"/>
+                <a:ea typeface="Calibri" pitchFamily="34" charset="-122"/>
+                <a:cs typeface="Calibri" pitchFamily="34" charset="-120"/>
+              </a:rPr>
+              <a:t>0.27</a:t>
+            </a:r>
+            <a:endParaRPr lang="en-US" sz="2200" dirty="0"/>
+          </a:p>
+        </p:txBody>
+      </p:sp>
+      <p:sp>
+        <p:nvSpPr>
+          <p:cNvPr id="11" name="Text 9"/>
+          <p:cNvSpPr/>
+          <p:nvPr/>
+        </p:nvSpPr>
+        <p:spPr>
+          <a:xfrm>
+            <a:off x="3474720" y="2130552"/>
+            <a:ext cx="2377440" cy="365760"/>
+          </a:xfrm>
+          <a:prstGeom prst="rect">
+            <a:avLst/>
+          </a:prstGeom>
+          <a:noFill/>
+          <a:ln/>
+        </p:spPr>
+        <p:txBody>
+          <a:bodyPr wrap="square" rtlCol="0" anchor="ctr"/>
+          <a:lstStyle/>
+          <a:p>
+            <a:pPr indent="0" marL="0">
+              <a:buNone/>
+            </a:pPr>
+            <a:r>
+              <a:rPr lang="en-US" sz="900" dirty="0">
+                <a:solidFill>
+                  <a:srgbClr val="5B6178"/>
+                </a:solidFill>
+                <a:latin typeface="Calibri" pitchFamily="34" charset="0"/>
+                <a:ea typeface="Calibri" pitchFamily="34" charset="-122"/>
+                <a:cs typeface="Calibri" pitchFamily="34" charset="-120"/>
+              </a:rPr>
+              <a:t>Held-out PR-AUC</a:t>
+            </a:r>
+            <a:endParaRPr lang="en-US" sz="900" dirty="0"/>
+          </a:p>
+        </p:txBody>
+      </p:sp>
+      <p:sp>
+        <p:nvSpPr>
+          <p:cNvPr id="12" name="Shape 10"/>
+          <p:cNvSpPr/>
+          <p:nvPr/>
+        </p:nvSpPr>
+        <p:spPr>
+          <a:xfrm>
+            <a:off x="6126480" y="1508760"/>
+            <a:ext cx="2651760" cy="1051560"/>
+          </a:xfrm>
+          <a:prstGeom prst="roundRect">
+            <a:avLst>
+              <a:gd name="adj" fmla="val 6957"/>
+            </a:avLst>
+          </a:prstGeom>
+          <a:solidFill>
+            <a:srgbClr val="F5F7FC"/>
+          </a:solidFill>
+          <a:ln/>
+        </p:spPr>
+      </p:sp>
+      <p:sp>
+        <p:nvSpPr>
+          <p:cNvPr id="13" name="Text 11"/>
+          <p:cNvSpPr/>
+          <p:nvPr/>
+        </p:nvSpPr>
+        <p:spPr>
+          <a:xfrm>
+            <a:off x="6263640" y="1618488"/>
+            <a:ext cx="2377440" cy="502920"/>
+          </a:xfrm>
+          <a:prstGeom prst="rect">
+            <a:avLst/>
+          </a:prstGeom>
+          <a:noFill/>
+          <a:ln/>
+        </p:spPr>
+        <p:txBody>
+          <a:bodyPr wrap="square" rtlCol="0" anchor="ctr"/>
+          <a:lstStyle/>
+          <a:p>
+            <a:pPr indent="0" marL="0">
+              <a:buNone/>
+            </a:pPr>
+            <a:r>
+              <a:rPr lang="en-US" sz="2200" b="1" dirty="0">
+                <a:solidFill>
+                  <a:srgbClr val="1E2761"/>
+                </a:solidFill>
+                <a:latin typeface="Calibri" pitchFamily="34" charset="0"/>
+                <a:ea typeface="Calibri" pitchFamily="34" charset="-122"/>
+                <a:cs typeface="Calibri" pitchFamily="34" charset="-120"/>
+              </a:rPr>
+              <a:t>0.13</a:t>
+            </a:r>
+            <a:endParaRPr lang="en-US" sz="2200" dirty="0"/>
+          </a:p>
+        </p:txBody>
+      </p:sp>
+      <p:sp>
+        <p:nvSpPr>
+          <p:cNvPr id="14" name="Text 12"/>
+          <p:cNvSpPr/>
+          <p:nvPr/>
+        </p:nvSpPr>
+        <p:spPr>
+          <a:xfrm>
+            <a:off x="6263640" y="2130552"/>
+            <a:ext cx="2377440" cy="365760"/>
+          </a:xfrm>
+          <a:prstGeom prst="rect">
+            <a:avLst/>
+          </a:prstGeom>
+          <a:noFill/>
+          <a:ln/>
+        </p:spPr>
+        <p:txBody>
+          <a:bodyPr wrap="square" rtlCol="0" anchor="ctr"/>
+          <a:lstStyle/>
+          <a:p>
+            <a:pPr indent="0" marL="0">
+              <a:buNone/>
+            </a:pPr>
+            <a:r>
+              <a:rPr lang="en-US" sz="900" dirty="0">
+                <a:solidFill>
+                  <a:srgbClr val="5B6178"/>
+                </a:solidFill>
+                <a:latin typeface="Calibri" pitchFamily="34" charset="0"/>
+                <a:ea typeface="Calibri" pitchFamily="34" charset="-122"/>
+                <a:cs typeface="Calibri" pitchFamily="34" charset="-120"/>
+              </a:rPr>
+              <a:t>Brier score</a:t>
+            </a:r>
+            <a:endParaRPr lang="en-US" sz="900" dirty="0"/>
+          </a:p>
+        </p:txBody>
+      </p:sp>
+      <p:sp>
+        <p:nvSpPr>
+          <p:cNvPr id="15" name="Shape 13"/>
+          <p:cNvSpPr/>
+          <p:nvPr/>
+        </p:nvSpPr>
+        <p:spPr>
+          <a:xfrm>
+            <a:off x="8915400" y="1508760"/>
+            <a:ext cx="2651760" cy="1051560"/>
+          </a:xfrm>
+          <a:prstGeom prst="roundRect">
+            <a:avLst>
+              <a:gd name="adj" fmla="val 6957"/>
+            </a:avLst>
+          </a:prstGeom>
+          <a:solidFill>
+            <a:srgbClr val="F5F7FC"/>
+          </a:solidFill>
+          <a:ln/>
+        </p:spPr>
+      </p:sp>
+      <p:sp>
+        <p:nvSpPr>
+          <p:cNvPr id="16" name="Text 14"/>
+          <p:cNvSpPr/>
+          <p:nvPr/>
+        </p:nvSpPr>
+        <p:spPr>
+          <a:xfrm>
+            <a:off x="9052560" y="1618488"/>
+            <a:ext cx="2377440" cy="502920"/>
+          </a:xfrm>
+          <a:prstGeom prst="rect">
+            <a:avLst/>
+          </a:prstGeom>
+          <a:noFill/>
+          <a:ln/>
+        </p:spPr>
+        <p:txBody>
+          <a:bodyPr wrap="square" rtlCol="0" anchor="ctr"/>
+          <a:lstStyle/>
+          <a:p>
+            <a:pPr indent="0" marL="0">
+              <a:buNone/>
+            </a:pPr>
+            <a:r>
+              <a:rPr lang="en-US" sz="2200" b="1" dirty="0">
+                <a:solidFill>
+                  <a:srgbClr val="1E2761"/>
+                </a:solidFill>
+                <a:latin typeface="Calibri" pitchFamily="34" charset="0"/>
+                <a:ea typeface="Calibri" pitchFamily="34" charset="-122"/>
+                <a:cs typeface="Calibri" pitchFamily="34" charset="-120"/>
+              </a:rPr>
+              <a:t>20</a:t>
+            </a:r>
+            <a:endParaRPr lang="en-US" sz="2200" dirty="0"/>
+          </a:p>
+        </p:txBody>
+      </p:sp>
+      <p:sp>
+        <p:nvSpPr>
+          <p:cNvPr id="17" name="Text 15"/>
+          <p:cNvSpPr/>
+          <p:nvPr/>
+        </p:nvSpPr>
+        <p:spPr>
+          <a:xfrm>
+            <a:off x="9052560" y="2130552"/>
+            <a:ext cx="2377440" cy="365760"/>
+          </a:xfrm>
+          <a:prstGeom prst="rect">
+            <a:avLst/>
+          </a:prstGeom>
+          <a:noFill/>
+          <a:ln/>
+        </p:spPr>
+        <p:txBody>
+          <a:bodyPr wrap="square" rtlCol="0" anchor="ctr"/>
+          <a:lstStyle/>
+          <a:p>
+            <a:pPr indent="0" marL="0">
+              <a:buNone/>
+            </a:pPr>
+            <a:r>
+              <a:rPr lang="en-US" sz="900" dirty="0">
+                <a:solidFill>
+                  <a:srgbClr val="5B6178"/>
+                </a:solidFill>
+                <a:latin typeface="Calibri" pitchFamily="34" charset="0"/>
+                <a:ea typeface="Calibri" pitchFamily="34" charset="-122"/>
+                <a:cs typeface="Calibri" pitchFamily="34" charset="-120"/>
+              </a:rPr>
+              <a:t>Venues flagged</a:t>
+            </a:r>
+            <a:endParaRPr lang="en-US" sz="900" dirty="0"/>
+          </a:p>
+        </p:txBody>
+      </p:sp>
+      <p:graphicFrame>
+        <p:nvGraphicFramePr>
+          <p:cNvPr id="18" name="Chart 0" descr=""/>
+          <p:cNvGraphicFramePr/>
+          <p:nvPr/>
+        </p:nvGraphicFramePr>
+        <p:xfrm>
+          <a:off x="548640" y="2880360"/>
+          <a:ext cx="5394960" cy="3246120"/>
+        </p:xfrm>
+        <a:graphic xmlns:a="http://schemas.openxmlformats.org/drawingml/2006/main">
+          <a:graphicData uri="http://schemas.openxmlformats.org/drawingml/2006/chart">
+            <c:chart xmlns:c="http://schemas.openxmlformats.org/drawingml/2006/chart" r:id="rId1"/>
+          </a:graphicData>
+        </a:graphic>
+      </p:graphicFrame>
+      <p:sp>
+        <p:nvSpPr>
+          <p:cNvPr id="19" name="Text 16"/>
+          <p:cNvSpPr/>
+          <p:nvPr/>
+        </p:nvSpPr>
+        <p:spPr>
+          <a:xfrm>
+            <a:off x="6263640" y="2880360"/>
+            <a:ext cx="5394960" cy="256032"/>
+          </a:xfrm>
+          <a:prstGeom prst="rect">
+            <a:avLst/>
+          </a:prstGeom>
+          <a:noFill/>
+          <a:ln/>
+        </p:spPr>
+        <p:txBody>
+          <a:bodyPr wrap="square" rtlCol="0" anchor="ctr"/>
+          <a:lstStyle/>
+          <a:p>
+            <a:pPr indent="0" marL="0">
+              <a:buNone/>
+            </a:pPr>
+            <a:r>
+              <a:rPr lang="en-US" sz="1200" b="1" dirty="0">
+                <a:solidFill>
+                  <a:srgbClr val="1E2761"/>
+                </a:solidFill>
+                <a:latin typeface="Cambria" pitchFamily="34" charset="0"/>
+                <a:ea typeface="Cambria" pitchFamily="34" charset="-122"/>
+                <a:cs typeface="Cambria" pitchFamily="34" charset="-120"/>
+              </a:rPr>
+              <a:t>Top at-risk venues (of 20 flagged, by OOF risk)</a:t>
+            </a:r>
+            <a:endParaRPr lang="en-US" sz="1200" dirty="0"/>
+          </a:p>
+        </p:txBody>
+      </p:sp>
+      <p:sp>
+        <p:nvSpPr>
+          <p:cNvPr id="20" name="Text 17"/>
+          <p:cNvSpPr/>
+          <p:nvPr/>
+        </p:nvSpPr>
+        <p:spPr>
+          <a:xfrm>
+            <a:off x="6263640" y="3172968"/>
+            <a:ext cx="3977640" cy="219456"/>
+          </a:xfrm>
+          <a:prstGeom prst="rect">
+            <a:avLst/>
+          </a:prstGeom>
+          <a:noFill/>
+          <a:ln/>
+        </p:spPr>
+        <p:txBody>
+          <a:bodyPr wrap="square" rtlCol="0" anchor="ctr"/>
+          <a:lstStyle/>
+          <a:p>
+            <a:pPr indent="0" marL="0">
+              <a:buNone/>
+            </a:pPr>
+            <a:r>
+              <a:rPr lang="en-US" sz="1000" dirty="0">
+                <a:solidFill>
+                  <a:srgbClr val="1A1A2E"/>
+                </a:solidFill>
+                <a:latin typeface="Calibri" pitchFamily="34" charset="0"/>
+                <a:ea typeface="Calibri" pitchFamily="34" charset="-122"/>
+                <a:cs typeface="Calibri" pitchFamily="34" charset="-120"/>
+              </a:rPr>
+              <a:t>Venue #281 (Bars)</a:t>
+            </a:r>
+            <a:endParaRPr lang="en-US" sz="1000" dirty="0"/>
+          </a:p>
+        </p:txBody>
+      </p:sp>
+      <p:sp>
+        <p:nvSpPr>
+          <p:cNvPr id="21" name="Text 18"/>
+          <p:cNvSpPr/>
+          <p:nvPr/>
+        </p:nvSpPr>
+        <p:spPr>
+          <a:xfrm>
+            <a:off x="10241280" y="3172968"/>
+            <a:ext cx="1417320" cy="219456"/>
+          </a:xfrm>
+          <a:prstGeom prst="rect">
+            <a:avLst/>
+          </a:prstGeom>
+          <a:noFill/>
+          <a:ln/>
+        </p:spPr>
+        <p:txBody>
+          <a:bodyPr wrap="square" rtlCol="0" anchor="ctr"/>
+          <a:lstStyle/>
+          <a:p>
+            <a:pPr algn="r" indent="0" marL="0">
+              <a:buNone/>
+            </a:pPr>
+            <a:r>
+              <a:rPr lang="en-US" sz="1000" b="1" dirty="0">
+                <a:solidFill>
+                  <a:srgbClr val="B8500A"/>
+                </a:solidFill>
+                <a:latin typeface="Calibri" pitchFamily="34" charset="0"/>
+                <a:ea typeface="Calibri" pitchFamily="34" charset="-122"/>
+                <a:cs typeface="Calibri" pitchFamily="34" charset="-120"/>
+              </a:rPr>
+              <a:t>60%</a:t>
+            </a:r>
+            <a:endParaRPr lang="en-US" sz="1000" dirty="0"/>
+          </a:p>
+        </p:txBody>
+      </p:sp>
+      <p:sp>
+        <p:nvSpPr>
+          <p:cNvPr id="22" name="Text 19"/>
+          <p:cNvSpPr/>
+          <p:nvPr/>
+        </p:nvSpPr>
+        <p:spPr>
+          <a:xfrm>
+            <a:off x="6263640" y="3374136"/>
+            <a:ext cx="5394960" cy="201168"/>
+          </a:xfrm>
+          <a:prstGeom prst="rect">
+            <a:avLst/>
+          </a:prstGeom>
+          <a:noFill/>
+          <a:ln/>
+        </p:spPr>
+        <p:txBody>
+          <a:bodyPr wrap="square" rtlCol="0" anchor="ctr"/>
+          <a:lstStyle/>
+          <a:p>
+            <a:pPr indent="0" marL="0">
+              <a:buNone/>
+            </a:pPr>
+            <a:r>
+              <a:rPr lang="en-US" sz="900" i="1" dirty="0">
+                <a:solidFill>
+                  <a:srgbClr val="8A4B0A"/>
+                </a:solidFill>
+                <a:latin typeface="Calibri" pitchFamily="34" charset="0"/>
+                <a:ea typeface="Calibri" pitchFamily="34" charset="-122"/>
+                <a:cs typeface="Calibri" pitchFamily="34" charset="-120"/>
+              </a:rPr>
+              <a:t>engagement declining → content/placement review</a:t>
+            </a:r>
+            <a:endParaRPr lang="en-US" sz="900" dirty="0"/>
+          </a:p>
+        </p:txBody>
+      </p:sp>
+      <p:sp>
+        <p:nvSpPr>
+          <p:cNvPr id="23" name="Text 20"/>
+          <p:cNvSpPr/>
+          <p:nvPr/>
+        </p:nvSpPr>
+        <p:spPr>
+          <a:xfrm>
+            <a:off x="6263640" y="3593592"/>
+            <a:ext cx="3977640" cy="219456"/>
+          </a:xfrm>
+          <a:prstGeom prst="rect">
+            <a:avLst/>
+          </a:prstGeom>
+          <a:noFill/>
+          <a:ln/>
+        </p:spPr>
+        <p:txBody>
+          <a:bodyPr wrap="square" rtlCol="0" anchor="ctr"/>
+          <a:lstStyle/>
+          <a:p>
+            <a:pPr indent="0" marL="0">
+              <a:buNone/>
+            </a:pPr>
+            <a:r>
+              <a:rPr lang="en-US" sz="1000" dirty="0">
+                <a:solidFill>
+                  <a:srgbClr val="1A1A2E"/>
+                </a:solidFill>
+                <a:latin typeface="Calibri" pitchFamily="34" charset="0"/>
+                <a:ea typeface="Calibri" pitchFamily="34" charset="-122"/>
+                <a:cs typeface="Calibri" pitchFamily="34" charset="-120"/>
+              </a:rPr>
+              <a:t>Venue #200 (Bars)</a:t>
+            </a:r>
+            <a:endParaRPr lang="en-US" sz="1000" dirty="0"/>
+          </a:p>
+        </p:txBody>
+      </p:sp>
+      <p:sp>
+        <p:nvSpPr>
+          <p:cNvPr id="24" name="Text 21"/>
+          <p:cNvSpPr/>
+          <p:nvPr/>
+        </p:nvSpPr>
+        <p:spPr>
+          <a:xfrm>
+            <a:off x="10241280" y="3593592"/>
+            <a:ext cx="1417320" cy="219456"/>
+          </a:xfrm>
+          <a:prstGeom prst="rect">
+            <a:avLst/>
+          </a:prstGeom>
+          <a:noFill/>
+          <a:ln/>
+        </p:spPr>
+        <p:txBody>
+          <a:bodyPr wrap="square" rtlCol="0" anchor="ctr"/>
+          <a:lstStyle/>
+          <a:p>
+            <a:pPr algn="r" indent="0" marL="0">
+              <a:buNone/>
+            </a:pPr>
+            <a:r>
+              <a:rPr lang="en-US" sz="1000" b="1" dirty="0">
+                <a:solidFill>
+                  <a:srgbClr val="B8500A"/>
+                </a:solidFill>
+                <a:latin typeface="Calibri" pitchFamily="34" charset="0"/>
+                <a:ea typeface="Calibri" pitchFamily="34" charset="-122"/>
+                <a:cs typeface="Calibri" pitchFamily="34" charset="-120"/>
+              </a:rPr>
+              <a:t>55%</a:t>
+            </a:r>
+            <a:endParaRPr lang="en-US" sz="1000" dirty="0"/>
+          </a:p>
+        </p:txBody>
+      </p:sp>
+      <p:sp>
+        <p:nvSpPr>
+          <p:cNvPr id="25" name="Text 22"/>
+          <p:cNvSpPr/>
+          <p:nvPr/>
+        </p:nvSpPr>
+        <p:spPr>
+          <a:xfrm>
+            <a:off x="6263640" y="3794760"/>
+            <a:ext cx="5394960" cy="201168"/>
+          </a:xfrm>
+          <a:prstGeom prst="rect">
+            <a:avLst/>
+          </a:prstGeom>
+          <a:noFill/>
+          <a:ln/>
+        </p:spPr>
+        <p:txBody>
+          <a:bodyPr wrap="square" rtlCol="0" anchor="ctr"/>
+          <a:lstStyle/>
+          <a:p>
+            <a:pPr indent="0" marL="0">
+              <a:buNone/>
+            </a:pPr>
+            <a:r>
+              <a:rPr lang="en-US" sz="900" i="1" dirty="0">
+                <a:solidFill>
+                  <a:srgbClr val="8A4B0A"/>
+                </a:solidFill>
+                <a:latin typeface="Calibri" pitchFamily="34" charset="0"/>
+                <a:ea typeface="Calibri" pitchFamily="34" charset="-122"/>
+                <a:cs typeface="Calibri" pitchFamily="34" charset="-120"/>
+              </a:rPr>
+              <a:t>engagement declining → content/placement review</a:t>
+            </a:r>
+            <a:endParaRPr lang="en-US" sz="900" dirty="0"/>
+          </a:p>
+        </p:txBody>
+      </p:sp>
+      <p:sp>
+        <p:nvSpPr>
+          <p:cNvPr id="26" name="Text 23"/>
+          <p:cNvSpPr/>
+          <p:nvPr/>
+        </p:nvSpPr>
+        <p:spPr>
+          <a:xfrm>
+            <a:off x="6263640" y="4014216"/>
+            <a:ext cx="3977640" cy="219456"/>
+          </a:xfrm>
+          <a:prstGeom prst="rect">
+            <a:avLst/>
+          </a:prstGeom>
+          <a:noFill/>
+          <a:ln/>
+        </p:spPr>
+        <p:txBody>
+          <a:bodyPr wrap="square" rtlCol="0" anchor="ctr"/>
+          <a:lstStyle/>
+          <a:p>
+            <a:pPr indent="0" marL="0">
+              <a:buNone/>
+            </a:pPr>
+            <a:r>
+              <a:rPr lang="en-US" sz="1000" dirty="0">
+                <a:solidFill>
+                  <a:srgbClr val="1A1A2E"/>
+                </a:solidFill>
+                <a:latin typeface="Calibri" pitchFamily="34" charset="0"/>
+                <a:ea typeface="Calibri" pitchFamily="34" charset="-122"/>
+                <a:cs typeface="Calibri" pitchFamily="34" charset="-120"/>
+              </a:rPr>
+              <a:t>Venue #12 (Restaurants)</a:t>
+            </a:r>
+            <a:endParaRPr lang="en-US" sz="1000" dirty="0"/>
+          </a:p>
+        </p:txBody>
+      </p:sp>
+      <p:sp>
+        <p:nvSpPr>
+          <p:cNvPr id="27" name="Text 24"/>
+          <p:cNvSpPr/>
+          <p:nvPr/>
+        </p:nvSpPr>
+        <p:spPr>
+          <a:xfrm>
+            <a:off x="10241280" y="4014216"/>
+            <a:ext cx="1417320" cy="219456"/>
+          </a:xfrm>
+          <a:prstGeom prst="rect">
+            <a:avLst/>
+          </a:prstGeom>
+          <a:noFill/>
+          <a:ln/>
+        </p:spPr>
+        <p:txBody>
+          <a:bodyPr wrap="square" rtlCol="0" anchor="ctr"/>
+          <a:lstStyle/>
+          <a:p>
+            <a:pPr algn="r" indent="0" marL="0">
+              <a:buNone/>
+            </a:pPr>
+            <a:r>
+              <a:rPr lang="en-US" sz="1000" b="1" dirty="0">
+                <a:solidFill>
+                  <a:srgbClr val="B8500A"/>
+                </a:solidFill>
+                <a:latin typeface="Calibri" pitchFamily="34" charset="0"/>
+                <a:ea typeface="Calibri" pitchFamily="34" charset="-122"/>
+                <a:cs typeface="Calibri" pitchFamily="34" charset="-120"/>
+              </a:rPr>
+              <a:t>52%</a:t>
+            </a:r>
+            <a:endParaRPr lang="en-US" sz="1000" dirty="0"/>
+          </a:p>
+        </p:txBody>
+      </p:sp>
+      <p:sp>
+        <p:nvSpPr>
+          <p:cNvPr id="28" name="Text 25"/>
+          <p:cNvSpPr/>
+          <p:nvPr/>
+        </p:nvSpPr>
+        <p:spPr>
+          <a:xfrm>
+            <a:off x="6263640" y="4215384"/>
+            <a:ext cx="5394960" cy="201168"/>
+          </a:xfrm>
+          <a:prstGeom prst="rect">
+            <a:avLst/>
+          </a:prstGeom>
+          <a:noFill/>
+          <a:ln/>
+        </p:spPr>
+        <p:txBody>
+          <a:bodyPr wrap="square" rtlCol="0" anchor="ctr"/>
+          <a:lstStyle/>
+          <a:p>
+            <a:pPr indent="0" marL="0">
+              <a:buNone/>
+            </a:pPr>
+            <a:r>
+              <a:rPr lang="en-US" sz="900" i="1" dirty="0">
+                <a:solidFill>
+                  <a:srgbClr val="8A4B0A"/>
+                </a:solidFill>
+                <a:latin typeface="Calibri" pitchFamily="34" charset="0"/>
+                <a:ea typeface="Calibri" pitchFamily="34" charset="-122"/>
+                <a:cs typeface="Calibri" pitchFamily="34" charset="-120"/>
+              </a:rPr>
+              <a:t>uptime issue → dispatch technical support</a:t>
+            </a:r>
+            <a:endParaRPr lang="en-US" sz="900" dirty="0"/>
+          </a:p>
+        </p:txBody>
+      </p:sp>
+      <p:sp>
+        <p:nvSpPr>
+          <p:cNvPr id="29" name="Text 26"/>
+          <p:cNvSpPr/>
+          <p:nvPr/>
+        </p:nvSpPr>
+        <p:spPr>
+          <a:xfrm>
+            <a:off x="6263640" y="4526280"/>
+            <a:ext cx="5394960" cy="237744"/>
+          </a:xfrm>
+          <a:prstGeom prst="rect">
+            <a:avLst/>
+          </a:prstGeom>
+          <a:noFill/>
+          <a:ln/>
+        </p:spPr>
+        <p:txBody>
+          <a:bodyPr wrap="square" rtlCol="0" anchor="ctr"/>
+          <a:lstStyle/>
+          <a:p>
+            <a:pPr indent="0" marL="0">
+              <a:buNone/>
+            </a:pPr>
+            <a:r>
+              <a:rPr lang="en-US" sz="1200" b="1" dirty="0">
+                <a:solidFill>
+                  <a:srgbClr val="1E2761"/>
+                </a:solidFill>
+                <a:latin typeface="Cambria" pitchFamily="34" charset="0"/>
+                <a:ea typeface="Cambria" pitchFamily="34" charset="-122"/>
+                <a:cs typeface="Cambria" pitchFamily="34" charset="-120"/>
+              </a:rPr>
+              <a:t>Priority quadrant (Q3 revenue × Q4 risk)</a:t>
+            </a:r>
+            <a:endParaRPr lang="en-US" sz="1200" dirty="0"/>
+          </a:p>
+        </p:txBody>
+      </p:sp>
+      <p:sp>
+        <p:nvSpPr>
+          <p:cNvPr id="30" name="Text 27"/>
+          <p:cNvSpPr/>
+          <p:nvPr/>
+        </p:nvSpPr>
+        <p:spPr>
+          <a:xfrm>
+            <a:off x="6263640" y="4800600"/>
+            <a:ext cx="4023360" cy="237744"/>
+          </a:xfrm>
+          <a:prstGeom prst="rect">
+            <a:avLst/>
+          </a:prstGeom>
+          <a:noFill/>
+          <a:ln/>
+        </p:spPr>
+        <p:txBody>
+          <a:bodyPr wrap="square" rtlCol="0" anchor="ctr"/>
+          <a:lstStyle/>
+          <a:p>
+            <a:pPr indent="0" marL="0">
+              <a:buNone/>
+            </a:pPr>
+            <a:r>
+              <a:rPr lang="en-US" sz="1000" dirty="0">
+                <a:solidFill>
+                  <a:srgbClr val="1A1A2E"/>
+                </a:solidFill>
+                <a:latin typeface="Calibri" pitchFamily="34" charset="0"/>
+                <a:ea typeface="Calibri" pitchFamily="34" charset="-122"/>
+                <a:cs typeface="Calibri" pitchFamily="34" charset="-120"/>
+              </a:rPr>
+              <a:t>Save now (high value, high risk)</a:t>
+            </a:r>
+            <a:endParaRPr lang="en-US" sz="1000" dirty="0"/>
+          </a:p>
+        </p:txBody>
+      </p:sp>
+      <p:sp>
+        <p:nvSpPr>
+          <p:cNvPr id="31" name="Text 28"/>
+          <p:cNvSpPr/>
+          <p:nvPr/>
+        </p:nvSpPr>
+        <p:spPr>
+          <a:xfrm>
+            <a:off x="10195560" y="4800600"/>
+            <a:ext cx="1463040" cy="237744"/>
+          </a:xfrm>
+          <a:prstGeom prst="rect">
+            <a:avLst/>
+          </a:prstGeom>
+          <a:noFill/>
+          <a:ln/>
+        </p:spPr>
+        <p:txBody>
+          <a:bodyPr wrap="square" rtlCol="0" anchor="ctr"/>
+          <a:lstStyle/>
+          <a:p>
+            <a:pPr algn="r" indent="0" marL="0">
+              <a:buNone/>
+            </a:pPr>
+            <a:r>
+              <a:rPr lang="en-US" sz="1000" b="1" dirty="0">
+                <a:solidFill>
+                  <a:srgbClr val="B8500A"/>
+                </a:solidFill>
+                <a:latin typeface="Calibri" pitchFamily="34" charset="0"/>
+                <a:ea typeface="Calibri" pitchFamily="34" charset="-122"/>
+                <a:cs typeface="Calibri" pitchFamily="34" charset="-120"/>
+              </a:rPr>
+              <a:t>136</a:t>
+            </a:r>
+            <a:endParaRPr lang="en-US" sz="1000" dirty="0"/>
+          </a:p>
+        </p:txBody>
+      </p:sp>
+      <p:sp>
+        <p:nvSpPr>
+          <p:cNvPr id="32" name="Text 29"/>
+          <p:cNvSpPr/>
+          <p:nvPr/>
+        </p:nvSpPr>
+        <p:spPr>
+          <a:xfrm>
+            <a:off x="6263640" y="5047488"/>
+            <a:ext cx="4023360" cy="237744"/>
+          </a:xfrm>
+          <a:prstGeom prst="rect">
+            <a:avLst/>
+          </a:prstGeom>
+          <a:noFill/>
+          <a:ln/>
+        </p:spPr>
+        <p:txBody>
+          <a:bodyPr wrap="square" rtlCol="0" anchor="ctr"/>
+          <a:lstStyle/>
+          <a:p>
+            <a:pPr indent="0" marL="0">
+              <a:buNone/>
+            </a:pPr>
+            <a:r>
+              <a:rPr lang="en-US" sz="1000" dirty="0">
+                <a:solidFill>
+                  <a:srgbClr val="1A1A2E"/>
+                </a:solidFill>
+                <a:latin typeface="Calibri" pitchFamily="34" charset="0"/>
+                <a:ea typeface="Calibri" pitchFamily="34" charset="-122"/>
+                <a:cs typeface="Calibri" pitchFamily="34" charset="-120"/>
+              </a:rPr>
+              <a:t>Monitor (low value, low risk)</a:t>
+            </a:r>
+            <a:endParaRPr lang="en-US" sz="1000" dirty="0"/>
+          </a:p>
+        </p:txBody>
+      </p:sp>
+      <p:sp>
+        <p:nvSpPr>
+          <p:cNvPr id="33" name="Text 30"/>
+          <p:cNvSpPr/>
+          <p:nvPr/>
+        </p:nvSpPr>
+        <p:spPr>
+          <a:xfrm>
+            <a:off x="10195560" y="5047488"/>
+            <a:ext cx="1463040" cy="237744"/>
+          </a:xfrm>
+          <a:prstGeom prst="rect">
+            <a:avLst/>
+          </a:prstGeom>
+          <a:noFill/>
+          <a:ln/>
+        </p:spPr>
+        <p:txBody>
+          <a:bodyPr wrap="square" rtlCol="0" anchor="ctr"/>
+          <a:lstStyle/>
+          <a:p>
+            <a:pPr algn="r" indent="0" marL="0">
+              <a:buNone/>
+            </a:pPr>
+            <a:r>
+              <a:rPr lang="en-US" sz="1000" b="1" dirty="0">
+                <a:solidFill>
+                  <a:srgbClr val="5B6178"/>
+                </a:solidFill>
+                <a:latin typeface="Calibri" pitchFamily="34" charset="0"/>
+                <a:ea typeface="Calibri" pitchFamily="34" charset="-122"/>
+                <a:cs typeface="Calibri" pitchFamily="34" charset="-120"/>
+              </a:rPr>
+              <a:t>136</a:t>
+            </a:r>
+            <a:endParaRPr lang="en-US" sz="1000" dirty="0"/>
+          </a:p>
+        </p:txBody>
+      </p:sp>
+      <p:sp>
+        <p:nvSpPr>
+          <p:cNvPr id="34" name="Text 31"/>
+          <p:cNvSpPr/>
+          <p:nvPr/>
+        </p:nvSpPr>
+        <p:spPr>
+          <a:xfrm>
+            <a:off x="6263640" y="5294376"/>
+            <a:ext cx="4023360" cy="237744"/>
+          </a:xfrm>
+          <a:prstGeom prst="rect">
+            <a:avLst/>
+          </a:prstGeom>
+          <a:noFill/>
+          <a:ln/>
+        </p:spPr>
+        <p:txBody>
+          <a:bodyPr wrap="square" rtlCol="0" anchor="ctr"/>
+          <a:lstStyle/>
+          <a:p>
+            <a:pPr indent="0" marL="0">
+              <a:buNone/>
+            </a:pPr>
+            <a:r>
+              <a:rPr lang="en-US" sz="1000" dirty="0">
+                <a:solidFill>
+                  <a:srgbClr val="1A1A2E"/>
+                </a:solidFill>
+                <a:latin typeface="Calibri" pitchFamily="34" charset="0"/>
+                <a:ea typeface="Calibri" pitchFamily="34" charset="-122"/>
+                <a:cs typeface="Calibri" pitchFamily="34" charset="-120"/>
+              </a:rPr>
+              <a:t>Protect (high value, low risk)</a:t>
+            </a:r>
+            <a:endParaRPr lang="en-US" sz="1000" dirty="0"/>
+          </a:p>
+        </p:txBody>
+      </p:sp>
+      <p:sp>
+        <p:nvSpPr>
+          <p:cNvPr id="35" name="Text 32"/>
+          <p:cNvSpPr/>
+          <p:nvPr/>
+        </p:nvSpPr>
+        <p:spPr>
+          <a:xfrm>
+            <a:off x="10195560" y="5294376"/>
+            <a:ext cx="1463040" cy="237744"/>
+          </a:xfrm>
+          <a:prstGeom prst="rect">
+            <a:avLst/>
+          </a:prstGeom>
+          <a:noFill/>
+          <a:ln/>
+        </p:spPr>
+        <p:txBody>
+          <a:bodyPr wrap="square" rtlCol="0" anchor="ctr"/>
+          <a:lstStyle/>
+          <a:p>
+            <a:pPr algn="r" indent="0" marL="0">
+              <a:buNone/>
+            </a:pPr>
+            <a:r>
+              <a:rPr lang="en-US" sz="1000" b="1" dirty="0">
+                <a:solidFill>
+                  <a:srgbClr val="2C7A57"/>
+                </a:solidFill>
+                <a:latin typeface="Calibri" pitchFamily="34" charset="0"/>
+                <a:ea typeface="Calibri" pitchFamily="34" charset="-122"/>
+                <a:cs typeface="Calibri" pitchFamily="34" charset="-120"/>
+              </a:rPr>
+              <a:t>64</a:t>
+            </a:r>
+            <a:endParaRPr lang="en-US" sz="1000" dirty="0"/>
+          </a:p>
+        </p:txBody>
+      </p:sp>
+      <p:sp>
+        <p:nvSpPr>
+          <p:cNvPr id="36" name="Text 33"/>
+          <p:cNvSpPr/>
+          <p:nvPr/>
+        </p:nvSpPr>
+        <p:spPr>
+          <a:xfrm>
+            <a:off x="6263640" y="5541264"/>
+            <a:ext cx="4023360" cy="237744"/>
+          </a:xfrm>
+          <a:prstGeom prst="rect">
+            <a:avLst/>
+          </a:prstGeom>
+          <a:noFill/>
+          <a:ln/>
+        </p:spPr>
+        <p:txBody>
+          <a:bodyPr wrap="square" rtlCol="0" anchor="ctr"/>
+          <a:lstStyle/>
+          <a:p>
+            <a:pPr indent="0" marL="0">
+              <a:buNone/>
+            </a:pPr>
+            <a:r>
+              <a:rPr lang="en-US" sz="1000" dirty="0">
+                <a:solidFill>
+                  <a:srgbClr val="1A1A2E"/>
+                </a:solidFill>
+                <a:latin typeface="Calibri" pitchFamily="34" charset="0"/>
+                <a:ea typeface="Calibri" pitchFamily="34" charset="-122"/>
+                <a:cs typeface="Calibri" pitchFamily="34" charset="-120"/>
+              </a:rPr>
+              <a:t>Low priority (low value, high risk)</a:t>
+            </a:r>
+            <a:endParaRPr lang="en-US" sz="1000" dirty="0"/>
+          </a:p>
+        </p:txBody>
+      </p:sp>
+      <p:sp>
+        <p:nvSpPr>
+          <p:cNvPr id="37" name="Text 34"/>
+          <p:cNvSpPr/>
+          <p:nvPr/>
+        </p:nvSpPr>
+        <p:spPr>
+          <a:xfrm>
+            <a:off x="10195560" y="5541264"/>
+            <a:ext cx="1463040" cy="237744"/>
+          </a:xfrm>
+          <a:prstGeom prst="rect">
+            <a:avLst/>
+          </a:prstGeom>
+          <a:noFill/>
+          <a:ln/>
+        </p:spPr>
+        <p:txBody>
+          <a:bodyPr wrap="square" rtlCol="0" anchor="ctr"/>
+          <a:lstStyle/>
+          <a:p>
+            <a:pPr algn="r" indent="0" marL="0">
+              <a:buNone/>
+            </a:pPr>
+            <a:r>
+              <a:rPr lang="en-US" sz="1000" b="1" dirty="0">
+                <a:solidFill>
+                  <a:srgbClr val="5B6178"/>
+                </a:solidFill>
+                <a:latin typeface="Calibri" pitchFamily="34" charset="0"/>
+                <a:ea typeface="Calibri" pitchFamily="34" charset="-122"/>
+                <a:cs typeface="Calibri" pitchFamily="34" charset="-120"/>
+              </a:rPr>
+              <a:t>64</a:t>
+            </a:r>
+            <a:endParaRPr lang="en-US" sz="1000" dirty="0"/>
+          </a:p>
+        </p:txBody>
+      </p:sp>
+      <p:sp>
+        <p:nvSpPr>
+          <p:cNvPr id="38" name="Text 35"/>
+          <p:cNvSpPr/>
+          <p:nvPr/>
+        </p:nvSpPr>
+        <p:spPr>
+          <a:xfrm>
+            <a:off x="548640" y="6016752"/>
+            <a:ext cx="11064240" cy="548640"/>
+          </a:xfrm>
+          <a:prstGeom prst="rect">
+            <a:avLst/>
+          </a:prstGeom>
+          <a:noFill/>
+          <a:ln/>
+        </p:spPr>
+        <p:txBody>
+          <a:bodyPr wrap="square" rtlCol="0" anchor="ctr"/>
+          <a:lstStyle/>
+          <a:p>
+            <a:pPr indent="0" marL="0">
+              <a:lnSpc>
+                <a:spcPts val="1050"/>
+              </a:lnSpc>
+              <a:buNone/>
+            </a:pPr>
+            <a:r>
+              <a:rPr lang="en-US" sz="870" i="1" dirty="0">
+                <a:solidFill>
+                  <a:srgbClr val="5B6178"/>
+                </a:solidFill>
+                <a:latin typeface="Calibri" pitchFamily="34" charset="0"/>
+                <a:ea typeface="Calibri" pitchFamily="34" charset="-122"/>
+                <a:cs typeface="Calibri" pitchFamily="34" charset="-120"/>
+              </a:rPr>
+              <a:t>Flags come from 5-fold OOF predictions; AUC/PR-AUC read modest next to the revenue model's R² because churn is a rarer, noisier event to call than revenue — typical for a churn classifier, not a modeling miss. realized_ad_revenue's importance is a venue_type confound, not a causal driver. Each "Save now" / flagged venue also carries a SHAP top driver (from the fold model that never saw it) mapped to a concrete action — technical dispatch, AM retention call, content review — not a generic "reach out."</a:t>
+            </a:r>
+            <a:endParaRPr lang="en-US" sz="870" dirty="0"/>
+          </a:p>
+        </p:txBody>
+      </p:sp>
+      <p:sp>
+        <p:nvSpPr>
+          <p:cNvPr id="39" name="Text 36"/>
+          <p:cNvSpPr/>
+          <p:nvPr/>
+        </p:nvSpPr>
+        <p:spPr>
+          <a:xfrm>
+            <a:off x="457200" y="6537960"/>
+            <a:ext cx="7315200" cy="274320"/>
+          </a:xfrm>
+          <a:prstGeom prst="rect">
+            <a:avLst/>
+          </a:prstGeom>
+          <a:noFill/>
+          <a:ln/>
+        </p:spPr>
+        <p:txBody>
+          <a:bodyPr wrap="square" rtlCol="0" anchor="ctr"/>
+          <a:lstStyle/>
+          <a:p>
+            <a:pPr indent="0" marL="0">
+              <a:buNone/>
+            </a:pPr>
+            <a:r>
+              <a:rPr lang="en-US" sz="900" dirty="0">
+                <a:solidFill>
+                  <a:srgbClr val="5B6178"/>
+                </a:solidFill>
+                <a:latin typeface="Calibri" pitchFamily="34" charset="0"/>
+                <a:ea typeface="Calibri" pitchFamily="34" charset="-122"/>
+                <a:cs typeface="Calibri" pitchFamily="34" charset="-120"/>
+              </a:rPr>
+              <a:t>Venue retention</a:t>
+            </a:r>
+            <a:endParaRPr lang="en-US" sz="900" dirty="0"/>
+          </a:p>
+        </p:txBody>
+      </p:sp>
+    </p:spTree>
+  </p:cSld>
+  <p:clrMapOvr>
+    <a:masterClrMapping/>
+  </p:clrMapOvr>
+</p:sld>
+</file>
+
+<file path=ppt/slides/slide16.xml><?xml version="1.0" encoding="utf-8"?>
+<p:sld xmlns:a="http://schemas.openxmlformats.org/drawingml/2006/main" xmlns:r="http://schemas.openxmlformats.org/officeDocument/2006/relationships" xmlns:p="http://schemas.openxmlformats.org/presentationml/2006/main">
+  <p:cSld name="Slide 16">
     <p:bg>
       <p:bgPr>
         <a:solidFill>
@@ -16136,23 +17168,23 @@
         <p:spPr>
           <a:xfrm>
             <a:off x="548640" y="411480"/>
-            <a:ext cx="10058400" cy="594360"/>
-          </a:xfrm>
-          <a:prstGeom prst="rect">
-            <a:avLst/>
-          </a:prstGeom>
-          <a:noFill/>
-          <a:ln/>
-        </p:spPr>
-        <p:txBody>
-          <a:bodyPr wrap="square" rtlCol="0" anchor="ctr"/>
-          <a:lstStyle/>
-          <a:p>
-            <a:pPr indent="0" marL="0">
-              <a:buNone/>
-            </a:pPr>
-            <a:r>
-              <a:rPr lang="en-US" sz="2700" b="1" dirty="0">
+            <a:ext cx="10789920" cy="594360"/>
+          </a:xfrm>
+          <a:prstGeom prst="rect">
+            <a:avLst/>
+          </a:prstGeom>
+          <a:noFill/>
+          <a:ln/>
+        </p:spPr>
+        <p:txBody>
+          <a:bodyPr wrap="square" rtlCol="0" anchor="ctr"/>
+          <a:lstStyle/>
+          <a:p>
+            <a:pPr indent="0" marL="0">
+              <a:buNone/>
+            </a:pPr>
+            <a:r>
+              <a:rPr lang="en-US" sz="2600" b="1" dirty="0">
                 <a:solidFill>
                   <a:srgbClr val="1E2761"/>
                 </a:solidFill>
@@ -16160,9 +17192,9 @@
                 <a:ea typeface="Cambria" pitchFamily="34" charset="-122"/>
                 <a:cs typeface="Cambria" pitchFamily="34" charset="-120"/>
               </a:rPr>
-              <a:t>Measuring the campaigns we couldn't randomize</a:t>
-            </a:r>
-            <a:endParaRPr lang="en-US" sz="2700" dirty="0"/>
+              <a:t>How long does the lift last after the campaign ends?</a:t>
+            </a:r>
+            <a:endParaRPr lang="en-US" sz="2600" dirty="0"/>
           </a:p>
         </p:txBody>
       </p:sp>
@@ -16226,7 +17258,7 @@
                 <a:ea typeface="Calibri" pitchFamily="34" charset="-122"/>
                 <a:cs typeface="Calibri" pitchFamily="34" charset="-120"/>
               </a:rPr>
-              <a:t>Step 2 of 6 · Answers Q1</a:t>
+              <a:t>Step 1 persistence check · Q1</a:t>
             </a:r>
             <a:endParaRPr lang="en-US" sz="950" dirty="0"/>
           </a:p>
@@ -16241,7 +17273,7 @@
         <p:spPr>
           <a:xfrm>
             <a:off x="548640" y="1005840"/>
-            <a:ext cx="10789920" cy="457200"/>
+            <a:ext cx="10972800" cy="457200"/>
           </a:xfrm>
           <a:prstGeom prst="rect">
             <a:avLst/>
@@ -16265,7 +17297,7 @@
                 <a:ea typeface="Calibri" pitchFamily="34" charset="-122"/>
                 <a:cs typeface="Calibri" pitchFamily="34" charset="-120"/>
               </a:rPr>
-              <a:t>Most advertisers' campaigns already ran, on venues they picked — not us. Synthetic control reconstructs the counterfactual anyway, with its own built-in checks.</a:t>
+              <a:t>Same treated-vs-holdout contrast as the previous slide, applied to the weeks after the campaign ends — no new design, no new assumption.</a:t>
             </a:r>
             <a:endParaRPr lang="en-US" sz="1250" dirty="0"/>
           </a:p>
@@ -16278,7 +17310,7 @@
           <p:nvPr/>
         </p:nvGraphicFramePr>
         <p:xfrm>
-          <a:off x="548640" y="1645920"/>
+          <a:off x="548640" y="1600200"/>
           <a:ext cx="6583680" cy="3749040"/>
         </p:xfrm>
         <a:graphic xmlns:a="http://schemas.openxmlformats.org/drawingml/2006/main">
@@ -16295,7 +17327,7 @@
         </p:nvSpPr>
         <p:spPr>
           <a:xfrm>
-            <a:off x="7406640" y="1645920"/>
+            <a:off x="7406640" y="1600200"/>
             <a:ext cx="4206240" cy="274320"/>
           </a:xfrm>
           <a:prstGeom prst="rect">
@@ -16312,7 +17344,7 @@
               <a:buNone/>
             </a:pPr>
             <a:r>
-              <a:rPr lang="en-US" sz="1000" b="1" dirty="0">
+              <a:rPr lang="en-US" sz="950" b="1" dirty="0">
                 <a:solidFill>
                   <a:srgbClr val="5B6178"/>
                 </a:solidFill>
@@ -16320,9 +17352,9 @@
                 <a:ea typeface="Courier New" pitchFamily="34" charset="-122"/>
                 <a:cs typeface="Courier New" pitchFamily="34" charset="-120"/>
               </a:rPr>
-              <a:t>Venue type      Placebo p    Pre-RMSPE</a:t>
-            </a:r>
-            <a:endParaRPr lang="en-US" sz="1000" dirty="0"/>
+              <a:t>Window                  Estimate     SE      p-value</a:t>
+            </a:r>
+            <a:endParaRPr lang="en-US" sz="950" dirty="0"/>
           </a:p>
         </p:txBody>
       </p:sp>
@@ -16334,8 +17366,8 @@
         </p:nvSpPr>
         <p:spPr>
           <a:xfrm>
-            <a:off x="7406640" y="1965960"/>
-            <a:ext cx="4206240" cy="320040"/>
+            <a:off x="7406640" y="1920240"/>
+            <a:ext cx="4206240" cy="292608"/>
           </a:xfrm>
           <a:prstGeom prst="rect">
             <a:avLst/>
@@ -16359,7 +17391,7 @@
                 <a:ea typeface="Courier New" pitchFamily="34" charset="-122"/>
                 <a:cs typeface="Courier New" pitchFamily="34" charset="-120"/>
               </a:rPr>
-              <a:t>Restaurants    0.160        26.4</a:t>
+              <a:t>During campaign     +13.26    1.26   &lt; 0.001</a:t>
             </a:r>
             <a:endParaRPr lang="en-US" sz="1050" dirty="0"/>
           </a:p>
@@ -16373,8 +17405,8 @@
         </p:nvSpPr>
         <p:spPr>
           <a:xfrm>
-            <a:off x="7406640" y="2350008"/>
-            <a:ext cx="4206240" cy="320040"/>
+            <a:off x="7406640" y="2267712"/>
+            <a:ext cx="4206240" cy="292608"/>
           </a:xfrm>
           <a:prstGeom prst="rect">
             <a:avLst/>
@@ -16398,7 +17430,7 @@
                 <a:ea typeface="Courier New" pitchFamily="34" charset="-122"/>
                 <a:cs typeface="Courier New" pitchFamily="34" charset="-120"/>
               </a:rPr>
-              <a:t>Gyms           0.050        14.4</a:t>
+              <a:t>0–10 wks after       +2.52    1.16   0.031</a:t>
             </a:r>
             <a:endParaRPr lang="en-US" sz="1050" dirty="0"/>
           </a:p>
@@ -16412,8 +17444,8 @@
         </p:nvSpPr>
         <p:spPr>
           <a:xfrm>
-            <a:off x="7406640" y="2734056"/>
-            <a:ext cx="4206240" cy="320040"/>
+            <a:off x="7406640" y="2615184"/>
+            <a:ext cx="4206240" cy="292608"/>
           </a:xfrm>
           <a:prstGeom prst="rect">
             <a:avLst/>
@@ -16437,7 +17469,7 @@
                 <a:ea typeface="Courier New" pitchFamily="34" charset="-122"/>
                 <a:cs typeface="Courier New" pitchFamily="34" charset="-120"/>
               </a:rPr>
-              <a:t>Bars           0.100        17.8</a:t>
+              <a:t>10–20 wks after      -1.43    1.20   0.236</a:t>
             </a:r>
             <a:endParaRPr lang="en-US" sz="1050" dirty="0"/>
           </a:p>
@@ -16451,8 +17483,8 @@
         </p:nvSpPr>
         <p:spPr>
           <a:xfrm>
-            <a:off x="7406640" y="3118104"/>
-            <a:ext cx="4206240" cy="320040"/>
+            <a:off x="7406640" y="2962656"/>
+            <a:ext cx="4206240" cy="292608"/>
           </a:xfrm>
           <a:prstGeom prst="rect">
             <a:avLst/>
@@ -16476,7 +17508,7 @@
                 <a:ea typeface="Courier New" pitchFamily="34" charset="-122"/>
                 <a:cs typeface="Courier New" pitchFamily="34" charset="-120"/>
               </a:rPr>
-              <a:t>Waiting Rooms  0.110        8.3</a:t>
+              <a:t>Full post (34wk)     +0.05    0.75   0.945</a:t>
             </a:r>
             <a:endParaRPr lang="en-US" sz="1050" dirty="0"/>
           </a:p>
@@ -16490,8 +17522,47 @@
         </p:nvSpPr>
         <p:spPr>
           <a:xfrm>
-            <a:off x="7406640" y="3776472"/>
-            <a:ext cx="4206240" cy="1554480"/>
+            <a:off x="7406640" y="3447288"/>
+            <a:ext cx="4206240" cy="274320"/>
+          </a:xfrm>
+          <a:prstGeom prst="rect">
+            <a:avLst/>
+          </a:prstGeom>
+          <a:noFill/>
+          <a:ln/>
+        </p:spPr>
+        <p:txBody>
+          <a:bodyPr wrap="square" rtlCol="0" anchor="ctr"/>
+          <a:lstStyle/>
+          <a:p>
+            <a:pPr indent="0" marL="0">
+              <a:buNone/>
+            </a:pPr>
+            <a:r>
+              <a:rPr lang="en-US" sz="1200" b="1" dirty="0">
+                <a:solidFill>
+                  <a:srgbClr val="1E2761"/>
+                </a:solidFill>
+                <a:latin typeface="Cambria" pitchFamily="34" charset="0"/>
+                <a:ea typeface="Cambria" pitchFamily="34" charset="-122"/>
+                <a:cs typeface="Cambria" pitchFamily="34" charset="-120"/>
+              </a:rPr>
+              <a:t>A small tail, then nothing</a:t>
+            </a:r>
+            <a:endParaRPr lang="en-US" sz="1200" dirty="0"/>
+          </a:p>
+        </p:txBody>
+      </p:sp>
+      <p:sp>
+        <p:nvSpPr>
+          <p:cNvPr id="13" name="Text 10"/>
+          <p:cNvSpPr/>
+          <p:nvPr/>
+        </p:nvSpPr>
+        <p:spPr>
+          <a:xfrm>
+            <a:off x="7406640" y="3767328"/>
+            <a:ext cx="4206240" cy="1188720"/>
           </a:xfrm>
           <a:prstGeom prst="rect">
             <a:avLst/>
@@ -16505,12 +17576,54 @@
           <a:p>
             <a:pPr indent="0" marL="0">
               <a:lnSpc>
-                <a:spcPts val="1500"/>
+                <a:spcPts val="1400"/>
               </a:lnSpc>
               <a:buNone/>
             </a:pPr>
             <a:r>
-              <a:rPr lang="en-US" sz="1100" i="1" dirty="0">
+              <a:rPr lang="en-US" sz="1050" dirty="0">
+                <a:solidFill>
+                  <a:srgbClr val="1A1A2E"/>
+                </a:solidFill>
+                <a:latin typeface="Calibri" pitchFamily="34" charset="0"/>
+                <a:ea typeface="Calibri" pitchFamily="34" charset="-122"/>
+                <a:cs typeface="Calibri" pitchFamily="34" charset="-120"/>
+              </a:rPr>
+              <a:t>The first 10 weeks after the campaign ends still show a real, significant tail — about 19% of the in-campaign lift (p=0.031). By 10–20 weeks out it's gone (p=0.236), and averaged across the full 34-week post-campaign panel the effect is a clean +0.05 (p=0.945).</a:t>
+            </a:r>
+            <a:endParaRPr lang="en-US" sz="1050" dirty="0"/>
+          </a:p>
+        </p:txBody>
+      </p:sp>
+      <p:sp>
+        <p:nvSpPr>
+          <p:cNvPr id="14" name="Text 11"/>
+          <p:cNvSpPr/>
+          <p:nvPr/>
+        </p:nvSpPr>
+        <p:spPr>
+          <a:xfrm>
+            <a:off x="7406640" y="5093208"/>
+            <a:ext cx="4206240" cy="914400"/>
+          </a:xfrm>
+          <a:prstGeom prst="rect">
+            <a:avLst/>
+          </a:prstGeom>
+          <a:noFill/>
+          <a:ln/>
+        </p:spPr>
+        <p:txBody>
+          <a:bodyPr wrap="square" rtlCol="0" anchor="ctr"/>
+          <a:lstStyle/>
+          <a:p>
+            <a:pPr indent="0" marL="0">
+              <a:lnSpc>
+                <a:spcPts val="1400"/>
+              </a:lnSpc>
+              <a:buNone/>
+            </a:pPr>
+            <a:r>
+              <a:rPr lang="en-US" sz="1050" i="1" dirty="0">
                 <a:solidFill>
                   <a:srgbClr val="5B6178"/>
                 </a:solidFill>
@@ -16518,15 +17631,15 @@
                 <a:ea typeface="Calibri" pitchFamily="34" charset="-122"/>
                 <a:cs typeface="Calibri" pitchFamily="34" charset="-120"/>
               </a:rPr>
-              <a:t>Two validation checks, since synthetic control has no closed-form standard error: pre-period fit quality (RMSPE — poor fits are flagged and excluded from the aggregate estimate) and an in-space placebo test on every donor venue.</a:t>
-            </a:r>
-            <a:endParaRPr lang="en-US" sz="1100" dirty="0"/>
-          </a:p>
-        </p:txBody>
-      </p:sp>
-      <p:sp>
-        <p:nvSpPr>
-          <p:cNvPr id="13" name="Text 10"/>
+              <a:t>Practical read: don't plan on meaningful carryover past the campaign's own window — each flight buys its own 10 weeks of impact, not lingering awareness. That argues for cadence, not one-and-done bursts.</a:t>
+            </a:r>
+            <a:endParaRPr lang="en-US" sz="1050" dirty="0"/>
+          </a:p>
+        </p:txBody>
+      </p:sp>
+      <p:sp>
+        <p:nvSpPr>
+          <p:cNvPr id="15" name="Text 12"/>
           <p:cNvSpPr/>
           <p:nvPr/>
         </p:nvSpPr>
@@ -16557,7 +17670,7 @@
                 <a:ea typeface="Calibri" pitchFamily="34" charset="-122"/>
                 <a:cs typeface="Calibri" pitchFamily="34" charset="-120"/>
               </a:rPr>
-              <a:t>Causal measurement — Synthetic Control</a:t>
+              <a:t>Causal measurement — RCT, post-campaign persistence</a:t>
             </a:r>
             <a:endParaRPr lang="en-US" sz="900" dirty="0"/>
           </a:p>
@@ -16604,23 +17717,23 @@
         <p:spPr>
           <a:xfrm>
             <a:off x="548640" y="411480"/>
-            <a:ext cx="11247120" cy="594360"/>
-          </a:xfrm>
-          <a:prstGeom prst="rect">
-            <a:avLst/>
-          </a:prstGeom>
-          <a:noFill/>
-          <a:ln/>
-        </p:spPr>
-        <p:txBody>
-          <a:bodyPr wrap="square" rtlCol="0" anchor="ctr"/>
-          <a:lstStyle/>
-          <a:p>
-            <a:pPr indent="0" marL="0">
-              <a:buNone/>
-            </a:pPr>
-            <a:r>
-              <a:rPr lang="en-US" sz="2500" b="1" dirty="0">
+            <a:ext cx="10058400" cy="594360"/>
+          </a:xfrm>
+          <a:prstGeom prst="rect">
+            <a:avLst/>
+          </a:prstGeom>
+          <a:noFill/>
+          <a:ln/>
+        </p:spPr>
+        <p:txBody>
+          <a:bodyPr wrap="square" rtlCol="0" anchor="ctr"/>
+          <a:lstStyle/>
+          <a:p>
+            <a:pPr indent="0" marL="0">
+              <a:buNone/>
+            </a:pPr>
+            <a:r>
+              <a:rPr lang="en-US" sz="2700" b="1" dirty="0">
                 <a:solidFill>
                   <a:srgbClr val="1E2761"/>
                 </a:solidFill>
@@ -16628,9 +17741,9 @@
                 <a:ea typeface="Cambria" pitchFamily="34" charset="-122"/>
                 <a:cs typeface="Cambria" pitchFamily="34" charset="-120"/>
               </a:rPr>
-              <a:t>MMM: an uncalibrated model would have underpriced results</a:t>
-            </a:r>
-            <a:endParaRPr lang="en-US" sz="2500" dirty="0"/>
+              <a:t>Measuring the campaigns we couldn't randomize</a:t>
+            </a:r>
+            <a:endParaRPr lang="en-US" sz="2700" dirty="0"/>
           </a:p>
         </p:txBody>
       </p:sp>
@@ -16655,7 +17768,7 @@
           </a:solidFill>
           <a:ln w="15875">
             <a:solidFill>
-              <a:srgbClr val="B8500A"/>
+              <a:srgbClr val="1E2761"/>
             </a:solidFill>
             <a:prstDash val="solid"/>
           </a:ln>
@@ -16688,13 +17801,13 @@
             <a:r>
               <a:rPr lang="en-US" sz="950" b="1" dirty="0">
                 <a:solidFill>
-                  <a:srgbClr val="B8500A"/>
-                </a:solidFill>
-                <a:latin typeface="Calibri" pitchFamily="34" charset="0"/>
-                <a:ea typeface="Calibri" pitchFamily="34" charset="-122"/>
-                <a:cs typeface="Calibri" pitchFamily="34" charset="-120"/>
-              </a:rPr>
-              <a:t>Step 3 of 6 · Answers Q2</a:t>
+                  <a:srgbClr val="1E2761"/>
+                </a:solidFill>
+                <a:latin typeface="Calibri" pitchFamily="34" charset="0"/>
+                <a:ea typeface="Calibri" pitchFamily="34" charset="-122"/>
+                <a:cs typeface="Calibri" pitchFamily="34" charset="-120"/>
+              </a:rPr>
+              <a:t>Step 2 of 6 · Answers Q1</a:t>
             </a:r>
             <a:endParaRPr lang="en-US" sz="950" dirty="0"/>
           </a:p>
@@ -16709,7 +17822,7 @@
         <p:spPr>
           <a:xfrm>
             <a:off x="548640" y="1005840"/>
-            <a:ext cx="10972800" cy="365760"/>
+            <a:ext cx="10789920" cy="457200"/>
           </a:xfrm>
           <a:prstGeom prst="rect">
             <a:avLst/>
@@ -16733,7 +17846,7 @@
                 <a:ea typeface="Calibri" pitchFamily="34" charset="-122"/>
                 <a:cs typeface="Calibri" pitchFamily="34" charset="-120"/>
               </a:rPr>
-              <a:t>Adstock + saturation shape comes from the aggregate weekly series; scale is pinned by the RCT's high-confidence estimate.</a:t>
+              <a:t>Most advertisers' campaigns already ran, on venues they picked — not us. Synthetic control reconstructs the counterfactual anyway, with its own built-in checks.</a:t>
             </a:r>
             <a:endParaRPr lang="en-US" sz="1250" dirty="0"/>
           </a:p>
@@ -16746,8 +17859,8 @@
           <p:nvPr/>
         </p:nvGraphicFramePr>
         <p:xfrm>
-          <a:off x="548640" y="1600200"/>
-          <a:ext cx="6949440" cy="3931920"/>
+          <a:off x="548640" y="1645920"/>
+          <a:ext cx="6583680" cy="3749040"/>
         </p:xfrm>
         <a:graphic xmlns:a="http://schemas.openxmlformats.org/drawingml/2006/main">
           <a:graphicData uri="http://schemas.openxmlformats.org/drawingml/2006/chart">
@@ -16763,34 +17876,34 @@
         </p:nvSpPr>
         <p:spPr>
           <a:xfrm>
-            <a:off x="7772400" y="1737360"/>
-            <a:ext cx="3840480" cy="320040"/>
-          </a:xfrm>
-          <a:prstGeom prst="rect">
-            <a:avLst/>
-          </a:prstGeom>
-          <a:noFill/>
-          <a:ln/>
-        </p:spPr>
-        <p:txBody>
-          <a:bodyPr wrap="square" rtlCol="0" anchor="ctr"/>
-          <a:lstStyle/>
-          <a:p>
-            <a:pPr indent="0" marL="0">
-              <a:buNone/>
-            </a:pPr>
-            <a:r>
-              <a:rPr lang="en-US" sz="1200" b="1" dirty="0">
-                <a:solidFill>
-                  <a:srgbClr val="1E2761"/>
-                </a:solidFill>
-                <a:latin typeface="Cambria" pitchFamily="34" charset="0"/>
-                <a:ea typeface="Cambria" pitchFamily="34" charset="-122"/>
-                <a:cs typeface="Cambria" pitchFamily="34" charset="-120"/>
-              </a:rPr>
-              <a:t>Calibration adjustment</a:t>
-            </a:r>
-            <a:endParaRPr lang="en-US" sz="1200" dirty="0"/>
+            <a:off x="7406640" y="1645920"/>
+            <a:ext cx="4206240" cy="274320"/>
+          </a:xfrm>
+          <a:prstGeom prst="rect">
+            <a:avLst/>
+          </a:prstGeom>
+          <a:noFill/>
+          <a:ln/>
+        </p:spPr>
+        <p:txBody>
+          <a:bodyPr wrap="square" rtlCol="0" anchor="ctr"/>
+          <a:lstStyle/>
+          <a:p>
+            <a:pPr indent="0" marL="0">
+              <a:buNone/>
+            </a:pPr>
+            <a:r>
+              <a:rPr lang="en-US" sz="1000" b="1" dirty="0">
+                <a:solidFill>
+                  <a:srgbClr val="5B6178"/>
+                </a:solidFill>
+                <a:latin typeface="Courier New" pitchFamily="34" charset="0"/>
+                <a:ea typeface="Courier New" pitchFamily="34" charset="-122"/>
+                <a:cs typeface="Courier New" pitchFamily="34" charset="-120"/>
+              </a:rPr>
+              <a:t>Venue type      Placebo p    Pre-RMSPE</a:t>
+            </a:r>
+            <a:endParaRPr lang="en-US" sz="1000" dirty="0"/>
           </a:p>
         </p:txBody>
       </p:sp>
@@ -16802,34 +17915,34 @@
         </p:nvSpPr>
         <p:spPr>
           <a:xfrm>
-            <a:off x="7772400" y="2194560"/>
-            <a:ext cx="1737360" cy="502920"/>
-          </a:xfrm>
-          <a:prstGeom prst="rect">
-            <a:avLst/>
-          </a:prstGeom>
-          <a:noFill/>
-          <a:ln/>
-        </p:spPr>
-        <p:txBody>
-          <a:bodyPr wrap="square" rtlCol="0" anchor="ctr"/>
-          <a:lstStyle/>
-          <a:p>
-            <a:pPr indent="0" marL="0">
-              <a:buNone/>
-            </a:pPr>
-            <a:r>
-              <a:rPr lang="en-US" sz="1200" dirty="0">
+            <a:off x="7406640" y="1965960"/>
+            <a:ext cx="4206240" cy="320040"/>
+          </a:xfrm>
+          <a:prstGeom prst="rect">
+            <a:avLst/>
+          </a:prstGeom>
+          <a:noFill/>
+          <a:ln/>
+        </p:spPr>
+        <p:txBody>
+          <a:bodyPr wrap="square" rtlCol="0" anchor="ctr"/>
+          <a:lstStyle/>
+          <a:p>
+            <a:pPr indent="0" marL="0">
+              <a:buNone/>
+            </a:pPr>
+            <a:r>
+              <a:rPr lang="en-US" sz="1050" dirty="0">
                 <a:solidFill>
                   <a:srgbClr val="1A1A2E"/>
                 </a:solidFill>
-                <a:latin typeface="Calibri" pitchFamily="34" charset="0"/>
-                <a:ea typeface="Calibri" pitchFamily="34" charset="-122"/>
-                <a:cs typeface="Calibri" pitchFamily="34" charset="-120"/>
-              </a:rPr>
-              <a:t>Restaurants</a:t>
-            </a:r>
-            <a:endParaRPr lang="en-US" sz="1200" dirty="0"/>
+                <a:latin typeface="Courier New" pitchFamily="34" charset="0"/>
+                <a:ea typeface="Courier New" pitchFamily="34" charset="-122"/>
+                <a:cs typeface="Courier New" pitchFamily="34" charset="-120"/>
+              </a:rPr>
+              <a:t>Restaurants    0.160        26.4</a:t>
+            </a:r>
+            <a:endParaRPr lang="en-US" sz="1050" dirty="0"/>
           </a:p>
         </p:txBody>
       </p:sp>
@@ -16841,34 +17954,34 @@
         </p:nvSpPr>
         <p:spPr>
           <a:xfrm>
-            <a:off x="9509760" y="2194560"/>
-            <a:ext cx="2103120" cy="502920"/>
-          </a:xfrm>
-          <a:prstGeom prst="rect">
-            <a:avLst/>
-          </a:prstGeom>
-          <a:noFill/>
-          <a:ln/>
-        </p:spPr>
-        <p:txBody>
-          <a:bodyPr wrap="square" rtlCol="0" anchor="ctr"/>
-          <a:lstStyle/>
-          <a:p>
-            <a:pPr indent="0" marL="0">
-              <a:buNone/>
-            </a:pPr>
-            <a:r>
-              <a:rPr lang="en-US" sz="1800" b="1" dirty="0">
-                <a:solidFill>
-                  <a:srgbClr val="B8500A"/>
-                </a:solidFill>
-                <a:latin typeface="Calibri" pitchFamily="34" charset="0"/>
-                <a:ea typeface="Calibri" pitchFamily="34" charset="-122"/>
-                <a:cs typeface="Calibri" pitchFamily="34" charset="-120"/>
-              </a:rPr>
-              <a:t>+134%</a:t>
-            </a:r>
-            <a:endParaRPr lang="en-US" sz="1800" dirty="0"/>
+            <a:off x="7406640" y="2350008"/>
+            <a:ext cx="4206240" cy="320040"/>
+          </a:xfrm>
+          <a:prstGeom prst="rect">
+            <a:avLst/>
+          </a:prstGeom>
+          <a:noFill/>
+          <a:ln/>
+        </p:spPr>
+        <p:txBody>
+          <a:bodyPr wrap="square" rtlCol="0" anchor="ctr"/>
+          <a:lstStyle/>
+          <a:p>
+            <a:pPr indent="0" marL="0">
+              <a:buNone/>
+            </a:pPr>
+            <a:r>
+              <a:rPr lang="en-US" sz="1050" dirty="0">
+                <a:solidFill>
+                  <a:srgbClr val="1A1A2E"/>
+                </a:solidFill>
+                <a:latin typeface="Courier New" pitchFamily="34" charset="0"/>
+                <a:ea typeface="Courier New" pitchFamily="34" charset="-122"/>
+                <a:cs typeface="Courier New" pitchFamily="34" charset="-120"/>
+              </a:rPr>
+              <a:t>Gyms           0.050        14.4</a:t>
+            </a:r>
+            <a:endParaRPr lang="en-US" sz="1050" dirty="0"/>
           </a:p>
         </p:txBody>
       </p:sp>
@@ -16880,34 +17993,34 @@
         </p:nvSpPr>
         <p:spPr>
           <a:xfrm>
-            <a:off x="7772400" y="2788920"/>
-            <a:ext cx="1737360" cy="502920"/>
-          </a:xfrm>
-          <a:prstGeom prst="rect">
-            <a:avLst/>
-          </a:prstGeom>
-          <a:noFill/>
-          <a:ln/>
-        </p:spPr>
-        <p:txBody>
-          <a:bodyPr wrap="square" rtlCol="0" anchor="ctr"/>
-          <a:lstStyle/>
-          <a:p>
-            <a:pPr indent="0" marL="0">
-              <a:buNone/>
-            </a:pPr>
-            <a:r>
-              <a:rPr lang="en-US" sz="1200" dirty="0">
+            <a:off x="7406640" y="2734056"/>
+            <a:ext cx="4206240" cy="320040"/>
+          </a:xfrm>
+          <a:prstGeom prst="rect">
+            <a:avLst/>
+          </a:prstGeom>
+          <a:noFill/>
+          <a:ln/>
+        </p:spPr>
+        <p:txBody>
+          <a:bodyPr wrap="square" rtlCol="0" anchor="ctr"/>
+          <a:lstStyle/>
+          <a:p>
+            <a:pPr indent="0" marL="0">
+              <a:buNone/>
+            </a:pPr>
+            <a:r>
+              <a:rPr lang="en-US" sz="1050" dirty="0">
                 <a:solidFill>
                   <a:srgbClr val="1A1A2E"/>
                 </a:solidFill>
-                <a:latin typeface="Calibri" pitchFamily="34" charset="0"/>
-                <a:ea typeface="Calibri" pitchFamily="34" charset="-122"/>
-                <a:cs typeface="Calibri" pitchFamily="34" charset="-120"/>
-              </a:rPr>
-              <a:t>Gyms</a:t>
-            </a:r>
-            <a:endParaRPr lang="en-US" sz="1200" dirty="0"/>
+                <a:latin typeface="Courier New" pitchFamily="34" charset="0"/>
+                <a:ea typeface="Courier New" pitchFamily="34" charset="-122"/>
+                <a:cs typeface="Courier New" pitchFamily="34" charset="-120"/>
+              </a:rPr>
+              <a:t>Bars           0.100        17.8</a:t>
+            </a:r>
+            <a:endParaRPr lang="en-US" sz="1050" dirty="0"/>
           </a:p>
         </p:txBody>
       </p:sp>
@@ -16919,34 +18032,34 @@
         </p:nvSpPr>
         <p:spPr>
           <a:xfrm>
-            <a:off x="9509760" y="2788920"/>
-            <a:ext cx="2103120" cy="502920"/>
-          </a:xfrm>
-          <a:prstGeom prst="rect">
-            <a:avLst/>
-          </a:prstGeom>
-          <a:noFill/>
-          <a:ln/>
-        </p:spPr>
-        <p:txBody>
-          <a:bodyPr wrap="square" rtlCol="0" anchor="ctr"/>
-          <a:lstStyle/>
-          <a:p>
-            <a:pPr indent="0" marL="0">
-              <a:buNone/>
-            </a:pPr>
-            <a:r>
-              <a:rPr lang="en-US" sz="1800" b="1" dirty="0">
-                <a:solidFill>
-                  <a:srgbClr val="B8500A"/>
-                </a:solidFill>
-                <a:latin typeface="Calibri" pitchFamily="34" charset="0"/>
-                <a:ea typeface="Calibri" pitchFamily="34" charset="-122"/>
-                <a:cs typeface="Calibri" pitchFamily="34" charset="-120"/>
-              </a:rPr>
-              <a:t>+165%</a:t>
-            </a:r>
-            <a:endParaRPr lang="en-US" sz="1800" dirty="0"/>
+            <a:off x="7406640" y="3118104"/>
+            <a:ext cx="4206240" cy="320040"/>
+          </a:xfrm>
+          <a:prstGeom prst="rect">
+            <a:avLst/>
+          </a:prstGeom>
+          <a:noFill/>
+          <a:ln/>
+        </p:spPr>
+        <p:txBody>
+          <a:bodyPr wrap="square" rtlCol="0" anchor="ctr"/>
+          <a:lstStyle/>
+          <a:p>
+            <a:pPr indent="0" marL="0">
+              <a:buNone/>
+            </a:pPr>
+            <a:r>
+              <a:rPr lang="en-US" sz="1050" dirty="0">
+                <a:solidFill>
+                  <a:srgbClr val="1A1A2E"/>
+                </a:solidFill>
+                <a:latin typeface="Courier New" pitchFamily="34" charset="0"/>
+                <a:ea typeface="Courier New" pitchFamily="34" charset="-122"/>
+                <a:cs typeface="Courier New" pitchFamily="34" charset="-120"/>
+              </a:rPr>
+              <a:t>Waiting Rooms  0.110        8.3</a:t>
+            </a:r>
+            <a:endParaRPr lang="en-US" sz="1050" dirty="0"/>
           </a:p>
         </p:txBody>
       </p:sp>
@@ -16958,164 +18071,8 @@
         </p:nvSpPr>
         <p:spPr>
           <a:xfrm>
-            <a:off x="7772400" y="3383280"/>
-            <a:ext cx="1737360" cy="502920"/>
-          </a:xfrm>
-          <a:prstGeom prst="rect">
-            <a:avLst/>
-          </a:prstGeom>
-          <a:noFill/>
-          <a:ln/>
-        </p:spPr>
-        <p:txBody>
-          <a:bodyPr wrap="square" rtlCol="0" anchor="ctr"/>
-          <a:lstStyle/>
-          <a:p>
-            <a:pPr indent="0" marL="0">
-              <a:buNone/>
-            </a:pPr>
-            <a:r>
-              <a:rPr lang="en-US" sz="1200" dirty="0">
-                <a:solidFill>
-                  <a:srgbClr val="1A1A2E"/>
-                </a:solidFill>
-                <a:latin typeface="Calibri" pitchFamily="34" charset="0"/>
-                <a:ea typeface="Calibri" pitchFamily="34" charset="-122"/>
-                <a:cs typeface="Calibri" pitchFamily="34" charset="-120"/>
-              </a:rPr>
-              <a:t>Bars</a:t>
-            </a:r>
-            <a:endParaRPr lang="en-US" sz="1200" dirty="0"/>
-          </a:p>
-        </p:txBody>
-      </p:sp>
-      <p:sp>
-        <p:nvSpPr>
-          <p:cNvPr id="13" name="Text 10"/>
-          <p:cNvSpPr/>
-          <p:nvPr/>
-        </p:nvSpPr>
-        <p:spPr>
-          <a:xfrm>
-            <a:off x="9509760" y="3383280"/>
-            <a:ext cx="2103120" cy="502920"/>
-          </a:xfrm>
-          <a:prstGeom prst="rect">
-            <a:avLst/>
-          </a:prstGeom>
-          <a:noFill/>
-          <a:ln/>
-        </p:spPr>
-        <p:txBody>
-          <a:bodyPr wrap="square" rtlCol="0" anchor="ctr"/>
-          <a:lstStyle/>
-          <a:p>
-            <a:pPr indent="0" marL="0">
-              <a:buNone/>
-            </a:pPr>
-            <a:r>
-              <a:rPr lang="en-US" sz="1800" b="1" dirty="0">
-                <a:solidFill>
-                  <a:srgbClr val="2C7A57"/>
-                </a:solidFill>
-                <a:latin typeface="Calibri" pitchFamily="34" charset="0"/>
-                <a:ea typeface="Calibri" pitchFamily="34" charset="-122"/>
-                <a:cs typeface="Calibri" pitchFamily="34" charset="-120"/>
-              </a:rPr>
-              <a:t>+20%</a:t>
-            </a:r>
-            <a:endParaRPr lang="en-US" sz="1800" dirty="0"/>
-          </a:p>
-        </p:txBody>
-      </p:sp>
-      <p:sp>
-        <p:nvSpPr>
-          <p:cNvPr id="14" name="Text 11"/>
-          <p:cNvSpPr/>
-          <p:nvPr/>
-        </p:nvSpPr>
-        <p:spPr>
-          <a:xfrm>
-            <a:off x="7772400" y="3977640"/>
-            <a:ext cx="1737360" cy="502920"/>
-          </a:xfrm>
-          <a:prstGeom prst="rect">
-            <a:avLst/>
-          </a:prstGeom>
-          <a:noFill/>
-          <a:ln/>
-        </p:spPr>
-        <p:txBody>
-          <a:bodyPr wrap="square" rtlCol="0" anchor="ctr"/>
-          <a:lstStyle/>
-          <a:p>
-            <a:pPr indent="0" marL="0">
-              <a:buNone/>
-            </a:pPr>
-            <a:r>
-              <a:rPr lang="en-US" sz="1200" dirty="0">
-                <a:solidFill>
-                  <a:srgbClr val="1A1A2E"/>
-                </a:solidFill>
-                <a:latin typeface="Calibri" pitchFamily="34" charset="0"/>
-                <a:ea typeface="Calibri" pitchFamily="34" charset="-122"/>
-                <a:cs typeface="Calibri" pitchFamily="34" charset="-120"/>
-              </a:rPr>
-              <a:t>Waiting Rooms</a:t>
-            </a:r>
-            <a:endParaRPr lang="en-US" sz="1200" dirty="0"/>
-          </a:p>
-        </p:txBody>
-      </p:sp>
-      <p:sp>
-        <p:nvSpPr>
-          <p:cNvPr id="15" name="Text 12"/>
-          <p:cNvSpPr/>
-          <p:nvPr/>
-        </p:nvSpPr>
-        <p:spPr>
-          <a:xfrm>
-            <a:off x="9509760" y="3977640"/>
-            <a:ext cx="2103120" cy="502920"/>
-          </a:xfrm>
-          <a:prstGeom prst="rect">
-            <a:avLst/>
-          </a:prstGeom>
-          <a:noFill/>
-          <a:ln/>
-        </p:spPr>
-        <p:txBody>
-          <a:bodyPr wrap="square" rtlCol="0" anchor="ctr"/>
-          <a:lstStyle/>
-          <a:p>
-            <a:pPr indent="0" marL="0">
-              <a:buNone/>
-            </a:pPr>
-            <a:r>
-              <a:rPr lang="en-US" sz="1800" b="1" dirty="0">
-                <a:solidFill>
-                  <a:srgbClr val="B8500A"/>
-                </a:solidFill>
-                <a:latin typeface="Calibri" pitchFamily="34" charset="0"/>
-                <a:ea typeface="Calibri" pitchFamily="34" charset="-122"/>
-                <a:cs typeface="Calibri" pitchFamily="34" charset="-120"/>
-              </a:rPr>
-              <a:t>+100%</a:t>
-            </a:r>
-            <a:endParaRPr lang="en-US" sz="1800" dirty="0"/>
-          </a:p>
-        </p:txBody>
-      </p:sp>
-      <p:sp>
-        <p:nvSpPr>
-          <p:cNvPr id="16" name="Text 13"/>
-          <p:cNvSpPr/>
-          <p:nvPr/>
-        </p:nvSpPr>
-        <p:spPr>
-          <a:xfrm>
-            <a:off x="7772400" y="4709160"/>
-            <a:ext cx="3840480" cy="1463040"/>
+            <a:off x="7406640" y="3776472"/>
+            <a:ext cx="4206240" cy="1554480"/>
           </a:xfrm>
           <a:prstGeom prst="rect">
             <a:avLst/>
@@ -17142,7 +18099,7 @@
                 <a:ea typeface="Calibri" pitchFamily="34" charset="-122"/>
                 <a:cs typeface="Calibri" pitchFamily="34" charset="-120"/>
               </a:rPr>
-              <a:t>For 3 of 4 venue types, the naive observational fit understated the RCT-calibrated estimate by 100–165% — the kind of gap real MMM practice cites as its core identification problem, and exactly why the RCT anchor matters.</a:t>
+              <a:t>Two validation checks, since synthetic control has no closed-form standard error: pre-period fit quality (RMSPE — poor fits are flagged and excluded from the aggregate estimate) and an in-space placebo test on every donor venue.</a:t>
             </a:r>
             <a:endParaRPr lang="en-US" sz="1100" dirty="0"/>
           </a:p>
@@ -17150,7 +18107,7 @@
       </p:sp>
       <p:sp>
         <p:nvSpPr>
-          <p:cNvPr id="17" name="Text 14"/>
+          <p:cNvPr id="13" name="Text 10"/>
           <p:cNvSpPr/>
           <p:nvPr/>
         </p:nvSpPr>
@@ -17181,7 +18138,7 @@
                 <a:ea typeface="Calibri" pitchFamily="34" charset="-122"/>
                 <a:cs typeface="Calibri" pitchFamily="34" charset="-120"/>
               </a:rPr>
-              <a:t>Media-mix model</a:t>
+              <a:t>Causal measurement — Synthetic Control</a:t>
             </a:r>
             <a:endParaRPr lang="en-US" sz="900" dirty="0"/>
           </a:p>

--- a/deck/AtmosphereTV_DOOH_Measurement.pptx
+++ b/deck/AtmosphereTV_DOOH_Measurement.pptx
@@ -16348,7 +16348,7 @@
                           <a:ea typeface="Calibri" pitchFamily="34" charset="-122"/>
                           <a:cs typeface="Calibri" pitchFamily="34" charset="-120"/>
                         </a:rPr>
-                        <a:t>Ads stop, but true lift decays out over ~8 more weeks (adstock carryover) — not yet analyzed.</a:t>
+                        <a:t>Ads stop — a real tail holds for ~10 weeks, then fades to zero (see persistence check, next).</a:t>
                       </a:r>
                       <a:endParaRPr lang="en-US" sz="1050" dirty="0">
                         <a:latin typeface="Calibri" charset="0"/>
@@ -16511,7 +16511,7 @@
                 <a:ea typeface="Calibri" pitchFamily="34" charset="-122"/>
                 <a:cs typeface="Calibri" pitchFamily="34" charset="-120"/>
               </a:rPr>
-              <a:t>RCT pool: assignment is verified, not assumed — anchors high confidence. Observational pool: 134 of 264 venues never run a campaign at all, and the rest self-activate on their own schedule — exactly why synthetic control (next) reconstructs the counterfactual instead of comparing before/after directly.</a:t>
+              <a:t>RCT pool: assignment is verified, not assumed — anchors high confidence. Observational pool: 134 of 264 venues never run a campaign at all, and the rest 130 venues self-activate on their own schedule — exactly why synthetic control (next) reconstructs the counterfactual instead of comparing before/after directly.</a:t>
             </a:r>
             <a:endParaRPr lang="en-US" sz="1100" dirty="0"/>
           </a:p>

--- a/deck/AtmosphereTV_DOOH_Measurement.pptx
+++ b/deck/AtmosphereTV_DOOH_Measurement.pptx
@@ -16762,7 +16762,7 @@
         </p:nvGraphicFramePr>
         <p:xfrm>
           <a:off x="548640" y="1188720"/>
-          <a:ext cx="6583680" cy="3749040"/>
+          <a:ext cx="6583680" cy="3017520"/>
         </p:xfrm>
         <a:graphic xmlns:a="http://schemas.openxmlformats.org/drawingml/2006/main">
           <a:graphicData uri="http://schemas.openxmlformats.org/drawingml/2006/chart">
@@ -16778,6 +16778,169 @@
         </p:nvSpPr>
         <p:spPr>
           <a:xfrm>
+            <a:off x="548640" y="4297680"/>
+            <a:ext cx="6583680" cy="256032"/>
+          </a:xfrm>
+          <a:prstGeom prst="rect">
+            <a:avLst/>
+          </a:prstGeom>
+          <a:noFill/>
+          <a:ln/>
+        </p:spPr>
+        <p:txBody>
+          <a:bodyPr wrap="square" rtlCol="0" anchor="ctr"/>
+          <a:lstStyle/>
+          <a:p>
+            <a:pPr indent="0" marL="0">
+              <a:buNone/>
+            </a:pPr>
+            <a:r>
+              <a:rPr lang="en-US" sz="1250" b="1" dirty="0">
+                <a:solidFill>
+                  <a:srgbClr val="1E2761"/>
+                </a:solidFill>
+                <a:latin typeface="Cambria" pitchFamily="34" charset="0"/>
+                <a:ea typeface="Cambria" pitchFamily="34" charset="-122"/>
+                <a:cs typeface="Cambria" pitchFamily="34" charset="-120"/>
+              </a:rPr>
+              <a:t>Method: ANCOVA-style delta estimator</a:t>
+            </a:r>
+            <a:endParaRPr lang="en-US" sz="1250" dirty="0"/>
+          </a:p>
+        </p:txBody>
+      </p:sp>
+      <p:sp>
+        <p:nvSpPr>
+          <p:cNvPr id="9" name="Text 6"/>
+          <p:cNvSpPr/>
+          <p:nvPr/>
+        </p:nvSpPr>
+        <p:spPr>
+          <a:xfrm>
+            <a:off x="548640" y="4572000"/>
+            <a:ext cx="6583680" cy="1051560"/>
+          </a:xfrm>
+          <a:prstGeom prst="rect">
+            <a:avLst/>
+          </a:prstGeom>
+          <a:noFill/>
+          <a:ln/>
+        </p:spPr>
+        <p:txBody>
+          <a:bodyPr wrap="square" rtlCol="0" anchor="ctr"/>
+          <a:lstStyle/>
+          <a:p>
+            <a:pPr indent="0" marL="0">
+              <a:lnSpc>
+                <a:spcPts val="1350"/>
+              </a:lnSpc>
+              <a:buNone/>
+            </a:pPr>
+            <a:r>
+              <a:rPr lang="en-US" sz="1000" dirty="0">
+                <a:solidFill>
+                  <a:srgbClr val="1A1A2E"/>
+                </a:solidFill>
+                <a:latin typeface="Calibri" pitchFamily="34" charset="0"/>
+                <a:ea typeface="Calibri" pitchFamily="34" charset="-122"/>
+                <a:cs typeface="Calibri" pitchFamily="34" charset="-120"/>
+              </a:rPr>
+              <a:t>① Per-venue delta = campaign-window avg − pre-period avg — nets out that venue's own baseline.</a:t>
+            </a:r>
+            <a:endParaRPr lang="en-US" sz="1000" dirty="0"/>
+          </a:p>
+          <a:p>
+            <a:pPr indent="0" marL="0">
+              <a:lnSpc>
+                <a:spcPts val="1350"/>
+              </a:lnSpc>
+              <a:buNone/>
+            </a:pPr>
+            <a:r>
+              <a:rPr lang="en-US" sz="1000" dirty="0">
+                <a:solidFill>
+                  <a:srgbClr val="1A1A2E"/>
+                </a:solidFill>
+                <a:latin typeface="Calibri" pitchFamily="34" charset="0"/>
+                <a:ea typeface="Calibri" pitchFamily="34" charset="-122"/>
+                <a:cs typeface="Calibri" pitchFamily="34" charset="-120"/>
+              </a:rPr>
+              <a:t>② Effect = mean(treated deltas) − mean(holdout deltas) — a DiD-style comparison; any trend common to both arms cancels out too.</a:t>
+            </a:r>
+            <a:endParaRPr lang="en-US" sz="1000" dirty="0"/>
+          </a:p>
+          <a:p>
+            <a:pPr indent="0" marL="0">
+              <a:lnSpc>
+                <a:spcPts val="1350"/>
+              </a:lnSpc>
+              <a:buNone/>
+            </a:pPr>
+            <a:r>
+              <a:rPr lang="en-US" sz="1000" dirty="0">
+                <a:solidFill>
+                  <a:srgbClr val="1A1A2E"/>
+                </a:solidFill>
+                <a:latin typeface="Calibri" pitchFamily="34" charset="0"/>
+                <a:ea typeface="Calibri" pitchFamily="34" charset="-122"/>
+                <a:cs typeface="Calibri" pitchFamily="34" charset="-120"/>
+              </a:rPr>
+              <a:t>③ Welch's t-test on the two delta samples (unequal variance, unequal n) → SE, 95% CI, p-value.</a:t>
+            </a:r>
+            <a:endParaRPr lang="en-US" sz="1000" dirty="0"/>
+          </a:p>
+        </p:txBody>
+      </p:sp>
+      <p:sp>
+        <p:nvSpPr>
+          <p:cNvPr id="10" name="Text 7"/>
+          <p:cNvSpPr/>
+          <p:nvPr/>
+        </p:nvSpPr>
+        <p:spPr>
+          <a:xfrm>
+            <a:off x="548640" y="5623560"/>
+            <a:ext cx="6583680" cy="777240"/>
+          </a:xfrm>
+          <a:prstGeom prst="rect">
+            <a:avLst/>
+          </a:prstGeom>
+          <a:noFill/>
+          <a:ln/>
+        </p:spPr>
+        <p:txBody>
+          <a:bodyPr wrap="square" rtlCol="0" anchor="ctr"/>
+          <a:lstStyle/>
+          <a:p>
+            <a:pPr indent="0" marL="0">
+              <a:lnSpc>
+                <a:spcPts val="1200"/>
+              </a:lnSpc>
+              <a:buNone/>
+            </a:pPr>
+            <a:r>
+              <a:rPr lang="en-US" sz="900" i="1" dirty="0">
+                <a:solidFill>
+                  <a:srgbClr val="5B6178"/>
+                </a:solidFill>
+                <a:latin typeface="Calibri" pitchFamily="34" charset="0"/>
+                <a:ea typeface="Calibri" pitchFamily="34" charset="-122"/>
+                <a:cs typeface="Calibri" pitchFamily="34" charset="-120"/>
+              </a:rPr>
+              <a:t>Why delta, not raw post-period levels: venues vary hugely in baseline traffic (see Table 1) — differencing removes that between-venue noise, so 15–19 venues/arm reach significance a raw-level comparison couldn't. Why Welch's, not Student's or z: arms are small and unequal in size, so we don't assume equal variance, and we use the t- (not z-) distribution because that variance is itself estimated from so few venues.</a:t>
+            </a:r>
+            <a:endParaRPr lang="en-US" sz="900" dirty="0"/>
+          </a:p>
+        </p:txBody>
+      </p:sp>
+      <p:sp>
+        <p:nvSpPr>
+          <p:cNvPr id="11" name="Text 8"/>
+          <p:cNvSpPr/>
+          <p:nvPr/>
+        </p:nvSpPr>
+        <p:spPr>
+          <a:xfrm>
             <a:off x="7406640" y="1188720"/>
             <a:ext cx="4206240" cy="274320"/>
           </a:xfrm>
@@ -16795,7 +16958,7 @@
               <a:buNone/>
             </a:pPr>
             <a:r>
-              <a:rPr lang="en-US" sz="1000" b="1" dirty="0">
+              <a:rPr lang="en-US" sz="950" b="1" dirty="0">
                 <a:solidFill>
                   <a:srgbClr val="5B6178"/>
                 </a:solidFill>
@@ -16803,15 +16966,15 @@
                 <a:ea typeface="Courier New" pitchFamily="34" charset="-122"/>
                 <a:cs typeface="Courier New" pitchFamily="34" charset="-120"/>
               </a:rPr>
-              <a:t>Venue type      95% CI               p-value</a:t>
-            </a:r>
-            <a:endParaRPr lang="en-US" sz="1000" dirty="0"/>
-          </a:p>
-        </p:txBody>
-      </p:sp>
-      <p:sp>
-        <p:nvSpPr>
-          <p:cNvPr id="9" name="Text 6"/>
+              <a:t>Venue type      n (T/H)   95% CI               p-value</a:t>
+            </a:r>
+            <a:endParaRPr lang="en-US" sz="950" dirty="0"/>
+          </a:p>
+        </p:txBody>
+      </p:sp>
+      <p:sp>
+        <p:nvSpPr>
+          <p:cNvPr id="12" name="Text 9"/>
           <p:cNvSpPr/>
           <p:nvPr/>
         </p:nvSpPr>
@@ -16834,7 +16997,7 @@
               <a:buNone/>
             </a:pPr>
             <a:r>
-              <a:rPr lang="en-US" sz="1050" dirty="0">
+              <a:rPr lang="en-US" sz="1000" dirty="0">
                 <a:solidFill>
                   <a:srgbClr val="1A1A2E"/>
                 </a:solidFill>
@@ -16842,15 +17005,15 @@
                 <a:ea typeface="Courier New" pitchFamily="34" charset="-122"/>
                 <a:cs typeface="Courier New" pitchFamily="34" charset="-120"/>
               </a:rPr>
-              <a:t>Restaurants    [11.1, 22.4]   &lt; 0.001</a:t>
-            </a:r>
-            <a:endParaRPr lang="en-US" sz="1050" dirty="0"/>
-          </a:p>
-        </p:txBody>
-      </p:sp>
-      <p:sp>
-        <p:nvSpPr>
-          <p:cNvPr id="10" name="Text 7"/>
+              <a:t>Restaurants    18/17     [11.1, 22.4]   &lt; 0.001</a:t>
+            </a:r>
+            <a:endParaRPr lang="en-US" sz="1000" dirty="0"/>
+          </a:p>
+        </p:txBody>
+      </p:sp>
+      <p:sp>
+        <p:nvSpPr>
+          <p:cNvPr id="13" name="Text 10"/>
           <p:cNvSpPr/>
           <p:nvPr/>
         </p:nvSpPr>
@@ -16873,7 +17036,7 @@
               <a:buNone/>
             </a:pPr>
             <a:r>
-              <a:rPr lang="en-US" sz="1050" dirty="0">
+              <a:rPr lang="en-US" sz="1000" dirty="0">
                 <a:solidFill>
                   <a:srgbClr val="1A1A2E"/>
                 </a:solidFill>
@@ -16881,15 +17044,15 @@
                 <a:ea typeface="Courier New" pitchFamily="34" charset="-122"/>
                 <a:cs typeface="Courier New" pitchFamily="34" charset="-120"/>
               </a:rPr>
-              <a:t>Gyms           [5.2, 15.4]   &lt; 0.001</a:t>
-            </a:r>
-            <a:endParaRPr lang="en-US" sz="1050" dirty="0"/>
-          </a:p>
-        </p:txBody>
-      </p:sp>
-      <p:sp>
-        <p:nvSpPr>
-          <p:cNvPr id="11" name="Text 8"/>
+              <a:t>Gyms           15/17     [5.2, 15.4]   &lt; 0.001</a:t>
+            </a:r>
+            <a:endParaRPr lang="en-US" sz="1000" dirty="0"/>
+          </a:p>
+        </p:txBody>
+      </p:sp>
+      <p:sp>
+        <p:nvSpPr>
+          <p:cNvPr id="14" name="Text 11"/>
           <p:cNvSpPr/>
           <p:nvPr/>
         </p:nvSpPr>
@@ -16912,7 +17075,7 @@
               <a:buNone/>
             </a:pPr>
             <a:r>
-              <a:rPr lang="en-US" sz="1050" dirty="0">
+              <a:rPr lang="en-US" sz="1000" dirty="0">
                 <a:solidFill>
                   <a:srgbClr val="1A1A2E"/>
                 </a:solidFill>
@@ -16920,15 +17083,15 @@
                 <a:ea typeface="Courier New" pitchFamily="34" charset="-122"/>
                 <a:cs typeface="Courier New" pitchFamily="34" charset="-120"/>
               </a:rPr>
-              <a:t>Bars           [13.3, 22.5]   &lt; 0.001</a:t>
-            </a:r>
-            <a:endParaRPr lang="en-US" sz="1050" dirty="0"/>
-          </a:p>
-        </p:txBody>
-      </p:sp>
-      <p:sp>
-        <p:nvSpPr>
-          <p:cNvPr id="12" name="Text 9"/>
+              <a:t>Bars           17/19     [13.3, 22.5]   &lt; 0.001</a:t>
+            </a:r>
+            <a:endParaRPr lang="en-US" sz="1000" dirty="0"/>
+          </a:p>
+        </p:txBody>
+      </p:sp>
+      <p:sp>
+        <p:nvSpPr>
+          <p:cNvPr id="15" name="Text 12"/>
           <p:cNvSpPr/>
           <p:nvPr/>
         </p:nvSpPr>
@@ -16951,7 +17114,7 @@
               <a:buNone/>
             </a:pPr>
             <a:r>
-              <a:rPr lang="en-US" sz="1050" dirty="0">
+              <a:rPr lang="en-US" sz="1000" dirty="0">
                 <a:solidFill>
                   <a:srgbClr val="1A1A2E"/>
                 </a:solidFill>
@@ -16959,15 +17122,15 @@
                 <a:ea typeface="Courier New" pitchFamily="34" charset="-122"/>
                 <a:cs typeface="Courier New" pitchFamily="34" charset="-120"/>
               </a:rPr>
-              <a:t>Waiting Rooms  [5.1, 10.2]   &lt; 0.001</a:t>
-            </a:r>
-            <a:endParaRPr lang="en-US" sz="1050" dirty="0"/>
-          </a:p>
-        </p:txBody>
-      </p:sp>
-      <p:sp>
-        <p:nvSpPr>
-          <p:cNvPr id="13" name="Text 10"/>
+              <a:t>Waiting Rooms  17/16     [5.1, 10.2]   &lt; 0.001</a:t>
+            </a:r>
+            <a:endParaRPr lang="en-US" sz="1000" dirty="0"/>
+          </a:p>
+        </p:txBody>
+      </p:sp>
+      <p:sp>
+        <p:nvSpPr>
+          <p:cNvPr id="16" name="Text 13"/>
           <p:cNvSpPr/>
           <p:nvPr/>
         </p:nvSpPr>
@@ -17006,14 +17169,14 @@
       </p:sp>
       <p:sp>
         <p:nvSpPr>
-          <p:cNvPr id="14" name="Text 11"/>
+          <p:cNvPr id="17" name="Text 14"/>
           <p:cNvSpPr/>
           <p:nvPr/>
         </p:nvSpPr>
         <p:spPr>
           <a:xfrm>
             <a:off x="7406640" y="3639312"/>
-            <a:ext cx="4206240" cy="777240"/>
+            <a:ext cx="4206240" cy="914400"/>
           </a:xfrm>
           <a:prstGeom prst="rect">
             <a:avLst/>
@@ -17040,7 +17203,7 @@
                 <a:ea typeface="Calibri" pitchFamily="34" charset="-122"/>
                 <a:cs typeface="Calibri" pitchFamily="34" charset="-120"/>
               </a:rPr>
-              <a:t>16 tests = 4 pre-treatment covariates (baseline traffic level, dwell time, screen count, audience quality) × 4 venue types. Only 2 came back significant at p≤0.05.</a:t>
+              <a:t>16 t-tests = 4 pre-treatment covariates (baseline traffic level, dwell time, screen count, audience quality) × 4 venue types — a separate check from the 136 RCT venues themselves. Only 2 came back significant at p≤0.05.</a:t>
             </a:r>
             <a:endParaRPr lang="en-US" sz="1050" dirty="0"/>
           </a:p>
@@ -17048,14 +17211,14 @@
       </p:sp>
       <p:sp>
         <p:nvSpPr>
-          <p:cNvPr id="15" name="Text 12"/>
-          <p:cNvSpPr/>
-          <p:nvPr/>
-        </p:nvSpPr>
-        <p:spPr>
-          <a:xfrm>
-            <a:off x="7406640" y="4462272"/>
-            <a:ext cx="4206240" cy="1371600"/>
+          <p:cNvPr id="18" name="Text 15"/>
+          <p:cNvSpPr/>
+          <p:nvPr/>
+        </p:nvSpPr>
+        <p:spPr>
+          <a:xfrm>
+            <a:off x="7406640" y="4599432"/>
+            <a:ext cx="4206240" cy="1234440"/>
           </a:xfrm>
           <a:prstGeom prst="rect">
             <a:avLst/>
@@ -17082,7 +17245,7 @@
                 <a:ea typeface="Calibri" pitchFamily="34" charset="-122"/>
                 <a:cs typeface="Calibri" pitchFamily="34" charset="-120"/>
               </a:rPr>
-              <a:t>If randomization is clean, the count of false positives across 16 independent tests follows Binomial(16, 0.05): mean 0.8, P(≥2) ≈ 19%. Two sits well inside that distribution's main mass — nowhere near a red-flag tail value like 8+. Randomization worked as designed, not assumed.</a:t>
+              <a:t>If randomization is clean, the count of false positives across 16 independent t-tests follows Binomial(16, 0.05): mean 0.8, P(≥2) ≈ 19%. Two sits well inside that distribution's main mass — nowhere near a red-flag tail value like 8+. Randomization worked as designed, not assumed.</a:t>
             </a:r>
             <a:endParaRPr lang="en-US" sz="1050" dirty="0"/>
           </a:p>
@@ -17090,7 +17253,7 @@
       </p:sp>
       <p:sp>
         <p:nvSpPr>
-          <p:cNvPr id="16" name="Text 13"/>
+          <p:cNvPr id="19" name="Text 16"/>
           <p:cNvSpPr/>
           <p:nvPr/>
         </p:nvSpPr>

--- a/deck/AtmosphereTV_DOOH_Measurement.pptx
+++ b/deck/AtmosphereTV_DOOH_Measurement.pptx
@@ -16927,7 +16927,7 @@
                 <a:ea typeface="Calibri" pitchFamily="34" charset="-122"/>
                 <a:cs typeface="Calibri" pitchFamily="34" charset="-120"/>
               </a:rPr>
-              <a:t>Why delta, not raw post-period levels: venues vary hugely in baseline traffic (see Table 1) — differencing removes that between-venue noise, so 15–19 venues/arm reach significance a raw-level comparison couldn't. Why Welch's, not Student's or z: arms are small and unequal in size, so we don't assume equal variance, and we use the t- (not z-) distribution because that variance is itself estimated from so few venues.</a:t>
+              <a:t>Why delta, not raw post-period levels: individual venues differ a lot in baseline traffic even within one arm — differencing each against its own pre-period average removes that noise, so 15–19 venues/arm reach significance a raw-level comparison couldn't. Why Welch's, not Student's or z: arms are small and unequal in size, so we don't assume equal variance, and we use the t- (not z-) distribution — for both the p-value and the CI — because that variance is itself estimated from so few venues.</a:t>
             </a:r>
             <a:endParaRPr lang="en-US" sz="900" dirty="0"/>
           </a:p>
@@ -17005,7 +17005,7 @@
                 <a:ea typeface="Courier New" pitchFamily="34" charset="-122"/>
                 <a:cs typeface="Courier New" pitchFamily="34" charset="-120"/>
               </a:rPr>
-              <a:t>Restaurants    18/17     [11.1, 22.4]   &lt; 0.001</a:t>
+              <a:t>Restaurants    18/17     [10.9, 22.7]   &lt; 0.001</a:t>
             </a:r>
             <a:endParaRPr lang="en-US" sz="1000" dirty="0"/>
           </a:p>
@@ -17044,7 +17044,7 @@
                 <a:ea typeface="Courier New" pitchFamily="34" charset="-122"/>
                 <a:cs typeface="Courier New" pitchFamily="34" charset="-120"/>
               </a:rPr>
-              <a:t>Gyms           15/17     [5.2, 15.4]   &lt; 0.001</a:t>
+              <a:t>Gyms           15/17     [5.0, 15.7]   &lt; 0.001</a:t>
             </a:r>
             <a:endParaRPr lang="en-US" sz="1000" dirty="0"/>
           </a:p>
@@ -17083,7 +17083,7 @@
                 <a:ea typeface="Courier New" pitchFamily="34" charset="-122"/>
                 <a:cs typeface="Courier New" pitchFamily="34" charset="-120"/>
               </a:rPr>
-              <a:t>Bars           17/19     [13.3, 22.5]   &lt; 0.001</a:t>
+              <a:t>Bars           17/19     [13.1, 22.6]   &lt; 0.001</a:t>
             </a:r>
             <a:endParaRPr lang="en-US" sz="1000" dirty="0"/>
           </a:p>
@@ -17122,7 +17122,7 @@
                 <a:ea typeface="Courier New" pitchFamily="34" charset="-122"/>
                 <a:cs typeface="Courier New" pitchFamily="34" charset="-120"/>
               </a:rPr>
-              <a:t>Waiting Rooms  17/16     [5.1, 10.2]   &lt; 0.001</a:t>
+              <a:t>Waiting Rooms  17/16     [5.0, 10.3]   &lt; 0.001</a:t>
             </a:r>
             <a:endParaRPr lang="en-US" sz="1000" dirty="0"/>
           </a:p>

--- a/deck/AtmosphereTV_DOOH_Measurement.pptx
+++ b/deck/AtmosphereTV_DOOH_Measurement.pptx
@@ -17474,7 +17474,7 @@
         </p:nvGraphicFramePr>
         <p:xfrm>
           <a:off x="548640" y="1600200"/>
-          <a:ext cx="6583680" cy="3749040"/>
+          <a:ext cx="6583680" cy="2834640"/>
         </p:xfrm>
         <a:graphic xmlns:a="http://schemas.openxmlformats.org/drawingml/2006/main">
           <a:graphicData uri="http://schemas.openxmlformats.org/drawingml/2006/chart">
@@ -17490,7 +17490,169 @@
         </p:nvSpPr>
         <p:spPr>
           <a:xfrm>
+            <a:off x="548640" y="4526280"/>
+            <a:ext cx="6583680" cy="256032"/>
+          </a:xfrm>
+          <a:prstGeom prst="rect">
+            <a:avLst/>
+          </a:prstGeom>
+          <a:noFill/>
+          <a:ln/>
+        </p:spPr>
+        <p:txBody>
+          <a:bodyPr wrap="square" rtlCol="0" anchor="ctr"/>
+          <a:lstStyle/>
+          <a:p>
+            <a:pPr indent="0" marL="0">
+              <a:buNone/>
+            </a:pPr>
+            <a:r>
+              <a:rPr lang="en-US" sz="1250" b="1" dirty="0">
+                <a:solidFill>
+                  <a:srgbClr val="1E2761"/>
+                </a:solidFill>
+                <a:latin typeface="Cambria" pitchFamily="34" charset="0"/>
+                <a:ea typeface="Cambria" pitchFamily="34" charset="-122"/>
+                <a:cs typeface="Cambria" pitchFamily="34" charset="-120"/>
+              </a:rPr>
+              <a:t>Method: same estimator, later windows</a:t>
+            </a:r>
+            <a:endParaRPr lang="en-US" sz="1250" dirty="0"/>
+          </a:p>
+        </p:txBody>
+      </p:sp>
+      <p:sp>
+        <p:nvSpPr>
+          <p:cNvPr id="8" name="Text 5"/>
+          <p:cNvSpPr/>
+          <p:nvPr/>
+        </p:nvSpPr>
+        <p:spPr>
+          <a:xfrm>
+            <a:off x="548640" y="4800600"/>
+            <a:ext cx="6583680" cy="731520"/>
+          </a:xfrm>
+          <a:prstGeom prst="rect">
+            <a:avLst/>
+          </a:prstGeom>
+          <a:noFill/>
+          <a:ln/>
+        </p:spPr>
+        <p:txBody>
+          <a:bodyPr wrap="square" rtlCol="0" anchor="ctr"/>
+          <a:lstStyle/>
+          <a:p>
+            <a:pPr indent="0" marL="0">
+              <a:lnSpc>
+                <a:spcPts val="1300"/>
+              </a:lnSpc>
+              <a:buNone/>
+            </a:pPr>
+            <a:r>
+              <a:rPr lang="en-US" sz="1000" dirty="0">
+                <a:solidFill>
+                  <a:srgbClr val="1A1A2E"/>
+                </a:solidFill>
+                <a:latin typeface="Calibri" pitchFamily="34" charset="0"/>
+                <a:ea typeface="Calibri" pitchFamily="34" charset="-122"/>
+                <a:cs typeface="Calibri" pitchFamily="34" charset="-120"/>
+              </a:rPr>
+              <a:t>Same 3-step ANCOVA-style delta as the RCT slide — per-venue delta (window avg − pre-period avg) → treated-mean minus holdout-mean → Welch's t-test for SE, CI, p-value — just re-applied to each window here instead of the single week 60–69 window.</a:t>
+            </a:r>
+            <a:endParaRPr lang="en-US" sz="1000" dirty="0"/>
+          </a:p>
+        </p:txBody>
+      </p:sp>
+      <p:sp>
+        <p:nvSpPr>
+          <p:cNvPr id="9" name="Text 6"/>
+          <p:cNvSpPr/>
+          <p:nvPr/>
+        </p:nvSpPr>
+        <p:spPr>
+          <a:xfrm>
+            <a:off x="548640" y="5577840"/>
+            <a:ext cx="6583680" cy="777240"/>
+          </a:xfrm>
+          <a:prstGeom prst="rect">
+            <a:avLst/>
+          </a:prstGeom>
+          <a:noFill/>
+          <a:ln/>
+        </p:spPr>
+        <p:txBody>
+          <a:bodyPr wrap="square" rtlCol="0" anchor="ctr"/>
+          <a:lstStyle/>
+          <a:p>
+            <a:pPr indent="0" marL="0">
+              <a:lnSpc>
+                <a:spcPts val="1200"/>
+              </a:lnSpc>
+              <a:buNone/>
+            </a:pPr>
+            <a:r>
+              <a:rPr lang="en-US" sz="900" i="1" dirty="0">
+                <a:solidFill>
+                  <a:srgbClr val="5B6178"/>
+                </a:solidFill>
+                <a:latin typeface="Calibri" pitchFamily="34" charset="0"/>
+                <a:ea typeface="Calibri" pitchFamily="34" charset="-122"/>
+                <a:cs typeface="Calibri" pitchFamily="34" charset="-120"/>
+              </a:rPr>
+              <a:t>Pooled across all 4 venue types (67 treated / 69 holdout, every window) rather than split like the RCT slide: splitting was already thin at ~15–19 venues/arm for one window, and gets noisier once decay effects — smaller than the in-campaign one — are spread across four.</a:t>
+            </a:r>
+            <a:endParaRPr lang="en-US" sz="900" dirty="0"/>
+          </a:p>
+        </p:txBody>
+      </p:sp>
+      <p:sp>
+        <p:nvSpPr>
+          <p:cNvPr id="10" name="Text 7"/>
+          <p:cNvSpPr/>
+          <p:nvPr/>
+        </p:nvSpPr>
+        <p:spPr>
+          <a:xfrm>
             <a:off x="7406640" y="1600200"/>
+            <a:ext cx="4206240" cy="237744"/>
+          </a:xfrm>
+          <a:prstGeom prst="rect">
+            <a:avLst/>
+          </a:prstGeom>
+          <a:noFill/>
+          <a:ln/>
+        </p:spPr>
+        <p:txBody>
+          <a:bodyPr wrap="square" rtlCol="0" anchor="ctr"/>
+          <a:lstStyle/>
+          <a:p>
+            <a:pPr indent="0" marL="0">
+              <a:buNone/>
+            </a:pPr>
+            <a:r>
+              <a:rPr lang="en-US" sz="950" i="1" dirty="0">
+                <a:solidFill>
+                  <a:srgbClr val="5B6178"/>
+                </a:solidFill>
+                <a:latin typeface="Calibri" pitchFamily="34" charset="0"/>
+                <a:ea typeface="Calibri" pitchFamily="34" charset="-122"/>
+                <a:cs typeface="Calibri" pitchFamily="34" charset="-120"/>
+              </a:rPr>
+              <a:t>n = 67 treated / 69 holdout (same venues, every window)</a:t>
+            </a:r>
+            <a:endParaRPr lang="en-US" sz="950" dirty="0"/>
+          </a:p>
+        </p:txBody>
+      </p:sp>
+      <p:sp>
+        <p:nvSpPr>
+          <p:cNvPr id="11" name="Text 8"/>
+          <p:cNvSpPr/>
+          <p:nvPr/>
+        </p:nvSpPr>
+        <p:spPr>
+          <a:xfrm>
+            <a:off x="7406640" y="1892808"/>
             <a:ext cx="4206240" cy="274320"/>
           </a:xfrm>
           <a:prstGeom prst="rect">
@@ -17515,7 +17677,7 @@
                 <a:ea typeface="Courier New" pitchFamily="34" charset="-122"/>
                 <a:cs typeface="Courier New" pitchFamily="34" charset="-120"/>
               </a:rPr>
-              <a:t>Window                  Estimate     SE      p-value</a:t>
+              <a:t>Window              95% CI              p-value</a:t>
             </a:r>
             <a:endParaRPr lang="en-US" sz="950" dirty="0"/>
           </a:p>
@@ -17523,13 +17685,13 @@
       </p:sp>
       <p:sp>
         <p:nvSpPr>
-          <p:cNvPr id="8" name="Text 5"/>
-          <p:cNvSpPr/>
-          <p:nvPr/>
-        </p:nvSpPr>
-        <p:spPr>
-          <a:xfrm>
-            <a:off x="7406640" y="1920240"/>
+          <p:cNvPr id="12" name="Text 9"/>
+          <p:cNvSpPr/>
+          <p:nvPr/>
+        </p:nvSpPr>
+        <p:spPr>
+          <a:xfrm>
+            <a:off x="7406640" y="2185416"/>
             <a:ext cx="4206240" cy="292608"/>
           </a:xfrm>
           <a:prstGeom prst="rect">
@@ -17546,7 +17708,7 @@
               <a:buNone/>
             </a:pPr>
             <a:r>
-              <a:rPr lang="en-US" sz="1050" dirty="0">
+              <a:rPr lang="en-US" sz="1000" dirty="0">
                 <a:solidFill>
                   <a:srgbClr val="1A1A2E"/>
                 </a:solidFill>
@@ -17554,21 +17716,21 @@
                 <a:ea typeface="Courier New" pitchFamily="34" charset="-122"/>
                 <a:cs typeface="Courier New" pitchFamily="34" charset="-120"/>
               </a:rPr>
-              <a:t>During campaign     +13.26    1.26   &lt; 0.001</a:t>
-            </a:r>
-            <a:endParaRPr lang="en-US" sz="1050" dirty="0"/>
-          </a:p>
-        </p:txBody>
-      </p:sp>
-      <p:sp>
-        <p:nvSpPr>
-          <p:cNvPr id="9" name="Text 6"/>
-          <p:cNvSpPr/>
-          <p:nvPr/>
-        </p:nvSpPr>
-        <p:spPr>
-          <a:xfrm>
-            <a:off x="7406640" y="2267712"/>
+              <a:t>During campaign    [10.8, 15.8]    &lt; 0.001</a:t>
+            </a:r>
+            <a:endParaRPr lang="en-US" sz="1000" dirty="0"/>
+          </a:p>
+        </p:txBody>
+      </p:sp>
+      <p:sp>
+        <p:nvSpPr>
+          <p:cNvPr id="13" name="Text 10"/>
+          <p:cNvSpPr/>
+          <p:nvPr/>
+        </p:nvSpPr>
+        <p:spPr>
+          <a:xfrm>
+            <a:off x="7406640" y="2514600"/>
             <a:ext cx="4206240" cy="292608"/>
           </a:xfrm>
           <a:prstGeom prst="rect">
@@ -17585,7 +17747,7 @@
               <a:buNone/>
             </a:pPr>
             <a:r>
-              <a:rPr lang="en-US" sz="1050" dirty="0">
+              <a:rPr lang="en-US" sz="1000" dirty="0">
                 <a:solidFill>
                   <a:srgbClr val="1A1A2E"/>
                 </a:solidFill>
@@ -17593,21 +17755,21 @@
                 <a:ea typeface="Courier New" pitchFamily="34" charset="-122"/>
                 <a:cs typeface="Courier New" pitchFamily="34" charset="-120"/>
               </a:rPr>
-              <a:t>0–10 wks after       +2.52    1.16   0.031</a:t>
-            </a:r>
-            <a:endParaRPr lang="en-US" sz="1050" dirty="0"/>
-          </a:p>
-        </p:txBody>
-      </p:sp>
-      <p:sp>
-        <p:nvSpPr>
-          <p:cNvPr id="10" name="Text 7"/>
-          <p:cNvSpPr/>
-          <p:nvPr/>
-        </p:nvSpPr>
-        <p:spPr>
-          <a:xfrm>
-            <a:off x="7406640" y="2615184"/>
+              <a:t>0–10 wks after     [0.2, 4.8]      0.031</a:t>
+            </a:r>
+            <a:endParaRPr lang="en-US" sz="1000" dirty="0"/>
+          </a:p>
+        </p:txBody>
+      </p:sp>
+      <p:sp>
+        <p:nvSpPr>
+          <p:cNvPr id="14" name="Text 11"/>
+          <p:cNvSpPr/>
+          <p:nvPr/>
+        </p:nvSpPr>
+        <p:spPr>
+          <a:xfrm>
+            <a:off x="7406640" y="2843784"/>
             <a:ext cx="4206240" cy="292608"/>
           </a:xfrm>
           <a:prstGeom prst="rect">
@@ -17624,7 +17786,7 @@
               <a:buNone/>
             </a:pPr>
             <a:r>
-              <a:rPr lang="en-US" sz="1050" dirty="0">
+              <a:rPr lang="en-US" sz="1000" dirty="0">
                 <a:solidFill>
                   <a:srgbClr val="1A1A2E"/>
                 </a:solidFill>
@@ -17632,21 +17794,21 @@
                 <a:ea typeface="Courier New" pitchFamily="34" charset="-122"/>
                 <a:cs typeface="Courier New" pitchFamily="34" charset="-120"/>
               </a:rPr>
-              <a:t>10–20 wks after      -1.43    1.20   0.236</a:t>
-            </a:r>
-            <a:endParaRPr lang="en-US" sz="1050" dirty="0"/>
-          </a:p>
-        </p:txBody>
-      </p:sp>
-      <p:sp>
-        <p:nvSpPr>
-          <p:cNvPr id="11" name="Text 8"/>
-          <p:cNvSpPr/>
-          <p:nvPr/>
-        </p:nvSpPr>
-        <p:spPr>
-          <a:xfrm>
-            <a:off x="7406640" y="2962656"/>
+              <a:t>10–20 wks after    [-3.8, 0.9]     0.236</a:t>
+            </a:r>
+            <a:endParaRPr lang="en-US" sz="1000" dirty="0"/>
+          </a:p>
+        </p:txBody>
+      </p:sp>
+      <p:sp>
+        <p:nvSpPr>
+          <p:cNvPr id="15" name="Text 12"/>
+          <p:cNvSpPr/>
+          <p:nvPr/>
+        </p:nvSpPr>
+        <p:spPr>
+          <a:xfrm>
+            <a:off x="7406640" y="3172968"/>
             <a:ext cx="4206240" cy="292608"/>
           </a:xfrm>
           <a:prstGeom prst="rect">
@@ -17663,7 +17825,7 @@
               <a:buNone/>
             </a:pPr>
             <a:r>
-              <a:rPr lang="en-US" sz="1050" dirty="0">
+              <a:rPr lang="en-US" sz="1000" dirty="0">
                 <a:solidFill>
                   <a:srgbClr val="1A1A2E"/>
                 </a:solidFill>
@@ -17671,21 +17833,21 @@
                 <a:ea typeface="Courier New" pitchFamily="34" charset="-122"/>
                 <a:cs typeface="Courier New" pitchFamily="34" charset="-120"/>
               </a:rPr>
-              <a:t>Full post (34wk)     +0.05    0.75   0.945</a:t>
-            </a:r>
-            <a:endParaRPr lang="en-US" sz="1050" dirty="0"/>
-          </a:p>
-        </p:txBody>
-      </p:sp>
-      <p:sp>
-        <p:nvSpPr>
-          <p:cNvPr id="12" name="Text 9"/>
-          <p:cNvSpPr/>
-          <p:nvPr/>
-        </p:nvSpPr>
-        <p:spPr>
-          <a:xfrm>
-            <a:off x="7406640" y="3447288"/>
+              <a:t>Full post (34wk)   [-1.4, 1.5]     0.945</a:t>
+            </a:r>
+            <a:endParaRPr lang="en-US" sz="1000" dirty="0"/>
+          </a:p>
+        </p:txBody>
+      </p:sp>
+      <p:sp>
+        <p:nvSpPr>
+          <p:cNvPr id="16" name="Text 13"/>
+          <p:cNvSpPr/>
+          <p:nvPr/>
+        </p:nvSpPr>
+        <p:spPr>
+          <a:xfrm>
+            <a:off x="7406640" y="3666744"/>
             <a:ext cx="4206240" cy="274320"/>
           </a:xfrm>
           <a:prstGeom prst="rect">
@@ -17718,14 +17880,14 @@
       </p:sp>
       <p:sp>
         <p:nvSpPr>
-          <p:cNvPr id="13" name="Text 10"/>
-          <p:cNvSpPr/>
-          <p:nvPr/>
-        </p:nvSpPr>
-        <p:spPr>
-          <a:xfrm>
-            <a:off x="7406640" y="3767328"/>
-            <a:ext cx="4206240" cy="1188720"/>
+          <p:cNvPr id="17" name="Text 14"/>
+          <p:cNvSpPr/>
+          <p:nvPr/>
+        </p:nvSpPr>
+        <p:spPr>
+          <a:xfrm>
+            <a:off x="7406640" y="3977640"/>
+            <a:ext cx="4206240" cy="1097280"/>
           </a:xfrm>
           <a:prstGeom prst="rect">
             <a:avLst/>
@@ -17739,7 +17901,7 @@
           <a:p>
             <a:pPr indent="0" marL="0">
               <a:lnSpc>
-                <a:spcPts val="1400"/>
+                <a:spcPts val="1350"/>
               </a:lnSpc>
               <a:buNone/>
             </a:pPr>
@@ -17760,14 +17922,14 @@
       </p:sp>
       <p:sp>
         <p:nvSpPr>
-          <p:cNvPr id="14" name="Text 11"/>
-          <p:cNvSpPr/>
-          <p:nvPr/>
-        </p:nvSpPr>
-        <p:spPr>
-          <a:xfrm>
-            <a:off x="7406640" y="5093208"/>
-            <a:ext cx="4206240" cy="914400"/>
+          <p:cNvPr id="18" name="Text 15"/>
+          <p:cNvSpPr/>
+          <p:nvPr/>
+        </p:nvSpPr>
+        <p:spPr>
+          <a:xfrm>
+            <a:off x="7406640" y="5166360"/>
+            <a:ext cx="4206240" cy="868680"/>
           </a:xfrm>
           <a:prstGeom prst="rect">
             <a:avLst/>
@@ -17781,7 +17943,7 @@
           <a:p>
             <a:pPr indent="0" marL="0">
               <a:lnSpc>
-                <a:spcPts val="1400"/>
+                <a:spcPts val="1350"/>
               </a:lnSpc>
               <a:buNone/>
             </a:pPr>
@@ -17802,7 +17964,7 @@
       </p:sp>
       <p:sp>
         <p:nvSpPr>
-          <p:cNvPr id="15" name="Text 12"/>
+          <p:cNvPr id="19" name="Text 16"/>
           <p:cNvSpPr/>
           <p:nvPr/>
         </p:nvSpPr>

--- a/deck/AtmosphereTV_DOOH_Measurement.pptx
+++ b/deck/AtmosphereTV_DOOH_Measurement.pptx
@@ -18185,7 +18185,7 @@
         </p:nvGraphicFramePr>
         <p:xfrm>
           <a:off x="548640" y="1645920"/>
-          <a:ext cx="6583680" cy="3749040"/>
+          <a:ext cx="6583680" cy="2743200"/>
         </p:xfrm>
         <a:graphic xmlns:a="http://schemas.openxmlformats.org/drawingml/2006/main">
           <a:graphicData uri="http://schemas.openxmlformats.org/drawingml/2006/chart">
@@ -18201,24 +18201,147 @@
         </p:nvSpPr>
         <p:spPr>
           <a:xfrm>
+            <a:off x="548640" y="4434840"/>
+            <a:ext cx="6583680" cy="256032"/>
+          </a:xfrm>
+          <a:prstGeom prst="rect">
+            <a:avLst/>
+          </a:prstGeom>
+          <a:noFill/>
+          <a:ln/>
+        </p:spPr>
+        <p:txBody>
+          <a:bodyPr wrap="square" rtlCol="0" anchor="ctr"/>
+          <a:lstStyle/>
+          <a:p>
+            <a:pPr indent="0" marL="0">
+              <a:buNone/>
+            </a:pPr>
+            <a:r>
+              <a:rPr lang="en-US" sz="1250" b="1" dirty="0">
+                <a:solidFill>
+                  <a:srgbClr val="1E2761"/>
+                </a:solidFill>
+                <a:latin typeface="Cambria" pitchFamily="34" charset="0"/>
+                <a:ea typeface="Cambria" pitchFamily="34" charset="-122"/>
+                <a:cs typeface="Cambria" pitchFamily="34" charset="-120"/>
+              </a:rPr>
+              <a:t>Method: build a synthetic twin, per venue</a:t>
+            </a:r>
+            <a:endParaRPr lang="en-US" sz="1250" dirty="0"/>
+          </a:p>
+        </p:txBody>
+      </p:sp>
+      <p:sp>
+        <p:nvSpPr>
+          <p:cNvPr id="8" name="Text 5"/>
+          <p:cNvSpPr/>
+          <p:nvPr/>
+        </p:nvSpPr>
+        <p:spPr>
+          <a:xfrm>
+            <a:off x="548640" y="4709160"/>
+            <a:ext cx="6583680" cy="868680"/>
+          </a:xfrm>
+          <a:prstGeom prst="rect">
+            <a:avLst/>
+          </a:prstGeom>
+          <a:noFill/>
+          <a:ln/>
+        </p:spPr>
+        <p:txBody>
+          <a:bodyPr wrap="square" rtlCol="0" anchor="ctr"/>
+          <a:lstStyle/>
+          <a:p>
+            <a:pPr indent="0" marL="0">
+              <a:lnSpc>
+                <a:spcPts val="1300"/>
+              </a:lnSpc>
+              <a:buNone/>
+            </a:pPr>
+            <a:r>
+              <a:rPr lang="en-US" sz="1000" dirty="0">
+                <a:solidFill>
+                  <a:srgbClr val="1A1A2E"/>
+                </a:solidFill>
+                <a:latin typeface="Calibri" pitchFamily="34" charset="0"/>
+                <a:ea typeface="Calibri" pitchFamily="34" charset="-122"/>
+                <a:cs typeface="Calibri" pitchFamily="34" charset="-120"/>
+              </a:rPr>
+              <a:t>For each activated venue: fit non-negative weights (summing to 1) on same-type never-activated donor venues, minimizing pre-period MSE against that venue's own trajectory (the classic Abadie et al. construction) → apply those weights to donors' post-period data as the counterfactual → effect = mean(actual − synthetic) over that venue's own 16-week post-campaign window.</a:t>
+            </a:r>
+            <a:endParaRPr lang="en-US" sz="1000" dirty="0"/>
+          </a:p>
+        </p:txBody>
+      </p:sp>
+      <p:sp>
+        <p:nvSpPr>
+          <p:cNvPr id="9" name="Text 6"/>
+          <p:cNvSpPr/>
+          <p:nvPr/>
+        </p:nvSpPr>
+        <p:spPr>
+          <a:xfrm>
+            <a:off x="548640" y="5623560"/>
+            <a:ext cx="6583680" cy="822960"/>
+          </a:xfrm>
+          <a:prstGeom prst="rect">
+            <a:avLst/>
+          </a:prstGeom>
+          <a:noFill/>
+          <a:ln/>
+        </p:spPr>
+        <p:txBody>
+          <a:bodyPr wrap="square" rtlCol="0" anchor="ctr"/>
+          <a:lstStyle/>
+          <a:p>
+            <a:pPr indent="0" marL="0">
+              <a:lnSpc>
+                <a:spcPts val="1200"/>
+              </a:lnSpc>
+              <a:buNone/>
+            </a:pPr>
+            <a:r>
+              <a:rPr lang="en-US" sz="900" i="1" dirty="0">
+                <a:solidFill>
+                  <a:srgbClr val="5B6178"/>
+                </a:solidFill>
+                <a:latin typeface="Calibri" pitchFamily="34" charset="0"/>
+                <a:ea typeface="Calibri" pitchFamily="34" charset="-122"/>
+                <a:cs typeface="Calibri" pitchFamily="34" charset="-120"/>
+              </a:rPr>
+              <a:t>Unlike the RCT, each venue picks its own pre/post split at its own activation week — obs-pool venues self-activate on their own schedule, there's no shared campaign window. Each bar is the mean effect across only that type's good pre-period-fit venues (see right) — poor fits are excluded, not averaged in.</a:t>
+            </a:r>
+            <a:endParaRPr lang="en-US" sz="900" dirty="0"/>
+          </a:p>
+        </p:txBody>
+      </p:sp>
+      <p:sp>
+        <p:nvSpPr>
+          <p:cNvPr id="10" name="Text 7"/>
+          <p:cNvSpPr/>
+          <p:nvPr/>
+        </p:nvSpPr>
+        <p:spPr>
+          <a:xfrm>
             <a:off x="7406640" y="1645920"/>
-            <a:ext cx="4206240" cy="274320"/>
-          </a:xfrm>
-          <a:prstGeom prst="rect">
-            <a:avLst/>
-          </a:prstGeom>
-          <a:noFill/>
-          <a:ln/>
-        </p:spPr>
-        <p:txBody>
-          <a:bodyPr wrap="square" rtlCol="0" anchor="ctr"/>
-          <a:lstStyle/>
-          <a:p>
-            <a:pPr indent="0" marL="0">
-              <a:buNone/>
-            </a:pPr>
-            <a:r>
-              <a:rPr lang="en-US" sz="1000" b="1" dirty="0">
+            <a:ext cx="4206240" cy="256032"/>
+          </a:xfrm>
+          <a:prstGeom prst="rect">
+            <a:avLst/>
+          </a:prstGeom>
+          <a:noFill/>
+          <a:ln/>
+        </p:spPr>
+        <p:txBody>
+          <a:bodyPr wrap="square" rtlCol="0" anchor="ctr"/>
+          <a:lstStyle/>
+          <a:p>
+            <a:pPr indent="0" marL="0">
+              <a:buNone/>
+            </a:pPr>
+            <a:r>
+              <a:rPr lang="en-US" sz="950" b="1" dirty="0">
                 <a:solidFill>
                   <a:srgbClr val="5B6178"/>
                 </a:solidFill>
@@ -18226,38 +18349,38 @@
                 <a:ea typeface="Courier New" pitchFamily="34" charset="-122"/>
                 <a:cs typeface="Courier New" pitchFamily="34" charset="-120"/>
               </a:rPr>
-              <a:t>Venue type      Placebo p    Pre-RMSPE</a:t>
-            </a:r>
-            <a:endParaRPr lang="en-US" sz="1000" dirty="0"/>
-          </a:p>
-        </p:txBody>
-      </p:sp>
-      <p:sp>
-        <p:nvSpPr>
-          <p:cNvPr id="8" name="Text 5"/>
-          <p:cNvSpPr/>
-          <p:nvPr/>
-        </p:nvSpPr>
-        <p:spPr>
-          <a:xfrm>
-            <a:off x="7406640" y="1965960"/>
-            <a:ext cx="4206240" cy="320040"/>
-          </a:xfrm>
-          <a:prstGeom prst="rect">
-            <a:avLst/>
-          </a:prstGeom>
-          <a:noFill/>
-          <a:ln/>
-        </p:spPr>
-        <p:txBody>
-          <a:bodyPr wrap="square" rtlCol="0" anchor="ctr"/>
-          <a:lstStyle/>
-          <a:p>
-            <a:pPr indent="0" marL="0">
-              <a:buNone/>
-            </a:pPr>
-            <a:r>
-              <a:rPr lang="en-US" sz="1050" dirty="0">
+              <a:t>Venue type    n(used/flag)  Placebo p   RMSPE</a:t>
+            </a:r>
+            <a:endParaRPr lang="en-US" sz="950" dirty="0"/>
+          </a:p>
+        </p:txBody>
+      </p:sp>
+      <p:sp>
+        <p:nvSpPr>
+          <p:cNvPr id="11" name="Text 8"/>
+          <p:cNvSpPr/>
+          <p:nvPr/>
+        </p:nvSpPr>
+        <p:spPr>
+          <a:xfrm>
+            <a:off x="7406640" y="1938528"/>
+            <a:ext cx="4206240" cy="274320"/>
+          </a:xfrm>
+          <a:prstGeom prst="rect">
+            <a:avLst/>
+          </a:prstGeom>
+          <a:noFill/>
+          <a:ln/>
+        </p:spPr>
+        <p:txBody>
+          <a:bodyPr wrap="square" rtlCol="0" anchor="ctr"/>
+          <a:lstStyle/>
+          <a:p>
+            <a:pPr indent="0" marL="0">
+              <a:buNone/>
+            </a:pPr>
+            <a:r>
+              <a:rPr lang="en-US" sz="950" dirty="0">
                 <a:solidFill>
                   <a:srgbClr val="1A1A2E"/>
                 </a:solidFill>
@@ -18265,38 +18388,38 @@
                 <a:ea typeface="Courier New" pitchFamily="34" charset="-122"/>
                 <a:cs typeface="Courier New" pitchFamily="34" charset="-120"/>
               </a:rPr>
-              <a:t>Restaurants    0.160        26.4</a:t>
-            </a:r>
-            <a:endParaRPr lang="en-US" sz="1050" dirty="0"/>
-          </a:p>
-        </p:txBody>
-      </p:sp>
-      <p:sp>
-        <p:nvSpPr>
-          <p:cNvPr id="9" name="Text 6"/>
-          <p:cNvSpPr/>
-          <p:nvPr/>
-        </p:nvSpPr>
-        <p:spPr>
-          <a:xfrm>
-            <a:off x="7406640" y="2350008"/>
-            <a:ext cx="4206240" cy="320040"/>
-          </a:xfrm>
-          <a:prstGeom prst="rect">
-            <a:avLst/>
-          </a:prstGeom>
-          <a:noFill/>
-          <a:ln/>
-        </p:spPr>
-        <p:txBody>
-          <a:bodyPr wrap="square" rtlCol="0" anchor="ctr"/>
-          <a:lstStyle/>
-          <a:p>
-            <a:pPr indent="0" marL="0">
-              <a:buNone/>
-            </a:pPr>
-            <a:r>
-              <a:rPr lang="en-US" sz="1050" dirty="0">
+              <a:t>Restaurants   42/4          0.160       26.4</a:t>
+            </a:r>
+            <a:endParaRPr lang="en-US" sz="950" dirty="0"/>
+          </a:p>
+        </p:txBody>
+      </p:sp>
+      <p:sp>
+        <p:nvSpPr>
+          <p:cNvPr id="12" name="Text 9"/>
+          <p:cNvSpPr/>
+          <p:nvPr/>
+        </p:nvSpPr>
+        <p:spPr>
+          <a:xfrm>
+            <a:off x="7406640" y="2267712"/>
+            <a:ext cx="4206240" cy="274320"/>
+          </a:xfrm>
+          <a:prstGeom prst="rect">
+            <a:avLst/>
+          </a:prstGeom>
+          <a:noFill/>
+          <a:ln/>
+        </p:spPr>
+        <p:txBody>
+          <a:bodyPr wrap="square" rtlCol="0" anchor="ctr"/>
+          <a:lstStyle/>
+          <a:p>
+            <a:pPr indent="0" marL="0">
+              <a:buNone/>
+            </a:pPr>
+            <a:r>
+              <a:rPr lang="en-US" sz="950" dirty="0">
                 <a:solidFill>
                   <a:srgbClr val="1A1A2E"/>
                 </a:solidFill>
@@ -18304,38 +18427,38 @@
                 <a:ea typeface="Courier New" pitchFamily="34" charset="-122"/>
                 <a:cs typeface="Courier New" pitchFamily="34" charset="-120"/>
               </a:rPr>
-              <a:t>Gyms           0.050        14.4</a:t>
-            </a:r>
-            <a:endParaRPr lang="en-US" sz="1050" dirty="0"/>
-          </a:p>
-        </p:txBody>
-      </p:sp>
-      <p:sp>
-        <p:nvSpPr>
-          <p:cNvPr id="10" name="Text 7"/>
-          <p:cNvSpPr/>
-          <p:nvPr/>
-        </p:nvSpPr>
-        <p:spPr>
-          <a:xfrm>
-            <a:off x="7406640" y="2734056"/>
-            <a:ext cx="4206240" cy="320040"/>
-          </a:xfrm>
-          <a:prstGeom prst="rect">
-            <a:avLst/>
-          </a:prstGeom>
-          <a:noFill/>
-          <a:ln/>
-        </p:spPr>
-        <p:txBody>
-          <a:bodyPr wrap="square" rtlCol="0" anchor="ctr"/>
-          <a:lstStyle/>
-          <a:p>
-            <a:pPr indent="0" marL="0">
-              <a:buNone/>
-            </a:pPr>
-            <a:r>
-              <a:rPr lang="en-US" sz="1050" dirty="0">
+              <a:t>Gyms          31/0          0.050       14.4</a:t>
+            </a:r>
+            <a:endParaRPr lang="en-US" sz="950" dirty="0"/>
+          </a:p>
+        </p:txBody>
+      </p:sp>
+      <p:sp>
+        <p:nvSpPr>
+          <p:cNvPr id="13" name="Text 10"/>
+          <p:cNvSpPr/>
+          <p:nvPr/>
+        </p:nvSpPr>
+        <p:spPr>
+          <a:xfrm>
+            <a:off x="7406640" y="2596896"/>
+            <a:ext cx="4206240" cy="274320"/>
+          </a:xfrm>
+          <a:prstGeom prst="rect">
+            <a:avLst/>
+          </a:prstGeom>
+          <a:noFill/>
+          <a:ln/>
+        </p:spPr>
+        <p:txBody>
+          <a:bodyPr wrap="square" rtlCol="0" anchor="ctr"/>
+          <a:lstStyle/>
+          <a:p>
+            <a:pPr indent="0" marL="0">
+              <a:buNone/>
+            </a:pPr>
+            <a:r>
+              <a:rPr lang="en-US" sz="950" dirty="0">
                 <a:solidFill>
                   <a:srgbClr val="1A1A2E"/>
                 </a:solidFill>
@@ -18343,38 +18466,38 @@
                 <a:ea typeface="Courier New" pitchFamily="34" charset="-122"/>
                 <a:cs typeface="Courier New" pitchFamily="34" charset="-120"/>
               </a:rPr>
-              <a:t>Bars           0.100        17.8</a:t>
-            </a:r>
-            <a:endParaRPr lang="en-US" sz="1050" dirty="0"/>
-          </a:p>
-        </p:txBody>
-      </p:sp>
-      <p:sp>
-        <p:nvSpPr>
-          <p:cNvPr id="11" name="Text 8"/>
-          <p:cNvSpPr/>
-          <p:nvPr/>
-        </p:nvSpPr>
-        <p:spPr>
-          <a:xfrm>
-            <a:off x="7406640" y="3118104"/>
-            <a:ext cx="4206240" cy="320040"/>
-          </a:xfrm>
-          <a:prstGeom prst="rect">
-            <a:avLst/>
-          </a:prstGeom>
-          <a:noFill/>
-          <a:ln/>
-        </p:spPr>
-        <p:txBody>
-          <a:bodyPr wrap="square" rtlCol="0" anchor="ctr"/>
-          <a:lstStyle/>
-          <a:p>
-            <a:pPr indent="0" marL="0">
-              <a:buNone/>
-            </a:pPr>
-            <a:r>
-              <a:rPr lang="en-US" sz="1050" dirty="0">
+              <a:t>Bars          29/4          0.100       17.8</a:t>
+            </a:r>
+            <a:endParaRPr lang="en-US" sz="950" dirty="0"/>
+          </a:p>
+        </p:txBody>
+      </p:sp>
+      <p:sp>
+        <p:nvSpPr>
+          <p:cNvPr id="14" name="Text 11"/>
+          <p:cNvSpPr/>
+          <p:nvPr/>
+        </p:nvSpPr>
+        <p:spPr>
+          <a:xfrm>
+            <a:off x="7406640" y="2926080"/>
+            <a:ext cx="4206240" cy="274320"/>
+          </a:xfrm>
+          <a:prstGeom prst="rect">
+            <a:avLst/>
+          </a:prstGeom>
+          <a:noFill/>
+          <a:ln/>
+        </p:spPr>
+        <p:txBody>
+          <a:bodyPr wrap="square" rtlCol="0" anchor="ctr"/>
+          <a:lstStyle/>
+          <a:p>
+            <a:pPr indent="0" marL="0">
+              <a:buNone/>
+            </a:pPr>
+            <a:r>
+              <a:rPr lang="en-US" sz="950" dirty="0">
                 <a:solidFill>
                   <a:srgbClr val="1A1A2E"/>
                 </a:solidFill>
@@ -18382,22 +18505,22 @@
                 <a:ea typeface="Courier New" pitchFamily="34" charset="-122"/>
                 <a:cs typeface="Courier New" pitchFamily="34" charset="-120"/>
               </a:rPr>
-              <a:t>Waiting Rooms  0.110        8.3</a:t>
-            </a:r>
-            <a:endParaRPr lang="en-US" sz="1050" dirty="0"/>
-          </a:p>
-        </p:txBody>
-      </p:sp>
-      <p:sp>
-        <p:nvSpPr>
-          <p:cNvPr id="12" name="Text 9"/>
-          <p:cNvSpPr/>
-          <p:nvPr/>
-        </p:nvSpPr>
-        <p:spPr>
-          <a:xfrm>
-            <a:off x="7406640" y="3776472"/>
-            <a:ext cx="4206240" cy="1554480"/>
+              <a:t>Waiting Rooms 20/0          0.110       8.3</a:t>
+            </a:r>
+            <a:endParaRPr lang="en-US" sz="950" dirty="0"/>
+          </a:p>
+        </p:txBody>
+      </p:sp>
+      <p:sp>
+        <p:nvSpPr>
+          <p:cNvPr id="15" name="Text 12"/>
+          <p:cNvSpPr/>
+          <p:nvPr/>
+        </p:nvSpPr>
+        <p:spPr>
+          <a:xfrm>
+            <a:off x="7406640" y="3346704"/>
+            <a:ext cx="4206240" cy="1051560"/>
           </a:xfrm>
           <a:prstGeom prst="rect">
             <a:avLst/>
@@ -18411,12 +18534,54 @@
           <a:p>
             <a:pPr indent="0" marL="0">
               <a:lnSpc>
-                <a:spcPts val="1500"/>
+                <a:spcPts val="1250"/>
               </a:lnSpc>
               <a:buNone/>
             </a:pPr>
             <a:r>
-              <a:rPr lang="en-US" sz="1100" i="1" dirty="0">
+              <a:rPr lang="en-US" sz="950" dirty="0">
+                <a:solidFill>
+                  <a:srgbClr val="1A1A2E"/>
+                </a:solidFill>
+                <a:latin typeface="Calibri" pitchFamily="34" charset="0"/>
+                <a:ea typeface="Calibri" pitchFamily="34" charset="-122"/>
+                <a:cs typeface="Calibri" pitchFamily="34" charset="-120"/>
+              </a:rPr>
+              <a:t>Pre-period RMSPE = √mean((actual − synthetic)²) over each venue's own pre-period weeks — how well the twin matches reality before treatment starts. A venue is flagged (excluded from the bar above) if its RMSPE exceeds 2.5× its type's median — restaurants' high median (26.4) is why 4 of its 46 attempted fits got flagged.</a:t>
+            </a:r>
+            <a:endParaRPr lang="en-US" sz="950" dirty="0"/>
+          </a:p>
+        </p:txBody>
+      </p:sp>
+      <p:sp>
+        <p:nvSpPr>
+          <p:cNvPr id="16" name="Text 13"/>
+          <p:cNvSpPr/>
+          <p:nvPr/>
+        </p:nvSpPr>
+        <p:spPr>
+          <a:xfrm>
+            <a:off x="7406640" y="4489704"/>
+            <a:ext cx="4206240" cy="1143000"/>
+          </a:xfrm>
+          <a:prstGeom prst="rect">
+            <a:avLst/>
+          </a:prstGeom>
+          <a:noFill/>
+          <a:ln/>
+        </p:spPr>
+        <p:txBody>
+          <a:bodyPr wrap="square" rtlCol="0" anchor="ctr"/>
+          <a:lstStyle/>
+          <a:p>
+            <a:pPr indent="0" marL="0">
+              <a:lnSpc>
+                <a:spcPts val="1250"/>
+              </a:lnSpc>
+              <a:buNone/>
+            </a:pPr>
+            <a:r>
+              <a:rPr lang="en-US" sz="950" i="1" dirty="0">
                 <a:solidFill>
                   <a:srgbClr val="5B6178"/>
                 </a:solidFill>
@@ -18424,15 +18589,15 @@
                 <a:ea typeface="Calibri" pitchFamily="34" charset="-122"/>
                 <a:cs typeface="Calibri" pitchFamily="34" charset="-120"/>
               </a:rPr>
-              <a:t>Two validation checks, since synthetic control has no closed-form standard error: pre-period fit quality (RMSPE — poor fits are flagged and excluded from the aggregate estimate) and an in-space placebo test on every donor venue.</a:t>
-            </a:r>
-            <a:endParaRPr lang="en-US" sz="1100" dirty="0"/>
-          </a:p>
-        </p:txBody>
-      </p:sp>
-      <p:sp>
-        <p:nvSpPr>
-          <p:cNvPr id="13" name="Text 10"/>
+              <a:t>In-space placebo test — substitutes for a p-value since synthetic control has no closed-form SE: rerun the identical fit on every never-activated donor, pretending each was treated. Placebo p = share of those donor "fake effects" at least as extreme as the real one — restaurant's p=0.16 is the weakest signal of the four (its worst-fitting type too); gym's p=0.05 the strongest.</a:t>
+            </a:r>
+            <a:endParaRPr lang="en-US" sz="950" dirty="0"/>
+          </a:p>
+        </p:txBody>
+      </p:sp>
+      <p:sp>
+        <p:nvSpPr>
+          <p:cNvPr id="17" name="Text 14"/>
           <p:cNvSpPr/>
           <p:nvPr/>
         </p:nvSpPr>

--- a/deck/AtmosphereTV_DOOH_Measurement.pptx
+++ b/deck/AtmosphereTV_DOOH_Measurement.pptx
@@ -17557,7 +17557,7 @@
                 <a:ea typeface="Calibri" pitchFamily="34" charset="-122"/>
                 <a:cs typeface="Calibri" pitchFamily="34" charset="-120"/>
               </a:rPr>
-              <a:t>Same 3-step ANCOVA-style delta as the RCT slide — per-venue delta (window avg − pre-period avg) → treated-mean minus holdout-mean → Welch's t-test for SE, CI, p-value — just re-applied to each window here instead of the single week 60–69 window.</a:t>
+              <a:t>Same 3-step ANCOVA-style delta as the RCT slide — per-venue delta (window avg − pre-period avg) → treated-mean minus holdout-mean → Welch's t-test for SE, CI, p-value — but pooled across all 4 venue types here (not split like the RCT slide), and re-applied to each window instead of the single week 60–69 window.</a:t>
             </a:r>
             <a:endParaRPr lang="en-US" sz="1000" dirty="0"/>
           </a:p>
@@ -17599,7 +17599,7 @@
                 <a:ea typeface="Calibri" pitchFamily="34" charset="-122"/>
                 <a:cs typeface="Calibri" pitchFamily="34" charset="-120"/>
               </a:rPr>
-              <a:t>Pooled across all 4 venue types (67 treated / 69 holdout, every window) rather than split like the RCT slide: splitting was already thin at ~15–19 venues/arm for one window, and gets noisier once decay effects — smaller than the in-campaign one — are spread across four.</a:t>
+              <a:t>Splitting was already thin at ~15–19 venues/arm for one window; spreading that across four venue types and four windows, on top of decay effects that are smaller than the in-campaign lift, would push the noise past what a week-level estimate can resolve.</a:t>
             </a:r>
             <a:endParaRPr lang="en-US" sz="900" dirty="0"/>
           </a:p>

--- a/deck/AtmosphereTV_DOOH_Measurement.pptx
+++ b/deck/AtmosphereTV_DOOH_Measurement.pptx
@@ -18185,7 +18185,7 @@
         </p:nvGraphicFramePr>
         <p:xfrm>
           <a:off x="548640" y="1645920"/>
-          <a:ext cx="6583680" cy="2743200"/>
+          <a:ext cx="6583680" cy="2606040"/>
         </p:xfrm>
         <a:graphic xmlns:a="http://schemas.openxmlformats.org/drawingml/2006/main">
           <a:graphicData uri="http://schemas.openxmlformats.org/drawingml/2006/chart">
@@ -18201,7 +18201,7 @@
         </p:nvSpPr>
         <p:spPr>
           <a:xfrm>
-            <a:off x="548640" y="4434840"/>
+            <a:off x="548640" y="4297680"/>
             <a:ext cx="6583680" cy="256032"/>
           </a:xfrm>
           <a:prstGeom prst="rect">
@@ -18240,8 +18240,8 @@
         </p:nvSpPr>
         <p:spPr>
           <a:xfrm>
-            <a:off x="548640" y="4709160"/>
-            <a:ext cx="6583680" cy="868680"/>
+            <a:off x="548640" y="4572000"/>
+            <a:ext cx="6583680" cy="1188720"/>
           </a:xfrm>
           <a:prstGeom prst="rect">
             <a:avLst/>
@@ -18255,7 +18255,7 @@
           <a:p>
             <a:pPr indent="0" marL="0">
               <a:lnSpc>
-                <a:spcPts val="1300"/>
+                <a:spcPts val="1250"/>
               </a:lnSpc>
               <a:buNone/>
             </a:pPr>
@@ -18268,10 +18268,50 @@
                 <a:ea typeface="Calibri" pitchFamily="34" charset="-122"/>
                 <a:cs typeface="Calibri" pitchFamily="34" charset="-120"/>
               </a:rPr>
-              <a:t>For each activated venue: fit non-negative weights (summing to 1) on same-type never-activated donor venues, minimizing pre-period MSE against that venue's own trajectory (the classic Abadie et al. construction) → apply those weights to donors' post-period data as the counterfactual → effect = mean(actual − synthetic) over that venue's own 16-week post-campaign window.</a:t>
+              <a:t>① Donor pool = same-type venues that never ran a campaign (e.g. 31 never-activated bars).</a:t>
             </a:r>
             <a:endParaRPr lang="en-US" sz="1000" dirty="0"/>
           </a:p>
+          <a:p>
+            <a:pPr indent="0" marL="0">
+              <a:lnSpc>
+                <a:spcPts val="1250"/>
+              </a:lnSpc>
+              <a:buNone/>
+            </a:pPr>
+            <a:r>
+              <a:rPr lang="en-US" sz="1000" dirty="0">
+                <a:solidFill>
+                  <a:srgbClr val="1A1A2E"/>
+                </a:solidFill>
+                <a:latin typeface="Calibri" pitchFamily="34" charset="0"/>
+                <a:ea typeface="Calibri" pitchFamily="34" charset="-122"/>
+                <a:cs typeface="Calibri" pitchFamily="34" charset="-120"/>
+              </a:rPr>
+              <a:t>② Fit non-negative weights, one per donor, summing to 1, that minimize the MSE between the weighted donor blend and this venue's own pre-period traffic (Abadie et al.) — a real blend, typically 5–15 donors get meaningful weight, not one single match.</a:t>
+            </a:r>
+            <a:endParaRPr lang="en-US" sz="1000" dirty="0"/>
+          </a:p>
+          <a:p>
+            <a:pPr indent="0" marL="0">
+              <a:lnSpc>
+                <a:spcPts val="1250"/>
+              </a:lnSpc>
+              <a:buNone/>
+            </a:pPr>
+            <a:r>
+              <a:rPr lang="en-US" sz="1000" dirty="0">
+                <a:solidFill>
+                  <a:srgbClr val="1A1A2E"/>
+                </a:solidFill>
+                <a:latin typeface="Calibri" pitchFamily="34" charset="0"/>
+                <a:ea typeface="Calibri" pitchFamily="34" charset="-122"/>
+                <a:cs typeface="Calibri" pitchFamily="34" charset="-120"/>
+              </a:rPr>
+              <a:t>③ Apply that same weight vector to the donors' post-period traffic → synthetic counterfactual; effect = mean(actual − synthetic) over the venue's own 16-week post-campaign window.</a:t>
+            </a:r>
+            <a:endParaRPr lang="en-US" sz="1000" dirty="0"/>
+          </a:p>
         </p:txBody>
       </p:sp>
       <p:sp>
@@ -18282,8 +18322,8 @@
         </p:nvSpPr>
         <p:spPr>
           <a:xfrm>
-            <a:off x="548640" y="5623560"/>
-            <a:ext cx="6583680" cy="822960"/>
+            <a:off x="548640" y="5806440"/>
+            <a:ext cx="6583680" cy="685800"/>
           </a:xfrm>
           <a:prstGeom prst="rect">
             <a:avLst/>
@@ -18297,7 +18337,7 @@
           <a:p>
             <a:pPr indent="0" marL="0">
               <a:lnSpc>
-                <a:spcPts val="1200"/>
+                <a:spcPts val="1150"/>
               </a:lnSpc>
               <a:buNone/>
             </a:pPr>

--- a/deck/AtmosphereTV_DOOH_Measurement.pptx
+++ b/deck/AtmosphereTV_DOOH_Measurement.pptx
@@ -18241,7 +18241,7 @@
         <p:spPr>
           <a:xfrm>
             <a:off x="548640" y="4572000"/>
-            <a:ext cx="6583680" cy="1188720"/>
+            <a:ext cx="6583680" cy="1417320"/>
           </a:xfrm>
           <a:prstGeom prst="rect">
             <a:avLst/>
@@ -18255,12 +18255,12 @@
           <a:p>
             <a:pPr indent="0" marL="0">
               <a:lnSpc>
-                <a:spcPts val="1250"/>
+                <a:spcPts val="1200"/>
               </a:lnSpc>
               <a:buNone/>
             </a:pPr>
             <a:r>
-              <a:rPr lang="en-US" sz="1000" dirty="0">
+              <a:rPr lang="en-US" sz="950" dirty="0">
                 <a:solidFill>
                   <a:srgbClr val="1A1A2E"/>
                 </a:solidFill>
@@ -18270,17 +18270,17 @@
               </a:rPr>
               <a:t>① Donor pool = same-type venues that never ran a campaign (e.g. 31 never-activated bars).</a:t>
             </a:r>
-            <a:endParaRPr lang="en-US" sz="1000" dirty="0"/>
+            <a:endParaRPr lang="en-US" sz="950" dirty="0"/>
           </a:p>
           <a:p>
             <a:pPr indent="0" marL="0">
               <a:lnSpc>
-                <a:spcPts val="1250"/>
+                <a:spcPts val="1200"/>
               </a:lnSpc>
               <a:buNone/>
             </a:pPr>
             <a:r>
-              <a:rPr lang="en-US" sz="1000" dirty="0">
+              <a:rPr lang="en-US" sz="950" dirty="0">
                 <a:solidFill>
                   <a:srgbClr val="1A1A2E"/>
                 </a:solidFill>
@@ -18288,19 +18288,19 @@
                 <a:ea typeface="Calibri" pitchFamily="34" charset="-122"/>
                 <a:cs typeface="Calibri" pitchFamily="34" charset="-120"/>
               </a:rPr>
-              <a:t>② Fit non-negative weights, one per donor, summing to 1, that minimize the MSE between the weighted donor blend and this venue's own pre-period traffic (Abadie et al.) — a real blend, typically 5–15 donors get meaningful weight, not one single match.</a:t>
-            </a:r>
-            <a:endParaRPr lang="en-US" sz="1000" dirty="0"/>
+              <a:t>② Fit non-negative weights, one per donor, summing to 1, via SLSQP (Sequential Least Squares Programming, scipy.optimize) minimizing the MSE between the weighted donor blend and this venue's own pre-period traffic (Abadie et al.) — a real blend, typically 5–15 donors get meaningful weight, not one single match.</a:t>
+            </a:r>
+            <a:endParaRPr lang="en-US" sz="950" dirty="0"/>
           </a:p>
           <a:p>
             <a:pPr indent="0" marL="0">
               <a:lnSpc>
-                <a:spcPts val="1250"/>
+                <a:spcPts val="1200"/>
               </a:lnSpc>
               <a:buNone/>
             </a:pPr>
             <a:r>
-              <a:rPr lang="en-US" sz="1000" dirty="0">
+              <a:rPr lang="en-US" sz="950" dirty="0">
                 <a:solidFill>
                   <a:srgbClr val="1A1A2E"/>
                 </a:solidFill>
@@ -18310,7 +18310,7 @@
               </a:rPr>
               <a:t>③ Apply that same weight vector to the donors' post-period traffic → synthetic counterfactual; effect = mean(actual − synthetic) over the venue's own 16-week post-campaign window.</a:t>
             </a:r>
-            <a:endParaRPr lang="en-US" sz="1000" dirty="0"/>
+            <a:endParaRPr lang="en-US" sz="950" dirty="0"/>
           </a:p>
         </p:txBody>
       </p:sp>
@@ -18322,8 +18322,245 @@
         </p:nvSpPr>
         <p:spPr>
           <a:xfrm>
-            <a:off x="548640" y="5806440"/>
-            <a:ext cx="6583680" cy="685800"/>
+            <a:off x="548640" y="6035040"/>
+            <a:ext cx="6583680" cy="502920"/>
+          </a:xfrm>
+          <a:prstGeom prst="rect">
+            <a:avLst/>
+          </a:prstGeom>
+          <a:noFill/>
+          <a:ln/>
+        </p:spPr>
+        <p:txBody>
+          <a:bodyPr wrap="square" rtlCol="0" anchor="ctr"/>
+          <a:lstStyle/>
+          <a:p>
+            <a:pPr indent="0" marL="0">
+              <a:lnSpc>
+                <a:spcPts val="1050"/>
+              </a:lnSpc>
+              <a:buNone/>
+            </a:pPr>
+            <a:r>
+              <a:rPr lang="en-US" sz="850" i="1" dirty="0">
+                <a:solidFill>
+                  <a:srgbClr val="5B6178"/>
+                </a:solidFill>
+                <a:latin typeface="Calibri" pitchFamily="34" charset="0"/>
+                <a:ea typeface="Calibri" pitchFamily="34" charset="-122"/>
+                <a:cs typeface="Calibri" pitchFamily="34" charset="-120"/>
+              </a:rPr>
+              <a:t>Unlike the RCT, each venue picks its own pre/post split at its own activation week — no shared campaign window. Each bar is the mean effect across only that type's good pre-period-fit venues (see right) — poor fits are excluded, not averaged in.</a:t>
+            </a:r>
+            <a:endParaRPr lang="en-US" sz="850" dirty="0"/>
+          </a:p>
+        </p:txBody>
+      </p:sp>
+      <p:sp>
+        <p:nvSpPr>
+          <p:cNvPr id="10" name="Text 7"/>
+          <p:cNvSpPr/>
+          <p:nvPr/>
+        </p:nvSpPr>
+        <p:spPr>
+          <a:xfrm>
+            <a:off x="7406640" y="1645920"/>
+            <a:ext cx="4206240" cy="256032"/>
+          </a:xfrm>
+          <a:prstGeom prst="rect">
+            <a:avLst/>
+          </a:prstGeom>
+          <a:noFill/>
+          <a:ln/>
+        </p:spPr>
+        <p:txBody>
+          <a:bodyPr wrap="square" rtlCol="0" anchor="ctr"/>
+          <a:lstStyle/>
+          <a:p>
+            <a:pPr indent="0" marL="0">
+              <a:buNone/>
+            </a:pPr>
+            <a:r>
+              <a:rPr lang="en-US" sz="950" b="1" dirty="0">
+                <a:solidFill>
+                  <a:srgbClr val="5B6178"/>
+                </a:solidFill>
+                <a:latin typeface="Courier New" pitchFamily="34" charset="0"/>
+                <a:ea typeface="Courier New" pitchFamily="34" charset="-122"/>
+                <a:cs typeface="Courier New" pitchFamily="34" charset="-120"/>
+              </a:rPr>
+              <a:t>Venue type    n(used/flag)  Placebo p   RMSPE</a:t>
+            </a:r>
+            <a:endParaRPr lang="en-US" sz="950" dirty="0"/>
+          </a:p>
+        </p:txBody>
+      </p:sp>
+      <p:sp>
+        <p:nvSpPr>
+          <p:cNvPr id="11" name="Text 8"/>
+          <p:cNvSpPr/>
+          <p:nvPr/>
+        </p:nvSpPr>
+        <p:spPr>
+          <a:xfrm>
+            <a:off x="7406640" y="1938528"/>
+            <a:ext cx="4206240" cy="274320"/>
+          </a:xfrm>
+          <a:prstGeom prst="rect">
+            <a:avLst/>
+          </a:prstGeom>
+          <a:noFill/>
+          <a:ln/>
+        </p:spPr>
+        <p:txBody>
+          <a:bodyPr wrap="square" rtlCol="0" anchor="ctr"/>
+          <a:lstStyle/>
+          <a:p>
+            <a:pPr indent="0" marL="0">
+              <a:buNone/>
+            </a:pPr>
+            <a:r>
+              <a:rPr lang="en-US" sz="950" dirty="0">
+                <a:solidFill>
+                  <a:srgbClr val="1A1A2E"/>
+                </a:solidFill>
+                <a:latin typeface="Courier New" pitchFamily="34" charset="0"/>
+                <a:ea typeface="Courier New" pitchFamily="34" charset="-122"/>
+                <a:cs typeface="Courier New" pitchFamily="34" charset="-120"/>
+              </a:rPr>
+              <a:t>Restaurants   42/4          0.158       26.4</a:t>
+            </a:r>
+            <a:endParaRPr lang="en-US" sz="950" dirty="0"/>
+          </a:p>
+        </p:txBody>
+      </p:sp>
+      <p:sp>
+        <p:nvSpPr>
+          <p:cNvPr id="12" name="Text 9"/>
+          <p:cNvSpPr/>
+          <p:nvPr/>
+        </p:nvSpPr>
+        <p:spPr>
+          <a:xfrm>
+            <a:off x="7406640" y="2267712"/>
+            <a:ext cx="4206240" cy="274320"/>
+          </a:xfrm>
+          <a:prstGeom prst="rect">
+            <a:avLst/>
+          </a:prstGeom>
+          <a:noFill/>
+          <a:ln/>
+        </p:spPr>
+        <p:txBody>
+          <a:bodyPr wrap="square" rtlCol="0" anchor="ctr"/>
+          <a:lstStyle/>
+          <a:p>
+            <a:pPr indent="0" marL="0">
+              <a:buNone/>
+            </a:pPr>
+            <a:r>
+              <a:rPr lang="en-US" sz="950" dirty="0">
+                <a:solidFill>
+                  <a:srgbClr val="1A1A2E"/>
+                </a:solidFill>
+                <a:latin typeface="Courier New" pitchFamily="34" charset="0"/>
+                <a:ea typeface="Courier New" pitchFamily="34" charset="-122"/>
+                <a:cs typeface="Courier New" pitchFamily="34" charset="-120"/>
+              </a:rPr>
+              <a:t>Gyms          31/0          0.054       14.4</a:t>
+            </a:r>
+            <a:endParaRPr lang="en-US" sz="950" dirty="0"/>
+          </a:p>
+        </p:txBody>
+      </p:sp>
+      <p:sp>
+        <p:nvSpPr>
+          <p:cNvPr id="13" name="Text 10"/>
+          <p:cNvSpPr/>
+          <p:nvPr/>
+        </p:nvSpPr>
+        <p:spPr>
+          <a:xfrm>
+            <a:off x="7406640" y="2596896"/>
+            <a:ext cx="4206240" cy="274320"/>
+          </a:xfrm>
+          <a:prstGeom prst="rect">
+            <a:avLst/>
+          </a:prstGeom>
+          <a:noFill/>
+          <a:ln/>
+        </p:spPr>
+        <p:txBody>
+          <a:bodyPr wrap="square" rtlCol="0" anchor="ctr"/>
+          <a:lstStyle/>
+          <a:p>
+            <a:pPr indent="0" marL="0">
+              <a:buNone/>
+            </a:pPr>
+            <a:r>
+              <a:rPr lang="en-US" sz="950" dirty="0">
+                <a:solidFill>
+                  <a:srgbClr val="1A1A2E"/>
+                </a:solidFill>
+                <a:latin typeface="Courier New" pitchFamily="34" charset="0"/>
+                <a:ea typeface="Courier New" pitchFamily="34" charset="-122"/>
+                <a:cs typeface="Courier New" pitchFamily="34" charset="-120"/>
+              </a:rPr>
+              <a:t>Bars          29/4          0.097       17.8</a:t>
+            </a:r>
+            <a:endParaRPr lang="en-US" sz="950" dirty="0"/>
+          </a:p>
+        </p:txBody>
+      </p:sp>
+      <p:sp>
+        <p:nvSpPr>
+          <p:cNvPr id="14" name="Text 11"/>
+          <p:cNvSpPr/>
+          <p:nvPr/>
+        </p:nvSpPr>
+        <p:spPr>
+          <a:xfrm>
+            <a:off x="7406640" y="2926080"/>
+            <a:ext cx="4206240" cy="274320"/>
+          </a:xfrm>
+          <a:prstGeom prst="rect">
+            <a:avLst/>
+          </a:prstGeom>
+          <a:noFill/>
+          <a:ln/>
+        </p:spPr>
+        <p:txBody>
+          <a:bodyPr wrap="square" rtlCol="0" anchor="ctr"/>
+          <a:lstStyle/>
+          <a:p>
+            <a:pPr indent="0" marL="0">
+              <a:buNone/>
+            </a:pPr>
+            <a:r>
+              <a:rPr lang="en-US" sz="950" dirty="0">
+                <a:solidFill>
+                  <a:srgbClr val="1A1A2E"/>
+                </a:solidFill>
+                <a:latin typeface="Courier New" pitchFamily="34" charset="0"/>
+                <a:ea typeface="Courier New" pitchFamily="34" charset="-122"/>
+                <a:cs typeface="Courier New" pitchFamily="34" charset="-120"/>
+              </a:rPr>
+              <a:t>Waiting Rooms 20/0          0.106       8.3</a:t>
+            </a:r>
+            <a:endParaRPr lang="en-US" sz="950" dirty="0"/>
+          </a:p>
+        </p:txBody>
+      </p:sp>
+      <p:sp>
+        <p:nvSpPr>
+          <p:cNvPr id="15" name="Text 12"/>
+          <p:cNvSpPr/>
+          <p:nvPr/>
+        </p:nvSpPr>
+        <p:spPr>
+          <a:xfrm>
+            <a:off x="7406640" y="3328416"/>
+            <a:ext cx="4206240" cy="914400"/>
           </a:xfrm>
           <a:prstGeom prst="rect">
             <a:avLst/>
@@ -18342,6 +18579,48 @@
               <a:buNone/>
             </a:pPr>
             <a:r>
+              <a:rPr lang="en-US" sz="900" dirty="0">
+                <a:solidFill>
+                  <a:srgbClr val="1A1A2E"/>
+                </a:solidFill>
+                <a:latin typeface="Calibri" pitchFamily="34" charset="0"/>
+                <a:ea typeface="Calibri" pitchFamily="34" charset="-122"/>
+                <a:cs typeface="Calibri" pitchFamily="34" charset="-120"/>
+              </a:rPr>
+              <a:t>Pre-period RMSPE (root mean squared prediction error) = √mean((actual − synthetic)²) over each venue's own pre-period weeks — how well the twin matches reality before treatment starts. Flagged (excluded from the bar) if RMSPE exceeds 2.5× its type's median — restaurants' high median (26.4) is why 4 of its 46 fits got flagged.</a:t>
+            </a:r>
+            <a:endParaRPr lang="en-US" sz="900" dirty="0"/>
+          </a:p>
+        </p:txBody>
+      </p:sp>
+      <p:sp>
+        <p:nvSpPr>
+          <p:cNvPr id="16" name="Text 13"/>
+          <p:cNvSpPr/>
+          <p:nvPr/>
+        </p:nvSpPr>
+        <p:spPr>
+          <a:xfrm>
+            <a:off x="7406640" y="4315968"/>
+            <a:ext cx="4206240" cy="960120"/>
+          </a:xfrm>
+          <a:prstGeom prst="rect">
+            <a:avLst/>
+          </a:prstGeom>
+          <a:noFill/>
+          <a:ln/>
+        </p:spPr>
+        <p:txBody>
+          <a:bodyPr wrap="square" rtlCol="0" anchor="ctr"/>
+          <a:lstStyle/>
+          <a:p>
+            <a:pPr indent="0" marL="0">
+              <a:lnSpc>
+                <a:spcPts val="1150"/>
+              </a:lnSpc>
+              <a:buNone/>
+            </a:pPr>
+            <a:r>
               <a:rPr lang="en-US" sz="900" i="1" dirty="0">
                 <a:solidFill>
                   <a:srgbClr val="5B6178"/>
@@ -18350,7 +18629,7 @@
                 <a:ea typeface="Calibri" pitchFamily="34" charset="-122"/>
                 <a:cs typeface="Calibri" pitchFamily="34" charset="-120"/>
               </a:rPr>
-              <a:t>Unlike the RCT, each venue picks its own pre/post split at its own activation week — obs-pool venues self-activate on their own schedule, there's no shared campaign window. Each bar is the mean effect across only that type's good pre-period-fit venues (see right) — poor fits are excluded, not averaged in.</a:t>
+              <a:t>In-space placebo test — substitutes for a p-value since synthetic control has no closed-form SE: rerun the identical fit on every never-activated donor, pretending each was treated. Placebo p = share of donor "fake effects" at least as extreme as the real one — restaurant's p=0.158 is the weakest signal (its worst-fitting type too); gym's p=0.054 the strongest.</a:t>
             </a:r>
             <a:endParaRPr lang="en-US" sz="900" dirty="0"/>
           </a:p>
@@ -18358,286 +18637,88 @@
       </p:sp>
       <p:sp>
         <p:nvSpPr>
-          <p:cNvPr id="10" name="Text 7"/>
-          <p:cNvSpPr/>
-          <p:nvPr/>
-        </p:nvSpPr>
-        <p:spPr>
-          <a:xfrm>
-            <a:off x="7406640" y="1645920"/>
-            <a:ext cx="4206240" cy="256032"/>
-          </a:xfrm>
-          <a:prstGeom prst="rect">
-            <a:avLst/>
-          </a:prstGeom>
-          <a:noFill/>
-          <a:ln/>
-        </p:spPr>
-        <p:txBody>
-          <a:bodyPr wrap="square" rtlCol="0" anchor="ctr"/>
-          <a:lstStyle/>
-          <a:p>
-            <a:pPr indent="0" marL="0">
-              <a:buNone/>
-            </a:pPr>
-            <a:r>
-              <a:rPr lang="en-US" sz="950" b="1" dirty="0">
-                <a:solidFill>
-                  <a:srgbClr val="5B6178"/>
-                </a:solidFill>
-                <a:latin typeface="Courier New" pitchFamily="34" charset="0"/>
-                <a:ea typeface="Courier New" pitchFamily="34" charset="-122"/>
-                <a:cs typeface="Courier New" pitchFamily="34" charset="-120"/>
-              </a:rPr>
-              <a:t>Venue type    n(used/flag)  Placebo p   RMSPE</a:t>
-            </a:r>
-            <a:endParaRPr lang="en-US" sz="950" dirty="0"/>
-          </a:p>
-        </p:txBody>
-      </p:sp>
-      <p:sp>
-        <p:nvSpPr>
-          <p:cNvPr id="11" name="Text 8"/>
-          <p:cNvSpPr/>
-          <p:nvPr/>
-        </p:nvSpPr>
-        <p:spPr>
-          <a:xfrm>
-            <a:off x="7406640" y="1938528"/>
-            <a:ext cx="4206240" cy="274320"/>
-          </a:xfrm>
-          <a:prstGeom prst="rect">
-            <a:avLst/>
-          </a:prstGeom>
-          <a:noFill/>
-          <a:ln/>
-        </p:spPr>
-        <p:txBody>
-          <a:bodyPr wrap="square" rtlCol="0" anchor="ctr"/>
-          <a:lstStyle/>
-          <a:p>
-            <a:pPr indent="0" marL="0">
-              <a:buNone/>
-            </a:pPr>
-            <a:r>
-              <a:rPr lang="en-US" sz="950" dirty="0">
+          <p:cNvPr id="17" name="Text 14"/>
+          <p:cNvSpPr/>
+          <p:nvPr/>
+        </p:nvSpPr>
+        <p:spPr>
+          <a:xfrm>
+            <a:off x="7406640" y="5367528"/>
+            <a:ext cx="4206240" cy="292608"/>
+          </a:xfrm>
+          <a:prstGeom prst="rect">
+            <a:avLst/>
+          </a:prstGeom>
+          <a:noFill/>
+          <a:ln/>
+        </p:spPr>
+        <p:txBody>
+          <a:bodyPr wrap="square" rtlCol="0" anchor="ctr"/>
+          <a:lstStyle/>
+          <a:p>
+            <a:pPr indent="0" marL="0">
+              <a:buNone/>
+            </a:pPr>
+            <a:r>
+              <a:rPr lang="en-US" sz="1100" b="1" dirty="0">
+                <a:solidFill>
+                  <a:srgbClr val="1E2761"/>
+                </a:solidFill>
+                <a:latin typeface="Cambria" pitchFamily="34" charset="0"/>
+                <a:ea typeface="Cambria" pitchFamily="34" charset="-122"/>
+                <a:cs typeface="Cambria" pitchFamily="34" charset="-120"/>
+              </a:rPr>
+              <a:t>Consistent with the RCT — not independently significant</a:t>
+            </a:r>
+            <a:endParaRPr lang="en-US" sz="1100" dirty="0"/>
+          </a:p>
+        </p:txBody>
+      </p:sp>
+      <p:sp>
+        <p:nvSpPr>
+          <p:cNvPr id="18" name="Text 15"/>
+          <p:cNvSpPr/>
+          <p:nvPr/>
+        </p:nvSpPr>
+        <p:spPr>
+          <a:xfrm>
+            <a:off x="7406640" y="5696712"/>
+            <a:ext cx="4206240" cy="548640"/>
+          </a:xfrm>
+          <a:prstGeom prst="rect">
+            <a:avLst/>
+          </a:prstGeom>
+          <a:noFill/>
+          <a:ln/>
+        </p:spPr>
+        <p:txBody>
+          <a:bodyPr wrap="square" rtlCol="0" anchor="ctr"/>
+          <a:lstStyle/>
+          <a:p>
+            <a:pPr indent="0" marL="0">
+              <a:lnSpc>
+                <a:spcPts val="1100"/>
+              </a:lnSpc>
+              <a:buNone/>
+            </a:pPr>
+            <a:r>
+              <a:rPr lang="en-US" sz="900" dirty="0">
                 <a:solidFill>
                   <a:srgbClr val="1A1A2E"/>
                 </a:solidFill>
-                <a:latin typeface="Courier New" pitchFamily="34" charset="0"/>
-                <a:ea typeface="Courier New" pitchFamily="34" charset="-122"/>
-                <a:cs typeface="Courier New" pitchFamily="34" charset="-120"/>
-              </a:rPr>
-              <a:t>Restaurants   42/4          0.160       26.4</a:t>
-            </a:r>
-            <a:endParaRPr lang="en-US" sz="950" dirty="0"/>
-          </a:p>
-        </p:txBody>
-      </p:sp>
-      <p:sp>
-        <p:nvSpPr>
-          <p:cNvPr id="12" name="Text 9"/>
-          <p:cNvSpPr/>
-          <p:nvPr/>
-        </p:nvSpPr>
-        <p:spPr>
-          <a:xfrm>
-            <a:off x="7406640" y="2267712"/>
-            <a:ext cx="4206240" cy="274320"/>
-          </a:xfrm>
-          <a:prstGeom prst="rect">
-            <a:avLst/>
-          </a:prstGeom>
-          <a:noFill/>
-          <a:ln/>
-        </p:spPr>
-        <p:txBody>
-          <a:bodyPr wrap="square" rtlCol="0" anchor="ctr"/>
-          <a:lstStyle/>
-          <a:p>
-            <a:pPr indent="0" marL="0">
-              <a:buNone/>
-            </a:pPr>
-            <a:r>
-              <a:rPr lang="en-US" sz="950" dirty="0">
-                <a:solidFill>
-                  <a:srgbClr val="1A1A2E"/>
-                </a:solidFill>
-                <a:latin typeface="Courier New" pitchFamily="34" charset="0"/>
-                <a:ea typeface="Courier New" pitchFamily="34" charset="-122"/>
-                <a:cs typeface="Courier New" pitchFamily="34" charset="-120"/>
-              </a:rPr>
-              <a:t>Gyms          31/0          0.050       14.4</a:t>
-            </a:r>
-            <a:endParaRPr lang="en-US" sz="950" dirty="0"/>
-          </a:p>
-        </p:txBody>
-      </p:sp>
-      <p:sp>
-        <p:nvSpPr>
-          <p:cNvPr id="13" name="Text 10"/>
-          <p:cNvSpPr/>
-          <p:nvPr/>
-        </p:nvSpPr>
-        <p:spPr>
-          <a:xfrm>
-            <a:off x="7406640" y="2596896"/>
-            <a:ext cx="4206240" cy="274320"/>
-          </a:xfrm>
-          <a:prstGeom prst="rect">
-            <a:avLst/>
-          </a:prstGeom>
-          <a:noFill/>
-          <a:ln/>
-        </p:spPr>
-        <p:txBody>
-          <a:bodyPr wrap="square" rtlCol="0" anchor="ctr"/>
-          <a:lstStyle/>
-          <a:p>
-            <a:pPr indent="0" marL="0">
-              <a:buNone/>
-            </a:pPr>
-            <a:r>
-              <a:rPr lang="en-US" sz="950" dirty="0">
-                <a:solidFill>
-                  <a:srgbClr val="1A1A2E"/>
-                </a:solidFill>
-                <a:latin typeface="Courier New" pitchFamily="34" charset="0"/>
-                <a:ea typeface="Courier New" pitchFamily="34" charset="-122"/>
-                <a:cs typeface="Courier New" pitchFamily="34" charset="-120"/>
-              </a:rPr>
-              <a:t>Bars          29/4          0.100       17.8</a:t>
-            </a:r>
-            <a:endParaRPr lang="en-US" sz="950" dirty="0"/>
-          </a:p>
-        </p:txBody>
-      </p:sp>
-      <p:sp>
-        <p:nvSpPr>
-          <p:cNvPr id="14" name="Text 11"/>
-          <p:cNvSpPr/>
-          <p:nvPr/>
-        </p:nvSpPr>
-        <p:spPr>
-          <a:xfrm>
-            <a:off x="7406640" y="2926080"/>
-            <a:ext cx="4206240" cy="274320"/>
-          </a:xfrm>
-          <a:prstGeom prst="rect">
-            <a:avLst/>
-          </a:prstGeom>
-          <a:noFill/>
-          <a:ln/>
-        </p:spPr>
-        <p:txBody>
-          <a:bodyPr wrap="square" rtlCol="0" anchor="ctr"/>
-          <a:lstStyle/>
-          <a:p>
-            <a:pPr indent="0" marL="0">
-              <a:buNone/>
-            </a:pPr>
-            <a:r>
-              <a:rPr lang="en-US" sz="950" dirty="0">
-                <a:solidFill>
-                  <a:srgbClr val="1A1A2E"/>
-                </a:solidFill>
-                <a:latin typeface="Courier New" pitchFamily="34" charset="0"/>
-                <a:ea typeface="Courier New" pitchFamily="34" charset="-122"/>
-                <a:cs typeface="Courier New" pitchFamily="34" charset="-120"/>
-              </a:rPr>
-              <a:t>Waiting Rooms 20/0          0.110       8.3</a:t>
-            </a:r>
-            <a:endParaRPr lang="en-US" sz="950" dirty="0"/>
-          </a:p>
-        </p:txBody>
-      </p:sp>
-      <p:sp>
-        <p:nvSpPr>
-          <p:cNvPr id="15" name="Text 12"/>
-          <p:cNvSpPr/>
-          <p:nvPr/>
-        </p:nvSpPr>
-        <p:spPr>
-          <a:xfrm>
-            <a:off x="7406640" y="3346704"/>
-            <a:ext cx="4206240" cy="1051560"/>
-          </a:xfrm>
-          <a:prstGeom prst="rect">
-            <a:avLst/>
-          </a:prstGeom>
-          <a:noFill/>
-          <a:ln/>
-        </p:spPr>
-        <p:txBody>
-          <a:bodyPr wrap="square" rtlCol="0" anchor="ctr"/>
-          <a:lstStyle/>
-          <a:p>
-            <a:pPr indent="0" marL="0">
-              <a:lnSpc>
-                <a:spcPts val="1250"/>
-              </a:lnSpc>
-              <a:buNone/>
-            </a:pPr>
-            <a:r>
-              <a:rPr lang="en-US" sz="950" dirty="0">
-                <a:solidFill>
-                  <a:srgbClr val="1A1A2E"/>
-                </a:solidFill>
-                <a:latin typeface="Calibri" pitchFamily="34" charset="0"/>
-                <a:ea typeface="Calibri" pitchFamily="34" charset="-122"/>
-                <a:cs typeface="Calibri" pitchFamily="34" charset="-120"/>
-              </a:rPr>
-              <a:t>Pre-period RMSPE = √mean((actual − synthetic)²) over each venue's own pre-period weeks — how well the twin matches reality before treatment starts. A venue is flagged (excluded from the bar above) if its RMSPE exceeds 2.5× its type's median — restaurants' high median (26.4) is why 4 of its 46 attempted fits got flagged.</a:t>
-            </a:r>
-            <a:endParaRPr lang="en-US" sz="950" dirty="0"/>
-          </a:p>
-        </p:txBody>
-      </p:sp>
-      <p:sp>
-        <p:nvSpPr>
-          <p:cNvPr id="16" name="Text 13"/>
-          <p:cNvSpPr/>
-          <p:nvPr/>
-        </p:nvSpPr>
-        <p:spPr>
-          <a:xfrm>
-            <a:off x="7406640" y="4489704"/>
-            <a:ext cx="4206240" cy="1143000"/>
-          </a:xfrm>
-          <a:prstGeom prst="rect">
-            <a:avLst/>
-          </a:prstGeom>
-          <a:noFill/>
-          <a:ln/>
-        </p:spPr>
-        <p:txBody>
-          <a:bodyPr wrap="square" rtlCol="0" anchor="ctr"/>
-          <a:lstStyle/>
-          <a:p>
-            <a:pPr indent="0" marL="0">
-              <a:lnSpc>
-                <a:spcPts val="1250"/>
-              </a:lnSpc>
-              <a:buNone/>
-            </a:pPr>
-            <a:r>
-              <a:rPr lang="en-US" sz="950" i="1" dirty="0">
-                <a:solidFill>
-                  <a:srgbClr val="5B6178"/>
-                </a:solidFill>
-                <a:latin typeface="Calibri" pitchFamily="34" charset="0"/>
-                <a:ea typeface="Calibri" pitchFamily="34" charset="-122"/>
-                <a:cs typeface="Calibri" pitchFamily="34" charset="-120"/>
-              </a:rPr>
-              <a:t>In-space placebo test — substitutes for a p-value since synthetic control has no closed-form SE: rerun the identical fit on every never-activated donor, pretending each was treated. Placebo p = share of those donor "fake effects" at least as extreme as the real one — restaurant's p=0.16 is the weakest signal of the four (its worst-fitting type too); gym's p=0.05 the strongest.</a:t>
-            </a:r>
-            <a:endParaRPr lang="en-US" sz="950" dirty="0"/>
-          </a:p>
-        </p:txBody>
-      </p:sp>
-      <p:sp>
-        <p:nvSpPr>
-          <p:cNvPr id="17" name="Text 14"/>
+                <a:latin typeface="Calibri" pitchFamily="34" charset="0"/>
+                <a:ea typeface="Calibri" pitchFamily="34" charset="-122"/>
+                <a:cs typeface="Calibri" pitchFamily="34" charset="-120"/>
+              </a:rPr>
+              <a:t>No type clears p&lt;0.05 alone (gyms closest, 0.054) — but every point estimate lands within ~1.3 of the RCT's own effect for that same type, on a completely different set of venues: real corroboration, just not from this test alone.</a:t>
+            </a:r>
+            <a:endParaRPr lang="en-US" sz="900" dirty="0"/>
+          </a:p>
+        </p:txBody>
+      </p:sp>
+      <p:sp>
+        <p:nvSpPr>
+          <p:cNvPr id="19" name="Text 16"/>
           <p:cNvSpPr/>
           <p:nvPr/>
         </p:nvSpPr>

--- a/deck/AtmosphereTV_DOOH_Measurement.pptx
+++ b/deck/AtmosphereTV_DOOH_Measurement.pptx
@@ -15893,7 +15893,7 @@
                           <a:ea typeface="Calibri" pitchFamily="34" charset="-122"/>
                           <a:cs typeface="Calibri" pitchFamily="34" charset="-120"/>
                         </a:rPr>
-                        <a:t>24 of 264 self-activate here — each advertiser's own timing, no coordination.</a:t>
+                        <a:t>24 of 264 go live here — each on its own timing, no coordination.</a:t>
                       </a:r>
                       <a:endParaRPr lang="en-US" sz="1050" dirty="0">
                         <a:latin typeface="Calibri" charset="0"/>
@@ -16156,7 +16156,7 @@
                           <a:ea typeface="Calibri" pitchFamily="34" charset="-122"/>
                           <a:cs typeface="Calibri" pitchFamily="34" charset="-120"/>
                         </a:rPr>
-                        <a:t>37 more self-activate here — overlap with the RCT window is coincidence, not design.</a:t>
+                        <a:t>37 more go live here — overlap with the RCT window is coincidence, not design.</a:t>
                       </a:r>
                       <a:endParaRPr lang="en-US" sz="1050" dirty="0">
                         <a:latin typeface="Calibri" charset="0"/>
@@ -16419,7 +16419,7 @@
                           <a:ea typeface="Calibri" pitchFamily="34" charset="-122"/>
                           <a:cs typeface="Calibri" pitchFamily="34" charset="-120"/>
                         </a:rPr>
-                        <a:t>69 more (the largest group) start only now — most real campaigns land late, spread thin.</a:t>
+                        <a:t>69 more (the largest group) go live only now — most real campaigns land late, spread thin.</a:t>
                       </a:r>
                       <a:endParaRPr lang="en-US" sz="1050" dirty="0">
                         <a:latin typeface="Calibri" charset="0"/>
@@ -16483,8 +16483,8 @@
         </p:nvSpPr>
         <p:spPr>
           <a:xfrm>
-            <a:off x="548640" y="5623560"/>
-            <a:ext cx="11091672" cy="685800"/>
+            <a:off x="548640" y="5577840"/>
+            <a:ext cx="11091672" cy="777240"/>
           </a:xfrm>
           <a:prstGeom prst="rect">
             <a:avLst/>
@@ -16498,12 +16498,12 @@
           <a:p>
             <a:pPr indent="0" marL="0">
               <a:lnSpc>
-                <a:spcPts val="1500"/>
+                <a:spcPts val="1400"/>
               </a:lnSpc>
               <a:buNone/>
             </a:pPr>
             <a:r>
-              <a:rPr lang="en-US" sz="1100" i="1" dirty="0">
+              <a:rPr lang="en-US" sz="1050" i="1" dirty="0">
                 <a:solidFill>
                   <a:srgbClr val="5B6178"/>
                 </a:solidFill>
@@ -16511,9 +16511,9 @@
                 <a:ea typeface="Calibri" pitchFamily="34" charset="-122"/>
                 <a:cs typeface="Calibri" pitchFamily="34" charset="-120"/>
               </a:rPr>
-              <a:t>RCT pool: assignment is verified, not assumed — anchors high confidence. Observational pool: 134 of 264 venues never run a campaign at all, and the rest 130 venues self-activate on their own schedule — exactly why synthetic control (next) reconstructs the counterfactual instead of comparing before/after directly.</a:t>
-            </a:r>
-            <a:endParaRPr lang="en-US" sz="1100" dirty="0"/>
+              <a:t>RCT pool: assignment is verified, not assumed — anchors high confidence. Observational pool: 134 of 264 venues never run a campaign at all, and the rest 130 go live at their own, uncoordinated point in time — whether a venue is using its own free self-promotion slot or Atmosphere sold the remaining inventory there to an outside advertiser, the panel only records that the screen started playing ads, not who bought the airtime — exactly why synthetic control (next) reconstructs the counterfactual instead of comparing before/after directly.</a:t>
+            </a:r>
+            <a:endParaRPr lang="en-US" sz="1050" dirty="0"/>
           </a:p>
         </p:txBody>
       </p:sp>

--- a/deck/AtmosphereTV_DOOH_Measurement.pptx
+++ b/deck/AtmosphereTV_DOOH_Measurement.pptx
@@ -5042,7 +5042,7 @@
         </p:nvGraphicFramePr>
         <p:xfrm>
           <a:off x="548640" y="1600200"/>
-          <a:ext cx="6949440" cy="3931920"/>
+          <a:ext cx="6949440" cy="2286000"/>
         </p:xfrm>
         <a:graphic xmlns:a="http://schemas.openxmlformats.org/drawingml/2006/main">
           <a:graphicData uri="http://schemas.openxmlformats.org/drawingml/2006/chart">
@@ -5058,24 +5058,24 @@
         </p:nvSpPr>
         <p:spPr>
           <a:xfrm>
-            <a:off x="7772400" y="1737360"/>
-            <a:ext cx="3840480" cy="320040"/>
-          </a:xfrm>
-          <a:prstGeom prst="rect">
-            <a:avLst/>
-          </a:prstGeom>
-          <a:noFill/>
-          <a:ln/>
-        </p:spPr>
-        <p:txBody>
-          <a:bodyPr wrap="square" rtlCol="0" anchor="ctr"/>
-          <a:lstStyle/>
-          <a:p>
-            <a:pPr indent="0" marL="0">
-              <a:buNone/>
-            </a:pPr>
-            <a:r>
-              <a:rPr lang="en-US" sz="1200" b="1" dirty="0">
+            <a:off x="548640" y="3977640"/>
+            <a:ext cx="6949440" cy="237744"/>
+          </a:xfrm>
+          <a:prstGeom prst="rect">
+            <a:avLst/>
+          </a:prstGeom>
+          <a:noFill/>
+          <a:ln/>
+        </p:spPr>
+        <p:txBody>
+          <a:bodyPr wrap="square" rtlCol="0" anchor="ctr"/>
+          <a:lstStyle/>
+          <a:p>
+            <a:pPr indent="0" marL="0">
+              <a:buNone/>
+            </a:pPr>
+            <a:r>
+              <a:rPr lang="en-US" sz="1250" b="1" dirty="0">
                 <a:solidFill>
                   <a:srgbClr val="1E2761"/>
                 </a:solidFill>
@@ -5083,38 +5083,181 @@
                 <a:ea typeface="Cambria" pitchFamily="34" charset="-122"/>
                 <a:cs typeface="Cambria" pitchFamily="34" charset="-120"/>
               </a:rPr>
+              <a:t>Method: fit the shape, then pin the scale</a:t>
+            </a:r>
+            <a:endParaRPr lang="en-US" sz="1250" dirty="0"/>
+          </a:p>
+        </p:txBody>
+      </p:sp>
+      <p:sp>
+        <p:nvSpPr>
+          <p:cNvPr id="8" name="Text 5"/>
+          <p:cNvSpPr/>
+          <p:nvPr/>
+        </p:nvSpPr>
+        <p:spPr>
+          <a:xfrm>
+            <a:off x="548640" y="4233672"/>
+            <a:ext cx="6949440" cy="1463040"/>
+          </a:xfrm>
+          <a:prstGeom prst="rect">
+            <a:avLst/>
+          </a:prstGeom>
+          <a:noFill/>
+          <a:ln/>
+        </p:spPr>
+        <p:txBody>
+          <a:bodyPr wrap="square" rtlCol="0" anchor="ctr"/>
+          <a:lstStyle/>
+          <a:p>
+            <a:pPr indent="0" marL="0">
+              <a:lnSpc>
+                <a:spcPts val="1080"/>
+              </a:lnSpc>
+              <a:buNone/>
+            </a:pPr>
+            <a:r>
+              <a:rPr lang="en-US" sz="900" dirty="0">
+                <a:solidFill>
+                  <a:srgbClr val="1A1A2E"/>
+                </a:solidFill>
+                <a:latin typeface="Calibri" pitchFamily="34" charset="0"/>
+                <a:ea typeface="Calibri" pitchFamily="34" charset="-122"/>
+                <a:cs typeface="Calibri" pitchFamily="34" charset="-120"/>
+              </a:rPr>
+              <a:t>① Fit shape on the aggregate weekly series (all venues of this type, RCT + observational pooled together): adstock carries exposure forward week to week (adstock_t = freq_t + decay×adstock_{t−1}), then a Hill curve turns that into diminishing returns (sat(x) = x^shape / (x^shape + half^shape)). decay, half, and shape are grid-searched — 7 × 6 × 4 = 168 combinations — picking whichever minimizes squared error against actual weekly traffic (with trend + seasonality controls, plain OLS). This gives β_naive, the raw uncalibrated max-lift.</a:t>
+            </a:r>
+            <a:endParaRPr lang="en-US" sz="900" dirty="0"/>
+          </a:p>
+          <a:p>
+            <a:pPr indent="0" marL="0">
+              <a:lnSpc>
+                <a:spcPts val="1080"/>
+              </a:lnSpc>
+              <a:buNone/>
+            </a:pPr>
+            <a:r>
+              <a:rPr lang="en-US" sz="900" dirty="0">
+                <a:solidFill>
+                  <a:srgbClr val="1A1A2E"/>
+                </a:solidFill>
+                <a:latin typeface="Calibri" pitchFamily="34" charset="0"/>
+                <a:ea typeface="Calibri" pitchFamily="34" charset="-122"/>
+                <a:cs typeface="Calibri" pitchFamily="34" charset="-120"/>
+              </a:rPr>
+              <a:t>② Pin scale only, via the RCT: simulate the RCT's own exposure (6 plays/wk for 10 weeks) through this same fitted decay/saturation curve to get its implied saturation level, then rescale β so the model's predicted lift there matches the RCT's point estimate exactly. decay/half/shape stay exactly as fit in step ① — only β moves.</a:t>
+            </a:r>
+            <a:endParaRPr lang="en-US" sz="900" dirty="0"/>
+          </a:p>
+        </p:txBody>
+      </p:sp>
+      <p:sp>
+        <p:nvSpPr>
+          <p:cNvPr id="9" name="Text 6"/>
+          <p:cNvSpPr/>
+          <p:nvPr/>
+        </p:nvSpPr>
+        <p:spPr>
+          <a:xfrm>
+            <a:off x="548640" y="5742432"/>
+            <a:ext cx="6949440" cy="548640"/>
+          </a:xfrm>
+          <a:prstGeom prst="rect">
+            <a:avLst/>
+          </a:prstGeom>
+          <a:noFill/>
+          <a:ln/>
+        </p:spPr>
+        <p:txBody>
+          <a:bodyPr wrap="square" rtlCol="0" anchor="ctr"/>
+          <a:lstStyle/>
+          <a:p>
+            <a:pPr indent="0" marL="0">
+              <a:lnSpc>
+                <a:spcPts val="1050"/>
+              </a:lnSpc>
+              <a:buNone/>
+            </a:pPr>
+            <a:r>
+              <a:rPr lang="en-US" sz="850" i="1" dirty="0">
+                <a:solidFill>
+                  <a:srgbClr val="5B6178"/>
+                </a:solidFill>
+                <a:latin typeface="Calibri" pitchFamily="34" charset="0"/>
+                <a:ea typeface="Calibri" pitchFamily="34" charset="-122"/>
+                <a:cs typeface="Calibri" pitchFamily="34" charset="-120"/>
+              </a:rPr>
+              <a:t>Simplified for the demo: a real deployment would add more controls (competitor spend, price/promo, macro trend), validate the shape out-of-time rather than on in-sample SSE alone, and often blend the experiment in as a Bayesian prior rather than a hard rescale.</a:t>
+            </a:r>
+            <a:endParaRPr lang="en-US" sz="850" dirty="0"/>
+          </a:p>
+        </p:txBody>
+      </p:sp>
+      <p:sp>
+        <p:nvSpPr>
+          <p:cNvPr id="10" name="Text 7"/>
+          <p:cNvSpPr/>
+          <p:nvPr/>
+        </p:nvSpPr>
+        <p:spPr>
+          <a:xfrm>
+            <a:off x="7772400" y="1600200"/>
+            <a:ext cx="3840480" cy="274320"/>
+          </a:xfrm>
+          <a:prstGeom prst="rect">
+            <a:avLst/>
+          </a:prstGeom>
+          <a:noFill/>
+          <a:ln/>
+        </p:spPr>
+        <p:txBody>
+          <a:bodyPr wrap="square" rtlCol="0" anchor="ctr"/>
+          <a:lstStyle/>
+          <a:p>
+            <a:pPr indent="0" marL="0">
+              <a:buNone/>
+            </a:pPr>
+            <a:r>
+              <a:rPr lang="en-US" sz="1150" b="1" dirty="0">
+                <a:solidFill>
+                  <a:srgbClr val="1E2761"/>
+                </a:solidFill>
+                <a:latin typeface="Cambria" pitchFamily="34" charset="0"/>
+                <a:ea typeface="Cambria" pitchFamily="34" charset="-122"/>
+                <a:cs typeface="Cambria" pitchFamily="34" charset="-120"/>
+              </a:rPr>
               <a:t>Calibration adjustment</a:t>
             </a:r>
-            <a:endParaRPr lang="en-US" sz="1200" dirty="0"/>
-          </a:p>
-        </p:txBody>
-      </p:sp>
-      <p:sp>
-        <p:nvSpPr>
-          <p:cNvPr id="8" name="Text 5"/>
-          <p:cNvSpPr/>
-          <p:nvPr/>
-        </p:nvSpPr>
-        <p:spPr>
-          <a:xfrm>
-            <a:off x="7772400" y="2194560"/>
-            <a:ext cx="1737360" cy="502920"/>
-          </a:xfrm>
-          <a:prstGeom prst="rect">
-            <a:avLst/>
-          </a:prstGeom>
-          <a:noFill/>
-          <a:ln/>
-        </p:spPr>
-        <p:txBody>
-          <a:bodyPr wrap="square" rtlCol="0" anchor="ctr"/>
-          <a:lstStyle/>
-          <a:p>
-            <a:pPr indent="0" marL="0">
-              <a:buNone/>
-            </a:pPr>
-            <a:r>
-              <a:rPr lang="en-US" sz="1200" dirty="0">
+            <a:endParaRPr lang="en-US" sz="1150" dirty="0"/>
+          </a:p>
+        </p:txBody>
+      </p:sp>
+      <p:sp>
+        <p:nvSpPr>
+          <p:cNvPr id="11" name="Text 8"/>
+          <p:cNvSpPr/>
+          <p:nvPr/>
+        </p:nvSpPr>
+        <p:spPr>
+          <a:xfrm>
+            <a:off x="7772400" y="1947672"/>
+            <a:ext cx="1737360" cy="384048"/>
+          </a:xfrm>
+          <a:prstGeom prst="rect">
+            <a:avLst/>
+          </a:prstGeom>
+          <a:noFill/>
+          <a:ln/>
+        </p:spPr>
+        <p:txBody>
+          <a:bodyPr wrap="square" rtlCol="0" anchor="ctr"/>
+          <a:lstStyle/>
+          <a:p>
+            <a:pPr indent="0" marL="0">
+              <a:buNone/>
+            </a:pPr>
+            <a:r>
+              <a:rPr lang="en-US" sz="1100" dirty="0">
                 <a:solidFill>
                   <a:srgbClr val="1A1A2E"/>
                 </a:solidFill>
@@ -5124,36 +5267,36 @@
               </a:rPr>
               <a:t>Restaurants</a:t>
             </a:r>
-            <a:endParaRPr lang="en-US" sz="1200" dirty="0"/>
-          </a:p>
-        </p:txBody>
-      </p:sp>
-      <p:sp>
-        <p:nvSpPr>
-          <p:cNvPr id="9" name="Text 6"/>
-          <p:cNvSpPr/>
-          <p:nvPr/>
-        </p:nvSpPr>
-        <p:spPr>
-          <a:xfrm>
-            <a:off x="9509760" y="2194560"/>
-            <a:ext cx="2103120" cy="502920"/>
-          </a:xfrm>
-          <a:prstGeom prst="rect">
-            <a:avLst/>
-          </a:prstGeom>
-          <a:noFill/>
-          <a:ln/>
-        </p:spPr>
-        <p:txBody>
-          <a:bodyPr wrap="square" rtlCol="0" anchor="ctr"/>
-          <a:lstStyle/>
-          <a:p>
-            <a:pPr indent="0" marL="0">
-              <a:buNone/>
-            </a:pPr>
-            <a:r>
-              <a:rPr lang="en-US" sz="1800" b="1" dirty="0">
+            <a:endParaRPr lang="en-US" sz="1100" dirty="0"/>
+          </a:p>
+        </p:txBody>
+      </p:sp>
+      <p:sp>
+        <p:nvSpPr>
+          <p:cNvPr id="12" name="Text 9"/>
+          <p:cNvSpPr/>
+          <p:nvPr/>
+        </p:nvSpPr>
+        <p:spPr>
+          <a:xfrm>
+            <a:off x="9509760" y="1947672"/>
+            <a:ext cx="2103120" cy="384048"/>
+          </a:xfrm>
+          <a:prstGeom prst="rect">
+            <a:avLst/>
+          </a:prstGeom>
+          <a:noFill/>
+          <a:ln/>
+        </p:spPr>
+        <p:txBody>
+          <a:bodyPr wrap="square" rtlCol="0" anchor="ctr"/>
+          <a:lstStyle/>
+          <a:p>
+            <a:pPr indent="0" marL="0">
+              <a:buNone/>
+            </a:pPr>
+            <a:r>
+              <a:rPr lang="en-US" sz="1500" b="1" dirty="0">
                 <a:solidFill>
                   <a:srgbClr val="B8500A"/>
                 </a:solidFill>
@@ -5163,36 +5306,36 @@
               </a:rPr>
               <a:t>+134%</a:t>
             </a:r>
-            <a:endParaRPr lang="en-US" sz="1800" dirty="0"/>
-          </a:p>
-        </p:txBody>
-      </p:sp>
-      <p:sp>
-        <p:nvSpPr>
-          <p:cNvPr id="10" name="Text 7"/>
-          <p:cNvSpPr/>
-          <p:nvPr/>
-        </p:nvSpPr>
-        <p:spPr>
-          <a:xfrm>
-            <a:off x="7772400" y="2788920"/>
-            <a:ext cx="1737360" cy="502920"/>
-          </a:xfrm>
-          <a:prstGeom prst="rect">
-            <a:avLst/>
-          </a:prstGeom>
-          <a:noFill/>
-          <a:ln/>
-        </p:spPr>
-        <p:txBody>
-          <a:bodyPr wrap="square" rtlCol="0" anchor="ctr"/>
-          <a:lstStyle/>
-          <a:p>
-            <a:pPr indent="0" marL="0">
-              <a:buNone/>
-            </a:pPr>
-            <a:r>
-              <a:rPr lang="en-US" sz="1200" dirty="0">
+            <a:endParaRPr lang="en-US" sz="1500" dirty="0"/>
+          </a:p>
+        </p:txBody>
+      </p:sp>
+      <p:sp>
+        <p:nvSpPr>
+          <p:cNvPr id="13" name="Text 10"/>
+          <p:cNvSpPr/>
+          <p:nvPr/>
+        </p:nvSpPr>
+        <p:spPr>
+          <a:xfrm>
+            <a:off x="7772400" y="2350008"/>
+            <a:ext cx="1737360" cy="384048"/>
+          </a:xfrm>
+          <a:prstGeom prst="rect">
+            <a:avLst/>
+          </a:prstGeom>
+          <a:noFill/>
+          <a:ln/>
+        </p:spPr>
+        <p:txBody>
+          <a:bodyPr wrap="square" rtlCol="0" anchor="ctr"/>
+          <a:lstStyle/>
+          <a:p>
+            <a:pPr indent="0" marL="0">
+              <a:buNone/>
+            </a:pPr>
+            <a:r>
+              <a:rPr lang="en-US" sz="1100" dirty="0">
                 <a:solidFill>
                   <a:srgbClr val="1A1A2E"/>
                 </a:solidFill>
@@ -5202,36 +5345,36 @@
               </a:rPr>
               <a:t>Gyms</a:t>
             </a:r>
-            <a:endParaRPr lang="en-US" sz="1200" dirty="0"/>
-          </a:p>
-        </p:txBody>
-      </p:sp>
-      <p:sp>
-        <p:nvSpPr>
-          <p:cNvPr id="11" name="Text 8"/>
-          <p:cNvSpPr/>
-          <p:nvPr/>
-        </p:nvSpPr>
-        <p:spPr>
-          <a:xfrm>
-            <a:off x="9509760" y="2788920"/>
-            <a:ext cx="2103120" cy="502920"/>
-          </a:xfrm>
-          <a:prstGeom prst="rect">
-            <a:avLst/>
-          </a:prstGeom>
-          <a:noFill/>
-          <a:ln/>
-        </p:spPr>
-        <p:txBody>
-          <a:bodyPr wrap="square" rtlCol="0" anchor="ctr"/>
-          <a:lstStyle/>
-          <a:p>
-            <a:pPr indent="0" marL="0">
-              <a:buNone/>
-            </a:pPr>
-            <a:r>
-              <a:rPr lang="en-US" sz="1800" b="1" dirty="0">
+            <a:endParaRPr lang="en-US" sz="1100" dirty="0"/>
+          </a:p>
+        </p:txBody>
+      </p:sp>
+      <p:sp>
+        <p:nvSpPr>
+          <p:cNvPr id="14" name="Text 11"/>
+          <p:cNvSpPr/>
+          <p:nvPr/>
+        </p:nvSpPr>
+        <p:spPr>
+          <a:xfrm>
+            <a:off x="9509760" y="2350008"/>
+            <a:ext cx="2103120" cy="384048"/>
+          </a:xfrm>
+          <a:prstGeom prst="rect">
+            <a:avLst/>
+          </a:prstGeom>
+          <a:noFill/>
+          <a:ln/>
+        </p:spPr>
+        <p:txBody>
+          <a:bodyPr wrap="square" rtlCol="0" anchor="ctr"/>
+          <a:lstStyle/>
+          <a:p>
+            <a:pPr indent="0" marL="0">
+              <a:buNone/>
+            </a:pPr>
+            <a:r>
+              <a:rPr lang="en-US" sz="1500" b="1" dirty="0">
                 <a:solidFill>
                   <a:srgbClr val="B8500A"/>
                 </a:solidFill>
@@ -5241,36 +5384,36 @@
               </a:rPr>
               <a:t>+165%</a:t>
             </a:r>
-            <a:endParaRPr lang="en-US" sz="1800" dirty="0"/>
-          </a:p>
-        </p:txBody>
-      </p:sp>
-      <p:sp>
-        <p:nvSpPr>
-          <p:cNvPr id="12" name="Text 9"/>
-          <p:cNvSpPr/>
-          <p:nvPr/>
-        </p:nvSpPr>
-        <p:spPr>
-          <a:xfrm>
-            <a:off x="7772400" y="3383280"/>
-            <a:ext cx="1737360" cy="502920"/>
-          </a:xfrm>
-          <a:prstGeom prst="rect">
-            <a:avLst/>
-          </a:prstGeom>
-          <a:noFill/>
-          <a:ln/>
-        </p:spPr>
-        <p:txBody>
-          <a:bodyPr wrap="square" rtlCol="0" anchor="ctr"/>
-          <a:lstStyle/>
-          <a:p>
-            <a:pPr indent="0" marL="0">
-              <a:buNone/>
-            </a:pPr>
-            <a:r>
-              <a:rPr lang="en-US" sz="1200" dirty="0">
+            <a:endParaRPr lang="en-US" sz="1500" dirty="0"/>
+          </a:p>
+        </p:txBody>
+      </p:sp>
+      <p:sp>
+        <p:nvSpPr>
+          <p:cNvPr id="15" name="Text 12"/>
+          <p:cNvSpPr/>
+          <p:nvPr/>
+        </p:nvSpPr>
+        <p:spPr>
+          <a:xfrm>
+            <a:off x="7772400" y="2752344"/>
+            <a:ext cx="1737360" cy="384048"/>
+          </a:xfrm>
+          <a:prstGeom prst="rect">
+            <a:avLst/>
+          </a:prstGeom>
+          <a:noFill/>
+          <a:ln/>
+        </p:spPr>
+        <p:txBody>
+          <a:bodyPr wrap="square" rtlCol="0" anchor="ctr"/>
+          <a:lstStyle/>
+          <a:p>
+            <a:pPr indent="0" marL="0">
+              <a:buNone/>
+            </a:pPr>
+            <a:r>
+              <a:rPr lang="en-US" sz="1100" dirty="0">
                 <a:solidFill>
                   <a:srgbClr val="1A1A2E"/>
                 </a:solidFill>
@@ -5280,36 +5423,36 @@
               </a:rPr>
               <a:t>Bars</a:t>
             </a:r>
-            <a:endParaRPr lang="en-US" sz="1200" dirty="0"/>
-          </a:p>
-        </p:txBody>
-      </p:sp>
-      <p:sp>
-        <p:nvSpPr>
-          <p:cNvPr id="13" name="Text 10"/>
-          <p:cNvSpPr/>
-          <p:nvPr/>
-        </p:nvSpPr>
-        <p:spPr>
-          <a:xfrm>
-            <a:off x="9509760" y="3383280"/>
-            <a:ext cx="2103120" cy="502920"/>
-          </a:xfrm>
-          <a:prstGeom prst="rect">
-            <a:avLst/>
-          </a:prstGeom>
-          <a:noFill/>
-          <a:ln/>
-        </p:spPr>
-        <p:txBody>
-          <a:bodyPr wrap="square" rtlCol="0" anchor="ctr"/>
-          <a:lstStyle/>
-          <a:p>
-            <a:pPr indent="0" marL="0">
-              <a:buNone/>
-            </a:pPr>
-            <a:r>
-              <a:rPr lang="en-US" sz="1800" b="1" dirty="0">
+            <a:endParaRPr lang="en-US" sz="1100" dirty="0"/>
+          </a:p>
+        </p:txBody>
+      </p:sp>
+      <p:sp>
+        <p:nvSpPr>
+          <p:cNvPr id="16" name="Text 13"/>
+          <p:cNvSpPr/>
+          <p:nvPr/>
+        </p:nvSpPr>
+        <p:spPr>
+          <a:xfrm>
+            <a:off x="9509760" y="2752344"/>
+            <a:ext cx="2103120" cy="384048"/>
+          </a:xfrm>
+          <a:prstGeom prst="rect">
+            <a:avLst/>
+          </a:prstGeom>
+          <a:noFill/>
+          <a:ln/>
+        </p:spPr>
+        <p:txBody>
+          <a:bodyPr wrap="square" rtlCol="0" anchor="ctr"/>
+          <a:lstStyle/>
+          <a:p>
+            <a:pPr indent="0" marL="0">
+              <a:buNone/>
+            </a:pPr>
+            <a:r>
+              <a:rPr lang="en-US" sz="1500" b="1" dirty="0">
                 <a:solidFill>
                   <a:srgbClr val="2C7A57"/>
                 </a:solidFill>
@@ -5319,98 +5462,332 @@
               </a:rPr>
               <a:t>+20%</a:t>
             </a:r>
-            <a:endParaRPr lang="en-US" sz="1800" dirty="0"/>
-          </a:p>
-        </p:txBody>
-      </p:sp>
-      <p:sp>
-        <p:nvSpPr>
-          <p:cNvPr id="14" name="Text 11"/>
+            <a:endParaRPr lang="en-US" sz="1500" dirty="0"/>
+          </a:p>
+        </p:txBody>
+      </p:sp>
+      <p:sp>
+        <p:nvSpPr>
+          <p:cNvPr id="17" name="Text 14"/>
+          <p:cNvSpPr/>
+          <p:nvPr/>
+        </p:nvSpPr>
+        <p:spPr>
+          <a:xfrm>
+            <a:off x="7772400" y="3154680"/>
+            <a:ext cx="1737360" cy="384048"/>
+          </a:xfrm>
+          <a:prstGeom prst="rect">
+            <a:avLst/>
+          </a:prstGeom>
+          <a:noFill/>
+          <a:ln/>
+        </p:spPr>
+        <p:txBody>
+          <a:bodyPr wrap="square" rtlCol="0" anchor="ctr"/>
+          <a:lstStyle/>
+          <a:p>
+            <a:pPr indent="0" marL="0">
+              <a:buNone/>
+            </a:pPr>
+            <a:r>
+              <a:rPr lang="en-US" sz="1100" dirty="0">
+                <a:solidFill>
+                  <a:srgbClr val="1A1A2E"/>
+                </a:solidFill>
+                <a:latin typeface="Calibri" pitchFamily="34" charset="0"/>
+                <a:ea typeface="Calibri" pitchFamily="34" charset="-122"/>
+                <a:cs typeface="Calibri" pitchFamily="34" charset="-120"/>
+              </a:rPr>
+              <a:t>Waiting Rooms</a:t>
+            </a:r>
+            <a:endParaRPr lang="en-US" sz="1100" dirty="0"/>
+          </a:p>
+        </p:txBody>
+      </p:sp>
+      <p:sp>
+        <p:nvSpPr>
+          <p:cNvPr id="18" name="Text 15"/>
+          <p:cNvSpPr/>
+          <p:nvPr/>
+        </p:nvSpPr>
+        <p:spPr>
+          <a:xfrm>
+            <a:off x="9509760" y="3154680"/>
+            <a:ext cx="2103120" cy="384048"/>
+          </a:xfrm>
+          <a:prstGeom prst="rect">
+            <a:avLst/>
+          </a:prstGeom>
+          <a:noFill/>
+          <a:ln/>
+        </p:spPr>
+        <p:txBody>
+          <a:bodyPr wrap="square" rtlCol="0" anchor="ctr"/>
+          <a:lstStyle/>
+          <a:p>
+            <a:pPr indent="0" marL="0">
+              <a:buNone/>
+            </a:pPr>
+            <a:r>
+              <a:rPr lang="en-US" sz="1500" b="1" dirty="0">
+                <a:solidFill>
+                  <a:srgbClr val="B8500A"/>
+                </a:solidFill>
+                <a:latin typeface="Calibri" pitchFamily="34" charset="0"/>
+                <a:ea typeface="Calibri" pitchFamily="34" charset="-122"/>
+                <a:cs typeface="Calibri" pitchFamily="34" charset="-120"/>
+              </a:rPr>
+              <a:t>+100%</a:t>
+            </a:r>
+            <a:endParaRPr lang="en-US" sz="1500" dirty="0"/>
+          </a:p>
+        </p:txBody>
+      </p:sp>
+      <p:sp>
+        <p:nvSpPr>
+          <p:cNvPr id="19" name="Text 16"/>
+          <p:cNvSpPr/>
+          <p:nvPr/>
+        </p:nvSpPr>
+        <p:spPr>
+          <a:xfrm>
+            <a:off x="7772400" y="3685032"/>
+            <a:ext cx="3840480" cy="256032"/>
+          </a:xfrm>
+          <a:prstGeom prst="rect">
+            <a:avLst/>
+          </a:prstGeom>
+          <a:noFill/>
+          <a:ln/>
+        </p:spPr>
+        <p:txBody>
+          <a:bodyPr wrap="square" rtlCol="0" anchor="ctr"/>
+          <a:lstStyle/>
+          <a:p>
+            <a:pPr indent="0" marL="0">
+              <a:buNone/>
+            </a:pPr>
+            <a:r>
+              <a:rPr lang="en-US" sz="1050" b="1" dirty="0">
+                <a:solidFill>
+                  <a:srgbClr val="1E2761"/>
+                </a:solidFill>
+                <a:latin typeface="Cambria" pitchFamily="34" charset="0"/>
+                <a:ea typeface="Cambria" pitchFamily="34" charset="-122"/>
+                <a:cs typeface="Cambria" pitchFamily="34" charset="-120"/>
+              </a:rPr>
+              <a:t>Recovery vs. true effect (synthetic ground truth)</a:t>
+            </a:r>
+            <a:endParaRPr lang="en-US" sz="1050" dirty="0"/>
+          </a:p>
+        </p:txBody>
+      </p:sp>
+      <p:sp>
+        <p:nvSpPr>
+          <p:cNvPr id="20" name="Text 17"/>
           <p:cNvSpPr/>
           <p:nvPr/>
         </p:nvSpPr>
         <p:spPr>
           <a:xfrm>
             <a:off x="7772400" y="3977640"/>
-            <a:ext cx="1737360" cy="502920"/>
-          </a:xfrm>
-          <a:prstGeom prst="rect">
-            <a:avLst/>
-          </a:prstGeom>
-          <a:noFill/>
-          <a:ln/>
-        </p:spPr>
-        <p:txBody>
-          <a:bodyPr wrap="square" rtlCol="0" anchor="ctr"/>
-          <a:lstStyle/>
-          <a:p>
-            <a:pPr indent="0" marL="0">
-              <a:buNone/>
-            </a:pPr>
-            <a:r>
-              <a:rPr lang="en-US" sz="1200" dirty="0">
+            <a:ext cx="3840480" cy="219456"/>
+          </a:xfrm>
+          <a:prstGeom prst="rect">
+            <a:avLst/>
+          </a:prstGeom>
+          <a:noFill/>
+          <a:ln/>
+        </p:spPr>
+        <p:txBody>
+          <a:bodyPr wrap="square" rtlCol="0" anchor="ctr"/>
+          <a:lstStyle/>
+          <a:p>
+            <a:pPr indent="0" marL="0">
+              <a:buNone/>
+            </a:pPr>
+            <a:r>
+              <a:rPr lang="en-US" sz="850" b="1" dirty="0">
+                <a:solidFill>
+                  <a:srgbClr val="5B6178"/>
+                </a:solidFill>
+                <a:latin typeface="Courier New" pitchFamily="34" charset="0"/>
+                <a:ea typeface="Courier New" pitchFamily="34" charset="-122"/>
+                <a:cs typeface="Courier New" pitchFamily="34" charset="-120"/>
+              </a:rPr>
+              <a:t>Venue type    Naive err   Calib err</a:t>
+            </a:r>
+            <a:endParaRPr lang="en-US" sz="850" dirty="0"/>
+          </a:p>
+        </p:txBody>
+      </p:sp>
+      <p:sp>
+        <p:nvSpPr>
+          <p:cNvPr id="21" name="Text 18"/>
+          <p:cNvSpPr/>
+          <p:nvPr/>
+        </p:nvSpPr>
+        <p:spPr>
+          <a:xfrm>
+            <a:off x="7772400" y="4215384"/>
+            <a:ext cx="3840480" cy="219456"/>
+          </a:xfrm>
+          <a:prstGeom prst="rect">
+            <a:avLst/>
+          </a:prstGeom>
+          <a:noFill/>
+          <a:ln/>
+        </p:spPr>
+        <p:txBody>
+          <a:bodyPr wrap="square" rtlCol="0" anchor="ctr"/>
+          <a:lstStyle/>
+          <a:p>
+            <a:pPr indent="0" marL="0">
+              <a:buNone/>
+            </a:pPr>
+            <a:r>
+              <a:rPr lang="en-US" sz="850" dirty="0">
                 <a:solidFill>
                   <a:srgbClr val="1A1A2E"/>
                 </a:solidFill>
-                <a:latin typeface="Calibri" pitchFamily="34" charset="0"/>
-                <a:ea typeface="Calibri" pitchFamily="34" charset="-122"/>
-                <a:cs typeface="Calibri" pitchFamily="34" charset="-120"/>
-              </a:rPr>
-              <a:t>Waiting Rooms</a:t>
-            </a:r>
-            <a:endParaRPr lang="en-US" sz="1200" dirty="0"/>
-          </a:p>
-        </p:txBody>
-      </p:sp>
-      <p:sp>
-        <p:nvSpPr>
-          <p:cNvPr id="15" name="Text 12"/>
-          <p:cNvSpPr/>
-          <p:nvPr/>
-        </p:nvSpPr>
-        <p:spPr>
-          <a:xfrm>
-            <a:off x="9509760" y="3977640"/>
-            <a:ext cx="2103120" cy="502920"/>
-          </a:xfrm>
-          <a:prstGeom prst="rect">
-            <a:avLst/>
-          </a:prstGeom>
-          <a:noFill/>
-          <a:ln/>
-        </p:spPr>
-        <p:txBody>
-          <a:bodyPr wrap="square" rtlCol="0" anchor="ctr"/>
-          <a:lstStyle/>
-          <a:p>
-            <a:pPr indent="0" marL="0">
-              <a:buNone/>
-            </a:pPr>
-            <a:r>
-              <a:rPr lang="en-US" sz="1800" b="1" dirty="0">
-                <a:solidFill>
-                  <a:srgbClr val="B8500A"/>
-                </a:solidFill>
-                <a:latin typeface="Calibri" pitchFamily="34" charset="0"/>
-                <a:ea typeface="Calibri" pitchFamily="34" charset="-122"/>
-                <a:cs typeface="Calibri" pitchFamily="34" charset="-120"/>
-              </a:rPr>
-              <a:t>+100%</a:t>
-            </a:r>
-            <a:endParaRPr lang="en-US" sz="1800" dirty="0"/>
-          </a:p>
-        </p:txBody>
-      </p:sp>
-      <p:sp>
-        <p:nvSpPr>
-          <p:cNvPr id="16" name="Text 13"/>
-          <p:cNvSpPr/>
-          <p:nvPr/>
-        </p:nvSpPr>
-        <p:spPr>
-          <a:xfrm>
-            <a:off x="7772400" y="4709160"/>
-            <a:ext cx="3840480" cy="1463040"/>
+                <a:latin typeface="Courier New" pitchFamily="34" charset="0"/>
+                <a:ea typeface="Courier New" pitchFamily="34" charset="-122"/>
+                <a:cs typeface="Courier New" pitchFamily="34" charset="-120"/>
+              </a:rPr>
+              <a:t>Restaurants   -10.0       +0.7</a:t>
+            </a:r>
+            <a:endParaRPr lang="en-US" sz="850" dirty="0"/>
+          </a:p>
+        </p:txBody>
+      </p:sp>
+      <p:sp>
+        <p:nvSpPr>
+          <p:cNvPr id="22" name="Text 19"/>
+          <p:cNvSpPr/>
+          <p:nvPr/>
+        </p:nvSpPr>
+        <p:spPr>
+          <a:xfrm>
+            <a:off x="7772400" y="4453128"/>
+            <a:ext cx="3840480" cy="219456"/>
+          </a:xfrm>
+          <a:prstGeom prst="rect">
+            <a:avLst/>
+          </a:prstGeom>
+          <a:noFill/>
+          <a:ln/>
+        </p:spPr>
+        <p:txBody>
+          <a:bodyPr wrap="square" rtlCol="0" anchor="ctr"/>
+          <a:lstStyle/>
+          <a:p>
+            <a:pPr indent="0" marL="0">
+              <a:buNone/>
+            </a:pPr>
+            <a:r>
+              <a:rPr lang="en-US" sz="850" dirty="0">
+                <a:solidFill>
+                  <a:srgbClr val="1A1A2E"/>
+                </a:solidFill>
+                <a:latin typeface="Courier New" pitchFamily="34" charset="0"/>
+                <a:ea typeface="Courier New" pitchFamily="34" charset="-122"/>
+                <a:cs typeface="Courier New" pitchFamily="34" charset="-120"/>
+              </a:rPr>
+              <a:t>Gyms          -9.1        -0.9</a:t>
+            </a:r>
+            <a:endParaRPr lang="en-US" sz="850" dirty="0"/>
+          </a:p>
+        </p:txBody>
+      </p:sp>
+      <p:sp>
+        <p:nvSpPr>
+          <p:cNvPr id="23" name="Text 20"/>
+          <p:cNvSpPr/>
+          <p:nvPr/>
+        </p:nvSpPr>
+        <p:spPr>
+          <a:xfrm>
+            <a:off x="7772400" y="4690872"/>
+            <a:ext cx="3840480" cy="219456"/>
+          </a:xfrm>
+          <a:prstGeom prst="rect">
+            <a:avLst/>
+          </a:prstGeom>
+          <a:noFill/>
+          <a:ln/>
+        </p:spPr>
+        <p:txBody>
+          <a:bodyPr wrap="square" rtlCol="0" anchor="ctr"/>
+          <a:lstStyle/>
+          <a:p>
+            <a:pPr indent="0" marL="0">
+              <a:buNone/>
+            </a:pPr>
+            <a:r>
+              <a:rPr lang="en-US" sz="850" dirty="0">
+                <a:solidFill>
+                  <a:srgbClr val="1A1A2E"/>
+                </a:solidFill>
+                <a:latin typeface="Courier New" pitchFamily="34" charset="0"/>
+                <a:ea typeface="Courier New" pitchFamily="34" charset="-122"/>
+                <a:cs typeface="Courier New" pitchFamily="34" charset="-120"/>
+              </a:rPr>
+              <a:t>Bars          -5.8        -2.4</a:t>
+            </a:r>
+            <a:endParaRPr lang="en-US" sz="850" dirty="0"/>
+          </a:p>
+        </p:txBody>
+      </p:sp>
+      <p:sp>
+        <p:nvSpPr>
+          <p:cNvPr id="24" name="Text 21"/>
+          <p:cNvSpPr/>
+          <p:nvPr/>
+        </p:nvSpPr>
+        <p:spPr>
+          <a:xfrm>
+            <a:off x="7772400" y="4928616"/>
+            <a:ext cx="3840480" cy="219456"/>
+          </a:xfrm>
+          <a:prstGeom prst="rect">
+            <a:avLst/>
+          </a:prstGeom>
+          <a:noFill/>
+          <a:ln/>
+        </p:spPr>
+        <p:txBody>
+          <a:bodyPr wrap="square" rtlCol="0" anchor="ctr"/>
+          <a:lstStyle/>
+          <a:p>
+            <a:pPr indent="0" marL="0">
+              <a:buNone/>
+            </a:pPr>
+            <a:r>
+              <a:rPr lang="en-US" sz="850" dirty="0">
+                <a:solidFill>
+                  <a:srgbClr val="1A1A2E"/>
+                </a:solidFill>
+                <a:latin typeface="Courier New" pitchFamily="34" charset="0"/>
+                <a:ea typeface="Courier New" pitchFamily="34" charset="-122"/>
+                <a:cs typeface="Courier New" pitchFamily="34" charset="-120"/>
+              </a:rPr>
+              <a:t>Waiting Rooms -4.9        -0.8</a:t>
+            </a:r>
+            <a:endParaRPr lang="en-US" sz="850" dirty="0"/>
+          </a:p>
+        </p:txBody>
+      </p:sp>
+      <p:sp>
+        <p:nvSpPr>
+          <p:cNvPr id="25" name="Text 22"/>
+          <p:cNvSpPr/>
+          <p:nvPr/>
+        </p:nvSpPr>
+        <p:spPr>
+          <a:xfrm>
+            <a:off x="7772400" y="5276088"/>
+            <a:ext cx="3840480" cy="914400"/>
           </a:xfrm>
           <a:prstGeom prst="rect">
             <a:avLst/>
@@ -5424,12 +5801,12 @@
           <a:p>
             <a:pPr indent="0" marL="0">
               <a:lnSpc>
-                <a:spcPts val="1500"/>
+                <a:spcPts val="1150"/>
               </a:lnSpc>
               <a:buNone/>
             </a:pPr>
             <a:r>
-              <a:rPr lang="en-US" sz="1100" i="1" dirty="0">
+              <a:rPr lang="en-US" sz="900" i="1" dirty="0">
                 <a:solidFill>
                   <a:srgbClr val="5B6178"/>
                 </a:solidFill>
@@ -5437,15 +5814,15 @@
                 <a:ea typeface="Calibri" pitchFamily="34" charset="-122"/>
                 <a:cs typeface="Calibri" pitchFamily="34" charset="-120"/>
               </a:rPr>
-              <a:t>For 3 of 4 venue types, the naive observational fit understated the RCT-calibrated estimate by 100–165% — the kind of gap real MMM practice cites as its core identification problem, and exactly why the RCT anchor matters.</a:t>
-            </a:r>
-            <a:endParaRPr lang="en-US" sz="1100" dirty="0"/>
-          </a:p>
-        </p:txBody>
-      </p:sp>
-      <p:sp>
-        <p:nvSpPr>
-          <p:cNvPr id="17" name="Text 14"/>
+              <a:t>Every calibrated error is far smaller than its naive error (restaurant: −10.0 → +0.7) — only checkable here because this is synthetic data with a known answer key. In a real deployment there's no such key; that's exactly why the RCT anchor is trusted rather than verified.</a:t>
+            </a:r>
+            <a:endParaRPr lang="en-US" sz="900" dirty="0"/>
+          </a:p>
+        </p:txBody>
+      </p:sp>
+      <p:sp>
+        <p:nvSpPr>
+          <p:cNvPr id="26" name="Text 23"/>
           <p:cNvSpPr/>
           <p:nvPr/>
         </p:nvSpPr>

--- a/deck/AtmosphereTV_DOOH_Measurement.pptx
+++ b/deck/AtmosphereTV_DOOH_Measurement.pptx
@@ -21,9 +21,10 @@
     <p:sldId id="269" r:id="rId15"/>
     <p:sldId id="270" r:id="rId16"/>
     <p:sldId id="271" r:id="rId17"/>
+    <p:sldId id="272" r:id="rId18"/>
   </p:sldIdLst>
   <p:notesMasterIdLst>
-    <p:notesMasterId r:id="rId18"/>
+    <p:notesMasterId r:id="rId19"/>
   </p:notesMasterIdLst>
   <p:sldSz cx="12192000" cy="6858000"/>
   <p:notesSz cx="6858000" cy="12192000"/>
@@ -1780,7 +1781,405 @@
   <c:date1904 val="0"/>
   <c:roundedCorners val="1"/>
   <c:chart>
-    <c:autoTitleDeleted val="1"/>
+    <c:title>
+      <c:tx>
+        <c:rich>
+          <a:bodyPr/>
+          <a:lstStyle/>
+          <a:p>
+            <a:pPr>
+              <a:defRPr sz="1100" b="0" i="0" u="none" strike="noStrike">
+                <a:solidFill>
+                  <a:srgbClr val="1E2761"/>
+                </a:solidFill>
+                <a:latin typeface="Arial"/>
+              </a:defRPr>
+            </a:pPr>
+            <a:r>
+              <a:rPr sz="1100" b="0" i="0" u="none" strike="noStrike">
+                <a:solidFill>
+                  <a:srgbClr val="1E2761"/>
+                </a:solidFill>
+                <a:latin typeface="Arial"/>
+              </a:rPr>
+              <a:t>The next dollar's return rises, THEN falls — not monotonic</a:t>
+            </a:r>
+          </a:p>
+        </c:rich>
+      </c:tx>
+      <c:layout/>
+      <c:overlay val="0"/>
+    </c:title>
+    <c:autoTitleDeleted val="0"/>
+    <c:plotArea>
+      <c:layout/>
+      <c:lineChart>
+        <c:varyColors val="0"/>
+        <c:ser>
+          <c:idx val="0"/>
+          <c:order val="0"/>
+          <c:tx>
+            <c:strRef>
+              <c:f>Sheet1!$B$1</c:f>
+              <c:strCache>
+                <c:ptCount val="1"/>
+                <c:pt idx="0">
+                  <c:v>Restaurant: incremental lift per $1,000 spent</c:v>
+                </c:pt>
+              </c:strCache>
+            </c:strRef>
+          </c:tx>
+          <c:spPr>
+            <a:solidFill>
+              <a:srgbClr val="1E2761"/>
+            </a:solidFill>
+            <a:ln w="31750" cap="flat">
+              <a:solidFill>
+                <a:srgbClr val="1E2761"/>
+              </a:solidFill>
+              <a:prstDash val="solid"/>
+              <a:round/>
+            </a:ln>
+            <a:effectLst/>
+          </c:spPr>
+          <c:invertIfNegative val="0"/>
+          <c:dLbls>
+            <c:numFmt formatCode="0.0" sourceLinked="0"/>
+            <c:txPr>
+              <a:bodyPr/>
+              <a:lstStyle/>
+              <a:p>
+                <a:pPr>
+                  <a:defRPr b="0" i="0" strike="noStrike" sz="900" u="none">
+                    <a:solidFill>
+                      <a:srgbClr val="1A1A2E"/>
+                    </a:solidFill>
+                    <a:latin typeface="Arial"/>
+                  </a:defRPr>
+                </a:pPr>
+              </a:p>
+            </c:txPr>
+            <c:dLblPos val="t"/>
+            <c:showLegendKey val="0"/>
+            <c:showVal val="1"/>
+            <c:showCatName val="0"/>
+            <c:showSerName val="0"/>
+            <c:showPercent val="0"/>
+            <c:showBubbleSize val="0"/>
+            <c:showLeaderLines val="0"/>
+          </c:dLbls>
+          <c:marker>
+            <c:symbol val="circle"/>
+            <c:size val="6"/>
+            <c:spPr>
+              <a:solidFill>
+                <a:srgbClr val="1E2761"/>
+              </a:solidFill>
+              <a:ln w="9525" cap="flat">
+                <a:solidFill>
+                  <a:srgbClr val="1E2761"/>
+                </a:solidFill>
+                <a:prstDash val="solid"/>
+                <a:round/>
+              </a:ln>
+              <a:effectLst/>
+            </c:spPr>
+          </c:marker>
+          <c:cat>
+            <c:multiLvlStrRef>
+              <c:f>Sheet1!$A$2:$A$7</c:f>
+              <c:multiLvlStrCache>
+                <c:ptCount val="6"/>
+                <c:lvl>
+                  <c:pt idx="0">
+                    <c:v>.25</c:v>
+                  </c:pt>
+                  <c:pt idx="1">
+                    <c:v>.5</c:v>
+                  </c:pt>
+                  <c:pt idx="2">
+                    <c:v>.75</c:v>
+                  </c:pt>
+                  <c:pt idx="3">
+                    <c:v>1.0</c:v>
+                  </c:pt>
+                  <c:pt idx="4">
+                    <c:v>1.5</c:v>
+                  </c:pt>
+                  <c:pt idx="5">
+                    <c:v>2.0</c:v>
+                  </c:pt>
+                </c:lvl>
+              </c:multiLvlStrCache>
+            </c:multiLvlStrRef>
+          </c:cat>
+          <c:val>
+            <c:numRef>
+              <c:f>Sheet1!$B$2:$B$7</c:f>
+              <c:numCache>
+                <c:formatCode>General</c:formatCode>
+                <c:ptCount val="6"/>
+                <c:pt idx="0">
+                  <c:v>5</c:v>
+                </c:pt>
+                <c:pt idx="1">
+                  <c:v>34.2</c:v>
+                </c:pt>
+                <c:pt idx="2">
+                  <c:v>86.9</c:v>
+                </c:pt>
+                <c:pt idx="3">
+                  <c:v>147.5</c:v>
+                </c:pt>
+                <c:pt idx="4">
+                  <c:v>205.8</c:v>
+                </c:pt>
+                <c:pt idx="5">
+                  <c:v>198</c:v>
+                </c:pt>
+              </c:numCache>
+            </c:numRef>
+          </c:val>
+          <c:smooth val="0"/>
+        </c:ser>
+        <c:dLbls>
+          <c:numFmt formatCode="0.0" sourceLinked="0"/>
+          <c:txPr>
+            <a:bodyPr/>
+            <a:lstStyle/>
+            <a:p>
+              <a:pPr>
+                <a:defRPr b="0" i="0" strike="noStrike" sz="900" u="none">
+                  <a:solidFill>
+                    <a:srgbClr val="1A1A2E"/>
+                  </a:solidFill>
+                  <a:latin typeface="Arial"/>
+                </a:defRPr>
+              </a:pPr>
+            </a:p>
+          </c:txPr>
+          <c:dLblPos val="t"/>
+          <c:showLegendKey val="0"/>
+          <c:showVal val="1"/>
+          <c:showCatName val="0"/>
+          <c:showSerName val="0"/>
+          <c:showPercent val="0"/>
+          <c:showBubbleSize val="0"/>
+          <c:showLeaderLines val="0"/>
+        </c:dLbls>
+        <c:marker val="1"/>
+        <c:axId val="2094734554"/>
+        <c:axId val="2094734552"/>
+        <c:axId val="2094734556"/>
+      </c:lineChart>
+      <c:catAx>
+        <c:axId val="2094734554"/>
+        <c:scaling>
+          <c:orientation val="minMax"/>
+        </c:scaling>
+        <c:delete val="0"/>
+        <c:axPos val="b"/>
+        <c:title>
+          <c:tx>
+            <c:rich>
+              <a:bodyPr/>
+              <a:lstStyle/>
+              <a:p>
+                <a:pPr>
+                  <a:defRPr sz="950" b="0" i="0" u="none" strike="noStrike">
+                    <a:solidFill>
+                      <a:srgbClr val="000000"/>
+                    </a:solidFill>
+                    <a:latin typeface="Arial"/>
+                  </a:defRPr>
+                </a:pPr>
+                <a:r>
+                  <a:rPr sz="950" b="0" i="0" u="none" strike="noStrike">
+                    <a:solidFill>
+                      <a:srgbClr val="000000"/>
+                    </a:solidFill>
+                    <a:latin typeface="Arial"/>
+                  </a:rPr>
+                  <a:t>Frequency (plays/venue/wk)</a:t>
+                </a:r>
+              </a:p>
+            </c:rich>
+          </c:tx>
+          <c:layout/>
+          <c:overlay val="0"/>
+        </c:title>
+        <c:numFmt formatCode="General" sourceLinked="1"/>
+        <c:majorTickMark val="out"/>
+        <c:minorTickMark val="none"/>
+        <c:tickLblPos val="low"/>
+        <c:spPr>
+          <a:ln w="12700" cap="flat">
+            <a:solidFill>
+              <a:srgbClr val="888888"/>
+            </a:solidFill>
+            <a:prstDash val="solid"/>
+            <a:round/>
+          </a:ln>
+        </c:spPr>
+        <c:txPr>
+          <a:bodyPr/>
+          <a:lstStyle/>
+          <a:p>
+            <a:pPr>
+              <a:defRPr sz="1000" b="0" i="0" u="none" strike="noStrike">
+                <a:solidFill>
+                  <a:srgbClr val="1A1A2E"/>
+                </a:solidFill>
+                <a:latin typeface="Arial"/>
+              </a:defRPr>
+            </a:pPr>
+            <a:endParaRPr lang="en-US"/>
+          </a:p>
+        </c:txPr>
+        <c:crossAx val="2094734552"/>
+        <c:crosses val="autoZero"/>
+        <c:auto val="1"/>
+        <c:lblAlgn val="ctr"/>
+        <c:noMultiLvlLbl val="1"/>
+      </c:catAx>
+      <c:valAx>
+        <c:axId val="2094734552"/>
+        <c:scaling>
+          <c:orientation val="minMax"/>
+        </c:scaling>
+        <c:delete val="0"/>
+        <c:axPos val="l"/>
+        <c:majorGridlines>
+          <c:spPr>
+            <a:ln w="9525" cap="flat">
+              <a:solidFill>
+                <a:srgbClr val="E5E5EF"/>
+              </a:solidFill>
+              <a:prstDash val="solid"/>
+              <a:round/>
+            </a:ln>
+          </c:spPr>
+        </c:majorGridlines>
+        <c:title>
+          <c:tx>
+            <c:rich>
+              <a:bodyPr/>
+              <a:lstStyle/>
+              <a:p>
+                <a:pPr>
+                  <a:defRPr sz="1000" b="0" i="0" u="none" strike="noStrike">
+                    <a:solidFill>
+                      <a:srgbClr val="000000"/>
+                    </a:solidFill>
+                    <a:latin typeface="Arial"/>
+                  </a:defRPr>
+                </a:pPr>
+                <a:r>
+                  <a:rPr sz="1000" b="0" i="0" u="none" strike="noStrike">
+                    <a:solidFill>
+                      <a:srgbClr val="000000"/>
+                    </a:solidFill>
+                    <a:latin typeface="Arial"/>
+                  </a:rPr>
+                  <a:t>Incremental lift per $1,000</a:t>
+                </a:r>
+              </a:p>
+            </c:rich>
+          </c:tx>
+          <c:layout/>
+          <c:overlay val="0"/>
+        </c:title>
+        <c:numFmt formatCode="General" sourceLinked="0"/>
+        <c:majorTickMark val="out"/>
+        <c:minorTickMark val="none"/>
+        <c:tickLblPos val="nextTo"/>
+        <c:spPr>
+          <a:ln w="12700" cap="flat">
+            <a:solidFill>
+              <a:srgbClr val="888888"/>
+            </a:solidFill>
+            <a:prstDash val="solid"/>
+            <a:round/>
+          </a:ln>
+        </c:spPr>
+        <c:txPr>
+          <a:bodyPr/>
+          <a:lstStyle/>
+          <a:p>
+            <a:pPr>
+              <a:defRPr sz="900" b="0" i="0" u="none" strike="noStrike">
+                <a:solidFill>
+                  <a:srgbClr val="5B6178"/>
+                </a:solidFill>
+                <a:latin typeface="Arial"/>
+              </a:defRPr>
+            </a:pPr>
+            <a:endParaRPr lang="en-US"/>
+          </a:p>
+        </c:txPr>
+        <c:crossAx val="2094734554"/>
+        <c:crosses val="autoZero"/>
+        <c:crossBetween val="between"/>
+      </c:valAx>
+      <c:spPr>
+        <a:noFill/>
+        <a:ln>
+          <a:noFill/>
+        </a:ln>
+        <a:effectLst/>
+      </c:spPr>
+    </c:plotArea>
+    <c:plotVisOnly val="1"/>
+    <c:dispBlanksAs val="span"/>
+  </c:chart>
+  <c:spPr>
+    <a:noFill/>
+    <a:ln>
+      <a:noFill/>
+    </a:ln>
+    <a:effectLst/>
+  </c:spPr>
+  <c:externalData r:id="rId1">
+    <c:autoUpdate val="0"/>
+  </c:externalData>
+</c:chartSpace>
+</file>
+
+<file path=ppt/charts/chart7.xml><?xml version="1.0" encoding="utf-8"?>
+<c:chartSpace xmlns:c="http://schemas.openxmlformats.org/drawingml/2006/chart" xmlns:a="http://schemas.openxmlformats.org/drawingml/2006/main" xmlns:r="http://schemas.openxmlformats.org/officeDocument/2006/relationships">
+  <c:date1904 val="0"/>
+  <c:roundedCorners val="1"/>
+  <c:chart>
+    <c:title>
+      <c:tx>
+        <c:rich>
+          <a:bodyPr/>
+          <a:lstStyle/>
+          <a:p>
+            <a:pPr>
+              <a:defRPr sz="1050" b="0" i="0" u="none" strike="noStrike">
+                <a:solidFill>
+                  <a:srgbClr val="1E2761"/>
+                </a:solidFill>
+                <a:latin typeface="Arial"/>
+              </a:defRPr>
+            </a:pPr>
+            <a:r>
+              <a:rPr sz="1050" b="0" i="0" u="none" strike="noStrike">
+                <a:solidFill>
+                  <a:srgbClr val="1E2761"/>
+                </a:solidFill>
+                <a:latin typeface="Arial"/>
+              </a:rPr>
+              <a:t>$100,000 weekly budget — DP-optimal allocation</a:t>
+            </a:r>
+          </a:p>
+        </c:rich>
+      </c:tx>
+      <c:layout/>
+      <c:overlay val="0"/>
+    </c:title>
+    <c:autoTitleDeleted val="0"/>
     <c:plotArea>
       <c:layout/>
       <c:barChart>
@@ -1815,7 +2214,7 @@
               <a:lstStyle/>
               <a:p>
                 <a:pPr>
-                  <a:defRPr b="0" i="0" strike="noStrike" sz="1000" u="none">
+                  <a:defRPr b="0" i="0" strike="noStrike" sz="950" u="none">
                     <a:solidFill>
                       <a:srgbClr val="1A1A2E"/>
                     </a:solidFill>
@@ -1883,7 +2282,7 @@
             <a:lstStyle/>
             <a:p>
               <a:pPr>
-                <a:defRPr b="0" i="0" strike="noStrike" sz="1000" u="none">
+                <a:defRPr b="0" i="0" strike="noStrike" sz="950" u="none">
                   <a:solidFill>
                     <a:srgbClr val="1A1A2E"/>
                   </a:solidFill>
@@ -1931,7 +2330,7 @@
           <a:lstStyle/>
           <a:p>
             <a:pPr>
-              <a:defRPr sz="1100" b="0" i="0" u="none" strike="noStrike">
+              <a:defRPr sz="1000" b="0" i="0" u="none" strike="noStrike">
                 <a:solidFill>
                   <a:srgbClr val="1A1A2E"/>
                 </a:solidFill>
@@ -1983,7 +2382,7 @@
           <a:lstStyle/>
           <a:p>
             <a:pPr>
-              <a:defRPr sz="900" b="0" i="0" u="none" strike="noStrike">
+              <a:defRPr sz="850" b="0" i="0" u="none" strike="noStrike">
                 <a:solidFill>
                   <a:srgbClr val="5B6178"/>
                 </a:solidFill>
@@ -2021,7 +2420,7 @@
 </c:chartSpace>
 </file>
 
-<file path=ppt/charts/chart7.xml><?xml version="1.0" encoding="utf-8"?>
+<file path=ppt/charts/chart8.xml><?xml version="1.0" encoding="utf-8"?>
 <c:chartSpace xmlns:c="http://schemas.openxmlformats.org/drawingml/2006/chart" xmlns:a="http://schemas.openxmlformats.org/drawingml/2006/main" xmlns:r="http://schemas.openxmlformats.org/officeDocument/2006/relationships">
   <c:date1904 val="0"/>
   <c:roundedCorners val="1"/>
@@ -2296,7 +2695,7 @@
 </c:chartSpace>
 </file>
 
-<file path=ppt/charts/chart8.xml><?xml version="1.0" encoding="utf-8"?>
+<file path=ppt/charts/chart9.xml><?xml version="1.0" encoding="utf-8"?>
 <c:chartSpace xmlns:c="http://schemas.openxmlformats.org/drawingml/2006/chart" xmlns:a="http://schemas.openxmlformats.org/drawingml/2006/main" xmlns:r="http://schemas.openxmlformats.org/officeDocument/2006/relationships">
   <c:date1904 val="0"/>
   <c:roundedCorners val="1"/>
@@ -3606,6 +4005,94 @@
             <a:fld id="{F7021451-1387-4CA6-816F-3879F97B5CBC}" type="slidenum">
               <a:rPr lang="en-US"/>
               <a:t>16</a:t>
+            </a:fld>
+            <a:endParaRPr lang="en-US"/>
+          </a:p>
+        </p:txBody>
+      </p:sp>
+    </p:spTree>
+    <p:extLst>
+      <p:ext uri="{BB962C8B-B14F-4D97-AF65-F5344CB8AC3E}">
+        <p14:creationId xmlns:p14="http://schemas.microsoft.com/office/powerpoint/2010/main" val="1024086991"/>
+      </p:ext>
+    </p:extLst>
+  </p:cSld>
+  <p:clrMapOvr>
+    <a:masterClrMapping/>
+  </p:clrMapOvr>
+</p:notes>
+</file>
+
+<file path=ppt/notesSlides/notesSlide17.xml><?xml version="1.0" encoding="utf-8"?>
+<p:notes xmlns:a="http://schemas.openxmlformats.org/drawingml/2006/main" xmlns:r="http://schemas.openxmlformats.org/officeDocument/2006/relationships" xmlns:p="http://schemas.openxmlformats.org/presentationml/2006/main">
+  <p:cSld>
+    <p:spTree>
+      <p:nvGrpSpPr>
+        <p:cNvPr id="1" name=""/>
+        <p:cNvGrpSpPr/>
+        <p:nvPr/>
+      </p:nvGrpSpPr>
+      <p:grpSpPr>
+        <a:xfrm>
+          <a:off x="0" y="0"/>
+          <a:ext cx="0" cy="0"/>
+          <a:chOff x="0" y="0"/>
+          <a:chExt cx="0" cy="0"/>
+        </a:xfrm>
+      </p:grpSpPr>
+      <p:sp>
+        <p:nvSpPr>
+          <p:cNvPr id="2" name="Slide Image Placeholder 1"/>
+          <p:cNvSpPr>
+            <a:spLocks noGrp="1" noRot="1" noChangeAspect="1"/>
+          </p:cNvSpPr>
+          <p:nvPr>
+            <p:ph type="sldImg"/>
+          </p:nvPr>
+        </p:nvSpPr>
+        <p:spPr/>
+      </p:sp>
+      <p:sp>
+        <p:nvSpPr>
+          <p:cNvPr id="3" name="Notes Placeholder 2"/>
+          <p:cNvSpPr>
+            <a:spLocks noGrp="1"/>
+          </p:cNvSpPr>
+          <p:nvPr>
+            <p:ph type="body" idx="1"/>
+          </p:nvPr>
+        </p:nvSpPr>
+        <p:spPr/>
+        <p:txBody>
+          <a:bodyPr/>
+          <a:lstStyle/>
+          <a:p>
+            <a:r>
+              <a:rPr lang="en-US" dirty="0"/>
+              <a:t/>
+            </a:r>
+            <a:endParaRPr lang="en-US" dirty="0"/>
+          </a:p>
+        </p:txBody>
+      </p:sp>
+      <p:sp>
+        <p:nvSpPr>
+          <p:cNvPr id="4" name="Slide Number Placeholder 3"/>
+          <p:cNvSpPr>
+            <a:spLocks noGrp="1"/>
+          </p:cNvSpPr>
+          <p:nvPr>
+            <p:ph type="sldNum" sz="quarter" idx="10"/>
+          </p:nvPr>
+        </p:nvSpPr>
+        <p:spPr/>
+        <p:txBody>
+          <a:bodyPr/>
+          <a:lstStyle/>
+          <a:p>
+            <a:fld id="{F7021451-1387-4CA6-816F-3879F97B5CBC}" type="slidenum">
+              <a:rPr lang="en-US"/>
+              <a:t>17</a:t>
             </a:fld>
             <a:endParaRPr lang="en-US"/>
           </a:p>
@@ -5577,7 +6064,7 @@
                 <a:ea typeface="Cambria" pitchFamily="34" charset="-122"/>
                 <a:cs typeface="Cambria" pitchFamily="34" charset="-120"/>
               </a:rPr>
-              <a:t>Recovery vs. true effect (synthetic ground truth)</a:t>
+              <a:t>Worked example: restaurant's β, step by step</a:t>
             </a:r>
             <a:endParaRPr lang="en-US" sz="1050" dirty="0"/>
           </a:p>
@@ -5592,62 +6079,46 @@
         <p:spPr>
           <a:xfrm>
             <a:off x="7772400" y="3977640"/>
-            <a:ext cx="3840480" cy="219456"/>
-          </a:xfrm>
-          <a:prstGeom prst="rect">
-            <a:avLst/>
-          </a:prstGeom>
-          <a:noFill/>
-          <a:ln/>
-        </p:spPr>
-        <p:txBody>
-          <a:bodyPr wrap="square" rtlCol="0" anchor="ctr"/>
-          <a:lstStyle/>
-          <a:p>
-            <a:pPr indent="0" marL="0">
-              <a:buNone/>
-            </a:pPr>
-            <a:r>
-              <a:rPr lang="en-US" sz="850" b="1" dirty="0">
-                <a:solidFill>
-                  <a:srgbClr val="5B6178"/>
+            <a:ext cx="3840480" cy="1188720"/>
+          </a:xfrm>
+          <a:prstGeom prst="rect">
+            <a:avLst/>
+          </a:prstGeom>
+          <a:noFill/>
+          <a:ln/>
+        </p:spPr>
+        <p:txBody>
+          <a:bodyPr wrap="square" rtlCol="0" anchor="ctr"/>
+          <a:lstStyle/>
+          <a:p>
+            <a:pPr indent="0" marL="0">
+              <a:lnSpc>
+                <a:spcPts val="1300"/>
+              </a:lnSpc>
+              <a:buNone/>
+            </a:pPr>
+            <a:r>
+              <a:rPr lang="en-US" sz="870" dirty="0">
+                <a:solidFill>
+                  <a:srgbClr val="1A1A2E"/>
                 </a:solidFill>
                 <a:latin typeface="Courier New" pitchFamily="34" charset="0"/>
                 <a:ea typeface="Courier New" pitchFamily="34" charset="-122"/>
                 <a:cs typeface="Courier New" pitchFamily="34" charset="-120"/>
               </a:rPr>
-              <a:t>Venue type    Naive err   Calib err</a:t>
-            </a:r>
-            <a:endParaRPr lang="en-US" sz="850" dirty="0"/>
-          </a:p>
-        </p:txBody>
-      </p:sp>
-      <p:sp>
-        <p:nvSpPr>
-          <p:cNvPr id="21" name="Text 18"/>
-          <p:cNvSpPr/>
-          <p:nvPr/>
-        </p:nvSpPr>
-        <p:spPr>
-          <a:xfrm>
-            <a:off x="7772400" y="4215384"/>
-            <a:ext cx="3840480" cy="219456"/>
-          </a:xfrm>
-          <a:prstGeom prst="rect">
-            <a:avLst/>
-          </a:prstGeom>
-          <a:noFill/>
-          <a:ln/>
-        </p:spPr>
-        <p:txBody>
-          <a:bodyPr wrap="square" rtlCol="0" anchor="ctr"/>
-          <a:lstStyle/>
-          <a:p>
-            <a:pPr indent="0" marL="0">
-              <a:buNone/>
-            </a:pPr>
-            <a:r>
-              <a:rPr lang="en-US" sz="850" dirty="0">
+              <a:t>RCT design:      6 plays/wk × 10 wks</a:t>
+            </a:r>
+            <a:endParaRPr lang="en-US" sz="870" dirty="0"/>
+          </a:p>
+          <a:p>
+            <a:pPr indent="0" marL="0">
+              <a:lnSpc>
+                <a:spcPts val="1300"/>
+              </a:lnSpc>
+              <a:buNone/>
+            </a:pPr>
+            <a:r>
+              <a:rPr lang="en-US" sz="870" dirty="0">
                 <a:solidFill>
                   <a:srgbClr val="1A1A2E"/>
                 </a:solidFill>
@@ -5655,38 +6126,19 @@
                 <a:ea typeface="Courier New" pitchFamily="34" charset="-122"/>
                 <a:cs typeface="Courier New" pitchFamily="34" charset="-120"/>
               </a:rPr>
-              <a:t>Restaurants   -10.0       +0.7</a:t>
-            </a:r>
-            <a:endParaRPr lang="en-US" sz="850" dirty="0"/>
-          </a:p>
-        </p:txBody>
-      </p:sp>
-      <p:sp>
-        <p:nvSpPr>
-          <p:cNvPr id="22" name="Text 19"/>
-          <p:cNvSpPr/>
-          <p:nvPr/>
-        </p:nvSpPr>
-        <p:spPr>
-          <a:xfrm>
-            <a:off x="7772400" y="4453128"/>
-            <a:ext cx="3840480" cy="219456"/>
-          </a:xfrm>
-          <a:prstGeom prst="rect">
-            <a:avLst/>
-          </a:prstGeom>
-          <a:noFill/>
-          <a:ln/>
-        </p:spPr>
-        <p:txBody>
-          <a:bodyPr wrap="square" rtlCol="0" anchor="ctr"/>
-          <a:lstStyle/>
-          <a:p>
-            <a:pPr indent="0" marL="0">
-              <a:buNone/>
-            </a:pPr>
-            <a:r>
-              <a:rPr lang="en-US" sz="850" dirty="0">
+              <a:t>Adstock (decay .7): 6.0→10.2→13.1→…→19.4</a:t>
+            </a:r>
+            <a:endParaRPr lang="en-US" sz="870" dirty="0"/>
+          </a:p>
+          <a:p>
+            <a:pPr indent="0" marL="0">
+              <a:lnSpc>
+                <a:spcPts val="1300"/>
+              </a:lnSpc>
+              <a:buNone/>
+            </a:pPr>
+            <a:r>
+              <a:rPr lang="en-US" sz="870" dirty="0">
                 <a:solidFill>
                   <a:srgbClr val="1A1A2E"/>
                 </a:solidFill>
@@ -5694,38 +6146,19 @@
                 <a:ea typeface="Courier New" pitchFamily="34" charset="-122"/>
                 <a:cs typeface="Courier New" pitchFamily="34" charset="-120"/>
               </a:rPr>
-              <a:t>Gyms          -9.1        -0.9</a:t>
-            </a:r>
-            <a:endParaRPr lang="en-US" sz="850" dirty="0"/>
-          </a:p>
-        </p:txBody>
-      </p:sp>
-      <p:sp>
-        <p:nvSpPr>
-          <p:cNvPr id="23" name="Text 20"/>
-          <p:cNvSpPr/>
-          <p:nvPr/>
-        </p:nvSpPr>
-        <p:spPr>
-          <a:xfrm>
-            <a:off x="7772400" y="4690872"/>
-            <a:ext cx="3840480" cy="219456"/>
-          </a:xfrm>
-          <a:prstGeom prst="rect">
-            <a:avLst/>
-          </a:prstGeom>
-          <a:noFill/>
-          <a:ln/>
-        </p:spPr>
-        <p:txBody>
-          <a:bodyPr wrap="square" rtlCol="0" anchor="ctr"/>
-          <a:lstStyle/>
-          <a:p>
-            <a:pPr indent="0" marL="0">
-              <a:buNone/>
-            </a:pPr>
-            <a:r>
-              <a:rPr lang="en-US" sz="850" dirty="0">
+              <a:t>Saturation (half 6, shape 3): .50→.83→.91→…→.97, avg≈0.90</a:t>
+            </a:r>
+            <a:endParaRPr lang="en-US" sz="870" dirty="0"/>
+          </a:p>
+          <a:p>
+            <a:pPr indent="0" marL="0">
+              <a:lnSpc>
+                <a:spcPts val="1300"/>
+              </a:lnSpc>
+              <a:buNone/>
+            </a:pPr>
+            <a:r>
+              <a:rPr lang="en-US" sz="870" dirty="0">
                 <a:solidFill>
                   <a:srgbClr val="1A1A2E"/>
                 </a:solidFill>
@@ -5733,38 +6166,19 @@
                 <a:ea typeface="Courier New" pitchFamily="34" charset="-122"/>
                 <a:cs typeface="Courier New" pitchFamily="34" charset="-120"/>
               </a:rPr>
-              <a:t>Bars          -5.8        -2.4</a:t>
-            </a:r>
-            <a:endParaRPr lang="en-US" sz="850" dirty="0"/>
-          </a:p>
-        </p:txBody>
-      </p:sp>
-      <p:sp>
-        <p:nvSpPr>
-          <p:cNvPr id="24" name="Text 21"/>
-          <p:cNvSpPr/>
-          <p:nvPr/>
-        </p:nvSpPr>
-        <p:spPr>
-          <a:xfrm>
-            <a:off x="7772400" y="4928616"/>
-            <a:ext cx="3840480" cy="219456"/>
-          </a:xfrm>
-          <a:prstGeom prst="rect">
-            <a:avLst/>
-          </a:prstGeom>
-          <a:noFill/>
-          <a:ln/>
-        </p:spPr>
-        <p:txBody>
-          <a:bodyPr wrap="square" rtlCol="0" anchor="ctr"/>
-          <a:lstStyle/>
-          <a:p>
-            <a:pPr indent="0" marL="0">
-              <a:buNone/>
-            </a:pPr>
-            <a:r>
-              <a:rPr lang="en-US" sz="850" dirty="0">
+              <a:t>Naive predicts:  7.97 × 0.90 ≈ 7.2</a:t>
+            </a:r>
+            <a:endParaRPr lang="en-US" sz="870" dirty="0"/>
+          </a:p>
+          <a:p>
+            <a:pPr indent="0" marL="0">
+              <a:lnSpc>
+                <a:spcPts val="1300"/>
+              </a:lnSpc>
+              <a:buNone/>
+            </a:pPr>
+            <a:r>
+              <a:rPr lang="en-US" sz="870" dirty="0">
                 <a:solidFill>
                   <a:srgbClr val="1A1A2E"/>
                 </a:solidFill>
@@ -5772,15 +6186,35 @@
                 <a:ea typeface="Courier New" pitchFamily="34" charset="-122"/>
                 <a:cs typeface="Courier New" pitchFamily="34" charset="-120"/>
               </a:rPr>
-              <a:t>Waiting Rooms -4.9        -0.8</a:t>
-            </a:r>
-            <a:endParaRPr lang="en-US" sz="850" dirty="0"/>
-          </a:p>
-        </p:txBody>
-      </p:sp>
-      <p:sp>
-        <p:nvSpPr>
-          <p:cNvPr id="25" name="Text 22"/>
+              <a:t>RCT measured:   16.79 (real, from Slide 7)</a:t>
+            </a:r>
+            <a:endParaRPr lang="en-US" sz="870" dirty="0"/>
+          </a:p>
+          <a:p>
+            <a:pPr indent="0" marL="0">
+              <a:lnSpc>
+                <a:spcPts val="1300"/>
+              </a:lnSpc>
+              <a:buNone/>
+            </a:pPr>
+            <a:r>
+              <a:rPr lang="en-US" sz="870" dirty="0">
+                <a:solidFill>
+                  <a:srgbClr val="1A1A2E"/>
+                </a:solidFill>
+                <a:latin typeface="Courier New" pitchFamily="34" charset="0"/>
+                <a:ea typeface="Courier New" pitchFamily="34" charset="-122"/>
+                <a:cs typeface="Courier New" pitchFamily="34" charset="-120"/>
+              </a:rPr>
+              <a:t>Calibrated β:   16.79 ÷ 0.90 ≈ 18.7</a:t>
+            </a:r>
+            <a:endParaRPr lang="en-US" sz="870" dirty="0"/>
+          </a:p>
+        </p:txBody>
+      </p:sp>
+      <p:sp>
+        <p:nvSpPr>
+          <p:cNvPr id="21" name="Text 18"/>
           <p:cNvSpPr/>
           <p:nvPr/>
         </p:nvSpPr>
@@ -5814,7 +6248,7 @@
                 <a:ea typeface="Calibri" pitchFamily="34" charset="-122"/>
                 <a:cs typeface="Calibri" pitchFamily="34" charset="-120"/>
               </a:rPr>
-              <a:t>Every calibrated error is far smaller than its naive error (restaurant: −10.0 → +0.7) — only checkable here because this is synthetic data with a known answer key. In a real deployment there's no such key; that's exactly why the RCT anchor is trusted rather than verified.</a:t>
+              <a:t>Only β is rescaled — decay/half/shape stay exactly as fit in step ①. calibration_adjustment_pct is just (β_calibrated − β_naive) ÷ β_naive: (18.69 − 7.97) ÷ 7.97 ≈ +134%, the number shown for restaurants above.</a:t>
             </a:r>
             <a:endParaRPr lang="en-US" sz="900" dirty="0"/>
           </a:p>
@@ -5822,7 +6256,7 @@
       </p:sp>
       <p:sp>
         <p:nvSpPr>
-          <p:cNvPr id="26" name="Text 23"/>
+          <p:cNvPr id="22" name="Text 19"/>
           <p:cNvSpPr/>
           <p:nvPr/>
         </p:nvSpPr>
@@ -6379,23 +6813,23 @@
         <p:spPr>
           <a:xfrm>
             <a:off x="548640" y="411480"/>
-            <a:ext cx="10972800" cy="594360"/>
-          </a:xfrm>
-          <a:prstGeom prst="rect">
-            <a:avLst/>
-          </a:prstGeom>
-          <a:noFill/>
-          <a:ln/>
-        </p:spPr>
-        <p:txBody>
-          <a:bodyPr wrap="square" rtlCol="0" anchor="ctr"/>
-          <a:lstStyle/>
-          <a:p>
-            <a:pPr indent="0" marL="0">
-              <a:buNone/>
-            </a:pPr>
-            <a:r>
-              <a:rPr lang="en-US" sz="2700" b="1" dirty="0">
+            <a:ext cx="11155680" cy="594360"/>
+          </a:xfrm>
+          <a:prstGeom prst="rect">
+            <a:avLst/>
+          </a:prstGeom>
+          <a:noFill/>
+          <a:ln/>
+        </p:spPr>
+        <p:txBody>
+          <a:bodyPr wrap="square" rtlCol="0" anchor="ctr"/>
+          <a:lstStyle/>
+          <a:p>
+            <a:pPr indent="0" marL="0">
+              <a:buNone/>
+            </a:pPr>
+            <a:r>
+              <a:rPr lang="en-US" sz="2600" b="1" dirty="0">
                 <a:solidFill>
                   <a:srgbClr val="1E2761"/>
                 </a:solidFill>
@@ -6403,9 +6837,9 @@
                 <a:ea typeface="Cambria" pitchFamily="34" charset="-122"/>
                 <a:cs typeface="Cambria" pitchFamily="34" charset="-120"/>
               </a:rPr>
-              <a:t>Budget allocator: exact DP, not a greedy walk</a:t>
-            </a:r>
-            <a:endParaRPr lang="en-US" sz="2700" dirty="0"/>
+              <a:t>Why a greedy allocator can lose to equal-split</a:t>
+            </a:r>
+            <a:endParaRPr lang="en-US" sz="2600" dirty="0"/>
           </a:p>
         </p:txBody>
       </p:sp>
@@ -6469,7 +6903,7 @@
                 <a:ea typeface="Calibri" pitchFamily="34" charset="-122"/>
                 <a:cs typeface="Calibri" pitchFamily="34" charset="-120"/>
               </a:rPr>
-              <a:t>Step 4 of 6 · Answers Q2</a:t>
+              <a:t>Step 4 motivation · Answers Q2</a:t>
             </a:r>
             <a:endParaRPr lang="en-US" sz="950" dirty="0"/>
           </a:p>
@@ -6477,36 +6911,14 @@
       </p:sp>
       <p:sp>
         <p:nvSpPr>
-          <p:cNvPr id="5" name="Shape 3"/>
-          <p:cNvSpPr/>
-          <p:nvPr/>
-        </p:nvSpPr>
-        <p:spPr>
-          <a:xfrm>
-            <a:off x="548640" y="1143000"/>
-            <a:ext cx="11064240" cy="914400"/>
-          </a:xfrm>
-          <a:prstGeom prst="roundRect">
-            <a:avLst>
-              <a:gd name="adj" fmla="val 8000"/>
-            </a:avLst>
-          </a:prstGeom>
-          <a:solidFill>
-            <a:srgbClr val="FDF1E3"/>
-          </a:solidFill>
-          <a:ln/>
-        </p:spPr>
-      </p:sp>
-      <p:sp>
-        <p:nvSpPr>
-          <p:cNvPr id="6" name="Text 4"/>
-          <p:cNvSpPr/>
-          <p:nvPr/>
-        </p:nvSpPr>
-        <p:spPr>
-          <a:xfrm>
-            <a:off x="777240" y="1234440"/>
-            <a:ext cx="10607040" cy="777240"/>
+          <p:cNvPr id="5" name="Text 3"/>
+          <p:cNvSpPr/>
+          <p:nvPr/>
+        </p:nvSpPr>
+        <p:spPr>
+          <a:xfrm>
+            <a:off x="548640" y="1005840"/>
+            <a:ext cx="10972800" cy="411480"/>
           </a:xfrm>
           <a:prstGeom prst="rect">
             <a:avLst/>
@@ -6520,20 +6932,20 @@
           <a:p>
             <a:pPr indent="0" marL="0">
               <a:lnSpc>
-                <a:spcPts val="1500"/>
+                <a:spcPts val="1400"/>
               </a:lnSpc>
               <a:buNone/>
             </a:pPr>
             <a:r>
               <a:rPr lang="en-US" sz="1200" i="1" dirty="0">
                 <a:solidFill>
-                  <a:srgbClr val="8A4B0A"/>
-                </a:solidFill>
-                <a:latin typeface="Calibri" pitchFamily="34" charset="0"/>
-                <a:ea typeface="Calibri" pitchFamily="34" charset="-122"/>
-                <a:cs typeface="Calibri" pitchFamily="34" charset="-120"/>
-              </a:rPr>
-              <a:t>A Hill/S-shaped response curve is CONVEX before its inflection point — a greedy “spend the next dollar on whichever venue type currently looks best” heuristic isn't guaranteed optimal there. An earlier greedy version of this allocator actually underperformed a naive equal-split baseline; the DP formulation below has no concavity requirement and is guaranteed to find the grid-optimal allocation.</a:t>
+                  <a:srgbClr val="5B6178"/>
+                </a:solidFill>
+                <a:latin typeface="Calibri" pitchFamily="34" charset="0"/>
+                <a:ea typeface="Calibri" pitchFamily="34" charset="-122"/>
+                <a:cs typeface="Calibri" pitchFamily="34" charset="-120"/>
+              </a:rPr>
+              <a:t>A Hill/S-curve (shape &gt; 1, as fit here) is convex before its inflection point — the next dollar's marginal return isn't monotonically falling, so "chase today's best marginal $" can get stuck.</a:t>
             </a:r>
             <a:endParaRPr lang="en-US" sz="1200" dirty="0"/>
           </a:p>
@@ -6541,13 +6953,13 @@
       </p:sp>
       <p:graphicFrame>
         <p:nvGraphicFramePr>
-          <p:cNvPr id="7" name="Chart 0" descr=""/>
+          <p:cNvPr id="6" name="Chart 0" descr=""/>
           <p:cNvGraphicFramePr/>
           <p:nvPr/>
         </p:nvGraphicFramePr>
         <p:xfrm>
-          <a:off x="548640" y="2286000"/>
-          <a:ext cx="6675120" cy="3566160"/>
+          <a:off x="548640" y="1600200"/>
+          <a:ext cx="6583680" cy="3063240"/>
         </p:xfrm>
         <a:graphic xmlns:a="http://schemas.openxmlformats.org/drawingml/2006/main">
           <a:graphicData uri="http://schemas.openxmlformats.org/drawingml/2006/chart">
@@ -6557,30 +6969,75 @@
       </p:graphicFrame>
       <p:sp>
         <p:nvSpPr>
+          <p:cNvPr id="7" name="Text 4"/>
+          <p:cNvSpPr/>
+          <p:nvPr/>
+        </p:nvSpPr>
+        <p:spPr>
+          <a:xfrm>
+            <a:off x="548640" y="4754880"/>
+            <a:ext cx="6583680" cy="1417320"/>
+          </a:xfrm>
+          <a:prstGeom prst="rect">
+            <a:avLst/>
+          </a:prstGeom>
+          <a:noFill/>
+          <a:ln/>
+        </p:spPr>
+        <p:txBody>
+          <a:bodyPr wrap="square" rtlCol="0" anchor="ctr"/>
+          <a:lstStyle/>
+          <a:p>
+            <a:pPr indent="0" marL="0">
+              <a:lnSpc>
+                <a:spcPts val="1300"/>
+              </a:lnSpc>
+              <a:buNone/>
+            </a:pPr>
+            <a:r>
+              <a:rPr lang="en-US" sz="1000" dirty="0">
+                <a:solidFill>
+                  <a:srgbClr val="1A1A2E"/>
+                </a:solidFill>
+                <a:latin typeface="Calibri" pitchFamily="34" charset="0"/>
+                <a:ea typeface="Calibri" pitchFamily="34" charset="-122"/>
+                <a:cs typeface="Calibri" pitchFamily="34" charset="-120"/>
+              </a:rPr>
+              <a:t>This real curve (restaurant, from this deck's own calibrated MMM) is convex up to ~freq 1.0–1.5, concave after. At very low frequency every venue type's next dollar buys almost nothing — still in the flat, convex trough — so a rule comparing "which type's next dollar looks best right now" can't see that committing a lump sum to ONE type would pay off later. It only sees today's small, similar-looking numbers.</a:t>
+            </a:r>
+            <a:endParaRPr lang="en-US" sz="1000" dirty="0"/>
+          </a:p>
+        </p:txBody>
+      </p:sp>
+      <p:sp>
+        <p:nvSpPr>
           <p:cNvPr id="8" name="Text 5"/>
           <p:cNvSpPr/>
           <p:nvPr/>
         </p:nvSpPr>
         <p:spPr>
           <a:xfrm>
-            <a:off x="7498080" y="2331720"/>
-            <a:ext cx="4114800" cy="365760"/>
-          </a:xfrm>
-          <a:prstGeom prst="rect">
-            <a:avLst/>
-          </a:prstGeom>
-          <a:noFill/>
-          <a:ln/>
-        </p:spPr>
-        <p:txBody>
-          <a:bodyPr wrap="square" rtlCol="0" anchor="ctr"/>
-          <a:lstStyle/>
-          <a:p>
-            <a:pPr indent="0" marL="0">
-              <a:buNone/>
-            </a:pPr>
-            <a:r>
-              <a:rPr lang="en-US" sz="1300" b="1" dirty="0">
+            <a:off x="7406640" y="1600200"/>
+            <a:ext cx="4206240" cy="365760"/>
+          </a:xfrm>
+          <a:prstGeom prst="rect">
+            <a:avLst/>
+          </a:prstGeom>
+          <a:noFill/>
+          <a:ln/>
+        </p:spPr>
+        <p:txBody>
+          <a:bodyPr wrap="square" rtlCol="0" anchor="ctr"/>
+          <a:lstStyle/>
+          <a:p>
+            <a:pPr indent="0" marL="0">
+              <a:lnSpc>
+                <a:spcPts val="1400"/>
+              </a:lnSpc>
+              <a:buNone/>
+            </a:pPr>
+            <a:r>
+              <a:rPr lang="en-US" sz="1200" b="1" dirty="0">
                 <a:solidFill>
                   <a:srgbClr val="1E2761"/>
                 </a:solidFill>
@@ -6588,9 +7045,9 @@
                 <a:ea typeface="Cambria" pitchFamily="34" charset="-122"/>
                 <a:cs typeface="Cambria" pitchFamily="34" charset="-120"/>
               </a:rPr>
-              <a:t>$100,000 weekly budget example</a:t>
-            </a:r>
-            <a:endParaRPr lang="en-US" sz="1300" dirty="0"/>
+              <a:t>At freq ≈ .25, every type looks similarly unpromising</a:t>
+            </a:r>
+            <a:endParaRPr lang="en-US" sz="1200" dirty="0"/>
           </a:p>
         </p:txBody>
       </p:sp>
@@ -6602,34 +7059,117 @@
         </p:nvSpPr>
         <p:spPr>
           <a:xfrm>
-            <a:off x="7498080" y="2788920"/>
-            <a:ext cx="1828800" cy="457200"/>
-          </a:xfrm>
-          <a:prstGeom prst="rect">
-            <a:avLst/>
-          </a:prstGeom>
-          <a:noFill/>
-          <a:ln/>
-        </p:spPr>
-        <p:txBody>
-          <a:bodyPr wrap="square" rtlCol="0" anchor="ctr"/>
-          <a:lstStyle/>
-          <a:p>
-            <a:pPr indent="0" marL="0">
-              <a:buNone/>
-            </a:pPr>
-            <a:r>
-              <a:rPr lang="en-US" sz="1200" dirty="0">
+            <a:off x="7406640" y="2057400"/>
+            <a:ext cx="4206240" cy="960120"/>
+          </a:xfrm>
+          <a:prstGeom prst="rect">
+            <a:avLst/>
+          </a:prstGeom>
+          <a:noFill/>
+          <a:ln/>
+        </p:spPr>
+        <p:txBody>
+          <a:bodyPr wrap="square" rtlCol="0" anchor="ctr"/>
+          <a:lstStyle/>
+          <a:p>
+            <a:pPr indent="0" marL="0">
+              <a:lnSpc>
+                <a:spcPts val="1500"/>
+              </a:lnSpc>
+              <a:buNone/>
+            </a:pPr>
+            <a:r>
+              <a:rPr lang="en-US" sz="950" dirty="0">
                 <a:solidFill>
                   <a:srgbClr val="1A1A2E"/>
                 </a:solidFill>
-                <a:latin typeface="Calibri" pitchFamily="34" charset="0"/>
-                <a:ea typeface="Calibri" pitchFamily="34" charset="-122"/>
-                <a:cs typeface="Calibri" pitchFamily="34" charset="-120"/>
-              </a:rPr>
-              <a:t>$20,000 budget</a:t>
-            </a:r>
-            <a:endParaRPr lang="en-US" sz="1200" dirty="0"/>
+                <a:latin typeface="Courier New" pitchFamily="34" charset="0"/>
+                <a:ea typeface="Courier New" pitchFamily="34" charset="-122"/>
+                <a:cs typeface="Courier New" pitchFamily="34" charset="-120"/>
+              </a:rPr>
+              <a:t>Venue type      Lift per $1,000</a:t>
+            </a:r>
+            <a:endParaRPr lang="en-US" sz="950" dirty="0"/>
+          </a:p>
+          <a:p>
+            <a:pPr indent="0" marL="0">
+              <a:lnSpc>
+                <a:spcPts val="1500"/>
+              </a:lnSpc>
+              <a:buNone/>
+            </a:pPr>
+            <a:r>
+              <a:rPr lang="en-US" sz="950" dirty="0">
+                <a:solidFill>
+                  <a:srgbClr val="1A1A2E"/>
+                </a:solidFill>
+                <a:latin typeface="Courier New" pitchFamily="34" charset="0"/>
+                <a:ea typeface="Courier New" pitchFamily="34" charset="-122"/>
+                <a:cs typeface="Courier New" pitchFamily="34" charset="-120"/>
+              </a:rPr>
+              <a:t>Bar                    1.4</a:t>
+            </a:r>
+            <a:endParaRPr lang="en-US" sz="950" dirty="0"/>
+          </a:p>
+          <a:p>
+            <a:pPr indent="0" marL="0">
+              <a:lnSpc>
+                <a:spcPts val="1500"/>
+              </a:lnSpc>
+              <a:buNone/>
+            </a:pPr>
+            <a:r>
+              <a:rPr lang="en-US" sz="950" dirty="0">
+                <a:solidFill>
+                  <a:srgbClr val="1A1A2E"/>
+                </a:solidFill>
+                <a:latin typeface="Courier New" pitchFamily="34" charset="0"/>
+                <a:ea typeface="Courier New" pitchFamily="34" charset="-122"/>
+                <a:cs typeface="Courier New" pitchFamily="34" charset="-120"/>
+              </a:rPr>
+              <a:t>Restaurant             5.0</a:t>
+            </a:r>
+            <a:endParaRPr lang="en-US" sz="950" dirty="0"/>
+          </a:p>
+          <a:p>
+            <a:pPr indent="0" marL="0">
+              <a:lnSpc>
+                <a:spcPts val="1500"/>
+              </a:lnSpc>
+              <a:buNone/>
+            </a:pPr>
+            <a:r>
+              <a:rPr lang="en-US" sz="950" dirty="0">
+                <a:solidFill>
+                  <a:srgbClr val="1A1A2E"/>
+                </a:solidFill>
+                <a:latin typeface="Courier New" pitchFamily="34" charset="0"/>
+                <a:ea typeface="Courier New" pitchFamily="34" charset="-122"/>
+                <a:cs typeface="Courier New" pitchFamily="34" charset="-120"/>
+              </a:rPr>
+              <a:t>Gym                    6.1</a:t>
+            </a:r>
+            <a:endParaRPr lang="en-US" sz="950" dirty="0"/>
+          </a:p>
+          <a:p>
+            <a:pPr indent="0" marL="0">
+              <a:lnSpc>
+                <a:spcPts val="1500"/>
+              </a:lnSpc>
+              <a:buNone/>
+            </a:pPr>
+            <a:r>
+              <a:rPr lang="en-US" sz="950" dirty="0">
+                <a:solidFill>
+                  <a:srgbClr val="1A1A2E"/>
+                </a:solidFill>
+                <a:latin typeface="Courier New" pitchFamily="34" charset="0"/>
+                <a:ea typeface="Courier New" pitchFamily="34" charset="-122"/>
+                <a:cs typeface="Courier New" pitchFamily="34" charset="-120"/>
+              </a:rPr>
+              <a:t>Waiting room           8.4</a:t>
+            </a:r>
+            <a:endParaRPr lang="en-US" sz="950" dirty="0"/>
           </a:p>
         </p:txBody>
       </p:sp>
@@ -6641,34 +7181,37 @@
         </p:nvSpPr>
         <p:spPr>
           <a:xfrm>
-            <a:off x="9326880" y="2743200"/>
-            <a:ext cx="2286000" cy="548640"/>
-          </a:xfrm>
-          <a:prstGeom prst="rect">
-            <a:avLst/>
-          </a:prstGeom>
-          <a:noFill/>
-          <a:ln/>
-        </p:spPr>
-        <p:txBody>
-          <a:bodyPr wrap="square" rtlCol="0" anchor="ctr"/>
-          <a:lstStyle/>
-          <a:p>
-            <a:pPr indent="0" marL="0">
-              <a:buNone/>
-            </a:pPr>
-            <a:r>
-              <a:rPr lang="en-US" sz="2000" b="1" dirty="0">
-                <a:solidFill>
-                  <a:srgbClr val="E8871E"/>
-                </a:solidFill>
-                <a:latin typeface="Calibri" pitchFamily="34" charset="0"/>
-                <a:ea typeface="Calibri" pitchFamily="34" charset="-122"/>
-                <a:cs typeface="Calibri" pitchFamily="34" charset="-120"/>
-              </a:rPr>
-              <a:t>+48.6%</a:t>
-            </a:r>
-            <a:endParaRPr lang="en-US" sz="2000" dirty="0"/>
+            <a:off x="7406640" y="3108960"/>
+            <a:ext cx="4206240" cy="457200"/>
+          </a:xfrm>
+          <a:prstGeom prst="rect">
+            <a:avLst/>
+          </a:prstGeom>
+          <a:noFill/>
+          <a:ln/>
+        </p:spPr>
+        <p:txBody>
+          <a:bodyPr wrap="square" rtlCol="0" anchor="ctr"/>
+          <a:lstStyle/>
+          <a:p>
+            <a:pPr indent="0" marL="0">
+              <a:lnSpc>
+                <a:spcPts val="1300"/>
+              </a:lnSpc>
+              <a:buNone/>
+            </a:pPr>
+            <a:r>
+              <a:rPr lang="en-US" sz="1000" i="1" dirty="0">
+                <a:solidFill>
+                  <a:srgbClr val="1A1A2E"/>
+                </a:solidFill>
+                <a:latin typeface="Calibri" pitchFamily="34" charset="0"/>
+                <a:ea typeface="Calibri" pitchFamily="34" charset="-122"/>
+                <a:cs typeface="Calibri" pitchFamily="34" charset="-120"/>
+              </a:rPr>
+              <a:t>...but each type's own PEAK (always somewhere around freq 1–2) is 15–30× higher:</a:t>
+            </a:r>
+            <a:endParaRPr lang="en-US" sz="1000" dirty="0"/>
           </a:p>
         </p:txBody>
       </p:sp>
@@ -6680,20 +7223,85 @@
         </p:nvSpPr>
         <p:spPr>
           <a:xfrm>
-            <a:off x="7498080" y="3172968"/>
-            <a:ext cx="4114800" cy="274320"/>
-          </a:xfrm>
-          <a:prstGeom prst="rect">
-            <a:avLst/>
-          </a:prstGeom>
-          <a:noFill/>
-          <a:ln/>
-        </p:spPr>
-        <p:txBody>
-          <a:bodyPr wrap="square" rtlCol="0" anchor="ctr"/>
-          <a:lstStyle/>
-          <a:p>
-            <a:pPr indent="0" marL="0">
+            <a:off x="7406640" y="3611880"/>
+            <a:ext cx="4206240" cy="548640"/>
+          </a:xfrm>
+          <a:prstGeom prst="rect">
+            <a:avLst/>
+          </a:prstGeom>
+          <a:noFill/>
+          <a:ln/>
+        </p:spPr>
+        <p:txBody>
+          <a:bodyPr wrap="square" rtlCol="0" anchor="ctr"/>
+          <a:lstStyle/>
+          <a:p>
+            <a:pPr indent="0" marL="0">
+              <a:lnSpc>
+                <a:spcPts val="1500"/>
+              </a:lnSpc>
+              <a:buNone/>
+            </a:pPr>
+            <a:r>
+              <a:rPr lang="en-US" sz="950" dirty="0">
+                <a:solidFill>
+                  <a:srgbClr val="1A1A2E"/>
+                </a:solidFill>
+                <a:latin typeface="Courier New" pitchFamily="34" charset="0"/>
+                <a:ea typeface="Courier New" pitchFamily="34" charset="-122"/>
+                <a:cs typeface="Courier New" pitchFamily="34" charset="-120"/>
+              </a:rPr>
+              <a:t>Bar ~124      Restaurant ~206</a:t>
+            </a:r>
+            <a:endParaRPr lang="en-US" sz="950" dirty="0"/>
+          </a:p>
+          <a:p>
+            <a:pPr indent="0" marL="0">
+              <a:lnSpc>
+                <a:spcPts val="1500"/>
+              </a:lnSpc>
+              <a:buNone/>
+            </a:pPr>
+            <a:r>
+              <a:rPr lang="en-US" sz="950" dirty="0">
+                <a:solidFill>
+                  <a:srgbClr val="1A1A2E"/>
+                </a:solidFill>
+                <a:latin typeface="Courier New" pitchFamily="34" charset="0"/>
+                <a:ea typeface="Courier New" pitchFamily="34" charset="-122"/>
+                <a:cs typeface="Courier New" pitchFamily="34" charset="-120"/>
+              </a:rPr>
+              <a:t>Gym ~132      Waiting room ~247</a:t>
+            </a:r>
+            <a:endParaRPr lang="en-US" sz="950" dirty="0"/>
+          </a:p>
+        </p:txBody>
+      </p:sp>
+      <p:sp>
+        <p:nvSpPr>
+          <p:cNvPr id="12" name="Text 9"/>
+          <p:cNvSpPr/>
+          <p:nvPr/>
+        </p:nvSpPr>
+        <p:spPr>
+          <a:xfrm>
+            <a:off x="7406640" y="4251960"/>
+            <a:ext cx="4206240" cy="1920240"/>
+          </a:xfrm>
+          <a:prstGeom prst="rect">
+            <a:avLst/>
+          </a:prstGeom>
+          <a:noFill/>
+          <a:ln/>
+        </p:spPr>
+        <p:txBody>
+          <a:bodyPr wrap="square" rtlCol="0" anchor="ctr"/>
+          <a:lstStyle/>
+          <a:p>
+            <a:pPr indent="0" marL="0">
+              <a:lnSpc>
+                <a:spcPts val="1250"/>
+              </a:lnSpc>
               <a:buNone/>
             </a:pPr>
             <a:r>
@@ -6705,7 +7313,7 @@
                 <a:ea typeface="Calibri" pitchFamily="34" charset="-122"/>
                 <a:cs typeface="Calibri" pitchFamily="34" charset="-120"/>
               </a:rPr>
-              <a:t>vs. naive equal-split</a:t>
+              <a:t>A greedy rule that only ever compares "today's next dollar" has no way to see that peak from here — it can only react to which of these near-tied numbers is currently largest, one tiny step at a time. This is the mechanism that let an earlier greedy version of this allocator underperform naive equal-split at larger budgets — the retired code itself isn't preserved, but this is the exact response-curve shape it was walking.</a:t>
             </a:r>
             <a:endParaRPr lang="en-US" sz="950" dirty="0"/>
           </a:p>
@@ -6713,283 +7321,7 @@
       </p:sp>
       <p:sp>
         <p:nvSpPr>
-          <p:cNvPr id="12" name="Text 9"/>
-          <p:cNvSpPr/>
-          <p:nvPr/>
-        </p:nvSpPr>
-        <p:spPr>
-          <a:xfrm>
-            <a:off x="7498080" y="3840480"/>
-            <a:ext cx="1828800" cy="457200"/>
-          </a:xfrm>
-          <a:prstGeom prst="rect">
-            <a:avLst/>
-          </a:prstGeom>
-          <a:noFill/>
-          <a:ln/>
-        </p:spPr>
-        <p:txBody>
-          <a:bodyPr wrap="square" rtlCol="0" anchor="ctr"/>
-          <a:lstStyle/>
-          <a:p>
-            <a:pPr indent="0" marL="0">
-              <a:buNone/>
-            </a:pPr>
-            <a:r>
-              <a:rPr lang="en-US" sz="1200" dirty="0">
-                <a:solidFill>
-                  <a:srgbClr val="1A1A2E"/>
-                </a:solidFill>
-                <a:latin typeface="Calibri" pitchFamily="34" charset="0"/>
-                <a:ea typeface="Calibri" pitchFamily="34" charset="-122"/>
-                <a:cs typeface="Calibri" pitchFamily="34" charset="-120"/>
-              </a:rPr>
-              <a:t>$50,000 budget</a:t>
-            </a:r>
-            <a:endParaRPr lang="en-US" sz="1200" dirty="0"/>
-          </a:p>
-        </p:txBody>
-      </p:sp>
-      <p:sp>
-        <p:nvSpPr>
           <p:cNvPr id="13" name="Text 10"/>
-          <p:cNvSpPr/>
-          <p:nvPr/>
-        </p:nvSpPr>
-        <p:spPr>
-          <a:xfrm>
-            <a:off x="9326880" y="3794760"/>
-            <a:ext cx="2286000" cy="548640"/>
-          </a:xfrm>
-          <a:prstGeom prst="rect">
-            <a:avLst/>
-          </a:prstGeom>
-          <a:noFill/>
-          <a:ln/>
-        </p:spPr>
-        <p:txBody>
-          <a:bodyPr wrap="square" rtlCol="0" anchor="ctr"/>
-          <a:lstStyle/>
-          <a:p>
-            <a:pPr indent="0" marL="0">
-              <a:buNone/>
-            </a:pPr>
-            <a:r>
-              <a:rPr lang="en-US" sz="2000" b="1" dirty="0">
-                <a:solidFill>
-                  <a:srgbClr val="E8871E"/>
-                </a:solidFill>
-                <a:latin typeface="Calibri" pitchFamily="34" charset="0"/>
-                <a:ea typeface="Calibri" pitchFamily="34" charset="-122"/>
-                <a:cs typeface="Calibri" pitchFamily="34" charset="-120"/>
-              </a:rPr>
-              <a:t>+11.1%</a:t>
-            </a:r>
-            <a:endParaRPr lang="en-US" sz="2000" dirty="0"/>
-          </a:p>
-        </p:txBody>
-      </p:sp>
-      <p:sp>
-        <p:nvSpPr>
-          <p:cNvPr id="14" name="Text 11"/>
-          <p:cNvSpPr/>
-          <p:nvPr/>
-        </p:nvSpPr>
-        <p:spPr>
-          <a:xfrm>
-            <a:off x="7498080" y="4224528"/>
-            <a:ext cx="4114800" cy="274320"/>
-          </a:xfrm>
-          <a:prstGeom prst="rect">
-            <a:avLst/>
-          </a:prstGeom>
-          <a:noFill/>
-          <a:ln/>
-        </p:spPr>
-        <p:txBody>
-          <a:bodyPr wrap="square" rtlCol="0" anchor="ctr"/>
-          <a:lstStyle/>
-          <a:p>
-            <a:pPr indent="0" marL="0">
-              <a:buNone/>
-            </a:pPr>
-            <a:r>
-              <a:rPr lang="en-US" sz="950" i="1" dirty="0">
-                <a:solidFill>
-                  <a:srgbClr val="5B6178"/>
-                </a:solidFill>
-                <a:latin typeface="Calibri" pitchFamily="34" charset="0"/>
-                <a:ea typeface="Calibri" pitchFamily="34" charset="-122"/>
-                <a:cs typeface="Calibri" pitchFamily="34" charset="-120"/>
-              </a:rPr>
-              <a:t>vs. naive equal-split</a:t>
-            </a:r>
-            <a:endParaRPr lang="en-US" sz="950" dirty="0"/>
-          </a:p>
-        </p:txBody>
-      </p:sp>
-      <p:sp>
-        <p:nvSpPr>
-          <p:cNvPr id="15" name="Text 12"/>
-          <p:cNvSpPr/>
-          <p:nvPr/>
-        </p:nvSpPr>
-        <p:spPr>
-          <a:xfrm>
-            <a:off x="7498080" y="4892040"/>
-            <a:ext cx="1828800" cy="457200"/>
-          </a:xfrm>
-          <a:prstGeom prst="rect">
-            <a:avLst/>
-          </a:prstGeom>
-          <a:noFill/>
-          <a:ln/>
-        </p:spPr>
-        <p:txBody>
-          <a:bodyPr wrap="square" rtlCol="0" anchor="ctr"/>
-          <a:lstStyle/>
-          <a:p>
-            <a:pPr indent="0" marL="0">
-              <a:buNone/>
-            </a:pPr>
-            <a:r>
-              <a:rPr lang="en-US" sz="1200" dirty="0">
-                <a:solidFill>
-                  <a:srgbClr val="1A1A2E"/>
-                </a:solidFill>
-                <a:latin typeface="Calibri" pitchFamily="34" charset="0"/>
-                <a:ea typeface="Calibri" pitchFamily="34" charset="-122"/>
-                <a:cs typeface="Calibri" pitchFamily="34" charset="-120"/>
-              </a:rPr>
-              <a:t>$100,000 budget</a:t>
-            </a:r>
-            <a:endParaRPr lang="en-US" sz="1200" dirty="0"/>
-          </a:p>
-        </p:txBody>
-      </p:sp>
-      <p:sp>
-        <p:nvSpPr>
-          <p:cNvPr id="16" name="Text 13"/>
-          <p:cNvSpPr/>
-          <p:nvPr/>
-        </p:nvSpPr>
-        <p:spPr>
-          <a:xfrm>
-            <a:off x="9326880" y="4846320"/>
-            <a:ext cx="2286000" cy="548640"/>
-          </a:xfrm>
-          <a:prstGeom prst="rect">
-            <a:avLst/>
-          </a:prstGeom>
-          <a:noFill/>
-          <a:ln/>
-        </p:spPr>
-        <p:txBody>
-          <a:bodyPr wrap="square" rtlCol="0" anchor="ctr"/>
-          <a:lstStyle/>
-          <a:p>
-            <a:pPr indent="0" marL="0">
-              <a:buNone/>
-            </a:pPr>
-            <a:r>
-              <a:rPr lang="en-US" sz="2000" b="1" dirty="0">
-                <a:solidFill>
-                  <a:srgbClr val="E8871E"/>
-                </a:solidFill>
-                <a:latin typeface="Calibri" pitchFamily="34" charset="0"/>
-                <a:ea typeface="Calibri" pitchFamily="34" charset="-122"/>
-                <a:cs typeface="Calibri" pitchFamily="34" charset="-120"/>
-              </a:rPr>
-              <a:t>+2.4%</a:t>
-            </a:r>
-            <a:endParaRPr lang="en-US" sz="2000" dirty="0"/>
-          </a:p>
-        </p:txBody>
-      </p:sp>
-      <p:sp>
-        <p:nvSpPr>
-          <p:cNvPr id="17" name="Text 14"/>
-          <p:cNvSpPr/>
-          <p:nvPr/>
-        </p:nvSpPr>
-        <p:spPr>
-          <a:xfrm>
-            <a:off x="7498080" y="5276088"/>
-            <a:ext cx="4114800" cy="274320"/>
-          </a:xfrm>
-          <a:prstGeom prst="rect">
-            <a:avLst/>
-          </a:prstGeom>
-          <a:noFill/>
-          <a:ln/>
-        </p:spPr>
-        <p:txBody>
-          <a:bodyPr wrap="square" rtlCol="0" anchor="ctr"/>
-          <a:lstStyle/>
-          <a:p>
-            <a:pPr indent="0" marL="0">
-              <a:buNone/>
-            </a:pPr>
-            <a:r>
-              <a:rPr lang="en-US" sz="950" i="1" dirty="0">
-                <a:solidFill>
-                  <a:srgbClr val="5B6178"/>
-                </a:solidFill>
-                <a:latin typeface="Calibri" pitchFamily="34" charset="0"/>
-                <a:ea typeface="Calibri" pitchFamily="34" charset="-122"/>
-                <a:cs typeface="Calibri" pitchFamily="34" charset="-120"/>
-              </a:rPr>
-              <a:t>vs. naive equal-split</a:t>
-            </a:r>
-            <a:endParaRPr lang="en-US" sz="950" dirty="0"/>
-          </a:p>
-        </p:txBody>
-      </p:sp>
-      <p:sp>
-        <p:nvSpPr>
-          <p:cNvPr id="18" name="Text 15"/>
-          <p:cNvSpPr/>
-          <p:nvPr/>
-        </p:nvSpPr>
-        <p:spPr>
-          <a:xfrm>
-            <a:off x="7498080" y="5989320"/>
-            <a:ext cx="4206240" cy="548640"/>
-          </a:xfrm>
-          <a:prstGeom prst="rect">
-            <a:avLst/>
-          </a:prstGeom>
-          <a:noFill/>
-          <a:ln/>
-        </p:spPr>
-        <p:txBody>
-          <a:bodyPr wrap="square" rtlCol="0" anchor="ctr"/>
-          <a:lstStyle/>
-          <a:p>
-            <a:pPr indent="0" marL="0">
-              <a:lnSpc>
-                <a:spcPts val="1400"/>
-              </a:lnSpc>
-              <a:buNone/>
-            </a:pPr>
-            <a:r>
-              <a:rPr lang="en-US" sz="1050" i="1" dirty="0">
-                <a:solidFill>
-                  <a:srgbClr val="5B6178"/>
-                </a:solidFill>
-                <a:latin typeface="Calibri" pitchFamily="34" charset="0"/>
-                <a:ea typeface="Calibri" pitchFamily="34" charset="-122"/>
-                <a:cs typeface="Calibri" pitchFamily="34" charset="-120"/>
-              </a:rPr>
-              <a:t>The optimizer's edge is largest when budget is scarce — exactly when allocation decisions matter most.</a:t>
-            </a:r>
-            <a:endParaRPr lang="en-US" sz="1050" dirty="0"/>
-          </a:p>
-        </p:txBody>
-      </p:sp>
-      <p:sp>
-        <p:nvSpPr>
-          <p:cNvPr id="19" name="Text 16"/>
           <p:cNvSpPr/>
           <p:nvPr/>
         </p:nvSpPr>
@@ -7020,7 +7352,7 @@
                 <a:ea typeface="Calibri" pitchFamily="34" charset="-122"/>
                 <a:cs typeface="Calibri" pitchFamily="34" charset="-120"/>
               </a:rPr>
-              <a:t>Productization — budget allocator</a:t>
+              <a:t>Productization — budget allocator, why not greedy</a:t>
             </a:r>
             <a:endParaRPr lang="en-US" sz="900" dirty="0"/>
           </a:p>
@@ -7037,6 +7369,852 @@
 <file path=ppt/slides/slide13.xml><?xml version="1.0" encoding="utf-8"?>
 <p:sld xmlns:a="http://schemas.openxmlformats.org/drawingml/2006/main" xmlns:r="http://schemas.openxmlformats.org/officeDocument/2006/relationships" xmlns:p="http://schemas.openxmlformats.org/presentationml/2006/main">
   <p:cSld name="Slide 13">
+    <p:bg>
+      <p:bgPr>
+        <a:solidFill>
+          <a:srgbClr val="FFFFFF"/>
+        </a:solidFill>
+      </p:bgPr>
+    </p:bg>
+    <p:spTree>
+      <p:nvGrpSpPr>
+        <p:cNvPr id="1" name=""/>
+        <p:cNvGrpSpPr/>
+        <p:nvPr/>
+      </p:nvGrpSpPr>
+      <p:grpSpPr>
+        <a:xfrm>
+          <a:off x="0" y="0"/>
+          <a:ext cx="0" cy="0"/>
+          <a:chOff x="0" y="0"/>
+          <a:chExt cx="0" cy="0"/>
+        </a:xfrm>
+      </p:grpSpPr>
+      <p:sp>
+        <p:nvSpPr>
+          <p:cNvPr id="2" name="Text 0"/>
+          <p:cNvSpPr/>
+          <p:nvPr/>
+        </p:nvSpPr>
+        <p:spPr>
+          <a:xfrm>
+            <a:off x="548640" y="411480"/>
+            <a:ext cx="11155680" cy="594360"/>
+          </a:xfrm>
+          <a:prstGeom prst="rect">
+            <a:avLst/>
+          </a:prstGeom>
+          <a:noFill/>
+          <a:ln/>
+        </p:spPr>
+        <p:txBody>
+          <a:bodyPr wrap="square" rtlCol="0" anchor="ctr"/>
+          <a:lstStyle/>
+          <a:p>
+            <a:pPr indent="0" marL="0">
+              <a:buNone/>
+            </a:pPr>
+            <a:r>
+              <a:rPr lang="en-US" sz="2500" b="1" dirty="0">
+                <a:solidFill>
+                  <a:srgbClr val="1E2761"/>
+                </a:solidFill>
+                <a:latin typeface="Cambria" pitchFamily="34" charset="0"/>
+                <a:ea typeface="Cambria" pitchFamily="34" charset="-122"/>
+                <a:cs typeface="Cambria" pitchFamily="34" charset="-120"/>
+              </a:rPr>
+              <a:t>Budget allocator: how the exact DP actually works</a:t>
+            </a:r>
+            <a:endParaRPr lang="en-US" sz="2500" dirty="0"/>
+          </a:p>
+        </p:txBody>
+      </p:sp>
+      <p:sp>
+        <p:nvSpPr>
+          <p:cNvPr id="3" name="Shape 1"/>
+          <p:cNvSpPr/>
+          <p:nvPr/>
+        </p:nvSpPr>
+        <p:spPr>
+          <a:xfrm>
+            <a:off x="8229600" y="146304"/>
+            <a:ext cx="3410712" cy="246888"/>
+          </a:xfrm>
+          <a:prstGeom prst="roundRect">
+            <a:avLst>
+              <a:gd name="adj" fmla="val 22222"/>
+            </a:avLst>
+          </a:prstGeom>
+          <a:solidFill>
+            <a:srgbClr val="FFFFFF"/>
+          </a:solidFill>
+          <a:ln w="15875">
+            <a:solidFill>
+              <a:srgbClr val="B8500A"/>
+            </a:solidFill>
+            <a:prstDash val="solid"/>
+          </a:ln>
+        </p:spPr>
+      </p:sp>
+      <p:sp>
+        <p:nvSpPr>
+          <p:cNvPr id="4" name="Text 2"/>
+          <p:cNvSpPr/>
+          <p:nvPr/>
+        </p:nvSpPr>
+        <p:spPr>
+          <a:xfrm>
+            <a:off x="8229600" y="146304"/>
+            <a:ext cx="3410712" cy="246888"/>
+          </a:xfrm>
+          <a:prstGeom prst="rect">
+            <a:avLst/>
+          </a:prstGeom>
+          <a:noFill/>
+          <a:ln/>
+        </p:spPr>
+        <p:txBody>
+          <a:bodyPr wrap="square" rtlCol="0" anchor="ctr"/>
+          <a:lstStyle/>
+          <a:p>
+            <a:pPr algn="ctr" indent="0" marL="0">
+              <a:buNone/>
+            </a:pPr>
+            <a:r>
+              <a:rPr lang="en-US" sz="950" b="1" dirty="0">
+                <a:solidFill>
+                  <a:srgbClr val="B8500A"/>
+                </a:solidFill>
+                <a:latin typeface="Calibri" pitchFamily="34" charset="0"/>
+                <a:ea typeface="Calibri" pitchFamily="34" charset="-122"/>
+                <a:cs typeface="Calibri" pitchFamily="34" charset="-120"/>
+              </a:rPr>
+              <a:t>Step 4 of 6 · Answers Q2</a:t>
+            </a:r>
+            <a:endParaRPr lang="en-US" sz="950" dirty="0"/>
+          </a:p>
+        </p:txBody>
+      </p:sp>
+      <p:sp>
+        <p:nvSpPr>
+          <p:cNvPr id="5" name="Text 3"/>
+          <p:cNvSpPr/>
+          <p:nvPr/>
+        </p:nvSpPr>
+        <p:spPr>
+          <a:xfrm>
+            <a:off x="548640" y="1005840"/>
+            <a:ext cx="10972800" cy="365760"/>
+          </a:xfrm>
+          <a:prstGeom prst="rect">
+            <a:avLst/>
+          </a:prstGeom>
+          <a:noFill/>
+          <a:ln/>
+        </p:spPr>
+        <p:txBody>
+          <a:bodyPr wrap="square" rtlCol="0" anchor="ctr"/>
+          <a:lstStyle/>
+          <a:p>
+            <a:pPr indent="0" marL="0">
+              <a:buNone/>
+            </a:pPr>
+            <a:r>
+              <a:rPr lang="en-US" sz="1250" i="1" dirty="0">
+                <a:solidFill>
+                  <a:srgbClr val="5B6178"/>
+                </a:solidFill>
+                <a:latin typeface="Calibri" pitchFamily="34" charset="0"/>
+                <a:ea typeface="Calibri" pitchFamily="34" charset="-122"/>
+                <a:cs typeface="Calibri" pitchFamily="34" charset="-120"/>
+              </a:rPr>
+              <a:t>No concavity requirement — every discretized spend level is actually evaluated, so by construction it can never do worse than equal-split.</a:t>
+            </a:r>
+            <a:endParaRPr lang="en-US" sz="1250" dirty="0"/>
+          </a:p>
+        </p:txBody>
+      </p:sp>
+      <p:sp>
+        <p:nvSpPr>
+          <p:cNvPr id="6" name="Text 4"/>
+          <p:cNvSpPr/>
+          <p:nvPr/>
+        </p:nvSpPr>
+        <p:spPr>
+          <a:xfrm>
+            <a:off x="548640" y="1417320"/>
+            <a:ext cx="6675120" cy="256032"/>
+          </a:xfrm>
+          <a:prstGeom prst="rect">
+            <a:avLst/>
+          </a:prstGeom>
+          <a:noFill/>
+          <a:ln/>
+        </p:spPr>
+        <p:txBody>
+          <a:bodyPr wrap="square" rtlCol="0" anchor="ctr"/>
+          <a:lstStyle/>
+          <a:p>
+            <a:pPr indent="0" marL="0">
+              <a:buNone/>
+            </a:pPr>
+            <a:r>
+              <a:rPr lang="en-US" sz="1250" b="1" dirty="0">
+                <a:solidFill>
+                  <a:srgbClr val="1E2761"/>
+                </a:solidFill>
+                <a:latin typeface="Cambria" pitchFamily="34" charset="0"/>
+                <a:ea typeface="Cambria" pitchFamily="34" charset="-122"/>
+                <a:cs typeface="Cambria" pitchFamily="34" charset="-120"/>
+              </a:rPr>
+              <a:t>Method: exact DP in four steps (multiple-choice knapsack)</a:t>
+            </a:r>
+            <a:endParaRPr lang="en-US" sz="1250" dirty="0"/>
+          </a:p>
+        </p:txBody>
+      </p:sp>
+      <p:sp>
+        <p:nvSpPr>
+          <p:cNvPr id="7" name="Text 5"/>
+          <p:cNvSpPr/>
+          <p:nvPr/>
+        </p:nvSpPr>
+        <p:spPr>
+          <a:xfrm>
+            <a:off x="548640" y="1691640"/>
+            <a:ext cx="6675120" cy="1874520"/>
+          </a:xfrm>
+          <a:prstGeom prst="rect">
+            <a:avLst/>
+          </a:prstGeom>
+          <a:noFill/>
+          <a:ln/>
+        </p:spPr>
+        <p:txBody>
+          <a:bodyPr wrap="square" rtlCol="0" anchor="ctr"/>
+          <a:lstStyle/>
+          <a:p>
+            <a:pPr indent="0" marL="0">
+              <a:lnSpc>
+                <a:spcPts val="1150"/>
+              </a:lnSpc>
+              <a:buNone/>
+            </a:pPr>
+            <a:r>
+              <a:rPr lang="en-US" sz="930" dirty="0">
+                <a:solidFill>
+                  <a:srgbClr val="1A1A2E"/>
+                </a:solidFill>
+                <a:latin typeface="Calibri" pitchFamily="34" charset="0"/>
+                <a:ea typeface="Calibri" pitchFamily="34" charset="-122"/>
+                <a:cs typeface="Calibri" pitchFamily="34" charset="-120"/>
+              </a:rPr>
+              <a:t>① Discretize: for each venue_type, sweep frequency 0→14/venue in 0.25 steps (57 points). At each point, read network lift = per-venue lift (from the calibrated MMM response curve) × venue count, and $ spend = freq × cost-per-frequency-unit × venue count.</a:t>
+            </a:r>
+            <a:endParaRPr lang="en-US" sz="930" dirty="0"/>
+          </a:p>
+          <a:p>
+            <a:pPr indent="0" marL="0">
+              <a:lnSpc>
+                <a:spcPts val="1150"/>
+              </a:lnSpc>
+              <a:buNone/>
+            </a:pPr>
+            <a:r>
+              <a:rPr lang="en-US" sz="930" dirty="0">
+                <a:solidFill>
+                  <a:srgbClr val="1A1A2E"/>
+                </a:solidFill>
+                <a:latin typeface="Calibri" pitchFamily="34" charset="0"/>
+                <a:ea typeface="Calibri" pitchFamily="34" charset="-122"/>
+                <a:cs typeface="Calibri" pitchFamily="34" charset="-120"/>
+              </a:rPr>
+              <a:t>② Snap every candidate's spend onto a shared $250 grid, so all venue types' options line up on one budget axis — keeping only the highest-lift option at each grid point per type. This is that type's "menu."</a:t>
+            </a:r>
+            <a:endParaRPr lang="en-US" sz="930" dirty="0"/>
+          </a:p>
+          <a:p>
+            <a:pPr indent="0" marL="0">
+              <a:lnSpc>
+                <a:spcPts val="1150"/>
+              </a:lnSpc>
+              <a:buNone/>
+            </a:pPr>
+            <a:r>
+              <a:rPr lang="en-US" sz="930" dirty="0">
+                <a:solidFill>
+                  <a:srgbClr val="1A1A2E"/>
+                </a:solidFill>
+                <a:latin typeface="Calibri" pitchFamily="34" charset="0"/>
+                <a:ea typeface="Calibri" pitchFamily="34" charset="-122"/>
+                <a:cs typeface="Calibri" pitchFamily="34" charset="-120"/>
+              </a:rPr>
+              <a:t>③ Process venue types one at a time: for every $ grid point b, try each of that type's menu options with spend ≤ b, add it to whatever the types-already-processed achieved at (b − spend), and keep whichever combination gives the highest total lift — every option is actually tried, not estimated from a local slope.</a:t>
+            </a:r>
+            <a:endParaRPr lang="en-US" sz="930" dirty="0"/>
+          </a:p>
+          <a:p>
+            <a:pPr indent="0" marL="0">
+              <a:lnSpc>
+                <a:spcPts val="1150"/>
+              </a:lnSpc>
+              <a:buNone/>
+            </a:pPr>
+            <a:r>
+              <a:rPr lang="en-US" sz="930" dirty="0">
+                <a:solidFill>
+                  <a:srgbClr val="1A1A2E"/>
+                </a:solidFill>
+                <a:latin typeface="Calibri" pitchFamily="34" charset="0"/>
+                <a:ea typeface="Calibri" pitchFamily="34" charset="-122"/>
+                <a:cs typeface="Calibri" pitchFamily="34" charset="-120"/>
+              </a:rPr>
+              <a:t>④ Backtrack from the full-budget column to read off which frequency was actually chosen for each venue type.</a:t>
+            </a:r>
+            <a:endParaRPr lang="en-US" sz="930" dirty="0"/>
+          </a:p>
+        </p:txBody>
+      </p:sp>
+      <p:sp>
+        <p:nvSpPr>
+          <p:cNvPr id="8" name="Text 6"/>
+          <p:cNvSpPr/>
+          <p:nvPr/>
+        </p:nvSpPr>
+        <p:spPr>
+          <a:xfrm>
+            <a:off x="548640" y="3657600"/>
+            <a:ext cx="6675120" cy="457200"/>
+          </a:xfrm>
+          <a:prstGeom prst="rect">
+            <a:avLst/>
+          </a:prstGeom>
+          <a:noFill/>
+          <a:ln/>
+        </p:spPr>
+        <p:txBody>
+          <a:bodyPr wrap="square" rtlCol="0" anchor="ctr"/>
+          <a:lstStyle/>
+          <a:p>
+            <a:pPr indent="0" marL="0">
+              <a:lnSpc>
+                <a:spcPts val="1100"/>
+              </a:lnSpc>
+              <a:buNone/>
+            </a:pPr>
+            <a:r>
+              <a:rPr lang="en-US" sz="870" i="1" dirty="0">
+                <a:solidFill>
+                  <a:srgbClr val="5B6178"/>
+                </a:solidFill>
+                <a:latin typeface="Calibri" pitchFamily="34" charset="0"/>
+                <a:ea typeface="Calibri" pitchFamily="34" charset="-122"/>
+                <a:cs typeface="Calibri" pitchFamily="34" charset="-120"/>
+              </a:rPr>
+              <a:t>Grid granularity ($250 budget steps, 0.25 frequency steps) trades a little precision for tractability — the same principle real deployments use, just at production-scale resolution.</a:t>
+            </a:r>
+            <a:endParaRPr lang="en-US" sz="870" dirty="0"/>
+          </a:p>
+        </p:txBody>
+      </p:sp>
+      <p:graphicFrame>
+        <p:nvGraphicFramePr>
+          <p:cNvPr id="9" name="Chart 0" descr=""/>
+          <p:cNvGraphicFramePr/>
+          <p:nvPr/>
+        </p:nvGraphicFramePr>
+        <p:xfrm>
+          <a:off x="548640" y="4206240"/>
+          <a:ext cx="6675120" cy="2148840"/>
+        </p:xfrm>
+        <a:graphic xmlns:a="http://schemas.openxmlformats.org/drawingml/2006/main">
+          <a:graphicData uri="http://schemas.openxmlformats.org/drawingml/2006/chart">
+            <c:chart xmlns:c="http://schemas.openxmlformats.org/drawingml/2006/chart" r:id="rId1"/>
+          </a:graphicData>
+        </a:graphic>
+      </p:graphicFrame>
+      <p:sp>
+        <p:nvSpPr>
+          <p:cNvPr id="10" name="Text 7"/>
+          <p:cNvSpPr/>
+          <p:nvPr/>
+        </p:nvSpPr>
+        <p:spPr>
+          <a:xfrm>
+            <a:off x="7498080" y="1417320"/>
+            <a:ext cx="4114800" cy="320040"/>
+          </a:xfrm>
+          <a:prstGeom prst="rect">
+            <a:avLst/>
+          </a:prstGeom>
+          <a:noFill/>
+          <a:ln/>
+        </p:spPr>
+        <p:txBody>
+          <a:bodyPr wrap="square" rtlCol="0" anchor="ctr"/>
+          <a:lstStyle/>
+          <a:p>
+            <a:pPr indent="0" marL="0">
+              <a:buNone/>
+            </a:pPr>
+            <a:r>
+              <a:rPr lang="en-US" sz="1300" b="1" dirty="0">
+                <a:solidFill>
+                  <a:srgbClr val="1E2761"/>
+                </a:solidFill>
+                <a:latin typeface="Cambria" pitchFamily="34" charset="0"/>
+                <a:ea typeface="Cambria" pitchFamily="34" charset="-122"/>
+                <a:cs typeface="Cambria" pitchFamily="34" charset="-120"/>
+              </a:rPr>
+              <a:t>Gain vs. naive equal-split</a:t>
+            </a:r>
+            <a:endParaRPr lang="en-US" sz="1300" dirty="0"/>
+          </a:p>
+        </p:txBody>
+      </p:sp>
+      <p:sp>
+        <p:nvSpPr>
+          <p:cNvPr id="11" name="Text 8"/>
+          <p:cNvSpPr/>
+          <p:nvPr/>
+        </p:nvSpPr>
+        <p:spPr>
+          <a:xfrm>
+            <a:off x="7498080" y="1874520"/>
+            <a:ext cx="1828800" cy="457200"/>
+          </a:xfrm>
+          <a:prstGeom prst="rect">
+            <a:avLst/>
+          </a:prstGeom>
+          <a:noFill/>
+          <a:ln/>
+        </p:spPr>
+        <p:txBody>
+          <a:bodyPr wrap="square" rtlCol="0" anchor="ctr"/>
+          <a:lstStyle/>
+          <a:p>
+            <a:pPr indent="0" marL="0">
+              <a:buNone/>
+            </a:pPr>
+            <a:r>
+              <a:rPr lang="en-US" sz="1200" dirty="0">
+                <a:solidFill>
+                  <a:srgbClr val="1A1A2E"/>
+                </a:solidFill>
+                <a:latin typeface="Calibri" pitchFamily="34" charset="0"/>
+                <a:ea typeface="Calibri" pitchFamily="34" charset="-122"/>
+                <a:cs typeface="Calibri" pitchFamily="34" charset="-120"/>
+              </a:rPr>
+              <a:t>$20,000 budget</a:t>
+            </a:r>
+            <a:endParaRPr lang="en-US" sz="1200" dirty="0"/>
+          </a:p>
+        </p:txBody>
+      </p:sp>
+      <p:sp>
+        <p:nvSpPr>
+          <p:cNvPr id="12" name="Text 9"/>
+          <p:cNvSpPr/>
+          <p:nvPr/>
+        </p:nvSpPr>
+        <p:spPr>
+          <a:xfrm>
+            <a:off x="9326880" y="1828800"/>
+            <a:ext cx="2286000" cy="548640"/>
+          </a:xfrm>
+          <a:prstGeom prst="rect">
+            <a:avLst/>
+          </a:prstGeom>
+          <a:noFill/>
+          <a:ln/>
+        </p:spPr>
+        <p:txBody>
+          <a:bodyPr wrap="square" rtlCol="0" anchor="ctr"/>
+          <a:lstStyle/>
+          <a:p>
+            <a:pPr indent="0" marL="0">
+              <a:buNone/>
+            </a:pPr>
+            <a:r>
+              <a:rPr lang="en-US" sz="2000" b="1" dirty="0">
+                <a:solidFill>
+                  <a:srgbClr val="E8871E"/>
+                </a:solidFill>
+                <a:latin typeface="Calibri" pitchFamily="34" charset="0"/>
+                <a:ea typeface="Calibri" pitchFamily="34" charset="-122"/>
+                <a:cs typeface="Calibri" pitchFamily="34" charset="-120"/>
+              </a:rPr>
+              <a:t>+48.6%</a:t>
+            </a:r>
+            <a:endParaRPr lang="en-US" sz="2000" dirty="0"/>
+          </a:p>
+        </p:txBody>
+      </p:sp>
+      <p:sp>
+        <p:nvSpPr>
+          <p:cNvPr id="13" name="Text 10"/>
+          <p:cNvSpPr/>
+          <p:nvPr/>
+        </p:nvSpPr>
+        <p:spPr>
+          <a:xfrm>
+            <a:off x="7498080" y="2258568"/>
+            <a:ext cx="4114800" cy="274320"/>
+          </a:xfrm>
+          <a:prstGeom prst="rect">
+            <a:avLst/>
+          </a:prstGeom>
+          <a:noFill/>
+          <a:ln/>
+        </p:spPr>
+        <p:txBody>
+          <a:bodyPr wrap="square" rtlCol="0" anchor="ctr"/>
+          <a:lstStyle/>
+          <a:p>
+            <a:pPr indent="0" marL="0">
+              <a:buNone/>
+            </a:pPr>
+            <a:r>
+              <a:rPr lang="en-US" sz="950" i="1" dirty="0">
+                <a:solidFill>
+                  <a:srgbClr val="5B6178"/>
+                </a:solidFill>
+                <a:latin typeface="Calibri" pitchFamily="34" charset="0"/>
+                <a:ea typeface="Calibri" pitchFamily="34" charset="-122"/>
+                <a:cs typeface="Calibri" pitchFamily="34" charset="-120"/>
+              </a:rPr>
+              <a:t>vs. naive equal-split</a:t>
+            </a:r>
+            <a:endParaRPr lang="en-US" sz="950" dirty="0"/>
+          </a:p>
+        </p:txBody>
+      </p:sp>
+      <p:sp>
+        <p:nvSpPr>
+          <p:cNvPr id="14" name="Text 11"/>
+          <p:cNvSpPr/>
+          <p:nvPr/>
+        </p:nvSpPr>
+        <p:spPr>
+          <a:xfrm>
+            <a:off x="7498080" y="2926080"/>
+            <a:ext cx="1828800" cy="457200"/>
+          </a:xfrm>
+          <a:prstGeom prst="rect">
+            <a:avLst/>
+          </a:prstGeom>
+          <a:noFill/>
+          <a:ln/>
+        </p:spPr>
+        <p:txBody>
+          <a:bodyPr wrap="square" rtlCol="0" anchor="ctr"/>
+          <a:lstStyle/>
+          <a:p>
+            <a:pPr indent="0" marL="0">
+              <a:buNone/>
+            </a:pPr>
+            <a:r>
+              <a:rPr lang="en-US" sz="1200" dirty="0">
+                <a:solidFill>
+                  <a:srgbClr val="1A1A2E"/>
+                </a:solidFill>
+                <a:latin typeface="Calibri" pitchFamily="34" charset="0"/>
+                <a:ea typeface="Calibri" pitchFamily="34" charset="-122"/>
+                <a:cs typeface="Calibri" pitchFamily="34" charset="-120"/>
+              </a:rPr>
+              <a:t>$50,000 budget</a:t>
+            </a:r>
+            <a:endParaRPr lang="en-US" sz="1200" dirty="0"/>
+          </a:p>
+        </p:txBody>
+      </p:sp>
+      <p:sp>
+        <p:nvSpPr>
+          <p:cNvPr id="15" name="Text 12"/>
+          <p:cNvSpPr/>
+          <p:nvPr/>
+        </p:nvSpPr>
+        <p:spPr>
+          <a:xfrm>
+            <a:off x="9326880" y="2880360"/>
+            <a:ext cx="2286000" cy="548640"/>
+          </a:xfrm>
+          <a:prstGeom prst="rect">
+            <a:avLst/>
+          </a:prstGeom>
+          <a:noFill/>
+          <a:ln/>
+        </p:spPr>
+        <p:txBody>
+          <a:bodyPr wrap="square" rtlCol="0" anchor="ctr"/>
+          <a:lstStyle/>
+          <a:p>
+            <a:pPr indent="0" marL="0">
+              <a:buNone/>
+            </a:pPr>
+            <a:r>
+              <a:rPr lang="en-US" sz="2000" b="1" dirty="0">
+                <a:solidFill>
+                  <a:srgbClr val="E8871E"/>
+                </a:solidFill>
+                <a:latin typeface="Calibri" pitchFamily="34" charset="0"/>
+                <a:ea typeface="Calibri" pitchFamily="34" charset="-122"/>
+                <a:cs typeface="Calibri" pitchFamily="34" charset="-120"/>
+              </a:rPr>
+              <a:t>+11.1%</a:t>
+            </a:r>
+            <a:endParaRPr lang="en-US" sz="2000" dirty="0"/>
+          </a:p>
+        </p:txBody>
+      </p:sp>
+      <p:sp>
+        <p:nvSpPr>
+          <p:cNvPr id="16" name="Text 13"/>
+          <p:cNvSpPr/>
+          <p:nvPr/>
+        </p:nvSpPr>
+        <p:spPr>
+          <a:xfrm>
+            <a:off x="7498080" y="3310128"/>
+            <a:ext cx="4114800" cy="274320"/>
+          </a:xfrm>
+          <a:prstGeom prst="rect">
+            <a:avLst/>
+          </a:prstGeom>
+          <a:noFill/>
+          <a:ln/>
+        </p:spPr>
+        <p:txBody>
+          <a:bodyPr wrap="square" rtlCol="0" anchor="ctr"/>
+          <a:lstStyle/>
+          <a:p>
+            <a:pPr indent="0" marL="0">
+              <a:buNone/>
+            </a:pPr>
+            <a:r>
+              <a:rPr lang="en-US" sz="950" i="1" dirty="0">
+                <a:solidFill>
+                  <a:srgbClr val="5B6178"/>
+                </a:solidFill>
+                <a:latin typeface="Calibri" pitchFamily="34" charset="0"/>
+                <a:ea typeface="Calibri" pitchFamily="34" charset="-122"/>
+                <a:cs typeface="Calibri" pitchFamily="34" charset="-120"/>
+              </a:rPr>
+              <a:t>vs. naive equal-split</a:t>
+            </a:r>
+            <a:endParaRPr lang="en-US" sz="950" dirty="0"/>
+          </a:p>
+        </p:txBody>
+      </p:sp>
+      <p:sp>
+        <p:nvSpPr>
+          <p:cNvPr id="17" name="Text 14"/>
+          <p:cNvSpPr/>
+          <p:nvPr/>
+        </p:nvSpPr>
+        <p:spPr>
+          <a:xfrm>
+            <a:off x="7498080" y="3977640"/>
+            <a:ext cx="1828800" cy="457200"/>
+          </a:xfrm>
+          <a:prstGeom prst="rect">
+            <a:avLst/>
+          </a:prstGeom>
+          <a:noFill/>
+          <a:ln/>
+        </p:spPr>
+        <p:txBody>
+          <a:bodyPr wrap="square" rtlCol="0" anchor="ctr"/>
+          <a:lstStyle/>
+          <a:p>
+            <a:pPr indent="0" marL="0">
+              <a:buNone/>
+            </a:pPr>
+            <a:r>
+              <a:rPr lang="en-US" sz="1200" dirty="0">
+                <a:solidFill>
+                  <a:srgbClr val="1A1A2E"/>
+                </a:solidFill>
+                <a:latin typeface="Calibri" pitchFamily="34" charset="0"/>
+                <a:ea typeface="Calibri" pitchFamily="34" charset="-122"/>
+                <a:cs typeface="Calibri" pitchFamily="34" charset="-120"/>
+              </a:rPr>
+              <a:t>$100,000 budget</a:t>
+            </a:r>
+            <a:endParaRPr lang="en-US" sz="1200" dirty="0"/>
+          </a:p>
+        </p:txBody>
+      </p:sp>
+      <p:sp>
+        <p:nvSpPr>
+          <p:cNvPr id="18" name="Text 15"/>
+          <p:cNvSpPr/>
+          <p:nvPr/>
+        </p:nvSpPr>
+        <p:spPr>
+          <a:xfrm>
+            <a:off x="9326880" y="3931920"/>
+            <a:ext cx="2286000" cy="548640"/>
+          </a:xfrm>
+          <a:prstGeom prst="rect">
+            <a:avLst/>
+          </a:prstGeom>
+          <a:noFill/>
+          <a:ln/>
+        </p:spPr>
+        <p:txBody>
+          <a:bodyPr wrap="square" rtlCol="0" anchor="ctr"/>
+          <a:lstStyle/>
+          <a:p>
+            <a:pPr indent="0" marL="0">
+              <a:buNone/>
+            </a:pPr>
+            <a:r>
+              <a:rPr lang="en-US" sz="2000" b="1" dirty="0">
+                <a:solidFill>
+                  <a:srgbClr val="E8871E"/>
+                </a:solidFill>
+                <a:latin typeface="Calibri" pitchFamily="34" charset="0"/>
+                <a:ea typeface="Calibri" pitchFamily="34" charset="-122"/>
+                <a:cs typeface="Calibri" pitchFamily="34" charset="-120"/>
+              </a:rPr>
+              <a:t>+2.4%</a:t>
+            </a:r>
+            <a:endParaRPr lang="en-US" sz="2000" dirty="0"/>
+          </a:p>
+        </p:txBody>
+      </p:sp>
+      <p:sp>
+        <p:nvSpPr>
+          <p:cNvPr id="19" name="Text 16"/>
+          <p:cNvSpPr/>
+          <p:nvPr/>
+        </p:nvSpPr>
+        <p:spPr>
+          <a:xfrm>
+            <a:off x="7498080" y="4361688"/>
+            <a:ext cx="4114800" cy="274320"/>
+          </a:xfrm>
+          <a:prstGeom prst="rect">
+            <a:avLst/>
+          </a:prstGeom>
+          <a:noFill/>
+          <a:ln/>
+        </p:spPr>
+        <p:txBody>
+          <a:bodyPr wrap="square" rtlCol="0" anchor="ctr"/>
+          <a:lstStyle/>
+          <a:p>
+            <a:pPr indent="0" marL="0">
+              <a:buNone/>
+            </a:pPr>
+            <a:r>
+              <a:rPr lang="en-US" sz="950" i="1" dirty="0">
+                <a:solidFill>
+                  <a:srgbClr val="5B6178"/>
+                </a:solidFill>
+                <a:latin typeface="Calibri" pitchFamily="34" charset="0"/>
+                <a:ea typeface="Calibri" pitchFamily="34" charset="-122"/>
+                <a:cs typeface="Calibri" pitchFamily="34" charset="-120"/>
+              </a:rPr>
+              <a:t>vs. naive equal-split</a:t>
+            </a:r>
+            <a:endParaRPr lang="en-US" sz="950" dirty="0"/>
+          </a:p>
+        </p:txBody>
+      </p:sp>
+      <p:sp>
+        <p:nvSpPr>
+          <p:cNvPr id="20" name="Text 17"/>
+          <p:cNvSpPr/>
+          <p:nvPr/>
+        </p:nvSpPr>
+        <p:spPr>
+          <a:xfrm>
+            <a:off x="7498080" y="5074920"/>
+            <a:ext cx="4206240" cy="822960"/>
+          </a:xfrm>
+          <a:prstGeom prst="rect">
+            <a:avLst/>
+          </a:prstGeom>
+          <a:noFill/>
+          <a:ln/>
+        </p:spPr>
+        <p:txBody>
+          <a:bodyPr wrap="square" rtlCol="0" anchor="ctr"/>
+          <a:lstStyle/>
+          <a:p>
+            <a:pPr indent="0" marL="0">
+              <a:lnSpc>
+                <a:spcPts val="1400"/>
+              </a:lnSpc>
+              <a:buNone/>
+            </a:pPr>
+            <a:r>
+              <a:rPr lang="en-US" sz="1050" i="1" dirty="0">
+                <a:solidFill>
+                  <a:srgbClr val="5B6178"/>
+                </a:solidFill>
+                <a:latin typeface="Calibri" pitchFamily="34" charset="0"/>
+                <a:ea typeface="Calibri" pitchFamily="34" charset="-122"/>
+                <a:cs typeface="Calibri" pitchFamily="34" charset="-120"/>
+              </a:rPr>
+              <a:t>The optimizer's edge is largest when budget is scarce — exactly when allocation decisions matter most. (Previous slide: why a greedy walk can lose this edge entirely.)</a:t>
+            </a:r>
+            <a:endParaRPr lang="en-US" sz="1050" dirty="0"/>
+          </a:p>
+        </p:txBody>
+      </p:sp>
+      <p:sp>
+        <p:nvSpPr>
+          <p:cNvPr id="21" name="Text 18"/>
+          <p:cNvSpPr/>
+          <p:nvPr/>
+        </p:nvSpPr>
+        <p:spPr>
+          <a:xfrm>
+            <a:off x="457200" y="6537960"/>
+            <a:ext cx="7315200" cy="274320"/>
+          </a:xfrm>
+          <a:prstGeom prst="rect">
+            <a:avLst/>
+          </a:prstGeom>
+          <a:noFill/>
+          <a:ln/>
+        </p:spPr>
+        <p:txBody>
+          <a:bodyPr wrap="square" rtlCol="0" anchor="ctr"/>
+          <a:lstStyle/>
+          <a:p>
+            <a:pPr indent="0" marL="0">
+              <a:buNone/>
+            </a:pPr>
+            <a:r>
+              <a:rPr lang="en-US" sz="900" dirty="0">
+                <a:solidFill>
+                  <a:srgbClr val="5B6178"/>
+                </a:solidFill>
+                <a:latin typeface="Calibri" pitchFamily="34" charset="0"/>
+                <a:ea typeface="Calibri" pitchFamily="34" charset="-122"/>
+                <a:cs typeface="Calibri" pitchFamily="34" charset="-120"/>
+              </a:rPr>
+              <a:t>Productization — budget allocator</a:t>
+            </a:r>
+            <a:endParaRPr lang="en-US" sz="900" dirty="0"/>
+          </a:p>
+        </p:txBody>
+      </p:sp>
+    </p:spTree>
+  </p:cSld>
+  <p:clrMapOvr>
+    <a:masterClrMapping/>
+  </p:clrMapOvr>
+</p:sld>
+</file>
+
+<file path=ppt/slides/slide14.xml><?xml version="1.0" encoding="utf-8"?>
+<p:sld xmlns:a="http://schemas.openxmlformats.org/drawingml/2006/main" xmlns:r="http://schemas.openxmlformats.org/officeDocument/2006/relationships" xmlns:p="http://schemas.openxmlformats.org/presentationml/2006/main">
+  <p:cSld name="Slide 14">
     <p:bg>
       <p:bgPr>
         <a:solidFill>
@@ -7738,1381 +8916,6 @@
               <a:t>“Smarter on both sides of the business” — the venue-side model shares its data foundation and causal-value input with the advertising side, rather than being a disconnected second project. Results on the next slide.</a:t>
             </a:r>
             <a:endParaRPr lang="en-US" sz="1150" dirty="0"/>
-          </a:p>
-        </p:txBody>
-      </p:sp>
-    </p:spTree>
-  </p:cSld>
-  <p:clrMapOvr>
-    <a:masterClrMapping/>
-  </p:clrMapOvr>
-</p:sld>
-</file>
-
-<file path=ppt/slides/slide14.xml><?xml version="1.0" encoding="utf-8"?>
-<p:sld xmlns:a="http://schemas.openxmlformats.org/drawingml/2006/main" xmlns:r="http://schemas.openxmlformats.org/officeDocument/2006/relationships" xmlns:p="http://schemas.openxmlformats.org/presentationml/2006/main">
-  <p:cSld name="Slide 14">
-    <p:bg>
-      <p:bgPr>
-        <a:solidFill>
-          <a:srgbClr val="FFFFFF"/>
-        </a:solidFill>
-      </p:bgPr>
-    </p:bg>
-    <p:spTree>
-      <p:nvGrpSpPr>
-        <p:cNvPr id="1" name=""/>
-        <p:cNvGrpSpPr/>
-        <p:nvPr/>
-      </p:nvGrpSpPr>
-      <p:grpSpPr>
-        <a:xfrm>
-          <a:off x="0" y="0"/>
-          <a:ext cx="0" cy="0"/>
-          <a:chOff x="0" y="0"/>
-          <a:chExt cx="0" cy="0"/>
-        </a:xfrm>
-      </p:grpSpPr>
-      <p:sp>
-        <p:nvSpPr>
-          <p:cNvPr id="2" name="Text 0"/>
-          <p:cNvSpPr/>
-          <p:nvPr/>
-        </p:nvSpPr>
-        <p:spPr>
-          <a:xfrm>
-            <a:off x="548640" y="411480"/>
-            <a:ext cx="11155680" cy="594360"/>
-          </a:xfrm>
-          <a:prstGeom prst="rect">
-            <a:avLst/>
-          </a:prstGeom>
-          <a:noFill/>
-          <a:ln/>
-        </p:spPr>
-        <p:txBody>
-          <a:bodyPr wrap="square" rtlCol="0" anchor="ctr"/>
-          <a:lstStyle/>
-          <a:p>
-            <a:pPr indent="0" marL="0">
-              <a:buNone/>
-            </a:pPr>
-            <a:r>
-              <a:rPr lang="en-US" sz="2500" b="1" dirty="0">
-                <a:solidFill>
-                  <a:srgbClr val="1E2761"/>
-                </a:solidFill>
-                <a:latin typeface="Cambria" pitchFamily="34" charset="0"/>
-                <a:ea typeface="Cambria" pitchFamily="34" charset="-122"/>
-                <a:cs typeface="Cambria" pitchFamily="34" charset="-120"/>
-              </a:rPr>
-              <a:t>Predicting venue ad-revenue, honestly</a:t>
-            </a:r>
-            <a:endParaRPr lang="en-US" sz="2500" dirty="0"/>
-          </a:p>
-        </p:txBody>
-      </p:sp>
-      <p:sp>
-        <p:nvSpPr>
-          <p:cNvPr id="3" name="Shape 1"/>
-          <p:cNvSpPr/>
-          <p:nvPr/>
-        </p:nvSpPr>
-        <p:spPr>
-          <a:xfrm>
-            <a:off x="8229600" y="146304"/>
-            <a:ext cx="3410712" cy="246888"/>
-          </a:xfrm>
-          <a:prstGeom prst="roundRect">
-            <a:avLst>
-              <a:gd name="adj" fmla="val 22222"/>
-            </a:avLst>
-          </a:prstGeom>
-          <a:solidFill>
-            <a:srgbClr val="FFFFFF"/>
-          </a:solidFill>
-          <a:ln w="15875">
-            <a:solidFill>
-              <a:srgbClr val="2C7A57"/>
-            </a:solidFill>
-            <a:prstDash val="solid"/>
-          </a:ln>
-        </p:spPr>
-      </p:sp>
-      <p:sp>
-        <p:nvSpPr>
-          <p:cNvPr id="4" name="Text 2"/>
-          <p:cNvSpPr/>
-          <p:nvPr/>
-        </p:nvSpPr>
-        <p:spPr>
-          <a:xfrm>
-            <a:off x="8229600" y="146304"/>
-            <a:ext cx="3410712" cy="246888"/>
-          </a:xfrm>
-          <a:prstGeom prst="rect">
-            <a:avLst/>
-          </a:prstGeom>
-          <a:noFill/>
-          <a:ln/>
-        </p:spPr>
-        <p:txBody>
-          <a:bodyPr wrap="square" rtlCol="0" anchor="ctr"/>
-          <a:lstStyle/>
-          <a:p>
-            <a:pPr algn="ctr" indent="0" marL="0">
-              <a:buNone/>
-            </a:pPr>
-            <a:r>
-              <a:rPr lang="en-US" sz="950" b="1" dirty="0">
-                <a:solidFill>
-                  <a:srgbClr val="2C7A57"/>
-                </a:solidFill>
-                <a:latin typeface="Calibri" pitchFamily="34" charset="0"/>
-                <a:ea typeface="Calibri" pitchFamily="34" charset="-122"/>
-                <a:cs typeface="Calibri" pitchFamily="34" charset="-120"/>
-              </a:rPr>
-              <a:t>Step 5 of 6 · Answers Q3</a:t>
-            </a:r>
-            <a:endParaRPr lang="en-US" sz="950" dirty="0"/>
-          </a:p>
-        </p:txBody>
-      </p:sp>
-      <p:sp>
-        <p:nvSpPr>
-          <p:cNvPr id="5" name="Text 3"/>
-          <p:cNvSpPr/>
-          <p:nvPr/>
-        </p:nvSpPr>
-        <p:spPr>
-          <a:xfrm>
-            <a:off x="548640" y="1005840"/>
-            <a:ext cx="10972800" cy="365760"/>
-          </a:xfrm>
-          <a:prstGeom prst="rect">
-            <a:avLst/>
-          </a:prstGeom>
-          <a:noFill/>
-          <a:ln/>
-        </p:spPr>
-        <p:txBody>
-          <a:bodyPr wrap="square" rtlCol="0" anchor="ctr"/>
-          <a:lstStyle/>
-          <a:p>
-            <a:pPr indent="0" marL="0">
-              <a:buNone/>
-            </a:pPr>
-            <a:r>
-              <a:rPr lang="en-US" sz="1250" i="1" dirty="0">
-                <a:solidFill>
-                  <a:srgbClr val="5B6178"/>
-                </a:solidFill>
-                <a:latin typeface="Calibri" pitchFamily="34" charset="0"/>
-                <a:ea typeface="Calibri" pitchFamily="34" charset="-122"/>
-                <a:cs typeface="Calibri" pitchFamily="34" charset="-120"/>
-              </a:rPr>
-              <a:t>Gradient-boosted trees on observable venue characteristics + the calibrated per-exposure lift as a feature.</a:t>
-            </a:r>
-            <a:endParaRPr lang="en-US" sz="1250" dirty="0"/>
-          </a:p>
-        </p:txBody>
-      </p:sp>
-      <p:sp>
-        <p:nvSpPr>
-          <p:cNvPr id="6" name="Shape 4"/>
-          <p:cNvSpPr/>
-          <p:nvPr/>
-        </p:nvSpPr>
-        <p:spPr>
-          <a:xfrm>
-            <a:off x="548640" y="1508760"/>
-            <a:ext cx="2651760" cy="1051560"/>
-          </a:xfrm>
-          <a:prstGeom prst="roundRect">
-            <a:avLst>
-              <a:gd name="adj" fmla="val 6957"/>
-            </a:avLst>
-          </a:prstGeom>
-          <a:solidFill>
-            <a:srgbClr val="F5F7FC"/>
-          </a:solidFill>
-          <a:ln/>
-        </p:spPr>
-      </p:sp>
-      <p:sp>
-        <p:nvSpPr>
-          <p:cNvPr id="7" name="Text 5"/>
-          <p:cNvSpPr/>
-          <p:nvPr/>
-        </p:nvSpPr>
-        <p:spPr>
-          <a:xfrm>
-            <a:off x="685800" y="1618488"/>
-            <a:ext cx="2377440" cy="502920"/>
-          </a:xfrm>
-          <a:prstGeom prst="rect">
-            <a:avLst/>
-          </a:prstGeom>
-          <a:noFill/>
-          <a:ln/>
-        </p:spPr>
-        <p:txBody>
-          <a:bodyPr wrap="square" rtlCol="0" anchor="ctr"/>
-          <a:lstStyle/>
-          <a:p>
-            <a:pPr indent="0" marL="0">
-              <a:buNone/>
-            </a:pPr>
-            <a:r>
-              <a:rPr lang="en-US" sz="2200" b="1" dirty="0">
-                <a:solidFill>
-                  <a:srgbClr val="1E2761"/>
-                </a:solidFill>
-                <a:latin typeface="Calibri" pitchFamily="34" charset="0"/>
-                <a:ea typeface="Calibri" pitchFamily="34" charset="-122"/>
-                <a:cs typeface="Calibri" pitchFamily="34" charset="-120"/>
-              </a:rPr>
-              <a:t>0.84</a:t>
-            </a:r>
-            <a:endParaRPr lang="en-US" sz="2200" dirty="0"/>
-          </a:p>
-        </p:txBody>
-      </p:sp>
-      <p:sp>
-        <p:nvSpPr>
-          <p:cNvPr id="8" name="Text 6"/>
-          <p:cNvSpPr/>
-          <p:nvPr/>
-        </p:nvSpPr>
-        <p:spPr>
-          <a:xfrm>
-            <a:off x="685800" y="2130552"/>
-            <a:ext cx="2377440" cy="365760"/>
-          </a:xfrm>
-          <a:prstGeom prst="rect">
-            <a:avLst/>
-          </a:prstGeom>
-          <a:noFill/>
-          <a:ln/>
-        </p:spPr>
-        <p:txBody>
-          <a:bodyPr wrap="square" rtlCol="0" anchor="ctr"/>
-          <a:lstStyle/>
-          <a:p>
-            <a:pPr indent="0" marL="0">
-              <a:buNone/>
-            </a:pPr>
-            <a:r>
-              <a:rPr lang="en-US" sz="950" dirty="0">
-                <a:solidFill>
-                  <a:srgbClr val="5B6178"/>
-                </a:solidFill>
-                <a:latin typeface="Calibri" pitchFamily="34" charset="0"/>
-                <a:ea typeface="Calibri" pitchFamily="34" charset="-122"/>
-                <a:cs typeface="Calibri" pitchFamily="34" charset="-120"/>
-              </a:rPr>
-              <a:t>Held-out R²</a:t>
-            </a:r>
-            <a:endParaRPr lang="en-US" sz="950" dirty="0"/>
-          </a:p>
-        </p:txBody>
-      </p:sp>
-      <p:sp>
-        <p:nvSpPr>
-          <p:cNvPr id="9" name="Shape 7"/>
-          <p:cNvSpPr/>
-          <p:nvPr/>
-        </p:nvSpPr>
-        <p:spPr>
-          <a:xfrm>
-            <a:off x="3337560" y="1508760"/>
-            <a:ext cx="2651760" cy="1051560"/>
-          </a:xfrm>
-          <a:prstGeom prst="roundRect">
-            <a:avLst>
-              <a:gd name="adj" fmla="val 6957"/>
-            </a:avLst>
-          </a:prstGeom>
-          <a:solidFill>
-            <a:srgbClr val="F5F7FC"/>
-          </a:solidFill>
-          <a:ln/>
-        </p:spPr>
-      </p:sp>
-      <p:sp>
-        <p:nvSpPr>
-          <p:cNvPr id="10" name="Text 8"/>
-          <p:cNvSpPr/>
-          <p:nvPr/>
-        </p:nvSpPr>
-        <p:spPr>
-          <a:xfrm>
-            <a:off x="3474720" y="1618488"/>
-            <a:ext cx="2377440" cy="502920"/>
-          </a:xfrm>
-          <a:prstGeom prst="rect">
-            <a:avLst/>
-          </a:prstGeom>
-          <a:noFill/>
-          <a:ln/>
-        </p:spPr>
-        <p:txBody>
-          <a:bodyPr wrap="square" rtlCol="0" anchor="ctr"/>
-          <a:lstStyle/>
-          <a:p>
-            <a:pPr indent="0" marL="0">
-              <a:buNone/>
-            </a:pPr>
-            <a:r>
-              <a:rPr lang="en-US" sz="2200" b="1" dirty="0">
-                <a:solidFill>
-                  <a:srgbClr val="1E2761"/>
-                </a:solidFill>
-                <a:latin typeface="Calibri" pitchFamily="34" charset="0"/>
-                <a:ea typeface="Calibri" pitchFamily="34" charset="-122"/>
-                <a:cs typeface="Calibri" pitchFamily="34" charset="-120"/>
-              </a:rPr>
-              <a:t>22.1%</a:t>
-            </a:r>
-            <a:endParaRPr lang="en-US" sz="2200" dirty="0"/>
-          </a:p>
-        </p:txBody>
-      </p:sp>
-      <p:sp>
-        <p:nvSpPr>
-          <p:cNvPr id="11" name="Text 9"/>
-          <p:cNvSpPr/>
-          <p:nvPr/>
-        </p:nvSpPr>
-        <p:spPr>
-          <a:xfrm>
-            <a:off x="3474720" y="2130552"/>
-            <a:ext cx="2377440" cy="365760"/>
-          </a:xfrm>
-          <a:prstGeom prst="rect">
-            <a:avLst/>
-          </a:prstGeom>
-          <a:noFill/>
-          <a:ln/>
-        </p:spPr>
-        <p:txBody>
-          <a:bodyPr wrap="square" rtlCol="0" anchor="ctr"/>
-          <a:lstStyle/>
-          <a:p>
-            <a:pPr indent="0" marL="0">
-              <a:buNone/>
-            </a:pPr>
-            <a:r>
-              <a:rPr lang="en-US" sz="950" dirty="0">
-                <a:solidFill>
-                  <a:srgbClr val="5B6178"/>
-                </a:solidFill>
-                <a:latin typeface="Calibri" pitchFamily="34" charset="0"/>
-                <a:ea typeface="Calibri" pitchFamily="34" charset="-122"/>
-                <a:cs typeface="Calibri" pitchFamily="34" charset="-120"/>
-              </a:rPr>
-              <a:t>Held-out MAPE</a:t>
-            </a:r>
-            <a:endParaRPr lang="en-US" sz="950" dirty="0"/>
-          </a:p>
-        </p:txBody>
-      </p:sp>
-      <p:sp>
-        <p:nvSpPr>
-          <p:cNvPr id="12" name="Shape 10"/>
-          <p:cNvSpPr/>
-          <p:nvPr/>
-        </p:nvSpPr>
-        <p:spPr>
-          <a:xfrm>
-            <a:off x="6126480" y="1508760"/>
-            <a:ext cx="2651760" cy="1051560"/>
-          </a:xfrm>
-          <a:prstGeom prst="roundRect">
-            <a:avLst>
-              <a:gd name="adj" fmla="val 6957"/>
-            </a:avLst>
-          </a:prstGeom>
-          <a:solidFill>
-            <a:srgbClr val="F5F7FC"/>
-          </a:solidFill>
-          <a:ln/>
-        </p:spPr>
-      </p:sp>
-      <p:sp>
-        <p:nvSpPr>
-          <p:cNvPr id="13" name="Text 11"/>
-          <p:cNvSpPr/>
-          <p:nvPr/>
-        </p:nvSpPr>
-        <p:spPr>
-          <a:xfrm>
-            <a:off x="6263640" y="1618488"/>
-            <a:ext cx="2377440" cy="502920"/>
-          </a:xfrm>
-          <a:prstGeom prst="rect">
-            <a:avLst/>
-          </a:prstGeom>
-          <a:noFill/>
-          <a:ln/>
-        </p:spPr>
-        <p:txBody>
-          <a:bodyPr wrap="square" rtlCol="0" anchor="ctr"/>
-          <a:lstStyle/>
-          <a:p>
-            <a:pPr indent="0" marL="0">
-              <a:buNone/>
-            </a:pPr>
-            <a:r>
-              <a:rPr lang="en-US" sz="2200" b="1" dirty="0">
-                <a:solidFill>
-                  <a:srgbClr val="1E2761"/>
-                </a:solidFill>
-                <a:latin typeface="Calibri" pitchFamily="34" charset="0"/>
-                <a:ea typeface="Calibri" pitchFamily="34" charset="-122"/>
-                <a:cs typeface="Calibri" pitchFamily="34" charset="-120"/>
-              </a:rPr>
-              <a:t>$45</a:t>
-            </a:r>
-            <a:endParaRPr lang="en-US" sz="2200" dirty="0"/>
-          </a:p>
-        </p:txBody>
-      </p:sp>
-      <p:sp>
-        <p:nvSpPr>
-          <p:cNvPr id="14" name="Text 12"/>
-          <p:cNvSpPr/>
-          <p:nvPr/>
-        </p:nvSpPr>
-        <p:spPr>
-          <a:xfrm>
-            <a:off x="6263640" y="2130552"/>
-            <a:ext cx="2377440" cy="365760"/>
-          </a:xfrm>
-          <a:prstGeom prst="rect">
-            <a:avLst/>
-          </a:prstGeom>
-          <a:noFill/>
-          <a:ln/>
-        </p:spPr>
-        <p:txBody>
-          <a:bodyPr wrap="square" rtlCol="0" anchor="ctr"/>
-          <a:lstStyle/>
-          <a:p>
-            <a:pPr indent="0" marL="0">
-              <a:buNone/>
-            </a:pPr>
-            <a:r>
-              <a:rPr lang="en-US" sz="950" dirty="0">
-                <a:solidFill>
-                  <a:srgbClr val="5B6178"/>
-                </a:solidFill>
-                <a:latin typeface="Calibri" pitchFamily="34" charset="0"/>
-                <a:ea typeface="Calibri" pitchFamily="34" charset="-122"/>
-                <a:cs typeface="Calibri" pitchFamily="34" charset="-120"/>
-              </a:rPr>
-              <a:t>Held-out MAE</a:t>
-            </a:r>
-            <a:endParaRPr lang="en-US" sz="950" dirty="0"/>
-          </a:p>
-        </p:txBody>
-      </p:sp>
-      <p:sp>
-        <p:nvSpPr>
-          <p:cNvPr id="15" name="Shape 13"/>
-          <p:cNvSpPr/>
-          <p:nvPr/>
-        </p:nvSpPr>
-        <p:spPr>
-          <a:xfrm>
-            <a:off x="8915400" y="1508760"/>
-            <a:ext cx="2651760" cy="1051560"/>
-          </a:xfrm>
-          <a:prstGeom prst="roundRect">
-            <a:avLst>
-              <a:gd name="adj" fmla="val 6957"/>
-            </a:avLst>
-          </a:prstGeom>
-          <a:solidFill>
-            <a:srgbClr val="F5F7FC"/>
-          </a:solidFill>
-          <a:ln/>
-        </p:spPr>
-      </p:sp>
-      <p:sp>
-        <p:nvSpPr>
-          <p:cNvPr id="16" name="Text 14"/>
-          <p:cNvSpPr/>
-          <p:nvPr/>
-        </p:nvSpPr>
-        <p:spPr>
-          <a:xfrm>
-            <a:off x="9052560" y="1618488"/>
-            <a:ext cx="2377440" cy="502920"/>
-          </a:xfrm>
-          <a:prstGeom prst="rect">
-            <a:avLst/>
-          </a:prstGeom>
-          <a:noFill/>
-          <a:ln/>
-        </p:spPr>
-        <p:txBody>
-          <a:bodyPr wrap="square" rtlCol="0" anchor="ctr"/>
-          <a:lstStyle/>
-          <a:p>
-            <a:pPr indent="0" marL="0">
-              <a:buNone/>
-            </a:pPr>
-            <a:r>
-              <a:rPr lang="en-US" sz="2200" b="1" dirty="0">
-                <a:solidFill>
-                  <a:srgbClr val="1E2761"/>
-                </a:solidFill>
-                <a:latin typeface="Calibri" pitchFamily="34" charset="0"/>
-                <a:ea typeface="Calibri" pitchFamily="34" charset="-122"/>
-                <a:cs typeface="Calibri" pitchFamily="34" charset="-120"/>
-              </a:rPr>
-              <a:t>20</a:t>
-            </a:r>
-            <a:endParaRPr lang="en-US" sz="2200" dirty="0"/>
-          </a:p>
-        </p:txBody>
-      </p:sp>
-      <p:sp>
-        <p:nvSpPr>
-          <p:cNvPr id="17" name="Text 15"/>
-          <p:cNvSpPr/>
-          <p:nvPr/>
-        </p:nvSpPr>
-        <p:spPr>
-          <a:xfrm>
-            <a:off x="9052560" y="2130552"/>
-            <a:ext cx="2377440" cy="365760"/>
-          </a:xfrm>
-          <a:prstGeom prst="rect">
-            <a:avLst/>
-          </a:prstGeom>
-          <a:noFill/>
-          <a:ln/>
-        </p:spPr>
-        <p:txBody>
-          <a:bodyPr wrap="square" rtlCol="0" anchor="ctr"/>
-          <a:lstStyle/>
-          <a:p>
-            <a:pPr indent="0" marL="0">
-              <a:buNone/>
-            </a:pPr>
-            <a:r>
-              <a:rPr lang="en-US" sz="950" dirty="0">
-                <a:solidFill>
-                  <a:srgbClr val="5B6178"/>
-                </a:solidFill>
-                <a:latin typeface="Calibri" pitchFamily="34" charset="0"/>
-                <a:ea typeface="Calibri" pitchFamily="34" charset="-122"/>
-                <a:cs typeface="Calibri" pitchFamily="34" charset="-120"/>
-              </a:rPr>
-              <a:t>Venues flagged</a:t>
-            </a:r>
-            <a:endParaRPr lang="en-US" sz="950" dirty="0"/>
-          </a:p>
-        </p:txBody>
-      </p:sp>
-      <p:graphicFrame>
-        <p:nvGraphicFramePr>
-          <p:cNvPr id="18" name="Chart 0" descr=""/>
-          <p:cNvGraphicFramePr/>
-          <p:nvPr/>
-        </p:nvGraphicFramePr>
-        <p:xfrm>
-          <a:off x="548640" y="2880360"/>
-          <a:ext cx="5394960" cy="3246120"/>
-        </p:xfrm>
-        <a:graphic xmlns:a="http://schemas.openxmlformats.org/drawingml/2006/main">
-          <a:graphicData uri="http://schemas.openxmlformats.org/drawingml/2006/chart">
-            <c:chart xmlns:c="http://schemas.openxmlformats.org/drawingml/2006/chart" r:id="rId1"/>
-          </a:graphicData>
-        </a:graphic>
-      </p:graphicFrame>
-      <p:sp>
-        <p:nvSpPr>
-          <p:cNvPr id="19" name="Text 16"/>
-          <p:cNvSpPr/>
-          <p:nvPr/>
-        </p:nvSpPr>
-        <p:spPr>
-          <a:xfrm>
-            <a:off x="6263640" y="2880360"/>
-            <a:ext cx="5394960" cy="274320"/>
-          </a:xfrm>
-          <a:prstGeom prst="rect">
-            <a:avLst/>
-          </a:prstGeom>
-          <a:noFill/>
-          <a:ln/>
-        </p:spPr>
-        <p:txBody>
-          <a:bodyPr wrap="square" rtlCol="0" anchor="ctr"/>
-          <a:lstStyle/>
-          <a:p>
-            <a:pPr indent="0" marL="0">
-              <a:buNone/>
-            </a:pPr>
-            <a:r>
-              <a:rPr lang="en-US" sz="1200" b="1" dirty="0">
-                <a:solidFill>
-                  <a:srgbClr val="1E2761"/>
-                </a:solidFill>
-                <a:latin typeface="Cambria" pitchFamily="34" charset="0"/>
-                <a:ea typeface="Cambria" pitchFamily="34" charset="-122"/>
-                <a:cs typeface="Cambria" pitchFamily="34" charset="-120"/>
-              </a:rPr>
-              <a:t>Top under-monetized venues (of 20 flagged)</a:t>
-            </a:r>
-            <a:endParaRPr lang="en-US" sz="1200" dirty="0"/>
-          </a:p>
-        </p:txBody>
-      </p:sp>
-      <p:sp>
-        <p:nvSpPr>
-          <p:cNvPr id="20" name="Text 17"/>
-          <p:cNvSpPr/>
-          <p:nvPr/>
-        </p:nvSpPr>
-        <p:spPr>
-          <a:xfrm>
-            <a:off x="6263640" y="3209544"/>
-            <a:ext cx="3657600" cy="274320"/>
-          </a:xfrm>
-          <a:prstGeom prst="rect">
-            <a:avLst/>
-          </a:prstGeom>
-          <a:noFill/>
-          <a:ln/>
-        </p:spPr>
-        <p:txBody>
-          <a:bodyPr wrap="square" rtlCol="0" anchor="ctr"/>
-          <a:lstStyle/>
-          <a:p>
-            <a:pPr indent="0" marL="0">
-              <a:buNone/>
-            </a:pPr>
-            <a:r>
-              <a:rPr lang="en-US" sz="1000" dirty="0">
-                <a:solidFill>
-                  <a:srgbClr val="1A1A2E"/>
-                </a:solidFill>
-                <a:latin typeface="Calibri" pitchFamily="34" charset="0"/>
-                <a:ea typeface="Calibri" pitchFamily="34" charset="-122"/>
-                <a:cs typeface="Calibri" pitchFamily="34" charset="-120"/>
-              </a:rPr>
-              <a:t>Venue #85 (Restaurants)</a:t>
-            </a:r>
-            <a:endParaRPr lang="en-US" sz="1000" dirty="0"/>
-          </a:p>
-        </p:txBody>
-      </p:sp>
-      <p:sp>
-        <p:nvSpPr>
-          <p:cNvPr id="21" name="Text 18"/>
-          <p:cNvSpPr/>
-          <p:nvPr/>
-        </p:nvSpPr>
-        <p:spPr>
-          <a:xfrm>
-            <a:off x="9966960" y="3209544"/>
-            <a:ext cx="1691640" cy="274320"/>
-          </a:xfrm>
-          <a:prstGeom prst="rect">
-            <a:avLst/>
-          </a:prstGeom>
-          <a:noFill/>
-          <a:ln/>
-        </p:spPr>
-        <p:txBody>
-          <a:bodyPr wrap="square" rtlCol="0" anchor="ctr"/>
-          <a:lstStyle/>
-          <a:p>
-            <a:pPr algn="r" indent="0" marL="0">
-              <a:buNone/>
-            </a:pPr>
-            <a:r>
-              <a:rPr lang="en-US" sz="1000" b="1" dirty="0">
-                <a:solidFill>
-                  <a:srgbClr val="B8500A"/>
-                </a:solidFill>
-                <a:latin typeface="Calibri" pitchFamily="34" charset="0"/>
-                <a:ea typeface="Calibri" pitchFamily="34" charset="-122"/>
-                <a:cs typeface="Calibri" pitchFamily="34" charset="-120"/>
-              </a:rPr>
-              <a:t>-62%</a:t>
-            </a:r>
-            <a:endParaRPr lang="en-US" sz="1000" dirty="0"/>
-          </a:p>
-        </p:txBody>
-      </p:sp>
-      <p:sp>
-        <p:nvSpPr>
-          <p:cNvPr id="22" name="Text 19"/>
-          <p:cNvSpPr/>
-          <p:nvPr/>
-        </p:nvSpPr>
-        <p:spPr>
-          <a:xfrm>
-            <a:off x="6263640" y="3502152"/>
-            <a:ext cx="3657600" cy="274320"/>
-          </a:xfrm>
-          <a:prstGeom prst="rect">
-            <a:avLst/>
-          </a:prstGeom>
-          <a:noFill/>
-          <a:ln/>
-        </p:spPr>
-        <p:txBody>
-          <a:bodyPr wrap="square" rtlCol="0" anchor="ctr"/>
-          <a:lstStyle/>
-          <a:p>
-            <a:pPr indent="0" marL="0">
-              <a:buNone/>
-            </a:pPr>
-            <a:r>
-              <a:rPr lang="en-US" sz="1000" dirty="0">
-                <a:solidFill>
-                  <a:srgbClr val="1A1A2E"/>
-                </a:solidFill>
-                <a:latin typeface="Calibri" pitchFamily="34" charset="0"/>
-                <a:ea typeface="Calibri" pitchFamily="34" charset="-122"/>
-                <a:cs typeface="Calibri" pitchFamily="34" charset="-120"/>
-              </a:rPr>
-              <a:t>Venue #309 (Waiting Rooms)</a:t>
-            </a:r>
-            <a:endParaRPr lang="en-US" sz="1000" dirty="0"/>
-          </a:p>
-        </p:txBody>
-      </p:sp>
-      <p:sp>
-        <p:nvSpPr>
-          <p:cNvPr id="23" name="Text 20"/>
-          <p:cNvSpPr/>
-          <p:nvPr/>
-        </p:nvSpPr>
-        <p:spPr>
-          <a:xfrm>
-            <a:off x="9966960" y="3502152"/>
-            <a:ext cx="1691640" cy="274320"/>
-          </a:xfrm>
-          <a:prstGeom prst="rect">
-            <a:avLst/>
-          </a:prstGeom>
-          <a:noFill/>
-          <a:ln/>
-        </p:spPr>
-        <p:txBody>
-          <a:bodyPr wrap="square" rtlCol="0" anchor="ctr"/>
-          <a:lstStyle/>
-          <a:p>
-            <a:pPr algn="r" indent="0" marL="0">
-              <a:buNone/>
-            </a:pPr>
-            <a:r>
-              <a:rPr lang="en-US" sz="1000" b="1" dirty="0">
-                <a:solidFill>
-                  <a:srgbClr val="B8500A"/>
-                </a:solidFill>
-                <a:latin typeface="Calibri" pitchFamily="34" charset="0"/>
-                <a:ea typeface="Calibri" pitchFamily="34" charset="-122"/>
-                <a:cs typeface="Calibri" pitchFamily="34" charset="-120"/>
-              </a:rPr>
-              <a:t>-61%</a:t>
-            </a:r>
-            <a:endParaRPr lang="en-US" sz="1000" dirty="0"/>
-          </a:p>
-        </p:txBody>
-      </p:sp>
-      <p:sp>
-        <p:nvSpPr>
-          <p:cNvPr id="24" name="Text 21"/>
-          <p:cNvSpPr/>
-          <p:nvPr/>
-        </p:nvSpPr>
-        <p:spPr>
-          <a:xfrm>
-            <a:off x="6263640" y="3794760"/>
-            <a:ext cx="3657600" cy="274320"/>
-          </a:xfrm>
-          <a:prstGeom prst="rect">
-            <a:avLst/>
-          </a:prstGeom>
-          <a:noFill/>
-          <a:ln/>
-        </p:spPr>
-        <p:txBody>
-          <a:bodyPr wrap="square" rtlCol="0" anchor="ctr"/>
-          <a:lstStyle/>
-          <a:p>
-            <a:pPr indent="0" marL="0">
-              <a:buNone/>
-            </a:pPr>
-            <a:r>
-              <a:rPr lang="en-US" sz="1000" dirty="0">
-                <a:solidFill>
-                  <a:srgbClr val="1A1A2E"/>
-                </a:solidFill>
-                <a:latin typeface="Calibri" pitchFamily="34" charset="0"/>
-                <a:ea typeface="Calibri" pitchFamily="34" charset="-122"/>
-                <a:cs typeface="Calibri" pitchFamily="34" charset="-120"/>
-              </a:rPr>
-              <a:t>Venue #53 (Restaurants)</a:t>
-            </a:r>
-            <a:endParaRPr lang="en-US" sz="1000" dirty="0"/>
-          </a:p>
-        </p:txBody>
-      </p:sp>
-      <p:sp>
-        <p:nvSpPr>
-          <p:cNvPr id="25" name="Text 22"/>
-          <p:cNvSpPr/>
-          <p:nvPr/>
-        </p:nvSpPr>
-        <p:spPr>
-          <a:xfrm>
-            <a:off x="9966960" y="3794760"/>
-            <a:ext cx="1691640" cy="274320"/>
-          </a:xfrm>
-          <a:prstGeom prst="rect">
-            <a:avLst/>
-          </a:prstGeom>
-          <a:noFill/>
-          <a:ln/>
-        </p:spPr>
-        <p:txBody>
-          <a:bodyPr wrap="square" rtlCol="0" anchor="ctr"/>
-          <a:lstStyle/>
-          <a:p>
-            <a:pPr algn="r" indent="0" marL="0">
-              <a:buNone/>
-            </a:pPr>
-            <a:r>
-              <a:rPr lang="en-US" sz="1000" b="1" dirty="0">
-                <a:solidFill>
-                  <a:srgbClr val="B8500A"/>
-                </a:solidFill>
-                <a:latin typeface="Calibri" pitchFamily="34" charset="0"/>
-                <a:ea typeface="Calibri" pitchFamily="34" charset="-122"/>
-                <a:cs typeface="Calibri" pitchFamily="34" charset="-120"/>
-              </a:rPr>
-              <a:t>-61%</a:t>
-            </a:r>
-            <a:endParaRPr lang="en-US" sz="1000" dirty="0"/>
-          </a:p>
-        </p:txBody>
-      </p:sp>
-      <p:sp>
-        <p:nvSpPr>
-          <p:cNvPr id="26" name="Text 23"/>
-          <p:cNvSpPr/>
-          <p:nvPr/>
-        </p:nvSpPr>
-        <p:spPr>
-          <a:xfrm>
-            <a:off x="6263640" y="4087368"/>
-            <a:ext cx="3657600" cy="274320"/>
-          </a:xfrm>
-          <a:prstGeom prst="rect">
-            <a:avLst/>
-          </a:prstGeom>
-          <a:noFill/>
-          <a:ln/>
-        </p:spPr>
-        <p:txBody>
-          <a:bodyPr wrap="square" rtlCol="0" anchor="ctr"/>
-          <a:lstStyle/>
-          <a:p>
-            <a:pPr indent="0" marL="0">
-              <a:buNone/>
-            </a:pPr>
-            <a:r>
-              <a:rPr lang="en-US" sz="1000" dirty="0">
-                <a:solidFill>
-                  <a:srgbClr val="1A1A2E"/>
-                </a:solidFill>
-                <a:latin typeface="Calibri" pitchFamily="34" charset="0"/>
-                <a:ea typeface="Calibri" pitchFamily="34" charset="-122"/>
-                <a:cs typeface="Calibri" pitchFamily="34" charset="-120"/>
-              </a:rPr>
-              <a:t>Venue #247 (Bars)</a:t>
-            </a:r>
-            <a:endParaRPr lang="en-US" sz="1000" dirty="0"/>
-          </a:p>
-        </p:txBody>
-      </p:sp>
-      <p:sp>
-        <p:nvSpPr>
-          <p:cNvPr id="27" name="Text 24"/>
-          <p:cNvSpPr/>
-          <p:nvPr/>
-        </p:nvSpPr>
-        <p:spPr>
-          <a:xfrm>
-            <a:off x="9966960" y="4087368"/>
-            <a:ext cx="1691640" cy="274320"/>
-          </a:xfrm>
-          <a:prstGeom prst="rect">
-            <a:avLst/>
-          </a:prstGeom>
-          <a:noFill/>
-          <a:ln/>
-        </p:spPr>
-        <p:txBody>
-          <a:bodyPr wrap="square" rtlCol="0" anchor="ctr"/>
-          <a:lstStyle/>
-          <a:p>
-            <a:pPr algn="r" indent="0" marL="0">
-              <a:buNone/>
-            </a:pPr>
-            <a:r>
-              <a:rPr lang="en-US" sz="1000" b="1" dirty="0">
-                <a:solidFill>
-                  <a:srgbClr val="B8500A"/>
-                </a:solidFill>
-                <a:latin typeface="Calibri" pitchFamily="34" charset="0"/>
-                <a:ea typeface="Calibri" pitchFamily="34" charset="-122"/>
-                <a:cs typeface="Calibri" pitchFamily="34" charset="-120"/>
-              </a:rPr>
-              <a:t>-60%</a:t>
-            </a:r>
-            <a:endParaRPr lang="en-US" sz="1000" dirty="0"/>
-          </a:p>
-        </p:txBody>
-      </p:sp>
-      <p:sp>
-        <p:nvSpPr>
-          <p:cNvPr id="28" name="Text 25"/>
-          <p:cNvSpPr/>
-          <p:nvPr/>
-        </p:nvSpPr>
-        <p:spPr>
-          <a:xfrm>
-            <a:off x="6263640" y="4562856"/>
-            <a:ext cx="5394960" cy="274320"/>
-          </a:xfrm>
-          <a:prstGeom prst="rect">
-            <a:avLst/>
-          </a:prstGeom>
-          <a:noFill/>
-          <a:ln/>
-        </p:spPr>
-        <p:txBody>
-          <a:bodyPr wrap="square" rtlCol="0" anchor="ctr"/>
-          <a:lstStyle/>
-          <a:p>
-            <a:pPr indent="0" marL="0">
-              <a:buNone/>
-            </a:pPr>
-            <a:r>
-              <a:rPr lang="en-US" sz="1200" b="1" dirty="0">
-                <a:solidFill>
-                  <a:srgbClr val="1E2761"/>
-                </a:solidFill>
-                <a:latin typeface="Cambria" pitchFamily="34" charset="0"/>
-                <a:ea typeface="Cambria" pitchFamily="34" charset="-122"/>
-                <a:cs typeface="Cambria" pitchFamily="34" charset="-120"/>
-              </a:rPr>
-              <a:t>Top prospect venues (expansion priority)</a:t>
-            </a:r>
-            <a:endParaRPr lang="en-US" sz="1200" dirty="0"/>
-          </a:p>
-        </p:txBody>
-      </p:sp>
-      <p:sp>
-        <p:nvSpPr>
-          <p:cNvPr id="29" name="Text 26"/>
-          <p:cNvSpPr/>
-          <p:nvPr/>
-        </p:nvSpPr>
-        <p:spPr>
-          <a:xfrm>
-            <a:off x="6263640" y="4892040"/>
-            <a:ext cx="4023360" cy="274320"/>
-          </a:xfrm>
-          <a:prstGeom prst="rect">
-            <a:avLst/>
-          </a:prstGeom>
-          <a:noFill/>
-          <a:ln/>
-        </p:spPr>
-        <p:txBody>
-          <a:bodyPr wrap="square" rtlCol="0" anchor="ctr"/>
-          <a:lstStyle/>
-          <a:p>
-            <a:pPr indent="0" marL="0">
-              <a:buNone/>
-            </a:pPr>
-            <a:r>
-              <a:rPr lang="en-US" sz="1000" dirty="0">
-                <a:solidFill>
-                  <a:srgbClr val="1A1A2E"/>
-                </a:solidFill>
-                <a:latin typeface="Calibri" pitchFamily="34" charset="0"/>
-                <a:ea typeface="Calibri" pitchFamily="34" charset="-122"/>
-                <a:cs typeface="Calibri" pitchFamily="34" charset="-120"/>
-              </a:rPr>
-              <a:t>P0018 — Bars (existing market)</a:t>
-            </a:r>
-            <a:endParaRPr lang="en-US" sz="1000" dirty="0"/>
-          </a:p>
-        </p:txBody>
-      </p:sp>
-      <p:sp>
-        <p:nvSpPr>
-          <p:cNvPr id="30" name="Text 27"/>
-          <p:cNvSpPr/>
-          <p:nvPr/>
-        </p:nvSpPr>
-        <p:spPr>
-          <a:xfrm>
-            <a:off x="10195560" y="4892040"/>
-            <a:ext cx="1463040" cy="274320"/>
-          </a:xfrm>
-          <a:prstGeom prst="rect">
-            <a:avLst/>
-          </a:prstGeom>
-          <a:noFill/>
-          <a:ln/>
-        </p:spPr>
-        <p:txBody>
-          <a:bodyPr wrap="square" rtlCol="0" anchor="ctr"/>
-          <a:lstStyle/>
-          <a:p>
-            <a:pPr algn="r" indent="0" marL="0">
-              <a:buNone/>
-            </a:pPr>
-            <a:r>
-              <a:rPr lang="en-US" sz="1000" b="1" dirty="0">
-                <a:solidFill>
-                  <a:srgbClr val="2C7A57"/>
-                </a:solidFill>
-                <a:latin typeface="Calibri" pitchFamily="34" charset="0"/>
-                <a:ea typeface="Calibri" pitchFamily="34" charset="-122"/>
-                <a:cs typeface="Calibri" pitchFamily="34" charset="-120"/>
-              </a:rPr>
-              <a:t>$684</a:t>
-            </a:r>
-            <a:endParaRPr lang="en-US" sz="1000" dirty="0"/>
-          </a:p>
-        </p:txBody>
-      </p:sp>
-      <p:sp>
-        <p:nvSpPr>
-          <p:cNvPr id="31" name="Text 28"/>
-          <p:cNvSpPr/>
-          <p:nvPr/>
-        </p:nvSpPr>
-        <p:spPr>
-          <a:xfrm>
-            <a:off x="6263640" y="5184648"/>
-            <a:ext cx="4023360" cy="274320"/>
-          </a:xfrm>
-          <a:prstGeom prst="rect">
-            <a:avLst/>
-          </a:prstGeom>
-          <a:noFill/>
-          <a:ln/>
-        </p:spPr>
-        <p:txBody>
-          <a:bodyPr wrap="square" rtlCol="0" anchor="ctr"/>
-          <a:lstStyle/>
-          <a:p>
-            <a:pPr indent="0" marL="0">
-              <a:buNone/>
-            </a:pPr>
-            <a:r>
-              <a:rPr lang="en-US" sz="1000" dirty="0">
-                <a:solidFill>
-                  <a:srgbClr val="1A1A2E"/>
-                </a:solidFill>
-                <a:latin typeface="Calibri" pitchFamily="34" charset="0"/>
-                <a:ea typeface="Calibri" pitchFamily="34" charset="-122"/>
-                <a:cs typeface="Calibri" pitchFamily="34" charset="-120"/>
-              </a:rPr>
-              <a:t>P0055 — Restaurants (existing market)</a:t>
-            </a:r>
-            <a:endParaRPr lang="en-US" sz="1000" dirty="0"/>
-          </a:p>
-        </p:txBody>
-      </p:sp>
-      <p:sp>
-        <p:nvSpPr>
-          <p:cNvPr id="32" name="Text 29"/>
-          <p:cNvSpPr/>
-          <p:nvPr/>
-        </p:nvSpPr>
-        <p:spPr>
-          <a:xfrm>
-            <a:off x="10195560" y="5184648"/>
-            <a:ext cx="1463040" cy="274320"/>
-          </a:xfrm>
-          <a:prstGeom prst="rect">
-            <a:avLst/>
-          </a:prstGeom>
-          <a:noFill/>
-          <a:ln/>
-        </p:spPr>
-        <p:txBody>
-          <a:bodyPr wrap="square" rtlCol="0" anchor="ctr"/>
-          <a:lstStyle/>
-          <a:p>
-            <a:pPr algn="r" indent="0" marL="0">
-              <a:buNone/>
-            </a:pPr>
-            <a:r>
-              <a:rPr lang="en-US" sz="1000" b="1" dirty="0">
-                <a:solidFill>
-                  <a:srgbClr val="2C7A57"/>
-                </a:solidFill>
-                <a:latin typeface="Calibri" pitchFamily="34" charset="0"/>
-                <a:ea typeface="Calibri" pitchFamily="34" charset="-122"/>
-                <a:cs typeface="Calibri" pitchFamily="34" charset="-120"/>
-              </a:rPr>
-              <a:t>$524</a:t>
-            </a:r>
-            <a:endParaRPr lang="en-US" sz="1000" dirty="0"/>
-          </a:p>
-        </p:txBody>
-      </p:sp>
-      <p:sp>
-        <p:nvSpPr>
-          <p:cNvPr id="33" name="Text 30"/>
-          <p:cNvSpPr/>
-          <p:nvPr/>
-        </p:nvSpPr>
-        <p:spPr>
-          <a:xfrm>
-            <a:off x="6263640" y="5477256"/>
-            <a:ext cx="4023360" cy="274320"/>
-          </a:xfrm>
-          <a:prstGeom prst="rect">
-            <a:avLst/>
-          </a:prstGeom>
-          <a:noFill/>
-          <a:ln/>
-        </p:spPr>
-        <p:txBody>
-          <a:bodyPr wrap="square" rtlCol="0" anchor="ctr"/>
-          <a:lstStyle/>
-          <a:p>
-            <a:pPr indent="0" marL="0">
-              <a:buNone/>
-            </a:pPr>
-            <a:r>
-              <a:rPr lang="en-US" sz="1000" dirty="0">
-                <a:solidFill>
-                  <a:srgbClr val="1A1A2E"/>
-                </a:solidFill>
-                <a:latin typeface="Calibri" pitchFamily="34" charset="0"/>
-                <a:ea typeface="Calibri" pitchFamily="34" charset="-122"/>
-                <a:cs typeface="Calibri" pitchFamily="34" charset="-120"/>
-              </a:rPr>
-              <a:t>P0000 — Bars (new market)</a:t>
-            </a:r>
-            <a:endParaRPr lang="en-US" sz="1000" dirty="0"/>
-          </a:p>
-        </p:txBody>
-      </p:sp>
-      <p:sp>
-        <p:nvSpPr>
-          <p:cNvPr id="34" name="Text 31"/>
-          <p:cNvSpPr/>
-          <p:nvPr/>
-        </p:nvSpPr>
-        <p:spPr>
-          <a:xfrm>
-            <a:off x="10195560" y="5477256"/>
-            <a:ext cx="1463040" cy="274320"/>
-          </a:xfrm>
-          <a:prstGeom prst="rect">
-            <a:avLst/>
-          </a:prstGeom>
-          <a:noFill/>
-          <a:ln/>
-        </p:spPr>
-        <p:txBody>
-          <a:bodyPr wrap="square" rtlCol="0" anchor="ctr"/>
-          <a:lstStyle/>
-          <a:p>
-            <a:pPr algn="r" indent="0" marL="0">
-              <a:buNone/>
-            </a:pPr>
-            <a:r>
-              <a:rPr lang="en-US" sz="1000" b="1" dirty="0">
-                <a:solidFill>
-                  <a:srgbClr val="2C7A57"/>
-                </a:solidFill>
-                <a:latin typeface="Calibri" pitchFamily="34" charset="0"/>
-                <a:ea typeface="Calibri" pitchFamily="34" charset="-122"/>
-                <a:cs typeface="Calibri" pitchFamily="34" charset="-120"/>
-              </a:rPr>
-              <a:t>$500</a:t>
-            </a:r>
-            <a:endParaRPr lang="en-US" sz="1000" dirty="0"/>
-          </a:p>
-        </p:txBody>
-      </p:sp>
-      <p:sp>
-        <p:nvSpPr>
-          <p:cNvPr id="35" name="Text 32"/>
-          <p:cNvSpPr/>
-          <p:nvPr/>
-        </p:nvSpPr>
-        <p:spPr>
-          <a:xfrm>
-            <a:off x="6263640" y="5769864"/>
-            <a:ext cx="4023360" cy="274320"/>
-          </a:xfrm>
-          <a:prstGeom prst="rect">
-            <a:avLst/>
-          </a:prstGeom>
-          <a:noFill/>
-          <a:ln/>
-        </p:spPr>
-        <p:txBody>
-          <a:bodyPr wrap="square" rtlCol="0" anchor="ctr"/>
-          <a:lstStyle/>
-          <a:p>
-            <a:pPr indent="0" marL="0">
-              <a:buNone/>
-            </a:pPr>
-            <a:r>
-              <a:rPr lang="en-US" sz="1000" dirty="0">
-                <a:solidFill>
-                  <a:srgbClr val="1A1A2E"/>
-                </a:solidFill>
-                <a:latin typeface="Calibri" pitchFamily="34" charset="0"/>
-                <a:ea typeface="Calibri" pitchFamily="34" charset="-122"/>
-                <a:cs typeface="Calibri" pitchFamily="34" charset="-120"/>
-              </a:rPr>
-              <a:t>P0001 — Bars (new market)</a:t>
-            </a:r>
-            <a:endParaRPr lang="en-US" sz="1000" dirty="0"/>
-          </a:p>
-        </p:txBody>
-      </p:sp>
-      <p:sp>
-        <p:nvSpPr>
-          <p:cNvPr id="36" name="Text 33"/>
-          <p:cNvSpPr/>
-          <p:nvPr/>
-        </p:nvSpPr>
-        <p:spPr>
-          <a:xfrm>
-            <a:off x="10195560" y="5769864"/>
-            <a:ext cx="1463040" cy="274320"/>
-          </a:xfrm>
-          <a:prstGeom prst="rect">
-            <a:avLst/>
-          </a:prstGeom>
-          <a:noFill/>
-          <a:ln/>
-        </p:spPr>
-        <p:txBody>
-          <a:bodyPr wrap="square" rtlCol="0" anchor="ctr"/>
-          <a:lstStyle/>
-          <a:p>
-            <a:pPr algn="r" indent="0" marL="0">
-              <a:buNone/>
-            </a:pPr>
-            <a:r>
-              <a:rPr lang="en-US" sz="1000" b="1" dirty="0">
-                <a:solidFill>
-                  <a:srgbClr val="2C7A57"/>
-                </a:solidFill>
-                <a:latin typeface="Calibri" pitchFamily="34" charset="0"/>
-                <a:ea typeface="Calibri" pitchFamily="34" charset="-122"/>
-                <a:cs typeface="Calibri" pitchFamily="34" charset="-120"/>
-              </a:rPr>
-              <a:t>$496</a:t>
-            </a:r>
-            <a:endParaRPr lang="en-US" sz="1000" dirty="0"/>
-          </a:p>
-        </p:txBody>
-      </p:sp>
-      <p:sp>
-        <p:nvSpPr>
-          <p:cNvPr id="37" name="Text 34"/>
-          <p:cNvSpPr/>
-          <p:nvPr/>
-        </p:nvSpPr>
-        <p:spPr>
-          <a:xfrm>
-            <a:off x="548640" y="6080760"/>
-            <a:ext cx="11064240" cy="411480"/>
-          </a:xfrm>
-          <a:prstGeom prst="rect">
-            <a:avLst/>
-          </a:prstGeom>
-          <a:noFill/>
-          <a:ln/>
-        </p:spPr>
-        <p:txBody>
-          <a:bodyPr wrap="square" rtlCol="0" anchor="ctr"/>
-          <a:lstStyle/>
-          <a:p>
-            <a:pPr indent="0" marL="0">
-              <a:lnSpc>
-                <a:spcPts val="1200"/>
-              </a:lnSpc>
-              <a:buNone/>
-            </a:pPr>
-            <a:r>
-              <a:rPr lang="en-US" sz="1000" i="1" dirty="0">
-                <a:solidFill>
-                  <a:srgbClr val="5B6178"/>
-                </a:solidFill>
-                <a:latin typeface="Calibri" pitchFamily="34" charset="0"/>
-                <a:ea typeface="Calibri" pitchFamily="34" charset="-122"/>
-                <a:cs typeface="Calibri" pitchFamily="34" charset="-120"/>
-              </a:rPr>
-              <a:t>Flags come from 5-fold out-of-fold predictions, never a model scoring the venue it was trained on. The calibrated-lift feature carries near-zero importance — honest, since it's constant within venue_type once venue_type itself is a feature.</a:t>
-            </a:r>
-            <a:endParaRPr lang="en-US" sz="1000" dirty="0"/>
-          </a:p>
-        </p:txBody>
-      </p:sp>
-      <p:sp>
-        <p:nvSpPr>
-          <p:cNvPr id="38" name="Text 35"/>
-          <p:cNvSpPr/>
-          <p:nvPr/>
-        </p:nvSpPr>
-        <p:spPr>
-          <a:xfrm>
-            <a:off x="457200" y="6537960"/>
-            <a:ext cx="7315200" cy="274320"/>
-          </a:xfrm>
-          <a:prstGeom prst="rect">
-            <a:avLst/>
-          </a:prstGeom>
-          <a:noFill/>
-          <a:ln/>
-        </p:spPr>
-        <p:txBody>
-          <a:bodyPr wrap="square" rtlCol="0" anchor="ctr"/>
-          <a:lstStyle/>
-          <a:p>
-            <a:pPr indent="0" marL="0">
-              <a:buNone/>
-            </a:pPr>
-            <a:r>
-              <a:rPr lang="en-US" sz="900" dirty="0">
-                <a:solidFill>
-                  <a:srgbClr val="5B6178"/>
-                </a:solidFill>
-                <a:latin typeface="Calibri" pitchFamily="34" charset="0"/>
-                <a:ea typeface="Calibri" pitchFamily="34" charset="-122"/>
-                <a:cs typeface="Calibri" pitchFamily="34" charset="-120"/>
-              </a:rPr>
-              <a:t>Venue economics</a:t>
-            </a:r>
-            <a:endParaRPr lang="en-US" sz="900" dirty="0"/>
           </a:p>
         </p:txBody>
       </p:sp>
@@ -9181,7 +8984,7 @@
                 <a:ea typeface="Cambria" pitchFamily="34" charset="-122"/>
                 <a:cs typeface="Cambria" pitchFamily="34" charset="-120"/>
               </a:rPr>
-              <a:t>Predicting venue churn risk, honestly</a:t>
+              <a:t>Predicting venue ad-revenue, honestly</a:t>
             </a:r>
             <a:endParaRPr lang="en-US" sz="2500" dirty="0"/>
           </a:p>
@@ -9208,7 +9011,7 @@
           </a:solidFill>
           <a:ln w="15875">
             <a:solidFill>
-              <a:srgbClr val="8E3B60"/>
+              <a:srgbClr val="2C7A57"/>
             </a:solidFill>
             <a:prstDash val="solid"/>
           </a:ln>
@@ -9241,13 +9044,13 @@
             <a:r>
               <a:rPr lang="en-US" sz="950" b="1" dirty="0">
                 <a:solidFill>
-                  <a:srgbClr val="8E3B60"/>
-                </a:solidFill>
-                <a:latin typeface="Calibri" pitchFamily="34" charset="0"/>
-                <a:ea typeface="Calibri" pitchFamily="34" charset="-122"/>
-                <a:cs typeface="Calibri" pitchFamily="34" charset="-120"/>
-              </a:rPr>
-              <a:t>Step 6 of 6 · Answers Q4</a:t>
+                  <a:srgbClr val="2C7A57"/>
+                </a:solidFill>
+                <a:latin typeface="Calibri" pitchFamily="34" charset="0"/>
+                <a:ea typeface="Calibri" pitchFamily="34" charset="-122"/>
+                <a:cs typeface="Calibri" pitchFamily="34" charset="-120"/>
+              </a:rPr>
+              <a:t>Step 5 of 6 · Answers Q3</a:t>
             </a:r>
             <a:endParaRPr lang="en-US" sz="950" dirty="0"/>
           </a:p>
@@ -9278,7 +9081,7 @@
               <a:buNone/>
             </a:pPr>
             <a:r>
-              <a:rPr lang="en-US" sz="1200" i="1" dirty="0">
+              <a:rPr lang="en-US" sz="1250" i="1" dirty="0">
                 <a:solidFill>
                   <a:srgbClr val="5B6178"/>
                 </a:solidFill>
@@ -9286,9 +9089,9 @@
                 <a:ea typeface="Calibri" pitchFamily="34" charset="-122"/>
                 <a:cs typeface="Calibri" pitchFamily="34" charset="-120"/>
               </a:rPr>
-              <a:t>Gradient-boosted classifier on ops-visible signals (engagement, uptime, complaints, competitor outreach) — the other half of "what makes a venue valuable and what puts it at risk."</a:t>
-            </a:r>
-            <a:endParaRPr lang="en-US" sz="1200" dirty="0"/>
+              <a:t>Gradient-boosted trees on observable venue characteristics + the calibrated per-exposure lift as a feature.</a:t>
+            </a:r>
+            <a:endParaRPr lang="en-US" sz="1250" dirty="0"/>
           </a:p>
         </p:txBody>
       </p:sp>
@@ -9347,7 +9150,7 @@
                 <a:ea typeface="Calibri" pitchFamily="34" charset="-122"/>
                 <a:cs typeface="Calibri" pitchFamily="34" charset="-120"/>
               </a:rPr>
-              <a:t>0.65</a:t>
+              <a:t>0.84</a:t>
             </a:r>
             <a:endParaRPr lang="en-US" sz="2200" dirty="0"/>
           </a:p>
@@ -9378,7 +9181,7 @@
               <a:buNone/>
             </a:pPr>
             <a:r>
-              <a:rPr lang="en-US" sz="900" dirty="0">
+              <a:rPr lang="en-US" sz="950" dirty="0">
                 <a:solidFill>
                   <a:srgbClr val="5B6178"/>
                 </a:solidFill>
@@ -9386,9 +9189,9 @@
                 <a:ea typeface="Calibri" pitchFamily="34" charset="-122"/>
                 <a:cs typeface="Calibri" pitchFamily="34" charset="-120"/>
               </a:rPr>
-              <a:t>Held-out AUC</a:t>
-            </a:r>
-            <a:endParaRPr lang="en-US" sz="900" dirty="0"/>
+              <a:t>Held-out R²</a:t>
+            </a:r>
+            <a:endParaRPr lang="en-US" sz="950" dirty="0"/>
           </a:p>
         </p:txBody>
       </p:sp>
@@ -9447,7 +9250,7 @@
                 <a:ea typeface="Calibri" pitchFamily="34" charset="-122"/>
                 <a:cs typeface="Calibri" pitchFamily="34" charset="-120"/>
               </a:rPr>
-              <a:t>0.27</a:t>
+              <a:t>22.1%</a:t>
             </a:r>
             <a:endParaRPr lang="en-US" sz="2200" dirty="0"/>
           </a:p>
@@ -9478,7 +9281,7 @@
               <a:buNone/>
             </a:pPr>
             <a:r>
-              <a:rPr lang="en-US" sz="900" dirty="0">
+              <a:rPr lang="en-US" sz="950" dirty="0">
                 <a:solidFill>
                   <a:srgbClr val="5B6178"/>
                 </a:solidFill>
@@ -9486,9 +9289,9 @@
                 <a:ea typeface="Calibri" pitchFamily="34" charset="-122"/>
                 <a:cs typeface="Calibri" pitchFamily="34" charset="-120"/>
               </a:rPr>
-              <a:t>Held-out PR-AUC</a:t>
-            </a:r>
-            <a:endParaRPr lang="en-US" sz="900" dirty="0"/>
+              <a:t>Held-out MAPE</a:t>
+            </a:r>
+            <a:endParaRPr lang="en-US" sz="950" dirty="0"/>
           </a:p>
         </p:txBody>
       </p:sp>
@@ -9547,7 +9350,7 @@
                 <a:ea typeface="Calibri" pitchFamily="34" charset="-122"/>
                 <a:cs typeface="Calibri" pitchFamily="34" charset="-120"/>
               </a:rPr>
-              <a:t>0.13</a:t>
+              <a:t>$45</a:t>
             </a:r>
             <a:endParaRPr lang="en-US" sz="2200" dirty="0"/>
           </a:p>
@@ -9578,7 +9381,7 @@
               <a:buNone/>
             </a:pPr>
             <a:r>
-              <a:rPr lang="en-US" sz="900" dirty="0">
+              <a:rPr lang="en-US" sz="950" dirty="0">
                 <a:solidFill>
                   <a:srgbClr val="5B6178"/>
                 </a:solidFill>
@@ -9586,9 +9389,9 @@
                 <a:ea typeface="Calibri" pitchFamily="34" charset="-122"/>
                 <a:cs typeface="Calibri" pitchFamily="34" charset="-120"/>
               </a:rPr>
-              <a:t>Brier score</a:t>
-            </a:r>
-            <a:endParaRPr lang="en-US" sz="900" dirty="0"/>
+              <a:t>Held-out MAE</a:t>
+            </a:r>
+            <a:endParaRPr lang="en-US" sz="950" dirty="0"/>
           </a:p>
         </p:txBody>
       </p:sp>
@@ -9678,7 +9481,7 @@
               <a:buNone/>
             </a:pPr>
             <a:r>
-              <a:rPr lang="en-US" sz="900" dirty="0">
+              <a:rPr lang="en-US" sz="950" dirty="0">
                 <a:solidFill>
                   <a:srgbClr val="5B6178"/>
                 </a:solidFill>
@@ -9688,7 +9491,7 @@
               </a:rPr>
               <a:t>Venues flagged</a:t>
             </a:r>
-            <a:endParaRPr lang="en-US" sz="900" dirty="0"/>
+            <a:endParaRPr lang="en-US" sz="950" dirty="0"/>
           </a:p>
         </p:txBody>
       </p:sp>
@@ -9717,7 +9520,7 @@
         <p:spPr>
           <a:xfrm>
             <a:off x="6263640" y="2880360"/>
-            <a:ext cx="5394960" cy="256032"/>
+            <a:ext cx="5394960" cy="274320"/>
           </a:xfrm>
           <a:prstGeom prst="rect">
             <a:avLst/>
@@ -9741,7 +9544,7 @@
                 <a:ea typeface="Cambria" pitchFamily="34" charset="-122"/>
                 <a:cs typeface="Cambria" pitchFamily="34" charset="-120"/>
               </a:rPr>
-              <a:t>Top at-risk venues (of 20 flagged, by OOF risk)</a:t>
+              <a:t>Top under-monetized venues (of 20 flagged)</a:t>
             </a:r>
             <a:endParaRPr lang="en-US" sz="1200" dirty="0"/>
           </a:p>
@@ -9755,8 +9558,8 @@
         </p:nvSpPr>
         <p:spPr>
           <a:xfrm>
-            <a:off x="6263640" y="3172968"/>
-            <a:ext cx="3977640" cy="219456"/>
+            <a:off x="6263640" y="3209544"/>
+            <a:ext cx="3657600" cy="274320"/>
           </a:xfrm>
           <a:prstGeom prst="rect">
             <a:avLst/>
@@ -9780,7 +9583,7 @@
                 <a:ea typeface="Calibri" pitchFamily="34" charset="-122"/>
                 <a:cs typeface="Calibri" pitchFamily="34" charset="-120"/>
               </a:rPr>
-              <a:t>Venue #281 (Bars)</a:t>
+              <a:t>Venue #85 (Restaurants)</a:t>
             </a:r>
             <a:endParaRPr lang="en-US" sz="1000" dirty="0"/>
           </a:p>
@@ -9794,8 +9597,8 @@
         </p:nvSpPr>
         <p:spPr>
           <a:xfrm>
-            <a:off x="10241280" y="3172968"/>
-            <a:ext cx="1417320" cy="219456"/>
+            <a:off x="9966960" y="3209544"/>
+            <a:ext cx="1691640" cy="274320"/>
           </a:xfrm>
           <a:prstGeom prst="rect">
             <a:avLst/>
@@ -9819,7 +9622,7 @@
                 <a:ea typeface="Calibri" pitchFamily="34" charset="-122"/>
                 <a:cs typeface="Calibri" pitchFamily="34" charset="-120"/>
               </a:rPr>
-              <a:t>60%</a:t>
+              <a:t>-62%</a:t>
             </a:r>
             <a:endParaRPr lang="en-US" sz="1000" dirty="0"/>
           </a:p>
@@ -9833,34 +9636,34 @@
         </p:nvSpPr>
         <p:spPr>
           <a:xfrm>
-            <a:off x="6263640" y="3374136"/>
-            <a:ext cx="5394960" cy="201168"/>
-          </a:xfrm>
-          <a:prstGeom prst="rect">
-            <a:avLst/>
-          </a:prstGeom>
-          <a:noFill/>
-          <a:ln/>
-        </p:spPr>
-        <p:txBody>
-          <a:bodyPr wrap="square" rtlCol="0" anchor="ctr"/>
-          <a:lstStyle/>
-          <a:p>
-            <a:pPr indent="0" marL="0">
-              <a:buNone/>
-            </a:pPr>
-            <a:r>
-              <a:rPr lang="en-US" sz="900" i="1" dirty="0">
-                <a:solidFill>
-                  <a:srgbClr val="8A4B0A"/>
-                </a:solidFill>
-                <a:latin typeface="Calibri" pitchFamily="34" charset="0"/>
-                <a:ea typeface="Calibri" pitchFamily="34" charset="-122"/>
-                <a:cs typeface="Calibri" pitchFamily="34" charset="-120"/>
-              </a:rPr>
-              <a:t>engagement declining → content/placement review</a:t>
-            </a:r>
-            <a:endParaRPr lang="en-US" sz="900" dirty="0"/>
+            <a:off x="6263640" y="3502152"/>
+            <a:ext cx="3657600" cy="274320"/>
+          </a:xfrm>
+          <a:prstGeom prst="rect">
+            <a:avLst/>
+          </a:prstGeom>
+          <a:noFill/>
+          <a:ln/>
+        </p:spPr>
+        <p:txBody>
+          <a:bodyPr wrap="square" rtlCol="0" anchor="ctr"/>
+          <a:lstStyle/>
+          <a:p>
+            <a:pPr indent="0" marL="0">
+              <a:buNone/>
+            </a:pPr>
+            <a:r>
+              <a:rPr lang="en-US" sz="1000" dirty="0">
+                <a:solidFill>
+                  <a:srgbClr val="1A1A2E"/>
+                </a:solidFill>
+                <a:latin typeface="Calibri" pitchFamily="34" charset="0"/>
+                <a:ea typeface="Calibri" pitchFamily="34" charset="-122"/>
+                <a:cs typeface="Calibri" pitchFamily="34" charset="-120"/>
+              </a:rPr>
+              <a:t>Venue #309 (Waiting Rooms)</a:t>
+            </a:r>
+            <a:endParaRPr lang="en-US" sz="1000" dirty="0"/>
           </a:p>
         </p:txBody>
       </p:sp>
@@ -9872,8 +9675,47 @@
         </p:nvSpPr>
         <p:spPr>
           <a:xfrm>
-            <a:off x="6263640" y="3593592"/>
-            <a:ext cx="3977640" cy="219456"/>
+            <a:off x="9966960" y="3502152"/>
+            <a:ext cx="1691640" cy="274320"/>
+          </a:xfrm>
+          <a:prstGeom prst="rect">
+            <a:avLst/>
+          </a:prstGeom>
+          <a:noFill/>
+          <a:ln/>
+        </p:spPr>
+        <p:txBody>
+          <a:bodyPr wrap="square" rtlCol="0" anchor="ctr"/>
+          <a:lstStyle/>
+          <a:p>
+            <a:pPr algn="r" indent="0" marL="0">
+              <a:buNone/>
+            </a:pPr>
+            <a:r>
+              <a:rPr lang="en-US" sz="1000" b="1" dirty="0">
+                <a:solidFill>
+                  <a:srgbClr val="B8500A"/>
+                </a:solidFill>
+                <a:latin typeface="Calibri" pitchFamily="34" charset="0"/>
+                <a:ea typeface="Calibri" pitchFamily="34" charset="-122"/>
+                <a:cs typeface="Calibri" pitchFamily="34" charset="-120"/>
+              </a:rPr>
+              <a:t>-61%</a:t>
+            </a:r>
+            <a:endParaRPr lang="en-US" sz="1000" dirty="0"/>
+          </a:p>
+        </p:txBody>
+      </p:sp>
+      <p:sp>
+        <p:nvSpPr>
+          <p:cNvPr id="24" name="Text 21"/>
+          <p:cNvSpPr/>
+          <p:nvPr/>
+        </p:nvSpPr>
+        <p:spPr>
+          <a:xfrm>
+            <a:off x="6263640" y="3794760"/>
+            <a:ext cx="3657600" cy="274320"/>
           </a:xfrm>
           <a:prstGeom prst="rect">
             <a:avLst/>
@@ -9897,7 +9739,7 @@
                 <a:ea typeface="Calibri" pitchFamily="34" charset="-122"/>
                 <a:cs typeface="Calibri" pitchFamily="34" charset="-120"/>
               </a:rPr>
-              <a:t>Venue #200 (Bars)</a:t>
+              <a:t>Venue #53 (Restaurants)</a:t>
             </a:r>
             <a:endParaRPr lang="en-US" sz="1000" dirty="0"/>
           </a:p>
@@ -9905,14 +9747,14 @@
       </p:sp>
       <p:sp>
         <p:nvSpPr>
-          <p:cNvPr id="24" name="Text 21"/>
-          <p:cNvSpPr/>
-          <p:nvPr/>
-        </p:nvSpPr>
-        <p:spPr>
-          <a:xfrm>
-            <a:off x="10241280" y="3593592"/>
-            <a:ext cx="1417320" cy="219456"/>
+          <p:cNvPr id="25" name="Text 22"/>
+          <p:cNvSpPr/>
+          <p:nvPr/>
+        </p:nvSpPr>
+        <p:spPr>
+          <a:xfrm>
+            <a:off x="9966960" y="3794760"/>
+            <a:ext cx="1691640" cy="274320"/>
           </a:xfrm>
           <a:prstGeom prst="rect">
             <a:avLst/>
@@ -9936,7 +9778,7 @@
                 <a:ea typeface="Calibri" pitchFamily="34" charset="-122"/>
                 <a:cs typeface="Calibri" pitchFamily="34" charset="-120"/>
               </a:rPr>
-              <a:t>55%</a:t>
+              <a:t>-61%</a:t>
             </a:r>
             <a:endParaRPr lang="en-US" sz="1000" dirty="0"/>
           </a:p>
@@ -9944,53 +9786,14 @@
       </p:sp>
       <p:sp>
         <p:nvSpPr>
-          <p:cNvPr id="25" name="Text 22"/>
-          <p:cNvSpPr/>
-          <p:nvPr/>
-        </p:nvSpPr>
-        <p:spPr>
-          <a:xfrm>
-            <a:off x="6263640" y="3794760"/>
-            <a:ext cx="5394960" cy="201168"/>
-          </a:xfrm>
-          <a:prstGeom prst="rect">
-            <a:avLst/>
-          </a:prstGeom>
-          <a:noFill/>
-          <a:ln/>
-        </p:spPr>
-        <p:txBody>
-          <a:bodyPr wrap="square" rtlCol="0" anchor="ctr"/>
-          <a:lstStyle/>
-          <a:p>
-            <a:pPr indent="0" marL="0">
-              <a:buNone/>
-            </a:pPr>
-            <a:r>
-              <a:rPr lang="en-US" sz="900" i="1" dirty="0">
-                <a:solidFill>
-                  <a:srgbClr val="8A4B0A"/>
-                </a:solidFill>
-                <a:latin typeface="Calibri" pitchFamily="34" charset="0"/>
-                <a:ea typeface="Calibri" pitchFamily="34" charset="-122"/>
-                <a:cs typeface="Calibri" pitchFamily="34" charset="-120"/>
-              </a:rPr>
-              <a:t>engagement declining → content/placement review</a:t>
-            </a:r>
-            <a:endParaRPr lang="en-US" sz="900" dirty="0"/>
-          </a:p>
-        </p:txBody>
-      </p:sp>
-      <p:sp>
-        <p:nvSpPr>
           <p:cNvPr id="26" name="Text 23"/>
           <p:cNvSpPr/>
           <p:nvPr/>
         </p:nvSpPr>
         <p:spPr>
           <a:xfrm>
-            <a:off x="6263640" y="4014216"/>
-            <a:ext cx="3977640" cy="219456"/>
+            <a:off x="6263640" y="4087368"/>
+            <a:ext cx="3657600" cy="274320"/>
           </a:xfrm>
           <a:prstGeom prst="rect">
             <a:avLst/>
@@ -10014,7 +9817,7 @@
                 <a:ea typeface="Calibri" pitchFamily="34" charset="-122"/>
                 <a:cs typeface="Calibri" pitchFamily="34" charset="-120"/>
               </a:rPr>
-              <a:t>Venue #12 (Restaurants)</a:t>
+              <a:t>Venue #247 (Bars)</a:t>
             </a:r>
             <a:endParaRPr lang="en-US" sz="1000" dirty="0"/>
           </a:p>
@@ -10028,8 +9831,8 @@
         </p:nvSpPr>
         <p:spPr>
           <a:xfrm>
-            <a:off x="10241280" y="4014216"/>
-            <a:ext cx="1417320" cy="219456"/>
+            <a:off x="9966960" y="4087368"/>
+            <a:ext cx="1691640" cy="274320"/>
           </a:xfrm>
           <a:prstGeom prst="rect">
             <a:avLst/>
@@ -10053,7 +9856,7 @@
                 <a:ea typeface="Calibri" pitchFamily="34" charset="-122"/>
                 <a:cs typeface="Calibri" pitchFamily="34" charset="-120"/>
               </a:rPr>
-              <a:t>52%</a:t>
+              <a:t>-60%</a:t>
             </a:r>
             <a:endParaRPr lang="en-US" sz="1000" dirty="0"/>
           </a:p>
@@ -10067,47 +9870,8 @@
         </p:nvSpPr>
         <p:spPr>
           <a:xfrm>
-            <a:off x="6263640" y="4215384"/>
-            <a:ext cx="5394960" cy="201168"/>
-          </a:xfrm>
-          <a:prstGeom prst="rect">
-            <a:avLst/>
-          </a:prstGeom>
-          <a:noFill/>
-          <a:ln/>
-        </p:spPr>
-        <p:txBody>
-          <a:bodyPr wrap="square" rtlCol="0" anchor="ctr"/>
-          <a:lstStyle/>
-          <a:p>
-            <a:pPr indent="0" marL="0">
-              <a:buNone/>
-            </a:pPr>
-            <a:r>
-              <a:rPr lang="en-US" sz="900" i="1" dirty="0">
-                <a:solidFill>
-                  <a:srgbClr val="8A4B0A"/>
-                </a:solidFill>
-                <a:latin typeface="Calibri" pitchFamily="34" charset="0"/>
-                <a:ea typeface="Calibri" pitchFamily="34" charset="-122"/>
-                <a:cs typeface="Calibri" pitchFamily="34" charset="-120"/>
-              </a:rPr>
-              <a:t>uptime issue → dispatch technical support</a:t>
-            </a:r>
-            <a:endParaRPr lang="en-US" sz="900" dirty="0"/>
-          </a:p>
-        </p:txBody>
-      </p:sp>
-      <p:sp>
-        <p:nvSpPr>
-          <p:cNvPr id="29" name="Text 26"/>
-          <p:cNvSpPr/>
-          <p:nvPr/>
-        </p:nvSpPr>
-        <p:spPr>
-          <a:xfrm>
-            <a:off x="6263640" y="4526280"/>
-            <a:ext cx="5394960" cy="237744"/>
+            <a:off x="6263640" y="4562856"/>
+            <a:ext cx="5394960" cy="274320"/>
           </a:xfrm>
           <a:prstGeom prst="rect">
             <a:avLst/>
@@ -10131,7 +9895,7 @@
                 <a:ea typeface="Cambria" pitchFamily="34" charset="-122"/>
                 <a:cs typeface="Cambria" pitchFamily="34" charset="-120"/>
               </a:rPr>
-              <a:t>Priority quadrant (Q3 revenue × Q4 risk)</a:t>
+              <a:t>Top prospect venues (expansion priority)</a:t>
             </a:r>
             <a:endParaRPr lang="en-US" sz="1200" dirty="0"/>
           </a:p>
@@ -10139,14 +9903,92 @@
       </p:sp>
       <p:sp>
         <p:nvSpPr>
+          <p:cNvPr id="29" name="Text 26"/>
+          <p:cNvSpPr/>
+          <p:nvPr/>
+        </p:nvSpPr>
+        <p:spPr>
+          <a:xfrm>
+            <a:off x="6263640" y="4892040"/>
+            <a:ext cx="4023360" cy="274320"/>
+          </a:xfrm>
+          <a:prstGeom prst="rect">
+            <a:avLst/>
+          </a:prstGeom>
+          <a:noFill/>
+          <a:ln/>
+        </p:spPr>
+        <p:txBody>
+          <a:bodyPr wrap="square" rtlCol="0" anchor="ctr"/>
+          <a:lstStyle/>
+          <a:p>
+            <a:pPr indent="0" marL="0">
+              <a:buNone/>
+            </a:pPr>
+            <a:r>
+              <a:rPr lang="en-US" sz="1000" dirty="0">
+                <a:solidFill>
+                  <a:srgbClr val="1A1A2E"/>
+                </a:solidFill>
+                <a:latin typeface="Calibri" pitchFamily="34" charset="0"/>
+                <a:ea typeface="Calibri" pitchFamily="34" charset="-122"/>
+                <a:cs typeface="Calibri" pitchFamily="34" charset="-120"/>
+              </a:rPr>
+              <a:t>P0018 — Bars (existing market)</a:t>
+            </a:r>
+            <a:endParaRPr lang="en-US" sz="1000" dirty="0"/>
+          </a:p>
+        </p:txBody>
+      </p:sp>
+      <p:sp>
+        <p:nvSpPr>
           <p:cNvPr id="30" name="Text 27"/>
           <p:cNvSpPr/>
           <p:nvPr/>
         </p:nvSpPr>
         <p:spPr>
           <a:xfrm>
-            <a:off x="6263640" y="4800600"/>
-            <a:ext cx="4023360" cy="237744"/>
+            <a:off x="10195560" y="4892040"/>
+            <a:ext cx="1463040" cy="274320"/>
+          </a:xfrm>
+          <a:prstGeom prst="rect">
+            <a:avLst/>
+          </a:prstGeom>
+          <a:noFill/>
+          <a:ln/>
+        </p:spPr>
+        <p:txBody>
+          <a:bodyPr wrap="square" rtlCol="0" anchor="ctr"/>
+          <a:lstStyle/>
+          <a:p>
+            <a:pPr algn="r" indent="0" marL="0">
+              <a:buNone/>
+            </a:pPr>
+            <a:r>
+              <a:rPr lang="en-US" sz="1000" b="1" dirty="0">
+                <a:solidFill>
+                  <a:srgbClr val="2C7A57"/>
+                </a:solidFill>
+                <a:latin typeface="Calibri" pitchFamily="34" charset="0"/>
+                <a:ea typeface="Calibri" pitchFamily="34" charset="-122"/>
+                <a:cs typeface="Calibri" pitchFamily="34" charset="-120"/>
+              </a:rPr>
+              <a:t>$684</a:t>
+            </a:r>
+            <a:endParaRPr lang="en-US" sz="1000" dirty="0"/>
+          </a:p>
+        </p:txBody>
+      </p:sp>
+      <p:sp>
+        <p:nvSpPr>
+          <p:cNvPr id="31" name="Text 28"/>
+          <p:cNvSpPr/>
+          <p:nvPr/>
+        </p:nvSpPr>
+        <p:spPr>
+          <a:xfrm>
+            <a:off x="6263640" y="5184648"/>
+            <a:ext cx="4023360" cy="274320"/>
           </a:xfrm>
           <a:prstGeom prst="rect">
             <a:avLst/>
@@ -10170,7 +10012,7 @@
                 <a:ea typeface="Calibri" pitchFamily="34" charset="-122"/>
                 <a:cs typeface="Calibri" pitchFamily="34" charset="-120"/>
               </a:rPr>
-              <a:t>Save now (high value, high risk)</a:t>
+              <a:t>P0055 — Restaurants (existing market)</a:t>
             </a:r>
             <a:endParaRPr lang="en-US" sz="1000" dirty="0"/>
           </a:p>
@@ -10178,14 +10020,14 @@
       </p:sp>
       <p:sp>
         <p:nvSpPr>
-          <p:cNvPr id="31" name="Text 28"/>
-          <p:cNvSpPr/>
-          <p:nvPr/>
-        </p:nvSpPr>
-        <p:spPr>
-          <a:xfrm>
-            <a:off x="10195560" y="4800600"/>
-            <a:ext cx="1463040" cy="237744"/>
+          <p:cNvPr id="32" name="Text 29"/>
+          <p:cNvSpPr/>
+          <p:nvPr/>
+        </p:nvSpPr>
+        <p:spPr>
+          <a:xfrm>
+            <a:off x="10195560" y="5184648"/>
+            <a:ext cx="1463040" cy="274320"/>
           </a:xfrm>
           <a:prstGeom prst="rect">
             <a:avLst/>
@@ -10203,13 +10045,13 @@
             <a:r>
               <a:rPr lang="en-US" sz="1000" b="1" dirty="0">
                 <a:solidFill>
-                  <a:srgbClr val="B8500A"/>
-                </a:solidFill>
-                <a:latin typeface="Calibri" pitchFamily="34" charset="0"/>
-                <a:ea typeface="Calibri" pitchFamily="34" charset="-122"/>
-                <a:cs typeface="Calibri" pitchFamily="34" charset="-120"/>
-              </a:rPr>
-              <a:t>136</a:t>
+                  <a:srgbClr val="2C7A57"/>
+                </a:solidFill>
+                <a:latin typeface="Calibri" pitchFamily="34" charset="0"/>
+                <a:ea typeface="Calibri" pitchFamily="34" charset="-122"/>
+                <a:cs typeface="Calibri" pitchFamily="34" charset="-120"/>
+              </a:rPr>
+              <a:t>$524</a:t>
             </a:r>
             <a:endParaRPr lang="en-US" sz="1000" dirty="0"/>
           </a:p>
@@ -10217,14 +10059,14 @@
       </p:sp>
       <p:sp>
         <p:nvSpPr>
-          <p:cNvPr id="32" name="Text 29"/>
-          <p:cNvSpPr/>
-          <p:nvPr/>
-        </p:nvSpPr>
-        <p:spPr>
-          <a:xfrm>
-            <a:off x="6263640" y="5047488"/>
-            <a:ext cx="4023360" cy="237744"/>
+          <p:cNvPr id="33" name="Text 30"/>
+          <p:cNvSpPr/>
+          <p:nvPr/>
+        </p:nvSpPr>
+        <p:spPr>
+          <a:xfrm>
+            <a:off x="6263640" y="5477256"/>
+            <a:ext cx="4023360" cy="274320"/>
           </a:xfrm>
           <a:prstGeom prst="rect">
             <a:avLst/>
@@ -10248,7 +10090,7 @@
                 <a:ea typeface="Calibri" pitchFamily="34" charset="-122"/>
                 <a:cs typeface="Calibri" pitchFamily="34" charset="-120"/>
               </a:rPr>
-              <a:t>Monitor (low value, low risk)</a:t>
+              <a:t>P0000 — Bars (new market)</a:t>
             </a:r>
             <a:endParaRPr lang="en-US" sz="1000" dirty="0"/>
           </a:p>
@@ -10256,14 +10098,14 @@
       </p:sp>
       <p:sp>
         <p:nvSpPr>
-          <p:cNvPr id="33" name="Text 30"/>
-          <p:cNvSpPr/>
-          <p:nvPr/>
-        </p:nvSpPr>
-        <p:spPr>
-          <a:xfrm>
-            <a:off x="10195560" y="5047488"/>
-            <a:ext cx="1463040" cy="237744"/>
+          <p:cNvPr id="34" name="Text 31"/>
+          <p:cNvSpPr/>
+          <p:nvPr/>
+        </p:nvSpPr>
+        <p:spPr>
+          <a:xfrm>
+            <a:off x="10195560" y="5477256"/>
+            <a:ext cx="1463040" cy="274320"/>
           </a:xfrm>
           <a:prstGeom prst="rect">
             <a:avLst/>
@@ -10281,13 +10123,133 @@
             <a:r>
               <a:rPr lang="en-US" sz="1000" b="1" dirty="0">
                 <a:solidFill>
+                  <a:srgbClr val="2C7A57"/>
+                </a:solidFill>
+                <a:latin typeface="Calibri" pitchFamily="34" charset="0"/>
+                <a:ea typeface="Calibri" pitchFamily="34" charset="-122"/>
+                <a:cs typeface="Calibri" pitchFamily="34" charset="-120"/>
+              </a:rPr>
+              <a:t>$500</a:t>
+            </a:r>
+            <a:endParaRPr lang="en-US" sz="1000" dirty="0"/>
+          </a:p>
+        </p:txBody>
+      </p:sp>
+      <p:sp>
+        <p:nvSpPr>
+          <p:cNvPr id="35" name="Text 32"/>
+          <p:cNvSpPr/>
+          <p:nvPr/>
+        </p:nvSpPr>
+        <p:spPr>
+          <a:xfrm>
+            <a:off x="6263640" y="5769864"/>
+            <a:ext cx="4023360" cy="274320"/>
+          </a:xfrm>
+          <a:prstGeom prst="rect">
+            <a:avLst/>
+          </a:prstGeom>
+          <a:noFill/>
+          <a:ln/>
+        </p:spPr>
+        <p:txBody>
+          <a:bodyPr wrap="square" rtlCol="0" anchor="ctr"/>
+          <a:lstStyle/>
+          <a:p>
+            <a:pPr indent="0" marL="0">
+              <a:buNone/>
+            </a:pPr>
+            <a:r>
+              <a:rPr lang="en-US" sz="1000" dirty="0">
+                <a:solidFill>
+                  <a:srgbClr val="1A1A2E"/>
+                </a:solidFill>
+                <a:latin typeface="Calibri" pitchFamily="34" charset="0"/>
+                <a:ea typeface="Calibri" pitchFamily="34" charset="-122"/>
+                <a:cs typeface="Calibri" pitchFamily="34" charset="-120"/>
+              </a:rPr>
+              <a:t>P0001 — Bars (new market)</a:t>
+            </a:r>
+            <a:endParaRPr lang="en-US" sz="1000" dirty="0"/>
+          </a:p>
+        </p:txBody>
+      </p:sp>
+      <p:sp>
+        <p:nvSpPr>
+          <p:cNvPr id="36" name="Text 33"/>
+          <p:cNvSpPr/>
+          <p:nvPr/>
+        </p:nvSpPr>
+        <p:spPr>
+          <a:xfrm>
+            <a:off x="10195560" y="5769864"/>
+            <a:ext cx="1463040" cy="274320"/>
+          </a:xfrm>
+          <a:prstGeom prst="rect">
+            <a:avLst/>
+          </a:prstGeom>
+          <a:noFill/>
+          <a:ln/>
+        </p:spPr>
+        <p:txBody>
+          <a:bodyPr wrap="square" rtlCol="0" anchor="ctr"/>
+          <a:lstStyle/>
+          <a:p>
+            <a:pPr algn="r" indent="0" marL="0">
+              <a:buNone/>
+            </a:pPr>
+            <a:r>
+              <a:rPr lang="en-US" sz="1000" b="1" dirty="0">
+                <a:solidFill>
+                  <a:srgbClr val="2C7A57"/>
+                </a:solidFill>
+                <a:latin typeface="Calibri" pitchFamily="34" charset="0"/>
+                <a:ea typeface="Calibri" pitchFamily="34" charset="-122"/>
+                <a:cs typeface="Calibri" pitchFamily="34" charset="-120"/>
+              </a:rPr>
+              <a:t>$496</a:t>
+            </a:r>
+            <a:endParaRPr lang="en-US" sz="1000" dirty="0"/>
+          </a:p>
+        </p:txBody>
+      </p:sp>
+      <p:sp>
+        <p:nvSpPr>
+          <p:cNvPr id="37" name="Text 34"/>
+          <p:cNvSpPr/>
+          <p:nvPr/>
+        </p:nvSpPr>
+        <p:spPr>
+          <a:xfrm>
+            <a:off x="548640" y="6080760"/>
+            <a:ext cx="11064240" cy="411480"/>
+          </a:xfrm>
+          <a:prstGeom prst="rect">
+            <a:avLst/>
+          </a:prstGeom>
+          <a:noFill/>
+          <a:ln/>
+        </p:spPr>
+        <p:txBody>
+          <a:bodyPr wrap="square" rtlCol="0" anchor="ctr"/>
+          <a:lstStyle/>
+          <a:p>
+            <a:pPr indent="0" marL="0">
+              <a:lnSpc>
+                <a:spcPts val="1200"/>
+              </a:lnSpc>
+              <a:buNone/>
+            </a:pPr>
+            <a:r>
+              <a:rPr lang="en-US" sz="1000" i="1" dirty="0">
+                <a:solidFill>
                   <a:srgbClr val="5B6178"/>
                 </a:solidFill>
                 <a:latin typeface="Calibri" pitchFamily="34" charset="0"/>
                 <a:ea typeface="Calibri" pitchFamily="34" charset="-122"/>
                 <a:cs typeface="Calibri" pitchFamily="34" charset="-120"/>
               </a:rPr>
-              <a:t>136</a:t>
+              <a:t>Flags come from 5-fold out-of-fold predictions, never a model scoring the venue it was trained on. The calibrated-lift feature carries near-zero importance — honest, since it's constant within venue_type once venue_type itself is a feature.</a:t>
             </a:r>
             <a:endParaRPr lang="en-US" sz="1000" dirty="0"/>
           </a:p>
@@ -10295,205 +10257,7 @@
       </p:sp>
       <p:sp>
         <p:nvSpPr>
-          <p:cNvPr id="34" name="Text 31"/>
-          <p:cNvSpPr/>
-          <p:nvPr/>
-        </p:nvSpPr>
-        <p:spPr>
-          <a:xfrm>
-            <a:off x="6263640" y="5294376"/>
-            <a:ext cx="4023360" cy="237744"/>
-          </a:xfrm>
-          <a:prstGeom prst="rect">
-            <a:avLst/>
-          </a:prstGeom>
-          <a:noFill/>
-          <a:ln/>
-        </p:spPr>
-        <p:txBody>
-          <a:bodyPr wrap="square" rtlCol="0" anchor="ctr"/>
-          <a:lstStyle/>
-          <a:p>
-            <a:pPr indent="0" marL="0">
-              <a:buNone/>
-            </a:pPr>
-            <a:r>
-              <a:rPr lang="en-US" sz="1000" dirty="0">
-                <a:solidFill>
-                  <a:srgbClr val="1A1A2E"/>
-                </a:solidFill>
-                <a:latin typeface="Calibri" pitchFamily="34" charset="0"/>
-                <a:ea typeface="Calibri" pitchFamily="34" charset="-122"/>
-                <a:cs typeface="Calibri" pitchFamily="34" charset="-120"/>
-              </a:rPr>
-              <a:t>Protect (high value, low risk)</a:t>
-            </a:r>
-            <a:endParaRPr lang="en-US" sz="1000" dirty="0"/>
-          </a:p>
-        </p:txBody>
-      </p:sp>
-      <p:sp>
-        <p:nvSpPr>
-          <p:cNvPr id="35" name="Text 32"/>
-          <p:cNvSpPr/>
-          <p:nvPr/>
-        </p:nvSpPr>
-        <p:spPr>
-          <a:xfrm>
-            <a:off x="10195560" y="5294376"/>
-            <a:ext cx="1463040" cy="237744"/>
-          </a:xfrm>
-          <a:prstGeom prst="rect">
-            <a:avLst/>
-          </a:prstGeom>
-          <a:noFill/>
-          <a:ln/>
-        </p:spPr>
-        <p:txBody>
-          <a:bodyPr wrap="square" rtlCol="0" anchor="ctr"/>
-          <a:lstStyle/>
-          <a:p>
-            <a:pPr algn="r" indent="0" marL="0">
-              <a:buNone/>
-            </a:pPr>
-            <a:r>
-              <a:rPr lang="en-US" sz="1000" b="1" dirty="0">
-                <a:solidFill>
-                  <a:srgbClr val="2C7A57"/>
-                </a:solidFill>
-                <a:latin typeface="Calibri" pitchFamily="34" charset="0"/>
-                <a:ea typeface="Calibri" pitchFamily="34" charset="-122"/>
-                <a:cs typeface="Calibri" pitchFamily="34" charset="-120"/>
-              </a:rPr>
-              <a:t>64</a:t>
-            </a:r>
-            <a:endParaRPr lang="en-US" sz="1000" dirty="0"/>
-          </a:p>
-        </p:txBody>
-      </p:sp>
-      <p:sp>
-        <p:nvSpPr>
-          <p:cNvPr id="36" name="Text 33"/>
-          <p:cNvSpPr/>
-          <p:nvPr/>
-        </p:nvSpPr>
-        <p:spPr>
-          <a:xfrm>
-            <a:off x="6263640" y="5541264"/>
-            <a:ext cx="4023360" cy="237744"/>
-          </a:xfrm>
-          <a:prstGeom prst="rect">
-            <a:avLst/>
-          </a:prstGeom>
-          <a:noFill/>
-          <a:ln/>
-        </p:spPr>
-        <p:txBody>
-          <a:bodyPr wrap="square" rtlCol="0" anchor="ctr"/>
-          <a:lstStyle/>
-          <a:p>
-            <a:pPr indent="0" marL="0">
-              <a:buNone/>
-            </a:pPr>
-            <a:r>
-              <a:rPr lang="en-US" sz="1000" dirty="0">
-                <a:solidFill>
-                  <a:srgbClr val="1A1A2E"/>
-                </a:solidFill>
-                <a:latin typeface="Calibri" pitchFamily="34" charset="0"/>
-                <a:ea typeface="Calibri" pitchFamily="34" charset="-122"/>
-                <a:cs typeface="Calibri" pitchFamily="34" charset="-120"/>
-              </a:rPr>
-              <a:t>Low priority (low value, high risk)</a:t>
-            </a:r>
-            <a:endParaRPr lang="en-US" sz="1000" dirty="0"/>
-          </a:p>
-        </p:txBody>
-      </p:sp>
-      <p:sp>
-        <p:nvSpPr>
-          <p:cNvPr id="37" name="Text 34"/>
-          <p:cNvSpPr/>
-          <p:nvPr/>
-        </p:nvSpPr>
-        <p:spPr>
-          <a:xfrm>
-            <a:off x="10195560" y="5541264"/>
-            <a:ext cx="1463040" cy="237744"/>
-          </a:xfrm>
-          <a:prstGeom prst="rect">
-            <a:avLst/>
-          </a:prstGeom>
-          <a:noFill/>
-          <a:ln/>
-        </p:spPr>
-        <p:txBody>
-          <a:bodyPr wrap="square" rtlCol="0" anchor="ctr"/>
-          <a:lstStyle/>
-          <a:p>
-            <a:pPr algn="r" indent="0" marL="0">
-              <a:buNone/>
-            </a:pPr>
-            <a:r>
-              <a:rPr lang="en-US" sz="1000" b="1" dirty="0">
-                <a:solidFill>
-                  <a:srgbClr val="5B6178"/>
-                </a:solidFill>
-                <a:latin typeface="Calibri" pitchFamily="34" charset="0"/>
-                <a:ea typeface="Calibri" pitchFamily="34" charset="-122"/>
-                <a:cs typeface="Calibri" pitchFamily="34" charset="-120"/>
-              </a:rPr>
-              <a:t>64</a:t>
-            </a:r>
-            <a:endParaRPr lang="en-US" sz="1000" dirty="0"/>
-          </a:p>
-        </p:txBody>
-      </p:sp>
-      <p:sp>
-        <p:nvSpPr>
           <p:cNvPr id="38" name="Text 35"/>
-          <p:cNvSpPr/>
-          <p:nvPr/>
-        </p:nvSpPr>
-        <p:spPr>
-          <a:xfrm>
-            <a:off x="548640" y="6016752"/>
-            <a:ext cx="11064240" cy="548640"/>
-          </a:xfrm>
-          <a:prstGeom prst="rect">
-            <a:avLst/>
-          </a:prstGeom>
-          <a:noFill/>
-          <a:ln/>
-        </p:spPr>
-        <p:txBody>
-          <a:bodyPr wrap="square" rtlCol="0" anchor="ctr"/>
-          <a:lstStyle/>
-          <a:p>
-            <a:pPr indent="0" marL="0">
-              <a:lnSpc>
-                <a:spcPts val="1050"/>
-              </a:lnSpc>
-              <a:buNone/>
-            </a:pPr>
-            <a:r>
-              <a:rPr lang="en-US" sz="870" i="1" dirty="0">
-                <a:solidFill>
-                  <a:srgbClr val="5B6178"/>
-                </a:solidFill>
-                <a:latin typeface="Calibri" pitchFamily="34" charset="0"/>
-                <a:ea typeface="Calibri" pitchFamily="34" charset="-122"/>
-                <a:cs typeface="Calibri" pitchFamily="34" charset="-120"/>
-              </a:rPr>
-              <a:t>Flags come from 5-fold OOF predictions; AUC/PR-AUC read modest next to the revenue model's R² because churn is a rarer, noisier event to call than revenue — typical for a churn classifier, not a modeling miss. realized_ad_revenue's importance is a venue_type confound, not a causal driver. Each "Save now" / flagged venue also carries a SHAP top driver (from the fold model that never saw it) mapped to a concrete action — technical dispatch, AM retention call, content review — not a generic "reach out."</a:t>
-            </a:r>
-            <a:endParaRPr lang="en-US" sz="870" dirty="0"/>
-          </a:p>
-        </p:txBody>
-      </p:sp>
-      <p:sp>
-        <p:nvSpPr>
-          <p:cNvPr id="39" name="Text 36"/>
           <p:cNvSpPr/>
           <p:nvPr/>
         </p:nvSpPr>
@@ -10524,7 +10288,7 @@
                 <a:ea typeface="Calibri" pitchFamily="34" charset="-122"/>
                 <a:cs typeface="Calibri" pitchFamily="34" charset="-120"/>
               </a:rPr>
-              <a:t>Venue retention</a:t>
+              <a:t>Venue economics</a:t>
             </a:r>
             <a:endParaRPr lang="en-US" sz="900" dirty="0"/>
           </a:p>
@@ -10541,6 +10305,1420 @@
 <file path=ppt/slides/slide16.xml><?xml version="1.0" encoding="utf-8"?>
 <p:sld xmlns:a="http://schemas.openxmlformats.org/drawingml/2006/main" xmlns:r="http://schemas.openxmlformats.org/officeDocument/2006/relationships" xmlns:p="http://schemas.openxmlformats.org/presentationml/2006/main">
   <p:cSld name="Slide 16">
+    <p:bg>
+      <p:bgPr>
+        <a:solidFill>
+          <a:srgbClr val="FFFFFF"/>
+        </a:solidFill>
+      </p:bgPr>
+    </p:bg>
+    <p:spTree>
+      <p:nvGrpSpPr>
+        <p:cNvPr id="1" name=""/>
+        <p:cNvGrpSpPr/>
+        <p:nvPr/>
+      </p:nvGrpSpPr>
+      <p:grpSpPr>
+        <a:xfrm>
+          <a:off x="0" y="0"/>
+          <a:ext cx="0" cy="0"/>
+          <a:chOff x="0" y="0"/>
+          <a:chExt cx="0" cy="0"/>
+        </a:xfrm>
+      </p:grpSpPr>
+      <p:sp>
+        <p:nvSpPr>
+          <p:cNvPr id="2" name="Text 0"/>
+          <p:cNvSpPr/>
+          <p:nvPr/>
+        </p:nvSpPr>
+        <p:spPr>
+          <a:xfrm>
+            <a:off x="548640" y="411480"/>
+            <a:ext cx="11155680" cy="594360"/>
+          </a:xfrm>
+          <a:prstGeom prst="rect">
+            <a:avLst/>
+          </a:prstGeom>
+          <a:noFill/>
+          <a:ln/>
+        </p:spPr>
+        <p:txBody>
+          <a:bodyPr wrap="square" rtlCol="0" anchor="ctr"/>
+          <a:lstStyle/>
+          <a:p>
+            <a:pPr indent="0" marL="0">
+              <a:buNone/>
+            </a:pPr>
+            <a:r>
+              <a:rPr lang="en-US" sz="2500" b="1" dirty="0">
+                <a:solidFill>
+                  <a:srgbClr val="1E2761"/>
+                </a:solidFill>
+                <a:latin typeface="Cambria" pitchFamily="34" charset="0"/>
+                <a:ea typeface="Cambria" pitchFamily="34" charset="-122"/>
+                <a:cs typeface="Cambria" pitchFamily="34" charset="-120"/>
+              </a:rPr>
+              <a:t>Predicting venue churn risk, honestly</a:t>
+            </a:r>
+            <a:endParaRPr lang="en-US" sz="2500" dirty="0"/>
+          </a:p>
+        </p:txBody>
+      </p:sp>
+      <p:sp>
+        <p:nvSpPr>
+          <p:cNvPr id="3" name="Shape 1"/>
+          <p:cNvSpPr/>
+          <p:nvPr/>
+        </p:nvSpPr>
+        <p:spPr>
+          <a:xfrm>
+            <a:off x="8229600" y="146304"/>
+            <a:ext cx="3410712" cy="246888"/>
+          </a:xfrm>
+          <a:prstGeom prst="roundRect">
+            <a:avLst>
+              <a:gd name="adj" fmla="val 22222"/>
+            </a:avLst>
+          </a:prstGeom>
+          <a:solidFill>
+            <a:srgbClr val="FFFFFF"/>
+          </a:solidFill>
+          <a:ln w="15875">
+            <a:solidFill>
+              <a:srgbClr val="8E3B60"/>
+            </a:solidFill>
+            <a:prstDash val="solid"/>
+          </a:ln>
+        </p:spPr>
+      </p:sp>
+      <p:sp>
+        <p:nvSpPr>
+          <p:cNvPr id="4" name="Text 2"/>
+          <p:cNvSpPr/>
+          <p:nvPr/>
+        </p:nvSpPr>
+        <p:spPr>
+          <a:xfrm>
+            <a:off x="8229600" y="146304"/>
+            <a:ext cx="3410712" cy="246888"/>
+          </a:xfrm>
+          <a:prstGeom prst="rect">
+            <a:avLst/>
+          </a:prstGeom>
+          <a:noFill/>
+          <a:ln/>
+        </p:spPr>
+        <p:txBody>
+          <a:bodyPr wrap="square" rtlCol="0" anchor="ctr"/>
+          <a:lstStyle/>
+          <a:p>
+            <a:pPr algn="ctr" indent="0" marL="0">
+              <a:buNone/>
+            </a:pPr>
+            <a:r>
+              <a:rPr lang="en-US" sz="950" b="1" dirty="0">
+                <a:solidFill>
+                  <a:srgbClr val="8E3B60"/>
+                </a:solidFill>
+                <a:latin typeface="Calibri" pitchFamily="34" charset="0"/>
+                <a:ea typeface="Calibri" pitchFamily="34" charset="-122"/>
+                <a:cs typeface="Calibri" pitchFamily="34" charset="-120"/>
+              </a:rPr>
+              <a:t>Step 6 of 6 · Answers Q4</a:t>
+            </a:r>
+            <a:endParaRPr lang="en-US" sz="950" dirty="0"/>
+          </a:p>
+        </p:txBody>
+      </p:sp>
+      <p:sp>
+        <p:nvSpPr>
+          <p:cNvPr id="5" name="Text 3"/>
+          <p:cNvSpPr/>
+          <p:nvPr/>
+        </p:nvSpPr>
+        <p:spPr>
+          <a:xfrm>
+            <a:off x="548640" y="1005840"/>
+            <a:ext cx="10972800" cy="365760"/>
+          </a:xfrm>
+          <a:prstGeom prst="rect">
+            <a:avLst/>
+          </a:prstGeom>
+          <a:noFill/>
+          <a:ln/>
+        </p:spPr>
+        <p:txBody>
+          <a:bodyPr wrap="square" rtlCol="0" anchor="ctr"/>
+          <a:lstStyle/>
+          <a:p>
+            <a:pPr indent="0" marL="0">
+              <a:buNone/>
+            </a:pPr>
+            <a:r>
+              <a:rPr lang="en-US" sz="1200" i="1" dirty="0">
+                <a:solidFill>
+                  <a:srgbClr val="5B6178"/>
+                </a:solidFill>
+                <a:latin typeface="Calibri" pitchFamily="34" charset="0"/>
+                <a:ea typeface="Calibri" pitchFamily="34" charset="-122"/>
+                <a:cs typeface="Calibri" pitchFamily="34" charset="-120"/>
+              </a:rPr>
+              <a:t>Gradient-boosted classifier on ops-visible signals (engagement, uptime, complaints, competitor outreach) — the other half of "what makes a venue valuable and what puts it at risk."</a:t>
+            </a:r>
+            <a:endParaRPr lang="en-US" sz="1200" dirty="0"/>
+          </a:p>
+        </p:txBody>
+      </p:sp>
+      <p:sp>
+        <p:nvSpPr>
+          <p:cNvPr id="6" name="Shape 4"/>
+          <p:cNvSpPr/>
+          <p:nvPr/>
+        </p:nvSpPr>
+        <p:spPr>
+          <a:xfrm>
+            <a:off x="548640" y="1508760"/>
+            <a:ext cx="2651760" cy="1051560"/>
+          </a:xfrm>
+          <a:prstGeom prst="roundRect">
+            <a:avLst>
+              <a:gd name="adj" fmla="val 6957"/>
+            </a:avLst>
+          </a:prstGeom>
+          <a:solidFill>
+            <a:srgbClr val="F5F7FC"/>
+          </a:solidFill>
+          <a:ln/>
+        </p:spPr>
+      </p:sp>
+      <p:sp>
+        <p:nvSpPr>
+          <p:cNvPr id="7" name="Text 5"/>
+          <p:cNvSpPr/>
+          <p:nvPr/>
+        </p:nvSpPr>
+        <p:spPr>
+          <a:xfrm>
+            <a:off x="685800" y="1618488"/>
+            <a:ext cx="2377440" cy="502920"/>
+          </a:xfrm>
+          <a:prstGeom prst="rect">
+            <a:avLst/>
+          </a:prstGeom>
+          <a:noFill/>
+          <a:ln/>
+        </p:spPr>
+        <p:txBody>
+          <a:bodyPr wrap="square" rtlCol="0" anchor="ctr"/>
+          <a:lstStyle/>
+          <a:p>
+            <a:pPr indent="0" marL="0">
+              <a:buNone/>
+            </a:pPr>
+            <a:r>
+              <a:rPr lang="en-US" sz="2200" b="1" dirty="0">
+                <a:solidFill>
+                  <a:srgbClr val="1E2761"/>
+                </a:solidFill>
+                <a:latin typeface="Calibri" pitchFamily="34" charset="0"/>
+                <a:ea typeface="Calibri" pitchFamily="34" charset="-122"/>
+                <a:cs typeface="Calibri" pitchFamily="34" charset="-120"/>
+              </a:rPr>
+              <a:t>0.65</a:t>
+            </a:r>
+            <a:endParaRPr lang="en-US" sz="2200" dirty="0"/>
+          </a:p>
+        </p:txBody>
+      </p:sp>
+      <p:sp>
+        <p:nvSpPr>
+          <p:cNvPr id="8" name="Text 6"/>
+          <p:cNvSpPr/>
+          <p:nvPr/>
+        </p:nvSpPr>
+        <p:spPr>
+          <a:xfrm>
+            <a:off x="685800" y="2130552"/>
+            <a:ext cx="2377440" cy="365760"/>
+          </a:xfrm>
+          <a:prstGeom prst="rect">
+            <a:avLst/>
+          </a:prstGeom>
+          <a:noFill/>
+          <a:ln/>
+        </p:spPr>
+        <p:txBody>
+          <a:bodyPr wrap="square" rtlCol="0" anchor="ctr"/>
+          <a:lstStyle/>
+          <a:p>
+            <a:pPr indent="0" marL="0">
+              <a:buNone/>
+            </a:pPr>
+            <a:r>
+              <a:rPr lang="en-US" sz="900" dirty="0">
+                <a:solidFill>
+                  <a:srgbClr val="5B6178"/>
+                </a:solidFill>
+                <a:latin typeface="Calibri" pitchFamily="34" charset="0"/>
+                <a:ea typeface="Calibri" pitchFamily="34" charset="-122"/>
+                <a:cs typeface="Calibri" pitchFamily="34" charset="-120"/>
+              </a:rPr>
+              <a:t>Held-out AUC</a:t>
+            </a:r>
+            <a:endParaRPr lang="en-US" sz="900" dirty="0"/>
+          </a:p>
+        </p:txBody>
+      </p:sp>
+      <p:sp>
+        <p:nvSpPr>
+          <p:cNvPr id="9" name="Shape 7"/>
+          <p:cNvSpPr/>
+          <p:nvPr/>
+        </p:nvSpPr>
+        <p:spPr>
+          <a:xfrm>
+            <a:off x="3337560" y="1508760"/>
+            <a:ext cx="2651760" cy="1051560"/>
+          </a:xfrm>
+          <a:prstGeom prst="roundRect">
+            <a:avLst>
+              <a:gd name="adj" fmla="val 6957"/>
+            </a:avLst>
+          </a:prstGeom>
+          <a:solidFill>
+            <a:srgbClr val="F5F7FC"/>
+          </a:solidFill>
+          <a:ln/>
+        </p:spPr>
+      </p:sp>
+      <p:sp>
+        <p:nvSpPr>
+          <p:cNvPr id="10" name="Text 8"/>
+          <p:cNvSpPr/>
+          <p:nvPr/>
+        </p:nvSpPr>
+        <p:spPr>
+          <a:xfrm>
+            <a:off x="3474720" y="1618488"/>
+            <a:ext cx="2377440" cy="502920"/>
+          </a:xfrm>
+          <a:prstGeom prst="rect">
+            <a:avLst/>
+          </a:prstGeom>
+          <a:noFill/>
+          <a:ln/>
+        </p:spPr>
+        <p:txBody>
+          <a:bodyPr wrap="square" rtlCol="0" anchor="ctr"/>
+          <a:lstStyle/>
+          <a:p>
+            <a:pPr indent="0" marL="0">
+              <a:buNone/>
+            </a:pPr>
+            <a:r>
+              <a:rPr lang="en-US" sz="2200" b="1" dirty="0">
+                <a:solidFill>
+                  <a:srgbClr val="1E2761"/>
+                </a:solidFill>
+                <a:latin typeface="Calibri" pitchFamily="34" charset="0"/>
+                <a:ea typeface="Calibri" pitchFamily="34" charset="-122"/>
+                <a:cs typeface="Calibri" pitchFamily="34" charset="-120"/>
+              </a:rPr>
+              <a:t>0.27</a:t>
+            </a:r>
+            <a:endParaRPr lang="en-US" sz="2200" dirty="0"/>
+          </a:p>
+        </p:txBody>
+      </p:sp>
+      <p:sp>
+        <p:nvSpPr>
+          <p:cNvPr id="11" name="Text 9"/>
+          <p:cNvSpPr/>
+          <p:nvPr/>
+        </p:nvSpPr>
+        <p:spPr>
+          <a:xfrm>
+            <a:off x="3474720" y="2130552"/>
+            <a:ext cx="2377440" cy="365760"/>
+          </a:xfrm>
+          <a:prstGeom prst="rect">
+            <a:avLst/>
+          </a:prstGeom>
+          <a:noFill/>
+          <a:ln/>
+        </p:spPr>
+        <p:txBody>
+          <a:bodyPr wrap="square" rtlCol="0" anchor="ctr"/>
+          <a:lstStyle/>
+          <a:p>
+            <a:pPr indent="0" marL="0">
+              <a:buNone/>
+            </a:pPr>
+            <a:r>
+              <a:rPr lang="en-US" sz="900" dirty="0">
+                <a:solidFill>
+                  <a:srgbClr val="5B6178"/>
+                </a:solidFill>
+                <a:latin typeface="Calibri" pitchFamily="34" charset="0"/>
+                <a:ea typeface="Calibri" pitchFamily="34" charset="-122"/>
+                <a:cs typeface="Calibri" pitchFamily="34" charset="-120"/>
+              </a:rPr>
+              <a:t>Held-out PR-AUC</a:t>
+            </a:r>
+            <a:endParaRPr lang="en-US" sz="900" dirty="0"/>
+          </a:p>
+        </p:txBody>
+      </p:sp>
+      <p:sp>
+        <p:nvSpPr>
+          <p:cNvPr id="12" name="Shape 10"/>
+          <p:cNvSpPr/>
+          <p:nvPr/>
+        </p:nvSpPr>
+        <p:spPr>
+          <a:xfrm>
+            <a:off x="6126480" y="1508760"/>
+            <a:ext cx="2651760" cy="1051560"/>
+          </a:xfrm>
+          <a:prstGeom prst="roundRect">
+            <a:avLst>
+              <a:gd name="adj" fmla="val 6957"/>
+            </a:avLst>
+          </a:prstGeom>
+          <a:solidFill>
+            <a:srgbClr val="F5F7FC"/>
+          </a:solidFill>
+          <a:ln/>
+        </p:spPr>
+      </p:sp>
+      <p:sp>
+        <p:nvSpPr>
+          <p:cNvPr id="13" name="Text 11"/>
+          <p:cNvSpPr/>
+          <p:nvPr/>
+        </p:nvSpPr>
+        <p:spPr>
+          <a:xfrm>
+            <a:off x="6263640" y="1618488"/>
+            <a:ext cx="2377440" cy="502920"/>
+          </a:xfrm>
+          <a:prstGeom prst="rect">
+            <a:avLst/>
+          </a:prstGeom>
+          <a:noFill/>
+          <a:ln/>
+        </p:spPr>
+        <p:txBody>
+          <a:bodyPr wrap="square" rtlCol="0" anchor="ctr"/>
+          <a:lstStyle/>
+          <a:p>
+            <a:pPr indent="0" marL="0">
+              <a:buNone/>
+            </a:pPr>
+            <a:r>
+              <a:rPr lang="en-US" sz="2200" b="1" dirty="0">
+                <a:solidFill>
+                  <a:srgbClr val="1E2761"/>
+                </a:solidFill>
+                <a:latin typeface="Calibri" pitchFamily="34" charset="0"/>
+                <a:ea typeface="Calibri" pitchFamily="34" charset="-122"/>
+                <a:cs typeface="Calibri" pitchFamily="34" charset="-120"/>
+              </a:rPr>
+              <a:t>0.13</a:t>
+            </a:r>
+            <a:endParaRPr lang="en-US" sz="2200" dirty="0"/>
+          </a:p>
+        </p:txBody>
+      </p:sp>
+      <p:sp>
+        <p:nvSpPr>
+          <p:cNvPr id="14" name="Text 12"/>
+          <p:cNvSpPr/>
+          <p:nvPr/>
+        </p:nvSpPr>
+        <p:spPr>
+          <a:xfrm>
+            <a:off x="6263640" y="2130552"/>
+            <a:ext cx="2377440" cy="365760"/>
+          </a:xfrm>
+          <a:prstGeom prst="rect">
+            <a:avLst/>
+          </a:prstGeom>
+          <a:noFill/>
+          <a:ln/>
+        </p:spPr>
+        <p:txBody>
+          <a:bodyPr wrap="square" rtlCol="0" anchor="ctr"/>
+          <a:lstStyle/>
+          <a:p>
+            <a:pPr indent="0" marL="0">
+              <a:buNone/>
+            </a:pPr>
+            <a:r>
+              <a:rPr lang="en-US" sz="900" dirty="0">
+                <a:solidFill>
+                  <a:srgbClr val="5B6178"/>
+                </a:solidFill>
+                <a:latin typeface="Calibri" pitchFamily="34" charset="0"/>
+                <a:ea typeface="Calibri" pitchFamily="34" charset="-122"/>
+                <a:cs typeface="Calibri" pitchFamily="34" charset="-120"/>
+              </a:rPr>
+              <a:t>Brier score</a:t>
+            </a:r>
+            <a:endParaRPr lang="en-US" sz="900" dirty="0"/>
+          </a:p>
+        </p:txBody>
+      </p:sp>
+      <p:sp>
+        <p:nvSpPr>
+          <p:cNvPr id="15" name="Shape 13"/>
+          <p:cNvSpPr/>
+          <p:nvPr/>
+        </p:nvSpPr>
+        <p:spPr>
+          <a:xfrm>
+            <a:off x="8915400" y="1508760"/>
+            <a:ext cx="2651760" cy="1051560"/>
+          </a:xfrm>
+          <a:prstGeom prst="roundRect">
+            <a:avLst>
+              <a:gd name="adj" fmla="val 6957"/>
+            </a:avLst>
+          </a:prstGeom>
+          <a:solidFill>
+            <a:srgbClr val="F5F7FC"/>
+          </a:solidFill>
+          <a:ln/>
+        </p:spPr>
+      </p:sp>
+      <p:sp>
+        <p:nvSpPr>
+          <p:cNvPr id="16" name="Text 14"/>
+          <p:cNvSpPr/>
+          <p:nvPr/>
+        </p:nvSpPr>
+        <p:spPr>
+          <a:xfrm>
+            <a:off x="9052560" y="1618488"/>
+            <a:ext cx="2377440" cy="502920"/>
+          </a:xfrm>
+          <a:prstGeom prst="rect">
+            <a:avLst/>
+          </a:prstGeom>
+          <a:noFill/>
+          <a:ln/>
+        </p:spPr>
+        <p:txBody>
+          <a:bodyPr wrap="square" rtlCol="0" anchor="ctr"/>
+          <a:lstStyle/>
+          <a:p>
+            <a:pPr indent="0" marL="0">
+              <a:buNone/>
+            </a:pPr>
+            <a:r>
+              <a:rPr lang="en-US" sz="2200" b="1" dirty="0">
+                <a:solidFill>
+                  <a:srgbClr val="1E2761"/>
+                </a:solidFill>
+                <a:latin typeface="Calibri" pitchFamily="34" charset="0"/>
+                <a:ea typeface="Calibri" pitchFamily="34" charset="-122"/>
+                <a:cs typeface="Calibri" pitchFamily="34" charset="-120"/>
+              </a:rPr>
+              <a:t>20</a:t>
+            </a:r>
+            <a:endParaRPr lang="en-US" sz="2200" dirty="0"/>
+          </a:p>
+        </p:txBody>
+      </p:sp>
+      <p:sp>
+        <p:nvSpPr>
+          <p:cNvPr id="17" name="Text 15"/>
+          <p:cNvSpPr/>
+          <p:nvPr/>
+        </p:nvSpPr>
+        <p:spPr>
+          <a:xfrm>
+            <a:off x="9052560" y="2130552"/>
+            <a:ext cx="2377440" cy="365760"/>
+          </a:xfrm>
+          <a:prstGeom prst="rect">
+            <a:avLst/>
+          </a:prstGeom>
+          <a:noFill/>
+          <a:ln/>
+        </p:spPr>
+        <p:txBody>
+          <a:bodyPr wrap="square" rtlCol="0" anchor="ctr"/>
+          <a:lstStyle/>
+          <a:p>
+            <a:pPr indent="0" marL="0">
+              <a:buNone/>
+            </a:pPr>
+            <a:r>
+              <a:rPr lang="en-US" sz="900" dirty="0">
+                <a:solidFill>
+                  <a:srgbClr val="5B6178"/>
+                </a:solidFill>
+                <a:latin typeface="Calibri" pitchFamily="34" charset="0"/>
+                <a:ea typeface="Calibri" pitchFamily="34" charset="-122"/>
+                <a:cs typeface="Calibri" pitchFamily="34" charset="-120"/>
+              </a:rPr>
+              <a:t>Venues flagged</a:t>
+            </a:r>
+            <a:endParaRPr lang="en-US" sz="900" dirty="0"/>
+          </a:p>
+        </p:txBody>
+      </p:sp>
+      <p:graphicFrame>
+        <p:nvGraphicFramePr>
+          <p:cNvPr id="18" name="Chart 0" descr=""/>
+          <p:cNvGraphicFramePr/>
+          <p:nvPr/>
+        </p:nvGraphicFramePr>
+        <p:xfrm>
+          <a:off x="548640" y="2880360"/>
+          <a:ext cx="5394960" cy="3246120"/>
+        </p:xfrm>
+        <a:graphic xmlns:a="http://schemas.openxmlformats.org/drawingml/2006/main">
+          <a:graphicData uri="http://schemas.openxmlformats.org/drawingml/2006/chart">
+            <c:chart xmlns:c="http://schemas.openxmlformats.org/drawingml/2006/chart" r:id="rId1"/>
+          </a:graphicData>
+        </a:graphic>
+      </p:graphicFrame>
+      <p:sp>
+        <p:nvSpPr>
+          <p:cNvPr id="19" name="Text 16"/>
+          <p:cNvSpPr/>
+          <p:nvPr/>
+        </p:nvSpPr>
+        <p:spPr>
+          <a:xfrm>
+            <a:off x="6263640" y="2880360"/>
+            <a:ext cx="5394960" cy="256032"/>
+          </a:xfrm>
+          <a:prstGeom prst="rect">
+            <a:avLst/>
+          </a:prstGeom>
+          <a:noFill/>
+          <a:ln/>
+        </p:spPr>
+        <p:txBody>
+          <a:bodyPr wrap="square" rtlCol="0" anchor="ctr"/>
+          <a:lstStyle/>
+          <a:p>
+            <a:pPr indent="0" marL="0">
+              <a:buNone/>
+            </a:pPr>
+            <a:r>
+              <a:rPr lang="en-US" sz="1200" b="1" dirty="0">
+                <a:solidFill>
+                  <a:srgbClr val="1E2761"/>
+                </a:solidFill>
+                <a:latin typeface="Cambria" pitchFamily="34" charset="0"/>
+                <a:ea typeface="Cambria" pitchFamily="34" charset="-122"/>
+                <a:cs typeface="Cambria" pitchFamily="34" charset="-120"/>
+              </a:rPr>
+              <a:t>Top at-risk venues (of 20 flagged, by OOF risk)</a:t>
+            </a:r>
+            <a:endParaRPr lang="en-US" sz="1200" dirty="0"/>
+          </a:p>
+        </p:txBody>
+      </p:sp>
+      <p:sp>
+        <p:nvSpPr>
+          <p:cNvPr id="20" name="Text 17"/>
+          <p:cNvSpPr/>
+          <p:nvPr/>
+        </p:nvSpPr>
+        <p:spPr>
+          <a:xfrm>
+            <a:off x="6263640" y="3172968"/>
+            <a:ext cx="3977640" cy="219456"/>
+          </a:xfrm>
+          <a:prstGeom prst="rect">
+            <a:avLst/>
+          </a:prstGeom>
+          <a:noFill/>
+          <a:ln/>
+        </p:spPr>
+        <p:txBody>
+          <a:bodyPr wrap="square" rtlCol="0" anchor="ctr"/>
+          <a:lstStyle/>
+          <a:p>
+            <a:pPr indent="0" marL="0">
+              <a:buNone/>
+            </a:pPr>
+            <a:r>
+              <a:rPr lang="en-US" sz="1000" dirty="0">
+                <a:solidFill>
+                  <a:srgbClr val="1A1A2E"/>
+                </a:solidFill>
+                <a:latin typeface="Calibri" pitchFamily="34" charset="0"/>
+                <a:ea typeface="Calibri" pitchFamily="34" charset="-122"/>
+                <a:cs typeface="Calibri" pitchFamily="34" charset="-120"/>
+              </a:rPr>
+              <a:t>Venue #281 (Bars)</a:t>
+            </a:r>
+            <a:endParaRPr lang="en-US" sz="1000" dirty="0"/>
+          </a:p>
+        </p:txBody>
+      </p:sp>
+      <p:sp>
+        <p:nvSpPr>
+          <p:cNvPr id="21" name="Text 18"/>
+          <p:cNvSpPr/>
+          <p:nvPr/>
+        </p:nvSpPr>
+        <p:spPr>
+          <a:xfrm>
+            <a:off x="10241280" y="3172968"/>
+            <a:ext cx="1417320" cy="219456"/>
+          </a:xfrm>
+          <a:prstGeom prst="rect">
+            <a:avLst/>
+          </a:prstGeom>
+          <a:noFill/>
+          <a:ln/>
+        </p:spPr>
+        <p:txBody>
+          <a:bodyPr wrap="square" rtlCol="0" anchor="ctr"/>
+          <a:lstStyle/>
+          <a:p>
+            <a:pPr algn="r" indent="0" marL="0">
+              <a:buNone/>
+            </a:pPr>
+            <a:r>
+              <a:rPr lang="en-US" sz="1000" b="1" dirty="0">
+                <a:solidFill>
+                  <a:srgbClr val="B8500A"/>
+                </a:solidFill>
+                <a:latin typeface="Calibri" pitchFamily="34" charset="0"/>
+                <a:ea typeface="Calibri" pitchFamily="34" charset="-122"/>
+                <a:cs typeface="Calibri" pitchFamily="34" charset="-120"/>
+              </a:rPr>
+              <a:t>60%</a:t>
+            </a:r>
+            <a:endParaRPr lang="en-US" sz="1000" dirty="0"/>
+          </a:p>
+        </p:txBody>
+      </p:sp>
+      <p:sp>
+        <p:nvSpPr>
+          <p:cNvPr id="22" name="Text 19"/>
+          <p:cNvSpPr/>
+          <p:nvPr/>
+        </p:nvSpPr>
+        <p:spPr>
+          <a:xfrm>
+            <a:off x="6263640" y="3374136"/>
+            <a:ext cx="5394960" cy="201168"/>
+          </a:xfrm>
+          <a:prstGeom prst="rect">
+            <a:avLst/>
+          </a:prstGeom>
+          <a:noFill/>
+          <a:ln/>
+        </p:spPr>
+        <p:txBody>
+          <a:bodyPr wrap="square" rtlCol="0" anchor="ctr"/>
+          <a:lstStyle/>
+          <a:p>
+            <a:pPr indent="0" marL="0">
+              <a:buNone/>
+            </a:pPr>
+            <a:r>
+              <a:rPr lang="en-US" sz="900" i="1" dirty="0">
+                <a:solidFill>
+                  <a:srgbClr val="8A4B0A"/>
+                </a:solidFill>
+                <a:latin typeface="Calibri" pitchFamily="34" charset="0"/>
+                <a:ea typeface="Calibri" pitchFamily="34" charset="-122"/>
+                <a:cs typeface="Calibri" pitchFamily="34" charset="-120"/>
+              </a:rPr>
+              <a:t>engagement declining → content/placement review</a:t>
+            </a:r>
+            <a:endParaRPr lang="en-US" sz="900" dirty="0"/>
+          </a:p>
+        </p:txBody>
+      </p:sp>
+      <p:sp>
+        <p:nvSpPr>
+          <p:cNvPr id="23" name="Text 20"/>
+          <p:cNvSpPr/>
+          <p:nvPr/>
+        </p:nvSpPr>
+        <p:spPr>
+          <a:xfrm>
+            <a:off x="6263640" y="3593592"/>
+            <a:ext cx="3977640" cy="219456"/>
+          </a:xfrm>
+          <a:prstGeom prst="rect">
+            <a:avLst/>
+          </a:prstGeom>
+          <a:noFill/>
+          <a:ln/>
+        </p:spPr>
+        <p:txBody>
+          <a:bodyPr wrap="square" rtlCol="0" anchor="ctr"/>
+          <a:lstStyle/>
+          <a:p>
+            <a:pPr indent="0" marL="0">
+              <a:buNone/>
+            </a:pPr>
+            <a:r>
+              <a:rPr lang="en-US" sz="1000" dirty="0">
+                <a:solidFill>
+                  <a:srgbClr val="1A1A2E"/>
+                </a:solidFill>
+                <a:latin typeface="Calibri" pitchFamily="34" charset="0"/>
+                <a:ea typeface="Calibri" pitchFamily="34" charset="-122"/>
+                <a:cs typeface="Calibri" pitchFamily="34" charset="-120"/>
+              </a:rPr>
+              <a:t>Venue #200 (Bars)</a:t>
+            </a:r>
+            <a:endParaRPr lang="en-US" sz="1000" dirty="0"/>
+          </a:p>
+        </p:txBody>
+      </p:sp>
+      <p:sp>
+        <p:nvSpPr>
+          <p:cNvPr id="24" name="Text 21"/>
+          <p:cNvSpPr/>
+          <p:nvPr/>
+        </p:nvSpPr>
+        <p:spPr>
+          <a:xfrm>
+            <a:off x="10241280" y="3593592"/>
+            <a:ext cx="1417320" cy="219456"/>
+          </a:xfrm>
+          <a:prstGeom prst="rect">
+            <a:avLst/>
+          </a:prstGeom>
+          <a:noFill/>
+          <a:ln/>
+        </p:spPr>
+        <p:txBody>
+          <a:bodyPr wrap="square" rtlCol="0" anchor="ctr"/>
+          <a:lstStyle/>
+          <a:p>
+            <a:pPr algn="r" indent="0" marL="0">
+              <a:buNone/>
+            </a:pPr>
+            <a:r>
+              <a:rPr lang="en-US" sz="1000" b="1" dirty="0">
+                <a:solidFill>
+                  <a:srgbClr val="B8500A"/>
+                </a:solidFill>
+                <a:latin typeface="Calibri" pitchFamily="34" charset="0"/>
+                <a:ea typeface="Calibri" pitchFamily="34" charset="-122"/>
+                <a:cs typeface="Calibri" pitchFamily="34" charset="-120"/>
+              </a:rPr>
+              <a:t>55%</a:t>
+            </a:r>
+            <a:endParaRPr lang="en-US" sz="1000" dirty="0"/>
+          </a:p>
+        </p:txBody>
+      </p:sp>
+      <p:sp>
+        <p:nvSpPr>
+          <p:cNvPr id="25" name="Text 22"/>
+          <p:cNvSpPr/>
+          <p:nvPr/>
+        </p:nvSpPr>
+        <p:spPr>
+          <a:xfrm>
+            <a:off x="6263640" y="3794760"/>
+            <a:ext cx="5394960" cy="201168"/>
+          </a:xfrm>
+          <a:prstGeom prst="rect">
+            <a:avLst/>
+          </a:prstGeom>
+          <a:noFill/>
+          <a:ln/>
+        </p:spPr>
+        <p:txBody>
+          <a:bodyPr wrap="square" rtlCol="0" anchor="ctr"/>
+          <a:lstStyle/>
+          <a:p>
+            <a:pPr indent="0" marL="0">
+              <a:buNone/>
+            </a:pPr>
+            <a:r>
+              <a:rPr lang="en-US" sz="900" i="1" dirty="0">
+                <a:solidFill>
+                  <a:srgbClr val="8A4B0A"/>
+                </a:solidFill>
+                <a:latin typeface="Calibri" pitchFamily="34" charset="0"/>
+                <a:ea typeface="Calibri" pitchFamily="34" charset="-122"/>
+                <a:cs typeface="Calibri" pitchFamily="34" charset="-120"/>
+              </a:rPr>
+              <a:t>engagement declining → content/placement review</a:t>
+            </a:r>
+            <a:endParaRPr lang="en-US" sz="900" dirty="0"/>
+          </a:p>
+        </p:txBody>
+      </p:sp>
+      <p:sp>
+        <p:nvSpPr>
+          <p:cNvPr id="26" name="Text 23"/>
+          <p:cNvSpPr/>
+          <p:nvPr/>
+        </p:nvSpPr>
+        <p:spPr>
+          <a:xfrm>
+            <a:off x="6263640" y="4014216"/>
+            <a:ext cx="3977640" cy="219456"/>
+          </a:xfrm>
+          <a:prstGeom prst="rect">
+            <a:avLst/>
+          </a:prstGeom>
+          <a:noFill/>
+          <a:ln/>
+        </p:spPr>
+        <p:txBody>
+          <a:bodyPr wrap="square" rtlCol="0" anchor="ctr"/>
+          <a:lstStyle/>
+          <a:p>
+            <a:pPr indent="0" marL="0">
+              <a:buNone/>
+            </a:pPr>
+            <a:r>
+              <a:rPr lang="en-US" sz="1000" dirty="0">
+                <a:solidFill>
+                  <a:srgbClr val="1A1A2E"/>
+                </a:solidFill>
+                <a:latin typeface="Calibri" pitchFamily="34" charset="0"/>
+                <a:ea typeface="Calibri" pitchFamily="34" charset="-122"/>
+                <a:cs typeface="Calibri" pitchFamily="34" charset="-120"/>
+              </a:rPr>
+              <a:t>Venue #12 (Restaurants)</a:t>
+            </a:r>
+            <a:endParaRPr lang="en-US" sz="1000" dirty="0"/>
+          </a:p>
+        </p:txBody>
+      </p:sp>
+      <p:sp>
+        <p:nvSpPr>
+          <p:cNvPr id="27" name="Text 24"/>
+          <p:cNvSpPr/>
+          <p:nvPr/>
+        </p:nvSpPr>
+        <p:spPr>
+          <a:xfrm>
+            <a:off x="10241280" y="4014216"/>
+            <a:ext cx="1417320" cy="219456"/>
+          </a:xfrm>
+          <a:prstGeom prst="rect">
+            <a:avLst/>
+          </a:prstGeom>
+          <a:noFill/>
+          <a:ln/>
+        </p:spPr>
+        <p:txBody>
+          <a:bodyPr wrap="square" rtlCol="0" anchor="ctr"/>
+          <a:lstStyle/>
+          <a:p>
+            <a:pPr algn="r" indent="0" marL="0">
+              <a:buNone/>
+            </a:pPr>
+            <a:r>
+              <a:rPr lang="en-US" sz="1000" b="1" dirty="0">
+                <a:solidFill>
+                  <a:srgbClr val="B8500A"/>
+                </a:solidFill>
+                <a:latin typeface="Calibri" pitchFamily="34" charset="0"/>
+                <a:ea typeface="Calibri" pitchFamily="34" charset="-122"/>
+                <a:cs typeface="Calibri" pitchFamily="34" charset="-120"/>
+              </a:rPr>
+              <a:t>52%</a:t>
+            </a:r>
+            <a:endParaRPr lang="en-US" sz="1000" dirty="0"/>
+          </a:p>
+        </p:txBody>
+      </p:sp>
+      <p:sp>
+        <p:nvSpPr>
+          <p:cNvPr id="28" name="Text 25"/>
+          <p:cNvSpPr/>
+          <p:nvPr/>
+        </p:nvSpPr>
+        <p:spPr>
+          <a:xfrm>
+            <a:off x="6263640" y="4215384"/>
+            <a:ext cx="5394960" cy="201168"/>
+          </a:xfrm>
+          <a:prstGeom prst="rect">
+            <a:avLst/>
+          </a:prstGeom>
+          <a:noFill/>
+          <a:ln/>
+        </p:spPr>
+        <p:txBody>
+          <a:bodyPr wrap="square" rtlCol="0" anchor="ctr"/>
+          <a:lstStyle/>
+          <a:p>
+            <a:pPr indent="0" marL="0">
+              <a:buNone/>
+            </a:pPr>
+            <a:r>
+              <a:rPr lang="en-US" sz="900" i="1" dirty="0">
+                <a:solidFill>
+                  <a:srgbClr val="8A4B0A"/>
+                </a:solidFill>
+                <a:latin typeface="Calibri" pitchFamily="34" charset="0"/>
+                <a:ea typeface="Calibri" pitchFamily="34" charset="-122"/>
+                <a:cs typeface="Calibri" pitchFamily="34" charset="-120"/>
+              </a:rPr>
+              <a:t>uptime issue → dispatch technical support</a:t>
+            </a:r>
+            <a:endParaRPr lang="en-US" sz="900" dirty="0"/>
+          </a:p>
+        </p:txBody>
+      </p:sp>
+      <p:sp>
+        <p:nvSpPr>
+          <p:cNvPr id="29" name="Text 26"/>
+          <p:cNvSpPr/>
+          <p:nvPr/>
+        </p:nvSpPr>
+        <p:spPr>
+          <a:xfrm>
+            <a:off x="6263640" y="4526280"/>
+            <a:ext cx="5394960" cy="237744"/>
+          </a:xfrm>
+          <a:prstGeom prst="rect">
+            <a:avLst/>
+          </a:prstGeom>
+          <a:noFill/>
+          <a:ln/>
+        </p:spPr>
+        <p:txBody>
+          <a:bodyPr wrap="square" rtlCol="0" anchor="ctr"/>
+          <a:lstStyle/>
+          <a:p>
+            <a:pPr indent="0" marL="0">
+              <a:buNone/>
+            </a:pPr>
+            <a:r>
+              <a:rPr lang="en-US" sz="1200" b="1" dirty="0">
+                <a:solidFill>
+                  <a:srgbClr val="1E2761"/>
+                </a:solidFill>
+                <a:latin typeface="Cambria" pitchFamily="34" charset="0"/>
+                <a:ea typeface="Cambria" pitchFamily="34" charset="-122"/>
+                <a:cs typeface="Cambria" pitchFamily="34" charset="-120"/>
+              </a:rPr>
+              <a:t>Priority quadrant (Q3 revenue × Q4 risk)</a:t>
+            </a:r>
+            <a:endParaRPr lang="en-US" sz="1200" dirty="0"/>
+          </a:p>
+        </p:txBody>
+      </p:sp>
+      <p:sp>
+        <p:nvSpPr>
+          <p:cNvPr id="30" name="Text 27"/>
+          <p:cNvSpPr/>
+          <p:nvPr/>
+        </p:nvSpPr>
+        <p:spPr>
+          <a:xfrm>
+            <a:off x="6263640" y="4800600"/>
+            <a:ext cx="4023360" cy="237744"/>
+          </a:xfrm>
+          <a:prstGeom prst="rect">
+            <a:avLst/>
+          </a:prstGeom>
+          <a:noFill/>
+          <a:ln/>
+        </p:spPr>
+        <p:txBody>
+          <a:bodyPr wrap="square" rtlCol="0" anchor="ctr"/>
+          <a:lstStyle/>
+          <a:p>
+            <a:pPr indent="0" marL="0">
+              <a:buNone/>
+            </a:pPr>
+            <a:r>
+              <a:rPr lang="en-US" sz="1000" dirty="0">
+                <a:solidFill>
+                  <a:srgbClr val="1A1A2E"/>
+                </a:solidFill>
+                <a:latin typeface="Calibri" pitchFamily="34" charset="0"/>
+                <a:ea typeface="Calibri" pitchFamily="34" charset="-122"/>
+                <a:cs typeface="Calibri" pitchFamily="34" charset="-120"/>
+              </a:rPr>
+              <a:t>Save now (high value, high risk)</a:t>
+            </a:r>
+            <a:endParaRPr lang="en-US" sz="1000" dirty="0"/>
+          </a:p>
+        </p:txBody>
+      </p:sp>
+      <p:sp>
+        <p:nvSpPr>
+          <p:cNvPr id="31" name="Text 28"/>
+          <p:cNvSpPr/>
+          <p:nvPr/>
+        </p:nvSpPr>
+        <p:spPr>
+          <a:xfrm>
+            <a:off x="10195560" y="4800600"/>
+            <a:ext cx="1463040" cy="237744"/>
+          </a:xfrm>
+          <a:prstGeom prst="rect">
+            <a:avLst/>
+          </a:prstGeom>
+          <a:noFill/>
+          <a:ln/>
+        </p:spPr>
+        <p:txBody>
+          <a:bodyPr wrap="square" rtlCol="0" anchor="ctr"/>
+          <a:lstStyle/>
+          <a:p>
+            <a:pPr algn="r" indent="0" marL="0">
+              <a:buNone/>
+            </a:pPr>
+            <a:r>
+              <a:rPr lang="en-US" sz="1000" b="1" dirty="0">
+                <a:solidFill>
+                  <a:srgbClr val="B8500A"/>
+                </a:solidFill>
+                <a:latin typeface="Calibri" pitchFamily="34" charset="0"/>
+                <a:ea typeface="Calibri" pitchFamily="34" charset="-122"/>
+                <a:cs typeface="Calibri" pitchFamily="34" charset="-120"/>
+              </a:rPr>
+              <a:t>136</a:t>
+            </a:r>
+            <a:endParaRPr lang="en-US" sz="1000" dirty="0"/>
+          </a:p>
+        </p:txBody>
+      </p:sp>
+      <p:sp>
+        <p:nvSpPr>
+          <p:cNvPr id="32" name="Text 29"/>
+          <p:cNvSpPr/>
+          <p:nvPr/>
+        </p:nvSpPr>
+        <p:spPr>
+          <a:xfrm>
+            <a:off x="6263640" y="5047488"/>
+            <a:ext cx="4023360" cy="237744"/>
+          </a:xfrm>
+          <a:prstGeom prst="rect">
+            <a:avLst/>
+          </a:prstGeom>
+          <a:noFill/>
+          <a:ln/>
+        </p:spPr>
+        <p:txBody>
+          <a:bodyPr wrap="square" rtlCol="0" anchor="ctr"/>
+          <a:lstStyle/>
+          <a:p>
+            <a:pPr indent="0" marL="0">
+              <a:buNone/>
+            </a:pPr>
+            <a:r>
+              <a:rPr lang="en-US" sz="1000" dirty="0">
+                <a:solidFill>
+                  <a:srgbClr val="1A1A2E"/>
+                </a:solidFill>
+                <a:latin typeface="Calibri" pitchFamily="34" charset="0"/>
+                <a:ea typeface="Calibri" pitchFamily="34" charset="-122"/>
+                <a:cs typeface="Calibri" pitchFamily="34" charset="-120"/>
+              </a:rPr>
+              <a:t>Monitor (low value, low risk)</a:t>
+            </a:r>
+            <a:endParaRPr lang="en-US" sz="1000" dirty="0"/>
+          </a:p>
+        </p:txBody>
+      </p:sp>
+      <p:sp>
+        <p:nvSpPr>
+          <p:cNvPr id="33" name="Text 30"/>
+          <p:cNvSpPr/>
+          <p:nvPr/>
+        </p:nvSpPr>
+        <p:spPr>
+          <a:xfrm>
+            <a:off x="10195560" y="5047488"/>
+            <a:ext cx="1463040" cy="237744"/>
+          </a:xfrm>
+          <a:prstGeom prst="rect">
+            <a:avLst/>
+          </a:prstGeom>
+          <a:noFill/>
+          <a:ln/>
+        </p:spPr>
+        <p:txBody>
+          <a:bodyPr wrap="square" rtlCol="0" anchor="ctr"/>
+          <a:lstStyle/>
+          <a:p>
+            <a:pPr algn="r" indent="0" marL="0">
+              <a:buNone/>
+            </a:pPr>
+            <a:r>
+              <a:rPr lang="en-US" sz="1000" b="1" dirty="0">
+                <a:solidFill>
+                  <a:srgbClr val="5B6178"/>
+                </a:solidFill>
+                <a:latin typeface="Calibri" pitchFamily="34" charset="0"/>
+                <a:ea typeface="Calibri" pitchFamily="34" charset="-122"/>
+                <a:cs typeface="Calibri" pitchFamily="34" charset="-120"/>
+              </a:rPr>
+              <a:t>136</a:t>
+            </a:r>
+            <a:endParaRPr lang="en-US" sz="1000" dirty="0"/>
+          </a:p>
+        </p:txBody>
+      </p:sp>
+      <p:sp>
+        <p:nvSpPr>
+          <p:cNvPr id="34" name="Text 31"/>
+          <p:cNvSpPr/>
+          <p:nvPr/>
+        </p:nvSpPr>
+        <p:spPr>
+          <a:xfrm>
+            <a:off x="6263640" y="5294376"/>
+            <a:ext cx="4023360" cy="237744"/>
+          </a:xfrm>
+          <a:prstGeom prst="rect">
+            <a:avLst/>
+          </a:prstGeom>
+          <a:noFill/>
+          <a:ln/>
+        </p:spPr>
+        <p:txBody>
+          <a:bodyPr wrap="square" rtlCol="0" anchor="ctr"/>
+          <a:lstStyle/>
+          <a:p>
+            <a:pPr indent="0" marL="0">
+              <a:buNone/>
+            </a:pPr>
+            <a:r>
+              <a:rPr lang="en-US" sz="1000" dirty="0">
+                <a:solidFill>
+                  <a:srgbClr val="1A1A2E"/>
+                </a:solidFill>
+                <a:latin typeface="Calibri" pitchFamily="34" charset="0"/>
+                <a:ea typeface="Calibri" pitchFamily="34" charset="-122"/>
+                <a:cs typeface="Calibri" pitchFamily="34" charset="-120"/>
+              </a:rPr>
+              <a:t>Protect (high value, low risk)</a:t>
+            </a:r>
+            <a:endParaRPr lang="en-US" sz="1000" dirty="0"/>
+          </a:p>
+        </p:txBody>
+      </p:sp>
+      <p:sp>
+        <p:nvSpPr>
+          <p:cNvPr id="35" name="Text 32"/>
+          <p:cNvSpPr/>
+          <p:nvPr/>
+        </p:nvSpPr>
+        <p:spPr>
+          <a:xfrm>
+            <a:off x="10195560" y="5294376"/>
+            <a:ext cx="1463040" cy="237744"/>
+          </a:xfrm>
+          <a:prstGeom prst="rect">
+            <a:avLst/>
+          </a:prstGeom>
+          <a:noFill/>
+          <a:ln/>
+        </p:spPr>
+        <p:txBody>
+          <a:bodyPr wrap="square" rtlCol="0" anchor="ctr"/>
+          <a:lstStyle/>
+          <a:p>
+            <a:pPr algn="r" indent="0" marL="0">
+              <a:buNone/>
+            </a:pPr>
+            <a:r>
+              <a:rPr lang="en-US" sz="1000" b="1" dirty="0">
+                <a:solidFill>
+                  <a:srgbClr val="2C7A57"/>
+                </a:solidFill>
+                <a:latin typeface="Calibri" pitchFamily="34" charset="0"/>
+                <a:ea typeface="Calibri" pitchFamily="34" charset="-122"/>
+                <a:cs typeface="Calibri" pitchFamily="34" charset="-120"/>
+              </a:rPr>
+              <a:t>64</a:t>
+            </a:r>
+            <a:endParaRPr lang="en-US" sz="1000" dirty="0"/>
+          </a:p>
+        </p:txBody>
+      </p:sp>
+      <p:sp>
+        <p:nvSpPr>
+          <p:cNvPr id="36" name="Text 33"/>
+          <p:cNvSpPr/>
+          <p:nvPr/>
+        </p:nvSpPr>
+        <p:spPr>
+          <a:xfrm>
+            <a:off x="6263640" y="5541264"/>
+            <a:ext cx="4023360" cy="237744"/>
+          </a:xfrm>
+          <a:prstGeom prst="rect">
+            <a:avLst/>
+          </a:prstGeom>
+          <a:noFill/>
+          <a:ln/>
+        </p:spPr>
+        <p:txBody>
+          <a:bodyPr wrap="square" rtlCol="0" anchor="ctr"/>
+          <a:lstStyle/>
+          <a:p>
+            <a:pPr indent="0" marL="0">
+              <a:buNone/>
+            </a:pPr>
+            <a:r>
+              <a:rPr lang="en-US" sz="1000" dirty="0">
+                <a:solidFill>
+                  <a:srgbClr val="1A1A2E"/>
+                </a:solidFill>
+                <a:latin typeface="Calibri" pitchFamily="34" charset="0"/>
+                <a:ea typeface="Calibri" pitchFamily="34" charset="-122"/>
+                <a:cs typeface="Calibri" pitchFamily="34" charset="-120"/>
+              </a:rPr>
+              <a:t>Low priority (low value, high risk)</a:t>
+            </a:r>
+            <a:endParaRPr lang="en-US" sz="1000" dirty="0"/>
+          </a:p>
+        </p:txBody>
+      </p:sp>
+      <p:sp>
+        <p:nvSpPr>
+          <p:cNvPr id="37" name="Text 34"/>
+          <p:cNvSpPr/>
+          <p:nvPr/>
+        </p:nvSpPr>
+        <p:spPr>
+          <a:xfrm>
+            <a:off x="10195560" y="5541264"/>
+            <a:ext cx="1463040" cy="237744"/>
+          </a:xfrm>
+          <a:prstGeom prst="rect">
+            <a:avLst/>
+          </a:prstGeom>
+          <a:noFill/>
+          <a:ln/>
+        </p:spPr>
+        <p:txBody>
+          <a:bodyPr wrap="square" rtlCol="0" anchor="ctr"/>
+          <a:lstStyle/>
+          <a:p>
+            <a:pPr algn="r" indent="0" marL="0">
+              <a:buNone/>
+            </a:pPr>
+            <a:r>
+              <a:rPr lang="en-US" sz="1000" b="1" dirty="0">
+                <a:solidFill>
+                  <a:srgbClr val="5B6178"/>
+                </a:solidFill>
+                <a:latin typeface="Calibri" pitchFamily="34" charset="0"/>
+                <a:ea typeface="Calibri" pitchFamily="34" charset="-122"/>
+                <a:cs typeface="Calibri" pitchFamily="34" charset="-120"/>
+              </a:rPr>
+              <a:t>64</a:t>
+            </a:r>
+            <a:endParaRPr lang="en-US" sz="1000" dirty="0"/>
+          </a:p>
+        </p:txBody>
+      </p:sp>
+      <p:sp>
+        <p:nvSpPr>
+          <p:cNvPr id="38" name="Text 35"/>
+          <p:cNvSpPr/>
+          <p:nvPr/>
+        </p:nvSpPr>
+        <p:spPr>
+          <a:xfrm>
+            <a:off x="548640" y="6016752"/>
+            <a:ext cx="11064240" cy="548640"/>
+          </a:xfrm>
+          <a:prstGeom prst="rect">
+            <a:avLst/>
+          </a:prstGeom>
+          <a:noFill/>
+          <a:ln/>
+        </p:spPr>
+        <p:txBody>
+          <a:bodyPr wrap="square" rtlCol="0" anchor="ctr"/>
+          <a:lstStyle/>
+          <a:p>
+            <a:pPr indent="0" marL="0">
+              <a:lnSpc>
+                <a:spcPts val="1050"/>
+              </a:lnSpc>
+              <a:buNone/>
+            </a:pPr>
+            <a:r>
+              <a:rPr lang="en-US" sz="870" i="1" dirty="0">
+                <a:solidFill>
+                  <a:srgbClr val="5B6178"/>
+                </a:solidFill>
+                <a:latin typeface="Calibri" pitchFamily="34" charset="0"/>
+                <a:ea typeface="Calibri" pitchFamily="34" charset="-122"/>
+                <a:cs typeface="Calibri" pitchFamily="34" charset="-120"/>
+              </a:rPr>
+              <a:t>Flags come from 5-fold OOF predictions; AUC/PR-AUC read modest next to the revenue model's R² because churn is a rarer, noisier event to call than revenue — typical for a churn classifier, not a modeling miss. realized_ad_revenue's importance is a venue_type confound, not a causal driver. Each "Save now" / flagged venue also carries a SHAP top driver (from the fold model that never saw it) mapped to a concrete action — technical dispatch, AM retention call, content review — not a generic "reach out."</a:t>
+            </a:r>
+            <a:endParaRPr lang="en-US" sz="870" dirty="0"/>
+          </a:p>
+        </p:txBody>
+      </p:sp>
+      <p:sp>
+        <p:nvSpPr>
+          <p:cNvPr id="39" name="Text 36"/>
+          <p:cNvSpPr/>
+          <p:nvPr/>
+        </p:nvSpPr>
+        <p:spPr>
+          <a:xfrm>
+            <a:off x="457200" y="6537960"/>
+            <a:ext cx="7315200" cy="274320"/>
+          </a:xfrm>
+          <a:prstGeom prst="rect">
+            <a:avLst/>
+          </a:prstGeom>
+          <a:noFill/>
+          <a:ln/>
+        </p:spPr>
+        <p:txBody>
+          <a:bodyPr wrap="square" rtlCol="0" anchor="ctr"/>
+          <a:lstStyle/>
+          <a:p>
+            <a:pPr indent="0" marL="0">
+              <a:buNone/>
+            </a:pPr>
+            <a:r>
+              <a:rPr lang="en-US" sz="900" dirty="0">
+                <a:solidFill>
+                  <a:srgbClr val="5B6178"/>
+                </a:solidFill>
+                <a:latin typeface="Calibri" pitchFamily="34" charset="0"/>
+                <a:ea typeface="Calibri" pitchFamily="34" charset="-122"/>
+                <a:cs typeface="Calibri" pitchFamily="34" charset="-120"/>
+              </a:rPr>
+              <a:t>Venue retention</a:t>
+            </a:r>
+            <a:endParaRPr lang="en-US" sz="900" dirty="0"/>
+          </a:p>
+        </p:txBody>
+      </p:sp>
+    </p:spTree>
+  </p:cSld>
+  <p:clrMapOvr>
+    <a:masterClrMapping/>
+  </p:clrMapOvr>
+</p:sld>
+</file>
+
+<file path=ppt/slides/slide17.xml><?xml version="1.0" encoding="utf-8"?>
+<p:sld xmlns:a="http://schemas.openxmlformats.org/drawingml/2006/main" xmlns:r="http://schemas.openxmlformats.org/officeDocument/2006/relationships" xmlns:p="http://schemas.openxmlformats.org/presentationml/2006/main">
+  <p:cSld name="Slide 17">
     <p:bg>
       <p:bgPr>
         <a:solidFill>

--- a/deck/AtmosphereTV_DOOH_Measurement.pptx
+++ b/deck/AtmosphereTV_DOOH_Measurement.pptx
@@ -22,9 +22,10 @@
     <p:sldId id="270" r:id="rId16"/>
     <p:sldId id="271" r:id="rId17"/>
     <p:sldId id="272" r:id="rId18"/>
+    <p:sldId id="273" r:id="rId19"/>
   </p:sldIdLst>
   <p:notesMasterIdLst>
-    <p:notesMasterId r:id="rId19"/>
+    <p:notesMasterId r:id="rId20"/>
   </p:notesMasterIdLst>
   <p:sldSz cx="12192000" cy="6858000"/>
   <p:notesSz cx="6858000" cy="12192000"/>
@@ -4093,6 +4094,94 @@
             <a:fld id="{F7021451-1387-4CA6-816F-3879F97B5CBC}" type="slidenum">
               <a:rPr lang="en-US"/>
               <a:t>17</a:t>
+            </a:fld>
+            <a:endParaRPr lang="en-US"/>
+          </a:p>
+        </p:txBody>
+      </p:sp>
+    </p:spTree>
+    <p:extLst>
+      <p:ext uri="{BB962C8B-B14F-4D97-AF65-F5344CB8AC3E}">
+        <p14:creationId xmlns:p14="http://schemas.microsoft.com/office/powerpoint/2010/main" val="1024086991"/>
+      </p:ext>
+    </p:extLst>
+  </p:cSld>
+  <p:clrMapOvr>
+    <a:masterClrMapping/>
+  </p:clrMapOvr>
+</p:notes>
+</file>
+
+<file path=ppt/notesSlides/notesSlide18.xml><?xml version="1.0" encoding="utf-8"?>
+<p:notes xmlns:a="http://schemas.openxmlformats.org/drawingml/2006/main" xmlns:r="http://schemas.openxmlformats.org/officeDocument/2006/relationships" xmlns:p="http://schemas.openxmlformats.org/presentationml/2006/main">
+  <p:cSld>
+    <p:spTree>
+      <p:nvGrpSpPr>
+        <p:cNvPr id="1" name=""/>
+        <p:cNvGrpSpPr/>
+        <p:nvPr/>
+      </p:nvGrpSpPr>
+      <p:grpSpPr>
+        <a:xfrm>
+          <a:off x="0" y="0"/>
+          <a:ext cx="0" cy="0"/>
+          <a:chOff x="0" y="0"/>
+          <a:chExt cx="0" cy="0"/>
+        </a:xfrm>
+      </p:grpSpPr>
+      <p:sp>
+        <p:nvSpPr>
+          <p:cNvPr id="2" name="Slide Image Placeholder 1"/>
+          <p:cNvSpPr>
+            <a:spLocks noGrp="1" noRot="1" noChangeAspect="1"/>
+          </p:cNvSpPr>
+          <p:nvPr>
+            <p:ph type="sldImg"/>
+          </p:nvPr>
+        </p:nvSpPr>
+        <p:spPr/>
+      </p:sp>
+      <p:sp>
+        <p:nvSpPr>
+          <p:cNvPr id="3" name="Notes Placeholder 2"/>
+          <p:cNvSpPr>
+            <a:spLocks noGrp="1"/>
+          </p:cNvSpPr>
+          <p:nvPr>
+            <p:ph type="body" idx="1"/>
+          </p:nvPr>
+        </p:nvSpPr>
+        <p:spPr/>
+        <p:txBody>
+          <a:bodyPr/>
+          <a:lstStyle/>
+          <a:p>
+            <a:r>
+              <a:rPr lang="en-US" dirty="0"/>
+              <a:t/>
+            </a:r>
+            <a:endParaRPr lang="en-US" dirty="0"/>
+          </a:p>
+        </p:txBody>
+      </p:sp>
+      <p:sp>
+        <p:nvSpPr>
+          <p:cNvPr id="4" name="Slide Number Placeholder 3"/>
+          <p:cNvSpPr>
+            <a:spLocks noGrp="1"/>
+          </p:cNvSpPr>
+          <p:nvPr>
+            <p:ph type="sldNum" sz="quarter" idx="10"/>
+          </p:nvPr>
+        </p:nvSpPr>
+        <p:spPr/>
+        <p:txBody>
+          <a:bodyPr/>
+          <a:lstStyle/>
+          <a:p>
+            <a:fld id="{F7021451-1387-4CA6-816F-3879F97B5CBC}" type="slidenum">
+              <a:rPr lang="en-US"/>
+              <a:t>18</a:t>
             </a:fld>
             <a:endParaRPr lang="en-US"/>
           </a:p>
@@ -8976,7 +9065,7 @@
               <a:buNone/>
             </a:pPr>
             <a:r>
-              <a:rPr lang="en-US" sz="2500" b="1" dirty="0">
+              <a:rPr lang="en-US" sz="2300" b="1" dirty="0">
                 <a:solidFill>
                   <a:srgbClr val="1E2761"/>
                 </a:solidFill>
@@ -8984,9 +9073,9 @@
                 <a:ea typeface="Cambria" pitchFamily="34" charset="-122"/>
                 <a:cs typeface="Cambria" pitchFamily="34" charset="-120"/>
               </a:rPr>
-              <a:t>Predicting venue ad-revenue, honestly</a:t>
-            </a:r>
-            <a:endParaRPr lang="en-US" sz="2500" dirty="0"/>
+              <a:t>Venue revenue model: what feeds in, and why this model</a:t>
+            </a:r>
+            <a:endParaRPr lang="en-US" sz="2300" dirty="0"/>
           </a:p>
         </p:txBody>
       </p:sp>
@@ -9050,7 +9139,7 @@
                 <a:ea typeface="Calibri" pitchFamily="34" charset="-122"/>
                 <a:cs typeface="Calibri" pitchFamily="34" charset="-120"/>
               </a:rPr>
-              <a:t>Step 5 of 6 · Answers Q3</a:t>
+              <a:t>Step 5 setup · Answers Q3</a:t>
             </a:r>
             <a:endParaRPr lang="en-US" sz="950" dirty="0"/>
           </a:p>
@@ -9065,19 +9154,22 @@
         <p:spPr>
           <a:xfrm>
             <a:off x="548640" y="1005840"/>
-            <a:ext cx="10972800" cy="365760"/>
-          </a:xfrm>
-          <a:prstGeom prst="rect">
-            <a:avLst/>
-          </a:prstGeom>
-          <a:noFill/>
-          <a:ln/>
-        </p:spPr>
-        <p:txBody>
-          <a:bodyPr wrap="square" rtlCol="0" anchor="ctr"/>
-          <a:lstStyle/>
-          <a:p>
-            <a:pPr indent="0" marL="0">
+            <a:ext cx="10972800" cy="411480"/>
+          </a:xfrm>
+          <a:prstGeom prst="rect">
+            <a:avLst/>
+          </a:prstGeom>
+          <a:noFill/>
+          <a:ln/>
+        </p:spPr>
+        <p:txBody>
+          <a:bodyPr wrap="square" rtlCol="0" anchor="ctr"/>
+          <a:lstStyle/>
+          <a:p>
+            <a:pPr indent="0" marL="0">
+              <a:lnSpc>
+                <a:spcPts val="1500"/>
+              </a:lnSpc>
               <a:buNone/>
             </a:pPr>
             <a:r>
@@ -9089,7 +9181,7 @@
                 <a:ea typeface="Calibri" pitchFamily="34" charset="-122"/>
                 <a:cs typeface="Calibri" pitchFamily="34" charset="-120"/>
               </a:rPr>
-              <a:t>Gradient-boosted trees on observable venue characteristics + the calibrated per-exposure lift as a feature.</a:t>
+              <a:t>Can this venue's own characteristics + a validated advertising effect predict what it actually earns — and surface who's under-monetized or high-potential?</a:t>
             </a:r>
             <a:endParaRPr lang="en-US" sz="1250" dirty="0"/>
           </a:p>
@@ -9097,18 +9189,222 @@
       </p:sp>
       <p:sp>
         <p:nvSpPr>
-          <p:cNvPr id="6" name="Shape 4"/>
-          <p:cNvSpPr/>
-          <p:nvPr/>
-        </p:nvSpPr>
-        <p:spPr>
-          <a:xfrm>
-            <a:off x="548640" y="1508760"/>
-            <a:ext cx="2651760" cy="1051560"/>
+          <p:cNvPr id="6" name="Text 4"/>
+          <p:cNvSpPr/>
+          <p:nvPr/>
+        </p:nvSpPr>
+        <p:spPr>
+          <a:xfrm>
+            <a:off x="548640" y="1645920"/>
+            <a:ext cx="5394960" cy="502920"/>
+          </a:xfrm>
+          <a:prstGeom prst="rect">
+            <a:avLst/>
+          </a:prstGeom>
+          <a:noFill/>
+          <a:ln/>
+        </p:spPr>
+        <p:txBody>
+          <a:bodyPr wrap="square" rtlCol="0" anchor="ctr"/>
+          <a:lstStyle/>
+          <a:p>
+            <a:pPr indent="0" marL="0">
+              <a:lnSpc>
+                <a:spcPts val="1600"/>
+              </a:lnSpc>
+              <a:buNone/>
+            </a:pPr>
+            <a:r>
+              <a:rPr lang="en-US" sz="1350" b="1" dirty="0">
+                <a:solidFill>
+                  <a:srgbClr val="1E2761"/>
+                </a:solidFill>
+                <a:latin typeface="Cambria" pitchFamily="34" charset="0"/>
+                <a:ea typeface="Cambria" pitchFamily="34" charset="-122"/>
+                <a:cs typeface="Cambria" pitchFamily="34" charset="-120"/>
+              </a:rPr>
+              <a:t>Model: HistGradientBoostingRegressor (sklearn)</a:t>
+            </a:r>
+            <a:endParaRPr lang="en-US" sz="1350" dirty="0"/>
+          </a:p>
+        </p:txBody>
+      </p:sp>
+      <p:sp>
+        <p:nvSpPr>
+          <p:cNvPr id="7" name="Text 5"/>
+          <p:cNvSpPr/>
+          <p:nvPr/>
+        </p:nvSpPr>
+        <p:spPr>
+          <a:xfrm>
+            <a:off x="548640" y="2194560"/>
+            <a:ext cx="5394960" cy="1188720"/>
+          </a:xfrm>
+          <a:prstGeom prst="rect">
+            <a:avLst/>
+          </a:prstGeom>
+          <a:noFill/>
+          <a:ln/>
+        </p:spPr>
+        <p:txBody>
+          <a:bodyPr wrap="square" rtlCol="0" anchor="ctr"/>
+          <a:lstStyle/>
+          <a:p>
+            <a:pPr indent="0" marL="0">
+              <a:lnSpc>
+                <a:spcPts val="1400"/>
+              </a:lnSpc>
+              <a:buNone/>
+            </a:pPr>
+            <a:r>
+              <a:rPr lang="en-US" sz="1050" dirty="0">
+                <a:solidFill>
+                  <a:srgbClr val="1A1A2E"/>
+                </a:solidFill>
+                <a:latin typeface="Calibri" pitchFamily="34" charset="0"/>
+                <a:ea typeface="Calibri" pitchFamily="34" charset="-122"/>
+                <a:cs typeface="Calibri" pitchFamily="34" charset="-120"/>
+              </a:rPr>
+              <a:t>Chosen because it handles venue_type / geo_cluster / traffic_tier as native categorical splits. geo_cluster alone has 20+ levels — one-hot encoding that would blow the feature space up and dilute each split's signal. categorical_features="from_dtype" avoids that entirely, no preprocessing needed.</a:t>
+            </a:r>
+            <a:endParaRPr lang="en-US" sz="1050" dirty="0"/>
+          </a:p>
+        </p:txBody>
+      </p:sp>
+      <p:sp>
+        <p:nvSpPr>
+          <p:cNvPr id="8" name="Text 6"/>
+          <p:cNvSpPr/>
+          <p:nvPr/>
+        </p:nvSpPr>
+        <p:spPr>
+          <a:xfrm>
+            <a:off x="548640" y="3520440"/>
+            <a:ext cx="5394960" cy="365760"/>
+          </a:xfrm>
+          <a:prstGeom prst="rect">
+            <a:avLst/>
+          </a:prstGeom>
+          <a:noFill/>
+          <a:ln/>
+        </p:spPr>
+        <p:txBody>
+          <a:bodyPr wrap="square" rtlCol="0" anchor="ctr"/>
+          <a:lstStyle/>
+          <a:p>
+            <a:pPr indent="0" marL="0">
+              <a:buNone/>
+            </a:pPr>
+            <a:r>
+              <a:rPr lang="en-US" sz="1350" b="1" dirty="0">
+                <a:solidFill>
+                  <a:srgbClr val="1E2761"/>
+                </a:solidFill>
+                <a:latin typeface="Cambria" pitchFamily="34" charset="0"/>
+                <a:ea typeface="Cambria" pitchFamily="34" charset="-122"/>
+                <a:cs typeface="Cambria" pitchFamily="34" charset="-120"/>
+              </a:rPr>
+              <a:t>Target: realized_ad_revenue</a:t>
+            </a:r>
+            <a:endParaRPr lang="en-US" sz="1350" dirty="0"/>
+          </a:p>
+        </p:txBody>
+      </p:sp>
+      <p:sp>
+        <p:nvSpPr>
+          <p:cNvPr id="9" name="Text 7"/>
+          <p:cNvSpPr/>
+          <p:nvPr/>
+        </p:nvSpPr>
+        <p:spPr>
+          <a:xfrm>
+            <a:off x="548640" y="3977640"/>
+            <a:ext cx="5394960" cy="365760"/>
+          </a:xfrm>
+          <a:prstGeom prst="rect">
+            <a:avLst/>
+          </a:prstGeom>
+          <a:noFill/>
+          <a:ln/>
+        </p:spPr>
+        <p:txBody>
+          <a:bodyPr wrap="square" rtlCol="0" anchor="ctr"/>
+          <a:lstStyle/>
+          <a:p>
+            <a:pPr indent="0" marL="0">
+              <a:lnSpc>
+                <a:spcPts val="1400"/>
+              </a:lnSpc>
+              <a:buNone/>
+            </a:pPr>
+            <a:r>
+              <a:rPr lang="en-US" sz="1050" i="1" dirty="0">
+                <a:solidFill>
+                  <a:srgbClr val="5B6178"/>
+                </a:solidFill>
+                <a:latin typeface="Calibri" pitchFamily="34" charset="0"/>
+                <a:ea typeface="Calibri" pitchFamily="34" charset="-122"/>
+                <a:cs typeface="Calibri" pitchFamily="34" charset="-120"/>
+              </a:rPr>
+              <a:t>The venue's actual weekly $ ad revenue — not a proxy, not a survey response.</a:t>
+            </a:r>
+            <a:endParaRPr lang="en-US" sz="1050" dirty="0"/>
+          </a:p>
+        </p:txBody>
+      </p:sp>
+      <p:sp>
+        <p:nvSpPr>
+          <p:cNvPr id="10" name="Text 8"/>
+          <p:cNvSpPr/>
+          <p:nvPr/>
+        </p:nvSpPr>
+        <p:spPr>
+          <a:xfrm>
+            <a:off x="6263640" y="1645920"/>
+            <a:ext cx="5394960" cy="320040"/>
+          </a:xfrm>
+          <a:prstGeom prst="rect">
+            <a:avLst/>
+          </a:prstGeom>
+          <a:noFill/>
+          <a:ln/>
+        </p:spPr>
+        <p:txBody>
+          <a:bodyPr wrap="square" rtlCol="0" anchor="ctr"/>
+          <a:lstStyle/>
+          <a:p>
+            <a:pPr indent="0" marL="0">
+              <a:buNone/>
+            </a:pPr>
+            <a:r>
+              <a:rPr lang="en-US" sz="1350" b="1" dirty="0">
+                <a:solidFill>
+                  <a:srgbClr val="1E2761"/>
+                </a:solidFill>
+                <a:latin typeface="Cambria" pitchFamily="34" charset="0"/>
+                <a:ea typeface="Cambria" pitchFamily="34" charset="-122"/>
+                <a:cs typeface="Cambria" pitchFamily="34" charset="-120"/>
+              </a:rPr>
+              <a:t>Features — two sources</a:t>
+            </a:r>
+            <a:endParaRPr lang="en-US" sz="1350" dirty="0"/>
+          </a:p>
+        </p:txBody>
+      </p:sp>
+      <p:sp>
+        <p:nvSpPr>
+          <p:cNvPr id="11" name="Shape 9"/>
+          <p:cNvSpPr/>
+          <p:nvPr/>
+        </p:nvSpPr>
+        <p:spPr>
+          <a:xfrm>
+            <a:off x="6263640" y="2029968"/>
+            <a:ext cx="5394960" cy="1600200"/>
           </a:xfrm>
           <a:prstGeom prst="roundRect">
             <a:avLst>
-              <a:gd name="adj" fmla="val 6957"/>
+              <a:gd name="adj" fmla="val 4000"/>
             </a:avLst>
           </a:prstGeom>
           <a:solidFill>
@@ -9119,96 +9415,242 @@
       </p:sp>
       <p:sp>
         <p:nvSpPr>
-          <p:cNvPr id="7" name="Text 5"/>
-          <p:cNvSpPr/>
-          <p:nvPr/>
-        </p:nvSpPr>
-        <p:spPr>
-          <a:xfrm>
-            <a:off x="685800" y="1618488"/>
-            <a:ext cx="2377440" cy="502920"/>
-          </a:xfrm>
-          <a:prstGeom prst="rect">
-            <a:avLst/>
-          </a:prstGeom>
-          <a:noFill/>
-          <a:ln/>
-        </p:spPr>
-        <p:txBody>
-          <a:bodyPr wrap="square" rtlCol="0" anchor="ctr"/>
-          <a:lstStyle/>
-          <a:p>
-            <a:pPr indent="0" marL="0">
-              <a:buNone/>
-            </a:pPr>
-            <a:r>
-              <a:rPr lang="en-US" sz="2200" b="1" dirty="0">
+          <p:cNvPr id="12" name="Text 10"/>
+          <p:cNvSpPr/>
+          <p:nvPr/>
+        </p:nvSpPr>
+        <p:spPr>
+          <a:xfrm>
+            <a:off x="6492240" y="2148840"/>
+            <a:ext cx="4937760" cy="274320"/>
+          </a:xfrm>
+          <a:prstGeom prst="rect">
+            <a:avLst/>
+          </a:prstGeom>
+          <a:noFill/>
+          <a:ln/>
+        </p:spPr>
+        <p:txBody>
+          <a:bodyPr wrap="square" rtlCol="0" anchor="ctr"/>
+          <a:lstStyle/>
+          <a:p>
+            <a:pPr indent="0" marL="0">
+              <a:buNone/>
+            </a:pPr>
+            <a:r>
+              <a:rPr lang="en-US" sz="1100" b="1" dirty="0">
                 <a:solidFill>
                   <a:srgbClr val="1E2761"/>
                 </a:solidFill>
-                <a:latin typeface="Calibri" pitchFamily="34" charset="0"/>
-                <a:ea typeface="Calibri" pitchFamily="34" charset="-122"/>
-                <a:cs typeface="Calibri" pitchFamily="34" charset="-120"/>
-              </a:rPr>
-              <a:t>0.84</a:t>
-            </a:r>
-            <a:endParaRPr lang="en-US" sz="2200" dirty="0"/>
-          </a:p>
-        </p:txBody>
-      </p:sp>
-      <p:sp>
-        <p:nvSpPr>
-          <p:cNvPr id="8" name="Text 6"/>
-          <p:cNvSpPr/>
-          <p:nvPr/>
-        </p:nvSpPr>
-        <p:spPr>
-          <a:xfrm>
-            <a:off x="685800" y="2130552"/>
-            <a:ext cx="2377440" cy="365760"/>
-          </a:xfrm>
-          <a:prstGeom prst="rect">
-            <a:avLst/>
-          </a:prstGeom>
-          <a:noFill/>
-          <a:ln/>
-        </p:spPr>
-        <p:txBody>
-          <a:bodyPr wrap="square" rtlCol="0" anchor="ctr"/>
-          <a:lstStyle/>
-          <a:p>
-            <a:pPr indent="0" marL="0">
-              <a:buNone/>
-            </a:pPr>
-            <a:r>
-              <a:rPr lang="en-US" sz="950" dirty="0">
-                <a:solidFill>
-                  <a:srgbClr val="5B6178"/>
-                </a:solidFill>
-                <a:latin typeface="Calibri" pitchFamily="34" charset="0"/>
-                <a:ea typeface="Calibri" pitchFamily="34" charset="-122"/>
-                <a:cs typeface="Calibri" pitchFamily="34" charset="-120"/>
-              </a:rPr>
-              <a:t>Held-out R²</a:t>
-            </a:r>
-            <a:endParaRPr lang="en-US" sz="950" dirty="0"/>
-          </a:p>
-        </p:txBody>
-      </p:sp>
-      <p:sp>
-        <p:nvSpPr>
-          <p:cNvPr id="9" name="Shape 7"/>
-          <p:cNvSpPr/>
-          <p:nvPr/>
-        </p:nvSpPr>
-        <p:spPr>
-          <a:xfrm>
-            <a:off x="3337560" y="1508760"/>
-            <a:ext cx="2651760" cy="1051560"/>
+                <a:latin typeface="Cambria" pitchFamily="34" charset="0"/>
+                <a:ea typeface="Cambria" pitchFamily="34" charset="-122"/>
+                <a:cs typeface="Cambria" pitchFamily="34" charset="-120"/>
+              </a:rPr>
+              <a:t>This venue's own characteristics</a:t>
+            </a:r>
+            <a:endParaRPr lang="en-US" sz="1100" dirty="0"/>
+          </a:p>
+        </p:txBody>
+      </p:sp>
+      <p:sp>
+        <p:nvSpPr>
+          <p:cNvPr id="13" name="Text 11"/>
+          <p:cNvSpPr/>
+          <p:nvPr/>
+        </p:nvSpPr>
+        <p:spPr>
+          <a:xfrm>
+            <a:off x="6492240" y="2468880"/>
+            <a:ext cx="4937760" cy="1051560"/>
+          </a:xfrm>
+          <a:prstGeom prst="rect">
+            <a:avLst/>
+          </a:prstGeom>
+          <a:noFill/>
+          <a:ln/>
+        </p:spPr>
+        <p:txBody>
+          <a:bodyPr wrap="square" rtlCol="0" anchor="ctr"/>
+          <a:lstStyle/>
+          <a:p>
+            <a:pPr indent="0" marL="0">
+              <a:lnSpc>
+                <a:spcPts val="1700"/>
+              </a:lnSpc>
+              <a:buNone/>
+            </a:pPr>
+            <a:r>
+              <a:rPr lang="en-US" sz="1050" dirty="0">
+                <a:solidFill>
+                  <a:srgbClr val="1A1A2E"/>
+                </a:solidFill>
+                <a:latin typeface="Courier New" pitchFamily="34" charset="0"/>
+                <a:ea typeface="Courier New" pitchFamily="34" charset="-122"/>
+                <a:cs typeface="Courier New" pitchFamily="34" charset="-120"/>
+              </a:rPr>
+              <a:t>venue_type · geo_cluster · traffic_tier</a:t>
+            </a:r>
+            <a:endParaRPr lang="en-US" sz="1050" dirty="0"/>
+          </a:p>
+          <a:p>
+            <a:pPr indent="0" marL="0">
+              <a:lnSpc>
+                <a:spcPts val="1700"/>
+              </a:lnSpc>
+              <a:buNone/>
+            </a:pPr>
+            <a:r>
+              <a:rPr lang="en-US" sz="1050" dirty="0">
+                <a:solidFill>
+                  <a:srgbClr val="1A1A2E"/>
+                </a:solidFill>
+                <a:latin typeface="Courier New" pitchFamily="34" charset="0"/>
+                <a:ea typeface="Courier New" pitchFamily="34" charset="-122"/>
+                <a:cs typeface="Courier New" pitchFamily="34" charset="-120"/>
+              </a:rPr>
+              <a:t>baseline_level · dwell_time_min</a:t>
+            </a:r>
+            <a:endParaRPr lang="en-US" sz="1050" dirty="0"/>
+          </a:p>
+          <a:p>
+            <a:pPr indent="0" marL="0">
+              <a:lnSpc>
+                <a:spcPts val="1700"/>
+              </a:lnSpc>
+              <a:buNone/>
+            </a:pPr>
+            <a:r>
+              <a:rPr lang="en-US" sz="1050" dirty="0">
+                <a:solidFill>
+                  <a:srgbClr val="1A1A2E"/>
+                </a:solidFill>
+                <a:latin typeface="Courier New" pitchFamily="34" charset="0"/>
+                <a:ea typeface="Courier New" pitchFamily="34" charset="-122"/>
+                <a:cs typeface="Courier New" pitchFamily="34" charset="-120"/>
+              </a:rPr>
+              <a:t>screen_count · audience_quality</a:t>
+            </a:r>
+            <a:endParaRPr lang="en-US" sz="1050" dirty="0"/>
+          </a:p>
+        </p:txBody>
+      </p:sp>
+      <p:sp>
+        <p:nvSpPr>
+          <p:cNvPr id="14" name="Shape 12"/>
+          <p:cNvSpPr/>
+          <p:nvPr/>
+        </p:nvSpPr>
+        <p:spPr>
+          <a:xfrm>
+            <a:off x="6263640" y="3767328"/>
+            <a:ext cx="5394960" cy="1325880"/>
           </a:xfrm>
           <a:prstGeom prst="roundRect">
             <a:avLst>
-              <a:gd name="adj" fmla="val 6957"/>
+              <a:gd name="adj" fmla="val 4828"/>
+            </a:avLst>
+          </a:prstGeom>
+          <a:solidFill>
+            <a:srgbClr val="FDF1E3"/>
+          </a:solidFill>
+          <a:ln/>
+        </p:spPr>
+      </p:sp>
+      <p:sp>
+        <p:nvSpPr>
+          <p:cNvPr id="15" name="Text 13"/>
+          <p:cNvSpPr/>
+          <p:nvPr/>
+        </p:nvSpPr>
+        <p:spPr>
+          <a:xfrm>
+            <a:off x="6492240" y="3886200"/>
+            <a:ext cx="4937760" cy="274320"/>
+          </a:xfrm>
+          <a:prstGeom prst="rect">
+            <a:avLst/>
+          </a:prstGeom>
+          <a:noFill/>
+          <a:ln/>
+        </p:spPr>
+        <p:txBody>
+          <a:bodyPr wrap="square" rtlCol="0" anchor="ctr"/>
+          <a:lstStyle/>
+          <a:p>
+            <a:pPr indent="0" marL="0">
+              <a:buNone/>
+            </a:pPr>
+            <a:r>
+              <a:rPr lang="en-US" sz="1030" b="1" dirty="0">
+                <a:solidFill>
+                  <a:srgbClr val="8A4B0A"/>
+                </a:solidFill>
+                <a:latin typeface="Cambria" pitchFamily="34" charset="0"/>
+                <a:ea typeface="Cambria" pitchFamily="34" charset="-122"/>
+                <a:cs typeface="Cambria" pitchFamily="34" charset="-120"/>
+              </a:rPr>
+              <a:t>From the Q1/Q2 causal pipeline (RCT: Slide 7 · MMM: Slide 10)</a:t>
+            </a:r>
+            <a:endParaRPr lang="en-US" sz="1030" dirty="0"/>
+          </a:p>
+        </p:txBody>
+      </p:sp>
+      <p:sp>
+        <p:nvSpPr>
+          <p:cNvPr id="16" name="Text 14"/>
+          <p:cNvSpPr/>
+          <p:nvPr/>
+        </p:nvSpPr>
+        <p:spPr>
+          <a:xfrm>
+            <a:off x="6492240" y="4187952"/>
+            <a:ext cx="4937760" cy="868680"/>
+          </a:xfrm>
+          <a:prstGeom prst="rect">
+            <a:avLst/>
+          </a:prstGeom>
+          <a:noFill/>
+          <a:ln/>
+        </p:spPr>
+        <p:txBody>
+          <a:bodyPr wrap="square" rtlCol="0" anchor="ctr"/>
+          <a:lstStyle/>
+          <a:p>
+            <a:pPr indent="0" marL="0">
+              <a:lnSpc>
+                <a:spcPts val="1250"/>
+              </a:lnSpc>
+              <a:buNone/>
+            </a:pPr>
+            <a:r>
+              <a:rPr lang="en-US" sz="970" dirty="0">
+                <a:solidFill>
+                  <a:srgbClr val="8A4B0A"/>
+                </a:solidFill>
+                <a:latin typeface="Calibri" pitchFamily="34" charset="0"/>
+                <a:ea typeface="Calibri" pitchFamily="34" charset="-122"/>
+                <a:cs typeface="Calibri" pitchFamily="34" charset="-120"/>
+              </a:rPr>
+              <a:t>calibrated_lift_feature — the RCT-calibrated per-exposure lift from the MMM. This is where the advertising-incrementality pipeline plugs into the venue-economics side — the connection promised on Slide 14, not a separate silo.</a:t>
+            </a:r>
+            <a:endParaRPr lang="en-US" sz="970" dirty="0"/>
+          </a:p>
+        </p:txBody>
+      </p:sp>
+      <p:sp>
+        <p:nvSpPr>
+          <p:cNvPr id="17" name="Shape 15"/>
+          <p:cNvSpPr/>
+          <p:nvPr/>
+        </p:nvSpPr>
+        <p:spPr>
+          <a:xfrm>
+            <a:off x="548640" y="5257800"/>
+            <a:ext cx="11091672" cy="960120"/>
+          </a:xfrm>
+          <a:prstGeom prst="roundRect">
+            <a:avLst>
+              <a:gd name="adj" fmla="val 5714"/>
             </a:avLst>
           </a:prstGeom>
           <a:solidFill>
@@ -9219,363 +9661,33 @@
       </p:sp>
       <p:sp>
         <p:nvSpPr>
-          <p:cNvPr id="10" name="Text 8"/>
-          <p:cNvSpPr/>
-          <p:nvPr/>
-        </p:nvSpPr>
-        <p:spPr>
-          <a:xfrm>
-            <a:off x="3474720" y="1618488"/>
-            <a:ext cx="2377440" cy="502920"/>
-          </a:xfrm>
-          <a:prstGeom prst="rect">
-            <a:avLst/>
-          </a:prstGeom>
-          <a:noFill/>
-          <a:ln/>
-        </p:spPr>
-        <p:txBody>
-          <a:bodyPr wrap="square" rtlCol="0" anchor="ctr"/>
-          <a:lstStyle/>
-          <a:p>
-            <a:pPr indent="0" marL="0">
-              <a:buNone/>
-            </a:pPr>
-            <a:r>
-              <a:rPr lang="en-US" sz="2200" b="1" dirty="0">
-                <a:solidFill>
-                  <a:srgbClr val="1E2761"/>
-                </a:solidFill>
-                <a:latin typeface="Calibri" pitchFamily="34" charset="0"/>
-                <a:ea typeface="Calibri" pitchFamily="34" charset="-122"/>
-                <a:cs typeface="Calibri" pitchFamily="34" charset="-120"/>
-              </a:rPr>
-              <a:t>22.1%</a:t>
-            </a:r>
-            <a:endParaRPr lang="en-US" sz="2200" dirty="0"/>
-          </a:p>
-        </p:txBody>
-      </p:sp>
-      <p:sp>
-        <p:nvSpPr>
-          <p:cNvPr id="11" name="Text 9"/>
-          <p:cNvSpPr/>
-          <p:nvPr/>
-        </p:nvSpPr>
-        <p:spPr>
-          <a:xfrm>
-            <a:off x="3474720" y="2130552"/>
-            <a:ext cx="2377440" cy="365760"/>
-          </a:xfrm>
-          <a:prstGeom prst="rect">
-            <a:avLst/>
-          </a:prstGeom>
-          <a:noFill/>
-          <a:ln/>
-        </p:spPr>
-        <p:txBody>
-          <a:bodyPr wrap="square" rtlCol="0" anchor="ctr"/>
-          <a:lstStyle/>
-          <a:p>
-            <a:pPr indent="0" marL="0">
-              <a:buNone/>
-            </a:pPr>
-            <a:r>
-              <a:rPr lang="en-US" sz="950" dirty="0">
-                <a:solidFill>
-                  <a:srgbClr val="5B6178"/>
-                </a:solidFill>
-                <a:latin typeface="Calibri" pitchFamily="34" charset="0"/>
-                <a:ea typeface="Calibri" pitchFamily="34" charset="-122"/>
-                <a:cs typeface="Calibri" pitchFamily="34" charset="-120"/>
-              </a:rPr>
-              <a:t>Held-out MAPE</a:t>
-            </a:r>
-            <a:endParaRPr lang="en-US" sz="950" dirty="0"/>
-          </a:p>
-        </p:txBody>
-      </p:sp>
-      <p:sp>
-        <p:nvSpPr>
-          <p:cNvPr id="12" name="Shape 10"/>
-          <p:cNvSpPr/>
-          <p:nvPr/>
-        </p:nvSpPr>
-        <p:spPr>
-          <a:xfrm>
-            <a:off x="6126480" y="1508760"/>
-            <a:ext cx="2651760" cy="1051560"/>
-          </a:xfrm>
-          <a:prstGeom prst="roundRect">
-            <a:avLst>
-              <a:gd name="adj" fmla="val 6957"/>
-            </a:avLst>
-          </a:prstGeom>
-          <a:solidFill>
-            <a:srgbClr val="F5F7FC"/>
-          </a:solidFill>
-          <a:ln/>
-        </p:spPr>
-      </p:sp>
-      <p:sp>
-        <p:nvSpPr>
-          <p:cNvPr id="13" name="Text 11"/>
-          <p:cNvSpPr/>
-          <p:nvPr/>
-        </p:nvSpPr>
-        <p:spPr>
-          <a:xfrm>
-            <a:off x="6263640" y="1618488"/>
-            <a:ext cx="2377440" cy="502920"/>
-          </a:xfrm>
-          <a:prstGeom prst="rect">
-            <a:avLst/>
-          </a:prstGeom>
-          <a:noFill/>
-          <a:ln/>
-        </p:spPr>
-        <p:txBody>
-          <a:bodyPr wrap="square" rtlCol="0" anchor="ctr"/>
-          <a:lstStyle/>
-          <a:p>
-            <a:pPr indent="0" marL="0">
-              <a:buNone/>
-            </a:pPr>
-            <a:r>
-              <a:rPr lang="en-US" sz="2200" b="1" dirty="0">
-                <a:solidFill>
-                  <a:srgbClr val="1E2761"/>
-                </a:solidFill>
-                <a:latin typeface="Calibri" pitchFamily="34" charset="0"/>
-                <a:ea typeface="Calibri" pitchFamily="34" charset="-122"/>
-                <a:cs typeface="Calibri" pitchFamily="34" charset="-120"/>
-              </a:rPr>
-              <a:t>$45</a:t>
-            </a:r>
-            <a:endParaRPr lang="en-US" sz="2200" dirty="0"/>
-          </a:p>
-        </p:txBody>
-      </p:sp>
-      <p:sp>
-        <p:nvSpPr>
-          <p:cNvPr id="14" name="Text 12"/>
-          <p:cNvSpPr/>
-          <p:nvPr/>
-        </p:nvSpPr>
-        <p:spPr>
-          <a:xfrm>
-            <a:off x="6263640" y="2130552"/>
-            <a:ext cx="2377440" cy="365760"/>
-          </a:xfrm>
-          <a:prstGeom prst="rect">
-            <a:avLst/>
-          </a:prstGeom>
-          <a:noFill/>
-          <a:ln/>
-        </p:spPr>
-        <p:txBody>
-          <a:bodyPr wrap="square" rtlCol="0" anchor="ctr"/>
-          <a:lstStyle/>
-          <a:p>
-            <a:pPr indent="0" marL="0">
-              <a:buNone/>
-            </a:pPr>
-            <a:r>
-              <a:rPr lang="en-US" sz="950" dirty="0">
-                <a:solidFill>
-                  <a:srgbClr val="5B6178"/>
-                </a:solidFill>
-                <a:latin typeface="Calibri" pitchFamily="34" charset="0"/>
-                <a:ea typeface="Calibri" pitchFamily="34" charset="-122"/>
-                <a:cs typeface="Calibri" pitchFamily="34" charset="-120"/>
-              </a:rPr>
-              <a:t>Held-out MAE</a:t>
-            </a:r>
-            <a:endParaRPr lang="en-US" sz="950" dirty="0"/>
-          </a:p>
-        </p:txBody>
-      </p:sp>
-      <p:sp>
-        <p:nvSpPr>
-          <p:cNvPr id="15" name="Shape 13"/>
-          <p:cNvSpPr/>
-          <p:nvPr/>
-        </p:nvSpPr>
-        <p:spPr>
-          <a:xfrm>
-            <a:off x="8915400" y="1508760"/>
-            <a:ext cx="2651760" cy="1051560"/>
-          </a:xfrm>
-          <a:prstGeom prst="roundRect">
-            <a:avLst>
-              <a:gd name="adj" fmla="val 6957"/>
-            </a:avLst>
-          </a:prstGeom>
-          <a:solidFill>
-            <a:srgbClr val="F5F7FC"/>
-          </a:solidFill>
-          <a:ln/>
-        </p:spPr>
-      </p:sp>
-      <p:sp>
-        <p:nvSpPr>
-          <p:cNvPr id="16" name="Text 14"/>
-          <p:cNvSpPr/>
-          <p:nvPr/>
-        </p:nvSpPr>
-        <p:spPr>
-          <a:xfrm>
-            <a:off x="9052560" y="1618488"/>
-            <a:ext cx="2377440" cy="502920"/>
-          </a:xfrm>
-          <a:prstGeom prst="rect">
-            <a:avLst/>
-          </a:prstGeom>
-          <a:noFill/>
-          <a:ln/>
-        </p:spPr>
-        <p:txBody>
-          <a:bodyPr wrap="square" rtlCol="0" anchor="ctr"/>
-          <a:lstStyle/>
-          <a:p>
-            <a:pPr indent="0" marL="0">
-              <a:buNone/>
-            </a:pPr>
-            <a:r>
-              <a:rPr lang="en-US" sz="2200" b="1" dirty="0">
-                <a:solidFill>
-                  <a:srgbClr val="1E2761"/>
-                </a:solidFill>
-                <a:latin typeface="Calibri" pitchFamily="34" charset="0"/>
-                <a:ea typeface="Calibri" pitchFamily="34" charset="-122"/>
-                <a:cs typeface="Calibri" pitchFamily="34" charset="-120"/>
-              </a:rPr>
-              <a:t>20</a:t>
-            </a:r>
-            <a:endParaRPr lang="en-US" sz="2200" dirty="0"/>
-          </a:p>
-        </p:txBody>
-      </p:sp>
-      <p:sp>
-        <p:nvSpPr>
-          <p:cNvPr id="17" name="Text 15"/>
-          <p:cNvSpPr/>
-          <p:nvPr/>
-        </p:nvSpPr>
-        <p:spPr>
-          <a:xfrm>
-            <a:off x="9052560" y="2130552"/>
-            <a:ext cx="2377440" cy="365760"/>
-          </a:xfrm>
-          <a:prstGeom prst="rect">
-            <a:avLst/>
-          </a:prstGeom>
-          <a:noFill/>
-          <a:ln/>
-        </p:spPr>
-        <p:txBody>
-          <a:bodyPr wrap="square" rtlCol="0" anchor="ctr"/>
-          <a:lstStyle/>
-          <a:p>
-            <a:pPr indent="0" marL="0">
-              <a:buNone/>
-            </a:pPr>
-            <a:r>
-              <a:rPr lang="en-US" sz="950" dirty="0">
-                <a:solidFill>
-                  <a:srgbClr val="5B6178"/>
-                </a:solidFill>
-                <a:latin typeface="Calibri" pitchFamily="34" charset="0"/>
-                <a:ea typeface="Calibri" pitchFamily="34" charset="-122"/>
-                <a:cs typeface="Calibri" pitchFamily="34" charset="-120"/>
-              </a:rPr>
-              <a:t>Venues flagged</a:t>
-            </a:r>
-            <a:endParaRPr lang="en-US" sz="950" dirty="0"/>
-          </a:p>
-        </p:txBody>
-      </p:sp>
-      <p:graphicFrame>
-        <p:nvGraphicFramePr>
-          <p:cNvPr id="18" name="Chart 0" descr=""/>
-          <p:cNvGraphicFramePr/>
-          <p:nvPr/>
-        </p:nvGraphicFramePr>
-        <p:xfrm>
-          <a:off x="548640" y="2880360"/>
-          <a:ext cx="5394960" cy="3246120"/>
-        </p:xfrm>
-        <a:graphic xmlns:a="http://schemas.openxmlformats.org/drawingml/2006/main">
-          <a:graphicData uri="http://schemas.openxmlformats.org/drawingml/2006/chart">
-            <c:chart xmlns:c="http://schemas.openxmlformats.org/drawingml/2006/chart" r:id="rId1"/>
-          </a:graphicData>
-        </a:graphic>
-      </p:graphicFrame>
-      <p:sp>
-        <p:nvSpPr>
-          <p:cNvPr id="19" name="Text 16"/>
-          <p:cNvSpPr/>
-          <p:nvPr/>
-        </p:nvSpPr>
-        <p:spPr>
-          <a:xfrm>
-            <a:off x="6263640" y="2880360"/>
-            <a:ext cx="5394960" cy="274320"/>
-          </a:xfrm>
-          <a:prstGeom prst="rect">
-            <a:avLst/>
-          </a:prstGeom>
-          <a:noFill/>
-          <a:ln/>
-        </p:spPr>
-        <p:txBody>
-          <a:bodyPr wrap="square" rtlCol="0" anchor="ctr"/>
-          <a:lstStyle/>
-          <a:p>
-            <a:pPr indent="0" marL="0">
-              <a:buNone/>
-            </a:pPr>
-            <a:r>
-              <a:rPr lang="en-US" sz="1200" b="1" dirty="0">
-                <a:solidFill>
-                  <a:srgbClr val="1E2761"/>
-                </a:solidFill>
-                <a:latin typeface="Cambria" pitchFamily="34" charset="0"/>
-                <a:ea typeface="Cambria" pitchFamily="34" charset="-122"/>
-                <a:cs typeface="Cambria" pitchFamily="34" charset="-120"/>
-              </a:rPr>
-              <a:t>Top under-monetized venues (of 20 flagged)</a:t>
-            </a:r>
-            <a:endParaRPr lang="en-US" sz="1200" dirty="0"/>
-          </a:p>
-        </p:txBody>
-      </p:sp>
-      <p:sp>
-        <p:nvSpPr>
-          <p:cNvPr id="20" name="Text 17"/>
-          <p:cNvSpPr/>
-          <p:nvPr/>
-        </p:nvSpPr>
-        <p:spPr>
-          <a:xfrm>
-            <a:off x="6263640" y="3209544"/>
-            <a:ext cx="3657600" cy="274320"/>
-          </a:xfrm>
-          <a:prstGeom prst="rect">
-            <a:avLst/>
-          </a:prstGeom>
-          <a:noFill/>
-          <a:ln/>
-        </p:spPr>
-        <p:txBody>
-          <a:bodyPr wrap="square" rtlCol="0" anchor="ctr"/>
-          <a:lstStyle/>
-          <a:p>
-            <a:pPr indent="0" marL="0">
-              <a:buNone/>
-            </a:pPr>
-            <a:r>
-              <a:rPr lang="en-US" sz="1000" dirty="0">
+          <p:cNvPr id="18" name="Text 16"/>
+          <p:cNvSpPr/>
+          <p:nvPr/>
+        </p:nvSpPr>
+        <p:spPr>
+          <a:xfrm>
+            <a:off x="777240" y="5367528"/>
+            <a:ext cx="10607040" cy="777240"/>
+          </a:xfrm>
+          <a:prstGeom prst="rect">
+            <a:avLst/>
+          </a:prstGeom>
+          <a:noFill/>
+          <a:ln/>
+        </p:spPr>
+        <p:txBody>
+          <a:bodyPr wrap="square" rtlCol="0" anchor="ctr"/>
+          <a:lstStyle/>
+          <a:p>
+            <a:pPr indent="0" marL="0">
+              <a:lnSpc>
+                <a:spcPts val="1400"/>
+              </a:lnSpc>
+              <a:buNone/>
+            </a:pPr>
+            <a:r>
+              <a:rPr lang="en-US" sz="1050" i="1" dirty="0">
                 <a:solidFill>
                   <a:srgbClr val="1A1A2E"/>
                 </a:solidFill>
@@ -9583,681 +9695,15 @@
                 <a:ea typeface="Calibri" pitchFamily="34" charset="-122"/>
                 <a:cs typeface="Calibri" pitchFamily="34" charset="-120"/>
               </a:rPr>
-              <a:t>Venue #85 (Restaurants)</a:t>
-            </a:r>
-            <a:endParaRPr lang="en-US" sz="1000" dirty="0"/>
-          </a:p>
-        </p:txBody>
-      </p:sp>
-      <p:sp>
-        <p:nvSpPr>
-          <p:cNvPr id="21" name="Text 18"/>
-          <p:cNvSpPr/>
-          <p:nvPr/>
-        </p:nvSpPr>
-        <p:spPr>
-          <a:xfrm>
-            <a:off x="9966960" y="3209544"/>
-            <a:ext cx="1691640" cy="274320"/>
-          </a:xfrm>
-          <a:prstGeom prst="rect">
-            <a:avLst/>
-          </a:prstGeom>
-          <a:noFill/>
-          <a:ln/>
-        </p:spPr>
-        <p:txBody>
-          <a:bodyPr wrap="square" rtlCol="0" anchor="ctr"/>
-          <a:lstStyle/>
-          <a:p>
-            <a:pPr algn="r" indent="0" marL="0">
-              <a:buNone/>
-            </a:pPr>
-            <a:r>
-              <a:rPr lang="en-US" sz="1000" b="1" dirty="0">
-                <a:solidFill>
-                  <a:srgbClr val="B8500A"/>
-                </a:solidFill>
-                <a:latin typeface="Calibri" pitchFamily="34" charset="0"/>
-                <a:ea typeface="Calibri" pitchFamily="34" charset="-122"/>
-                <a:cs typeface="Calibri" pitchFamily="34" charset="-120"/>
-              </a:rPr>
-              <a:t>-62%</a:t>
-            </a:r>
-            <a:endParaRPr lang="en-US" sz="1000" dirty="0"/>
-          </a:p>
-        </p:txBody>
-      </p:sp>
-      <p:sp>
-        <p:nvSpPr>
-          <p:cNvPr id="22" name="Text 19"/>
-          <p:cNvSpPr/>
-          <p:nvPr/>
-        </p:nvSpPr>
-        <p:spPr>
-          <a:xfrm>
-            <a:off x="6263640" y="3502152"/>
-            <a:ext cx="3657600" cy="274320"/>
-          </a:xfrm>
-          <a:prstGeom prst="rect">
-            <a:avLst/>
-          </a:prstGeom>
-          <a:noFill/>
-          <a:ln/>
-        </p:spPr>
-        <p:txBody>
-          <a:bodyPr wrap="square" rtlCol="0" anchor="ctr"/>
-          <a:lstStyle/>
-          <a:p>
-            <a:pPr indent="0" marL="0">
-              <a:buNone/>
-            </a:pPr>
-            <a:r>
-              <a:rPr lang="en-US" sz="1000" dirty="0">
-                <a:solidFill>
-                  <a:srgbClr val="1A1A2E"/>
-                </a:solidFill>
-                <a:latin typeface="Calibri" pitchFamily="34" charset="0"/>
-                <a:ea typeface="Calibri" pitchFamily="34" charset="-122"/>
-                <a:cs typeface="Calibri" pitchFamily="34" charset="-120"/>
-              </a:rPr>
-              <a:t>Venue #309 (Waiting Rooms)</a:t>
-            </a:r>
-            <a:endParaRPr lang="en-US" sz="1000" dirty="0"/>
-          </a:p>
-        </p:txBody>
-      </p:sp>
-      <p:sp>
-        <p:nvSpPr>
-          <p:cNvPr id="23" name="Text 20"/>
-          <p:cNvSpPr/>
-          <p:nvPr/>
-        </p:nvSpPr>
-        <p:spPr>
-          <a:xfrm>
-            <a:off x="9966960" y="3502152"/>
-            <a:ext cx="1691640" cy="274320"/>
-          </a:xfrm>
-          <a:prstGeom prst="rect">
-            <a:avLst/>
-          </a:prstGeom>
-          <a:noFill/>
-          <a:ln/>
-        </p:spPr>
-        <p:txBody>
-          <a:bodyPr wrap="square" rtlCol="0" anchor="ctr"/>
-          <a:lstStyle/>
-          <a:p>
-            <a:pPr algn="r" indent="0" marL="0">
-              <a:buNone/>
-            </a:pPr>
-            <a:r>
-              <a:rPr lang="en-US" sz="1000" b="1" dirty="0">
-                <a:solidFill>
-                  <a:srgbClr val="B8500A"/>
-                </a:solidFill>
-                <a:latin typeface="Calibri" pitchFamily="34" charset="0"/>
-                <a:ea typeface="Calibri" pitchFamily="34" charset="-122"/>
-                <a:cs typeface="Calibri" pitchFamily="34" charset="-120"/>
-              </a:rPr>
-              <a:t>-61%</a:t>
-            </a:r>
-            <a:endParaRPr lang="en-US" sz="1000" dirty="0"/>
-          </a:p>
-        </p:txBody>
-      </p:sp>
-      <p:sp>
-        <p:nvSpPr>
-          <p:cNvPr id="24" name="Text 21"/>
-          <p:cNvSpPr/>
-          <p:nvPr/>
-        </p:nvSpPr>
-        <p:spPr>
-          <a:xfrm>
-            <a:off x="6263640" y="3794760"/>
-            <a:ext cx="3657600" cy="274320"/>
-          </a:xfrm>
-          <a:prstGeom prst="rect">
-            <a:avLst/>
-          </a:prstGeom>
-          <a:noFill/>
-          <a:ln/>
-        </p:spPr>
-        <p:txBody>
-          <a:bodyPr wrap="square" rtlCol="0" anchor="ctr"/>
-          <a:lstStyle/>
-          <a:p>
-            <a:pPr indent="0" marL="0">
-              <a:buNone/>
-            </a:pPr>
-            <a:r>
-              <a:rPr lang="en-US" sz="1000" dirty="0">
-                <a:solidFill>
-                  <a:srgbClr val="1A1A2E"/>
-                </a:solidFill>
-                <a:latin typeface="Calibri" pitchFamily="34" charset="0"/>
-                <a:ea typeface="Calibri" pitchFamily="34" charset="-122"/>
-                <a:cs typeface="Calibri" pitchFamily="34" charset="-120"/>
-              </a:rPr>
-              <a:t>Venue #53 (Restaurants)</a:t>
-            </a:r>
-            <a:endParaRPr lang="en-US" sz="1000" dirty="0"/>
-          </a:p>
-        </p:txBody>
-      </p:sp>
-      <p:sp>
-        <p:nvSpPr>
-          <p:cNvPr id="25" name="Text 22"/>
-          <p:cNvSpPr/>
-          <p:nvPr/>
-        </p:nvSpPr>
-        <p:spPr>
-          <a:xfrm>
-            <a:off x="9966960" y="3794760"/>
-            <a:ext cx="1691640" cy="274320"/>
-          </a:xfrm>
-          <a:prstGeom prst="rect">
-            <a:avLst/>
-          </a:prstGeom>
-          <a:noFill/>
-          <a:ln/>
-        </p:spPr>
-        <p:txBody>
-          <a:bodyPr wrap="square" rtlCol="0" anchor="ctr"/>
-          <a:lstStyle/>
-          <a:p>
-            <a:pPr algn="r" indent="0" marL="0">
-              <a:buNone/>
-            </a:pPr>
-            <a:r>
-              <a:rPr lang="en-US" sz="1000" b="1" dirty="0">
-                <a:solidFill>
-                  <a:srgbClr val="B8500A"/>
-                </a:solidFill>
-                <a:latin typeface="Calibri" pitchFamily="34" charset="0"/>
-                <a:ea typeface="Calibri" pitchFamily="34" charset="-122"/>
-                <a:cs typeface="Calibri" pitchFamily="34" charset="-120"/>
-              </a:rPr>
-              <a:t>-61%</a:t>
-            </a:r>
-            <a:endParaRPr lang="en-US" sz="1000" dirty="0"/>
-          </a:p>
-        </p:txBody>
-      </p:sp>
-      <p:sp>
-        <p:nvSpPr>
-          <p:cNvPr id="26" name="Text 23"/>
-          <p:cNvSpPr/>
-          <p:nvPr/>
-        </p:nvSpPr>
-        <p:spPr>
-          <a:xfrm>
-            <a:off x="6263640" y="4087368"/>
-            <a:ext cx="3657600" cy="274320"/>
-          </a:xfrm>
-          <a:prstGeom prst="rect">
-            <a:avLst/>
-          </a:prstGeom>
-          <a:noFill/>
-          <a:ln/>
-        </p:spPr>
-        <p:txBody>
-          <a:bodyPr wrap="square" rtlCol="0" anchor="ctr"/>
-          <a:lstStyle/>
-          <a:p>
-            <a:pPr indent="0" marL="0">
-              <a:buNone/>
-            </a:pPr>
-            <a:r>
-              <a:rPr lang="en-US" sz="1000" dirty="0">
-                <a:solidFill>
-                  <a:srgbClr val="1A1A2E"/>
-                </a:solidFill>
-                <a:latin typeface="Calibri" pitchFamily="34" charset="0"/>
-                <a:ea typeface="Calibri" pitchFamily="34" charset="-122"/>
-                <a:cs typeface="Calibri" pitchFamily="34" charset="-120"/>
-              </a:rPr>
-              <a:t>Venue #247 (Bars)</a:t>
-            </a:r>
-            <a:endParaRPr lang="en-US" sz="1000" dirty="0"/>
-          </a:p>
-        </p:txBody>
-      </p:sp>
-      <p:sp>
-        <p:nvSpPr>
-          <p:cNvPr id="27" name="Text 24"/>
-          <p:cNvSpPr/>
-          <p:nvPr/>
-        </p:nvSpPr>
-        <p:spPr>
-          <a:xfrm>
-            <a:off x="9966960" y="4087368"/>
-            <a:ext cx="1691640" cy="274320"/>
-          </a:xfrm>
-          <a:prstGeom prst="rect">
-            <a:avLst/>
-          </a:prstGeom>
-          <a:noFill/>
-          <a:ln/>
-        </p:spPr>
-        <p:txBody>
-          <a:bodyPr wrap="square" rtlCol="0" anchor="ctr"/>
-          <a:lstStyle/>
-          <a:p>
-            <a:pPr algn="r" indent="0" marL="0">
-              <a:buNone/>
-            </a:pPr>
-            <a:r>
-              <a:rPr lang="en-US" sz="1000" b="1" dirty="0">
-                <a:solidFill>
-                  <a:srgbClr val="B8500A"/>
-                </a:solidFill>
-                <a:latin typeface="Calibri" pitchFamily="34" charset="0"/>
-                <a:ea typeface="Calibri" pitchFamily="34" charset="-122"/>
-                <a:cs typeface="Calibri" pitchFamily="34" charset="-120"/>
-              </a:rPr>
-              <a:t>-60%</a:t>
-            </a:r>
-            <a:endParaRPr lang="en-US" sz="1000" dirty="0"/>
-          </a:p>
-        </p:txBody>
-      </p:sp>
-      <p:sp>
-        <p:nvSpPr>
-          <p:cNvPr id="28" name="Text 25"/>
-          <p:cNvSpPr/>
-          <p:nvPr/>
-        </p:nvSpPr>
-        <p:spPr>
-          <a:xfrm>
-            <a:off x="6263640" y="4562856"/>
-            <a:ext cx="5394960" cy="274320"/>
-          </a:xfrm>
-          <a:prstGeom prst="rect">
-            <a:avLst/>
-          </a:prstGeom>
-          <a:noFill/>
-          <a:ln/>
-        </p:spPr>
-        <p:txBody>
-          <a:bodyPr wrap="square" rtlCol="0" anchor="ctr"/>
-          <a:lstStyle/>
-          <a:p>
-            <a:pPr indent="0" marL="0">
-              <a:buNone/>
-            </a:pPr>
-            <a:r>
-              <a:rPr lang="en-US" sz="1200" b="1" dirty="0">
-                <a:solidFill>
-                  <a:srgbClr val="1E2761"/>
-                </a:solidFill>
-                <a:latin typeface="Cambria" pitchFamily="34" charset="0"/>
-                <a:ea typeface="Cambria" pitchFamily="34" charset="-122"/>
-                <a:cs typeface="Cambria" pitchFamily="34" charset="-120"/>
-              </a:rPr>
-              <a:t>Top prospect venues (expansion priority)</a:t>
-            </a:r>
-            <a:endParaRPr lang="en-US" sz="1200" dirty="0"/>
-          </a:p>
-        </p:txBody>
-      </p:sp>
-      <p:sp>
-        <p:nvSpPr>
-          <p:cNvPr id="29" name="Text 26"/>
-          <p:cNvSpPr/>
-          <p:nvPr/>
-        </p:nvSpPr>
-        <p:spPr>
-          <a:xfrm>
-            <a:off x="6263640" y="4892040"/>
-            <a:ext cx="4023360" cy="274320"/>
-          </a:xfrm>
-          <a:prstGeom prst="rect">
-            <a:avLst/>
-          </a:prstGeom>
-          <a:noFill/>
-          <a:ln/>
-        </p:spPr>
-        <p:txBody>
-          <a:bodyPr wrap="square" rtlCol="0" anchor="ctr"/>
-          <a:lstStyle/>
-          <a:p>
-            <a:pPr indent="0" marL="0">
-              <a:buNone/>
-            </a:pPr>
-            <a:r>
-              <a:rPr lang="en-US" sz="1000" dirty="0">
-                <a:solidFill>
-                  <a:srgbClr val="1A1A2E"/>
-                </a:solidFill>
-                <a:latin typeface="Calibri" pitchFamily="34" charset="0"/>
-                <a:ea typeface="Calibri" pitchFamily="34" charset="-122"/>
-                <a:cs typeface="Calibri" pitchFamily="34" charset="-120"/>
-              </a:rPr>
-              <a:t>P0018 — Bars (existing market)</a:t>
-            </a:r>
-            <a:endParaRPr lang="en-US" sz="1000" dirty="0"/>
-          </a:p>
-        </p:txBody>
-      </p:sp>
-      <p:sp>
-        <p:nvSpPr>
-          <p:cNvPr id="30" name="Text 27"/>
-          <p:cNvSpPr/>
-          <p:nvPr/>
-        </p:nvSpPr>
-        <p:spPr>
-          <a:xfrm>
-            <a:off x="10195560" y="4892040"/>
-            <a:ext cx="1463040" cy="274320"/>
-          </a:xfrm>
-          <a:prstGeom prst="rect">
-            <a:avLst/>
-          </a:prstGeom>
-          <a:noFill/>
-          <a:ln/>
-        </p:spPr>
-        <p:txBody>
-          <a:bodyPr wrap="square" rtlCol="0" anchor="ctr"/>
-          <a:lstStyle/>
-          <a:p>
-            <a:pPr algn="r" indent="0" marL="0">
-              <a:buNone/>
-            </a:pPr>
-            <a:r>
-              <a:rPr lang="en-US" sz="1000" b="1" dirty="0">
-                <a:solidFill>
-                  <a:srgbClr val="2C7A57"/>
-                </a:solidFill>
-                <a:latin typeface="Calibri" pitchFamily="34" charset="0"/>
-                <a:ea typeface="Calibri" pitchFamily="34" charset="-122"/>
-                <a:cs typeface="Calibri" pitchFamily="34" charset="-120"/>
-              </a:rPr>
-              <a:t>$684</a:t>
-            </a:r>
-            <a:endParaRPr lang="en-US" sz="1000" dirty="0"/>
-          </a:p>
-        </p:txBody>
-      </p:sp>
-      <p:sp>
-        <p:nvSpPr>
-          <p:cNvPr id="31" name="Text 28"/>
-          <p:cNvSpPr/>
-          <p:nvPr/>
-        </p:nvSpPr>
-        <p:spPr>
-          <a:xfrm>
-            <a:off x="6263640" y="5184648"/>
-            <a:ext cx="4023360" cy="274320"/>
-          </a:xfrm>
-          <a:prstGeom prst="rect">
-            <a:avLst/>
-          </a:prstGeom>
-          <a:noFill/>
-          <a:ln/>
-        </p:spPr>
-        <p:txBody>
-          <a:bodyPr wrap="square" rtlCol="0" anchor="ctr"/>
-          <a:lstStyle/>
-          <a:p>
-            <a:pPr indent="0" marL="0">
-              <a:buNone/>
-            </a:pPr>
-            <a:r>
-              <a:rPr lang="en-US" sz="1000" dirty="0">
-                <a:solidFill>
-                  <a:srgbClr val="1A1A2E"/>
-                </a:solidFill>
-                <a:latin typeface="Calibri" pitchFamily="34" charset="0"/>
-                <a:ea typeface="Calibri" pitchFamily="34" charset="-122"/>
-                <a:cs typeface="Calibri" pitchFamily="34" charset="-120"/>
-              </a:rPr>
-              <a:t>P0055 — Restaurants (existing market)</a:t>
-            </a:r>
-            <a:endParaRPr lang="en-US" sz="1000" dirty="0"/>
-          </a:p>
-        </p:txBody>
-      </p:sp>
-      <p:sp>
-        <p:nvSpPr>
-          <p:cNvPr id="32" name="Text 29"/>
-          <p:cNvSpPr/>
-          <p:nvPr/>
-        </p:nvSpPr>
-        <p:spPr>
-          <a:xfrm>
-            <a:off x="10195560" y="5184648"/>
-            <a:ext cx="1463040" cy="274320"/>
-          </a:xfrm>
-          <a:prstGeom prst="rect">
-            <a:avLst/>
-          </a:prstGeom>
-          <a:noFill/>
-          <a:ln/>
-        </p:spPr>
-        <p:txBody>
-          <a:bodyPr wrap="square" rtlCol="0" anchor="ctr"/>
-          <a:lstStyle/>
-          <a:p>
-            <a:pPr algn="r" indent="0" marL="0">
-              <a:buNone/>
-            </a:pPr>
-            <a:r>
-              <a:rPr lang="en-US" sz="1000" b="1" dirty="0">
-                <a:solidFill>
-                  <a:srgbClr val="2C7A57"/>
-                </a:solidFill>
-                <a:latin typeface="Calibri" pitchFamily="34" charset="0"/>
-                <a:ea typeface="Calibri" pitchFamily="34" charset="-122"/>
-                <a:cs typeface="Calibri" pitchFamily="34" charset="-120"/>
-              </a:rPr>
-              <a:t>$524</a:t>
-            </a:r>
-            <a:endParaRPr lang="en-US" sz="1000" dirty="0"/>
-          </a:p>
-        </p:txBody>
-      </p:sp>
-      <p:sp>
-        <p:nvSpPr>
-          <p:cNvPr id="33" name="Text 30"/>
-          <p:cNvSpPr/>
-          <p:nvPr/>
-        </p:nvSpPr>
-        <p:spPr>
-          <a:xfrm>
-            <a:off x="6263640" y="5477256"/>
-            <a:ext cx="4023360" cy="274320"/>
-          </a:xfrm>
-          <a:prstGeom prst="rect">
-            <a:avLst/>
-          </a:prstGeom>
-          <a:noFill/>
-          <a:ln/>
-        </p:spPr>
-        <p:txBody>
-          <a:bodyPr wrap="square" rtlCol="0" anchor="ctr"/>
-          <a:lstStyle/>
-          <a:p>
-            <a:pPr indent="0" marL="0">
-              <a:buNone/>
-            </a:pPr>
-            <a:r>
-              <a:rPr lang="en-US" sz="1000" dirty="0">
-                <a:solidFill>
-                  <a:srgbClr val="1A1A2E"/>
-                </a:solidFill>
-                <a:latin typeface="Calibri" pitchFamily="34" charset="0"/>
-                <a:ea typeface="Calibri" pitchFamily="34" charset="-122"/>
-                <a:cs typeface="Calibri" pitchFamily="34" charset="-120"/>
-              </a:rPr>
-              <a:t>P0000 — Bars (new market)</a:t>
-            </a:r>
-            <a:endParaRPr lang="en-US" sz="1000" dirty="0"/>
-          </a:p>
-        </p:txBody>
-      </p:sp>
-      <p:sp>
-        <p:nvSpPr>
-          <p:cNvPr id="34" name="Text 31"/>
-          <p:cNvSpPr/>
-          <p:nvPr/>
-        </p:nvSpPr>
-        <p:spPr>
-          <a:xfrm>
-            <a:off x="10195560" y="5477256"/>
-            <a:ext cx="1463040" cy="274320"/>
-          </a:xfrm>
-          <a:prstGeom prst="rect">
-            <a:avLst/>
-          </a:prstGeom>
-          <a:noFill/>
-          <a:ln/>
-        </p:spPr>
-        <p:txBody>
-          <a:bodyPr wrap="square" rtlCol="0" anchor="ctr"/>
-          <a:lstStyle/>
-          <a:p>
-            <a:pPr algn="r" indent="0" marL="0">
-              <a:buNone/>
-            </a:pPr>
-            <a:r>
-              <a:rPr lang="en-US" sz="1000" b="1" dirty="0">
-                <a:solidFill>
-                  <a:srgbClr val="2C7A57"/>
-                </a:solidFill>
-                <a:latin typeface="Calibri" pitchFamily="34" charset="0"/>
-                <a:ea typeface="Calibri" pitchFamily="34" charset="-122"/>
-                <a:cs typeface="Calibri" pitchFamily="34" charset="-120"/>
-              </a:rPr>
-              <a:t>$500</a:t>
-            </a:r>
-            <a:endParaRPr lang="en-US" sz="1000" dirty="0"/>
-          </a:p>
-        </p:txBody>
-      </p:sp>
-      <p:sp>
-        <p:nvSpPr>
-          <p:cNvPr id="35" name="Text 32"/>
-          <p:cNvSpPr/>
-          <p:nvPr/>
-        </p:nvSpPr>
-        <p:spPr>
-          <a:xfrm>
-            <a:off x="6263640" y="5769864"/>
-            <a:ext cx="4023360" cy="274320"/>
-          </a:xfrm>
-          <a:prstGeom prst="rect">
-            <a:avLst/>
-          </a:prstGeom>
-          <a:noFill/>
-          <a:ln/>
-        </p:spPr>
-        <p:txBody>
-          <a:bodyPr wrap="square" rtlCol="0" anchor="ctr"/>
-          <a:lstStyle/>
-          <a:p>
-            <a:pPr indent="0" marL="0">
-              <a:buNone/>
-            </a:pPr>
-            <a:r>
-              <a:rPr lang="en-US" sz="1000" dirty="0">
-                <a:solidFill>
-                  <a:srgbClr val="1A1A2E"/>
-                </a:solidFill>
-                <a:latin typeface="Calibri" pitchFamily="34" charset="0"/>
-                <a:ea typeface="Calibri" pitchFamily="34" charset="-122"/>
-                <a:cs typeface="Calibri" pitchFamily="34" charset="-120"/>
-              </a:rPr>
-              <a:t>P0001 — Bars (new market)</a:t>
-            </a:r>
-            <a:endParaRPr lang="en-US" sz="1000" dirty="0"/>
-          </a:p>
-        </p:txBody>
-      </p:sp>
-      <p:sp>
-        <p:nvSpPr>
-          <p:cNvPr id="36" name="Text 33"/>
-          <p:cNvSpPr/>
-          <p:nvPr/>
-        </p:nvSpPr>
-        <p:spPr>
-          <a:xfrm>
-            <a:off x="10195560" y="5769864"/>
-            <a:ext cx="1463040" cy="274320"/>
-          </a:xfrm>
-          <a:prstGeom prst="rect">
-            <a:avLst/>
-          </a:prstGeom>
-          <a:noFill/>
-          <a:ln/>
-        </p:spPr>
-        <p:txBody>
-          <a:bodyPr wrap="square" rtlCol="0" anchor="ctr"/>
-          <a:lstStyle/>
-          <a:p>
-            <a:pPr algn="r" indent="0" marL="0">
-              <a:buNone/>
-            </a:pPr>
-            <a:r>
-              <a:rPr lang="en-US" sz="1000" b="1" dirty="0">
-                <a:solidFill>
-                  <a:srgbClr val="2C7A57"/>
-                </a:solidFill>
-                <a:latin typeface="Calibri" pitchFamily="34" charset="0"/>
-                <a:ea typeface="Calibri" pitchFamily="34" charset="-122"/>
-                <a:cs typeface="Calibri" pitchFamily="34" charset="-120"/>
-              </a:rPr>
-              <a:t>$496</a:t>
-            </a:r>
-            <a:endParaRPr lang="en-US" sz="1000" dirty="0"/>
-          </a:p>
-        </p:txBody>
-      </p:sp>
-      <p:sp>
-        <p:nvSpPr>
-          <p:cNvPr id="37" name="Text 34"/>
-          <p:cNvSpPr/>
-          <p:nvPr/>
-        </p:nvSpPr>
-        <p:spPr>
-          <a:xfrm>
-            <a:off x="548640" y="6080760"/>
-            <a:ext cx="11064240" cy="411480"/>
-          </a:xfrm>
-          <a:prstGeom prst="rect">
-            <a:avLst/>
-          </a:prstGeom>
-          <a:noFill/>
-          <a:ln/>
-        </p:spPr>
-        <p:txBody>
-          <a:bodyPr wrap="square" rtlCol="0" anchor="ctr"/>
-          <a:lstStyle/>
-          <a:p>
-            <a:pPr indent="0" marL="0">
-              <a:lnSpc>
-                <a:spcPts val="1200"/>
-              </a:lnSpc>
-              <a:buNone/>
-            </a:pPr>
-            <a:r>
-              <a:rPr lang="en-US" sz="1000" i="1" dirty="0">
-                <a:solidFill>
-                  <a:srgbClr val="5B6178"/>
-                </a:solidFill>
-                <a:latin typeface="Calibri" pitchFamily="34" charset="0"/>
-                <a:ea typeface="Calibri" pitchFamily="34" charset="-122"/>
-                <a:cs typeface="Calibri" pitchFamily="34" charset="-120"/>
-              </a:rPr>
-              <a:t>Flags come from 5-fold out-of-fold predictions, never a model scoring the venue it was trained on. The calibrated-lift feature carries near-zero importance — honest, since it's constant within venue_type once venue_type itself is a feature.</a:t>
-            </a:r>
-            <a:endParaRPr lang="en-US" sz="1000" dirty="0"/>
-          </a:p>
-        </p:txBody>
-      </p:sp>
-      <p:sp>
-        <p:nvSpPr>
-          <p:cNvPr id="38" name="Text 35"/>
+              <a:t>Method, honestly: held-out metrics (next slide) come from a genuine 30% test split, stratified by venue_type — never train-set fit. Under-monetization flags come from 5-fold out-of-fold predictions — every venue's flag uses a model that never saw its own revenue. Prospect venues (no revenue history) are scored by that same trained model, not a separate heuristic.</a:t>
+            </a:r>
+            <a:endParaRPr lang="en-US" sz="1050" dirty="0"/>
+          </a:p>
+        </p:txBody>
+      </p:sp>
+      <p:sp>
+        <p:nvSpPr>
+          <p:cNvPr id="19" name="Text 17"/>
           <p:cNvSpPr/>
           <p:nvPr/>
         </p:nvSpPr>
@@ -10288,7 +9734,7 @@
                 <a:ea typeface="Calibri" pitchFamily="34" charset="-122"/>
                 <a:cs typeface="Calibri" pitchFamily="34" charset="-120"/>
               </a:rPr>
-              <a:t>Venue economics</a:t>
+              <a:t>Venue economics — model &amp; inputs</a:t>
             </a:r>
             <a:endParaRPr lang="en-US" sz="900" dirty="0"/>
           </a:p>
@@ -10359,6 +9805,1423 @@
                 <a:ea typeface="Cambria" pitchFamily="34" charset="-122"/>
                 <a:cs typeface="Cambria" pitchFamily="34" charset="-120"/>
               </a:rPr>
+              <a:t>Predicting venue ad-revenue, honestly</a:t>
+            </a:r>
+            <a:endParaRPr lang="en-US" sz="2500" dirty="0"/>
+          </a:p>
+        </p:txBody>
+      </p:sp>
+      <p:sp>
+        <p:nvSpPr>
+          <p:cNvPr id="3" name="Shape 1"/>
+          <p:cNvSpPr/>
+          <p:nvPr/>
+        </p:nvSpPr>
+        <p:spPr>
+          <a:xfrm>
+            <a:off x="8229600" y="146304"/>
+            <a:ext cx="3410712" cy="246888"/>
+          </a:xfrm>
+          <a:prstGeom prst="roundRect">
+            <a:avLst>
+              <a:gd name="adj" fmla="val 22222"/>
+            </a:avLst>
+          </a:prstGeom>
+          <a:solidFill>
+            <a:srgbClr val="FFFFFF"/>
+          </a:solidFill>
+          <a:ln w="15875">
+            <a:solidFill>
+              <a:srgbClr val="2C7A57"/>
+            </a:solidFill>
+            <a:prstDash val="solid"/>
+          </a:ln>
+        </p:spPr>
+      </p:sp>
+      <p:sp>
+        <p:nvSpPr>
+          <p:cNvPr id="4" name="Text 2"/>
+          <p:cNvSpPr/>
+          <p:nvPr/>
+        </p:nvSpPr>
+        <p:spPr>
+          <a:xfrm>
+            <a:off x="8229600" y="146304"/>
+            <a:ext cx="3410712" cy="246888"/>
+          </a:xfrm>
+          <a:prstGeom prst="rect">
+            <a:avLst/>
+          </a:prstGeom>
+          <a:noFill/>
+          <a:ln/>
+        </p:spPr>
+        <p:txBody>
+          <a:bodyPr wrap="square" rtlCol="0" anchor="ctr"/>
+          <a:lstStyle/>
+          <a:p>
+            <a:pPr algn="ctr" indent="0" marL="0">
+              <a:buNone/>
+            </a:pPr>
+            <a:r>
+              <a:rPr lang="en-US" sz="950" b="1" dirty="0">
+                <a:solidFill>
+                  <a:srgbClr val="2C7A57"/>
+                </a:solidFill>
+                <a:latin typeface="Calibri" pitchFamily="34" charset="0"/>
+                <a:ea typeface="Calibri" pitchFamily="34" charset="-122"/>
+                <a:cs typeface="Calibri" pitchFamily="34" charset="-120"/>
+              </a:rPr>
+              <a:t>Step 5 of 6 · Answers Q3</a:t>
+            </a:r>
+            <a:endParaRPr lang="en-US" sz="950" dirty="0"/>
+          </a:p>
+        </p:txBody>
+      </p:sp>
+      <p:sp>
+        <p:nvSpPr>
+          <p:cNvPr id="5" name="Text 3"/>
+          <p:cNvSpPr/>
+          <p:nvPr/>
+        </p:nvSpPr>
+        <p:spPr>
+          <a:xfrm>
+            <a:off x="548640" y="1005840"/>
+            <a:ext cx="10972800" cy="365760"/>
+          </a:xfrm>
+          <a:prstGeom prst="rect">
+            <a:avLst/>
+          </a:prstGeom>
+          <a:noFill/>
+          <a:ln/>
+        </p:spPr>
+        <p:txBody>
+          <a:bodyPr wrap="square" rtlCol="0" anchor="ctr"/>
+          <a:lstStyle/>
+          <a:p>
+            <a:pPr indent="0" marL="0">
+              <a:buNone/>
+            </a:pPr>
+            <a:r>
+              <a:rPr lang="en-US" sz="1250" i="1" dirty="0">
+                <a:solidFill>
+                  <a:srgbClr val="5B6178"/>
+                </a:solidFill>
+                <a:latin typeface="Calibri" pitchFamily="34" charset="0"/>
+                <a:ea typeface="Calibri" pitchFamily="34" charset="-122"/>
+                <a:cs typeface="Calibri" pitchFamily="34" charset="-120"/>
+              </a:rPr>
+              <a:t>Held-out evaluation, feature importance, and the venues these numbers actually flag (model &amp; features: previous slide).</a:t>
+            </a:r>
+            <a:endParaRPr lang="en-US" sz="1250" dirty="0"/>
+          </a:p>
+        </p:txBody>
+      </p:sp>
+      <p:sp>
+        <p:nvSpPr>
+          <p:cNvPr id="6" name="Shape 4"/>
+          <p:cNvSpPr/>
+          <p:nvPr/>
+        </p:nvSpPr>
+        <p:spPr>
+          <a:xfrm>
+            <a:off x="548640" y="1508760"/>
+            <a:ext cx="2651760" cy="1051560"/>
+          </a:xfrm>
+          <a:prstGeom prst="roundRect">
+            <a:avLst>
+              <a:gd name="adj" fmla="val 6957"/>
+            </a:avLst>
+          </a:prstGeom>
+          <a:solidFill>
+            <a:srgbClr val="F5F7FC"/>
+          </a:solidFill>
+          <a:ln/>
+        </p:spPr>
+      </p:sp>
+      <p:sp>
+        <p:nvSpPr>
+          <p:cNvPr id="7" name="Text 5"/>
+          <p:cNvSpPr/>
+          <p:nvPr/>
+        </p:nvSpPr>
+        <p:spPr>
+          <a:xfrm>
+            <a:off x="685800" y="1618488"/>
+            <a:ext cx="2377440" cy="502920"/>
+          </a:xfrm>
+          <a:prstGeom prst="rect">
+            <a:avLst/>
+          </a:prstGeom>
+          <a:noFill/>
+          <a:ln/>
+        </p:spPr>
+        <p:txBody>
+          <a:bodyPr wrap="square" rtlCol="0" anchor="ctr"/>
+          <a:lstStyle/>
+          <a:p>
+            <a:pPr indent="0" marL="0">
+              <a:buNone/>
+            </a:pPr>
+            <a:r>
+              <a:rPr lang="en-US" sz="2200" b="1" dirty="0">
+                <a:solidFill>
+                  <a:srgbClr val="1E2761"/>
+                </a:solidFill>
+                <a:latin typeface="Calibri" pitchFamily="34" charset="0"/>
+                <a:ea typeface="Calibri" pitchFamily="34" charset="-122"/>
+                <a:cs typeface="Calibri" pitchFamily="34" charset="-120"/>
+              </a:rPr>
+              <a:t>0.84</a:t>
+            </a:r>
+            <a:endParaRPr lang="en-US" sz="2200" dirty="0"/>
+          </a:p>
+        </p:txBody>
+      </p:sp>
+      <p:sp>
+        <p:nvSpPr>
+          <p:cNvPr id="8" name="Text 6"/>
+          <p:cNvSpPr/>
+          <p:nvPr/>
+        </p:nvSpPr>
+        <p:spPr>
+          <a:xfrm>
+            <a:off x="685800" y="2130552"/>
+            <a:ext cx="2377440" cy="365760"/>
+          </a:xfrm>
+          <a:prstGeom prst="rect">
+            <a:avLst/>
+          </a:prstGeom>
+          <a:noFill/>
+          <a:ln/>
+        </p:spPr>
+        <p:txBody>
+          <a:bodyPr wrap="square" rtlCol="0" anchor="ctr"/>
+          <a:lstStyle/>
+          <a:p>
+            <a:pPr indent="0" marL="0">
+              <a:buNone/>
+            </a:pPr>
+            <a:r>
+              <a:rPr lang="en-US" sz="950" dirty="0">
+                <a:solidFill>
+                  <a:srgbClr val="5B6178"/>
+                </a:solidFill>
+                <a:latin typeface="Calibri" pitchFamily="34" charset="0"/>
+                <a:ea typeface="Calibri" pitchFamily="34" charset="-122"/>
+                <a:cs typeface="Calibri" pitchFamily="34" charset="-120"/>
+              </a:rPr>
+              <a:t>Held-out R²</a:t>
+            </a:r>
+            <a:endParaRPr lang="en-US" sz="950" dirty="0"/>
+          </a:p>
+        </p:txBody>
+      </p:sp>
+      <p:sp>
+        <p:nvSpPr>
+          <p:cNvPr id="9" name="Shape 7"/>
+          <p:cNvSpPr/>
+          <p:nvPr/>
+        </p:nvSpPr>
+        <p:spPr>
+          <a:xfrm>
+            <a:off x="3337560" y="1508760"/>
+            <a:ext cx="2651760" cy="1051560"/>
+          </a:xfrm>
+          <a:prstGeom prst="roundRect">
+            <a:avLst>
+              <a:gd name="adj" fmla="val 6957"/>
+            </a:avLst>
+          </a:prstGeom>
+          <a:solidFill>
+            <a:srgbClr val="F5F7FC"/>
+          </a:solidFill>
+          <a:ln/>
+        </p:spPr>
+      </p:sp>
+      <p:sp>
+        <p:nvSpPr>
+          <p:cNvPr id="10" name="Text 8"/>
+          <p:cNvSpPr/>
+          <p:nvPr/>
+        </p:nvSpPr>
+        <p:spPr>
+          <a:xfrm>
+            <a:off x="3474720" y="1618488"/>
+            <a:ext cx="2377440" cy="502920"/>
+          </a:xfrm>
+          <a:prstGeom prst="rect">
+            <a:avLst/>
+          </a:prstGeom>
+          <a:noFill/>
+          <a:ln/>
+        </p:spPr>
+        <p:txBody>
+          <a:bodyPr wrap="square" rtlCol="0" anchor="ctr"/>
+          <a:lstStyle/>
+          <a:p>
+            <a:pPr indent="0" marL="0">
+              <a:buNone/>
+            </a:pPr>
+            <a:r>
+              <a:rPr lang="en-US" sz="2200" b="1" dirty="0">
+                <a:solidFill>
+                  <a:srgbClr val="1E2761"/>
+                </a:solidFill>
+                <a:latin typeface="Calibri" pitchFamily="34" charset="0"/>
+                <a:ea typeface="Calibri" pitchFamily="34" charset="-122"/>
+                <a:cs typeface="Calibri" pitchFamily="34" charset="-120"/>
+              </a:rPr>
+              <a:t>22.1%</a:t>
+            </a:r>
+            <a:endParaRPr lang="en-US" sz="2200" dirty="0"/>
+          </a:p>
+        </p:txBody>
+      </p:sp>
+      <p:sp>
+        <p:nvSpPr>
+          <p:cNvPr id="11" name="Text 9"/>
+          <p:cNvSpPr/>
+          <p:nvPr/>
+        </p:nvSpPr>
+        <p:spPr>
+          <a:xfrm>
+            <a:off x="3474720" y="2130552"/>
+            <a:ext cx="2377440" cy="365760"/>
+          </a:xfrm>
+          <a:prstGeom prst="rect">
+            <a:avLst/>
+          </a:prstGeom>
+          <a:noFill/>
+          <a:ln/>
+        </p:spPr>
+        <p:txBody>
+          <a:bodyPr wrap="square" rtlCol="0" anchor="ctr"/>
+          <a:lstStyle/>
+          <a:p>
+            <a:pPr indent="0" marL="0">
+              <a:buNone/>
+            </a:pPr>
+            <a:r>
+              <a:rPr lang="en-US" sz="950" dirty="0">
+                <a:solidFill>
+                  <a:srgbClr val="5B6178"/>
+                </a:solidFill>
+                <a:latin typeface="Calibri" pitchFamily="34" charset="0"/>
+                <a:ea typeface="Calibri" pitchFamily="34" charset="-122"/>
+                <a:cs typeface="Calibri" pitchFamily="34" charset="-120"/>
+              </a:rPr>
+              <a:t>Held-out MAPE</a:t>
+            </a:r>
+            <a:endParaRPr lang="en-US" sz="950" dirty="0"/>
+          </a:p>
+        </p:txBody>
+      </p:sp>
+      <p:sp>
+        <p:nvSpPr>
+          <p:cNvPr id="12" name="Shape 10"/>
+          <p:cNvSpPr/>
+          <p:nvPr/>
+        </p:nvSpPr>
+        <p:spPr>
+          <a:xfrm>
+            <a:off x="6126480" y="1508760"/>
+            <a:ext cx="2651760" cy="1051560"/>
+          </a:xfrm>
+          <a:prstGeom prst="roundRect">
+            <a:avLst>
+              <a:gd name="adj" fmla="val 6957"/>
+            </a:avLst>
+          </a:prstGeom>
+          <a:solidFill>
+            <a:srgbClr val="F5F7FC"/>
+          </a:solidFill>
+          <a:ln/>
+        </p:spPr>
+      </p:sp>
+      <p:sp>
+        <p:nvSpPr>
+          <p:cNvPr id="13" name="Text 11"/>
+          <p:cNvSpPr/>
+          <p:nvPr/>
+        </p:nvSpPr>
+        <p:spPr>
+          <a:xfrm>
+            <a:off x="6263640" y="1618488"/>
+            <a:ext cx="2377440" cy="502920"/>
+          </a:xfrm>
+          <a:prstGeom prst="rect">
+            <a:avLst/>
+          </a:prstGeom>
+          <a:noFill/>
+          <a:ln/>
+        </p:spPr>
+        <p:txBody>
+          <a:bodyPr wrap="square" rtlCol="0" anchor="ctr"/>
+          <a:lstStyle/>
+          <a:p>
+            <a:pPr indent="0" marL="0">
+              <a:buNone/>
+            </a:pPr>
+            <a:r>
+              <a:rPr lang="en-US" sz="2200" b="1" dirty="0">
+                <a:solidFill>
+                  <a:srgbClr val="1E2761"/>
+                </a:solidFill>
+                <a:latin typeface="Calibri" pitchFamily="34" charset="0"/>
+                <a:ea typeface="Calibri" pitchFamily="34" charset="-122"/>
+                <a:cs typeface="Calibri" pitchFamily="34" charset="-120"/>
+              </a:rPr>
+              <a:t>$45</a:t>
+            </a:r>
+            <a:endParaRPr lang="en-US" sz="2200" dirty="0"/>
+          </a:p>
+        </p:txBody>
+      </p:sp>
+      <p:sp>
+        <p:nvSpPr>
+          <p:cNvPr id="14" name="Text 12"/>
+          <p:cNvSpPr/>
+          <p:nvPr/>
+        </p:nvSpPr>
+        <p:spPr>
+          <a:xfrm>
+            <a:off x="6263640" y="2130552"/>
+            <a:ext cx="2377440" cy="365760"/>
+          </a:xfrm>
+          <a:prstGeom prst="rect">
+            <a:avLst/>
+          </a:prstGeom>
+          <a:noFill/>
+          <a:ln/>
+        </p:spPr>
+        <p:txBody>
+          <a:bodyPr wrap="square" rtlCol="0" anchor="ctr"/>
+          <a:lstStyle/>
+          <a:p>
+            <a:pPr indent="0" marL="0">
+              <a:buNone/>
+            </a:pPr>
+            <a:r>
+              <a:rPr lang="en-US" sz="950" dirty="0">
+                <a:solidFill>
+                  <a:srgbClr val="5B6178"/>
+                </a:solidFill>
+                <a:latin typeface="Calibri" pitchFamily="34" charset="0"/>
+                <a:ea typeface="Calibri" pitchFamily="34" charset="-122"/>
+                <a:cs typeface="Calibri" pitchFamily="34" charset="-120"/>
+              </a:rPr>
+              <a:t>Held-out MAE</a:t>
+            </a:r>
+            <a:endParaRPr lang="en-US" sz="950" dirty="0"/>
+          </a:p>
+        </p:txBody>
+      </p:sp>
+      <p:sp>
+        <p:nvSpPr>
+          <p:cNvPr id="15" name="Shape 13"/>
+          <p:cNvSpPr/>
+          <p:nvPr/>
+        </p:nvSpPr>
+        <p:spPr>
+          <a:xfrm>
+            <a:off x="8915400" y="1508760"/>
+            <a:ext cx="2651760" cy="1051560"/>
+          </a:xfrm>
+          <a:prstGeom prst="roundRect">
+            <a:avLst>
+              <a:gd name="adj" fmla="val 6957"/>
+            </a:avLst>
+          </a:prstGeom>
+          <a:solidFill>
+            <a:srgbClr val="F5F7FC"/>
+          </a:solidFill>
+          <a:ln/>
+        </p:spPr>
+      </p:sp>
+      <p:sp>
+        <p:nvSpPr>
+          <p:cNvPr id="16" name="Text 14"/>
+          <p:cNvSpPr/>
+          <p:nvPr/>
+        </p:nvSpPr>
+        <p:spPr>
+          <a:xfrm>
+            <a:off x="9052560" y="1618488"/>
+            <a:ext cx="2377440" cy="502920"/>
+          </a:xfrm>
+          <a:prstGeom prst="rect">
+            <a:avLst/>
+          </a:prstGeom>
+          <a:noFill/>
+          <a:ln/>
+        </p:spPr>
+        <p:txBody>
+          <a:bodyPr wrap="square" rtlCol="0" anchor="ctr"/>
+          <a:lstStyle/>
+          <a:p>
+            <a:pPr indent="0" marL="0">
+              <a:buNone/>
+            </a:pPr>
+            <a:r>
+              <a:rPr lang="en-US" sz="2200" b="1" dirty="0">
+                <a:solidFill>
+                  <a:srgbClr val="1E2761"/>
+                </a:solidFill>
+                <a:latin typeface="Calibri" pitchFamily="34" charset="0"/>
+                <a:ea typeface="Calibri" pitchFamily="34" charset="-122"/>
+                <a:cs typeface="Calibri" pitchFamily="34" charset="-120"/>
+              </a:rPr>
+              <a:t>20</a:t>
+            </a:r>
+            <a:endParaRPr lang="en-US" sz="2200" dirty="0"/>
+          </a:p>
+        </p:txBody>
+      </p:sp>
+      <p:sp>
+        <p:nvSpPr>
+          <p:cNvPr id="17" name="Text 15"/>
+          <p:cNvSpPr/>
+          <p:nvPr/>
+        </p:nvSpPr>
+        <p:spPr>
+          <a:xfrm>
+            <a:off x="9052560" y="2130552"/>
+            <a:ext cx="2377440" cy="365760"/>
+          </a:xfrm>
+          <a:prstGeom prst="rect">
+            <a:avLst/>
+          </a:prstGeom>
+          <a:noFill/>
+          <a:ln/>
+        </p:spPr>
+        <p:txBody>
+          <a:bodyPr wrap="square" rtlCol="0" anchor="ctr"/>
+          <a:lstStyle/>
+          <a:p>
+            <a:pPr indent="0" marL="0">
+              <a:buNone/>
+            </a:pPr>
+            <a:r>
+              <a:rPr lang="en-US" sz="950" dirty="0">
+                <a:solidFill>
+                  <a:srgbClr val="5B6178"/>
+                </a:solidFill>
+                <a:latin typeface="Calibri" pitchFamily="34" charset="0"/>
+                <a:ea typeface="Calibri" pitchFamily="34" charset="-122"/>
+                <a:cs typeface="Calibri" pitchFamily="34" charset="-120"/>
+              </a:rPr>
+              <a:t>Venues flagged</a:t>
+            </a:r>
+            <a:endParaRPr lang="en-US" sz="950" dirty="0"/>
+          </a:p>
+        </p:txBody>
+      </p:sp>
+      <p:graphicFrame>
+        <p:nvGraphicFramePr>
+          <p:cNvPr id="18" name="Chart 0" descr=""/>
+          <p:cNvGraphicFramePr/>
+          <p:nvPr/>
+        </p:nvGraphicFramePr>
+        <p:xfrm>
+          <a:off x="548640" y="2880360"/>
+          <a:ext cx="5394960" cy="2834640"/>
+        </p:xfrm>
+        <a:graphic xmlns:a="http://schemas.openxmlformats.org/drawingml/2006/main">
+          <a:graphicData uri="http://schemas.openxmlformats.org/drawingml/2006/chart">
+            <c:chart xmlns:c="http://schemas.openxmlformats.org/drawingml/2006/chart" r:id="rId1"/>
+          </a:graphicData>
+        </a:graphic>
+      </p:graphicFrame>
+      <p:sp>
+        <p:nvSpPr>
+          <p:cNvPr id="19" name="Text 16"/>
+          <p:cNvSpPr/>
+          <p:nvPr/>
+        </p:nvSpPr>
+        <p:spPr>
+          <a:xfrm>
+            <a:off x="548640" y="5742432"/>
+            <a:ext cx="5394960" cy="320040"/>
+          </a:xfrm>
+          <a:prstGeom prst="rect">
+            <a:avLst/>
+          </a:prstGeom>
+          <a:noFill/>
+          <a:ln/>
+        </p:spPr>
+        <p:txBody>
+          <a:bodyPr wrap="square" rtlCol="0" anchor="ctr"/>
+          <a:lstStyle/>
+          <a:p>
+            <a:pPr indent="0" marL="0">
+              <a:lnSpc>
+                <a:spcPts val="1050"/>
+              </a:lnSpc>
+              <a:buNone/>
+            </a:pPr>
+            <a:r>
+              <a:rPr lang="en-US" sz="850" i="1" dirty="0">
+                <a:solidFill>
+                  <a:srgbClr val="5B6178"/>
+                </a:solidFill>
+                <a:latin typeface="Calibri" pitchFamily="34" charset="0"/>
+                <a:ea typeface="Calibri" pitchFamily="34" charset="-122"/>
+                <a:cs typeface="Calibri" pitchFamily="34" charset="-120"/>
+              </a:rPr>
+              <a:t>Permutation, not gain-based — gain-based splits are biased toward high-cardinality categoricals like geo_cluster (20+ levels).</a:t>
+            </a:r>
+            <a:endParaRPr lang="en-US" sz="850" dirty="0"/>
+          </a:p>
+        </p:txBody>
+      </p:sp>
+      <p:sp>
+        <p:nvSpPr>
+          <p:cNvPr id="20" name="Text 17"/>
+          <p:cNvSpPr/>
+          <p:nvPr/>
+        </p:nvSpPr>
+        <p:spPr>
+          <a:xfrm>
+            <a:off x="6263640" y="2880360"/>
+            <a:ext cx="5394960" cy="274320"/>
+          </a:xfrm>
+          <a:prstGeom prst="rect">
+            <a:avLst/>
+          </a:prstGeom>
+          <a:noFill/>
+          <a:ln/>
+        </p:spPr>
+        <p:txBody>
+          <a:bodyPr wrap="square" rtlCol="0" anchor="ctr"/>
+          <a:lstStyle/>
+          <a:p>
+            <a:pPr indent="0" marL="0">
+              <a:buNone/>
+            </a:pPr>
+            <a:r>
+              <a:rPr lang="en-US" sz="1200" b="1" dirty="0">
+                <a:solidFill>
+                  <a:srgbClr val="1E2761"/>
+                </a:solidFill>
+                <a:latin typeface="Cambria" pitchFamily="34" charset="0"/>
+                <a:ea typeface="Cambria" pitchFamily="34" charset="-122"/>
+                <a:cs typeface="Cambria" pitchFamily="34" charset="-120"/>
+              </a:rPr>
+              <a:t>Top under-monetized venues (of 20 flagged)</a:t>
+            </a:r>
+            <a:endParaRPr lang="en-US" sz="1200" dirty="0"/>
+          </a:p>
+        </p:txBody>
+      </p:sp>
+      <p:sp>
+        <p:nvSpPr>
+          <p:cNvPr id="21" name="Text 18"/>
+          <p:cNvSpPr/>
+          <p:nvPr/>
+        </p:nvSpPr>
+        <p:spPr>
+          <a:xfrm>
+            <a:off x="6263640" y="3209544"/>
+            <a:ext cx="3657600" cy="274320"/>
+          </a:xfrm>
+          <a:prstGeom prst="rect">
+            <a:avLst/>
+          </a:prstGeom>
+          <a:noFill/>
+          <a:ln/>
+        </p:spPr>
+        <p:txBody>
+          <a:bodyPr wrap="square" rtlCol="0" anchor="ctr"/>
+          <a:lstStyle/>
+          <a:p>
+            <a:pPr indent="0" marL="0">
+              <a:buNone/>
+            </a:pPr>
+            <a:r>
+              <a:rPr lang="en-US" sz="1000" dirty="0">
+                <a:solidFill>
+                  <a:srgbClr val="1A1A2E"/>
+                </a:solidFill>
+                <a:latin typeface="Calibri" pitchFamily="34" charset="0"/>
+                <a:ea typeface="Calibri" pitchFamily="34" charset="-122"/>
+                <a:cs typeface="Calibri" pitchFamily="34" charset="-120"/>
+              </a:rPr>
+              <a:t>Venue #85 (Restaurants)</a:t>
+            </a:r>
+            <a:endParaRPr lang="en-US" sz="1000" dirty="0"/>
+          </a:p>
+        </p:txBody>
+      </p:sp>
+      <p:sp>
+        <p:nvSpPr>
+          <p:cNvPr id="22" name="Text 19"/>
+          <p:cNvSpPr/>
+          <p:nvPr/>
+        </p:nvSpPr>
+        <p:spPr>
+          <a:xfrm>
+            <a:off x="9966960" y="3209544"/>
+            <a:ext cx="1691640" cy="274320"/>
+          </a:xfrm>
+          <a:prstGeom prst="rect">
+            <a:avLst/>
+          </a:prstGeom>
+          <a:noFill/>
+          <a:ln/>
+        </p:spPr>
+        <p:txBody>
+          <a:bodyPr wrap="square" rtlCol="0" anchor="ctr"/>
+          <a:lstStyle/>
+          <a:p>
+            <a:pPr algn="r" indent="0" marL="0">
+              <a:buNone/>
+            </a:pPr>
+            <a:r>
+              <a:rPr lang="en-US" sz="1000" b="1" dirty="0">
+                <a:solidFill>
+                  <a:srgbClr val="B8500A"/>
+                </a:solidFill>
+                <a:latin typeface="Calibri" pitchFamily="34" charset="0"/>
+                <a:ea typeface="Calibri" pitchFamily="34" charset="-122"/>
+                <a:cs typeface="Calibri" pitchFamily="34" charset="-120"/>
+              </a:rPr>
+              <a:t>-62%</a:t>
+            </a:r>
+            <a:endParaRPr lang="en-US" sz="1000" dirty="0"/>
+          </a:p>
+        </p:txBody>
+      </p:sp>
+      <p:sp>
+        <p:nvSpPr>
+          <p:cNvPr id="23" name="Text 20"/>
+          <p:cNvSpPr/>
+          <p:nvPr/>
+        </p:nvSpPr>
+        <p:spPr>
+          <a:xfrm>
+            <a:off x="6263640" y="3502152"/>
+            <a:ext cx="3657600" cy="274320"/>
+          </a:xfrm>
+          <a:prstGeom prst="rect">
+            <a:avLst/>
+          </a:prstGeom>
+          <a:noFill/>
+          <a:ln/>
+        </p:spPr>
+        <p:txBody>
+          <a:bodyPr wrap="square" rtlCol="0" anchor="ctr"/>
+          <a:lstStyle/>
+          <a:p>
+            <a:pPr indent="0" marL="0">
+              <a:buNone/>
+            </a:pPr>
+            <a:r>
+              <a:rPr lang="en-US" sz="1000" dirty="0">
+                <a:solidFill>
+                  <a:srgbClr val="1A1A2E"/>
+                </a:solidFill>
+                <a:latin typeface="Calibri" pitchFamily="34" charset="0"/>
+                <a:ea typeface="Calibri" pitchFamily="34" charset="-122"/>
+                <a:cs typeface="Calibri" pitchFamily="34" charset="-120"/>
+              </a:rPr>
+              <a:t>Venue #309 (Waiting Rooms)</a:t>
+            </a:r>
+            <a:endParaRPr lang="en-US" sz="1000" dirty="0"/>
+          </a:p>
+        </p:txBody>
+      </p:sp>
+      <p:sp>
+        <p:nvSpPr>
+          <p:cNvPr id="24" name="Text 21"/>
+          <p:cNvSpPr/>
+          <p:nvPr/>
+        </p:nvSpPr>
+        <p:spPr>
+          <a:xfrm>
+            <a:off x="9966960" y="3502152"/>
+            <a:ext cx="1691640" cy="274320"/>
+          </a:xfrm>
+          <a:prstGeom prst="rect">
+            <a:avLst/>
+          </a:prstGeom>
+          <a:noFill/>
+          <a:ln/>
+        </p:spPr>
+        <p:txBody>
+          <a:bodyPr wrap="square" rtlCol="0" anchor="ctr"/>
+          <a:lstStyle/>
+          <a:p>
+            <a:pPr algn="r" indent="0" marL="0">
+              <a:buNone/>
+            </a:pPr>
+            <a:r>
+              <a:rPr lang="en-US" sz="1000" b="1" dirty="0">
+                <a:solidFill>
+                  <a:srgbClr val="B8500A"/>
+                </a:solidFill>
+                <a:latin typeface="Calibri" pitchFamily="34" charset="0"/>
+                <a:ea typeface="Calibri" pitchFamily="34" charset="-122"/>
+                <a:cs typeface="Calibri" pitchFamily="34" charset="-120"/>
+              </a:rPr>
+              <a:t>-61%</a:t>
+            </a:r>
+            <a:endParaRPr lang="en-US" sz="1000" dirty="0"/>
+          </a:p>
+        </p:txBody>
+      </p:sp>
+      <p:sp>
+        <p:nvSpPr>
+          <p:cNvPr id="25" name="Text 22"/>
+          <p:cNvSpPr/>
+          <p:nvPr/>
+        </p:nvSpPr>
+        <p:spPr>
+          <a:xfrm>
+            <a:off x="6263640" y="3794760"/>
+            <a:ext cx="3657600" cy="274320"/>
+          </a:xfrm>
+          <a:prstGeom prst="rect">
+            <a:avLst/>
+          </a:prstGeom>
+          <a:noFill/>
+          <a:ln/>
+        </p:spPr>
+        <p:txBody>
+          <a:bodyPr wrap="square" rtlCol="0" anchor="ctr"/>
+          <a:lstStyle/>
+          <a:p>
+            <a:pPr indent="0" marL="0">
+              <a:buNone/>
+            </a:pPr>
+            <a:r>
+              <a:rPr lang="en-US" sz="1000" dirty="0">
+                <a:solidFill>
+                  <a:srgbClr val="1A1A2E"/>
+                </a:solidFill>
+                <a:latin typeface="Calibri" pitchFamily="34" charset="0"/>
+                <a:ea typeface="Calibri" pitchFamily="34" charset="-122"/>
+                <a:cs typeface="Calibri" pitchFamily="34" charset="-120"/>
+              </a:rPr>
+              <a:t>Venue #53 (Restaurants)</a:t>
+            </a:r>
+            <a:endParaRPr lang="en-US" sz="1000" dirty="0"/>
+          </a:p>
+        </p:txBody>
+      </p:sp>
+      <p:sp>
+        <p:nvSpPr>
+          <p:cNvPr id="26" name="Text 23"/>
+          <p:cNvSpPr/>
+          <p:nvPr/>
+        </p:nvSpPr>
+        <p:spPr>
+          <a:xfrm>
+            <a:off x="9966960" y="3794760"/>
+            <a:ext cx="1691640" cy="274320"/>
+          </a:xfrm>
+          <a:prstGeom prst="rect">
+            <a:avLst/>
+          </a:prstGeom>
+          <a:noFill/>
+          <a:ln/>
+        </p:spPr>
+        <p:txBody>
+          <a:bodyPr wrap="square" rtlCol="0" anchor="ctr"/>
+          <a:lstStyle/>
+          <a:p>
+            <a:pPr algn="r" indent="0" marL="0">
+              <a:buNone/>
+            </a:pPr>
+            <a:r>
+              <a:rPr lang="en-US" sz="1000" b="1" dirty="0">
+                <a:solidFill>
+                  <a:srgbClr val="B8500A"/>
+                </a:solidFill>
+                <a:latin typeface="Calibri" pitchFamily="34" charset="0"/>
+                <a:ea typeface="Calibri" pitchFamily="34" charset="-122"/>
+                <a:cs typeface="Calibri" pitchFamily="34" charset="-120"/>
+              </a:rPr>
+              <a:t>-61%</a:t>
+            </a:r>
+            <a:endParaRPr lang="en-US" sz="1000" dirty="0"/>
+          </a:p>
+        </p:txBody>
+      </p:sp>
+      <p:sp>
+        <p:nvSpPr>
+          <p:cNvPr id="27" name="Text 24"/>
+          <p:cNvSpPr/>
+          <p:nvPr/>
+        </p:nvSpPr>
+        <p:spPr>
+          <a:xfrm>
+            <a:off x="6263640" y="4087368"/>
+            <a:ext cx="3657600" cy="274320"/>
+          </a:xfrm>
+          <a:prstGeom prst="rect">
+            <a:avLst/>
+          </a:prstGeom>
+          <a:noFill/>
+          <a:ln/>
+        </p:spPr>
+        <p:txBody>
+          <a:bodyPr wrap="square" rtlCol="0" anchor="ctr"/>
+          <a:lstStyle/>
+          <a:p>
+            <a:pPr indent="0" marL="0">
+              <a:buNone/>
+            </a:pPr>
+            <a:r>
+              <a:rPr lang="en-US" sz="1000" dirty="0">
+                <a:solidFill>
+                  <a:srgbClr val="1A1A2E"/>
+                </a:solidFill>
+                <a:latin typeface="Calibri" pitchFamily="34" charset="0"/>
+                <a:ea typeface="Calibri" pitchFamily="34" charset="-122"/>
+                <a:cs typeface="Calibri" pitchFamily="34" charset="-120"/>
+              </a:rPr>
+              <a:t>Venue #247 (Bars)</a:t>
+            </a:r>
+            <a:endParaRPr lang="en-US" sz="1000" dirty="0"/>
+          </a:p>
+        </p:txBody>
+      </p:sp>
+      <p:sp>
+        <p:nvSpPr>
+          <p:cNvPr id="28" name="Text 25"/>
+          <p:cNvSpPr/>
+          <p:nvPr/>
+        </p:nvSpPr>
+        <p:spPr>
+          <a:xfrm>
+            <a:off x="9966960" y="4087368"/>
+            <a:ext cx="1691640" cy="274320"/>
+          </a:xfrm>
+          <a:prstGeom prst="rect">
+            <a:avLst/>
+          </a:prstGeom>
+          <a:noFill/>
+          <a:ln/>
+        </p:spPr>
+        <p:txBody>
+          <a:bodyPr wrap="square" rtlCol="0" anchor="ctr"/>
+          <a:lstStyle/>
+          <a:p>
+            <a:pPr algn="r" indent="0" marL="0">
+              <a:buNone/>
+            </a:pPr>
+            <a:r>
+              <a:rPr lang="en-US" sz="1000" b="1" dirty="0">
+                <a:solidFill>
+                  <a:srgbClr val="B8500A"/>
+                </a:solidFill>
+                <a:latin typeface="Calibri" pitchFamily="34" charset="0"/>
+                <a:ea typeface="Calibri" pitchFamily="34" charset="-122"/>
+                <a:cs typeface="Calibri" pitchFamily="34" charset="-120"/>
+              </a:rPr>
+              <a:t>-60%</a:t>
+            </a:r>
+            <a:endParaRPr lang="en-US" sz="1000" dirty="0"/>
+          </a:p>
+        </p:txBody>
+      </p:sp>
+      <p:sp>
+        <p:nvSpPr>
+          <p:cNvPr id="29" name="Text 26"/>
+          <p:cNvSpPr/>
+          <p:nvPr/>
+        </p:nvSpPr>
+        <p:spPr>
+          <a:xfrm>
+            <a:off x="6263640" y="4562856"/>
+            <a:ext cx="5394960" cy="274320"/>
+          </a:xfrm>
+          <a:prstGeom prst="rect">
+            <a:avLst/>
+          </a:prstGeom>
+          <a:noFill/>
+          <a:ln/>
+        </p:spPr>
+        <p:txBody>
+          <a:bodyPr wrap="square" rtlCol="0" anchor="ctr"/>
+          <a:lstStyle/>
+          <a:p>
+            <a:pPr indent="0" marL="0">
+              <a:buNone/>
+            </a:pPr>
+            <a:r>
+              <a:rPr lang="en-US" sz="1200" b="1" dirty="0">
+                <a:solidFill>
+                  <a:srgbClr val="1E2761"/>
+                </a:solidFill>
+                <a:latin typeface="Cambria" pitchFamily="34" charset="0"/>
+                <a:ea typeface="Cambria" pitchFamily="34" charset="-122"/>
+                <a:cs typeface="Cambria" pitchFamily="34" charset="-120"/>
+              </a:rPr>
+              <a:t>Top prospect venues (expansion priority)</a:t>
+            </a:r>
+            <a:endParaRPr lang="en-US" sz="1200" dirty="0"/>
+          </a:p>
+        </p:txBody>
+      </p:sp>
+      <p:sp>
+        <p:nvSpPr>
+          <p:cNvPr id="30" name="Text 27"/>
+          <p:cNvSpPr/>
+          <p:nvPr/>
+        </p:nvSpPr>
+        <p:spPr>
+          <a:xfrm>
+            <a:off x="6263640" y="4892040"/>
+            <a:ext cx="4023360" cy="274320"/>
+          </a:xfrm>
+          <a:prstGeom prst="rect">
+            <a:avLst/>
+          </a:prstGeom>
+          <a:noFill/>
+          <a:ln/>
+        </p:spPr>
+        <p:txBody>
+          <a:bodyPr wrap="square" rtlCol="0" anchor="ctr"/>
+          <a:lstStyle/>
+          <a:p>
+            <a:pPr indent="0" marL="0">
+              <a:buNone/>
+            </a:pPr>
+            <a:r>
+              <a:rPr lang="en-US" sz="1000" dirty="0">
+                <a:solidFill>
+                  <a:srgbClr val="1A1A2E"/>
+                </a:solidFill>
+                <a:latin typeface="Calibri" pitchFamily="34" charset="0"/>
+                <a:ea typeface="Calibri" pitchFamily="34" charset="-122"/>
+                <a:cs typeface="Calibri" pitchFamily="34" charset="-120"/>
+              </a:rPr>
+              <a:t>P0018 — Bars (existing market)</a:t>
+            </a:r>
+            <a:endParaRPr lang="en-US" sz="1000" dirty="0"/>
+          </a:p>
+        </p:txBody>
+      </p:sp>
+      <p:sp>
+        <p:nvSpPr>
+          <p:cNvPr id="31" name="Text 28"/>
+          <p:cNvSpPr/>
+          <p:nvPr/>
+        </p:nvSpPr>
+        <p:spPr>
+          <a:xfrm>
+            <a:off x="10195560" y="4892040"/>
+            <a:ext cx="1463040" cy="274320"/>
+          </a:xfrm>
+          <a:prstGeom prst="rect">
+            <a:avLst/>
+          </a:prstGeom>
+          <a:noFill/>
+          <a:ln/>
+        </p:spPr>
+        <p:txBody>
+          <a:bodyPr wrap="square" rtlCol="0" anchor="ctr"/>
+          <a:lstStyle/>
+          <a:p>
+            <a:pPr algn="r" indent="0" marL="0">
+              <a:buNone/>
+            </a:pPr>
+            <a:r>
+              <a:rPr lang="en-US" sz="1000" b="1" dirty="0">
+                <a:solidFill>
+                  <a:srgbClr val="2C7A57"/>
+                </a:solidFill>
+                <a:latin typeface="Calibri" pitchFamily="34" charset="0"/>
+                <a:ea typeface="Calibri" pitchFamily="34" charset="-122"/>
+                <a:cs typeface="Calibri" pitchFamily="34" charset="-120"/>
+              </a:rPr>
+              <a:t>$684</a:t>
+            </a:r>
+            <a:endParaRPr lang="en-US" sz="1000" dirty="0"/>
+          </a:p>
+        </p:txBody>
+      </p:sp>
+      <p:sp>
+        <p:nvSpPr>
+          <p:cNvPr id="32" name="Text 29"/>
+          <p:cNvSpPr/>
+          <p:nvPr/>
+        </p:nvSpPr>
+        <p:spPr>
+          <a:xfrm>
+            <a:off x="6263640" y="5184648"/>
+            <a:ext cx="4023360" cy="274320"/>
+          </a:xfrm>
+          <a:prstGeom prst="rect">
+            <a:avLst/>
+          </a:prstGeom>
+          <a:noFill/>
+          <a:ln/>
+        </p:spPr>
+        <p:txBody>
+          <a:bodyPr wrap="square" rtlCol="0" anchor="ctr"/>
+          <a:lstStyle/>
+          <a:p>
+            <a:pPr indent="0" marL="0">
+              <a:buNone/>
+            </a:pPr>
+            <a:r>
+              <a:rPr lang="en-US" sz="1000" dirty="0">
+                <a:solidFill>
+                  <a:srgbClr val="1A1A2E"/>
+                </a:solidFill>
+                <a:latin typeface="Calibri" pitchFamily="34" charset="0"/>
+                <a:ea typeface="Calibri" pitchFamily="34" charset="-122"/>
+                <a:cs typeface="Calibri" pitchFamily="34" charset="-120"/>
+              </a:rPr>
+              <a:t>P0055 — Restaurants (existing market)</a:t>
+            </a:r>
+            <a:endParaRPr lang="en-US" sz="1000" dirty="0"/>
+          </a:p>
+        </p:txBody>
+      </p:sp>
+      <p:sp>
+        <p:nvSpPr>
+          <p:cNvPr id="33" name="Text 30"/>
+          <p:cNvSpPr/>
+          <p:nvPr/>
+        </p:nvSpPr>
+        <p:spPr>
+          <a:xfrm>
+            <a:off x="10195560" y="5184648"/>
+            <a:ext cx="1463040" cy="274320"/>
+          </a:xfrm>
+          <a:prstGeom prst="rect">
+            <a:avLst/>
+          </a:prstGeom>
+          <a:noFill/>
+          <a:ln/>
+        </p:spPr>
+        <p:txBody>
+          <a:bodyPr wrap="square" rtlCol="0" anchor="ctr"/>
+          <a:lstStyle/>
+          <a:p>
+            <a:pPr algn="r" indent="0" marL="0">
+              <a:buNone/>
+            </a:pPr>
+            <a:r>
+              <a:rPr lang="en-US" sz="1000" b="1" dirty="0">
+                <a:solidFill>
+                  <a:srgbClr val="2C7A57"/>
+                </a:solidFill>
+                <a:latin typeface="Calibri" pitchFamily="34" charset="0"/>
+                <a:ea typeface="Calibri" pitchFamily="34" charset="-122"/>
+                <a:cs typeface="Calibri" pitchFamily="34" charset="-120"/>
+              </a:rPr>
+              <a:t>$524</a:t>
+            </a:r>
+            <a:endParaRPr lang="en-US" sz="1000" dirty="0"/>
+          </a:p>
+        </p:txBody>
+      </p:sp>
+      <p:sp>
+        <p:nvSpPr>
+          <p:cNvPr id="34" name="Text 31"/>
+          <p:cNvSpPr/>
+          <p:nvPr/>
+        </p:nvSpPr>
+        <p:spPr>
+          <a:xfrm>
+            <a:off x="6263640" y="5477256"/>
+            <a:ext cx="4023360" cy="274320"/>
+          </a:xfrm>
+          <a:prstGeom prst="rect">
+            <a:avLst/>
+          </a:prstGeom>
+          <a:noFill/>
+          <a:ln/>
+        </p:spPr>
+        <p:txBody>
+          <a:bodyPr wrap="square" rtlCol="0" anchor="ctr"/>
+          <a:lstStyle/>
+          <a:p>
+            <a:pPr indent="0" marL="0">
+              <a:buNone/>
+            </a:pPr>
+            <a:r>
+              <a:rPr lang="en-US" sz="1000" dirty="0">
+                <a:solidFill>
+                  <a:srgbClr val="1A1A2E"/>
+                </a:solidFill>
+                <a:latin typeface="Calibri" pitchFamily="34" charset="0"/>
+                <a:ea typeface="Calibri" pitchFamily="34" charset="-122"/>
+                <a:cs typeface="Calibri" pitchFamily="34" charset="-120"/>
+              </a:rPr>
+              <a:t>P0000 — Bars (new market)</a:t>
+            </a:r>
+            <a:endParaRPr lang="en-US" sz="1000" dirty="0"/>
+          </a:p>
+        </p:txBody>
+      </p:sp>
+      <p:sp>
+        <p:nvSpPr>
+          <p:cNvPr id="35" name="Text 32"/>
+          <p:cNvSpPr/>
+          <p:nvPr/>
+        </p:nvSpPr>
+        <p:spPr>
+          <a:xfrm>
+            <a:off x="10195560" y="5477256"/>
+            <a:ext cx="1463040" cy="274320"/>
+          </a:xfrm>
+          <a:prstGeom prst="rect">
+            <a:avLst/>
+          </a:prstGeom>
+          <a:noFill/>
+          <a:ln/>
+        </p:spPr>
+        <p:txBody>
+          <a:bodyPr wrap="square" rtlCol="0" anchor="ctr"/>
+          <a:lstStyle/>
+          <a:p>
+            <a:pPr algn="r" indent="0" marL="0">
+              <a:buNone/>
+            </a:pPr>
+            <a:r>
+              <a:rPr lang="en-US" sz="1000" b="1" dirty="0">
+                <a:solidFill>
+                  <a:srgbClr val="2C7A57"/>
+                </a:solidFill>
+                <a:latin typeface="Calibri" pitchFamily="34" charset="0"/>
+                <a:ea typeface="Calibri" pitchFamily="34" charset="-122"/>
+                <a:cs typeface="Calibri" pitchFamily="34" charset="-120"/>
+              </a:rPr>
+              <a:t>$500</a:t>
+            </a:r>
+            <a:endParaRPr lang="en-US" sz="1000" dirty="0"/>
+          </a:p>
+        </p:txBody>
+      </p:sp>
+      <p:sp>
+        <p:nvSpPr>
+          <p:cNvPr id="36" name="Text 33"/>
+          <p:cNvSpPr/>
+          <p:nvPr/>
+        </p:nvSpPr>
+        <p:spPr>
+          <a:xfrm>
+            <a:off x="6263640" y="5769864"/>
+            <a:ext cx="4023360" cy="274320"/>
+          </a:xfrm>
+          <a:prstGeom prst="rect">
+            <a:avLst/>
+          </a:prstGeom>
+          <a:noFill/>
+          <a:ln/>
+        </p:spPr>
+        <p:txBody>
+          <a:bodyPr wrap="square" rtlCol="0" anchor="ctr"/>
+          <a:lstStyle/>
+          <a:p>
+            <a:pPr indent="0" marL="0">
+              <a:buNone/>
+            </a:pPr>
+            <a:r>
+              <a:rPr lang="en-US" sz="1000" dirty="0">
+                <a:solidFill>
+                  <a:srgbClr val="1A1A2E"/>
+                </a:solidFill>
+                <a:latin typeface="Calibri" pitchFamily="34" charset="0"/>
+                <a:ea typeface="Calibri" pitchFamily="34" charset="-122"/>
+                <a:cs typeface="Calibri" pitchFamily="34" charset="-120"/>
+              </a:rPr>
+              <a:t>P0001 — Bars (new market)</a:t>
+            </a:r>
+            <a:endParaRPr lang="en-US" sz="1000" dirty="0"/>
+          </a:p>
+        </p:txBody>
+      </p:sp>
+      <p:sp>
+        <p:nvSpPr>
+          <p:cNvPr id="37" name="Text 34"/>
+          <p:cNvSpPr/>
+          <p:nvPr/>
+        </p:nvSpPr>
+        <p:spPr>
+          <a:xfrm>
+            <a:off x="10195560" y="5769864"/>
+            <a:ext cx="1463040" cy="274320"/>
+          </a:xfrm>
+          <a:prstGeom prst="rect">
+            <a:avLst/>
+          </a:prstGeom>
+          <a:noFill/>
+          <a:ln/>
+        </p:spPr>
+        <p:txBody>
+          <a:bodyPr wrap="square" rtlCol="0" anchor="ctr"/>
+          <a:lstStyle/>
+          <a:p>
+            <a:pPr algn="r" indent="0" marL="0">
+              <a:buNone/>
+            </a:pPr>
+            <a:r>
+              <a:rPr lang="en-US" sz="1000" b="1" dirty="0">
+                <a:solidFill>
+                  <a:srgbClr val="2C7A57"/>
+                </a:solidFill>
+                <a:latin typeface="Calibri" pitchFamily="34" charset="0"/>
+                <a:ea typeface="Calibri" pitchFamily="34" charset="-122"/>
+                <a:cs typeface="Calibri" pitchFamily="34" charset="-120"/>
+              </a:rPr>
+              <a:t>$496</a:t>
+            </a:r>
+            <a:endParaRPr lang="en-US" sz="1000" dirty="0"/>
+          </a:p>
+        </p:txBody>
+      </p:sp>
+      <p:sp>
+        <p:nvSpPr>
+          <p:cNvPr id="38" name="Text 35"/>
+          <p:cNvSpPr/>
+          <p:nvPr/>
+        </p:nvSpPr>
+        <p:spPr>
+          <a:xfrm>
+            <a:off x="548640" y="6080760"/>
+            <a:ext cx="11064240" cy="411480"/>
+          </a:xfrm>
+          <a:prstGeom prst="rect">
+            <a:avLst/>
+          </a:prstGeom>
+          <a:noFill/>
+          <a:ln/>
+        </p:spPr>
+        <p:txBody>
+          <a:bodyPr wrap="square" rtlCol="0" anchor="ctr"/>
+          <a:lstStyle/>
+          <a:p>
+            <a:pPr indent="0" marL="0">
+              <a:lnSpc>
+                <a:spcPts val="1200"/>
+              </a:lnSpc>
+              <a:buNone/>
+            </a:pPr>
+            <a:r>
+              <a:rPr lang="en-US" sz="1000" i="1" dirty="0">
+                <a:solidFill>
+                  <a:srgbClr val="5B6178"/>
+                </a:solidFill>
+                <a:latin typeface="Calibri" pitchFamily="34" charset="0"/>
+                <a:ea typeface="Calibri" pitchFamily="34" charset="-122"/>
+                <a:cs typeface="Calibri" pitchFamily="34" charset="-120"/>
+              </a:rPr>
+              <a:t>Flags come from 5-fold out-of-fold predictions, never a model scoring the venue it was trained on. The calibrated-lift feature carries near-zero importance — honest, since it's constant within venue_type once venue_type itself is a feature.</a:t>
+            </a:r>
+            <a:endParaRPr lang="en-US" sz="1000" dirty="0"/>
+          </a:p>
+        </p:txBody>
+      </p:sp>
+      <p:sp>
+        <p:nvSpPr>
+          <p:cNvPr id="39" name="Text 36"/>
+          <p:cNvSpPr/>
+          <p:nvPr/>
+        </p:nvSpPr>
+        <p:spPr>
+          <a:xfrm>
+            <a:off x="457200" y="6537960"/>
+            <a:ext cx="7315200" cy="274320"/>
+          </a:xfrm>
+          <a:prstGeom prst="rect">
+            <a:avLst/>
+          </a:prstGeom>
+          <a:noFill/>
+          <a:ln/>
+        </p:spPr>
+        <p:txBody>
+          <a:bodyPr wrap="square" rtlCol="0" anchor="ctr"/>
+          <a:lstStyle/>
+          <a:p>
+            <a:pPr indent="0" marL="0">
+              <a:buNone/>
+            </a:pPr>
+            <a:r>
+              <a:rPr lang="en-US" sz="900" dirty="0">
+                <a:solidFill>
+                  <a:srgbClr val="5B6178"/>
+                </a:solidFill>
+                <a:latin typeface="Calibri" pitchFamily="34" charset="0"/>
+                <a:ea typeface="Calibri" pitchFamily="34" charset="-122"/>
+                <a:cs typeface="Calibri" pitchFamily="34" charset="-120"/>
+              </a:rPr>
+              <a:t>Venue economics</a:t>
+            </a:r>
+            <a:endParaRPr lang="en-US" sz="900" dirty="0"/>
+          </a:p>
+        </p:txBody>
+      </p:sp>
+    </p:spTree>
+  </p:cSld>
+  <p:clrMapOvr>
+    <a:masterClrMapping/>
+  </p:clrMapOvr>
+</p:sld>
+</file>
+
+<file path=ppt/slides/slide17.xml><?xml version="1.0" encoding="utf-8"?>
+<p:sld xmlns:a="http://schemas.openxmlformats.org/drawingml/2006/main" xmlns:r="http://schemas.openxmlformats.org/officeDocument/2006/relationships" xmlns:p="http://schemas.openxmlformats.org/presentationml/2006/main">
+  <p:cSld name="Slide 17">
+    <p:bg>
+      <p:bgPr>
+        <a:solidFill>
+          <a:srgbClr val="FFFFFF"/>
+        </a:solidFill>
+      </p:bgPr>
+    </p:bg>
+    <p:spTree>
+      <p:nvGrpSpPr>
+        <p:cNvPr id="1" name=""/>
+        <p:cNvGrpSpPr/>
+        <p:nvPr/>
+      </p:nvGrpSpPr>
+      <p:grpSpPr>
+        <a:xfrm>
+          <a:off x="0" y="0"/>
+          <a:ext cx="0" cy="0"/>
+          <a:chOff x="0" y="0"/>
+          <a:chExt cx="0" cy="0"/>
+        </a:xfrm>
+      </p:grpSpPr>
+      <p:sp>
+        <p:nvSpPr>
+          <p:cNvPr id="2" name="Text 0"/>
+          <p:cNvSpPr/>
+          <p:nvPr/>
+        </p:nvSpPr>
+        <p:spPr>
+          <a:xfrm>
+            <a:off x="548640" y="411480"/>
+            <a:ext cx="11155680" cy="594360"/>
+          </a:xfrm>
+          <a:prstGeom prst="rect">
+            <a:avLst/>
+          </a:prstGeom>
+          <a:noFill/>
+          <a:ln/>
+        </p:spPr>
+        <p:txBody>
+          <a:bodyPr wrap="square" rtlCol="0" anchor="ctr"/>
+          <a:lstStyle/>
+          <a:p>
+            <a:pPr indent="0" marL="0">
+              <a:buNone/>
+            </a:pPr>
+            <a:r>
+              <a:rPr lang="en-US" sz="2500" b="1" dirty="0">
+                <a:solidFill>
+                  <a:srgbClr val="1E2761"/>
+                </a:solidFill>
+                <a:latin typeface="Cambria" pitchFamily="34" charset="0"/>
+                <a:ea typeface="Cambria" pitchFamily="34" charset="-122"/>
+                <a:cs typeface="Cambria" pitchFamily="34" charset="-120"/>
+              </a:rPr>
               <a:t>Predicting venue churn risk, honestly</a:t>
             </a:r>
             <a:endParaRPr lang="en-US" sz="2500" dirty="0"/>
@@ -11716,9 +12579,9 @@
 </p:sld>
 </file>
 
-<file path=ppt/slides/slide17.xml><?xml version="1.0" encoding="utf-8"?>
+<file path=ppt/slides/slide18.xml><?xml version="1.0" encoding="utf-8"?>
 <p:sld xmlns:a="http://schemas.openxmlformats.org/drawingml/2006/main" xmlns:r="http://schemas.openxmlformats.org/officeDocument/2006/relationships" xmlns:p="http://schemas.openxmlformats.org/presentationml/2006/main">
-  <p:cSld name="Slide 17">
+  <p:cSld name="Slide 18">
     <p:bg>
       <p:bgPr>
         <a:solidFill>

--- a/deck/AtmosphereTV_DOOH_Measurement.pptx
+++ b/deck/AtmosphereTV_DOOH_Measurement.pptx
@@ -10421,8 +10421,47 @@
         </p:nvSpPr>
         <p:spPr>
           <a:xfrm>
-            <a:off x="6263640" y="3209544"/>
-            <a:ext cx="3657600" cy="274320"/>
+            <a:off x="6263640" y="3172968"/>
+            <a:ext cx="5394960" cy="201168"/>
+          </a:xfrm>
+          <a:prstGeom prst="rect">
+            <a:avLst/>
+          </a:prstGeom>
+          <a:noFill/>
+          <a:ln/>
+        </p:spPr>
+        <p:txBody>
+          <a:bodyPr wrap="square" rtlCol="0" anchor="ctr"/>
+          <a:lstStyle/>
+          <a:p>
+            <a:pPr indent="0" marL="0">
+              <a:buNone/>
+            </a:pPr>
+            <a:r>
+              <a:rPr lang="en-US" sz="870" i="1" dirty="0">
+                <a:solidFill>
+                  <a:srgbClr val="5B6178"/>
+                </a:solidFill>
+                <a:latin typeface="Courier New" pitchFamily="34" charset="0"/>
+                <a:ea typeface="Courier New" pitchFamily="34" charset="-122"/>
+                <a:cs typeface="Courier New" pitchFamily="34" charset="-120"/>
+              </a:rPr>
+              <a:t>gap_pct = (actual − OOF predicted) ÷ OOF predicted × 100</a:t>
+            </a:r>
+            <a:endParaRPr lang="en-US" sz="870" dirty="0"/>
+          </a:p>
+        </p:txBody>
+      </p:sp>
+      <p:sp>
+        <p:nvSpPr>
+          <p:cNvPr id="22" name="Text 19"/>
+          <p:cNvSpPr/>
+          <p:nvPr/>
+        </p:nvSpPr>
+        <p:spPr>
+          <a:xfrm>
+            <a:off x="6263640" y="3410712"/>
+            <a:ext cx="3657600" cy="256032"/>
           </a:xfrm>
           <a:prstGeom prst="rect">
             <a:avLst/>
@@ -10454,14 +10493,14 @@
       </p:sp>
       <p:sp>
         <p:nvSpPr>
-          <p:cNvPr id="22" name="Text 19"/>
-          <p:cNvSpPr/>
-          <p:nvPr/>
-        </p:nvSpPr>
-        <p:spPr>
-          <a:xfrm>
-            <a:off x="9966960" y="3209544"/>
-            <a:ext cx="1691640" cy="274320"/>
+          <p:cNvPr id="23" name="Text 20"/>
+          <p:cNvSpPr/>
+          <p:nvPr/>
+        </p:nvSpPr>
+        <p:spPr>
+          <a:xfrm>
+            <a:off x="9966960" y="3410712"/>
+            <a:ext cx="1691640" cy="256032"/>
           </a:xfrm>
           <a:prstGeom prst="rect">
             <a:avLst/>
@@ -10493,14 +10532,14 @@
       </p:sp>
       <p:sp>
         <p:nvSpPr>
-          <p:cNvPr id="23" name="Text 20"/>
-          <p:cNvSpPr/>
-          <p:nvPr/>
-        </p:nvSpPr>
-        <p:spPr>
-          <a:xfrm>
-            <a:off x="6263640" y="3502152"/>
-            <a:ext cx="3657600" cy="274320"/>
+          <p:cNvPr id="24" name="Text 21"/>
+          <p:cNvSpPr/>
+          <p:nvPr/>
+        </p:nvSpPr>
+        <p:spPr>
+          <a:xfrm>
+            <a:off x="6263640" y="3666744"/>
+            <a:ext cx="3657600" cy="256032"/>
           </a:xfrm>
           <a:prstGeom prst="rect">
             <a:avLst/>
@@ -10532,14 +10571,14 @@
       </p:sp>
       <p:sp>
         <p:nvSpPr>
-          <p:cNvPr id="24" name="Text 21"/>
-          <p:cNvSpPr/>
-          <p:nvPr/>
-        </p:nvSpPr>
-        <p:spPr>
-          <a:xfrm>
-            <a:off x="9966960" y="3502152"/>
-            <a:ext cx="1691640" cy="274320"/>
+          <p:cNvPr id="25" name="Text 22"/>
+          <p:cNvSpPr/>
+          <p:nvPr/>
+        </p:nvSpPr>
+        <p:spPr>
+          <a:xfrm>
+            <a:off x="9966960" y="3666744"/>
+            <a:ext cx="1691640" cy="256032"/>
           </a:xfrm>
           <a:prstGeom prst="rect">
             <a:avLst/>
@@ -10571,14 +10610,14 @@
       </p:sp>
       <p:sp>
         <p:nvSpPr>
-          <p:cNvPr id="25" name="Text 22"/>
-          <p:cNvSpPr/>
-          <p:nvPr/>
-        </p:nvSpPr>
-        <p:spPr>
-          <a:xfrm>
-            <a:off x="6263640" y="3794760"/>
-            <a:ext cx="3657600" cy="274320"/>
+          <p:cNvPr id="26" name="Text 23"/>
+          <p:cNvSpPr/>
+          <p:nvPr/>
+        </p:nvSpPr>
+        <p:spPr>
+          <a:xfrm>
+            <a:off x="6263640" y="3922776"/>
+            <a:ext cx="3657600" cy="256032"/>
           </a:xfrm>
           <a:prstGeom prst="rect">
             <a:avLst/>
@@ -10610,14 +10649,14 @@
       </p:sp>
       <p:sp>
         <p:nvSpPr>
-          <p:cNvPr id="26" name="Text 23"/>
-          <p:cNvSpPr/>
-          <p:nvPr/>
-        </p:nvSpPr>
-        <p:spPr>
-          <a:xfrm>
-            <a:off x="9966960" y="3794760"/>
-            <a:ext cx="1691640" cy="274320"/>
+          <p:cNvPr id="27" name="Text 24"/>
+          <p:cNvSpPr/>
+          <p:nvPr/>
+        </p:nvSpPr>
+        <p:spPr>
+          <a:xfrm>
+            <a:off x="9966960" y="3922776"/>
+            <a:ext cx="1691640" cy="256032"/>
           </a:xfrm>
           <a:prstGeom prst="rect">
             <a:avLst/>
@@ -10649,14 +10688,14 @@
       </p:sp>
       <p:sp>
         <p:nvSpPr>
-          <p:cNvPr id="27" name="Text 24"/>
-          <p:cNvSpPr/>
-          <p:nvPr/>
-        </p:nvSpPr>
-        <p:spPr>
-          <a:xfrm>
-            <a:off x="6263640" y="4087368"/>
-            <a:ext cx="3657600" cy="274320"/>
+          <p:cNvPr id="28" name="Text 25"/>
+          <p:cNvSpPr/>
+          <p:nvPr/>
+        </p:nvSpPr>
+        <p:spPr>
+          <a:xfrm>
+            <a:off x="6263640" y="4178808"/>
+            <a:ext cx="3657600" cy="256032"/>
           </a:xfrm>
           <a:prstGeom prst="rect">
             <a:avLst/>
@@ -10688,14 +10727,14 @@
       </p:sp>
       <p:sp>
         <p:nvSpPr>
-          <p:cNvPr id="28" name="Text 25"/>
-          <p:cNvSpPr/>
-          <p:nvPr/>
-        </p:nvSpPr>
-        <p:spPr>
-          <a:xfrm>
-            <a:off x="9966960" y="4087368"/>
-            <a:ext cx="1691640" cy="274320"/>
+          <p:cNvPr id="29" name="Text 26"/>
+          <p:cNvSpPr/>
+          <p:nvPr/>
+        </p:nvSpPr>
+        <p:spPr>
+          <a:xfrm>
+            <a:off x="9966960" y="4178808"/>
+            <a:ext cx="1691640" cy="256032"/>
           </a:xfrm>
           <a:prstGeom prst="rect">
             <a:avLst/>
@@ -10727,13 +10766,13 @@
       </p:sp>
       <p:sp>
         <p:nvSpPr>
-          <p:cNvPr id="29" name="Text 26"/>
-          <p:cNvSpPr/>
-          <p:nvPr/>
-        </p:nvSpPr>
-        <p:spPr>
-          <a:xfrm>
-            <a:off x="6263640" y="4562856"/>
+          <p:cNvPr id="30" name="Text 27"/>
+          <p:cNvSpPr/>
+          <p:nvPr/>
+        </p:nvSpPr>
+        <p:spPr>
+          <a:xfrm>
+            <a:off x="6263640" y="4572000"/>
             <a:ext cx="5394960" cy="274320"/>
           </a:xfrm>
           <a:prstGeom prst="rect">
@@ -10766,14 +10805,14 @@
       </p:sp>
       <p:sp>
         <p:nvSpPr>
-          <p:cNvPr id="30" name="Text 27"/>
-          <p:cNvSpPr/>
-          <p:nvPr/>
-        </p:nvSpPr>
-        <p:spPr>
-          <a:xfrm>
-            <a:off x="6263640" y="4892040"/>
-            <a:ext cx="4023360" cy="274320"/>
+          <p:cNvPr id="31" name="Text 28"/>
+          <p:cNvSpPr/>
+          <p:nvPr/>
+        </p:nvSpPr>
+        <p:spPr>
+          <a:xfrm>
+            <a:off x="6263640" y="4864608"/>
+            <a:ext cx="4023360" cy="256032"/>
           </a:xfrm>
           <a:prstGeom prst="rect">
             <a:avLst/>
@@ -10805,14 +10844,14 @@
       </p:sp>
       <p:sp>
         <p:nvSpPr>
-          <p:cNvPr id="31" name="Text 28"/>
-          <p:cNvSpPr/>
-          <p:nvPr/>
-        </p:nvSpPr>
-        <p:spPr>
-          <a:xfrm>
-            <a:off x="10195560" y="4892040"/>
-            <a:ext cx="1463040" cy="274320"/>
+          <p:cNvPr id="32" name="Text 29"/>
+          <p:cNvSpPr/>
+          <p:nvPr/>
+        </p:nvSpPr>
+        <p:spPr>
+          <a:xfrm>
+            <a:off x="10195560" y="4864608"/>
+            <a:ext cx="1463040" cy="256032"/>
           </a:xfrm>
           <a:prstGeom prst="rect">
             <a:avLst/>
@@ -10844,14 +10883,14 @@
       </p:sp>
       <p:sp>
         <p:nvSpPr>
-          <p:cNvPr id="32" name="Text 29"/>
-          <p:cNvSpPr/>
-          <p:nvPr/>
-        </p:nvSpPr>
-        <p:spPr>
-          <a:xfrm>
-            <a:off x="6263640" y="5184648"/>
-            <a:ext cx="4023360" cy="274320"/>
+          <p:cNvPr id="33" name="Text 30"/>
+          <p:cNvSpPr/>
+          <p:nvPr/>
+        </p:nvSpPr>
+        <p:spPr>
+          <a:xfrm>
+            <a:off x="6263640" y="5120640"/>
+            <a:ext cx="4023360" cy="256032"/>
           </a:xfrm>
           <a:prstGeom prst="rect">
             <a:avLst/>
@@ -10883,14 +10922,14 @@
       </p:sp>
       <p:sp>
         <p:nvSpPr>
-          <p:cNvPr id="33" name="Text 30"/>
-          <p:cNvSpPr/>
-          <p:nvPr/>
-        </p:nvSpPr>
-        <p:spPr>
-          <a:xfrm>
-            <a:off x="10195560" y="5184648"/>
-            <a:ext cx="1463040" cy="274320"/>
+          <p:cNvPr id="34" name="Text 31"/>
+          <p:cNvSpPr/>
+          <p:nvPr/>
+        </p:nvSpPr>
+        <p:spPr>
+          <a:xfrm>
+            <a:off x="10195560" y="5120640"/>
+            <a:ext cx="1463040" cy="256032"/>
           </a:xfrm>
           <a:prstGeom prst="rect">
             <a:avLst/>
@@ -10922,14 +10961,14 @@
       </p:sp>
       <p:sp>
         <p:nvSpPr>
-          <p:cNvPr id="34" name="Text 31"/>
-          <p:cNvSpPr/>
-          <p:nvPr/>
-        </p:nvSpPr>
-        <p:spPr>
-          <a:xfrm>
-            <a:off x="6263640" y="5477256"/>
-            <a:ext cx="4023360" cy="274320"/>
+          <p:cNvPr id="35" name="Text 32"/>
+          <p:cNvSpPr/>
+          <p:nvPr/>
+        </p:nvSpPr>
+        <p:spPr>
+          <a:xfrm>
+            <a:off x="6263640" y="5376672"/>
+            <a:ext cx="4023360" cy="256032"/>
           </a:xfrm>
           <a:prstGeom prst="rect">
             <a:avLst/>
@@ -10961,14 +11000,14 @@
       </p:sp>
       <p:sp>
         <p:nvSpPr>
-          <p:cNvPr id="35" name="Text 32"/>
-          <p:cNvSpPr/>
-          <p:nvPr/>
-        </p:nvSpPr>
-        <p:spPr>
-          <a:xfrm>
-            <a:off x="10195560" y="5477256"/>
-            <a:ext cx="1463040" cy="274320"/>
+          <p:cNvPr id="36" name="Text 33"/>
+          <p:cNvSpPr/>
+          <p:nvPr/>
+        </p:nvSpPr>
+        <p:spPr>
+          <a:xfrm>
+            <a:off x="10195560" y="5376672"/>
+            <a:ext cx="1463040" cy="256032"/>
           </a:xfrm>
           <a:prstGeom prst="rect">
             <a:avLst/>
@@ -11000,14 +11039,14 @@
       </p:sp>
       <p:sp>
         <p:nvSpPr>
-          <p:cNvPr id="36" name="Text 33"/>
-          <p:cNvSpPr/>
-          <p:nvPr/>
-        </p:nvSpPr>
-        <p:spPr>
-          <a:xfrm>
-            <a:off x="6263640" y="5769864"/>
-            <a:ext cx="4023360" cy="274320"/>
+          <p:cNvPr id="37" name="Text 34"/>
+          <p:cNvSpPr/>
+          <p:nvPr/>
+        </p:nvSpPr>
+        <p:spPr>
+          <a:xfrm>
+            <a:off x="6263640" y="5632704"/>
+            <a:ext cx="4023360" cy="256032"/>
           </a:xfrm>
           <a:prstGeom prst="rect">
             <a:avLst/>
@@ -11039,14 +11078,14 @@
       </p:sp>
       <p:sp>
         <p:nvSpPr>
-          <p:cNvPr id="37" name="Text 34"/>
-          <p:cNvSpPr/>
-          <p:nvPr/>
-        </p:nvSpPr>
-        <p:spPr>
-          <a:xfrm>
-            <a:off x="10195560" y="5769864"/>
-            <a:ext cx="1463040" cy="274320"/>
+          <p:cNvPr id="38" name="Text 35"/>
+          <p:cNvSpPr/>
+          <p:nvPr/>
+        </p:nvSpPr>
+        <p:spPr>
+          <a:xfrm>
+            <a:off x="10195560" y="5632704"/>
+            <a:ext cx="1463040" cy="256032"/>
           </a:xfrm>
           <a:prstGeom prst="rect">
             <a:avLst/>
@@ -11078,7 +11117,7 @@
       </p:sp>
       <p:sp>
         <p:nvSpPr>
-          <p:cNvPr id="38" name="Text 35"/>
+          <p:cNvPr id="39" name="Text 36"/>
           <p:cNvSpPr/>
           <p:nvPr/>
         </p:nvSpPr>
@@ -11120,7 +11159,7 @@
       </p:sp>
       <p:sp>
         <p:nvSpPr>
-          <p:cNvPr id="39" name="Text 36"/>
+          <p:cNvPr id="40" name="Text 37"/>
           <p:cNvSpPr/>
           <p:nvPr/>
         </p:nvSpPr>

--- a/deck/AtmosphereTV_DOOH_Measurement.pptx
+++ b/deck/AtmosphereTV_DOOH_Measurement.pptx
@@ -23,9 +23,10 @@
     <p:sldId id="271" r:id="rId17"/>
     <p:sldId id="272" r:id="rId18"/>
     <p:sldId id="273" r:id="rId19"/>
+    <p:sldId id="274" r:id="rId20"/>
   </p:sldIdLst>
   <p:notesMasterIdLst>
-    <p:notesMasterId r:id="rId20"/>
+    <p:notesMasterId r:id="rId21"/>
   </p:notesMasterIdLst>
   <p:sldSz cx="12192000" cy="6858000"/>
   <p:notesSz cx="6858000" cy="12192000"/>
@@ -4182,6 +4183,94 @@
             <a:fld id="{F7021451-1387-4CA6-816F-3879F97B5CBC}" type="slidenum">
               <a:rPr lang="en-US"/>
               <a:t>18</a:t>
+            </a:fld>
+            <a:endParaRPr lang="en-US"/>
+          </a:p>
+        </p:txBody>
+      </p:sp>
+    </p:spTree>
+    <p:extLst>
+      <p:ext uri="{BB962C8B-B14F-4D97-AF65-F5344CB8AC3E}">
+        <p14:creationId xmlns:p14="http://schemas.microsoft.com/office/powerpoint/2010/main" val="1024086991"/>
+      </p:ext>
+    </p:extLst>
+  </p:cSld>
+  <p:clrMapOvr>
+    <a:masterClrMapping/>
+  </p:clrMapOvr>
+</p:notes>
+</file>
+
+<file path=ppt/notesSlides/notesSlide19.xml><?xml version="1.0" encoding="utf-8"?>
+<p:notes xmlns:a="http://schemas.openxmlformats.org/drawingml/2006/main" xmlns:r="http://schemas.openxmlformats.org/officeDocument/2006/relationships" xmlns:p="http://schemas.openxmlformats.org/presentationml/2006/main">
+  <p:cSld>
+    <p:spTree>
+      <p:nvGrpSpPr>
+        <p:cNvPr id="1" name=""/>
+        <p:cNvGrpSpPr/>
+        <p:nvPr/>
+      </p:nvGrpSpPr>
+      <p:grpSpPr>
+        <a:xfrm>
+          <a:off x="0" y="0"/>
+          <a:ext cx="0" cy="0"/>
+          <a:chOff x="0" y="0"/>
+          <a:chExt cx="0" cy="0"/>
+        </a:xfrm>
+      </p:grpSpPr>
+      <p:sp>
+        <p:nvSpPr>
+          <p:cNvPr id="2" name="Slide Image Placeholder 1"/>
+          <p:cNvSpPr>
+            <a:spLocks noGrp="1" noRot="1" noChangeAspect="1"/>
+          </p:cNvSpPr>
+          <p:nvPr>
+            <p:ph type="sldImg"/>
+          </p:nvPr>
+        </p:nvSpPr>
+        <p:spPr/>
+      </p:sp>
+      <p:sp>
+        <p:nvSpPr>
+          <p:cNvPr id="3" name="Notes Placeholder 2"/>
+          <p:cNvSpPr>
+            <a:spLocks noGrp="1"/>
+          </p:cNvSpPr>
+          <p:nvPr>
+            <p:ph type="body" idx="1"/>
+          </p:nvPr>
+        </p:nvSpPr>
+        <p:spPr/>
+        <p:txBody>
+          <a:bodyPr/>
+          <a:lstStyle/>
+          <a:p>
+            <a:r>
+              <a:rPr lang="en-US" dirty="0"/>
+              <a:t/>
+            </a:r>
+            <a:endParaRPr lang="en-US" dirty="0"/>
+          </a:p>
+        </p:txBody>
+      </p:sp>
+      <p:sp>
+        <p:nvSpPr>
+          <p:cNvPr id="4" name="Slide Number Placeholder 3"/>
+          <p:cNvSpPr>
+            <a:spLocks noGrp="1"/>
+          </p:cNvSpPr>
+          <p:nvPr>
+            <p:ph type="sldNum" sz="quarter" idx="10"/>
+          </p:nvPr>
+        </p:nvSpPr>
+        <p:spPr/>
+        <p:txBody>
+          <a:bodyPr/>
+          <a:lstStyle/>
+          <a:p>
+            <a:fld id="{F7021451-1387-4CA6-816F-3879F97B5CBC}" type="slidenum">
+              <a:rPr lang="en-US"/>
+              <a:t>19</a:t>
             </a:fld>
             <a:endParaRPr lang="en-US"/>
           </a:p>
@@ -5736,7 +5825,7 @@
         <p:spPr>
           <a:xfrm>
             <a:off x="548640" y="5742432"/>
-            <a:ext cx="6949440" cy="548640"/>
+            <a:ext cx="6949440" cy="658368"/>
           </a:xfrm>
           <a:prstGeom prst="rect">
             <a:avLst/>
@@ -5750,12 +5839,12 @@
           <a:p>
             <a:pPr indent="0" marL="0">
               <a:lnSpc>
-                <a:spcPts val="1050"/>
+                <a:spcPts val="1000"/>
               </a:lnSpc>
               <a:buNone/>
             </a:pPr>
             <a:r>
-              <a:rPr lang="en-US" sz="850" i="1" dirty="0">
+              <a:rPr lang="en-US" sz="830" i="1" dirty="0">
                 <a:solidFill>
                   <a:srgbClr val="5B6178"/>
                 </a:solidFill>
@@ -5763,9 +5852,9 @@
                 <a:ea typeface="Calibri" pitchFamily="34" charset="-122"/>
                 <a:cs typeface="Calibri" pitchFamily="34" charset="-120"/>
               </a:rPr>
-              <a:t>Simplified for the demo: a real deployment would add more controls (competitor spend, price/promo, macro trend), validate the shape out-of-time rather than on in-sample SSE alone, and often blend the experiment in as a Bayesian prior rather than a hard rescale.</a:t>
-            </a:r>
-            <a:endParaRPr lang="en-US" sz="850" dirty="0"/>
+              <a:t>Why the naive estimate undershoots: the aggregate series it's fit on is sparse — restaurants never average above ~2.6 plays/wk — versus the RCT's sustained 6 plays/wk. The fitted curve is extrapolated into that untested territory, where a Hill curve's convex early segment (Slide 12) tends to undersell the upside; pooling RCT and non-randomly-selected venues in the same aggregate fit adds further bias. The RCT measures that exposure directly, not by extrapolation.</a:t>
+            </a:r>
+            <a:endParaRPr lang="en-US" sz="830" dirty="0"/>
           </a:p>
         </p:txBody>
       </p:sp>
@@ -6439,7 +6528,7 @@
               <a:buNone/>
             </a:pPr>
             <a:r>
-              <a:rPr lang="en-US" sz="2400" b="1" dirty="0">
+              <a:rPr lang="en-US" sz="2500" b="1" dirty="0">
                 <a:solidFill>
                   <a:srgbClr val="1E2761"/>
                 </a:solidFill>
@@ -6447,9 +6536,9 @@
                 <a:ea typeface="Cambria" pitchFamily="34" charset="-122"/>
                 <a:cs typeface="Cambria" pitchFamily="34" charset="-120"/>
               </a:rPr>
-              <a:t>Robustness check: does competing media break this MMM?</a:t>
-            </a:r>
-            <a:endParaRPr lang="en-US" sz="2400" dirty="0"/>
+              <a:t>Why calibrate only one of eight parameters?</a:t>
+            </a:r>
+            <a:endParaRPr lang="en-US" sz="2500" dirty="0"/>
           </a:p>
         </p:txBody>
       </p:sp>
@@ -6513,7 +6602,7 @@
                 <a:ea typeface="Calibri" pitchFamily="34" charset="-122"/>
                 <a:cs typeface="Calibri" pitchFamily="34" charset="-120"/>
               </a:rPr>
-              <a:t>Step 3 robustness check · Q2</a:t>
+              <a:t>Step 3 continued · Answers Q2</a:t>
             </a:r>
             <a:endParaRPr lang="en-US" sz="950" dirty="0"/>
           </a:p>
@@ -6544,7 +6633,7 @@
               <a:buNone/>
             </a:pPr>
             <a:r>
-              <a:rPr lang="en-US" sz="1200" i="1" dirty="0">
+              <a:rPr lang="en-US" sz="1250" i="1" dirty="0">
                 <a:solidFill>
                   <a:srgbClr val="5B6178"/>
                 </a:solidFill>
@@ -6552,42 +6641,407 @@
                 <a:ea typeface="Calibri" pitchFamily="34" charset="-122"/>
                 <a:cs typeface="Calibri" pitchFamily="34" charset="-120"/>
               </a:rPr>
-              <a:t>A stress-test scenario: a competing advertiser ramps up on the same venues at the same time, correlated with Atmosphere's own exposure — the kind of overlap a real MMM has to prove it's robust to.</a:t>
-            </a:r>
-            <a:endParaRPr lang="en-US" sz="1200" dirty="0"/>
-          </a:p>
-        </p:txBody>
-      </p:sp>
-      <p:graphicFrame>
-        <p:nvGraphicFramePr>
-          <p:cNvPr id="6" name="Chart 0" descr=""/>
-          <p:cNvGraphicFramePr/>
-          <p:nvPr/>
-        </p:nvGraphicFramePr>
-        <p:xfrm>
-          <a:off x="548640" y="1600200"/>
-          <a:ext cx="6949440" cy="3931920"/>
-        </p:xfrm>
-        <a:graphic xmlns:a="http://schemas.openxmlformats.org/drawingml/2006/main">
-          <a:graphicData uri="http://schemas.openxmlformats.org/drawingml/2006/chart">
-            <c:chart xmlns:c="http://schemas.openxmlformats.org/drawingml/2006/chart" r:id="rId1"/>
-          </a:graphicData>
-        </a:graphic>
-      </p:graphicFrame>
-      <p:sp>
-        <p:nvSpPr>
-          <p:cNvPr id="7" name="Shape 4"/>
-          <p:cNvSpPr/>
-          <p:nvPr/>
-        </p:nvSpPr>
-        <p:spPr>
-          <a:xfrm>
-            <a:off x="7772400" y="1600200"/>
-            <a:ext cx="3867912" cy="1234440"/>
+              <a:t>The MMM regression has 8 free parameters. One RCT arm gives exactly one clean number — enough to calibrate exactly one of them.</a:t>
+            </a:r>
+            <a:endParaRPr lang="en-US" sz="1250" dirty="0"/>
+          </a:p>
+        </p:txBody>
+      </p:sp>
+      <p:sp>
+        <p:nvSpPr>
+          <p:cNvPr id="6" name="Text 4"/>
+          <p:cNvSpPr/>
+          <p:nvPr/>
+        </p:nvSpPr>
+        <p:spPr>
+          <a:xfrm>
+            <a:off x="548640" y="1508760"/>
+            <a:ext cx="6949440" cy="256032"/>
+          </a:xfrm>
+          <a:prstGeom prst="rect">
+            <a:avLst/>
+          </a:prstGeom>
+          <a:noFill/>
+          <a:ln/>
+        </p:spPr>
+        <p:txBody>
+          <a:bodyPr wrap="square" rtlCol="0" anchor="ctr"/>
+          <a:lstStyle/>
+          <a:p>
+            <a:pPr indent="0" marL="0">
+              <a:buNone/>
+            </a:pPr>
+            <a:r>
+              <a:rPr lang="en-US" sz="1250" b="1" dirty="0">
+                <a:solidFill>
+                  <a:srgbClr val="1E2761"/>
+                </a:solidFill>
+                <a:latin typeface="Cambria" pitchFamily="34" charset="0"/>
+                <a:ea typeface="Cambria" pitchFamily="34" charset="-122"/>
+                <a:cs typeface="Cambria" pitchFamily="34" charset="-120"/>
+              </a:rPr>
+              <a:t>The regression, in full</a:t>
+            </a:r>
+            <a:endParaRPr lang="en-US" sz="1250" dirty="0"/>
+          </a:p>
+        </p:txBody>
+      </p:sp>
+      <p:sp>
+        <p:nvSpPr>
+          <p:cNvPr id="7" name="Text 5"/>
+          <p:cNvSpPr/>
+          <p:nvPr/>
+        </p:nvSpPr>
+        <p:spPr>
+          <a:xfrm>
+            <a:off x="548640" y="1783080"/>
+            <a:ext cx="6949440" cy="1234440"/>
+          </a:xfrm>
+          <a:prstGeom prst="rect">
+            <a:avLst/>
+          </a:prstGeom>
+          <a:noFill/>
+          <a:ln/>
+        </p:spPr>
+        <p:txBody>
+          <a:bodyPr wrap="square" rtlCol="0" anchor="ctr"/>
+          <a:lstStyle/>
+          <a:p>
+            <a:pPr indent="0" marL="0">
+              <a:lnSpc>
+                <a:spcPts val="1300"/>
+              </a:lnSpc>
+              <a:buNone/>
+            </a:pPr>
+            <a:r>
+              <a:rPr lang="en-US" sz="930" dirty="0">
+                <a:solidFill>
+                  <a:srgbClr val="1A1A2E"/>
+                </a:solidFill>
+                <a:latin typeface="Courier New" pitchFamily="34" charset="0"/>
+                <a:ea typeface="Courier New" pitchFamily="34" charset="-122"/>
+                <a:cs typeface="Courier New" pitchFamily="34" charset="-120"/>
+              </a:rPr>
+              <a:t>adstock_t  = freq_t + decay·adstock_(t−1)</a:t>
+            </a:r>
+            <a:endParaRPr lang="en-US" sz="930" dirty="0"/>
+          </a:p>
+          <a:p>
+            <a:pPr indent="0" marL="0">
+              <a:lnSpc>
+                <a:spcPts val="1300"/>
+              </a:lnSpc>
+              <a:buNone/>
+            </a:pPr>
+            <a:r>
+              <a:rPr lang="en-US" sz="930" dirty="0">
+                <a:solidFill>
+                  <a:srgbClr val="1A1A2E"/>
+                </a:solidFill>
+                <a:latin typeface="Courier New" pitchFamily="34" charset="0"/>
+                <a:ea typeface="Courier New" pitchFamily="34" charset="-122"/>
+                <a:cs typeface="Courier New" pitchFamily="34" charset="-120"/>
+              </a:rPr>
+              <a:t>sat(x)     = x^shape ÷ (x^shape + half^shape)</a:t>
+            </a:r>
+            <a:endParaRPr lang="en-US" sz="930" dirty="0"/>
+          </a:p>
+          <a:p>
+            <a:pPr indent="0" marL="0">
+              <a:lnSpc>
+                <a:spcPts val="1300"/>
+              </a:lnSpc>
+              <a:buNone/>
+            </a:pPr>
+            <a:r>
+              <a:rPr lang="en-US" sz="930" dirty="0">
+                <a:solidFill>
+                  <a:srgbClr val="1A1A2E"/>
+                </a:solidFill>
+                <a:latin typeface="Courier New" pitchFamily="34" charset="0"/>
+                <a:ea typeface="Courier New" pitchFamily="34" charset="-122"/>
+                <a:cs typeface="Courier New" pitchFamily="34" charset="-120"/>
+              </a:rPr>
+              <a:t>traffic_t  = β · sat(adstock_t)</a:t>
+            </a:r>
+            <a:endParaRPr lang="en-US" sz="930" dirty="0"/>
+          </a:p>
+          <a:p>
+            <a:pPr indent="0" marL="0">
+              <a:lnSpc>
+                <a:spcPts val="1300"/>
+              </a:lnSpc>
+              <a:buNone/>
+            </a:pPr>
+            <a:r>
+              <a:rPr lang="en-US" sz="930" dirty="0">
+                <a:solidFill>
+                  <a:srgbClr val="1A1A2E"/>
+                </a:solidFill>
+                <a:latin typeface="Courier New" pitchFamily="34" charset="0"/>
+                <a:ea typeface="Courier New" pitchFamily="34" charset="-122"/>
+                <a:cs typeface="Courier New" pitchFamily="34" charset="-120"/>
+              </a:rPr>
+              <a:t>           + trend_coef · week_t</a:t>
+            </a:r>
+            <a:endParaRPr lang="en-US" sz="930" dirty="0"/>
+          </a:p>
+          <a:p>
+            <a:pPr indent="0" marL="0">
+              <a:lnSpc>
+                <a:spcPts val="1300"/>
+              </a:lnSpc>
+              <a:buNone/>
+            </a:pPr>
+            <a:r>
+              <a:rPr lang="en-US" sz="930" dirty="0">
+                <a:solidFill>
+                  <a:srgbClr val="1A1A2E"/>
+                </a:solidFill>
+                <a:latin typeface="Courier New" pitchFamily="34" charset="0"/>
+                <a:ea typeface="Courier New" pitchFamily="34" charset="-122"/>
+                <a:cs typeface="Courier New" pitchFamily="34" charset="-120"/>
+              </a:rPr>
+              <a:t>           + season_sin_coef · sin(2π·week_t /52)</a:t>
+            </a:r>
+            <a:endParaRPr lang="en-US" sz="930" dirty="0"/>
+          </a:p>
+          <a:p>
+            <a:pPr indent="0" marL="0">
+              <a:lnSpc>
+                <a:spcPts val="1300"/>
+              </a:lnSpc>
+              <a:buNone/>
+            </a:pPr>
+            <a:r>
+              <a:rPr lang="en-US" sz="930" dirty="0">
+                <a:solidFill>
+                  <a:srgbClr val="1A1A2E"/>
+                </a:solidFill>
+                <a:latin typeface="Courier New" pitchFamily="34" charset="0"/>
+                <a:ea typeface="Courier New" pitchFamily="34" charset="-122"/>
+                <a:cs typeface="Courier New" pitchFamily="34" charset="-120"/>
+              </a:rPr>
+              <a:t>           + season_cos_coef · cos(2π·week_t /52)</a:t>
+            </a:r>
+            <a:endParaRPr lang="en-US" sz="930" dirty="0"/>
+          </a:p>
+          <a:p>
+            <a:pPr indent="0" marL="0">
+              <a:lnSpc>
+                <a:spcPts val="1300"/>
+              </a:lnSpc>
+              <a:buNone/>
+            </a:pPr>
+            <a:r>
+              <a:rPr lang="en-US" sz="930" dirty="0">
+                <a:solidFill>
+                  <a:srgbClr val="1A1A2E"/>
+                </a:solidFill>
+                <a:latin typeface="Courier New" pitchFamily="34" charset="0"/>
+                <a:ea typeface="Courier New" pitchFamily="34" charset="-122"/>
+                <a:cs typeface="Courier New" pitchFamily="34" charset="-120"/>
+              </a:rPr>
+              <a:t>           + intercept</a:t>
+            </a:r>
+            <a:endParaRPr lang="en-US" sz="930" dirty="0"/>
+          </a:p>
+        </p:txBody>
+      </p:sp>
+      <p:sp>
+        <p:nvSpPr>
+          <p:cNvPr id="8" name="Text 6"/>
+          <p:cNvSpPr/>
+          <p:nvPr/>
+        </p:nvSpPr>
+        <p:spPr>
+          <a:xfrm>
+            <a:off x="548640" y="3127248"/>
+            <a:ext cx="6949440" cy="256032"/>
+          </a:xfrm>
+          <a:prstGeom prst="rect">
+            <a:avLst/>
+          </a:prstGeom>
+          <a:noFill/>
+          <a:ln/>
+        </p:spPr>
+        <p:txBody>
+          <a:bodyPr wrap="square" rtlCol="0" anchor="ctr"/>
+          <a:lstStyle/>
+          <a:p>
+            <a:pPr indent="0" marL="0">
+              <a:buNone/>
+            </a:pPr>
+            <a:r>
+              <a:rPr lang="en-US" sz="1250" b="1" dirty="0">
+                <a:solidFill>
+                  <a:srgbClr val="1E2761"/>
+                </a:solidFill>
+                <a:latin typeface="Cambria" pitchFamily="34" charset="0"/>
+                <a:ea typeface="Cambria" pitchFamily="34" charset="-122"/>
+                <a:cs typeface="Cambria" pitchFamily="34" charset="-120"/>
+              </a:rPr>
+              <a:t>Method: why only β is RCT-calibrated</a:t>
+            </a:r>
+            <a:endParaRPr lang="en-US" sz="1250" dirty="0"/>
+          </a:p>
+        </p:txBody>
+      </p:sp>
+      <p:sp>
+        <p:nvSpPr>
+          <p:cNvPr id="9" name="Text 7"/>
+          <p:cNvSpPr/>
+          <p:nvPr/>
+        </p:nvSpPr>
+        <p:spPr>
+          <a:xfrm>
+            <a:off x="548640" y="3429000"/>
+            <a:ext cx="6949440" cy="2880360"/>
+          </a:xfrm>
+          <a:prstGeom prst="rect">
+            <a:avLst/>
+          </a:prstGeom>
+          <a:noFill/>
+          <a:ln/>
+        </p:spPr>
+        <p:txBody>
+          <a:bodyPr wrap="square" rtlCol="0" anchor="ctr"/>
+          <a:lstStyle/>
+          <a:p>
+            <a:pPr indent="0" marL="0">
+              <a:lnSpc>
+                <a:spcPts val="1300"/>
+              </a:lnSpc>
+              <a:buNone/>
+            </a:pPr>
+            <a:r>
+              <a:rPr lang="en-US" sz="980" dirty="0">
+                <a:solidFill>
+                  <a:srgbClr val="1A1A2E"/>
+                </a:solidFill>
+                <a:latin typeface="Calibri" pitchFamily="34" charset="0"/>
+                <a:ea typeface="Calibri" pitchFamily="34" charset="-122"/>
+                <a:cs typeface="Calibri" pitchFamily="34" charset="-120"/>
+              </a:rPr>
+              <a:t>① One RCT arm supplies exactly one clean number — a single measured average lift at one exposure design. That's enough information to pin down exactly one free parameter without the fit becoming underdetermined.</a:t>
+            </a:r>
+            <a:endParaRPr lang="en-US" sz="980" dirty="0"/>
+          </a:p>
+          <a:p>
+            <a:pPr indent="0" marL="0">
+              <a:lnSpc>
+                <a:spcPts val="1300"/>
+              </a:lnSpc>
+              <a:buNone/>
+            </a:pPr>
+            <a:r>
+              <a:rPr lang="en-US" sz="980" dirty="0">
+                <a:solidFill>
+                  <a:srgbClr val="1A1A2E"/>
+                </a:solidFill>
+                <a:latin typeface="Calibri" pitchFamily="34" charset="0"/>
+                <a:ea typeface="Calibri" pitchFamily="34" charset="-122"/>
+                <a:cs typeface="Calibri" pitchFamily="34" charset="-120"/>
+              </a:rPr>
+              <a:t>② trend_coef, season_sin_coef, season_cos_coef, and the intercept are nuisance controls, not causal targets. Randomization balances them between the RCT's treatment and control arms — it doesn't estimate what their true values are, so there's nothing for the RCT to calibrate there.</a:t>
+            </a:r>
+            <a:endParaRPr lang="en-US" sz="980" dirty="0"/>
+          </a:p>
+          <a:p>
+            <a:pPr indent="0" marL="0">
+              <a:lnSpc>
+                <a:spcPts val="1300"/>
+              </a:lnSpc>
+              <a:buNone/>
+            </a:pPr>
+            <a:r>
+              <a:rPr lang="en-US" sz="980" dirty="0">
+                <a:solidFill>
+                  <a:srgbClr val="1A1A2E"/>
+                </a:solidFill>
+                <a:latin typeface="Calibri" pitchFamily="34" charset="0"/>
+                <a:ea typeface="Calibri" pitchFamily="34" charset="-122"/>
+                <a:cs typeface="Calibri" pitchFamily="34" charset="-120"/>
+              </a:rPr>
+              <a:t>③ decay, half, and shape describe the curve's dynamics — how fast memory fades, where it saturates, how steep the climb is. These are identified from the much richer week-to-week variation across the whole aggregate series, not from a single experimental anchor.</a:t>
+            </a:r>
+            <a:endParaRPr lang="en-US" sz="980" dirty="0"/>
+          </a:p>
+          <a:p>
+            <a:pPr indent="0" marL="0">
+              <a:lnSpc>
+                <a:spcPts val="1300"/>
+              </a:lnSpc>
+              <a:buNone/>
+            </a:pPr>
+            <a:r>
+              <a:rPr lang="en-US" sz="980" dirty="0">
+                <a:solidFill>
+                  <a:srgbClr val="1A1A2E"/>
+                </a:solidFill>
+                <a:latin typeface="Calibri" pitchFamily="34" charset="0"/>
+                <a:ea typeface="Calibri" pitchFamily="34" charset="-122"/>
+                <a:cs typeface="Calibri" pitchFamily="34" charset="-120"/>
+              </a:rPr>
+              <a:t>④ β (the media/scale coefficient) is exactly the piece most exposed to endogeneity: this aggregate series pools RCT venues with non-randomly-selected observational ones. Its overall level is the one thing a single clean causal estimate both can, and should, correct.</a:t>
+            </a:r>
+            <a:endParaRPr lang="en-US" sz="980" dirty="0"/>
+          </a:p>
+        </p:txBody>
+      </p:sp>
+      <p:sp>
+        <p:nvSpPr>
+          <p:cNvPr id="10" name="Text 8"/>
+          <p:cNvSpPr/>
+          <p:nvPr/>
+        </p:nvSpPr>
+        <p:spPr>
+          <a:xfrm>
+            <a:off x="7772400" y="1508760"/>
+            <a:ext cx="3931920" cy="274320"/>
+          </a:xfrm>
+          <a:prstGeom prst="rect">
+            <a:avLst/>
+          </a:prstGeom>
+          <a:noFill/>
+          <a:ln/>
+        </p:spPr>
+        <p:txBody>
+          <a:bodyPr wrap="square" rtlCol="0" anchor="ctr"/>
+          <a:lstStyle/>
+          <a:p>
+            <a:pPr indent="0" marL="0">
+              <a:buNone/>
+            </a:pPr>
+            <a:r>
+              <a:rPr lang="en-US" sz="1250" b="1" dirty="0">
+                <a:solidFill>
+                  <a:srgbClr val="1E2761"/>
+                </a:solidFill>
+                <a:latin typeface="Cambria" pitchFamily="34" charset="0"/>
+                <a:ea typeface="Cambria" pitchFamily="34" charset="-122"/>
+                <a:cs typeface="Cambria" pitchFamily="34" charset="-120"/>
+              </a:rPr>
+              <a:t>8 free parameters, one RCT anchor</a:t>
+            </a:r>
+            <a:endParaRPr lang="en-US" sz="1250" dirty="0"/>
+          </a:p>
+        </p:txBody>
+      </p:sp>
+      <p:sp>
+        <p:nvSpPr>
+          <p:cNvPr id="11" name="Shape 9"/>
+          <p:cNvSpPr/>
+          <p:nvPr/>
+        </p:nvSpPr>
+        <p:spPr>
+          <a:xfrm>
+            <a:off x="7772400" y="1874520"/>
+            <a:ext cx="3931920" cy="1783080"/>
           </a:xfrm>
           <a:prstGeom prst="roundRect">
             <a:avLst>
-              <a:gd name="adj" fmla="val 5926"/>
+              <a:gd name="adj" fmla="val 3590"/>
             </a:avLst>
           </a:prstGeom>
           <a:solidFill>
@@ -6598,14 +7052,14 @@
       </p:sp>
       <p:sp>
         <p:nvSpPr>
-          <p:cNvPr id="8" name="Text 5"/>
-          <p:cNvSpPr/>
-          <p:nvPr/>
-        </p:nvSpPr>
-        <p:spPr>
-          <a:xfrm>
-            <a:off x="7955280" y="1719072"/>
-            <a:ext cx="3520440" cy="365760"/>
+          <p:cNvPr id="12" name="Text 10"/>
+          <p:cNvSpPr/>
+          <p:nvPr/>
+        </p:nvSpPr>
+        <p:spPr>
+          <a:xfrm>
+            <a:off x="8001000" y="1993392"/>
+            <a:ext cx="3474720" cy="274320"/>
           </a:xfrm>
           <a:prstGeom prst="rect">
             <a:avLst/>
@@ -6629,7 +7083,7 @@
                 <a:ea typeface="Cambria" pitchFamily="34" charset="-122"/>
                 <a:cs typeface="Cambria" pitchFamily="34" charset="-120"/>
               </a:rPr>
-              <a:t>RCT estimate shift under the identical shock</a:t>
+              <a:t>5 linear coefficients (OLS)</a:t>
             </a:r>
             <a:endParaRPr lang="en-US" sz="1100" dirty="0"/>
           </a:p>
@@ -6637,53 +7091,14 @@
       </p:sp>
       <p:sp>
         <p:nvSpPr>
-          <p:cNvPr id="9" name="Text 6"/>
-          <p:cNvSpPr/>
-          <p:nvPr/>
-        </p:nvSpPr>
-        <p:spPr>
-          <a:xfrm>
-            <a:off x="7955280" y="2057400"/>
-            <a:ext cx="3520440" cy="594360"/>
-          </a:xfrm>
-          <a:prstGeom prst="rect">
-            <a:avLst/>
-          </a:prstGeom>
-          <a:noFill/>
-          <a:ln/>
-        </p:spPr>
-        <p:txBody>
-          <a:bodyPr wrap="square" rtlCol="0" anchor="ctr"/>
-          <a:lstStyle/>
-          <a:p>
-            <a:pPr indent="0" marL="0">
-              <a:buNone/>
-            </a:pPr>
-            <a:r>
-              <a:rPr lang="en-US" sz="3200" b="1" dirty="0">
-                <a:solidFill>
-                  <a:srgbClr val="2C7A57"/>
-                </a:solidFill>
-                <a:latin typeface="Calibri" pitchFamily="34" charset="0"/>
-                <a:ea typeface="Calibri" pitchFamily="34" charset="-122"/>
-                <a:cs typeface="Calibri" pitchFamily="34" charset="-120"/>
-              </a:rPr>
-              <a:t>0.00</a:t>
-            </a:r>
-            <a:endParaRPr lang="en-US" sz="3200" dirty="0"/>
-          </a:p>
-        </p:txBody>
-      </p:sp>
-      <p:sp>
-        <p:nvSpPr>
-          <p:cNvPr id="10" name="Text 7"/>
-          <p:cNvSpPr/>
-          <p:nvPr/>
-        </p:nvSpPr>
-        <p:spPr>
-          <a:xfrm>
-            <a:off x="7955280" y="2633472"/>
-            <a:ext cx="3520440" cy="182880"/>
+          <p:cNvPr id="13" name="Text 11"/>
+          <p:cNvSpPr/>
+          <p:nvPr/>
+        </p:nvSpPr>
+        <p:spPr>
+          <a:xfrm>
+            <a:off x="8001000" y="2331720"/>
+            <a:ext cx="3474720" cy="1234440"/>
           </a:xfrm>
           <a:prstGeom prst="rect">
             <a:avLst/>
@@ -6697,81 +7112,117 @@
           <a:p>
             <a:pPr indent="0" marL="0">
               <a:lnSpc>
-                <a:spcPts val="1000"/>
+                <a:spcPts val="1650"/>
               </a:lnSpc>
               <a:buNone/>
             </a:pPr>
             <a:r>
-              <a:rPr lang="en-US" sz="870" i="1" dirty="0">
-                <a:solidFill>
-                  <a:srgbClr val="5B6178"/>
-                </a:solidFill>
-                <a:latin typeface="Calibri" pitchFamily="34" charset="0"/>
-                <a:ea typeface="Calibri" pitchFamily="34" charset="-122"/>
-                <a:cs typeface="Calibri" pitchFamily="34" charset="-120"/>
-              </a:rPr>
-              <a:t>every venue type — the shock hits both arms equally, so a randomized comparison is mechanically immune to it</a:t>
-            </a:r>
-            <a:endParaRPr lang="en-US" sz="870" dirty="0"/>
-          </a:p>
-        </p:txBody>
-      </p:sp>
-      <p:sp>
-        <p:nvSpPr>
-          <p:cNvPr id="11" name="Text 8"/>
-          <p:cNvSpPr/>
-          <p:nvPr/>
-        </p:nvSpPr>
-        <p:spPr>
-          <a:xfrm>
-            <a:off x="7772400" y="3063240"/>
-            <a:ext cx="3867912" cy="1417320"/>
-          </a:xfrm>
-          <a:prstGeom prst="rect">
-            <a:avLst/>
-          </a:prstGeom>
-          <a:noFill/>
-          <a:ln/>
-        </p:spPr>
-        <p:txBody>
-          <a:bodyPr wrap="square" rtlCol="0" anchor="ctr"/>
-          <a:lstStyle/>
-          <a:p>
+              <a:rPr lang="en-US" sz="1030" b="1" dirty="0">
+                <a:solidFill>
+                  <a:srgbClr val="B8500A"/>
+                </a:solidFill>
+                <a:latin typeface="Courier New" pitchFamily="34" charset="0"/>
+                <a:ea typeface="Courier New" pitchFamily="34" charset="-122"/>
+                <a:cs typeface="Courier New" pitchFamily="34" charset="-120"/>
+              </a:rPr>
+              <a:t>β_media  ← RCT-calibrated
+</a:t>
+            </a:r>
             <a:pPr indent="0" marL="0">
               <a:lnSpc>
-                <a:spcPts val="1350"/>
+                <a:spcPts val="1650"/>
               </a:lnSpc>
               <a:buNone/>
             </a:pPr>
             <a:r>
-              <a:rPr lang="en-US" sz="1000" dirty="0">
+              <a:rPr lang="en-US" sz="1030" dirty="0">
                 <a:solidFill>
                   <a:srgbClr val="1A1A2E"/>
                 </a:solidFill>
-                <a:latin typeface="Calibri" pitchFamily="34" charset="0"/>
-                <a:ea typeface="Calibri" pitchFamily="34" charset="-122"/>
-                <a:cs typeface="Calibri" pitchFamily="34" charset="-120"/>
-              </a:rPr>
-              <a:t>Naive MMM, by contrast, swings from useful to actively misleading: for 3 of 4 venue types the confound-blind fit was off by 2–4× — even at a moderate 0.35 correlation between competing media and Atmosphere's own exposure ramp, nowhere near a worst case. Controlling for the confound (green) recovers this model's own baseline from the previous slide — the RCT-scale calibration from that same slide is what closes the rest of the gap.</a:t>
-            </a:r>
-            <a:endParaRPr lang="en-US" sz="1000" dirty="0"/>
-          </a:p>
-        </p:txBody>
-      </p:sp>
-      <p:sp>
-        <p:nvSpPr>
-          <p:cNvPr id="12" name="Shape 9"/>
-          <p:cNvSpPr/>
-          <p:nvPr/>
-        </p:nvSpPr>
-        <p:spPr>
-          <a:xfrm>
-            <a:off x="548640" y="5687568"/>
-            <a:ext cx="11091672" cy="713232"/>
+                <a:latin typeface="Courier New" pitchFamily="34" charset="0"/>
+                <a:ea typeface="Courier New" pitchFamily="34" charset="-122"/>
+                <a:cs typeface="Courier New" pitchFamily="34" charset="-120"/>
+              </a:rPr>
+              <a:t>trend_coef</a:t>
+            </a:r>
+            <a:endParaRPr lang="en-US" sz="1030" dirty="0"/>
+          </a:p>
+          <a:p>
+            <a:pPr indent="0" marL="0">
+              <a:lnSpc>
+                <a:spcPts val="1650"/>
+              </a:lnSpc>
+              <a:buNone/>
+            </a:pPr>
+            <a:r>
+              <a:rPr lang="en-US" sz="1030" dirty="0">
+                <a:solidFill>
+                  <a:srgbClr val="1A1A2E"/>
+                </a:solidFill>
+                <a:latin typeface="Courier New" pitchFamily="34" charset="0"/>
+                <a:ea typeface="Courier New" pitchFamily="34" charset="-122"/>
+                <a:cs typeface="Courier New" pitchFamily="34" charset="-120"/>
+              </a:rPr>
+              <a:t>season_sin_coef</a:t>
+            </a:r>
+            <a:endParaRPr lang="en-US" sz="1030" dirty="0"/>
+          </a:p>
+          <a:p>
+            <a:pPr indent="0" marL="0">
+              <a:lnSpc>
+                <a:spcPts val="1650"/>
+              </a:lnSpc>
+              <a:buNone/>
+            </a:pPr>
+            <a:r>
+              <a:rPr lang="en-US" sz="1030" dirty="0">
+                <a:solidFill>
+                  <a:srgbClr val="1A1A2E"/>
+                </a:solidFill>
+                <a:latin typeface="Courier New" pitchFamily="34" charset="0"/>
+                <a:ea typeface="Courier New" pitchFamily="34" charset="-122"/>
+                <a:cs typeface="Courier New" pitchFamily="34" charset="-120"/>
+              </a:rPr>
+              <a:t>season_cos_coef</a:t>
+            </a:r>
+            <a:endParaRPr lang="en-US" sz="1030" dirty="0"/>
+          </a:p>
+          <a:p>
+            <a:pPr indent="0" marL="0">
+              <a:lnSpc>
+                <a:spcPts val="1650"/>
+              </a:lnSpc>
+              <a:buNone/>
+            </a:pPr>
+            <a:r>
+              <a:rPr lang="en-US" sz="1030" dirty="0">
+                <a:solidFill>
+                  <a:srgbClr val="1A1A2E"/>
+                </a:solidFill>
+                <a:latin typeface="Courier New" pitchFamily="34" charset="0"/>
+                <a:ea typeface="Courier New" pitchFamily="34" charset="-122"/>
+                <a:cs typeface="Courier New" pitchFamily="34" charset="-120"/>
+              </a:rPr>
+              <a:t>intercept</a:t>
+            </a:r>
+            <a:endParaRPr lang="en-US" sz="1030" dirty="0"/>
+          </a:p>
+        </p:txBody>
+      </p:sp>
+      <p:sp>
+        <p:nvSpPr>
+          <p:cNvPr id="14" name="Shape 12"/>
+          <p:cNvSpPr/>
+          <p:nvPr/>
+        </p:nvSpPr>
+        <p:spPr>
+          <a:xfrm>
+            <a:off x="7772400" y="3794760"/>
+            <a:ext cx="3931920" cy="1234440"/>
           </a:xfrm>
           <a:prstGeom prst="roundRect">
             <a:avLst>
-              <a:gd name="adj" fmla="val 7692"/>
+              <a:gd name="adj" fmla="val 5185"/>
             </a:avLst>
           </a:prstGeom>
           <a:solidFill>
@@ -6782,14 +7233,53 @@
       </p:sp>
       <p:sp>
         <p:nvSpPr>
-          <p:cNvPr id="13" name="Text 10"/>
-          <p:cNvSpPr/>
-          <p:nvPr/>
-        </p:nvSpPr>
-        <p:spPr>
-          <a:xfrm>
-            <a:off x="731520" y="5779008"/>
-            <a:ext cx="10744200" cy="548640"/>
+          <p:cNvPr id="15" name="Text 13"/>
+          <p:cNvSpPr/>
+          <p:nvPr/>
+        </p:nvSpPr>
+        <p:spPr>
+          <a:xfrm>
+            <a:off x="8001000" y="3913632"/>
+            <a:ext cx="3474720" cy="274320"/>
+          </a:xfrm>
+          <a:prstGeom prst="rect">
+            <a:avLst/>
+          </a:prstGeom>
+          <a:noFill/>
+          <a:ln/>
+        </p:spPr>
+        <p:txBody>
+          <a:bodyPr wrap="square" rtlCol="0" anchor="ctr"/>
+          <a:lstStyle/>
+          <a:p>
+            <a:pPr indent="0" marL="0">
+              <a:buNone/>
+            </a:pPr>
+            <a:r>
+              <a:rPr lang="en-US" sz="1030" b="1" dirty="0">
+                <a:solidFill>
+                  <a:srgbClr val="8A4B0A"/>
+                </a:solidFill>
+                <a:latin typeface="Cambria" pitchFamily="34" charset="0"/>
+                <a:ea typeface="Cambria" pitchFamily="34" charset="-122"/>
+                <a:cs typeface="Cambria" pitchFamily="34" charset="-120"/>
+              </a:rPr>
+              <a:t>3 shape hyperparameters (grid search)</a:t>
+            </a:r>
+            <a:endParaRPr lang="en-US" sz="1030" dirty="0"/>
+          </a:p>
+        </p:txBody>
+      </p:sp>
+      <p:sp>
+        <p:nvSpPr>
+          <p:cNvPr id="16" name="Text 14"/>
+          <p:cNvSpPr/>
+          <p:nvPr/>
+        </p:nvSpPr>
+        <p:spPr>
+          <a:xfrm>
+            <a:off x="8001000" y="4224528"/>
+            <a:ext cx="3474720" cy="749808"/>
           </a:xfrm>
           <a:prstGeom prst="rect">
             <a:avLst/>
@@ -6803,12 +7293,12 @@
           <a:p>
             <a:pPr indent="0" marL="0">
               <a:lnSpc>
-                <a:spcPts val="1200"/>
+                <a:spcPts val="1250"/>
               </a:lnSpc>
               <a:buNone/>
             </a:pPr>
             <a:r>
-              <a:rPr lang="en-US" sz="950" i="1" dirty="0">
+              <a:rPr lang="en-US" sz="970" dirty="0">
                 <a:solidFill>
                   <a:srgbClr val="8A4B0A"/>
                 </a:solidFill>
@@ -6816,15 +7306,77 @@
                 <a:ea typeface="Calibri" pitchFamily="34" charset="-122"/>
                 <a:cs typeface="Calibri" pitchFamily="34" charset="-120"/>
               </a:rPr>
-              <a:t>Why this is scoped this way: deciding how an advertiser splits budget across Atmosphere + TV + social is the advertiser's/agency's call — Atmosphere has no visibility into competitors' channel data anyway. What Atmosphere's DS role should own is netting competing media OUT of its own causal read (the JD's own phrasing), which the RCT does by design and a single-channel MMM only does with an explicit control.</a:t>
-            </a:r>
-            <a:endParaRPr lang="en-US" sz="950" dirty="0"/>
-          </a:p>
-        </p:txBody>
-      </p:sp>
-      <p:sp>
-        <p:nvSpPr>
-          <p:cNvPr id="14" name="Text 11"/>
+              <a:t>decay · half · shape</a:t>
+            </a:r>
+            <a:endParaRPr lang="en-US" sz="970" dirty="0"/>
+          </a:p>
+          <a:p>
+            <a:pPr indent="0" marL="0">
+              <a:lnSpc>
+                <a:spcPts val="1250"/>
+              </a:lnSpc>
+              <a:buNone/>
+            </a:pPr>
+            <a:r>
+              <a:rPr lang="en-US" sz="970" dirty="0">
+                <a:solidFill>
+                  <a:srgbClr val="8A4B0A"/>
+                </a:solidFill>
+                <a:latin typeface="Calibri" pitchFamily="34" charset="0"/>
+                <a:ea typeface="Calibri" pitchFamily="34" charset="-122"/>
+                <a:cs typeface="Calibri" pitchFamily="34" charset="-120"/>
+              </a:rPr>
+              <a:t>Fit from the aggregate time series (168-combo grid search), not the RCT anchor.</a:t>
+            </a:r>
+            <a:endParaRPr lang="en-US" sz="970" dirty="0"/>
+          </a:p>
+        </p:txBody>
+      </p:sp>
+      <p:sp>
+        <p:nvSpPr>
+          <p:cNvPr id="17" name="Text 15"/>
+          <p:cNvSpPr/>
+          <p:nvPr/>
+        </p:nvSpPr>
+        <p:spPr>
+          <a:xfrm>
+            <a:off x="7772400" y="5257800"/>
+            <a:ext cx="3931920" cy="960120"/>
+          </a:xfrm>
+          <a:prstGeom prst="rect">
+            <a:avLst/>
+          </a:prstGeom>
+          <a:noFill/>
+          <a:ln/>
+        </p:spPr>
+        <p:txBody>
+          <a:bodyPr wrap="square" rtlCol="0" anchor="ctr"/>
+          <a:lstStyle/>
+          <a:p>
+            <a:pPr indent="0" marL="0">
+              <a:lnSpc>
+                <a:spcPts val="1150"/>
+              </a:lnSpc>
+              <a:buNone/>
+            </a:pPr>
+            <a:r>
+              <a:rPr lang="en-US" sz="900" i="1" dirty="0">
+                <a:solidFill>
+                  <a:srgbClr val="5B6178"/>
+                </a:solidFill>
+                <a:latin typeface="Calibri" pitchFamily="34" charset="0"/>
+                <a:ea typeface="Calibri" pitchFamily="34" charset="-122"/>
+                <a:cs typeface="Calibri" pitchFamily="34" charset="-120"/>
+              </a:rPr>
+              <a:t>One RCT arm → one calibrated parameter. Calibrating the curve's shape too would need RCT arms at multiple exposure levels — a bigger, costlier experiment design than the single geo-holdout test used here (Slide 6).</a:t>
+            </a:r>
+            <a:endParaRPr lang="en-US" sz="900" dirty="0"/>
+          </a:p>
+        </p:txBody>
+      </p:sp>
+      <p:sp>
+        <p:nvSpPr>
+          <p:cNvPr id="18" name="Text 16"/>
           <p:cNvSpPr/>
           <p:nvPr/>
         </p:nvSpPr>
@@ -6855,7 +7407,7 @@
                 <a:ea typeface="Calibri" pitchFamily="34" charset="-122"/>
                 <a:cs typeface="Calibri" pitchFamily="34" charset="-120"/>
               </a:rPr>
-              <a:t>Media-mix model — robustness</a:t>
+              <a:t>Media-mix model — why one parameter</a:t>
             </a:r>
             <a:endParaRPr lang="en-US" sz="900" dirty="0"/>
           </a:p>
@@ -6902,23 +7454,23 @@
         <p:spPr>
           <a:xfrm>
             <a:off x="548640" y="411480"/>
-            <a:ext cx="11155680" cy="594360"/>
-          </a:xfrm>
-          <a:prstGeom prst="rect">
-            <a:avLst/>
-          </a:prstGeom>
-          <a:noFill/>
-          <a:ln/>
-        </p:spPr>
-        <p:txBody>
-          <a:bodyPr wrap="square" rtlCol="0" anchor="ctr"/>
-          <a:lstStyle/>
-          <a:p>
-            <a:pPr indent="0" marL="0">
-              <a:buNone/>
-            </a:pPr>
-            <a:r>
-              <a:rPr lang="en-US" sz="2600" b="1" dirty="0">
+            <a:ext cx="11247120" cy="594360"/>
+          </a:xfrm>
+          <a:prstGeom prst="rect">
+            <a:avLst/>
+          </a:prstGeom>
+          <a:noFill/>
+          <a:ln/>
+        </p:spPr>
+        <p:txBody>
+          <a:bodyPr wrap="square" rtlCol="0" anchor="ctr"/>
+          <a:lstStyle/>
+          <a:p>
+            <a:pPr indent="0" marL="0">
+              <a:buNone/>
+            </a:pPr>
+            <a:r>
+              <a:rPr lang="en-US" sz="2400" b="1" dirty="0">
                 <a:solidFill>
                   <a:srgbClr val="1E2761"/>
                 </a:solidFill>
@@ -6926,9 +7478,9 @@
                 <a:ea typeface="Cambria" pitchFamily="34" charset="-122"/>
                 <a:cs typeface="Cambria" pitchFamily="34" charset="-120"/>
               </a:rPr>
-              <a:t>Why a greedy allocator can lose to equal-split</a:t>
-            </a:r>
-            <a:endParaRPr lang="en-US" sz="2600" dirty="0"/>
+              <a:t>Robustness check: does competing media break this MMM?</a:t>
+            </a:r>
+            <a:endParaRPr lang="en-US" sz="2400" dirty="0"/>
           </a:p>
         </p:txBody>
       </p:sp>
@@ -6992,7 +7544,7 @@
                 <a:ea typeface="Calibri" pitchFamily="34" charset="-122"/>
                 <a:cs typeface="Calibri" pitchFamily="34" charset="-120"/>
               </a:rPr>
-              <a:t>Step 4 motivation · Answers Q2</a:t>
+              <a:t>Step 3 robustness check · Q2</a:t>
             </a:r>
             <a:endParaRPr lang="en-US" sz="950" dirty="0"/>
           </a:p>
@@ -7007,22 +7559,19 @@
         <p:spPr>
           <a:xfrm>
             <a:off x="548640" y="1005840"/>
-            <a:ext cx="10972800" cy="411480"/>
-          </a:xfrm>
-          <a:prstGeom prst="rect">
-            <a:avLst/>
-          </a:prstGeom>
-          <a:noFill/>
-          <a:ln/>
-        </p:spPr>
-        <p:txBody>
-          <a:bodyPr wrap="square" rtlCol="0" anchor="ctr"/>
-          <a:lstStyle/>
-          <a:p>
-            <a:pPr indent="0" marL="0">
-              <a:lnSpc>
-                <a:spcPts val="1400"/>
-              </a:lnSpc>
+            <a:ext cx="10972800" cy="365760"/>
+          </a:xfrm>
+          <a:prstGeom prst="rect">
+            <a:avLst/>
+          </a:prstGeom>
+          <a:noFill/>
+          <a:ln/>
+        </p:spPr>
+        <p:txBody>
+          <a:bodyPr wrap="square" rtlCol="0" anchor="ctr"/>
+          <a:lstStyle/>
+          <a:p>
+            <a:pPr indent="0" marL="0">
               <a:buNone/>
             </a:pPr>
             <a:r>
@@ -7034,7 +7583,7 @@
                 <a:ea typeface="Calibri" pitchFamily="34" charset="-122"/>
                 <a:cs typeface="Calibri" pitchFamily="34" charset="-120"/>
               </a:rPr>
-              <a:t>A Hill/S-curve (shape &gt; 1, as fit here) is convex before its inflection point — the next dollar's marginal return isn't monotonically falling, so "chase today's best marginal $" can get stuck.</a:t>
+              <a:t>A stress-test scenario: a competing advertiser ramps up on the same venues at the same time, correlated with Atmosphere's own exposure — the kind of overlap a real MMM has to prove it's robust to.</a:t>
             </a:r>
             <a:endParaRPr lang="en-US" sz="1200" dirty="0"/>
           </a:p>
@@ -7048,7 +7597,7 @@
         </p:nvGraphicFramePr>
         <p:xfrm>
           <a:off x="548640" y="1600200"/>
-          <a:ext cx="6583680" cy="3063240"/>
+          <a:ext cx="6949440" cy="3931920"/>
         </p:xfrm>
         <a:graphic xmlns:a="http://schemas.openxmlformats.org/drawingml/2006/main">
           <a:graphicData uri="http://schemas.openxmlformats.org/drawingml/2006/chart">
@@ -7058,45 +7607,25 @@
       </p:graphicFrame>
       <p:sp>
         <p:nvSpPr>
-          <p:cNvPr id="7" name="Text 4"/>
-          <p:cNvSpPr/>
-          <p:nvPr/>
-        </p:nvSpPr>
-        <p:spPr>
-          <a:xfrm>
-            <a:off x="548640" y="4754880"/>
-            <a:ext cx="6583680" cy="1417320"/>
-          </a:xfrm>
-          <a:prstGeom prst="rect">
-            <a:avLst/>
-          </a:prstGeom>
-          <a:noFill/>
-          <a:ln/>
-        </p:spPr>
-        <p:txBody>
-          <a:bodyPr wrap="square" rtlCol="0" anchor="ctr"/>
-          <a:lstStyle/>
-          <a:p>
-            <a:pPr indent="0" marL="0">
-              <a:lnSpc>
-                <a:spcPts val="1300"/>
-              </a:lnSpc>
-              <a:buNone/>
-            </a:pPr>
-            <a:r>
-              <a:rPr lang="en-US" sz="1000" dirty="0">
-                <a:solidFill>
-                  <a:srgbClr val="1A1A2E"/>
-                </a:solidFill>
-                <a:latin typeface="Calibri" pitchFamily="34" charset="0"/>
-                <a:ea typeface="Calibri" pitchFamily="34" charset="-122"/>
-                <a:cs typeface="Calibri" pitchFamily="34" charset="-120"/>
-              </a:rPr>
-              <a:t>This real curve (restaurant, from this deck's own calibrated MMM) is convex up to ~freq 1.0–1.5, concave after. At very low frequency every venue type's next dollar buys almost nothing — still in the flat, convex trough — so a rule comparing "which type's next dollar looks best right now" can't see that committing a lump sum to ONE type would pay off later. It only sees today's small, similar-looking numbers.</a:t>
-            </a:r>
-            <a:endParaRPr lang="en-US" sz="1000" dirty="0"/>
-          </a:p>
-        </p:txBody>
+          <p:cNvPr id="7" name="Shape 4"/>
+          <p:cNvSpPr/>
+          <p:nvPr/>
+        </p:nvSpPr>
+        <p:spPr>
+          <a:xfrm>
+            <a:off x="7772400" y="1600200"/>
+            <a:ext cx="3867912" cy="1234440"/>
+          </a:xfrm>
+          <a:prstGeom prst="roundRect">
+            <a:avLst>
+              <a:gd name="adj" fmla="val 5926"/>
+            </a:avLst>
+          </a:prstGeom>
+          <a:solidFill>
+            <a:srgbClr val="F5F7FC"/>
+          </a:solidFill>
+          <a:ln/>
+        </p:spPr>
       </p:sp>
       <p:sp>
         <p:nvSpPr>
@@ -7106,27 +7635,24 @@
         </p:nvSpPr>
         <p:spPr>
           <a:xfrm>
-            <a:off x="7406640" y="1600200"/>
-            <a:ext cx="4206240" cy="365760"/>
-          </a:xfrm>
-          <a:prstGeom prst="rect">
-            <a:avLst/>
-          </a:prstGeom>
-          <a:noFill/>
-          <a:ln/>
-        </p:spPr>
-        <p:txBody>
-          <a:bodyPr wrap="square" rtlCol="0" anchor="ctr"/>
-          <a:lstStyle/>
-          <a:p>
-            <a:pPr indent="0" marL="0">
-              <a:lnSpc>
-                <a:spcPts val="1400"/>
-              </a:lnSpc>
-              <a:buNone/>
-            </a:pPr>
-            <a:r>
-              <a:rPr lang="en-US" sz="1200" b="1" dirty="0">
+            <a:off x="7955280" y="1719072"/>
+            <a:ext cx="3520440" cy="365760"/>
+          </a:xfrm>
+          <a:prstGeom prst="rect">
+            <a:avLst/>
+          </a:prstGeom>
+          <a:noFill/>
+          <a:ln/>
+        </p:spPr>
+        <p:txBody>
+          <a:bodyPr wrap="square" rtlCol="0" anchor="ctr"/>
+          <a:lstStyle/>
+          <a:p>
+            <a:pPr indent="0" marL="0">
+              <a:buNone/>
+            </a:pPr>
+            <a:r>
+              <a:rPr lang="en-US" sz="1100" b="1" dirty="0">
                 <a:solidFill>
                   <a:srgbClr val="1E2761"/>
                 </a:solidFill>
@@ -7134,9 +7660,9 @@
                 <a:ea typeface="Cambria" pitchFamily="34" charset="-122"/>
                 <a:cs typeface="Cambria" pitchFamily="34" charset="-120"/>
               </a:rPr>
-              <a:t>At freq ≈ .25, every type looks similarly unpromising</a:t>
-            </a:r>
-            <a:endParaRPr lang="en-US" sz="1200" dirty="0"/>
+              <a:t>RCT estimate shift under the identical shock</a:t>
+            </a:r>
+            <a:endParaRPr lang="en-US" sz="1100" dirty="0"/>
           </a:p>
         </p:txBody>
       </p:sp>
@@ -7148,8 +7674,47 @@
         </p:nvSpPr>
         <p:spPr>
           <a:xfrm>
-            <a:off x="7406640" y="2057400"/>
-            <a:ext cx="4206240" cy="960120"/>
+            <a:off x="7955280" y="2057400"/>
+            <a:ext cx="3520440" cy="594360"/>
+          </a:xfrm>
+          <a:prstGeom prst="rect">
+            <a:avLst/>
+          </a:prstGeom>
+          <a:noFill/>
+          <a:ln/>
+        </p:spPr>
+        <p:txBody>
+          <a:bodyPr wrap="square" rtlCol="0" anchor="ctr"/>
+          <a:lstStyle/>
+          <a:p>
+            <a:pPr indent="0" marL="0">
+              <a:buNone/>
+            </a:pPr>
+            <a:r>
+              <a:rPr lang="en-US" sz="3200" b="1" dirty="0">
+                <a:solidFill>
+                  <a:srgbClr val="2C7A57"/>
+                </a:solidFill>
+                <a:latin typeface="Calibri" pitchFamily="34" charset="0"/>
+                <a:ea typeface="Calibri" pitchFamily="34" charset="-122"/>
+                <a:cs typeface="Calibri" pitchFamily="34" charset="-120"/>
+              </a:rPr>
+              <a:t>0.00</a:t>
+            </a:r>
+            <a:endParaRPr lang="en-US" sz="3200" dirty="0"/>
+          </a:p>
+        </p:txBody>
+      </p:sp>
+      <p:sp>
+        <p:nvSpPr>
+          <p:cNvPr id="10" name="Text 7"/>
+          <p:cNvSpPr/>
+          <p:nvPr/>
+        </p:nvSpPr>
+        <p:spPr>
+          <a:xfrm>
+            <a:off x="7955280" y="2633472"/>
+            <a:ext cx="3520440" cy="182880"/>
           </a:xfrm>
           <a:prstGeom prst="rect">
             <a:avLst/>
@@ -7163,254 +7728,134 @@
           <a:p>
             <a:pPr indent="0" marL="0">
               <a:lnSpc>
-                <a:spcPts val="1500"/>
+                <a:spcPts val="1000"/>
               </a:lnSpc>
               <a:buNone/>
             </a:pPr>
             <a:r>
-              <a:rPr lang="en-US" sz="950" dirty="0">
+              <a:rPr lang="en-US" sz="870" i="1" dirty="0">
+                <a:solidFill>
+                  <a:srgbClr val="5B6178"/>
+                </a:solidFill>
+                <a:latin typeface="Calibri" pitchFamily="34" charset="0"/>
+                <a:ea typeface="Calibri" pitchFamily="34" charset="-122"/>
+                <a:cs typeface="Calibri" pitchFamily="34" charset="-120"/>
+              </a:rPr>
+              <a:t>every venue type — the shock hits both arms equally, so a randomized comparison is mechanically immune to it</a:t>
+            </a:r>
+            <a:endParaRPr lang="en-US" sz="870" dirty="0"/>
+          </a:p>
+        </p:txBody>
+      </p:sp>
+      <p:sp>
+        <p:nvSpPr>
+          <p:cNvPr id="11" name="Text 8"/>
+          <p:cNvSpPr/>
+          <p:nvPr/>
+        </p:nvSpPr>
+        <p:spPr>
+          <a:xfrm>
+            <a:off x="7772400" y="3063240"/>
+            <a:ext cx="3867912" cy="1417320"/>
+          </a:xfrm>
+          <a:prstGeom prst="rect">
+            <a:avLst/>
+          </a:prstGeom>
+          <a:noFill/>
+          <a:ln/>
+        </p:spPr>
+        <p:txBody>
+          <a:bodyPr wrap="square" rtlCol="0" anchor="ctr"/>
+          <a:lstStyle/>
+          <a:p>
+            <a:pPr indent="0" marL="0">
+              <a:lnSpc>
+                <a:spcPts val="1350"/>
+              </a:lnSpc>
+              <a:buNone/>
+            </a:pPr>
+            <a:r>
+              <a:rPr lang="en-US" sz="1000" dirty="0">
                 <a:solidFill>
                   <a:srgbClr val="1A1A2E"/>
                 </a:solidFill>
-                <a:latin typeface="Courier New" pitchFamily="34" charset="0"/>
-                <a:ea typeface="Courier New" pitchFamily="34" charset="-122"/>
-                <a:cs typeface="Courier New" pitchFamily="34" charset="-120"/>
-              </a:rPr>
-              <a:t>Venue type      Lift per $1,000</a:t>
+                <a:latin typeface="Calibri" pitchFamily="34" charset="0"/>
+                <a:ea typeface="Calibri" pitchFamily="34" charset="-122"/>
+                <a:cs typeface="Calibri" pitchFamily="34" charset="-120"/>
+              </a:rPr>
+              <a:t>Naive MMM, by contrast, swings from useful to actively misleading: for 3 of 4 venue types the confound-blind fit was off by 2–4× — even at a moderate 0.35 correlation between competing media and Atmosphere's own exposure ramp, nowhere near a worst case. Controlling for the confound (green) recovers this model's own baseline from the previous slide — the RCT-scale calibration from that same slide is what closes the rest of the gap.</a:t>
+            </a:r>
+            <a:endParaRPr lang="en-US" sz="1000" dirty="0"/>
+          </a:p>
+        </p:txBody>
+      </p:sp>
+      <p:sp>
+        <p:nvSpPr>
+          <p:cNvPr id="12" name="Shape 9"/>
+          <p:cNvSpPr/>
+          <p:nvPr/>
+        </p:nvSpPr>
+        <p:spPr>
+          <a:xfrm>
+            <a:off x="548640" y="5687568"/>
+            <a:ext cx="11091672" cy="713232"/>
+          </a:xfrm>
+          <a:prstGeom prst="roundRect">
+            <a:avLst>
+              <a:gd name="adj" fmla="val 7692"/>
+            </a:avLst>
+          </a:prstGeom>
+          <a:solidFill>
+            <a:srgbClr val="FDF1E3"/>
+          </a:solidFill>
+          <a:ln/>
+        </p:spPr>
+      </p:sp>
+      <p:sp>
+        <p:nvSpPr>
+          <p:cNvPr id="13" name="Text 10"/>
+          <p:cNvSpPr/>
+          <p:nvPr/>
+        </p:nvSpPr>
+        <p:spPr>
+          <a:xfrm>
+            <a:off x="731520" y="5779008"/>
+            <a:ext cx="10744200" cy="548640"/>
+          </a:xfrm>
+          <a:prstGeom prst="rect">
+            <a:avLst/>
+          </a:prstGeom>
+          <a:noFill/>
+          <a:ln/>
+        </p:spPr>
+        <p:txBody>
+          <a:bodyPr wrap="square" rtlCol="0" anchor="ctr"/>
+          <a:lstStyle/>
+          <a:p>
+            <a:pPr indent="0" marL="0">
+              <a:lnSpc>
+                <a:spcPts val="1200"/>
+              </a:lnSpc>
+              <a:buNone/>
+            </a:pPr>
+            <a:r>
+              <a:rPr lang="en-US" sz="950" i="1" dirty="0">
+                <a:solidFill>
+                  <a:srgbClr val="8A4B0A"/>
+                </a:solidFill>
+                <a:latin typeface="Calibri" pitchFamily="34" charset="0"/>
+                <a:ea typeface="Calibri" pitchFamily="34" charset="-122"/>
+                <a:cs typeface="Calibri" pitchFamily="34" charset="-120"/>
+              </a:rPr>
+              <a:t>Why this is scoped this way: deciding how an advertiser splits budget across Atmosphere + TV + social is the advertiser's/agency's call — Atmosphere has no visibility into competitors' channel data anyway. What Atmosphere's DS role should own is netting competing media OUT of its own causal read (the JD's own phrasing), which the RCT does by design and a single-channel MMM only does with an explicit control.</a:t>
             </a:r>
             <a:endParaRPr lang="en-US" sz="950" dirty="0"/>
           </a:p>
-          <a:p>
-            <a:pPr indent="0" marL="0">
-              <a:lnSpc>
-                <a:spcPts val="1500"/>
-              </a:lnSpc>
-              <a:buNone/>
-            </a:pPr>
-            <a:r>
-              <a:rPr lang="en-US" sz="950" dirty="0">
-                <a:solidFill>
-                  <a:srgbClr val="1A1A2E"/>
-                </a:solidFill>
-                <a:latin typeface="Courier New" pitchFamily="34" charset="0"/>
-                <a:ea typeface="Courier New" pitchFamily="34" charset="-122"/>
-                <a:cs typeface="Courier New" pitchFamily="34" charset="-120"/>
-              </a:rPr>
-              <a:t>Bar                    1.4</a:t>
-            </a:r>
-            <a:endParaRPr lang="en-US" sz="950" dirty="0"/>
-          </a:p>
-          <a:p>
-            <a:pPr indent="0" marL="0">
-              <a:lnSpc>
-                <a:spcPts val="1500"/>
-              </a:lnSpc>
-              <a:buNone/>
-            </a:pPr>
-            <a:r>
-              <a:rPr lang="en-US" sz="950" dirty="0">
-                <a:solidFill>
-                  <a:srgbClr val="1A1A2E"/>
-                </a:solidFill>
-                <a:latin typeface="Courier New" pitchFamily="34" charset="0"/>
-                <a:ea typeface="Courier New" pitchFamily="34" charset="-122"/>
-                <a:cs typeface="Courier New" pitchFamily="34" charset="-120"/>
-              </a:rPr>
-              <a:t>Restaurant             5.0</a:t>
-            </a:r>
-            <a:endParaRPr lang="en-US" sz="950" dirty="0"/>
-          </a:p>
-          <a:p>
-            <a:pPr indent="0" marL="0">
-              <a:lnSpc>
-                <a:spcPts val="1500"/>
-              </a:lnSpc>
-              <a:buNone/>
-            </a:pPr>
-            <a:r>
-              <a:rPr lang="en-US" sz="950" dirty="0">
-                <a:solidFill>
-                  <a:srgbClr val="1A1A2E"/>
-                </a:solidFill>
-                <a:latin typeface="Courier New" pitchFamily="34" charset="0"/>
-                <a:ea typeface="Courier New" pitchFamily="34" charset="-122"/>
-                <a:cs typeface="Courier New" pitchFamily="34" charset="-120"/>
-              </a:rPr>
-              <a:t>Gym                    6.1</a:t>
-            </a:r>
-            <a:endParaRPr lang="en-US" sz="950" dirty="0"/>
-          </a:p>
-          <a:p>
-            <a:pPr indent="0" marL="0">
-              <a:lnSpc>
-                <a:spcPts val="1500"/>
-              </a:lnSpc>
-              <a:buNone/>
-            </a:pPr>
-            <a:r>
-              <a:rPr lang="en-US" sz="950" dirty="0">
-                <a:solidFill>
-                  <a:srgbClr val="1A1A2E"/>
-                </a:solidFill>
-                <a:latin typeface="Courier New" pitchFamily="34" charset="0"/>
-                <a:ea typeface="Courier New" pitchFamily="34" charset="-122"/>
-                <a:cs typeface="Courier New" pitchFamily="34" charset="-120"/>
-              </a:rPr>
-              <a:t>Waiting room           8.4</a:t>
-            </a:r>
-            <a:endParaRPr lang="en-US" sz="950" dirty="0"/>
-          </a:p>
-        </p:txBody>
-      </p:sp>
-      <p:sp>
-        <p:nvSpPr>
-          <p:cNvPr id="10" name="Text 7"/>
-          <p:cNvSpPr/>
-          <p:nvPr/>
-        </p:nvSpPr>
-        <p:spPr>
-          <a:xfrm>
-            <a:off x="7406640" y="3108960"/>
-            <a:ext cx="4206240" cy="457200"/>
-          </a:xfrm>
-          <a:prstGeom prst="rect">
-            <a:avLst/>
-          </a:prstGeom>
-          <a:noFill/>
-          <a:ln/>
-        </p:spPr>
-        <p:txBody>
-          <a:bodyPr wrap="square" rtlCol="0" anchor="ctr"/>
-          <a:lstStyle/>
-          <a:p>
-            <a:pPr indent="0" marL="0">
-              <a:lnSpc>
-                <a:spcPts val="1300"/>
-              </a:lnSpc>
-              <a:buNone/>
-            </a:pPr>
-            <a:r>
-              <a:rPr lang="en-US" sz="1000" i="1" dirty="0">
-                <a:solidFill>
-                  <a:srgbClr val="1A1A2E"/>
-                </a:solidFill>
-                <a:latin typeface="Calibri" pitchFamily="34" charset="0"/>
-                <a:ea typeface="Calibri" pitchFamily="34" charset="-122"/>
-                <a:cs typeface="Calibri" pitchFamily="34" charset="-120"/>
-              </a:rPr>
-              <a:t>...but each type's own PEAK (always somewhere around freq 1–2) is 15–30× higher:</a:t>
-            </a:r>
-            <a:endParaRPr lang="en-US" sz="1000" dirty="0"/>
-          </a:p>
-        </p:txBody>
-      </p:sp>
-      <p:sp>
-        <p:nvSpPr>
-          <p:cNvPr id="11" name="Text 8"/>
-          <p:cNvSpPr/>
-          <p:nvPr/>
-        </p:nvSpPr>
-        <p:spPr>
-          <a:xfrm>
-            <a:off x="7406640" y="3611880"/>
-            <a:ext cx="4206240" cy="548640"/>
-          </a:xfrm>
-          <a:prstGeom prst="rect">
-            <a:avLst/>
-          </a:prstGeom>
-          <a:noFill/>
-          <a:ln/>
-        </p:spPr>
-        <p:txBody>
-          <a:bodyPr wrap="square" rtlCol="0" anchor="ctr"/>
-          <a:lstStyle/>
-          <a:p>
-            <a:pPr indent="0" marL="0">
-              <a:lnSpc>
-                <a:spcPts val="1500"/>
-              </a:lnSpc>
-              <a:buNone/>
-            </a:pPr>
-            <a:r>
-              <a:rPr lang="en-US" sz="950" dirty="0">
-                <a:solidFill>
-                  <a:srgbClr val="1A1A2E"/>
-                </a:solidFill>
-                <a:latin typeface="Courier New" pitchFamily="34" charset="0"/>
-                <a:ea typeface="Courier New" pitchFamily="34" charset="-122"/>
-                <a:cs typeface="Courier New" pitchFamily="34" charset="-120"/>
-              </a:rPr>
-              <a:t>Bar ~124      Restaurant ~206</a:t>
-            </a:r>
-            <a:endParaRPr lang="en-US" sz="950" dirty="0"/>
-          </a:p>
-          <a:p>
-            <a:pPr indent="0" marL="0">
-              <a:lnSpc>
-                <a:spcPts val="1500"/>
-              </a:lnSpc>
-              <a:buNone/>
-            </a:pPr>
-            <a:r>
-              <a:rPr lang="en-US" sz="950" dirty="0">
-                <a:solidFill>
-                  <a:srgbClr val="1A1A2E"/>
-                </a:solidFill>
-                <a:latin typeface="Courier New" pitchFamily="34" charset="0"/>
-                <a:ea typeface="Courier New" pitchFamily="34" charset="-122"/>
-                <a:cs typeface="Courier New" pitchFamily="34" charset="-120"/>
-              </a:rPr>
-              <a:t>Gym ~132      Waiting room ~247</a:t>
-            </a:r>
-            <a:endParaRPr lang="en-US" sz="950" dirty="0"/>
-          </a:p>
-        </p:txBody>
-      </p:sp>
-      <p:sp>
-        <p:nvSpPr>
-          <p:cNvPr id="12" name="Text 9"/>
-          <p:cNvSpPr/>
-          <p:nvPr/>
-        </p:nvSpPr>
-        <p:spPr>
-          <a:xfrm>
-            <a:off x="7406640" y="4251960"/>
-            <a:ext cx="4206240" cy="1920240"/>
-          </a:xfrm>
-          <a:prstGeom prst="rect">
-            <a:avLst/>
-          </a:prstGeom>
-          <a:noFill/>
-          <a:ln/>
-        </p:spPr>
-        <p:txBody>
-          <a:bodyPr wrap="square" rtlCol="0" anchor="ctr"/>
-          <a:lstStyle/>
-          <a:p>
-            <a:pPr indent="0" marL="0">
-              <a:lnSpc>
-                <a:spcPts val="1250"/>
-              </a:lnSpc>
-              <a:buNone/>
-            </a:pPr>
-            <a:r>
-              <a:rPr lang="en-US" sz="950" i="1" dirty="0">
-                <a:solidFill>
-                  <a:srgbClr val="5B6178"/>
-                </a:solidFill>
-                <a:latin typeface="Calibri" pitchFamily="34" charset="0"/>
-                <a:ea typeface="Calibri" pitchFamily="34" charset="-122"/>
-                <a:cs typeface="Calibri" pitchFamily="34" charset="-120"/>
-              </a:rPr>
-              <a:t>A greedy rule that only ever compares "today's next dollar" has no way to see that peak from here — it can only react to which of these near-tied numbers is currently largest, one tiny step at a time. This is the mechanism that let an earlier greedy version of this allocator underperform naive equal-split at larger budgets — the retired code itself isn't preserved, but this is the exact response-curve shape it was walking.</a:t>
-            </a:r>
-            <a:endParaRPr lang="en-US" sz="950" dirty="0"/>
-          </a:p>
-        </p:txBody>
-      </p:sp>
-      <p:sp>
-        <p:nvSpPr>
-          <p:cNvPr id="13" name="Text 10"/>
+        </p:txBody>
+      </p:sp>
+      <p:sp>
+        <p:nvSpPr>
+          <p:cNvPr id="14" name="Text 11"/>
           <p:cNvSpPr/>
           <p:nvPr/>
         </p:nvSpPr>
@@ -7441,7 +7886,7 @@
                 <a:ea typeface="Calibri" pitchFamily="34" charset="-122"/>
                 <a:cs typeface="Calibri" pitchFamily="34" charset="-120"/>
               </a:rPr>
-              <a:t>Productization — budget allocator, why not greedy</a:t>
+              <a:t>Media-mix model — robustness</a:t>
             </a:r>
             <a:endParaRPr lang="en-US" sz="900" dirty="0"/>
           </a:p>
@@ -7504,6 +7949,592 @@
               <a:buNone/>
             </a:pPr>
             <a:r>
+              <a:rPr lang="en-US" sz="2600" b="1" dirty="0">
+                <a:solidFill>
+                  <a:srgbClr val="1E2761"/>
+                </a:solidFill>
+                <a:latin typeface="Cambria" pitchFamily="34" charset="0"/>
+                <a:ea typeface="Cambria" pitchFamily="34" charset="-122"/>
+                <a:cs typeface="Cambria" pitchFamily="34" charset="-120"/>
+              </a:rPr>
+              <a:t>Why a greedy allocator can lose to equal-split</a:t>
+            </a:r>
+            <a:endParaRPr lang="en-US" sz="2600" dirty="0"/>
+          </a:p>
+        </p:txBody>
+      </p:sp>
+      <p:sp>
+        <p:nvSpPr>
+          <p:cNvPr id="3" name="Shape 1"/>
+          <p:cNvSpPr/>
+          <p:nvPr/>
+        </p:nvSpPr>
+        <p:spPr>
+          <a:xfrm>
+            <a:off x="8229600" y="146304"/>
+            <a:ext cx="3410712" cy="246888"/>
+          </a:xfrm>
+          <a:prstGeom prst="roundRect">
+            <a:avLst>
+              <a:gd name="adj" fmla="val 22222"/>
+            </a:avLst>
+          </a:prstGeom>
+          <a:solidFill>
+            <a:srgbClr val="FFFFFF"/>
+          </a:solidFill>
+          <a:ln w="15875">
+            <a:solidFill>
+              <a:srgbClr val="B8500A"/>
+            </a:solidFill>
+            <a:prstDash val="solid"/>
+          </a:ln>
+        </p:spPr>
+      </p:sp>
+      <p:sp>
+        <p:nvSpPr>
+          <p:cNvPr id="4" name="Text 2"/>
+          <p:cNvSpPr/>
+          <p:nvPr/>
+        </p:nvSpPr>
+        <p:spPr>
+          <a:xfrm>
+            <a:off x="8229600" y="146304"/>
+            <a:ext cx="3410712" cy="246888"/>
+          </a:xfrm>
+          <a:prstGeom prst="rect">
+            <a:avLst/>
+          </a:prstGeom>
+          <a:noFill/>
+          <a:ln/>
+        </p:spPr>
+        <p:txBody>
+          <a:bodyPr wrap="square" rtlCol="0" anchor="ctr"/>
+          <a:lstStyle/>
+          <a:p>
+            <a:pPr algn="ctr" indent="0" marL="0">
+              <a:buNone/>
+            </a:pPr>
+            <a:r>
+              <a:rPr lang="en-US" sz="950" b="1" dirty="0">
+                <a:solidFill>
+                  <a:srgbClr val="B8500A"/>
+                </a:solidFill>
+                <a:latin typeface="Calibri" pitchFamily="34" charset="0"/>
+                <a:ea typeface="Calibri" pitchFamily="34" charset="-122"/>
+                <a:cs typeface="Calibri" pitchFamily="34" charset="-120"/>
+              </a:rPr>
+              <a:t>Step 4 motivation · Answers Q2</a:t>
+            </a:r>
+            <a:endParaRPr lang="en-US" sz="950" dirty="0"/>
+          </a:p>
+        </p:txBody>
+      </p:sp>
+      <p:sp>
+        <p:nvSpPr>
+          <p:cNvPr id="5" name="Text 3"/>
+          <p:cNvSpPr/>
+          <p:nvPr/>
+        </p:nvSpPr>
+        <p:spPr>
+          <a:xfrm>
+            <a:off x="548640" y="1005840"/>
+            <a:ext cx="10972800" cy="411480"/>
+          </a:xfrm>
+          <a:prstGeom prst="rect">
+            <a:avLst/>
+          </a:prstGeom>
+          <a:noFill/>
+          <a:ln/>
+        </p:spPr>
+        <p:txBody>
+          <a:bodyPr wrap="square" rtlCol="0" anchor="ctr"/>
+          <a:lstStyle/>
+          <a:p>
+            <a:pPr indent="0" marL="0">
+              <a:lnSpc>
+                <a:spcPts val="1400"/>
+              </a:lnSpc>
+              <a:buNone/>
+            </a:pPr>
+            <a:r>
+              <a:rPr lang="en-US" sz="1200" i="1" dirty="0">
+                <a:solidFill>
+                  <a:srgbClr val="5B6178"/>
+                </a:solidFill>
+                <a:latin typeface="Calibri" pitchFamily="34" charset="0"/>
+                <a:ea typeface="Calibri" pitchFamily="34" charset="-122"/>
+                <a:cs typeface="Calibri" pitchFamily="34" charset="-120"/>
+              </a:rPr>
+              <a:t>A Hill/S-curve (shape &gt; 1, as fit here) is convex before its inflection point — the next dollar's marginal return isn't monotonically falling, so "chase today's best marginal $" can get stuck.</a:t>
+            </a:r>
+            <a:endParaRPr lang="en-US" sz="1200" dirty="0"/>
+          </a:p>
+        </p:txBody>
+      </p:sp>
+      <p:graphicFrame>
+        <p:nvGraphicFramePr>
+          <p:cNvPr id="6" name="Chart 0" descr=""/>
+          <p:cNvGraphicFramePr/>
+          <p:nvPr/>
+        </p:nvGraphicFramePr>
+        <p:xfrm>
+          <a:off x="548640" y="1600200"/>
+          <a:ext cx="6583680" cy="3063240"/>
+        </p:xfrm>
+        <a:graphic xmlns:a="http://schemas.openxmlformats.org/drawingml/2006/main">
+          <a:graphicData uri="http://schemas.openxmlformats.org/drawingml/2006/chart">
+            <c:chart xmlns:c="http://schemas.openxmlformats.org/drawingml/2006/chart" r:id="rId1"/>
+          </a:graphicData>
+        </a:graphic>
+      </p:graphicFrame>
+      <p:sp>
+        <p:nvSpPr>
+          <p:cNvPr id="7" name="Text 4"/>
+          <p:cNvSpPr/>
+          <p:nvPr/>
+        </p:nvSpPr>
+        <p:spPr>
+          <a:xfrm>
+            <a:off x="548640" y="4754880"/>
+            <a:ext cx="6583680" cy="1417320"/>
+          </a:xfrm>
+          <a:prstGeom prst="rect">
+            <a:avLst/>
+          </a:prstGeom>
+          <a:noFill/>
+          <a:ln/>
+        </p:spPr>
+        <p:txBody>
+          <a:bodyPr wrap="square" rtlCol="0" anchor="ctr"/>
+          <a:lstStyle/>
+          <a:p>
+            <a:pPr indent="0" marL="0">
+              <a:lnSpc>
+                <a:spcPts val="1300"/>
+              </a:lnSpc>
+              <a:buNone/>
+            </a:pPr>
+            <a:r>
+              <a:rPr lang="en-US" sz="1000" dirty="0">
+                <a:solidFill>
+                  <a:srgbClr val="1A1A2E"/>
+                </a:solidFill>
+                <a:latin typeface="Calibri" pitchFamily="34" charset="0"/>
+                <a:ea typeface="Calibri" pitchFamily="34" charset="-122"/>
+                <a:cs typeface="Calibri" pitchFamily="34" charset="-120"/>
+              </a:rPr>
+              <a:t>This real curve (restaurant, from this deck's own calibrated MMM) is convex up to ~freq 1.0–1.5, concave after. At very low frequency every venue type's next dollar buys almost nothing — still in the flat, convex trough — so a rule comparing "which type's next dollar looks best right now" can't see that committing a lump sum to ONE type would pay off later. It only sees today's small, similar-looking numbers.</a:t>
+            </a:r>
+            <a:endParaRPr lang="en-US" sz="1000" dirty="0"/>
+          </a:p>
+        </p:txBody>
+      </p:sp>
+      <p:sp>
+        <p:nvSpPr>
+          <p:cNvPr id="8" name="Text 5"/>
+          <p:cNvSpPr/>
+          <p:nvPr/>
+        </p:nvSpPr>
+        <p:spPr>
+          <a:xfrm>
+            <a:off x="7406640" y="1600200"/>
+            <a:ext cx="4206240" cy="365760"/>
+          </a:xfrm>
+          <a:prstGeom prst="rect">
+            <a:avLst/>
+          </a:prstGeom>
+          <a:noFill/>
+          <a:ln/>
+        </p:spPr>
+        <p:txBody>
+          <a:bodyPr wrap="square" rtlCol="0" anchor="ctr"/>
+          <a:lstStyle/>
+          <a:p>
+            <a:pPr indent="0" marL="0">
+              <a:lnSpc>
+                <a:spcPts val="1400"/>
+              </a:lnSpc>
+              <a:buNone/>
+            </a:pPr>
+            <a:r>
+              <a:rPr lang="en-US" sz="1200" b="1" dirty="0">
+                <a:solidFill>
+                  <a:srgbClr val="1E2761"/>
+                </a:solidFill>
+                <a:latin typeface="Cambria" pitchFamily="34" charset="0"/>
+                <a:ea typeface="Cambria" pitchFamily="34" charset="-122"/>
+                <a:cs typeface="Cambria" pitchFamily="34" charset="-120"/>
+              </a:rPr>
+              <a:t>At freq ≈ .25, every type looks similarly unpromising</a:t>
+            </a:r>
+            <a:endParaRPr lang="en-US" sz="1200" dirty="0"/>
+          </a:p>
+        </p:txBody>
+      </p:sp>
+      <p:sp>
+        <p:nvSpPr>
+          <p:cNvPr id="9" name="Text 6"/>
+          <p:cNvSpPr/>
+          <p:nvPr/>
+        </p:nvSpPr>
+        <p:spPr>
+          <a:xfrm>
+            <a:off x="7406640" y="2057400"/>
+            <a:ext cx="4206240" cy="960120"/>
+          </a:xfrm>
+          <a:prstGeom prst="rect">
+            <a:avLst/>
+          </a:prstGeom>
+          <a:noFill/>
+          <a:ln/>
+        </p:spPr>
+        <p:txBody>
+          <a:bodyPr wrap="square" rtlCol="0" anchor="ctr"/>
+          <a:lstStyle/>
+          <a:p>
+            <a:pPr indent="0" marL="0">
+              <a:lnSpc>
+                <a:spcPts val="1500"/>
+              </a:lnSpc>
+              <a:buNone/>
+            </a:pPr>
+            <a:r>
+              <a:rPr lang="en-US" sz="950" dirty="0">
+                <a:solidFill>
+                  <a:srgbClr val="1A1A2E"/>
+                </a:solidFill>
+                <a:latin typeface="Courier New" pitchFamily="34" charset="0"/>
+                <a:ea typeface="Courier New" pitchFamily="34" charset="-122"/>
+                <a:cs typeface="Courier New" pitchFamily="34" charset="-120"/>
+              </a:rPr>
+              <a:t>Venue type      Lift per $1,000</a:t>
+            </a:r>
+            <a:endParaRPr lang="en-US" sz="950" dirty="0"/>
+          </a:p>
+          <a:p>
+            <a:pPr indent="0" marL="0">
+              <a:lnSpc>
+                <a:spcPts val="1500"/>
+              </a:lnSpc>
+              <a:buNone/>
+            </a:pPr>
+            <a:r>
+              <a:rPr lang="en-US" sz="950" dirty="0">
+                <a:solidFill>
+                  <a:srgbClr val="1A1A2E"/>
+                </a:solidFill>
+                <a:latin typeface="Courier New" pitchFamily="34" charset="0"/>
+                <a:ea typeface="Courier New" pitchFamily="34" charset="-122"/>
+                <a:cs typeface="Courier New" pitchFamily="34" charset="-120"/>
+              </a:rPr>
+              <a:t>Bar                    1.4</a:t>
+            </a:r>
+            <a:endParaRPr lang="en-US" sz="950" dirty="0"/>
+          </a:p>
+          <a:p>
+            <a:pPr indent="0" marL="0">
+              <a:lnSpc>
+                <a:spcPts val="1500"/>
+              </a:lnSpc>
+              <a:buNone/>
+            </a:pPr>
+            <a:r>
+              <a:rPr lang="en-US" sz="950" dirty="0">
+                <a:solidFill>
+                  <a:srgbClr val="1A1A2E"/>
+                </a:solidFill>
+                <a:latin typeface="Courier New" pitchFamily="34" charset="0"/>
+                <a:ea typeface="Courier New" pitchFamily="34" charset="-122"/>
+                <a:cs typeface="Courier New" pitchFamily="34" charset="-120"/>
+              </a:rPr>
+              <a:t>Restaurant             5.0</a:t>
+            </a:r>
+            <a:endParaRPr lang="en-US" sz="950" dirty="0"/>
+          </a:p>
+          <a:p>
+            <a:pPr indent="0" marL="0">
+              <a:lnSpc>
+                <a:spcPts val="1500"/>
+              </a:lnSpc>
+              <a:buNone/>
+            </a:pPr>
+            <a:r>
+              <a:rPr lang="en-US" sz="950" dirty="0">
+                <a:solidFill>
+                  <a:srgbClr val="1A1A2E"/>
+                </a:solidFill>
+                <a:latin typeface="Courier New" pitchFamily="34" charset="0"/>
+                <a:ea typeface="Courier New" pitchFamily="34" charset="-122"/>
+                <a:cs typeface="Courier New" pitchFamily="34" charset="-120"/>
+              </a:rPr>
+              <a:t>Gym                    6.1</a:t>
+            </a:r>
+            <a:endParaRPr lang="en-US" sz="950" dirty="0"/>
+          </a:p>
+          <a:p>
+            <a:pPr indent="0" marL="0">
+              <a:lnSpc>
+                <a:spcPts val="1500"/>
+              </a:lnSpc>
+              <a:buNone/>
+            </a:pPr>
+            <a:r>
+              <a:rPr lang="en-US" sz="950" dirty="0">
+                <a:solidFill>
+                  <a:srgbClr val="1A1A2E"/>
+                </a:solidFill>
+                <a:latin typeface="Courier New" pitchFamily="34" charset="0"/>
+                <a:ea typeface="Courier New" pitchFamily="34" charset="-122"/>
+                <a:cs typeface="Courier New" pitchFamily="34" charset="-120"/>
+              </a:rPr>
+              <a:t>Waiting room           8.4</a:t>
+            </a:r>
+            <a:endParaRPr lang="en-US" sz="950" dirty="0"/>
+          </a:p>
+        </p:txBody>
+      </p:sp>
+      <p:sp>
+        <p:nvSpPr>
+          <p:cNvPr id="10" name="Text 7"/>
+          <p:cNvSpPr/>
+          <p:nvPr/>
+        </p:nvSpPr>
+        <p:spPr>
+          <a:xfrm>
+            <a:off x="7406640" y="3108960"/>
+            <a:ext cx="4206240" cy="457200"/>
+          </a:xfrm>
+          <a:prstGeom prst="rect">
+            <a:avLst/>
+          </a:prstGeom>
+          <a:noFill/>
+          <a:ln/>
+        </p:spPr>
+        <p:txBody>
+          <a:bodyPr wrap="square" rtlCol="0" anchor="ctr"/>
+          <a:lstStyle/>
+          <a:p>
+            <a:pPr indent="0" marL="0">
+              <a:lnSpc>
+                <a:spcPts val="1300"/>
+              </a:lnSpc>
+              <a:buNone/>
+            </a:pPr>
+            <a:r>
+              <a:rPr lang="en-US" sz="1000" i="1" dirty="0">
+                <a:solidFill>
+                  <a:srgbClr val="1A1A2E"/>
+                </a:solidFill>
+                <a:latin typeface="Calibri" pitchFamily="34" charset="0"/>
+                <a:ea typeface="Calibri" pitchFamily="34" charset="-122"/>
+                <a:cs typeface="Calibri" pitchFamily="34" charset="-120"/>
+              </a:rPr>
+              <a:t>...but each type's own PEAK (always somewhere around freq 1–2) is 15–30× higher:</a:t>
+            </a:r>
+            <a:endParaRPr lang="en-US" sz="1000" dirty="0"/>
+          </a:p>
+        </p:txBody>
+      </p:sp>
+      <p:sp>
+        <p:nvSpPr>
+          <p:cNvPr id="11" name="Text 8"/>
+          <p:cNvSpPr/>
+          <p:nvPr/>
+        </p:nvSpPr>
+        <p:spPr>
+          <a:xfrm>
+            <a:off x="7406640" y="3611880"/>
+            <a:ext cx="4206240" cy="548640"/>
+          </a:xfrm>
+          <a:prstGeom prst="rect">
+            <a:avLst/>
+          </a:prstGeom>
+          <a:noFill/>
+          <a:ln/>
+        </p:spPr>
+        <p:txBody>
+          <a:bodyPr wrap="square" rtlCol="0" anchor="ctr"/>
+          <a:lstStyle/>
+          <a:p>
+            <a:pPr indent="0" marL="0">
+              <a:lnSpc>
+                <a:spcPts val="1500"/>
+              </a:lnSpc>
+              <a:buNone/>
+            </a:pPr>
+            <a:r>
+              <a:rPr lang="en-US" sz="950" dirty="0">
+                <a:solidFill>
+                  <a:srgbClr val="1A1A2E"/>
+                </a:solidFill>
+                <a:latin typeface="Courier New" pitchFamily="34" charset="0"/>
+                <a:ea typeface="Courier New" pitchFamily="34" charset="-122"/>
+                <a:cs typeface="Courier New" pitchFamily="34" charset="-120"/>
+              </a:rPr>
+              <a:t>Bar ~124      Restaurant ~206</a:t>
+            </a:r>
+            <a:endParaRPr lang="en-US" sz="950" dirty="0"/>
+          </a:p>
+          <a:p>
+            <a:pPr indent="0" marL="0">
+              <a:lnSpc>
+                <a:spcPts val="1500"/>
+              </a:lnSpc>
+              <a:buNone/>
+            </a:pPr>
+            <a:r>
+              <a:rPr lang="en-US" sz="950" dirty="0">
+                <a:solidFill>
+                  <a:srgbClr val="1A1A2E"/>
+                </a:solidFill>
+                <a:latin typeface="Courier New" pitchFamily="34" charset="0"/>
+                <a:ea typeface="Courier New" pitchFamily="34" charset="-122"/>
+                <a:cs typeface="Courier New" pitchFamily="34" charset="-120"/>
+              </a:rPr>
+              <a:t>Gym ~132      Waiting room ~247</a:t>
+            </a:r>
+            <a:endParaRPr lang="en-US" sz="950" dirty="0"/>
+          </a:p>
+        </p:txBody>
+      </p:sp>
+      <p:sp>
+        <p:nvSpPr>
+          <p:cNvPr id="12" name="Text 9"/>
+          <p:cNvSpPr/>
+          <p:nvPr/>
+        </p:nvSpPr>
+        <p:spPr>
+          <a:xfrm>
+            <a:off x="7406640" y="4251960"/>
+            <a:ext cx="4206240" cy="1920240"/>
+          </a:xfrm>
+          <a:prstGeom prst="rect">
+            <a:avLst/>
+          </a:prstGeom>
+          <a:noFill/>
+          <a:ln/>
+        </p:spPr>
+        <p:txBody>
+          <a:bodyPr wrap="square" rtlCol="0" anchor="ctr"/>
+          <a:lstStyle/>
+          <a:p>
+            <a:pPr indent="0" marL="0">
+              <a:lnSpc>
+                <a:spcPts val="1250"/>
+              </a:lnSpc>
+              <a:buNone/>
+            </a:pPr>
+            <a:r>
+              <a:rPr lang="en-US" sz="950" i="1" dirty="0">
+                <a:solidFill>
+                  <a:srgbClr val="5B6178"/>
+                </a:solidFill>
+                <a:latin typeface="Calibri" pitchFamily="34" charset="0"/>
+                <a:ea typeface="Calibri" pitchFamily="34" charset="-122"/>
+                <a:cs typeface="Calibri" pitchFamily="34" charset="-120"/>
+              </a:rPr>
+              <a:t>A greedy rule that only ever compares "today's next dollar" has no way to see that peak from here — it can only react to which of these near-tied numbers is currently largest, one tiny step at a time. This is the mechanism that let an earlier greedy version of this allocator underperform naive equal-split at larger budgets — the retired code itself isn't preserved, but this is the exact response-curve shape it was walking.</a:t>
+            </a:r>
+            <a:endParaRPr lang="en-US" sz="950" dirty="0"/>
+          </a:p>
+        </p:txBody>
+      </p:sp>
+      <p:sp>
+        <p:nvSpPr>
+          <p:cNvPr id="13" name="Text 10"/>
+          <p:cNvSpPr/>
+          <p:nvPr/>
+        </p:nvSpPr>
+        <p:spPr>
+          <a:xfrm>
+            <a:off x="457200" y="6537960"/>
+            <a:ext cx="7315200" cy="274320"/>
+          </a:xfrm>
+          <a:prstGeom prst="rect">
+            <a:avLst/>
+          </a:prstGeom>
+          <a:noFill/>
+          <a:ln/>
+        </p:spPr>
+        <p:txBody>
+          <a:bodyPr wrap="square" rtlCol="0" anchor="ctr"/>
+          <a:lstStyle/>
+          <a:p>
+            <a:pPr indent="0" marL="0">
+              <a:buNone/>
+            </a:pPr>
+            <a:r>
+              <a:rPr lang="en-US" sz="900" dirty="0">
+                <a:solidFill>
+                  <a:srgbClr val="5B6178"/>
+                </a:solidFill>
+                <a:latin typeface="Calibri" pitchFamily="34" charset="0"/>
+                <a:ea typeface="Calibri" pitchFamily="34" charset="-122"/>
+                <a:cs typeface="Calibri" pitchFamily="34" charset="-120"/>
+              </a:rPr>
+              <a:t>Productization — budget allocator, why not greedy</a:t>
+            </a:r>
+            <a:endParaRPr lang="en-US" sz="900" dirty="0"/>
+          </a:p>
+        </p:txBody>
+      </p:sp>
+    </p:spTree>
+  </p:cSld>
+  <p:clrMapOvr>
+    <a:masterClrMapping/>
+  </p:clrMapOvr>
+</p:sld>
+</file>
+
+<file path=ppt/slides/slide14.xml><?xml version="1.0" encoding="utf-8"?>
+<p:sld xmlns:a="http://schemas.openxmlformats.org/drawingml/2006/main" xmlns:r="http://schemas.openxmlformats.org/officeDocument/2006/relationships" xmlns:p="http://schemas.openxmlformats.org/presentationml/2006/main">
+  <p:cSld name="Slide 14">
+    <p:bg>
+      <p:bgPr>
+        <a:solidFill>
+          <a:srgbClr val="FFFFFF"/>
+        </a:solidFill>
+      </p:bgPr>
+    </p:bg>
+    <p:spTree>
+      <p:nvGrpSpPr>
+        <p:cNvPr id="1" name=""/>
+        <p:cNvGrpSpPr/>
+        <p:nvPr/>
+      </p:nvGrpSpPr>
+      <p:grpSpPr>
+        <a:xfrm>
+          <a:off x="0" y="0"/>
+          <a:ext cx="0" cy="0"/>
+          <a:chOff x="0" y="0"/>
+          <a:chExt cx="0" cy="0"/>
+        </a:xfrm>
+      </p:grpSpPr>
+      <p:sp>
+        <p:nvSpPr>
+          <p:cNvPr id="2" name="Text 0"/>
+          <p:cNvSpPr/>
+          <p:nvPr/>
+        </p:nvSpPr>
+        <p:spPr>
+          <a:xfrm>
+            <a:off x="548640" y="411480"/>
+            <a:ext cx="11155680" cy="594360"/>
+          </a:xfrm>
+          <a:prstGeom prst="rect">
+            <a:avLst/>
+          </a:prstGeom>
+          <a:noFill/>
+          <a:ln/>
+        </p:spPr>
+        <p:txBody>
+          <a:bodyPr wrap="square" rtlCol="0" anchor="ctr"/>
+          <a:lstStyle/>
+          <a:p>
+            <a:pPr indent="0" marL="0">
+              <a:buNone/>
+            </a:pPr>
+            <a:r>
               <a:rPr lang="en-US" sz="2500" b="1" dirty="0">
                 <a:solidFill>
                   <a:srgbClr val="1E2761"/>
@@ -8301,9 +9332,9 @@
 </p:sld>
 </file>
 
-<file path=ppt/slides/slide14.xml><?xml version="1.0" encoding="utf-8"?>
+<file path=ppt/slides/slide15.xml><?xml version="1.0" encoding="utf-8"?>
 <p:sld xmlns:a="http://schemas.openxmlformats.org/drawingml/2006/main" xmlns:r="http://schemas.openxmlformats.org/officeDocument/2006/relationships" xmlns:p="http://schemas.openxmlformats.org/presentationml/2006/main">
-  <p:cSld name="Slide 14">
+  <p:cSld name="Slide 15">
     <p:bg>
       <p:bgPr>
         <a:solidFill>
@@ -9005,738 +10036,6 @@
               <a:t>“Smarter on both sides of the business” — the venue-side model shares its data foundation and causal-value input with the advertising side, rather than being a disconnected second project. Results on the next slide.</a:t>
             </a:r>
             <a:endParaRPr lang="en-US" sz="1150" dirty="0"/>
-          </a:p>
-        </p:txBody>
-      </p:sp>
-    </p:spTree>
-  </p:cSld>
-  <p:clrMapOvr>
-    <a:masterClrMapping/>
-  </p:clrMapOvr>
-</p:sld>
-</file>
-
-<file path=ppt/slides/slide15.xml><?xml version="1.0" encoding="utf-8"?>
-<p:sld xmlns:a="http://schemas.openxmlformats.org/drawingml/2006/main" xmlns:r="http://schemas.openxmlformats.org/officeDocument/2006/relationships" xmlns:p="http://schemas.openxmlformats.org/presentationml/2006/main">
-  <p:cSld name="Slide 15">
-    <p:bg>
-      <p:bgPr>
-        <a:solidFill>
-          <a:srgbClr val="FFFFFF"/>
-        </a:solidFill>
-      </p:bgPr>
-    </p:bg>
-    <p:spTree>
-      <p:nvGrpSpPr>
-        <p:cNvPr id="1" name=""/>
-        <p:cNvGrpSpPr/>
-        <p:nvPr/>
-      </p:nvGrpSpPr>
-      <p:grpSpPr>
-        <a:xfrm>
-          <a:off x="0" y="0"/>
-          <a:ext cx="0" cy="0"/>
-          <a:chOff x="0" y="0"/>
-          <a:chExt cx="0" cy="0"/>
-        </a:xfrm>
-      </p:grpSpPr>
-      <p:sp>
-        <p:nvSpPr>
-          <p:cNvPr id="2" name="Text 0"/>
-          <p:cNvSpPr/>
-          <p:nvPr/>
-        </p:nvSpPr>
-        <p:spPr>
-          <a:xfrm>
-            <a:off x="548640" y="411480"/>
-            <a:ext cx="11155680" cy="594360"/>
-          </a:xfrm>
-          <a:prstGeom prst="rect">
-            <a:avLst/>
-          </a:prstGeom>
-          <a:noFill/>
-          <a:ln/>
-        </p:spPr>
-        <p:txBody>
-          <a:bodyPr wrap="square" rtlCol="0" anchor="ctr"/>
-          <a:lstStyle/>
-          <a:p>
-            <a:pPr indent="0" marL="0">
-              <a:buNone/>
-            </a:pPr>
-            <a:r>
-              <a:rPr lang="en-US" sz="2300" b="1" dirty="0">
-                <a:solidFill>
-                  <a:srgbClr val="1E2761"/>
-                </a:solidFill>
-                <a:latin typeface="Cambria" pitchFamily="34" charset="0"/>
-                <a:ea typeface="Cambria" pitchFamily="34" charset="-122"/>
-                <a:cs typeface="Cambria" pitchFamily="34" charset="-120"/>
-              </a:rPr>
-              <a:t>Venue revenue model: what feeds in, and why this model</a:t>
-            </a:r>
-            <a:endParaRPr lang="en-US" sz="2300" dirty="0"/>
-          </a:p>
-        </p:txBody>
-      </p:sp>
-      <p:sp>
-        <p:nvSpPr>
-          <p:cNvPr id="3" name="Shape 1"/>
-          <p:cNvSpPr/>
-          <p:nvPr/>
-        </p:nvSpPr>
-        <p:spPr>
-          <a:xfrm>
-            <a:off x="8229600" y="146304"/>
-            <a:ext cx="3410712" cy="246888"/>
-          </a:xfrm>
-          <a:prstGeom prst="roundRect">
-            <a:avLst>
-              <a:gd name="adj" fmla="val 22222"/>
-            </a:avLst>
-          </a:prstGeom>
-          <a:solidFill>
-            <a:srgbClr val="FFFFFF"/>
-          </a:solidFill>
-          <a:ln w="15875">
-            <a:solidFill>
-              <a:srgbClr val="2C7A57"/>
-            </a:solidFill>
-            <a:prstDash val="solid"/>
-          </a:ln>
-        </p:spPr>
-      </p:sp>
-      <p:sp>
-        <p:nvSpPr>
-          <p:cNvPr id="4" name="Text 2"/>
-          <p:cNvSpPr/>
-          <p:nvPr/>
-        </p:nvSpPr>
-        <p:spPr>
-          <a:xfrm>
-            <a:off x="8229600" y="146304"/>
-            <a:ext cx="3410712" cy="246888"/>
-          </a:xfrm>
-          <a:prstGeom prst="rect">
-            <a:avLst/>
-          </a:prstGeom>
-          <a:noFill/>
-          <a:ln/>
-        </p:spPr>
-        <p:txBody>
-          <a:bodyPr wrap="square" rtlCol="0" anchor="ctr"/>
-          <a:lstStyle/>
-          <a:p>
-            <a:pPr algn="ctr" indent="0" marL="0">
-              <a:buNone/>
-            </a:pPr>
-            <a:r>
-              <a:rPr lang="en-US" sz="950" b="1" dirty="0">
-                <a:solidFill>
-                  <a:srgbClr val="2C7A57"/>
-                </a:solidFill>
-                <a:latin typeface="Calibri" pitchFamily="34" charset="0"/>
-                <a:ea typeface="Calibri" pitchFamily="34" charset="-122"/>
-                <a:cs typeface="Calibri" pitchFamily="34" charset="-120"/>
-              </a:rPr>
-              <a:t>Step 5 setup · Answers Q3</a:t>
-            </a:r>
-            <a:endParaRPr lang="en-US" sz="950" dirty="0"/>
-          </a:p>
-        </p:txBody>
-      </p:sp>
-      <p:sp>
-        <p:nvSpPr>
-          <p:cNvPr id="5" name="Text 3"/>
-          <p:cNvSpPr/>
-          <p:nvPr/>
-        </p:nvSpPr>
-        <p:spPr>
-          <a:xfrm>
-            <a:off x="548640" y="1005840"/>
-            <a:ext cx="10972800" cy="411480"/>
-          </a:xfrm>
-          <a:prstGeom prst="rect">
-            <a:avLst/>
-          </a:prstGeom>
-          <a:noFill/>
-          <a:ln/>
-        </p:spPr>
-        <p:txBody>
-          <a:bodyPr wrap="square" rtlCol="0" anchor="ctr"/>
-          <a:lstStyle/>
-          <a:p>
-            <a:pPr indent="0" marL="0">
-              <a:lnSpc>
-                <a:spcPts val="1500"/>
-              </a:lnSpc>
-              <a:buNone/>
-            </a:pPr>
-            <a:r>
-              <a:rPr lang="en-US" sz="1250" i="1" dirty="0">
-                <a:solidFill>
-                  <a:srgbClr val="5B6178"/>
-                </a:solidFill>
-                <a:latin typeface="Calibri" pitchFamily="34" charset="0"/>
-                <a:ea typeface="Calibri" pitchFamily="34" charset="-122"/>
-                <a:cs typeface="Calibri" pitchFamily="34" charset="-120"/>
-              </a:rPr>
-              <a:t>Can this venue's own characteristics + a validated advertising effect predict what it actually earns — and surface who's under-monetized or high-potential?</a:t>
-            </a:r>
-            <a:endParaRPr lang="en-US" sz="1250" dirty="0"/>
-          </a:p>
-        </p:txBody>
-      </p:sp>
-      <p:sp>
-        <p:nvSpPr>
-          <p:cNvPr id="6" name="Text 4"/>
-          <p:cNvSpPr/>
-          <p:nvPr/>
-        </p:nvSpPr>
-        <p:spPr>
-          <a:xfrm>
-            <a:off x="548640" y="1645920"/>
-            <a:ext cx="5394960" cy="502920"/>
-          </a:xfrm>
-          <a:prstGeom prst="rect">
-            <a:avLst/>
-          </a:prstGeom>
-          <a:noFill/>
-          <a:ln/>
-        </p:spPr>
-        <p:txBody>
-          <a:bodyPr wrap="square" rtlCol="0" anchor="ctr"/>
-          <a:lstStyle/>
-          <a:p>
-            <a:pPr indent="0" marL="0">
-              <a:lnSpc>
-                <a:spcPts val="1600"/>
-              </a:lnSpc>
-              <a:buNone/>
-            </a:pPr>
-            <a:r>
-              <a:rPr lang="en-US" sz="1350" b="1" dirty="0">
-                <a:solidFill>
-                  <a:srgbClr val="1E2761"/>
-                </a:solidFill>
-                <a:latin typeface="Cambria" pitchFamily="34" charset="0"/>
-                <a:ea typeface="Cambria" pitchFamily="34" charset="-122"/>
-                <a:cs typeface="Cambria" pitchFamily="34" charset="-120"/>
-              </a:rPr>
-              <a:t>Model: HistGradientBoostingRegressor (sklearn)</a:t>
-            </a:r>
-            <a:endParaRPr lang="en-US" sz="1350" dirty="0"/>
-          </a:p>
-        </p:txBody>
-      </p:sp>
-      <p:sp>
-        <p:nvSpPr>
-          <p:cNvPr id="7" name="Text 5"/>
-          <p:cNvSpPr/>
-          <p:nvPr/>
-        </p:nvSpPr>
-        <p:spPr>
-          <a:xfrm>
-            <a:off x="548640" y="2194560"/>
-            <a:ext cx="5394960" cy="1188720"/>
-          </a:xfrm>
-          <a:prstGeom prst="rect">
-            <a:avLst/>
-          </a:prstGeom>
-          <a:noFill/>
-          <a:ln/>
-        </p:spPr>
-        <p:txBody>
-          <a:bodyPr wrap="square" rtlCol="0" anchor="ctr"/>
-          <a:lstStyle/>
-          <a:p>
-            <a:pPr indent="0" marL="0">
-              <a:lnSpc>
-                <a:spcPts val="1400"/>
-              </a:lnSpc>
-              <a:buNone/>
-            </a:pPr>
-            <a:r>
-              <a:rPr lang="en-US" sz="1050" dirty="0">
-                <a:solidFill>
-                  <a:srgbClr val="1A1A2E"/>
-                </a:solidFill>
-                <a:latin typeface="Calibri" pitchFamily="34" charset="0"/>
-                <a:ea typeface="Calibri" pitchFamily="34" charset="-122"/>
-                <a:cs typeface="Calibri" pitchFamily="34" charset="-120"/>
-              </a:rPr>
-              <a:t>Chosen because it handles venue_type / geo_cluster / traffic_tier as native categorical splits. geo_cluster alone has 20+ levels — one-hot encoding that would blow the feature space up and dilute each split's signal. categorical_features="from_dtype" avoids that entirely, no preprocessing needed.</a:t>
-            </a:r>
-            <a:endParaRPr lang="en-US" sz="1050" dirty="0"/>
-          </a:p>
-        </p:txBody>
-      </p:sp>
-      <p:sp>
-        <p:nvSpPr>
-          <p:cNvPr id="8" name="Text 6"/>
-          <p:cNvSpPr/>
-          <p:nvPr/>
-        </p:nvSpPr>
-        <p:spPr>
-          <a:xfrm>
-            <a:off x="548640" y="3520440"/>
-            <a:ext cx="5394960" cy="365760"/>
-          </a:xfrm>
-          <a:prstGeom prst="rect">
-            <a:avLst/>
-          </a:prstGeom>
-          <a:noFill/>
-          <a:ln/>
-        </p:spPr>
-        <p:txBody>
-          <a:bodyPr wrap="square" rtlCol="0" anchor="ctr"/>
-          <a:lstStyle/>
-          <a:p>
-            <a:pPr indent="0" marL="0">
-              <a:buNone/>
-            </a:pPr>
-            <a:r>
-              <a:rPr lang="en-US" sz="1350" b="1" dirty="0">
-                <a:solidFill>
-                  <a:srgbClr val="1E2761"/>
-                </a:solidFill>
-                <a:latin typeface="Cambria" pitchFamily="34" charset="0"/>
-                <a:ea typeface="Cambria" pitchFamily="34" charset="-122"/>
-                <a:cs typeface="Cambria" pitchFamily="34" charset="-120"/>
-              </a:rPr>
-              <a:t>Target: realized_ad_revenue</a:t>
-            </a:r>
-            <a:endParaRPr lang="en-US" sz="1350" dirty="0"/>
-          </a:p>
-        </p:txBody>
-      </p:sp>
-      <p:sp>
-        <p:nvSpPr>
-          <p:cNvPr id="9" name="Text 7"/>
-          <p:cNvSpPr/>
-          <p:nvPr/>
-        </p:nvSpPr>
-        <p:spPr>
-          <a:xfrm>
-            <a:off x="548640" y="3977640"/>
-            <a:ext cx="5394960" cy="365760"/>
-          </a:xfrm>
-          <a:prstGeom prst="rect">
-            <a:avLst/>
-          </a:prstGeom>
-          <a:noFill/>
-          <a:ln/>
-        </p:spPr>
-        <p:txBody>
-          <a:bodyPr wrap="square" rtlCol="0" anchor="ctr"/>
-          <a:lstStyle/>
-          <a:p>
-            <a:pPr indent="0" marL="0">
-              <a:lnSpc>
-                <a:spcPts val="1400"/>
-              </a:lnSpc>
-              <a:buNone/>
-            </a:pPr>
-            <a:r>
-              <a:rPr lang="en-US" sz="1050" i="1" dirty="0">
-                <a:solidFill>
-                  <a:srgbClr val="5B6178"/>
-                </a:solidFill>
-                <a:latin typeface="Calibri" pitchFamily="34" charset="0"/>
-                <a:ea typeface="Calibri" pitchFamily="34" charset="-122"/>
-                <a:cs typeface="Calibri" pitchFamily="34" charset="-120"/>
-              </a:rPr>
-              <a:t>The venue's actual weekly $ ad revenue — not a proxy, not a survey response.</a:t>
-            </a:r>
-            <a:endParaRPr lang="en-US" sz="1050" dirty="0"/>
-          </a:p>
-        </p:txBody>
-      </p:sp>
-      <p:sp>
-        <p:nvSpPr>
-          <p:cNvPr id="10" name="Text 8"/>
-          <p:cNvSpPr/>
-          <p:nvPr/>
-        </p:nvSpPr>
-        <p:spPr>
-          <a:xfrm>
-            <a:off x="6263640" y="1645920"/>
-            <a:ext cx="5394960" cy="320040"/>
-          </a:xfrm>
-          <a:prstGeom prst="rect">
-            <a:avLst/>
-          </a:prstGeom>
-          <a:noFill/>
-          <a:ln/>
-        </p:spPr>
-        <p:txBody>
-          <a:bodyPr wrap="square" rtlCol="0" anchor="ctr"/>
-          <a:lstStyle/>
-          <a:p>
-            <a:pPr indent="0" marL="0">
-              <a:buNone/>
-            </a:pPr>
-            <a:r>
-              <a:rPr lang="en-US" sz="1350" b="1" dirty="0">
-                <a:solidFill>
-                  <a:srgbClr val="1E2761"/>
-                </a:solidFill>
-                <a:latin typeface="Cambria" pitchFamily="34" charset="0"/>
-                <a:ea typeface="Cambria" pitchFamily="34" charset="-122"/>
-                <a:cs typeface="Cambria" pitchFamily="34" charset="-120"/>
-              </a:rPr>
-              <a:t>Features — two sources</a:t>
-            </a:r>
-            <a:endParaRPr lang="en-US" sz="1350" dirty="0"/>
-          </a:p>
-        </p:txBody>
-      </p:sp>
-      <p:sp>
-        <p:nvSpPr>
-          <p:cNvPr id="11" name="Shape 9"/>
-          <p:cNvSpPr/>
-          <p:nvPr/>
-        </p:nvSpPr>
-        <p:spPr>
-          <a:xfrm>
-            <a:off x="6263640" y="2029968"/>
-            <a:ext cx="5394960" cy="1600200"/>
-          </a:xfrm>
-          <a:prstGeom prst="roundRect">
-            <a:avLst>
-              <a:gd name="adj" fmla="val 4000"/>
-            </a:avLst>
-          </a:prstGeom>
-          <a:solidFill>
-            <a:srgbClr val="F5F7FC"/>
-          </a:solidFill>
-          <a:ln/>
-        </p:spPr>
-      </p:sp>
-      <p:sp>
-        <p:nvSpPr>
-          <p:cNvPr id="12" name="Text 10"/>
-          <p:cNvSpPr/>
-          <p:nvPr/>
-        </p:nvSpPr>
-        <p:spPr>
-          <a:xfrm>
-            <a:off x="6492240" y="2148840"/>
-            <a:ext cx="4937760" cy="274320"/>
-          </a:xfrm>
-          <a:prstGeom prst="rect">
-            <a:avLst/>
-          </a:prstGeom>
-          <a:noFill/>
-          <a:ln/>
-        </p:spPr>
-        <p:txBody>
-          <a:bodyPr wrap="square" rtlCol="0" anchor="ctr"/>
-          <a:lstStyle/>
-          <a:p>
-            <a:pPr indent="0" marL="0">
-              <a:buNone/>
-            </a:pPr>
-            <a:r>
-              <a:rPr lang="en-US" sz="1100" b="1" dirty="0">
-                <a:solidFill>
-                  <a:srgbClr val="1E2761"/>
-                </a:solidFill>
-                <a:latin typeface="Cambria" pitchFamily="34" charset="0"/>
-                <a:ea typeface="Cambria" pitchFamily="34" charset="-122"/>
-                <a:cs typeface="Cambria" pitchFamily="34" charset="-120"/>
-              </a:rPr>
-              <a:t>This venue's own characteristics</a:t>
-            </a:r>
-            <a:endParaRPr lang="en-US" sz="1100" dirty="0"/>
-          </a:p>
-        </p:txBody>
-      </p:sp>
-      <p:sp>
-        <p:nvSpPr>
-          <p:cNvPr id="13" name="Text 11"/>
-          <p:cNvSpPr/>
-          <p:nvPr/>
-        </p:nvSpPr>
-        <p:spPr>
-          <a:xfrm>
-            <a:off x="6492240" y="2468880"/>
-            <a:ext cx="4937760" cy="1051560"/>
-          </a:xfrm>
-          <a:prstGeom prst="rect">
-            <a:avLst/>
-          </a:prstGeom>
-          <a:noFill/>
-          <a:ln/>
-        </p:spPr>
-        <p:txBody>
-          <a:bodyPr wrap="square" rtlCol="0" anchor="ctr"/>
-          <a:lstStyle/>
-          <a:p>
-            <a:pPr indent="0" marL="0">
-              <a:lnSpc>
-                <a:spcPts val="1700"/>
-              </a:lnSpc>
-              <a:buNone/>
-            </a:pPr>
-            <a:r>
-              <a:rPr lang="en-US" sz="1050" dirty="0">
-                <a:solidFill>
-                  <a:srgbClr val="1A1A2E"/>
-                </a:solidFill>
-                <a:latin typeface="Courier New" pitchFamily="34" charset="0"/>
-                <a:ea typeface="Courier New" pitchFamily="34" charset="-122"/>
-                <a:cs typeface="Courier New" pitchFamily="34" charset="-120"/>
-              </a:rPr>
-              <a:t>venue_type · geo_cluster · traffic_tier</a:t>
-            </a:r>
-            <a:endParaRPr lang="en-US" sz="1050" dirty="0"/>
-          </a:p>
-          <a:p>
-            <a:pPr indent="0" marL="0">
-              <a:lnSpc>
-                <a:spcPts val="1700"/>
-              </a:lnSpc>
-              <a:buNone/>
-            </a:pPr>
-            <a:r>
-              <a:rPr lang="en-US" sz="1050" dirty="0">
-                <a:solidFill>
-                  <a:srgbClr val="1A1A2E"/>
-                </a:solidFill>
-                <a:latin typeface="Courier New" pitchFamily="34" charset="0"/>
-                <a:ea typeface="Courier New" pitchFamily="34" charset="-122"/>
-                <a:cs typeface="Courier New" pitchFamily="34" charset="-120"/>
-              </a:rPr>
-              <a:t>baseline_level · dwell_time_min</a:t>
-            </a:r>
-            <a:endParaRPr lang="en-US" sz="1050" dirty="0"/>
-          </a:p>
-          <a:p>
-            <a:pPr indent="0" marL="0">
-              <a:lnSpc>
-                <a:spcPts val="1700"/>
-              </a:lnSpc>
-              <a:buNone/>
-            </a:pPr>
-            <a:r>
-              <a:rPr lang="en-US" sz="1050" dirty="0">
-                <a:solidFill>
-                  <a:srgbClr val="1A1A2E"/>
-                </a:solidFill>
-                <a:latin typeface="Courier New" pitchFamily="34" charset="0"/>
-                <a:ea typeface="Courier New" pitchFamily="34" charset="-122"/>
-                <a:cs typeface="Courier New" pitchFamily="34" charset="-120"/>
-              </a:rPr>
-              <a:t>screen_count · audience_quality</a:t>
-            </a:r>
-            <a:endParaRPr lang="en-US" sz="1050" dirty="0"/>
-          </a:p>
-        </p:txBody>
-      </p:sp>
-      <p:sp>
-        <p:nvSpPr>
-          <p:cNvPr id="14" name="Shape 12"/>
-          <p:cNvSpPr/>
-          <p:nvPr/>
-        </p:nvSpPr>
-        <p:spPr>
-          <a:xfrm>
-            <a:off x="6263640" y="3767328"/>
-            <a:ext cx="5394960" cy="1325880"/>
-          </a:xfrm>
-          <a:prstGeom prst="roundRect">
-            <a:avLst>
-              <a:gd name="adj" fmla="val 4828"/>
-            </a:avLst>
-          </a:prstGeom>
-          <a:solidFill>
-            <a:srgbClr val="FDF1E3"/>
-          </a:solidFill>
-          <a:ln/>
-        </p:spPr>
-      </p:sp>
-      <p:sp>
-        <p:nvSpPr>
-          <p:cNvPr id="15" name="Text 13"/>
-          <p:cNvSpPr/>
-          <p:nvPr/>
-        </p:nvSpPr>
-        <p:spPr>
-          <a:xfrm>
-            <a:off x="6492240" y="3886200"/>
-            <a:ext cx="4937760" cy="274320"/>
-          </a:xfrm>
-          <a:prstGeom prst="rect">
-            <a:avLst/>
-          </a:prstGeom>
-          <a:noFill/>
-          <a:ln/>
-        </p:spPr>
-        <p:txBody>
-          <a:bodyPr wrap="square" rtlCol="0" anchor="ctr"/>
-          <a:lstStyle/>
-          <a:p>
-            <a:pPr indent="0" marL="0">
-              <a:buNone/>
-            </a:pPr>
-            <a:r>
-              <a:rPr lang="en-US" sz="1030" b="1" dirty="0">
-                <a:solidFill>
-                  <a:srgbClr val="8A4B0A"/>
-                </a:solidFill>
-                <a:latin typeface="Cambria" pitchFamily="34" charset="0"/>
-                <a:ea typeface="Cambria" pitchFamily="34" charset="-122"/>
-                <a:cs typeface="Cambria" pitchFamily="34" charset="-120"/>
-              </a:rPr>
-              <a:t>From the Q1/Q2 causal pipeline (RCT: Slide 7 · MMM: Slide 10)</a:t>
-            </a:r>
-            <a:endParaRPr lang="en-US" sz="1030" dirty="0"/>
-          </a:p>
-        </p:txBody>
-      </p:sp>
-      <p:sp>
-        <p:nvSpPr>
-          <p:cNvPr id="16" name="Text 14"/>
-          <p:cNvSpPr/>
-          <p:nvPr/>
-        </p:nvSpPr>
-        <p:spPr>
-          <a:xfrm>
-            <a:off x="6492240" y="4187952"/>
-            <a:ext cx="4937760" cy="868680"/>
-          </a:xfrm>
-          <a:prstGeom prst="rect">
-            <a:avLst/>
-          </a:prstGeom>
-          <a:noFill/>
-          <a:ln/>
-        </p:spPr>
-        <p:txBody>
-          <a:bodyPr wrap="square" rtlCol="0" anchor="ctr"/>
-          <a:lstStyle/>
-          <a:p>
-            <a:pPr indent="0" marL="0">
-              <a:lnSpc>
-                <a:spcPts val="1250"/>
-              </a:lnSpc>
-              <a:buNone/>
-            </a:pPr>
-            <a:r>
-              <a:rPr lang="en-US" sz="970" dirty="0">
-                <a:solidFill>
-                  <a:srgbClr val="8A4B0A"/>
-                </a:solidFill>
-                <a:latin typeface="Calibri" pitchFamily="34" charset="0"/>
-                <a:ea typeface="Calibri" pitchFamily="34" charset="-122"/>
-                <a:cs typeface="Calibri" pitchFamily="34" charset="-120"/>
-              </a:rPr>
-              <a:t>calibrated_lift_feature — the RCT-calibrated per-exposure lift from the MMM. This is where the advertising-incrementality pipeline plugs into the venue-economics side — the connection promised on Slide 14, not a separate silo.</a:t>
-            </a:r>
-            <a:endParaRPr lang="en-US" sz="970" dirty="0"/>
-          </a:p>
-        </p:txBody>
-      </p:sp>
-      <p:sp>
-        <p:nvSpPr>
-          <p:cNvPr id="17" name="Shape 15"/>
-          <p:cNvSpPr/>
-          <p:nvPr/>
-        </p:nvSpPr>
-        <p:spPr>
-          <a:xfrm>
-            <a:off x="548640" y="5257800"/>
-            <a:ext cx="11091672" cy="960120"/>
-          </a:xfrm>
-          <a:prstGeom prst="roundRect">
-            <a:avLst>
-              <a:gd name="adj" fmla="val 5714"/>
-            </a:avLst>
-          </a:prstGeom>
-          <a:solidFill>
-            <a:srgbClr val="F5F7FC"/>
-          </a:solidFill>
-          <a:ln/>
-        </p:spPr>
-      </p:sp>
-      <p:sp>
-        <p:nvSpPr>
-          <p:cNvPr id="18" name="Text 16"/>
-          <p:cNvSpPr/>
-          <p:nvPr/>
-        </p:nvSpPr>
-        <p:spPr>
-          <a:xfrm>
-            <a:off x="777240" y="5367528"/>
-            <a:ext cx="10607040" cy="777240"/>
-          </a:xfrm>
-          <a:prstGeom prst="rect">
-            <a:avLst/>
-          </a:prstGeom>
-          <a:noFill/>
-          <a:ln/>
-        </p:spPr>
-        <p:txBody>
-          <a:bodyPr wrap="square" rtlCol="0" anchor="ctr"/>
-          <a:lstStyle/>
-          <a:p>
-            <a:pPr indent="0" marL="0">
-              <a:lnSpc>
-                <a:spcPts val="1400"/>
-              </a:lnSpc>
-              <a:buNone/>
-            </a:pPr>
-            <a:r>
-              <a:rPr lang="en-US" sz="1050" i="1" dirty="0">
-                <a:solidFill>
-                  <a:srgbClr val="1A1A2E"/>
-                </a:solidFill>
-                <a:latin typeface="Calibri" pitchFamily="34" charset="0"/>
-                <a:ea typeface="Calibri" pitchFamily="34" charset="-122"/>
-                <a:cs typeface="Calibri" pitchFamily="34" charset="-120"/>
-              </a:rPr>
-              <a:t>Method, honestly: held-out metrics (next slide) come from a genuine 30% test split, stratified by venue_type — never train-set fit. Under-monetization flags come from 5-fold out-of-fold predictions — every venue's flag uses a model that never saw its own revenue. Prospect venues (no revenue history) are scored by that same trained model, not a separate heuristic.</a:t>
-            </a:r>
-            <a:endParaRPr lang="en-US" sz="1050" dirty="0"/>
-          </a:p>
-        </p:txBody>
-      </p:sp>
-      <p:sp>
-        <p:nvSpPr>
-          <p:cNvPr id="19" name="Text 17"/>
-          <p:cNvSpPr/>
-          <p:nvPr/>
-        </p:nvSpPr>
-        <p:spPr>
-          <a:xfrm>
-            <a:off x="457200" y="6537960"/>
-            <a:ext cx="7315200" cy="274320"/>
-          </a:xfrm>
-          <a:prstGeom prst="rect">
-            <a:avLst/>
-          </a:prstGeom>
-          <a:noFill/>
-          <a:ln/>
-        </p:spPr>
-        <p:txBody>
-          <a:bodyPr wrap="square" rtlCol="0" anchor="ctr"/>
-          <a:lstStyle/>
-          <a:p>
-            <a:pPr indent="0" marL="0">
-              <a:buNone/>
-            </a:pPr>
-            <a:r>
-              <a:rPr lang="en-US" sz="900" dirty="0">
-                <a:solidFill>
-                  <a:srgbClr val="5B6178"/>
-                </a:solidFill>
-                <a:latin typeface="Calibri" pitchFamily="34" charset="0"/>
-                <a:ea typeface="Calibri" pitchFamily="34" charset="-122"/>
-                <a:cs typeface="Calibri" pitchFamily="34" charset="-120"/>
-              </a:rPr>
-              <a:t>Venue economics — model &amp; inputs</a:t>
-            </a:r>
-            <a:endParaRPr lang="en-US" sz="900" dirty="0"/>
           </a:p>
         </p:txBody>
       </p:sp>
@@ -9797,7 +10096,7 @@
               <a:buNone/>
             </a:pPr>
             <a:r>
-              <a:rPr lang="en-US" sz="2500" b="1" dirty="0">
+              <a:rPr lang="en-US" sz="2300" b="1" dirty="0">
                 <a:solidFill>
                   <a:srgbClr val="1E2761"/>
                 </a:solidFill>
@@ -9805,9 +10104,9 @@
                 <a:ea typeface="Cambria" pitchFamily="34" charset="-122"/>
                 <a:cs typeface="Cambria" pitchFamily="34" charset="-120"/>
               </a:rPr>
-              <a:t>Predicting venue ad-revenue, honestly</a:t>
-            </a:r>
-            <a:endParaRPr lang="en-US" sz="2500" dirty="0"/>
+              <a:t>Venue revenue model: what feeds in, and why this model</a:t>
+            </a:r>
+            <a:endParaRPr lang="en-US" sz="2300" dirty="0"/>
           </a:p>
         </p:txBody>
       </p:sp>
@@ -9871,7 +10170,7 @@
                 <a:ea typeface="Calibri" pitchFamily="34" charset="-122"/>
                 <a:cs typeface="Calibri" pitchFamily="34" charset="-120"/>
               </a:rPr>
-              <a:t>Step 5 of 6 · Answers Q3</a:t>
+              <a:t>Step 5 setup · Answers Q3</a:t>
             </a:r>
             <a:endParaRPr lang="en-US" sz="950" dirty="0"/>
           </a:p>
@@ -9886,19 +10185,22 @@
         <p:spPr>
           <a:xfrm>
             <a:off x="548640" y="1005840"/>
-            <a:ext cx="10972800" cy="365760"/>
-          </a:xfrm>
-          <a:prstGeom prst="rect">
-            <a:avLst/>
-          </a:prstGeom>
-          <a:noFill/>
-          <a:ln/>
-        </p:spPr>
-        <p:txBody>
-          <a:bodyPr wrap="square" rtlCol="0" anchor="ctr"/>
-          <a:lstStyle/>
-          <a:p>
-            <a:pPr indent="0" marL="0">
+            <a:ext cx="10972800" cy="411480"/>
+          </a:xfrm>
+          <a:prstGeom prst="rect">
+            <a:avLst/>
+          </a:prstGeom>
+          <a:noFill/>
+          <a:ln/>
+        </p:spPr>
+        <p:txBody>
+          <a:bodyPr wrap="square" rtlCol="0" anchor="ctr"/>
+          <a:lstStyle/>
+          <a:p>
+            <a:pPr indent="0" marL="0">
+              <a:lnSpc>
+                <a:spcPts val="1500"/>
+              </a:lnSpc>
               <a:buNone/>
             </a:pPr>
             <a:r>
@@ -9910,7 +10212,7 @@
                 <a:ea typeface="Calibri" pitchFamily="34" charset="-122"/>
                 <a:cs typeface="Calibri" pitchFamily="34" charset="-120"/>
               </a:rPr>
-              <a:t>Held-out evaluation, feature importance, and the venues these numbers actually flag (model &amp; features: previous slide).</a:t>
+              <a:t>Can this venue's own characteristics + a validated advertising effect predict what it actually earns — and surface who's under-monetized or high-potential?</a:t>
             </a:r>
             <a:endParaRPr lang="en-US" sz="1250" dirty="0"/>
           </a:p>
@@ -9918,18 +10220,222 @@
       </p:sp>
       <p:sp>
         <p:nvSpPr>
-          <p:cNvPr id="6" name="Shape 4"/>
-          <p:cNvSpPr/>
-          <p:nvPr/>
-        </p:nvSpPr>
-        <p:spPr>
-          <a:xfrm>
-            <a:off x="548640" y="1508760"/>
-            <a:ext cx="2651760" cy="1051560"/>
+          <p:cNvPr id="6" name="Text 4"/>
+          <p:cNvSpPr/>
+          <p:nvPr/>
+        </p:nvSpPr>
+        <p:spPr>
+          <a:xfrm>
+            <a:off x="548640" y="1645920"/>
+            <a:ext cx="5394960" cy="502920"/>
+          </a:xfrm>
+          <a:prstGeom prst="rect">
+            <a:avLst/>
+          </a:prstGeom>
+          <a:noFill/>
+          <a:ln/>
+        </p:spPr>
+        <p:txBody>
+          <a:bodyPr wrap="square" rtlCol="0" anchor="ctr"/>
+          <a:lstStyle/>
+          <a:p>
+            <a:pPr indent="0" marL="0">
+              <a:lnSpc>
+                <a:spcPts val="1600"/>
+              </a:lnSpc>
+              <a:buNone/>
+            </a:pPr>
+            <a:r>
+              <a:rPr lang="en-US" sz="1350" b="1" dirty="0">
+                <a:solidFill>
+                  <a:srgbClr val="1E2761"/>
+                </a:solidFill>
+                <a:latin typeface="Cambria" pitchFamily="34" charset="0"/>
+                <a:ea typeface="Cambria" pitchFamily="34" charset="-122"/>
+                <a:cs typeface="Cambria" pitchFamily="34" charset="-120"/>
+              </a:rPr>
+              <a:t>Model: HistGradientBoostingRegressor (sklearn)</a:t>
+            </a:r>
+            <a:endParaRPr lang="en-US" sz="1350" dirty="0"/>
+          </a:p>
+        </p:txBody>
+      </p:sp>
+      <p:sp>
+        <p:nvSpPr>
+          <p:cNvPr id="7" name="Text 5"/>
+          <p:cNvSpPr/>
+          <p:nvPr/>
+        </p:nvSpPr>
+        <p:spPr>
+          <a:xfrm>
+            <a:off x="548640" y="2194560"/>
+            <a:ext cx="5394960" cy="1188720"/>
+          </a:xfrm>
+          <a:prstGeom prst="rect">
+            <a:avLst/>
+          </a:prstGeom>
+          <a:noFill/>
+          <a:ln/>
+        </p:spPr>
+        <p:txBody>
+          <a:bodyPr wrap="square" rtlCol="0" anchor="ctr"/>
+          <a:lstStyle/>
+          <a:p>
+            <a:pPr indent="0" marL="0">
+              <a:lnSpc>
+                <a:spcPts val="1400"/>
+              </a:lnSpc>
+              <a:buNone/>
+            </a:pPr>
+            <a:r>
+              <a:rPr lang="en-US" sz="1050" dirty="0">
+                <a:solidFill>
+                  <a:srgbClr val="1A1A2E"/>
+                </a:solidFill>
+                <a:latin typeface="Calibri" pitchFamily="34" charset="0"/>
+                <a:ea typeface="Calibri" pitchFamily="34" charset="-122"/>
+                <a:cs typeface="Calibri" pitchFamily="34" charset="-120"/>
+              </a:rPr>
+              <a:t>Chosen because it handles venue_type / geo_cluster / traffic_tier as native categorical splits. geo_cluster alone has 20+ levels — one-hot encoding that would blow the feature space up and dilute each split's signal. categorical_features="from_dtype" avoids that entirely, no preprocessing needed.</a:t>
+            </a:r>
+            <a:endParaRPr lang="en-US" sz="1050" dirty="0"/>
+          </a:p>
+        </p:txBody>
+      </p:sp>
+      <p:sp>
+        <p:nvSpPr>
+          <p:cNvPr id="8" name="Text 6"/>
+          <p:cNvSpPr/>
+          <p:nvPr/>
+        </p:nvSpPr>
+        <p:spPr>
+          <a:xfrm>
+            <a:off x="548640" y="3520440"/>
+            <a:ext cx="5394960" cy="365760"/>
+          </a:xfrm>
+          <a:prstGeom prst="rect">
+            <a:avLst/>
+          </a:prstGeom>
+          <a:noFill/>
+          <a:ln/>
+        </p:spPr>
+        <p:txBody>
+          <a:bodyPr wrap="square" rtlCol="0" anchor="ctr"/>
+          <a:lstStyle/>
+          <a:p>
+            <a:pPr indent="0" marL="0">
+              <a:buNone/>
+            </a:pPr>
+            <a:r>
+              <a:rPr lang="en-US" sz="1350" b="1" dirty="0">
+                <a:solidFill>
+                  <a:srgbClr val="1E2761"/>
+                </a:solidFill>
+                <a:latin typeface="Cambria" pitchFamily="34" charset="0"/>
+                <a:ea typeface="Cambria" pitchFamily="34" charset="-122"/>
+                <a:cs typeface="Cambria" pitchFamily="34" charset="-120"/>
+              </a:rPr>
+              <a:t>Target: realized_ad_revenue</a:t>
+            </a:r>
+            <a:endParaRPr lang="en-US" sz="1350" dirty="0"/>
+          </a:p>
+        </p:txBody>
+      </p:sp>
+      <p:sp>
+        <p:nvSpPr>
+          <p:cNvPr id="9" name="Text 7"/>
+          <p:cNvSpPr/>
+          <p:nvPr/>
+        </p:nvSpPr>
+        <p:spPr>
+          <a:xfrm>
+            <a:off x="548640" y="3977640"/>
+            <a:ext cx="5394960" cy="365760"/>
+          </a:xfrm>
+          <a:prstGeom prst="rect">
+            <a:avLst/>
+          </a:prstGeom>
+          <a:noFill/>
+          <a:ln/>
+        </p:spPr>
+        <p:txBody>
+          <a:bodyPr wrap="square" rtlCol="0" anchor="ctr"/>
+          <a:lstStyle/>
+          <a:p>
+            <a:pPr indent="0" marL="0">
+              <a:lnSpc>
+                <a:spcPts val="1400"/>
+              </a:lnSpc>
+              <a:buNone/>
+            </a:pPr>
+            <a:r>
+              <a:rPr lang="en-US" sz="1050" i="1" dirty="0">
+                <a:solidFill>
+                  <a:srgbClr val="5B6178"/>
+                </a:solidFill>
+                <a:latin typeface="Calibri" pitchFamily="34" charset="0"/>
+                <a:ea typeface="Calibri" pitchFamily="34" charset="-122"/>
+                <a:cs typeface="Calibri" pitchFamily="34" charset="-120"/>
+              </a:rPr>
+              <a:t>The venue's actual weekly $ ad revenue — not a proxy, not a survey response.</a:t>
+            </a:r>
+            <a:endParaRPr lang="en-US" sz="1050" dirty="0"/>
+          </a:p>
+        </p:txBody>
+      </p:sp>
+      <p:sp>
+        <p:nvSpPr>
+          <p:cNvPr id="10" name="Text 8"/>
+          <p:cNvSpPr/>
+          <p:nvPr/>
+        </p:nvSpPr>
+        <p:spPr>
+          <a:xfrm>
+            <a:off x="6263640" y="1645920"/>
+            <a:ext cx="5394960" cy="320040"/>
+          </a:xfrm>
+          <a:prstGeom prst="rect">
+            <a:avLst/>
+          </a:prstGeom>
+          <a:noFill/>
+          <a:ln/>
+        </p:spPr>
+        <p:txBody>
+          <a:bodyPr wrap="square" rtlCol="0" anchor="ctr"/>
+          <a:lstStyle/>
+          <a:p>
+            <a:pPr indent="0" marL="0">
+              <a:buNone/>
+            </a:pPr>
+            <a:r>
+              <a:rPr lang="en-US" sz="1350" b="1" dirty="0">
+                <a:solidFill>
+                  <a:srgbClr val="1E2761"/>
+                </a:solidFill>
+                <a:latin typeface="Cambria" pitchFamily="34" charset="0"/>
+                <a:ea typeface="Cambria" pitchFamily="34" charset="-122"/>
+                <a:cs typeface="Cambria" pitchFamily="34" charset="-120"/>
+              </a:rPr>
+              <a:t>Features — two sources</a:t>
+            </a:r>
+            <a:endParaRPr lang="en-US" sz="1350" dirty="0"/>
+          </a:p>
+        </p:txBody>
+      </p:sp>
+      <p:sp>
+        <p:nvSpPr>
+          <p:cNvPr id="11" name="Shape 9"/>
+          <p:cNvSpPr/>
+          <p:nvPr/>
+        </p:nvSpPr>
+        <p:spPr>
+          <a:xfrm>
+            <a:off x="6263640" y="2029968"/>
+            <a:ext cx="5394960" cy="1600200"/>
           </a:xfrm>
           <a:prstGeom prst="roundRect">
             <a:avLst>
-              <a:gd name="adj" fmla="val 6957"/>
+              <a:gd name="adj" fmla="val 4000"/>
             </a:avLst>
           </a:prstGeom>
           <a:solidFill>
@@ -9940,96 +10446,242 @@
       </p:sp>
       <p:sp>
         <p:nvSpPr>
-          <p:cNvPr id="7" name="Text 5"/>
-          <p:cNvSpPr/>
-          <p:nvPr/>
-        </p:nvSpPr>
-        <p:spPr>
-          <a:xfrm>
-            <a:off x="685800" y="1618488"/>
-            <a:ext cx="2377440" cy="502920"/>
-          </a:xfrm>
-          <a:prstGeom prst="rect">
-            <a:avLst/>
-          </a:prstGeom>
-          <a:noFill/>
-          <a:ln/>
-        </p:spPr>
-        <p:txBody>
-          <a:bodyPr wrap="square" rtlCol="0" anchor="ctr"/>
-          <a:lstStyle/>
-          <a:p>
-            <a:pPr indent="0" marL="0">
-              <a:buNone/>
-            </a:pPr>
-            <a:r>
-              <a:rPr lang="en-US" sz="2200" b="1" dirty="0">
+          <p:cNvPr id="12" name="Text 10"/>
+          <p:cNvSpPr/>
+          <p:nvPr/>
+        </p:nvSpPr>
+        <p:spPr>
+          <a:xfrm>
+            <a:off x="6492240" y="2148840"/>
+            <a:ext cx="4937760" cy="274320"/>
+          </a:xfrm>
+          <a:prstGeom prst="rect">
+            <a:avLst/>
+          </a:prstGeom>
+          <a:noFill/>
+          <a:ln/>
+        </p:spPr>
+        <p:txBody>
+          <a:bodyPr wrap="square" rtlCol="0" anchor="ctr"/>
+          <a:lstStyle/>
+          <a:p>
+            <a:pPr indent="0" marL="0">
+              <a:buNone/>
+            </a:pPr>
+            <a:r>
+              <a:rPr lang="en-US" sz="1100" b="1" dirty="0">
                 <a:solidFill>
                   <a:srgbClr val="1E2761"/>
                 </a:solidFill>
-                <a:latin typeface="Calibri" pitchFamily="34" charset="0"/>
-                <a:ea typeface="Calibri" pitchFamily="34" charset="-122"/>
-                <a:cs typeface="Calibri" pitchFamily="34" charset="-120"/>
-              </a:rPr>
-              <a:t>0.84</a:t>
-            </a:r>
-            <a:endParaRPr lang="en-US" sz="2200" dirty="0"/>
-          </a:p>
-        </p:txBody>
-      </p:sp>
-      <p:sp>
-        <p:nvSpPr>
-          <p:cNvPr id="8" name="Text 6"/>
-          <p:cNvSpPr/>
-          <p:nvPr/>
-        </p:nvSpPr>
-        <p:spPr>
-          <a:xfrm>
-            <a:off x="685800" y="2130552"/>
-            <a:ext cx="2377440" cy="365760"/>
-          </a:xfrm>
-          <a:prstGeom prst="rect">
-            <a:avLst/>
-          </a:prstGeom>
-          <a:noFill/>
-          <a:ln/>
-        </p:spPr>
-        <p:txBody>
-          <a:bodyPr wrap="square" rtlCol="0" anchor="ctr"/>
-          <a:lstStyle/>
-          <a:p>
-            <a:pPr indent="0" marL="0">
-              <a:buNone/>
-            </a:pPr>
-            <a:r>
-              <a:rPr lang="en-US" sz="950" dirty="0">
-                <a:solidFill>
-                  <a:srgbClr val="5B6178"/>
-                </a:solidFill>
-                <a:latin typeface="Calibri" pitchFamily="34" charset="0"/>
-                <a:ea typeface="Calibri" pitchFamily="34" charset="-122"/>
-                <a:cs typeface="Calibri" pitchFamily="34" charset="-120"/>
-              </a:rPr>
-              <a:t>Held-out R²</a:t>
-            </a:r>
-            <a:endParaRPr lang="en-US" sz="950" dirty="0"/>
-          </a:p>
-        </p:txBody>
-      </p:sp>
-      <p:sp>
-        <p:nvSpPr>
-          <p:cNvPr id="9" name="Shape 7"/>
-          <p:cNvSpPr/>
-          <p:nvPr/>
-        </p:nvSpPr>
-        <p:spPr>
-          <a:xfrm>
-            <a:off x="3337560" y="1508760"/>
-            <a:ext cx="2651760" cy="1051560"/>
+                <a:latin typeface="Cambria" pitchFamily="34" charset="0"/>
+                <a:ea typeface="Cambria" pitchFamily="34" charset="-122"/>
+                <a:cs typeface="Cambria" pitchFamily="34" charset="-120"/>
+              </a:rPr>
+              <a:t>This venue's own characteristics</a:t>
+            </a:r>
+            <a:endParaRPr lang="en-US" sz="1100" dirty="0"/>
+          </a:p>
+        </p:txBody>
+      </p:sp>
+      <p:sp>
+        <p:nvSpPr>
+          <p:cNvPr id="13" name="Text 11"/>
+          <p:cNvSpPr/>
+          <p:nvPr/>
+        </p:nvSpPr>
+        <p:spPr>
+          <a:xfrm>
+            <a:off x="6492240" y="2468880"/>
+            <a:ext cx="4937760" cy="1051560"/>
+          </a:xfrm>
+          <a:prstGeom prst="rect">
+            <a:avLst/>
+          </a:prstGeom>
+          <a:noFill/>
+          <a:ln/>
+        </p:spPr>
+        <p:txBody>
+          <a:bodyPr wrap="square" rtlCol="0" anchor="ctr"/>
+          <a:lstStyle/>
+          <a:p>
+            <a:pPr indent="0" marL="0">
+              <a:lnSpc>
+                <a:spcPts val="1700"/>
+              </a:lnSpc>
+              <a:buNone/>
+            </a:pPr>
+            <a:r>
+              <a:rPr lang="en-US" sz="1050" dirty="0">
+                <a:solidFill>
+                  <a:srgbClr val="1A1A2E"/>
+                </a:solidFill>
+                <a:latin typeface="Courier New" pitchFamily="34" charset="0"/>
+                <a:ea typeface="Courier New" pitchFamily="34" charset="-122"/>
+                <a:cs typeface="Courier New" pitchFamily="34" charset="-120"/>
+              </a:rPr>
+              <a:t>venue_type · geo_cluster · traffic_tier</a:t>
+            </a:r>
+            <a:endParaRPr lang="en-US" sz="1050" dirty="0"/>
+          </a:p>
+          <a:p>
+            <a:pPr indent="0" marL="0">
+              <a:lnSpc>
+                <a:spcPts val="1700"/>
+              </a:lnSpc>
+              <a:buNone/>
+            </a:pPr>
+            <a:r>
+              <a:rPr lang="en-US" sz="1050" dirty="0">
+                <a:solidFill>
+                  <a:srgbClr val="1A1A2E"/>
+                </a:solidFill>
+                <a:latin typeface="Courier New" pitchFamily="34" charset="0"/>
+                <a:ea typeface="Courier New" pitchFamily="34" charset="-122"/>
+                <a:cs typeface="Courier New" pitchFamily="34" charset="-120"/>
+              </a:rPr>
+              <a:t>baseline_level · dwell_time_min</a:t>
+            </a:r>
+            <a:endParaRPr lang="en-US" sz="1050" dirty="0"/>
+          </a:p>
+          <a:p>
+            <a:pPr indent="0" marL="0">
+              <a:lnSpc>
+                <a:spcPts val="1700"/>
+              </a:lnSpc>
+              <a:buNone/>
+            </a:pPr>
+            <a:r>
+              <a:rPr lang="en-US" sz="1050" dirty="0">
+                <a:solidFill>
+                  <a:srgbClr val="1A1A2E"/>
+                </a:solidFill>
+                <a:latin typeface="Courier New" pitchFamily="34" charset="0"/>
+                <a:ea typeface="Courier New" pitchFamily="34" charset="-122"/>
+                <a:cs typeface="Courier New" pitchFamily="34" charset="-120"/>
+              </a:rPr>
+              <a:t>screen_count · audience_quality</a:t>
+            </a:r>
+            <a:endParaRPr lang="en-US" sz="1050" dirty="0"/>
+          </a:p>
+        </p:txBody>
+      </p:sp>
+      <p:sp>
+        <p:nvSpPr>
+          <p:cNvPr id="14" name="Shape 12"/>
+          <p:cNvSpPr/>
+          <p:nvPr/>
+        </p:nvSpPr>
+        <p:spPr>
+          <a:xfrm>
+            <a:off x="6263640" y="3767328"/>
+            <a:ext cx="5394960" cy="1325880"/>
           </a:xfrm>
           <a:prstGeom prst="roundRect">
             <a:avLst>
-              <a:gd name="adj" fmla="val 6957"/>
+              <a:gd name="adj" fmla="val 4828"/>
+            </a:avLst>
+          </a:prstGeom>
+          <a:solidFill>
+            <a:srgbClr val="FDF1E3"/>
+          </a:solidFill>
+          <a:ln/>
+        </p:spPr>
+      </p:sp>
+      <p:sp>
+        <p:nvSpPr>
+          <p:cNvPr id="15" name="Text 13"/>
+          <p:cNvSpPr/>
+          <p:nvPr/>
+        </p:nvSpPr>
+        <p:spPr>
+          <a:xfrm>
+            <a:off x="6492240" y="3886200"/>
+            <a:ext cx="4937760" cy="274320"/>
+          </a:xfrm>
+          <a:prstGeom prst="rect">
+            <a:avLst/>
+          </a:prstGeom>
+          <a:noFill/>
+          <a:ln/>
+        </p:spPr>
+        <p:txBody>
+          <a:bodyPr wrap="square" rtlCol="0" anchor="ctr"/>
+          <a:lstStyle/>
+          <a:p>
+            <a:pPr indent="0" marL="0">
+              <a:buNone/>
+            </a:pPr>
+            <a:r>
+              <a:rPr lang="en-US" sz="1030" b="1" dirty="0">
+                <a:solidFill>
+                  <a:srgbClr val="8A4B0A"/>
+                </a:solidFill>
+                <a:latin typeface="Cambria" pitchFamily="34" charset="0"/>
+                <a:ea typeface="Cambria" pitchFamily="34" charset="-122"/>
+                <a:cs typeface="Cambria" pitchFamily="34" charset="-120"/>
+              </a:rPr>
+              <a:t>From the Q1/Q2 causal pipeline (RCT: Slide 7 · MMM: Slide 10)</a:t>
+            </a:r>
+            <a:endParaRPr lang="en-US" sz="1030" dirty="0"/>
+          </a:p>
+        </p:txBody>
+      </p:sp>
+      <p:sp>
+        <p:nvSpPr>
+          <p:cNvPr id="16" name="Text 14"/>
+          <p:cNvSpPr/>
+          <p:nvPr/>
+        </p:nvSpPr>
+        <p:spPr>
+          <a:xfrm>
+            <a:off x="6492240" y="4187952"/>
+            <a:ext cx="4937760" cy="868680"/>
+          </a:xfrm>
+          <a:prstGeom prst="rect">
+            <a:avLst/>
+          </a:prstGeom>
+          <a:noFill/>
+          <a:ln/>
+        </p:spPr>
+        <p:txBody>
+          <a:bodyPr wrap="square" rtlCol="0" anchor="ctr"/>
+          <a:lstStyle/>
+          <a:p>
+            <a:pPr indent="0" marL="0">
+              <a:lnSpc>
+                <a:spcPts val="1250"/>
+              </a:lnSpc>
+              <a:buNone/>
+            </a:pPr>
+            <a:r>
+              <a:rPr lang="en-US" sz="970" dirty="0">
+                <a:solidFill>
+                  <a:srgbClr val="8A4B0A"/>
+                </a:solidFill>
+                <a:latin typeface="Calibri" pitchFamily="34" charset="0"/>
+                <a:ea typeface="Calibri" pitchFamily="34" charset="-122"/>
+                <a:cs typeface="Calibri" pitchFamily="34" charset="-120"/>
+              </a:rPr>
+              <a:t>calibrated_lift_feature — the RCT-calibrated per-exposure lift from the MMM. This is where the advertising-incrementality pipeline plugs into the venue-economics side — the connection promised on Slide 14, not a separate silo.</a:t>
+            </a:r>
+            <a:endParaRPr lang="en-US" sz="970" dirty="0"/>
+          </a:p>
+        </p:txBody>
+      </p:sp>
+      <p:sp>
+        <p:nvSpPr>
+          <p:cNvPr id="17" name="Shape 15"/>
+          <p:cNvSpPr/>
+          <p:nvPr/>
+        </p:nvSpPr>
+        <p:spPr>
+          <a:xfrm>
+            <a:off x="548640" y="5257800"/>
+            <a:ext cx="11091672" cy="960120"/>
+          </a:xfrm>
+          <a:prstGeom prst="roundRect">
+            <a:avLst>
+              <a:gd name="adj" fmla="val 5714"/>
             </a:avLst>
           </a:prstGeom>
           <a:solidFill>
@@ -10040,308 +10692,14 @@
       </p:sp>
       <p:sp>
         <p:nvSpPr>
-          <p:cNvPr id="10" name="Text 8"/>
-          <p:cNvSpPr/>
-          <p:nvPr/>
-        </p:nvSpPr>
-        <p:spPr>
-          <a:xfrm>
-            <a:off x="3474720" y="1618488"/>
-            <a:ext cx="2377440" cy="502920"/>
-          </a:xfrm>
-          <a:prstGeom prst="rect">
-            <a:avLst/>
-          </a:prstGeom>
-          <a:noFill/>
-          <a:ln/>
-        </p:spPr>
-        <p:txBody>
-          <a:bodyPr wrap="square" rtlCol="0" anchor="ctr"/>
-          <a:lstStyle/>
-          <a:p>
-            <a:pPr indent="0" marL="0">
-              <a:buNone/>
-            </a:pPr>
-            <a:r>
-              <a:rPr lang="en-US" sz="2200" b="1" dirty="0">
-                <a:solidFill>
-                  <a:srgbClr val="1E2761"/>
-                </a:solidFill>
-                <a:latin typeface="Calibri" pitchFamily="34" charset="0"/>
-                <a:ea typeface="Calibri" pitchFamily="34" charset="-122"/>
-                <a:cs typeface="Calibri" pitchFamily="34" charset="-120"/>
-              </a:rPr>
-              <a:t>22.1%</a:t>
-            </a:r>
-            <a:endParaRPr lang="en-US" sz="2200" dirty="0"/>
-          </a:p>
-        </p:txBody>
-      </p:sp>
-      <p:sp>
-        <p:nvSpPr>
-          <p:cNvPr id="11" name="Text 9"/>
-          <p:cNvSpPr/>
-          <p:nvPr/>
-        </p:nvSpPr>
-        <p:spPr>
-          <a:xfrm>
-            <a:off x="3474720" y="2130552"/>
-            <a:ext cx="2377440" cy="365760"/>
-          </a:xfrm>
-          <a:prstGeom prst="rect">
-            <a:avLst/>
-          </a:prstGeom>
-          <a:noFill/>
-          <a:ln/>
-        </p:spPr>
-        <p:txBody>
-          <a:bodyPr wrap="square" rtlCol="0" anchor="ctr"/>
-          <a:lstStyle/>
-          <a:p>
-            <a:pPr indent="0" marL="0">
-              <a:buNone/>
-            </a:pPr>
-            <a:r>
-              <a:rPr lang="en-US" sz="950" dirty="0">
-                <a:solidFill>
-                  <a:srgbClr val="5B6178"/>
-                </a:solidFill>
-                <a:latin typeface="Calibri" pitchFamily="34" charset="0"/>
-                <a:ea typeface="Calibri" pitchFamily="34" charset="-122"/>
-                <a:cs typeface="Calibri" pitchFamily="34" charset="-120"/>
-              </a:rPr>
-              <a:t>Held-out MAPE</a:t>
-            </a:r>
-            <a:endParaRPr lang="en-US" sz="950" dirty="0"/>
-          </a:p>
-        </p:txBody>
-      </p:sp>
-      <p:sp>
-        <p:nvSpPr>
-          <p:cNvPr id="12" name="Shape 10"/>
-          <p:cNvSpPr/>
-          <p:nvPr/>
-        </p:nvSpPr>
-        <p:spPr>
-          <a:xfrm>
-            <a:off x="6126480" y="1508760"/>
-            <a:ext cx="2651760" cy="1051560"/>
-          </a:xfrm>
-          <a:prstGeom prst="roundRect">
-            <a:avLst>
-              <a:gd name="adj" fmla="val 6957"/>
-            </a:avLst>
-          </a:prstGeom>
-          <a:solidFill>
-            <a:srgbClr val="F5F7FC"/>
-          </a:solidFill>
-          <a:ln/>
-        </p:spPr>
-      </p:sp>
-      <p:sp>
-        <p:nvSpPr>
-          <p:cNvPr id="13" name="Text 11"/>
-          <p:cNvSpPr/>
-          <p:nvPr/>
-        </p:nvSpPr>
-        <p:spPr>
-          <a:xfrm>
-            <a:off x="6263640" y="1618488"/>
-            <a:ext cx="2377440" cy="502920"/>
-          </a:xfrm>
-          <a:prstGeom prst="rect">
-            <a:avLst/>
-          </a:prstGeom>
-          <a:noFill/>
-          <a:ln/>
-        </p:spPr>
-        <p:txBody>
-          <a:bodyPr wrap="square" rtlCol="0" anchor="ctr"/>
-          <a:lstStyle/>
-          <a:p>
-            <a:pPr indent="0" marL="0">
-              <a:buNone/>
-            </a:pPr>
-            <a:r>
-              <a:rPr lang="en-US" sz="2200" b="1" dirty="0">
-                <a:solidFill>
-                  <a:srgbClr val="1E2761"/>
-                </a:solidFill>
-                <a:latin typeface="Calibri" pitchFamily="34" charset="0"/>
-                <a:ea typeface="Calibri" pitchFamily="34" charset="-122"/>
-                <a:cs typeface="Calibri" pitchFamily="34" charset="-120"/>
-              </a:rPr>
-              <a:t>$45</a:t>
-            </a:r>
-            <a:endParaRPr lang="en-US" sz="2200" dirty="0"/>
-          </a:p>
-        </p:txBody>
-      </p:sp>
-      <p:sp>
-        <p:nvSpPr>
-          <p:cNvPr id="14" name="Text 12"/>
-          <p:cNvSpPr/>
-          <p:nvPr/>
-        </p:nvSpPr>
-        <p:spPr>
-          <a:xfrm>
-            <a:off x="6263640" y="2130552"/>
-            <a:ext cx="2377440" cy="365760"/>
-          </a:xfrm>
-          <a:prstGeom prst="rect">
-            <a:avLst/>
-          </a:prstGeom>
-          <a:noFill/>
-          <a:ln/>
-        </p:spPr>
-        <p:txBody>
-          <a:bodyPr wrap="square" rtlCol="0" anchor="ctr"/>
-          <a:lstStyle/>
-          <a:p>
-            <a:pPr indent="0" marL="0">
-              <a:buNone/>
-            </a:pPr>
-            <a:r>
-              <a:rPr lang="en-US" sz="950" dirty="0">
-                <a:solidFill>
-                  <a:srgbClr val="5B6178"/>
-                </a:solidFill>
-                <a:latin typeface="Calibri" pitchFamily="34" charset="0"/>
-                <a:ea typeface="Calibri" pitchFamily="34" charset="-122"/>
-                <a:cs typeface="Calibri" pitchFamily="34" charset="-120"/>
-              </a:rPr>
-              <a:t>Held-out MAE</a:t>
-            </a:r>
-            <a:endParaRPr lang="en-US" sz="950" dirty="0"/>
-          </a:p>
-        </p:txBody>
-      </p:sp>
-      <p:sp>
-        <p:nvSpPr>
-          <p:cNvPr id="15" name="Shape 13"/>
-          <p:cNvSpPr/>
-          <p:nvPr/>
-        </p:nvSpPr>
-        <p:spPr>
-          <a:xfrm>
-            <a:off x="8915400" y="1508760"/>
-            <a:ext cx="2651760" cy="1051560"/>
-          </a:xfrm>
-          <a:prstGeom prst="roundRect">
-            <a:avLst>
-              <a:gd name="adj" fmla="val 6957"/>
-            </a:avLst>
-          </a:prstGeom>
-          <a:solidFill>
-            <a:srgbClr val="F5F7FC"/>
-          </a:solidFill>
-          <a:ln/>
-        </p:spPr>
-      </p:sp>
-      <p:sp>
-        <p:nvSpPr>
-          <p:cNvPr id="16" name="Text 14"/>
-          <p:cNvSpPr/>
-          <p:nvPr/>
-        </p:nvSpPr>
-        <p:spPr>
-          <a:xfrm>
-            <a:off x="9052560" y="1618488"/>
-            <a:ext cx="2377440" cy="502920"/>
-          </a:xfrm>
-          <a:prstGeom prst="rect">
-            <a:avLst/>
-          </a:prstGeom>
-          <a:noFill/>
-          <a:ln/>
-        </p:spPr>
-        <p:txBody>
-          <a:bodyPr wrap="square" rtlCol="0" anchor="ctr"/>
-          <a:lstStyle/>
-          <a:p>
-            <a:pPr indent="0" marL="0">
-              <a:buNone/>
-            </a:pPr>
-            <a:r>
-              <a:rPr lang="en-US" sz="2200" b="1" dirty="0">
-                <a:solidFill>
-                  <a:srgbClr val="1E2761"/>
-                </a:solidFill>
-                <a:latin typeface="Calibri" pitchFamily="34" charset="0"/>
-                <a:ea typeface="Calibri" pitchFamily="34" charset="-122"/>
-                <a:cs typeface="Calibri" pitchFamily="34" charset="-120"/>
-              </a:rPr>
-              <a:t>20</a:t>
-            </a:r>
-            <a:endParaRPr lang="en-US" sz="2200" dirty="0"/>
-          </a:p>
-        </p:txBody>
-      </p:sp>
-      <p:sp>
-        <p:nvSpPr>
-          <p:cNvPr id="17" name="Text 15"/>
-          <p:cNvSpPr/>
-          <p:nvPr/>
-        </p:nvSpPr>
-        <p:spPr>
-          <a:xfrm>
-            <a:off x="9052560" y="2130552"/>
-            <a:ext cx="2377440" cy="365760"/>
-          </a:xfrm>
-          <a:prstGeom prst="rect">
-            <a:avLst/>
-          </a:prstGeom>
-          <a:noFill/>
-          <a:ln/>
-        </p:spPr>
-        <p:txBody>
-          <a:bodyPr wrap="square" rtlCol="0" anchor="ctr"/>
-          <a:lstStyle/>
-          <a:p>
-            <a:pPr indent="0" marL="0">
-              <a:buNone/>
-            </a:pPr>
-            <a:r>
-              <a:rPr lang="en-US" sz="950" dirty="0">
-                <a:solidFill>
-                  <a:srgbClr val="5B6178"/>
-                </a:solidFill>
-                <a:latin typeface="Calibri" pitchFamily="34" charset="0"/>
-                <a:ea typeface="Calibri" pitchFamily="34" charset="-122"/>
-                <a:cs typeface="Calibri" pitchFamily="34" charset="-120"/>
-              </a:rPr>
-              <a:t>Venues flagged</a:t>
-            </a:r>
-            <a:endParaRPr lang="en-US" sz="950" dirty="0"/>
-          </a:p>
-        </p:txBody>
-      </p:sp>
-      <p:graphicFrame>
-        <p:nvGraphicFramePr>
-          <p:cNvPr id="18" name="Chart 0" descr=""/>
-          <p:cNvGraphicFramePr/>
-          <p:nvPr/>
-        </p:nvGraphicFramePr>
-        <p:xfrm>
-          <a:off x="548640" y="2880360"/>
-          <a:ext cx="5394960" cy="2834640"/>
-        </p:xfrm>
-        <a:graphic xmlns:a="http://schemas.openxmlformats.org/drawingml/2006/main">
-          <a:graphicData uri="http://schemas.openxmlformats.org/drawingml/2006/chart">
-            <c:chart xmlns:c="http://schemas.openxmlformats.org/drawingml/2006/chart" r:id="rId1"/>
-          </a:graphicData>
-        </a:graphic>
-      </p:graphicFrame>
-      <p:sp>
-        <p:nvSpPr>
-          <p:cNvPr id="19" name="Text 16"/>
-          <p:cNvSpPr/>
-          <p:nvPr/>
-        </p:nvSpPr>
-        <p:spPr>
-          <a:xfrm>
-            <a:off x="548640" y="5742432"/>
-            <a:ext cx="5394960" cy="320040"/>
+          <p:cNvPr id="18" name="Text 16"/>
+          <p:cNvSpPr/>
+          <p:nvPr/>
+        </p:nvSpPr>
+        <p:spPr>
+          <a:xfrm>
+            <a:off x="777240" y="5367528"/>
+            <a:ext cx="10607040" cy="777240"/>
           </a:xfrm>
           <a:prstGeom prst="rect">
             <a:avLst/>
@@ -10355,129 +10713,12 @@
           <a:p>
             <a:pPr indent="0" marL="0">
               <a:lnSpc>
-                <a:spcPts val="1050"/>
+                <a:spcPts val="1400"/>
               </a:lnSpc>
               <a:buNone/>
             </a:pPr>
             <a:r>
-              <a:rPr lang="en-US" sz="850" i="1" dirty="0">
-                <a:solidFill>
-                  <a:srgbClr val="5B6178"/>
-                </a:solidFill>
-                <a:latin typeface="Calibri" pitchFamily="34" charset="0"/>
-                <a:ea typeface="Calibri" pitchFamily="34" charset="-122"/>
-                <a:cs typeface="Calibri" pitchFamily="34" charset="-120"/>
-              </a:rPr>
-              <a:t>Permutation, not gain-based — gain-based splits are biased toward high-cardinality categoricals like geo_cluster (20+ levels).</a:t>
-            </a:r>
-            <a:endParaRPr lang="en-US" sz="850" dirty="0"/>
-          </a:p>
-        </p:txBody>
-      </p:sp>
-      <p:sp>
-        <p:nvSpPr>
-          <p:cNvPr id="20" name="Text 17"/>
-          <p:cNvSpPr/>
-          <p:nvPr/>
-        </p:nvSpPr>
-        <p:spPr>
-          <a:xfrm>
-            <a:off x="6263640" y="2880360"/>
-            <a:ext cx="5394960" cy="274320"/>
-          </a:xfrm>
-          <a:prstGeom prst="rect">
-            <a:avLst/>
-          </a:prstGeom>
-          <a:noFill/>
-          <a:ln/>
-        </p:spPr>
-        <p:txBody>
-          <a:bodyPr wrap="square" rtlCol="0" anchor="ctr"/>
-          <a:lstStyle/>
-          <a:p>
-            <a:pPr indent="0" marL="0">
-              <a:buNone/>
-            </a:pPr>
-            <a:r>
-              <a:rPr lang="en-US" sz="1200" b="1" dirty="0">
-                <a:solidFill>
-                  <a:srgbClr val="1E2761"/>
-                </a:solidFill>
-                <a:latin typeface="Cambria" pitchFamily="34" charset="0"/>
-                <a:ea typeface="Cambria" pitchFamily="34" charset="-122"/>
-                <a:cs typeface="Cambria" pitchFamily="34" charset="-120"/>
-              </a:rPr>
-              <a:t>Top under-monetized venues (of 20 flagged)</a:t>
-            </a:r>
-            <a:endParaRPr lang="en-US" sz="1200" dirty="0"/>
-          </a:p>
-        </p:txBody>
-      </p:sp>
-      <p:sp>
-        <p:nvSpPr>
-          <p:cNvPr id="21" name="Text 18"/>
-          <p:cNvSpPr/>
-          <p:nvPr/>
-        </p:nvSpPr>
-        <p:spPr>
-          <a:xfrm>
-            <a:off x="6263640" y="3172968"/>
-            <a:ext cx="5394960" cy="201168"/>
-          </a:xfrm>
-          <a:prstGeom prst="rect">
-            <a:avLst/>
-          </a:prstGeom>
-          <a:noFill/>
-          <a:ln/>
-        </p:spPr>
-        <p:txBody>
-          <a:bodyPr wrap="square" rtlCol="0" anchor="ctr"/>
-          <a:lstStyle/>
-          <a:p>
-            <a:pPr indent="0" marL="0">
-              <a:buNone/>
-            </a:pPr>
-            <a:r>
-              <a:rPr lang="en-US" sz="870" i="1" dirty="0">
-                <a:solidFill>
-                  <a:srgbClr val="5B6178"/>
-                </a:solidFill>
-                <a:latin typeface="Courier New" pitchFamily="34" charset="0"/>
-                <a:ea typeface="Courier New" pitchFamily="34" charset="-122"/>
-                <a:cs typeface="Courier New" pitchFamily="34" charset="-120"/>
-              </a:rPr>
-              <a:t>gap_pct = (actual − OOF predicted) ÷ OOF predicted × 100</a:t>
-            </a:r>
-            <a:endParaRPr lang="en-US" sz="870" dirty="0"/>
-          </a:p>
-        </p:txBody>
-      </p:sp>
-      <p:sp>
-        <p:nvSpPr>
-          <p:cNvPr id="22" name="Text 19"/>
-          <p:cNvSpPr/>
-          <p:nvPr/>
-        </p:nvSpPr>
-        <p:spPr>
-          <a:xfrm>
-            <a:off x="6263640" y="3410712"/>
-            <a:ext cx="3657600" cy="256032"/>
-          </a:xfrm>
-          <a:prstGeom prst="rect">
-            <a:avLst/>
-          </a:prstGeom>
-          <a:noFill/>
-          <a:ln/>
-        </p:spPr>
-        <p:txBody>
-          <a:bodyPr wrap="square" rtlCol="0" anchor="ctr"/>
-          <a:lstStyle/>
-          <a:p>
-            <a:pPr indent="0" marL="0">
-              <a:buNone/>
-            </a:pPr>
-            <a:r>
-              <a:rPr lang="en-US" sz="1000" dirty="0">
+              <a:rPr lang="en-US" sz="1050" i="1" dirty="0">
                 <a:solidFill>
                   <a:srgbClr val="1A1A2E"/>
                 </a:solidFill>
@@ -10485,681 +10726,15 @@
                 <a:ea typeface="Calibri" pitchFamily="34" charset="-122"/>
                 <a:cs typeface="Calibri" pitchFamily="34" charset="-120"/>
               </a:rPr>
-              <a:t>Venue #85 (Restaurants)</a:t>
-            </a:r>
-            <a:endParaRPr lang="en-US" sz="1000" dirty="0"/>
-          </a:p>
-        </p:txBody>
-      </p:sp>
-      <p:sp>
-        <p:nvSpPr>
-          <p:cNvPr id="23" name="Text 20"/>
-          <p:cNvSpPr/>
-          <p:nvPr/>
-        </p:nvSpPr>
-        <p:spPr>
-          <a:xfrm>
-            <a:off x="9966960" y="3410712"/>
-            <a:ext cx="1691640" cy="256032"/>
-          </a:xfrm>
-          <a:prstGeom prst="rect">
-            <a:avLst/>
-          </a:prstGeom>
-          <a:noFill/>
-          <a:ln/>
-        </p:spPr>
-        <p:txBody>
-          <a:bodyPr wrap="square" rtlCol="0" anchor="ctr"/>
-          <a:lstStyle/>
-          <a:p>
-            <a:pPr algn="r" indent="0" marL="0">
-              <a:buNone/>
-            </a:pPr>
-            <a:r>
-              <a:rPr lang="en-US" sz="1000" b="1" dirty="0">
-                <a:solidFill>
-                  <a:srgbClr val="B8500A"/>
-                </a:solidFill>
-                <a:latin typeface="Calibri" pitchFamily="34" charset="0"/>
-                <a:ea typeface="Calibri" pitchFamily="34" charset="-122"/>
-                <a:cs typeface="Calibri" pitchFamily="34" charset="-120"/>
-              </a:rPr>
-              <a:t>-62%</a:t>
-            </a:r>
-            <a:endParaRPr lang="en-US" sz="1000" dirty="0"/>
-          </a:p>
-        </p:txBody>
-      </p:sp>
-      <p:sp>
-        <p:nvSpPr>
-          <p:cNvPr id="24" name="Text 21"/>
-          <p:cNvSpPr/>
-          <p:nvPr/>
-        </p:nvSpPr>
-        <p:spPr>
-          <a:xfrm>
-            <a:off x="6263640" y="3666744"/>
-            <a:ext cx="3657600" cy="256032"/>
-          </a:xfrm>
-          <a:prstGeom prst="rect">
-            <a:avLst/>
-          </a:prstGeom>
-          <a:noFill/>
-          <a:ln/>
-        </p:spPr>
-        <p:txBody>
-          <a:bodyPr wrap="square" rtlCol="0" anchor="ctr"/>
-          <a:lstStyle/>
-          <a:p>
-            <a:pPr indent="0" marL="0">
-              <a:buNone/>
-            </a:pPr>
-            <a:r>
-              <a:rPr lang="en-US" sz="1000" dirty="0">
-                <a:solidFill>
-                  <a:srgbClr val="1A1A2E"/>
-                </a:solidFill>
-                <a:latin typeface="Calibri" pitchFamily="34" charset="0"/>
-                <a:ea typeface="Calibri" pitchFamily="34" charset="-122"/>
-                <a:cs typeface="Calibri" pitchFamily="34" charset="-120"/>
-              </a:rPr>
-              <a:t>Venue #309 (Waiting Rooms)</a:t>
-            </a:r>
-            <a:endParaRPr lang="en-US" sz="1000" dirty="0"/>
-          </a:p>
-        </p:txBody>
-      </p:sp>
-      <p:sp>
-        <p:nvSpPr>
-          <p:cNvPr id="25" name="Text 22"/>
-          <p:cNvSpPr/>
-          <p:nvPr/>
-        </p:nvSpPr>
-        <p:spPr>
-          <a:xfrm>
-            <a:off x="9966960" y="3666744"/>
-            <a:ext cx="1691640" cy="256032"/>
-          </a:xfrm>
-          <a:prstGeom prst="rect">
-            <a:avLst/>
-          </a:prstGeom>
-          <a:noFill/>
-          <a:ln/>
-        </p:spPr>
-        <p:txBody>
-          <a:bodyPr wrap="square" rtlCol="0" anchor="ctr"/>
-          <a:lstStyle/>
-          <a:p>
-            <a:pPr algn="r" indent="0" marL="0">
-              <a:buNone/>
-            </a:pPr>
-            <a:r>
-              <a:rPr lang="en-US" sz="1000" b="1" dirty="0">
-                <a:solidFill>
-                  <a:srgbClr val="B8500A"/>
-                </a:solidFill>
-                <a:latin typeface="Calibri" pitchFamily="34" charset="0"/>
-                <a:ea typeface="Calibri" pitchFamily="34" charset="-122"/>
-                <a:cs typeface="Calibri" pitchFamily="34" charset="-120"/>
-              </a:rPr>
-              <a:t>-61%</a:t>
-            </a:r>
-            <a:endParaRPr lang="en-US" sz="1000" dirty="0"/>
-          </a:p>
-        </p:txBody>
-      </p:sp>
-      <p:sp>
-        <p:nvSpPr>
-          <p:cNvPr id="26" name="Text 23"/>
-          <p:cNvSpPr/>
-          <p:nvPr/>
-        </p:nvSpPr>
-        <p:spPr>
-          <a:xfrm>
-            <a:off x="6263640" y="3922776"/>
-            <a:ext cx="3657600" cy="256032"/>
-          </a:xfrm>
-          <a:prstGeom prst="rect">
-            <a:avLst/>
-          </a:prstGeom>
-          <a:noFill/>
-          <a:ln/>
-        </p:spPr>
-        <p:txBody>
-          <a:bodyPr wrap="square" rtlCol="0" anchor="ctr"/>
-          <a:lstStyle/>
-          <a:p>
-            <a:pPr indent="0" marL="0">
-              <a:buNone/>
-            </a:pPr>
-            <a:r>
-              <a:rPr lang="en-US" sz="1000" dirty="0">
-                <a:solidFill>
-                  <a:srgbClr val="1A1A2E"/>
-                </a:solidFill>
-                <a:latin typeface="Calibri" pitchFamily="34" charset="0"/>
-                <a:ea typeface="Calibri" pitchFamily="34" charset="-122"/>
-                <a:cs typeface="Calibri" pitchFamily="34" charset="-120"/>
-              </a:rPr>
-              <a:t>Venue #53 (Restaurants)</a:t>
-            </a:r>
-            <a:endParaRPr lang="en-US" sz="1000" dirty="0"/>
-          </a:p>
-        </p:txBody>
-      </p:sp>
-      <p:sp>
-        <p:nvSpPr>
-          <p:cNvPr id="27" name="Text 24"/>
-          <p:cNvSpPr/>
-          <p:nvPr/>
-        </p:nvSpPr>
-        <p:spPr>
-          <a:xfrm>
-            <a:off x="9966960" y="3922776"/>
-            <a:ext cx="1691640" cy="256032"/>
-          </a:xfrm>
-          <a:prstGeom prst="rect">
-            <a:avLst/>
-          </a:prstGeom>
-          <a:noFill/>
-          <a:ln/>
-        </p:spPr>
-        <p:txBody>
-          <a:bodyPr wrap="square" rtlCol="0" anchor="ctr"/>
-          <a:lstStyle/>
-          <a:p>
-            <a:pPr algn="r" indent="0" marL="0">
-              <a:buNone/>
-            </a:pPr>
-            <a:r>
-              <a:rPr lang="en-US" sz="1000" b="1" dirty="0">
-                <a:solidFill>
-                  <a:srgbClr val="B8500A"/>
-                </a:solidFill>
-                <a:latin typeface="Calibri" pitchFamily="34" charset="0"/>
-                <a:ea typeface="Calibri" pitchFamily="34" charset="-122"/>
-                <a:cs typeface="Calibri" pitchFamily="34" charset="-120"/>
-              </a:rPr>
-              <a:t>-61%</a:t>
-            </a:r>
-            <a:endParaRPr lang="en-US" sz="1000" dirty="0"/>
-          </a:p>
-        </p:txBody>
-      </p:sp>
-      <p:sp>
-        <p:nvSpPr>
-          <p:cNvPr id="28" name="Text 25"/>
-          <p:cNvSpPr/>
-          <p:nvPr/>
-        </p:nvSpPr>
-        <p:spPr>
-          <a:xfrm>
-            <a:off x="6263640" y="4178808"/>
-            <a:ext cx="3657600" cy="256032"/>
-          </a:xfrm>
-          <a:prstGeom prst="rect">
-            <a:avLst/>
-          </a:prstGeom>
-          <a:noFill/>
-          <a:ln/>
-        </p:spPr>
-        <p:txBody>
-          <a:bodyPr wrap="square" rtlCol="0" anchor="ctr"/>
-          <a:lstStyle/>
-          <a:p>
-            <a:pPr indent="0" marL="0">
-              <a:buNone/>
-            </a:pPr>
-            <a:r>
-              <a:rPr lang="en-US" sz="1000" dirty="0">
-                <a:solidFill>
-                  <a:srgbClr val="1A1A2E"/>
-                </a:solidFill>
-                <a:latin typeface="Calibri" pitchFamily="34" charset="0"/>
-                <a:ea typeface="Calibri" pitchFamily="34" charset="-122"/>
-                <a:cs typeface="Calibri" pitchFamily="34" charset="-120"/>
-              </a:rPr>
-              <a:t>Venue #247 (Bars)</a:t>
-            </a:r>
-            <a:endParaRPr lang="en-US" sz="1000" dirty="0"/>
-          </a:p>
-        </p:txBody>
-      </p:sp>
-      <p:sp>
-        <p:nvSpPr>
-          <p:cNvPr id="29" name="Text 26"/>
-          <p:cNvSpPr/>
-          <p:nvPr/>
-        </p:nvSpPr>
-        <p:spPr>
-          <a:xfrm>
-            <a:off x="9966960" y="4178808"/>
-            <a:ext cx="1691640" cy="256032"/>
-          </a:xfrm>
-          <a:prstGeom prst="rect">
-            <a:avLst/>
-          </a:prstGeom>
-          <a:noFill/>
-          <a:ln/>
-        </p:spPr>
-        <p:txBody>
-          <a:bodyPr wrap="square" rtlCol="0" anchor="ctr"/>
-          <a:lstStyle/>
-          <a:p>
-            <a:pPr algn="r" indent="0" marL="0">
-              <a:buNone/>
-            </a:pPr>
-            <a:r>
-              <a:rPr lang="en-US" sz="1000" b="1" dirty="0">
-                <a:solidFill>
-                  <a:srgbClr val="B8500A"/>
-                </a:solidFill>
-                <a:latin typeface="Calibri" pitchFamily="34" charset="0"/>
-                <a:ea typeface="Calibri" pitchFamily="34" charset="-122"/>
-                <a:cs typeface="Calibri" pitchFamily="34" charset="-120"/>
-              </a:rPr>
-              <a:t>-60%</a:t>
-            </a:r>
-            <a:endParaRPr lang="en-US" sz="1000" dirty="0"/>
-          </a:p>
-        </p:txBody>
-      </p:sp>
-      <p:sp>
-        <p:nvSpPr>
-          <p:cNvPr id="30" name="Text 27"/>
-          <p:cNvSpPr/>
-          <p:nvPr/>
-        </p:nvSpPr>
-        <p:spPr>
-          <a:xfrm>
-            <a:off x="6263640" y="4572000"/>
-            <a:ext cx="5394960" cy="274320"/>
-          </a:xfrm>
-          <a:prstGeom prst="rect">
-            <a:avLst/>
-          </a:prstGeom>
-          <a:noFill/>
-          <a:ln/>
-        </p:spPr>
-        <p:txBody>
-          <a:bodyPr wrap="square" rtlCol="0" anchor="ctr"/>
-          <a:lstStyle/>
-          <a:p>
-            <a:pPr indent="0" marL="0">
-              <a:buNone/>
-            </a:pPr>
-            <a:r>
-              <a:rPr lang="en-US" sz="1200" b="1" dirty="0">
-                <a:solidFill>
-                  <a:srgbClr val="1E2761"/>
-                </a:solidFill>
-                <a:latin typeface="Cambria" pitchFamily="34" charset="0"/>
-                <a:ea typeface="Cambria" pitchFamily="34" charset="-122"/>
-                <a:cs typeface="Cambria" pitchFamily="34" charset="-120"/>
-              </a:rPr>
-              <a:t>Top prospect venues (expansion priority)</a:t>
-            </a:r>
-            <a:endParaRPr lang="en-US" sz="1200" dirty="0"/>
-          </a:p>
-        </p:txBody>
-      </p:sp>
-      <p:sp>
-        <p:nvSpPr>
-          <p:cNvPr id="31" name="Text 28"/>
-          <p:cNvSpPr/>
-          <p:nvPr/>
-        </p:nvSpPr>
-        <p:spPr>
-          <a:xfrm>
-            <a:off x="6263640" y="4864608"/>
-            <a:ext cx="4023360" cy="256032"/>
-          </a:xfrm>
-          <a:prstGeom prst="rect">
-            <a:avLst/>
-          </a:prstGeom>
-          <a:noFill/>
-          <a:ln/>
-        </p:spPr>
-        <p:txBody>
-          <a:bodyPr wrap="square" rtlCol="0" anchor="ctr"/>
-          <a:lstStyle/>
-          <a:p>
-            <a:pPr indent="0" marL="0">
-              <a:buNone/>
-            </a:pPr>
-            <a:r>
-              <a:rPr lang="en-US" sz="1000" dirty="0">
-                <a:solidFill>
-                  <a:srgbClr val="1A1A2E"/>
-                </a:solidFill>
-                <a:latin typeface="Calibri" pitchFamily="34" charset="0"/>
-                <a:ea typeface="Calibri" pitchFamily="34" charset="-122"/>
-                <a:cs typeface="Calibri" pitchFamily="34" charset="-120"/>
-              </a:rPr>
-              <a:t>P0018 — Bars (existing market)</a:t>
-            </a:r>
-            <a:endParaRPr lang="en-US" sz="1000" dirty="0"/>
-          </a:p>
-        </p:txBody>
-      </p:sp>
-      <p:sp>
-        <p:nvSpPr>
-          <p:cNvPr id="32" name="Text 29"/>
-          <p:cNvSpPr/>
-          <p:nvPr/>
-        </p:nvSpPr>
-        <p:spPr>
-          <a:xfrm>
-            <a:off x="10195560" y="4864608"/>
-            <a:ext cx="1463040" cy="256032"/>
-          </a:xfrm>
-          <a:prstGeom prst="rect">
-            <a:avLst/>
-          </a:prstGeom>
-          <a:noFill/>
-          <a:ln/>
-        </p:spPr>
-        <p:txBody>
-          <a:bodyPr wrap="square" rtlCol="0" anchor="ctr"/>
-          <a:lstStyle/>
-          <a:p>
-            <a:pPr algn="r" indent="0" marL="0">
-              <a:buNone/>
-            </a:pPr>
-            <a:r>
-              <a:rPr lang="en-US" sz="1000" b="1" dirty="0">
-                <a:solidFill>
-                  <a:srgbClr val="2C7A57"/>
-                </a:solidFill>
-                <a:latin typeface="Calibri" pitchFamily="34" charset="0"/>
-                <a:ea typeface="Calibri" pitchFamily="34" charset="-122"/>
-                <a:cs typeface="Calibri" pitchFamily="34" charset="-120"/>
-              </a:rPr>
-              <a:t>$684</a:t>
-            </a:r>
-            <a:endParaRPr lang="en-US" sz="1000" dirty="0"/>
-          </a:p>
-        </p:txBody>
-      </p:sp>
-      <p:sp>
-        <p:nvSpPr>
-          <p:cNvPr id="33" name="Text 30"/>
-          <p:cNvSpPr/>
-          <p:nvPr/>
-        </p:nvSpPr>
-        <p:spPr>
-          <a:xfrm>
-            <a:off x="6263640" y="5120640"/>
-            <a:ext cx="4023360" cy="256032"/>
-          </a:xfrm>
-          <a:prstGeom prst="rect">
-            <a:avLst/>
-          </a:prstGeom>
-          <a:noFill/>
-          <a:ln/>
-        </p:spPr>
-        <p:txBody>
-          <a:bodyPr wrap="square" rtlCol="0" anchor="ctr"/>
-          <a:lstStyle/>
-          <a:p>
-            <a:pPr indent="0" marL="0">
-              <a:buNone/>
-            </a:pPr>
-            <a:r>
-              <a:rPr lang="en-US" sz="1000" dirty="0">
-                <a:solidFill>
-                  <a:srgbClr val="1A1A2E"/>
-                </a:solidFill>
-                <a:latin typeface="Calibri" pitchFamily="34" charset="0"/>
-                <a:ea typeface="Calibri" pitchFamily="34" charset="-122"/>
-                <a:cs typeface="Calibri" pitchFamily="34" charset="-120"/>
-              </a:rPr>
-              <a:t>P0055 — Restaurants (existing market)</a:t>
-            </a:r>
-            <a:endParaRPr lang="en-US" sz="1000" dirty="0"/>
-          </a:p>
-        </p:txBody>
-      </p:sp>
-      <p:sp>
-        <p:nvSpPr>
-          <p:cNvPr id="34" name="Text 31"/>
-          <p:cNvSpPr/>
-          <p:nvPr/>
-        </p:nvSpPr>
-        <p:spPr>
-          <a:xfrm>
-            <a:off x="10195560" y="5120640"/>
-            <a:ext cx="1463040" cy="256032"/>
-          </a:xfrm>
-          <a:prstGeom prst="rect">
-            <a:avLst/>
-          </a:prstGeom>
-          <a:noFill/>
-          <a:ln/>
-        </p:spPr>
-        <p:txBody>
-          <a:bodyPr wrap="square" rtlCol="0" anchor="ctr"/>
-          <a:lstStyle/>
-          <a:p>
-            <a:pPr algn="r" indent="0" marL="0">
-              <a:buNone/>
-            </a:pPr>
-            <a:r>
-              <a:rPr lang="en-US" sz="1000" b="1" dirty="0">
-                <a:solidFill>
-                  <a:srgbClr val="2C7A57"/>
-                </a:solidFill>
-                <a:latin typeface="Calibri" pitchFamily="34" charset="0"/>
-                <a:ea typeface="Calibri" pitchFamily="34" charset="-122"/>
-                <a:cs typeface="Calibri" pitchFamily="34" charset="-120"/>
-              </a:rPr>
-              <a:t>$524</a:t>
-            </a:r>
-            <a:endParaRPr lang="en-US" sz="1000" dirty="0"/>
-          </a:p>
-        </p:txBody>
-      </p:sp>
-      <p:sp>
-        <p:nvSpPr>
-          <p:cNvPr id="35" name="Text 32"/>
-          <p:cNvSpPr/>
-          <p:nvPr/>
-        </p:nvSpPr>
-        <p:spPr>
-          <a:xfrm>
-            <a:off x="6263640" y="5376672"/>
-            <a:ext cx="4023360" cy="256032"/>
-          </a:xfrm>
-          <a:prstGeom prst="rect">
-            <a:avLst/>
-          </a:prstGeom>
-          <a:noFill/>
-          <a:ln/>
-        </p:spPr>
-        <p:txBody>
-          <a:bodyPr wrap="square" rtlCol="0" anchor="ctr"/>
-          <a:lstStyle/>
-          <a:p>
-            <a:pPr indent="0" marL="0">
-              <a:buNone/>
-            </a:pPr>
-            <a:r>
-              <a:rPr lang="en-US" sz="1000" dirty="0">
-                <a:solidFill>
-                  <a:srgbClr val="1A1A2E"/>
-                </a:solidFill>
-                <a:latin typeface="Calibri" pitchFamily="34" charset="0"/>
-                <a:ea typeface="Calibri" pitchFamily="34" charset="-122"/>
-                <a:cs typeface="Calibri" pitchFamily="34" charset="-120"/>
-              </a:rPr>
-              <a:t>P0000 — Bars (new market)</a:t>
-            </a:r>
-            <a:endParaRPr lang="en-US" sz="1000" dirty="0"/>
-          </a:p>
-        </p:txBody>
-      </p:sp>
-      <p:sp>
-        <p:nvSpPr>
-          <p:cNvPr id="36" name="Text 33"/>
-          <p:cNvSpPr/>
-          <p:nvPr/>
-        </p:nvSpPr>
-        <p:spPr>
-          <a:xfrm>
-            <a:off x="10195560" y="5376672"/>
-            <a:ext cx="1463040" cy="256032"/>
-          </a:xfrm>
-          <a:prstGeom prst="rect">
-            <a:avLst/>
-          </a:prstGeom>
-          <a:noFill/>
-          <a:ln/>
-        </p:spPr>
-        <p:txBody>
-          <a:bodyPr wrap="square" rtlCol="0" anchor="ctr"/>
-          <a:lstStyle/>
-          <a:p>
-            <a:pPr algn="r" indent="0" marL="0">
-              <a:buNone/>
-            </a:pPr>
-            <a:r>
-              <a:rPr lang="en-US" sz="1000" b="1" dirty="0">
-                <a:solidFill>
-                  <a:srgbClr val="2C7A57"/>
-                </a:solidFill>
-                <a:latin typeface="Calibri" pitchFamily="34" charset="0"/>
-                <a:ea typeface="Calibri" pitchFamily="34" charset="-122"/>
-                <a:cs typeface="Calibri" pitchFamily="34" charset="-120"/>
-              </a:rPr>
-              <a:t>$500</a:t>
-            </a:r>
-            <a:endParaRPr lang="en-US" sz="1000" dirty="0"/>
-          </a:p>
-        </p:txBody>
-      </p:sp>
-      <p:sp>
-        <p:nvSpPr>
-          <p:cNvPr id="37" name="Text 34"/>
-          <p:cNvSpPr/>
-          <p:nvPr/>
-        </p:nvSpPr>
-        <p:spPr>
-          <a:xfrm>
-            <a:off x="6263640" y="5632704"/>
-            <a:ext cx="4023360" cy="256032"/>
-          </a:xfrm>
-          <a:prstGeom prst="rect">
-            <a:avLst/>
-          </a:prstGeom>
-          <a:noFill/>
-          <a:ln/>
-        </p:spPr>
-        <p:txBody>
-          <a:bodyPr wrap="square" rtlCol="0" anchor="ctr"/>
-          <a:lstStyle/>
-          <a:p>
-            <a:pPr indent="0" marL="0">
-              <a:buNone/>
-            </a:pPr>
-            <a:r>
-              <a:rPr lang="en-US" sz="1000" dirty="0">
-                <a:solidFill>
-                  <a:srgbClr val="1A1A2E"/>
-                </a:solidFill>
-                <a:latin typeface="Calibri" pitchFamily="34" charset="0"/>
-                <a:ea typeface="Calibri" pitchFamily="34" charset="-122"/>
-                <a:cs typeface="Calibri" pitchFamily="34" charset="-120"/>
-              </a:rPr>
-              <a:t>P0001 — Bars (new market)</a:t>
-            </a:r>
-            <a:endParaRPr lang="en-US" sz="1000" dirty="0"/>
-          </a:p>
-        </p:txBody>
-      </p:sp>
-      <p:sp>
-        <p:nvSpPr>
-          <p:cNvPr id="38" name="Text 35"/>
-          <p:cNvSpPr/>
-          <p:nvPr/>
-        </p:nvSpPr>
-        <p:spPr>
-          <a:xfrm>
-            <a:off x="10195560" y="5632704"/>
-            <a:ext cx="1463040" cy="256032"/>
-          </a:xfrm>
-          <a:prstGeom prst="rect">
-            <a:avLst/>
-          </a:prstGeom>
-          <a:noFill/>
-          <a:ln/>
-        </p:spPr>
-        <p:txBody>
-          <a:bodyPr wrap="square" rtlCol="0" anchor="ctr"/>
-          <a:lstStyle/>
-          <a:p>
-            <a:pPr algn="r" indent="0" marL="0">
-              <a:buNone/>
-            </a:pPr>
-            <a:r>
-              <a:rPr lang="en-US" sz="1000" b="1" dirty="0">
-                <a:solidFill>
-                  <a:srgbClr val="2C7A57"/>
-                </a:solidFill>
-                <a:latin typeface="Calibri" pitchFamily="34" charset="0"/>
-                <a:ea typeface="Calibri" pitchFamily="34" charset="-122"/>
-                <a:cs typeface="Calibri" pitchFamily="34" charset="-120"/>
-              </a:rPr>
-              <a:t>$496</a:t>
-            </a:r>
-            <a:endParaRPr lang="en-US" sz="1000" dirty="0"/>
-          </a:p>
-        </p:txBody>
-      </p:sp>
-      <p:sp>
-        <p:nvSpPr>
-          <p:cNvPr id="39" name="Text 36"/>
-          <p:cNvSpPr/>
-          <p:nvPr/>
-        </p:nvSpPr>
-        <p:spPr>
-          <a:xfrm>
-            <a:off x="548640" y="6080760"/>
-            <a:ext cx="11064240" cy="411480"/>
-          </a:xfrm>
-          <a:prstGeom prst="rect">
-            <a:avLst/>
-          </a:prstGeom>
-          <a:noFill/>
-          <a:ln/>
-        </p:spPr>
-        <p:txBody>
-          <a:bodyPr wrap="square" rtlCol="0" anchor="ctr"/>
-          <a:lstStyle/>
-          <a:p>
-            <a:pPr indent="0" marL="0">
-              <a:lnSpc>
-                <a:spcPts val="1200"/>
-              </a:lnSpc>
-              <a:buNone/>
-            </a:pPr>
-            <a:r>
-              <a:rPr lang="en-US" sz="1000" i="1" dirty="0">
-                <a:solidFill>
-                  <a:srgbClr val="5B6178"/>
-                </a:solidFill>
-                <a:latin typeface="Calibri" pitchFamily="34" charset="0"/>
-                <a:ea typeface="Calibri" pitchFamily="34" charset="-122"/>
-                <a:cs typeface="Calibri" pitchFamily="34" charset="-120"/>
-              </a:rPr>
-              <a:t>Flags come from 5-fold out-of-fold predictions, never a model scoring the venue it was trained on. The calibrated-lift feature carries near-zero importance — honest, since it's constant within venue_type once venue_type itself is a feature.</a:t>
-            </a:r>
-            <a:endParaRPr lang="en-US" sz="1000" dirty="0"/>
-          </a:p>
-        </p:txBody>
-      </p:sp>
-      <p:sp>
-        <p:nvSpPr>
-          <p:cNvPr id="40" name="Text 37"/>
+              <a:t>Method, honestly: held-out metrics (next slide) come from a genuine 30% test split, stratified by venue_type — never train-set fit. Under-monetization flags come from 5-fold out-of-fold predictions — every venue's flag uses a model that never saw its own revenue. Prospect venues (no revenue history) are scored by that same trained model, not a separate heuristic.</a:t>
+            </a:r>
+            <a:endParaRPr lang="en-US" sz="1050" dirty="0"/>
+          </a:p>
+        </p:txBody>
+      </p:sp>
+      <p:sp>
+        <p:nvSpPr>
+          <p:cNvPr id="19" name="Text 17"/>
           <p:cNvSpPr/>
           <p:nvPr/>
         </p:nvSpPr>
@@ -11190,7 +10765,7 @@
                 <a:ea typeface="Calibri" pitchFamily="34" charset="-122"/>
                 <a:cs typeface="Calibri" pitchFamily="34" charset="-120"/>
               </a:rPr>
-              <a:t>Venue economics</a:t>
+              <a:t>Venue economics — model &amp; inputs</a:t>
             </a:r>
             <a:endParaRPr lang="en-US" sz="900" dirty="0"/>
           </a:p>
@@ -11261,6 +10836,1462 @@
                 <a:ea typeface="Cambria" pitchFamily="34" charset="-122"/>
                 <a:cs typeface="Cambria" pitchFamily="34" charset="-120"/>
               </a:rPr>
+              <a:t>Predicting venue ad-revenue, honestly</a:t>
+            </a:r>
+            <a:endParaRPr lang="en-US" sz="2500" dirty="0"/>
+          </a:p>
+        </p:txBody>
+      </p:sp>
+      <p:sp>
+        <p:nvSpPr>
+          <p:cNvPr id="3" name="Shape 1"/>
+          <p:cNvSpPr/>
+          <p:nvPr/>
+        </p:nvSpPr>
+        <p:spPr>
+          <a:xfrm>
+            <a:off x="8229600" y="146304"/>
+            <a:ext cx="3410712" cy="246888"/>
+          </a:xfrm>
+          <a:prstGeom prst="roundRect">
+            <a:avLst>
+              <a:gd name="adj" fmla="val 22222"/>
+            </a:avLst>
+          </a:prstGeom>
+          <a:solidFill>
+            <a:srgbClr val="FFFFFF"/>
+          </a:solidFill>
+          <a:ln w="15875">
+            <a:solidFill>
+              <a:srgbClr val="2C7A57"/>
+            </a:solidFill>
+            <a:prstDash val="solid"/>
+          </a:ln>
+        </p:spPr>
+      </p:sp>
+      <p:sp>
+        <p:nvSpPr>
+          <p:cNvPr id="4" name="Text 2"/>
+          <p:cNvSpPr/>
+          <p:nvPr/>
+        </p:nvSpPr>
+        <p:spPr>
+          <a:xfrm>
+            <a:off x="8229600" y="146304"/>
+            <a:ext cx="3410712" cy="246888"/>
+          </a:xfrm>
+          <a:prstGeom prst="rect">
+            <a:avLst/>
+          </a:prstGeom>
+          <a:noFill/>
+          <a:ln/>
+        </p:spPr>
+        <p:txBody>
+          <a:bodyPr wrap="square" rtlCol="0" anchor="ctr"/>
+          <a:lstStyle/>
+          <a:p>
+            <a:pPr algn="ctr" indent="0" marL="0">
+              <a:buNone/>
+            </a:pPr>
+            <a:r>
+              <a:rPr lang="en-US" sz="950" b="1" dirty="0">
+                <a:solidFill>
+                  <a:srgbClr val="2C7A57"/>
+                </a:solidFill>
+                <a:latin typeface="Calibri" pitchFamily="34" charset="0"/>
+                <a:ea typeface="Calibri" pitchFamily="34" charset="-122"/>
+                <a:cs typeface="Calibri" pitchFamily="34" charset="-120"/>
+              </a:rPr>
+              <a:t>Step 5 of 6 · Answers Q3</a:t>
+            </a:r>
+            <a:endParaRPr lang="en-US" sz="950" dirty="0"/>
+          </a:p>
+        </p:txBody>
+      </p:sp>
+      <p:sp>
+        <p:nvSpPr>
+          <p:cNvPr id="5" name="Text 3"/>
+          <p:cNvSpPr/>
+          <p:nvPr/>
+        </p:nvSpPr>
+        <p:spPr>
+          <a:xfrm>
+            <a:off x="548640" y="1005840"/>
+            <a:ext cx="10972800" cy="365760"/>
+          </a:xfrm>
+          <a:prstGeom prst="rect">
+            <a:avLst/>
+          </a:prstGeom>
+          <a:noFill/>
+          <a:ln/>
+        </p:spPr>
+        <p:txBody>
+          <a:bodyPr wrap="square" rtlCol="0" anchor="ctr"/>
+          <a:lstStyle/>
+          <a:p>
+            <a:pPr indent="0" marL="0">
+              <a:buNone/>
+            </a:pPr>
+            <a:r>
+              <a:rPr lang="en-US" sz="1250" i="1" dirty="0">
+                <a:solidFill>
+                  <a:srgbClr val="5B6178"/>
+                </a:solidFill>
+                <a:latin typeface="Calibri" pitchFamily="34" charset="0"/>
+                <a:ea typeface="Calibri" pitchFamily="34" charset="-122"/>
+                <a:cs typeface="Calibri" pitchFamily="34" charset="-120"/>
+              </a:rPr>
+              <a:t>Held-out evaluation, feature importance, and the venues these numbers actually flag (model &amp; features: previous slide).</a:t>
+            </a:r>
+            <a:endParaRPr lang="en-US" sz="1250" dirty="0"/>
+          </a:p>
+        </p:txBody>
+      </p:sp>
+      <p:sp>
+        <p:nvSpPr>
+          <p:cNvPr id="6" name="Shape 4"/>
+          <p:cNvSpPr/>
+          <p:nvPr/>
+        </p:nvSpPr>
+        <p:spPr>
+          <a:xfrm>
+            <a:off x="548640" y="1508760"/>
+            <a:ext cx="2651760" cy="1051560"/>
+          </a:xfrm>
+          <a:prstGeom prst="roundRect">
+            <a:avLst>
+              <a:gd name="adj" fmla="val 6957"/>
+            </a:avLst>
+          </a:prstGeom>
+          <a:solidFill>
+            <a:srgbClr val="F5F7FC"/>
+          </a:solidFill>
+          <a:ln/>
+        </p:spPr>
+      </p:sp>
+      <p:sp>
+        <p:nvSpPr>
+          <p:cNvPr id="7" name="Text 5"/>
+          <p:cNvSpPr/>
+          <p:nvPr/>
+        </p:nvSpPr>
+        <p:spPr>
+          <a:xfrm>
+            <a:off x="685800" y="1618488"/>
+            <a:ext cx="2377440" cy="502920"/>
+          </a:xfrm>
+          <a:prstGeom prst="rect">
+            <a:avLst/>
+          </a:prstGeom>
+          <a:noFill/>
+          <a:ln/>
+        </p:spPr>
+        <p:txBody>
+          <a:bodyPr wrap="square" rtlCol="0" anchor="ctr"/>
+          <a:lstStyle/>
+          <a:p>
+            <a:pPr indent="0" marL="0">
+              <a:buNone/>
+            </a:pPr>
+            <a:r>
+              <a:rPr lang="en-US" sz="2200" b="1" dirty="0">
+                <a:solidFill>
+                  <a:srgbClr val="1E2761"/>
+                </a:solidFill>
+                <a:latin typeface="Calibri" pitchFamily="34" charset="0"/>
+                <a:ea typeface="Calibri" pitchFamily="34" charset="-122"/>
+                <a:cs typeface="Calibri" pitchFamily="34" charset="-120"/>
+              </a:rPr>
+              <a:t>0.84</a:t>
+            </a:r>
+            <a:endParaRPr lang="en-US" sz="2200" dirty="0"/>
+          </a:p>
+        </p:txBody>
+      </p:sp>
+      <p:sp>
+        <p:nvSpPr>
+          <p:cNvPr id="8" name="Text 6"/>
+          <p:cNvSpPr/>
+          <p:nvPr/>
+        </p:nvSpPr>
+        <p:spPr>
+          <a:xfrm>
+            <a:off x="685800" y="2130552"/>
+            <a:ext cx="2377440" cy="365760"/>
+          </a:xfrm>
+          <a:prstGeom prst="rect">
+            <a:avLst/>
+          </a:prstGeom>
+          <a:noFill/>
+          <a:ln/>
+        </p:spPr>
+        <p:txBody>
+          <a:bodyPr wrap="square" rtlCol="0" anchor="ctr"/>
+          <a:lstStyle/>
+          <a:p>
+            <a:pPr indent="0" marL="0">
+              <a:buNone/>
+            </a:pPr>
+            <a:r>
+              <a:rPr lang="en-US" sz="950" dirty="0">
+                <a:solidFill>
+                  <a:srgbClr val="5B6178"/>
+                </a:solidFill>
+                <a:latin typeface="Calibri" pitchFamily="34" charset="0"/>
+                <a:ea typeface="Calibri" pitchFamily="34" charset="-122"/>
+                <a:cs typeface="Calibri" pitchFamily="34" charset="-120"/>
+              </a:rPr>
+              <a:t>Held-out R²</a:t>
+            </a:r>
+            <a:endParaRPr lang="en-US" sz="950" dirty="0"/>
+          </a:p>
+        </p:txBody>
+      </p:sp>
+      <p:sp>
+        <p:nvSpPr>
+          <p:cNvPr id="9" name="Shape 7"/>
+          <p:cNvSpPr/>
+          <p:nvPr/>
+        </p:nvSpPr>
+        <p:spPr>
+          <a:xfrm>
+            <a:off x="3337560" y="1508760"/>
+            <a:ext cx="2651760" cy="1051560"/>
+          </a:xfrm>
+          <a:prstGeom prst="roundRect">
+            <a:avLst>
+              <a:gd name="adj" fmla="val 6957"/>
+            </a:avLst>
+          </a:prstGeom>
+          <a:solidFill>
+            <a:srgbClr val="F5F7FC"/>
+          </a:solidFill>
+          <a:ln/>
+        </p:spPr>
+      </p:sp>
+      <p:sp>
+        <p:nvSpPr>
+          <p:cNvPr id="10" name="Text 8"/>
+          <p:cNvSpPr/>
+          <p:nvPr/>
+        </p:nvSpPr>
+        <p:spPr>
+          <a:xfrm>
+            <a:off x="3474720" y="1618488"/>
+            <a:ext cx="2377440" cy="502920"/>
+          </a:xfrm>
+          <a:prstGeom prst="rect">
+            <a:avLst/>
+          </a:prstGeom>
+          <a:noFill/>
+          <a:ln/>
+        </p:spPr>
+        <p:txBody>
+          <a:bodyPr wrap="square" rtlCol="0" anchor="ctr"/>
+          <a:lstStyle/>
+          <a:p>
+            <a:pPr indent="0" marL="0">
+              <a:buNone/>
+            </a:pPr>
+            <a:r>
+              <a:rPr lang="en-US" sz="2200" b="1" dirty="0">
+                <a:solidFill>
+                  <a:srgbClr val="1E2761"/>
+                </a:solidFill>
+                <a:latin typeface="Calibri" pitchFamily="34" charset="0"/>
+                <a:ea typeface="Calibri" pitchFamily="34" charset="-122"/>
+                <a:cs typeface="Calibri" pitchFamily="34" charset="-120"/>
+              </a:rPr>
+              <a:t>22.1%</a:t>
+            </a:r>
+            <a:endParaRPr lang="en-US" sz="2200" dirty="0"/>
+          </a:p>
+        </p:txBody>
+      </p:sp>
+      <p:sp>
+        <p:nvSpPr>
+          <p:cNvPr id="11" name="Text 9"/>
+          <p:cNvSpPr/>
+          <p:nvPr/>
+        </p:nvSpPr>
+        <p:spPr>
+          <a:xfrm>
+            <a:off x="3474720" y="2130552"/>
+            <a:ext cx="2377440" cy="365760"/>
+          </a:xfrm>
+          <a:prstGeom prst="rect">
+            <a:avLst/>
+          </a:prstGeom>
+          <a:noFill/>
+          <a:ln/>
+        </p:spPr>
+        <p:txBody>
+          <a:bodyPr wrap="square" rtlCol="0" anchor="ctr"/>
+          <a:lstStyle/>
+          <a:p>
+            <a:pPr indent="0" marL="0">
+              <a:buNone/>
+            </a:pPr>
+            <a:r>
+              <a:rPr lang="en-US" sz="950" dirty="0">
+                <a:solidFill>
+                  <a:srgbClr val="5B6178"/>
+                </a:solidFill>
+                <a:latin typeface="Calibri" pitchFamily="34" charset="0"/>
+                <a:ea typeface="Calibri" pitchFamily="34" charset="-122"/>
+                <a:cs typeface="Calibri" pitchFamily="34" charset="-120"/>
+              </a:rPr>
+              <a:t>Held-out MAPE</a:t>
+            </a:r>
+            <a:endParaRPr lang="en-US" sz="950" dirty="0"/>
+          </a:p>
+        </p:txBody>
+      </p:sp>
+      <p:sp>
+        <p:nvSpPr>
+          <p:cNvPr id="12" name="Shape 10"/>
+          <p:cNvSpPr/>
+          <p:nvPr/>
+        </p:nvSpPr>
+        <p:spPr>
+          <a:xfrm>
+            <a:off x="6126480" y="1508760"/>
+            <a:ext cx="2651760" cy="1051560"/>
+          </a:xfrm>
+          <a:prstGeom prst="roundRect">
+            <a:avLst>
+              <a:gd name="adj" fmla="val 6957"/>
+            </a:avLst>
+          </a:prstGeom>
+          <a:solidFill>
+            <a:srgbClr val="F5F7FC"/>
+          </a:solidFill>
+          <a:ln/>
+        </p:spPr>
+      </p:sp>
+      <p:sp>
+        <p:nvSpPr>
+          <p:cNvPr id="13" name="Text 11"/>
+          <p:cNvSpPr/>
+          <p:nvPr/>
+        </p:nvSpPr>
+        <p:spPr>
+          <a:xfrm>
+            <a:off x="6263640" y="1618488"/>
+            <a:ext cx="2377440" cy="502920"/>
+          </a:xfrm>
+          <a:prstGeom prst="rect">
+            <a:avLst/>
+          </a:prstGeom>
+          <a:noFill/>
+          <a:ln/>
+        </p:spPr>
+        <p:txBody>
+          <a:bodyPr wrap="square" rtlCol="0" anchor="ctr"/>
+          <a:lstStyle/>
+          <a:p>
+            <a:pPr indent="0" marL="0">
+              <a:buNone/>
+            </a:pPr>
+            <a:r>
+              <a:rPr lang="en-US" sz="2200" b="1" dirty="0">
+                <a:solidFill>
+                  <a:srgbClr val="1E2761"/>
+                </a:solidFill>
+                <a:latin typeface="Calibri" pitchFamily="34" charset="0"/>
+                <a:ea typeface="Calibri" pitchFamily="34" charset="-122"/>
+                <a:cs typeface="Calibri" pitchFamily="34" charset="-120"/>
+              </a:rPr>
+              <a:t>$45</a:t>
+            </a:r>
+            <a:endParaRPr lang="en-US" sz="2200" dirty="0"/>
+          </a:p>
+        </p:txBody>
+      </p:sp>
+      <p:sp>
+        <p:nvSpPr>
+          <p:cNvPr id="14" name="Text 12"/>
+          <p:cNvSpPr/>
+          <p:nvPr/>
+        </p:nvSpPr>
+        <p:spPr>
+          <a:xfrm>
+            <a:off x="6263640" y="2130552"/>
+            <a:ext cx="2377440" cy="365760"/>
+          </a:xfrm>
+          <a:prstGeom prst="rect">
+            <a:avLst/>
+          </a:prstGeom>
+          <a:noFill/>
+          <a:ln/>
+        </p:spPr>
+        <p:txBody>
+          <a:bodyPr wrap="square" rtlCol="0" anchor="ctr"/>
+          <a:lstStyle/>
+          <a:p>
+            <a:pPr indent="0" marL="0">
+              <a:buNone/>
+            </a:pPr>
+            <a:r>
+              <a:rPr lang="en-US" sz="950" dirty="0">
+                <a:solidFill>
+                  <a:srgbClr val="5B6178"/>
+                </a:solidFill>
+                <a:latin typeface="Calibri" pitchFamily="34" charset="0"/>
+                <a:ea typeface="Calibri" pitchFamily="34" charset="-122"/>
+                <a:cs typeface="Calibri" pitchFamily="34" charset="-120"/>
+              </a:rPr>
+              <a:t>Held-out MAE</a:t>
+            </a:r>
+            <a:endParaRPr lang="en-US" sz="950" dirty="0"/>
+          </a:p>
+        </p:txBody>
+      </p:sp>
+      <p:sp>
+        <p:nvSpPr>
+          <p:cNvPr id="15" name="Shape 13"/>
+          <p:cNvSpPr/>
+          <p:nvPr/>
+        </p:nvSpPr>
+        <p:spPr>
+          <a:xfrm>
+            <a:off x="8915400" y="1508760"/>
+            <a:ext cx="2651760" cy="1051560"/>
+          </a:xfrm>
+          <a:prstGeom prst="roundRect">
+            <a:avLst>
+              <a:gd name="adj" fmla="val 6957"/>
+            </a:avLst>
+          </a:prstGeom>
+          <a:solidFill>
+            <a:srgbClr val="F5F7FC"/>
+          </a:solidFill>
+          <a:ln/>
+        </p:spPr>
+      </p:sp>
+      <p:sp>
+        <p:nvSpPr>
+          <p:cNvPr id="16" name="Text 14"/>
+          <p:cNvSpPr/>
+          <p:nvPr/>
+        </p:nvSpPr>
+        <p:spPr>
+          <a:xfrm>
+            <a:off x="9052560" y="1618488"/>
+            <a:ext cx="2377440" cy="502920"/>
+          </a:xfrm>
+          <a:prstGeom prst="rect">
+            <a:avLst/>
+          </a:prstGeom>
+          <a:noFill/>
+          <a:ln/>
+        </p:spPr>
+        <p:txBody>
+          <a:bodyPr wrap="square" rtlCol="0" anchor="ctr"/>
+          <a:lstStyle/>
+          <a:p>
+            <a:pPr indent="0" marL="0">
+              <a:buNone/>
+            </a:pPr>
+            <a:r>
+              <a:rPr lang="en-US" sz="2200" b="1" dirty="0">
+                <a:solidFill>
+                  <a:srgbClr val="1E2761"/>
+                </a:solidFill>
+                <a:latin typeface="Calibri" pitchFamily="34" charset="0"/>
+                <a:ea typeface="Calibri" pitchFamily="34" charset="-122"/>
+                <a:cs typeface="Calibri" pitchFamily="34" charset="-120"/>
+              </a:rPr>
+              <a:t>20</a:t>
+            </a:r>
+            <a:endParaRPr lang="en-US" sz="2200" dirty="0"/>
+          </a:p>
+        </p:txBody>
+      </p:sp>
+      <p:sp>
+        <p:nvSpPr>
+          <p:cNvPr id="17" name="Text 15"/>
+          <p:cNvSpPr/>
+          <p:nvPr/>
+        </p:nvSpPr>
+        <p:spPr>
+          <a:xfrm>
+            <a:off x="9052560" y="2130552"/>
+            <a:ext cx="2377440" cy="365760"/>
+          </a:xfrm>
+          <a:prstGeom prst="rect">
+            <a:avLst/>
+          </a:prstGeom>
+          <a:noFill/>
+          <a:ln/>
+        </p:spPr>
+        <p:txBody>
+          <a:bodyPr wrap="square" rtlCol="0" anchor="ctr"/>
+          <a:lstStyle/>
+          <a:p>
+            <a:pPr indent="0" marL="0">
+              <a:buNone/>
+            </a:pPr>
+            <a:r>
+              <a:rPr lang="en-US" sz="950" dirty="0">
+                <a:solidFill>
+                  <a:srgbClr val="5B6178"/>
+                </a:solidFill>
+                <a:latin typeface="Calibri" pitchFamily="34" charset="0"/>
+                <a:ea typeface="Calibri" pitchFamily="34" charset="-122"/>
+                <a:cs typeface="Calibri" pitchFamily="34" charset="-120"/>
+              </a:rPr>
+              <a:t>Venues flagged</a:t>
+            </a:r>
+            <a:endParaRPr lang="en-US" sz="950" dirty="0"/>
+          </a:p>
+        </p:txBody>
+      </p:sp>
+      <p:graphicFrame>
+        <p:nvGraphicFramePr>
+          <p:cNvPr id="18" name="Chart 0" descr=""/>
+          <p:cNvGraphicFramePr/>
+          <p:nvPr/>
+        </p:nvGraphicFramePr>
+        <p:xfrm>
+          <a:off x="548640" y="2880360"/>
+          <a:ext cx="5394960" cy="2834640"/>
+        </p:xfrm>
+        <a:graphic xmlns:a="http://schemas.openxmlformats.org/drawingml/2006/main">
+          <a:graphicData uri="http://schemas.openxmlformats.org/drawingml/2006/chart">
+            <c:chart xmlns:c="http://schemas.openxmlformats.org/drawingml/2006/chart" r:id="rId1"/>
+          </a:graphicData>
+        </a:graphic>
+      </p:graphicFrame>
+      <p:sp>
+        <p:nvSpPr>
+          <p:cNvPr id="19" name="Text 16"/>
+          <p:cNvSpPr/>
+          <p:nvPr/>
+        </p:nvSpPr>
+        <p:spPr>
+          <a:xfrm>
+            <a:off x="548640" y="5742432"/>
+            <a:ext cx="5394960" cy="320040"/>
+          </a:xfrm>
+          <a:prstGeom prst="rect">
+            <a:avLst/>
+          </a:prstGeom>
+          <a:noFill/>
+          <a:ln/>
+        </p:spPr>
+        <p:txBody>
+          <a:bodyPr wrap="square" rtlCol="0" anchor="ctr"/>
+          <a:lstStyle/>
+          <a:p>
+            <a:pPr indent="0" marL="0">
+              <a:lnSpc>
+                <a:spcPts val="1050"/>
+              </a:lnSpc>
+              <a:buNone/>
+            </a:pPr>
+            <a:r>
+              <a:rPr lang="en-US" sz="850" i="1" dirty="0">
+                <a:solidFill>
+                  <a:srgbClr val="5B6178"/>
+                </a:solidFill>
+                <a:latin typeface="Calibri" pitchFamily="34" charset="0"/>
+                <a:ea typeface="Calibri" pitchFamily="34" charset="-122"/>
+                <a:cs typeface="Calibri" pitchFamily="34" charset="-120"/>
+              </a:rPr>
+              <a:t>Permutation, not gain-based — gain-based splits are biased toward high-cardinality categoricals like geo_cluster (20+ levels).</a:t>
+            </a:r>
+            <a:endParaRPr lang="en-US" sz="850" dirty="0"/>
+          </a:p>
+        </p:txBody>
+      </p:sp>
+      <p:sp>
+        <p:nvSpPr>
+          <p:cNvPr id="20" name="Text 17"/>
+          <p:cNvSpPr/>
+          <p:nvPr/>
+        </p:nvSpPr>
+        <p:spPr>
+          <a:xfrm>
+            <a:off x="6263640" y="2880360"/>
+            <a:ext cx="5394960" cy="274320"/>
+          </a:xfrm>
+          <a:prstGeom prst="rect">
+            <a:avLst/>
+          </a:prstGeom>
+          <a:noFill/>
+          <a:ln/>
+        </p:spPr>
+        <p:txBody>
+          <a:bodyPr wrap="square" rtlCol="0" anchor="ctr"/>
+          <a:lstStyle/>
+          <a:p>
+            <a:pPr indent="0" marL="0">
+              <a:buNone/>
+            </a:pPr>
+            <a:r>
+              <a:rPr lang="en-US" sz="1200" b="1" dirty="0">
+                <a:solidFill>
+                  <a:srgbClr val="1E2761"/>
+                </a:solidFill>
+                <a:latin typeface="Cambria" pitchFamily="34" charset="0"/>
+                <a:ea typeface="Cambria" pitchFamily="34" charset="-122"/>
+                <a:cs typeface="Cambria" pitchFamily="34" charset="-120"/>
+              </a:rPr>
+              <a:t>Top under-monetized venues (of 20 flagged)</a:t>
+            </a:r>
+            <a:endParaRPr lang="en-US" sz="1200" dirty="0"/>
+          </a:p>
+        </p:txBody>
+      </p:sp>
+      <p:sp>
+        <p:nvSpPr>
+          <p:cNvPr id="21" name="Text 18"/>
+          <p:cNvSpPr/>
+          <p:nvPr/>
+        </p:nvSpPr>
+        <p:spPr>
+          <a:xfrm>
+            <a:off x="6263640" y="3172968"/>
+            <a:ext cx="5394960" cy="201168"/>
+          </a:xfrm>
+          <a:prstGeom prst="rect">
+            <a:avLst/>
+          </a:prstGeom>
+          <a:noFill/>
+          <a:ln/>
+        </p:spPr>
+        <p:txBody>
+          <a:bodyPr wrap="square" rtlCol="0" anchor="ctr"/>
+          <a:lstStyle/>
+          <a:p>
+            <a:pPr indent="0" marL="0">
+              <a:buNone/>
+            </a:pPr>
+            <a:r>
+              <a:rPr lang="en-US" sz="870" i="1" dirty="0">
+                <a:solidFill>
+                  <a:srgbClr val="5B6178"/>
+                </a:solidFill>
+                <a:latin typeface="Courier New" pitchFamily="34" charset="0"/>
+                <a:ea typeface="Courier New" pitchFamily="34" charset="-122"/>
+                <a:cs typeface="Courier New" pitchFamily="34" charset="-120"/>
+              </a:rPr>
+              <a:t>gap_pct = (actual − OOF predicted) ÷ OOF predicted × 100</a:t>
+            </a:r>
+            <a:endParaRPr lang="en-US" sz="870" dirty="0"/>
+          </a:p>
+        </p:txBody>
+      </p:sp>
+      <p:sp>
+        <p:nvSpPr>
+          <p:cNvPr id="22" name="Text 19"/>
+          <p:cNvSpPr/>
+          <p:nvPr/>
+        </p:nvSpPr>
+        <p:spPr>
+          <a:xfrm>
+            <a:off x="6263640" y="3410712"/>
+            <a:ext cx="3657600" cy="256032"/>
+          </a:xfrm>
+          <a:prstGeom prst="rect">
+            <a:avLst/>
+          </a:prstGeom>
+          <a:noFill/>
+          <a:ln/>
+        </p:spPr>
+        <p:txBody>
+          <a:bodyPr wrap="square" rtlCol="0" anchor="ctr"/>
+          <a:lstStyle/>
+          <a:p>
+            <a:pPr indent="0" marL="0">
+              <a:buNone/>
+            </a:pPr>
+            <a:r>
+              <a:rPr lang="en-US" sz="1000" dirty="0">
+                <a:solidFill>
+                  <a:srgbClr val="1A1A2E"/>
+                </a:solidFill>
+                <a:latin typeface="Calibri" pitchFamily="34" charset="0"/>
+                <a:ea typeface="Calibri" pitchFamily="34" charset="-122"/>
+                <a:cs typeface="Calibri" pitchFamily="34" charset="-120"/>
+              </a:rPr>
+              <a:t>Venue #85 (Restaurants)</a:t>
+            </a:r>
+            <a:endParaRPr lang="en-US" sz="1000" dirty="0"/>
+          </a:p>
+        </p:txBody>
+      </p:sp>
+      <p:sp>
+        <p:nvSpPr>
+          <p:cNvPr id="23" name="Text 20"/>
+          <p:cNvSpPr/>
+          <p:nvPr/>
+        </p:nvSpPr>
+        <p:spPr>
+          <a:xfrm>
+            <a:off x="9966960" y="3410712"/>
+            <a:ext cx="1691640" cy="256032"/>
+          </a:xfrm>
+          <a:prstGeom prst="rect">
+            <a:avLst/>
+          </a:prstGeom>
+          <a:noFill/>
+          <a:ln/>
+        </p:spPr>
+        <p:txBody>
+          <a:bodyPr wrap="square" rtlCol="0" anchor="ctr"/>
+          <a:lstStyle/>
+          <a:p>
+            <a:pPr algn="r" indent="0" marL="0">
+              <a:buNone/>
+            </a:pPr>
+            <a:r>
+              <a:rPr lang="en-US" sz="1000" b="1" dirty="0">
+                <a:solidFill>
+                  <a:srgbClr val="B8500A"/>
+                </a:solidFill>
+                <a:latin typeface="Calibri" pitchFamily="34" charset="0"/>
+                <a:ea typeface="Calibri" pitchFamily="34" charset="-122"/>
+                <a:cs typeface="Calibri" pitchFamily="34" charset="-120"/>
+              </a:rPr>
+              <a:t>-62%</a:t>
+            </a:r>
+            <a:endParaRPr lang="en-US" sz="1000" dirty="0"/>
+          </a:p>
+        </p:txBody>
+      </p:sp>
+      <p:sp>
+        <p:nvSpPr>
+          <p:cNvPr id="24" name="Text 21"/>
+          <p:cNvSpPr/>
+          <p:nvPr/>
+        </p:nvSpPr>
+        <p:spPr>
+          <a:xfrm>
+            <a:off x="6263640" y="3666744"/>
+            <a:ext cx="3657600" cy="256032"/>
+          </a:xfrm>
+          <a:prstGeom prst="rect">
+            <a:avLst/>
+          </a:prstGeom>
+          <a:noFill/>
+          <a:ln/>
+        </p:spPr>
+        <p:txBody>
+          <a:bodyPr wrap="square" rtlCol="0" anchor="ctr"/>
+          <a:lstStyle/>
+          <a:p>
+            <a:pPr indent="0" marL="0">
+              <a:buNone/>
+            </a:pPr>
+            <a:r>
+              <a:rPr lang="en-US" sz="1000" dirty="0">
+                <a:solidFill>
+                  <a:srgbClr val="1A1A2E"/>
+                </a:solidFill>
+                <a:latin typeface="Calibri" pitchFamily="34" charset="0"/>
+                <a:ea typeface="Calibri" pitchFamily="34" charset="-122"/>
+                <a:cs typeface="Calibri" pitchFamily="34" charset="-120"/>
+              </a:rPr>
+              <a:t>Venue #309 (Waiting Rooms)</a:t>
+            </a:r>
+            <a:endParaRPr lang="en-US" sz="1000" dirty="0"/>
+          </a:p>
+        </p:txBody>
+      </p:sp>
+      <p:sp>
+        <p:nvSpPr>
+          <p:cNvPr id="25" name="Text 22"/>
+          <p:cNvSpPr/>
+          <p:nvPr/>
+        </p:nvSpPr>
+        <p:spPr>
+          <a:xfrm>
+            <a:off x="9966960" y="3666744"/>
+            <a:ext cx="1691640" cy="256032"/>
+          </a:xfrm>
+          <a:prstGeom prst="rect">
+            <a:avLst/>
+          </a:prstGeom>
+          <a:noFill/>
+          <a:ln/>
+        </p:spPr>
+        <p:txBody>
+          <a:bodyPr wrap="square" rtlCol="0" anchor="ctr"/>
+          <a:lstStyle/>
+          <a:p>
+            <a:pPr algn="r" indent="0" marL="0">
+              <a:buNone/>
+            </a:pPr>
+            <a:r>
+              <a:rPr lang="en-US" sz="1000" b="1" dirty="0">
+                <a:solidFill>
+                  <a:srgbClr val="B8500A"/>
+                </a:solidFill>
+                <a:latin typeface="Calibri" pitchFamily="34" charset="0"/>
+                <a:ea typeface="Calibri" pitchFamily="34" charset="-122"/>
+                <a:cs typeface="Calibri" pitchFamily="34" charset="-120"/>
+              </a:rPr>
+              <a:t>-61%</a:t>
+            </a:r>
+            <a:endParaRPr lang="en-US" sz="1000" dirty="0"/>
+          </a:p>
+        </p:txBody>
+      </p:sp>
+      <p:sp>
+        <p:nvSpPr>
+          <p:cNvPr id="26" name="Text 23"/>
+          <p:cNvSpPr/>
+          <p:nvPr/>
+        </p:nvSpPr>
+        <p:spPr>
+          <a:xfrm>
+            <a:off x="6263640" y="3922776"/>
+            <a:ext cx="3657600" cy="256032"/>
+          </a:xfrm>
+          <a:prstGeom prst="rect">
+            <a:avLst/>
+          </a:prstGeom>
+          <a:noFill/>
+          <a:ln/>
+        </p:spPr>
+        <p:txBody>
+          <a:bodyPr wrap="square" rtlCol="0" anchor="ctr"/>
+          <a:lstStyle/>
+          <a:p>
+            <a:pPr indent="0" marL="0">
+              <a:buNone/>
+            </a:pPr>
+            <a:r>
+              <a:rPr lang="en-US" sz="1000" dirty="0">
+                <a:solidFill>
+                  <a:srgbClr val="1A1A2E"/>
+                </a:solidFill>
+                <a:latin typeface="Calibri" pitchFamily="34" charset="0"/>
+                <a:ea typeface="Calibri" pitchFamily="34" charset="-122"/>
+                <a:cs typeface="Calibri" pitchFamily="34" charset="-120"/>
+              </a:rPr>
+              <a:t>Venue #53 (Restaurants)</a:t>
+            </a:r>
+            <a:endParaRPr lang="en-US" sz="1000" dirty="0"/>
+          </a:p>
+        </p:txBody>
+      </p:sp>
+      <p:sp>
+        <p:nvSpPr>
+          <p:cNvPr id="27" name="Text 24"/>
+          <p:cNvSpPr/>
+          <p:nvPr/>
+        </p:nvSpPr>
+        <p:spPr>
+          <a:xfrm>
+            <a:off x="9966960" y="3922776"/>
+            <a:ext cx="1691640" cy="256032"/>
+          </a:xfrm>
+          <a:prstGeom prst="rect">
+            <a:avLst/>
+          </a:prstGeom>
+          <a:noFill/>
+          <a:ln/>
+        </p:spPr>
+        <p:txBody>
+          <a:bodyPr wrap="square" rtlCol="0" anchor="ctr"/>
+          <a:lstStyle/>
+          <a:p>
+            <a:pPr algn="r" indent="0" marL="0">
+              <a:buNone/>
+            </a:pPr>
+            <a:r>
+              <a:rPr lang="en-US" sz="1000" b="1" dirty="0">
+                <a:solidFill>
+                  <a:srgbClr val="B8500A"/>
+                </a:solidFill>
+                <a:latin typeface="Calibri" pitchFamily="34" charset="0"/>
+                <a:ea typeface="Calibri" pitchFamily="34" charset="-122"/>
+                <a:cs typeface="Calibri" pitchFamily="34" charset="-120"/>
+              </a:rPr>
+              <a:t>-61%</a:t>
+            </a:r>
+            <a:endParaRPr lang="en-US" sz="1000" dirty="0"/>
+          </a:p>
+        </p:txBody>
+      </p:sp>
+      <p:sp>
+        <p:nvSpPr>
+          <p:cNvPr id="28" name="Text 25"/>
+          <p:cNvSpPr/>
+          <p:nvPr/>
+        </p:nvSpPr>
+        <p:spPr>
+          <a:xfrm>
+            <a:off x="6263640" y="4178808"/>
+            <a:ext cx="3657600" cy="256032"/>
+          </a:xfrm>
+          <a:prstGeom prst="rect">
+            <a:avLst/>
+          </a:prstGeom>
+          <a:noFill/>
+          <a:ln/>
+        </p:spPr>
+        <p:txBody>
+          <a:bodyPr wrap="square" rtlCol="0" anchor="ctr"/>
+          <a:lstStyle/>
+          <a:p>
+            <a:pPr indent="0" marL="0">
+              <a:buNone/>
+            </a:pPr>
+            <a:r>
+              <a:rPr lang="en-US" sz="1000" dirty="0">
+                <a:solidFill>
+                  <a:srgbClr val="1A1A2E"/>
+                </a:solidFill>
+                <a:latin typeface="Calibri" pitchFamily="34" charset="0"/>
+                <a:ea typeface="Calibri" pitchFamily="34" charset="-122"/>
+                <a:cs typeface="Calibri" pitchFamily="34" charset="-120"/>
+              </a:rPr>
+              <a:t>Venue #247 (Bars)</a:t>
+            </a:r>
+            <a:endParaRPr lang="en-US" sz="1000" dirty="0"/>
+          </a:p>
+        </p:txBody>
+      </p:sp>
+      <p:sp>
+        <p:nvSpPr>
+          <p:cNvPr id="29" name="Text 26"/>
+          <p:cNvSpPr/>
+          <p:nvPr/>
+        </p:nvSpPr>
+        <p:spPr>
+          <a:xfrm>
+            <a:off x="9966960" y="4178808"/>
+            <a:ext cx="1691640" cy="256032"/>
+          </a:xfrm>
+          <a:prstGeom prst="rect">
+            <a:avLst/>
+          </a:prstGeom>
+          <a:noFill/>
+          <a:ln/>
+        </p:spPr>
+        <p:txBody>
+          <a:bodyPr wrap="square" rtlCol="0" anchor="ctr"/>
+          <a:lstStyle/>
+          <a:p>
+            <a:pPr algn="r" indent="0" marL="0">
+              <a:buNone/>
+            </a:pPr>
+            <a:r>
+              <a:rPr lang="en-US" sz="1000" b="1" dirty="0">
+                <a:solidFill>
+                  <a:srgbClr val="B8500A"/>
+                </a:solidFill>
+                <a:latin typeface="Calibri" pitchFamily="34" charset="0"/>
+                <a:ea typeface="Calibri" pitchFamily="34" charset="-122"/>
+                <a:cs typeface="Calibri" pitchFamily="34" charset="-120"/>
+              </a:rPr>
+              <a:t>-60%</a:t>
+            </a:r>
+            <a:endParaRPr lang="en-US" sz="1000" dirty="0"/>
+          </a:p>
+        </p:txBody>
+      </p:sp>
+      <p:sp>
+        <p:nvSpPr>
+          <p:cNvPr id="30" name="Text 27"/>
+          <p:cNvSpPr/>
+          <p:nvPr/>
+        </p:nvSpPr>
+        <p:spPr>
+          <a:xfrm>
+            <a:off x="6263640" y="4572000"/>
+            <a:ext cx="5394960" cy="274320"/>
+          </a:xfrm>
+          <a:prstGeom prst="rect">
+            <a:avLst/>
+          </a:prstGeom>
+          <a:noFill/>
+          <a:ln/>
+        </p:spPr>
+        <p:txBody>
+          <a:bodyPr wrap="square" rtlCol="0" anchor="ctr"/>
+          <a:lstStyle/>
+          <a:p>
+            <a:pPr indent="0" marL="0">
+              <a:buNone/>
+            </a:pPr>
+            <a:r>
+              <a:rPr lang="en-US" sz="1200" b="1" dirty="0">
+                <a:solidFill>
+                  <a:srgbClr val="1E2761"/>
+                </a:solidFill>
+                <a:latin typeface="Cambria" pitchFamily="34" charset="0"/>
+                <a:ea typeface="Cambria" pitchFamily="34" charset="-122"/>
+                <a:cs typeface="Cambria" pitchFamily="34" charset="-120"/>
+              </a:rPr>
+              <a:t>Top prospect venues (expansion priority)</a:t>
+            </a:r>
+            <a:endParaRPr lang="en-US" sz="1200" dirty="0"/>
+          </a:p>
+        </p:txBody>
+      </p:sp>
+      <p:sp>
+        <p:nvSpPr>
+          <p:cNvPr id="31" name="Text 28"/>
+          <p:cNvSpPr/>
+          <p:nvPr/>
+        </p:nvSpPr>
+        <p:spPr>
+          <a:xfrm>
+            <a:off x="6263640" y="4864608"/>
+            <a:ext cx="4023360" cy="256032"/>
+          </a:xfrm>
+          <a:prstGeom prst="rect">
+            <a:avLst/>
+          </a:prstGeom>
+          <a:noFill/>
+          <a:ln/>
+        </p:spPr>
+        <p:txBody>
+          <a:bodyPr wrap="square" rtlCol="0" anchor="ctr"/>
+          <a:lstStyle/>
+          <a:p>
+            <a:pPr indent="0" marL="0">
+              <a:buNone/>
+            </a:pPr>
+            <a:r>
+              <a:rPr lang="en-US" sz="1000" dirty="0">
+                <a:solidFill>
+                  <a:srgbClr val="1A1A2E"/>
+                </a:solidFill>
+                <a:latin typeface="Calibri" pitchFamily="34" charset="0"/>
+                <a:ea typeface="Calibri" pitchFamily="34" charset="-122"/>
+                <a:cs typeface="Calibri" pitchFamily="34" charset="-120"/>
+              </a:rPr>
+              <a:t>P0018 — Bars (existing market)</a:t>
+            </a:r>
+            <a:endParaRPr lang="en-US" sz="1000" dirty="0"/>
+          </a:p>
+        </p:txBody>
+      </p:sp>
+      <p:sp>
+        <p:nvSpPr>
+          <p:cNvPr id="32" name="Text 29"/>
+          <p:cNvSpPr/>
+          <p:nvPr/>
+        </p:nvSpPr>
+        <p:spPr>
+          <a:xfrm>
+            <a:off x="10195560" y="4864608"/>
+            <a:ext cx="1463040" cy="256032"/>
+          </a:xfrm>
+          <a:prstGeom prst="rect">
+            <a:avLst/>
+          </a:prstGeom>
+          <a:noFill/>
+          <a:ln/>
+        </p:spPr>
+        <p:txBody>
+          <a:bodyPr wrap="square" rtlCol="0" anchor="ctr"/>
+          <a:lstStyle/>
+          <a:p>
+            <a:pPr algn="r" indent="0" marL="0">
+              <a:buNone/>
+            </a:pPr>
+            <a:r>
+              <a:rPr lang="en-US" sz="1000" b="1" dirty="0">
+                <a:solidFill>
+                  <a:srgbClr val="2C7A57"/>
+                </a:solidFill>
+                <a:latin typeface="Calibri" pitchFamily="34" charset="0"/>
+                <a:ea typeface="Calibri" pitchFamily="34" charset="-122"/>
+                <a:cs typeface="Calibri" pitchFamily="34" charset="-120"/>
+              </a:rPr>
+              <a:t>$684</a:t>
+            </a:r>
+            <a:endParaRPr lang="en-US" sz="1000" dirty="0"/>
+          </a:p>
+        </p:txBody>
+      </p:sp>
+      <p:sp>
+        <p:nvSpPr>
+          <p:cNvPr id="33" name="Text 30"/>
+          <p:cNvSpPr/>
+          <p:nvPr/>
+        </p:nvSpPr>
+        <p:spPr>
+          <a:xfrm>
+            <a:off x="6263640" y="5120640"/>
+            <a:ext cx="4023360" cy="256032"/>
+          </a:xfrm>
+          <a:prstGeom prst="rect">
+            <a:avLst/>
+          </a:prstGeom>
+          <a:noFill/>
+          <a:ln/>
+        </p:spPr>
+        <p:txBody>
+          <a:bodyPr wrap="square" rtlCol="0" anchor="ctr"/>
+          <a:lstStyle/>
+          <a:p>
+            <a:pPr indent="0" marL="0">
+              <a:buNone/>
+            </a:pPr>
+            <a:r>
+              <a:rPr lang="en-US" sz="1000" dirty="0">
+                <a:solidFill>
+                  <a:srgbClr val="1A1A2E"/>
+                </a:solidFill>
+                <a:latin typeface="Calibri" pitchFamily="34" charset="0"/>
+                <a:ea typeface="Calibri" pitchFamily="34" charset="-122"/>
+                <a:cs typeface="Calibri" pitchFamily="34" charset="-120"/>
+              </a:rPr>
+              <a:t>P0055 — Restaurants (existing market)</a:t>
+            </a:r>
+            <a:endParaRPr lang="en-US" sz="1000" dirty="0"/>
+          </a:p>
+        </p:txBody>
+      </p:sp>
+      <p:sp>
+        <p:nvSpPr>
+          <p:cNvPr id="34" name="Text 31"/>
+          <p:cNvSpPr/>
+          <p:nvPr/>
+        </p:nvSpPr>
+        <p:spPr>
+          <a:xfrm>
+            <a:off x="10195560" y="5120640"/>
+            <a:ext cx="1463040" cy="256032"/>
+          </a:xfrm>
+          <a:prstGeom prst="rect">
+            <a:avLst/>
+          </a:prstGeom>
+          <a:noFill/>
+          <a:ln/>
+        </p:spPr>
+        <p:txBody>
+          <a:bodyPr wrap="square" rtlCol="0" anchor="ctr"/>
+          <a:lstStyle/>
+          <a:p>
+            <a:pPr algn="r" indent="0" marL="0">
+              <a:buNone/>
+            </a:pPr>
+            <a:r>
+              <a:rPr lang="en-US" sz="1000" b="1" dirty="0">
+                <a:solidFill>
+                  <a:srgbClr val="2C7A57"/>
+                </a:solidFill>
+                <a:latin typeface="Calibri" pitchFamily="34" charset="0"/>
+                <a:ea typeface="Calibri" pitchFamily="34" charset="-122"/>
+                <a:cs typeface="Calibri" pitchFamily="34" charset="-120"/>
+              </a:rPr>
+              <a:t>$524</a:t>
+            </a:r>
+            <a:endParaRPr lang="en-US" sz="1000" dirty="0"/>
+          </a:p>
+        </p:txBody>
+      </p:sp>
+      <p:sp>
+        <p:nvSpPr>
+          <p:cNvPr id="35" name="Text 32"/>
+          <p:cNvSpPr/>
+          <p:nvPr/>
+        </p:nvSpPr>
+        <p:spPr>
+          <a:xfrm>
+            <a:off x="6263640" y="5376672"/>
+            <a:ext cx="4023360" cy="256032"/>
+          </a:xfrm>
+          <a:prstGeom prst="rect">
+            <a:avLst/>
+          </a:prstGeom>
+          <a:noFill/>
+          <a:ln/>
+        </p:spPr>
+        <p:txBody>
+          <a:bodyPr wrap="square" rtlCol="0" anchor="ctr"/>
+          <a:lstStyle/>
+          <a:p>
+            <a:pPr indent="0" marL="0">
+              <a:buNone/>
+            </a:pPr>
+            <a:r>
+              <a:rPr lang="en-US" sz="1000" dirty="0">
+                <a:solidFill>
+                  <a:srgbClr val="1A1A2E"/>
+                </a:solidFill>
+                <a:latin typeface="Calibri" pitchFamily="34" charset="0"/>
+                <a:ea typeface="Calibri" pitchFamily="34" charset="-122"/>
+                <a:cs typeface="Calibri" pitchFamily="34" charset="-120"/>
+              </a:rPr>
+              <a:t>P0000 — Bars (new market)</a:t>
+            </a:r>
+            <a:endParaRPr lang="en-US" sz="1000" dirty="0"/>
+          </a:p>
+        </p:txBody>
+      </p:sp>
+      <p:sp>
+        <p:nvSpPr>
+          <p:cNvPr id="36" name="Text 33"/>
+          <p:cNvSpPr/>
+          <p:nvPr/>
+        </p:nvSpPr>
+        <p:spPr>
+          <a:xfrm>
+            <a:off x="10195560" y="5376672"/>
+            <a:ext cx="1463040" cy="256032"/>
+          </a:xfrm>
+          <a:prstGeom prst="rect">
+            <a:avLst/>
+          </a:prstGeom>
+          <a:noFill/>
+          <a:ln/>
+        </p:spPr>
+        <p:txBody>
+          <a:bodyPr wrap="square" rtlCol="0" anchor="ctr"/>
+          <a:lstStyle/>
+          <a:p>
+            <a:pPr algn="r" indent="0" marL="0">
+              <a:buNone/>
+            </a:pPr>
+            <a:r>
+              <a:rPr lang="en-US" sz="1000" b="1" dirty="0">
+                <a:solidFill>
+                  <a:srgbClr val="2C7A57"/>
+                </a:solidFill>
+                <a:latin typeface="Calibri" pitchFamily="34" charset="0"/>
+                <a:ea typeface="Calibri" pitchFamily="34" charset="-122"/>
+                <a:cs typeface="Calibri" pitchFamily="34" charset="-120"/>
+              </a:rPr>
+              <a:t>$500</a:t>
+            </a:r>
+            <a:endParaRPr lang="en-US" sz="1000" dirty="0"/>
+          </a:p>
+        </p:txBody>
+      </p:sp>
+      <p:sp>
+        <p:nvSpPr>
+          <p:cNvPr id="37" name="Text 34"/>
+          <p:cNvSpPr/>
+          <p:nvPr/>
+        </p:nvSpPr>
+        <p:spPr>
+          <a:xfrm>
+            <a:off x="6263640" y="5632704"/>
+            <a:ext cx="4023360" cy="256032"/>
+          </a:xfrm>
+          <a:prstGeom prst="rect">
+            <a:avLst/>
+          </a:prstGeom>
+          <a:noFill/>
+          <a:ln/>
+        </p:spPr>
+        <p:txBody>
+          <a:bodyPr wrap="square" rtlCol="0" anchor="ctr"/>
+          <a:lstStyle/>
+          <a:p>
+            <a:pPr indent="0" marL="0">
+              <a:buNone/>
+            </a:pPr>
+            <a:r>
+              <a:rPr lang="en-US" sz="1000" dirty="0">
+                <a:solidFill>
+                  <a:srgbClr val="1A1A2E"/>
+                </a:solidFill>
+                <a:latin typeface="Calibri" pitchFamily="34" charset="0"/>
+                <a:ea typeface="Calibri" pitchFamily="34" charset="-122"/>
+                <a:cs typeface="Calibri" pitchFamily="34" charset="-120"/>
+              </a:rPr>
+              <a:t>P0001 — Bars (new market)</a:t>
+            </a:r>
+            <a:endParaRPr lang="en-US" sz="1000" dirty="0"/>
+          </a:p>
+        </p:txBody>
+      </p:sp>
+      <p:sp>
+        <p:nvSpPr>
+          <p:cNvPr id="38" name="Text 35"/>
+          <p:cNvSpPr/>
+          <p:nvPr/>
+        </p:nvSpPr>
+        <p:spPr>
+          <a:xfrm>
+            <a:off x="10195560" y="5632704"/>
+            <a:ext cx="1463040" cy="256032"/>
+          </a:xfrm>
+          <a:prstGeom prst="rect">
+            <a:avLst/>
+          </a:prstGeom>
+          <a:noFill/>
+          <a:ln/>
+        </p:spPr>
+        <p:txBody>
+          <a:bodyPr wrap="square" rtlCol="0" anchor="ctr"/>
+          <a:lstStyle/>
+          <a:p>
+            <a:pPr algn="r" indent="0" marL="0">
+              <a:buNone/>
+            </a:pPr>
+            <a:r>
+              <a:rPr lang="en-US" sz="1000" b="1" dirty="0">
+                <a:solidFill>
+                  <a:srgbClr val="2C7A57"/>
+                </a:solidFill>
+                <a:latin typeface="Calibri" pitchFamily="34" charset="0"/>
+                <a:ea typeface="Calibri" pitchFamily="34" charset="-122"/>
+                <a:cs typeface="Calibri" pitchFamily="34" charset="-120"/>
+              </a:rPr>
+              <a:t>$496</a:t>
+            </a:r>
+            <a:endParaRPr lang="en-US" sz="1000" dirty="0"/>
+          </a:p>
+        </p:txBody>
+      </p:sp>
+      <p:sp>
+        <p:nvSpPr>
+          <p:cNvPr id="39" name="Text 36"/>
+          <p:cNvSpPr/>
+          <p:nvPr/>
+        </p:nvSpPr>
+        <p:spPr>
+          <a:xfrm>
+            <a:off x="548640" y="6080760"/>
+            <a:ext cx="11064240" cy="411480"/>
+          </a:xfrm>
+          <a:prstGeom prst="rect">
+            <a:avLst/>
+          </a:prstGeom>
+          <a:noFill/>
+          <a:ln/>
+        </p:spPr>
+        <p:txBody>
+          <a:bodyPr wrap="square" rtlCol="0" anchor="ctr"/>
+          <a:lstStyle/>
+          <a:p>
+            <a:pPr indent="0" marL="0">
+              <a:lnSpc>
+                <a:spcPts val="1200"/>
+              </a:lnSpc>
+              <a:buNone/>
+            </a:pPr>
+            <a:r>
+              <a:rPr lang="en-US" sz="1000" i="1" dirty="0">
+                <a:solidFill>
+                  <a:srgbClr val="5B6178"/>
+                </a:solidFill>
+                <a:latin typeface="Calibri" pitchFamily="34" charset="0"/>
+                <a:ea typeface="Calibri" pitchFamily="34" charset="-122"/>
+                <a:cs typeface="Calibri" pitchFamily="34" charset="-120"/>
+              </a:rPr>
+              <a:t>Flags come from 5-fold out-of-fold predictions, never a model scoring the venue it was trained on. The calibrated-lift feature carries near-zero importance — honest, since it's constant within venue_type once venue_type itself is a feature.</a:t>
+            </a:r>
+            <a:endParaRPr lang="en-US" sz="1000" dirty="0"/>
+          </a:p>
+        </p:txBody>
+      </p:sp>
+      <p:sp>
+        <p:nvSpPr>
+          <p:cNvPr id="40" name="Text 37"/>
+          <p:cNvSpPr/>
+          <p:nvPr/>
+        </p:nvSpPr>
+        <p:spPr>
+          <a:xfrm>
+            <a:off x="457200" y="6537960"/>
+            <a:ext cx="7315200" cy="274320"/>
+          </a:xfrm>
+          <a:prstGeom prst="rect">
+            <a:avLst/>
+          </a:prstGeom>
+          <a:noFill/>
+          <a:ln/>
+        </p:spPr>
+        <p:txBody>
+          <a:bodyPr wrap="square" rtlCol="0" anchor="ctr"/>
+          <a:lstStyle/>
+          <a:p>
+            <a:pPr indent="0" marL="0">
+              <a:buNone/>
+            </a:pPr>
+            <a:r>
+              <a:rPr lang="en-US" sz="900" dirty="0">
+                <a:solidFill>
+                  <a:srgbClr val="5B6178"/>
+                </a:solidFill>
+                <a:latin typeface="Calibri" pitchFamily="34" charset="0"/>
+                <a:ea typeface="Calibri" pitchFamily="34" charset="-122"/>
+                <a:cs typeface="Calibri" pitchFamily="34" charset="-120"/>
+              </a:rPr>
+              <a:t>Venue economics</a:t>
+            </a:r>
+            <a:endParaRPr lang="en-US" sz="900" dirty="0"/>
+          </a:p>
+        </p:txBody>
+      </p:sp>
+    </p:spTree>
+  </p:cSld>
+  <p:clrMapOvr>
+    <a:masterClrMapping/>
+  </p:clrMapOvr>
+</p:sld>
+</file>
+
+<file path=ppt/slides/slide18.xml><?xml version="1.0" encoding="utf-8"?>
+<p:sld xmlns:a="http://schemas.openxmlformats.org/drawingml/2006/main" xmlns:r="http://schemas.openxmlformats.org/officeDocument/2006/relationships" xmlns:p="http://schemas.openxmlformats.org/presentationml/2006/main">
+  <p:cSld name="Slide 18">
+    <p:bg>
+      <p:bgPr>
+        <a:solidFill>
+          <a:srgbClr val="FFFFFF"/>
+        </a:solidFill>
+      </p:bgPr>
+    </p:bg>
+    <p:spTree>
+      <p:nvGrpSpPr>
+        <p:cNvPr id="1" name=""/>
+        <p:cNvGrpSpPr/>
+        <p:nvPr/>
+      </p:nvGrpSpPr>
+      <p:grpSpPr>
+        <a:xfrm>
+          <a:off x="0" y="0"/>
+          <a:ext cx="0" cy="0"/>
+          <a:chOff x="0" y="0"/>
+          <a:chExt cx="0" cy="0"/>
+        </a:xfrm>
+      </p:grpSpPr>
+      <p:sp>
+        <p:nvSpPr>
+          <p:cNvPr id="2" name="Text 0"/>
+          <p:cNvSpPr/>
+          <p:nvPr/>
+        </p:nvSpPr>
+        <p:spPr>
+          <a:xfrm>
+            <a:off x="548640" y="411480"/>
+            <a:ext cx="11155680" cy="594360"/>
+          </a:xfrm>
+          <a:prstGeom prst="rect">
+            <a:avLst/>
+          </a:prstGeom>
+          <a:noFill/>
+          <a:ln/>
+        </p:spPr>
+        <p:txBody>
+          <a:bodyPr wrap="square" rtlCol="0" anchor="ctr"/>
+          <a:lstStyle/>
+          <a:p>
+            <a:pPr indent="0" marL="0">
+              <a:buNone/>
+            </a:pPr>
+            <a:r>
+              <a:rPr lang="en-US" sz="2500" b="1" dirty="0">
+                <a:solidFill>
+                  <a:srgbClr val="1E2761"/>
+                </a:solidFill>
+                <a:latin typeface="Cambria" pitchFamily="34" charset="0"/>
+                <a:ea typeface="Cambria" pitchFamily="34" charset="-122"/>
+                <a:cs typeface="Cambria" pitchFamily="34" charset="-120"/>
+              </a:rPr>
               <a:t>Predicting venue churn risk, honestly</a:t>
             </a:r>
             <a:endParaRPr lang="en-US" sz="2500" dirty="0"/>
@@ -12618,9 +13649,9 @@
 </p:sld>
 </file>
 
-<file path=ppt/slides/slide18.xml><?xml version="1.0" encoding="utf-8"?>
+<file path=ppt/slides/slide19.xml><?xml version="1.0" encoding="utf-8"?>
 <p:sld xmlns:a="http://schemas.openxmlformats.org/drawingml/2006/main" xmlns:r="http://schemas.openxmlformats.org/officeDocument/2006/relationships" xmlns:p="http://schemas.openxmlformats.org/presentationml/2006/main">
-  <p:cSld name="Slide 18">
+  <p:cSld name="Slide 19">
     <p:bg>
       <p:bgPr>
         <a:solidFill>

--- a/deck/AtmosphereTV_DOOH_Measurement.pptx
+++ b/deck/AtmosphereTV_DOOH_Measurement.pptx
@@ -2240,16 +2240,20 @@
                 <c:ptCount val="4"/>
                 <c:lvl>
                   <c:pt idx="0">
-                    <c:v>Restaurants</c:v>
+                    <c:v>Restaurants
+(freq 6.5/wk)</c:v>
                   </c:pt>
                   <c:pt idx="1">
-                    <c:v>Gyms</c:v>
+                    <c:v>Gyms
+(freq 8.5/wk)</c:v>
                   </c:pt>
                   <c:pt idx="2">
-                    <c:v>Bars</c:v>
+                    <c:v>Bars
+(freq 8.5/wk)</c:v>
                   </c:pt>
                   <c:pt idx="3">
-                    <c:v>Waiting Rooms</c:v>
+                    <c:v>Waiting Rooms
+(freq 5.8/wk)</c:v>
                   </c:pt>
                 </c:lvl>
               </c:multiLvlStrCache>
